--- a/operator_hypothesis_lab/presentations/tsla_descriptive_microscope_evidence.pptx
+++ b/operator_hypothesis_lab/presentations/tsla_descriptive_microscope_evidence.pptx
@@ -2,23 +2,29 @@
 <file path=ppt/presentation.xml><?xml version="1.0" encoding="utf-8"?>
 <p:presentation xmlns:p="http://schemas.openxmlformats.org/presentationml/2006/main">
   <p:sldMasterIdLst>
-    <p:sldMasterId xmlns:r="http://schemas.openxmlformats.org/officeDocument/2006/relationships" id="2147483648" r:id="Rf2623cbd7b314455"/>
+    <p:sldMasterId xmlns:r="http://schemas.openxmlformats.org/officeDocument/2006/relationships" id="2147483648" r:id="Ref7cc39b95564d2b"/>
   </p:sldMasterIdLst>
   <p:notesMasterIdLst>
-    <p:notesMasterId xmlns:r="http://schemas.openxmlformats.org/officeDocument/2006/relationships" r:id="R7938fd31e8d547e6"/>
+    <p:notesMasterId xmlns:r="http://schemas.openxmlformats.org/officeDocument/2006/relationships" r:id="R7c60bff3d6e748a3"/>
   </p:notesMasterIdLst>
   <p:sldIdLst>
-    <p:sldId xmlns:r="http://schemas.openxmlformats.org/officeDocument/2006/relationships" id="256" r:id="R9891e1d04dcf43b5"/>
-    <p:sldId xmlns:r="http://schemas.openxmlformats.org/officeDocument/2006/relationships" id="257" r:id="Rc6924265e9d740e1"/>
-    <p:sldId xmlns:r="http://schemas.openxmlformats.org/officeDocument/2006/relationships" id="258" r:id="R466301c200554248"/>
-    <p:sldId xmlns:r="http://schemas.openxmlformats.org/officeDocument/2006/relationships" id="259" r:id="Ra021e10bc4384ead"/>
-    <p:sldId xmlns:r="http://schemas.openxmlformats.org/officeDocument/2006/relationships" id="260" r:id="Ra6afaf79bd5d4f1b"/>
-    <p:sldId xmlns:r="http://schemas.openxmlformats.org/officeDocument/2006/relationships" id="261" r:id="Rb43099973eb64dc0"/>
-    <p:sldId xmlns:r="http://schemas.openxmlformats.org/officeDocument/2006/relationships" id="262" r:id="Rd052facee978435a"/>
-    <p:sldId xmlns:r="http://schemas.openxmlformats.org/officeDocument/2006/relationships" id="263" r:id="Rb98984394daf4da9"/>
-    <p:sldId xmlns:r="http://schemas.openxmlformats.org/officeDocument/2006/relationships" id="264" r:id="R679a37332d4c4328"/>
-    <p:sldId xmlns:r="http://schemas.openxmlformats.org/officeDocument/2006/relationships" id="265" r:id="R0d29b55c094441a2"/>
-    <p:sldId xmlns:r="http://schemas.openxmlformats.org/officeDocument/2006/relationships" id="266" r:id="R999f495ab3554ffb"/>
+    <p:sldId xmlns:r="http://schemas.openxmlformats.org/officeDocument/2006/relationships" id="256" r:id="Rb26edf371e23440b"/>
+    <p:sldId xmlns:r="http://schemas.openxmlformats.org/officeDocument/2006/relationships" id="257" r:id="Ra257527d8f714d57"/>
+    <p:sldId xmlns:r="http://schemas.openxmlformats.org/officeDocument/2006/relationships" id="258" r:id="R6c46465cf34a404f"/>
+    <p:sldId xmlns:r="http://schemas.openxmlformats.org/officeDocument/2006/relationships" id="259" r:id="Re97d6d52d0e241cc"/>
+    <p:sldId xmlns:r="http://schemas.openxmlformats.org/officeDocument/2006/relationships" id="260" r:id="Rb22a1f62dc8041f7"/>
+    <p:sldId xmlns:r="http://schemas.openxmlformats.org/officeDocument/2006/relationships" id="261" r:id="R53c9a87f72a94b4e"/>
+    <p:sldId xmlns:r="http://schemas.openxmlformats.org/officeDocument/2006/relationships" id="262" r:id="Rf2d0d2d36713477b"/>
+    <p:sldId xmlns:r="http://schemas.openxmlformats.org/officeDocument/2006/relationships" id="263" r:id="R674c5b9788e848c0"/>
+    <p:sldId xmlns:r="http://schemas.openxmlformats.org/officeDocument/2006/relationships" id="264" r:id="Ra4822c9e02864476"/>
+    <p:sldId xmlns:r="http://schemas.openxmlformats.org/officeDocument/2006/relationships" id="265" r:id="R3c6629c1cbd64e3f"/>
+    <p:sldId xmlns:r="http://schemas.openxmlformats.org/officeDocument/2006/relationships" id="266" r:id="Ra91b6a4e24884fcc"/>
+    <p:sldId xmlns:r="http://schemas.openxmlformats.org/officeDocument/2006/relationships" id="267" r:id="R3e0baacb00b34b70"/>
+    <p:sldId xmlns:r="http://schemas.openxmlformats.org/officeDocument/2006/relationships" id="268" r:id="Rcbb176f099ad44bb"/>
+    <p:sldId xmlns:r="http://schemas.openxmlformats.org/officeDocument/2006/relationships" id="269" r:id="R6f51a66bcda34f42"/>
+    <p:sldId xmlns:r="http://schemas.openxmlformats.org/officeDocument/2006/relationships" id="270" r:id="R96ae2cf278d64820"/>
+    <p:sldId xmlns:r="http://schemas.openxmlformats.org/officeDocument/2006/relationships" id="271" r:id="Rb4f0ea01794d4d4c"/>
+    <p:sldId xmlns:r="http://schemas.openxmlformats.org/officeDocument/2006/relationships" id="272" r:id="R4fb887d3286143d1"/>
   </p:sldIdLst>
   <p:sldSz cx="12192000" cy="6858000"/>
   <p:notesSz cx="6858000" cy="9144000"/>
@@ -707,6 +713,591 @@
 </p:notes>
 </file>
 
+<file path=ppt/notesSlides/notesSlide12.xml><?xml version="1.0" encoding="utf-8"?>
+<p:notes xmlns:p="http://schemas.openxmlformats.org/presentationml/2006/main">
+  <p:cSld>
+    <p:spTree>
+      <p:nvGrpSpPr>
+        <p:cNvPr id="1" name=""/>
+        <p:cNvGrpSpPr/>
+        <p:nvPr/>
+      </p:nvGrpSpPr>
+      <p:grpSpPr>
+        <a:xfrm xmlns:a="http://schemas.openxmlformats.org/drawingml/2006/main"/>
+      </p:grpSpPr>
+      <p:sp>
+        <p:nvSpPr>
+          <p:cNvPr id="2" name="Slide Image Placeholder 1"/>
+          <p:cNvSpPr>
+            <a:spLocks xmlns:a="http://schemas.openxmlformats.org/drawingml/2006/main" noGrp="1"/>
+          </p:cNvSpPr>
+          <p:nvPr>
+            <p:ph type="sldImg" idx="0"/>
+          </p:nvPr>
+        </p:nvSpPr>
+        <p:spPr/>
+      </p:sp>
+      <p:sp>
+        <p:nvSpPr>
+          <p:cNvPr id="3" name="Notes Placeholder 2"/>
+          <p:cNvSpPr>
+            <a:spLocks xmlns:a="http://schemas.openxmlformats.org/drawingml/2006/main" noGrp="1"/>
+          </p:cNvSpPr>
+          <p:nvPr>
+            <p:ph type="body" idx="1"/>
+          </p:nvPr>
+        </p:nvSpPr>
+        <p:spPr/>
+        <p:txBody>
+          <a:bodyPr xmlns:a="http://schemas.openxmlformats.org/drawingml/2006/main"/>
+          <a:lstStyle xmlns:a="http://schemas.openxmlformats.org/drawingml/2006/main"/>
+          <a:p xmlns:a="http://schemas.openxmlformats.org/drawingml/2006/main">
+            <a:r>
+              <a:t>This section asks whether aggregating sessions reveals signed dependence hidden by the adjacent-session view.</a:t>
+            </a:r>
+          </a:p>
+          <a:p xmlns:a="http://schemas.openxmlformats.org/drawingml/2006/main">
+            <a:r>
+              <a:t/>
+            </a:r>
+          </a:p>
+          <a:p xmlns:a="http://schemas.openxmlformats.org/drawingml/2006/main">
+            <a:r>
+              <a:t>[Sources]</a:t>
+            </a:r>
+          </a:p>
+          <a:p xmlns:a="http://schemas.openxmlformats.org/drawingml/2006/main">
+            <a:r>
+              <a:t>- scripts/inspect/run_tsla_cumulative_return_horizon_grid.R</a:t>
+            </a:r>
+          </a:p>
+          <a:p xmlns:a="http://schemas.openxmlformats.org/drawingml/2006/main">
+            <a:r>
+              <a:t>- runs/research_workbench/operator_hypothesis_lab/tsla_cumulative_return_horizon_grid_20260825/run_spec.csv</a:t>
+            </a:r>
+          </a:p>
+          <a:p xmlns:a="http://schemas.openxmlformats.org/drawingml/2006/main">
+            <a:r>
+              <a:t>[/Sources]</a:t>
+            </a:r>
+          </a:p>
+        </p:txBody>
+      </p:sp>
+      <p:sp>
+        <p:nvSpPr>
+          <p:cNvPr id="4" name="Slide Number Placeholder 3"/>
+          <p:cNvSpPr>
+            <a:spLocks xmlns:a="http://schemas.openxmlformats.org/drawingml/2006/main" noGrp="1"/>
+          </p:cNvSpPr>
+          <p:nvPr>
+            <p:ph type="sldNum" idx="5"/>
+          </p:nvPr>
+        </p:nvSpPr>
+        <p:spPr/>
+        <p:txBody>
+          <a:bodyPr xmlns:a="http://schemas.openxmlformats.org/drawingml/2006/main"/>
+          <a:lstStyle xmlns:a="http://schemas.openxmlformats.org/drawingml/2006/main"/>
+          <a:p xmlns:a="http://schemas.openxmlformats.org/drawingml/2006/main"/>
+        </p:txBody>
+      </p:sp>
+    </p:spTree>
+  </p:cSld>
+  <p:clrMapOvr>
+    <a:masterClrMapping xmlns:a="http://schemas.openxmlformats.org/drawingml/2006/main"/>
+  </p:clrMapOvr>
+</p:notes>
+</file>
+
+<file path=ppt/notesSlides/notesSlide13.xml><?xml version="1.0" encoding="utf-8"?>
+<p:notes xmlns:p="http://schemas.openxmlformats.org/presentationml/2006/main">
+  <p:cSld>
+    <p:spTree>
+      <p:nvGrpSpPr>
+        <p:cNvPr id="1" name=""/>
+        <p:cNvGrpSpPr/>
+        <p:nvPr/>
+      </p:nvGrpSpPr>
+      <p:grpSpPr>
+        <a:xfrm xmlns:a="http://schemas.openxmlformats.org/drawingml/2006/main"/>
+      </p:grpSpPr>
+      <p:sp>
+        <p:nvSpPr>
+          <p:cNvPr id="2" name="Slide Image Placeholder 1"/>
+          <p:cNvSpPr>
+            <a:spLocks xmlns:a="http://schemas.openxmlformats.org/drawingml/2006/main" noGrp="1"/>
+          </p:cNvSpPr>
+          <p:nvPr>
+            <p:ph type="sldImg" idx="0"/>
+          </p:nvPr>
+        </p:nvSpPr>
+        <p:spPr/>
+      </p:sp>
+      <p:sp>
+        <p:nvSpPr>
+          <p:cNvPr id="3" name="Notes Placeholder 2"/>
+          <p:cNvSpPr>
+            <a:spLocks xmlns:a="http://schemas.openxmlformats.org/drawingml/2006/main" noGrp="1"/>
+          </p:cNvSpPr>
+          <p:nvPr>
+            <p:ph type="body" idx="1"/>
+          </p:nvPr>
+        </p:nvSpPr>
+        <p:spPr/>
+        <p:txBody>
+          <a:bodyPr xmlns:a="http://schemas.openxmlformats.org/drawingml/2006/main"/>
+          <a:lstStyle xmlns:a="http://schemas.openxmlformats.org/drawingml/2006/main"/>
+          <a:p xmlns:a="http://schemas.openxmlformats.org/drawingml/2006/main">
+            <a:r>
+              <a:t>Define the information boundary first: cumulative prior return ends at the anchor close and cumulative forward return begins from that close.</a:t>
+            </a:r>
+          </a:p>
+          <a:p xmlns:a="http://schemas.openxmlformats.org/drawingml/2006/main">
+            <a:r>
+              <a:t/>
+            </a:r>
+          </a:p>
+          <a:p xmlns:a="http://schemas.openxmlformats.org/drawingml/2006/main">
+            <a:r>
+              <a:t>[Sources]</a:t>
+            </a:r>
+          </a:p>
+          <a:p xmlns:a="http://schemas.openxmlformats.org/drawingml/2006/main">
+            <a:r>
+              <a:t>- runs/research_workbench/operator_hypothesis_lab/tsla_cumulative_return_horizon_grid_20260825/run_spec.csv</a:t>
+            </a:r>
+          </a:p>
+          <a:p xmlns:a="http://schemas.openxmlformats.org/drawingml/2006/main">
+            <a:r>
+              <a:t>- runs/research_workbench/operator_hypothesis_lab/tsla_cumulative_return_horizon_grid_20260825/grid_checks.csv</a:t>
+            </a:r>
+          </a:p>
+          <a:p xmlns:a="http://schemas.openxmlformats.org/drawingml/2006/main">
+            <a:r>
+              <a:t>[/Sources]</a:t>
+            </a:r>
+          </a:p>
+        </p:txBody>
+      </p:sp>
+      <p:sp>
+        <p:nvSpPr>
+          <p:cNvPr id="4" name="Slide Number Placeholder 3"/>
+          <p:cNvSpPr>
+            <a:spLocks xmlns:a="http://schemas.openxmlformats.org/drawingml/2006/main" noGrp="1"/>
+          </p:cNvSpPr>
+          <p:nvPr>
+            <p:ph type="sldNum" idx="5"/>
+          </p:nvPr>
+        </p:nvSpPr>
+        <p:spPr/>
+        <p:txBody>
+          <a:bodyPr xmlns:a="http://schemas.openxmlformats.org/drawingml/2006/main"/>
+          <a:lstStyle xmlns:a="http://schemas.openxmlformats.org/drawingml/2006/main"/>
+          <a:p xmlns:a="http://schemas.openxmlformats.org/drawingml/2006/main"/>
+        </p:txBody>
+      </p:sp>
+    </p:spTree>
+  </p:cSld>
+  <p:clrMapOvr>
+    <a:masterClrMapping xmlns:a="http://schemas.openxmlformats.org/drawingml/2006/main"/>
+  </p:clrMapOvr>
+</p:notes>
+</file>
+
+<file path=ppt/notesSlides/notesSlide14.xml><?xml version="1.0" encoding="utf-8"?>
+<p:notes xmlns:p="http://schemas.openxmlformats.org/presentationml/2006/main">
+  <p:cSld>
+    <p:spTree>
+      <p:nvGrpSpPr>
+        <p:cNvPr id="1" name=""/>
+        <p:cNvGrpSpPr/>
+        <p:nvPr/>
+      </p:nvGrpSpPr>
+      <p:grpSpPr>
+        <a:xfrm xmlns:a="http://schemas.openxmlformats.org/drawingml/2006/main"/>
+      </p:grpSpPr>
+      <p:sp>
+        <p:nvSpPr>
+          <p:cNvPr id="2" name="Slide Image Placeholder 1"/>
+          <p:cNvSpPr>
+            <a:spLocks xmlns:a="http://schemas.openxmlformats.org/drawingml/2006/main" noGrp="1"/>
+          </p:cNvSpPr>
+          <p:nvPr>
+            <p:ph type="sldImg" idx="0"/>
+          </p:nvPr>
+        </p:nvSpPr>
+        <p:spPr/>
+      </p:sp>
+      <p:sp>
+        <p:nvSpPr>
+          <p:cNvPr id="3" name="Notes Placeholder 2"/>
+          <p:cNvSpPr>
+            <a:spLocks xmlns:a="http://schemas.openxmlformats.org/drawingml/2006/main" noGrp="1"/>
+          </p:cNvSpPr>
+          <p:nvPr>
+            <p:ph type="body" idx="1"/>
+          </p:nvPr>
+        </p:nvSpPr>
+        <p:spPr/>
+        <p:txBody>
+          <a:bodyPr xmlns:a="http://schemas.openxmlformats.org/drawingml/2006/main"/>
+          <a:lstStyle xmlns:a="http://schemas.openxmlformats.org/drawingml/2006/main"/>
+          <a:p xmlns:a="http://schemas.openxmlformats.org/drawingml/2006/main">
+            <a:r>
+              <a:t>The positive region is coherent rather than a single isolated cell, but its magnitude is small and this nested grid is highly dependent.</a:t>
+            </a:r>
+          </a:p>
+          <a:p xmlns:a="http://schemas.openxmlformats.org/drawingml/2006/main">
+            <a:r>
+              <a:t/>
+            </a:r>
+          </a:p>
+          <a:p xmlns:a="http://schemas.openxmlformats.org/drawingml/2006/main">
+            <a:r>
+              <a:t>[Sources]</a:t>
+            </a:r>
+          </a:p>
+          <a:p xmlns:a="http://schemas.openxmlformats.org/drawingml/2006/main">
+            <a:r>
+              <a:t>- runs/research_workbench/operator_hypothesis_lab/tsla_cumulative_return_horizon_grid_20260825/pearson_correlation_matrix.csv</a:t>
+            </a:r>
+          </a:p>
+          <a:p xmlns:a="http://schemas.openxmlformats.org/drawingml/2006/main">
+            <a:r>
+              <a:t>- runs/research_workbench/operator_hypothesis_lab/tsla_cumulative_return_horizon_grid_20260825/slope_bh_q_value_matrix.csv</a:t>
+            </a:r>
+          </a:p>
+          <a:p xmlns:a="http://schemas.openxmlformats.org/drawingml/2006/main">
+            <a:r>
+              <a:t>- runs/research_workbench/operator_hypothesis_lab/tsla_cumulative_return_horizon_grid_20260825/visuals/tsla_cumulative_return_pearson_heatmap.png</a:t>
+            </a:r>
+          </a:p>
+          <a:p xmlns:a="http://schemas.openxmlformats.org/drawingml/2006/main">
+            <a:r>
+              <a:t>[/Sources]</a:t>
+            </a:r>
+          </a:p>
+        </p:txBody>
+      </p:sp>
+      <p:sp>
+        <p:nvSpPr>
+          <p:cNvPr id="4" name="Slide Number Placeholder 3"/>
+          <p:cNvSpPr>
+            <a:spLocks xmlns:a="http://schemas.openxmlformats.org/drawingml/2006/main" noGrp="1"/>
+          </p:cNvSpPr>
+          <p:nvPr>
+            <p:ph type="sldNum" idx="5"/>
+          </p:nvPr>
+        </p:nvSpPr>
+        <p:spPr/>
+        <p:txBody>
+          <a:bodyPr xmlns:a="http://schemas.openxmlformats.org/drawingml/2006/main"/>
+          <a:lstStyle xmlns:a="http://schemas.openxmlformats.org/drawingml/2006/main"/>
+          <a:p xmlns:a="http://schemas.openxmlformats.org/drawingml/2006/main"/>
+        </p:txBody>
+      </p:sp>
+    </p:spTree>
+  </p:cSld>
+  <p:clrMapOvr>
+    <a:masterClrMapping xmlns:a="http://schemas.openxmlformats.org/drawingml/2006/main"/>
+  </p:clrMapOvr>
+</p:notes>
+</file>
+
+<file path=ppt/notesSlides/notesSlide15.xml><?xml version="1.0" encoding="utf-8"?>
+<p:notes xmlns:p="http://schemas.openxmlformats.org/presentationml/2006/main">
+  <p:cSld>
+    <p:spTree>
+      <p:nvGrpSpPr>
+        <p:cNvPr id="1" name=""/>
+        <p:cNvGrpSpPr/>
+        <p:nvPr/>
+      </p:nvGrpSpPr>
+      <p:grpSpPr>
+        <a:xfrm xmlns:a="http://schemas.openxmlformats.org/drawingml/2006/main"/>
+      </p:grpSpPr>
+      <p:sp>
+        <p:nvSpPr>
+          <p:cNvPr id="2" name="Slide Image Placeholder 1"/>
+          <p:cNvSpPr>
+            <a:spLocks xmlns:a="http://schemas.openxmlformats.org/drawingml/2006/main" noGrp="1"/>
+          </p:cNvSpPr>
+          <p:nvPr>
+            <p:ph type="sldImg" idx="0"/>
+          </p:nvPr>
+        </p:nvSpPr>
+        <p:spPr/>
+      </p:sp>
+      <p:sp>
+        <p:nvSpPr>
+          <p:cNvPr id="3" name="Notes Placeholder 2"/>
+          <p:cNvSpPr>
+            <a:spLocks xmlns:a="http://schemas.openxmlformats.org/drawingml/2006/main" noGrp="1"/>
+          </p:cNvSpPr>
+          <p:nvPr>
+            <p:ph type="body" idx="1"/>
+          </p:nvPr>
+        </p:nvSpPr>
+        <p:spPr/>
+        <p:txBody>
+          <a:bodyPr xmlns:a="http://schemas.openxmlformats.org/drawingml/2006/main"/>
+          <a:lstStyle xmlns:a="http://schemas.openxmlformats.org/drawingml/2006/main"/>
+          <a:p xmlns:a="http://schemas.openxmlformats.org/drawingml/2006/main">
+            <a:r>
+              <a:t>The strongest point estimate explains less than one percent of forward-return variance, and its overlap-aware interval includes zero. Its BH q-value is 0.660.</a:t>
+            </a:r>
+          </a:p>
+          <a:p xmlns:a="http://schemas.openxmlformats.org/drawingml/2006/main">
+            <a:r>
+              <a:t/>
+            </a:r>
+          </a:p>
+          <a:p xmlns:a="http://schemas.openxmlformats.org/drawingml/2006/main">
+            <a:r>
+              <a:t>[Sources]</a:t>
+            </a:r>
+          </a:p>
+          <a:p xmlns:a="http://schemas.openxmlformats.org/drawingml/2006/main">
+            <a:r>
+              <a:t>- runs/research_workbench/operator_hypothesis_lab/tsla_cumulative_return_horizon_grid_20260825/horizon_grid_statistics.csv</a:t>
+            </a:r>
+          </a:p>
+          <a:p xmlns:a="http://schemas.openxmlformats.org/drawingml/2006/main">
+            <a:r>
+              <a:t>- runs/research_workbench/operator_hypothesis_lab/tsla_cumulative_return_horizon_grid_20260825/r_squared_percent_matrix.csv</a:t>
+            </a:r>
+          </a:p>
+          <a:p xmlns:a="http://schemas.openxmlformats.org/drawingml/2006/main">
+            <a:r>
+              <a:t>- runs/research_workbench/operator_hypothesis_lab/tsla_cumulative_return_horizon_grid_20260825/visuals/tsla_cumulative_return_r_squared_heatmap.png</a:t>
+            </a:r>
+          </a:p>
+          <a:p xmlns:a="http://schemas.openxmlformats.org/drawingml/2006/main">
+            <a:r>
+              <a:t>[/Sources]</a:t>
+            </a:r>
+          </a:p>
+        </p:txBody>
+      </p:sp>
+      <p:sp>
+        <p:nvSpPr>
+          <p:cNvPr id="4" name="Slide Number Placeholder 3"/>
+          <p:cNvSpPr>
+            <a:spLocks xmlns:a="http://schemas.openxmlformats.org/drawingml/2006/main" noGrp="1"/>
+          </p:cNvSpPr>
+          <p:nvPr>
+            <p:ph type="sldNum" idx="5"/>
+          </p:nvPr>
+        </p:nvSpPr>
+        <p:spPr/>
+        <p:txBody>
+          <a:bodyPr xmlns:a="http://schemas.openxmlformats.org/drawingml/2006/main"/>
+          <a:lstStyle xmlns:a="http://schemas.openxmlformats.org/drawingml/2006/main"/>
+          <a:p xmlns:a="http://schemas.openxmlformats.org/drawingml/2006/main"/>
+        </p:txBody>
+      </p:sp>
+    </p:spTree>
+  </p:cSld>
+  <p:clrMapOvr>
+    <a:masterClrMapping xmlns:a="http://schemas.openxmlformats.org/drawingml/2006/main"/>
+  </p:clrMapOvr>
+</p:notes>
+</file>
+
+<file path=ppt/notesSlides/notesSlide16.xml><?xml version="1.0" encoding="utf-8"?>
+<p:notes xmlns:p="http://schemas.openxmlformats.org/presentationml/2006/main">
+  <p:cSld>
+    <p:spTree>
+      <p:nvGrpSpPr>
+        <p:cNvPr id="1" name=""/>
+        <p:cNvGrpSpPr/>
+        <p:nvPr/>
+      </p:nvGrpSpPr>
+      <p:grpSpPr>
+        <a:xfrm xmlns:a="http://schemas.openxmlformats.org/drawingml/2006/main"/>
+      </p:grpSpPr>
+      <p:sp>
+        <p:nvSpPr>
+          <p:cNvPr id="2" name="Slide Image Placeholder 1"/>
+          <p:cNvSpPr>
+            <a:spLocks xmlns:a="http://schemas.openxmlformats.org/drawingml/2006/main" noGrp="1"/>
+          </p:cNvSpPr>
+          <p:nvPr>
+            <p:ph type="sldImg" idx="0"/>
+          </p:nvPr>
+        </p:nvSpPr>
+        <p:spPr/>
+      </p:sp>
+      <p:sp>
+        <p:nvSpPr>
+          <p:cNvPr id="3" name="Notes Placeholder 2"/>
+          <p:cNvSpPr>
+            <a:spLocks xmlns:a="http://schemas.openxmlformats.org/drawingml/2006/main" noGrp="1"/>
+          </p:cNvSpPr>
+          <p:nvPr>
+            <p:ph type="body" idx="1"/>
+          </p:nvPr>
+        </p:nvSpPr>
+        <p:spPr/>
+        <p:txBody>
+          <a:bodyPr xmlns:a="http://schemas.openxmlformats.org/drawingml/2006/main"/>
+          <a:lstStyle xmlns:a="http://schemas.openxmlformats.org/drawingml/2006/main"/>
+          <a:p xmlns:a="http://schemas.openxmlformats.org/drawingml/2006/main">
+            <a:r>
+              <a:t>Several direction differences are positive, but the best raw p-value becomes q=0.554 after the 81-cell scan. None survives BH-FDR or Bonferroni.</a:t>
+            </a:r>
+          </a:p>
+          <a:p xmlns:a="http://schemas.openxmlformats.org/drawingml/2006/main">
+            <a:r>
+              <a:t/>
+            </a:r>
+          </a:p>
+          <a:p xmlns:a="http://schemas.openxmlformats.org/drawingml/2006/main">
+            <a:r>
+              <a:t>[Sources]</a:t>
+            </a:r>
+          </a:p>
+          <a:p xmlns:a="http://schemas.openxmlformats.org/drawingml/2006/main">
+            <a:r>
+              <a:t>- runs/research_workbench/operator_hypothesis_lab/tsla_cumulative_return_horizon_grid_20260825/direction_difference_pp_matrix.csv</a:t>
+            </a:r>
+          </a:p>
+          <a:p xmlns:a="http://schemas.openxmlformats.org/drawingml/2006/main">
+            <a:r>
+              <a:t>- runs/research_workbench/operator_hypothesis_lab/tsla_cumulative_return_horizon_grid_20260825/horizon_grid_statistics.csv</a:t>
+            </a:r>
+          </a:p>
+          <a:p xmlns:a="http://schemas.openxmlformats.org/drawingml/2006/main">
+            <a:r>
+              <a:t>- runs/research_workbench/operator_hypothesis_lab/tsla_cumulative_return_horizon_grid_20260825/visuals/tsla_cumulative_return_direction_difference_heatmap.png</a:t>
+            </a:r>
+          </a:p>
+          <a:p xmlns:a="http://schemas.openxmlformats.org/drawingml/2006/main">
+            <a:r>
+              <a:t>[/Sources]</a:t>
+            </a:r>
+          </a:p>
+        </p:txBody>
+      </p:sp>
+      <p:sp>
+        <p:nvSpPr>
+          <p:cNvPr id="4" name="Slide Number Placeholder 3"/>
+          <p:cNvSpPr>
+            <a:spLocks xmlns:a="http://schemas.openxmlformats.org/drawingml/2006/main" noGrp="1"/>
+          </p:cNvSpPr>
+          <p:nvPr>
+            <p:ph type="sldNum" idx="5"/>
+          </p:nvPr>
+        </p:nvSpPr>
+        <p:spPr/>
+        <p:txBody>
+          <a:bodyPr xmlns:a="http://schemas.openxmlformats.org/drawingml/2006/main"/>
+          <a:lstStyle xmlns:a="http://schemas.openxmlformats.org/drawingml/2006/main"/>
+          <a:p xmlns:a="http://schemas.openxmlformats.org/drawingml/2006/main"/>
+        </p:txBody>
+      </p:sp>
+    </p:spTree>
+  </p:cSld>
+  <p:clrMapOvr>
+    <a:masterClrMapping xmlns:a="http://schemas.openxmlformats.org/drawingml/2006/main"/>
+  </p:clrMapOvr>
+</p:notes>
+</file>
+
+<file path=ppt/notesSlides/notesSlide17.xml><?xml version="1.0" encoding="utf-8"?>
+<p:notes xmlns:p="http://schemas.openxmlformats.org/presentationml/2006/main">
+  <p:cSld>
+    <p:spTree>
+      <p:nvGrpSpPr>
+        <p:cNvPr id="1" name=""/>
+        <p:cNvGrpSpPr/>
+        <p:nvPr/>
+      </p:nvGrpSpPr>
+      <p:grpSpPr>
+        <a:xfrm xmlns:a="http://schemas.openxmlformats.org/drawingml/2006/main"/>
+      </p:grpSpPr>
+      <p:sp>
+        <p:nvSpPr>
+          <p:cNvPr id="2" name="Slide Image Placeholder 1"/>
+          <p:cNvSpPr>
+            <a:spLocks xmlns:a="http://schemas.openxmlformats.org/drawingml/2006/main" noGrp="1"/>
+          </p:cNvSpPr>
+          <p:nvPr>
+            <p:ph type="sldImg" idx="0"/>
+          </p:nvPr>
+        </p:nvSpPr>
+        <p:spPr/>
+      </p:sp>
+      <p:sp>
+        <p:nvSpPr>
+          <p:cNvPr id="3" name="Notes Placeholder 2"/>
+          <p:cNvSpPr>
+            <a:spLocks xmlns:a="http://schemas.openxmlformats.org/drawingml/2006/main" noGrp="1"/>
+          </p:cNvSpPr>
+          <p:nvPr>
+            <p:ph type="body" idx="1"/>
+          </p:nvPr>
+        </p:nvSpPr>
+        <p:spPr/>
+        <p:txBody>
+          <a:bodyPr xmlns:a="http://schemas.openxmlformats.org/drawingml/2006/main"/>
+          <a:lstStyle xmlns:a="http://schemas.openxmlformats.org/drawingml/2006/main"/>
+          <a:p xmlns:a="http://schemas.openxmlformats.org/drawingml/2006/main">
+            <a:r>
+              <a:t>Close by separating the descriptive pattern from evidence strength. The ridge is worth naming, but this scan does not establish predictive authority.</a:t>
+            </a:r>
+          </a:p>
+          <a:p xmlns:a="http://schemas.openxmlformats.org/drawingml/2006/main">
+            <a:r>
+              <a:t/>
+            </a:r>
+          </a:p>
+          <a:p xmlns:a="http://schemas.openxmlformats.org/drawingml/2006/main">
+            <a:r>
+              <a:t>[Sources]</a:t>
+            </a:r>
+          </a:p>
+          <a:p xmlns:a="http://schemas.openxmlformats.org/drawingml/2006/main">
+            <a:r>
+              <a:t>- runs/research_workbench/operator_hypothesis_lab/tsla_cumulative_return_horizon_grid_20260825/report.md</a:t>
+            </a:r>
+          </a:p>
+          <a:p xmlns:a="http://schemas.openxmlformats.org/drawingml/2006/main">
+            <a:r>
+              <a:t>- runs/research_workbench/operator_hypothesis_lab/tsla_cumulative_return_horizon_grid_20260825/cells_ranked_by_absolute_correlation.csv</a:t>
+            </a:r>
+          </a:p>
+          <a:p xmlns:a="http://schemas.openxmlformats.org/drawingml/2006/main">
+            <a:r>
+              <a:t>[/Sources]</a:t>
+            </a:r>
+          </a:p>
+        </p:txBody>
+      </p:sp>
+      <p:sp>
+        <p:nvSpPr>
+          <p:cNvPr id="4" name="Slide Number Placeholder 3"/>
+          <p:cNvSpPr>
+            <a:spLocks xmlns:a="http://schemas.openxmlformats.org/drawingml/2006/main" noGrp="1"/>
+          </p:cNvSpPr>
+          <p:nvPr>
+            <p:ph type="sldNum" idx="5"/>
+          </p:nvPr>
+        </p:nvSpPr>
+        <p:spPr/>
+        <p:txBody>
+          <a:bodyPr xmlns:a="http://schemas.openxmlformats.org/drawingml/2006/main"/>
+          <a:lstStyle xmlns:a="http://schemas.openxmlformats.org/drawingml/2006/main"/>
+          <a:p xmlns:a="http://schemas.openxmlformats.org/drawingml/2006/main"/>
+        </p:txBody>
+      </p:sp>
+    </p:spTree>
+  </p:cSld>
+  <p:clrMapOvr>
+    <a:masterClrMapping xmlns:a="http://schemas.openxmlformats.org/drawingml/2006/main"/>
+  </p:clrMapOvr>
+</p:notes>
+</file>
+
 <file path=ppt/notesSlides/notesSlide2.xml><?xml version="1.0" encoding="utf-8"?>
 <p:notes xmlns:p="http://schemas.openxmlformats.org/presentationml/2006/main">
   <p:cSld>
@@ -1520,7 +2111,7 @@
   </p:cSld>
   <p:clrMap bg1="lt1" tx1="dk1" bg2="lt2" tx2="dk2" accent1="accent1" accent2="accent2" accent3="accent3" accent4="accent4" accent5="accent5" accent6="accent6" hlink="hlink" folHlink="folHlink"/>
   <p:sldLayoutIdLst>
-    <p:sldLayoutId xmlns:r="http://schemas.openxmlformats.org/officeDocument/2006/relationships" id="2147483649" r:id="R32c14de84b534ec5"/>
+    <p:sldLayoutId xmlns:r="http://schemas.openxmlformats.org/officeDocument/2006/relationships" id="2147483649" r:id="R4dca3461df90472d"/>
   </p:sldLayoutIdLst>
   <p:txStyles>
     <p:titleStyle>
@@ -2101,6 +2692,7 @@
           <a:lstStyle xmlns:a="http://schemas.openxmlformats.org/drawingml/2006/main"/>
           <a:p xmlns:a="http://schemas.openxmlformats.org/drawingml/2006/main">
             <a:pPr algn="l">
+              <a:buNone/>
               <a:defRPr sz="1350" b="1">
                 <a:solidFill>
                   <a:srgbClr val="667384"/>
@@ -2159,6 +2751,7 @@
           <a:lstStyle xmlns:a="http://schemas.openxmlformats.org/drawingml/2006/main"/>
           <a:p xmlns:a="http://schemas.openxmlformats.org/drawingml/2006/main">
             <a:pPr algn="l">
+              <a:buNone/>
               <a:defRPr sz="6000" b="1">
                 <a:solidFill>
                   <a:srgbClr val="000000"/>
@@ -2182,6 +2775,7 @@
           </a:p>
           <a:p xmlns:a="http://schemas.openxmlformats.org/drawingml/2006/main">
             <a:pPr algn="l">
+              <a:buNone/>
               <a:defRPr sz="6000" b="1">
                 <a:solidFill>
                   <a:srgbClr val="000000"/>
@@ -2273,6 +2867,7 @@
           <a:lstStyle xmlns:a="http://schemas.openxmlformats.org/drawingml/2006/main"/>
           <a:p xmlns:a="http://schemas.openxmlformats.org/drawingml/2006/main">
             <a:pPr algn="l">
+              <a:buNone/>
               <a:defRPr sz="2325" b="0">
                 <a:solidFill>
                   <a:srgbClr val="273548"/>
@@ -2331,6 +2926,7 @@
           <a:lstStyle xmlns:a="http://schemas.openxmlformats.org/drawingml/2006/main"/>
           <a:p xmlns:a="http://schemas.openxmlformats.org/drawingml/2006/main">
             <a:pPr algn="l">
+              <a:buNone/>
               <a:defRPr sz="1350" b="0">
                 <a:solidFill>
                   <a:srgbClr val="667384"/>
@@ -2418,6 +3014,7 @@
           <a:lstStyle xmlns:a="http://schemas.openxmlformats.org/drawingml/2006/main"/>
           <a:p xmlns:a="http://schemas.openxmlformats.org/drawingml/2006/main">
             <a:pPr algn="l">
+              <a:buNone/>
               <a:defRPr sz="1200" b="1">
                 <a:solidFill>
                   <a:srgbClr val="667384"/>
@@ -2476,6 +3073,7 @@
           <a:lstStyle xmlns:a="http://schemas.openxmlformats.org/drawingml/2006/main"/>
           <a:p xmlns:a="http://schemas.openxmlformats.org/drawingml/2006/main">
             <a:pPr algn="l">
+              <a:buNone/>
               <a:defRPr sz="3525" b="1">
                 <a:solidFill>
                   <a:srgbClr val="000000"/>
@@ -2567,6 +3165,7 @@
           <a:lstStyle xmlns:a="http://schemas.openxmlformats.org/drawingml/2006/main"/>
           <a:p xmlns:a="http://schemas.openxmlformats.org/drawingml/2006/main">
             <a:pPr algn="l">
+              <a:buNone/>
               <a:defRPr sz="1050" b="0">
                 <a:solidFill>
                   <a:srgbClr val="667384"/>
@@ -2625,6 +3224,7 @@
           <a:lstStyle xmlns:a="http://schemas.openxmlformats.org/drawingml/2006/main"/>
           <a:p xmlns:a="http://schemas.openxmlformats.org/drawingml/2006/main">
             <a:pPr algn="r">
+              <a:buNone/>
               <a:defRPr sz="1050" b="0">
                 <a:solidFill>
                   <a:srgbClr val="667384"/>
@@ -2683,14 +3283,14 @@
       </p:sp>
       <p:pic>
         <p:nvPicPr>
-          <p:cNvPr id="22" name=""/>
+          <p:cNvPr id="24" name=""/>
           <p:cNvPicPr>
             <a:picLocks xmlns:a="http://schemas.openxmlformats.org/drawingml/2006/main" noChangeAspect="1"/>
           </p:cNvPicPr>
           <p:nvPr/>
         </p:nvPicPr>
         <p:blipFill>
-          <a:blip xmlns:r="http://schemas.openxmlformats.org/officeDocument/2006/relationships" xmlns:a="http://schemas.openxmlformats.org/drawingml/2006/main" r:embed="Rc7422d70b7dc413c"/>
+          <a:blip xmlns:r="http://schemas.openxmlformats.org/officeDocument/2006/relationships" xmlns:a="http://schemas.openxmlformats.org/drawingml/2006/main" r:embed="R37b12248629d458c"/>
           <a:stretch xmlns:a="http://schemas.openxmlformats.org/drawingml/2006/main"/>
         </p:blipFill>
         <p:spPr>
@@ -2804,6 +3404,7 @@
           <a:lstStyle xmlns:a="http://schemas.openxmlformats.org/drawingml/2006/main"/>
           <a:p xmlns:a="http://schemas.openxmlformats.org/drawingml/2006/main">
             <a:pPr algn="l">
+              <a:buNone/>
               <a:defRPr sz="3225" b="1">
                 <a:solidFill>
                   <a:srgbClr val="3D8DFF"/>
@@ -2862,6 +3463,7 @@
           <a:lstStyle xmlns:a="http://schemas.openxmlformats.org/drawingml/2006/main"/>
           <a:p xmlns:a="http://schemas.openxmlformats.org/drawingml/2006/main">
             <a:pPr algn="l">
+              <a:buNone/>
               <a:defRPr sz="1350" b="0">
                 <a:solidFill>
                   <a:srgbClr val="273548"/>
@@ -2920,6 +3522,7 @@
           <a:lstStyle xmlns:a="http://schemas.openxmlformats.org/drawingml/2006/main"/>
           <a:p xmlns:a="http://schemas.openxmlformats.org/drawingml/2006/main">
             <a:pPr algn="l">
+              <a:buNone/>
               <a:defRPr sz="1800" b="1">
                 <a:solidFill>
                   <a:srgbClr val="273548"/>
@@ -2943,6 +3546,7 @@
           </a:p>
           <a:p xmlns:a="http://schemas.openxmlformats.org/drawingml/2006/main">
             <a:pPr algn="l">
+              <a:buNone/>
               <a:defRPr sz="1800" b="1">
                 <a:solidFill>
                   <a:srgbClr val="273548"/>
@@ -3034,6 +3638,7 @@
           <a:lstStyle xmlns:a="http://schemas.openxmlformats.org/drawingml/2006/main"/>
           <a:p xmlns:a="http://schemas.openxmlformats.org/drawingml/2006/main">
             <a:pPr algn="l">
+              <a:buNone/>
               <a:defRPr sz="1950" b="1">
                 <a:solidFill>
                   <a:srgbClr val="E45756"/>
@@ -3092,6 +3697,7 @@
           <a:lstStyle xmlns:a="http://schemas.openxmlformats.org/drawingml/2006/main"/>
           <a:p xmlns:a="http://schemas.openxmlformats.org/drawingml/2006/main">
             <a:pPr algn="l">
+              <a:buNone/>
               <a:defRPr sz="1350" b="0">
                 <a:solidFill>
                   <a:srgbClr val="273548"/>
@@ -3179,6 +3785,7 @@
           <a:lstStyle xmlns:a="http://schemas.openxmlformats.org/drawingml/2006/main"/>
           <a:p xmlns:a="http://schemas.openxmlformats.org/drawingml/2006/main">
             <a:pPr algn="l">
+              <a:buNone/>
               <a:defRPr sz="1200" b="1">
                 <a:solidFill>
                   <a:srgbClr val="667384"/>
@@ -3237,6 +3844,7 @@
           <a:lstStyle xmlns:a="http://schemas.openxmlformats.org/drawingml/2006/main"/>
           <a:p xmlns:a="http://schemas.openxmlformats.org/drawingml/2006/main">
             <a:pPr algn="l">
+              <a:buNone/>
               <a:defRPr sz="3525" b="1">
                 <a:solidFill>
                   <a:srgbClr val="000000"/>
@@ -3328,6 +3936,7 @@
           <a:lstStyle xmlns:a="http://schemas.openxmlformats.org/drawingml/2006/main"/>
           <a:p xmlns:a="http://schemas.openxmlformats.org/drawingml/2006/main">
             <a:pPr algn="l">
+              <a:buNone/>
               <a:defRPr sz="1050" b="0">
                 <a:solidFill>
                   <a:srgbClr val="667384"/>
@@ -3386,6 +3995,7 @@
           <a:lstStyle xmlns:a="http://schemas.openxmlformats.org/drawingml/2006/main"/>
           <a:p xmlns:a="http://schemas.openxmlformats.org/drawingml/2006/main">
             <a:pPr algn="r">
+              <a:buNone/>
               <a:defRPr sz="1050" b="0">
                 <a:solidFill>
                   <a:srgbClr val="667384"/>
@@ -3477,6 +4087,7 @@
           <a:lstStyle xmlns:a="http://schemas.openxmlformats.org/drawingml/2006/main"/>
           <a:p xmlns:a="http://schemas.openxmlformats.org/drawingml/2006/main">
             <a:pPr algn="l">
+              <a:buNone/>
               <a:defRPr sz="1350" b="1">
                 <a:solidFill>
                   <a:srgbClr val="E45756"/>
@@ -3535,6 +4146,7 @@
           <a:lstStyle xmlns:a="http://schemas.openxmlformats.org/drawingml/2006/main"/>
           <a:p xmlns:a="http://schemas.openxmlformats.org/drawingml/2006/main">
             <a:pPr algn="l">
+              <a:buNone/>
               <a:defRPr sz="1950" b="1">
                 <a:solidFill>
                   <a:srgbClr val="273548"/>
@@ -3593,6 +4205,7 @@
           <a:lstStyle xmlns:a="http://schemas.openxmlformats.org/drawingml/2006/main"/>
           <a:p xmlns:a="http://schemas.openxmlformats.org/drawingml/2006/main">
             <a:pPr algn="l">
+              <a:buNone/>
               <a:defRPr sz="1425" b="0">
                 <a:solidFill>
                   <a:srgbClr val="667384"/>
@@ -3717,6 +4330,7 @@
           <a:lstStyle xmlns:a="http://schemas.openxmlformats.org/drawingml/2006/main"/>
           <a:p xmlns:a="http://schemas.openxmlformats.org/drawingml/2006/main">
             <a:pPr algn="l">
+              <a:buNone/>
               <a:defRPr sz="1350" b="1">
                 <a:solidFill>
                   <a:srgbClr val="2A9D6F"/>
@@ -3775,6 +4389,7 @@
           <a:lstStyle xmlns:a="http://schemas.openxmlformats.org/drawingml/2006/main"/>
           <a:p xmlns:a="http://schemas.openxmlformats.org/drawingml/2006/main">
             <a:pPr algn="l">
+              <a:buNone/>
               <a:defRPr sz="1950" b="1">
                 <a:solidFill>
                   <a:srgbClr val="273548"/>
@@ -3833,6 +4448,7 @@
           <a:lstStyle xmlns:a="http://schemas.openxmlformats.org/drawingml/2006/main"/>
           <a:p xmlns:a="http://schemas.openxmlformats.org/drawingml/2006/main">
             <a:pPr algn="l">
+              <a:buNone/>
               <a:defRPr sz="1425" b="0">
                 <a:solidFill>
                   <a:srgbClr val="667384"/>
@@ -3957,6 +4573,7 @@
           <a:lstStyle xmlns:a="http://schemas.openxmlformats.org/drawingml/2006/main"/>
           <a:p xmlns:a="http://schemas.openxmlformats.org/drawingml/2006/main">
             <a:pPr algn="l">
+              <a:buNone/>
               <a:defRPr sz="1350" b="1">
                 <a:solidFill>
                   <a:srgbClr val="3D8DFF"/>
@@ -4015,6 +4632,7 @@
           <a:lstStyle xmlns:a="http://schemas.openxmlformats.org/drawingml/2006/main"/>
           <a:p xmlns:a="http://schemas.openxmlformats.org/drawingml/2006/main">
             <a:pPr algn="l">
+              <a:buNone/>
               <a:defRPr sz="1950" b="1">
                 <a:solidFill>
                   <a:srgbClr val="273548"/>
@@ -4073,6 +4691,7 @@
           <a:lstStyle xmlns:a="http://schemas.openxmlformats.org/drawingml/2006/main"/>
           <a:p xmlns:a="http://schemas.openxmlformats.org/drawingml/2006/main">
             <a:pPr algn="l">
+              <a:buNone/>
               <a:defRPr sz="1425" b="0">
                 <a:solidFill>
                   <a:srgbClr val="667384"/>
@@ -4197,6 +4816,7 @@
           <a:lstStyle xmlns:a="http://schemas.openxmlformats.org/drawingml/2006/main"/>
           <a:p xmlns:a="http://schemas.openxmlformats.org/drawingml/2006/main">
             <a:pPr algn="l">
+              <a:buNone/>
               <a:defRPr sz="1725" b="1">
                 <a:solidFill>
                   <a:srgbClr val="3D8DFF"/>
@@ -4255,6 +4875,7 @@
           <a:lstStyle xmlns:a="http://schemas.openxmlformats.org/drawingml/2006/main"/>
           <a:p xmlns:a="http://schemas.openxmlformats.org/drawingml/2006/main">
             <a:pPr algn="l">
+              <a:buNone/>
               <a:defRPr sz="1800" b="1">
                 <a:solidFill>
                   <a:srgbClr val="273548"/>
@@ -4274,6 +4895,5218 @@
                 <a:cs typeface="Arial"/>
               </a:rPr>
               <a:t>Does yesterday's return magnitude forecast tomorrow's magnitude on a separately frozen surface?</a:t>
+            </a:r>
+          </a:p>
+        </p:txBody>
+      </p:sp>
+    </p:spTree>
+    <p:extLst>
+      <p:ext uri="{BB962C8B-B14F-4D97-AF65-F5344CB8AC3E}">
+        <p14:creationId xmlns:p14="http://schemas.microsoft.com/office/powerpoint/2010/main" val="666536286"/>
+      </p:ext>
+    </p:extLst>
+  </p:cSld>
+</p:sld>
+</file>
+
+<file path=ppt/slides/slide12.xml><?xml version="1.0" encoding="utf-8"?>
+<p:sld xmlns:p="http://schemas.openxmlformats.org/presentationml/2006/main">
+  <p:cSld>
+    <p:bg>
+      <p:bgPr>
+        <a:solidFill xmlns:a="http://schemas.openxmlformats.org/drawingml/2006/main">
+          <a:srgbClr val="FFFFFF"/>
+        </a:solidFill>
+      </p:bgPr>
+    </p:bg>
+    <p:spTree>
+      <p:nvGrpSpPr>
+        <p:cNvPr id="1" name=""/>
+        <p:cNvGrpSpPr/>
+        <p:nvPr/>
+      </p:nvGrpSpPr>
+      <p:grpSpPr>
+        <a:xfrm xmlns:a="http://schemas.openxmlformats.org/drawingml/2006/main"/>
+      </p:grpSpPr>
+      <p:sp>
+        <p:nvSpPr>
+          <p:cNvPr id="7" name="">
+            <a:extLst xmlns:a="http://schemas.openxmlformats.org/drawingml/2006/main">
+              <a:ext uri="{FF2B5EF4-FFF2-40B4-BE49-F238E27FC236}">
+                <a16:creationId xmlns:a16="http://schemas.microsoft.com/office/drawing/2014/main" id="{52BC51E6-6E84-4C1E-8D3E-0D1B2ADE0DA7}"/>
+              </a:ext>
+            </a:extLst>
+          </p:cNvPr>
+          <p:cNvSpPr>
+            <a:spLocks xmlns:a="http://schemas.openxmlformats.org/drawingml/2006/main" noGrp="1"/>
+          </p:cNvSpPr>
+          <p:nvPr/>
+        </p:nvSpPr>
+        <p:spPr>
+          <a:xfrm xmlns:a="http://schemas.openxmlformats.org/drawingml/2006/main">
+            <a:off x="457200" y="400050"/>
+            <a:ext cx="4000500" cy="266700"/>
+          </a:xfrm>
+          <a:prstGeom xmlns:a="http://schemas.openxmlformats.org/drawingml/2006/main" prst="rect">
+            <a:avLst/>
+          </a:prstGeom>
+          <a:noFill xmlns:a="http://schemas.openxmlformats.org/drawingml/2006/main"/>
+          <a:ln xmlns:a="http://schemas.openxmlformats.org/drawingml/2006/main" w="0">
+            <a:noFill/>
+            <a:prstDash val="solid"/>
+          </a:ln>
+        </p:spPr>
+        <p:txBody>
+          <a:bodyPr xmlns:a="http://schemas.openxmlformats.org/drawingml/2006/main" wrap="square" lIns="0" tIns="0" rIns="0" bIns="0" anchor="t">
+            <a:normAutofit fontScale="100000"/>
+          </a:bodyPr>
+          <a:lstStyle xmlns:a="http://schemas.openxmlformats.org/drawingml/2006/main"/>
+          <a:p xmlns:a="http://schemas.openxmlformats.org/drawingml/2006/main">
+            <a:pPr algn="l">
+              <a:buNone/>
+              <a:defRPr sz="1350" b="1">
+                <a:solidFill>
+                  <a:srgbClr val="667384"/>
+                </a:solidFill>
+                <a:latin typeface="Arial"/>
+                <a:ea typeface="Arial"/>
+                <a:cs typeface="Arial"/>
+              </a:defRPr>
+            </a:pPr>
+            <a:r>
+              <a:rPr sz="1350" b="1">
+                <a:solidFill>
+                  <a:srgbClr val="667384"/>
+                </a:solidFill>
+                <a:latin typeface="Arial"/>
+                <a:ea typeface="Arial"/>
+                <a:cs typeface="Arial"/>
+              </a:rPr>
+              <a:t>HORIZON GRID</a:t>
+            </a:r>
+          </a:p>
+        </p:txBody>
+      </p:sp>
+      <p:sp>
+        <p:nvSpPr>
+          <p:cNvPr id="2" name="">
+            <a:extLst xmlns:a="http://schemas.openxmlformats.org/drawingml/2006/main">
+              <a:ext uri="{FF2B5EF4-FFF2-40B4-BE49-F238E27FC236}">
+                <a16:creationId xmlns:a16="http://schemas.microsoft.com/office/drawing/2014/main" id="{D5FBD659-315B-4902-8A62-88F3460EC6CC}"/>
+              </a:ext>
+            </a:extLst>
+          </p:cNvPr>
+          <p:cNvSpPr>
+            <a:spLocks xmlns:a="http://schemas.openxmlformats.org/drawingml/2006/main" noGrp="1"/>
+          </p:cNvSpPr>
+          <p:nvPr/>
+        </p:nvSpPr>
+        <p:spPr>
+          <a:xfrm xmlns:a="http://schemas.openxmlformats.org/drawingml/2006/main">
+            <a:off x="457200" y="1562100"/>
+            <a:ext cx="10763250" cy="1809750"/>
+          </a:xfrm>
+          <a:prstGeom xmlns:a="http://schemas.openxmlformats.org/drawingml/2006/main" prst="rect">
+            <a:avLst/>
+          </a:prstGeom>
+          <a:noFill xmlns:a="http://schemas.openxmlformats.org/drawingml/2006/main"/>
+          <a:ln xmlns:a="http://schemas.openxmlformats.org/drawingml/2006/main" w="0">
+            <a:noFill/>
+            <a:prstDash val="solid"/>
+          </a:ln>
+        </p:spPr>
+        <p:txBody>
+          <a:bodyPr xmlns:a="http://schemas.openxmlformats.org/drawingml/2006/main" wrap="square" lIns="0" tIns="0" rIns="0" bIns="0" anchor="t">
+            <a:noAutofit/>
+          </a:bodyPr>
+          <a:lstStyle xmlns:a="http://schemas.openxmlformats.org/drawingml/2006/main"/>
+          <a:p xmlns:a="http://schemas.openxmlformats.org/drawingml/2006/main">
+            <a:pPr algn="l">
+              <a:buNone/>
+              <a:defRPr sz="5100" b="1">
+                <a:solidFill>
+                  <a:srgbClr val="000000"/>
+                </a:solidFill>
+                <a:latin typeface="Arial"/>
+                <a:ea typeface="Arial"/>
+                <a:cs typeface="Arial"/>
+              </a:defRPr>
+            </a:pPr>
+            <a:r>
+              <a:rPr sz="5100" b="1">
+                <a:solidFill>
+                  <a:srgbClr val="000000"/>
+                </a:solidFill>
+                <a:latin typeface="Arial"/>
+                <a:ea typeface="Arial"/>
+                <a:cs typeface="Arial"/>
+              </a:rPr>
+              <a:t>What if one session is simply</a:t>
+            </a:r>
+          </a:p>
+          <a:p xmlns:a="http://schemas.openxmlformats.org/drawingml/2006/main">
+            <a:pPr algn="l">
+              <a:buNone/>
+              <a:defRPr sz="5100" b="1">
+                <a:solidFill>
+                  <a:srgbClr val="000000"/>
+                </a:solidFill>
+                <a:latin typeface="Arial"/>
+                <a:ea typeface="Arial"/>
+                <a:cs typeface="Arial"/>
+              </a:defRPr>
+            </a:pPr>
+            <a:r>
+              <a:rPr sz="5100" b="1">
+                <a:solidFill>
+                  <a:srgbClr val="000000"/>
+                </a:solidFill>
+                <a:latin typeface="Arial"/>
+                <a:ea typeface="Arial"/>
+                <a:cs typeface="Arial"/>
+              </a:rPr>
+              <a:t>too noisy?</a:t>
+            </a:r>
+          </a:p>
+        </p:txBody>
+      </p:sp>
+      <p:sp>
+        <p:nvSpPr>
+          <p:cNvPr id="3" name="">
+            <a:extLst xmlns:a="http://schemas.openxmlformats.org/drawingml/2006/main">
+              <a:ext uri="{FF2B5EF4-FFF2-40B4-BE49-F238E27FC236}">
+                <a16:creationId xmlns:a16="http://schemas.microsoft.com/office/drawing/2014/main" id="{108F8D12-F796-4339-A513-DF003E6E5740}"/>
+              </a:ext>
+            </a:extLst>
+          </p:cNvPr>
+          <p:cNvSpPr>
+            <a:spLocks xmlns:a="http://schemas.openxmlformats.org/drawingml/2006/main" noGrp="1"/>
+          </p:cNvSpPr>
+          <p:nvPr/>
+        </p:nvSpPr>
+        <p:spPr>
+          <a:xfrm xmlns:a="http://schemas.openxmlformats.org/drawingml/2006/main">
+            <a:off x="457200" y="3714750"/>
+            <a:ext cx="1257300" cy="76200"/>
+          </a:xfrm>
+          <a:prstGeom xmlns:a="http://schemas.openxmlformats.org/drawingml/2006/main" prst="rect">
+            <a:avLst/>
+          </a:prstGeom>
+          <a:solidFill xmlns:a="http://schemas.openxmlformats.org/drawingml/2006/main">
+            <a:srgbClr val="3D8DFF"/>
+          </a:solidFill>
+          <a:ln xmlns:a="http://schemas.openxmlformats.org/drawingml/2006/main" w="0">
+            <a:solidFill>
+              <a:srgbClr val="3D8DFF"/>
+            </a:solidFill>
+            <a:prstDash val="solid"/>
+          </a:ln>
+        </p:spPr>
+      </p:sp>
+      <p:sp>
+        <p:nvSpPr>
+          <p:cNvPr id="4" name="">
+            <a:extLst xmlns:a="http://schemas.openxmlformats.org/drawingml/2006/main">
+              <a:ext uri="{FF2B5EF4-FFF2-40B4-BE49-F238E27FC236}">
+                <a16:creationId xmlns:a16="http://schemas.microsoft.com/office/drawing/2014/main" id="{8345830B-E6EE-4175-94D1-A484215C8069}"/>
+              </a:ext>
+            </a:extLst>
+          </p:cNvPr>
+          <p:cNvSpPr>
+            <a:spLocks xmlns:a="http://schemas.openxmlformats.org/drawingml/2006/main" noGrp="1"/>
+          </p:cNvSpPr>
+          <p:nvPr/>
+        </p:nvSpPr>
+        <p:spPr>
+          <a:xfrm xmlns:a="http://schemas.openxmlformats.org/drawingml/2006/main">
+            <a:off x="457200" y="4171950"/>
+            <a:ext cx="9239250" cy="685800"/>
+          </a:xfrm>
+          <a:prstGeom xmlns:a="http://schemas.openxmlformats.org/drawingml/2006/main" prst="rect">
+            <a:avLst/>
+          </a:prstGeom>
+          <a:noFill xmlns:a="http://schemas.openxmlformats.org/drawingml/2006/main"/>
+          <a:ln xmlns:a="http://schemas.openxmlformats.org/drawingml/2006/main" w="0">
+            <a:noFill/>
+            <a:prstDash val="solid"/>
+          </a:ln>
+        </p:spPr>
+        <p:txBody>
+          <a:bodyPr xmlns:a="http://schemas.openxmlformats.org/drawingml/2006/main" wrap="square" lIns="0" tIns="0" rIns="0" bIns="0" anchor="t">
+            <a:normAutofit fontScale="94728"/>
+          </a:bodyPr>
+          <a:lstStyle xmlns:a="http://schemas.openxmlformats.org/drawingml/2006/main"/>
+          <a:p xmlns:a="http://schemas.openxmlformats.org/drawingml/2006/main">
+            <a:pPr algn="l">
+              <a:buNone/>
+              <a:defRPr sz="2550" b="0">
+                <a:solidFill>
+                  <a:srgbClr val="273548"/>
+                </a:solidFill>
+                <a:latin typeface="Arial"/>
+                <a:ea typeface="Arial"/>
+                <a:cs typeface="Arial"/>
+              </a:defRPr>
+            </a:pPr>
+            <a:r>
+              <a:rPr sz="2550" b="0">
+                <a:solidFill>
+                  <a:srgbClr val="273548"/>
+                </a:solidFill>
+                <a:latin typeface="Arial"/>
+                <a:ea typeface="Arial"/>
+                <a:cs typeface="Arial"/>
+              </a:rPr>
+              <a:t>Aggregate the past. Aggregate the future. Keep the boundary clean.</a:t>
+            </a:r>
+          </a:p>
+        </p:txBody>
+      </p:sp>
+      <p:sp>
+        <p:nvSpPr>
+          <p:cNvPr id="5" name="">
+            <a:extLst xmlns:a="http://schemas.openxmlformats.org/drawingml/2006/main">
+              <a:ext uri="{FF2B5EF4-FFF2-40B4-BE49-F238E27FC236}">
+                <a16:creationId xmlns:a16="http://schemas.microsoft.com/office/drawing/2014/main" id="{93B3AAD9-855C-47E7-9BA0-F94B71F3F42B}"/>
+              </a:ext>
+            </a:extLst>
+          </p:cNvPr>
+          <p:cNvSpPr>
+            <a:spLocks xmlns:a="http://schemas.openxmlformats.org/drawingml/2006/main" noGrp="1"/>
+          </p:cNvSpPr>
+          <p:nvPr/>
+        </p:nvSpPr>
+        <p:spPr>
+          <a:xfrm xmlns:a="http://schemas.openxmlformats.org/drawingml/2006/main">
+            <a:off x="457200" y="5429250"/>
+            <a:ext cx="10191750" cy="609600"/>
+          </a:xfrm>
+          <a:prstGeom xmlns:a="http://schemas.openxmlformats.org/drawingml/2006/main" prst="rect">
+            <a:avLst/>
+          </a:prstGeom>
+          <a:noFill xmlns:a="http://schemas.openxmlformats.org/drawingml/2006/main"/>
+          <a:ln xmlns:a="http://schemas.openxmlformats.org/drawingml/2006/main" w="0">
+            <a:noFill/>
+            <a:prstDash val="solid"/>
+          </a:ln>
+        </p:spPr>
+        <p:txBody>
+          <a:bodyPr xmlns:a="http://schemas.openxmlformats.org/drawingml/2006/main" wrap="square" lIns="0" tIns="0" rIns="0" bIns="0" anchor="t">
+            <a:normAutofit fontScale="100000"/>
+          </a:bodyPr>
+          <a:lstStyle xmlns:a="http://schemas.openxmlformats.org/drawingml/2006/main"/>
+          <a:p xmlns:a="http://schemas.openxmlformats.org/drawingml/2006/main">
+            <a:pPr algn="l">
+              <a:buNone/>
+              <a:defRPr sz="1650" b="0">
+                <a:solidFill>
+                  <a:srgbClr val="667384"/>
+                </a:solidFill>
+                <a:latin typeface="Arial"/>
+                <a:ea typeface="Arial"/>
+                <a:cs typeface="Arial"/>
+              </a:defRPr>
+            </a:pPr>
+            <a:r>
+              <a:rPr sz="1650" b="0">
+                <a:solidFill>
+                  <a:srgbClr val="667384"/>
+                </a:solidFill>
+                <a:latin typeface="Arial"/>
+                <a:ea typeface="Arial"/>
+                <a:cs typeface="Arial"/>
+              </a:rPr>
+              <a:t>Predeclared prior and forward horizons: 1, 2, 3, 4, 5, 10, 15, 20, and 25 sessions. No cell becomes a strategy.</a:t>
+            </a:r>
+          </a:p>
+        </p:txBody>
+      </p:sp>
+      <p:sp>
+        <p:nvSpPr>
+          <p:cNvPr id="6" name="">
+            <a:extLst xmlns:a="http://schemas.openxmlformats.org/drawingml/2006/main">
+              <a:ext uri="{FF2B5EF4-FFF2-40B4-BE49-F238E27FC236}">
+                <a16:creationId xmlns:a16="http://schemas.microsoft.com/office/drawing/2014/main" id="{C26E2559-6393-4E7F-A448-E0578397EEA2}"/>
+              </a:ext>
+            </a:extLst>
+          </p:cNvPr>
+          <p:cNvSpPr>
+            <a:spLocks xmlns:a="http://schemas.openxmlformats.org/drawingml/2006/main" noGrp="1"/>
+          </p:cNvSpPr>
+          <p:nvPr/>
+        </p:nvSpPr>
+        <p:spPr>
+          <a:xfrm xmlns:a="http://schemas.openxmlformats.org/drawingml/2006/main">
+            <a:off x="11239500" y="6496050"/>
+            <a:ext cx="495300" cy="190500"/>
+          </a:xfrm>
+          <a:prstGeom xmlns:a="http://schemas.openxmlformats.org/drawingml/2006/main" prst="rect">
+            <a:avLst/>
+          </a:prstGeom>
+          <a:noFill xmlns:a="http://schemas.openxmlformats.org/drawingml/2006/main"/>
+          <a:ln xmlns:a="http://schemas.openxmlformats.org/drawingml/2006/main" w="0">
+            <a:noFill/>
+            <a:prstDash val="solid"/>
+          </a:ln>
+        </p:spPr>
+        <p:txBody>
+          <a:bodyPr xmlns:a="http://schemas.openxmlformats.org/drawingml/2006/main" wrap="square" lIns="0" tIns="0" rIns="0" bIns="0" anchor="t">
+            <a:normAutofit fontScale="100000"/>
+          </a:bodyPr>
+          <a:lstStyle xmlns:a="http://schemas.openxmlformats.org/drawingml/2006/main"/>
+          <a:p xmlns:a="http://schemas.openxmlformats.org/drawingml/2006/main">
+            <a:pPr algn="r">
+              <a:buNone/>
+              <a:defRPr sz="1050" b="0">
+                <a:solidFill>
+                  <a:srgbClr val="667384"/>
+                </a:solidFill>
+                <a:latin typeface="Arial"/>
+                <a:ea typeface="Arial"/>
+                <a:cs typeface="Arial"/>
+              </a:defRPr>
+            </a:pPr>
+            <a:r>
+              <a:rPr sz="1050" b="0">
+                <a:solidFill>
+                  <a:srgbClr val="667384"/>
+                </a:solidFill>
+                <a:latin typeface="Arial"/>
+                <a:ea typeface="Arial"/>
+                <a:cs typeface="Arial"/>
+              </a:rPr>
+              <a:t>12</a:t>
+            </a:r>
+          </a:p>
+        </p:txBody>
+      </p:sp>
+    </p:spTree>
+    <p:extLst>
+      <p:ext uri="{BB962C8B-B14F-4D97-AF65-F5344CB8AC3E}">
+        <p14:creationId xmlns:p14="http://schemas.microsoft.com/office/powerpoint/2010/main" val="80248067"/>
+      </p:ext>
+    </p:extLst>
+  </p:cSld>
+</p:sld>
+</file>
+
+<file path=ppt/slides/slide13.xml><?xml version="1.0" encoding="utf-8"?>
+<p:sld xmlns:p="http://schemas.openxmlformats.org/presentationml/2006/main">
+  <p:cSld>
+    <p:bg>
+      <p:bgPr>
+        <a:solidFill xmlns:a="http://schemas.openxmlformats.org/drawingml/2006/main">
+          <a:srgbClr val="FFFFFF"/>
+        </a:solidFill>
+      </p:bgPr>
+    </p:bg>
+    <p:spTree>
+      <p:nvGrpSpPr>
+        <p:cNvPr id="1" name=""/>
+        <p:cNvGrpSpPr/>
+        <p:nvPr/>
+      </p:nvGrpSpPr>
+      <p:grpSpPr>
+        <a:xfrm xmlns:a="http://schemas.openxmlformats.org/drawingml/2006/main"/>
+      </p:grpSpPr>
+      <p:sp>
+        <p:nvSpPr>
+          <p:cNvPr id="30" name="section-3">
+            <a:extLst xmlns:a="http://schemas.openxmlformats.org/drawingml/2006/main">
+              <a:ext uri="{FF2B5EF4-FFF2-40B4-BE49-F238E27FC236}">
+                <a16:creationId xmlns:a16="http://schemas.microsoft.com/office/drawing/2014/main" id="{D21E8F50-BA1C-4536-B715-AAD5A74ED82B}"/>
+              </a:ext>
+            </a:extLst>
+          </p:cNvPr>
+          <p:cNvSpPr>
+            <a:spLocks xmlns:a="http://schemas.openxmlformats.org/drawingml/2006/main" noGrp="1"/>
+          </p:cNvSpPr>
+          <p:nvPr/>
+        </p:nvSpPr>
+        <p:spPr>
+          <a:xfrm xmlns:a="http://schemas.openxmlformats.org/drawingml/2006/main">
+            <a:off x="457200" y="228600"/>
+            <a:ext cx="4191000" cy="228600"/>
+          </a:xfrm>
+          <a:prstGeom xmlns:a="http://schemas.openxmlformats.org/drawingml/2006/main" prst="rect">
+            <a:avLst/>
+          </a:prstGeom>
+          <a:noFill xmlns:a="http://schemas.openxmlformats.org/drawingml/2006/main"/>
+          <a:ln xmlns:a="http://schemas.openxmlformats.org/drawingml/2006/main" w="0">
+            <a:noFill/>
+            <a:prstDash val="solid"/>
+          </a:ln>
+        </p:spPr>
+        <p:txBody>
+          <a:bodyPr xmlns:a="http://schemas.openxmlformats.org/drawingml/2006/main" wrap="square" lIns="0" tIns="0" rIns="0" bIns="0" anchor="t">
+            <a:normAutofit fontScale="100000"/>
+          </a:bodyPr>
+          <a:lstStyle xmlns:a="http://schemas.openxmlformats.org/drawingml/2006/main"/>
+          <a:p xmlns:a="http://schemas.openxmlformats.org/drawingml/2006/main">
+            <a:pPr algn="l">
+              <a:buNone/>
+              <a:defRPr sz="1200" b="1">
+                <a:solidFill>
+                  <a:srgbClr val="667384"/>
+                </a:solidFill>
+                <a:latin typeface="Arial"/>
+                <a:ea typeface="Arial"/>
+                <a:cs typeface="Arial"/>
+              </a:defRPr>
+            </a:pPr>
+            <a:r>
+              <a:rPr sz="1200" b="1">
+                <a:solidFill>
+                  <a:srgbClr val="667384"/>
+                </a:solidFill>
+                <a:latin typeface="Arial"/>
+                <a:ea typeface="Arial"/>
+                <a:cs typeface="Arial"/>
+              </a:rPr>
+              <a:t>TSLA DESCRIPTIVE MICROSCOPE</a:t>
+            </a:r>
+          </a:p>
+        </p:txBody>
+      </p:sp>
+      <p:sp>
+        <p:nvSpPr>
+          <p:cNvPr id="2" name="title-3">
+            <a:extLst xmlns:a="http://schemas.openxmlformats.org/drawingml/2006/main">
+              <a:ext uri="{FF2B5EF4-FFF2-40B4-BE49-F238E27FC236}">
+                <a16:creationId xmlns:a16="http://schemas.microsoft.com/office/drawing/2014/main" id="{622D00AB-54E7-40F8-BC73-9A3D2344F481}"/>
+              </a:ext>
+            </a:extLst>
+          </p:cNvPr>
+          <p:cNvSpPr>
+            <a:spLocks xmlns:a="http://schemas.openxmlformats.org/drawingml/2006/main" noGrp="1"/>
+          </p:cNvSpPr>
+          <p:nvPr/>
+        </p:nvSpPr>
+        <p:spPr>
+          <a:xfrm xmlns:a="http://schemas.openxmlformats.org/drawingml/2006/main">
+            <a:off x="457200" y="533400"/>
+            <a:ext cx="11277600" cy="628650"/>
+          </a:xfrm>
+          <a:prstGeom xmlns:a="http://schemas.openxmlformats.org/drawingml/2006/main" prst="rect">
+            <a:avLst/>
+          </a:prstGeom>
+          <a:noFill xmlns:a="http://schemas.openxmlformats.org/drawingml/2006/main"/>
+          <a:ln xmlns:a="http://schemas.openxmlformats.org/drawingml/2006/main" w="0">
+            <a:noFill/>
+            <a:prstDash val="solid"/>
+          </a:ln>
+        </p:spPr>
+        <p:txBody>
+          <a:bodyPr xmlns:a="http://schemas.openxmlformats.org/drawingml/2006/main" wrap="square" lIns="0" tIns="0" rIns="0" bIns="0" anchor="t">
+            <a:normAutofit fontScale="100000"/>
+          </a:bodyPr>
+          <a:lstStyle xmlns:a="http://schemas.openxmlformats.org/drawingml/2006/main"/>
+          <a:p xmlns:a="http://schemas.openxmlformats.org/drawingml/2006/main">
+            <a:pPr algn="l">
+              <a:buNone/>
+              <a:defRPr sz="3525" b="1">
+                <a:solidFill>
+                  <a:srgbClr val="000000"/>
+                </a:solidFill>
+                <a:latin typeface="Arial"/>
+                <a:ea typeface="Arial"/>
+                <a:cs typeface="Arial"/>
+              </a:defRPr>
+            </a:pPr>
+            <a:r>
+              <a:rPr sz="3525" b="1">
+                <a:solidFill>
+                  <a:srgbClr val="000000"/>
+                </a:solidFill>
+                <a:latin typeface="Arial"/>
+                <a:ea typeface="Arial"/>
+                <a:cs typeface="Arial"/>
+              </a:rPr>
+              <a:t>A fixed 9 x 9 surface tests aggregation</a:t>
+            </a:r>
+          </a:p>
+        </p:txBody>
+      </p:sp>
+      <p:sp>
+        <p:nvSpPr>
+          <p:cNvPr id="3" name="">
+            <a:extLst xmlns:a="http://schemas.openxmlformats.org/drawingml/2006/main">
+              <a:ext uri="{FF2B5EF4-FFF2-40B4-BE49-F238E27FC236}">
+                <a16:creationId xmlns:a16="http://schemas.microsoft.com/office/drawing/2014/main" id="{C3977435-894D-461F-A4F7-CD91DF8A8A55}"/>
+              </a:ext>
+            </a:extLst>
+          </p:cNvPr>
+          <p:cNvSpPr>
+            <a:spLocks xmlns:a="http://schemas.openxmlformats.org/drawingml/2006/main" noGrp="1"/>
+          </p:cNvSpPr>
+          <p:nvPr/>
+        </p:nvSpPr>
+        <p:spPr>
+          <a:xfrm xmlns:a="http://schemas.openxmlformats.org/drawingml/2006/main">
+            <a:off x="457200" y="1200150"/>
+            <a:ext cx="11277600" cy="19050"/>
+          </a:xfrm>
+          <a:prstGeom xmlns:a="http://schemas.openxmlformats.org/drawingml/2006/main" prst="rect">
+            <a:avLst/>
+          </a:prstGeom>
+          <a:solidFill xmlns:a="http://schemas.openxmlformats.org/drawingml/2006/main">
+            <a:srgbClr val="B8BCC4"/>
+          </a:solidFill>
+          <a:ln xmlns:a="http://schemas.openxmlformats.org/drawingml/2006/main" w="0">
+            <a:solidFill>
+              <a:srgbClr val="B8BCC4"/>
+            </a:solidFill>
+            <a:prstDash val="solid"/>
+          </a:ln>
+        </p:spPr>
+      </p:sp>
+      <p:sp>
+        <p:nvSpPr>
+          <p:cNvPr id="4" name="footer-left-3">
+            <a:extLst xmlns:a="http://schemas.openxmlformats.org/drawingml/2006/main">
+              <a:ext uri="{FF2B5EF4-FFF2-40B4-BE49-F238E27FC236}">
+                <a16:creationId xmlns:a16="http://schemas.microsoft.com/office/drawing/2014/main" id="{FC53CCFE-82C8-49A0-BC48-206B3BC8CC1B}"/>
+              </a:ext>
+            </a:extLst>
+          </p:cNvPr>
+          <p:cNvSpPr>
+            <a:spLocks xmlns:a="http://schemas.openxmlformats.org/drawingml/2006/main" noGrp="1"/>
+          </p:cNvSpPr>
+          <p:nvPr/>
+        </p:nvSpPr>
+        <p:spPr>
+          <a:xfrm xmlns:a="http://schemas.openxmlformats.org/drawingml/2006/main">
+            <a:off x="457200" y="6515100"/>
+            <a:ext cx="3429000" cy="171450"/>
+          </a:xfrm>
+          <a:prstGeom xmlns:a="http://schemas.openxmlformats.org/drawingml/2006/main" prst="rect">
+            <a:avLst/>
+          </a:prstGeom>
+          <a:noFill xmlns:a="http://schemas.openxmlformats.org/drawingml/2006/main"/>
+          <a:ln xmlns:a="http://schemas.openxmlformats.org/drawingml/2006/main" w="0">
+            <a:noFill/>
+            <a:prstDash val="solid"/>
+          </a:ln>
+        </p:spPr>
+        <p:txBody>
+          <a:bodyPr xmlns:a="http://schemas.openxmlformats.org/drawingml/2006/main" wrap="square" lIns="0" tIns="0" rIns="0" bIns="0" anchor="t">
+            <a:normAutofit fontScale="100000"/>
+          </a:bodyPr>
+          <a:lstStyle xmlns:a="http://schemas.openxmlformats.org/drawingml/2006/main"/>
+          <a:p xmlns:a="http://schemas.openxmlformats.org/drawingml/2006/main">
+            <a:pPr algn="l">
+              <a:buNone/>
+              <a:defRPr sz="1050" b="0">
+                <a:solidFill>
+                  <a:srgbClr val="667384"/>
+                </a:solidFill>
+                <a:latin typeface="Arial"/>
+                <a:ea typeface="Arial"/>
+                <a:cs typeface="Arial"/>
+              </a:defRPr>
+            </a:pPr>
+            <a:r>
+              <a:rPr sz="1050" b="0">
+                <a:solidFill>
+                  <a:srgbClr val="667384"/>
+                </a:solidFill>
+                <a:latin typeface="Arial"/>
+                <a:ea typeface="Arial"/>
+                <a:cs typeface="Arial"/>
+              </a:rPr>
+              <a:t>Adjusted daily TSLA | 2018-2023</a:t>
+            </a:r>
+          </a:p>
+        </p:txBody>
+      </p:sp>
+      <p:sp>
+        <p:nvSpPr>
+          <p:cNvPr id="5" name="footer-number-3">
+            <a:extLst xmlns:a="http://schemas.openxmlformats.org/drawingml/2006/main">
+              <a:ext uri="{FF2B5EF4-FFF2-40B4-BE49-F238E27FC236}">
+                <a16:creationId xmlns:a16="http://schemas.microsoft.com/office/drawing/2014/main" id="{B9F045FD-2505-4635-89F0-EDCD31EF4080}"/>
+              </a:ext>
+            </a:extLst>
+          </p:cNvPr>
+          <p:cNvSpPr>
+            <a:spLocks xmlns:a="http://schemas.openxmlformats.org/drawingml/2006/main" noGrp="1"/>
+          </p:cNvSpPr>
+          <p:nvPr/>
+        </p:nvSpPr>
+        <p:spPr>
+          <a:xfrm xmlns:a="http://schemas.openxmlformats.org/drawingml/2006/main">
+            <a:off x="11239500" y="6496050"/>
+            <a:ext cx="495300" cy="190500"/>
+          </a:xfrm>
+          <a:prstGeom xmlns:a="http://schemas.openxmlformats.org/drawingml/2006/main" prst="rect">
+            <a:avLst/>
+          </a:prstGeom>
+          <a:noFill xmlns:a="http://schemas.openxmlformats.org/drawingml/2006/main"/>
+          <a:ln xmlns:a="http://schemas.openxmlformats.org/drawingml/2006/main" w="0">
+            <a:noFill/>
+            <a:prstDash val="solid"/>
+          </a:ln>
+        </p:spPr>
+        <p:txBody>
+          <a:bodyPr xmlns:a="http://schemas.openxmlformats.org/drawingml/2006/main" wrap="square" lIns="0" tIns="0" rIns="0" bIns="0" anchor="t">
+            <a:normAutofit fontScale="100000"/>
+          </a:bodyPr>
+          <a:lstStyle xmlns:a="http://schemas.openxmlformats.org/drawingml/2006/main"/>
+          <a:p xmlns:a="http://schemas.openxmlformats.org/drawingml/2006/main">
+            <a:pPr algn="r">
+              <a:buNone/>
+              <a:defRPr sz="1050" b="0">
+                <a:solidFill>
+                  <a:srgbClr val="667384"/>
+                </a:solidFill>
+                <a:latin typeface="Arial"/>
+                <a:ea typeface="Arial"/>
+                <a:cs typeface="Arial"/>
+              </a:defRPr>
+            </a:pPr>
+            <a:r>
+              <a:rPr sz="1050" b="0">
+                <a:solidFill>
+                  <a:srgbClr val="667384"/>
+                </a:solidFill>
+                <a:latin typeface="Arial"/>
+                <a:ea typeface="Arial"/>
+                <a:cs typeface="Arial"/>
+              </a:rPr>
+              <a:t>13</a:t>
+            </a:r>
+          </a:p>
+        </p:txBody>
+      </p:sp>
+      <p:sp>
+        <p:nvSpPr>
+          <p:cNvPr id="6" name="">
+            <a:extLst xmlns:a="http://schemas.openxmlformats.org/drawingml/2006/main">
+              <a:ext uri="{FF2B5EF4-FFF2-40B4-BE49-F238E27FC236}">
+                <a16:creationId xmlns:a16="http://schemas.microsoft.com/office/drawing/2014/main" id="{551133C9-969B-4370-A80C-D9B73CA522F0}"/>
+              </a:ext>
+            </a:extLst>
+          </p:cNvPr>
+          <p:cNvSpPr>
+            <a:spLocks xmlns:a="http://schemas.openxmlformats.org/drawingml/2006/main" noGrp="1"/>
+          </p:cNvSpPr>
+          <p:nvPr/>
+        </p:nvSpPr>
+        <p:spPr>
+          <a:xfrm xmlns:a="http://schemas.openxmlformats.org/drawingml/2006/main">
+            <a:off x="628650" y="1752600"/>
+            <a:ext cx="5429250" cy="762000"/>
+          </a:xfrm>
+          <a:prstGeom xmlns:a="http://schemas.openxmlformats.org/drawingml/2006/main" prst="rect">
+            <a:avLst/>
+          </a:prstGeom>
+          <a:noFill xmlns:a="http://schemas.openxmlformats.org/drawingml/2006/main"/>
+          <a:ln xmlns:a="http://schemas.openxmlformats.org/drawingml/2006/main" w="0">
+            <a:noFill/>
+            <a:prstDash val="solid"/>
+          </a:ln>
+        </p:spPr>
+        <p:txBody>
+          <a:bodyPr xmlns:a="http://schemas.openxmlformats.org/drawingml/2006/main" wrap="square" lIns="0" tIns="0" rIns="0" bIns="0" anchor="t">
+            <a:normAutofit fontScale="100000"/>
+          </a:bodyPr>
+          <a:lstStyle xmlns:a="http://schemas.openxmlformats.org/drawingml/2006/main"/>
+          <a:p xmlns:a="http://schemas.openxmlformats.org/drawingml/2006/main">
+            <a:pPr algn="l">
+              <a:buNone/>
+              <a:defRPr sz="3300" b="1">
+                <a:solidFill>
+                  <a:srgbClr val="3D8DFF"/>
+                </a:solidFill>
+                <a:latin typeface="Arial"/>
+                <a:ea typeface="Arial"/>
+                <a:cs typeface="Arial"/>
+              </a:defRPr>
+            </a:pPr>
+            <a:r>
+              <a:rPr sz="3300" b="1">
+                <a:solidFill>
+                  <a:srgbClr val="3D8DFF"/>
+                </a:solidFill>
+                <a:latin typeface="Arial"/>
+                <a:ea typeface="Arial"/>
+                <a:cs typeface="Arial"/>
+              </a:rPr>
+              <a:t>R-(p)  versus  R+(f)</a:t>
+            </a:r>
+          </a:p>
+        </p:txBody>
+      </p:sp>
+      <p:sp>
+        <p:nvSpPr>
+          <p:cNvPr id="7" name="">
+            <a:extLst xmlns:a="http://schemas.openxmlformats.org/drawingml/2006/main">
+              <a:ext uri="{FF2B5EF4-FFF2-40B4-BE49-F238E27FC236}">
+                <a16:creationId xmlns:a16="http://schemas.microsoft.com/office/drawing/2014/main" id="{82D8EB97-B391-424E-82EB-0DEEC881C286}"/>
+              </a:ext>
+            </a:extLst>
+          </p:cNvPr>
+          <p:cNvSpPr>
+            <a:spLocks xmlns:a="http://schemas.openxmlformats.org/drawingml/2006/main" noGrp="1"/>
+          </p:cNvSpPr>
+          <p:nvPr/>
+        </p:nvSpPr>
+        <p:spPr>
+          <a:xfrm xmlns:a="http://schemas.openxmlformats.org/drawingml/2006/main">
+            <a:off x="628650" y="2724150"/>
+            <a:ext cx="5048250" cy="990600"/>
+          </a:xfrm>
+          <a:prstGeom xmlns:a="http://schemas.openxmlformats.org/drawingml/2006/main" prst="rect">
+            <a:avLst/>
+          </a:prstGeom>
+          <a:noFill xmlns:a="http://schemas.openxmlformats.org/drawingml/2006/main"/>
+          <a:ln xmlns:a="http://schemas.openxmlformats.org/drawingml/2006/main" w="0">
+            <a:noFill/>
+            <a:prstDash val="solid"/>
+          </a:ln>
+        </p:spPr>
+        <p:txBody>
+          <a:bodyPr xmlns:a="http://schemas.openxmlformats.org/drawingml/2006/main" wrap="square" lIns="0" tIns="0" rIns="0" bIns="0" anchor="t">
+            <a:normAutofit fontScale="100000"/>
+          </a:bodyPr>
+          <a:lstStyle xmlns:a="http://schemas.openxmlformats.org/drawingml/2006/main"/>
+          <a:p xmlns:a="http://schemas.openxmlformats.org/drawingml/2006/main">
+            <a:pPr algn="l">
+              <a:buNone/>
+              <a:defRPr sz="1875" b="0">
+                <a:solidFill>
+                  <a:srgbClr val="273548"/>
+                </a:solidFill>
+                <a:latin typeface="Arial"/>
+                <a:ea typeface="Arial"/>
+                <a:cs typeface="Arial"/>
+              </a:defRPr>
+            </a:pPr>
+            <a:r>
+              <a:rPr sz="1875" b="0">
+                <a:solidFill>
+                  <a:srgbClr val="273548"/>
+                </a:solidFill>
+                <a:latin typeface="Arial"/>
+                <a:ea typeface="Arial"/>
+                <a:cs typeface="Arial"/>
+              </a:rPr>
+              <a:t>The prior window ends at the anchor close. The forward window begins after it—no return interval appears on both sides.</a:t>
+            </a:r>
+          </a:p>
+        </p:txBody>
+      </p:sp>
+      <p:sp>
+        <p:nvSpPr>
+          <p:cNvPr id="8" name="">
+            <a:extLst xmlns:a="http://schemas.openxmlformats.org/drawingml/2006/main">
+              <a:ext uri="{FF2B5EF4-FFF2-40B4-BE49-F238E27FC236}">
+                <a16:creationId xmlns:a16="http://schemas.microsoft.com/office/drawing/2014/main" id="{8FD10794-EB76-4BB0-B74E-31375B660ECD}"/>
+              </a:ext>
+            </a:extLst>
+          </p:cNvPr>
+          <p:cNvSpPr>
+            <a:spLocks xmlns:a="http://schemas.openxmlformats.org/drawingml/2006/main" noGrp="1"/>
+          </p:cNvSpPr>
+          <p:nvPr/>
+        </p:nvSpPr>
+        <p:spPr>
+          <a:xfrm xmlns:a="http://schemas.openxmlformats.org/drawingml/2006/main">
+            <a:off x="628650" y="4095750"/>
+            <a:ext cx="4953000" cy="1695450"/>
+          </a:xfrm>
+          <a:prstGeom xmlns:a="http://schemas.openxmlformats.org/drawingml/2006/main" prst="rect">
+            <a:avLst/>
+          </a:prstGeom>
+          <a:solidFill xmlns:a="http://schemas.openxmlformats.org/drawingml/2006/main">
+            <a:srgbClr val="EDEDED"/>
+          </a:solidFill>
+          <a:ln xmlns:a="http://schemas.openxmlformats.org/drawingml/2006/main" w="0">
+            <a:solidFill>
+              <a:srgbClr val="EDEDED"/>
+            </a:solidFill>
+            <a:prstDash val="solid"/>
+          </a:ln>
+        </p:spPr>
+      </p:sp>
+      <p:sp>
+        <p:nvSpPr>
+          <p:cNvPr id="9" name="">
+            <a:extLst xmlns:a="http://schemas.openxmlformats.org/drawingml/2006/main">
+              <a:ext uri="{FF2B5EF4-FFF2-40B4-BE49-F238E27FC236}">
+                <a16:creationId xmlns:a16="http://schemas.microsoft.com/office/drawing/2014/main" id="{E8834C39-6D46-429B-A2ED-F97A068A843A}"/>
+              </a:ext>
+            </a:extLst>
+          </p:cNvPr>
+          <p:cNvSpPr>
+            <a:spLocks xmlns:a="http://schemas.openxmlformats.org/drawingml/2006/main" noGrp="1"/>
+          </p:cNvSpPr>
+          <p:nvPr/>
+        </p:nvSpPr>
+        <p:spPr>
+          <a:xfrm xmlns:a="http://schemas.openxmlformats.org/drawingml/2006/main">
+            <a:off x="628650" y="4095750"/>
+            <a:ext cx="76200" cy="1695450"/>
+          </a:xfrm>
+          <a:prstGeom xmlns:a="http://schemas.openxmlformats.org/drawingml/2006/main" prst="rect">
+            <a:avLst/>
+          </a:prstGeom>
+          <a:solidFill xmlns:a="http://schemas.openxmlformats.org/drawingml/2006/main">
+            <a:srgbClr val="3D8DFF"/>
+          </a:solidFill>
+          <a:ln xmlns:a="http://schemas.openxmlformats.org/drawingml/2006/main" w="0">
+            <a:solidFill>
+              <a:srgbClr val="3D8DFF"/>
+            </a:solidFill>
+            <a:prstDash val="solid"/>
+          </a:ln>
+        </p:spPr>
+      </p:sp>
+      <p:sp>
+        <p:nvSpPr>
+          <p:cNvPr id="10" name="">
+            <a:extLst xmlns:a="http://schemas.openxmlformats.org/drawingml/2006/main">
+              <a:ext uri="{FF2B5EF4-FFF2-40B4-BE49-F238E27FC236}">
+                <a16:creationId xmlns:a16="http://schemas.microsoft.com/office/drawing/2014/main" id="{743D83BD-5D8C-4BCB-B02F-81EB74163C70}"/>
+              </a:ext>
+            </a:extLst>
+          </p:cNvPr>
+          <p:cNvSpPr>
+            <a:spLocks xmlns:a="http://schemas.openxmlformats.org/drawingml/2006/main" noGrp="1"/>
+          </p:cNvSpPr>
+          <p:nvPr/>
+        </p:nvSpPr>
+        <p:spPr>
+          <a:xfrm xmlns:a="http://schemas.openxmlformats.org/drawingml/2006/main">
+            <a:off x="895350" y="4267200"/>
+            <a:ext cx="4495800" cy="590550"/>
+          </a:xfrm>
+          <a:prstGeom xmlns:a="http://schemas.openxmlformats.org/drawingml/2006/main" prst="rect">
+            <a:avLst/>
+          </a:prstGeom>
+          <a:noFill xmlns:a="http://schemas.openxmlformats.org/drawingml/2006/main"/>
+          <a:ln xmlns:a="http://schemas.openxmlformats.org/drawingml/2006/main" w="0">
+            <a:noFill/>
+            <a:prstDash val="solid"/>
+          </a:ln>
+        </p:spPr>
+        <p:txBody>
+          <a:bodyPr xmlns:a="http://schemas.openxmlformats.org/drawingml/2006/main" wrap="square" lIns="0" tIns="0" rIns="0" bIns="0" anchor="t">
+            <a:normAutofit fontScale="100000"/>
+          </a:bodyPr>
+          <a:lstStyle xmlns:a="http://schemas.openxmlformats.org/drawingml/2006/main"/>
+          <a:p xmlns:a="http://schemas.openxmlformats.org/drawingml/2006/main">
+            <a:pPr algn="l">
+              <a:buNone/>
+              <a:defRPr sz="3225" b="1">
+                <a:solidFill>
+                  <a:srgbClr val="3D8DFF"/>
+                </a:solidFill>
+                <a:latin typeface="Arial"/>
+                <a:ea typeface="Arial"/>
+                <a:cs typeface="Arial"/>
+              </a:defRPr>
+            </a:pPr>
+            <a:r>
+              <a:rPr sz="3225" b="1">
+                <a:solidFill>
+                  <a:srgbClr val="3D8DFF"/>
+                </a:solidFill>
+                <a:latin typeface="Arial"/>
+                <a:ea typeface="Arial"/>
+                <a:cs typeface="Arial"/>
+              </a:rPr>
+              <a:t>81</a:t>
+            </a:r>
+          </a:p>
+        </p:txBody>
+      </p:sp>
+      <p:sp>
+        <p:nvSpPr>
+          <p:cNvPr id="11" name="">
+            <a:extLst xmlns:a="http://schemas.openxmlformats.org/drawingml/2006/main">
+              <a:ext uri="{FF2B5EF4-FFF2-40B4-BE49-F238E27FC236}">
+                <a16:creationId xmlns:a16="http://schemas.microsoft.com/office/drawing/2014/main" id="{ED88569D-B256-4A8E-9334-C068F39865EA}"/>
+              </a:ext>
+            </a:extLst>
+          </p:cNvPr>
+          <p:cNvSpPr>
+            <a:spLocks xmlns:a="http://schemas.openxmlformats.org/drawingml/2006/main" noGrp="1"/>
+          </p:cNvSpPr>
+          <p:nvPr/>
+        </p:nvSpPr>
+        <p:spPr>
+          <a:xfrm xmlns:a="http://schemas.openxmlformats.org/drawingml/2006/main">
+            <a:off x="895350" y="4933950"/>
+            <a:ext cx="4495800" cy="704850"/>
+          </a:xfrm>
+          <a:prstGeom xmlns:a="http://schemas.openxmlformats.org/drawingml/2006/main" prst="rect">
+            <a:avLst/>
+          </a:prstGeom>
+          <a:noFill xmlns:a="http://schemas.openxmlformats.org/drawingml/2006/main"/>
+          <a:ln xmlns:a="http://schemas.openxmlformats.org/drawingml/2006/main" w="0">
+            <a:noFill/>
+            <a:prstDash val="solid"/>
+          </a:ln>
+        </p:spPr>
+        <p:txBody>
+          <a:bodyPr xmlns:a="http://schemas.openxmlformats.org/drawingml/2006/main" wrap="square" lIns="0" tIns="0" rIns="0" bIns="0" anchor="t">
+            <a:normAutofit fontScale="100000"/>
+          </a:bodyPr>
+          <a:lstStyle xmlns:a="http://schemas.openxmlformats.org/drawingml/2006/main"/>
+          <a:p xmlns:a="http://schemas.openxmlformats.org/drawingml/2006/main">
+            <a:pPr algn="l">
+              <a:buNone/>
+              <a:defRPr sz="1350" b="0">
+                <a:solidFill>
+                  <a:srgbClr val="273548"/>
+                </a:solidFill>
+                <a:latin typeface="Arial"/>
+                <a:ea typeface="Arial"/>
+                <a:cs typeface="Arial"/>
+              </a:defRPr>
+            </a:pPr>
+            <a:r>
+              <a:rPr sz="1350" b="0">
+                <a:solidFill>
+                  <a:srgbClr val="273548"/>
+                </a:solidFill>
+                <a:latin typeface="Arial"/>
+                <a:ea typeface="Arial"/>
+                <a:cs typeface="Arial"/>
+              </a:rPr>
+              <a:t>predeclared horizon pairs</a:t>
+            </a:r>
+          </a:p>
+        </p:txBody>
+      </p:sp>
+      <p:sp>
+        <p:nvSpPr>
+          <p:cNvPr id="12" name="">
+            <a:extLst xmlns:a="http://schemas.openxmlformats.org/drawingml/2006/main">
+              <a:ext uri="{FF2B5EF4-FFF2-40B4-BE49-F238E27FC236}">
+                <a16:creationId xmlns:a16="http://schemas.microsoft.com/office/drawing/2014/main" id="{1139CAED-155E-4498-A477-F11A6F4A02F8}"/>
+              </a:ext>
+            </a:extLst>
+          </p:cNvPr>
+          <p:cNvSpPr>
+            <a:spLocks xmlns:a="http://schemas.openxmlformats.org/drawingml/2006/main" noGrp="1"/>
+          </p:cNvSpPr>
+          <p:nvPr/>
+        </p:nvSpPr>
+        <p:spPr>
+          <a:xfrm xmlns:a="http://schemas.openxmlformats.org/drawingml/2006/main">
+            <a:off x="6667500" y="1676400"/>
+            <a:ext cx="4191000" cy="400050"/>
+          </a:xfrm>
+          <a:prstGeom xmlns:a="http://schemas.openxmlformats.org/drawingml/2006/main" prst="rect">
+            <a:avLst/>
+          </a:prstGeom>
+          <a:noFill xmlns:a="http://schemas.openxmlformats.org/drawingml/2006/main"/>
+          <a:ln xmlns:a="http://schemas.openxmlformats.org/drawingml/2006/main" w="0">
+            <a:noFill/>
+            <a:prstDash val="solid"/>
+          </a:ln>
+        </p:spPr>
+        <p:txBody>
+          <a:bodyPr xmlns:a="http://schemas.openxmlformats.org/drawingml/2006/main" wrap="square" lIns="0" tIns="0" rIns="0" bIns="0" anchor="t">
+            <a:normAutofit fontScale="100000"/>
+          </a:bodyPr>
+          <a:lstStyle xmlns:a="http://schemas.openxmlformats.org/drawingml/2006/main"/>
+          <a:p xmlns:a="http://schemas.openxmlformats.org/drawingml/2006/main">
+            <a:pPr algn="l">
+              <a:buNone/>
+              <a:defRPr sz="2250" b="1">
+                <a:solidFill>
+                  <a:srgbClr val="000000"/>
+                </a:solidFill>
+                <a:latin typeface="Arial"/>
+                <a:ea typeface="Arial"/>
+                <a:cs typeface="Arial"/>
+              </a:defRPr>
+            </a:pPr>
+            <a:r>
+              <a:rPr sz="2250" b="1">
+                <a:solidFill>
+                  <a:srgbClr val="000000"/>
+                </a:solidFill>
+                <a:latin typeface="Arial"/>
+                <a:ea typeface="Arial"/>
+                <a:cs typeface="Arial"/>
+              </a:rPr>
+              <a:t>Fixed boundaries</a:t>
+            </a:r>
+          </a:p>
+        </p:txBody>
+      </p:sp>
+      <p:sp>
+        <p:nvSpPr>
+          <p:cNvPr id="13" name="">
+            <a:extLst xmlns:a="http://schemas.openxmlformats.org/drawingml/2006/main">
+              <a:ext uri="{FF2B5EF4-FFF2-40B4-BE49-F238E27FC236}">
+                <a16:creationId xmlns:a16="http://schemas.microsoft.com/office/drawing/2014/main" id="{09D8E2E5-6744-4962-977E-E85B48910BDF}"/>
+              </a:ext>
+            </a:extLst>
+          </p:cNvPr>
+          <p:cNvSpPr>
+            <a:spLocks xmlns:a="http://schemas.openxmlformats.org/drawingml/2006/main" noGrp="1"/>
+          </p:cNvSpPr>
+          <p:nvPr/>
+        </p:nvSpPr>
+        <p:spPr>
+          <a:xfrm xmlns:a="http://schemas.openxmlformats.org/drawingml/2006/main">
+            <a:off x="6667500" y="2286000"/>
+            <a:ext cx="1809750" cy="323850"/>
+          </a:xfrm>
+          <a:prstGeom xmlns:a="http://schemas.openxmlformats.org/drawingml/2006/main" prst="rect">
+            <a:avLst/>
+          </a:prstGeom>
+          <a:noFill xmlns:a="http://schemas.openxmlformats.org/drawingml/2006/main"/>
+          <a:ln xmlns:a="http://schemas.openxmlformats.org/drawingml/2006/main" w="0">
+            <a:noFill/>
+            <a:prstDash val="solid"/>
+          </a:ln>
+        </p:spPr>
+        <p:txBody>
+          <a:bodyPr xmlns:a="http://schemas.openxmlformats.org/drawingml/2006/main" wrap="square" lIns="0" tIns="0" rIns="0" bIns="0" anchor="t">
+            <a:normAutofit fontScale="100000"/>
+          </a:bodyPr>
+          <a:lstStyle xmlns:a="http://schemas.openxmlformats.org/drawingml/2006/main"/>
+          <a:p xmlns:a="http://schemas.openxmlformats.org/drawingml/2006/main">
+            <a:pPr algn="l">
+              <a:buNone/>
+              <a:defRPr sz="1500" b="1">
+                <a:solidFill>
+                  <a:srgbClr val="667384"/>
+                </a:solidFill>
+                <a:latin typeface="Arial"/>
+                <a:ea typeface="Arial"/>
+                <a:cs typeface="Arial"/>
+              </a:defRPr>
+            </a:pPr>
+            <a:r>
+              <a:rPr sz="1500" b="1">
+                <a:solidFill>
+                  <a:srgbClr val="667384"/>
+                </a:solidFill>
+                <a:latin typeface="Arial"/>
+                <a:ea typeface="Arial"/>
+                <a:cs typeface="Arial"/>
+              </a:rPr>
+              <a:t>Asset</a:t>
+            </a:r>
+          </a:p>
+        </p:txBody>
+      </p:sp>
+      <p:sp>
+        <p:nvSpPr>
+          <p:cNvPr id="14" name="">
+            <a:extLst xmlns:a="http://schemas.openxmlformats.org/drawingml/2006/main">
+              <a:ext uri="{FF2B5EF4-FFF2-40B4-BE49-F238E27FC236}">
+                <a16:creationId xmlns:a16="http://schemas.microsoft.com/office/drawing/2014/main" id="{60FD2958-8D30-49E2-9398-075A839B2785}"/>
+              </a:ext>
+            </a:extLst>
+          </p:cNvPr>
+          <p:cNvSpPr>
+            <a:spLocks xmlns:a="http://schemas.openxmlformats.org/drawingml/2006/main" noGrp="1"/>
+          </p:cNvSpPr>
+          <p:nvPr/>
+        </p:nvSpPr>
+        <p:spPr>
+          <a:xfrm xmlns:a="http://schemas.openxmlformats.org/drawingml/2006/main">
+            <a:off x="8572500" y="2286000"/>
+            <a:ext cx="2952750" cy="419100"/>
+          </a:xfrm>
+          <a:prstGeom xmlns:a="http://schemas.openxmlformats.org/drawingml/2006/main" prst="rect">
+            <a:avLst/>
+          </a:prstGeom>
+          <a:noFill xmlns:a="http://schemas.openxmlformats.org/drawingml/2006/main"/>
+          <a:ln xmlns:a="http://schemas.openxmlformats.org/drawingml/2006/main" w="0">
+            <a:noFill/>
+            <a:prstDash val="solid"/>
+          </a:ln>
+        </p:spPr>
+        <p:txBody>
+          <a:bodyPr xmlns:a="http://schemas.openxmlformats.org/drawingml/2006/main" wrap="square" lIns="0" tIns="0" rIns="0" bIns="0" anchor="t">
+            <a:normAutofit fontScale="100000"/>
+          </a:bodyPr>
+          <a:lstStyle xmlns:a="http://schemas.openxmlformats.org/drawingml/2006/main"/>
+          <a:p xmlns:a="http://schemas.openxmlformats.org/drawingml/2006/main">
+            <a:pPr algn="l">
+              <a:buNone/>
+              <a:defRPr sz="1500" b="0">
+                <a:solidFill>
+                  <a:srgbClr val="273548"/>
+                </a:solidFill>
+                <a:latin typeface="Arial"/>
+                <a:ea typeface="Arial"/>
+                <a:cs typeface="Arial"/>
+              </a:defRPr>
+            </a:pPr>
+            <a:r>
+              <a:rPr sz="1500" b="0">
+                <a:solidFill>
+                  <a:srgbClr val="273548"/>
+                </a:solidFill>
+                <a:latin typeface="Arial"/>
+                <a:ea typeface="Arial"/>
+                <a:cs typeface="Arial"/>
+              </a:rPr>
+              <a:t>TSLA</a:t>
+            </a:r>
+          </a:p>
+        </p:txBody>
+      </p:sp>
+      <p:sp>
+        <p:nvSpPr>
+          <p:cNvPr id="15" name="">
+            <a:extLst xmlns:a="http://schemas.openxmlformats.org/drawingml/2006/main">
+              <a:ext uri="{FF2B5EF4-FFF2-40B4-BE49-F238E27FC236}">
+                <a16:creationId xmlns:a16="http://schemas.microsoft.com/office/drawing/2014/main" id="{B5F0B4C3-3792-489F-A37E-FD53597FE449}"/>
+              </a:ext>
+            </a:extLst>
+          </p:cNvPr>
+          <p:cNvSpPr>
+            <a:spLocks xmlns:a="http://schemas.openxmlformats.org/drawingml/2006/main" noGrp="1"/>
+          </p:cNvSpPr>
+          <p:nvPr/>
+        </p:nvSpPr>
+        <p:spPr>
+          <a:xfrm xmlns:a="http://schemas.openxmlformats.org/drawingml/2006/main">
+            <a:off x="6667500" y="2743200"/>
+            <a:ext cx="4857750" cy="9525"/>
+          </a:xfrm>
+          <a:prstGeom xmlns:a="http://schemas.openxmlformats.org/drawingml/2006/main" prst="rect">
+            <a:avLst/>
+          </a:prstGeom>
+          <a:solidFill xmlns:a="http://schemas.openxmlformats.org/drawingml/2006/main">
+            <a:srgbClr val="B8BCC4"/>
+          </a:solidFill>
+          <a:ln xmlns:a="http://schemas.openxmlformats.org/drawingml/2006/main" w="0">
+            <a:solidFill>
+              <a:srgbClr val="B8BCC4"/>
+            </a:solidFill>
+            <a:prstDash val="solid"/>
+          </a:ln>
+        </p:spPr>
+      </p:sp>
+      <p:sp>
+        <p:nvSpPr>
+          <p:cNvPr id="16" name="">
+            <a:extLst xmlns:a="http://schemas.openxmlformats.org/drawingml/2006/main">
+              <a:ext uri="{FF2B5EF4-FFF2-40B4-BE49-F238E27FC236}">
+                <a16:creationId xmlns:a16="http://schemas.microsoft.com/office/drawing/2014/main" id="{1F168646-6439-4EB2-88F0-0C08EDC14E3F}"/>
+              </a:ext>
+            </a:extLst>
+          </p:cNvPr>
+          <p:cNvSpPr>
+            <a:spLocks xmlns:a="http://schemas.openxmlformats.org/drawingml/2006/main" noGrp="1"/>
+          </p:cNvSpPr>
+          <p:nvPr/>
+        </p:nvSpPr>
+        <p:spPr>
+          <a:xfrm xmlns:a="http://schemas.openxmlformats.org/drawingml/2006/main">
+            <a:off x="6667500" y="2876550"/>
+            <a:ext cx="1809750" cy="323850"/>
+          </a:xfrm>
+          <a:prstGeom xmlns:a="http://schemas.openxmlformats.org/drawingml/2006/main" prst="rect">
+            <a:avLst/>
+          </a:prstGeom>
+          <a:noFill xmlns:a="http://schemas.openxmlformats.org/drawingml/2006/main"/>
+          <a:ln xmlns:a="http://schemas.openxmlformats.org/drawingml/2006/main" w="0">
+            <a:noFill/>
+            <a:prstDash val="solid"/>
+          </a:ln>
+        </p:spPr>
+        <p:txBody>
+          <a:bodyPr xmlns:a="http://schemas.openxmlformats.org/drawingml/2006/main" wrap="square" lIns="0" tIns="0" rIns="0" bIns="0" anchor="t">
+            <a:normAutofit fontScale="100000"/>
+          </a:bodyPr>
+          <a:lstStyle xmlns:a="http://schemas.openxmlformats.org/drawingml/2006/main"/>
+          <a:p xmlns:a="http://schemas.openxmlformats.org/drawingml/2006/main">
+            <a:pPr algn="l">
+              <a:buNone/>
+              <a:defRPr sz="1500" b="1">
+                <a:solidFill>
+                  <a:srgbClr val="667384"/>
+                </a:solidFill>
+                <a:latin typeface="Arial"/>
+                <a:ea typeface="Arial"/>
+                <a:cs typeface="Arial"/>
+              </a:defRPr>
+            </a:pPr>
+            <a:r>
+              <a:rPr sz="1500" b="1">
+                <a:solidFill>
+                  <a:srgbClr val="667384"/>
+                </a:solidFill>
+                <a:latin typeface="Arial"/>
+                <a:ea typeface="Arial"/>
+                <a:cs typeface="Arial"/>
+              </a:rPr>
+              <a:t>Bars</a:t>
+            </a:r>
+          </a:p>
+        </p:txBody>
+      </p:sp>
+      <p:sp>
+        <p:nvSpPr>
+          <p:cNvPr id="17" name="">
+            <a:extLst xmlns:a="http://schemas.openxmlformats.org/drawingml/2006/main">
+              <a:ext uri="{FF2B5EF4-FFF2-40B4-BE49-F238E27FC236}">
+                <a16:creationId xmlns:a16="http://schemas.microsoft.com/office/drawing/2014/main" id="{5CE87A9A-C6B3-4232-84C2-9C442CAD9C05}"/>
+              </a:ext>
+            </a:extLst>
+          </p:cNvPr>
+          <p:cNvSpPr>
+            <a:spLocks xmlns:a="http://schemas.openxmlformats.org/drawingml/2006/main" noGrp="1"/>
+          </p:cNvSpPr>
+          <p:nvPr/>
+        </p:nvSpPr>
+        <p:spPr>
+          <a:xfrm xmlns:a="http://schemas.openxmlformats.org/drawingml/2006/main">
+            <a:off x="8572500" y="2876550"/>
+            <a:ext cx="2952750" cy="419100"/>
+          </a:xfrm>
+          <a:prstGeom xmlns:a="http://schemas.openxmlformats.org/drawingml/2006/main" prst="rect">
+            <a:avLst/>
+          </a:prstGeom>
+          <a:noFill xmlns:a="http://schemas.openxmlformats.org/drawingml/2006/main"/>
+          <a:ln xmlns:a="http://schemas.openxmlformats.org/drawingml/2006/main" w="0">
+            <a:noFill/>
+            <a:prstDash val="solid"/>
+          </a:ln>
+        </p:spPr>
+        <p:txBody>
+          <a:bodyPr xmlns:a="http://schemas.openxmlformats.org/drawingml/2006/main" wrap="square" lIns="0" tIns="0" rIns="0" bIns="0" anchor="t">
+            <a:normAutofit fontScale="100000"/>
+          </a:bodyPr>
+          <a:lstStyle xmlns:a="http://schemas.openxmlformats.org/drawingml/2006/main"/>
+          <a:p xmlns:a="http://schemas.openxmlformats.org/drawingml/2006/main">
+            <a:pPr algn="l">
+              <a:buNone/>
+              <a:defRPr sz="1500" b="0">
+                <a:solidFill>
+                  <a:srgbClr val="273548"/>
+                </a:solidFill>
+                <a:latin typeface="Arial"/>
+                <a:ea typeface="Arial"/>
+                <a:cs typeface="Arial"/>
+              </a:defRPr>
+            </a:pPr>
+            <a:r>
+              <a:rPr sz="1500" b="0">
+                <a:solidFill>
+                  <a:srgbClr val="273548"/>
+                </a:solidFill>
+                <a:latin typeface="Arial"/>
+                <a:ea typeface="Arial"/>
+                <a:cs typeface="Arial"/>
+              </a:rPr>
+              <a:t>Alpaca SIP adjusted daily close</a:t>
+            </a:r>
+          </a:p>
+        </p:txBody>
+      </p:sp>
+      <p:sp>
+        <p:nvSpPr>
+          <p:cNvPr id="18" name="">
+            <a:extLst xmlns:a="http://schemas.openxmlformats.org/drawingml/2006/main">
+              <a:ext uri="{FF2B5EF4-FFF2-40B4-BE49-F238E27FC236}">
+                <a16:creationId xmlns:a16="http://schemas.microsoft.com/office/drawing/2014/main" id="{4C822C36-1982-4EF0-A9F3-89DAA8EAA125}"/>
+              </a:ext>
+            </a:extLst>
+          </p:cNvPr>
+          <p:cNvSpPr>
+            <a:spLocks xmlns:a="http://schemas.openxmlformats.org/drawingml/2006/main" noGrp="1"/>
+          </p:cNvSpPr>
+          <p:nvPr/>
+        </p:nvSpPr>
+        <p:spPr>
+          <a:xfrm xmlns:a="http://schemas.openxmlformats.org/drawingml/2006/main">
+            <a:off x="6667500" y="3333750"/>
+            <a:ext cx="4857750" cy="9525"/>
+          </a:xfrm>
+          <a:prstGeom xmlns:a="http://schemas.openxmlformats.org/drawingml/2006/main" prst="rect">
+            <a:avLst/>
+          </a:prstGeom>
+          <a:solidFill xmlns:a="http://schemas.openxmlformats.org/drawingml/2006/main">
+            <a:srgbClr val="B8BCC4"/>
+          </a:solidFill>
+          <a:ln xmlns:a="http://schemas.openxmlformats.org/drawingml/2006/main" w="0">
+            <a:solidFill>
+              <a:srgbClr val="B8BCC4"/>
+            </a:solidFill>
+            <a:prstDash val="solid"/>
+          </a:ln>
+        </p:spPr>
+      </p:sp>
+      <p:sp>
+        <p:nvSpPr>
+          <p:cNvPr id="19" name="">
+            <a:extLst xmlns:a="http://schemas.openxmlformats.org/drawingml/2006/main">
+              <a:ext uri="{FF2B5EF4-FFF2-40B4-BE49-F238E27FC236}">
+                <a16:creationId xmlns:a16="http://schemas.microsoft.com/office/drawing/2014/main" id="{FFA764C4-9BB1-4E82-A1F0-6E930868FEC3}"/>
+              </a:ext>
+            </a:extLst>
+          </p:cNvPr>
+          <p:cNvSpPr>
+            <a:spLocks xmlns:a="http://schemas.openxmlformats.org/drawingml/2006/main" noGrp="1"/>
+          </p:cNvSpPr>
+          <p:nvPr/>
+        </p:nvSpPr>
+        <p:spPr>
+          <a:xfrm xmlns:a="http://schemas.openxmlformats.org/drawingml/2006/main">
+            <a:off x="6667500" y="3467100"/>
+            <a:ext cx="1809750" cy="323850"/>
+          </a:xfrm>
+          <a:prstGeom xmlns:a="http://schemas.openxmlformats.org/drawingml/2006/main" prst="rect">
+            <a:avLst/>
+          </a:prstGeom>
+          <a:noFill xmlns:a="http://schemas.openxmlformats.org/drawingml/2006/main"/>
+          <a:ln xmlns:a="http://schemas.openxmlformats.org/drawingml/2006/main" w="0">
+            <a:noFill/>
+            <a:prstDash val="solid"/>
+          </a:ln>
+        </p:spPr>
+        <p:txBody>
+          <a:bodyPr xmlns:a="http://schemas.openxmlformats.org/drawingml/2006/main" wrap="square" lIns="0" tIns="0" rIns="0" bIns="0" anchor="t">
+            <a:normAutofit fontScale="100000"/>
+          </a:bodyPr>
+          <a:lstStyle xmlns:a="http://schemas.openxmlformats.org/drawingml/2006/main"/>
+          <a:p xmlns:a="http://schemas.openxmlformats.org/drawingml/2006/main">
+            <a:pPr algn="l">
+              <a:buNone/>
+              <a:defRPr sz="1500" b="1">
+                <a:solidFill>
+                  <a:srgbClr val="667384"/>
+                </a:solidFill>
+                <a:latin typeface="Arial"/>
+                <a:ea typeface="Arial"/>
+                <a:cs typeface="Arial"/>
+              </a:defRPr>
+            </a:pPr>
+            <a:r>
+              <a:rPr sz="1500" b="1">
+                <a:solidFill>
+                  <a:srgbClr val="667384"/>
+                </a:solidFill>
+                <a:latin typeface="Arial"/>
+                <a:ea typeface="Arial"/>
+                <a:cs typeface="Arial"/>
+              </a:rPr>
+              <a:t>Horizons</a:t>
+            </a:r>
+          </a:p>
+        </p:txBody>
+      </p:sp>
+      <p:sp>
+        <p:nvSpPr>
+          <p:cNvPr id="20" name="">
+            <a:extLst xmlns:a="http://schemas.openxmlformats.org/drawingml/2006/main">
+              <a:ext uri="{FF2B5EF4-FFF2-40B4-BE49-F238E27FC236}">
+                <a16:creationId xmlns:a16="http://schemas.microsoft.com/office/drawing/2014/main" id="{62A04E11-771F-482D-97D0-41D18323CD03}"/>
+              </a:ext>
+            </a:extLst>
+          </p:cNvPr>
+          <p:cNvSpPr>
+            <a:spLocks xmlns:a="http://schemas.openxmlformats.org/drawingml/2006/main" noGrp="1"/>
+          </p:cNvSpPr>
+          <p:nvPr/>
+        </p:nvSpPr>
+        <p:spPr>
+          <a:xfrm xmlns:a="http://schemas.openxmlformats.org/drawingml/2006/main">
+            <a:off x="8572500" y="3467100"/>
+            <a:ext cx="2952750" cy="419100"/>
+          </a:xfrm>
+          <a:prstGeom xmlns:a="http://schemas.openxmlformats.org/drawingml/2006/main" prst="rect">
+            <a:avLst/>
+          </a:prstGeom>
+          <a:noFill xmlns:a="http://schemas.openxmlformats.org/drawingml/2006/main"/>
+          <a:ln xmlns:a="http://schemas.openxmlformats.org/drawingml/2006/main" w="0">
+            <a:noFill/>
+            <a:prstDash val="solid"/>
+          </a:ln>
+        </p:spPr>
+        <p:txBody>
+          <a:bodyPr xmlns:a="http://schemas.openxmlformats.org/drawingml/2006/main" wrap="square" lIns="0" tIns="0" rIns="0" bIns="0" anchor="t">
+            <a:normAutofit fontScale="100000"/>
+          </a:bodyPr>
+          <a:lstStyle xmlns:a="http://schemas.openxmlformats.org/drawingml/2006/main"/>
+          <a:p xmlns:a="http://schemas.openxmlformats.org/drawingml/2006/main">
+            <a:pPr algn="l">
+              <a:buNone/>
+              <a:defRPr sz="1500" b="0">
+                <a:solidFill>
+                  <a:srgbClr val="273548"/>
+                </a:solidFill>
+                <a:latin typeface="Arial"/>
+                <a:ea typeface="Arial"/>
+                <a:cs typeface="Arial"/>
+              </a:defRPr>
+            </a:pPr>
+            <a:r>
+              <a:rPr sz="1500" b="0">
+                <a:solidFill>
+                  <a:srgbClr val="273548"/>
+                </a:solidFill>
+                <a:latin typeface="Arial"/>
+                <a:ea typeface="Arial"/>
+                <a:cs typeface="Arial"/>
+              </a:rPr>
+              <a:t>1, 2, 3, 4, 5, 10, 15, 20, 25</a:t>
+            </a:r>
+          </a:p>
+        </p:txBody>
+      </p:sp>
+      <p:sp>
+        <p:nvSpPr>
+          <p:cNvPr id="21" name="">
+            <a:extLst xmlns:a="http://schemas.openxmlformats.org/drawingml/2006/main">
+              <a:ext uri="{FF2B5EF4-FFF2-40B4-BE49-F238E27FC236}">
+                <a16:creationId xmlns:a16="http://schemas.microsoft.com/office/drawing/2014/main" id="{2AEA1D46-2EB0-459D-9313-BA82DEAD9553}"/>
+              </a:ext>
+            </a:extLst>
+          </p:cNvPr>
+          <p:cNvSpPr>
+            <a:spLocks xmlns:a="http://schemas.openxmlformats.org/drawingml/2006/main" noGrp="1"/>
+          </p:cNvSpPr>
+          <p:nvPr/>
+        </p:nvSpPr>
+        <p:spPr>
+          <a:xfrm xmlns:a="http://schemas.openxmlformats.org/drawingml/2006/main">
+            <a:off x="6667500" y="3924300"/>
+            <a:ext cx="4857750" cy="9525"/>
+          </a:xfrm>
+          <a:prstGeom xmlns:a="http://schemas.openxmlformats.org/drawingml/2006/main" prst="rect">
+            <a:avLst/>
+          </a:prstGeom>
+          <a:solidFill xmlns:a="http://schemas.openxmlformats.org/drawingml/2006/main">
+            <a:srgbClr val="B8BCC4"/>
+          </a:solidFill>
+          <a:ln xmlns:a="http://schemas.openxmlformats.org/drawingml/2006/main" w="0">
+            <a:solidFill>
+              <a:srgbClr val="B8BCC4"/>
+            </a:solidFill>
+            <a:prstDash val="solid"/>
+          </a:ln>
+        </p:spPr>
+      </p:sp>
+      <p:sp>
+        <p:nvSpPr>
+          <p:cNvPr id="22" name="">
+            <a:extLst xmlns:a="http://schemas.openxmlformats.org/drawingml/2006/main">
+              <a:ext uri="{FF2B5EF4-FFF2-40B4-BE49-F238E27FC236}">
+                <a16:creationId xmlns:a16="http://schemas.microsoft.com/office/drawing/2014/main" id="{AAD0A15B-41F8-429C-8446-F9003B5B4E6F}"/>
+              </a:ext>
+            </a:extLst>
+          </p:cNvPr>
+          <p:cNvSpPr>
+            <a:spLocks xmlns:a="http://schemas.openxmlformats.org/drawingml/2006/main" noGrp="1"/>
+          </p:cNvSpPr>
+          <p:nvPr/>
+        </p:nvSpPr>
+        <p:spPr>
+          <a:xfrm xmlns:a="http://schemas.openxmlformats.org/drawingml/2006/main">
+            <a:off x="6667500" y="4057650"/>
+            <a:ext cx="1809750" cy="323850"/>
+          </a:xfrm>
+          <a:prstGeom xmlns:a="http://schemas.openxmlformats.org/drawingml/2006/main" prst="rect">
+            <a:avLst/>
+          </a:prstGeom>
+          <a:noFill xmlns:a="http://schemas.openxmlformats.org/drawingml/2006/main"/>
+          <a:ln xmlns:a="http://schemas.openxmlformats.org/drawingml/2006/main" w="0">
+            <a:noFill/>
+            <a:prstDash val="solid"/>
+          </a:ln>
+        </p:spPr>
+        <p:txBody>
+          <a:bodyPr xmlns:a="http://schemas.openxmlformats.org/drawingml/2006/main" wrap="square" lIns="0" tIns="0" rIns="0" bIns="0" anchor="t">
+            <a:normAutofit fontScale="100000"/>
+          </a:bodyPr>
+          <a:lstStyle xmlns:a="http://schemas.openxmlformats.org/drawingml/2006/main"/>
+          <a:p xmlns:a="http://schemas.openxmlformats.org/drawingml/2006/main">
+            <a:pPr algn="l">
+              <a:buNone/>
+              <a:defRPr sz="1500" b="1">
+                <a:solidFill>
+                  <a:srgbClr val="667384"/>
+                </a:solidFill>
+                <a:latin typeface="Arial"/>
+                <a:ea typeface="Arial"/>
+                <a:cs typeface="Arial"/>
+              </a:defRPr>
+            </a:pPr>
+            <a:r>
+              <a:rPr sz="1500" b="1">
+                <a:solidFill>
+                  <a:srgbClr val="667384"/>
+                </a:solidFill>
+                <a:latin typeface="Arial"/>
+                <a:ea typeface="Arial"/>
+                <a:cs typeface="Arial"/>
+              </a:rPr>
+              <a:t>Sample</a:t>
+            </a:r>
+          </a:p>
+        </p:txBody>
+      </p:sp>
+      <p:sp>
+        <p:nvSpPr>
+          <p:cNvPr id="23" name="">
+            <a:extLst xmlns:a="http://schemas.openxmlformats.org/drawingml/2006/main">
+              <a:ext uri="{FF2B5EF4-FFF2-40B4-BE49-F238E27FC236}">
+                <a16:creationId xmlns:a16="http://schemas.microsoft.com/office/drawing/2014/main" id="{A13F5128-0043-4265-B48A-E7E4E9B6F96C}"/>
+              </a:ext>
+            </a:extLst>
+          </p:cNvPr>
+          <p:cNvSpPr>
+            <a:spLocks xmlns:a="http://schemas.openxmlformats.org/drawingml/2006/main" noGrp="1"/>
+          </p:cNvSpPr>
+          <p:nvPr/>
+        </p:nvSpPr>
+        <p:spPr>
+          <a:xfrm xmlns:a="http://schemas.openxmlformats.org/drawingml/2006/main">
+            <a:off x="8572500" y="4057650"/>
+            <a:ext cx="2952750" cy="419100"/>
+          </a:xfrm>
+          <a:prstGeom xmlns:a="http://schemas.openxmlformats.org/drawingml/2006/main" prst="rect">
+            <a:avLst/>
+          </a:prstGeom>
+          <a:noFill xmlns:a="http://schemas.openxmlformats.org/drawingml/2006/main"/>
+          <a:ln xmlns:a="http://schemas.openxmlformats.org/drawingml/2006/main" w="0">
+            <a:noFill/>
+            <a:prstDash val="solid"/>
+          </a:ln>
+        </p:spPr>
+        <p:txBody>
+          <a:bodyPr xmlns:a="http://schemas.openxmlformats.org/drawingml/2006/main" wrap="square" lIns="0" tIns="0" rIns="0" bIns="0" anchor="t">
+            <a:normAutofit fontScale="100000"/>
+          </a:bodyPr>
+          <a:lstStyle xmlns:a="http://schemas.openxmlformats.org/drawingml/2006/main"/>
+          <a:p xmlns:a="http://schemas.openxmlformats.org/drawingml/2006/main">
+            <a:pPr algn="l">
+              <a:buNone/>
+              <a:defRPr sz="1500" b="0">
+                <a:solidFill>
+                  <a:srgbClr val="273548"/>
+                </a:solidFill>
+                <a:latin typeface="Arial"/>
+                <a:ea typeface="Arial"/>
+                <a:cs typeface="Arial"/>
+              </a:defRPr>
+            </a:pPr>
+            <a:r>
+              <a:rPr sz="1500" b="0">
+                <a:solidFill>
+                  <a:srgbClr val="273548"/>
+                </a:solidFill>
+                <a:latin typeface="Arial"/>
+                <a:ea typeface="Arial"/>
+                <a:cs typeface="Arial"/>
+              </a:rPr>
+              <a:t>2018-01-02 through 2023-12-29</a:t>
+            </a:r>
+          </a:p>
+        </p:txBody>
+      </p:sp>
+      <p:sp>
+        <p:nvSpPr>
+          <p:cNvPr id="24" name="">
+            <a:extLst xmlns:a="http://schemas.openxmlformats.org/drawingml/2006/main">
+              <a:ext uri="{FF2B5EF4-FFF2-40B4-BE49-F238E27FC236}">
+                <a16:creationId xmlns:a16="http://schemas.microsoft.com/office/drawing/2014/main" id="{1BB63F79-B572-4EF7-8C82-E4140C6E382C}"/>
+              </a:ext>
+            </a:extLst>
+          </p:cNvPr>
+          <p:cNvSpPr>
+            <a:spLocks xmlns:a="http://schemas.openxmlformats.org/drawingml/2006/main" noGrp="1"/>
+          </p:cNvSpPr>
+          <p:nvPr/>
+        </p:nvSpPr>
+        <p:spPr>
+          <a:xfrm xmlns:a="http://schemas.openxmlformats.org/drawingml/2006/main">
+            <a:off x="6667500" y="4514850"/>
+            <a:ext cx="4857750" cy="9525"/>
+          </a:xfrm>
+          <a:prstGeom xmlns:a="http://schemas.openxmlformats.org/drawingml/2006/main" prst="rect">
+            <a:avLst/>
+          </a:prstGeom>
+          <a:solidFill xmlns:a="http://schemas.openxmlformats.org/drawingml/2006/main">
+            <a:srgbClr val="B8BCC4"/>
+          </a:solidFill>
+          <a:ln xmlns:a="http://schemas.openxmlformats.org/drawingml/2006/main" w="0">
+            <a:solidFill>
+              <a:srgbClr val="B8BCC4"/>
+            </a:solidFill>
+            <a:prstDash val="solid"/>
+          </a:ln>
+        </p:spPr>
+      </p:sp>
+      <p:sp>
+        <p:nvSpPr>
+          <p:cNvPr id="25" name="">
+            <a:extLst xmlns:a="http://schemas.openxmlformats.org/drawingml/2006/main">
+              <a:ext uri="{FF2B5EF4-FFF2-40B4-BE49-F238E27FC236}">
+                <a16:creationId xmlns:a16="http://schemas.microsoft.com/office/drawing/2014/main" id="{F58FD0A4-5938-4ECC-AC99-491391233E24}"/>
+              </a:ext>
+            </a:extLst>
+          </p:cNvPr>
+          <p:cNvSpPr>
+            <a:spLocks xmlns:a="http://schemas.openxmlformats.org/drawingml/2006/main" noGrp="1"/>
+          </p:cNvSpPr>
+          <p:nvPr/>
+        </p:nvSpPr>
+        <p:spPr>
+          <a:xfrm xmlns:a="http://schemas.openxmlformats.org/drawingml/2006/main">
+            <a:off x="6667500" y="4648200"/>
+            <a:ext cx="1809750" cy="323850"/>
+          </a:xfrm>
+          <a:prstGeom xmlns:a="http://schemas.openxmlformats.org/drawingml/2006/main" prst="rect">
+            <a:avLst/>
+          </a:prstGeom>
+          <a:noFill xmlns:a="http://schemas.openxmlformats.org/drawingml/2006/main"/>
+          <a:ln xmlns:a="http://schemas.openxmlformats.org/drawingml/2006/main" w="0">
+            <a:noFill/>
+            <a:prstDash val="solid"/>
+          </a:ln>
+        </p:spPr>
+        <p:txBody>
+          <a:bodyPr xmlns:a="http://schemas.openxmlformats.org/drawingml/2006/main" wrap="square" lIns="0" tIns="0" rIns="0" bIns="0" anchor="t">
+            <a:normAutofit fontScale="100000"/>
+          </a:bodyPr>
+          <a:lstStyle xmlns:a="http://schemas.openxmlformats.org/drawingml/2006/main"/>
+          <a:p xmlns:a="http://schemas.openxmlformats.org/drawingml/2006/main">
+            <a:pPr algn="l">
+              <a:buNone/>
+              <a:defRPr sz="1500" b="1">
+                <a:solidFill>
+                  <a:srgbClr val="667384"/>
+                </a:solidFill>
+                <a:latin typeface="Arial"/>
+                <a:ea typeface="Arial"/>
+                <a:cs typeface="Arial"/>
+              </a:defRPr>
+            </a:pPr>
+            <a:r>
+              <a:rPr sz="1500" b="1">
+                <a:solidFill>
+                  <a:srgbClr val="667384"/>
+                </a:solidFill>
+                <a:latin typeface="Arial"/>
+                <a:ea typeface="Arial"/>
+                <a:cs typeface="Arial"/>
+              </a:rPr>
+              <a:t>Uncertainty</a:t>
+            </a:r>
+          </a:p>
+        </p:txBody>
+      </p:sp>
+      <p:sp>
+        <p:nvSpPr>
+          <p:cNvPr id="26" name="">
+            <a:extLst xmlns:a="http://schemas.openxmlformats.org/drawingml/2006/main">
+              <a:ext uri="{FF2B5EF4-FFF2-40B4-BE49-F238E27FC236}">
+                <a16:creationId xmlns:a16="http://schemas.microsoft.com/office/drawing/2014/main" id="{AA292260-C22B-4C56-9ED9-C8744785B552}"/>
+              </a:ext>
+            </a:extLst>
+          </p:cNvPr>
+          <p:cNvSpPr>
+            <a:spLocks xmlns:a="http://schemas.openxmlformats.org/drawingml/2006/main" noGrp="1"/>
+          </p:cNvSpPr>
+          <p:nvPr/>
+        </p:nvSpPr>
+        <p:spPr>
+          <a:xfrm xmlns:a="http://schemas.openxmlformats.org/drawingml/2006/main">
+            <a:off x="8572500" y="4648200"/>
+            <a:ext cx="2952750" cy="419100"/>
+          </a:xfrm>
+          <a:prstGeom xmlns:a="http://schemas.openxmlformats.org/drawingml/2006/main" prst="rect">
+            <a:avLst/>
+          </a:prstGeom>
+          <a:noFill xmlns:a="http://schemas.openxmlformats.org/drawingml/2006/main"/>
+          <a:ln xmlns:a="http://schemas.openxmlformats.org/drawingml/2006/main" w="0">
+            <a:noFill/>
+            <a:prstDash val="solid"/>
+          </a:ln>
+        </p:spPr>
+        <p:txBody>
+          <a:bodyPr xmlns:a="http://schemas.openxmlformats.org/drawingml/2006/main" wrap="square" lIns="0" tIns="0" rIns="0" bIns="0" anchor="t">
+            <a:normAutofit fontScale="100000"/>
+          </a:bodyPr>
+          <a:lstStyle xmlns:a="http://schemas.openxmlformats.org/drawingml/2006/main"/>
+          <a:p xmlns:a="http://schemas.openxmlformats.org/drawingml/2006/main">
+            <a:pPr algn="l">
+              <a:buNone/>
+              <a:defRPr sz="1500" b="0">
+                <a:solidFill>
+                  <a:srgbClr val="273548"/>
+                </a:solidFill>
+                <a:latin typeface="Arial"/>
+                <a:ea typeface="Arial"/>
+                <a:cs typeface="Arial"/>
+              </a:defRPr>
+            </a:pPr>
+            <a:r>
+              <a:rPr sz="1500" b="0">
+                <a:solidFill>
+                  <a:srgbClr val="273548"/>
+                </a:solidFill>
+                <a:latin typeface="Arial"/>
+                <a:ea typeface="Arial"/>
+                <a:cs typeface="Arial"/>
+              </a:rPr>
+              <a:t>Overlap-aware Newey-West / HAC</a:t>
+            </a:r>
+          </a:p>
+        </p:txBody>
+      </p:sp>
+      <p:sp>
+        <p:nvSpPr>
+          <p:cNvPr id="27" name="">
+            <a:extLst xmlns:a="http://schemas.openxmlformats.org/drawingml/2006/main">
+              <a:ext uri="{FF2B5EF4-FFF2-40B4-BE49-F238E27FC236}">
+                <a16:creationId xmlns:a16="http://schemas.microsoft.com/office/drawing/2014/main" id="{6C617A11-8542-47F5-AD42-16C68CB863E7}"/>
+              </a:ext>
+            </a:extLst>
+          </p:cNvPr>
+          <p:cNvSpPr>
+            <a:spLocks xmlns:a="http://schemas.openxmlformats.org/drawingml/2006/main" noGrp="1"/>
+          </p:cNvSpPr>
+          <p:nvPr/>
+        </p:nvSpPr>
+        <p:spPr>
+          <a:xfrm xmlns:a="http://schemas.openxmlformats.org/drawingml/2006/main">
+            <a:off x="6667500" y="5105400"/>
+            <a:ext cx="4857750" cy="9525"/>
+          </a:xfrm>
+          <a:prstGeom xmlns:a="http://schemas.openxmlformats.org/drawingml/2006/main" prst="rect">
+            <a:avLst/>
+          </a:prstGeom>
+          <a:solidFill xmlns:a="http://schemas.openxmlformats.org/drawingml/2006/main">
+            <a:srgbClr val="B8BCC4"/>
+          </a:solidFill>
+          <a:ln xmlns:a="http://schemas.openxmlformats.org/drawingml/2006/main" w="0">
+            <a:solidFill>
+              <a:srgbClr val="B8BCC4"/>
+            </a:solidFill>
+            <a:prstDash val="solid"/>
+          </a:ln>
+        </p:spPr>
+      </p:sp>
+      <p:sp>
+        <p:nvSpPr>
+          <p:cNvPr id="28" name="">
+            <a:extLst xmlns:a="http://schemas.openxmlformats.org/drawingml/2006/main">
+              <a:ext uri="{FF2B5EF4-FFF2-40B4-BE49-F238E27FC236}">
+                <a16:creationId xmlns:a16="http://schemas.microsoft.com/office/drawing/2014/main" id="{D3258514-91F0-4BFE-BE7D-A95A1C826021}"/>
+              </a:ext>
+            </a:extLst>
+          </p:cNvPr>
+          <p:cNvSpPr>
+            <a:spLocks xmlns:a="http://schemas.openxmlformats.org/drawingml/2006/main" noGrp="1"/>
+          </p:cNvSpPr>
+          <p:nvPr/>
+        </p:nvSpPr>
+        <p:spPr>
+          <a:xfrm xmlns:a="http://schemas.openxmlformats.org/drawingml/2006/main">
+            <a:off x="6667500" y="5238750"/>
+            <a:ext cx="1809750" cy="323850"/>
+          </a:xfrm>
+          <a:prstGeom xmlns:a="http://schemas.openxmlformats.org/drawingml/2006/main" prst="rect">
+            <a:avLst/>
+          </a:prstGeom>
+          <a:noFill xmlns:a="http://schemas.openxmlformats.org/drawingml/2006/main"/>
+          <a:ln xmlns:a="http://schemas.openxmlformats.org/drawingml/2006/main" w="0">
+            <a:noFill/>
+            <a:prstDash val="solid"/>
+          </a:ln>
+        </p:spPr>
+        <p:txBody>
+          <a:bodyPr xmlns:a="http://schemas.openxmlformats.org/drawingml/2006/main" wrap="square" lIns="0" tIns="0" rIns="0" bIns="0" anchor="t">
+            <a:normAutofit fontScale="100000"/>
+          </a:bodyPr>
+          <a:lstStyle xmlns:a="http://schemas.openxmlformats.org/drawingml/2006/main"/>
+          <a:p xmlns:a="http://schemas.openxmlformats.org/drawingml/2006/main">
+            <a:pPr algn="l">
+              <a:buNone/>
+              <a:defRPr sz="1500" b="1">
+                <a:solidFill>
+                  <a:srgbClr val="667384"/>
+                </a:solidFill>
+                <a:latin typeface="Arial"/>
+                <a:ea typeface="Arial"/>
+                <a:cs typeface="Arial"/>
+              </a:defRPr>
+            </a:pPr>
+            <a:r>
+              <a:rPr sz="1500" b="1">
+                <a:solidFill>
+                  <a:srgbClr val="667384"/>
+                </a:solidFill>
+                <a:latin typeface="Arial"/>
+                <a:ea typeface="Arial"/>
+                <a:cs typeface="Arial"/>
+              </a:rPr>
+              <a:t>Multiplicity</a:t>
+            </a:r>
+          </a:p>
+        </p:txBody>
+      </p:sp>
+      <p:sp>
+        <p:nvSpPr>
+          <p:cNvPr id="29" name="">
+            <a:extLst xmlns:a="http://schemas.openxmlformats.org/drawingml/2006/main">
+              <a:ext uri="{FF2B5EF4-FFF2-40B4-BE49-F238E27FC236}">
+                <a16:creationId xmlns:a16="http://schemas.microsoft.com/office/drawing/2014/main" id="{F73C58E3-8C22-4D23-8076-93E173576113}"/>
+              </a:ext>
+            </a:extLst>
+          </p:cNvPr>
+          <p:cNvSpPr>
+            <a:spLocks xmlns:a="http://schemas.openxmlformats.org/drawingml/2006/main" noGrp="1"/>
+          </p:cNvSpPr>
+          <p:nvPr/>
+        </p:nvSpPr>
+        <p:spPr>
+          <a:xfrm xmlns:a="http://schemas.openxmlformats.org/drawingml/2006/main">
+            <a:off x="8572500" y="5238750"/>
+            <a:ext cx="2952750" cy="419100"/>
+          </a:xfrm>
+          <a:prstGeom xmlns:a="http://schemas.openxmlformats.org/drawingml/2006/main" prst="rect">
+            <a:avLst/>
+          </a:prstGeom>
+          <a:noFill xmlns:a="http://schemas.openxmlformats.org/drawingml/2006/main"/>
+          <a:ln xmlns:a="http://schemas.openxmlformats.org/drawingml/2006/main" w="0">
+            <a:noFill/>
+            <a:prstDash val="solid"/>
+          </a:ln>
+        </p:spPr>
+        <p:txBody>
+          <a:bodyPr xmlns:a="http://schemas.openxmlformats.org/drawingml/2006/main" wrap="square" lIns="0" tIns="0" rIns="0" bIns="0" anchor="t">
+            <a:normAutofit fontScale="91667"/>
+          </a:bodyPr>
+          <a:lstStyle xmlns:a="http://schemas.openxmlformats.org/drawingml/2006/main"/>
+          <a:p xmlns:a="http://schemas.openxmlformats.org/drawingml/2006/main">
+            <a:pPr algn="l">
+              <a:buNone/>
+              <a:defRPr sz="1500" b="0">
+                <a:solidFill>
+                  <a:srgbClr val="273548"/>
+                </a:solidFill>
+                <a:latin typeface="Arial"/>
+                <a:ea typeface="Arial"/>
+                <a:cs typeface="Arial"/>
+              </a:defRPr>
+            </a:pPr>
+            <a:r>
+              <a:rPr sz="1500" b="0">
+                <a:solidFill>
+                  <a:srgbClr val="273548"/>
+                </a:solidFill>
+                <a:latin typeface="Arial"/>
+                <a:ea typeface="Arial"/>
+                <a:cs typeface="Arial"/>
+              </a:rPr>
+              <a:t>BH-FDR plus Bonferroni across 81 cells</a:t>
+            </a:r>
+          </a:p>
+        </p:txBody>
+      </p:sp>
+    </p:spTree>
+    <p:extLst>
+      <p:ext uri="{BB962C8B-B14F-4D97-AF65-F5344CB8AC3E}">
+        <p14:creationId xmlns:p14="http://schemas.microsoft.com/office/powerpoint/2010/main" val="1397283360"/>
+      </p:ext>
+    </p:extLst>
+  </p:cSld>
+</p:sld>
+</file>
+
+<file path=ppt/slides/slide14.xml><?xml version="1.0" encoding="utf-8"?>
+<p:sld xmlns:p="http://schemas.openxmlformats.org/presentationml/2006/main">
+  <p:cSld>
+    <p:bg>
+      <p:bgPr>
+        <a:solidFill xmlns:a="http://schemas.openxmlformats.org/drawingml/2006/main">
+          <a:srgbClr val="FFFFFF"/>
+        </a:solidFill>
+      </p:bgPr>
+    </p:bg>
+    <p:spTree>
+      <p:nvGrpSpPr>
+        <p:cNvPr id="1" name=""/>
+        <p:cNvGrpSpPr/>
+        <p:nvPr/>
+      </p:nvGrpSpPr>
+      <p:grpSpPr>
+        <a:xfrm xmlns:a="http://schemas.openxmlformats.org/drawingml/2006/main"/>
+      </p:grpSpPr>
+      <p:sp>
+        <p:nvSpPr>
+          <p:cNvPr id="9" name="section-4">
+            <a:extLst xmlns:a="http://schemas.openxmlformats.org/drawingml/2006/main">
+              <a:ext uri="{FF2B5EF4-FFF2-40B4-BE49-F238E27FC236}">
+                <a16:creationId xmlns:a16="http://schemas.microsoft.com/office/drawing/2014/main" id="{8AE0A271-669A-49F0-A82E-C4438BEE27D9}"/>
+              </a:ext>
+            </a:extLst>
+          </p:cNvPr>
+          <p:cNvSpPr>
+            <a:spLocks xmlns:a="http://schemas.openxmlformats.org/drawingml/2006/main" noGrp="1"/>
+          </p:cNvSpPr>
+          <p:nvPr/>
+        </p:nvSpPr>
+        <p:spPr>
+          <a:xfrm xmlns:a="http://schemas.openxmlformats.org/drawingml/2006/main">
+            <a:off x="457200" y="228600"/>
+            <a:ext cx="4191000" cy="228600"/>
+          </a:xfrm>
+          <a:prstGeom xmlns:a="http://schemas.openxmlformats.org/drawingml/2006/main" prst="rect">
+            <a:avLst/>
+          </a:prstGeom>
+          <a:noFill xmlns:a="http://schemas.openxmlformats.org/drawingml/2006/main"/>
+          <a:ln xmlns:a="http://schemas.openxmlformats.org/drawingml/2006/main" w="0">
+            <a:noFill/>
+            <a:prstDash val="solid"/>
+          </a:ln>
+        </p:spPr>
+        <p:txBody>
+          <a:bodyPr xmlns:a="http://schemas.openxmlformats.org/drawingml/2006/main" wrap="square" lIns="0" tIns="0" rIns="0" bIns="0" anchor="t">
+            <a:normAutofit fontScale="100000"/>
+          </a:bodyPr>
+          <a:lstStyle xmlns:a="http://schemas.openxmlformats.org/drawingml/2006/main"/>
+          <a:p xmlns:a="http://schemas.openxmlformats.org/drawingml/2006/main">
+            <a:pPr algn="l">
+              <a:buNone/>
+              <a:defRPr sz="1200" b="1">
+                <a:solidFill>
+                  <a:srgbClr val="667384"/>
+                </a:solidFill>
+                <a:latin typeface="Arial"/>
+                <a:ea typeface="Arial"/>
+                <a:cs typeface="Arial"/>
+              </a:defRPr>
+            </a:pPr>
+            <a:r>
+              <a:rPr sz="1200" b="1">
+                <a:solidFill>
+                  <a:srgbClr val="667384"/>
+                </a:solidFill>
+                <a:latin typeface="Arial"/>
+                <a:ea typeface="Arial"/>
+                <a:cs typeface="Arial"/>
+              </a:rPr>
+              <a:t>TSLA DESCRIPTIVE MICROSCOPE</a:t>
+            </a:r>
+          </a:p>
+        </p:txBody>
+      </p:sp>
+      <p:sp>
+        <p:nvSpPr>
+          <p:cNvPr id="2" name="title-4">
+            <a:extLst xmlns:a="http://schemas.openxmlformats.org/drawingml/2006/main">
+              <a:ext uri="{FF2B5EF4-FFF2-40B4-BE49-F238E27FC236}">
+                <a16:creationId xmlns:a16="http://schemas.microsoft.com/office/drawing/2014/main" id="{50C6F92F-721A-4252-9CF8-B5C9B01C7310}"/>
+              </a:ext>
+            </a:extLst>
+          </p:cNvPr>
+          <p:cNvSpPr>
+            <a:spLocks xmlns:a="http://schemas.openxmlformats.org/drawingml/2006/main" noGrp="1"/>
+          </p:cNvSpPr>
+          <p:nvPr/>
+        </p:nvSpPr>
+        <p:spPr>
+          <a:xfrm xmlns:a="http://schemas.openxmlformats.org/drawingml/2006/main">
+            <a:off x="457200" y="533400"/>
+            <a:ext cx="11277600" cy="628650"/>
+          </a:xfrm>
+          <a:prstGeom xmlns:a="http://schemas.openxmlformats.org/drawingml/2006/main" prst="rect">
+            <a:avLst/>
+          </a:prstGeom>
+          <a:noFill xmlns:a="http://schemas.openxmlformats.org/drawingml/2006/main"/>
+          <a:ln xmlns:a="http://schemas.openxmlformats.org/drawingml/2006/main" w="0">
+            <a:noFill/>
+            <a:prstDash val="solid"/>
+          </a:ln>
+        </p:spPr>
+        <p:txBody>
+          <a:bodyPr xmlns:a="http://schemas.openxmlformats.org/drawingml/2006/main" wrap="square" lIns="0" tIns="0" rIns="0" bIns="0" anchor="t">
+            <a:normAutofit fontScale="100000"/>
+          </a:bodyPr>
+          <a:lstStyle xmlns:a="http://schemas.openxmlformats.org/drawingml/2006/main"/>
+          <a:p xmlns:a="http://schemas.openxmlformats.org/drawingml/2006/main">
+            <a:pPr algn="l">
+              <a:buNone/>
+              <a:defRPr sz="3525" b="1">
+                <a:solidFill>
+                  <a:srgbClr val="000000"/>
+                </a:solidFill>
+                <a:latin typeface="Arial"/>
+                <a:ea typeface="Arial"/>
+                <a:cs typeface="Arial"/>
+              </a:defRPr>
+            </a:pPr>
+            <a:r>
+              <a:rPr sz="3525" b="1">
+                <a:solidFill>
+                  <a:srgbClr val="000000"/>
+                </a:solidFill>
+                <a:latin typeface="Arial"/>
+                <a:ea typeface="Arial"/>
+                <a:cs typeface="Arial"/>
+              </a:rPr>
+              <a:t>Aggregation reveals a weak 5–10-session ridge</a:t>
+            </a:r>
+          </a:p>
+        </p:txBody>
+      </p:sp>
+      <p:sp>
+        <p:nvSpPr>
+          <p:cNvPr id="3" name="">
+            <a:extLst xmlns:a="http://schemas.openxmlformats.org/drawingml/2006/main">
+              <a:ext uri="{FF2B5EF4-FFF2-40B4-BE49-F238E27FC236}">
+                <a16:creationId xmlns:a16="http://schemas.microsoft.com/office/drawing/2014/main" id="{242399F2-4D0A-4337-B17E-DB3599DC380F}"/>
+              </a:ext>
+            </a:extLst>
+          </p:cNvPr>
+          <p:cNvSpPr>
+            <a:spLocks xmlns:a="http://schemas.openxmlformats.org/drawingml/2006/main" noGrp="1"/>
+          </p:cNvSpPr>
+          <p:nvPr/>
+        </p:nvSpPr>
+        <p:spPr>
+          <a:xfrm xmlns:a="http://schemas.openxmlformats.org/drawingml/2006/main">
+            <a:off x="457200" y="1200150"/>
+            <a:ext cx="11277600" cy="19050"/>
+          </a:xfrm>
+          <a:prstGeom xmlns:a="http://schemas.openxmlformats.org/drawingml/2006/main" prst="rect">
+            <a:avLst/>
+          </a:prstGeom>
+          <a:solidFill xmlns:a="http://schemas.openxmlformats.org/drawingml/2006/main">
+            <a:srgbClr val="B8BCC4"/>
+          </a:solidFill>
+          <a:ln xmlns:a="http://schemas.openxmlformats.org/drawingml/2006/main" w="0">
+            <a:solidFill>
+              <a:srgbClr val="B8BCC4"/>
+            </a:solidFill>
+            <a:prstDash val="solid"/>
+          </a:ln>
+        </p:spPr>
+      </p:sp>
+      <p:sp>
+        <p:nvSpPr>
+          <p:cNvPr id="4" name="footer-left-4">
+            <a:extLst xmlns:a="http://schemas.openxmlformats.org/drawingml/2006/main">
+              <a:ext uri="{FF2B5EF4-FFF2-40B4-BE49-F238E27FC236}">
+                <a16:creationId xmlns:a16="http://schemas.microsoft.com/office/drawing/2014/main" id="{BF8B82CA-1E48-4669-BAD8-1FF8C09FCBFB}"/>
+              </a:ext>
+            </a:extLst>
+          </p:cNvPr>
+          <p:cNvSpPr>
+            <a:spLocks xmlns:a="http://schemas.openxmlformats.org/drawingml/2006/main" noGrp="1"/>
+          </p:cNvSpPr>
+          <p:nvPr/>
+        </p:nvSpPr>
+        <p:spPr>
+          <a:xfrm xmlns:a="http://schemas.openxmlformats.org/drawingml/2006/main">
+            <a:off x="457200" y="6515100"/>
+            <a:ext cx="3429000" cy="171450"/>
+          </a:xfrm>
+          <a:prstGeom xmlns:a="http://schemas.openxmlformats.org/drawingml/2006/main" prst="rect">
+            <a:avLst/>
+          </a:prstGeom>
+          <a:noFill xmlns:a="http://schemas.openxmlformats.org/drawingml/2006/main"/>
+          <a:ln xmlns:a="http://schemas.openxmlformats.org/drawingml/2006/main" w="0">
+            <a:noFill/>
+            <a:prstDash val="solid"/>
+          </a:ln>
+        </p:spPr>
+        <p:txBody>
+          <a:bodyPr xmlns:a="http://schemas.openxmlformats.org/drawingml/2006/main" wrap="square" lIns="0" tIns="0" rIns="0" bIns="0" anchor="t">
+            <a:normAutofit fontScale="100000"/>
+          </a:bodyPr>
+          <a:lstStyle xmlns:a="http://schemas.openxmlformats.org/drawingml/2006/main"/>
+          <a:p xmlns:a="http://schemas.openxmlformats.org/drawingml/2006/main">
+            <a:pPr algn="l">
+              <a:buNone/>
+              <a:defRPr sz="1050" b="0">
+                <a:solidFill>
+                  <a:srgbClr val="667384"/>
+                </a:solidFill>
+                <a:latin typeface="Arial"/>
+                <a:ea typeface="Arial"/>
+                <a:cs typeface="Arial"/>
+              </a:defRPr>
+            </a:pPr>
+            <a:r>
+              <a:rPr sz="1050" b="0">
+                <a:solidFill>
+                  <a:srgbClr val="667384"/>
+                </a:solidFill>
+                <a:latin typeface="Arial"/>
+                <a:ea typeface="Arial"/>
+                <a:cs typeface="Arial"/>
+              </a:rPr>
+              <a:t>Adjusted daily TSLA | 2018-2023</a:t>
+            </a:r>
+          </a:p>
+        </p:txBody>
+      </p:sp>
+      <p:sp>
+        <p:nvSpPr>
+          <p:cNvPr id="5" name="footer-number-4">
+            <a:extLst xmlns:a="http://schemas.openxmlformats.org/drawingml/2006/main">
+              <a:ext uri="{FF2B5EF4-FFF2-40B4-BE49-F238E27FC236}">
+                <a16:creationId xmlns:a16="http://schemas.microsoft.com/office/drawing/2014/main" id="{05959AEC-B0A5-45F0-A65B-C94C3E5A032F}"/>
+              </a:ext>
+            </a:extLst>
+          </p:cNvPr>
+          <p:cNvSpPr>
+            <a:spLocks xmlns:a="http://schemas.openxmlformats.org/drawingml/2006/main" noGrp="1"/>
+          </p:cNvSpPr>
+          <p:nvPr/>
+        </p:nvSpPr>
+        <p:spPr>
+          <a:xfrm xmlns:a="http://schemas.openxmlformats.org/drawingml/2006/main">
+            <a:off x="11239500" y="6496050"/>
+            <a:ext cx="495300" cy="190500"/>
+          </a:xfrm>
+          <a:prstGeom xmlns:a="http://schemas.openxmlformats.org/drawingml/2006/main" prst="rect">
+            <a:avLst/>
+          </a:prstGeom>
+          <a:noFill xmlns:a="http://schemas.openxmlformats.org/drawingml/2006/main"/>
+          <a:ln xmlns:a="http://schemas.openxmlformats.org/drawingml/2006/main" w="0">
+            <a:noFill/>
+            <a:prstDash val="solid"/>
+          </a:ln>
+        </p:spPr>
+        <p:txBody>
+          <a:bodyPr xmlns:a="http://schemas.openxmlformats.org/drawingml/2006/main" wrap="square" lIns="0" tIns="0" rIns="0" bIns="0" anchor="t">
+            <a:normAutofit fontScale="100000"/>
+          </a:bodyPr>
+          <a:lstStyle xmlns:a="http://schemas.openxmlformats.org/drawingml/2006/main"/>
+          <a:p xmlns:a="http://schemas.openxmlformats.org/drawingml/2006/main">
+            <a:pPr algn="r">
+              <a:buNone/>
+              <a:defRPr sz="1050" b="0">
+                <a:solidFill>
+                  <a:srgbClr val="667384"/>
+                </a:solidFill>
+                <a:latin typeface="Arial"/>
+                <a:ea typeface="Arial"/>
+                <a:cs typeface="Arial"/>
+              </a:defRPr>
+            </a:pPr>
+            <a:r>
+              <a:rPr sz="1050" b="0">
+                <a:solidFill>
+                  <a:srgbClr val="667384"/>
+                </a:solidFill>
+                <a:latin typeface="Arial"/>
+                <a:ea typeface="Arial"/>
+                <a:cs typeface="Arial"/>
+              </a:rPr>
+              <a:t>14</a:t>
+            </a:r>
+          </a:p>
+        </p:txBody>
+      </p:sp>
+      <p:sp>
+        <p:nvSpPr>
+          <p:cNvPr id="6" name="">
+            <a:extLst xmlns:a="http://schemas.openxmlformats.org/drawingml/2006/main">
+              <a:ext uri="{FF2B5EF4-FFF2-40B4-BE49-F238E27FC236}">
+                <a16:creationId xmlns:a16="http://schemas.microsoft.com/office/drawing/2014/main" id="{9C8DEA29-E57D-4C8D-8538-2028FF89DA7C}"/>
+              </a:ext>
+            </a:extLst>
+          </p:cNvPr>
+          <p:cNvSpPr>
+            <a:spLocks xmlns:a="http://schemas.openxmlformats.org/drawingml/2006/main" noGrp="1"/>
+          </p:cNvSpPr>
+          <p:nvPr/>
+        </p:nvSpPr>
+        <p:spPr>
+          <a:xfrm xmlns:a="http://schemas.openxmlformats.org/drawingml/2006/main">
+            <a:off x="1000125" y="1352550"/>
+            <a:ext cx="10191750" cy="4905375"/>
+          </a:xfrm>
+          <a:prstGeom xmlns:a="http://schemas.openxmlformats.org/drawingml/2006/main" prst="rect">
+            <a:avLst/>
+          </a:prstGeom>
+          <a:solidFill xmlns:a="http://schemas.openxmlformats.org/drawingml/2006/main">
+            <a:srgbClr val="FFFFFF"/>
+          </a:solidFill>
+          <a:ln xmlns:a="http://schemas.openxmlformats.org/drawingml/2006/main" w="9525">
+            <a:solidFill>
+              <a:srgbClr val="B8BCC4"/>
+            </a:solidFill>
+            <a:prstDash val="solid"/>
+          </a:ln>
+        </p:spPr>
+      </p:sp>
+      <p:sp>
+        <p:nvSpPr>
+          <p:cNvPr id="8" name="">
+            <a:extLst xmlns:a="http://schemas.openxmlformats.org/drawingml/2006/main">
+              <a:ext uri="{FF2B5EF4-FFF2-40B4-BE49-F238E27FC236}">
+                <a16:creationId xmlns:a16="http://schemas.microsoft.com/office/drawing/2014/main" id="{4346A5F2-8CC4-4151-9BDB-346D47A3096B}"/>
+              </a:ext>
+            </a:extLst>
+          </p:cNvPr>
+          <p:cNvSpPr>
+            <a:spLocks xmlns:a="http://schemas.openxmlformats.org/drawingml/2006/main" noGrp="1"/>
+          </p:cNvSpPr>
+          <p:nvPr/>
+        </p:nvSpPr>
+        <p:spPr>
+          <a:xfrm xmlns:a="http://schemas.openxmlformats.org/drawingml/2006/main">
+            <a:off x="1143000" y="6286500"/>
+            <a:ext cx="9906000" cy="171450"/>
+          </a:xfrm>
+          <a:prstGeom xmlns:a="http://schemas.openxmlformats.org/drawingml/2006/main" prst="rect">
+            <a:avLst/>
+          </a:prstGeom>
+          <a:noFill xmlns:a="http://schemas.openxmlformats.org/drawingml/2006/main"/>
+          <a:ln xmlns:a="http://schemas.openxmlformats.org/drawingml/2006/main" w="0">
+            <a:noFill/>
+            <a:prstDash val="solid"/>
+          </a:ln>
+        </p:spPr>
+        <p:txBody>
+          <a:bodyPr xmlns:a="http://schemas.openxmlformats.org/drawingml/2006/main" wrap="square" lIns="0" tIns="0" rIns="0" bIns="0" anchor="t">
+            <a:normAutofit fontScale="93750"/>
+          </a:bodyPr>
+          <a:lstStyle xmlns:a="http://schemas.openxmlformats.org/drawingml/2006/main"/>
+          <a:p xmlns:a="http://schemas.openxmlformats.org/drawingml/2006/main">
+            <a:pPr algn="ctr">
+              <a:buNone/>
+              <a:defRPr sz="1200" b="0">
+                <a:solidFill>
+                  <a:srgbClr val="667384"/>
+                </a:solidFill>
+                <a:latin typeface="Arial"/>
+                <a:ea typeface="Arial"/>
+                <a:cs typeface="Arial"/>
+              </a:defRPr>
+            </a:pPr>
+            <a:r>
+              <a:rPr sz="1200" b="0">
+                <a:solidFill>
+                  <a:srgbClr val="667384"/>
+                </a:solidFill>
+                <a:latin typeface="Arial"/>
+                <a:ea typeface="Arial"/>
+                <a:cs typeface="Arial"/>
+              </a:rPr>
+              <a:t>Pearson correlation matrix; no BH-FDR q-value is below 0.05.</a:t>
+            </a:r>
+          </a:p>
+        </p:txBody>
+      </p:sp>
+      <p:pic>
+        <p:nvPicPr>
+          <p:cNvPr id="18" name=""/>
+          <p:cNvPicPr>
+            <a:picLocks xmlns:a="http://schemas.openxmlformats.org/drawingml/2006/main" noChangeAspect="1"/>
+          </p:cNvPicPr>
+          <p:nvPr/>
+        </p:nvPicPr>
+        <p:blipFill>
+          <a:blip xmlns:r="http://schemas.openxmlformats.org/officeDocument/2006/relationships" xmlns:a="http://schemas.openxmlformats.org/drawingml/2006/main" r:embed="Rc8a5ebf15da6464a"/>
+          <a:stretch xmlns:a="http://schemas.openxmlformats.org/drawingml/2006/main"/>
+        </p:blipFill>
+        <p:spPr>
+          <a:xfrm xmlns:a="http://schemas.openxmlformats.org/drawingml/2006/main" flipH="0" flipV="0">
+            <a:off x="2942545" y="1352550"/>
+            <a:ext cx="6306911" cy="4905375"/>
+          </a:xfrm>
+          <a:prstGeom xmlns:a="http://schemas.openxmlformats.org/drawingml/2006/main" prst="rect">
+            <a:avLst/>
+          </a:prstGeom>
+        </p:spPr>
+      </p:pic>
+    </p:spTree>
+    <p:extLst>
+      <p:ext uri="{BB962C8B-B14F-4D97-AF65-F5344CB8AC3E}">
+        <p14:creationId xmlns:p14="http://schemas.microsoft.com/office/powerpoint/2010/main" val="400872380"/>
+      </p:ext>
+    </p:extLst>
+  </p:cSld>
+</p:sld>
+</file>
+
+<file path=ppt/slides/slide15.xml><?xml version="1.0" encoding="utf-8"?>
+<p:sld xmlns:p="http://schemas.openxmlformats.org/presentationml/2006/main">
+  <p:cSld>
+    <p:bg>
+      <p:bgPr>
+        <a:solidFill xmlns:a="http://schemas.openxmlformats.org/drawingml/2006/main">
+          <a:srgbClr val="FFFFFF"/>
+        </a:solidFill>
+      </p:bgPr>
+    </p:bg>
+    <p:spTree>
+      <p:nvGrpSpPr>
+        <p:cNvPr id="1" name=""/>
+        <p:cNvGrpSpPr/>
+        <p:nvPr/>
+      </p:nvGrpSpPr>
+      <p:grpSpPr>
+        <a:xfrm xmlns:a="http://schemas.openxmlformats.org/drawingml/2006/main"/>
+      </p:grpSpPr>
+      <p:sp>
+        <p:nvSpPr>
+          <p:cNvPr id="20" name="section-7">
+            <a:extLst xmlns:a="http://schemas.openxmlformats.org/drawingml/2006/main">
+              <a:ext uri="{FF2B5EF4-FFF2-40B4-BE49-F238E27FC236}">
+                <a16:creationId xmlns:a16="http://schemas.microsoft.com/office/drawing/2014/main" id="{BAC8373F-594E-467B-A8F8-56439CEBE044}"/>
+              </a:ext>
+            </a:extLst>
+          </p:cNvPr>
+          <p:cNvSpPr>
+            <a:spLocks xmlns:a="http://schemas.openxmlformats.org/drawingml/2006/main" noGrp="1"/>
+          </p:cNvSpPr>
+          <p:nvPr/>
+        </p:nvSpPr>
+        <p:spPr>
+          <a:xfrm xmlns:a="http://schemas.openxmlformats.org/drawingml/2006/main">
+            <a:off x="457200" y="228600"/>
+            <a:ext cx="4191000" cy="228600"/>
+          </a:xfrm>
+          <a:prstGeom xmlns:a="http://schemas.openxmlformats.org/drawingml/2006/main" prst="rect">
+            <a:avLst/>
+          </a:prstGeom>
+          <a:noFill xmlns:a="http://schemas.openxmlformats.org/drawingml/2006/main"/>
+          <a:ln xmlns:a="http://schemas.openxmlformats.org/drawingml/2006/main" w="0">
+            <a:noFill/>
+            <a:prstDash val="solid"/>
+          </a:ln>
+        </p:spPr>
+        <p:txBody>
+          <a:bodyPr xmlns:a="http://schemas.openxmlformats.org/drawingml/2006/main" wrap="square" lIns="0" tIns="0" rIns="0" bIns="0" anchor="t">
+            <a:normAutofit fontScale="100000"/>
+          </a:bodyPr>
+          <a:lstStyle xmlns:a="http://schemas.openxmlformats.org/drawingml/2006/main"/>
+          <a:p xmlns:a="http://schemas.openxmlformats.org/drawingml/2006/main">
+            <a:pPr algn="l">
+              <a:buNone/>
+              <a:defRPr sz="1200" b="1">
+                <a:solidFill>
+                  <a:srgbClr val="667384"/>
+                </a:solidFill>
+                <a:latin typeface="Arial"/>
+                <a:ea typeface="Arial"/>
+                <a:cs typeface="Arial"/>
+              </a:defRPr>
+            </a:pPr>
+            <a:r>
+              <a:rPr sz="1200" b="1">
+                <a:solidFill>
+                  <a:srgbClr val="667384"/>
+                </a:solidFill>
+                <a:latin typeface="Arial"/>
+                <a:ea typeface="Arial"/>
+                <a:cs typeface="Arial"/>
+              </a:rPr>
+              <a:t>TSLA DESCRIPTIVE MICROSCOPE</a:t>
+            </a:r>
+          </a:p>
+        </p:txBody>
+      </p:sp>
+      <p:sp>
+        <p:nvSpPr>
+          <p:cNvPr id="2" name="title-7">
+            <a:extLst xmlns:a="http://schemas.openxmlformats.org/drawingml/2006/main">
+              <a:ext uri="{FF2B5EF4-FFF2-40B4-BE49-F238E27FC236}">
+                <a16:creationId xmlns:a16="http://schemas.microsoft.com/office/drawing/2014/main" id="{7592E6E5-EA60-427F-BAB4-42C154D8CC5F}"/>
+              </a:ext>
+            </a:extLst>
+          </p:cNvPr>
+          <p:cNvSpPr>
+            <a:spLocks xmlns:a="http://schemas.openxmlformats.org/drawingml/2006/main" noGrp="1"/>
+          </p:cNvSpPr>
+          <p:nvPr/>
+        </p:nvSpPr>
+        <p:spPr>
+          <a:xfrm xmlns:a="http://schemas.openxmlformats.org/drawingml/2006/main">
+            <a:off x="457200" y="533400"/>
+            <a:ext cx="11277600" cy="628650"/>
+          </a:xfrm>
+          <a:prstGeom xmlns:a="http://schemas.openxmlformats.org/drawingml/2006/main" prst="rect">
+            <a:avLst/>
+          </a:prstGeom>
+          <a:noFill xmlns:a="http://schemas.openxmlformats.org/drawingml/2006/main"/>
+          <a:ln xmlns:a="http://schemas.openxmlformats.org/drawingml/2006/main" w="0">
+            <a:noFill/>
+            <a:prstDash val="solid"/>
+          </a:ln>
+        </p:spPr>
+        <p:txBody>
+          <a:bodyPr xmlns:a="http://schemas.openxmlformats.org/drawingml/2006/main" wrap="square" lIns="0" tIns="0" rIns="0" bIns="0" anchor="t">
+            <a:normAutofit fontScale="100000"/>
+          </a:bodyPr>
+          <a:lstStyle xmlns:a="http://schemas.openxmlformats.org/drawingml/2006/main"/>
+          <a:p xmlns:a="http://schemas.openxmlformats.org/drawingml/2006/main">
+            <a:pPr algn="l">
+              <a:buNone/>
+              <a:defRPr sz="3525" b="1">
+                <a:solidFill>
+                  <a:srgbClr val="000000"/>
+                </a:solidFill>
+                <a:latin typeface="Arial"/>
+                <a:ea typeface="Arial"/>
+                <a:cs typeface="Arial"/>
+              </a:defRPr>
+            </a:pPr>
+            <a:r>
+              <a:rPr sz="3525" b="1">
+                <a:solidFill>
+                  <a:srgbClr val="000000"/>
+                </a:solidFill>
+                <a:latin typeface="Arial"/>
+                <a:ea typeface="Arial"/>
+                <a:cs typeface="Arial"/>
+              </a:rPr>
+              <a:t>The ridge is weak and statistically unresolved</a:t>
+            </a:r>
+          </a:p>
+        </p:txBody>
+      </p:sp>
+      <p:sp>
+        <p:nvSpPr>
+          <p:cNvPr id="3" name="">
+            <a:extLst xmlns:a="http://schemas.openxmlformats.org/drawingml/2006/main">
+              <a:ext uri="{FF2B5EF4-FFF2-40B4-BE49-F238E27FC236}">
+                <a16:creationId xmlns:a16="http://schemas.microsoft.com/office/drawing/2014/main" id="{C852E1AC-5CE8-4847-87B1-81C28A4EFEDE}"/>
+              </a:ext>
+            </a:extLst>
+          </p:cNvPr>
+          <p:cNvSpPr>
+            <a:spLocks xmlns:a="http://schemas.openxmlformats.org/drawingml/2006/main" noGrp="1"/>
+          </p:cNvSpPr>
+          <p:nvPr/>
+        </p:nvSpPr>
+        <p:spPr>
+          <a:xfrm xmlns:a="http://schemas.openxmlformats.org/drawingml/2006/main">
+            <a:off x="457200" y="1200150"/>
+            <a:ext cx="11277600" cy="19050"/>
+          </a:xfrm>
+          <a:prstGeom xmlns:a="http://schemas.openxmlformats.org/drawingml/2006/main" prst="rect">
+            <a:avLst/>
+          </a:prstGeom>
+          <a:solidFill xmlns:a="http://schemas.openxmlformats.org/drawingml/2006/main">
+            <a:srgbClr val="B8BCC4"/>
+          </a:solidFill>
+          <a:ln xmlns:a="http://schemas.openxmlformats.org/drawingml/2006/main" w="0">
+            <a:solidFill>
+              <a:srgbClr val="B8BCC4"/>
+            </a:solidFill>
+            <a:prstDash val="solid"/>
+          </a:ln>
+        </p:spPr>
+      </p:sp>
+      <p:sp>
+        <p:nvSpPr>
+          <p:cNvPr id="4" name="footer-left-7">
+            <a:extLst xmlns:a="http://schemas.openxmlformats.org/drawingml/2006/main">
+              <a:ext uri="{FF2B5EF4-FFF2-40B4-BE49-F238E27FC236}">
+                <a16:creationId xmlns:a16="http://schemas.microsoft.com/office/drawing/2014/main" id="{4896B590-20BC-4B46-9282-D9F5A22A0CC5}"/>
+              </a:ext>
+            </a:extLst>
+          </p:cNvPr>
+          <p:cNvSpPr>
+            <a:spLocks xmlns:a="http://schemas.openxmlformats.org/drawingml/2006/main" noGrp="1"/>
+          </p:cNvSpPr>
+          <p:nvPr/>
+        </p:nvSpPr>
+        <p:spPr>
+          <a:xfrm xmlns:a="http://schemas.openxmlformats.org/drawingml/2006/main">
+            <a:off x="457200" y="6515100"/>
+            <a:ext cx="3429000" cy="171450"/>
+          </a:xfrm>
+          <a:prstGeom xmlns:a="http://schemas.openxmlformats.org/drawingml/2006/main" prst="rect">
+            <a:avLst/>
+          </a:prstGeom>
+          <a:noFill xmlns:a="http://schemas.openxmlformats.org/drawingml/2006/main"/>
+          <a:ln xmlns:a="http://schemas.openxmlformats.org/drawingml/2006/main" w="0">
+            <a:noFill/>
+            <a:prstDash val="solid"/>
+          </a:ln>
+        </p:spPr>
+        <p:txBody>
+          <a:bodyPr xmlns:a="http://schemas.openxmlformats.org/drawingml/2006/main" wrap="square" lIns="0" tIns="0" rIns="0" bIns="0" anchor="t">
+            <a:normAutofit fontScale="100000"/>
+          </a:bodyPr>
+          <a:lstStyle xmlns:a="http://schemas.openxmlformats.org/drawingml/2006/main"/>
+          <a:p xmlns:a="http://schemas.openxmlformats.org/drawingml/2006/main">
+            <a:pPr algn="l">
+              <a:buNone/>
+              <a:defRPr sz="1050" b="0">
+                <a:solidFill>
+                  <a:srgbClr val="667384"/>
+                </a:solidFill>
+                <a:latin typeface="Arial"/>
+                <a:ea typeface="Arial"/>
+                <a:cs typeface="Arial"/>
+              </a:defRPr>
+            </a:pPr>
+            <a:r>
+              <a:rPr sz="1050" b="0">
+                <a:solidFill>
+                  <a:srgbClr val="667384"/>
+                </a:solidFill>
+                <a:latin typeface="Arial"/>
+                <a:ea typeface="Arial"/>
+                <a:cs typeface="Arial"/>
+              </a:rPr>
+              <a:t>Adjusted daily TSLA | 2018-2023</a:t>
+            </a:r>
+          </a:p>
+        </p:txBody>
+      </p:sp>
+      <p:sp>
+        <p:nvSpPr>
+          <p:cNvPr id="5" name="footer-number-7">
+            <a:extLst xmlns:a="http://schemas.openxmlformats.org/drawingml/2006/main">
+              <a:ext uri="{FF2B5EF4-FFF2-40B4-BE49-F238E27FC236}">
+                <a16:creationId xmlns:a16="http://schemas.microsoft.com/office/drawing/2014/main" id="{1503EFAF-F487-4981-AFDC-23F1B41A7207}"/>
+              </a:ext>
+            </a:extLst>
+          </p:cNvPr>
+          <p:cNvSpPr>
+            <a:spLocks xmlns:a="http://schemas.openxmlformats.org/drawingml/2006/main" noGrp="1"/>
+          </p:cNvSpPr>
+          <p:nvPr/>
+        </p:nvSpPr>
+        <p:spPr>
+          <a:xfrm xmlns:a="http://schemas.openxmlformats.org/drawingml/2006/main">
+            <a:off x="11239500" y="6496050"/>
+            <a:ext cx="495300" cy="190500"/>
+          </a:xfrm>
+          <a:prstGeom xmlns:a="http://schemas.openxmlformats.org/drawingml/2006/main" prst="rect">
+            <a:avLst/>
+          </a:prstGeom>
+          <a:noFill xmlns:a="http://schemas.openxmlformats.org/drawingml/2006/main"/>
+          <a:ln xmlns:a="http://schemas.openxmlformats.org/drawingml/2006/main" w="0">
+            <a:noFill/>
+            <a:prstDash val="solid"/>
+          </a:ln>
+        </p:spPr>
+        <p:txBody>
+          <a:bodyPr xmlns:a="http://schemas.openxmlformats.org/drawingml/2006/main" wrap="square" lIns="0" tIns="0" rIns="0" bIns="0" anchor="t">
+            <a:normAutofit fontScale="100000"/>
+          </a:bodyPr>
+          <a:lstStyle xmlns:a="http://schemas.openxmlformats.org/drawingml/2006/main"/>
+          <a:p xmlns:a="http://schemas.openxmlformats.org/drawingml/2006/main">
+            <a:pPr algn="r">
+              <a:buNone/>
+              <a:defRPr sz="1050" b="0">
+                <a:solidFill>
+                  <a:srgbClr val="667384"/>
+                </a:solidFill>
+                <a:latin typeface="Arial"/>
+                <a:ea typeface="Arial"/>
+                <a:cs typeface="Arial"/>
+              </a:defRPr>
+            </a:pPr>
+            <a:r>
+              <a:rPr sz="1050" b="0">
+                <a:solidFill>
+                  <a:srgbClr val="667384"/>
+                </a:solidFill>
+                <a:latin typeface="Arial"/>
+                <a:ea typeface="Arial"/>
+                <a:cs typeface="Arial"/>
+              </a:rPr>
+              <a:t>15</a:t>
+            </a:r>
+          </a:p>
+        </p:txBody>
+      </p:sp>
+      <p:sp>
+        <p:nvSpPr>
+          <p:cNvPr id="6" name="">
+            <a:extLst xmlns:a="http://schemas.openxmlformats.org/drawingml/2006/main">
+              <a:ext uri="{FF2B5EF4-FFF2-40B4-BE49-F238E27FC236}">
+                <a16:creationId xmlns:a16="http://schemas.microsoft.com/office/drawing/2014/main" id="{4AA770DD-55E6-42DB-942A-6938E642B1A0}"/>
+              </a:ext>
+            </a:extLst>
+          </p:cNvPr>
+          <p:cNvSpPr>
+            <a:spLocks xmlns:a="http://schemas.openxmlformats.org/drawingml/2006/main" noGrp="1"/>
+          </p:cNvSpPr>
+          <p:nvPr/>
+        </p:nvSpPr>
+        <p:spPr>
+          <a:xfrm xmlns:a="http://schemas.openxmlformats.org/drawingml/2006/main">
+            <a:off x="342900" y="1428750"/>
+            <a:ext cx="7677150" cy="4762500"/>
+          </a:xfrm>
+          <a:prstGeom xmlns:a="http://schemas.openxmlformats.org/drawingml/2006/main" prst="rect">
+            <a:avLst/>
+          </a:prstGeom>
+          <a:solidFill xmlns:a="http://schemas.openxmlformats.org/drawingml/2006/main">
+            <a:srgbClr val="FFFFFF"/>
+          </a:solidFill>
+          <a:ln xmlns:a="http://schemas.openxmlformats.org/drawingml/2006/main" w="9525">
+            <a:solidFill>
+              <a:srgbClr val="B8BCC4"/>
+            </a:solidFill>
+            <a:prstDash val="solid"/>
+          </a:ln>
+        </p:spPr>
+      </p:sp>
+      <p:sp>
+        <p:nvSpPr>
+          <p:cNvPr id="8" name="">
+            <a:extLst xmlns:a="http://schemas.openxmlformats.org/drawingml/2006/main">
+              <a:ext uri="{FF2B5EF4-FFF2-40B4-BE49-F238E27FC236}">
+                <a16:creationId xmlns:a16="http://schemas.microsoft.com/office/drawing/2014/main" id="{925D1653-1738-47C8-BFA1-9C9390285CC4}"/>
+              </a:ext>
+            </a:extLst>
+          </p:cNvPr>
+          <p:cNvSpPr>
+            <a:spLocks xmlns:a="http://schemas.openxmlformats.org/drawingml/2006/main" noGrp="1"/>
+          </p:cNvSpPr>
+          <p:nvPr/>
+        </p:nvSpPr>
+        <p:spPr>
+          <a:xfrm xmlns:a="http://schemas.openxmlformats.org/drawingml/2006/main">
+            <a:off x="8362950" y="1504950"/>
+            <a:ext cx="3143250" cy="1428750"/>
+          </a:xfrm>
+          <a:prstGeom xmlns:a="http://schemas.openxmlformats.org/drawingml/2006/main" prst="rect">
+            <a:avLst/>
+          </a:prstGeom>
+          <a:solidFill xmlns:a="http://schemas.openxmlformats.org/drawingml/2006/main">
+            <a:srgbClr val="EDEDED"/>
+          </a:solidFill>
+          <a:ln xmlns:a="http://schemas.openxmlformats.org/drawingml/2006/main" w="0">
+            <a:solidFill>
+              <a:srgbClr val="EDEDED"/>
+            </a:solidFill>
+            <a:prstDash val="solid"/>
+          </a:ln>
+        </p:spPr>
+      </p:sp>
+      <p:sp>
+        <p:nvSpPr>
+          <p:cNvPr id="9" name="">
+            <a:extLst xmlns:a="http://schemas.openxmlformats.org/drawingml/2006/main">
+              <a:ext uri="{FF2B5EF4-FFF2-40B4-BE49-F238E27FC236}">
+                <a16:creationId xmlns:a16="http://schemas.microsoft.com/office/drawing/2014/main" id="{AD911094-04B5-4E98-9749-4F832E6A7030}"/>
+              </a:ext>
+            </a:extLst>
+          </p:cNvPr>
+          <p:cNvSpPr>
+            <a:spLocks xmlns:a="http://schemas.openxmlformats.org/drawingml/2006/main" noGrp="1"/>
+          </p:cNvSpPr>
+          <p:nvPr/>
+        </p:nvSpPr>
+        <p:spPr>
+          <a:xfrm xmlns:a="http://schemas.openxmlformats.org/drawingml/2006/main">
+            <a:off x="8362950" y="1504950"/>
+            <a:ext cx="76200" cy="1428750"/>
+          </a:xfrm>
+          <a:prstGeom xmlns:a="http://schemas.openxmlformats.org/drawingml/2006/main" prst="rect">
+            <a:avLst/>
+          </a:prstGeom>
+          <a:solidFill xmlns:a="http://schemas.openxmlformats.org/drawingml/2006/main">
+            <a:srgbClr val="E45756"/>
+          </a:solidFill>
+          <a:ln xmlns:a="http://schemas.openxmlformats.org/drawingml/2006/main" w="0">
+            <a:solidFill>
+              <a:srgbClr val="E45756"/>
+            </a:solidFill>
+            <a:prstDash val="solid"/>
+          </a:ln>
+        </p:spPr>
+      </p:sp>
+      <p:sp>
+        <p:nvSpPr>
+          <p:cNvPr id="10" name="">
+            <a:extLst xmlns:a="http://schemas.openxmlformats.org/drawingml/2006/main">
+              <a:ext uri="{FF2B5EF4-FFF2-40B4-BE49-F238E27FC236}">
+                <a16:creationId xmlns:a16="http://schemas.microsoft.com/office/drawing/2014/main" id="{8259A327-4374-4B4E-A3BA-F8E016498564}"/>
+              </a:ext>
+            </a:extLst>
+          </p:cNvPr>
+          <p:cNvSpPr>
+            <a:spLocks xmlns:a="http://schemas.openxmlformats.org/drawingml/2006/main" noGrp="1"/>
+          </p:cNvSpPr>
+          <p:nvPr/>
+        </p:nvSpPr>
+        <p:spPr>
+          <a:xfrm xmlns:a="http://schemas.openxmlformats.org/drawingml/2006/main">
+            <a:off x="8629650" y="1676400"/>
+            <a:ext cx="2686050" cy="590550"/>
+          </a:xfrm>
+          <a:prstGeom xmlns:a="http://schemas.openxmlformats.org/drawingml/2006/main" prst="rect">
+            <a:avLst/>
+          </a:prstGeom>
+          <a:noFill xmlns:a="http://schemas.openxmlformats.org/drawingml/2006/main"/>
+          <a:ln xmlns:a="http://schemas.openxmlformats.org/drawingml/2006/main" w="0">
+            <a:noFill/>
+            <a:prstDash val="solid"/>
+          </a:ln>
+        </p:spPr>
+        <p:txBody>
+          <a:bodyPr xmlns:a="http://schemas.openxmlformats.org/drawingml/2006/main" wrap="square" lIns="0" tIns="0" rIns="0" bIns="0" anchor="t">
+            <a:normAutofit fontScale="100000"/>
+          </a:bodyPr>
+          <a:lstStyle xmlns:a="http://schemas.openxmlformats.org/drawingml/2006/main"/>
+          <a:p xmlns:a="http://schemas.openxmlformats.org/drawingml/2006/main">
+            <a:pPr algn="l">
+              <a:buNone/>
+              <a:defRPr sz="3225" b="1">
+                <a:solidFill>
+                  <a:srgbClr val="E45756"/>
+                </a:solidFill>
+                <a:latin typeface="Arial"/>
+                <a:ea typeface="Arial"/>
+                <a:cs typeface="Arial"/>
+              </a:defRPr>
+            </a:pPr>
+            <a:r>
+              <a:rPr sz="3225" b="1">
+                <a:solidFill>
+                  <a:srgbClr val="E45756"/>
+                </a:solidFill>
+                <a:latin typeface="Arial"/>
+                <a:ea typeface="Arial"/>
+                <a:cs typeface="Arial"/>
+              </a:rPr>
+              <a:t>+0.092</a:t>
+            </a:r>
+          </a:p>
+        </p:txBody>
+      </p:sp>
+      <p:sp>
+        <p:nvSpPr>
+          <p:cNvPr id="11" name="">
+            <a:extLst xmlns:a="http://schemas.openxmlformats.org/drawingml/2006/main">
+              <a:ext uri="{FF2B5EF4-FFF2-40B4-BE49-F238E27FC236}">
+                <a16:creationId xmlns:a16="http://schemas.microsoft.com/office/drawing/2014/main" id="{BE341AE3-547D-4111-ADFF-14E5545F2DBF}"/>
+              </a:ext>
+            </a:extLst>
+          </p:cNvPr>
+          <p:cNvSpPr>
+            <a:spLocks xmlns:a="http://schemas.openxmlformats.org/drawingml/2006/main" noGrp="1"/>
+          </p:cNvSpPr>
+          <p:nvPr/>
+        </p:nvSpPr>
+        <p:spPr>
+          <a:xfrm xmlns:a="http://schemas.openxmlformats.org/drawingml/2006/main">
+            <a:off x="8629650" y="2343150"/>
+            <a:ext cx="2686050" cy="438150"/>
+          </a:xfrm>
+          <a:prstGeom xmlns:a="http://schemas.openxmlformats.org/drawingml/2006/main" prst="rect">
+            <a:avLst/>
+          </a:prstGeom>
+          <a:noFill xmlns:a="http://schemas.openxmlformats.org/drawingml/2006/main"/>
+          <a:ln xmlns:a="http://schemas.openxmlformats.org/drawingml/2006/main" w="0">
+            <a:noFill/>
+            <a:prstDash val="solid"/>
+          </a:ln>
+        </p:spPr>
+        <p:txBody>
+          <a:bodyPr xmlns:a="http://schemas.openxmlformats.org/drawingml/2006/main" wrap="square" lIns="0" tIns="0" rIns="0" bIns="0" anchor="t">
+            <a:normAutofit fontScale="100000"/>
+          </a:bodyPr>
+          <a:lstStyle xmlns:a="http://schemas.openxmlformats.org/drawingml/2006/main"/>
+          <a:p xmlns:a="http://schemas.openxmlformats.org/drawingml/2006/main">
+            <a:pPr algn="l">
+              <a:buNone/>
+              <a:defRPr sz="1350" b="0">
+                <a:solidFill>
+                  <a:srgbClr val="273548"/>
+                </a:solidFill>
+                <a:latin typeface="Arial"/>
+                <a:ea typeface="Arial"/>
+                <a:cs typeface="Arial"/>
+              </a:defRPr>
+            </a:pPr>
+            <a:r>
+              <a:rPr sz="1350" b="0">
+                <a:solidFill>
+                  <a:srgbClr val="273548"/>
+                </a:solidFill>
+                <a:latin typeface="Arial"/>
+                <a:ea typeface="Arial"/>
+                <a:cs typeface="Arial"/>
+              </a:rPr>
+              <a:t>largest Pearson: 5 prior / 10 forward</a:t>
+            </a:r>
+          </a:p>
+        </p:txBody>
+      </p:sp>
+      <p:sp>
+        <p:nvSpPr>
+          <p:cNvPr id="12" name="">
+            <a:extLst xmlns:a="http://schemas.openxmlformats.org/drawingml/2006/main">
+              <a:ext uri="{FF2B5EF4-FFF2-40B4-BE49-F238E27FC236}">
+                <a16:creationId xmlns:a16="http://schemas.microsoft.com/office/drawing/2014/main" id="{627B1C2D-BD18-4B6C-8DC8-10694F2FD365}"/>
+              </a:ext>
+            </a:extLst>
+          </p:cNvPr>
+          <p:cNvSpPr>
+            <a:spLocks xmlns:a="http://schemas.openxmlformats.org/drawingml/2006/main" noGrp="1"/>
+          </p:cNvSpPr>
+          <p:nvPr/>
+        </p:nvSpPr>
+        <p:spPr>
+          <a:xfrm xmlns:a="http://schemas.openxmlformats.org/drawingml/2006/main">
+            <a:off x="8362950" y="3143250"/>
+            <a:ext cx="3143250" cy="1428750"/>
+          </a:xfrm>
+          <a:prstGeom xmlns:a="http://schemas.openxmlformats.org/drawingml/2006/main" prst="rect">
+            <a:avLst/>
+          </a:prstGeom>
+          <a:solidFill xmlns:a="http://schemas.openxmlformats.org/drawingml/2006/main">
+            <a:srgbClr val="EDEDED"/>
+          </a:solidFill>
+          <a:ln xmlns:a="http://schemas.openxmlformats.org/drawingml/2006/main" w="0">
+            <a:solidFill>
+              <a:srgbClr val="EDEDED"/>
+            </a:solidFill>
+            <a:prstDash val="solid"/>
+          </a:ln>
+        </p:spPr>
+      </p:sp>
+      <p:sp>
+        <p:nvSpPr>
+          <p:cNvPr id="13" name="">
+            <a:extLst xmlns:a="http://schemas.openxmlformats.org/drawingml/2006/main">
+              <a:ext uri="{FF2B5EF4-FFF2-40B4-BE49-F238E27FC236}">
+                <a16:creationId xmlns:a16="http://schemas.microsoft.com/office/drawing/2014/main" id="{1A4050CC-5568-4F8A-B026-EC7B8ABEFB7A}"/>
+              </a:ext>
+            </a:extLst>
+          </p:cNvPr>
+          <p:cNvSpPr>
+            <a:spLocks xmlns:a="http://schemas.openxmlformats.org/drawingml/2006/main" noGrp="1"/>
+          </p:cNvSpPr>
+          <p:nvPr/>
+        </p:nvSpPr>
+        <p:spPr>
+          <a:xfrm xmlns:a="http://schemas.openxmlformats.org/drawingml/2006/main">
+            <a:off x="8362950" y="3143250"/>
+            <a:ext cx="76200" cy="1428750"/>
+          </a:xfrm>
+          <a:prstGeom xmlns:a="http://schemas.openxmlformats.org/drawingml/2006/main" prst="rect">
+            <a:avLst/>
+          </a:prstGeom>
+          <a:solidFill xmlns:a="http://schemas.openxmlformats.org/drawingml/2006/main">
+            <a:srgbClr val="3D8DFF"/>
+          </a:solidFill>
+          <a:ln xmlns:a="http://schemas.openxmlformats.org/drawingml/2006/main" w="0">
+            <a:solidFill>
+              <a:srgbClr val="3D8DFF"/>
+            </a:solidFill>
+            <a:prstDash val="solid"/>
+          </a:ln>
+        </p:spPr>
+      </p:sp>
+      <p:sp>
+        <p:nvSpPr>
+          <p:cNvPr id="14" name="">
+            <a:extLst xmlns:a="http://schemas.openxmlformats.org/drawingml/2006/main">
+              <a:ext uri="{FF2B5EF4-FFF2-40B4-BE49-F238E27FC236}">
+                <a16:creationId xmlns:a16="http://schemas.microsoft.com/office/drawing/2014/main" id="{502FF9D4-D051-476B-B68A-15DCA6B44FE9}"/>
+              </a:ext>
+            </a:extLst>
+          </p:cNvPr>
+          <p:cNvSpPr>
+            <a:spLocks xmlns:a="http://schemas.openxmlformats.org/drawingml/2006/main" noGrp="1"/>
+          </p:cNvSpPr>
+          <p:nvPr/>
+        </p:nvSpPr>
+        <p:spPr>
+          <a:xfrm xmlns:a="http://schemas.openxmlformats.org/drawingml/2006/main">
+            <a:off x="8629650" y="3314700"/>
+            <a:ext cx="2686050" cy="590550"/>
+          </a:xfrm>
+          <a:prstGeom xmlns:a="http://schemas.openxmlformats.org/drawingml/2006/main" prst="rect">
+            <a:avLst/>
+          </a:prstGeom>
+          <a:noFill xmlns:a="http://schemas.openxmlformats.org/drawingml/2006/main"/>
+          <a:ln xmlns:a="http://schemas.openxmlformats.org/drawingml/2006/main" w="0">
+            <a:noFill/>
+            <a:prstDash val="solid"/>
+          </a:ln>
+        </p:spPr>
+        <p:txBody>
+          <a:bodyPr xmlns:a="http://schemas.openxmlformats.org/drawingml/2006/main" wrap="square" lIns="0" tIns="0" rIns="0" bIns="0" anchor="t">
+            <a:normAutofit fontScale="91638"/>
+          </a:bodyPr>
+          <a:lstStyle xmlns:a="http://schemas.openxmlformats.org/drawingml/2006/main"/>
+          <a:p xmlns:a="http://schemas.openxmlformats.org/drawingml/2006/main">
+            <a:pPr algn="l">
+              <a:buNone/>
+              <a:defRPr sz="3225" b="1">
+                <a:solidFill>
+                  <a:srgbClr val="3D8DFF"/>
+                </a:solidFill>
+                <a:latin typeface="Arial"/>
+                <a:ea typeface="Arial"/>
+                <a:cs typeface="Arial"/>
+              </a:defRPr>
+            </a:pPr>
+            <a:r>
+              <a:rPr sz="3225" b="1">
+                <a:solidFill>
+                  <a:srgbClr val="3D8DFF"/>
+                </a:solidFill>
+                <a:latin typeface="Arial"/>
+                <a:ea typeface="Arial"/>
+                <a:cs typeface="Arial"/>
+              </a:rPr>
+              <a:t>[-0.003, +0.188]</a:t>
+            </a:r>
+          </a:p>
+        </p:txBody>
+      </p:sp>
+      <p:sp>
+        <p:nvSpPr>
+          <p:cNvPr id="15" name="">
+            <a:extLst xmlns:a="http://schemas.openxmlformats.org/drawingml/2006/main">
+              <a:ext uri="{FF2B5EF4-FFF2-40B4-BE49-F238E27FC236}">
+                <a16:creationId xmlns:a16="http://schemas.microsoft.com/office/drawing/2014/main" id="{03DFBB46-08D6-4497-AA7C-C2049757E9DE}"/>
+              </a:ext>
+            </a:extLst>
+          </p:cNvPr>
+          <p:cNvSpPr>
+            <a:spLocks xmlns:a="http://schemas.openxmlformats.org/drawingml/2006/main" noGrp="1"/>
+          </p:cNvSpPr>
+          <p:nvPr/>
+        </p:nvSpPr>
+        <p:spPr>
+          <a:xfrm xmlns:a="http://schemas.openxmlformats.org/drawingml/2006/main">
+            <a:off x="8629650" y="3981450"/>
+            <a:ext cx="2686050" cy="438150"/>
+          </a:xfrm>
+          <a:prstGeom xmlns:a="http://schemas.openxmlformats.org/drawingml/2006/main" prst="rect">
+            <a:avLst/>
+          </a:prstGeom>
+          <a:noFill xmlns:a="http://schemas.openxmlformats.org/drawingml/2006/main"/>
+          <a:ln xmlns:a="http://schemas.openxmlformats.org/drawingml/2006/main" w="0">
+            <a:noFill/>
+            <a:prstDash val="solid"/>
+          </a:ln>
+        </p:spPr>
+        <p:txBody>
+          <a:bodyPr xmlns:a="http://schemas.openxmlformats.org/drawingml/2006/main" wrap="square" lIns="0" tIns="0" rIns="0" bIns="0" anchor="t">
+            <a:normAutofit fontScale="100000"/>
+          </a:bodyPr>
+          <a:lstStyle xmlns:a="http://schemas.openxmlformats.org/drawingml/2006/main"/>
+          <a:p xmlns:a="http://schemas.openxmlformats.org/drawingml/2006/main">
+            <a:pPr algn="l">
+              <a:buNone/>
+              <a:defRPr sz="1350" b="0">
+                <a:solidFill>
+                  <a:srgbClr val="273548"/>
+                </a:solidFill>
+                <a:latin typeface="Arial"/>
+                <a:ea typeface="Arial"/>
+                <a:cs typeface="Arial"/>
+              </a:defRPr>
+            </a:pPr>
+            <a:r>
+              <a:rPr sz="1350" b="0">
+                <a:solidFill>
+                  <a:srgbClr val="273548"/>
+                </a:solidFill>
+                <a:latin typeface="Arial"/>
+                <a:ea typeface="Arial"/>
+                <a:cs typeface="Arial"/>
+              </a:rPr>
+              <a:t>95% overlap-aware HAC interval</a:t>
+            </a:r>
+          </a:p>
+        </p:txBody>
+      </p:sp>
+      <p:sp>
+        <p:nvSpPr>
+          <p:cNvPr id="16" name="">
+            <a:extLst xmlns:a="http://schemas.openxmlformats.org/drawingml/2006/main">
+              <a:ext uri="{FF2B5EF4-FFF2-40B4-BE49-F238E27FC236}">
+                <a16:creationId xmlns:a16="http://schemas.microsoft.com/office/drawing/2014/main" id="{509D61CC-6E5E-49EC-A5F6-E861E8561441}"/>
+              </a:ext>
+            </a:extLst>
+          </p:cNvPr>
+          <p:cNvSpPr>
+            <a:spLocks xmlns:a="http://schemas.openxmlformats.org/drawingml/2006/main" noGrp="1"/>
+          </p:cNvSpPr>
+          <p:nvPr/>
+        </p:nvSpPr>
+        <p:spPr>
+          <a:xfrm xmlns:a="http://schemas.openxmlformats.org/drawingml/2006/main">
+            <a:off x="8362950" y="4781550"/>
+            <a:ext cx="3143250" cy="1428750"/>
+          </a:xfrm>
+          <a:prstGeom xmlns:a="http://schemas.openxmlformats.org/drawingml/2006/main" prst="rect">
+            <a:avLst/>
+          </a:prstGeom>
+          <a:solidFill xmlns:a="http://schemas.openxmlformats.org/drawingml/2006/main">
+            <a:srgbClr val="EDEDED"/>
+          </a:solidFill>
+          <a:ln xmlns:a="http://schemas.openxmlformats.org/drawingml/2006/main" w="0">
+            <a:solidFill>
+              <a:srgbClr val="EDEDED"/>
+            </a:solidFill>
+            <a:prstDash val="solid"/>
+          </a:ln>
+        </p:spPr>
+      </p:sp>
+      <p:sp>
+        <p:nvSpPr>
+          <p:cNvPr id="17" name="">
+            <a:extLst xmlns:a="http://schemas.openxmlformats.org/drawingml/2006/main">
+              <a:ext uri="{FF2B5EF4-FFF2-40B4-BE49-F238E27FC236}">
+                <a16:creationId xmlns:a16="http://schemas.microsoft.com/office/drawing/2014/main" id="{A935608E-4DDE-41BA-8DF2-831CF419565B}"/>
+              </a:ext>
+            </a:extLst>
+          </p:cNvPr>
+          <p:cNvSpPr>
+            <a:spLocks xmlns:a="http://schemas.openxmlformats.org/drawingml/2006/main" noGrp="1"/>
+          </p:cNvSpPr>
+          <p:nvPr/>
+        </p:nvSpPr>
+        <p:spPr>
+          <a:xfrm xmlns:a="http://schemas.openxmlformats.org/drawingml/2006/main">
+            <a:off x="8362950" y="4781550"/>
+            <a:ext cx="76200" cy="1428750"/>
+          </a:xfrm>
+          <a:prstGeom xmlns:a="http://schemas.openxmlformats.org/drawingml/2006/main" prst="rect">
+            <a:avLst/>
+          </a:prstGeom>
+          <a:solidFill xmlns:a="http://schemas.openxmlformats.org/drawingml/2006/main">
+            <a:srgbClr val="273548"/>
+          </a:solidFill>
+          <a:ln xmlns:a="http://schemas.openxmlformats.org/drawingml/2006/main" w="0">
+            <a:solidFill>
+              <a:srgbClr val="273548"/>
+            </a:solidFill>
+            <a:prstDash val="solid"/>
+          </a:ln>
+        </p:spPr>
+      </p:sp>
+      <p:sp>
+        <p:nvSpPr>
+          <p:cNvPr id="18" name="">
+            <a:extLst xmlns:a="http://schemas.openxmlformats.org/drawingml/2006/main">
+              <a:ext uri="{FF2B5EF4-FFF2-40B4-BE49-F238E27FC236}">
+                <a16:creationId xmlns:a16="http://schemas.microsoft.com/office/drawing/2014/main" id="{088A976D-39D1-4C6C-803F-0D3F8BAE4A28}"/>
+              </a:ext>
+            </a:extLst>
+          </p:cNvPr>
+          <p:cNvSpPr>
+            <a:spLocks xmlns:a="http://schemas.openxmlformats.org/drawingml/2006/main" noGrp="1"/>
+          </p:cNvSpPr>
+          <p:nvPr/>
+        </p:nvSpPr>
+        <p:spPr>
+          <a:xfrm xmlns:a="http://schemas.openxmlformats.org/drawingml/2006/main">
+            <a:off x="8629650" y="4953000"/>
+            <a:ext cx="2686050" cy="590550"/>
+          </a:xfrm>
+          <a:prstGeom xmlns:a="http://schemas.openxmlformats.org/drawingml/2006/main" prst="rect">
+            <a:avLst/>
+          </a:prstGeom>
+          <a:noFill xmlns:a="http://schemas.openxmlformats.org/drawingml/2006/main"/>
+          <a:ln xmlns:a="http://schemas.openxmlformats.org/drawingml/2006/main" w="0">
+            <a:noFill/>
+            <a:prstDash val="solid"/>
+          </a:ln>
+        </p:spPr>
+        <p:txBody>
+          <a:bodyPr xmlns:a="http://schemas.openxmlformats.org/drawingml/2006/main" wrap="square" lIns="0" tIns="0" rIns="0" bIns="0" anchor="t">
+            <a:normAutofit fontScale="100000"/>
+          </a:bodyPr>
+          <a:lstStyle xmlns:a="http://schemas.openxmlformats.org/drawingml/2006/main"/>
+          <a:p xmlns:a="http://schemas.openxmlformats.org/drawingml/2006/main">
+            <a:pPr algn="l">
+              <a:buNone/>
+              <a:defRPr sz="3225" b="1">
+                <a:solidFill>
+                  <a:srgbClr val="273548"/>
+                </a:solidFill>
+                <a:latin typeface="Arial"/>
+                <a:ea typeface="Arial"/>
+                <a:cs typeface="Arial"/>
+              </a:defRPr>
+            </a:pPr>
+            <a:r>
+              <a:rPr sz="3225" b="1">
+                <a:solidFill>
+                  <a:srgbClr val="273548"/>
+                </a:solidFill>
+                <a:latin typeface="Arial"/>
+                <a:ea typeface="Arial"/>
+                <a:cs typeface="Arial"/>
+              </a:rPr>
+              <a:t>0.852%</a:t>
+            </a:r>
+          </a:p>
+        </p:txBody>
+      </p:sp>
+      <p:sp>
+        <p:nvSpPr>
+          <p:cNvPr id="19" name="">
+            <a:extLst xmlns:a="http://schemas.openxmlformats.org/drawingml/2006/main">
+              <a:ext uri="{FF2B5EF4-FFF2-40B4-BE49-F238E27FC236}">
+                <a16:creationId xmlns:a16="http://schemas.microsoft.com/office/drawing/2014/main" id="{AA1E116E-13CC-4735-B31A-B5C1846B2D22}"/>
+              </a:ext>
+            </a:extLst>
+          </p:cNvPr>
+          <p:cNvSpPr>
+            <a:spLocks xmlns:a="http://schemas.openxmlformats.org/drawingml/2006/main" noGrp="1"/>
+          </p:cNvSpPr>
+          <p:nvPr/>
+        </p:nvSpPr>
+        <p:spPr>
+          <a:xfrm xmlns:a="http://schemas.openxmlformats.org/drawingml/2006/main">
+            <a:off x="8629650" y="5619750"/>
+            <a:ext cx="2686050" cy="438150"/>
+          </a:xfrm>
+          <a:prstGeom xmlns:a="http://schemas.openxmlformats.org/drawingml/2006/main" prst="rect">
+            <a:avLst/>
+          </a:prstGeom>
+          <a:noFill xmlns:a="http://schemas.openxmlformats.org/drawingml/2006/main"/>
+          <a:ln xmlns:a="http://schemas.openxmlformats.org/drawingml/2006/main" w="0">
+            <a:noFill/>
+            <a:prstDash val="solid"/>
+          </a:ln>
+        </p:spPr>
+        <p:txBody>
+          <a:bodyPr xmlns:a="http://schemas.openxmlformats.org/drawingml/2006/main" wrap="square" lIns="0" tIns="0" rIns="0" bIns="0" anchor="t">
+            <a:normAutofit fontScale="100000"/>
+          </a:bodyPr>
+          <a:lstStyle xmlns:a="http://schemas.openxmlformats.org/drawingml/2006/main"/>
+          <a:p xmlns:a="http://schemas.openxmlformats.org/drawingml/2006/main">
+            <a:pPr algn="l">
+              <a:buNone/>
+              <a:defRPr sz="1350" b="0">
+                <a:solidFill>
+                  <a:srgbClr val="273548"/>
+                </a:solidFill>
+                <a:latin typeface="Arial"/>
+                <a:ea typeface="Arial"/>
+                <a:cs typeface="Arial"/>
+              </a:defRPr>
+            </a:pPr>
+            <a:r>
+              <a:rPr sz="1350" b="0">
+                <a:solidFill>
+                  <a:srgbClr val="273548"/>
+                </a:solidFill>
+                <a:latin typeface="Arial"/>
+                <a:ea typeface="Arial"/>
+                <a:cs typeface="Arial"/>
+              </a:rPr>
+              <a:t>maximum R-squared across 81 cells</a:t>
+            </a:r>
+          </a:p>
+        </p:txBody>
+      </p:sp>
+      <p:pic>
+        <p:nvPicPr>
+          <p:cNvPr id="40" name=""/>
+          <p:cNvPicPr>
+            <a:picLocks xmlns:a="http://schemas.openxmlformats.org/drawingml/2006/main" noChangeAspect="1"/>
+          </p:cNvPicPr>
+          <p:nvPr/>
+        </p:nvPicPr>
+        <p:blipFill>
+          <a:blip xmlns:r="http://schemas.openxmlformats.org/officeDocument/2006/relationships" xmlns:a="http://schemas.openxmlformats.org/drawingml/2006/main" r:embed="R5becb61b1c9b4637"/>
+          <a:stretch xmlns:a="http://schemas.openxmlformats.org/drawingml/2006/main"/>
+        </p:blipFill>
+        <p:spPr>
+          <a:xfrm xmlns:a="http://schemas.openxmlformats.org/drawingml/2006/main" flipH="0" flipV="0">
+            <a:off x="609600" y="1428750"/>
+            <a:ext cx="7143750" cy="4762500"/>
+          </a:xfrm>
+          <a:prstGeom xmlns:a="http://schemas.openxmlformats.org/drawingml/2006/main" prst="rect">
+            <a:avLst/>
+          </a:prstGeom>
+        </p:spPr>
+      </p:pic>
+    </p:spTree>
+    <p:extLst>
+      <p:ext uri="{BB962C8B-B14F-4D97-AF65-F5344CB8AC3E}">
+        <p14:creationId xmlns:p14="http://schemas.microsoft.com/office/powerpoint/2010/main" val="1583170704"/>
+      </p:ext>
+    </p:extLst>
+  </p:cSld>
+</p:sld>
+</file>
+
+<file path=ppt/slides/slide16.xml><?xml version="1.0" encoding="utf-8"?>
+<p:sld xmlns:p="http://schemas.openxmlformats.org/presentationml/2006/main">
+  <p:cSld>
+    <p:bg>
+      <p:bgPr>
+        <a:solidFill xmlns:a="http://schemas.openxmlformats.org/drawingml/2006/main">
+          <a:srgbClr val="FFFFFF"/>
+        </a:solidFill>
+      </p:bgPr>
+    </p:bg>
+    <p:spTree>
+      <p:nvGrpSpPr>
+        <p:cNvPr id="1" name=""/>
+        <p:cNvGrpSpPr/>
+        <p:nvPr/>
+      </p:nvGrpSpPr>
+      <p:grpSpPr>
+        <a:xfrm xmlns:a="http://schemas.openxmlformats.org/drawingml/2006/main"/>
+      </p:grpSpPr>
+      <p:sp>
+        <p:nvSpPr>
+          <p:cNvPr id="17" name="section-8">
+            <a:extLst xmlns:a="http://schemas.openxmlformats.org/drawingml/2006/main">
+              <a:ext uri="{FF2B5EF4-FFF2-40B4-BE49-F238E27FC236}">
+                <a16:creationId xmlns:a16="http://schemas.microsoft.com/office/drawing/2014/main" id="{FC99BA28-64AB-43E8-BE2C-0E05781D1086}"/>
+              </a:ext>
+            </a:extLst>
+          </p:cNvPr>
+          <p:cNvSpPr>
+            <a:spLocks xmlns:a="http://schemas.openxmlformats.org/drawingml/2006/main" noGrp="1"/>
+          </p:cNvSpPr>
+          <p:nvPr/>
+        </p:nvSpPr>
+        <p:spPr>
+          <a:xfrm xmlns:a="http://schemas.openxmlformats.org/drawingml/2006/main">
+            <a:off x="457200" y="228600"/>
+            <a:ext cx="4191000" cy="228600"/>
+          </a:xfrm>
+          <a:prstGeom xmlns:a="http://schemas.openxmlformats.org/drawingml/2006/main" prst="rect">
+            <a:avLst/>
+          </a:prstGeom>
+          <a:noFill xmlns:a="http://schemas.openxmlformats.org/drawingml/2006/main"/>
+          <a:ln xmlns:a="http://schemas.openxmlformats.org/drawingml/2006/main" w="0">
+            <a:noFill/>
+            <a:prstDash val="solid"/>
+          </a:ln>
+        </p:spPr>
+        <p:txBody>
+          <a:bodyPr xmlns:a="http://schemas.openxmlformats.org/drawingml/2006/main" wrap="square" lIns="0" tIns="0" rIns="0" bIns="0" anchor="t">
+            <a:normAutofit fontScale="100000"/>
+          </a:bodyPr>
+          <a:lstStyle xmlns:a="http://schemas.openxmlformats.org/drawingml/2006/main"/>
+          <a:p xmlns:a="http://schemas.openxmlformats.org/drawingml/2006/main">
+            <a:pPr algn="l">
+              <a:buNone/>
+              <a:defRPr sz="1200" b="1">
+                <a:solidFill>
+                  <a:srgbClr val="667384"/>
+                </a:solidFill>
+                <a:latin typeface="Arial"/>
+                <a:ea typeface="Arial"/>
+                <a:cs typeface="Arial"/>
+              </a:defRPr>
+            </a:pPr>
+            <a:r>
+              <a:rPr sz="1200" b="1">
+                <a:solidFill>
+                  <a:srgbClr val="667384"/>
+                </a:solidFill>
+                <a:latin typeface="Arial"/>
+                <a:ea typeface="Arial"/>
+                <a:cs typeface="Arial"/>
+              </a:rPr>
+              <a:t>TSLA DESCRIPTIVE MICROSCOPE</a:t>
+            </a:r>
+          </a:p>
+        </p:txBody>
+      </p:sp>
+      <p:sp>
+        <p:nvSpPr>
+          <p:cNvPr id="2" name="title-8">
+            <a:extLst xmlns:a="http://schemas.openxmlformats.org/drawingml/2006/main">
+              <a:ext uri="{FF2B5EF4-FFF2-40B4-BE49-F238E27FC236}">
+                <a16:creationId xmlns:a16="http://schemas.microsoft.com/office/drawing/2014/main" id="{F56141AD-6D41-4B04-9458-2EFEFD0C222B}"/>
+              </a:ext>
+            </a:extLst>
+          </p:cNvPr>
+          <p:cNvSpPr>
+            <a:spLocks xmlns:a="http://schemas.openxmlformats.org/drawingml/2006/main" noGrp="1"/>
+          </p:cNvSpPr>
+          <p:nvPr/>
+        </p:nvSpPr>
+        <p:spPr>
+          <a:xfrm xmlns:a="http://schemas.openxmlformats.org/drawingml/2006/main">
+            <a:off x="457200" y="533400"/>
+            <a:ext cx="11277600" cy="628650"/>
+          </a:xfrm>
+          <a:prstGeom xmlns:a="http://schemas.openxmlformats.org/drawingml/2006/main" prst="rect">
+            <a:avLst/>
+          </a:prstGeom>
+          <a:noFill xmlns:a="http://schemas.openxmlformats.org/drawingml/2006/main"/>
+          <a:ln xmlns:a="http://schemas.openxmlformats.org/drawingml/2006/main" w="0">
+            <a:noFill/>
+            <a:prstDash val="solid"/>
+          </a:ln>
+        </p:spPr>
+        <p:txBody>
+          <a:bodyPr xmlns:a="http://schemas.openxmlformats.org/drawingml/2006/main" wrap="square" lIns="0" tIns="0" rIns="0" bIns="0" anchor="t">
+            <a:normAutofit fontScale="100000"/>
+          </a:bodyPr>
+          <a:lstStyle xmlns:a="http://schemas.openxmlformats.org/drawingml/2006/main"/>
+          <a:p xmlns:a="http://schemas.openxmlformats.org/drawingml/2006/main">
+            <a:pPr algn="l">
+              <a:buNone/>
+              <a:defRPr sz="3525" b="1">
+                <a:solidFill>
+                  <a:srgbClr val="000000"/>
+                </a:solidFill>
+                <a:latin typeface="Arial"/>
+                <a:ea typeface="Arial"/>
+                <a:cs typeface="Arial"/>
+              </a:defRPr>
+            </a:pPr>
+            <a:r>
+              <a:rPr sz="3525" b="1">
+                <a:solidFill>
+                  <a:srgbClr val="000000"/>
+                </a:solidFill>
+                <a:latin typeface="Arial"/>
+                <a:ea typeface="Arial"/>
+                <a:cs typeface="Arial"/>
+              </a:rPr>
+              <a:t>Direction differences also fail the 81-cell scan</a:t>
+            </a:r>
+          </a:p>
+        </p:txBody>
+      </p:sp>
+      <p:sp>
+        <p:nvSpPr>
+          <p:cNvPr id="3" name="">
+            <a:extLst xmlns:a="http://schemas.openxmlformats.org/drawingml/2006/main">
+              <a:ext uri="{FF2B5EF4-FFF2-40B4-BE49-F238E27FC236}">
+                <a16:creationId xmlns:a16="http://schemas.microsoft.com/office/drawing/2014/main" id="{8C9B866E-F8EC-4822-8F75-8738AE5743DE}"/>
+              </a:ext>
+            </a:extLst>
+          </p:cNvPr>
+          <p:cNvSpPr>
+            <a:spLocks xmlns:a="http://schemas.openxmlformats.org/drawingml/2006/main" noGrp="1"/>
+          </p:cNvSpPr>
+          <p:nvPr/>
+        </p:nvSpPr>
+        <p:spPr>
+          <a:xfrm xmlns:a="http://schemas.openxmlformats.org/drawingml/2006/main">
+            <a:off x="457200" y="1200150"/>
+            <a:ext cx="11277600" cy="19050"/>
+          </a:xfrm>
+          <a:prstGeom xmlns:a="http://schemas.openxmlformats.org/drawingml/2006/main" prst="rect">
+            <a:avLst/>
+          </a:prstGeom>
+          <a:solidFill xmlns:a="http://schemas.openxmlformats.org/drawingml/2006/main">
+            <a:srgbClr val="B8BCC4"/>
+          </a:solidFill>
+          <a:ln xmlns:a="http://schemas.openxmlformats.org/drawingml/2006/main" w="0">
+            <a:solidFill>
+              <a:srgbClr val="B8BCC4"/>
+            </a:solidFill>
+            <a:prstDash val="solid"/>
+          </a:ln>
+        </p:spPr>
+      </p:sp>
+      <p:sp>
+        <p:nvSpPr>
+          <p:cNvPr id="4" name="footer-left-8">
+            <a:extLst xmlns:a="http://schemas.openxmlformats.org/drawingml/2006/main">
+              <a:ext uri="{FF2B5EF4-FFF2-40B4-BE49-F238E27FC236}">
+                <a16:creationId xmlns:a16="http://schemas.microsoft.com/office/drawing/2014/main" id="{60B7304E-4F61-40B8-9568-3A46AA0656E5}"/>
+              </a:ext>
+            </a:extLst>
+          </p:cNvPr>
+          <p:cNvSpPr>
+            <a:spLocks xmlns:a="http://schemas.openxmlformats.org/drawingml/2006/main" noGrp="1"/>
+          </p:cNvSpPr>
+          <p:nvPr/>
+        </p:nvSpPr>
+        <p:spPr>
+          <a:xfrm xmlns:a="http://schemas.openxmlformats.org/drawingml/2006/main">
+            <a:off x="457200" y="6515100"/>
+            <a:ext cx="3429000" cy="171450"/>
+          </a:xfrm>
+          <a:prstGeom xmlns:a="http://schemas.openxmlformats.org/drawingml/2006/main" prst="rect">
+            <a:avLst/>
+          </a:prstGeom>
+          <a:noFill xmlns:a="http://schemas.openxmlformats.org/drawingml/2006/main"/>
+          <a:ln xmlns:a="http://schemas.openxmlformats.org/drawingml/2006/main" w="0">
+            <a:noFill/>
+            <a:prstDash val="solid"/>
+          </a:ln>
+        </p:spPr>
+        <p:txBody>
+          <a:bodyPr xmlns:a="http://schemas.openxmlformats.org/drawingml/2006/main" wrap="square" lIns="0" tIns="0" rIns="0" bIns="0" anchor="t">
+            <a:normAutofit fontScale="100000"/>
+          </a:bodyPr>
+          <a:lstStyle xmlns:a="http://schemas.openxmlformats.org/drawingml/2006/main"/>
+          <a:p xmlns:a="http://schemas.openxmlformats.org/drawingml/2006/main">
+            <a:pPr algn="l">
+              <a:buNone/>
+              <a:defRPr sz="1050" b="0">
+                <a:solidFill>
+                  <a:srgbClr val="667384"/>
+                </a:solidFill>
+                <a:latin typeface="Arial"/>
+                <a:ea typeface="Arial"/>
+                <a:cs typeface="Arial"/>
+              </a:defRPr>
+            </a:pPr>
+            <a:r>
+              <a:rPr sz="1050" b="0">
+                <a:solidFill>
+                  <a:srgbClr val="667384"/>
+                </a:solidFill>
+                <a:latin typeface="Arial"/>
+                <a:ea typeface="Arial"/>
+                <a:cs typeface="Arial"/>
+              </a:rPr>
+              <a:t>Adjusted daily TSLA | 2018-2023</a:t>
+            </a:r>
+          </a:p>
+        </p:txBody>
+      </p:sp>
+      <p:sp>
+        <p:nvSpPr>
+          <p:cNvPr id="5" name="footer-number-8">
+            <a:extLst xmlns:a="http://schemas.openxmlformats.org/drawingml/2006/main">
+              <a:ext uri="{FF2B5EF4-FFF2-40B4-BE49-F238E27FC236}">
+                <a16:creationId xmlns:a16="http://schemas.microsoft.com/office/drawing/2014/main" id="{A2FDA8B5-1121-4016-B34F-180F19066411}"/>
+              </a:ext>
+            </a:extLst>
+          </p:cNvPr>
+          <p:cNvSpPr>
+            <a:spLocks xmlns:a="http://schemas.openxmlformats.org/drawingml/2006/main" noGrp="1"/>
+          </p:cNvSpPr>
+          <p:nvPr/>
+        </p:nvSpPr>
+        <p:spPr>
+          <a:xfrm xmlns:a="http://schemas.openxmlformats.org/drawingml/2006/main">
+            <a:off x="11239500" y="6496050"/>
+            <a:ext cx="495300" cy="190500"/>
+          </a:xfrm>
+          <a:prstGeom xmlns:a="http://schemas.openxmlformats.org/drawingml/2006/main" prst="rect">
+            <a:avLst/>
+          </a:prstGeom>
+          <a:noFill xmlns:a="http://schemas.openxmlformats.org/drawingml/2006/main"/>
+          <a:ln xmlns:a="http://schemas.openxmlformats.org/drawingml/2006/main" w="0">
+            <a:noFill/>
+            <a:prstDash val="solid"/>
+          </a:ln>
+        </p:spPr>
+        <p:txBody>
+          <a:bodyPr xmlns:a="http://schemas.openxmlformats.org/drawingml/2006/main" wrap="square" lIns="0" tIns="0" rIns="0" bIns="0" anchor="t">
+            <a:normAutofit fontScale="100000"/>
+          </a:bodyPr>
+          <a:lstStyle xmlns:a="http://schemas.openxmlformats.org/drawingml/2006/main"/>
+          <a:p xmlns:a="http://schemas.openxmlformats.org/drawingml/2006/main">
+            <a:pPr algn="r">
+              <a:buNone/>
+              <a:defRPr sz="1050" b="0">
+                <a:solidFill>
+                  <a:srgbClr val="667384"/>
+                </a:solidFill>
+                <a:latin typeface="Arial"/>
+                <a:ea typeface="Arial"/>
+                <a:cs typeface="Arial"/>
+              </a:defRPr>
+            </a:pPr>
+            <a:r>
+              <a:rPr sz="1050" b="0">
+                <a:solidFill>
+                  <a:srgbClr val="667384"/>
+                </a:solidFill>
+                <a:latin typeface="Arial"/>
+                <a:ea typeface="Arial"/>
+                <a:cs typeface="Arial"/>
+              </a:rPr>
+              <a:t>16</a:t>
+            </a:r>
+          </a:p>
+        </p:txBody>
+      </p:sp>
+      <p:sp>
+        <p:nvSpPr>
+          <p:cNvPr id="6" name="">
+            <a:extLst xmlns:a="http://schemas.openxmlformats.org/drawingml/2006/main">
+              <a:ext uri="{FF2B5EF4-FFF2-40B4-BE49-F238E27FC236}">
+                <a16:creationId xmlns:a16="http://schemas.microsoft.com/office/drawing/2014/main" id="{3559974A-1518-4857-8A86-2EF378C5D0E7}"/>
+              </a:ext>
+            </a:extLst>
+          </p:cNvPr>
+          <p:cNvSpPr>
+            <a:spLocks xmlns:a="http://schemas.openxmlformats.org/drawingml/2006/main" noGrp="1"/>
+          </p:cNvSpPr>
+          <p:nvPr/>
+        </p:nvSpPr>
+        <p:spPr>
+          <a:xfrm xmlns:a="http://schemas.openxmlformats.org/drawingml/2006/main">
+            <a:off x="381000" y="1466850"/>
+            <a:ext cx="7905750" cy="4667250"/>
+          </a:xfrm>
+          <a:prstGeom xmlns:a="http://schemas.openxmlformats.org/drawingml/2006/main" prst="rect">
+            <a:avLst/>
+          </a:prstGeom>
+          <a:solidFill xmlns:a="http://schemas.openxmlformats.org/drawingml/2006/main">
+            <a:srgbClr val="FFFFFF"/>
+          </a:solidFill>
+          <a:ln xmlns:a="http://schemas.openxmlformats.org/drawingml/2006/main" w="9525">
+            <a:solidFill>
+              <a:srgbClr val="B8BCC4"/>
+            </a:solidFill>
+            <a:prstDash val="solid"/>
+          </a:ln>
+        </p:spPr>
+      </p:sp>
+      <p:sp>
+        <p:nvSpPr>
+          <p:cNvPr id="8" name="">
+            <a:extLst xmlns:a="http://schemas.openxmlformats.org/drawingml/2006/main">
+              <a:ext uri="{FF2B5EF4-FFF2-40B4-BE49-F238E27FC236}">
+                <a16:creationId xmlns:a16="http://schemas.microsoft.com/office/drawing/2014/main" id="{F158CD61-4D23-41B7-A67E-B50BFA3C534B}"/>
+              </a:ext>
+            </a:extLst>
+          </p:cNvPr>
+          <p:cNvSpPr>
+            <a:spLocks xmlns:a="http://schemas.openxmlformats.org/drawingml/2006/main" noGrp="1"/>
+          </p:cNvSpPr>
+          <p:nvPr/>
+        </p:nvSpPr>
+        <p:spPr>
+          <a:xfrm xmlns:a="http://schemas.openxmlformats.org/drawingml/2006/main">
+            <a:off x="8610600" y="1695450"/>
+            <a:ext cx="2857500" cy="1428750"/>
+          </a:xfrm>
+          <a:prstGeom xmlns:a="http://schemas.openxmlformats.org/drawingml/2006/main" prst="rect">
+            <a:avLst/>
+          </a:prstGeom>
+          <a:solidFill xmlns:a="http://schemas.openxmlformats.org/drawingml/2006/main">
+            <a:srgbClr val="EDEDED"/>
+          </a:solidFill>
+          <a:ln xmlns:a="http://schemas.openxmlformats.org/drawingml/2006/main" w="0">
+            <a:solidFill>
+              <a:srgbClr val="EDEDED"/>
+            </a:solidFill>
+            <a:prstDash val="solid"/>
+          </a:ln>
+        </p:spPr>
+      </p:sp>
+      <p:sp>
+        <p:nvSpPr>
+          <p:cNvPr id="9" name="">
+            <a:extLst xmlns:a="http://schemas.openxmlformats.org/drawingml/2006/main">
+              <a:ext uri="{FF2B5EF4-FFF2-40B4-BE49-F238E27FC236}">
+                <a16:creationId xmlns:a16="http://schemas.microsoft.com/office/drawing/2014/main" id="{44C5ED96-F82C-4CF6-8B54-F372EF0D3357}"/>
+              </a:ext>
+            </a:extLst>
+          </p:cNvPr>
+          <p:cNvSpPr>
+            <a:spLocks xmlns:a="http://schemas.openxmlformats.org/drawingml/2006/main" noGrp="1"/>
+          </p:cNvSpPr>
+          <p:nvPr/>
+        </p:nvSpPr>
+        <p:spPr>
+          <a:xfrm xmlns:a="http://schemas.openxmlformats.org/drawingml/2006/main">
+            <a:off x="8610600" y="1695450"/>
+            <a:ext cx="76200" cy="1428750"/>
+          </a:xfrm>
+          <a:prstGeom xmlns:a="http://schemas.openxmlformats.org/drawingml/2006/main" prst="rect">
+            <a:avLst/>
+          </a:prstGeom>
+          <a:solidFill xmlns:a="http://schemas.openxmlformats.org/drawingml/2006/main">
+            <a:srgbClr val="E45756"/>
+          </a:solidFill>
+          <a:ln xmlns:a="http://schemas.openxmlformats.org/drawingml/2006/main" w="0">
+            <a:solidFill>
+              <a:srgbClr val="E45756"/>
+            </a:solidFill>
+            <a:prstDash val="solid"/>
+          </a:ln>
+        </p:spPr>
+      </p:sp>
+      <p:sp>
+        <p:nvSpPr>
+          <p:cNvPr id="10" name="">
+            <a:extLst xmlns:a="http://schemas.openxmlformats.org/drawingml/2006/main">
+              <a:ext uri="{FF2B5EF4-FFF2-40B4-BE49-F238E27FC236}">
+                <a16:creationId xmlns:a16="http://schemas.microsoft.com/office/drawing/2014/main" id="{E9B25F14-87B4-4B00-A519-E1B45B8944EF}"/>
+              </a:ext>
+            </a:extLst>
+          </p:cNvPr>
+          <p:cNvSpPr>
+            <a:spLocks xmlns:a="http://schemas.openxmlformats.org/drawingml/2006/main" noGrp="1"/>
+          </p:cNvSpPr>
+          <p:nvPr/>
+        </p:nvSpPr>
+        <p:spPr>
+          <a:xfrm xmlns:a="http://schemas.openxmlformats.org/drawingml/2006/main">
+            <a:off x="8877300" y="1866900"/>
+            <a:ext cx="2400300" cy="590550"/>
+          </a:xfrm>
+          <a:prstGeom xmlns:a="http://schemas.openxmlformats.org/drawingml/2006/main" prst="rect">
+            <a:avLst/>
+          </a:prstGeom>
+          <a:noFill xmlns:a="http://schemas.openxmlformats.org/drawingml/2006/main"/>
+          <a:ln xmlns:a="http://schemas.openxmlformats.org/drawingml/2006/main" w="0">
+            <a:noFill/>
+            <a:prstDash val="solid"/>
+          </a:ln>
+        </p:spPr>
+        <p:txBody>
+          <a:bodyPr xmlns:a="http://schemas.openxmlformats.org/drawingml/2006/main" wrap="square" lIns="0" tIns="0" rIns="0" bIns="0" anchor="t">
+            <a:normAutofit fontScale="100000"/>
+          </a:bodyPr>
+          <a:lstStyle xmlns:a="http://schemas.openxmlformats.org/drawingml/2006/main"/>
+          <a:p xmlns:a="http://schemas.openxmlformats.org/drawingml/2006/main">
+            <a:pPr algn="l">
+              <a:buNone/>
+              <a:defRPr sz="3225" b="1">
+                <a:solidFill>
+                  <a:srgbClr val="E45756"/>
+                </a:solidFill>
+                <a:latin typeface="Arial"/>
+                <a:ea typeface="Arial"/>
+                <a:cs typeface="Arial"/>
+              </a:defRPr>
+            </a:pPr>
+            <a:r>
+              <a:rPr sz="3225" b="1">
+                <a:solidFill>
+                  <a:srgbClr val="E45756"/>
+                </a:solidFill>
+                <a:latin typeface="Arial"/>
+                <a:ea typeface="Arial"/>
+                <a:cs typeface="Arial"/>
+              </a:rPr>
+              <a:t>+8.1 pp</a:t>
+            </a:r>
+          </a:p>
+        </p:txBody>
+      </p:sp>
+      <p:sp>
+        <p:nvSpPr>
+          <p:cNvPr id="11" name="">
+            <a:extLst xmlns:a="http://schemas.openxmlformats.org/drawingml/2006/main">
+              <a:ext uri="{FF2B5EF4-FFF2-40B4-BE49-F238E27FC236}">
+                <a16:creationId xmlns:a16="http://schemas.microsoft.com/office/drawing/2014/main" id="{272C7F50-11E4-4D99-A2B2-ED17DA9ED760}"/>
+              </a:ext>
+            </a:extLst>
+          </p:cNvPr>
+          <p:cNvSpPr>
+            <a:spLocks xmlns:a="http://schemas.openxmlformats.org/drawingml/2006/main" noGrp="1"/>
+          </p:cNvSpPr>
+          <p:nvPr/>
+        </p:nvSpPr>
+        <p:spPr>
+          <a:xfrm xmlns:a="http://schemas.openxmlformats.org/drawingml/2006/main">
+            <a:off x="8877300" y="2533650"/>
+            <a:ext cx="2400300" cy="438150"/>
+          </a:xfrm>
+          <a:prstGeom xmlns:a="http://schemas.openxmlformats.org/drawingml/2006/main" prst="rect">
+            <a:avLst/>
+          </a:prstGeom>
+          <a:noFill xmlns:a="http://schemas.openxmlformats.org/drawingml/2006/main"/>
+          <a:ln xmlns:a="http://schemas.openxmlformats.org/drawingml/2006/main" w="0">
+            <a:noFill/>
+            <a:prstDash val="solid"/>
+          </a:ln>
+        </p:spPr>
+        <p:txBody>
+          <a:bodyPr xmlns:a="http://schemas.openxmlformats.org/drawingml/2006/main" wrap="square" lIns="0" tIns="0" rIns="0" bIns="0" anchor="t">
+            <a:normAutofit fontScale="100000"/>
+          </a:bodyPr>
+          <a:lstStyle xmlns:a="http://schemas.openxmlformats.org/drawingml/2006/main"/>
+          <a:p xmlns:a="http://schemas.openxmlformats.org/drawingml/2006/main">
+            <a:pPr algn="l">
+              <a:buNone/>
+              <a:defRPr sz="1350" b="0">
+                <a:solidFill>
+                  <a:srgbClr val="273548"/>
+                </a:solidFill>
+                <a:latin typeface="Arial"/>
+                <a:ea typeface="Arial"/>
+                <a:cs typeface="Arial"/>
+              </a:defRPr>
+            </a:pPr>
+            <a:r>
+              <a:rPr sz="1350" b="0">
+                <a:solidFill>
+                  <a:srgbClr val="273548"/>
+                </a:solidFill>
+                <a:latin typeface="Arial"/>
+                <a:ea typeface="Arial"/>
+                <a:cs typeface="Arial"/>
+              </a:rPr>
+              <a:t>largest raw-sign difference with p &lt; 0.05</a:t>
+            </a:r>
+          </a:p>
+        </p:txBody>
+      </p:sp>
+      <p:sp>
+        <p:nvSpPr>
+          <p:cNvPr id="12" name="">
+            <a:extLst xmlns:a="http://schemas.openxmlformats.org/drawingml/2006/main">
+              <a:ext uri="{FF2B5EF4-FFF2-40B4-BE49-F238E27FC236}">
+                <a16:creationId xmlns:a16="http://schemas.microsoft.com/office/drawing/2014/main" id="{5C03A160-F567-45AF-99BA-FC078BEAD28C}"/>
+              </a:ext>
+            </a:extLst>
+          </p:cNvPr>
+          <p:cNvSpPr>
+            <a:spLocks xmlns:a="http://schemas.openxmlformats.org/drawingml/2006/main" noGrp="1"/>
+          </p:cNvSpPr>
+          <p:nvPr/>
+        </p:nvSpPr>
+        <p:spPr>
+          <a:xfrm xmlns:a="http://schemas.openxmlformats.org/drawingml/2006/main">
+            <a:off x="8610600" y="3371850"/>
+            <a:ext cx="2857500" cy="1428750"/>
+          </a:xfrm>
+          <a:prstGeom xmlns:a="http://schemas.openxmlformats.org/drawingml/2006/main" prst="rect">
+            <a:avLst/>
+          </a:prstGeom>
+          <a:solidFill xmlns:a="http://schemas.openxmlformats.org/drawingml/2006/main">
+            <a:srgbClr val="EDEDED"/>
+          </a:solidFill>
+          <a:ln xmlns:a="http://schemas.openxmlformats.org/drawingml/2006/main" w="0">
+            <a:solidFill>
+              <a:srgbClr val="EDEDED"/>
+            </a:solidFill>
+            <a:prstDash val="solid"/>
+          </a:ln>
+        </p:spPr>
+      </p:sp>
+      <p:sp>
+        <p:nvSpPr>
+          <p:cNvPr id="13" name="">
+            <a:extLst xmlns:a="http://schemas.openxmlformats.org/drawingml/2006/main">
+              <a:ext uri="{FF2B5EF4-FFF2-40B4-BE49-F238E27FC236}">
+                <a16:creationId xmlns:a16="http://schemas.microsoft.com/office/drawing/2014/main" id="{CF71FC31-69FB-4152-99F6-85AD4E4D1518}"/>
+              </a:ext>
+            </a:extLst>
+          </p:cNvPr>
+          <p:cNvSpPr>
+            <a:spLocks xmlns:a="http://schemas.openxmlformats.org/drawingml/2006/main" noGrp="1"/>
+          </p:cNvSpPr>
+          <p:nvPr/>
+        </p:nvSpPr>
+        <p:spPr>
+          <a:xfrm xmlns:a="http://schemas.openxmlformats.org/drawingml/2006/main">
+            <a:off x="8610600" y="3371850"/>
+            <a:ext cx="76200" cy="1428750"/>
+          </a:xfrm>
+          <a:prstGeom xmlns:a="http://schemas.openxmlformats.org/drawingml/2006/main" prst="rect">
+            <a:avLst/>
+          </a:prstGeom>
+          <a:solidFill xmlns:a="http://schemas.openxmlformats.org/drawingml/2006/main">
+            <a:srgbClr val="2A9D6F"/>
+          </a:solidFill>
+          <a:ln xmlns:a="http://schemas.openxmlformats.org/drawingml/2006/main" w="0">
+            <a:solidFill>
+              <a:srgbClr val="2A9D6F"/>
+            </a:solidFill>
+            <a:prstDash val="solid"/>
+          </a:ln>
+        </p:spPr>
+      </p:sp>
+      <p:sp>
+        <p:nvSpPr>
+          <p:cNvPr id="14" name="">
+            <a:extLst xmlns:a="http://schemas.openxmlformats.org/drawingml/2006/main">
+              <a:ext uri="{FF2B5EF4-FFF2-40B4-BE49-F238E27FC236}">
+                <a16:creationId xmlns:a16="http://schemas.microsoft.com/office/drawing/2014/main" id="{8ED9501F-EB23-41C7-BC9F-0DCAF5ED836D}"/>
+              </a:ext>
+            </a:extLst>
+          </p:cNvPr>
+          <p:cNvSpPr>
+            <a:spLocks xmlns:a="http://schemas.openxmlformats.org/drawingml/2006/main" noGrp="1"/>
+          </p:cNvSpPr>
+          <p:nvPr/>
+        </p:nvSpPr>
+        <p:spPr>
+          <a:xfrm xmlns:a="http://schemas.openxmlformats.org/drawingml/2006/main">
+            <a:off x="8877300" y="3543300"/>
+            <a:ext cx="2400300" cy="590550"/>
+          </a:xfrm>
+          <a:prstGeom xmlns:a="http://schemas.openxmlformats.org/drawingml/2006/main" prst="rect">
+            <a:avLst/>
+          </a:prstGeom>
+          <a:noFill xmlns:a="http://schemas.openxmlformats.org/drawingml/2006/main"/>
+          <a:ln xmlns:a="http://schemas.openxmlformats.org/drawingml/2006/main" w="0">
+            <a:noFill/>
+            <a:prstDash val="solid"/>
+          </a:ln>
+        </p:spPr>
+        <p:txBody>
+          <a:bodyPr xmlns:a="http://schemas.openxmlformats.org/drawingml/2006/main" wrap="square" lIns="0" tIns="0" rIns="0" bIns="0" anchor="t">
+            <a:normAutofit fontScale="100000"/>
+          </a:bodyPr>
+          <a:lstStyle xmlns:a="http://schemas.openxmlformats.org/drawingml/2006/main"/>
+          <a:p xmlns:a="http://schemas.openxmlformats.org/drawingml/2006/main">
+            <a:pPr algn="l">
+              <a:buNone/>
+              <a:defRPr sz="3225" b="1">
+                <a:solidFill>
+                  <a:srgbClr val="2A9D6F"/>
+                </a:solidFill>
+                <a:latin typeface="Arial"/>
+                <a:ea typeface="Arial"/>
+                <a:cs typeface="Arial"/>
+              </a:defRPr>
+            </a:pPr>
+            <a:r>
+              <a:rPr sz="3225" b="1">
+                <a:solidFill>
+                  <a:srgbClr val="2A9D6F"/>
+                </a:solidFill>
+                <a:latin typeface="Arial"/>
+                <a:ea typeface="Arial"/>
+                <a:cs typeface="Arial"/>
+              </a:rPr>
+              <a:t>0 / 81</a:t>
+            </a:r>
+          </a:p>
+        </p:txBody>
+      </p:sp>
+      <p:sp>
+        <p:nvSpPr>
+          <p:cNvPr id="15" name="">
+            <a:extLst xmlns:a="http://schemas.openxmlformats.org/drawingml/2006/main">
+              <a:ext uri="{FF2B5EF4-FFF2-40B4-BE49-F238E27FC236}">
+                <a16:creationId xmlns:a16="http://schemas.microsoft.com/office/drawing/2014/main" id="{1A5E9C93-AD93-49F0-B4EC-ABFC15BEED2F}"/>
+              </a:ext>
+            </a:extLst>
+          </p:cNvPr>
+          <p:cNvSpPr>
+            <a:spLocks xmlns:a="http://schemas.openxmlformats.org/drawingml/2006/main" noGrp="1"/>
+          </p:cNvSpPr>
+          <p:nvPr/>
+        </p:nvSpPr>
+        <p:spPr>
+          <a:xfrm xmlns:a="http://schemas.openxmlformats.org/drawingml/2006/main">
+            <a:off x="8877300" y="4210050"/>
+            <a:ext cx="2400300" cy="438150"/>
+          </a:xfrm>
+          <a:prstGeom xmlns:a="http://schemas.openxmlformats.org/drawingml/2006/main" prst="rect">
+            <a:avLst/>
+          </a:prstGeom>
+          <a:noFill xmlns:a="http://schemas.openxmlformats.org/drawingml/2006/main"/>
+          <a:ln xmlns:a="http://schemas.openxmlformats.org/drawingml/2006/main" w="0">
+            <a:noFill/>
+            <a:prstDash val="solid"/>
+          </a:ln>
+        </p:spPr>
+        <p:txBody>
+          <a:bodyPr xmlns:a="http://schemas.openxmlformats.org/drawingml/2006/main" wrap="square" lIns="0" tIns="0" rIns="0" bIns="0" anchor="t">
+            <a:normAutofit fontScale="100000"/>
+          </a:bodyPr>
+          <a:lstStyle xmlns:a="http://schemas.openxmlformats.org/drawingml/2006/main"/>
+          <a:p xmlns:a="http://schemas.openxmlformats.org/drawingml/2006/main">
+            <a:pPr algn="l">
+              <a:buNone/>
+              <a:defRPr sz="1350" b="0">
+                <a:solidFill>
+                  <a:srgbClr val="273548"/>
+                </a:solidFill>
+                <a:latin typeface="Arial"/>
+                <a:ea typeface="Arial"/>
+                <a:cs typeface="Arial"/>
+              </a:defRPr>
+            </a:pPr>
+            <a:r>
+              <a:rPr sz="1350" b="0">
+                <a:solidFill>
+                  <a:srgbClr val="273548"/>
+                </a:solidFill>
+                <a:latin typeface="Arial"/>
+                <a:ea typeface="Arial"/>
+                <a:cs typeface="Arial"/>
+              </a:rPr>
+              <a:t>direction cells with BH-FDR q &lt; 0.05</a:t>
+            </a:r>
+          </a:p>
+        </p:txBody>
+      </p:sp>
+      <p:sp>
+        <p:nvSpPr>
+          <p:cNvPr id="16" name="">
+            <a:extLst xmlns:a="http://schemas.openxmlformats.org/drawingml/2006/main">
+              <a:ext uri="{FF2B5EF4-FFF2-40B4-BE49-F238E27FC236}">
+                <a16:creationId xmlns:a16="http://schemas.microsoft.com/office/drawing/2014/main" id="{FC17DD6F-8CEE-4A90-8BD6-690A4FB48045}"/>
+              </a:ext>
+            </a:extLst>
+          </p:cNvPr>
+          <p:cNvSpPr>
+            <a:spLocks xmlns:a="http://schemas.openxmlformats.org/drawingml/2006/main" noGrp="1"/>
+          </p:cNvSpPr>
+          <p:nvPr/>
+        </p:nvSpPr>
+        <p:spPr>
+          <a:xfrm xmlns:a="http://schemas.openxmlformats.org/drawingml/2006/main">
+            <a:off x="8705850" y="5219700"/>
+            <a:ext cx="2667000" cy="800100"/>
+          </a:xfrm>
+          <a:prstGeom xmlns:a="http://schemas.openxmlformats.org/drawingml/2006/main" prst="rect">
+            <a:avLst/>
+          </a:prstGeom>
+          <a:noFill xmlns:a="http://schemas.openxmlformats.org/drawingml/2006/main"/>
+          <a:ln xmlns:a="http://schemas.openxmlformats.org/drawingml/2006/main" w="0">
+            <a:noFill/>
+            <a:prstDash val="solid"/>
+          </a:ln>
+        </p:spPr>
+        <p:txBody>
+          <a:bodyPr xmlns:a="http://schemas.openxmlformats.org/drawingml/2006/main" wrap="square" lIns="0" tIns="0" rIns="0" bIns="0" anchor="t">
+            <a:normAutofit fontScale="87500"/>
+          </a:bodyPr>
+          <a:lstStyle xmlns:a="http://schemas.openxmlformats.org/drawingml/2006/main"/>
+          <a:p xmlns:a="http://schemas.openxmlformats.org/drawingml/2006/main">
+            <a:pPr algn="l">
+              <a:buNone/>
+              <a:defRPr sz="1500" b="1">
+                <a:solidFill>
+                  <a:srgbClr val="273548"/>
+                </a:solidFill>
+                <a:latin typeface="Arial"/>
+                <a:ea typeface="Arial"/>
+                <a:cs typeface="Arial"/>
+              </a:defRPr>
+            </a:pPr>
+            <a:r>
+              <a:rPr sz="1500" b="1">
+                <a:solidFill>
+                  <a:srgbClr val="273548"/>
+                </a:solidFill>
+                <a:latin typeface="Arial"/>
+                <a:ea typeface="Arial"/>
+                <a:cs typeface="Arial"/>
+              </a:rPr>
+              <a:t>Best raw direction p = 0.025 at 10 prior / 3 forward.</a:t>
+            </a:r>
+          </a:p>
+          <a:p xmlns:a="http://schemas.openxmlformats.org/drawingml/2006/main">
+            <a:pPr algn="l">
+              <a:buNone/>
+              <a:defRPr sz="1500" b="1">
+                <a:solidFill>
+                  <a:srgbClr val="273548"/>
+                </a:solidFill>
+                <a:latin typeface="Arial"/>
+                <a:ea typeface="Arial"/>
+                <a:cs typeface="Arial"/>
+              </a:defRPr>
+            </a:pPr>
+            <a:r>
+              <a:rPr sz="1500" b="1">
+                <a:solidFill>
+                  <a:srgbClr val="273548"/>
+                </a:solidFill>
+                <a:latin typeface="Arial"/>
+                <a:ea typeface="Arial"/>
+                <a:cs typeface="Arial"/>
+              </a:rPr>
+              <a:t>BH q = 0.554; nested horizons share data.</a:t>
+            </a:r>
+          </a:p>
+        </p:txBody>
+      </p:sp>
+      <p:pic>
+        <p:nvPicPr>
+          <p:cNvPr id="34" name=""/>
+          <p:cNvPicPr>
+            <a:picLocks xmlns:a="http://schemas.openxmlformats.org/drawingml/2006/main" noChangeAspect="1"/>
+          </p:cNvPicPr>
+          <p:nvPr/>
+        </p:nvPicPr>
+        <p:blipFill>
+          <a:blip xmlns:r="http://schemas.openxmlformats.org/officeDocument/2006/relationships" xmlns:a="http://schemas.openxmlformats.org/drawingml/2006/main" r:embed="R148ed4ad98c5485e"/>
+          <a:stretch xmlns:a="http://schemas.openxmlformats.org/drawingml/2006/main"/>
+        </p:blipFill>
+        <p:spPr>
+          <a:xfrm xmlns:a="http://schemas.openxmlformats.org/drawingml/2006/main" flipH="0" flipV="0">
+            <a:off x="381000" y="1494631"/>
+            <a:ext cx="7905750" cy="4611688"/>
+          </a:xfrm>
+          <a:prstGeom xmlns:a="http://schemas.openxmlformats.org/drawingml/2006/main" prst="rect">
+            <a:avLst/>
+          </a:prstGeom>
+        </p:spPr>
+      </p:pic>
+    </p:spTree>
+    <p:extLst>
+      <p:ext uri="{BB962C8B-B14F-4D97-AF65-F5344CB8AC3E}">
+        <p14:creationId xmlns:p14="http://schemas.microsoft.com/office/powerpoint/2010/main" val="1724043639"/>
+      </p:ext>
+    </p:extLst>
+  </p:cSld>
+</p:sld>
+</file>
+
+<file path=ppt/slides/slide17.xml><?xml version="1.0" encoding="utf-8"?>
+<p:sld xmlns:p="http://schemas.openxmlformats.org/presentationml/2006/main">
+  <p:cSld>
+    <p:bg>
+      <p:bgPr>
+        <a:solidFill xmlns:a="http://schemas.openxmlformats.org/drawingml/2006/main">
+          <a:srgbClr val="FFFFFF"/>
+        </a:solidFill>
+      </p:bgPr>
+    </p:bg>
+    <p:spTree>
+      <p:nvGrpSpPr>
+        <p:cNvPr id="1" name=""/>
+        <p:cNvGrpSpPr/>
+        <p:nvPr/>
+      </p:nvGrpSpPr>
+      <p:grpSpPr>
+        <a:xfrm xmlns:a="http://schemas.openxmlformats.org/drawingml/2006/main"/>
+      </p:grpSpPr>
+      <p:sp>
+        <p:nvSpPr>
+          <p:cNvPr id="24" name="section-11">
+            <a:extLst xmlns:a="http://schemas.openxmlformats.org/drawingml/2006/main">
+              <a:ext uri="{FF2B5EF4-FFF2-40B4-BE49-F238E27FC236}">
+                <a16:creationId xmlns:a16="http://schemas.microsoft.com/office/drawing/2014/main" id="{272ED433-B59C-436C-9DFB-4D317B90A13F}"/>
+              </a:ext>
+            </a:extLst>
+          </p:cNvPr>
+          <p:cNvSpPr>
+            <a:spLocks xmlns:a="http://schemas.openxmlformats.org/drawingml/2006/main" noGrp="1"/>
+          </p:cNvSpPr>
+          <p:nvPr/>
+        </p:nvSpPr>
+        <p:spPr>
+          <a:xfrm xmlns:a="http://schemas.openxmlformats.org/drawingml/2006/main">
+            <a:off x="457200" y="228600"/>
+            <a:ext cx="4191000" cy="228600"/>
+          </a:xfrm>
+          <a:prstGeom xmlns:a="http://schemas.openxmlformats.org/drawingml/2006/main" prst="rect">
+            <a:avLst/>
+          </a:prstGeom>
+          <a:noFill xmlns:a="http://schemas.openxmlformats.org/drawingml/2006/main"/>
+          <a:ln xmlns:a="http://schemas.openxmlformats.org/drawingml/2006/main" w="0">
+            <a:noFill/>
+            <a:prstDash val="solid"/>
+          </a:ln>
+        </p:spPr>
+        <p:txBody>
+          <a:bodyPr xmlns:a="http://schemas.openxmlformats.org/drawingml/2006/main" wrap="square" lIns="0" tIns="0" rIns="0" bIns="0" anchor="t">
+            <a:normAutofit fontScale="100000"/>
+          </a:bodyPr>
+          <a:lstStyle xmlns:a="http://schemas.openxmlformats.org/drawingml/2006/main"/>
+          <a:p xmlns:a="http://schemas.openxmlformats.org/drawingml/2006/main">
+            <a:pPr algn="l">
+              <a:buNone/>
+              <a:defRPr sz="1200" b="1">
+                <a:solidFill>
+                  <a:srgbClr val="667384"/>
+                </a:solidFill>
+                <a:latin typeface="Arial"/>
+                <a:ea typeface="Arial"/>
+                <a:cs typeface="Arial"/>
+              </a:defRPr>
+            </a:pPr>
+            <a:r>
+              <a:rPr sz="1200" b="1">
+                <a:solidFill>
+                  <a:srgbClr val="667384"/>
+                </a:solidFill>
+                <a:latin typeface="Arial"/>
+                <a:ea typeface="Arial"/>
+                <a:cs typeface="Arial"/>
+              </a:rPr>
+              <a:t>TSLA DESCRIPTIVE MICROSCOPE</a:t>
+            </a:r>
+          </a:p>
+        </p:txBody>
+      </p:sp>
+      <p:sp>
+        <p:nvSpPr>
+          <p:cNvPr id="2" name="title-11">
+            <a:extLst xmlns:a="http://schemas.openxmlformats.org/drawingml/2006/main">
+              <a:ext uri="{FF2B5EF4-FFF2-40B4-BE49-F238E27FC236}">
+                <a16:creationId xmlns:a16="http://schemas.microsoft.com/office/drawing/2014/main" id="{3EC40708-7E00-432C-8ECE-907FA5705292}"/>
+              </a:ext>
+            </a:extLst>
+          </p:cNvPr>
+          <p:cNvSpPr>
+            <a:spLocks xmlns:a="http://schemas.openxmlformats.org/drawingml/2006/main" noGrp="1"/>
+          </p:cNvSpPr>
+          <p:nvPr/>
+        </p:nvSpPr>
+        <p:spPr>
+          <a:xfrm xmlns:a="http://schemas.openxmlformats.org/drawingml/2006/main">
+            <a:off x="457200" y="533400"/>
+            <a:ext cx="11277600" cy="628650"/>
+          </a:xfrm>
+          <a:prstGeom xmlns:a="http://schemas.openxmlformats.org/drawingml/2006/main" prst="rect">
+            <a:avLst/>
+          </a:prstGeom>
+          <a:noFill xmlns:a="http://schemas.openxmlformats.org/drawingml/2006/main"/>
+          <a:ln xmlns:a="http://schemas.openxmlformats.org/drawingml/2006/main" w="0">
+            <a:noFill/>
+            <a:prstDash val="solid"/>
+          </a:ln>
+        </p:spPr>
+        <p:txBody>
+          <a:bodyPr xmlns:a="http://schemas.openxmlformats.org/drawingml/2006/main" wrap="square" lIns="0" tIns="0" rIns="0" bIns="0" anchor="t">
+            <a:normAutofit fontScale="100000"/>
+          </a:bodyPr>
+          <a:lstStyle xmlns:a="http://schemas.openxmlformats.org/drawingml/2006/main"/>
+          <a:p xmlns:a="http://schemas.openxmlformats.org/drawingml/2006/main">
+            <a:pPr algn="l">
+              <a:buNone/>
+              <a:defRPr sz="3525" b="1">
+                <a:solidFill>
+                  <a:srgbClr val="000000"/>
+                </a:solidFill>
+                <a:latin typeface="Arial"/>
+                <a:ea typeface="Arial"/>
+                <a:cs typeface="Arial"/>
+              </a:defRPr>
+            </a:pPr>
+            <a:r>
+              <a:rPr sz="3525" b="1">
+                <a:solidFill>
+                  <a:srgbClr val="000000"/>
+                </a:solidFill>
+                <a:latin typeface="Arial"/>
+                <a:ea typeface="Arial"/>
+                <a:cs typeface="Arial"/>
+              </a:rPr>
+              <a:t>What survives the aggregation pass</a:t>
+            </a:r>
+          </a:p>
+        </p:txBody>
+      </p:sp>
+      <p:sp>
+        <p:nvSpPr>
+          <p:cNvPr id="3" name="">
+            <a:extLst xmlns:a="http://schemas.openxmlformats.org/drawingml/2006/main">
+              <a:ext uri="{FF2B5EF4-FFF2-40B4-BE49-F238E27FC236}">
+                <a16:creationId xmlns:a16="http://schemas.microsoft.com/office/drawing/2014/main" id="{D5CA0FCE-75E8-41EF-A76A-23E9E2120C6A}"/>
+              </a:ext>
+            </a:extLst>
+          </p:cNvPr>
+          <p:cNvSpPr>
+            <a:spLocks xmlns:a="http://schemas.openxmlformats.org/drawingml/2006/main" noGrp="1"/>
+          </p:cNvSpPr>
+          <p:nvPr/>
+        </p:nvSpPr>
+        <p:spPr>
+          <a:xfrm xmlns:a="http://schemas.openxmlformats.org/drawingml/2006/main">
+            <a:off x="457200" y="1200150"/>
+            <a:ext cx="11277600" cy="19050"/>
+          </a:xfrm>
+          <a:prstGeom xmlns:a="http://schemas.openxmlformats.org/drawingml/2006/main" prst="rect">
+            <a:avLst/>
+          </a:prstGeom>
+          <a:solidFill xmlns:a="http://schemas.openxmlformats.org/drawingml/2006/main">
+            <a:srgbClr val="B8BCC4"/>
+          </a:solidFill>
+          <a:ln xmlns:a="http://schemas.openxmlformats.org/drawingml/2006/main" w="0">
+            <a:solidFill>
+              <a:srgbClr val="B8BCC4"/>
+            </a:solidFill>
+            <a:prstDash val="solid"/>
+          </a:ln>
+        </p:spPr>
+      </p:sp>
+      <p:sp>
+        <p:nvSpPr>
+          <p:cNvPr id="4" name="footer-left-11">
+            <a:extLst xmlns:a="http://schemas.openxmlformats.org/drawingml/2006/main">
+              <a:ext uri="{FF2B5EF4-FFF2-40B4-BE49-F238E27FC236}">
+                <a16:creationId xmlns:a16="http://schemas.microsoft.com/office/drawing/2014/main" id="{700DA765-80E0-4197-8700-00D867B86FA2}"/>
+              </a:ext>
+            </a:extLst>
+          </p:cNvPr>
+          <p:cNvSpPr>
+            <a:spLocks xmlns:a="http://schemas.openxmlformats.org/drawingml/2006/main" noGrp="1"/>
+          </p:cNvSpPr>
+          <p:nvPr/>
+        </p:nvSpPr>
+        <p:spPr>
+          <a:xfrm xmlns:a="http://schemas.openxmlformats.org/drawingml/2006/main">
+            <a:off x="457200" y="6515100"/>
+            <a:ext cx="3429000" cy="171450"/>
+          </a:xfrm>
+          <a:prstGeom xmlns:a="http://schemas.openxmlformats.org/drawingml/2006/main" prst="rect">
+            <a:avLst/>
+          </a:prstGeom>
+          <a:noFill xmlns:a="http://schemas.openxmlformats.org/drawingml/2006/main"/>
+          <a:ln xmlns:a="http://schemas.openxmlformats.org/drawingml/2006/main" w="0">
+            <a:noFill/>
+            <a:prstDash val="solid"/>
+          </a:ln>
+        </p:spPr>
+        <p:txBody>
+          <a:bodyPr xmlns:a="http://schemas.openxmlformats.org/drawingml/2006/main" wrap="square" lIns="0" tIns="0" rIns="0" bIns="0" anchor="t">
+            <a:normAutofit fontScale="100000"/>
+          </a:bodyPr>
+          <a:lstStyle xmlns:a="http://schemas.openxmlformats.org/drawingml/2006/main"/>
+          <a:p xmlns:a="http://schemas.openxmlformats.org/drawingml/2006/main">
+            <a:pPr algn="l">
+              <a:buNone/>
+              <a:defRPr sz="1050" b="0">
+                <a:solidFill>
+                  <a:srgbClr val="667384"/>
+                </a:solidFill>
+                <a:latin typeface="Arial"/>
+                <a:ea typeface="Arial"/>
+                <a:cs typeface="Arial"/>
+              </a:defRPr>
+            </a:pPr>
+            <a:r>
+              <a:rPr sz="1050" b="0">
+                <a:solidFill>
+                  <a:srgbClr val="667384"/>
+                </a:solidFill>
+                <a:latin typeface="Arial"/>
+                <a:ea typeface="Arial"/>
+                <a:cs typeface="Arial"/>
+              </a:rPr>
+              <a:t>Adjusted daily TSLA | 2018-2023</a:t>
+            </a:r>
+          </a:p>
+        </p:txBody>
+      </p:sp>
+      <p:sp>
+        <p:nvSpPr>
+          <p:cNvPr id="5" name="footer-number-11">
+            <a:extLst xmlns:a="http://schemas.openxmlformats.org/drawingml/2006/main">
+              <a:ext uri="{FF2B5EF4-FFF2-40B4-BE49-F238E27FC236}">
+                <a16:creationId xmlns:a16="http://schemas.microsoft.com/office/drawing/2014/main" id="{83896276-4112-4532-AF7C-776C67C58B77}"/>
+              </a:ext>
+            </a:extLst>
+          </p:cNvPr>
+          <p:cNvSpPr>
+            <a:spLocks xmlns:a="http://schemas.openxmlformats.org/drawingml/2006/main" noGrp="1"/>
+          </p:cNvSpPr>
+          <p:nvPr/>
+        </p:nvSpPr>
+        <p:spPr>
+          <a:xfrm xmlns:a="http://schemas.openxmlformats.org/drawingml/2006/main">
+            <a:off x="11239500" y="6496050"/>
+            <a:ext cx="495300" cy="190500"/>
+          </a:xfrm>
+          <a:prstGeom xmlns:a="http://schemas.openxmlformats.org/drawingml/2006/main" prst="rect">
+            <a:avLst/>
+          </a:prstGeom>
+          <a:noFill xmlns:a="http://schemas.openxmlformats.org/drawingml/2006/main"/>
+          <a:ln xmlns:a="http://schemas.openxmlformats.org/drawingml/2006/main" w="0">
+            <a:noFill/>
+            <a:prstDash val="solid"/>
+          </a:ln>
+        </p:spPr>
+        <p:txBody>
+          <a:bodyPr xmlns:a="http://schemas.openxmlformats.org/drawingml/2006/main" wrap="square" lIns="0" tIns="0" rIns="0" bIns="0" anchor="t">
+            <a:normAutofit fontScale="100000"/>
+          </a:bodyPr>
+          <a:lstStyle xmlns:a="http://schemas.openxmlformats.org/drawingml/2006/main"/>
+          <a:p xmlns:a="http://schemas.openxmlformats.org/drawingml/2006/main">
+            <a:pPr algn="r">
+              <a:buNone/>
+              <a:defRPr sz="1050" b="0">
+                <a:solidFill>
+                  <a:srgbClr val="667384"/>
+                </a:solidFill>
+                <a:latin typeface="Arial"/>
+                <a:ea typeface="Arial"/>
+                <a:cs typeface="Arial"/>
+              </a:defRPr>
+            </a:pPr>
+            <a:r>
+              <a:rPr sz="1050" b="0">
+                <a:solidFill>
+                  <a:srgbClr val="667384"/>
+                </a:solidFill>
+                <a:latin typeface="Arial"/>
+                <a:ea typeface="Arial"/>
+                <a:cs typeface="Arial"/>
+              </a:rPr>
+              <a:t>17</a:t>
+            </a:r>
+          </a:p>
+        </p:txBody>
+      </p:sp>
+      <p:sp>
+        <p:nvSpPr>
+          <p:cNvPr id="6" name="">
+            <a:extLst xmlns:a="http://schemas.openxmlformats.org/drawingml/2006/main">
+              <a:ext uri="{FF2B5EF4-FFF2-40B4-BE49-F238E27FC236}">
+                <a16:creationId xmlns:a16="http://schemas.microsoft.com/office/drawing/2014/main" id="{10F4BA85-46C5-47BD-BA74-EC806E663D58}"/>
+              </a:ext>
+            </a:extLst>
+          </p:cNvPr>
+          <p:cNvSpPr>
+            <a:spLocks xmlns:a="http://schemas.openxmlformats.org/drawingml/2006/main" noGrp="1"/>
+          </p:cNvSpPr>
+          <p:nvPr/>
+        </p:nvSpPr>
+        <p:spPr>
+          <a:xfrm xmlns:a="http://schemas.openxmlformats.org/drawingml/2006/main">
+            <a:off x="552450" y="1600200"/>
+            <a:ext cx="95250" cy="895350"/>
+          </a:xfrm>
+          <a:prstGeom xmlns:a="http://schemas.openxmlformats.org/drawingml/2006/main" prst="rect">
+            <a:avLst/>
+          </a:prstGeom>
+          <a:solidFill xmlns:a="http://schemas.openxmlformats.org/drawingml/2006/main">
+            <a:srgbClr val="E45756"/>
+          </a:solidFill>
+          <a:ln xmlns:a="http://schemas.openxmlformats.org/drawingml/2006/main" w="0">
+            <a:solidFill>
+              <a:srgbClr val="E45756"/>
+            </a:solidFill>
+            <a:prstDash val="solid"/>
+          </a:ln>
+        </p:spPr>
+      </p:sp>
+      <p:sp>
+        <p:nvSpPr>
+          <p:cNvPr id="7" name="">
+            <a:extLst xmlns:a="http://schemas.openxmlformats.org/drawingml/2006/main">
+              <a:ext uri="{FF2B5EF4-FFF2-40B4-BE49-F238E27FC236}">
+                <a16:creationId xmlns:a16="http://schemas.microsoft.com/office/drawing/2014/main" id="{7EF5B945-9D04-48FA-BA66-96DE813A9715}"/>
+              </a:ext>
+            </a:extLst>
+          </p:cNvPr>
+          <p:cNvSpPr>
+            <a:spLocks xmlns:a="http://schemas.openxmlformats.org/drawingml/2006/main" noGrp="1"/>
+          </p:cNvSpPr>
+          <p:nvPr/>
+        </p:nvSpPr>
+        <p:spPr>
+          <a:xfrm xmlns:a="http://schemas.openxmlformats.org/drawingml/2006/main">
+            <a:off x="876300" y="1581150"/>
+            <a:ext cx="2095500" cy="285750"/>
+          </a:xfrm>
+          <a:prstGeom xmlns:a="http://schemas.openxmlformats.org/drawingml/2006/main" prst="rect">
+            <a:avLst/>
+          </a:prstGeom>
+          <a:noFill xmlns:a="http://schemas.openxmlformats.org/drawingml/2006/main"/>
+          <a:ln xmlns:a="http://schemas.openxmlformats.org/drawingml/2006/main" w="0">
+            <a:noFill/>
+            <a:prstDash val="solid"/>
+          </a:ln>
+        </p:spPr>
+        <p:txBody>
+          <a:bodyPr xmlns:a="http://schemas.openxmlformats.org/drawingml/2006/main" wrap="square" lIns="0" tIns="0" rIns="0" bIns="0" anchor="t">
+            <a:normAutofit fontScale="100000"/>
+          </a:bodyPr>
+          <a:lstStyle xmlns:a="http://schemas.openxmlformats.org/drawingml/2006/main"/>
+          <a:p xmlns:a="http://schemas.openxmlformats.org/drawingml/2006/main">
+            <a:pPr algn="l">
+              <a:buNone/>
+              <a:defRPr sz="1350" b="1">
+                <a:solidFill>
+                  <a:srgbClr val="E45756"/>
+                </a:solidFill>
+                <a:latin typeface="Arial"/>
+                <a:ea typeface="Arial"/>
+                <a:cs typeface="Arial"/>
+              </a:defRPr>
+            </a:pPr>
+            <a:r>
+              <a:rPr sz="1350" b="1">
+                <a:solidFill>
+                  <a:srgbClr val="E45756"/>
+                </a:solidFill>
+                <a:latin typeface="Arial"/>
+                <a:ea typeface="Arial"/>
+                <a:cs typeface="Arial"/>
+              </a:rPr>
+              <a:t>GRID PATTERN</a:t>
+            </a:r>
+          </a:p>
+        </p:txBody>
+      </p:sp>
+      <p:sp>
+        <p:nvSpPr>
+          <p:cNvPr id="8" name="">
+            <a:extLst xmlns:a="http://schemas.openxmlformats.org/drawingml/2006/main">
+              <a:ext uri="{FF2B5EF4-FFF2-40B4-BE49-F238E27FC236}">
+                <a16:creationId xmlns:a16="http://schemas.microsoft.com/office/drawing/2014/main" id="{655CF75D-5F23-4C7F-BE9C-764036D0B9E8}"/>
+              </a:ext>
+            </a:extLst>
+          </p:cNvPr>
+          <p:cNvSpPr>
+            <a:spLocks xmlns:a="http://schemas.openxmlformats.org/drawingml/2006/main" noGrp="1"/>
+          </p:cNvSpPr>
+          <p:nvPr/>
+        </p:nvSpPr>
+        <p:spPr>
+          <a:xfrm xmlns:a="http://schemas.openxmlformats.org/drawingml/2006/main">
+            <a:off x="3105150" y="1562100"/>
+            <a:ext cx="4762500" cy="419100"/>
+          </a:xfrm>
+          <a:prstGeom xmlns:a="http://schemas.openxmlformats.org/drawingml/2006/main" prst="rect">
+            <a:avLst/>
+          </a:prstGeom>
+          <a:noFill xmlns:a="http://schemas.openxmlformats.org/drawingml/2006/main"/>
+          <a:ln xmlns:a="http://schemas.openxmlformats.org/drawingml/2006/main" w="0">
+            <a:noFill/>
+            <a:prstDash val="solid"/>
+          </a:ln>
+        </p:spPr>
+        <p:txBody>
+          <a:bodyPr xmlns:a="http://schemas.openxmlformats.org/drawingml/2006/main" wrap="square" lIns="0" tIns="0" rIns="0" bIns="0" anchor="t">
+            <a:normAutofit fontScale="75036"/>
+          </a:bodyPr>
+          <a:lstStyle xmlns:a="http://schemas.openxmlformats.org/drawingml/2006/main"/>
+          <a:p xmlns:a="http://schemas.openxmlformats.org/drawingml/2006/main">
+            <a:pPr algn="l">
+              <a:buNone/>
+              <a:defRPr sz="1950" b="1">
+                <a:solidFill>
+                  <a:srgbClr val="273548"/>
+                </a:solidFill>
+                <a:latin typeface="Arial"/>
+                <a:ea typeface="Arial"/>
+                <a:cs typeface="Arial"/>
+              </a:defRPr>
+            </a:pPr>
+            <a:r>
+              <a:rPr sz="1950" b="1">
+                <a:solidFill>
+                  <a:srgbClr val="273548"/>
+                </a:solidFill>
+                <a:latin typeface="Arial"/>
+                <a:ea typeface="Arial"/>
+                <a:cs typeface="Arial"/>
+              </a:rPr>
+              <a:t>A coherent positive ridge appears near 5–10 sessions</a:t>
+            </a:r>
+          </a:p>
+        </p:txBody>
+      </p:sp>
+      <p:sp>
+        <p:nvSpPr>
+          <p:cNvPr id="9" name="">
+            <a:extLst xmlns:a="http://schemas.openxmlformats.org/drawingml/2006/main">
+              <a:ext uri="{FF2B5EF4-FFF2-40B4-BE49-F238E27FC236}">
+                <a16:creationId xmlns:a16="http://schemas.microsoft.com/office/drawing/2014/main" id="{3E0B76F2-4514-4DD8-934B-ABE42A34E950}"/>
+              </a:ext>
+            </a:extLst>
+          </p:cNvPr>
+          <p:cNvSpPr>
+            <a:spLocks xmlns:a="http://schemas.openxmlformats.org/drawingml/2006/main" noGrp="1"/>
+          </p:cNvSpPr>
+          <p:nvPr/>
+        </p:nvSpPr>
+        <p:spPr>
+          <a:xfrm xmlns:a="http://schemas.openxmlformats.org/drawingml/2006/main">
+            <a:off x="8096250" y="1581150"/>
+            <a:ext cx="3333750" cy="704850"/>
+          </a:xfrm>
+          <a:prstGeom xmlns:a="http://schemas.openxmlformats.org/drawingml/2006/main" prst="rect">
+            <a:avLst/>
+          </a:prstGeom>
+          <a:noFill xmlns:a="http://schemas.openxmlformats.org/drawingml/2006/main"/>
+          <a:ln xmlns:a="http://schemas.openxmlformats.org/drawingml/2006/main" w="0">
+            <a:noFill/>
+            <a:prstDash val="solid"/>
+          </a:ln>
+        </p:spPr>
+        <p:txBody>
+          <a:bodyPr xmlns:a="http://schemas.openxmlformats.org/drawingml/2006/main" wrap="square" lIns="0" tIns="0" rIns="0" bIns="0" anchor="t">
+            <a:normAutofit fontScale="100000"/>
+          </a:bodyPr>
+          <a:lstStyle xmlns:a="http://schemas.openxmlformats.org/drawingml/2006/main"/>
+          <a:p xmlns:a="http://schemas.openxmlformats.org/drawingml/2006/main">
+            <a:pPr algn="l">
+              <a:buNone/>
+              <a:defRPr sz="1425" b="0">
+                <a:solidFill>
+                  <a:srgbClr val="667384"/>
+                </a:solidFill>
+                <a:latin typeface="Arial"/>
+                <a:ea typeface="Arial"/>
+                <a:cs typeface="Arial"/>
+              </a:defRPr>
+            </a:pPr>
+            <a:r>
+              <a:rPr sz="1425" b="0">
+                <a:solidFill>
+                  <a:srgbClr val="667384"/>
+                </a:solidFill>
+                <a:latin typeface="Arial"/>
+                <a:ea typeface="Arial"/>
+                <a:cs typeface="Arial"/>
+              </a:rPr>
+              <a:t>Max Pearson +0.092 at 5 prior / 10 forward</a:t>
+            </a:r>
+          </a:p>
+        </p:txBody>
+      </p:sp>
+      <p:sp>
+        <p:nvSpPr>
+          <p:cNvPr id="10" name="">
+            <a:extLst xmlns:a="http://schemas.openxmlformats.org/drawingml/2006/main">
+              <a:ext uri="{FF2B5EF4-FFF2-40B4-BE49-F238E27FC236}">
+                <a16:creationId xmlns:a16="http://schemas.microsoft.com/office/drawing/2014/main" id="{294777C3-6D2F-4277-840E-7E984FB4554D}"/>
+              </a:ext>
+            </a:extLst>
+          </p:cNvPr>
+          <p:cNvSpPr>
+            <a:spLocks xmlns:a="http://schemas.openxmlformats.org/drawingml/2006/main" noGrp="1"/>
+          </p:cNvSpPr>
+          <p:nvPr/>
+        </p:nvSpPr>
+        <p:spPr>
+          <a:xfrm xmlns:a="http://schemas.openxmlformats.org/drawingml/2006/main">
+            <a:off x="876300" y="2590800"/>
+            <a:ext cx="10553700" cy="9525"/>
+          </a:xfrm>
+          <a:prstGeom xmlns:a="http://schemas.openxmlformats.org/drawingml/2006/main" prst="rect">
+            <a:avLst/>
+          </a:prstGeom>
+          <a:solidFill xmlns:a="http://schemas.openxmlformats.org/drawingml/2006/main">
+            <a:srgbClr val="B8BCC4"/>
+          </a:solidFill>
+          <a:ln xmlns:a="http://schemas.openxmlformats.org/drawingml/2006/main" w="0">
+            <a:solidFill>
+              <a:srgbClr val="B8BCC4"/>
+            </a:solidFill>
+            <a:prstDash val="solid"/>
+          </a:ln>
+        </p:spPr>
+      </p:sp>
+      <p:sp>
+        <p:nvSpPr>
+          <p:cNvPr id="11" name="">
+            <a:extLst xmlns:a="http://schemas.openxmlformats.org/drawingml/2006/main">
+              <a:ext uri="{FF2B5EF4-FFF2-40B4-BE49-F238E27FC236}">
+                <a16:creationId xmlns:a16="http://schemas.microsoft.com/office/drawing/2014/main" id="{F894CF3F-AD63-423C-8F01-64C507896579}"/>
+              </a:ext>
+            </a:extLst>
+          </p:cNvPr>
+          <p:cNvSpPr>
+            <a:spLocks xmlns:a="http://schemas.openxmlformats.org/drawingml/2006/main" noGrp="1"/>
+          </p:cNvSpPr>
+          <p:nvPr/>
+        </p:nvSpPr>
+        <p:spPr>
+          <a:xfrm xmlns:a="http://schemas.openxmlformats.org/drawingml/2006/main">
+            <a:off x="552450" y="2800350"/>
+            <a:ext cx="95250" cy="895350"/>
+          </a:xfrm>
+          <a:prstGeom xmlns:a="http://schemas.openxmlformats.org/drawingml/2006/main" prst="rect">
+            <a:avLst/>
+          </a:prstGeom>
+          <a:solidFill xmlns:a="http://schemas.openxmlformats.org/drawingml/2006/main">
+            <a:srgbClr val="2A9D6F"/>
+          </a:solidFill>
+          <a:ln xmlns:a="http://schemas.openxmlformats.org/drawingml/2006/main" w="0">
+            <a:solidFill>
+              <a:srgbClr val="2A9D6F"/>
+            </a:solidFill>
+            <a:prstDash val="solid"/>
+          </a:ln>
+        </p:spPr>
+      </p:sp>
+      <p:sp>
+        <p:nvSpPr>
+          <p:cNvPr id="12" name="">
+            <a:extLst xmlns:a="http://schemas.openxmlformats.org/drawingml/2006/main">
+              <a:ext uri="{FF2B5EF4-FFF2-40B4-BE49-F238E27FC236}">
+                <a16:creationId xmlns:a16="http://schemas.microsoft.com/office/drawing/2014/main" id="{D3953D03-6A7A-4FEE-B242-02BF0319C169}"/>
+              </a:ext>
+            </a:extLst>
+          </p:cNvPr>
+          <p:cNvSpPr>
+            <a:spLocks xmlns:a="http://schemas.openxmlformats.org/drawingml/2006/main" noGrp="1"/>
+          </p:cNvSpPr>
+          <p:nvPr/>
+        </p:nvSpPr>
+        <p:spPr>
+          <a:xfrm xmlns:a="http://schemas.openxmlformats.org/drawingml/2006/main">
+            <a:off x="876300" y="2781300"/>
+            <a:ext cx="2095500" cy="285750"/>
+          </a:xfrm>
+          <a:prstGeom xmlns:a="http://schemas.openxmlformats.org/drawingml/2006/main" prst="rect">
+            <a:avLst/>
+          </a:prstGeom>
+          <a:noFill xmlns:a="http://schemas.openxmlformats.org/drawingml/2006/main"/>
+          <a:ln xmlns:a="http://schemas.openxmlformats.org/drawingml/2006/main" w="0">
+            <a:noFill/>
+            <a:prstDash val="solid"/>
+          </a:ln>
+        </p:spPr>
+        <p:txBody>
+          <a:bodyPr xmlns:a="http://schemas.openxmlformats.org/drawingml/2006/main" wrap="square" lIns="0" tIns="0" rIns="0" bIns="0" anchor="t">
+            <a:normAutofit fontScale="100000"/>
+          </a:bodyPr>
+          <a:lstStyle xmlns:a="http://schemas.openxmlformats.org/drawingml/2006/main"/>
+          <a:p xmlns:a="http://schemas.openxmlformats.org/drawingml/2006/main">
+            <a:pPr algn="l">
+              <a:buNone/>
+              <a:defRPr sz="1350" b="1">
+                <a:solidFill>
+                  <a:srgbClr val="2A9D6F"/>
+                </a:solidFill>
+                <a:latin typeface="Arial"/>
+                <a:ea typeface="Arial"/>
+                <a:cs typeface="Arial"/>
+              </a:defRPr>
+            </a:pPr>
+            <a:r>
+              <a:rPr sz="1350" b="1">
+                <a:solidFill>
+                  <a:srgbClr val="2A9D6F"/>
+                </a:solidFill>
+                <a:latin typeface="Arial"/>
+                <a:ea typeface="Arial"/>
+                <a:cs typeface="Arial"/>
+              </a:rPr>
+              <a:t>UNCERTAINTY</a:t>
+            </a:r>
+          </a:p>
+        </p:txBody>
+      </p:sp>
+      <p:sp>
+        <p:nvSpPr>
+          <p:cNvPr id="13" name="">
+            <a:extLst xmlns:a="http://schemas.openxmlformats.org/drawingml/2006/main">
+              <a:ext uri="{FF2B5EF4-FFF2-40B4-BE49-F238E27FC236}">
+                <a16:creationId xmlns:a16="http://schemas.microsoft.com/office/drawing/2014/main" id="{52D1DBE8-EAF6-4492-89E7-5C97A3A6A395}"/>
+              </a:ext>
+            </a:extLst>
+          </p:cNvPr>
+          <p:cNvSpPr>
+            <a:spLocks xmlns:a="http://schemas.openxmlformats.org/drawingml/2006/main" noGrp="1"/>
+          </p:cNvSpPr>
+          <p:nvPr/>
+        </p:nvSpPr>
+        <p:spPr>
+          <a:xfrm xmlns:a="http://schemas.openxmlformats.org/drawingml/2006/main">
+            <a:off x="3105150" y="2762250"/>
+            <a:ext cx="4762500" cy="419100"/>
+          </a:xfrm>
+          <a:prstGeom xmlns:a="http://schemas.openxmlformats.org/drawingml/2006/main" prst="rect">
+            <a:avLst/>
+          </a:prstGeom>
+          <a:noFill xmlns:a="http://schemas.openxmlformats.org/drawingml/2006/main"/>
+          <a:ln xmlns:a="http://schemas.openxmlformats.org/drawingml/2006/main" w="0">
+            <a:noFill/>
+            <a:prstDash val="solid"/>
+          </a:ln>
+        </p:spPr>
+        <p:txBody>
+          <a:bodyPr xmlns:a="http://schemas.openxmlformats.org/drawingml/2006/main" wrap="square" lIns="0" tIns="0" rIns="0" bIns="0" anchor="t">
+            <a:normAutofit fontScale="87621"/>
+          </a:bodyPr>
+          <a:lstStyle xmlns:a="http://schemas.openxmlformats.org/drawingml/2006/main"/>
+          <a:p xmlns:a="http://schemas.openxmlformats.org/drawingml/2006/main">
+            <a:pPr algn="l">
+              <a:buNone/>
+              <a:defRPr sz="1950" b="1">
+                <a:solidFill>
+                  <a:srgbClr val="273548"/>
+                </a:solidFill>
+                <a:latin typeface="Arial"/>
+                <a:ea typeface="Arial"/>
+                <a:cs typeface="Arial"/>
+              </a:defRPr>
+            </a:pPr>
+            <a:r>
+              <a:rPr sz="1950" b="1">
+                <a:solidFill>
+                  <a:srgbClr val="273548"/>
+                </a:solidFill>
+                <a:latin typeface="Arial"/>
+                <a:ea typeface="Arial"/>
+                <a:cs typeface="Arial"/>
+              </a:rPr>
+              <a:t>Every signed-return interval still includes zero</a:t>
+            </a:r>
+          </a:p>
+        </p:txBody>
+      </p:sp>
+      <p:sp>
+        <p:nvSpPr>
+          <p:cNvPr id="14" name="">
+            <a:extLst xmlns:a="http://schemas.openxmlformats.org/drawingml/2006/main">
+              <a:ext uri="{FF2B5EF4-FFF2-40B4-BE49-F238E27FC236}">
+                <a16:creationId xmlns:a16="http://schemas.microsoft.com/office/drawing/2014/main" id="{2CAF0156-C9E6-4210-8A8A-BFEDD044631B}"/>
+              </a:ext>
+            </a:extLst>
+          </p:cNvPr>
+          <p:cNvSpPr>
+            <a:spLocks xmlns:a="http://schemas.openxmlformats.org/drawingml/2006/main" noGrp="1"/>
+          </p:cNvSpPr>
+          <p:nvPr/>
+        </p:nvSpPr>
+        <p:spPr>
+          <a:xfrm xmlns:a="http://schemas.openxmlformats.org/drawingml/2006/main">
+            <a:off x="8096250" y="2781300"/>
+            <a:ext cx="3333750" cy="704850"/>
+          </a:xfrm>
+          <a:prstGeom xmlns:a="http://schemas.openxmlformats.org/drawingml/2006/main" prst="rect">
+            <a:avLst/>
+          </a:prstGeom>
+          <a:noFill xmlns:a="http://schemas.openxmlformats.org/drawingml/2006/main"/>
+          <a:ln xmlns:a="http://schemas.openxmlformats.org/drawingml/2006/main" w="0">
+            <a:noFill/>
+            <a:prstDash val="solid"/>
+          </a:ln>
+        </p:spPr>
+        <p:txBody>
+          <a:bodyPr xmlns:a="http://schemas.openxmlformats.org/drawingml/2006/main" wrap="square" lIns="0" tIns="0" rIns="0" bIns="0" anchor="t">
+            <a:normAutofit fontScale="100000"/>
+          </a:bodyPr>
+          <a:lstStyle xmlns:a="http://schemas.openxmlformats.org/drawingml/2006/main"/>
+          <a:p xmlns:a="http://schemas.openxmlformats.org/drawingml/2006/main">
+            <a:pPr algn="l">
+              <a:buNone/>
+              <a:defRPr sz="1425" b="0">
+                <a:solidFill>
+                  <a:srgbClr val="667384"/>
+                </a:solidFill>
+                <a:latin typeface="Arial"/>
+                <a:ea typeface="Arial"/>
+                <a:cs typeface="Arial"/>
+              </a:defRPr>
+            </a:pPr>
+            <a:r>
+              <a:rPr sz="1425" b="0">
+                <a:solidFill>
+                  <a:srgbClr val="667384"/>
+                </a:solidFill>
+                <a:latin typeface="Arial"/>
+                <a:ea typeface="Arial"/>
+                <a:cs typeface="Arial"/>
+              </a:rPr>
+              <a:t>0/81 BH-FDR or Bonferroni passes</a:t>
+            </a:r>
+          </a:p>
+        </p:txBody>
+      </p:sp>
+      <p:sp>
+        <p:nvSpPr>
+          <p:cNvPr id="15" name="">
+            <a:extLst xmlns:a="http://schemas.openxmlformats.org/drawingml/2006/main">
+              <a:ext uri="{FF2B5EF4-FFF2-40B4-BE49-F238E27FC236}">
+                <a16:creationId xmlns:a16="http://schemas.microsoft.com/office/drawing/2014/main" id="{B126165D-5B65-44DB-99BD-15ED33F9B90F}"/>
+              </a:ext>
+            </a:extLst>
+          </p:cNvPr>
+          <p:cNvSpPr>
+            <a:spLocks xmlns:a="http://schemas.openxmlformats.org/drawingml/2006/main" noGrp="1"/>
+          </p:cNvSpPr>
+          <p:nvPr/>
+        </p:nvSpPr>
+        <p:spPr>
+          <a:xfrm xmlns:a="http://schemas.openxmlformats.org/drawingml/2006/main">
+            <a:off x="876300" y="3790950"/>
+            <a:ext cx="10553700" cy="9525"/>
+          </a:xfrm>
+          <a:prstGeom xmlns:a="http://schemas.openxmlformats.org/drawingml/2006/main" prst="rect">
+            <a:avLst/>
+          </a:prstGeom>
+          <a:solidFill xmlns:a="http://schemas.openxmlformats.org/drawingml/2006/main">
+            <a:srgbClr val="B8BCC4"/>
+          </a:solidFill>
+          <a:ln xmlns:a="http://schemas.openxmlformats.org/drawingml/2006/main" w="0">
+            <a:solidFill>
+              <a:srgbClr val="B8BCC4"/>
+            </a:solidFill>
+            <a:prstDash val="solid"/>
+          </a:ln>
+        </p:spPr>
+      </p:sp>
+      <p:sp>
+        <p:nvSpPr>
+          <p:cNvPr id="16" name="">
+            <a:extLst xmlns:a="http://schemas.openxmlformats.org/drawingml/2006/main">
+              <a:ext uri="{FF2B5EF4-FFF2-40B4-BE49-F238E27FC236}">
+                <a16:creationId xmlns:a16="http://schemas.microsoft.com/office/drawing/2014/main" id="{7DC0911F-9587-4B19-84C6-11974DB2A91C}"/>
+              </a:ext>
+            </a:extLst>
+          </p:cNvPr>
+          <p:cNvSpPr>
+            <a:spLocks xmlns:a="http://schemas.openxmlformats.org/drawingml/2006/main" noGrp="1"/>
+          </p:cNvSpPr>
+          <p:nvPr/>
+        </p:nvSpPr>
+        <p:spPr>
+          <a:xfrm xmlns:a="http://schemas.openxmlformats.org/drawingml/2006/main">
+            <a:off x="552450" y="4000500"/>
+            <a:ext cx="95250" cy="895350"/>
+          </a:xfrm>
+          <a:prstGeom xmlns:a="http://schemas.openxmlformats.org/drawingml/2006/main" prst="rect">
+            <a:avLst/>
+          </a:prstGeom>
+          <a:solidFill xmlns:a="http://schemas.openxmlformats.org/drawingml/2006/main">
+            <a:srgbClr val="3D8DFF"/>
+          </a:solidFill>
+          <a:ln xmlns:a="http://schemas.openxmlformats.org/drawingml/2006/main" w="0">
+            <a:solidFill>
+              <a:srgbClr val="3D8DFF"/>
+            </a:solidFill>
+            <a:prstDash val="solid"/>
+          </a:ln>
+        </p:spPr>
+      </p:sp>
+      <p:sp>
+        <p:nvSpPr>
+          <p:cNvPr id="17" name="">
+            <a:extLst xmlns:a="http://schemas.openxmlformats.org/drawingml/2006/main">
+              <a:ext uri="{FF2B5EF4-FFF2-40B4-BE49-F238E27FC236}">
+                <a16:creationId xmlns:a16="http://schemas.microsoft.com/office/drawing/2014/main" id="{DAB53991-F50C-4B95-9F23-DAE86BCEDF3B}"/>
+              </a:ext>
+            </a:extLst>
+          </p:cNvPr>
+          <p:cNvSpPr>
+            <a:spLocks xmlns:a="http://schemas.openxmlformats.org/drawingml/2006/main" noGrp="1"/>
+          </p:cNvSpPr>
+          <p:nvPr/>
+        </p:nvSpPr>
+        <p:spPr>
+          <a:xfrm xmlns:a="http://schemas.openxmlformats.org/drawingml/2006/main">
+            <a:off x="876300" y="3981450"/>
+            <a:ext cx="2095500" cy="285750"/>
+          </a:xfrm>
+          <a:prstGeom xmlns:a="http://schemas.openxmlformats.org/drawingml/2006/main" prst="rect">
+            <a:avLst/>
+          </a:prstGeom>
+          <a:noFill xmlns:a="http://schemas.openxmlformats.org/drawingml/2006/main"/>
+          <a:ln xmlns:a="http://schemas.openxmlformats.org/drawingml/2006/main" w="0">
+            <a:noFill/>
+            <a:prstDash val="solid"/>
+          </a:ln>
+        </p:spPr>
+        <p:txBody>
+          <a:bodyPr xmlns:a="http://schemas.openxmlformats.org/drawingml/2006/main" wrap="square" lIns="0" tIns="0" rIns="0" bIns="0" anchor="t">
+            <a:normAutofit fontScale="100000"/>
+          </a:bodyPr>
+          <a:lstStyle xmlns:a="http://schemas.openxmlformats.org/drawingml/2006/main"/>
+          <a:p xmlns:a="http://schemas.openxmlformats.org/drawingml/2006/main">
+            <a:pPr algn="l">
+              <a:buNone/>
+              <a:defRPr sz="1350" b="1">
+                <a:solidFill>
+                  <a:srgbClr val="3D8DFF"/>
+                </a:solidFill>
+                <a:latin typeface="Arial"/>
+                <a:ea typeface="Arial"/>
+                <a:cs typeface="Arial"/>
+              </a:defRPr>
+            </a:pPr>
+            <a:r>
+              <a:rPr sz="1350" b="1">
+                <a:solidFill>
+                  <a:srgbClr val="3D8DFF"/>
+                </a:solidFill>
+                <a:latin typeface="Arial"/>
+                <a:ea typeface="Arial"/>
+                <a:cs typeface="Arial"/>
+              </a:rPr>
+              <a:t>DIRECTION</a:t>
+            </a:r>
+          </a:p>
+        </p:txBody>
+      </p:sp>
+      <p:sp>
+        <p:nvSpPr>
+          <p:cNvPr id="18" name="">
+            <a:extLst xmlns:a="http://schemas.openxmlformats.org/drawingml/2006/main">
+              <a:ext uri="{FF2B5EF4-FFF2-40B4-BE49-F238E27FC236}">
+                <a16:creationId xmlns:a16="http://schemas.microsoft.com/office/drawing/2014/main" id="{5DFACF3B-08BC-4148-A40A-2004DFB81D71}"/>
+              </a:ext>
+            </a:extLst>
+          </p:cNvPr>
+          <p:cNvSpPr>
+            <a:spLocks xmlns:a="http://schemas.openxmlformats.org/drawingml/2006/main" noGrp="1"/>
+          </p:cNvSpPr>
+          <p:nvPr/>
+        </p:nvSpPr>
+        <p:spPr>
+          <a:xfrm xmlns:a="http://schemas.openxmlformats.org/drawingml/2006/main">
+            <a:off x="3105150" y="3962400"/>
+            <a:ext cx="4762500" cy="419100"/>
+          </a:xfrm>
+          <a:prstGeom xmlns:a="http://schemas.openxmlformats.org/drawingml/2006/main" prst="rect">
+            <a:avLst/>
+          </a:prstGeom>
+          <a:noFill xmlns:a="http://schemas.openxmlformats.org/drawingml/2006/main"/>
+          <a:ln xmlns:a="http://schemas.openxmlformats.org/drawingml/2006/main" w="0">
+            <a:noFill/>
+            <a:prstDash val="solid"/>
+          </a:ln>
+        </p:spPr>
+        <p:txBody>
+          <a:bodyPr xmlns:a="http://schemas.openxmlformats.org/drawingml/2006/main" wrap="square" lIns="0" tIns="0" rIns="0" bIns="0" anchor="t">
+            <a:normAutofit fontScale="75494"/>
+          </a:bodyPr>
+          <a:lstStyle xmlns:a="http://schemas.openxmlformats.org/drawingml/2006/main"/>
+          <a:p xmlns:a="http://schemas.openxmlformats.org/drawingml/2006/main">
+            <a:pPr algn="l">
+              <a:buNone/>
+              <a:defRPr sz="1950" b="1">
+                <a:solidFill>
+                  <a:srgbClr val="273548"/>
+                </a:solidFill>
+                <a:latin typeface="Arial"/>
+                <a:ea typeface="Arial"/>
+                <a:cs typeface="Arial"/>
+              </a:defRPr>
+            </a:pPr>
+            <a:r>
+              <a:rPr sz="1950" b="1">
+                <a:solidFill>
+                  <a:srgbClr val="273548"/>
+                </a:solidFill>
+                <a:latin typeface="Arial"/>
+                <a:ea typeface="Arial"/>
+                <a:cs typeface="Arial"/>
+              </a:rPr>
+              <a:t>Probability shifts are larger but not multiplicity-stable</a:t>
+            </a:r>
+          </a:p>
+        </p:txBody>
+      </p:sp>
+      <p:sp>
+        <p:nvSpPr>
+          <p:cNvPr id="19" name="">
+            <a:extLst xmlns:a="http://schemas.openxmlformats.org/drawingml/2006/main">
+              <a:ext uri="{FF2B5EF4-FFF2-40B4-BE49-F238E27FC236}">
+                <a16:creationId xmlns:a16="http://schemas.microsoft.com/office/drawing/2014/main" id="{C907D23B-44A2-43C4-9658-4C6E38430BF5}"/>
+              </a:ext>
+            </a:extLst>
+          </p:cNvPr>
+          <p:cNvSpPr>
+            <a:spLocks xmlns:a="http://schemas.openxmlformats.org/drawingml/2006/main" noGrp="1"/>
+          </p:cNvSpPr>
+          <p:nvPr/>
+        </p:nvSpPr>
+        <p:spPr>
+          <a:xfrm xmlns:a="http://schemas.openxmlformats.org/drawingml/2006/main">
+            <a:off x="8096250" y="3981450"/>
+            <a:ext cx="3333750" cy="704850"/>
+          </a:xfrm>
+          <a:prstGeom xmlns:a="http://schemas.openxmlformats.org/drawingml/2006/main" prst="rect">
+            <a:avLst/>
+          </a:prstGeom>
+          <a:noFill xmlns:a="http://schemas.openxmlformats.org/drawingml/2006/main"/>
+          <a:ln xmlns:a="http://schemas.openxmlformats.org/drawingml/2006/main" w="0">
+            <a:noFill/>
+            <a:prstDash val="solid"/>
+          </a:ln>
+        </p:spPr>
+        <p:txBody>
+          <a:bodyPr xmlns:a="http://schemas.openxmlformats.org/drawingml/2006/main" wrap="square" lIns="0" tIns="0" rIns="0" bIns="0" anchor="t">
+            <a:normAutofit fontScale="100000"/>
+          </a:bodyPr>
+          <a:lstStyle xmlns:a="http://schemas.openxmlformats.org/drawingml/2006/main"/>
+          <a:p xmlns:a="http://schemas.openxmlformats.org/drawingml/2006/main">
+            <a:pPr algn="l">
+              <a:buNone/>
+              <a:defRPr sz="1425" b="0">
+                <a:solidFill>
+                  <a:srgbClr val="667384"/>
+                </a:solidFill>
+                <a:latin typeface="Arial"/>
+                <a:ea typeface="Arial"/>
+                <a:cs typeface="Arial"/>
+              </a:defRPr>
+            </a:pPr>
+            <a:r>
+              <a:rPr sz="1425" b="0">
+                <a:solidFill>
+                  <a:srgbClr val="667384"/>
+                </a:solidFill>
+                <a:latin typeface="Arial"/>
+                <a:ea typeface="Arial"/>
+                <a:cs typeface="Arial"/>
+              </a:rPr>
+              <a:t>Best raw p=0.025; BH q=0.554</a:t>
+            </a:r>
+          </a:p>
+        </p:txBody>
+      </p:sp>
+      <p:sp>
+        <p:nvSpPr>
+          <p:cNvPr id="20" name="">
+            <a:extLst xmlns:a="http://schemas.openxmlformats.org/drawingml/2006/main">
+              <a:ext uri="{FF2B5EF4-FFF2-40B4-BE49-F238E27FC236}">
+                <a16:creationId xmlns:a16="http://schemas.microsoft.com/office/drawing/2014/main" id="{8042DFC4-7E22-47E6-8C53-1E63A8411C3A}"/>
+              </a:ext>
+            </a:extLst>
+          </p:cNvPr>
+          <p:cNvSpPr>
+            <a:spLocks xmlns:a="http://schemas.openxmlformats.org/drawingml/2006/main" noGrp="1"/>
+          </p:cNvSpPr>
+          <p:nvPr/>
+        </p:nvSpPr>
+        <p:spPr>
+          <a:xfrm xmlns:a="http://schemas.openxmlformats.org/drawingml/2006/main">
+            <a:off x="876300" y="4991100"/>
+            <a:ext cx="10553700" cy="9525"/>
+          </a:xfrm>
+          <a:prstGeom xmlns:a="http://schemas.openxmlformats.org/drawingml/2006/main" prst="rect">
+            <a:avLst/>
+          </a:prstGeom>
+          <a:solidFill xmlns:a="http://schemas.openxmlformats.org/drawingml/2006/main">
+            <a:srgbClr val="B8BCC4"/>
+          </a:solidFill>
+          <a:ln xmlns:a="http://schemas.openxmlformats.org/drawingml/2006/main" w="0">
+            <a:solidFill>
+              <a:srgbClr val="B8BCC4"/>
+            </a:solidFill>
+            <a:prstDash val="solid"/>
+          </a:ln>
+        </p:spPr>
+      </p:sp>
+      <p:sp>
+        <p:nvSpPr>
+          <p:cNvPr id="21" name="">
+            <a:extLst xmlns:a="http://schemas.openxmlformats.org/drawingml/2006/main">
+              <a:ext uri="{FF2B5EF4-FFF2-40B4-BE49-F238E27FC236}">
+                <a16:creationId xmlns:a16="http://schemas.microsoft.com/office/drawing/2014/main" id="{F4066D54-676B-4D0F-93B6-2152B57E41AF}"/>
+              </a:ext>
+            </a:extLst>
+          </p:cNvPr>
+          <p:cNvSpPr>
+            <a:spLocks xmlns:a="http://schemas.openxmlformats.org/drawingml/2006/main" noGrp="1"/>
+          </p:cNvSpPr>
+          <p:nvPr/>
+        </p:nvSpPr>
+        <p:spPr>
+          <a:xfrm xmlns:a="http://schemas.openxmlformats.org/drawingml/2006/main">
+            <a:off x="552450" y="5353050"/>
+            <a:ext cx="10877550" cy="781050"/>
+          </a:xfrm>
+          <a:prstGeom xmlns:a="http://schemas.openxmlformats.org/drawingml/2006/main" prst="rect">
+            <a:avLst/>
+          </a:prstGeom>
+          <a:solidFill xmlns:a="http://schemas.openxmlformats.org/drawingml/2006/main">
+            <a:srgbClr val="EAF5FB"/>
+          </a:solidFill>
+          <a:ln xmlns:a="http://schemas.openxmlformats.org/drawingml/2006/main" w="0">
+            <a:solidFill>
+              <a:srgbClr val="EAF5FB"/>
+            </a:solidFill>
+            <a:prstDash val="solid"/>
+          </a:ln>
+        </p:spPr>
+      </p:sp>
+      <p:sp>
+        <p:nvSpPr>
+          <p:cNvPr id="22" name="">
+            <a:extLst xmlns:a="http://schemas.openxmlformats.org/drawingml/2006/main">
+              <a:ext uri="{FF2B5EF4-FFF2-40B4-BE49-F238E27FC236}">
+                <a16:creationId xmlns:a16="http://schemas.microsoft.com/office/drawing/2014/main" id="{6E4C79AE-EB98-4B5B-B3D3-11ED0D4C729B}"/>
+              </a:ext>
+            </a:extLst>
+          </p:cNvPr>
+          <p:cNvSpPr>
+            <a:spLocks xmlns:a="http://schemas.openxmlformats.org/drawingml/2006/main" noGrp="1"/>
+          </p:cNvSpPr>
+          <p:nvPr/>
+        </p:nvSpPr>
+        <p:spPr>
+          <a:xfrm xmlns:a="http://schemas.openxmlformats.org/drawingml/2006/main">
+            <a:off x="781050" y="5524500"/>
+            <a:ext cx="2476500" cy="323850"/>
+          </a:xfrm>
+          <a:prstGeom xmlns:a="http://schemas.openxmlformats.org/drawingml/2006/main" prst="rect">
+            <a:avLst/>
+          </a:prstGeom>
+          <a:noFill xmlns:a="http://schemas.openxmlformats.org/drawingml/2006/main"/>
+          <a:ln xmlns:a="http://schemas.openxmlformats.org/drawingml/2006/main" w="0">
+            <a:noFill/>
+            <a:prstDash val="solid"/>
+          </a:ln>
+        </p:spPr>
+        <p:txBody>
+          <a:bodyPr xmlns:a="http://schemas.openxmlformats.org/drawingml/2006/main" wrap="square" lIns="0" tIns="0" rIns="0" bIns="0" anchor="t">
+            <a:normAutofit fontScale="100000"/>
+          </a:bodyPr>
+          <a:lstStyle xmlns:a="http://schemas.openxmlformats.org/drawingml/2006/main"/>
+          <a:p xmlns:a="http://schemas.openxmlformats.org/drawingml/2006/main">
+            <a:pPr algn="l">
+              <a:buNone/>
+              <a:defRPr sz="1725" b="1">
+                <a:solidFill>
+                  <a:srgbClr val="3D8DFF"/>
+                </a:solidFill>
+                <a:latin typeface="Arial"/>
+                <a:ea typeface="Arial"/>
+                <a:cs typeface="Arial"/>
+              </a:defRPr>
+            </a:pPr>
+            <a:r>
+              <a:rPr sz="1725" b="1">
+                <a:solidFill>
+                  <a:srgbClr val="3D8DFF"/>
+                </a:solidFill>
+                <a:latin typeface="Arial"/>
+                <a:ea typeface="Arial"/>
+                <a:cs typeface="Arial"/>
+              </a:rPr>
+              <a:t>Next narrow question</a:t>
+            </a:r>
+          </a:p>
+        </p:txBody>
+      </p:sp>
+      <p:sp>
+        <p:nvSpPr>
+          <p:cNvPr id="23" name="">
+            <a:extLst xmlns:a="http://schemas.openxmlformats.org/drawingml/2006/main">
+              <a:ext uri="{FF2B5EF4-FFF2-40B4-BE49-F238E27FC236}">
+                <a16:creationId xmlns:a16="http://schemas.microsoft.com/office/drawing/2014/main" id="{3320D60E-6067-4236-80ED-A898A863026E}"/>
+              </a:ext>
+            </a:extLst>
+          </p:cNvPr>
+          <p:cNvSpPr>
+            <a:spLocks xmlns:a="http://schemas.openxmlformats.org/drawingml/2006/main" noGrp="1"/>
+          </p:cNvSpPr>
+          <p:nvPr/>
+        </p:nvSpPr>
+        <p:spPr>
+          <a:xfrm xmlns:a="http://schemas.openxmlformats.org/drawingml/2006/main">
+            <a:off x="3333750" y="5486400"/>
+            <a:ext cx="7810500" cy="419100"/>
+          </a:xfrm>
+          <a:prstGeom xmlns:a="http://schemas.openxmlformats.org/drawingml/2006/main" prst="rect">
+            <a:avLst/>
+          </a:prstGeom>
+          <a:noFill xmlns:a="http://schemas.openxmlformats.org/drawingml/2006/main"/>
+          <a:ln xmlns:a="http://schemas.openxmlformats.org/drawingml/2006/main" w="0">
+            <a:noFill/>
+            <a:prstDash val="solid"/>
+          </a:ln>
+        </p:spPr>
+        <p:txBody>
+          <a:bodyPr xmlns:a="http://schemas.openxmlformats.org/drawingml/2006/main" wrap="square" lIns="0" tIns="0" rIns="0" bIns="0" anchor="t">
+            <a:normAutofit fontScale="76389"/>
+          </a:bodyPr>
+          <a:lstStyle xmlns:a="http://schemas.openxmlformats.org/drawingml/2006/main"/>
+          <a:p xmlns:a="http://schemas.openxmlformats.org/drawingml/2006/main">
+            <a:pPr algn="l">
+              <a:buNone/>
+              <a:defRPr sz="1800" b="1">
+                <a:solidFill>
+                  <a:srgbClr val="273548"/>
+                </a:solidFill>
+                <a:latin typeface="Arial"/>
+                <a:ea typeface="Arial"/>
+                <a:cs typeface="Arial"/>
+              </a:defRPr>
+            </a:pPr>
+            <a:r>
+              <a:rPr sz="1800" b="1">
+                <a:solidFill>
+                  <a:srgbClr val="273548"/>
+                </a:solidFill>
+                <a:latin typeface="Arial"/>
+                <a:ea typeface="Arial"/>
+                <a:cs typeface="Arial"/>
+              </a:rPr>
+              <a:t>Does the 5–10-session ridge deserve one frozen replication, or does this descriptive lane stop here?</a:t>
             </a:r>
           </a:p>
         </p:txBody>
@@ -4342,6 +10175,7 @@
           <a:lstStyle xmlns:a="http://schemas.openxmlformats.org/drawingml/2006/main"/>
           <a:p xmlns:a="http://schemas.openxmlformats.org/drawingml/2006/main">
             <a:pPr algn="l">
+              <a:buNone/>
               <a:defRPr sz="1200" b="1">
                 <a:solidFill>
                   <a:srgbClr val="667384"/>
@@ -4400,6 +10234,7 @@
           <a:lstStyle xmlns:a="http://schemas.openxmlformats.org/drawingml/2006/main"/>
           <a:p xmlns:a="http://schemas.openxmlformats.org/drawingml/2006/main">
             <a:pPr algn="l">
+              <a:buNone/>
               <a:defRPr sz="3525" b="1">
                 <a:solidFill>
                   <a:srgbClr val="000000"/>
@@ -4491,6 +10326,7 @@
           <a:lstStyle xmlns:a="http://schemas.openxmlformats.org/drawingml/2006/main"/>
           <a:p xmlns:a="http://schemas.openxmlformats.org/drawingml/2006/main">
             <a:pPr algn="l">
+              <a:buNone/>
               <a:defRPr sz="1050" b="0">
                 <a:solidFill>
                   <a:srgbClr val="667384"/>
@@ -4549,6 +10385,7 @@
           <a:lstStyle xmlns:a="http://schemas.openxmlformats.org/drawingml/2006/main"/>
           <a:p xmlns:a="http://schemas.openxmlformats.org/drawingml/2006/main">
             <a:pPr algn="r">
+              <a:buNone/>
               <a:defRPr sz="1050" b="0">
                 <a:solidFill>
                   <a:srgbClr val="667384"/>
@@ -4640,6 +10477,7 @@
           <a:lstStyle xmlns:a="http://schemas.openxmlformats.org/drawingml/2006/main"/>
           <a:p xmlns:a="http://schemas.openxmlformats.org/drawingml/2006/main">
             <a:pPr algn="l">
+              <a:buNone/>
               <a:defRPr sz="2100" b="1">
                 <a:solidFill>
                   <a:srgbClr val="273548"/>
@@ -4698,6 +10536,7 @@
           <a:lstStyle xmlns:a="http://schemas.openxmlformats.org/drawingml/2006/main"/>
           <a:p xmlns:a="http://schemas.openxmlformats.org/drawingml/2006/main">
             <a:pPr algn="l">
+              <a:buNone/>
               <a:defRPr sz="1650" b="0">
                 <a:solidFill>
                   <a:srgbClr val="273548"/>
@@ -4822,6 +10661,7 @@
           <a:lstStyle xmlns:a="http://schemas.openxmlformats.org/drawingml/2006/main"/>
           <a:p xmlns:a="http://schemas.openxmlformats.org/drawingml/2006/main">
             <a:pPr algn="l">
+              <a:buNone/>
               <a:defRPr sz="2100" b="1">
                 <a:solidFill>
                   <a:srgbClr val="273548"/>
@@ -4880,6 +10720,7 @@
           <a:lstStyle xmlns:a="http://schemas.openxmlformats.org/drawingml/2006/main"/>
           <a:p xmlns:a="http://schemas.openxmlformats.org/drawingml/2006/main">
             <a:pPr algn="l">
+              <a:buNone/>
               <a:defRPr sz="1650" b="0">
                 <a:solidFill>
                   <a:srgbClr val="273548"/>
@@ -5004,6 +10845,7 @@
           <a:lstStyle xmlns:a="http://schemas.openxmlformats.org/drawingml/2006/main"/>
           <a:p xmlns:a="http://schemas.openxmlformats.org/drawingml/2006/main">
             <a:pPr algn="l">
+              <a:buNone/>
               <a:defRPr sz="2100" b="1">
                 <a:solidFill>
                   <a:srgbClr val="273548"/>
@@ -5062,6 +10904,7 @@
           <a:lstStyle xmlns:a="http://schemas.openxmlformats.org/drawingml/2006/main"/>
           <a:p xmlns:a="http://schemas.openxmlformats.org/drawingml/2006/main">
             <a:pPr algn="l">
+              <a:buNone/>
               <a:defRPr sz="1650" b="0">
                 <a:solidFill>
                   <a:srgbClr val="273548"/>
@@ -5182,6 +11025,7 @@
           <a:lstStyle xmlns:a="http://schemas.openxmlformats.org/drawingml/2006/main"/>
           <a:p xmlns:a="http://schemas.openxmlformats.org/drawingml/2006/main">
             <a:pPr algn="l">
+              <a:buNone/>
               <a:defRPr sz="1200" b="1">
                 <a:solidFill>
                   <a:srgbClr val="667384"/>
@@ -5240,6 +11084,7 @@
           <a:lstStyle xmlns:a="http://schemas.openxmlformats.org/drawingml/2006/main"/>
           <a:p xmlns:a="http://schemas.openxmlformats.org/drawingml/2006/main">
             <a:pPr algn="l">
+              <a:buNone/>
               <a:defRPr sz="3525" b="1">
                 <a:solidFill>
                   <a:srgbClr val="000000"/>
@@ -5331,6 +11176,7 @@
           <a:lstStyle xmlns:a="http://schemas.openxmlformats.org/drawingml/2006/main"/>
           <a:p xmlns:a="http://schemas.openxmlformats.org/drawingml/2006/main">
             <a:pPr algn="l">
+              <a:buNone/>
               <a:defRPr sz="1050" b="0">
                 <a:solidFill>
                   <a:srgbClr val="667384"/>
@@ -5389,6 +11235,7 @@
           <a:lstStyle xmlns:a="http://schemas.openxmlformats.org/drawingml/2006/main"/>
           <a:p xmlns:a="http://schemas.openxmlformats.org/drawingml/2006/main">
             <a:pPr algn="r">
+              <a:buNone/>
               <a:defRPr sz="1050" b="0">
                 <a:solidFill>
                   <a:srgbClr val="667384"/>
@@ -5447,6 +11294,7 @@
           <a:lstStyle xmlns:a="http://schemas.openxmlformats.org/drawingml/2006/main"/>
           <a:p xmlns:a="http://schemas.openxmlformats.org/drawingml/2006/main">
             <a:pPr algn="l">
+              <a:buNone/>
               <a:defRPr sz="3300" b="1">
                 <a:solidFill>
                   <a:srgbClr val="3D8DFF"/>
@@ -5505,6 +11353,7 @@
           <a:lstStyle xmlns:a="http://schemas.openxmlformats.org/drawingml/2006/main"/>
           <a:p xmlns:a="http://schemas.openxmlformats.org/drawingml/2006/main">
             <a:pPr algn="l">
+              <a:buNone/>
               <a:defRPr sz="1875" b="0">
                 <a:solidFill>
                   <a:srgbClr val="273548"/>
@@ -5629,6 +11478,7 @@
           <a:lstStyle xmlns:a="http://schemas.openxmlformats.org/drawingml/2006/main"/>
           <a:p xmlns:a="http://schemas.openxmlformats.org/drawingml/2006/main">
             <a:pPr algn="l">
+              <a:buNone/>
               <a:defRPr sz="3225" b="1">
                 <a:solidFill>
                   <a:srgbClr val="3D8DFF"/>
@@ -5687,6 +11537,7 @@
           <a:lstStyle xmlns:a="http://schemas.openxmlformats.org/drawingml/2006/main"/>
           <a:p xmlns:a="http://schemas.openxmlformats.org/drawingml/2006/main">
             <a:pPr algn="l">
+              <a:buNone/>
               <a:defRPr sz="1350" b="0">
                 <a:solidFill>
                   <a:srgbClr val="273548"/>
@@ -5745,6 +11596,7 @@
           <a:lstStyle xmlns:a="http://schemas.openxmlformats.org/drawingml/2006/main"/>
           <a:p xmlns:a="http://schemas.openxmlformats.org/drawingml/2006/main">
             <a:pPr algn="l">
+              <a:buNone/>
               <a:defRPr sz="2250" b="1">
                 <a:solidFill>
                   <a:srgbClr val="000000"/>
@@ -5803,6 +11655,7 @@
           <a:lstStyle xmlns:a="http://schemas.openxmlformats.org/drawingml/2006/main"/>
           <a:p xmlns:a="http://schemas.openxmlformats.org/drawingml/2006/main">
             <a:pPr algn="l">
+              <a:buNone/>
               <a:defRPr sz="1500" b="1">
                 <a:solidFill>
                   <a:srgbClr val="667384"/>
@@ -5861,6 +11714,7 @@
           <a:lstStyle xmlns:a="http://schemas.openxmlformats.org/drawingml/2006/main"/>
           <a:p xmlns:a="http://schemas.openxmlformats.org/drawingml/2006/main">
             <a:pPr algn="l">
+              <a:buNone/>
               <a:defRPr sz="1500" b="0">
                 <a:solidFill>
                   <a:srgbClr val="273548"/>
@@ -5952,6 +11806,7 @@
           <a:lstStyle xmlns:a="http://schemas.openxmlformats.org/drawingml/2006/main"/>
           <a:p xmlns:a="http://schemas.openxmlformats.org/drawingml/2006/main">
             <a:pPr algn="l">
+              <a:buNone/>
               <a:defRPr sz="1500" b="1">
                 <a:solidFill>
                   <a:srgbClr val="667384"/>
@@ -6010,6 +11865,7 @@
           <a:lstStyle xmlns:a="http://schemas.openxmlformats.org/drawingml/2006/main"/>
           <a:p xmlns:a="http://schemas.openxmlformats.org/drawingml/2006/main">
             <a:pPr algn="l">
+              <a:buNone/>
               <a:defRPr sz="1500" b="0">
                 <a:solidFill>
                   <a:srgbClr val="273548"/>
@@ -6101,6 +11957,7 @@
           <a:lstStyle xmlns:a="http://schemas.openxmlformats.org/drawingml/2006/main"/>
           <a:p xmlns:a="http://schemas.openxmlformats.org/drawingml/2006/main">
             <a:pPr algn="l">
+              <a:buNone/>
               <a:defRPr sz="1500" b="1">
                 <a:solidFill>
                   <a:srgbClr val="667384"/>
@@ -6159,6 +12016,7 @@
           <a:lstStyle xmlns:a="http://schemas.openxmlformats.org/drawingml/2006/main"/>
           <a:p xmlns:a="http://schemas.openxmlformats.org/drawingml/2006/main">
             <a:pPr algn="l">
+              <a:buNone/>
               <a:defRPr sz="1500" b="0">
                 <a:solidFill>
                   <a:srgbClr val="273548"/>
@@ -6250,6 +12108,7 @@
           <a:lstStyle xmlns:a="http://schemas.openxmlformats.org/drawingml/2006/main"/>
           <a:p xmlns:a="http://schemas.openxmlformats.org/drawingml/2006/main">
             <a:pPr algn="l">
+              <a:buNone/>
               <a:defRPr sz="1500" b="1">
                 <a:solidFill>
                   <a:srgbClr val="667384"/>
@@ -6308,6 +12167,7 @@
           <a:lstStyle xmlns:a="http://schemas.openxmlformats.org/drawingml/2006/main"/>
           <a:p xmlns:a="http://schemas.openxmlformats.org/drawingml/2006/main">
             <a:pPr algn="l">
+              <a:buNone/>
               <a:defRPr sz="1500" b="0">
                 <a:solidFill>
                   <a:srgbClr val="273548"/>
@@ -6399,6 +12259,7 @@
           <a:lstStyle xmlns:a="http://schemas.openxmlformats.org/drawingml/2006/main"/>
           <a:p xmlns:a="http://schemas.openxmlformats.org/drawingml/2006/main">
             <a:pPr algn="l">
+              <a:buNone/>
               <a:defRPr sz="1500" b="1">
                 <a:solidFill>
                   <a:srgbClr val="667384"/>
@@ -6457,6 +12318,7 @@
           <a:lstStyle xmlns:a="http://schemas.openxmlformats.org/drawingml/2006/main"/>
           <a:p xmlns:a="http://schemas.openxmlformats.org/drawingml/2006/main">
             <a:pPr algn="l">
+              <a:buNone/>
               <a:defRPr sz="1500" b="0">
                 <a:solidFill>
                   <a:srgbClr val="273548"/>
@@ -6548,6 +12410,7 @@
           <a:lstStyle xmlns:a="http://schemas.openxmlformats.org/drawingml/2006/main"/>
           <a:p xmlns:a="http://schemas.openxmlformats.org/drawingml/2006/main">
             <a:pPr algn="l">
+              <a:buNone/>
               <a:defRPr sz="1500" b="1">
                 <a:solidFill>
                   <a:srgbClr val="667384"/>
@@ -6606,6 +12469,7 @@
           <a:lstStyle xmlns:a="http://schemas.openxmlformats.org/drawingml/2006/main"/>
           <a:p xmlns:a="http://schemas.openxmlformats.org/drawingml/2006/main">
             <a:pPr algn="l">
+              <a:buNone/>
               <a:defRPr sz="1500" b="0">
                 <a:solidFill>
                   <a:srgbClr val="273548"/>
@@ -6693,6 +12557,7 @@
           <a:lstStyle xmlns:a="http://schemas.openxmlformats.org/drawingml/2006/main"/>
           <a:p xmlns:a="http://schemas.openxmlformats.org/drawingml/2006/main">
             <a:pPr algn="l">
+              <a:buNone/>
               <a:defRPr sz="1200" b="1">
                 <a:solidFill>
                   <a:srgbClr val="667384"/>
@@ -6751,6 +12616,7 @@
           <a:lstStyle xmlns:a="http://schemas.openxmlformats.org/drawingml/2006/main"/>
           <a:p xmlns:a="http://schemas.openxmlformats.org/drawingml/2006/main">
             <a:pPr algn="l">
+              <a:buNone/>
               <a:defRPr sz="3525" b="1">
                 <a:solidFill>
                   <a:srgbClr val="000000"/>
@@ -6842,6 +12708,7 @@
           <a:lstStyle xmlns:a="http://schemas.openxmlformats.org/drawingml/2006/main"/>
           <a:p xmlns:a="http://schemas.openxmlformats.org/drawingml/2006/main">
             <a:pPr algn="l">
+              <a:buNone/>
               <a:defRPr sz="1050" b="0">
                 <a:solidFill>
                   <a:srgbClr val="667384"/>
@@ -6900,6 +12767,7 @@
           <a:lstStyle xmlns:a="http://schemas.openxmlformats.org/drawingml/2006/main"/>
           <a:p xmlns:a="http://schemas.openxmlformats.org/drawingml/2006/main">
             <a:pPr algn="r">
+              <a:buNone/>
               <a:defRPr sz="1050" b="0">
                 <a:solidFill>
                   <a:srgbClr val="667384"/>
@@ -6958,14 +12826,14 @@
       </p:sp>
       <p:pic>
         <p:nvPicPr>
-          <p:cNvPr id="15" name=""/>
+          <p:cNvPr id="17" name=""/>
           <p:cNvPicPr>
             <a:picLocks xmlns:a="http://schemas.openxmlformats.org/drawingml/2006/main" noChangeAspect="1"/>
           </p:cNvPicPr>
           <p:nvPr/>
         </p:nvPicPr>
         <p:blipFill>
-          <a:blip xmlns:r="http://schemas.openxmlformats.org/officeDocument/2006/relationships" xmlns:a="http://schemas.openxmlformats.org/drawingml/2006/main" r:embed="Re6f6033820dc4fa7"/>
+          <a:blip xmlns:r="http://schemas.openxmlformats.org/officeDocument/2006/relationships" xmlns:a="http://schemas.openxmlformats.org/drawingml/2006/main" r:embed="Rb38af22748c441bb"/>
           <a:stretch xmlns:a="http://schemas.openxmlformats.org/drawingml/2006/main"/>
         </p:blipFill>
         <p:spPr>
@@ -7013,6 +12881,7 @@
           <a:lstStyle xmlns:a="http://schemas.openxmlformats.org/drawingml/2006/main"/>
           <a:p xmlns:a="http://schemas.openxmlformats.org/drawingml/2006/main">
             <a:pPr algn="ctr">
+              <a:buNone/>
               <a:defRPr sz="1200" b="0">
                 <a:solidFill>
                   <a:srgbClr val="667384"/>
@@ -7100,6 +12969,7 @@
           <a:lstStyle xmlns:a="http://schemas.openxmlformats.org/drawingml/2006/main"/>
           <a:p xmlns:a="http://schemas.openxmlformats.org/drawingml/2006/main">
             <a:pPr algn="l">
+              <a:buNone/>
               <a:defRPr sz="1200" b="1">
                 <a:solidFill>
                   <a:srgbClr val="667384"/>
@@ -7158,6 +13028,7 @@
           <a:lstStyle xmlns:a="http://schemas.openxmlformats.org/drawingml/2006/main"/>
           <a:p xmlns:a="http://schemas.openxmlformats.org/drawingml/2006/main">
             <a:pPr algn="l">
+              <a:buNone/>
               <a:defRPr sz="3525" b="1">
                 <a:solidFill>
                   <a:srgbClr val="000000"/>
@@ -7249,6 +13120,7 @@
           <a:lstStyle xmlns:a="http://schemas.openxmlformats.org/drawingml/2006/main"/>
           <a:p xmlns:a="http://schemas.openxmlformats.org/drawingml/2006/main">
             <a:pPr algn="l">
+              <a:buNone/>
               <a:defRPr sz="1050" b="0">
                 <a:solidFill>
                   <a:srgbClr val="667384"/>
@@ -7307,6 +13179,7 @@
           <a:lstStyle xmlns:a="http://schemas.openxmlformats.org/drawingml/2006/main"/>
           <a:p xmlns:a="http://schemas.openxmlformats.org/drawingml/2006/main">
             <a:pPr algn="r">
+              <a:buNone/>
               <a:defRPr sz="1050" b="0">
                 <a:solidFill>
                   <a:srgbClr val="667384"/>
@@ -7365,14 +13238,14 @@
       </p:sp>
       <p:pic>
         <p:nvPicPr>
-          <p:cNvPr id="20" name=""/>
+          <p:cNvPr id="22" name=""/>
           <p:cNvPicPr>
             <a:picLocks xmlns:a="http://schemas.openxmlformats.org/drawingml/2006/main" noChangeAspect="1"/>
           </p:cNvPicPr>
           <p:nvPr/>
         </p:nvPicPr>
         <p:blipFill>
-          <a:blip xmlns:r="http://schemas.openxmlformats.org/officeDocument/2006/relationships" xmlns:a="http://schemas.openxmlformats.org/drawingml/2006/main" r:embed="R0f748e604a174de4"/>
+          <a:blip xmlns:r="http://schemas.openxmlformats.org/officeDocument/2006/relationships" xmlns:a="http://schemas.openxmlformats.org/drawingml/2006/main" r:embed="R6a471f70a9ce4229"/>
           <a:stretch xmlns:a="http://schemas.openxmlformats.org/drawingml/2006/main"/>
         </p:blipFill>
         <p:spPr>
@@ -7420,6 +13293,7 @@
           <a:lstStyle xmlns:a="http://schemas.openxmlformats.org/drawingml/2006/main"/>
           <a:p xmlns:a="http://schemas.openxmlformats.org/drawingml/2006/main">
             <a:pPr algn="l">
+              <a:buNone/>
               <a:defRPr sz="2100" b="1">
                 <a:solidFill>
                   <a:srgbClr val="000000"/>
@@ -7478,6 +13352,7 @@
           <a:lstStyle xmlns:a="http://schemas.openxmlformats.org/drawingml/2006/main"/>
           <a:p xmlns:a="http://schemas.openxmlformats.org/drawingml/2006/main">
             <a:pPr algn="l">
+              <a:buNone/>
               <a:defRPr sz="1500" b="0">
                 <a:solidFill>
                   <a:srgbClr val="273548"/>
@@ -7536,6 +13411,7 @@
           <a:lstStyle xmlns:a="http://schemas.openxmlformats.org/drawingml/2006/main"/>
           <a:p xmlns:a="http://schemas.openxmlformats.org/drawingml/2006/main">
             <a:pPr algn="l">
+              <a:buNone/>
               <a:defRPr sz="2100" b="1">
                 <a:solidFill>
                   <a:srgbClr val="000000"/>
@@ -7594,6 +13470,7 @@
           <a:lstStyle xmlns:a="http://schemas.openxmlformats.org/drawingml/2006/main"/>
           <a:p xmlns:a="http://schemas.openxmlformats.org/drawingml/2006/main">
             <a:pPr algn="l">
+              <a:buNone/>
               <a:defRPr sz="1500" b="0">
                 <a:solidFill>
                   <a:srgbClr val="273548"/>
@@ -7685,6 +13562,7 @@
           <a:lstStyle xmlns:a="http://schemas.openxmlformats.org/drawingml/2006/main"/>
           <a:p xmlns:a="http://schemas.openxmlformats.org/drawingml/2006/main">
             <a:pPr algn="l">
+              <a:buNone/>
               <a:defRPr sz="1275" b="1">
                 <a:solidFill>
                   <a:srgbClr val="2A9D6F"/>
@@ -7772,6 +13650,7 @@
           <a:lstStyle xmlns:a="http://schemas.openxmlformats.org/drawingml/2006/main"/>
           <a:p xmlns:a="http://schemas.openxmlformats.org/drawingml/2006/main">
             <a:pPr algn="l">
+              <a:buNone/>
               <a:defRPr sz="1350" b="1">
                 <a:solidFill>
                   <a:srgbClr val="667384"/>
@@ -7830,6 +13709,7 @@
           <a:lstStyle xmlns:a="http://schemas.openxmlformats.org/drawingml/2006/main"/>
           <a:p xmlns:a="http://schemas.openxmlformats.org/drawingml/2006/main">
             <a:pPr algn="l">
+              <a:buNone/>
               <a:defRPr sz="5100" b="1">
                 <a:solidFill>
                   <a:srgbClr val="000000"/>
@@ -7853,6 +13733,7 @@
           </a:p>
           <a:p xmlns:a="http://schemas.openxmlformats.org/drawingml/2006/main">
             <a:pPr algn="l">
+              <a:buNone/>
               <a:defRPr sz="5100" b="1">
                 <a:solidFill>
                   <a:srgbClr val="000000"/>
@@ -7944,6 +13825,7 @@
           <a:lstStyle xmlns:a="http://schemas.openxmlformats.org/drawingml/2006/main"/>
           <a:p xmlns:a="http://schemas.openxmlformats.org/drawingml/2006/main">
             <a:pPr algn="l">
+              <a:buNone/>
               <a:defRPr sz="2550" b="0">
                 <a:solidFill>
                   <a:srgbClr val="273548"/>
@@ -8002,6 +13884,7 @@
           <a:lstStyle xmlns:a="http://schemas.openxmlformats.org/drawingml/2006/main"/>
           <a:p xmlns:a="http://schemas.openxmlformats.org/drawingml/2006/main">
             <a:pPr algn="l">
+              <a:buNone/>
               <a:defRPr sz="1650" b="0">
                 <a:solidFill>
                   <a:srgbClr val="667384"/>
@@ -8060,6 +13943,7 @@
           <a:lstStyle xmlns:a="http://schemas.openxmlformats.org/drawingml/2006/main"/>
           <a:p xmlns:a="http://schemas.openxmlformats.org/drawingml/2006/main">
             <a:pPr algn="r">
+              <a:buNone/>
               <a:defRPr sz="1050" b="0">
                 <a:solidFill>
                   <a:srgbClr val="667384"/>
@@ -8147,6 +14031,7 @@
           <a:lstStyle xmlns:a="http://schemas.openxmlformats.org/drawingml/2006/main"/>
           <a:p xmlns:a="http://schemas.openxmlformats.org/drawingml/2006/main">
             <a:pPr algn="l">
+              <a:buNone/>
               <a:defRPr sz="1200" b="1">
                 <a:solidFill>
                   <a:srgbClr val="667384"/>
@@ -8205,6 +14090,7 @@
           <a:lstStyle xmlns:a="http://schemas.openxmlformats.org/drawingml/2006/main"/>
           <a:p xmlns:a="http://schemas.openxmlformats.org/drawingml/2006/main">
             <a:pPr algn="l">
+              <a:buNone/>
               <a:defRPr sz="3525" b="1">
                 <a:solidFill>
                   <a:srgbClr val="000000"/>
@@ -8296,6 +14182,7 @@
           <a:lstStyle xmlns:a="http://schemas.openxmlformats.org/drawingml/2006/main"/>
           <a:p xmlns:a="http://schemas.openxmlformats.org/drawingml/2006/main">
             <a:pPr algn="l">
+              <a:buNone/>
               <a:defRPr sz="1050" b="0">
                 <a:solidFill>
                   <a:srgbClr val="667384"/>
@@ -8354,6 +14241,7 @@
           <a:lstStyle xmlns:a="http://schemas.openxmlformats.org/drawingml/2006/main"/>
           <a:p xmlns:a="http://schemas.openxmlformats.org/drawingml/2006/main">
             <a:pPr algn="r">
+              <a:buNone/>
               <a:defRPr sz="1050" b="0">
                 <a:solidFill>
                   <a:srgbClr val="667384"/>
@@ -8412,14 +14300,14 @@
       </p:sp>
       <p:pic>
         <p:nvPicPr>
-          <p:cNvPr id="26" name=""/>
+          <p:cNvPr id="28" name=""/>
           <p:cNvPicPr>
             <a:picLocks xmlns:a="http://schemas.openxmlformats.org/drawingml/2006/main" noChangeAspect="1"/>
           </p:cNvPicPr>
           <p:nvPr/>
         </p:nvPicPr>
         <p:blipFill>
-          <a:blip xmlns:r="http://schemas.openxmlformats.org/officeDocument/2006/relationships" xmlns:a="http://schemas.openxmlformats.org/drawingml/2006/main" r:embed="R8727b15ab03b4c92"/>
+          <a:blip xmlns:r="http://schemas.openxmlformats.org/officeDocument/2006/relationships" xmlns:a="http://schemas.openxmlformats.org/drawingml/2006/main" r:embed="R05c9e2a3324e4304"/>
           <a:stretch xmlns:a="http://schemas.openxmlformats.org/drawingml/2006/main"/>
         </p:blipFill>
         <p:spPr>
@@ -8533,6 +14421,7 @@
           <a:lstStyle xmlns:a="http://schemas.openxmlformats.org/drawingml/2006/main"/>
           <a:p xmlns:a="http://schemas.openxmlformats.org/drawingml/2006/main">
             <a:pPr algn="l">
+              <a:buNone/>
               <a:defRPr sz="3225" b="1">
                 <a:solidFill>
                   <a:srgbClr val="E45756"/>
@@ -8591,6 +14480,7 @@
           <a:lstStyle xmlns:a="http://schemas.openxmlformats.org/drawingml/2006/main"/>
           <a:p xmlns:a="http://schemas.openxmlformats.org/drawingml/2006/main">
             <a:pPr algn="l">
+              <a:buNone/>
               <a:defRPr sz="1350" b="0">
                 <a:solidFill>
                   <a:srgbClr val="273548"/>
@@ -8715,6 +14605,7 @@
           <a:lstStyle xmlns:a="http://schemas.openxmlformats.org/drawingml/2006/main"/>
           <a:p xmlns:a="http://schemas.openxmlformats.org/drawingml/2006/main">
             <a:pPr algn="l">
+              <a:buNone/>
               <a:defRPr sz="3225" b="1">
                 <a:solidFill>
                   <a:srgbClr val="3D8DFF"/>
@@ -8773,6 +14664,7 @@
           <a:lstStyle xmlns:a="http://schemas.openxmlformats.org/drawingml/2006/main"/>
           <a:p xmlns:a="http://schemas.openxmlformats.org/drawingml/2006/main">
             <a:pPr algn="l">
+              <a:buNone/>
               <a:defRPr sz="1350" b="0">
                 <a:solidFill>
                   <a:srgbClr val="273548"/>
@@ -8897,6 +14789,7 @@
           <a:lstStyle xmlns:a="http://schemas.openxmlformats.org/drawingml/2006/main"/>
           <a:p xmlns:a="http://schemas.openxmlformats.org/drawingml/2006/main">
             <a:pPr algn="l">
+              <a:buNone/>
               <a:defRPr sz="3225" b="1">
                 <a:solidFill>
                   <a:srgbClr val="273548"/>
@@ -8955,6 +14848,7 @@
           <a:lstStyle xmlns:a="http://schemas.openxmlformats.org/drawingml/2006/main"/>
           <a:p xmlns:a="http://schemas.openxmlformats.org/drawingml/2006/main">
             <a:pPr algn="l">
+              <a:buNone/>
               <a:defRPr sz="1350" b="0">
                 <a:solidFill>
                   <a:srgbClr val="273548"/>
@@ -9042,6 +14936,7 @@
           <a:lstStyle xmlns:a="http://schemas.openxmlformats.org/drawingml/2006/main"/>
           <a:p xmlns:a="http://schemas.openxmlformats.org/drawingml/2006/main">
             <a:pPr algn="l">
+              <a:buNone/>
               <a:defRPr sz="1200" b="1">
                 <a:solidFill>
                   <a:srgbClr val="667384"/>
@@ -9100,6 +14995,7 @@
           <a:lstStyle xmlns:a="http://schemas.openxmlformats.org/drawingml/2006/main"/>
           <a:p xmlns:a="http://schemas.openxmlformats.org/drawingml/2006/main">
             <a:pPr algn="l">
+              <a:buNone/>
               <a:defRPr sz="3525" b="1">
                 <a:solidFill>
                   <a:srgbClr val="000000"/>
@@ -9191,6 +15087,7 @@
           <a:lstStyle xmlns:a="http://schemas.openxmlformats.org/drawingml/2006/main"/>
           <a:p xmlns:a="http://schemas.openxmlformats.org/drawingml/2006/main">
             <a:pPr algn="l">
+              <a:buNone/>
               <a:defRPr sz="1050" b="0">
                 <a:solidFill>
                   <a:srgbClr val="667384"/>
@@ -9249,6 +15146,7 @@
           <a:lstStyle xmlns:a="http://schemas.openxmlformats.org/drawingml/2006/main"/>
           <a:p xmlns:a="http://schemas.openxmlformats.org/drawingml/2006/main">
             <a:pPr algn="r">
+              <a:buNone/>
               <a:defRPr sz="1050" b="0">
                 <a:solidFill>
                   <a:srgbClr val="667384"/>
@@ -9307,14 +15205,14 @@
       </p:sp>
       <p:pic>
         <p:nvPicPr>
-          <p:cNvPr id="23" name=""/>
+          <p:cNvPr id="25" name=""/>
           <p:cNvPicPr>
             <a:picLocks xmlns:a="http://schemas.openxmlformats.org/drawingml/2006/main" noChangeAspect="1"/>
           </p:cNvPicPr>
           <p:nvPr/>
         </p:nvPicPr>
         <p:blipFill>
-          <a:blip xmlns:r="http://schemas.openxmlformats.org/officeDocument/2006/relationships" xmlns:a="http://schemas.openxmlformats.org/drawingml/2006/main" r:embed="Rdfd4c9b09969434d"/>
+          <a:blip xmlns:r="http://schemas.openxmlformats.org/officeDocument/2006/relationships" xmlns:a="http://schemas.openxmlformats.org/drawingml/2006/main" r:embed="R2abfe74f6ebe4fa7"/>
           <a:stretch xmlns:a="http://schemas.openxmlformats.org/drawingml/2006/main"/>
         </p:blipFill>
         <p:spPr>
@@ -9428,6 +15326,7 @@
           <a:lstStyle xmlns:a="http://schemas.openxmlformats.org/drawingml/2006/main"/>
           <a:p xmlns:a="http://schemas.openxmlformats.org/drawingml/2006/main">
             <a:pPr algn="l">
+              <a:buNone/>
               <a:defRPr sz="3225" b="1">
                 <a:solidFill>
                   <a:srgbClr val="E45756"/>
@@ -9486,6 +15385,7 @@
           <a:lstStyle xmlns:a="http://schemas.openxmlformats.org/drawingml/2006/main"/>
           <a:p xmlns:a="http://schemas.openxmlformats.org/drawingml/2006/main">
             <a:pPr algn="l">
+              <a:buNone/>
               <a:defRPr sz="1350" b="0">
                 <a:solidFill>
                   <a:srgbClr val="273548"/>
@@ -9610,6 +15510,7 @@
           <a:lstStyle xmlns:a="http://schemas.openxmlformats.org/drawingml/2006/main"/>
           <a:p xmlns:a="http://schemas.openxmlformats.org/drawingml/2006/main">
             <a:pPr algn="l">
+              <a:buNone/>
               <a:defRPr sz="3225" b="1">
                 <a:solidFill>
                   <a:srgbClr val="2A9D6F"/>
@@ -9668,6 +15569,7 @@
           <a:lstStyle xmlns:a="http://schemas.openxmlformats.org/drawingml/2006/main"/>
           <a:p xmlns:a="http://schemas.openxmlformats.org/drawingml/2006/main">
             <a:pPr algn="l">
+              <a:buNone/>
               <a:defRPr sz="1350" b="0">
                 <a:solidFill>
                   <a:srgbClr val="273548"/>
@@ -9726,6 +15628,7 @@
           <a:lstStyle xmlns:a="http://schemas.openxmlformats.org/drawingml/2006/main"/>
           <a:p xmlns:a="http://schemas.openxmlformats.org/drawingml/2006/main">
             <a:pPr algn="l">
+              <a:buNone/>
               <a:defRPr sz="1500" b="1">
                 <a:solidFill>
                   <a:srgbClr val="273548"/>
@@ -9749,6 +15652,7 @@
           </a:p>
           <a:p xmlns:a="http://schemas.openxmlformats.org/drawingml/2006/main">
             <a:pPr algn="l">
+              <a:buNone/>
               <a:defRPr sz="1500" b="1">
                 <a:solidFill>
                   <a:srgbClr val="273548"/>
@@ -9836,6 +15740,7 @@
           <a:lstStyle xmlns:a="http://schemas.openxmlformats.org/drawingml/2006/main"/>
           <a:p xmlns:a="http://schemas.openxmlformats.org/drawingml/2006/main">
             <a:pPr algn="l">
+              <a:buNone/>
               <a:defRPr sz="1200" b="1">
                 <a:solidFill>
                   <a:srgbClr val="667384"/>
@@ -9894,6 +15799,7 @@
           <a:lstStyle xmlns:a="http://schemas.openxmlformats.org/drawingml/2006/main"/>
           <a:p xmlns:a="http://schemas.openxmlformats.org/drawingml/2006/main">
             <a:pPr algn="l">
+              <a:buNone/>
               <a:defRPr sz="3525" b="1">
                 <a:solidFill>
                   <a:srgbClr val="000000"/>
@@ -9985,6 +15891,7 @@
           <a:lstStyle xmlns:a="http://schemas.openxmlformats.org/drawingml/2006/main"/>
           <a:p xmlns:a="http://schemas.openxmlformats.org/drawingml/2006/main">
             <a:pPr algn="l">
+              <a:buNone/>
               <a:defRPr sz="1050" b="0">
                 <a:solidFill>
                   <a:srgbClr val="667384"/>
@@ -10043,6 +15950,7 @@
           <a:lstStyle xmlns:a="http://schemas.openxmlformats.org/drawingml/2006/main"/>
           <a:p xmlns:a="http://schemas.openxmlformats.org/drawingml/2006/main">
             <a:pPr algn="r">
+              <a:buNone/>
               <a:defRPr sz="1050" b="0">
                 <a:solidFill>
                   <a:srgbClr val="667384"/>
@@ -10101,14 +16009,14 @@
       </p:sp>
       <p:pic>
         <p:nvPicPr>
-          <p:cNvPr id="21" name=""/>
+          <p:cNvPr id="23" name=""/>
           <p:cNvPicPr>
             <a:picLocks xmlns:a="http://schemas.openxmlformats.org/drawingml/2006/main" noChangeAspect="1"/>
           </p:cNvPicPr>
           <p:nvPr/>
         </p:nvPicPr>
         <p:blipFill>
-          <a:blip xmlns:r="http://schemas.openxmlformats.org/officeDocument/2006/relationships" xmlns:a="http://schemas.openxmlformats.org/drawingml/2006/main" r:embed="R000531e6df574d10"/>
+          <a:blip xmlns:r="http://schemas.openxmlformats.org/officeDocument/2006/relationships" xmlns:a="http://schemas.openxmlformats.org/drawingml/2006/main" r:embed="Rb2ed608f2a6e42ec"/>
           <a:stretch xmlns:a="http://schemas.openxmlformats.org/drawingml/2006/main"/>
         </p:blipFill>
         <p:spPr>
@@ -10156,6 +16064,7 @@
           <a:lstStyle xmlns:a="http://schemas.openxmlformats.org/drawingml/2006/main"/>
           <a:p xmlns:a="http://schemas.openxmlformats.org/drawingml/2006/main">
             <a:pPr algn="l">
+              <a:buNone/>
               <a:defRPr sz="2025" b="1">
                 <a:solidFill>
                   <a:srgbClr val="000000"/>
@@ -10214,6 +16123,7 @@
           <a:lstStyle xmlns:a="http://schemas.openxmlformats.org/drawingml/2006/main"/>
           <a:p xmlns:a="http://schemas.openxmlformats.org/drawingml/2006/main">
             <a:pPr algn="l">
+              <a:buNone/>
               <a:defRPr sz="1500" b="0">
                 <a:solidFill>
                   <a:srgbClr val="273548"/>
@@ -10237,6 +16147,7 @@
           </a:p>
           <a:p xmlns:a="http://schemas.openxmlformats.org/drawingml/2006/main">
             <a:pPr algn="l">
+              <a:buNone/>
               <a:defRPr sz="1500" b="0">
                 <a:solidFill>
                   <a:srgbClr val="273548"/>
@@ -10328,6 +16239,7 @@
           <a:lstStyle xmlns:a="http://schemas.openxmlformats.org/drawingml/2006/main"/>
           <a:p xmlns:a="http://schemas.openxmlformats.org/drawingml/2006/main">
             <a:pPr algn="l">
+              <a:buNone/>
               <a:defRPr sz="2025" b="1">
                 <a:solidFill>
                   <a:srgbClr val="000000"/>
@@ -10386,6 +16298,7 @@
           <a:lstStyle xmlns:a="http://schemas.openxmlformats.org/drawingml/2006/main"/>
           <a:p xmlns:a="http://schemas.openxmlformats.org/drawingml/2006/main">
             <a:pPr algn="l">
+              <a:buNone/>
               <a:defRPr sz="1500" b="0">
                 <a:solidFill>
                   <a:srgbClr val="273548"/>
@@ -10477,6 +16390,7 @@
           <a:lstStyle xmlns:a="http://schemas.openxmlformats.org/drawingml/2006/main"/>
           <a:p xmlns:a="http://schemas.openxmlformats.org/drawingml/2006/main">
             <a:pPr algn="l">
+              <a:buNone/>
               <a:defRPr sz="1575" b="1">
                 <a:solidFill>
                   <a:srgbClr val="E45756"/>

--- a/operator_hypothesis_lab/presentations/tsla_descriptive_microscope_evidence.pptx
+++ b/operator_hypothesis_lab/presentations/tsla_descriptive_microscope_evidence.pptx
@@ -2,29 +2,35 @@
 <file path=ppt/presentation.xml><?xml version="1.0" encoding="utf-8"?>
 <p:presentation xmlns:p="http://schemas.openxmlformats.org/presentationml/2006/main">
   <p:sldMasterIdLst>
-    <p:sldMasterId xmlns:r="http://schemas.openxmlformats.org/officeDocument/2006/relationships" id="2147483648" r:id="Ref7cc39b95564d2b"/>
+    <p:sldMasterId xmlns:r="http://schemas.openxmlformats.org/officeDocument/2006/relationships" id="2147483648" r:id="R352f69c630134403"/>
   </p:sldMasterIdLst>
   <p:notesMasterIdLst>
-    <p:notesMasterId xmlns:r="http://schemas.openxmlformats.org/officeDocument/2006/relationships" r:id="R7c60bff3d6e748a3"/>
+    <p:notesMasterId xmlns:r="http://schemas.openxmlformats.org/officeDocument/2006/relationships" r:id="R57325cb173274937"/>
   </p:notesMasterIdLst>
   <p:sldIdLst>
-    <p:sldId xmlns:r="http://schemas.openxmlformats.org/officeDocument/2006/relationships" id="256" r:id="Rb26edf371e23440b"/>
-    <p:sldId xmlns:r="http://schemas.openxmlformats.org/officeDocument/2006/relationships" id="257" r:id="Ra257527d8f714d57"/>
-    <p:sldId xmlns:r="http://schemas.openxmlformats.org/officeDocument/2006/relationships" id="258" r:id="R6c46465cf34a404f"/>
-    <p:sldId xmlns:r="http://schemas.openxmlformats.org/officeDocument/2006/relationships" id="259" r:id="Re97d6d52d0e241cc"/>
-    <p:sldId xmlns:r="http://schemas.openxmlformats.org/officeDocument/2006/relationships" id="260" r:id="Rb22a1f62dc8041f7"/>
-    <p:sldId xmlns:r="http://schemas.openxmlformats.org/officeDocument/2006/relationships" id="261" r:id="R53c9a87f72a94b4e"/>
-    <p:sldId xmlns:r="http://schemas.openxmlformats.org/officeDocument/2006/relationships" id="262" r:id="Rf2d0d2d36713477b"/>
-    <p:sldId xmlns:r="http://schemas.openxmlformats.org/officeDocument/2006/relationships" id="263" r:id="R674c5b9788e848c0"/>
-    <p:sldId xmlns:r="http://schemas.openxmlformats.org/officeDocument/2006/relationships" id="264" r:id="Ra4822c9e02864476"/>
-    <p:sldId xmlns:r="http://schemas.openxmlformats.org/officeDocument/2006/relationships" id="265" r:id="R3c6629c1cbd64e3f"/>
-    <p:sldId xmlns:r="http://schemas.openxmlformats.org/officeDocument/2006/relationships" id="266" r:id="Ra91b6a4e24884fcc"/>
-    <p:sldId xmlns:r="http://schemas.openxmlformats.org/officeDocument/2006/relationships" id="267" r:id="R3e0baacb00b34b70"/>
-    <p:sldId xmlns:r="http://schemas.openxmlformats.org/officeDocument/2006/relationships" id="268" r:id="Rcbb176f099ad44bb"/>
-    <p:sldId xmlns:r="http://schemas.openxmlformats.org/officeDocument/2006/relationships" id="269" r:id="R6f51a66bcda34f42"/>
-    <p:sldId xmlns:r="http://schemas.openxmlformats.org/officeDocument/2006/relationships" id="270" r:id="R96ae2cf278d64820"/>
-    <p:sldId xmlns:r="http://schemas.openxmlformats.org/officeDocument/2006/relationships" id="271" r:id="Rb4f0ea01794d4d4c"/>
-    <p:sldId xmlns:r="http://schemas.openxmlformats.org/officeDocument/2006/relationships" id="272" r:id="R4fb887d3286143d1"/>
+    <p:sldId xmlns:r="http://schemas.openxmlformats.org/officeDocument/2006/relationships" id="256" r:id="R3d91745202c04d36"/>
+    <p:sldId xmlns:r="http://schemas.openxmlformats.org/officeDocument/2006/relationships" id="257" r:id="R514dca58b41045cf"/>
+    <p:sldId xmlns:r="http://schemas.openxmlformats.org/officeDocument/2006/relationships" id="258" r:id="R97f1c4a73a3042ac"/>
+    <p:sldId xmlns:r="http://schemas.openxmlformats.org/officeDocument/2006/relationships" id="259" r:id="Rcbf4957169114ad9"/>
+    <p:sldId xmlns:r="http://schemas.openxmlformats.org/officeDocument/2006/relationships" id="260" r:id="R35a7e896827c4d32"/>
+    <p:sldId xmlns:r="http://schemas.openxmlformats.org/officeDocument/2006/relationships" id="261" r:id="R824b191bcd244b13"/>
+    <p:sldId xmlns:r="http://schemas.openxmlformats.org/officeDocument/2006/relationships" id="262" r:id="R2f05df1e6a9844c3"/>
+    <p:sldId xmlns:r="http://schemas.openxmlformats.org/officeDocument/2006/relationships" id="263" r:id="Raadfaddc89c7459f"/>
+    <p:sldId xmlns:r="http://schemas.openxmlformats.org/officeDocument/2006/relationships" id="264" r:id="R48bc88342ff3452f"/>
+    <p:sldId xmlns:r="http://schemas.openxmlformats.org/officeDocument/2006/relationships" id="265" r:id="R0e7a6a6c64bc4516"/>
+    <p:sldId xmlns:r="http://schemas.openxmlformats.org/officeDocument/2006/relationships" id="266" r:id="R778ba8dbed4149d0"/>
+    <p:sldId xmlns:r="http://schemas.openxmlformats.org/officeDocument/2006/relationships" id="267" r:id="R473f21589cca4062"/>
+    <p:sldId xmlns:r="http://schemas.openxmlformats.org/officeDocument/2006/relationships" id="268" r:id="Re93a2de3d29d41d5"/>
+    <p:sldId xmlns:r="http://schemas.openxmlformats.org/officeDocument/2006/relationships" id="269" r:id="R288622e5c9bf4bbd"/>
+    <p:sldId xmlns:r="http://schemas.openxmlformats.org/officeDocument/2006/relationships" id="270" r:id="R127364fd51944af5"/>
+    <p:sldId xmlns:r="http://schemas.openxmlformats.org/officeDocument/2006/relationships" id="271" r:id="R5ad94936ace94198"/>
+    <p:sldId xmlns:r="http://schemas.openxmlformats.org/officeDocument/2006/relationships" id="272" r:id="Re08edc91a99d45ca"/>
+    <p:sldId xmlns:r="http://schemas.openxmlformats.org/officeDocument/2006/relationships" id="273" r:id="R79f679868c444863"/>
+    <p:sldId xmlns:r="http://schemas.openxmlformats.org/officeDocument/2006/relationships" id="274" r:id="R8869a3ca62f749c2"/>
+    <p:sldId xmlns:r="http://schemas.openxmlformats.org/officeDocument/2006/relationships" id="275" r:id="R8c67b4c6108e4ee3"/>
+    <p:sldId xmlns:r="http://schemas.openxmlformats.org/officeDocument/2006/relationships" id="276" r:id="Rf43d8d89c0b048ce"/>
+    <p:sldId xmlns:r="http://schemas.openxmlformats.org/officeDocument/2006/relationships" id="277" r:id="R01d4460775c14ea4"/>
+    <p:sldId xmlns:r="http://schemas.openxmlformats.org/officeDocument/2006/relationships" id="278" r:id="R3084b2f5cad34eaa"/>
   </p:sldIdLst>
   <p:sldSz cx="12192000" cy="6858000"/>
   <p:notesSz cx="6858000" cy="9144000"/>
@@ -1298,6 +1304,201 @@
 </p:notes>
 </file>
 
+<file path=ppt/notesSlides/notesSlide18.xml><?xml version="1.0" encoding="utf-8"?>
+<p:notes xmlns:p="http://schemas.openxmlformats.org/presentationml/2006/main">
+  <p:cSld>
+    <p:spTree>
+      <p:nvGrpSpPr>
+        <p:cNvPr id="1" name=""/>
+        <p:cNvGrpSpPr/>
+        <p:nvPr/>
+      </p:nvGrpSpPr>
+      <p:grpSpPr>
+        <a:xfrm xmlns:a="http://schemas.openxmlformats.org/drawingml/2006/main"/>
+      </p:grpSpPr>
+      <p:sp>
+        <p:nvSpPr>
+          <p:cNvPr id="2" name="Slide Image Placeholder 1"/>
+          <p:cNvSpPr>
+            <a:spLocks xmlns:a="http://schemas.openxmlformats.org/drawingml/2006/main" noGrp="1"/>
+          </p:cNvSpPr>
+          <p:nvPr>
+            <p:ph type="sldImg" idx="0"/>
+          </p:nvPr>
+        </p:nvSpPr>
+        <p:spPr/>
+      </p:sp>
+      <p:sp>
+        <p:nvSpPr>
+          <p:cNvPr id="3" name="Notes Placeholder 2"/>
+          <p:cNvSpPr>
+            <a:spLocks xmlns:a="http://schemas.openxmlformats.org/drawingml/2006/main" noGrp="1"/>
+          </p:cNvSpPr>
+          <p:nvPr>
+            <p:ph type="body" idx="1"/>
+          </p:nvPr>
+        </p:nvSpPr>
+        <p:spPr/>
+        <p:txBody>
+          <a:bodyPr xmlns:a="http://schemas.openxmlformats.org/drawingml/2006/main"/>
+          <a:lstStyle xmlns:a="http://schemas.openxmlformats.org/drawingml/2006/main"/>
+          <a:p xmlns:a="http://schemas.openxmlformats.org/drawingml/2006/main">
+            <a:r>
+              <a:t>This section asks whether aggregating red and green path states washes out different prior-versus-forward return relationships.</a:t>
+            </a:r>
+          </a:p>
+          <a:p xmlns:a="http://schemas.openxmlformats.org/drawingml/2006/main">
+            <a:r>
+              <a:t/>
+            </a:r>
+          </a:p>
+          <a:p xmlns:a="http://schemas.openxmlformats.org/drawingml/2006/main">
+            <a:r>
+              <a:t>[Sources]</a:t>
+            </a:r>
+          </a:p>
+          <a:p xmlns:a="http://schemas.openxmlformats.org/drawingml/2006/main">
+            <a:r>
+              <a:t>- operator_hypothesis_lab/docs/TSLA_ER20_PATH_REGIME_BANDS_2018_2023.md</a:t>
+            </a:r>
+          </a:p>
+          <a:p xmlns:a="http://schemas.openxmlformats.org/drawingml/2006/main">
+            <a:r>
+              <a:t>- scripts/inspect/run_tsla_er20_conditioned_return_horizon_grid.R</a:t>
+            </a:r>
+          </a:p>
+          <a:p xmlns:a="http://schemas.openxmlformats.org/drawingml/2006/main">
+            <a:r>
+              <a:t>[/Sources]</a:t>
+            </a:r>
+          </a:p>
+        </p:txBody>
+      </p:sp>
+      <p:sp>
+        <p:nvSpPr>
+          <p:cNvPr id="4" name="Slide Number Placeholder 3"/>
+          <p:cNvSpPr>
+            <a:spLocks xmlns:a="http://schemas.openxmlformats.org/drawingml/2006/main" noGrp="1"/>
+          </p:cNvSpPr>
+          <p:nvPr>
+            <p:ph type="sldNum" idx="5"/>
+          </p:nvPr>
+        </p:nvSpPr>
+        <p:spPr/>
+        <p:txBody>
+          <a:bodyPr xmlns:a="http://schemas.openxmlformats.org/drawingml/2006/main"/>
+          <a:lstStyle xmlns:a="http://schemas.openxmlformats.org/drawingml/2006/main"/>
+          <a:p xmlns:a="http://schemas.openxmlformats.org/drawingml/2006/main"/>
+        </p:txBody>
+      </p:sp>
+    </p:spTree>
+  </p:cSld>
+  <p:clrMapOvr>
+    <a:masterClrMapping xmlns:a="http://schemas.openxmlformats.org/drawingml/2006/main"/>
+  </p:clrMapOvr>
+</p:notes>
+</file>
+
+<file path=ppt/notesSlides/notesSlide19.xml><?xml version="1.0" encoding="utf-8"?>
+<p:notes xmlns:p="http://schemas.openxmlformats.org/presentationml/2006/main">
+  <p:cSld>
+    <p:spTree>
+      <p:nvGrpSpPr>
+        <p:cNvPr id="1" name=""/>
+        <p:cNvGrpSpPr/>
+        <p:nvPr/>
+      </p:nvGrpSpPr>
+      <p:grpSpPr>
+        <a:xfrm xmlns:a="http://schemas.openxmlformats.org/drawingml/2006/main"/>
+      </p:grpSpPr>
+      <p:sp>
+        <p:nvSpPr>
+          <p:cNvPr id="2" name="Slide Image Placeholder 1"/>
+          <p:cNvSpPr>
+            <a:spLocks xmlns:a="http://schemas.openxmlformats.org/drawingml/2006/main" noGrp="1"/>
+          </p:cNvSpPr>
+          <p:nvPr>
+            <p:ph type="sldImg" idx="0"/>
+          </p:nvPr>
+        </p:nvSpPr>
+        <p:spPr/>
+      </p:sp>
+      <p:sp>
+        <p:nvSpPr>
+          <p:cNvPr id="3" name="Notes Placeholder 2"/>
+          <p:cNvSpPr>
+            <a:spLocks xmlns:a="http://schemas.openxmlformats.org/drawingml/2006/main" noGrp="1"/>
+          </p:cNvSpPr>
+          <p:nvPr>
+            <p:ph type="body" idx="1"/>
+          </p:nvPr>
+        </p:nvSpPr>
+        <p:spPr/>
+        <p:txBody>
+          <a:bodyPr xmlns:a="http://schemas.openxmlformats.org/drawingml/2006/main"/>
+          <a:lstStyle xmlns:a="http://schemas.openxmlformats.org/drawingml/2006/main"/>
+          <a:p xmlns:a="http://schemas.openxmlformats.org/drawingml/2006/main">
+            <a:r>
+              <a:t>The timing is causal: ER20 at the anchor uses closes through that anchor only. One pre-2018 anchor from the aggregate grid is uncolored and excluded.</a:t>
+            </a:r>
+          </a:p>
+          <a:p xmlns:a="http://schemas.openxmlformats.org/drawingml/2006/main">
+            <a:r>
+              <a:t/>
+            </a:r>
+          </a:p>
+          <a:p xmlns:a="http://schemas.openxmlformats.org/drawingml/2006/main">
+            <a:r>
+              <a:t>[Sources]</a:t>
+            </a:r>
+          </a:p>
+          <a:p xmlns:a="http://schemas.openxmlformats.org/drawingml/2006/main">
+            <a:r>
+              <a:t>- runs/research_workbench/operator_hypothesis_lab/tsla_er20_conditioned_return_horizon_grid_20260825/run_spec.csv</a:t>
+            </a:r>
+          </a:p>
+          <a:p xmlns:a="http://schemas.openxmlformats.org/drawingml/2006/main">
+            <a:r>
+              <a:t>- runs/research_workbench/operator_hypothesis_lab/tsla_er20_conditioned_return_horizon_grid_20260825/grid_checks.csv</a:t>
+            </a:r>
+          </a:p>
+          <a:p xmlns:a="http://schemas.openxmlformats.org/drawingml/2006/main">
+            <a:r>
+              <a:t>- operator_hypothesis_lab/docs/TSLA_ER20_PATH_REGIME_BANDS_2018_2023.md</a:t>
+            </a:r>
+          </a:p>
+          <a:p xmlns:a="http://schemas.openxmlformats.org/drawingml/2006/main">
+            <a:r>
+              <a:t>[/Sources]</a:t>
+            </a:r>
+          </a:p>
+        </p:txBody>
+      </p:sp>
+      <p:sp>
+        <p:nvSpPr>
+          <p:cNvPr id="4" name="Slide Number Placeholder 3"/>
+          <p:cNvSpPr>
+            <a:spLocks xmlns:a="http://schemas.openxmlformats.org/drawingml/2006/main" noGrp="1"/>
+          </p:cNvSpPr>
+          <p:nvPr>
+            <p:ph type="sldNum" idx="5"/>
+          </p:nvPr>
+        </p:nvSpPr>
+        <p:spPr/>
+        <p:txBody>
+          <a:bodyPr xmlns:a="http://schemas.openxmlformats.org/drawingml/2006/main"/>
+          <a:lstStyle xmlns:a="http://schemas.openxmlformats.org/drawingml/2006/main"/>
+          <a:p xmlns:a="http://schemas.openxmlformats.org/drawingml/2006/main"/>
+        </p:txBody>
+      </p:sp>
+    </p:spTree>
+  </p:cSld>
+  <p:clrMapOvr>
+    <a:masterClrMapping xmlns:a="http://schemas.openxmlformats.org/drawingml/2006/main"/>
+  </p:clrMapOvr>
+</p:notes>
+</file>
+
 <file path=ppt/notesSlides/notesSlide2.xml><?xml version="1.0" encoding="utf-8"?>
 <p:notes xmlns:p="http://schemas.openxmlformats.org/presentationml/2006/main">
   <p:cSld>
@@ -1359,6 +1560,411 @@
           <a:p xmlns:a="http://schemas.openxmlformats.org/drawingml/2006/main">
             <a:r>
               <a:t>- docs/GEN5_1_POC_PROGRESS_LOG.md entries 186-188</a:t>
+            </a:r>
+          </a:p>
+          <a:p xmlns:a="http://schemas.openxmlformats.org/drawingml/2006/main">
+            <a:r>
+              <a:t>[/Sources]</a:t>
+            </a:r>
+          </a:p>
+        </p:txBody>
+      </p:sp>
+      <p:sp>
+        <p:nvSpPr>
+          <p:cNvPr id="4" name="Slide Number Placeholder 3"/>
+          <p:cNvSpPr>
+            <a:spLocks xmlns:a="http://schemas.openxmlformats.org/drawingml/2006/main" noGrp="1"/>
+          </p:cNvSpPr>
+          <p:nvPr>
+            <p:ph type="sldNum" idx="5"/>
+          </p:nvPr>
+        </p:nvSpPr>
+        <p:spPr/>
+        <p:txBody>
+          <a:bodyPr xmlns:a="http://schemas.openxmlformats.org/drawingml/2006/main"/>
+          <a:lstStyle xmlns:a="http://schemas.openxmlformats.org/drawingml/2006/main"/>
+          <a:p xmlns:a="http://schemas.openxmlformats.org/drawingml/2006/main"/>
+        </p:txBody>
+      </p:sp>
+    </p:spTree>
+  </p:cSld>
+  <p:clrMapOvr>
+    <a:masterClrMapping xmlns:a="http://schemas.openxmlformats.org/drawingml/2006/main"/>
+  </p:clrMapOvr>
+</p:notes>
+</file>
+
+<file path=ppt/notesSlides/notesSlide20.xml><?xml version="1.0" encoding="utf-8"?>
+<p:notes xmlns:p="http://schemas.openxmlformats.org/presentationml/2006/main">
+  <p:cSld>
+    <p:spTree>
+      <p:nvGrpSpPr>
+        <p:cNvPr id="1" name=""/>
+        <p:cNvGrpSpPr/>
+        <p:nvPr/>
+      </p:nvGrpSpPr>
+      <p:grpSpPr>
+        <a:xfrm xmlns:a="http://schemas.openxmlformats.org/drawingml/2006/main"/>
+      </p:grpSpPr>
+      <p:sp>
+        <p:nvSpPr>
+          <p:cNvPr id="2" name="Slide Image Placeholder 1"/>
+          <p:cNvSpPr>
+            <a:spLocks xmlns:a="http://schemas.openxmlformats.org/drawingml/2006/main" noGrp="1"/>
+          </p:cNvSpPr>
+          <p:nvPr>
+            <p:ph type="sldImg" idx="0"/>
+          </p:nvPr>
+        </p:nvSpPr>
+        <p:spPr/>
+      </p:sp>
+      <p:sp>
+        <p:nvSpPr>
+          <p:cNvPr id="3" name="Notes Placeholder 2"/>
+          <p:cNvSpPr>
+            <a:spLocks xmlns:a="http://schemas.openxmlformats.org/drawingml/2006/main" noGrp="1"/>
+          </p:cNvSpPr>
+          <p:nvPr>
+            <p:ph type="body" idx="1"/>
+          </p:nvPr>
+        </p:nvSpPr>
+        <p:spPr/>
+        <p:txBody>
+          <a:bodyPr xmlns:a="http://schemas.openxmlformats.org/drawingml/2006/main"/>
+          <a:lstStyle xmlns:a="http://schemas.openxmlformats.org/drawingml/2006/main"/>
+          <a:p xmlns:a="http://schemas.openxmlformats.org/drawingml/2006/main">
+            <a:r>
+              <a:t>Red states show a coherent positive island centered around 10 to 15 prior sessions and 3 to 10 forward sessions. The largest cell has an overlap-aware interval that still includes zero.</a:t>
+            </a:r>
+          </a:p>
+          <a:p xmlns:a="http://schemas.openxmlformats.org/drawingml/2006/main">
+            <a:r>
+              <a:t/>
+            </a:r>
+          </a:p>
+          <a:p xmlns:a="http://schemas.openxmlformats.org/drawingml/2006/main">
+            <a:r>
+              <a:t>[Sources]</a:t>
+            </a:r>
+          </a:p>
+          <a:p xmlns:a="http://schemas.openxmlformats.org/drawingml/2006/main">
+            <a:r>
+              <a:t>- runs/research_workbench/operator_hypothesis_lab/tsla_er20_conditioned_return_horizon_grid_20260825/red_sideways_pearson_matrix.csv</a:t>
+            </a:r>
+          </a:p>
+          <a:p xmlns:a="http://schemas.openxmlformats.org/drawingml/2006/main">
+            <a:r>
+              <a:t>- runs/research_workbench/operator_hypothesis_lab/tsla_er20_conditioned_return_horizon_grid_20260825/conditioned_horizon_grid_statistics.csv</a:t>
+            </a:r>
+          </a:p>
+          <a:p xmlns:a="http://schemas.openxmlformats.org/drawingml/2006/main">
+            <a:r>
+              <a:t>- runs/research_workbench/operator_hypothesis_lab/tsla_er20_conditioned_return_horizon_grid_20260825/visuals/tsla_red_sideways_pearson_heatmap.png</a:t>
+            </a:r>
+          </a:p>
+          <a:p xmlns:a="http://schemas.openxmlformats.org/drawingml/2006/main">
+            <a:r>
+              <a:t>[/Sources]</a:t>
+            </a:r>
+          </a:p>
+        </p:txBody>
+      </p:sp>
+      <p:sp>
+        <p:nvSpPr>
+          <p:cNvPr id="4" name="Slide Number Placeholder 3"/>
+          <p:cNvSpPr>
+            <a:spLocks xmlns:a="http://schemas.openxmlformats.org/drawingml/2006/main" noGrp="1"/>
+          </p:cNvSpPr>
+          <p:nvPr>
+            <p:ph type="sldNum" idx="5"/>
+          </p:nvPr>
+        </p:nvSpPr>
+        <p:spPr/>
+        <p:txBody>
+          <a:bodyPr xmlns:a="http://schemas.openxmlformats.org/drawingml/2006/main"/>
+          <a:lstStyle xmlns:a="http://schemas.openxmlformats.org/drawingml/2006/main"/>
+          <a:p xmlns:a="http://schemas.openxmlformats.org/drawingml/2006/main"/>
+        </p:txBody>
+      </p:sp>
+    </p:spTree>
+  </p:cSld>
+  <p:clrMapOvr>
+    <a:masterClrMapping xmlns:a="http://schemas.openxmlformats.org/drawingml/2006/main"/>
+  </p:clrMapOvr>
+</p:notes>
+</file>
+
+<file path=ppt/notesSlides/notesSlide21.xml><?xml version="1.0" encoding="utf-8"?>
+<p:notes xmlns:p="http://schemas.openxmlformats.org/presentationml/2006/main">
+  <p:cSld>
+    <p:spTree>
+      <p:nvGrpSpPr>
+        <p:cNvPr id="1" name=""/>
+        <p:cNvGrpSpPr/>
+        <p:nvPr/>
+      </p:nvGrpSpPr>
+      <p:grpSpPr>
+        <a:xfrm xmlns:a="http://schemas.openxmlformats.org/drawingml/2006/main"/>
+      </p:grpSpPr>
+      <p:sp>
+        <p:nvSpPr>
+          <p:cNvPr id="2" name="Slide Image Placeholder 1"/>
+          <p:cNvSpPr>
+            <a:spLocks xmlns:a="http://schemas.openxmlformats.org/drawingml/2006/main" noGrp="1"/>
+          </p:cNvSpPr>
+          <p:nvPr>
+            <p:ph type="sldImg" idx="0"/>
+          </p:nvPr>
+        </p:nvSpPr>
+        <p:spPr/>
+      </p:sp>
+      <p:sp>
+        <p:nvSpPr>
+          <p:cNvPr id="3" name="Notes Placeholder 2"/>
+          <p:cNvSpPr>
+            <a:spLocks xmlns:a="http://schemas.openxmlformats.org/drawingml/2006/main" noGrp="1"/>
+          </p:cNvSpPr>
+          <p:nvPr>
+            <p:ph type="body" idx="1"/>
+          </p:nvPr>
+        </p:nvSpPr>
+        <p:spPr/>
+        <p:txBody>
+          <a:bodyPr xmlns:a="http://schemas.openxmlformats.org/drawingml/2006/main"/>
+          <a:lstStyle xmlns:a="http://schemas.openxmlformats.org/drawingml/2006/main"/>
+          <a:p xmlns:a="http://schemas.openxmlformats.org/drawingml/2006/main">
+            <a:r>
+              <a:t>Green states retain small positive short-horizon patches, but the red medium-horizon island is muted or reversed and the long-prior/long-forward corner becomes negative.</a:t>
+            </a:r>
+          </a:p>
+          <a:p xmlns:a="http://schemas.openxmlformats.org/drawingml/2006/main">
+            <a:r>
+              <a:t/>
+            </a:r>
+          </a:p>
+          <a:p xmlns:a="http://schemas.openxmlformats.org/drawingml/2006/main">
+            <a:r>
+              <a:t>[Sources]</a:t>
+            </a:r>
+          </a:p>
+          <a:p xmlns:a="http://schemas.openxmlformats.org/drawingml/2006/main">
+            <a:r>
+              <a:t>- runs/research_workbench/operator_hypothesis_lab/tsla_er20_conditioned_return_horizon_grid_20260825/green_trending_pearson_matrix.csv</a:t>
+            </a:r>
+          </a:p>
+          <a:p xmlns:a="http://schemas.openxmlformats.org/drawingml/2006/main">
+            <a:r>
+              <a:t>- runs/research_workbench/operator_hypothesis_lab/tsla_er20_conditioned_return_horizon_grid_20260825/conditioned_horizon_grid_statistics.csv</a:t>
+            </a:r>
+          </a:p>
+          <a:p xmlns:a="http://schemas.openxmlformats.org/drawingml/2006/main">
+            <a:r>
+              <a:t>- runs/research_workbench/operator_hypothesis_lab/tsla_er20_conditioned_return_horizon_grid_20260825/visuals/tsla_green_trending_pearson_heatmap.png</a:t>
+            </a:r>
+          </a:p>
+          <a:p xmlns:a="http://schemas.openxmlformats.org/drawingml/2006/main">
+            <a:r>
+              <a:t>[/Sources]</a:t>
+            </a:r>
+          </a:p>
+        </p:txBody>
+      </p:sp>
+      <p:sp>
+        <p:nvSpPr>
+          <p:cNvPr id="4" name="Slide Number Placeholder 3"/>
+          <p:cNvSpPr>
+            <a:spLocks xmlns:a="http://schemas.openxmlformats.org/drawingml/2006/main" noGrp="1"/>
+          </p:cNvSpPr>
+          <p:nvPr>
+            <p:ph type="sldNum" idx="5"/>
+          </p:nvPr>
+        </p:nvSpPr>
+        <p:spPr/>
+        <p:txBody>
+          <a:bodyPr xmlns:a="http://schemas.openxmlformats.org/drawingml/2006/main"/>
+          <a:lstStyle xmlns:a="http://schemas.openxmlformats.org/drawingml/2006/main"/>
+          <a:p xmlns:a="http://schemas.openxmlformats.org/drawingml/2006/main"/>
+        </p:txBody>
+      </p:sp>
+    </p:spTree>
+  </p:cSld>
+  <p:clrMapOvr>
+    <a:masterClrMapping xmlns:a="http://schemas.openxmlformats.org/drawingml/2006/main"/>
+  </p:clrMapOvr>
+</p:notes>
+</file>
+
+<file path=ppt/notesSlides/notesSlide22.xml><?xml version="1.0" encoding="utf-8"?>
+<p:notes xmlns:p="http://schemas.openxmlformats.org/presentationml/2006/main">
+  <p:cSld>
+    <p:spTree>
+      <p:nvGrpSpPr>
+        <p:cNvPr id="1" name=""/>
+        <p:cNvGrpSpPr/>
+        <p:nvPr/>
+      </p:nvGrpSpPr>
+      <p:grpSpPr>
+        <a:xfrm xmlns:a="http://schemas.openxmlformats.org/drawingml/2006/main"/>
+      </p:grpSpPr>
+      <p:sp>
+        <p:nvSpPr>
+          <p:cNvPr id="2" name="Slide Image Placeholder 1"/>
+          <p:cNvSpPr>
+            <a:spLocks xmlns:a="http://schemas.openxmlformats.org/drawingml/2006/main" noGrp="1"/>
+          </p:cNvSpPr>
+          <p:nvPr>
+            <p:ph type="sldImg" idx="0"/>
+          </p:nvPr>
+        </p:nvSpPr>
+        <p:spPr/>
+      </p:sp>
+      <p:sp>
+        <p:nvSpPr>
+          <p:cNvPr id="3" name="Notes Placeholder 2"/>
+          <p:cNvSpPr>
+            <a:spLocks xmlns:a="http://schemas.openxmlformats.org/drawingml/2006/main" noGrp="1"/>
+          </p:cNvSpPr>
+          <p:nvPr>
+            <p:ph type="body" idx="1"/>
+          </p:nvPr>
+        </p:nvSpPr>
+        <p:spPr/>
+        <p:txBody>
+          <a:bodyPr xmlns:a="http://schemas.openxmlformats.org/drawingml/2006/main"/>
+          <a:lstStyle xmlns:a="http://schemas.openxmlformats.org/drawingml/2006/main"/>
+          <a:p xmlns:a="http://schemas.openxmlformats.org/drawingml/2006/main">
+            <a:r>
+              <a:t>The largest raw regime contrast is at 15 prior and 5 forward: red correlation +0.173 versus green -0.058, a -0.231 difference. Its slope interaction has raw HAC p=0.029 but BH q=0.919; no interaction survives the grid scan.</a:t>
+            </a:r>
+          </a:p>
+          <a:p xmlns:a="http://schemas.openxmlformats.org/drawingml/2006/main">
+            <a:r>
+              <a:t/>
+            </a:r>
+          </a:p>
+          <a:p xmlns:a="http://schemas.openxmlformats.org/drawingml/2006/main">
+            <a:r>
+              <a:t>[Sources]</a:t>
+            </a:r>
+          </a:p>
+          <a:p xmlns:a="http://schemas.openxmlformats.org/drawingml/2006/main">
+            <a:r>
+              <a:t>- runs/research_workbench/operator_hypothesis_lab/tsla_er20_conditioned_return_horizon_grid_20260825/green_minus_red_pearson_matrix.csv</a:t>
+            </a:r>
+          </a:p>
+          <a:p xmlns:a="http://schemas.openxmlformats.org/drawingml/2006/main">
+            <a:r>
+              <a:t>- runs/research_workbench/operator_hypothesis_lab/tsla_er20_conditioned_return_horizon_grid_20260825/regime_comparison_statistics.csv</a:t>
+            </a:r>
+          </a:p>
+          <a:p xmlns:a="http://schemas.openxmlformats.org/drawingml/2006/main">
+            <a:r>
+              <a:t>- runs/research_workbench/operator_hypothesis_lab/tsla_er20_conditioned_return_horizon_grid_20260825/slope_interaction_bh_q_value_matrix.csv</a:t>
+            </a:r>
+          </a:p>
+          <a:p xmlns:a="http://schemas.openxmlformats.org/drawingml/2006/main">
+            <a:r>
+              <a:t>- runs/research_workbench/operator_hypothesis_lab/tsla_er20_conditioned_return_horizon_grid_20260825/visuals/tsla_green_minus_red_pearson_heatmap.png</a:t>
+            </a:r>
+          </a:p>
+          <a:p xmlns:a="http://schemas.openxmlformats.org/drawingml/2006/main">
+            <a:r>
+              <a:t>[/Sources]</a:t>
+            </a:r>
+          </a:p>
+        </p:txBody>
+      </p:sp>
+      <p:sp>
+        <p:nvSpPr>
+          <p:cNvPr id="4" name="Slide Number Placeholder 3"/>
+          <p:cNvSpPr>
+            <a:spLocks xmlns:a="http://schemas.openxmlformats.org/drawingml/2006/main" noGrp="1"/>
+          </p:cNvSpPr>
+          <p:nvPr>
+            <p:ph type="sldNum" idx="5"/>
+          </p:nvPr>
+        </p:nvSpPr>
+        <p:spPr/>
+        <p:txBody>
+          <a:bodyPr xmlns:a="http://schemas.openxmlformats.org/drawingml/2006/main"/>
+          <a:lstStyle xmlns:a="http://schemas.openxmlformats.org/drawingml/2006/main"/>
+          <a:p xmlns:a="http://schemas.openxmlformats.org/drawingml/2006/main"/>
+        </p:txBody>
+      </p:sp>
+    </p:spTree>
+  </p:cSld>
+  <p:clrMapOvr>
+    <a:masterClrMapping xmlns:a="http://schemas.openxmlformats.org/drawingml/2006/main"/>
+  </p:clrMapOvr>
+</p:notes>
+</file>
+
+<file path=ppt/notesSlides/notesSlide23.xml><?xml version="1.0" encoding="utf-8"?>
+<p:notes xmlns:p="http://schemas.openxmlformats.org/presentationml/2006/main">
+  <p:cSld>
+    <p:spTree>
+      <p:nvGrpSpPr>
+        <p:cNvPr id="1" name=""/>
+        <p:cNvGrpSpPr/>
+        <p:nvPr/>
+      </p:nvGrpSpPr>
+      <p:grpSpPr>
+        <a:xfrm xmlns:a="http://schemas.openxmlformats.org/drawingml/2006/main"/>
+      </p:grpSpPr>
+      <p:sp>
+        <p:nvSpPr>
+          <p:cNvPr id="2" name="Slide Image Placeholder 1"/>
+          <p:cNvSpPr>
+            <a:spLocks xmlns:a="http://schemas.openxmlformats.org/drawingml/2006/main" noGrp="1"/>
+          </p:cNvSpPr>
+          <p:nvPr>
+            <p:ph type="sldImg" idx="0"/>
+          </p:nvPr>
+        </p:nvSpPr>
+        <p:spPr/>
+      </p:sp>
+      <p:sp>
+        <p:nvSpPr>
+          <p:cNvPr id="3" name="Notes Placeholder 2"/>
+          <p:cNvSpPr>
+            <a:spLocks xmlns:a="http://schemas.openxmlformats.org/drawingml/2006/main" noGrp="1"/>
+          </p:cNvSpPr>
+          <p:nvPr>
+            <p:ph type="body" idx="1"/>
+          </p:nvPr>
+        </p:nvSpPr>
+        <p:spPr/>
+        <p:txBody>
+          <a:bodyPr xmlns:a="http://schemas.openxmlformats.org/drawingml/2006/main"/>
+          <a:lstStyle xmlns:a="http://schemas.openxmlformats.org/drawingml/2006/main"/>
+          <a:p xmlns:a="http://schemas.openxmlformats.org/drawingml/2006/main">
+            <a:r>
+              <a:t>Conditioning changes the descriptive map in a coherent way, but the finding remains exploratory. ER20 is built from the same trailing path as the prior-return variable, so a less mechanically entangled filter would be a useful comparison.</a:t>
+            </a:r>
+          </a:p>
+          <a:p xmlns:a="http://schemas.openxmlformats.org/drawingml/2006/main">
+            <a:r>
+              <a:t/>
+            </a:r>
+          </a:p>
+          <a:p xmlns:a="http://schemas.openxmlformats.org/drawingml/2006/main">
+            <a:r>
+              <a:t>[Sources]</a:t>
+            </a:r>
+          </a:p>
+          <a:p xmlns:a="http://schemas.openxmlformats.org/drawingml/2006/main">
+            <a:r>
+              <a:t>- runs/research_workbench/operator_hypothesis_lab/tsla_er20_conditioned_return_horizon_grid_20260825/report.md</a:t>
+            </a:r>
+          </a:p>
+          <a:p xmlns:a="http://schemas.openxmlformats.org/drawingml/2006/main">
+            <a:r>
+              <a:t>- runs/research_workbench/operator_hypothesis_lab/tsla_er20_conditioned_return_horizon_grid_20260825/conditioned_horizon_grid_statistics.csv</a:t>
+            </a:r>
+          </a:p>
+          <a:p xmlns:a="http://schemas.openxmlformats.org/drawingml/2006/main">
+            <a:r>
+              <a:t>- runs/research_workbench/operator_hypothesis_lab/tsla_er20_conditioned_return_horizon_grid_20260825/regime_comparison_statistics.csv</a:t>
             </a:r>
           </a:p>
           <a:p xmlns:a="http://schemas.openxmlformats.org/drawingml/2006/main">
@@ -2111,7 +2717,7 @@
   </p:cSld>
   <p:clrMap bg1="lt1" tx1="dk1" bg2="lt2" tx2="dk2" accent1="accent1" accent2="accent2" accent3="accent3" accent4="accent4" accent5="accent5" accent6="accent6" hlink="hlink" folHlink="folHlink"/>
   <p:sldLayoutIdLst>
-    <p:sldLayoutId xmlns:r="http://schemas.openxmlformats.org/officeDocument/2006/relationships" id="2147483649" r:id="R4dca3461df90472d"/>
+    <p:sldLayoutId xmlns:r="http://schemas.openxmlformats.org/officeDocument/2006/relationships" id="2147483649" r:id="R5ff77f7aa68e41d8"/>
   </p:sldLayoutIdLst>
   <p:txStyles>
     <p:titleStyle>
@@ -3290,7 +3896,7 @@
           <p:nvPr/>
         </p:nvPicPr>
         <p:blipFill>
-          <a:blip xmlns:r="http://schemas.openxmlformats.org/officeDocument/2006/relationships" xmlns:a="http://schemas.openxmlformats.org/drawingml/2006/main" r:embed="R37b12248629d458c"/>
+          <a:blip xmlns:r="http://schemas.openxmlformats.org/officeDocument/2006/relationships" xmlns:a="http://schemas.openxmlformats.org/drawingml/2006/main" r:embed="R7ae0722f17364403"/>
           <a:stretch xmlns:a="http://schemas.openxmlformats.org/drawingml/2006/main"/>
         </p:blipFill>
         <p:spPr>
@@ -7211,7 +7817,7 @@
           <p:nvPr/>
         </p:nvPicPr>
         <p:blipFill>
-          <a:blip xmlns:r="http://schemas.openxmlformats.org/officeDocument/2006/relationships" xmlns:a="http://schemas.openxmlformats.org/drawingml/2006/main" r:embed="Rc8a5ebf15da6464a"/>
+          <a:blip xmlns:r="http://schemas.openxmlformats.org/officeDocument/2006/relationships" xmlns:a="http://schemas.openxmlformats.org/drawingml/2006/main" r:embed="R5c8de20f28b04419"/>
           <a:stretch xmlns:a="http://schemas.openxmlformats.org/drawingml/2006/main"/>
         </p:blipFill>
         <p:spPr>
@@ -8116,7 +8722,7 @@
           <p:nvPr/>
         </p:nvPicPr>
         <p:blipFill>
-          <a:blip xmlns:r="http://schemas.openxmlformats.org/officeDocument/2006/relationships" xmlns:a="http://schemas.openxmlformats.org/drawingml/2006/main" r:embed="R5becb61b1c9b4637"/>
+          <a:blip xmlns:r="http://schemas.openxmlformats.org/officeDocument/2006/relationships" xmlns:a="http://schemas.openxmlformats.org/drawingml/2006/main" r:embed="R37dd7decee8d40dc"/>
           <a:stretch xmlns:a="http://schemas.openxmlformats.org/drawingml/2006/main"/>
         </p:blipFill>
         <p:spPr>
@@ -8920,7 +9526,7 @@
           <p:nvPr/>
         </p:nvPicPr>
         <p:blipFill>
-          <a:blip xmlns:r="http://schemas.openxmlformats.org/officeDocument/2006/relationships" xmlns:a="http://schemas.openxmlformats.org/drawingml/2006/main" r:embed="R148ed4ad98c5485e"/>
+          <a:blip xmlns:r="http://schemas.openxmlformats.org/officeDocument/2006/relationships" xmlns:a="http://schemas.openxmlformats.org/drawingml/2006/main" r:embed="R895f943fe56c4a50"/>
           <a:stretch xmlns:a="http://schemas.openxmlformats.org/drawingml/2006/main"/>
         </p:blipFill>
         <p:spPr>
@@ -10121,6 +10727,1919 @@
 </p:sld>
 </file>
 
+<file path=ppt/slides/slide18.xml><?xml version="1.0" encoding="utf-8"?>
+<p:sld xmlns:p="http://schemas.openxmlformats.org/presentationml/2006/main">
+  <p:cSld>
+    <p:bg>
+      <p:bgPr>
+        <a:solidFill xmlns:a="http://schemas.openxmlformats.org/drawingml/2006/main">
+          <a:srgbClr val="FFFFFF"/>
+        </a:solidFill>
+      </p:bgPr>
+    </p:bg>
+    <p:spTree>
+      <p:nvGrpSpPr>
+        <p:cNvPr id="1" name=""/>
+        <p:cNvGrpSpPr/>
+        <p:nvPr/>
+      </p:nvGrpSpPr>
+      <p:grpSpPr>
+        <a:xfrm xmlns:a="http://schemas.openxmlformats.org/drawingml/2006/main"/>
+      </p:grpSpPr>
+      <p:sp>
+        <p:nvSpPr>
+          <p:cNvPr id="7" name="">
+            <a:extLst xmlns:a="http://schemas.openxmlformats.org/drawingml/2006/main">
+              <a:ext uri="{FF2B5EF4-FFF2-40B4-BE49-F238E27FC236}">
+                <a16:creationId xmlns:a16="http://schemas.microsoft.com/office/drawing/2014/main" id="{52BC51E6-6E84-4C1E-8D3E-0D1B2ADE0DA7}"/>
+              </a:ext>
+            </a:extLst>
+          </p:cNvPr>
+          <p:cNvSpPr>
+            <a:spLocks xmlns:a="http://schemas.openxmlformats.org/drawingml/2006/main" noGrp="1"/>
+          </p:cNvSpPr>
+          <p:nvPr/>
+        </p:nvSpPr>
+        <p:spPr>
+          <a:xfrm xmlns:a="http://schemas.openxmlformats.org/drawingml/2006/main">
+            <a:off x="457200" y="400050"/>
+            <a:ext cx="4000500" cy="266700"/>
+          </a:xfrm>
+          <a:prstGeom xmlns:a="http://schemas.openxmlformats.org/drawingml/2006/main" prst="rect">
+            <a:avLst/>
+          </a:prstGeom>
+          <a:noFill xmlns:a="http://schemas.openxmlformats.org/drawingml/2006/main"/>
+          <a:ln xmlns:a="http://schemas.openxmlformats.org/drawingml/2006/main" w="0">
+            <a:noFill/>
+            <a:prstDash val="solid"/>
+          </a:ln>
+        </p:spPr>
+        <p:txBody>
+          <a:bodyPr xmlns:a="http://schemas.openxmlformats.org/drawingml/2006/main" wrap="square" lIns="0" tIns="0" rIns="0" bIns="0" anchor="t">
+            <a:normAutofit fontScale="100000"/>
+          </a:bodyPr>
+          <a:lstStyle xmlns:a="http://schemas.openxmlformats.org/drawingml/2006/main"/>
+          <a:p xmlns:a="http://schemas.openxmlformats.org/drawingml/2006/main">
+            <a:pPr algn="l">
+              <a:buNone/>
+              <a:defRPr sz="1350" b="1">
+                <a:solidFill>
+                  <a:srgbClr val="667384"/>
+                </a:solidFill>
+                <a:latin typeface="Arial"/>
+                <a:ea typeface="Arial"/>
+                <a:cs typeface="Arial"/>
+              </a:defRPr>
+            </a:pPr>
+            <a:r>
+              <a:rPr sz="1350" b="1">
+                <a:solidFill>
+                  <a:srgbClr val="667384"/>
+                </a:solidFill>
+                <a:latin typeface="Arial"/>
+                <a:ea typeface="Arial"/>
+                <a:cs typeface="Arial"/>
+              </a:rPr>
+              <a:t>REGIME CONDITIONING</a:t>
+            </a:r>
+          </a:p>
+        </p:txBody>
+      </p:sp>
+      <p:sp>
+        <p:nvSpPr>
+          <p:cNvPr id="2" name="">
+            <a:extLst xmlns:a="http://schemas.openxmlformats.org/drawingml/2006/main">
+              <a:ext uri="{FF2B5EF4-FFF2-40B4-BE49-F238E27FC236}">
+                <a16:creationId xmlns:a16="http://schemas.microsoft.com/office/drawing/2014/main" id="{D5FBD659-315B-4902-8A62-88F3460EC6CC}"/>
+              </a:ext>
+            </a:extLst>
+          </p:cNvPr>
+          <p:cNvSpPr>
+            <a:spLocks xmlns:a="http://schemas.openxmlformats.org/drawingml/2006/main" noGrp="1"/>
+          </p:cNvSpPr>
+          <p:nvPr/>
+        </p:nvSpPr>
+        <p:spPr>
+          <a:xfrm xmlns:a="http://schemas.openxmlformats.org/drawingml/2006/main">
+            <a:off x="457200" y="1562100"/>
+            <a:ext cx="10763250" cy="1809750"/>
+          </a:xfrm>
+          <a:prstGeom xmlns:a="http://schemas.openxmlformats.org/drawingml/2006/main" prst="rect">
+            <a:avLst/>
+          </a:prstGeom>
+          <a:noFill xmlns:a="http://schemas.openxmlformats.org/drawingml/2006/main"/>
+          <a:ln xmlns:a="http://schemas.openxmlformats.org/drawingml/2006/main" w="0">
+            <a:noFill/>
+            <a:prstDash val="solid"/>
+          </a:ln>
+        </p:spPr>
+        <p:txBody>
+          <a:bodyPr xmlns:a="http://schemas.openxmlformats.org/drawingml/2006/main" wrap="square" lIns="0" tIns="0" rIns="0" bIns="0" anchor="t">
+            <a:noAutofit/>
+          </a:bodyPr>
+          <a:lstStyle xmlns:a="http://schemas.openxmlformats.org/drawingml/2006/main"/>
+          <a:p xmlns:a="http://schemas.openxmlformats.org/drawingml/2006/main">
+            <a:pPr algn="l">
+              <a:buNone/>
+              <a:defRPr sz="5100" b="1">
+                <a:solidFill>
+                  <a:srgbClr val="000000"/>
+                </a:solidFill>
+                <a:latin typeface="Arial"/>
+                <a:ea typeface="Arial"/>
+                <a:cs typeface="Arial"/>
+              </a:defRPr>
+            </a:pPr>
+            <a:r>
+              <a:rPr sz="5100" b="1">
+                <a:solidFill>
+                  <a:srgbClr val="000000"/>
+                </a:solidFill>
+                <a:latin typeface="Arial"/>
+                <a:ea typeface="Arial"/>
+                <a:cs typeface="Arial"/>
+              </a:rPr>
+              <a:t>What if aggregation mixes</a:t>
+            </a:r>
+          </a:p>
+          <a:p xmlns:a="http://schemas.openxmlformats.org/drawingml/2006/main">
+            <a:pPr algn="l">
+              <a:buNone/>
+              <a:defRPr sz="5100" b="1">
+                <a:solidFill>
+                  <a:srgbClr val="000000"/>
+                </a:solidFill>
+                <a:latin typeface="Arial"/>
+                <a:ea typeface="Arial"/>
+                <a:cs typeface="Arial"/>
+              </a:defRPr>
+            </a:pPr>
+            <a:r>
+              <a:rPr sz="5100" b="1">
+                <a:solidFill>
+                  <a:srgbClr val="000000"/>
+                </a:solidFill>
+                <a:latin typeface="Arial"/>
+                <a:ea typeface="Arial"/>
+                <a:cs typeface="Arial"/>
+              </a:rPr>
+              <a:t>incompatible path states?</a:t>
+            </a:r>
+          </a:p>
+        </p:txBody>
+      </p:sp>
+      <p:sp>
+        <p:nvSpPr>
+          <p:cNvPr id="3" name="">
+            <a:extLst xmlns:a="http://schemas.openxmlformats.org/drawingml/2006/main">
+              <a:ext uri="{FF2B5EF4-FFF2-40B4-BE49-F238E27FC236}">
+                <a16:creationId xmlns:a16="http://schemas.microsoft.com/office/drawing/2014/main" id="{108F8D12-F796-4339-A513-DF003E6E5740}"/>
+              </a:ext>
+            </a:extLst>
+          </p:cNvPr>
+          <p:cNvSpPr>
+            <a:spLocks xmlns:a="http://schemas.openxmlformats.org/drawingml/2006/main" noGrp="1"/>
+          </p:cNvSpPr>
+          <p:nvPr/>
+        </p:nvSpPr>
+        <p:spPr>
+          <a:xfrm xmlns:a="http://schemas.openxmlformats.org/drawingml/2006/main">
+            <a:off x="457200" y="3714750"/>
+            <a:ext cx="1257300" cy="76200"/>
+          </a:xfrm>
+          <a:prstGeom xmlns:a="http://schemas.openxmlformats.org/drawingml/2006/main" prst="rect">
+            <a:avLst/>
+          </a:prstGeom>
+          <a:solidFill xmlns:a="http://schemas.openxmlformats.org/drawingml/2006/main">
+            <a:srgbClr val="3D8DFF"/>
+          </a:solidFill>
+          <a:ln xmlns:a="http://schemas.openxmlformats.org/drawingml/2006/main" w="0">
+            <a:solidFill>
+              <a:srgbClr val="3D8DFF"/>
+            </a:solidFill>
+            <a:prstDash val="solid"/>
+          </a:ln>
+        </p:spPr>
+      </p:sp>
+      <p:sp>
+        <p:nvSpPr>
+          <p:cNvPr id="4" name="">
+            <a:extLst xmlns:a="http://schemas.openxmlformats.org/drawingml/2006/main">
+              <a:ext uri="{FF2B5EF4-FFF2-40B4-BE49-F238E27FC236}">
+                <a16:creationId xmlns:a16="http://schemas.microsoft.com/office/drawing/2014/main" id="{8345830B-E6EE-4175-94D1-A484215C8069}"/>
+              </a:ext>
+            </a:extLst>
+          </p:cNvPr>
+          <p:cNvSpPr>
+            <a:spLocks xmlns:a="http://schemas.openxmlformats.org/drawingml/2006/main" noGrp="1"/>
+          </p:cNvSpPr>
+          <p:nvPr/>
+        </p:nvSpPr>
+        <p:spPr>
+          <a:xfrm xmlns:a="http://schemas.openxmlformats.org/drawingml/2006/main">
+            <a:off x="457200" y="4171950"/>
+            <a:ext cx="9239250" cy="685800"/>
+          </a:xfrm>
+          <a:prstGeom xmlns:a="http://schemas.openxmlformats.org/drawingml/2006/main" prst="rect">
+            <a:avLst/>
+          </a:prstGeom>
+          <a:noFill xmlns:a="http://schemas.openxmlformats.org/drawingml/2006/main"/>
+          <a:ln xmlns:a="http://schemas.openxmlformats.org/drawingml/2006/main" w="0">
+            <a:noFill/>
+            <a:prstDash val="solid"/>
+          </a:ln>
+        </p:spPr>
+        <p:txBody>
+          <a:bodyPr xmlns:a="http://schemas.openxmlformats.org/drawingml/2006/main" wrap="square" lIns="0" tIns="0" rIns="0" bIns="0" anchor="t">
+            <a:normAutofit fontScale="100000"/>
+          </a:bodyPr>
+          <a:lstStyle xmlns:a="http://schemas.openxmlformats.org/drawingml/2006/main"/>
+          <a:p xmlns:a="http://schemas.openxmlformats.org/drawingml/2006/main">
+            <a:pPr algn="l">
+              <a:buNone/>
+              <a:defRPr sz="2550" b="0">
+                <a:solidFill>
+                  <a:srgbClr val="273548"/>
+                </a:solidFill>
+                <a:latin typeface="Arial"/>
+                <a:ea typeface="Arial"/>
+                <a:cs typeface="Arial"/>
+              </a:defRPr>
+            </a:pPr>
+            <a:r>
+              <a:rPr sz="2550" b="0">
+                <a:solidFill>
+                  <a:srgbClr val="273548"/>
+                </a:solidFill>
+                <a:latin typeface="Arial"/>
+                <a:ea typeface="Arial"/>
+                <a:cs typeface="Arial"/>
+              </a:rPr>
+              <a:t>Use the ER20 color already known at the anchor close.</a:t>
+            </a:r>
+          </a:p>
+        </p:txBody>
+      </p:sp>
+      <p:sp>
+        <p:nvSpPr>
+          <p:cNvPr id="5" name="">
+            <a:extLst xmlns:a="http://schemas.openxmlformats.org/drawingml/2006/main">
+              <a:ext uri="{FF2B5EF4-FFF2-40B4-BE49-F238E27FC236}">
+                <a16:creationId xmlns:a16="http://schemas.microsoft.com/office/drawing/2014/main" id="{93B3AAD9-855C-47E7-9BA0-F94B71F3F42B}"/>
+              </a:ext>
+            </a:extLst>
+          </p:cNvPr>
+          <p:cNvSpPr>
+            <a:spLocks xmlns:a="http://schemas.openxmlformats.org/drawingml/2006/main" noGrp="1"/>
+          </p:cNvSpPr>
+          <p:nvPr/>
+        </p:nvSpPr>
+        <p:spPr>
+          <a:xfrm xmlns:a="http://schemas.openxmlformats.org/drawingml/2006/main">
+            <a:off x="457200" y="5429250"/>
+            <a:ext cx="10191750" cy="609600"/>
+          </a:xfrm>
+          <a:prstGeom xmlns:a="http://schemas.openxmlformats.org/drawingml/2006/main" prst="rect">
+            <a:avLst/>
+          </a:prstGeom>
+          <a:noFill xmlns:a="http://schemas.openxmlformats.org/drawingml/2006/main"/>
+          <a:ln xmlns:a="http://schemas.openxmlformats.org/drawingml/2006/main" w="0">
+            <a:noFill/>
+            <a:prstDash val="solid"/>
+          </a:ln>
+        </p:spPr>
+        <p:txBody>
+          <a:bodyPr xmlns:a="http://schemas.openxmlformats.org/drawingml/2006/main" wrap="square" lIns="0" tIns="0" rIns="0" bIns="0" anchor="t">
+            <a:normAutofit fontScale="100000"/>
+          </a:bodyPr>
+          <a:lstStyle xmlns:a="http://schemas.openxmlformats.org/drawingml/2006/main"/>
+          <a:p xmlns:a="http://schemas.openxmlformats.org/drawingml/2006/main">
+            <a:pPr algn="l">
+              <a:buNone/>
+              <a:defRPr sz="1650" b="0">
+                <a:solidFill>
+                  <a:srgbClr val="667384"/>
+                </a:solidFill>
+                <a:latin typeface="Arial"/>
+                <a:ea typeface="Arial"/>
+                <a:cs typeface="Arial"/>
+              </a:defRPr>
+            </a:pPr>
+            <a:r>
+              <a:rPr sz="1650" b="0">
+                <a:solidFill>
+                  <a:srgbClr val="667384"/>
+                </a:solidFill>
+                <a:latin typeface="Arial"/>
+                <a:ea typeface="Arial"/>
+                <a:cs typeface="Arial"/>
+              </a:rPr>
+              <a:t>Red and green inherit the prior POC's fixed 20-session metric and 0.30 cutoff. No threshold search.</a:t>
+            </a:r>
+          </a:p>
+        </p:txBody>
+      </p:sp>
+      <p:sp>
+        <p:nvSpPr>
+          <p:cNvPr id="6" name="">
+            <a:extLst xmlns:a="http://schemas.openxmlformats.org/drawingml/2006/main">
+              <a:ext uri="{FF2B5EF4-FFF2-40B4-BE49-F238E27FC236}">
+                <a16:creationId xmlns:a16="http://schemas.microsoft.com/office/drawing/2014/main" id="{C26E2559-6393-4E7F-A448-E0578397EEA2}"/>
+              </a:ext>
+            </a:extLst>
+          </p:cNvPr>
+          <p:cNvSpPr>
+            <a:spLocks xmlns:a="http://schemas.openxmlformats.org/drawingml/2006/main" noGrp="1"/>
+          </p:cNvSpPr>
+          <p:nvPr/>
+        </p:nvSpPr>
+        <p:spPr>
+          <a:xfrm xmlns:a="http://schemas.openxmlformats.org/drawingml/2006/main">
+            <a:off x="11239500" y="6496050"/>
+            <a:ext cx="495300" cy="190500"/>
+          </a:xfrm>
+          <a:prstGeom xmlns:a="http://schemas.openxmlformats.org/drawingml/2006/main" prst="rect">
+            <a:avLst/>
+          </a:prstGeom>
+          <a:noFill xmlns:a="http://schemas.openxmlformats.org/drawingml/2006/main"/>
+          <a:ln xmlns:a="http://schemas.openxmlformats.org/drawingml/2006/main" w="0">
+            <a:noFill/>
+            <a:prstDash val="solid"/>
+          </a:ln>
+        </p:spPr>
+        <p:txBody>
+          <a:bodyPr xmlns:a="http://schemas.openxmlformats.org/drawingml/2006/main" wrap="square" lIns="0" tIns="0" rIns="0" bIns="0" anchor="t">
+            <a:normAutofit fontScale="100000"/>
+          </a:bodyPr>
+          <a:lstStyle xmlns:a="http://schemas.openxmlformats.org/drawingml/2006/main"/>
+          <a:p xmlns:a="http://schemas.openxmlformats.org/drawingml/2006/main">
+            <a:pPr algn="r">
+              <a:buNone/>
+              <a:defRPr sz="1050" b="0">
+                <a:solidFill>
+                  <a:srgbClr val="667384"/>
+                </a:solidFill>
+                <a:latin typeface="Arial"/>
+                <a:ea typeface="Arial"/>
+                <a:cs typeface="Arial"/>
+              </a:defRPr>
+            </a:pPr>
+            <a:r>
+              <a:rPr sz="1050" b="0">
+                <a:solidFill>
+                  <a:srgbClr val="667384"/>
+                </a:solidFill>
+                <a:latin typeface="Arial"/>
+                <a:ea typeface="Arial"/>
+                <a:cs typeface="Arial"/>
+              </a:rPr>
+              <a:t>18</a:t>
+            </a:r>
+          </a:p>
+        </p:txBody>
+      </p:sp>
+    </p:spTree>
+    <p:extLst>
+      <p:ext uri="{BB962C8B-B14F-4D97-AF65-F5344CB8AC3E}">
+        <p14:creationId xmlns:p14="http://schemas.microsoft.com/office/powerpoint/2010/main" val="80248067"/>
+      </p:ext>
+    </p:extLst>
+  </p:cSld>
+</p:sld>
+</file>
+
+<file path=ppt/slides/slide19.xml><?xml version="1.0" encoding="utf-8"?>
+<p:sld xmlns:p="http://schemas.openxmlformats.org/presentationml/2006/main">
+  <p:cSld>
+    <p:bg>
+      <p:bgPr>
+        <a:solidFill xmlns:a="http://schemas.openxmlformats.org/drawingml/2006/main">
+          <a:srgbClr val="FFFFFF"/>
+        </a:solidFill>
+      </p:bgPr>
+    </p:bg>
+    <p:spTree>
+      <p:nvGrpSpPr>
+        <p:cNvPr id="1" name=""/>
+        <p:cNvGrpSpPr/>
+        <p:nvPr/>
+      </p:nvGrpSpPr>
+      <p:grpSpPr>
+        <a:xfrm xmlns:a="http://schemas.openxmlformats.org/drawingml/2006/main"/>
+      </p:grpSpPr>
+      <p:sp>
+        <p:nvSpPr>
+          <p:cNvPr id="30" name="section-3">
+            <a:extLst xmlns:a="http://schemas.openxmlformats.org/drawingml/2006/main">
+              <a:ext uri="{FF2B5EF4-FFF2-40B4-BE49-F238E27FC236}">
+                <a16:creationId xmlns:a16="http://schemas.microsoft.com/office/drawing/2014/main" id="{D21E8F50-BA1C-4536-B715-AAD5A74ED82B}"/>
+              </a:ext>
+            </a:extLst>
+          </p:cNvPr>
+          <p:cNvSpPr>
+            <a:spLocks xmlns:a="http://schemas.openxmlformats.org/drawingml/2006/main" noGrp="1"/>
+          </p:cNvSpPr>
+          <p:nvPr/>
+        </p:nvSpPr>
+        <p:spPr>
+          <a:xfrm xmlns:a="http://schemas.openxmlformats.org/drawingml/2006/main">
+            <a:off x="457200" y="228600"/>
+            <a:ext cx="4191000" cy="228600"/>
+          </a:xfrm>
+          <a:prstGeom xmlns:a="http://schemas.openxmlformats.org/drawingml/2006/main" prst="rect">
+            <a:avLst/>
+          </a:prstGeom>
+          <a:noFill xmlns:a="http://schemas.openxmlformats.org/drawingml/2006/main"/>
+          <a:ln xmlns:a="http://schemas.openxmlformats.org/drawingml/2006/main" w="0">
+            <a:noFill/>
+            <a:prstDash val="solid"/>
+          </a:ln>
+        </p:spPr>
+        <p:txBody>
+          <a:bodyPr xmlns:a="http://schemas.openxmlformats.org/drawingml/2006/main" wrap="square" lIns="0" tIns="0" rIns="0" bIns="0" anchor="t">
+            <a:normAutofit fontScale="100000"/>
+          </a:bodyPr>
+          <a:lstStyle xmlns:a="http://schemas.openxmlformats.org/drawingml/2006/main"/>
+          <a:p xmlns:a="http://schemas.openxmlformats.org/drawingml/2006/main">
+            <a:pPr algn="l">
+              <a:buNone/>
+              <a:defRPr sz="1200" b="1">
+                <a:solidFill>
+                  <a:srgbClr val="667384"/>
+                </a:solidFill>
+                <a:latin typeface="Arial"/>
+                <a:ea typeface="Arial"/>
+                <a:cs typeface="Arial"/>
+              </a:defRPr>
+            </a:pPr>
+            <a:r>
+              <a:rPr sz="1200" b="1">
+                <a:solidFill>
+                  <a:srgbClr val="667384"/>
+                </a:solidFill>
+                <a:latin typeface="Arial"/>
+                <a:ea typeface="Arial"/>
+                <a:cs typeface="Arial"/>
+              </a:rPr>
+              <a:t>TSLA DESCRIPTIVE MICROSCOPE</a:t>
+            </a:r>
+          </a:p>
+        </p:txBody>
+      </p:sp>
+      <p:sp>
+        <p:nvSpPr>
+          <p:cNvPr id="2" name="title-3">
+            <a:extLst xmlns:a="http://schemas.openxmlformats.org/drawingml/2006/main">
+              <a:ext uri="{FF2B5EF4-FFF2-40B4-BE49-F238E27FC236}">
+                <a16:creationId xmlns:a16="http://schemas.microsoft.com/office/drawing/2014/main" id="{622D00AB-54E7-40F8-BC73-9A3D2344F481}"/>
+              </a:ext>
+            </a:extLst>
+          </p:cNvPr>
+          <p:cNvSpPr>
+            <a:spLocks xmlns:a="http://schemas.openxmlformats.org/drawingml/2006/main" noGrp="1"/>
+          </p:cNvSpPr>
+          <p:nvPr/>
+        </p:nvSpPr>
+        <p:spPr>
+          <a:xfrm xmlns:a="http://schemas.openxmlformats.org/drawingml/2006/main">
+            <a:off x="457200" y="533400"/>
+            <a:ext cx="11277600" cy="628650"/>
+          </a:xfrm>
+          <a:prstGeom xmlns:a="http://schemas.openxmlformats.org/drawingml/2006/main" prst="rect">
+            <a:avLst/>
+          </a:prstGeom>
+          <a:noFill xmlns:a="http://schemas.openxmlformats.org/drawingml/2006/main"/>
+          <a:ln xmlns:a="http://schemas.openxmlformats.org/drawingml/2006/main" w="0">
+            <a:noFill/>
+            <a:prstDash val="solid"/>
+          </a:ln>
+        </p:spPr>
+        <p:txBody>
+          <a:bodyPr xmlns:a="http://schemas.openxmlformats.org/drawingml/2006/main" wrap="square" lIns="0" tIns="0" rIns="0" bIns="0" anchor="t">
+            <a:normAutofit fontScale="100000"/>
+          </a:bodyPr>
+          <a:lstStyle xmlns:a="http://schemas.openxmlformats.org/drawingml/2006/main"/>
+          <a:p xmlns:a="http://schemas.openxmlformats.org/drawingml/2006/main">
+            <a:pPr algn="l">
+              <a:buNone/>
+              <a:defRPr sz="3525" b="1">
+                <a:solidFill>
+                  <a:srgbClr val="000000"/>
+                </a:solidFill>
+                <a:latin typeface="Arial"/>
+                <a:ea typeface="Arial"/>
+                <a:cs typeface="Arial"/>
+              </a:defRPr>
+            </a:pPr>
+            <a:r>
+              <a:rPr sz="3525" b="1">
+                <a:solidFill>
+                  <a:srgbClr val="000000"/>
+                </a:solidFill>
+                <a:latin typeface="Arial"/>
+                <a:ea typeface="Arial"/>
+                <a:cs typeface="Arial"/>
+              </a:rPr>
+              <a:t>Condition on ER20 before reading the future</a:t>
+            </a:r>
+          </a:p>
+        </p:txBody>
+      </p:sp>
+      <p:sp>
+        <p:nvSpPr>
+          <p:cNvPr id="3" name="">
+            <a:extLst xmlns:a="http://schemas.openxmlformats.org/drawingml/2006/main">
+              <a:ext uri="{FF2B5EF4-FFF2-40B4-BE49-F238E27FC236}">
+                <a16:creationId xmlns:a16="http://schemas.microsoft.com/office/drawing/2014/main" id="{C3977435-894D-461F-A4F7-CD91DF8A8A55}"/>
+              </a:ext>
+            </a:extLst>
+          </p:cNvPr>
+          <p:cNvSpPr>
+            <a:spLocks xmlns:a="http://schemas.openxmlformats.org/drawingml/2006/main" noGrp="1"/>
+          </p:cNvSpPr>
+          <p:nvPr/>
+        </p:nvSpPr>
+        <p:spPr>
+          <a:xfrm xmlns:a="http://schemas.openxmlformats.org/drawingml/2006/main">
+            <a:off x="457200" y="1200150"/>
+            <a:ext cx="11277600" cy="19050"/>
+          </a:xfrm>
+          <a:prstGeom xmlns:a="http://schemas.openxmlformats.org/drawingml/2006/main" prst="rect">
+            <a:avLst/>
+          </a:prstGeom>
+          <a:solidFill xmlns:a="http://schemas.openxmlformats.org/drawingml/2006/main">
+            <a:srgbClr val="B8BCC4"/>
+          </a:solidFill>
+          <a:ln xmlns:a="http://schemas.openxmlformats.org/drawingml/2006/main" w="0">
+            <a:solidFill>
+              <a:srgbClr val="B8BCC4"/>
+            </a:solidFill>
+            <a:prstDash val="solid"/>
+          </a:ln>
+        </p:spPr>
+      </p:sp>
+      <p:sp>
+        <p:nvSpPr>
+          <p:cNvPr id="4" name="footer-left-3">
+            <a:extLst xmlns:a="http://schemas.openxmlformats.org/drawingml/2006/main">
+              <a:ext uri="{FF2B5EF4-FFF2-40B4-BE49-F238E27FC236}">
+                <a16:creationId xmlns:a16="http://schemas.microsoft.com/office/drawing/2014/main" id="{FC53CCFE-82C8-49A0-BC48-206B3BC8CC1B}"/>
+              </a:ext>
+            </a:extLst>
+          </p:cNvPr>
+          <p:cNvSpPr>
+            <a:spLocks xmlns:a="http://schemas.openxmlformats.org/drawingml/2006/main" noGrp="1"/>
+          </p:cNvSpPr>
+          <p:nvPr/>
+        </p:nvSpPr>
+        <p:spPr>
+          <a:xfrm xmlns:a="http://schemas.openxmlformats.org/drawingml/2006/main">
+            <a:off x="457200" y="6515100"/>
+            <a:ext cx="3429000" cy="171450"/>
+          </a:xfrm>
+          <a:prstGeom xmlns:a="http://schemas.openxmlformats.org/drawingml/2006/main" prst="rect">
+            <a:avLst/>
+          </a:prstGeom>
+          <a:noFill xmlns:a="http://schemas.openxmlformats.org/drawingml/2006/main"/>
+          <a:ln xmlns:a="http://schemas.openxmlformats.org/drawingml/2006/main" w="0">
+            <a:noFill/>
+            <a:prstDash val="solid"/>
+          </a:ln>
+        </p:spPr>
+        <p:txBody>
+          <a:bodyPr xmlns:a="http://schemas.openxmlformats.org/drawingml/2006/main" wrap="square" lIns="0" tIns="0" rIns="0" bIns="0" anchor="t">
+            <a:normAutofit fontScale="100000"/>
+          </a:bodyPr>
+          <a:lstStyle xmlns:a="http://schemas.openxmlformats.org/drawingml/2006/main"/>
+          <a:p xmlns:a="http://schemas.openxmlformats.org/drawingml/2006/main">
+            <a:pPr algn="l">
+              <a:buNone/>
+              <a:defRPr sz="1050" b="0">
+                <a:solidFill>
+                  <a:srgbClr val="667384"/>
+                </a:solidFill>
+                <a:latin typeface="Arial"/>
+                <a:ea typeface="Arial"/>
+                <a:cs typeface="Arial"/>
+              </a:defRPr>
+            </a:pPr>
+            <a:r>
+              <a:rPr sz="1050" b="0">
+                <a:solidFill>
+                  <a:srgbClr val="667384"/>
+                </a:solidFill>
+                <a:latin typeface="Arial"/>
+                <a:ea typeface="Arial"/>
+                <a:cs typeface="Arial"/>
+              </a:rPr>
+              <a:t>Adjusted daily TSLA | 2018-2023</a:t>
+            </a:r>
+          </a:p>
+        </p:txBody>
+      </p:sp>
+      <p:sp>
+        <p:nvSpPr>
+          <p:cNvPr id="5" name="footer-number-3">
+            <a:extLst xmlns:a="http://schemas.openxmlformats.org/drawingml/2006/main">
+              <a:ext uri="{FF2B5EF4-FFF2-40B4-BE49-F238E27FC236}">
+                <a16:creationId xmlns:a16="http://schemas.microsoft.com/office/drawing/2014/main" id="{B9F045FD-2505-4635-89F0-EDCD31EF4080}"/>
+              </a:ext>
+            </a:extLst>
+          </p:cNvPr>
+          <p:cNvSpPr>
+            <a:spLocks xmlns:a="http://schemas.openxmlformats.org/drawingml/2006/main" noGrp="1"/>
+          </p:cNvSpPr>
+          <p:nvPr/>
+        </p:nvSpPr>
+        <p:spPr>
+          <a:xfrm xmlns:a="http://schemas.openxmlformats.org/drawingml/2006/main">
+            <a:off x="11239500" y="6496050"/>
+            <a:ext cx="495300" cy="190500"/>
+          </a:xfrm>
+          <a:prstGeom xmlns:a="http://schemas.openxmlformats.org/drawingml/2006/main" prst="rect">
+            <a:avLst/>
+          </a:prstGeom>
+          <a:noFill xmlns:a="http://schemas.openxmlformats.org/drawingml/2006/main"/>
+          <a:ln xmlns:a="http://schemas.openxmlformats.org/drawingml/2006/main" w="0">
+            <a:noFill/>
+            <a:prstDash val="solid"/>
+          </a:ln>
+        </p:spPr>
+        <p:txBody>
+          <a:bodyPr xmlns:a="http://schemas.openxmlformats.org/drawingml/2006/main" wrap="square" lIns="0" tIns="0" rIns="0" bIns="0" anchor="t">
+            <a:normAutofit fontScale="100000"/>
+          </a:bodyPr>
+          <a:lstStyle xmlns:a="http://schemas.openxmlformats.org/drawingml/2006/main"/>
+          <a:p xmlns:a="http://schemas.openxmlformats.org/drawingml/2006/main">
+            <a:pPr algn="r">
+              <a:buNone/>
+              <a:defRPr sz="1050" b="0">
+                <a:solidFill>
+                  <a:srgbClr val="667384"/>
+                </a:solidFill>
+                <a:latin typeface="Arial"/>
+                <a:ea typeface="Arial"/>
+                <a:cs typeface="Arial"/>
+              </a:defRPr>
+            </a:pPr>
+            <a:r>
+              <a:rPr sz="1050" b="0">
+                <a:solidFill>
+                  <a:srgbClr val="667384"/>
+                </a:solidFill>
+                <a:latin typeface="Arial"/>
+                <a:ea typeface="Arial"/>
+                <a:cs typeface="Arial"/>
+              </a:rPr>
+              <a:t>19</a:t>
+            </a:r>
+          </a:p>
+        </p:txBody>
+      </p:sp>
+      <p:sp>
+        <p:nvSpPr>
+          <p:cNvPr id="6" name="">
+            <a:extLst xmlns:a="http://schemas.openxmlformats.org/drawingml/2006/main">
+              <a:ext uri="{FF2B5EF4-FFF2-40B4-BE49-F238E27FC236}">
+                <a16:creationId xmlns:a16="http://schemas.microsoft.com/office/drawing/2014/main" id="{551133C9-969B-4370-A80C-D9B73CA522F0}"/>
+              </a:ext>
+            </a:extLst>
+          </p:cNvPr>
+          <p:cNvSpPr>
+            <a:spLocks xmlns:a="http://schemas.openxmlformats.org/drawingml/2006/main" noGrp="1"/>
+          </p:cNvSpPr>
+          <p:nvPr/>
+        </p:nvSpPr>
+        <p:spPr>
+          <a:xfrm xmlns:a="http://schemas.openxmlformats.org/drawingml/2006/main">
+            <a:off x="628650" y="1752600"/>
+            <a:ext cx="5429250" cy="762000"/>
+          </a:xfrm>
+          <a:prstGeom xmlns:a="http://schemas.openxmlformats.org/drawingml/2006/main" prst="rect">
+            <a:avLst/>
+          </a:prstGeom>
+          <a:noFill xmlns:a="http://schemas.openxmlformats.org/drawingml/2006/main"/>
+          <a:ln xmlns:a="http://schemas.openxmlformats.org/drawingml/2006/main" w="0">
+            <a:noFill/>
+            <a:prstDash val="solid"/>
+          </a:ln>
+        </p:spPr>
+        <p:txBody>
+          <a:bodyPr xmlns:a="http://schemas.openxmlformats.org/drawingml/2006/main" wrap="square" lIns="0" tIns="0" rIns="0" bIns="0" anchor="t">
+            <a:normAutofit fontScale="100000"/>
+          </a:bodyPr>
+          <a:lstStyle xmlns:a="http://schemas.openxmlformats.org/drawingml/2006/main"/>
+          <a:p xmlns:a="http://schemas.openxmlformats.org/drawingml/2006/main">
+            <a:pPr algn="l">
+              <a:buNone/>
+              <a:defRPr sz="3300" b="1">
+                <a:solidFill>
+                  <a:srgbClr val="3D8DFF"/>
+                </a:solidFill>
+                <a:latin typeface="Arial"/>
+                <a:ea typeface="Arial"/>
+                <a:cs typeface="Arial"/>
+              </a:defRPr>
+            </a:pPr>
+            <a:r>
+              <a:rPr sz="3300" b="1">
+                <a:solidFill>
+                  <a:srgbClr val="3D8DFF"/>
+                </a:solidFill>
+                <a:latin typeface="Arial"/>
+                <a:ea typeface="Arial"/>
+                <a:cs typeface="Arial"/>
+              </a:rPr>
+              <a:t>State[t]  then  R+(f)</a:t>
+            </a:r>
+          </a:p>
+        </p:txBody>
+      </p:sp>
+      <p:sp>
+        <p:nvSpPr>
+          <p:cNvPr id="7" name="">
+            <a:extLst xmlns:a="http://schemas.openxmlformats.org/drawingml/2006/main">
+              <a:ext uri="{FF2B5EF4-FFF2-40B4-BE49-F238E27FC236}">
+                <a16:creationId xmlns:a16="http://schemas.microsoft.com/office/drawing/2014/main" id="{82D8EB97-B391-424E-82EB-0DEEC881C286}"/>
+              </a:ext>
+            </a:extLst>
+          </p:cNvPr>
+          <p:cNvSpPr>
+            <a:spLocks xmlns:a="http://schemas.openxmlformats.org/drawingml/2006/main" noGrp="1"/>
+          </p:cNvSpPr>
+          <p:nvPr/>
+        </p:nvSpPr>
+        <p:spPr>
+          <a:xfrm xmlns:a="http://schemas.openxmlformats.org/drawingml/2006/main">
+            <a:off x="628650" y="2724150"/>
+            <a:ext cx="5048250" cy="990600"/>
+          </a:xfrm>
+          <a:prstGeom xmlns:a="http://schemas.openxmlformats.org/drawingml/2006/main" prst="rect">
+            <a:avLst/>
+          </a:prstGeom>
+          <a:noFill xmlns:a="http://schemas.openxmlformats.org/drawingml/2006/main"/>
+          <a:ln xmlns:a="http://schemas.openxmlformats.org/drawingml/2006/main" w="0">
+            <a:noFill/>
+            <a:prstDash val="solid"/>
+          </a:ln>
+        </p:spPr>
+        <p:txBody>
+          <a:bodyPr xmlns:a="http://schemas.openxmlformats.org/drawingml/2006/main" wrap="square" lIns="0" tIns="0" rIns="0" bIns="0" anchor="t">
+            <a:normAutofit fontScale="100000"/>
+          </a:bodyPr>
+          <a:lstStyle xmlns:a="http://schemas.openxmlformats.org/drawingml/2006/main"/>
+          <a:p xmlns:a="http://schemas.openxmlformats.org/drawingml/2006/main">
+            <a:pPr algn="l">
+              <a:buNone/>
+              <a:defRPr sz="1875" b="0">
+                <a:solidFill>
+                  <a:srgbClr val="273548"/>
+                </a:solidFill>
+                <a:latin typeface="Arial"/>
+                <a:ea typeface="Arial"/>
+                <a:cs typeface="Arial"/>
+              </a:defRPr>
+            </a:pPr>
+            <a:r>
+              <a:rPr sz="1875" b="0">
+                <a:solidFill>
+                  <a:srgbClr val="273548"/>
+                </a:solidFill>
+                <a:latin typeface="Arial"/>
+                <a:ea typeface="Arial"/>
+                <a:cs typeface="Arial"/>
+              </a:rPr>
+              <a:t>The anchor is labeled from closes through t. Prior return ends at t; following return begins after t.</a:t>
+            </a:r>
+          </a:p>
+        </p:txBody>
+      </p:sp>
+      <p:sp>
+        <p:nvSpPr>
+          <p:cNvPr id="8" name="">
+            <a:extLst xmlns:a="http://schemas.openxmlformats.org/drawingml/2006/main">
+              <a:ext uri="{FF2B5EF4-FFF2-40B4-BE49-F238E27FC236}">
+                <a16:creationId xmlns:a16="http://schemas.microsoft.com/office/drawing/2014/main" id="{8FD10794-EB76-4BB0-B74E-31375B660ECD}"/>
+              </a:ext>
+            </a:extLst>
+          </p:cNvPr>
+          <p:cNvSpPr>
+            <a:spLocks xmlns:a="http://schemas.openxmlformats.org/drawingml/2006/main" noGrp="1"/>
+          </p:cNvSpPr>
+          <p:nvPr/>
+        </p:nvSpPr>
+        <p:spPr>
+          <a:xfrm xmlns:a="http://schemas.openxmlformats.org/drawingml/2006/main">
+            <a:off x="628650" y="4095750"/>
+            <a:ext cx="4953000" cy="1695450"/>
+          </a:xfrm>
+          <a:prstGeom xmlns:a="http://schemas.openxmlformats.org/drawingml/2006/main" prst="rect">
+            <a:avLst/>
+          </a:prstGeom>
+          <a:solidFill xmlns:a="http://schemas.openxmlformats.org/drawingml/2006/main">
+            <a:srgbClr val="EDEDED"/>
+          </a:solidFill>
+          <a:ln xmlns:a="http://schemas.openxmlformats.org/drawingml/2006/main" w="0">
+            <a:solidFill>
+              <a:srgbClr val="EDEDED"/>
+            </a:solidFill>
+            <a:prstDash val="solid"/>
+          </a:ln>
+        </p:spPr>
+      </p:sp>
+      <p:sp>
+        <p:nvSpPr>
+          <p:cNvPr id="9" name="">
+            <a:extLst xmlns:a="http://schemas.openxmlformats.org/drawingml/2006/main">
+              <a:ext uri="{FF2B5EF4-FFF2-40B4-BE49-F238E27FC236}">
+                <a16:creationId xmlns:a16="http://schemas.microsoft.com/office/drawing/2014/main" id="{E8834C39-6D46-429B-A2ED-F97A068A843A}"/>
+              </a:ext>
+            </a:extLst>
+          </p:cNvPr>
+          <p:cNvSpPr>
+            <a:spLocks xmlns:a="http://schemas.openxmlformats.org/drawingml/2006/main" noGrp="1"/>
+          </p:cNvSpPr>
+          <p:nvPr/>
+        </p:nvSpPr>
+        <p:spPr>
+          <a:xfrm xmlns:a="http://schemas.openxmlformats.org/drawingml/2006/main">
+            <a:off x="628650" y="4095750"/>
+            <a:ext cx="76200" cy="1695450"/>
+          </a:xfrm>
+          <a:prstGeom xmlns:a="http://schemas.openxmlformats.org/drawingml/2006/main" prst="rect">
+            <a:avLst/>
+          </a:prstGeom>
+          <a:solidFill xmlns:a="http://schemas.openxmlformats.org/drawingml/2006/main">
+            <a:srgbClr val="3D8DFF"/>
+          </a:solidFill>
+          <a:ln xmlns:a="http://schemas.openxmlformats.org/drawingml/2006/main" w="0">
+            <a:solidFill>
+              <a:srgbClr val="3D8DFF"/>
+            </a:solidFill>
+            <a:prstDash val="solid"/>
+          </a:ln>
+        </p:spPr>
+      </p:sp>
+      <p:sp>
+        <p:nvSpPr>
+          <p:cNvPr id="10" name="">
+            <a:extLst xmlns:a="http://schemas.openxmlformats.org/drawingml/2006/main">
+              <a:ext uri="{FF2B5EF4-FFF2-40B4-BE49-F238E27FC236}">
+                <a16:creationId xmlns:a16="http://schemas.microsoft.com/office/drawing/2014/main" id="{743D83BD-5D8C-4BCB-B02F-81EB74163C70}"/>
+              </a:ext>
+            </a:extLst>
+          </p:cNvPr>
+          <p:cNvSpPr>
+            <a:spLocks xmlns:a="http://schemas.openxmlformats.org/drawingml/2006/main" noGrp="1"/>
+          </p:cNvSpPr>
+          <p:nvPr/>
+        </p:nvSpPr>
+        <p:spPr>
+          <a:xfrm xmlns:a="http://schemas.openxmlformats.org/drawingml/2006/main">
+            <a:off x="895350" y="4267200"/>
+            <a:ext cx="4495800" cy="590550"/>
+          </a:xfrm>
+          <a:prstGeom xmlns:a="http://schemas.openxmlformats.org/drawingml/2006/main" prst="rect">
+            <a:avLst/>
+          </a:prstGeom>
+          <a:noFill xmlns:a="http://schemas.openxmlformats.org/drawingml/2006/main"/>
+          <a:ln xmlns:a="http://schemas.openxmlformats.org/drawingml/2006/main" w="0">
+            <a:noFill/>
+            <a:prstDash val="solid"/>
+          </a:ln>
+        </p:spPr>
+        <p:txBody>
+          <a:bodyPr xmlns:a="http://schemas.openxmlformats.org/drawingml/2006/main" wrap="square" lIns="0" tIns="0" rIns="0" bIns="0" anchor="t">
+            <a:normAutofit fontScale="100000"/>
+          </a:bodyPr>
+          <a:lstStyle xmlns:a="http://schemas.openxmlformats.org/drawingml/2006/main"/>
+          <a:p xmlns:a="http://schemas.openxmlformats.org/drawingml/2006/main">
+            <a:pPr algn="l">
+              <a:buNone/>
+              <a:defRPr sz="3225" b="1">
+                <a:solidFill>
+                  <a:srgbClr val="3D8DFF"/>
+                </a:solidFill>
+                <a:latin typeface="Arial"/>
+                <a:ea typeface="Arial"/>
+                <a:cs typeface="Arial"/>
+              </a:defRPr>
+            </a:pPr>
+            <a:r>
+              <a:rPr sz="3225" b="1">
+                <a:solidFill>
+                  <a:srgbClr val="3D8DFF"/>
+                </a:solidFill>
+                <a:latin typeface="Arial"/>
+                <a:ea typeface="Arial"/>
+                <a:cs typeface="Arial"/>
+              </a:rPr>
+              <a:t>2</a:t>
+            </a:r>
+          </a:p>
+        </p:txBody>
+      </p:sp>
+      <p:sp>
+        <p:nvSpPr>
+          <p:cNvPr id="11" name="">
+            <a:extLst xmlns:a="http://schemas.openxmlformats.org/drawingml/2006/main">
+              <a:ext uri="{FF2B5EF4-FFF2-40B4-BE49-F238E27FC236}">
+                <a16:creationId xmlns:a16="http://schemas.microsoft.com/office/drawing/2014/main" id="{ED88569D-B256-4A8E-9334-C068F39865EA}"/>
+              </a:ext>
+            </a:extLst>
+          </p:cNvPr>
+          <p:cNvSpPr>
+            <a:spLocks xmlns:a="http://schemas.openxmlformats.org/drawingml/2006/main" noGrp="1"/>
+          </p:cNvSpPr>
+          <p:nvPr/>
+        </p:nvSpPr>
+        <p:spPr>
+          <a:xfrm xmlns:a="http://schemas.openxmlformats.org/drawingml/2006/main">
+            <a:off x="895350" y="4933950"/>
+            <a:ext cx="4495800" cy="704850"/>
+          </a:xfrm>
+          <a:prstGeom xmlns:a="http://schemas.openxmlformats.org/drawingml/2006/main" prst="rect">
+            <a:avLst/>
+          </a:prstGeom>
+          <a:noFill xmlns:a="http://schemas.openxmlformats.org/drawingml/2006/main"/>
+          <a:ln xmlns:a="http://schemas.openxmlformats.org/drawingml/2006/main" w="0">
+            <a:noFill/>
+            <a:prstDash val="solid"/>
+          </a:ln>
+        </p:spPr>
+        <p:txBody>
+          <a:bodyPr xmlns:a="http://schemas.openxmlformats.org/drawingml/2006/main" wrap="square" lIns="0" tIns="0" rIns="0" bIns="0" anchor="t">
+            <a:normAutofit fontScale="100000"/>
+          </a:bodyPr>
+          <a:lstStyle xmlns:a="http://schemas.openxmlformats.org/drawingml/2006/main"/>
+          <a:p xmlns:a="http://schemas.openxmlformats.org/drawingml/2006/main">
+            <a:pPr algn="l">
+              <a:buNone/>
+              <a:defRPr sz="1350" b="0">
+                <a:solidFill>
+                  <a:srgbClr val="273548"/>
+                </a:solidFill>
+                <a:latin typeface="Arial"/>
+                <a:ea typeface="Arial"/>
+                <a:cs typeface="Arial"/>
+              </a:defRPr>
+            </a:pPr>
+            <a:r>
+              <a:rPr sz="1350" b="0">
+                <a:solidFill>
+                  <a:srgbClr val="273548"/>
+                </a:solidFill>
+                <a:latin typeface="Arial"/>
+                <a:ea typeface="Arial"/>
+                <a:cs typeface="Arial"/>
+              </a:rPr>
+              <a:t>fixed path states</a:t>
+            </a:r>
+          </a:p>
+        </p:txBody>
+      </p:sp>
+      <p:sp>
+        <p:nvSpPr>
+          <p:cNvPr id="12" name="">
+            <a:extLst xmlns:a="http://schemas.openxmlformats.org/drawingml/2006/main">
+              <a:ext uri="{FF2B5EF4-FFF2-40B4-BE49-F238E27FC236}">
+                <a16:creationId xmlns:a16="http://schemas.microsoft.com/office/drawing/2014/main" id="{1139CAED-155E-4498-A477-F11A6F4A02F8}"/>
+              </a:ext>
+            </a:extLst>
+          </p:cNvPr>
+          <p:cNvSpPr>
+            <a:spLocks xmlns:a="http://schemas.openxmlformats.org/drawingml/2006/main" noGrp="1"/>
+          </p:cNvSpPr>
+          <p:nvPr/>
+        </p:nvSpPr>
+        <p:spPr>
+          <a:xfrm xmlns:a="http://schemas.openxmlformats.org/drawingml/2006/main">
+            <a:off x="6667500" y="1676400"/>
+            <a:ext cx="4191000" cy="400050"/>
+          </a:xfrm>
+          <a:prstGeom xmlns:a="http://schemas.openxmlformats.org/drawingml/2006/main" prst="rect">
+            <a:avLst/>
+          </a:prstGeom>
+          <a:noFill xmlns:a="http://schemas.openxmlformats.org/drawingml/2006/main"/>
+          <a:ln xmlns:a="http://schemas.openxmlformats.org/drawingml/2006/main" w="0">
+            <a:noFill/>
+            <a:prstDash val="solid"/>
+          </a:ln>
+        </p:spPr>
+        <p:txBody>
+          <a:bodyPr xmlns:a="http://schemas.openxmlformats.org/drawingml/2006/main" wrap="square" lIns="0" tIns="0" rIns="0" bIns="0" anchor="t">
+            <a:normAutofit fontScale="100000"/>
+          </a:bodyPr>
+          <a:lstStyle xmlns:a="http://schemas.openxmlformats.org/drawingml/2006/main"/>
+          <a:p xmlns:a="http://schemas.openxmlformats.org/drawingml/2006/main">
+            <a:pPr algn="l">
+              <a:buNone/>
+              <a:defRPr sz="2250" b="1">
+                <a:solidFill>
+                  <a:srgbClr val="000000"/>
+                </a:solidFill>
+                <a:latin typeface="Arial"/>
+                <a:ea typeface="Arial"/>
+                <a:cs typeface="Arial"/>
+              </a:defRPr>
+            </a:pPr>
+            <a:r>
+              <a:rPr sz="2250" b="1">
+                <a:solidFill>
+                  <a:srgbClr val="000000"/>
+                </a:solidFill>
+                <a:latin typeface="Arial"/>
+                <a:ea typeface="Arial"/>
+                <a:cs typeface="Arial"/>
+              </a:rPr>
+              <a:t>Fixed conditioning</a:t>
+            </a:r>
+          </a:p>
+        </p:txBody>
+      </p:sp>
+      <p:sp>
+        <p:nvSpPr>
+          <p:cNvPr id="13" name="">
+            <a:extLst xmlns:a="http://schemas.openxmlformats.org/drawingml/2006/main">
+              <a:ext uri="{FF2B5EF4-FFF2-40B4-BE49-F238E27FC236}">
+                <a16:creationId xmlns:a16="http://schemas.microsoft.com/office/drawing/2014/main" id="{09D8E2E5-6744-4962-977E-E85B48910BDF}"/>
+              </a:ext>
+            </a:extLst>
+          </p:cNvPr>
+          <p:cNvSpPr>
+            <a:spLocks xmlns:a="http://schemas.openxmlformats.org/drawingml/2006/main" noGrp="1"/>
+          </p:cNvSpPr>
+          <p:nvPr/>
+        </p:nvSpPr>
+        <p:spPr>
+          <a:xfrm xmlns:a="http://schemas.openxmlformats.org/drawingml/2006/main">
+            <a:off x="6667500" y="2286000"/>
+            <a:ext cx="1809750" cy="323850"/>
+          </a:xfrm>
+          <a:prstGeom xmlns:a="http://schemas.openxmlformats.org/drawingml/2006/main" prst="rect">
+            <a:avLst/>
+          </a:prstGeom>
+          <a:noFill xmlns:a="http://schemas.openxmlformats.org/drawingml/2006/main"/>
+          <a:ln xmlns:a="http://schemas.openxmlformats.org/drawingml/2006/main" w="0">
+            <a:noFill/>
+            <a:prstDash val="solid"/>
+          </a:ln>
+        </p:spPr>
+        <p:txBody>
+          <a:bodyPr xmlns:a="http://schemas.openxmlformats.org/drawingml/2006/main" wrap="square" lIns="0" tIns="0" rIns="0" bIns="0" anchor="t">
+            <a:normAutofit fontScale="100000"/>
+          </a:bodyPr>
+          <a:lstStyle xmlns:a="http://schemas.openxmlformats.org/drawingml/2006/main"/>
+          <a:p xmlns:a="http://schemas.openxmlformats.org/drawingml/2006/main">
+            <a:pPr algn="l">
+              <a:buNone/>
+              <a:defRPr sz="1500" b="1">
+                <a:solidFill>
+                  <a:srgbClr val="667384"/>
+                </a:solidFill>
+                <a:latin typeface="Arial"/>
+                <a:ea typeface="Arial"/>
+                <a:cs typeface="Arial"/>
+              </a:defRPr>
+            </a:pPr>
+            <a:r>
+              <a:rPr sz="1500" b="1">
+                <a:solidFill>
+                  <a:srgbClr val="667384"/>
+                </a:solidFill>
+                <a:latin typeface="Arial"/>
+                <a:ea typeface="Arial"/>
+                <a:cs typeface="Arial"/>
+              </a:rPr>
+              <a:t>Metric</a:t>
+            </a:r>
+          </a:p>
+        </p:txBody>
+      </p:sp>
+      <p:sp>
+        <p:nvSpPr>
+          <p:cNvPr id="14" name="">
+            <a:extLst xmlns:a="http://schemas.openxmlformats.org/drawingml/2006/main">
+              <a:ext uri="{FF2B5EF4-FFF2-40B4-BE49-F238E27FC236}">
+                <a16:creationId xmlns:a16="http://schemas.microsoft.com/office/drawing/2014/main" id="{60FD2958-8D30-49E2-9398-075A839B2785}"/>
+              </a:ext>
+            </a:extLst>
+          </p:cNvPr>
+          <p:cNvSpPr>
+            <a:spLocks xmlns:a="http://schemas.openxmlformats.org/drawingml/2006/main" noGrp="1"/>
+          </p:cNvSpPr>
+          <p:nvPr/>
+        </p:nvSpPr>
+        <p:spPr>
+          <a:xfrm xmlns:a="http://schemas.openxmlformats.org/drawingml/2006/main">
+            <a:off x="8572500" y="2286000"/>
+            <a:ext cx="2952750" cy="419100"/>
+          </a:xfrm>
+          <a:prstGeom xmlns:a="http://schemas.openxmlformats.org/drawingml/2006/main" prst="rect">
+            <a:avLst/>
+          </a:prstGeom>
+          <a:noFill xmlns:a="http://schemas.openxmlformats.org/drawingml/2006/main"/>
+          <a:ln xmlns:a="http://schemas.openxmlformats.org/drawingml/2006/main" w="0">
+            <a:noFill/>
+            <a:prstDash val="solid"/>
+          </a:ln>
+        </p:spPr>
+        <p:txBody>
+          <a:bodyPr xmlns:a="http://schemas.openxmlformats.org/drawingml/2006/main" wrap="square" lIns="0" tIns="0" rIns="0" bIns="0" anchor="t">
+            <a:normAutofit fontScale="100000"/>
+          </a:bodyPr>
+          <a:lstStyle xmlns:a="http://schemas.openxmlformats.org/drawingml/2006/main"/>
+          <a:p xmlns:a="http://schemas.openxmlformats.org/drawingml/2006/main">
+            <a:pPr algn="l">
+              <a:buNone/>
+              <a:defRPr sz="1500" b="0">
+                <a:solidFill>
+                  <a:srgbClr val="273548"/>
+                </a:solidFill>
+                <a:latin typeface="Arial"/>
+                <a:ea typeface="Arial"/>
+                <a:cs typeface="Arial"/>
+              </a:defRPr>
+            </a:pPr>
+            <a:r>
+              <a:rPr sz="1500" b="0">
+                <a:solidFill>
+                  <a:srgbClr val="273548"/>
+                </a:solidFill>
+                <a:latin typeface="Arial"/>
+                <a:ea typeface="Arial"/>
+                <a:cs typeface="Arial"/>
+              </a:rPr>
+              <a:t>20-session log-price ER</a:t>
+            </a:r>
+          </a:p>
+        </p:txBody>
+      </p:sp>
+      <p:sp>
+        <p:nvSpPr>
+          <p:cNvPr id="15" name="">
+            <a:extLst xmlns:a="http://schemas.openxmlformats.org/drawingml/2006/main">
+              <a:ext uri="{FF2B5EF4-FFF2-40B4-BE49-F238E27FC236}">
+                <a16:creationId xmlns:a16="http://schemas.microsoft.com/office/drawing/2014/main" id="{B5F0B4C3-3792-489F-A37E-FD53597FE449}"/>
+              </a:ext>
+            </a:extLst>
+          </p:cNvPr>
+          <p:cNvSpPr>
+            <a:spLocks xmlns:a="http://schemas.openxmlformats.org/drawingml/2006/main" noGrp="1"/>
+          </p:cNvSpPr>
+          <p:nvPr/>
+        </p:nvSpPr>
+        <p:spPr>
+          <a:xfrm xmlns:a="http://schemas.openxmlformats.org/drawingml/2006/main">
+            <a:off x="6667500" y="2743200"/>
+            <a:ext cx="4857750" cy="9525"/>
+          </a:xfrm>
+          <a:prstGeom xmlns:a="http://schemas.openxmlformats.org/drawingml/2006/main" prst="rect">
+            <a:avLst/>
+          </a:prstGeom>
+          <a:solidFill xmlns:a="http://schemas.openxmlformats.org/drawingml/2006/main">
+            <a:srgbClr val="B8BCC4"/>
+          </a:solidFill>
+          <a:ln xmlns:a="http://schemas.openxmlformats.org/drawingml/2006/main" w="0">
+            <a:solidFill>
+              <a:srgbClr val="B8BCC4"/>
+            </a:solidFill>
+            <a:prstDash val="solid"/>
+          </a:ln>
+        </p:spPr>
+      </p:sp>
+      <p:sp>
+        <p:nvSpPr>
+          <p:cNvPr id="16" name="">
+            <a:extLst xmlns:a="http://schemas.openxmlformats.org/drawingml/2006/main">
+              <a:ext uri="{FF2B5EF4-FFF2-40B4-BE49-F238E27FC236}">
+                <a16:creationId xmlns:a16="http://schemas.microsoft.com/office/drawing/2014/main" id="{1F168646-6439-4EB2-88F0-0C08EDC14E3F}"/>
+              </a:ext>
+            </a:extLst>
+          </p:cNvPr>
+          <p:cNvSpPr>
+            <a:spLocks xmlns:a="http://schemas.openxmlformats.org/drawingml/2006/main" noGrp="1"/>
+          </p:cNvSpPr>
+          <p:nvPr/>
+        </p:nvSpPr>
+        <p:spPr>
+          <a:xfrm xmlns:a="http://schemas.openxmlformats.org/drawingml/2006/main">
+            <a:off x="6667500" y="2876550"/>
+            <a:ext cx="1809750" cy="323850"/>
+          </a:xfrm>
+          <a:prstGeom xmlns:a="http://schemas.openxmlformats.org/drawingml/2006/main" prst="rect">
+            <a:avLst/>
+          </a:prstGeom>
+          <a:noFill xmlns:a="http://schemas.openxmlformats.org/drawingml/2006/main"/>
+          <a:ln xmlns:a="http://schemas.openxmlformats.org/drawingml/2006/main" w="0">
+            <a:noFill/>
+            <a:prstDash val="solid"/>
+          </a:ln>
+        </p:spPr>
+        <p:txBody>
+          <a:bodyPr xmlns:a="http://schemas.openxmlformats.org/drawingml/2006/main" wrap="square" lIns="0" tIns="0" rIns="0" bIns="0" anchor="t">
+            <a:normAutofit fontScale="100000"/>
+          </a:bodyPr>
+          <a:lstStyle xmlns:a="http://schemas.openxmlformats.org/drawingml/2006/main"/>
+          <a:p xmlns:a="http://schemas.openxmlformats.org/drawingml/2006/main">
+            <a:pPr algn="l">
+              <a:buNone/>
+              <a:defRPr sz="1500" b="1">
+                <a:solidFill>
+                  <a:srgbClr val="667384"/>
+                </a:solidFill>
+                <a:latin typeface="Arial"/>
+                <a:ea typeface="Arial"/>
+                <a:cs typeface="Arial"/>
+              </a:defRPr>
+            </a:pPr>
+            <a:r>
+              <a:rPr sz="1500" b="1">
+                <a:solidFill>
+                  <a:srgbClr val="667384"/>
+                </a:solidFill>
+                <a:latin typeface="Arial"/>
+                <a:ea typeface="Arial"/>
+                <a:cs typeface="Arial"/>
+              </a:rPr>
+              <a:t>Red</a:t>
+            </a:r>
+          </a:p>
+        </p:txBody>
+      </p:sp>
+      <p:sp>
+        <p:nvSpPr>
+          <p:cNvPr id="17" name="">
+            <a:extLst xmlns:a="http://schemas.openxmlformats.org/drawingml/2006/main">
+              <a:ext uri="{FF2B5EF4-FFF2-40B4-BE49-F238E27FC236}">
+                <a16:creationId xmlns:a16="http://schemas.microsoft.com/office/drawing/2014/main" id="{5CE87A9A-C6B3-4232-84C2-9C442CAD9C05}"/>
+              </a:ext>
+            </a:extLst>
+          </p:cNvPr>
+          <p:cNvSpPr>
+            <a:spLocks xmlns:a="http://schemas.openxmlformats.org/drawingml/2006/main" noGrp="1"/>
+          </p:cNvSpPr>
+          <p:nvPr/>
+        </p:nvSpPr>
+        <p:spPr>
+          <a:xfrm xmlns:a="http://schemas.openxmlformats.org/drawingml/2006/main">
+            <a:off x="8572500" y="2876550"/>
+            <a:ext cx="2952750" cy="419100"/>
+          </a:xfrm>
+          <a:prstGeom xmlns:a="http://schemas.openxmlformats.org/drawingml/2006/main" prst="rect">
+            <a:avLst/>
+          </a:prstGeom>
+          <a:noFill xmlns:a="http://schemas.openxmlformats.org/drawingml/2006/main"/>
+          <a:ln xmlns:a="http://schemas.openxmlformats.org/drawingml/2006/main" w="0">
+            <a:noFill/>
+            <a:prstDash val="solid"/>
+          </a:ln>
+        </p:spPr>
+        <p:txBody>
+          <a:bodyPr xmlns:a="http://schemas.openxmlformats.org/drawingml/2006/main" wrap="square" lIns="0" tIns="0" rIns="0" bIns="0" anchor="t">
+            <a:normAutofit fontScale="100000"/>
+          </a:bodyPr>
+          <a:lstStyle xmlns:a="http://schemas.openxmlformats.org/drawingml/2006/main"/>
+          <a:p xmlns:a="http://schemas.openxmlformats.org/drawingml/2006/main">
+            <a:pPr algn="l">
+              <a:buNone/>
+              <a:defRPr sz="1500" b="0">
+                <a:solidFill>
+                  <a:srgbClr val="273548"/>
+                </a:solidFill>
+                <a:latin typeface="Arial"/>
+                <a:ea typeface="Arial"/>
+                <a:cs typeface="Arial"/>
+              </a:defRPr>
+            </a:pPr>
+            <a:r>
+              <a:rPr sz="1500" b="0">
+                <a:solidFill>
+                  <a:srgbClr val="273548"/>
+                </a:solidFill>
+                <a:latin typeface="Arial"/>
+                <a:ea typeface="Arial"/>
+                <a:cs typeface="Arial"/>
+              </a:rPr>
+              <a:t>ER20 &lt; 0.30 (sideways)</a:t>
+            </a:r>
+          </a:p>
+        </p:txBody>
+      </p:sp>
+      <p:sp>
+        <p:nvSpPr>
+          <p:cNvPr id="18" name="">
+            <a:extLst xmlns:a="http://schemas.openxmlformats.org/drawingml/2006/main">
+              <a:ext uri="{FF2B5EF4-FFF2-40B4-BE49-F238E27FC236}">
+                <a16:creationId xmlns:a16="http://schemas.microsoft.com/office/drawing/2014/main" id="{4C822C36-1982-4EF0-A9F3-89DAA8EAA125}"/>
+              </a:ext>
+            </a:extLst>
+          </p:cNvPr>
+          <p:cNvSpPr>
+            <a:spLocks xmlns:a="http://schemas.openxmlformats.org/drawingml/2006/main" noGrp="1"/>
+          </p:cNvSpPr>
+          <p:nvPr/>
+        </p:nvSpPr>
+        <p:spPr>
+          <a:xfrm xmlns:a="http://schemas.openxmlformats.org/drawingml/2006/main">
+            <a:off x="6667500" y="3333750"/>
+            <a:ext cx="4857750" cy="9525"/>
+          </a:xfrm>
+          <a:prstGeom xmlns:a="http://schemas.openxmlformats.org/drawingml/2006/main" prst="rect">
+            <a:avLst/>
+          </a:prstGeom>
+          <a:solidFill xmlns:a="http://schemas.openxmlformats.org/drawingml/2006/main">
+            <a:srgbClr val="B8BCC4"/>
+          </a:solidFill>
+          <a:ln xmlns:a="http://schemas.openxmlformats.org/drawingml/2006/main" w="0">
+            <a:solidFill>
+              <a:srgbClr val="B8BCC4"/>
+            </a:solidFill>
+            <a:prstDash val="solid"/>
+          </a:ln>
+        </p:spPr>
+      </p:sp>
+      <p:sp>
+        <p:nvSpPr>
+          <p:cNvPr id="19" name="">
+            <a:extLst xmlns:a="http://schemas.openxmlformats.org/drawingml/2006/main">
+              <a:ext uri="{FF2B5EF4-FFF2-40B4-BE49-F238E27FC236}">
+                <a16:creationId xmlns:a16="http://schemas.microsoft.com/office/drawing/2014/main" id="{FFA764C4-9BB1-4E82-A1F0-6E930868FEC3}"/>
+              </a:ext>
+            </a:extLst>
+          </p:cNvPr>
+          <p:cNvSpPr>
+            <a:spLocks xmlns:a="http://schemas.openxmlformats.org/drawingml/2006/main" noGrp="1"/>
+          </p:cNvSpPr>
+          <p:nvPr/>
+        </p:nvSpPr>
+        <p:spPr>
+          <a:xfrm xmlns:a="http://schemas.openxmlformats.org/drawingml/2006/main">
+            <a:off x="6667500" y="3467100"/>
+            <a:ext cx="1809750" cy="323850"/>
+          </a:xfrm>
+          <a:prstGeom xmlns:a="http://schemas.openxmlformats.org/drawingml/2006/main" prst="rect">
+            <a:avLst/>
+          </a:prstGeom>
+          <a:noFill xmlns:a="http://schemas.openxmlformats.org/drawingml/2006/main"/>
+          <a:ln xmlns:a="http://schemas.openxmlformats.org/drawingml/2006/main" w="0">
+            <a:noFill/>
+            <a:prstDash val="solid"/>
+          </a:ln>
+        </p:spPr>
+        <p:txBody>
+          <a:bodyPr xmlns:a="http://schemas.openxmlformats.org/drawingml/2006/main" wrap="square" lIns="0" tIns="0" rIns="0" bIns="0" anchor="t">
+            <a:normAutofit fontScale="100000"/>
+          </a:bodyPr>
+          <a:lstStyle xmlns:a="http://schemas.openxmlformats.org/drawingml/2006/main"/>
+          <a:p xmlns:a="http://schemas.openxmlformats.org/drawingml/2006/main">
+            <a:pPr algn="l">
+              <a:buNone/>
+              <a:defRPr sz="1500" b="1">
+                <a:solidFill>
+                  <a:srgbClr val="667384"/>
+                </a:solidFill>
+                <a:latin typeface="Arial"/>
+                <a:ea typeface="Arial"/>
+                <a:cs typeface="Arial"/>
+              </a:defRPr>
+            </a:pPr>
+            <a:r>
+              <a:rPr sz="1500" b="1">
+                <a:solidFill>
+                  <a:srgbClr val="667384"/>
+                </a:solidFill>
+                <a:latin typeface="Arial"/>
+                <a:ea typeface="Arial"/>
+                <a:cs typeface="Arial"/>
+              </a:rPr>
+              <a:t>Green</a:t>
+            </a:r>
+          </a:p>
+        </p:txBody>
+      </p:sp>
+      <p:sp>
+        <p:nvSpPr>
+          <p:cNvPr id="20" name="">
+            <a:extLst xmlns:a="http://schemas.openxmlformats.org/drawingml/2006/main">
+              <a:ext uri="{FF2B5EF4-FFF2-40B4-BE49-F238E27FC236}">
+                <a16:creationId xmlns:a16="http://schemas.microsoft.com/office/drawing/2014/main" id="{62A04E11-771F-482D-97D0-41D18323CD03}"/>
+              </a:ext>
+            </a:extLst>
+          </p:cNvPr>
+          <p:cNvSpPr>
+            <a:spLocks xmlns:a="http://schemas.openxmlformats.org/drawingml/2006/main" noGrp="1"/>
+          </p:cNvSpPr>
+          <p:nvPr/>
+        </p:nvSpPr>
+        <p:spPr>
+          <a:xfrm xmlns:a="http://schemas.openxmlformats.org/drawingml/2006/main">
+            <a:off x="8572500" y="3467100"/>
+            <a:ext cx="2952750" cy="419100"/>
+          </a:xfrm>
+          <a:prstGeom xmlns:a="http://schemas.openxmlformats.org/drawingml/2006/main" prst="rect">
+            <a:avLst/>
+          </a:prstGeom>
+          <a:noFill xmlns:a="http://schemas.openxmlformats.org/drawingml/2006/main"/>
+          <a:ln xmlns:a="http://schemas.openxmlformats.org/drawingml/2006/main" w="0">
+            <a:noFill/>
+            <a:prstDash val="solid"/>
+          </a:ln>
+        </p:spPr>
+        <p:txBody>
+          <a:bodyPr xmlns:a="http://schemas.openxmlformats.org/drawingml/2006/main" wrap="square" lIns="0" tIns="0" rIns="0" bIns="0" anchor="t">
+            <a:normAutofit fontScale="100000"/>
+          </a:bodyPr>
+          <a:lstStyle xmlns:a="http://schemas.openxmlformats.org/drawingml/2006/main"/>
+          <a:p xmlns:a="http://schemas.openxmlformats.org/drawingml/2006/main">
+            <a:pPr algn="l">
+              <a:buNone/>
+              <a:defRPr sz="1500" b="0">
+                <a:solidFill>
+                  <a:srgbClr val="273548"/>
+                </a:solidFill>
+                <a:latin typeface="Arial"/>
+                <a:ea typeface="Arial"/>
+                <a:cs typeface="Arial"/>
+              </a:defRPr>
+            </a:pPr>
+            <a:r>
+              <a:rPr sz="1500" b="0">
+                <a:solidFill>
+                  <a:srgbClr val="273548"/>
+                </a:solidFill>
+                <a:latin typeface="Arial"/>
+                <a:ea typeface="Arial"/>
+                <a:cs typeface="Arial"/>
+              </a:rPr>
+              <a:t>ER20 &gt;= 0.30 (trending)</a:t>
+            </a:r>
+          </a:p>
+        </p:txBody>
+      </p:sp>
+      <p:sp>
+        <p:nvSpPr>
+          <p:cNvPr id="21" name="">
+            <a:extLst xmlns:a="http://schemas.openxmlformats.org/drawingml/2006/main">
+              <a:ext uri="{FF2B5EF4-FFF2-40B4-BE49-F238E27FC236}">
+                <a16:creationId xmlns:a16="http://schemas.microsoft.com/office/drawing/2014/main" id="{2AEA1D46-2EB0-459D-9313-BA82DEAD9553}"/>
+              </a:ext>
+            </a:extLst>
+          </p:cNvPr>
+          <p:cNvSpPr>
+            <a:spLocks xmlns:a="http://schemas.openxmlformats.org/drawingml/2006/main" noGrp="1"/>
+          </p:cNvSpPr>
+          <p:nvPr/>
+        </p:nvSpPr>
+        <p:spPr>
+          <a:xfrm xmlns:a="http://schemas.openxmlformats.org/drawingml/2006/main">
+            <a:off x="6667500" y="3924300"/>
+            <a:ext cx="4857750" cy="9525"/>
+          </a:xfrm>
+          <a:prstGeom xmlns:a="http://schemas.openxmlformats.org/drawingml/2006/main" prst="rect">
+            <a:avLst/>
+          </a:prstGeom>
+          <a:solidFill xmlns:a="http://schemas.openxmlformats.org/drawingml/2006/main">
+            <a:srgbClr val="B8BCC4"/>
+          </a:solidFill>
+          <a:ln xmlns:a="http://schemas.openxmlformats.org/drawingml/2006/main" w="0">
+            <a:solidFill>
+              <a:srgbClr val="B8BCC4"/>
+            </a:solidFill>
+            <a:prstDash val="solid"/>
+          </a:ln>
+        </p:spPr>
+      </p:sp>
+      <p:sp>
+        <p:nvSpPr>
+          <p:cNvPr id="22" name="">
+            <a:extLst xmlns:a="http://schemas.openxmlformats.org/drawingml/2006/main">
+              <a:ext uri="{FF2B5EF4-FFF2-40B4-BE49-F238E27FC236}">
+                <a16:creationId xmlns:a16="http://schemas.microsoft.com/office/drawing/2014/main" id="{AAD0A15B-41F8-429C-8446-F9003B5B4E6F}"/>
+              </a:ext>
+            </a:extLst>
+          </p:cNvPr>
+          <p:cNvSpPr>
+            <a:spLocks xmlns:a="http://schemas.openxmlformats.org/drawingml/2006/main" noGrp="1"/>
+          </p:cNvSpPr>
+          <p:nvPr/>
+        </p:nvSpPr>
+        <p:spPr>
+          <a:xfrm xmlns:a="http://schemas.openxmlformats.org/drawingml/2006/main">
+            <a:off x="6667500" y="4057650"/>
+            <a:ext cx="1809750" cy="323850"/>
+          </a:xfrm>
+          <a:prstGeom xmlns:a="http://schemas.openxmlformats.org/drawingml/2006/main" prst="rect">
+            <a:avLst/>
+          </a:prstGeom>
+          <a:noFill xmlns:a="http://schemas.openxmlformats.org/drawingml/2006/main"/>
+          <a:ln xmlns:a="http://schemas.openxmlformats.org/drawingml/2006/main" w="0">
+            <a:noFill/>
+            <a:prstDash val="solid"/>
+          </a:ln>
+        </p:spPr>
+        <p:txBody>
+          <a:bodyPr xmlns:a="http://schemas.openxmlformats.org/drawingml/2006/main" wrap="square" lIns="0" tIns="0" rIns="0" bIns="0" anchor="t">
+            <a:normAutofit fontScale="100000"/>
+          </a:bodyPr>
+          <a:lstStyle xmlns:a="http://schemas.openxmlformats.org/drawingml/2006/main"/>
+          <a:p xmlns:a="http://schemas.openxmlformats.org/drawingml/2006/main">
+            <a:pPr algn="l">
+              <a:buNone/>
+              <a:defRPr sz="1500" b="1">
+                <a:solidFill>
+                  <a:srgbClr val="667384"/>
+                </a:solidFill>
+                <a:latin typeface="Arial"/>
+                <a:ea typeface="Arial"/>
+                <a:cs typeface="Arial"/>
+              </a:defRPr>
+            </a:pPr>
+            <a:r>
+              <a:rPr sz="1500" b="1">
+                <a:solidFill>
+                  <a:srgbClr val="667384"/>
+                </a:solidFill>
+                <a:latin typeface="Arial"/>
+                <a:ea typeface="Arial"/>
+                <a:cs typeface="Arial"/>
+              </a:rPr>
+              <a:t>Timing</a:t>
+            </a:r>
+          </a:p>
+        </p:txBody>
+      </p:sp>
+      <p:sp>
+        <p:nvSpPr>
+          <p:cNvPr id="23" name="">
+            <a:extLst xmlns:a="http://schemas.openxmlformats.org/drawingml/2006/main">
+              <a:ext uri="{FF2B5EF4-FFF2-40B4-BE49-F238E27FC236}">
+                <a16:creationId xmlns:a16="http://schemas.microsoft.com/office/drawing/2014/main" id="{A13F5128-0043-4265-B48A-E7E4E9B6F96C}"/>
+              </a:ext>
+            </a:extLst>
+          </p:cNvPr>
+          <p:cNvSpPr>
+            <a:spLocks xmlns:a="http://schemas.openxmlformats.org/drawingml/2006/main" noGrp="1"/>
+          </p:cNvSpPr>
+          <p:nvPr/>
+        </p:nvSpPr>
+        <p:spPr>
+          <a:xfrm xmlns:a="http://schemas.openxmlformats.org/drawingml/2006/main">
+            <a:off x="8572500" y="4057650"/>
+            <a:ext cx="2952750" cy="419100"/>
+          </a:xfrm>
+          <a:prstGeom xmlns:a="http://schemas.openxmlformats.org/drawingml/2006/main" prst="rect">
+            <a:avLst/>
+          </a:prstGeom>
+          <a:noFill xmlns:a="http://schemas.openxmlformats.org/drawingml/2006/main"/>
+          <a:ln xmlns:a="http://schemas.openxmlformats.org/drawingml/2006/main" w="0">
+            <a:noFill/>
+            <a:prstDash val="solid"/>
+          </a:ln>
+        </p:spPr>
+        <p:txBody>
+          <a:bodyPr xmlns:a="http://schemas.openxmlformats.org/drawingml/2006/main" wrap="square" lIns="0" tIns="0" rIns="0" bIns="0" anchor="t">
+            <a:normAutofit fontScale="100000"/>
+          </a:bodyPr>
+          <a:lstStyle xmlns:a="http://schemas.openxmlformats.org/drawingml/2006/main"/>
+          <a:p xmlns:a="http://schemas.openxmlformats.org/drawingml/2006/main">
+            <a:pPr algn="l">
+              <a:buNone/>
+              <a:defRPr sz="1500" b="0">
+                <a:solidFill>
+                  <a:srgbClr val="273548"/>
+                </a:solidFill>
+                <a:latin typeface="Arial"/>
+                <a:ea typeface="Arial"/>
+                <a:cs typeface="Arial"/>
+              </a:defRPr>
+            </a:pPr>
+            <a:r>
+              <a:rPr sz="1500" b="0">
+                <a:solidFill>
+                  <a:srgbClr val="273548"/>
+                </a:solidFill>
+                <a:latin typeface="Arial"/>
+                <a:ea typeface="Arial"/>
+                <a:cs typeface="Arial"/>
+              </a:rPr>
+              <a:t>State known at anchor close t</a:t>
+            </a:r>
+          </a:p>
+        </p:txBody>
+      </p:sp>
+      <p:sp>
+        <p:nvSpPr>
+          <p:cNvPr id="24" name="">
+            <a:extLst xmlns:a="http://schemas.openxmlformats.org/drawingml/2006/main">
+              <a:ext uri="{FF2B5EF4-FFF2-40B4-BE49-F238E27FC236}">
+                <a16:creationId xmlns:a16="http://schemas.microsoft.com/office/drawing/2014/main" id="{1BB63F79-B572-4EF7-8C82-E4140C6E382C}"/>
+              </a:ext>
+            </a:extLst>
+          </p:cNvPr>
+          <p:cNvSpPr>
+            <a:spLocks xmlns:a="http://schemas.openxmlformats.org/drawingml/2006/main" noGrp="1"/>
+          </p:cNvSpPr>
+          <p:nvPr/>
+        </p:nvSpPr>
+        <p:spPr>
+          <a:xfrm xmlns:a="http://schemas.openxmlformats.org/drawingml/2006/main">
+            <a:off x="6667500" y="4514850"/>
+            <a:ext cx="4857750" cy="9525"/>
+          </a:xfrm>
+          <a:prstGeom xmlns:a="http://schemas.openxmlformats.org/drawingml/2006/main" prst="rect">
+            <a:avLst/>
+          </a:prstGeom>
+          <a:solidFill xmlns:a="http://schemas.openxmlformats.org/drawingml/2006/main">
+            <a:srgbClr val="B8BCC4"/>
+          </a:solidFill>
+          <a:ln xmlns:a="http://schemas.openxmlformats.org/drawingml/2006/main" w="0">
+            <a:solidFill>
+              <a:srgbClr val="B8BCC4"/>
+            </a:solidFill>
+            <a:prstDash val="solid"/>
+          </a:ln>
+        </p:spPr>
+      </p:sp>
+      <p:sp>
+        <p:nvSpPr>
+          <p:cNvPr id="25" name="">
+            <a:extLst xmlns:a="http://schemas.openxmlformats.org/drawingml/2006/main">
+              <a:ext uri="{FF2B5EF4-FFF2-40B4-BE49-F238E27FC236}">
+                <a16:creationId xmlns:a16="http://schemas.microsoft.com/office/drawing/2014/main" id="{F58FD0A4-5938-4ECC-AC99-491391233E24}"/>
+              </a:ext>
+            </a:extLst>
+          </p:cNvPr>
+          <p:cNvSpPr>
+            <a:spLocks xmlns:a="http://schemas.openxmlformats.org/drawingml/2006/main" noGrp="1"/>
+          </p:cNvSpPr>
+          <p:nvPr/>
+        </p:nvSpPr>
+        <p:spPr>
+          <a:xfrm xmlns:a="http://schemas.openxmlformats.org/drawingml/2006/main">
+            <a:off x="6667500" y="4648200"/>
+            <a:ext cx="1809750" cy="323850"/>
+          </a:xfrm>
+          <a:prstGeom xmlns:a="http://schemas.openxmlformats.org/drawingml/2006/main" prst="rect">
+            <a:avLst/>
+          </a:prstGeom>
+          <a:noFill xmlns:a="http://schemas.openxmlformats.org/drawingml/2006/main"/>
+          <a:ln xmlns:a="http://schemas.openxmlformats.org/drawingml/2006/main" w="0">
+            <a:noFill/>
+            <a:prstDash val="solid"/>
+          </a:ln>
+        </p:spPr>
+        <p:txBody>
+          <a:bodyPr xmlns:a="http://schemas.openxmlformats.org/drawingml/2006/main" wrap="square" lIns="0" tIns="0" rIns="0" bIns="0" anchor="t">
+            <a:normAutofit fontScale="100000"/>
+          </a:bodyPr>
+          <a:lstStyle xmlns:a="http://schemas.openxmlformats.org/drawingml/2006/main"/>
+          <a:p xmlns:a="http://schemas.openxmlformats.org/drawingml/2006/main">
+            <a:pPr algn="l">
+              <a:buNone/>
+              <a:defRPr sz="1500" b="1">
+                <a:solidFill>
+                  <a:srgbClr val="667384"/>
+                </a:solidFill>
+                <a:latin typeface="Arial"/>
+                <a:ea typeface="Arial"/>
+                <a:cs typeface="Arial"/>
+              </a:defRPr>
+            </a:pPr>
+            <a:r>
+              <a:rPr sz="1500" b="1">
+                <a:solidFill>
+                  <a:srgbClr val="667384"/>
+                </a:solidFill>
+                <a:latin typeface="Arial"/>
+                <a:ea typeface="Arial"/>
+                <a:cs typeface="Arial"/>
+              </a:rPr>
+              <a:t>Surface</a:t>
+            </a:r>
+          </a:p>
+        </p:txBody>
+      </p:sp>
+      <p:sp>
+        <p:nvSpPr>
+          <p:cNvPr id="26" name="">
+            <a:extLst xmlns:a="http://schemas.openxmlformats.org/drawingml/2006/main">
+              <a:ext uri="{FF2B5EF4-FFF2-40B4-BE49-F238E27FC236}">
+                <a16:creationId xmlns:a16="http://schemas.microsoft.com/office/drawing/2014/main" id="{AA292260-C22B-4C56-9ED9-C8744785B552}"/>
+              </a:ext>
+            </a:extLst>
+          </p:cNvPr>
+          <p:cNvSpPr>
+            <a:spLocks xmlns:a="http://schemas.openxmlformats.org/drawingml/2006/main" noGrp="1"/>
+          </p:cNvSpPr>
+          <p:nvPr/>
+        </p:nvSpPr>
+        <p:spPr>
+          <a:xfrm xmlns:a="http://schemas.openxmlformats.org/drawingml/2006/main">
+            <a:off x="8572500" y="4648200"/>
+            <a:ext cx="2952750" cy="419100"/>
+          </a:xfrm>
+          <a:prstGeom xmlns:a="http://schemas.openxmlformats.org/drawingml/2006/main" prst="rect">
+            <a:avLst/>
+          </a:prstGeom>
+          <a:noFill xmlns:a="http://schemas.openxmlformats.org/drawingml/2006/main"/>
+          <a:ln xmlns:a="http://schemas.openxmlformats.org/drawingml/2006/main" w="0">
+            <a:noFill/>
+            <a:prstDash val="solid"/>
+          </a:ln>
+        </p:spPr>
+        <p:txBody>
+          <a:bodyPr xmlns:a="http://schemas.openxmlformats.org/drawingml/2006/main" wrap="square" lIns="0" tIns="0" rIns="0" bIns="0" anchor="t">
+            <a:normAutofit fontScale="100000"/>
+          </a:bodyPr>
+          <a:lstStyle xmlns:a="http://schemas.openxmlformats.org/drawingml/2006/main"/>
+          <a:p xmlns:a="http://schemas.openxmlformats.org/drawingml/2006/main">
+            <a:pPr algn="l">
+              <a:buNone/>
+              <a:defRPr sz="1500" b="0">
+                <a:solidFill>
+                  <a:srgbClr val="273548"/>
+                </a:solidFill>
+                <a:latin typeface="Arial"/>
+                <a:ea typeface="Arial"/>
+                <a:cs typeface="Arial"/>
+              </a:defRPr>
+            </a:pPr>
+            <a:r>
+              <a:rPr sz="1500" b="0">
+                <a:solidFill>
+                  <a:srgbClr val="273548"/>
+                </a:solidFill>
+                <a:latin typeface="Arial"/>
+                <a:ea typeface="Arial"/>
+                <a:cs typeface="Arial"/>
+              </a:rPr>
+              <a:t>Same 81 horizon pairs</a:t>
+            </a:r>
+          </a:p>
+        </p:txBody>
+      </p:sp>
+      <p:sp>
+        <p:nvSpPr>
+          <p:cNvPr id="27" name="">
+            <a:extLst xmlns:a="http://schemas.openxmlformats.org/drawingml/2006/main">
+              <a:ext uri="{FF2B5EF4-FFF2-40B4-BE49-F238E27FC236}">
+                <a16:creationId xmlns:a16="http://schemas.microsoft.com/office/drawing/2014/main" id="{6C617A11-8542-47F5-AD42-16C68CB863E7}"/>
+              </a:ext>
+            </a:extLst>
+          </p:cNvPr>
+          <p:cNvSpPr>
+            <a:spLocks xmlns:a="http://schemas.openxmlformats.org/drawingml/2006/main" noGrp="1"/>
+          </p:cNvSpPr>
+          <p:nvPr/>
+        </p:nvSpPr>
+        <p:spPr>
+          <a:xfrm xmlns:a="http://schemas.openxmlformats.org/drawingml/2006/main">
+            <a:off x="6667500" y="5105400"/>
+            <a:ext cx="4857750" cy="9525"/>
+          </a:xfrm>
+          <a:prstGeom xmlns:a="http://schemas.openxmlformats.org/drawingml/2006/main" prst="rect">
+            <a:avLst/>
+          </a:prstGeom>
+          <a:solidFill xmlns:a="http://schemas.openxmlformats.org/drawingml/2006/main">
+            <a:srgbClr val="B8BCC4"/>
+          </a:solidFill>
+          <a:ln xmlns:a="http://schemas.openxmlformats.org/drawingml/2006/main" w="0">
+            <a:solidFill>
+              <a:srgbClr val="B8BCC4"/>
+            </a:solidFill>
+            <a:prstDash val="solid"/>
+          </a:ln>
+        </p:spPr>
+      </p:sp>
+      <p:sp>
+        <p:nvSpPr>
+          <p:cNvPr id="28" name="">
+            <a:extLst xmlns:a="http://schemas.openxmlformats.org/drawingml/2006/main">
+              <a:ext uri="{FF2B5EF4-FFF2-40B4-BE49-F238E27FC236}">
+                <a16:creationId xmlns:a16="http://schemas.microsoft.com/office/drawing/2014/main" id="{D3258514-91F0-4BFE-BE7D-A95A1C826021}"/>
+              </a:ext>
+            </a:extLst>
+          </p:cNvPr>
+          <p:cNvSpPr>
+            <a:spLocks xmlns:a="http://schemas.openxmlformats.org/drawingml/2006/main" noGrp="1"/>
+          </p:cNvSpPr>
+          <p:nvPr/>
+        </p:nvSpPr>
+        <p:spPr>
+          <a:xfrm xmlns:a="http://schemas.openxmlformats.org/drawingml/2006/main">
+            <a:off x="6667500" y="5238750"/>
+            <a:ext cx="1809750" cy="323850"/>
+          </a:xfrm>
+          <a:prstGeom xmlns:a="http://schemas.openxmlformats.org/drawingml/2006/main" prst="rect">
+            <a:avLst/>
+          </a:prstGeom>
+          <a:noFill xmlns:a="http://schemas.openxmlformats.org/drawingml/2006/main"/>
+          <a:ln xmlns:a="http://schemas.openxmlformats.org/drawingml/2006/main" w="0">
+            <a:noFill/>
+            <a:prstDash val="solid"/>
+          </a:ln>
+        </p:spPr>
+        <p:txBody>
+          <a:bodyPr xmlns:a="http://schemas.openxmlformats.org/drawingml/2006/main" wrap="square" lIns="0" tIns="0" rIns="0" bIns="0" anchor="t">
+            <a:normAutofit fontScale="100000"/>
+          </a:bodyPr>
+          <a:lstStyle xmlns:a="http://schemas.openxmlformats.org/drawingml/2006/main"/>
+          <a:p xmlns:a="http://schemas.openxmlformats.org/drawingml/2006/main">
+            <a:pPr algn="l">
+              <a:buNone/>
+              <a:defRPr sz="1500" b="1">
+                <a:solidFill>
+                  <a:srgbClr val="667384"/>
+                </a:solidFill>
+                <a:latin typeface="Arial"/>
+                <a:ea typeface="Arial"/>
+                <a:cs typeface="Arial"/>
+              </a:defRPr>
+            </a:pPr>
+            <a:r>
+              <a:rPr sz="1500" b="1">
+                <a:solidFill>
+                  <a:srgbClr val="667384"/>
+                </a:solidFill>
+                <a:latin typeface="Arial"/>
+                <a:ea typeface="Arial"/>
+                <a:cs typeface="Arial"/>
+              </a:rPr>
+              <a:t>Caution</a:t>
+            </a:r>
+          </a:p>
+        </p:txBody>
+      </p:sp>
+      <p:sp>
+        <p:nvSpPr>
+          <p:cNvPr id="29" name="">
+            <a:extLst xmlns:a="http://schemas.openxmlformats.org/drawingml/2006/main">
+              <a:ext uri="{FF2B5EF4-FFF2-40B4-BE49-F238E27FC236}">
+                <a16:creationId xmlns:a16="http://schemas.microsoft.com/office/drawing/2014/main" id="{F73C58E3-8C22-4D23-8076-93E173576113}"/>
+              </a:ext>
+            </a:extLst>
+          </p:cNvPr>
+          <p:cNvSpPr>
+            <a:spLocks xmlns:a="http://schemas.openxmlformats.org/drawingml/2006/main" noGrp="1"/>
+          </p:cNvSpPr>
+          <p:nvPr/>
+        </p:nvSpPr>
+        <p:spPr>
+          <a:xfrm xmlns:a="http://schemas.openxmlformats.org/drawingml/2006/main">
+            <a:off x="8572500" y="5238750"/>
+            <a:ext cx="2952750" cy="419100"/>
+          </a:xfrm>
+          <a:prstGeom xmlns:a="http://schemas.openxmlformats.org/drawingml/2006/main" prst="rect">
+            <a:avLst/>
+          </a:prstGeom>
+          <a:noFill xmlns:a="http://schemas.openxmlformats.org/drawingml/2006/main"/>
+          <a:ln xmlns:a="http://schemas.openxmlformats.org/drawingml/2006/main" w="0">
+            <a:noFill/>
+            <a:prstDash val="solid"/>
+          </a:ln>
+        </p:spPr>
+        <p:txBody>
+          <a:bodyPr xmlns:a="http://schemas.openxmlformats.org/drawingml/2006/main" wrap="square" lIns="0" tIns="0" rIns="0" bIns="0" anchor="t">
+            <a:normAutofit fontScale="91667"/>
+          </a:bodyPr>
+          <a:lstStyle xmlns:a="http://schemas.openxmlformats.org/drawingml/2006/main"/>
+          <a:p xmlns:a="http://schemas.openxmlformats.org/drawingml/2006/main">
+            <a:pPr algn="l">
+              <a:buNone/>
+              <a:defRPr sz="1500" b="0">
+                <a:solidFill>
+                  <a:srgbClr val="273548"/>
+                </a:solidFill>
+                <a:latin typeface="Arial"/>
+                <a:ea typeface="Arial"/>
+                <a:cs typeface="Arial"/>
+              </a:defRPr>
+            </a:pPr>
+            <a:r>
+              <a:rPr sz="1500" b="0">
+                <a:solidFill>
+                  <a:srgbClr val="273548"/>
+                </a:solidFill>
+                <a:latin typeface="Arial"/>
+                <a:ea typeface="Arial"/>
+                <a:cs typeface="Arial"/>
+              </a:rPr>
+              <a:t>ER20 and prior return share trailing price data</a:t>
+            </a:r>
+          </a:p>
+        </p:txBody>
+      </p:sp>
+    </p:spTree>
+    <p:extLst>
+      <p:ext uri="{BB962C8B-B14F-4D97-AF65-F5344CB8AC3E}">
+        <p14:creationId xmlns:p14="http://schemas.microsoft.com/office/powerpoint/2010/main" val="1397283360"/>
+      </p:ext>
+    </p:extLst>
+  </p:cSld>
+</p:sld>
+</file>
+
 <file path=ppt/slides/slide2.xml><?xml version="1.0" encoding="utf-8"?>
 <p:sld xmlns:p="http://schemas.openxmlformats.org/presentationml/2006/main">
   <p:cSld>
@@ -10965,6 +13484,2913 @@
     <p:extLst>
       <p:ext uri="{BB962C8B-B14F-4D97-AF65-F5344CB8AC3E}">
         <p14:creationId xmlns:p14="http://schemas.microsoft.com/office/powerpoint/2010/main" val="446509429"/>
+      </p:ext>
+    </p:extLst>
+  </p:cSld>
+</p:sld>
+</file>
+
+<file path=ppt/slides/slide20.xml><?xml version="1.0" encoding="utf-8"?>
+<p:sld xmlns:p="http://schemas.openxmlformats.org/presentationml/2006/main">
+  <p:cSld>
+    <p:bg>
+      <p:bgPr>
+        <a:solidFill xmlns:a="http://schemas.openxmlformats.org/drawingml/2006/main">
+          <a:srgbClr val="FFFFFF"/>
+        </a:solidFill>
+      </p:bgPr>
+    </p:bg>
+    <p:spTree>
+      <p:nvGrpSpPr>
+        <p:cNvPr id="1" name=""/>
+        <p:cNvGrpSpPr/>
+        <p:nvPr/>
+      </p:nvGrpSpPr>
+      <p:grpSpPr>
+        <a:xfrm xmlns:a="http://schemas.openxmlformats.org/drawingml/2006/main"/>
+      </p:grpSpPr>
+      <p:sp>
+        <p:nvSpPr>
+          <p:cNvPr id="9" name="section-4">
+            <a:extLst xmlns:a="http://schemas.openxmlformats.org/drawingml/2006/main">
+              <a:ext uri="{FF2B5EF4-FFF2-40B4-BE49-F238E27FC236}">
+                <a16:creationId xmlns:a16="http://schemas.microsoft.com/office/drawing/2014/main" id="{8AE0A271-669A-49F0-A82E-C4438BEE27D9}"/>
+              </a:ext>
+            </a:extLst>
+          </p:cNvPr>
+          <p:cNvSpPr>
+            <a:spLocks xmlns:a="http://schemas.openxmlformats.org/drawingml/2006/main" noGrp="1"/>
+          </p:cNvSpPr>
+          <p:nvPr/>
+        </p:nvSpPr>
+        <p:spPr>
+          <a:xfrm xmlns:a="http://schemas.openxmlformats.org/drawingml/2006/main">
+            <a:off x="457200" y="228600"/>
+            <a:ext cx="4191000" cy="228600"/>
+          </a:xfrm>
+          <a:prstGeom xmlns:a="http://schemas.openxmlformats.org/drawingml/2006/main" prst="rect">
+            <a:avLst/>
+          </a:prstGeom>
+          <a:noFill xmlns:a="http://schemas.openxmlformats.org/drawingml/2006/main"/>
+          <a:ln xmlns:a="http://schemas.openxmlformats.org/drawingml/2006/main" w="0">
+            <a:noFill/>
+            <a:prstDash val="solid"/>
+          </a:ln>
+        </p:spPr>
+        <p:txBody>
+          <a:bodyPr xmlns:a="http://schemas.openxmlformats.org/drawingml/2006/main" wrap="square" lIns="0" tIns="0" rIns="0" bIns="0" anchor="t">
+            <a:normAutofit fontScale="100000"/>
+          </a:bodyPr>
+          <a:lstStyle xmlns:a="http://schemas.openxmlformats.org/drawingml/2006/main"/>
+          <a:p xmlns:a="http://schemas.openxmlformats.org/drawingml/2006/main">
+            <a:pPr algn="l">
+              <a:buNone/>
+              <a:defRPr sz="1200" b="1">
+                <a:solidFill>
+                  <a:srgbClr val="667384"/>
+                </a:solidFill>
+                <a:latin typeface="Arial"/>
+                <a:ea typeface="Arial"/>
+                <a:cs typeface="Arial"/>
+              </a:defRPr>
+            </a:pPr>
+            <a:r>
+              <a:rPr sz="1200" b="1">
+                <a:solidFill>
+                  <a:srgbClr val="667384"/>
+                </a:solidFill>
+                <a:latin typeface="Arial"/>
+                <a:ea typeface="Arial"/>
+                <a:cs typeface="Arial"/>
+              </a:rPr>
+              <a:t>TSLA DESCRIPTIVE MICROSCOPE</a:t>
+            </a:r>
+          </a:p>
+        </p:txBody>
+      </p:sp>
+      <p:sp>
+        <p:nvSpPr>
+          <p:cNvPr id="2" name="title-4">
+            <a:extLst xmlns:a="http://schemas.openxmlformats.org/drawingml/2006/main">
+              <a:ext uri="{FF2B5EF4-FFF2-40B4-BE49-F238E27FC236}">
+                <a16:creationId xmlns:a16="http://schemas.microsoft.com/office/drawing/2014/main" id="{50C6F92F-721A-4252-9CF8-B5C9B01C7310}"/>
+              </a:ext>
+            </a:extLst>
+          </p:cNvPr>
+          <p:cNvSpPr>
+            <a:spLocks xmlns:a="http://schemas.openxmlformats.org/drawingml/2006/main" noGrp="1"/>
+          </p:cNvSpPr>
+          <p:nvPr/>
+        </p:nvSpPr>
+        <p:spPr>
+          <a:xfrm xmlns:a="http://schemas.openxmlformats.org/drawingml/2006/main">
+            <a:off x="457200" y="533400"/>
+            <a:ext cx="11277600" cy="628650"/>
+          </a:xfrm>
+          <a:prstGeom xmlns:a="http://schemas.openxmlformats.org/drawingml/2006/main" prst="rect">
+            <a:avLst/>
+          </a:prstGeom>
+          <a:noFill xmlns:a="http://schemas.openxmlformats.org/drawingml/2006/main"/>
+          <a:ln xmlns:a="http://schemas.openxmlformats.org/drawingml/2006/main" w="0">
+            <a:noFill/>
+            <a:prstDash val="solid"/>
+          </a:ln>
+        </p:spPr>
+        <p:txBody>
+          <a:bodyPr xmlns:a="http://schemas.openxmlformats.org/drawingml/2006/main" wrap="square" lIns="0" tIns="0" rIns="0" bIns="0" anchor="t">
+            <a:normAutofit fontScale="100000"/>
+          </a:bodyPr>
+          <a:lstStyle xmlns:a="http://schemas.openxmlformats.org/drawingml/2006/main"/>
+          <a:p xmlns:a="http://schemas.openxmlformats.org/drawingml/2006/main">
+            <a:pPr algn="l">
+              <a:buNone/>
+              <a:defRPr sz="3525" b="1">
+                <a:solidFill>
+                  <a:srgbClr val="000000"/>
+                </a:solidFill>
+                <a:latin typeface="Arial"/>
+                <a:ea typeface="Arial"/>
+                <a:cs typeface="Arial"/>
+              </a:defRPr>
+            </a:pPr>
+            <a:r>
+              <a:rPr sz="3525" b="1">
+                <a:solidFill>
+                  <a:srgbClr val="000000"/>
+                </a:solidFill>
+                <a:latin typeface="Arial"/>
+                <a:ea typeface="Arial"/>
+                <a:cs typeface="Arial"/>
+              </a:rPr>
+              <a:t>Red ER20 states expose a positive island</a:t>
+            </a:r>
+          </a:p>
+        </p:txBody>
+      </p:sp>
+      <p:sp>
+        <p:nvSpPr>
+          <p:cNvPr id="3" name="">
+            <a:extLst xmlns:a="http://schemas.openxmlformats.org/drawingml/2006/main">
+              <a:ext uri="{FF2B5EF4-FFF2-40B4-BE49-F238E27FC236}">
+                <a16:creationId xmlns:a16="http://schemas.microsoft.com/office/drawing/2014/main" id="{242399F2-4D0A-4337-B17E-DB3599DC380F}"/>
+              </a:ext>
+            </a:extLst>
+          </p:cNvPr>
+          <p:cNvSpPr>
+            <a:spLocks xmlns:a="http://schemas.openxmlformats.org/drawingml/2006/main" noGrp="1"/>
+          </p:cNvSpPr>
+          <p:nvPr/>
+        </p:nvSpPr>
+        <p:spPr>
+          <a:xfrm xmlns:a="http://schemas.openxmlformats.org/drawingml/2006/main">
+            <a:off x="457200" y="1200150"/>
+            <a:ext cx="11277600" cy="19050"/>
+          </a:xfrm>
+          <a:prstGeom xmlns:a="http://schemas.openxmlformats.org/drawingml/2006/main" prst="rect">
+            <a:avLst/>
+          </a:prstGeom>
+          <a:solidFill xmlns:a="http://schemas.openxmlformats.org/drawingml/2006/main">
+            <a:srgbClr val="B8BCC4"/>
+          </a:solidFill>
+          <a:ln xmlns:a="http://schemas.openxmlformats.org/drawingml/2006/main" w="0">
+            <a:solidFill>
+              <a:srgbClr val="B8BCC4"/>
+            </a:solidFill>
+            <a:prstDash val="solid"/>
+          </a:ln>
+        </p:spPr>
+      </p:sp>
+      <p:sp>
+        <p:nvSpPr>
+          <p:cNvPr id="4" name="footer-left-4">
+            <a:extLst xmlns:a="http://schemas.openxmlformats.org/drawingml/2006/main">
+              <a:ext uri="{FF2B5EF4-FFF2-40B4-BE49-F238E27FC236}">
+                <a16:creationId xmlns:a16="http://schemas.microsoft.com/office/drawing/2014/main" id="{BF8B82CA-1E48-4669-BAD8-1FF8C09FCBFB}"/>
+              </a:ext>
+            </a:extLst>
+          </p:cNvPr>
+          <p:cNvSpPr>
+            <a:spLocks xmlns:a="http://schemas.openxmlformats.org/drawingml/2006/main" noGrp="1"/>
+          </p:cNvSpPr>
+          <p:nvPr/>
+        </p:nvSpPr>
+        <p:spPr>
+          <a:xfrm xmlns:a="http://schemas.openxmlformats.org/drawingml/2006/main">
+            <a:off x="457200" y="6515100"/>
+            <a:ext cx="3429000" cy="171450"/>
+          </a:xfrm>
+          <a:prstGeom xmlns:a="http://schemas.openxmlformats.org/drawingml/2006/main" prst="rect">
+            <a:avLst/>
+          </a:prstGeom>
+          <a:noFill xmlns:a="http://schemas.openxmlformats.org/drawingml/2006/main"/>
+          <a:ln xmlns:a="http://schemas.openxmlformats.org/drawingml/2006/main" w="0">
+            <a:noFill/>
+            <a:prstDash val="solid"/>
+          </a:ln>
+        </p:spPr>
+        <p:txBody>
+          <a:bodyPr xmlns:a="http://schemas.openxmlformats.org/drawingml/2006/main" wrap="square" lIns="0" tIns="0" rIns="0" bIns="0" anchor="t">
+            <a:normAutofit fontScale="100000"/>
+          </a:bodyPr>
+          <a:lstStyle xmlns:a="http://schemas.openxmlformats.org/drawingml/2006/main"/>
+          <a:p xmlns:a="http://schemas.openxmlformats.org/drawingml/2006/main">
+            <a:pPr algn="l">
+              <a:buNone/>
+              <a:defRPr sz="1050" b="0">
+                <a:solidFill>
+                  <a:srgbClr val="667384"/>
+                </a:solidFill>
+                <a:latin typeface="Arial"/>
+                <a:ea typeface="Arial"/>
+                <a:cs typeface="Arial"/>
+              </a:defRPr>
+            </a:pPr>
+            <a:r>
+              <a:rPr sz="1050" b="0">
+                <a:solidFill>
+                  <a:srgbClr val="667384"/>
+                </a:solidFill>
+                <a:latin typeface="Arial"/>
+                <a:ea typeface="Arial"/>
+                <a:cs typeface="Arial"/>
+              </a:rPr>
+              <a:t>Adjusted daily TSLA | 2018-2023</a:t>
+            </a:r>
+          </a:p>
+        </p:txBody>
+      </p:sp>
+      <p:sp>
+        <p:nvSpPr>
+          <p:cNvPr id="5" name="footer-number-4">
+            <a:extLst xmlns:a="http://schemas.openxmlformats.org/drawingml/2006/main">
+              <a:ext uri="{FF2B5EF4-FFF2-40B4-BE49-F238E27FC236}">
+                <a16:creationId xmlns:a16="http://schemas.microsoft.com/office/drawing/2014/main" id="{05959AEC-B0A5-45F0-A65B-C94C3E5A032F}"/>
+              </a:ext>
+            </a:extLst>
+          </p:cNvPr>
+          <p:cNvSpPr>
+            <a:spLocks xmlns:a="http://schemas.openxmlformats.org/drawingml/2006/main" noGrp="1"/>
+          </p:cNvSpPr>
+          <p:nvPr/>
+        </p:nvSpPr>
+        <p:spPr>
+          <a:xfrm xmlns:a="http://schemas.openxmlformats.org/drawingml/2006/main">
+            <a:off x="11239500" y="6496050"/>
+            <a:ext cx="495300" cy="190500"/>
+          </a:xfrm>
+          <a:prstGeom xmlns:a="http://schemas.openxmlformats.org/drawingml/2006/main" prst="rect">
+            <a:avLst/>
+          </a:prstGeom>
+          <a:noFill xmlns:a="http://schemas.openxmlformats.org/drawingml/2006/main"/>
+          <a:ln xmlns:a="http://schemas.openxmlformats.org/drawingml/2006/main" w="0">
+            <a:noFill/>
+            <a:prstDash val="solid"/>
+          </a:ln>
+        </p:spPr>
+        <p:txBody>
+          <a:bodyPr xmlns:a="http://schemas.openxmlformats.org/drawingml/2006/main" wrap="square" lIns="0" tIns="0" rIns="0" bIns="0" anchor="t">
+            <a:normAutofit fontScale="100000"/>
+          </a:bodyPr>
+          <a:lstStyle xmlns:a="http://schemas.openxmlformats.org/drawingml/2006/main"/>
+          <a:p xmlns:a="http://schemas.openxmlformats.org/drawingml/2006/main">
+            <a:pPr algn="r">
+              <a:buNone/>
+              <a:defRPr sz="1050" b="0">
+                <a:solidFill>
+                  <a:srgbClr val="667384"/>
+                </a:solidFill>
+                <a:latin typeface="Arial"/>
+                <a:ea typeface="Arial"/>
+                <a:cs typeface="Arial"/>
+              </a:defRPr>
+            </a:pPr>
+            <a:r>
+              <a:rPr sz="1050" b="0">
+                <a:solidFill>
+                  <a:srgbClr val="667384"/>
+                </a:solidFill>
+                <a:latin typeface="Arial"/>
+                <a:ea typeface="Arial"/>
+                <a:cs typeface="Arial"/>
+              </a:rPr>
+              <a:t>20</a:t>
+            </a:r>
+          </a:p>
+        </p:txBody>
+      </p:sp>
+      <p:sp>
+        <p:nvSpPr>
+          <p:cNvPr id="6" name="">
+            <a:extLst xmlns:a="http://schemas.openxmlformats.org/drawingml/2006/main">
+              <a:ext uri="{FF2B5EF4-FFF2-40B4-BE49-F238E27FC236}">
+                <a16:creationId xmlns:a16="http://schemas.microsoft.com/office/drawing/2014/main" id="{9C8DEA29-E57D-4C8D-8538-2028FF89DA7C}"/>
+              </a:ext>
+            </a:extLst>
+          </p:cNvPr>
+          <p:cNvSpPr>
+            <a:spLocks xmlns:a="http://schemas.openxmlformats.org/drawingml/2006/main" noGrp="1"/>
+          </p:cNvSpPr>
+          <p:nvPr/>
+        </p:nvSpPr>
+        <p:spPr>
+          <a:xfrm xmlns:a="http://schemas.openxmlformats.org/drawingml/2006/main">
+            <a:off x="1000125" y="1352550"/>
+            <a:ext cx="10191750" cy="4905375"/>
+          </a:xfrm>
+          <a:prstGeom xmlns:a="http://schemas.openxmlformats.org/drawingml/2006/main" prst="rect">
+            <a:avLst/>
+          </a:prstGeom>
+          <a:solidFill xmlns:a="http://schemas.openxmlformats.org/drawingml/2006/main">
+            <a:srgbClr val="FFFFFF"/>
+          </a:solidFill>
+          <a:ln xmlns:a="http://schemas.openxmlformats.org/drawingml/2006/main" w="9525">
+            <a:solidFill>
+              <a:srgbClr val="B8BCC4"/>
+            </a:solidFill>
+            <a:prstDash val="solid"/>
+          </a:ln>
+        </p:spPr>
+      </p:sp>
+      <p:sp>
+        <p:nvSpPr>
+          <p:cNvPr id="8" name="">
+            <a:extLst xmlns:a="http://schemas.openxmlformats.org/drawingml/2006/main">
+              <a:ext uri="{FF2B5EF4-FFF2-40B4-BE49-F238E27FC236}">
+                <a16:creationId xmlns:a16="http://schemas.microsoft.com/office/drawing/2014/main" id="{4346A5F2-8CC4-4151-9BDB-346D47A3096B}"/>
+              </a:ext>
+            </a:extLst>
+          </p:cNvPr>
+          <p:cNvSpPr>
+            <a:spLocks xmlns:a="http://schemas.openxmlformats.org/drawingml/2006/main" noGrp="1"/>
+          </p:cNvSpPr>
+          <p:nvPr/>
+        </p:nvSpPr>
+        <p:spPr>
+          <a:xfrm xmlns:a="http://schemas.openxmlformats.org/drawingml/2006/main">
+            <a:off x="1143000" y="6286500"/>
+            <a:ext cx="9906000" cy="171450"/>
+          </a:xfrm>
+          <a:prstGeom xmlns:a="http://schemas.openxmlformats.org/drawingml/2006/main" prst="rect">
+            <a:avLst/>
+          </a:prstGeom>
+          <a:noFill xmlns:a="http://schemas.openxmlformats.org/drawingml/2006/main"/>
+          <a:ln xmlns:a="http://schemas.openxmlformats.org/drawingml/2006/main" w="0">
+            <a:noFill/>
+            <a:prstDash val="solid"/>
+          </a:ln>
+        </p:spPr>
+        <p:txBody>
+          <a:bodyPr xmlns:a="http://schemas.openxmlformats.org/drawingml/2006/main" wrap="square" lIns="0" tIns="0" rIns="0" bIns="0" anchor="t">
+            <a:normAutofit fontScale="93750"/>
+          </a:bodyPr>
+          <a:lstStyle xmlns:a="http://schemas.openxmlformats.org/drawingml/2006/main"/>
+          <a:p xmlns:a="http://schemas.openxmlformats.org/drawingml/2006/main">
+            <a:pPr algn="ctr">
+              <a:buNone/>
+              <a:defRPr sz="1200" b="0">
+                <a:solidFill>
+                  <a:srgbClr val="667384"/>
+                </a:solidFill>
+                <a:latin typeface="Arial"/>
+                <a:ea typeface="Arial"/>
+                <a:cs typeface="Arial"/>
+              </a:defRPr>
+            </a:pPr>
+            <a:r>
+              <a:rPr sz="1200" b="0">
+                <a:solidFill>
+                  <a:srgbClr val="667384"/>
+                </a:solidFill>
+                <a:latin typeface="Arial"/>
+                <a:ea typeface="Arial"/>
+                <a:cs typeface="Arial"/>
+              </a:rPr>
+              <a:t>Red/sideways matrix; strongest cell +0.173 at 15 prior / 5 forward.</a:t>
+            </a:r>
+          </a:p>
+        </p:txBody>
+      </p:sp>
+      <p:pic>
+        <p:nvPicPr>
+          <p:cNvPr id="18" name=""/>
+          <p:cNvPicPr>
+            <a:picLocks xmlns:a="http://schemas.openxmlformats.org/drawingml/2006/main" noChangeAspect="1"/>
+          </p:cNvPicPr>
+          <p:nvPr/>
+        </p:nvPicPr>
+        <p:blipFill>
+          <a:blip xmlns:r="http://schemas.openxmlformats.org/officeDocument/2006/relationships" xmlns:a="http://schemas.openxmlformats.org/drawingml/2006/main" r:embed="Rc836beb74f174414"/>
+          <a:stretch xmlns:a="http://schemas.openxmlformats.org/drawingml/2006/main"/>
+        </p:blipFill>
+        <p:spPr>
+          <a:xfrm xmlns:a="http://schemas.openxmlformats.org/drawingml/2006/main" flipH="0" flipV="0">
+            <a:off x="2942545" y="1352550"/>
+            <a:ext cx="6306911" cy="4905375"/>
+          </a:xfrm>
+          <a:prstGeom xmlns:a="http://schemas.openxmlformats.org/drawingml/2006/main" prst="rect">
+            <a:avLst/>
+          </a:prstGeom>
+        </p:spPr>
+      </p:pic>
+    </p:spTree>
+    <p:extLst>
+      <p:ext uri="{BB962C8B-B14F-4D97-AF65-F5344CB8AC3E}">
+        <p14:creationId xmlns:p14="http://schemas.microsoft.com/office/powerpoint/2010/main" val="400872380"/>
+      </p:ext>
+    </p:extLst>
+  </p:cSld>
+</p:sld>
+</file>
+
+<file path=ppt/slides/slide21.xml><?xml version="1.0" encoding="utf-8"?>
+<p:sld xmlns:p="http://schemas.openxmlformats.org/presentationml/2006/main">
+  <p:cSld>
+    <p:bg>
+      <p:bgPr>
+        <a:solidFill xmlns:a="http://schemas.openxmlformats.org/drawingml/2006/main">
+          <a:srgbClr val="FFFFFF"/>
+        </a:solidFill>
+      </p:bgPr>
+    </p:bg>
+    <p:spTree>
+      <p:nvGrpSpPr>
+        <p:cNvPr id="1" name=""/>
+        <p:cNvGrpSpPr/>
+        <p:nvPr/>
+      </p:nvGrpSpPr>
+      <p:grpSpPr>
+        <a:xfrm xmlns:a="http://schemas.openxmlformats.org/drawingml/2006/main"/>
+      </p:grpSpPr>
+      <p:sp>
+        <p:nvSpPr>
+          <p:cNvPr id="9" name="section-4">
+            <a:extLst xmlns:a="http://schemas.openxmlformats.org/drawingml/2006/main">
+              <a:ext uri="{FF2B5EF4-FFF2-40B4-BE49-F238E27FC236}">
+                <a16:creationId xmlns:a16="http://schemas.microsoft.com/office/drawing/2014/main" id="{8AE0A271-669A-49F0-A82E-C4438BEE27D9}"/>
+              </a:ext>
+            </a:extLst>
+          </p:cNvPr>
+          <p:cNvSpPr>
+            <a:spLocks xmlns:a="http://schemas.openxmlformats.org/drawingml/2006/main" noGrp="1"/>
+          </p:cNvSpPr>
+          <p:nvPr/>
+        </p:nvSpPr>
+        <p:spPr>
+          <a:xfrm xmlns:a="http://schemas.openxmlformats.org/drawingml/2006/main">
+            <a:off x="457200" y="228600"/>
+            <a:ext cx="4191000" cy="228600"/>
+          </a:xfrm>
+          <a:prstGeom xmlns:a="http://schemas.openxmlformats.org/drawingml/2006/main" prst="rect">
+            <a:avLst/>
+          </a:prstGeom>
+          <a:noFill xmlns:a="http://schemas.openxmlformats.org/drawingml/2006/main"/>
+          <a:ln xmlns:a="http://schemas.openxmlformats.org/drawingml/2006/main" w="0">
+            <a:noFill/>
+            <a:prstDash val="solid"/>
+          </a:ln>
+        </p:spPr>
+        <p:txBody>
+          <a:bodyPr xmlns:a="http://schemas.openxmlformats.org/drawingml/2006/main" wrap="square" lIns="0" tIns="0" rIns="0" bIns="0" anchor="t">
+            <a:normAutofit fontScale="100000"/>
+          </a:bodyPr>
+          <a:lstStyle xmlns:a="http://schemas.openxmlformats.org/drawingml/2006/main"/>
+          <a:p xmlns:a="http://schemas.openxmlformats.org/drawingml/2006/main">
+            <a:pPr algn="l">
+              <a:buNone/>
+              <a:defRPr sz="1200" b="1">
+                <a:solidFill>
+                  <a:srgbClr val="667384"/>
+                </a:solidFill>
+                <a:latin typeface="Arial"/>
+                <a:ea typeface="Arial"/>
+                <a:cs typeface="Arial"/>
+              </a:defRPr>
+            </a:pPr>
+            <a:r>
+              <a:rPr sz="1200" b="1">
+                <a:solidFill>
+                  <a:srgbClr val="667384"/>
+                </a:solidFill>
+                <a:latin typeface="Arial"/>
+                <a:ea typeface="Arial"/>
+                <a:cs typeface="Arial"/>
+              </a:rPr>
+              <a:t>TSLA DESCRIPTIVE MICROSCOPE</a:t>
+            </a:r>
+          </a:p>
+        </p:txBody>
+      </p:sp>
+      <p:sp>
+        <p:nvSpPr>
+          <p:cNvPr id="2" name="title-4">
+            <a:extLst xmlns:a="http://schemas.openxmlformats.org/drawingml/2006/main">
+              <a:ext uri="{FF2B5EF4-FFF2-40B4-BE49-F238E27FC236}">
+                <a16:creationId xmlns:a16="http://schemas.microsoft.com/office/drawing/2014/main" id="{50C6F92F-721A-4252-9CF8-B5C9B01C7310}"/>
+              </a:ext>
+            </a:extLst>
+          </p:cNvPr>
+          <p:cNvSpPr>
+            <a:spLocks xmlns:a="http://schemas.openxmlformats.org/drawingml/2006/main" noGrp="1"/>
+          </p:cNvSpPr>
+          <p:nvPr/>
+        </p:nvSpPr>
+        <p:spPr>
+          <a:xfrm xmlns:a="http://schemas.openxmlformats.org/drawingml/2006/main">
+            <a:off x="457200" y="533400"/>
+            <a:ext cx="11277600" cy="628650"/>
+          </a:xfrm>
+          <a:prstGeom xmlns:a="http://schemas.openxmlformats.org/drawingml/2006/main" prst="rect">
+            <a:avLst/>
+          </a:prstGeom>
+          <a:noFill xmlns:a="http://schemas.openxmlformats.org/drawingml/2006/main"/>
+          <a:ln xmlns:a="http://schemas.openxmlformats.org/drawingml/2006/main" w="0">
+            <a:noFill/>
+            <a:prstDash val="solid"/>
+          </a:ln>
+        </p:spPr>
+        <p:txBody>
+          <a:bodyPr xmlns:a="http://schemas.openxmlformats.org/drawingml/2006/main" wrap="square" lIns="0" tIns="0" rIns="0" bIns="0" anchor="t">
+            <a:normAutofit fontScale="100000"/>
+          </a:bodyPr>
+          <a:lstStyle xmlns:a="http://schemas.openxmlformats.org/drawingml/2006/main"/>
+          <a:p xmlns:a="http://schemas.openxmlformats.org/drawingml/2006/main">
+            <a:pPr algn="l">
+              <a:buNone/>
+              <a:defRPr sz="3525" b="1">
+                <a:solidFill>
+                  <a:srgbClr val="000000"/>
+                </a:solidFill>
+                <a:latin typeface="Arial"/>
+                <a:ea typeface="Arial"/>
+                <a:cs typeface="Arial"/>
+              </a:defRPr>
+            </a:pPr>
+            <a:r>
+              <a:rPr sz="3525" b="1">
+                <a:solidFill>
+                  <a:srgbClr val="000000"/>
+                </a:solidFill>
+                <a:latin typeface="Arial"/>
+                <a:ea typeface="Arial"/>
+                <a:cs typeface="Arial"/>
+              </a:rPr>
+              <a:t>Green ER20 states suppress the positive island</a:t>
+            </a:r>
+          </a:p>
+        </p:txBody>
+      </p:sp>
+      <p:sp>
+        <p:nvSpPr>
+          <p:cNvPr id="3" name="">
+            <a:extLst xmlns:a="http://schemas.openxmlformats.org/drawingml/2006/main">
+              <a:ext uri="{FF2B5EF4-FFF2-40B4-BE49-F238E27FC236}">
+                <a16:creationId xmlns:a16="http://schemas.microsoft.com/office/drawing/2014/main" id="{242399F2-4D0A-4337-B17E-DB3599DC380F}"/>
+              </a:ext>
+            </a:extLst>
+          </p:cNvPr>
+          <p:cNvSpPr>
+            <a:spLocks xmlns:a="http://schemas.openxmlformats.org/drawingml/2006/main" noGrp="1"/>
+          </p:cNvSpPr>
+          <p:nvPr/>
+        </p:nvSpPr>
+        <p:spPr>
+          <a:xfrm xmlns:a="http://schemas.openxmlformats.org/drawingml/2006/main">
+            <a:off x="457200" y="1200150"/>
+            <a:ext cx="11277600" cy="19050"/>
+          </a:xfrm>
+          <a:prstGeom xmlns:a="http://schemas.openxmlformats.org/drawingml/2006/main" prst="rect">
+            <a:avLst/>
+          </a:prstGeom>
+          <a:solidFill xmlns:a="http://schemas.openxmlformats.org/drawingml/2006/main">
+            <a:srgbClr val="B8BCC4"/>
+          </a:solidFill>
+          <a:ln xmlns:a="http://schemas.openxmlformats.org/drawingml/2006/main" w="0">
+            <a:solidFill>
+              <a:srgbClr val="B8BCC4"/>
+            </a:solidFill>
+            <a:prstDash val="solid"/>
+          </a:ln>
+        </p:spPr>
+      </p:sp>
+      <p:sp>
+        <p:nvSpPr>
+          <p:cNvPr id="4" name="footer-left-4">
+            <a:extLst xmlns:a="http://schemas.openxmlformats.org/drawingml/2006/main">
+              <a:ext uri="{FF2B5EF4-FFF2-40B4-BE49-F238E27FC236}">
+                <a16:creationId xmlns:a16="http://schemas.microsoft.com/office/drawing/2014/main" id="{BF8B82CA-1E48-4669-BAD8-1FF8C09FCBFB}"/>
+              </a:ext>
+            </a:extLst>
+          </p:cNvPr>
+          <p:cNvSpPr>
+            <a:spLocks xmlns:a="http://schemas.openxmlformats.org/drawingml/2006/main" noGrp="1"/>
+          </p:cNvSpPr>
+          <p:nvPr/>
+        </p:nvSpPr>
+        <p:spPr>
+          <a:xfrm xmlns:a="http://schemas.openxmlformats.org/drawingml/2006/main">
+            <a:off x="457200" y="6515100"/>
+            <a:ext cx="3429000" cy="171450"/>
+          </a:xfrm>
+          <a:prstGeom xmlns:a="http://schemas.openxmlformats.org/drawingml/2006/main" prst="rect">
+            <a:avLst/>
+          </a:prstGeom>
+          <a:noFill xmlns:a="http://schemas.openxmlformats.org/drawingml/2006/main"/>
+          <a:ln xmlns:a="http://schemas.openxmlformats.org/drawingml/2006/main" w="0">
+            <a:noFill/>
+            <a:prstDash val="solid"/>
+          </a:ln>
+        </p:spPr>
+        <p:txBody>
+          <a:bodyPr xmlns:a="http://schemas.openxmlformats.org/drawingml/2006/main" wrap="square" lIns="0" tIns="0" rIns="0" bIns="0" anchor="t">
+            <a:normAutofit fontScale="100000"/>
+          </a:bodyPr>
+          <a:lstStyle xmlns:a="http://schemas.openxmlformats.org/drawingml/2006/main"/>
+          <a:p xmlns:a="http://schemas.openxmlformats.org/drawingml/2006/main">
+            <a:pPr algn="l">
+              <a:buNone/>
+              <a:defRPr sz="1050" b="0">
+                <a:solidFill>
+                  <a:srgbClr val="667384"/>
+                </a:solidFill>
+                <a:latin typeface="Arial"/>
+                <a:ea typeface="Arial"/>
+                <a:cs typeface="Arial"/>
+              </a:defRPr>
+            </a:pPr>
+            <a:r>
+              <a:rPr sz="1050" b="0">
+                <a:solidFill>
+                  <a:srgbClr val="667384"/>
+                </a:solidFill>
+                <a:latin typeface="Arial"/>
+                <a:ea typeface="Arial"/>
+                <a:cs typeface="Arial"/>
+              </a:rPr>
+              <a:t>Adjusted daily TSLA | 2018-2023</a:t>
+            </a:r>
+          </a:p>
+        </p:txBody>
+      </p:sp>
+      <p:sp>
+        <p:nvSpPr>
+          <p:cNvPr id="5" name="footer-number-4">
+            <a:extLst xmlns:a="http://schemas.openxmlformats.org/drawingml/2006/main">
+              <a:ext uri="{FF2B5EF4-FFF2-40B4-BE49-F238E27FC236}">
+                <a16:creationId xmlns:a16="http://schemas.microsoft.com/office/drawing/2014/main" id="{05959AEC-B0A5-45F0-A65B-C94C3E5A032F}"/>
+              </a:ext>
+            </a:extLst>
+          </p:cNvPr>
+          <p:cNvSpPr>
+            <a:spLocks xmlns:a="http://schemas.openxmlformats.org/drawingml/2006/main" noGrp="1"/>
+          </p:cNvSpPr>
+          <p:nvPr/>
+        </p:nvSpPr>
+        <p:spPr>
+          <a:xfrm xmlns:a="http://schemas.openxmlformats.org/drawingml/2006/main">
+            <a:off x="11239500" y="6496050"/>
+            <a:ext cx="495300" cy="190500"/>
+          </a:xfrm>
+          <a:prstGeom xmlns:a="http://schemas.openxmlformats.org/drawingml/2006/main" prst="rect">
+            <a:avLst/>
+          </a:prstGeom>
+          <a:noFill xmlns:a="http://schemas.openxmlformats.org/drawingml/2006/main"/>
+          <a:ln xmlns:a="http://schemas.openxmlformats.org/drawingml/2006/main" w="0">
+            <a:noFill/>
+            <a:prstDash val="solid"/>
+          </a:ln>
+        </p:spPr>
+        <p:txBody>
+          <a:bodyPr xmlns:a="http://schemas.openxmlformats.org/drawingml/2006/main" wrap="square" lIns="0" tIns="0" rIns="0" bIns="0" anchor="t">
+            <a:normAutofit fontScale="100000"/>
+          </a:bodyPr>
+          <a:lstStyle xmlns:a="http://schemas.openxmlformats.org/drawingml/2006/main"/>
+          <a:p xmlns:a="http://schemas.openxmlformats.org/drawingml/2006/main">
+            <a:pPr algn="r">
+              <a:buNone/>
+              <a:defRPr sz="1050" b="0">
+                <a:solidFill>
+                  <a:srgbClr val="667384"/>
+                </a:solidFill>
+                <a:latin typeface="Arial"/>
+                <a:ea typeface="Arial"/>
+                <a:cs typeface="Arial"/>
+              </a:defRPr>
+            </a:pPr>
+            <a:r>
+              <a:rPr sz="1050" b="0">
+                <a:solidFill>
+                  <a:srgbClr val="667384"/>
+                </a:solidFill>
+                <a:latin typeface="Arial"/>
+                <a:ea typeface="Arial"/>
+                <a:cs typeface="Arial"/>
+              </a:rPr>
+              <a:t>21</a:t>
+            </a:r>
+          </a:p>
+        </p:txBody>
+      </p:sp>
+      <p:sp>
+        <p:nvSpPr>
+          <p:cNvPr id="6" name="">
+            <a:extLst xmlns:a="http://schemas.openxmlformats.org/drawingml/2006/main">
+              <a:ext uri="{FF2B5EF4-FFF2-40B4-BE49-F238E27FC236}">
+                <a16:creationId xmlns:a16="http://schemas.microsoft.com/office/drawing/2014/main" id="{9C8DEA29-E57D-4C8D-8538-2028FF89DA7C}"/>
+              </a:ext>
+            </a:extLst>
+          </p:cNvPr>
+          <p:cNvSpPr>
+            <a:spLocks xmlns:a="http://schemas.openxmlformats.org/drawingml/2006/main" noGrp="1"/>
+          </p:cNvSpPr>
+          <p:nvPr/>
+        </p:nvSpPr>
+        <p:spPr>
+          <a:xfrm xmlns:a="http://schemas.openxmlformats.org/drawingml/2006/main">
+            <a:off x="1000125" y="1352550"/>
+            <a:ext cx="10191750" cy="4905375"/>
+          </a:xfrm>
+          <a:prstGeom xmlns:a="http://schemas.openxmlformats.org/drawingml/2006/main" prst="rect">
+            <a:avLst/>
+          </a:prstGeom>
+          <a:solidFill xmlns:a="http://schemas.openxmlformats.org/drawingml/2006/main">
+            <a:srgbClr val="FFFFFF"/>
+          </a:solidFill>
+          <a:ln xmlns:a="http://schemas.openxmlformats.org/drawingml/2006/main" w="9525">
+            <a:solidFill>
+              <a:srgbClr val="B8BCC4"/>
+            </a:solidFill>
+            <a:prstDash val="solid"/>
+          </a:ln>
+        </p:spPr>
+      </p:sp>
+      <p:sp>
+        <p:nvSpPr>
+          <p:cNvPr id="8" name="">
+            <a:extLst xmlns:a="http://schemas.openxmlformats.org/drawingml/2006/main">
+              <a:ext uri="{FF2B5EF4-FFF2-40B4-BE49-F238E27FC236}">
+                <a16:creationId xmlns:a16="http://schemas.microsoft.com/office/drawing/2014/main" id="{4346A5F2-8CC4-4151-9BDB-346D47A3096B}"/>
+              </a:ext>
+            </a:extLst>
+          </p:cNvPr>
+          <p:cNvSpPr>
+            <a:spLocks xmlns:a="http://schemas.openxmlformats.org/drawingml/2006/main" noGrp="1"/>
+          </p:cNvSpPr>
+          <p:nvPr/>
+        </p:nvSpPr>
+        <p:spPr>
+          <a:xfrm xmlns:a="http://schemas.openxmlformats.org/drawingml/2006/main">
+            <a:off x="1143000" y="6286500"/>
+            <a:ext cx="9906000" cy="171450"/>
+          </a:xfrm>
+          <a:prstGeom xmlns:a="http://schemas.openxmlformats.org/drawingml/2006/main" prst="rect">
+            <a:avLst/>
+          </a:prstGeom>
+          <a:noFill xmlns:a="http://schemas.openxmlformats.org/drawingml/2006/main"/>
+          <a:ln xmlns:a="http://schemas.openxmlformats.org/drawingml/2006/main" w="0">
+            <a:noFill/>
+            <a:prstDash val="solid"/>
+          </a:ln>
+        </p:spPr>
+        <p:txBody>
+          <a:bodyPr xmlns:a="http://schemas.openxmlformats.org/drawingml/2006/main" wrap="square" lIns="0" tIns="0" rIns="0" bIns="0" anchor="t">
+            <a:normAutofit fontScale="93750"/>
+          </a:bodyPr>
+          <a:lstStyle xmlns:a="http://schemas.openxmlformats.org/drawingml/2006/main"/>
+          <a:p xmlns:a="http://schemas.openxmlformats.org/drawingml/2006/main">
+            <a:pPr algn="ctr">
+              <a:buNone/>
+              <a:defRPr sz="1200" b="0">
+                <a:solidFill>
+                  <a:srgbClr val="667384"/>
+                </a:solidFill>
+                <a:latin typeface="Arial"/>
+                <a:ea typeface="Arial"/>
+                <a:cs typeface="Arial"/>
+              </a:defRPr>
+            </a:pPr>
+            <a:r>
+              <a:rPr sz="1200" b="0">
+                <a:solidFill>
+                  <a:srgbClr val="667384"/>
+                </a:solidFill>
+                <a:latin typeface="Arial"/>
+                <a:ea typeface="Arial"/>
+                <a:cs typeface="Arial"/>
+              </a:rPr>
+              <a:t>Green/trending matrix; long/long cells turn negative; strongest absolute cell -0.154.</a:t>
+            </a:r>
+          </a:p>
+        </p:txBody>
+      </p:sp>
+      <p:pic>
+        <p:nvPicPr>
+          <p:cNvPr id="18" name=""/>
+          <p:cNvPicPr>
+            <a:picLocks xmlns:a="http://schemas.openxmlformats.org/drawingml/2006/main" noChangeAspect="1"/>
+          </p:cNvPicPr>
+          <p:nvPr/>
+        </p:nvPicPr>
+        <p:blipFill>
+          <a:blip xmlns:r="http://schemas.openxmlformats.org/officeDocument/2006/relationships" xmlns:a="http://schemas.openxmlformats.org/drawingml/2006/main" r:embed="Red47e276ad054fc6"/>
+          <a:stretch xmlns:a="http://schemas.openxmlformats.org/drawingml/2006/main"/>
+        </p:blipFill>
+        <p:spPr>
+          <a:xfrm xmlns:a="http://schemas.openxmlformats.org/drawingml/2006/main" flipH="0" flipV="0">
+            <a:off x="2942545" y="1352550"/>
+            <a:ext cx="6306911" cy="4905375"/>
+          </a:xfrm>
+          <a:prstGeom xmlns:a="http://schemas.openxmlformats.org/drawingml/2006/main" prst="rect">
+            <a:avLst/>
+          </a:prstGeom>
+        </p:spPr>
+      </p:pic>
+    </p:spTree>
+    <p:extLst>
+      <p:ext uri="{BB962C8B-B14F-4D97-AF65-F5344CB8AC3E}">
+        <p14:creationId xmlns:p14="http://schemas.microsoft.com/office/powerpoint/2010/main" val="400872380"/>
+      </p:ext>
+    </p:extLst>
+  </p:cSld>
+</p:sld>
+</file>
+
+<file path=ppt/slides/slide22.xml><?xml version="1.0" encoding="utf-8"?>
+<p:sld xmlns:p="http://schemas.openxmlformats.org/presentationml/2006/main">
+  <p:cSld>
+    <p:bg>
+      <p:bgPr>
+        <a:solidFill xmlns:a="http://schemas.openxmlformats.org/drawingml/2006/main">
+          <a:srgbClr val="FFFFFF"/>
+        </a:solidFill>
+      </p:bgPr>
+    </p:bg>
+    <p:spTree>
+      <p:nvGrpSpPr>
+        <p:cNvPr id="1" name=""/>
+        <p:cNvGrpSpPr/>
+        <p:nvPr/>
+      </p:nvGrpSpPr>
+      <p:grpSpPr>
+        <a:xfrm xmlns:a="http://schemas.openxmlformats.org/drawingml/2006/main"/>
+      </p:grpSpPr>
+      <p:sp>
+        <p:nvSpPr>
+          <p:cNvPr id="20" name="section-7">
+            <a:extLst xmlns:a="http://schemas.openxmlformats.org/drawingml/2006/main">
+              <a:ext uri="{FF2B5EF4-FFF2-40B4-BE49-F238E27FC236}">
+                <a16:creationId xmlns:a16="http://schemas.microsoft.com/office/drawing/2014/main" id="{BAC8373F-594E-467B-A8F8-56439CEBE044}"/>
+              </a:ext>
+            </a:extLst>
+          </p:cNvPr>
+          <p:cNvSpPr>
+            <a:spLocks xmlns:a="http://schemas.openxmlformats.org/drawingml/2006/main" noGrp="1"/>
+          </p:cNvSpPr>
+          <p:nvPr/>
+        </p:nvSpPr>
+        <p:spPr>
+          <a:xfrm xmlns:a="http://schemas.openxmlformats.org/drawingml/2006/main">
+            <a:off x="457200" y="228600"/>
+            <a:ext cx="4191000" cy="228600"/>
+          </a:xfrm>
+          <a:prstGeom xmlns:a="http://schemas.openxmlformats.org/drawingml/2006/main" prst="rect">
+            <a:avLst/>
+          </a:prstGeom>
+          <a:noFill xmlns:a="http://schemas.openxmlformats.org/drawingml/2006/main"/>
+          <a:ln xmlns:a="http://schemas.openxmlformats.org/drawingml/2006/main" w="0">
+            <a:noFill/>
+            <a:prstDash val="solid"/>
+          </a:ln>
+        </p:spPr>
+        <p:txBody>
+          <a:bodyPr xmlns:a="http://schemas.openxmlformats.org/drawingml/2006/main" wrap="square" lIns="0" tIns="0" rIns="0" bIns="0" anchor="t">
+            <a:normAutofit fontScale="100000"/>
+          </a:bodyPr>
+          <a:lstStyle xmlns:a="http://schemas.openxmlformats.org/drawingml/2006/main"/>
+          <a:p xmlns:a="http://schemas.openxmlformats.org/drawingml/2006/main">
+            <a:pPr algn="l">
+              <a:buNone/>
+              <a:defRPr sz="1200" b="1">
+                <a:solidFill>
+                  <a:srgbClr val="667384"/>
+                </a:solidFill>
+                <a:latin typeface="Arial"/>
+                <a:ea typeface="Arial"/>
+                <a:cs typeface="Arial"/>
+              </a:defRPr>
+            </a:pPr>
+            <a:r>
+              <a:rPr sz="1200" b="1">
+                <a:solidFill>
+                  <a:srgbClr val="667384"/>
+                </a:solidFill>
+                <a:latin typeface="Arial"/>
+                <a:ea typeface="Arial"/>
+                <a:cs typeface="Arial"/>
+              </a:rPr>
+              <a:t>TSLA DESCRIPTIVE MICROSCOPE</a:t>
+            </a:r>
+          </a:p>
+        </p:txBody>
+      </p:sp>
+      <p:sp>
+        <p:nvSpPr>
+          <p:cNvPr id="2" name="title-7">
+            <a:extLst xmlns:a="http://schemas.openxmlformats.org/drawingml/2006/main">
+              <a:ext uri="{FF2B5EF4-FFF2-40B4-BE49-F238E27FC236}">
+                <a16:creationId xmlns:a16="http://schemas.microsoft.com/office/drawing/2014/main" id="{7592E6E5-EA60-427F-BAB4-42C154D8CC5F}"/>
+              </a:ext>
+            </a:extLst>
+          </p:cNvPr>
+          <p:cNvSpPr>
+            <a:spLocks xmlns:a="http://schemas.openxmlformats.org/drawingml/2006/main" noGrp="1"/>
+          </p:cNvSpPr>
+          <p:nvPr/>
+        </p:nvSpPr>
+        <p:spPr>
+          <a:xfrm xmlns:a="http://schemas.openxmlformats.org/drawingml/2006/main">
+            <a:off x="457200" y="533400"/>
+            <a:ext cx="11277600" cy="628650"/>
+          </a:xfrm>
+          <a:prstGeom xmlns:a="http://schemas.openxmlformats.org/drawingml/2006/main" prst="rect">
+            <a:avLst/>
+          </a:prstGeom>
+          <a:noFill xmlns:a="http://schemas.openxmlformats.org/drawingml/2006/main"/>
+          <a:ln xmlns:a="http://schemas.openxmlformats.org/drawingml/2006/main" w="0">
+            <a:noFill/>
+            <a:prstDash val="solid"/>
+          </a:ln>
+        </p:spPr>
+        <p:txBody>
+          <a:bodyPr xmlns:a="http://schemas.openxmlformats.org/drawingml/2006/main" wrap="square" lIns="0" tIns="0" rIns="0" bIns="0" anchor="t">
+            <a:normAutofit fontScale="100000"/>
+          </a:bodyPr>
+          <a:lstStyle xmlns:a="http://schemas.openxmlformats.org/drawingml/2006/main"/>
+          <a:p xmlns:a="http://schemas.openxmlformats.org/drawingml/2006/main">
+            <a:pPr algn="l">
+              <a:buNone/>
+              <a:defRPr sz="3525" b="1">
+                <a:solidFill>
+                  <a:srgbClr val="000000"/>
+                </a:solidFill>
+                <a:latin typeface="Arial"/>
+                <a:ea typeface="Arial"/>
+                <a:cs typeface="Arial"/>
+              </a:defRPr>
+            </a:pPr>
+            <a:r>
+              <a:rPr sz="3525" b="1">
+                <a:solidFill>
+                  <a:srgbClr val="000000"/>
+                </a:solidFill>
+                <a:latin typeface="Arial"/>
+                <a:ea typeface="Arial"/>
+                <a:cs typeface="Arial"/>
+              </a:rPr>
+              <a:t>The state split is coherent, but unresolved</a:t>
+            </a:r>
+          </a:p>
+        </p:txBody>
+      </p:sp>
+      <p:sp>
+        <p:nvSpPr>
+          <p:cNvPr id="3" name="">
+            <a:extLst xmlns:a="http://schemas.openxmlformats.org/drawingml/2006/main">
+              <a:ext uri="{FF2B5EF4-FFF2-40B4-BE49-F238E27FC236}">
+                <a16:creationId xmlns:a16="http://schemas.microsoft.com/office/drawing/2014/main" id="{C852E1AC-5CE8-4847-87B1-81C28A4EFEDE}"/>
+              </a:ext>
+            </a:extLst>
+          </p:cNvPr>
+          <p:cNvSpPr>
+            <a:spLocks xmlns:a="http://schemas.openxmlformats.org/drawingml/2006/main" noGrp="1"/>
+          </p:cNvSpPr>
+          <p:nvPr/>
+        </p:nvSpPr>
+        <p:spPr>
+          <a:xfrm xmlns:a="http://schemas.openxmlformats.org/drawingml/2006/main">
+            <a:off x="457200" y="1200150"/>
+            <a:ext cx="11277600" cy="19050"/>
+          </a:xfrm>
+          <a:prstGeom xmlns:a="http://schemas.openxmlformats.org/drawingml/2006/main" prst="rect">
+            <a:avLst/>
+          </a:prstGeom>
+          <a:solidFill xmlns:a="http://schemas.openxmlformats.org/drawingml/2006/main">
+            <a:srgbClr val="B8BCC4"/>
+          </a:solidFill>
+          <a:ln xmlns:a="http://schemas.openxmlformats.org/drawingml/2006/main" w="0">
+            <a:solidFill>
+              <a:srgbClr val="B8BCC4"/>
+            </a:solidFill>
+            <a:prstDash val="solid"/>
+          </a:ln>
+        </p:spPr>
+      </p:sp>
+      <p:sp>
+        <p:nvSpPr>
+          <p:cNvPr id="4" name="footer-left-7">
+            <a:extLst xmlns:a="http://schemas.openxmlformats.org/drawingml/2006/main">
+              <a:ext uri="{FF2B5EF4-FFF2-40B4-BE49-F238E27FC236}">
+                <a16:creationId xmlns:a16="http://schemas.microsoft.com/office/drawing/2014/main" id="{4896B590-20BC-4B46-9282-D9F5A22A0CC5}"/>
+              </a:ext>
+            </a:extLst>
+          </p:cNvPr>
+          <p:cNvSpPr>
+            <a:spLocks xmlns:a="http://schemas.openxmlformats.org/drawingml/2006/main" noGrp="1"/>
+          </p:cNvSpPr>
+          <p:nvPr/>
+        </p:nvSpPr>
+        <p:spPr>
+          <a:xfrm xmlns:a="http://schemas.openxmlformats.org/drawingml/2006/main">
+            <a:off x="457200" y="6515100"/>
+            <a:ext cx="3429000" cy="171450"/>
+          </a:xfrm>
+          <a:prstGeom xmlns:a="http://schemas.openxmlformats.org/drawingml/2006/main" prst="rect">
+            <a:avLst/>
+          </a:prstGeom>
+          <a:noFill xmlns:a="http://schemas.openxmlformats.org/drawingml/2006/main"/>
+          <a:ln xmlns:a="http://schemas.openxmlformats.org/drawingml/2006/main" w="0">
+            <a:noFill/>
+            <a:prstDash val="solid"/>
+          </a:ln>
+        </p:spPr>
+        <p:txBody>
+          <a:bodyPr xmlns:a="http://schemas.openxmlformats.org/drawingml/2006/main" wrap="square" lIns="0" tIns="0" rIns="0" bIns="0" anchor="t">
+            <a:normAutofit fontScale="100000"/>
+          </a:bodyPr>
+          <a:lstStyle xmlns:a="http://schemas.openxmlformats.org/drawingml/2006/main"/>
+          <a:p xmlns:a="http://schemas.openxmlformats.org/drawingml/2006/main">
+            <a:pPr algn="l">
+              <a:buNone/>
+              <a:defRPr sz="1050" b="0">
+                <a:solidFill>
+                  <a:srgbClr val="667384"/>
+                </a:solidFill>
+                <a:latin typeface="Arial"/>
+                <a:ea typeface="Arial"/>
+                <a:cs typeface="Arial"/>
+              </a:defRPr>
+            </a:pPr>
+            <a:r>
+              <a:rPr sz="1050" b="0">
+                <a:solidFill>
+                  <a:srgbClr val="667384"/>
+                </a:solidFill>
+                <a:latin typeface="Arial"/>
+                <a:ea typeface="Arial"/>
+                <a:cs typeface="Arial"/>
+              </a:rPr>
+              <a:t>Adjusted daily TSLA | 2018-2023</a:t>
+            </a:r>
+          </a:p>
+        </p:txBody>
+      </p:sp>
+      <p:sp>
+        <p:nvSpPr>
+          <p:cNvPr id="5" name="footer-number-7">
+            <a:extLst xmlns:a="http://schemas.openxmlformats.org/drawingml/2006/main">
+              <a:ext uri="{FF2B5EF4-FFF2-40B4-BE49-F238E27FC236}">
+                <a16:creationId xmlns:a16="http://schemas.microsoft.com/office/drawing/2014/main" id="{1503EFAF-F487-4981-AFDC-23F1B41A7207}"/>
+              </a:ext>
+            </a:extLst>
+          </p:cNvPr>
+          <p:cNvSpPr>
+            <a:spLocks xmlns:a="http://schemas.openxmlformats.org/drawingml/2006/main" noGrp="1"/>
+          </p:cNvSpPr>
+          <p:nvPr/>
+        </p:nvSpPr>
+        <p:spPr>
+          <a:xfrm xmlns:a="http://schemas.openxmlformats.org/drawingml/2006/main">
+            <a:off x="11239500" y="6496050"/>
+            <a:ext cx="495300" cy="190500"/>
+          </a:xfrm>
+          <a:prstGeom xmlns:a="http://schemas.openxmlformats.org/drawingml/2006/main" prst="rect">
+            <a:avLst/>
+          </a:prstGeom>
+          <a:noFill xmlns:a="http://schemas.openxmlformats.org/drawingml/2006/main"/>
+          <a:ln xmlns:a="http://schemas.openxmlformats.org/drawingml/2006/main" w="0">
+            <a:noFill/>
+            <a:prstDash val="solid"/>
+          </a:ln>
+        </p:spPr>
+        <p:txBody>
+          <a:bodyPr xmlns:a="http://schemas.openxmlformats.org/drawingml/2006/main" wrap="square" lIns="0" tIns="0" rIns="0" bIns="0" anchor="t">
+            <a:normAutofit fontScale="100000"/>
+          </a:bodyPr>
+          <a:lstStyle xmlns:a="http://schemas.openxmlformats.org/drawingml/2006/main"/>
+          <a:p xmlns:a="http://schemas.openxmlformats.org/drawingml/2006/main">
+            <a:pPr algn="r">
+              <a:buNone/>
+              <a:defRPr sz="1050" b="0">
+                <a:solidFill>
+                  <a:srgbClr val="667384"/>
+                </a:solidFill>
+                <a:latin typeface="Arial"/>
+                <a:ea typeface="Arial"/>
+                <a:cs typeface="Arial"/>
+              </a:defRPr>
+            </a:pPr>
+            <a:r>
+              <a:rPr sz="1050" b="0">
+                <a:solidFill>
+                  <a:srgbClr val="667384"/>
+                </a:solidFill>
+                <a:latin typeface="Arial"/>
+                <a:ea typeface="Arial"/>
+                <a:cs typeface="Arial"/>
+              </a:rPr>
+              <a:t>22</a:t>
+            </a:r>
+          </a:p>
+        </p:txBody>
+      </p:sp>
+      <p:sp>
+        <p:nvSpPr>
+          <p:cNvPr id="6" name="">
+            <a:extLst xmlns:a="http://schemas.openxmlformats.org/drawingml/2006/main">
+              <a:ext uri="{FF2B5EF4-FFF2-40B4-BE49-F238E27FC236}">
+                <a16:creationId xmlns:a16="http://schemas.microsoft.com/office/drawing/2014/main" id="{4AA770DD-55E6-42DB-942A-6938E642B1A0}"/>
+              </a:ext>
+            </a:extLst>
+          </p:cNvPr>
+          <p:cNvSpPr>
+            <a:spLocks xmlns:a="http://schemas.openxmlformats.org/drawingml/2006/main" noGrp="1"/>
+          </p:cNvSpPr>
+          <p:nvPr/>
+        </p:nvSpPr>
+        <p:spPr>
+          <a:xfrm xmlns:a="http://schemas.openxmlformats.org/drawingml/2006/main">
+            <a:off x="342900" y="1428750"/>
+            <a:ext cx="7677150" cy="4762500"/>
+          </a:xfrm>
+          <a:prstGeom xmlns:a="http://schemas.openxmlformats.org/drawingml/2006/main" prst="rect">
+            <a:avLst/>
+          </a:prstGeom>
+          <a:solidFill xmlns:a="http://schemas.openxmlformats.org/drawingml/2006/main">
+            <a:srgbClr val="FFFFFF"/>
+          </a:solidFill>
+          <a:ln xmlns:a="http://schemas.openxmlformats.org/drawingml/2006/main" w="9525">
+            <a:solidFill>
+              <a:srgbClr val="B8BCC4"/>
+            </a:solidFill>
+            <a:prstDash val="solid"/>
+          </a:ln>
+        </p:spPr>
+      </p:sp>
+      <p:sp>
+        <p:nvSpPr>
+          <p:cNvPr id="8" name="">
+            <a:extLst xmlns:a="http://schemas.openxmlformats.org/drawingml/2006/main">
+              <a:ext uri="{FF2B5EF4-FFF2-40B4-BE49-F238E27FC236}">
+                <a16:creationId xmlns:a16="http://schemas.microsoft.com/office/drawing/2014/main" id="{925D1653-1738-47C8-BFA1-9C9390285CC4}"/>
+              </a:ext>
+            </a:extLst>
+          </p:cNvPr>
+          <p:cNvSpPr>
+            <a:spLocks xmlns:a="http://schemas.openxmlformats.org/drawingml/2006/main" noGrp="1"/>
+          </p:cNvSpPr>
+          <p:nvPr/>
+        </p:nvSpPr>
+        <p:spPr>
+          <a:xfrm xmlns:a="http://schemas.openxmlformats.org/drawingml/2006/main">
+            <a:off x="8362950" y="1504950"/>
+            <a:ext cx="3143250" cy="1428750"/>
+          </a:xfrm>
+          <a:prstGeom xmlns:a="http://schemas.openxmlformats.org/drawingml/2006/main" prst="rect">
+            <a:avLst/>
+          </a:prstGeom>
+          <a:solidFill xmlns:a="http://schemas.openxmlformats.org/drawingml/2006/main">
+            <a:srgbClr val="EDEDED"/>
+          </a:solidFill>
+          <a:ln xmlns:a="http://schemas.openxmlformats.org/drawingml/2006/main" w="0">
+            <a:solidFill>
+              <a:srgbClr val="EDEDED"/>
+            </a:solidFill>
+            <a:prstDash val="solid"/>
+          </a:ln>
+        </p:spPr>
+      </p:sp>
+      <p:sp>
+        <p:nvSpPr>
+          <p:cNvPr id="9" name="">
+            <a:extLst xmlns:a="http://schemas.openxmlformats.org/drawingml/2006/main">
+              <a:ext uri="{FF2B5EF4-FFF2-40B4-BE49-F238E27FC236}">
+                <a16:creationId xmlns:a16="http://schemas.microsoft.com/office/drawing/2014/main" id="{AD911094-04B5-4E98-9749-4F832E6A7030}"/>
+              </a:ext>
+            </a:extLst>
+          </p:cNvPr>
+          <p:cNvSpPr>
+            <a:spLocks xmlns:a="http://schemas.openxmlformats.org/drawingml/2006/main" noGrp="1"/>
+          </p:cNvSpPr>
+          <p:nvPr/>
+        </p:nvSpPr>
+        <p:spPr>
+          <a:xfrm xmlns:a="http://schemas.openxmlformats.org/drawingml/2006/main">
+            <a:off x="8362950" y="1504950"/>
+            <a:ext cx="76200" cy="1428750"/>
+          </a:xfrm>
+          <a:prstGeom xmlns:a="http://schemas.openxmlformats.org/drawingml/2006/main" prst="rect">
+            <a:avLst/>
+          </a:prstGeom>
+          <a:solidFill xmlns:a="http://schemas.openxmlformats.org/drawingml/2006/main">
+            <a:srgbClr val="E45756"/>
+          </a:solidFill>
+          <a:ln xmlns:a="http://schemas.openxmlformats.org/drawingml/2006/main" w="0">
+            <a:solidFill>
+              <a:srgbClr val="E45756"/>
+            </a:solidFill>
+            <a:prstDash val="solid"/>
+          </a:ln>
+        </p:spPr>
+      </p:sp>
+      <p:sp>
+        <p:nvSpPr>
+          <p:cNvPr id="10" name="">
+            <a:extLst xmlns:a="http://schemas.openxmlformats.org/drawingml/2006/main">
+              <a:ext uri="{FF2B5EF4-FFF2-40B4-BE49-F238E27FC236}">
+                <a16:creationId xmlns:a16="http://schemas.microsoft.com/office/drawing/2014/main" id="{8259A327-4374-4B4E-A3BA-F8E016498564}"/>
+              </a:ext>
+            </a:extLst>
+          </p:cNvPr>
+          <p:cNvSpPr>
+            <a:spLocks xmlns:a="http://schemas.openxmlformats.org/drawingml/2006/main" noGrp="1"/>
+          </p:cNvSpPr>
+          <p:nvPr/>
+        </p:nvSpPr>
+        <p:spPr>
+          <a:xfrm xmlns:a="http://schemas.openxmlformats.org/drawingml/2006/main">
+            <a:off x="8629650" y="1676400"/>
+            <a:ext cx="2686050" cy="590550"/>
+          </a:xfrm>
+          <a:prstGeom xmlns:a="http://schemas.openxmlformats.org/drawingml/2006/main" prst="rect">
+            <a:avLst/>
+          </a:prstGeom>
+          <a:noFill xmlns:a="http://schemas.openxmlformats.org/drawingml/2006/main"/>
+          <a:ln xmlns:a="http://schemas.openxmlformats.org/drawingml/2006/main" w="0">
+            <a:noFill/>
+            <a:prstDash val="solid"/>
+          </a:ln>
+        </p:spPr>
+        <p:txBody>
+          <a:bodyPr xmlns:a="http://schemas.openxmlformats.org/drawingml/2006/main" wrap="square" lIns="0" tIns="0" rIns="0" bIns="0" anchor="t">
+            <a:normAutofit fontScale="100000"/>
+          </a:bodyPr>
+          <a:lstStyle xmlns:a="http://schemas.openxmlformats.org/drawingml/2006/main"/>
+          <a:p xmlns:a="http://schemas.openxmlformats.org/drawingml/2006/main">
+            <a:pPr algn="l">
+              <a:buNone/>
+              <a:defRPr sz="3225" b="1">
+                <a:solidFill>
+                  <a:srgbClr val="E45756"/>
+                </a:solidFill>
+                <a:latin typeface="Arial"/>
+                <a:ea typeface="Arial"/>
+                <a:cs typeface="Arial"/>
+              </a:defRPr>
+            </a:pPr>
+            <a:r>
+              <a:rPr sz="3225" b="1">
+                <a:solidFill>
+                  <a:srgbClr val="E45756"/>
+                </a:solidFill>
+                <a:latin typeface="Arial"/>
+                <a:ea typeface="Arial"/>
+                <a:cs typeface="Arial"/>
+              </a:rPr>
+              <a:t>-0.231</a:t>
+            </a:r>
+          </a:p>
+        </p:txBody>
+      </p:sp>
+      <p:sp>
+        <p:nvSpPr>
+          <p:cNvPr id="11" name="">
+            <a:extLst xmlns:a="http://schemas.openxmlformats.org/drawingml/2006/main">
+              <a:ext uri="{FF2B5EF4-FFF2-40B4-BE49-F238E27FC236}">
+                <a16:creationId xmlns:a16="http://schemas.microsoft.com/office/drawing/2014/main" id="{BE341AE3-547D-4111-ADFF-14E5545F2DBF}"/>
+              </a:ext>
+            </a:extLst>
+          </p:cNvPr>
+          <p:cNvSpPr>
+            <a:spLocks xmlns:a="http://schemas.openxmlformats.org/drawingml/2006/main" noGrp="1"/>
+          </p:cNvSpPr>
+          <p:nvPr/>
+        </p:nvSpPr>
+        <p:spPr>
+          <a:xfrm xmlns:a="http://schemas.openxmlformats.org/drawingml/2006/main">
+            <a:off x="8629650" y="2343150"/>
+            <a:ext cx="2686050" cy="438150"/>
+          </a:xfrm>
+          <a:prstGeom xmlns:a="http://schemas.openxmlformats.org/drawingml/2006/main" prst="rect">
+            <a:avLst/>
+          </a:prstGeom>
+          <a:noFill xmlns:a="http://schemas.openxmlformats.org/drawingml/2006/main"/>
+          <a:ln xmlns:a="http://schemas.openxmlformats.org/drawingml/2006/main" w="0">
+            <a:noFill/>
+            <a:prstDash val="solid"/>
+          </a:ln>
+        </p:spPr>
+        <p:txBody>
+          <a:bodyPr xmlns:a="http://schemas.openxmlformats.org/drawingml/2006/main" wrap="square" lIns="0" tIns="0" rIns="0" bIns="0" anchor="t">
+            <a:normAutofit fontScale="100000"/>
+          </a:bodyPr>
+          <a:lstStyle xmlns:a="http://schemas.openxmlformats.org/drawingml/2006/main"/>
+          <a:p xmlns:a="http://schemas.openxmlformats.org/drawingml/2006/main">
+            <a:pPr algn="l">
+              <a:buNone/>
+              <a:defRPr sz="1350" b="0">
+                <a:solidFill>
+                  <a:srgbClr val="273548"/>
+                </a:solidFill>
+                <a:latin typeface="Arial"/>
+                <a:ea typeface="Arial"/>
+                <a:cs typeface="Arial"/>
+              </a:defRPr>
+            </a:pPr>
+            <a:r>
+              <a:rPr sz="1350" b="0">
+                <a:solidFill>
+                  <a:srgbClr val="273548"/>
+                </a:solidFill>
+                <a:latin typeface="Arial"/>
+                <a:ea typeface="Arial"/>
+                <a:cs typeface="Arial"/>
+              </a:rPr>
+              <a:t>largest correlation change: 15 prior / 5 forward</a:t>
+            </a:r>
+          </a:p>
+        </p:txBody>
+      </p:sp>
+      <p:sp>
+        <p:nvSpPr>
+          <p:cNvPr id="12" name="">
+            <a:extLst xmlns:a="http://schemas.openxmlformats.org/drawingml/2006/main">
+              <a:ext uri="{FF2B5EF4-FFF2-40B4-BE49-F238E27FC236}">
+                <a16:creationId xmlns:a16="http://schemas.microsoft.com/office/drawing/2014/main" id="{627B1C2D-BD18-4B6C-8DC8-10694F2FD365}"/>
+              </a:ext>
+            </a:extLst>
+          </p:cNvPr>
+          <p:cNvSpPr>
+            <a:spLocks xmlns:a="http://schemas.openxmlformats.org/drawingml/2006/main" noGrp="1"/>
+          </p:cNvSpPr>
+          <p:nvPr/>
+        </p:nvSpPr>
+        <p:spPr>
+          <a:xfrm xmlns:a="http://schemas.openxmlformats.org/drawingml/2006/main">
+            <a:off x="8362950" y="3143250"/>
+            <a:ext cx="3143250" cy="1428750"/>
+          </a:xfrm>
+          <a:prstGeom xmlns:a="http://schemas.openxmlformats.org/drawingml/2006/main" prst="rect">
+            <a:avLst/>
+          </a:prstGeom>
+          <a:solidFill xmlns:a="http://schemas.openxmlformats.org/drawingml/2006/main">
+            <a:srgbClr val="EDEDED"/>
+          </a:solidFill>
+          <a:ln xmlns:a="http://schemas.openxmlformats.org/drawingml/2006/main" w="0">
+            <a:solidFill>
+              <a:srgbClr val="EDEDED"/>
+            </a:solidFill>
+            <a:prstDash val="solid"/>
+          </a:ln>
+        </p:spPr>
+      </p:sp>
+      <p:sp>
+        <p:nvSpPr>
+          <p:cNvPr id="13" name="">
+            <a:extLst xmlns:a="http://schemas.openxmlformats.org/drawingml/2006/main">
+              <a:ext uri="{FF2B5EF4-FFF2-40B4-BE49-F238E27FC236}">
+                <a16:creationId xmlns:a16="http://schemas.microsoft.com/office/drawing/2014/main" id="{1A4050CC-5568-4F8A-B026-EC7B8ABEFB7A}"/>
+              </a:ext>
+            </a:extLst>
+          </p:cNvPr>
+          <p:cNvSpPr>
+            <a:spLocks xmlns:a="http://schemas.openxmlformats.org/drawingml/2006/main" noGrp="1"/>
+          </p:cNvSpPr>
+          <p:nvPr/>
+        </p:nvSpPr>
+        <p:spPr>
+          <a:xfrm xmlns:a="http://schemas.openxmlformats.org/drawingml/2006/main">
+            <a:off x="8362950" y="3143250"/>
+            <a:ext cx="76200" cy="1428750"/>
+          </a:xfrm>
+          <a:prstGeom xmlns:a="http://schemas.openxmlformats.org/drawingml/2006/main" prst="rect">
+            <a:avLst/>
+          </a:prstGeom>
+          <a:solidFill xmlns:a="http://schemas.openxmlformats.org/drawingml/2006/main">
+            <a:srgbClr val="3D8DFF"/>
+          </a:solidFill>
+          <a:ln xmlns:a="http://schemas.openxmlformats.org/drawingml/2006/main" w="0">
+            <a:solidFill>
+              <a:srgbClr val="3D8DFF"/>
+            </a:solidFill>
+            <a:prstDash val="solid"/>
+          </a:ln>
+        </p:spPr>
+      </p:sp>
+      <p:sp>
+        <p:nvSpPr>
+          <p:cNvPr id="14" name="">
+            <a:extLst xmlns:a="http://schemas.openxmlformats.org/drawingml/2006/main">
+              <a:ext uri="{FF2B5EF4-FFF2-40B4-BE49-F238E27FC236}">
+                <a16:creationId xmlns:a16="http://schemas.microsoft.com/office/drawing/2014/main" id="{502FF9D4-D051-476B-B68A-15DCA6B44FE9}"/>
+              </a:ext>
+            </a:extLst>
+          </p:cNvPr>
+          <p:cNvSpPr>
+            <a:spLocks xmlns:a="http://schemas.openxmlformats.org/drawingml/2006/main" noGrp="1"/>
+          </p:cNvSpPr>
+          <p:nvPr/>
+        </p:nvSpPr>
+        <p:spPr>
+          <a:xfrm xmlns:a="http://schemas.openxmlformats.org/drawingml/2006/main">
+            <a:off x="8629650" y="3314700"/>
+            <a:ext cx="2686050" cy="590550"/>
+          </a:xfrm>
+          <a:prstGeom xmlns:a="http://schemas.openxmlformats.org/drawingml/2006/main" prst="rect">
+            <a:avLst/>
+          </a:prstGeom>
+          <a:noFill xmlns:a="http://schemas.openxmlformats.org/drawingml/2006/main"/>
+          <a:ln xmlns:a="http://schemas.openxmlformats.org/drawingml/2006/main" w="0">
+            <a:noFill/>
+            <a:prstDash val="solid"/>
+          </a:ln>
+        </p:spPr>
+        <p:txBody>
+          <a:bodyPr xmlns:a="http://schemas.openxmlformats.org/drawingml/2006/main" wrap="square" lIns="0" tIns="0" rIns="0" bIns="0" anchor="t">
+            <a:normAutofit fontScale="100000"/>
+          </a:bodyPr>
+          <a:lstStyle xmlns:a="http://schemas.openxmlformats.org/drawingml/2006/main"/>
+          <a:p xmlns:a="http://schemas.openxmlformats.org/drawingml/2006/main">
+            <a:pPr algn="l">
+              <a:buNone/>
+              <a:defRPr sz="3225" b="1">
+                <a:solidFill>
+                  <a:srgbClr val="3D8DFF"/>
+                </a:solidFill>
+                <a:latin typeface="Arial"/>
+                <a:ea typeface="Arial"/>
+                <a:cs typeface="Arial"/>
+              </a:defRPr>
+            </a:pPr>
+            <a:r>
+              <a:rPr sz="3225" b="1">
+                <a:solidFill>
+                  <a:srgbClr val="3D8DFF"/>
+                </a:solidFill>
+                <a:latin typeface="Arial"/>
+                <a:ea typeface="Arial"/>
+                <a:cs typeface="Arial"/>
+              </a:rPr>
+              <a:t>p = 0.029</a:t>
+            </a:r>
+          </a:p>
+        </p:txBody>
+      </p:sp>
+      <p:sp>
+        <p:nvSpPr>
+          <p:cNvPr id="15" name="">
+            <a:extLst xmlns:a="http://schemas.openxmlformats.org/drawingml/2006/main">
+              <a:ext uri="{FF2B5EF4-FFF2-40B4-BE49-F238E27FC236}">
+                <a16:creationId xmlns:a16="http://schemas.microsoft.com/office/drawing/2014/main" id="{03DFBB46-08D6-4497-AA7C-C2049757E9DE}"/>
+              </a:ext>
+            </a:extLst>
+          </p:cNvPr>
+          <p:cNvSpPr>
+            <a:spLocks xmlns:a="http://schemas.openxmlformats.org/drawingml/2006/main" noGrp="1"/>
+          </p:cNvSpPr>
+          <p:nvPr/>
+        </p:nvSpPr>
+        <p:spPr>
+          <a:xfrm xmlns:a="http://schemas.openxmlformats.org/drawingml/2006/main">
+            <a:off x="8629650" y="3981450"/>
+            <a:ext cx="2686050" cy="438150"/>
+          </a:xfrm>
+          <a:prstGeom xmlns:a="http://schemas.openxmlformats.org/drawingml/2006/main" prst="rect">
+            <a:avLst/>
+          </a:prstGeom>
+          <a:noFill xmlns:a="http://schemas.openxmlformats.org/drawingml/2006/main"/>
+          <a:ln xmlns:a="http://schemas.openxmlformats.org/drawingml/2006/main" w="0">
+            <a:noFill/>
+            <a:prstDash val="solid"/>
+          </a:ln>
+        </p:spPr>
+        <p:txBody>
+          <a:bodyPr xmlns:a="http://schemas.openxmlformats.org/drawingml/2006/main" wrap="square" lIns="0" tIns="0" rIns="0" bIns="0" anchor="t">
+            <a:normAutofit fontScale="100000"/>
+          </a:bodyPr>
+          <a:lstStyle xmlns:a="http://schemas.openxmlformats.org/drawingml/2006/main"/>
+          <a:p xmlns:a="http://schemas.openxmlformats.org/drawingml/2006/main">
+            <a:pPr algn="l">
+              <a:buNone/>
+              <a:defRPr sz="1350" b="0">
+                <a:solidFill>
+                  <a:srgbClr val="273548"/>
+                </a:solidFill>
+                <a:latin typeface="Arial"/>
+                <a:ea typeface="Arial"/>
+                <a:cs typeface="Arial"/>
+              </a:defRPr>
+            </a:pPr>
+            <a:r>
+              <a:rPr sz="1350" b="0">
+                <a:solidFill>
+                  <a:srgbClr val="273548"/>
+                </a:solidFill>
+                <a:latin typeface="Arial"/>
+                <a:ea typeface="Arial"/>
+                <a:cs typeface="Arial"/>
+              </a:rPr>
+              <a:t>raw HAC slope-interaction test</a:t>
+            </a:r>
+          </a:p>
+        </p:txBody>
+      </p:sp>
+      <p:sp>
+        <p:nvSpPr>
+          <p:cNvPr id="16" name="">
+            <a:extLst xmlns:a="http://schemas.openxmlformats.org/drawingml/2006/main">
+              <a:ext uri="{FF2B5EF4-FFF2-40B4-BE49-F238E27FC236}">
+                <a16:creationId xmlns:a16="http://schemas.microsoft.com/office/drawing/2014/main" id="{509D61CC-6E5E-49EC-A5F6-E861E8561441}"/>
+              </a:ext>
+            </a:extLst>
+          </p:cNvPr>
+          <p:cNvSpPr>
+            <a:spLocks xmlns:a="http://schemas.openxmlformats.org/drawingml/2006/main" noGrp="1"/>
+          </p:cNvSpPr>
+          <p:nvPr/>
+        </p:nvSpPr>
+        <p:spPr>
+          <a:xfrm xmlns:a="http://schemas.openxmlformats.org/drawingml/2006/main">
+            <a:off x="8362950" y="4781550"/>
+            <a:ext cx="3143250" cy="1428750"/>
+          </a:xfrm>
+          <a:prstGeom xmlns:a="http://schemas.openxmlformats.org/drawingml/2006/main" prst="rect">
+            <a:avLst/>
+          </a:prstGeom>
+          <a:solidFill xmlns:a="http://schemas.openxmlformats.org/drawingml/2006/main">
+            <a:srgbClr val="EDEDED"/>
+          </a:solidFill>
+          <a:ln xmlns:a="http://schemas.openxmlformats.org/drawingml/2006/main" w="0">
+            <a:solidFill>
+              <a:srgbClr val="EDEDED"/>
+            </a:solidFill>
+            <a:prstDash val="solid"/>
+          </a:ln>
+        </p:spPr>
+      </p:sp>
+      <p:sp>
+        <p:nvSpPr>
+          <p:cNvPr id="17" name="">
+            <a:extLst xmlns:a="http://schemas.openxmlformats.org/drawingml/2006/main">
+              <a:ext uri="{FF2B5EF4-FFF2-40B4-BE49-F238E27FC236}">
+                <a16:creationId xmlns:a16="http://schemas.microsoft.com/office/drawing/2014/main" id="{A935608E-4DDE-41BA-8DF2-831CF419565B}"/>
+              </a:ext>
+            </a:extLst>
+          </p:cNvPr>
+          <p:cNvSpPr>
+            <a:spLocks xmlns:a="http://schemas.openxmlformats.org/drawingml/2006/main" noGrp="1"/>
+          </p:cNvSpPr>
+          <p:nvPr/>
+        </p:nvSpPr>
+        <p:spPr>
+          <a:xfrm xmlns:a="http://schemas.openxmlformats.org/drawingml/2006/main">
+            <a:off x="8362950" y="4781550"/>
+            <a:ext cx="76200" cy="1428750"/>
+          </a:xfrm>
+          <a:prstGeom xmlns:a="http://schemas.openxmlformats.org/drawingml/2006/main" prst="rect">
+            <a:avLst/>
+          </a:prstGeom>
+          <a:solidFill xmlns:a="http://schemas.openxmlformats.org/drawingml/2006/main">
+            <a:srgbClr val="273548"/>
+          </a:solidFill>
+          <a:ln xmlns:a="http://schemas.openxmlformats.org/drawingml/2006/main" w="0">
+            <a:solidFill>
+              <a:srgbClr val="273548"/>
+            </a:solidFill>
+            <a:prstDash val="solid"/>
+          </a:ln>
+        </p:spPr>
+      </p:sp>
+      <p:sp>
+        <p:nvSpPr>
+          <p:cNvPr id="18" name="">
+            <a:extLst xmlns:a="http://schemas.openxmlformats.org/drawingml/2006/main">
+              <a:ext uri="{FF2B5EF4-FFF2-40B4-BE49-F238E27FC236}">
+                <a16:creationId xmlns:a16="http://schemas.microsoft.com/office/drawing/2014/main" id="{088A976D-39D1-4C6C-803F-0D3F8BAE4A28}"/>
+              </a:ext>
+            </a:extLst>
+          </p:cNvPr>
+          <p:cNvSpPr>
+            <a:spLocks xmlns:a="http://schemas.openxmlformats.org/drawingml/2006/main" noGrp="1"/>
+          </p:cNvSpPr>
+          <p:nvPr/>
+        </p:nvSpPr>
+        <p:spPr>
+          <a:xfrm xmlns:a="http://schemas.openxmlformats.org/drawingml/2006/main">
+            <a:off x="8629650" y="4953000"/>
+            <a:ext cx="2686050" cy="590550"/>
+          </a:xfrm>
+          <a:prstGeom xmlns:a="http://schemas.openxmlformats.org/drawingml/2006/main" prst="rect">
+            <a:avLst/>
+          </a:prstGeom>
+          <a:noFill xmlns:a="http://schemas.openxmlformats.org/drawingml/2006/main"/>
+          <a:ln xmlns:a="http://schemas.openxmlformats.org/drawingml/2006/main" w="0">
+            <a:noFill/>
+            <a:prstDash val="solid"/>
+          </a:ln>
+        </p:spPr>
+        <p:txBody>
+          <a:bodyPr xmlns:a="http://schemas.openxmlformats.org/drawingml/2006/main" wrap="square" lIns="0" tIns="0" rIns="0" bIns="0" anchor="t">
+            <a:normAutofit fontScale="100000"/>
+          </a:bodyPr>
+          <a:lstStyle xmlns:a="http://schemas.openxmlformats.org/drawingml/2006/main"/>
+          <a:p xmlns:a="http://schemas.openxmlformats.org/drawingml/2006/main">
+            <a:pPr algn="l">
+              <a:buNone/>
+              <a:defRPr sz="3225" b="1">
+                <a:solidFill>
+                  <a:srgbClr val="273548"/>
+                </a:solidFill>
+                <a:latin typeface="Arial"/>
+                <a:ea typeface="Arial"/>
+                <a:cs typeface="Arial"/>
+              </a:defRPr>
+            </a:pPr>
+            <a:r>
+              <a:rPr sz="3225" b="1">
+                <a:solidFill>
+                  <a:srgbClr val="273548"/>
+                </a:solidFill>
+                <a:latin typeface="Arial"/>
+                <a:ea typeface="Arial"/>
+                <a:cs typeface="Arial"/>
+              </a:rPr>
+              <a:t>0 / 81</a:t>
+            </a:r>
+          </a:p>
+        </p:txBody>
+      </p:sp>
+      <p:sp>
+        <p:nvSpPr>
+          <p:cNvPr id="19" name="">
+            <a:extLst xmlns:a="http://schemas.openxmlformats.org/drawingml/2006/main">
+              <a:ext uri="{FF2B5EF4-FFF2-40B4-BE49-F238E27FC236}">
+                <a16:creationId xmlns:a16="http://schemas.microsoft.com/office/drawing/2014/main" id="{AA1E116E-13CC-4735-B31A-B5C1846B2D22}"/>
+              </a:ext>
+            </a:extLst>
+          </p:cNvPr>
+          <p:cNvSpPr>
+            <a:spLocks xmlns:a="http://schemas.openxmlformats.org/drawingml/2006/main" noGrp="1"/>
+          </p:cNvSpPr>
+          <p:nvPr/>
+        </p:nvSpPr>
+        <p:spPr>
+          <a:xfrm xmlns:a="http://schemas.openxmlformats.org/drawingml/2006/main">
+            <a:off x="8629650" y="5619750"/>
+            <a:ext cx="2686050" cy="438150"/>
+          </a:xfrm>
+          <a:prstGeom xmlns:a="http://schemas.openxmlformats.org/drawingml/2006/main" prst="rect">
+            <a:avLst/>
+          </a:prstGeom>
+          <a:noFill xmlns:a="http://schemas.openxmlformats.org/drawingml/2006/main"/>
+          <a:ln xmlns:a="http://schemas.openxmlformats.org/drawingml/2006/main" w="0">
+            <a:noFill/>
+            <a:prstDash val="solid"/>
+          </a:ln>
+        </p:spPr>
+        <p:txBody>
+          <a:bodyPr xmlns:a="http://schemas.openxmlformats.org/drawingml/2006/main" wrap="square" lIns="0" tIns="0" rIns="0" bIns="0" anchor="t">
+            <a:normAutofit fontScale="100000"/>
+          </a:bodyPr>
+          <a:lstStyle xmlns:a="http://schemas.openxmlformats.org/drawingml/2006/main"/>
+          <a:p xmlns:a="http://schemas.openxmlformats.org/drawingml/2006/main">
+            <a:pPr algn="l">
+              <a:buNone/>
+              <a:defRPr sz="1350" b="0">
+                <a:solidFill>
+                  <a:srgbClr val="273548"/>
+                </a:solidFill>
+                <a:latin typeface="Arial"/>
+                <a:ea typeface="Arial"/>
+                <a:cs typeface="Arial"/>
+              </a:defRPr>
+            </a:pPr>
+            <a:r>
+              <a:rPr sz="1350" b="0">
+                <a:solidFill>
+                  <a:srgbClr val="273548"/>
+                </a:solidFill>
+                <a:latin typeface="Arial"/>
+                <a:ea typeface="Arial"/>
+                <a:cs typeface="Arial"/>
+              </a:rPr>
+              <a:t>interaction cells with BH-FDR q &lt; 0.05</a:t>
+            </a:r>
+          </a:p>
+        </p:txBody>
+      </p:sp>
+      <p:pic>
+        <p:nvPicPr>
+          <p:cNvPr id="40" name=""/>
+          <p:cNvPicPr>
+            <a:picLocks xmlns:a="http://schemas.openxmlformats.org/drawingml/2006/main" noChangeAspect="1"/>
+          </p:cNvPicPr>
+          <p:nvPr/>
+        </p:nvPicPr>
+        <p:blipFill>
+          <a:blip xmlns:r="http://schemas.openxmlformats.org/officeDocument/2006/relationships" xmlns:a="http://schemas.openxmlformats.org/drawingml/2006/main" r:embed="R234661b337a044a4"/>
+          <a:stretch xmlns:a="http://schemas.openxmlformats.org/drawingml/2006/main"/>
+        </p:blipFill>
+        <p:spPr>
+          <a:xfrm xmlns:a="http://schemas.openxmlformats.org/drawingml/2006/main" flipH="0" flipV="0">
+            <a:off x="609600" y="1428750"/>
+            <a:ext cx="7143750" cy="4762500"/>
+          </a:xfrm>
+          <a:prstGeom xmlns:a="http://schemas.openxmlformats.org/drawingml/2006/main" prst="rect">
+            <a:avLst/>
+          </a:prstGeom>
+        </p:spPr>
+      </p:pic>
+    </p:spTree>
+    <p:extLst>
+      <p:ext uri="{BB962C8B-B14F-4D97-AF65-F5344CB8AC3E}">
+        <p14:creationId xmlns:p14="http://schemas.microsoft.com/office/powerpoint/2010/main" val="1583170704"/>
+      </p:ext>
+    </p:extLst>
+  </p:cSld>
+</p:sld>
+</file>
+
+<file path=ppt/slides/slide23.xml><?xml version="1.0" encoding="utf-8"?>
+<p:sld xmlns:p="http://schemas.openxmlformats.org/presentationml/2006/main">
+  <p:cSld>
+    <p:bg>
+      <p:bgPr>
+        <a:solidFill xmlns:a="http://schemas.openxmlformats.org/drawingml/2006/main">
+          <a:srgbClr val="FFFFFF"/>
+        </a:solidFill>
+      </p:bgPr>
+    </p:bg>
+    <p:spTree>
+      <p:nvGrpSpPr>
+        <p:cNvPr id="1" name=""/>
+        <p:cNvGrpSpPr/>
+        <p:nvPr/>
+      </p:nvGrpSpPr>
+      <p:grpSpPr>
+        <a:xfrm xmlns:a="http://schemas.openxmlformats.org/drawingml/2006/main"/>
+      </p:grpSpPr>
+      <p:sp>
+        <p:nvSpPr>
+          <p:cNvPr id="24" name="section-11">
+            <a:extLst xmlns:a="http://schemas.openxmlformats.org/drawingml/2006/main">
+              <a:ext uri="{FF2B5EF4-FFF2-40B4-BE49-F238E27FC236}">
+                <a16:creationId xmlns:a16="http://schemas.microsoft.com/office/drawing/2014/main" id="{272ED433-B59C-436C-9DFB-4D317B90A13F}"/>
+              </a:ext>
+            </a:extLst>
+          </p:cNvPr>
+          <p:cNvSpPr>
+            <a:spLocks xmlns:a="http://schemas.openxmlformats.org/drawingml/2006/main" noGrp="1"/>
+          </p:cNvSpPr>
+          <p:nvPr/>
+        </p:nvSpPr>
+        <p:spPr>
+          <a:xfrm xmlns:a="http://schemas.openxmlformats.org/drawingml/2006/main">
+            <a:off x="457200" y="228600"/>
+            <a:ext cx="4191000" cy="228600"/>
+          </a:xfrm>
+          <a:prstGeom xmlns:a="http://schemas.openxmlformats.org/drawingml/2006/main" prst="rect">
+            <a:avLst/>
+          </a:prstGeom>
+          <a:noFill xmlns:a="http://schemas.openxmlformats.org/drawingml/2006/main"/>
+          <a:ln xmlns:a="http://schemas.openxmlformats.org/drawingml/2006/main" w="0">
+            <a:noFill/>
+            <a:prstDash val="solid"/>
+          </a:ln>
+        </p:spPr>
+        <p:txBody>
+          <a:bodyPr xmlns:a="http://schemas.openxmlformats.org/drawingml/2006/main" wrap="square" lIns="0" tIns="0" rIns="0" bIns="0" anchor="t">
+            <a:normAutofit fontScale="100000"/>
+          </a:bodyPr>
+          <a:lstStyle xmlns:a="http://schemas.openxmlformats.org/drawingml/2006/main"/>
+          <a:p xmlns:a="http://schemas.openxmlformats.org/drawingml/2006/main">
+            <a:pPr algn="l">
+              <a:buNone/>
+              <a:defRPr sz="1200" b="1">
+                <a:solidFill>
+                  <a:srgbClr val="667384"/>
+                </a:solidFill>
+                <a:latin typeface="Arial"/>
+                <a:ea typeface="Arial"/>
+                <a:cs typeface="Arial"/>
+              </a:defRPr>
+            </a:pPr>
+            <a:r>
+              <a:rPr sz="1200" b="1">
+                <a:solidFill>
+                  <a:srgbClr val="667384"/>
+                </a:solidFill>
+                <a:latin typeface="Arial"/>
+                <a:ea typeface="Arial"/>
+                <a:cs typeface="Arial"/>
+              </a:rPr>
+              <a:t>TSLA DESCRIPTIVE MICROSCOPE</a:t>
+            </a:r>
+          </a:p>
+        </p:txBody>
+      </p:sp>
+      <p:sp>
+        <p:nvSpPr>
+          <p:cNvPr id="2" name="title-11">
+            <a:extLst xmlns:a="http://schemas.openxmlformats.org/drawingml/2006/main">
+              <a:ext uri="{FF2B5EF4-FFF2-40B4-BE49-F238E27FC236}">
+                <a16:creationId xmlns:a16="http://schemas.microsoft.com/office/drawing/2014/main" id="{3EC40708-7E00-432C-8ECE-907FA5705292}"/>
+              </a:ext>
+            </a:extLst>
+          </p:cNvPr>
+          <p:cNvSpPr>
+            <a:spLocks xmlns:a="http://schemas.openxmlformats.org/drawingml/2006/main" noGrp="1"/>
+          </p:cNvSpPr>
+          <p:nvPr/>
+        </p:nvSpPr>
+        <p:spPr>
+          <a:xfrm xmlns:a="http://schemas.openxmlformats.org/drawingml/2006/main">
+            <a:off x="457200" y="533400"/>
+            <a:ext cx="11277600" cy="628650"/>
+          </a:xfrm>
+          <a:prstGeom xmlns:a="http://schemas.openxmlformats.org/drawingml/2006/main" prst="rect">
+            <a:avLst/>
+          </a:prstGeom>
+          <a:noFill xmlns:a="http://schemas.openxmlformats.org/drawingml/2006/main"/>
+          <a:ln xmlns:a="http://schemas.openxmlformats.org/drawingml/2006/main" w="0">
+            <a:noFill/>
+            <a:prstDash val="solid"/>
+          </a:ln>
+        </p:spPr>
+        <p:txBody>
+          <a:bodyPr xmlns:a="http://schemas.openxmlformats.org/drawingml/2006/main" wrap="square" lIns="0" tIns="0" rIns="0" bIns="0" anchor="t">
+            <a:normAutofit fontScale="100000"/>
+          </a:bodyPr>
+          <a:lstStyle xmlns:a="http://schemas.openxmlformats.org/drawingml/2006/main"/>
+          <a:p xmlns:a="http://schemas.openxmlformats.org/drawingml/2006/main">
+            <a:pPr algn="l">
+              <a:buNone/>
+              <a:defRPr sz="3525" b="1">
+                <a:solidFill>
+                  <a:srgbClr val="000000"/>
+                </a:solidFill>
+                <a:latin typeface="Arial"/>
+                <a:ea typeface="Arial"/>
+                <a:cs typeface="Arial"/>
+              </a:defRPr>
+            </a:pPr>
+            <a:r>
+              <a:rPr sz="3525" b="1">
+                <a:solidFill>
+                  <a:srgbClr val="000000"/>
+                </a:solidFill>
+                <a:latin typeface="Arial"/>
+                <a:ea typeface="Arial"/>
+                <a:cs typeface="Arial"/>
+              </a:rPr>
+              <a:t>ER20 changes the map, but not the evidentiary stop</a:t>
+            </a:r>
+          </a:p>
+        </p:txBody>
+      </p:sp>
+      <p:sp>
+        <p:nvSpPr>
+          <p:cNvPr id="3" name="">
+            <a:extLst xmlns:a="http://schemas.openxmlformats.org/drawingml/2006/main">
+              <a:ext uri="{FF2B5EF4-FFF2-40B4-BE49-F238E27FC236}">
+                <a16:creationId xmlns:a16="http://schemas.microsoft.com/office/drawing/2014/main" id="{D5CA0FCE-75E8-41EF-A76A-23E9E2120C6A}"/>
+              </a:ext>
+            </a:extLst>
+          </p:cNvPr>
+          <p:cNvSpPr>
+            <a:spLocks xmlns:a="http://schemas.openxmlformats.org/drawingml/2006/main" noGrp="1"/>
+          </p:cNvSpPr>
+          <p:nvPr/>
+        </p:nvSpPr>
+        <p:spPr>
+          <a:xfrm xmlns:a="http://schemas.openxmlformats.org/drawingml/2006/main">
+            <a:off x="457200" y="1200150"/>
+            <a:ext cx="11277600" cy="19050"/>
+          </a:xfrm>
+          <a:prstGeom xmlns:a="http://schemas.openxmlformats.org/drawingml/2006/main" prst="rect">
+            <a:avLst/>
+          </a:prstGeom>
+          <a:solidFill xmlns:a="http://schemas.openxmlformats.org/drawingml/2006/main">
+            <a:srgbClr val="B8BCC4"/>
+          </a:solidFill>
+          <a:ln xmlns:a="http://schemas.openxmlformats.org/drawingml/2006/main" w="0">
+            <a:solidFill>
+              <a:srgbClr val="B8BCC4"/>
+            </a:solidFill>
+            <a:prstDash val="solid"/>
+          </a:ln>
+        </p:spPr>
+      </p:sp>
+      <p:sp>
+        <p:nvSpPr>
+          <p:cNvPr id="4" name="footer-left-11">
+            <a:extLst xmlns:a="http://schemas.openxmlformats.org/drawingml/2006/main">
+              <a:ext uri="{FF2B5EF4-FFF2-40B4-BE49-F238E27FC236}">
+                <a16:creationId xmlns:a16="http://schemas.microsoft.com/office/drawing/2014/main" id="{700DA765-80E0-4197-8700-00D867B86FA2}"/>
+              </a:ext>
+            </a:extLst>
+          </p:cNvPr>
+          <p:cNvSpPr>
+            <a:spLocks xmlns:a="http://schemas.openxmlformats.org/drawingml/2006/main" noGrp="1"/>
+          </p:cNvSpPr>
+          <p:nvPr/>
+        </p:nvSpPr>
+        <p:spPr>
+          <a:xfrm xmlns:a="http://schemas.openxmlformats.org/drawingml/2006/main">
+            <a:off x="457200" y="6515100"/>
+            <a:ext cx="3429000" cy="171450"/>
+          </a:xfrm>
+          <a:prstGeom xmlns:a="http://schemas.openxmlformats.org/drawingml/2006/main" prst="rect">
+            <a:avLst/>
+          </a:prstGeom>
+          <a:noFill xmlns:a="http://schemas.openxmlformats.org/drawingml/2006/main"/>
+          <a:ln xmlns:a="http://schemas.openxmlformats.org/drawingml/2006/main" w="0">
+            <a:noFill/>
+            <a:prstDash val="solid"/>
+          </a:ln>
+        </p:spPr>
+        <p:txBody>
+          <a:bodyPr xmlns:a="http://schemas.openxmlformats.org/drawingml/2006/main" wrap="square" lIns="0" tIns="0" rIns="0" bIns="0" anchor="t">
+            <a:normAutofit fontScale="100000"/>
+          </a:bodyPr>
+          <a:lstStyle xmlns:a="http://schemas.openxmlformats.org/drawingml/2006/main"/>
+          <a:p xmlns:a="http://schemas.openxmlformats.org/drawingml/2006/main">
+            <a:pPr algn="l">
+              <a:buNone/>
+              <a:defRPr sz="1050" b="0">
+                <a:solidFill>
+                  <a:srgbClr val="667384"/>
+                </a:solidFill>
+                <a:latin typeface="Arial"/>
+                <a:ea typeface="Arial"/>
+                <a:cs typeface="Arial"/>
+              </a:defRPr>
+            </a:pPr>
+            <a:r>
+              <a:rPr sz="1050" b="0">
+                <a:solidFill>
+                  <a:srgbClr val="667384"/>
+                </a:solidFill>
+                <a:latin typeface="Arial"/>
+                <a:ea typeface="Arial"/>
+                <a:cs typeface="Arial"/>
+              </a:rPr>
+              <a:t>Adjusted daily TSLA | 2018-2023</a:t>
+            </a:r>
+          </a:p>
+        </p:txBody>
+      </p:sp>
+      <p:sp>
+        <p:nvSpPr>
+          <p:cNvPr id="5" name="footer-number-11">
+            <a:extLst xmlns:a="http://schemas.openxmlformats.org/drawingml/2006/main">
+              <a:ext uri="{FF2B5EF4-FFF2-40B4-BE49-F238E27FC236}">
+                <a16:creationId xmlns:a16="http://schemas.microsoft.com/office/drawing/2014/main" id="{83896276-4112-4532-AF7C-776C67C58B77}"/>
+              </a:ext>
+            </a:extLst>
+          </p:cNvPr>
+          <p:cNvSpPr>
+            <a:spLocks xmlns:a="http://schemas.openxmlformats.org/drawingml/2006/main" noGrp="1"/>
+          </p:cNvSpPr>
+          <p:nvPr/>
+        </p:nvSpPr>
+        <p:spPr>
+          <a:xfrm xmlns:a="http://schemas.openxmlformats.org/drawingml/2006/main">
+            <a:off x="11239500" y="6496050"/>
+            <a:ext cx="495300" cy="190500"/>
+          </a:xfrm>
+          <a:prstGeom xmlns:a="http://schemas.openxmlformats.org/drawingml/2006/main" prst="rect">
+            <a:avLst/>
+          </a:prstGeom>
+          <a:noFill xmlns:a="http://schemas.openxmlformats.org/drawingml/2006/main"/>
+          <a:ln xmlns:a="http://schemas.openxmlformats.org/drawingml/2006/main" w="0">
+            <a:noFill/>
+            <a:prstDash val="solid"/>
+          </a:ln>
+        </p:spPr>
+        <p:txBody>
+          <a:bodyPr xmlns:a="http://schemas.openxmlformats.org/drawingml/2006/main" wrap="square" lIns="0" tIns="0" rIns="0" bIns="0" anchor="t">
+            <a:normAutofit fontScale="100000"/>
+          </a:bodyPr>
+          <a:lstStyle xmlns:a="http://schemas.openxmlformats.org/drawingml/2006/main"/>
+          <a:p xmlns:a="http://schemas.openxmlformats.org/drawingml/2006/main">
+            <a:pPr algn="r">
+              <a:buNone/>
+              <a:defRPr sz="1050" b="0">
+                <a:solidFill>
+                  <a:srgbClr val="667384"/>
+                </a:solidFill>
+                <a:latin typeface="Arial"/>
+                <a:ea typeface="Arial"/>
+                <a:cs typeface="Arial"/>
+              </a:defRPr>
+            </a:pPr>
+            <a:r>
+              <a:rPr sz="1050" b="0">
+                <a:solidFill>
+                  <a:srgbClr val="667384"/>
+                </a:solidFill>
+                <a:latin typeface="Arial"/>
+                <a:ea typeface="Arial"/>
+                <a:cs typeface="Arial"/>
+              </a:rPr>
+              <a:t>23</a:t>
+            </a:r>
+          </a:p>
+        </p:txBody>
+      </p:sp>
+      <p:sp>
+        <p:nvSpPr>
+          <p:cNvPr id="6" name="">
+            <a:extLst xmlns:a="http://schemas.openxmlformats.org/drawingml/2006/main">
+              <a:ext uri="{FF2B5EF4-FFF2-40B4-BE49-F238E27FC236}">
+                <a16:creationId xmlns:a16="http://schemas.microsoft.com/office/drawing/2014/main" id="{10F4BA85-46C5-47BD-BA74-EC806E663D58}"/>
+              </a:ext>
+            </a:extLst>
+          </p:cNvPr>
+          <p:cNvSpPr>
+            <a:spLocks xmlns:a="http://schemas.openxmlformats.org/drawingml/2006/main" noGrp="1"/>
+          </p:cNvSpPr>
+          <p:nvPr/>
+        </p:nvSpPr>
+        <p:spPr>
+          <a:xfrm xmlns:a="http://schemas.openxmlformats.org/drawingml/2006/main">
+            <a:off x="552450" y="1600200"/>
+            <a:ext cx="95250" cy="895350"/>
+          </a:xfrm>
+          <a:prstGeom xmlns:a="http://schemas.openxmlformats.org/drawingml/2006/main" prst="rect">
+            <a:avLst/>
+          </a:prstGeom>
+          <a:solidFill xmlns:a="http://schemas.openxmlformats.org/drawingml/2006/main">
+            <a:srgbClr val="E45756"/>
+          </a:solidFill>
+          <a:ln xmlns:a="http://schemas.openxmlformats.org/drawingml/2006/main" w="0">
+            <a:solidFill>
+              <a:srgbClr val="E45756"/>
+            </a:solidFill>
+            <a:prstDash val="solid"/>
+          </a:ln>
+        </p:spPr>
+      </p:sp>
+      <p:sp>
+        <p:nvSpPr>
+          <p:cNvPr id="7" name="">
+            <a:extLst xmlns:a="http://schemas.openxmlformats.org/drawingml/2006/main">
+              <a:ext uri="{FF2B5EF4-FFF2-40B4-BE49-F238E27FC236}">
+                <a16:creationId xmlns:a16="http://schemas.microsoft.com/office/drawing/2014/main" id="{7EF5B945-9D04-48FA-BA66-96DE813A9715}"/>
+              </a:ext>
+            </a:extLst>
+          </p:cNvPr>
+          <p:cNvSpPr>
+            <a:spLocks xmlns:a="http://schemas.openxmlformats.org/drawingml/2006/main" noGrp="1"/>
+          </p:cNvSpPr>
+          <p:nvPr/>
+        </p:nvSpPr>
+        <p:spPr>
+          <a:xfrm xmlns:a="http://schemas.openxmlformats.org/drawingml/2006/main">
+            <a:off x="876300" y="1581150"/>
+            <a:ext cx="2095500" cy="285750"/>
+          </a:xfrm>
+          <a:prstGeom xmlns:a="http://schemas.openxmlformats.org/drawingml/2006/main" prst="rect">
+            <a:avLst/>
+          </a:prstGeom>
+          <a:noFill xmlns:a="http://schemas.openxmlformats.org/drawingml/2006/main"/>
+          <a:ln xmlns:a="http://schemas.openxmlformats.org/drawingml/2006/main" w="0">
+            <a:noFill/>
+            <a:prstDash val="solid"/>
+          </a:ln>
+        </p:spPr>
+        <p:txBody>
+          <a:bodyPr xmlns:a="http://schemas.openxmlformats.org/drawingml/2006/main" wrap="square" lIns="0" tIns="0" rIns="0" bIns="0" anchor="t">
+            <a:normAutofit fontScale="100000"/>
+          </a:bodyPr>
+          <a:lstStyle xmlns:a="http://schemas.openxmlformats.org/drawingml/2006/main"/>
+          <a:p xmlns:a="http://schemas.openxmlformats.org/drawingml/2006/main">
+            <a:pPr algn="l">
+              <a:buNone/>
+              <a:defRPr sz="1350" b="1">
+                <a:solidFill>
+                  <a:srgbClr val="E45756"/>
+                </a:solidFill>
+                <a:latin typeface="Arial"/>
+                <a:ea typeface="Arial"/>
+                <a:cs typeface="Arial"/>
+              </a:defRPr>
+            </a:pPr>
+            <a:r>
+              <a:rPr sz="1350" b="1">
+                <a:solidFill>
+                  <a:srgbClr val="E45756"/>
+                </a:solidFill>
+                <a:latin typeface="Arial"/>
+                <a:ea typeface="Arial"/>
+                <a:cs typeface="Arial"/>
+              </a:rPr>
+              <a:t>RED MAP</a:t>
+            </a:r>
+          </a:p>
+        </p:txBody>
+      </p:sp>
+      <p:sp>
+        <p:nvSpPr>
+          <p:cNvPr id="8" name="">
+            <a:extLst xmlns:a="http://schemas.openxmlformats.org/drawingml/2006/main">
+              <a:ext uri="{FF2B5EF4-FFF2-40B4-BE49-F238E27FC236}">
+                <a16:creationId xmlns:a16="http://schemas.microsoft.com/office/drawing/2014/main" id="{655CF75D-5F23-4C7F-BE9C-764036D0B9E8}"/>
+              </a:ext>
+            </a:extLst>
+          </p:cNvPr>
+          <p:cNvSpPr>
+            <a:spLocks xmlns:a="http://schemas.openxmlformats.org/drawingml/2006/main" noGrp="1"/>
+          </p:cNvSpPr>
+          <p:nvPr/>
+        </p:nvSpPr>
+        <p:spPr>
+          <a:xfrm xmlns:a="http://schemas.openxmlformats.org/drawingml/2006/main">
+            <a:off x="3105150" y="1562100"/>
+            <a:ext cx="4762500" cy="419100"/>
+          </a:xfrm>
+          <a:prstGeom xmlns:a="http://schemas.openxmlformats.org/drawingml/2006/main" prst="rect">
+            <a:avLst/>
+          </a:prstGeom>
+          <a:noFill xmlns:a="http://schemas.openxmlformats.org/drawingml/2006/main"/>
+          <a:ln xmlns:a="http://schemas.openxmlformats.org/drawingml/2006/main" w="0">
+            <a:noFill/>
+            <a:prstDash val="solid"/>
+          </a:ln>
+        </p:spPr>
+        <p:txBody>
+          <a:bodyPr xmlns:a="http://schemas.openxmlformats.org/drawingml/2006/main" wrap="square" lIns="0" tIns="0" rIns="0" bIns="0" anchor="t">
+            <a:normAutofit fontScale="70513"/>
+          </a:bodyPr>
+          <a:lstStyle xmlns:a="http://schemas.openxmlformats.org/drawingml/2006/main"/>
+          <a:p xmlns:a="http://schemas.openxmlformats.org/drawingml/2006/main">
+            <a:pPr algn="l">
+              <a:buNone/>
+              <a:defRPr sz="1950" b="1">
+                <a:solidFill>
+                  <a:srgbClr val="273548"/>
+                </a:solidFill>
+                <a:latin typeface="Arial"/>
+                <a:ea typeface="Arial"/>
+                <a:cs typeface="Arial"/>
+              </a:defRPr>
+            </a:pPr>
+            <a:r>
+              <a:rPr sz="1950" b="1">
+                <a:solidFill>
+                  <a:srgbClr val="273548"/>
+                </a:solidFill>
+                <a:latin typeface="Arial"/>
+                <a:ea typeface="Arial"/>
+                <a:cs typeface="Arial"/>
+              </a:rPr>
+              <a:t>A positive island appears around 10–15 prior / 3–10 forward</a:t>
+            </a:r>
+          </a:p>
+        </p:txBody>
+      </p:sp>
+      <p:sp>
+        <p:nvSpPr>
+          <p:cNvPr id="9" name="">
+            <a:extLst xmlns:a="http://schemas.openxmlformats.org/drawingml/2006/main">
+              <a:ext uri="{FF2B5EF4-FFF2-40B4-BE49-F238E27FC236}">
+                <a16:creationId xmlns:a16="http://schemas.microsoft.com/office/drawing/2014/main" id="{3E0B76F2-4514-4DD8-934B-ABE42A34E950}"/>
+              </a:ext>
+            </a:extLst>
+          </p:cNvPr>
+          <p:cNvSpPr>
+            <a:spLocks xmlns:a="http://schemas.openxmlformats.org/drawingml/2006/main" noGrp="1"/>
+          </p:cNvSpPr>
+          <p:nvPr/>
+        </p:nvSpPr>
+        <p:spPr>
+          <a:xfrm xmlns:a="http://schemas.openxmlformats.org/drawingml/2006/main">
+            <a:off x="8096250" y="1581150"/>
+            <a:ext cx="3333750" cy="704850"/>
+          </a:xfrm>
+          <a:prstGeom xmlns:a="http://schemas.openxmlformats.org/drawingml/2006/main" prst="rect">
+            <a:avLst/>
+          </a:prstGeom>
+          <a:noFill xmlns:a="http://schemas.openxmlformats.org/drawingml/2006/main"/>
+          <a:ln xmlns:a="http://schemas.openxmlformats.org/drawingml/2006/main" w="0">
+            <a:noFill/>
+            <a:prstDash val="solid"/>
+          </a:ln>
+        </p:spPr>
+        <p:txBody>
+          <a:bodyPr xmlns:a="http://schemas.openxmlformats.org/drawingml/2006/main" wrap="square" lIns="0" tIns="0" rIns="0" bIns="0" anchor="t">
+            <a:normAutofit fontScale="100000"/>
+          </a:bodyPr>
+          <a:lstStyle xmlns:a="http://schemas.openxmlformats.org/drawingml/2006/main"/>
+          <a:p xmlns:a="http://schemas.openxmlformats.org/drawingml/2006/main">
+            <a:pPr algn="l">
+              <a:buNone/>
+              <a:defRPr sz="1425" b="0">
+                <a:solidFill>
+                  <a:srgbClr val="667384"/>
+                </a:solidFill>
+                <a:latin typeface="Arial"/>
+                <a:ea typeface="Arial"/>
+                <a:cs typeface="Arial"/>
+              </a:defRPr>
+            </a:pPr>
+            <a:r>
+              <a:rPr sz="1425" b="0">
+                <a:solidFill>
+                  <a:srgbClr val="667384"/>
+                </a:solidFill>
+                <a:latin typeface="Arial"/>
+                <a:ea typeface="Arial"/>
+                <a:cs typeface="Arial"/>
+              </a:rPr>
+              <a:t>Max +0.173 at 15 prior / 5 forward</a:t>
+            </a:r>
+          </a:p>
+        </p:txBody>
+      </p:sp>
+      <p:sp>
+        <p:nvSpPr>
+          <p:cNvPr id="10" name="">
+            <a:extLst xmlns:a="http://schemas.openxmlformats.org/drawingml/2006/main">
+              <a:ext uri="{FF2B5EF4-FFF2-40B4-BE49-F238E27FC236}">
+                <a16:creationId xmlns:a16="http://schemas.microsoft.com/office/drawing/2014/main" id="{294777C3-6D2F-4277-840E-7E984FB4554D}"/>
+              </a:ext>
+            </a:extLst>
+          </p:cNvPr>
+          <p:cNvSpPr>
+            <a:spLocks xmlns:a="http://schemas.openxmlformats.org/drawingml/2006/main" noGrp="1"/>
+          </p:cNvSpPr>
+          <p:nvPr/>
+        </p:nvSpPr>
+        <p:spPr>
+          <a:xfrm xmlns:a="http://schemas.openxmlformats.org/drawingml/2006/main">
+            <a:off x="876300" y="2590800"/>
+            <a:ext cx="10553700" cy="9525"/>
+          </a:xfrm>
+          <a:prstGeom xmlns:a="http://schemas.openxmlformats.org/drawingml/2006/main" prst="rect">
+            <a:avLst/>
+          </a:prstGeom>
+          <a:solidFill xmlns:a="http://schemas.openxmlformats.org/drawingml/2006/main">
+            <a:srgbClr val="B8BCC4"/>
+          </a:solidFill>
+          <a:ln xmlns:a="http://schemas.openxmlformats.org/drawingml/2006/main" w="0">
+            <a:solidFill>
+              <a:srgbClr val="B8BCC4"/>
+            </a:solidFill>
+            <a:prstDash val="solid"/>
+          </a:ln>
+        </p:spPr>
+      </p:sp>
+      <p:sp>
+        <p:nvSpPr>
+          <p:cNvPr id="11" name="">
+            <a:extLst xmlns:a="http://schemas.openxmlformats.org/drawingml/2006/main">
+              <a:ext uri="{FF2B5EF4-FFF2-40B4-BE49-F238E27FC236}">
+                <a16:creationId xmlns:a16="http://schemas.microsoft.com/office/drawing/2014/main" id="{F894CF3F-AD63-423C-8F01-64C507896579}"/>
+              </a:ext>
+            </a:extLst>
+          </p:cNvPr>
+          <p:cNvSpPr>
+            <a:spLocks xmlns:a="http://schemas.openxmlformats.org/drawingml/2006/main" noGrp="1"/>
+          </p:cNvSpPr>
+          <p:nvPr/>
+        </p:nvSpPr>
+        <p:spPr>
+          <a:xfrm xmlns:a="http://schemas.openxmlformats.org/drawingml/2006/main">
+            <a:off x="552450" y="2800350"/>
+            <a:ext cx="95250" cy="895350"/>
+          </a:xfrm>
+          <a:prstGeom xmlns:a="http://schemas.openxmlformats.org/drawingml/2006/main" prst="rect">
+            <a:avLst/>
+          </a:prstGeom>
+          <a:solidFill xmlns:a="http://schemas.openxmlformats.org/drawingml/2006/main">
+            <a:srgbClr val="2A9D6F"/>
+          </a:solidFill>
+          <a:ln xmlns:a="http://schemas.openxmlformats.org/drawingml/2006/main" w="0">
+            <a:solidFill>
+              <a:srgbClr val="2A9D6F"/>
+            </a:solidFill>
+            <a:prstDash val="solid"/>
+          </a:ln>
+        </p:spPr>
+      </p:sp>
+      <p:sp>
+        <p:nvSpPr>
+          <p:cNvPr id="12" name="">
+            <a:extLst xmlns:a="http://schemas.openxmlformats.org/drawingml/2006/main">
+              <a:ext uri="{FF2B5EF4-FFF2-40B4-BE49-F238E27FC236}">
+                <a16:creationId xmlns:a16="http://schemas.microsoft.com/office/drawing/2014/main" id="{D3953D03-6A7A-4FEE-B242-02BF0319C169}"/>
+              </a:ext>
+            </a:extLst>
+          </p:cNvPr>
+          <p:cNvSpPr>
+            <a:spLocks xmlns:a="http://schemas.openxmlformats.org/drawingml/2006/main" noGrp="1"/>
+          </p:cNvSpPr>
+          <p:nvPr/>
+        </p:nvSpPr>
+        <p:spPr>
+          <a:xfrm xmlns:a="http://schemas.openxmlformats.org/drawingml/2006/main">
+            <a:off x="876300" y="2781300"/>
+            <a:ext cx="2095500" cy="285750"/>
+          </a:xfrm>
+          <a:prstGeom xmlns:a="http://schemas.openxmlformats.org/drawingml/2006/main" prst="rect">
+            <a:avLst/>
+          </a:prstGeom>
+          <a:noFill xmlns:a="http://schemas.openxmlformats.org/drawingml/2006/main"/>
+          <a:ln xmlns:a="http://schemas.openxmlformats.org/drawingml/2006/main" w="0">
+            <a:noFill/>
+            <a:prstDash val="solid"/>
+          </a:ln>
+        </p:spPr>
+        <p:txBody>
+          <a:bodyPr xmlns:a="http://schemas.openxmlformats.org/drawingml/2006/main" wrap="square" lIns="0" tIns="0" rIns="0" bIns="0" anchor="t">
+            <a:normAutofit fontScale="100000"/>
+          </a:bodyPr>
+          <a:lstStyle xmlns:a="http://schemas.openxmlformats.org/drawingml/2006/main"/>
+          <a:p xmlns:a="http://schemas.openxmlformats.org/drawingml/2006/main">
+            <a:pPr algn="l">
+              <a:buNone/>
+              <a:defRPr sz="1350" b="1">
+                <a:solidFill>
+                  <a:srgbClr val="2A9D6F"/>
+                </a:solidFill>
+                <a:latin typeface="Arial"/>
+                <a:ea typeface="Arial"/>
+                <a:cs typeface="Arial"/>
+              </a:defRPr>
+            </a:pPr>
+            <a:r>
+              <a:rPr sz="1350" b="1">
+                <a:solidFill>
+                  <a:srgbClr val="2A9D6F"/>
+                </a:solidFill>
+                <a:latin typeface="Arial"/>
+                <a:ea typeface="Arial"/>
+                <a:cs typeface="Arial"/>
+              </a:rPr>
+              <a:t>GREEN MAP</a:t>
+            </a:r>
+          </a:p>
+        </p:txBody>
+      </p:sp>
+      <p:sp>
+        <p:nvSpPr>
+          <p:cNvPr id="13" name="">
+            <a:extLst xmlns:a="http://schemas.openxmlformats.org/drawingml/2006/main">
+              <a:ext uri="{FF2B5EF4-FFF2-40B4-BE49-F238E27FC236}">
+                <a16:creationId xmlns:a16="http://schemas.microsoft.com/office/drawing/2014/main" id="{52D1DBE8-EAF6-4492-89E7-5C97A3A6A395}"/>
+              </a:ext>
+            </a:extLst>
+          </p:cNvPr>
+          <p:cNvSpPr>
+            <a:spLocks xmlns:a="http://schemas.openxmlformats.org/drawingml/2006/main" noGrp="1"/>
+          </p:cNvSpPr>
+          <p:nvPr/>
+        </p:nvSpPr>
+        <p:spPr>
+          <a:xfrm xmlns:a="http://schemas.openxmlformats.org/drawingml/2006/main">
+            <a:off x="3105150" y="2762250"/>
+            <a:ext cx="4762500" cy="419100"/>
+          </a:xfrm>
+          <a:prstGeom xmlns:a="http://schemas.openxmlformats.org/drawingml/2006/main" prst="rect">
+            <a:avLst/>
+          </a:prstGeom>
+          <a:noFill xmlns:a="http://schemas.openxmlformats.org/drawingml/2006/main"/>
+          <a:ln xmlns:a="http://schemas.openxmlformats.org/drawingml/2006/main" w="0">
+            <a:noFill/>
+            <a:prstDash val="solid"/>
+          </a:ln>
+        </p:spPr>
+        <p:txBody>
+          <a:bodyPr xmlns:a="http://schemas.openxmlformats.org/drawingml/2006/main" wrap="square" lIns="0" tIns="0" rIns="0" bIns="0" anchor="t">
+            <a:normAutofit fontScale="70513"/>
+          </a:bodyPr>
+          <a:lstStyle xmlns:a="http://schemas.openxmlformats.org/drawingml/2006/main"/>
+          <a:p xmlns:a="http://schemas.openxmlformats.org/drawingml/2006/main">
+            <a:pPr algn="l">
+              <a:buNone/>
+              <a:defRPr sz="1950" b="1">
+                <a:solidFill>
+                  <a:srgbClr val="273548"/>
+                </a:solidFill>
+                <a:latin typeface="Arial"/>
+                <a:ea typeface="Arial"/>
+                <a:cs typeface="Arial"/>
+              </a:defRPr>
+            </a:pPr>
+            <a:r>
+              <a:rPr sz="1950" b="1">
+                <a:solidFill>
+                  <a:srgbClr val="273548"/>
+                </a:solidFill>
+                <a:latin typeface="Arial"/>
+                <a:ea typeface="Arial"/>
+                <a:cs typeface="Arial"/>
+              </a:rPr>
+              <a:t>The same island is muted or reversed; long/long turns negative</a:t>
+            </a:r>
+          </a:p>
+        </p:txBody>
+      </p:sp>
+      <p:sp>
+        <p:nvSpPr>
+          <p:cNvPr id="14" name="">
+            <a:extLst xmlns:a="http://schemas.openxmlformats.org/drawingml/2006/main">
+              <a:ext uri="{FF2B5EF4-FFF2-40B4-BE49-F238E27FC236}">
+                <a16:creationId xmlns:a16="http://schemas.microsoft.com/office/drawing/2014/main" id="{2CAF0156-C9E6-4210-8A8A-BFEDD044631B}"/>
+              </a:ext>
+            </a:extLst>
+          </p:cNvPr>
+          <p:cNvSpPr>
+            <a:spLocks xmlns:a="http://schemas.openxmlformats.org/drawingml/2006/main" noGrp="1"/>
+          </p:cNvSpPr>
+          <p:nvPr/>
+        </p:nvSpPr>
+        <p:spPr>
+          <a:xfrm xmlns:a="http://schemas.openxmlformats.org/drawingml/2006/main">
+            <a:off x="8096250" y="2781300"/>
+            <a:ext cx="3333750" cy="704850"/>
+          </a:xfrm>
+          <a:prstGeom xmlns:a="http://schemas.openxmlformats.org/drawingml/2006/main" prst="rect">
+            <a:avLst/>
+          </a:prstGeom>
+          <a:noFill xmlns:a="http://schemas.openxmlformats.org/drawingml/2006/main"/>
+          <a:ln xmlns:a="http://schemas.openxmlformats.org/drawingml/2006/main" w="0">
+            <a:noFill/>
+            <a:prstDash val="solid"/>
+          </a:ln>
+        </p:spPr>
+        <p:txBody>
+          <a:bodyPr xmlns:a="http://schemas.openxmlformats.org/drawingml/2006/main" wrap="square" lIns="0" tIns="0" rIns="0" bIns="0" anchor="t">
+            <a:normAutofit fontScale="100000"/>
+          </a:bodyPr>
+          <a:lstStyle xmlns:a="http://schemas.openxmlformats.org/drawingml/2006/main"/>
+          <a:p xmlns:a="http://schemas.openxmlformats.org/drawingml/2006/main">
+            <a:pPr algn="l">
+              <a:buNone/>
+              <a:defRPr sz="1425" b="0">
+                <a:solidFill>
+                  <a:srgbClr val="667384"/>
+                </a:solidFill>
+                <a:latin typeface="Arial"/>
+                <a:ea typeface="Arial"/>
+                <a:cs typeface="Arial"/>
+              </a:defRPr>
+            </a:pPr>
+            <a:r>
+              <a:rPr sz="1425" b="0">
+                <a:solidFill>
+                  <a:srgbClr val="667384"/>
+                </a:solidFill>
+                <a:latin typeface="Arial"/>
+                <a:ea typeface="Arial"/>
+                <a:cs typeface="Arial"/>
+              </a:rPr>
+              <a:t>15 / 5 = -0.058; 25 / 25 = -0.154</a:t>
+            </a:r>
+          </a:p>
+        </p:txBody>
+      </p:sp>
+      <p:sp>
+        <p:nvSpPr>
+          <p:cNvPr id="15" name="">
+            <a:extLst xmlns:a="http://schemas.openxmlformats.org/drawingml/2006/main">
+              <a:ext uri="{FF2B5EF4-FFF2-40B4-BE49-F238E27FC236}">
+                <a16:creationId xmlns:a16="http://schemas.microsoft.com/office/drawing/2014/main" id="{B126165D-5B65-44DB-99BD-15ED33F9B90F}"/>
+              </a:ext>
+            </a:extLst>
+          </p:cNvPr>
+          <p:cNvSpPr>
+            <a:spLocks xmlns:a="http://schemas.openxmlformats.org/drawingml/2006/main" noGrp="1"/>
+          </p:cNvSpPr>
+          <p:nvPr/>
+        </p:nvSpPr>
+        <p:spPr>
+          <a:xfrm xmlns:a="http://schemas.openxmlformats.org/drawingml/2006/main">
+            <a:off x="876300" y="3790950"/>
+            <a:ext cx="10553700" cy="9525"/>
+          </a:xfrm>
+          <a:prstGeom xmlns:a="http://schemas.openxmlformats.org/drawingml/2006/main" prst="rect">
+            <a:avLst/>
+          </a:prstGeom>
+          <a:solidFill xmlns:a="http://schemas.openxmlformats.org/drawingml/2006/main">
+            <a:srgbClr val="B8BCC4"/>
+          </a:solidFill>
+          <a:ln xmlns:a="http://schemas.openxmlformats.org/drawingml/2006/main" w="0">
+            <a:solidFill>
+              <a:srgbClr val="B8BCC4"/>
+            </a:solidFill>
+            <a:prstDash val="solid"/>
+          </a:ln>
+        </p:spPr>
+      </p:sp>
+      <p:sp>
+        <p:nvSpPr>
+          <p:cNvPr id="16" name="">
+            <a:extLst xmlns:a="http://schemas.openxmlformats.org/drawingml/2006/main">
+              <a:ext uri="{FF2B5EF4-FFF2-40B4-BE49-F238E27FC236}">
+                <a16:creationId xmlns:a16="http://schemas.microsoft.com/office/drawing/2014/main" id="{7DC0911F-9587-4B19-84C6-11974DB2A91C}"/>
+              </a:ext>
+            </a:extLst>
+          </p:cNvPr>
+          <p:cNvSpPr>
+            <a:spLocks xmlns:a="http://schemas.openxmlformats.org/drawingml/2006/main" noGrp="1"/>
+          </p:cNvSpPr>
+          <p:nvPr/>
+        </p:nvSpPr>
+        <p:spPr>
+          <a:xfrm xmlns:a="http://schemas.openxmlformats.org/drawingml/2006/main">
+            <a:off x="552450" y="4000500"/>
+            <a:ext cx="95250" cy="895350"/>
+          </a:xfrm>
+          <a:prstGeom xmlns:a="http://schemas.openxmlformats.org/drawingml/2006/main" prst="rect">
+            <a:avLst/>
+          </a:prstGeom>
+          <a:solidFill xmlns:a="http://schemas.openxmlformats.org/drawingml/2006/main">
+            <a:srgbClr val="3D8DFF"/>
+          </a:solidFill>
+          <a:ln xmlns:a="http://schemas.openxmlformats.org/drawingml/2006/main" w="0">
+            <a:solidFill>
+              <a:srgbClr val="3D8DFF"/>
+            </a:solidFill>
+            <a:prstDash val="solid"/>
+          </a:ln>
+        </p:spPr>
+      </p:sp>
+      <p:sp>
+        <p:nvSpPr>
+          <p:cNvPr id="17" name="">
+            <a:extLst xmlns:a="http://schemas.openxmlformats.org/drawingml/2006/main">
+              <a:ext uri="{FF2B5EF4-FFF2-40B4-BE49-F238E27FC236}">
+                <a16:creationId xmlns:a16="http://schemas.microsoft.com/office/drawing/2014/main" id="{DAB53991-F50C-4B95-9F23-DAE86BCEDF3B}"/>
+              </a:ext>
+            </a:extLst>
+          </p:cNvPr>
+          <p:cNvSpPr>
+            <a:spLocks xmlns:a="http://schemas.openxmlformats.org/drawingml/2006/main" noGrp="1"/>
+          </p:cNvSpPr>
+          <p:nvPr/>
+        </p:nvSpPr>
+        <p:spPr>
+          <a:xfrm xmlns:a="http://schemas.openxmlformats.org/drawingml/2006/main">
+            <a:off x="876300" y="3981450"/>
+            <a:ext cx="2095500" cy="285750"/>
+          </a:xfrm>
+          <a:prstGeom xmlns:a="http://schemas.openxmlformats.org/drawingml/2006/main" prst="rect">
+            <a:avLst/>
+          </a:prstGeom>
+          <a:noFill xmlns:a="http://schemas.openxmlformats.org/drawingml/2006/main"/>
+          <a:ln xmlns:a="http://schemas.openxmlformats.org/drawingml/2006/main" w="0">
+            <a:noFill/>
+            <a:prstDash val="solid"/>
+          </a:ln>
+        </p:spPr>
+        <p:txBody>
+          <a:bodyPr xmlns:a="http://schemas.openxmlformats.org/drawingml/2006/main" wrap="square" lIns="0" tIns="0" rIns="0" bIns="0" anchor="t">
+            <a:normAutofit fontScale="100000"/>
+          </a:bodyPr>
+          <a:lstStyle xmlns:a="http://schemas.openxmlformats.org/drawingml/2006/main"/>
+          <a:p xmlns:a="http://schemas.openxmlformats.org/drawingml/2006/main">
+            <a:pPr algn="l">
+              <a:buNone/>
+              <a:defRPr sz="1350" b="1">
+                <a:solidFill>
+                  <a:srgbClr val="3D8DFF"/>
+                </a:solidFill>
+                <a:latin typeface="Arial"/>
+                <a:ea typeface="Arial"/>
+                <a:cs typeface="Arial"/>
+              </a:defRPr>
+            </a:pPr>
+            <a:r>
+              <a:rPr sz="1350" b="1">
+                <a:solidFill>
+                  <a:srgbClr val="3D8DFF"/>
+                </a:solidFill>
+                <a:latin typeface="Arial"/>
+                <a:ea typeface="Arial"/>
+                <a:cs typeface="Arial"/>
+              </a:rPr>
+              <a:t>UNCERTAINTY</a:t>
+            </a:r>
+          </a:p>
+        </p:txBody>
+      </p:sp>
+      <p:sp>
+        <p:nvSpPr>
+          <p:cNvPr id="18" name="">
+            <a:extLst xmlns:a="http://schemas.openxmlformats.org/drawingml/2006/main">
+              <a:ext uri="{FF2B5EF4-FFF2-40B4-BE49-F238E27FC236}">
+                <a16:creationId xmlns:a16="http://schemas.microsoft.com/office/drawing/2014/main" id="{5DFACF3B-08BC-4148-A40A-2004DFB81D71}"/>
+              </a:ext>
+            </a:extLst>
+          </p:cNvPr>
+          <p:cNvSpPr>
+            <a:spLocks xmlns:a="http://schemas.openxmlformats.org/drawingml/2006/main" noGrp="1"/>
+          </p:cNvSpPr>
+          <p:nvPr/>
+        </p:nvSpPr>
+        <p:spPr>
+          <a:xfrm xmlns:a="http://schemas.openxmlformats.org/drawingml/2006/main">
+            <a:off x="3105150" y="3962400"/>
+            <a:ext cx="4762500" cy="419100"/>
+          </a:xfrm>
+          <a:prstGeom xmlns:a="http://schemas.openxmlformats.org/drawingml/2006/main" prst="rect">
+            <a:avLst/>
+          </a:prstGeom>
+          <a:noFill xmlns:a="http://schemas.openxmlformats.org/drawingml/2006/main"/>
+          <a:ln xmlns:a="http://schemas.openxmlformats.org/drawingml/2006/main" w="0">
+            <a:noFill/>
+            <a:prstDash val="solid"/>
+          </a:ln>
+        </p:spPr>
+        <p:txBody>
+          <a:bodyPr xmlns:a="http://schemas.openxmlformats.org/drawingml/2006/main" wrap="square" lIns="0" tIns="0" rIns="0" bIns="0" anchor="t">
+            <a:normAutofit fontScale="70513"/>
+          </a:bodyPr>
+          <a:lstStyle xmlns:a="http://schemas.openxmlformats.org/drawingml/2006/main"/>
+          <a:p xmlns:a="http://schemas.openxmlformats.org/drawingml/2006/main">
+            <a:pPr algn="l">
+              <a:buNone/>
+              <a:defRPr sz="1950" b="1">
+                <a:solidFill>
+                  <a:srgbClr val="273548"/>
+                </a:solidFill>
+                <a:latin typeface="Arial"/>
+                <a:ea typeface="Arial"/>
+                <a:cs typeface="Arial"/>
+              </a:defRPr>
+            </a:pPr>
+            <a:r>
+              <a:rPr sz="1950" b="1">
+                <a:solidFill>
+                  <a:srgbClr val="273548"/>
+                </a:solidFill>
+                <a:latin typeface="Arial"/>
+                <a:ea typeface="Arial"/>
+                <a:cs typeface="Arial"/>
+              </a:rPr>
+              <a:t>No regime-specific or interaction result survives the scan</a:t>
+            </a:r>
+          </a:p>
+        </p:txBody>
+      </p:sp>
+      <p:sp>
+        <p:nvSpPr>
+          <p:cNvPr id="19" name="">
+            <a:extLst xmlns:a="http://schemas.openxmlformats.org/drawingml/2006/main">
+              <a:ext uri="{FF2B5EF4-FFF2-40B4-BE49-F238E27FC236}">
+                <a16:creationId xmlns:a16="http://schemas.microsoft.com/office/drawing/2014/main" id="{C907D23B-44A2-43C4-9658-4C6E38430BF5}"/>
+              </a:ext>
+            </a:extLst>
+          </p:cNvPr>
+          <p:cNvSpPr>
+            <a:spLocks xmlns:a="http://schemas.openxmlformats.org/drawingml/2006/main" noGrp="1"/>
+          </p:cNvSpPr>
+          <p:nvPr/>
+        </p:nvSpPr>
+        <p:spPr>
+          <a:xfrm xmlns:a="http://schemas.openxmlformats.org/drawingml/2006/main">
+            <a:off x="8096250" y="3981450"/>
+            <a:ext cx="3333750" cy="704850"/>
+          </a:xfrm>
+          <a:prstGeom xmlns:a="http://schemas.openxmlformats.org/drawingml/2006/main" prst="rect">
+            <a:avLst/>
+          </a:prstGeom>
+          <a:noFill xmlns:a="http://schemas.openxmlformats.org/drawingml/2006/main"/>
+          <a:ln xmlns:a="http://schemas.openxmlformats.org/drawingml/2006/main" w="0">
+            <a:noFill/>
+            <a:prstDash val="solid"/>
+          </a:ln>
+        </p:spPr>
+        <p:txBody>
+          <a:bodyPr xmlns:a="http://schemas.openxmlformats.org/drawingml/2006/main" wrap="square" lIns="0" tIns="0" rIns="0" bIns="0" anchor="t">
+            <a:normAutofit fontScale="100000"/>
+          </a:bodyPr>
+          <a:lstStyle xmlns:a="http://schemas.openxmlformats.org/drawingml/2006/main"/>
+          <a:p xmlns:a="http://schemas.openxmlformats.org/drawingml/2006/main">
+            <a:pPr algn="l">
+              <a:buNone/>
+              <a:defRPr sz="1425" b="0">
+                <a:solidFill>
+                  <a:srgbClr val="667384"/>
+                </a:solidFill>
+                <a:latin typeface="Arial"/>
+                <a:ea typeface="Arial"/>
+                <a:cs typeface="Arial"/>
+              </a:defRPr>
+            </a:pPr>
+            <a:r>
+              <a:rPr sz="1425" b="0">
+                <a:solidFill>
+                  <a:srgbClr val="667384"/>
+                </a:solidFill>
+                <a:latin typeface="Arial"/>
+                <a:ea typeface="Arial"/>
+                <a:cs typeface="Arial"/>
+              </a:rPr>
+              <a:t>0/81 red; 0/81 green; 0/81 interactions</a:t>
+            </a:r>
+          </a:p>
+        </p:txBody>
+      </p:sp>
+      <p:sp>
+        <p:nvSpPr>
+          <p:cNvPr id="20" name="">
+            <a:extLst xmlns:a="http://schemas.openxmlformats.org/drawingml/2006/main">
+              <a:ext uri="{FF2B5EF4-FFF2-40B4-BE49-F238E27FC236}">
+                <a16:creationId xmlns:a16="http://schemas.microsoft.com/office/drawing/2014/main" id="{8042DFC4-7E22-47E6-8C53-1E63A8411C3A}"/>
+              </a:ext>
+            </a:extLst>
+          </p:cNvPr>
+          <p:cNvSpPr>
+            <a:spLocks xmlns:a="http://schemas.openxmlformats.org/drawingml/2006/main" noGrp="1"/>
+          </p:cNvSpPr>
+          <p:nvPr/>
+        </p:nvSpPr>
+        <p:spPr>
+          <a:xfrm xmlns:a="http://schemas.openxmlformats.org/drawingml/2006/main">
+            <a:off x="876300" y="4991100"/>
+            <a:ext cx="10553700" cy="9525"/>
+          </a:xfrm>
+          <a:prstGeom xmlns:a="http://schemas.openxmlformats.org/drawingml/2006/main" prst="rect">
+            <a:avLst/>
+          </a:prstGeom>
+          <a:solidFill xmlns:a="http://schemas.openxmlformats.org/drawingml/2006/main">
+            <a:srgbClr val="B8BCC4"/>
+          </a:solidFill>
+          <a:ln xmlns:a="http://schemas.openxmlformats.org/drawingml/2006/main" w="0">
+            <a:solidFill>
+              <a:srgbClr val="B8BCC4"/>
+            </a:solidFill>
+            <a:prstDash val="solid"/>
+          </a:ln>
+        </p:spPr>
+      </p:sp>
+      <p:sp>
+        <p:nvSpPr>
+          <p:cNvPr id="21" name="">
+            <a:extLst xmlns:a="http://schemas.openxmlformats.org/drawingml/2006/main">
+              <a:ext uri="{FF2B5EF4-FFF2-40B4-BE49-F238E27FC236}">
+                <a16:creationId xmlns:a16="http://schemas.microsoft.com/office/drawing/2014/main" id="{F4066D54-676B-4D0F-93B6-2152B57E41AF}"/>
+              </a:ext>
+            </a:extLst>
+          </p:cNvPr>
+          <p:cNvSpPr>
+            <a:spLocks xmlns:a="http://schemas.openxmlformats.org/drawingml/2006/main" noGrp="1"/>
+          </p:cNvSpPr>
+          <p:nvPr/>
+        </p:nvSpPr>
+        <p:spPr>
+          <a:xfrm xmlns:a="http://schemas.openxmlformats.org/drawingml/2006/main">
+            <a:off x="552450" y="5353050"/>
+            <a:ext cx="10877550" cy="781050"/>
+          </a:xfrm>
+          <a:prstGeom xmlns:a="http://schemas.openxmlformats.org/drawingml/2006/main" prst="rect">
+            <a:avLst/>
+          </a:prstGeom>
+          <a:solidFill xmlns:a="http://schemas.openxmlformats.org/drawingml/2006/main">
+            <a:srgbClr val="EAF5FB"/>
+          </a:solidFill>
+          <a:ln xmlns:a="http://schemas.openxmlformats.org/drawingml/2006/main" w="0">
+            <a:solidFill>
+              <a:srgbClr val="EAF5FB"/>
+            </a:solidFill>
+            <a:prstDash val="solid"/>
+          </a:ln>
+        </p:spPr>
+      </p:sp>
+      <p:sp>
+        <p:nvSpPr>
+          <p:cNvPr id="22" name="">
+            <a:extLst xmlns:a="http://schemas.openxmlformats.org/drawingml/2006/main">
+              <a:ext uri="{FF2B5EF4-FFF2-40B4-BE49-F238E27FC236}">
+                <a16:creationId xmlns:a16="http://schemas.microsoft.com/office/drawing/2014/main" id="{6E4C79AE-EB98-4B5B-B3D3-11ED0D4C729B}"/>
+              </a:ext>
+            </a:extLst>
+          </p:cNvPr>
+          <p:cNvSpPr>
+            <a:spLocks xmlns:a="http://schemas.openxmlformats.org/drawingml/2006/main" noGrp="1"/>
+          </p:cNvSpPr>
+          <p:nvPr/>
+        </p:nvSpPr>
+        <p:spPr>
+          <a:xfrm xmlns:a="http://schemas.openxmlformats.org/drawingml/2006/main">
+            <a:off x="781050" y="5524500"/>
+            <a:ext cx="2476500" cy="323850"/>
+          </a:xfrm>
+          <a:prstGeom xmlns:a="http://schemas.openxmlformats.org/drawingml/2006/main" prst="rect">
+            <a:avLst/>
+          </a:prstGeom>
+          <a:noFill xmlns:a="http://schemas.openxmlformats.org/drawingml/2006/main"/>
+          <a:ln xmlns:a="http://schemas.openxmlformats.org/drawingml/2006/main" w="0">
+            <a:noFill/>
+            <a:prstDash val="solid"/>
+          </a:ln>
+        </p:spPr>
+        <p:txBody>
+          <a:bodyPr xmlns:a="http://schemas.openxmlformats.org/drawingml/2006/main" wrap="square" lIns="0" tIns="0" rIns="0" bIns="0" anchor="t">
+            <a:normAutofit fontScale="100000"/>
+          </a:bodyPr>
+          <a:lstStyle xmlns:a="http://schemas.openxmlformats.org/drawingml/2006/main"/>
+          <a:p xmlns:a="http://schemas.openxmlformats.org/drawingml/2006/main">
+            <a:pPr algn="l">
+              <a:buNone/>
+              <a:defRPr sz="1725" b="1">
+                <a:solidFill>
+                  <a:srgbClr val="3D8DFF"/>
+                </a:solidFill>
+                <a:latin typeface="Arial"/>
+                <a:ea typeface="Arial"/>
+                <a:cs typeface="Arial"/>
+              </a:defRPr>
+            </a:pPr>
+            <a:r>
+              <a:rPr sz="1725" b="1">
+                <a:solidFill>
+                  <a:srgbClr val="3D8DFF"/>
+                </a:solidFill>
+                <a:latin typeface="Arial"/>
+                <a:ea typeface="Arial"/>
+                <a:cs typeface="Arial"/>
+              </a:rPr>
+              <a:t>Next narrow question</a:t>
+            </a:r>
+          </a:p>
+        </p:txBody>
+      </p:sp>
+      <p:sp>
+        <p:nvSpPr>
+          <p:cNvPr id="23" name="">
+            <a:extLst xmlns:a="http://schemas.openxmlformats.org/drawingml/2006/main">
+              <a:ext uri="{FF2B5EF4-FFF2-40B4-BE49-F238E27FC236}">
+                <a16:creationId xmlns:a16="http://schemas.microsoft.com/office/drawing/2014/main" id="{3320D60E-6067-4236-80ED-A898A863026E}"/>
+              </a:ext>
+            </a:extLst>
+          </p:cNvPr>
+          <p:cNvSpPr>
+            <a:spLocks xmlns:a="http://schemas.openxmlformats.org/drawingml/2006/main" noGrp="1"/>
+          </p:cNvSpPr>
+          <p:nvPr/>
+        </p:nvSpPr>
+        <p:spPr>
+          <a:xfrm xmlns:a="http://schemas.openxmlformats.org/drawingml/2006/main">
+            <a:off x="3333750" y="5486400"/>
+            <a:ext cx="7810500" cy="419100"/>
+          </a:xfrm>
+          <a:prstGeom xmlns:a="http://schemas.openxmlformats.org/drawingml/2006/main" prst="rect">
+            <a:avLst/>
+          </a:prstGeom>
+          <a:noFill xmlns:a="http://schemas.openxmlformats.org/drawingml/2006/main"/>
+          <a:ln xmlns:a="http://schemas.openxmlformats.org/drawingml/2006/main" w="0">
+            <a:noFill/>
+            <a:prstDash val="solid"/>
+          </a:ln>
+        </p:spPr>
+        <p:txBody>
+          <a:bodyPr xmlns:a="http://schemas.openxmlformats.org/drawingml/2006/main" wrap="square" lIns="0" tIns="0" rIns="0" bIns="0" anchor="t">
+            <a:normAutofit fontScale="76389"/>
+          </a:bodyPr>
+          <a:lstStyle xmlns:a="http://schemas.openxmlformats.org/drawingml/2006/main"/>
+          <a:p xmlns:a="http://schemas.openxmlformats.org/drawingml/2006/main">
+            <a:pPr algn="l">
+              <a:buNone/>
+              <a:defRPr sz="1800" b="1">
+                <a:solidFill>
+                  <a:srgbClr val="273548"/>
+                </a:solidFill>
+                <a:latin typeface="Arial"/>
+                <a:ea typeface="Arial"/>
+                <a:cs typeface="Arial"/>
+              </a:defRPr>
+            </a:pPr>
+            <a:r>
+              <a:rPr sz="1800" b="1">
+                <a:solidFill>
+                  <a:srgbClr val="273548"/>
+                </a:solidFill>
+                <a:latin typeface="Arial"/>
+                <a:ea typeface="Arial"/>
+                <a:cs typeface="Arial"/>
+              </a:rPr>
+              <a:t>Freeze 15-prior / 5-forward for separate replication—or first test a regime filter less entangled with prior return?</a:t>
+            </a:r>
+          </a:p>
+        </p:txBody>
+      </p:sp>
+    </p:spTree>
+    <p:extLst>
+      <p:ext uri="{BB962C8B-B14F-4D97-AF65-F5344CB8AC3E}">
+        <p14:creationId xmlns:p14="http://schemas.microsoft.com/office/powerpoint/2010/main" val="666536286"/>
       </p:ext>
     </p:extLst>
   </p:cSld>
@@ -12833,7 +18259,7 @@
           <p:nvPr/>
         </p:nvPicPr>
         <p:blipFill>
-          <a:blip xmlns:r="http://schemas.openxmlformats.org/officeDocument/2006/relationships" xmlns:a="http://schemas.openxmlformats.org/drawingml/2006/main" r:embed="Rb38af22748c441bb"/>
+          <a:blip xmlns:r="http://schemas.openxmlformats.org/officeDocument/2006/relationships" xmlns:a="http://schemas.openxmlformats.org/drawingml/2006/main" r:embed="R7edbd1339a784db8"/>
           <a:stretch xmlns:a="http://schemas.openxmlformats.org/drawingml/2006/main"/>
         </p:blipFill>
         <p:spPr>
@@ -13245,7 +18671,7 @@
           <p:nvPr/>
         </p:nvPicPr>
         <p:blipFill>
-          <a:blip xmlns:r="http://schemas.openxmlformats.org/officeDocument/2006/relationships" xmlns:a="http://schemas.openxmlformats.org/drawingml/2006/main" r:embed="R6a471f70a9ce4229"/>
+          <a:blip xmlns:r="http://schemas.openxmlformats.org/officeDocument/2006/relationships" xmlns:a="http://schemas.openxmlformats.org/drawingml/2006/main" r:embed="R05df032fe7e44623"/>
           <a:stretch xmlns:a="http://schemas.openxmlformats.org/drawingml/2006/main"/>
         </p:blipFill>
         <p:spPr>
@@ -14307,7 +19733,7 @@
           <p:nvPr/>
         </p:nvPicPr>
         <p:blipFill>
-          <a:blip xmlns:r="http://schemas.openxmlformats.org/officeDocument/2006/relationships" xmlns:a="http://schemas.openxmlformats.org/drawingml/2006/main" r:embed="R05c9e2a3324e4304"/>
+          <a:blip xmlns:r="http://schemas.openxmlformats.org/officeDocument/2006/relationships" xmlns:a="http://schemas.openxmlformats.org/drawingml/2006/main" r:embed="R68c31d3e6af841f8"/>
           <a:stretch xmlns:a="http://schemas.openxmlformats.org/drawingml/2006/main"/>
         </p:blipFill>
         <p:spPr>
@@ -15212,7 +20638,7 @@
           <p:nvPr/>
         </p:nvPicPr>
         <p:blipFill>
-          <a:blip xmlns:r="http://schemas.openxmlformats.org/officeDocument/2006/relationships" xmlns:a="http://schemas.openxmlformats.org/drawingml/2006/main" r:embed="R2abfe74f6ebe4fa7"/>
+          <a:blip xmlns:r="http://schemas.openxmlformats.org/officeDocument/2006/relationships" xmlns:a="http://schemas.openxmlformats.org/drawingml/2006/main" r:embed="R0c54da1429b249a0"/>
           <a:stretch xmlns:a="http://schemas.openxmlformats.org/drawingml/2006/main"/>
         </p:blipFill>
         <p:spPr>
@@ -16016,7 +21442,7 @@
           <p:nvPr/>
         </p:nvPicPr>
         <p:blipFill>
-          <a:blip xmlns:r="http://schemas.openxmlformats.org/officeDocument/2006/relationships" xmlns:a="http://schemas.openxmlformats.org/drawingml/2006/main" r:embed="Rb2ed608f2a6e42ec"/>
+          <a:blip xmlns:r="http://schemas.openxmlformats.org/officeDocument/2006/relationships" xmlns:a="http://schemas.openxmlformats.org/drawingml/2006/main" r:embed="R7b08d525103f4a86"/>
           <a:stretch xmlns:a="http://schemas.openxmlformats.org/drawingml/2006/main"/>
         </p:blipFill>
         <p:spPr>

--- a/operator_hypothesis_lab/presentations/tsla_descriptive_microscope_evidence.pptx
+++ b/operator_hypothesis_lab/presentations/tsla_descriptive_microscope_evidence.pptx
@@ -2,35 +2,42 @@
 <file path=ppt/presentation.xml><?xml version="1.0" encoding="utf-8"?>
 <p:presentation xmlns:p="http://schemas.openxmlformats.org/presentationml/2006/main">
   <p:sldMasterIdLst>
-    <p:sldMasterId xmlns:r="http://schemas.openxmlformats.org/officeDocument/2006/relationships" id="2147483648" r:id="R352f69c630134403"/>
+    <p:sldMasterId xmlns:r="http://schemas.openxmlformats.org/officeDocument/2006/relationships" id="2147483648" r:id="Reb843da5173647aa"/>
   </p:sldMasterIdLst>
   <p:notesMasterIdLst>
-    <p:notesMasterId xmlns:r="http://schemas.openxmlformats.org/officeDocument/2006/relationships" r:id="R57325cb173274937"/>
+    <p:notesMasterId xmlns:r="http://schemas.openxmlformats.org/officeDocument/2006/relationships" r:id="Rd8fc8777ce8b4b36"/>
   </p:notesMasterIdLst>
   <p:sldIdLst>
-    <p:sldId xmlns:r="http://schemas.openxmlformats.org/officeDocument/2006/relationships" id="256" r:id="R3d91745202c04d36"/>
-    <p:sldId xmlns:r="http://schemas.openxmlformats.org/officeDocument/2006/relationships" id="257" r:id="R514dca58b41045cf"/>
-    <p:sldId xmlns:r="http://schemas.openxmlformats.org/officeDocument/2006/relationships" id="258" r:id="R97f1c4a73a3042ac"/>
-    <p:sldId xmlns:r="http://schemas.openxmlformats.org/officeDocument/2006/relationships" id="259" r:id="Rcbf4957169114ad9"/>
-    <p:sldId xmlns:r="http://schemas.openxmlformats.org/officeDocument/2006/relationships" id="260" r:id="R35a7e896827c4d32"/>
-    <p:sldId xmlns:r="http://schemas.openxmlformats.org/officeDocument/2006/relationships" id="261" r:id="R824b191bcd244b13"/>
-    <p:sldId xmlns:r="http://schemas.openxmlformats.org/officeDocument/2006/relationships" id="262" r:id="R2f05df1e6a9844c3"/>
-    <p:sldId xmlns:r="http://schemas.openxmlformats.org/officeDocument/2006/relationships" id="263" r:id="Raadfaddc89c7459f"/>
-    <p:sldId xmlns:r="http://schemas.openxmlformats.org/officeDocument/2006/relationships" id="264" r:id="R48bc88342ff3452f"/>
-    <p:sldId xmlns:r="http://schemas.openxmlformats.org/officeDocument/2006/relationships" id="265" r:id="R0e7a6a6c64bc4516"/>
-    <p:sldId xmlns:r="http://schemas.openxmlformats.org/officeDocument/2006/relationships" id="266" r:id="R778ba8dbed4149d0"/>
-    <p:sldId xmlns:r="http://schemas.openxmlformats.org/officeDocument/2006/relationships" id="267" r:id="R473f21589cca4062"/>
-    <p:sldId xmlns:r="http://schemas.openxmlformats.org/officeDocument/2006/relationships" id="268" r:id="Re93a2de3d29d41d5"/>
-    <p:sldId xmlns:r="http://schemas.openxmlformats.org/officeDocument/2006/relationships" id="269" r:id="R288622e5c9bf4bbd"/>
-    <p:sldId xmlns:r="http://schemas.openxmlformats.org/officeDocument/2006/relationships" id="270" r:id="R127364fd51944af5"/>
-    <p:sldId xmlns:r="http://schemas.openxmlformats.org/officeDocument/2006/relationships" id="271" r:id="R5ad94936ace94198"/>
-    <p:sldId xmlns:r="http://schemas.openxmlformats.org/officeDocument/2006/relationships" id="272" r:id="Re08edc91a99d45ca"/>
-    <p:sldId xmlns:r="http://schemas.openxmlformats.org/officeDocument/2006/relationships" id="273" r:id="R79f679868c444863"/>
-    <p:sldId xmlns:r="http://schemas.openxmlformats.org/officeDocument/2006/relationships" id="274" r:id="R8869a3ca62f749c2"/>
-    <p:sldId xmlns:r="http://schemas.openxmlformats.org/officeDocument/2006/relationships" id="275" r:id="R8c67b4c6108e4ee3"/>
-    <p:sldId xmlns:r="http://schemas.openxmlformats.org/officeDocument/2006/relationships" id="276" r:id="Rf43d8d89c0b048ce"/>
-    <p:sldId xmlns:r="http://schemas.openxmlformats.org/officeDocument/2006/relationships" id="277" r:id="R01d4460775c14ea4"/>
-    <p:sldId xmlns:r="http://schemas.openxmlformats.org/officeDocument/2006/relationships" id="278" r:id="R3084b2f5cad34eaa"/>
+    <p:sldId xmlns:r="http://schemas.openxmlformats.org/officeDocument/2006/relationships" id="256" r:id="R63902cd3df904b09"/>
+    <p:sldId xmlns:r="http://schemas.openxmlformats.org/officeDocument/2006/relationships" id="257" r:id="Rc3b1b92a27454849"/>
+    <p:sldId xmlns:r="http://schemas.openxmlformats.org/officeDocument/2006/relationships" id="258" r:id="R8215d72e601042f7"/>
+    <p:sldId xmlns:r="http://schemas.openxmlformats.org/officeDocument/2006/relationships" id="259" r:id="R6c5a6d101c9a4f28"/>
+    <p:sldId xmlns:r="http://schemas.openxmlformats.org/officeDocument/2006/relationships" id="260" r:id="Rc362f307e3924d5a"/>
+    <p:sldId xmlns:r="http://schemas.openxmlformats.org/officeDocument/2006/relationships" id="261" r:id="R3c1e37d2ca2c4e82"/>
+    <p:sldId xmlns:r="http://schemas.openxmlformats.org/officeDocument/2006/relationships" id="262" r:id="R048a3f4a33b74b91"/>
+    <p:sldId xmlns:r="http://schemas.openxmlformats.org/officeDocument/2006/relationships" id="263" r:id="Red344faaa8ba49d8"/>
+    <p:sldId xmlns:r="http://schemas.openxmlformats.org/officeDocument/2006/relationships" id="264" r:id="Rd08eefb8905741af"/>
+    <p:sldId xmlns:r="http://schemas.openxmlformats.org/officeDocument/2006/relationships" id="265" r:id="R9f7dafc8f9bb431b"/>
+    <p:sldId xmlns:r="http://schemas.openxmlformats.org/officeDocument/2006/relationships" id="266" r:id="R81e4ce78c2b64caf"/>
+    <p:sldId xmlns:r="http://schemas.openxmlformats.org/officeDocument/2006/relationships" id="267" r:id="Ra53fe406658e42c5"/>
+    <p:sldId xmlns:r="http://schemas.openxmlformats.org/officeDocument/2006/relationships" id="268" r:id="Rbe0235201b9f43cc"/>
+    <p:sldId xmlns:r="http://schemas.openxmlformats.org/officeDocument/2006/relationships" id="269" r:id="R9d9fe8cecb614130"/>
+    <p:sldId xmlns:r="http://schemas.openxmlformats.org/officeDocument/2006/relationships" id="270" r:id="R3755445df2314ad5"/>
+    <p:sldId xmlns:r="http://schemas.openxmlformats.org/officeDocument/2006/relationships" id="271" r:id="R376f8aae59e14dfb"/>
+    <p:sldId xmlns:r="http://schemas.openxmlformats.org/officeDocument/2006/relationships" id="272" r:id="Rce11102322054118"/>
+    <p:sldId xmlns:r="http://schemas.openxmlformats.org/officeDocument/2006/relationships" id="273" r:id="Rdf0b1a57102c496e"/>
+    <p:sldId xmlns:r="http://schemas.openxmlformats.org/officeDocument/2006/relationships" id="274" r:id="R5c397b28c5254ce9"/>
+    <p:sldId xmlns:r="http://schemas.openxmlformats.org/officeDocument/2006/relationships" id="275" r:id="Rad7276fc2ba14134"/>
+    <p:sldId xmlns:r="http://schemas.openxmlformats.org/officeDocument/2006/relationships" id="276" r:id="R17512c94dd114f05"/>
+    <p:sldId xmlns:r="http://schemas.openxmlformats.org/officeDocument/2006/relationships" id="277" r:id="Ra712361768c247ac"/>
+    <p:sldId xmlns:r="http://schemas.openxmlformats.org/officeDocument/2006/relationships" id="278" r:id="Rf00890273f9342cd"/>
+    <p:sldId xmlns:r="http://schemas.openxmlformats.org/officeDocument/2006/relationships" id="279" r:id="R8bafadd3c9c14419"/>
+    <p:sldId xmlns:r="http://schemas.openxmlformats.org/officeDocument/2006/relationships" id="280" r:id="Rdffbb9be272f4b7c"/>
+    <p:sldId xmlns:r="http://schemas.openxmlformats.org/officeDocument/2006/relationships" id="281" r:id="Ra9cb828de4b643a3"/>
+    <p:sldId xmlns:r="http://schemas.openxmlformats.org/officeDocument/2006/relationships" id="282" r:id="Raacf707921284382"/>
+    <p:sldId xmlns:r="http://schemas.openxmlformats.org/officeDocument/2006/relationships" id="283" r:id="Recebf945e77f4c21"/>
+    <p:sldId xmlns:r="http://schemas.openxmlformats.org/officeDocument/2006/relationships" id="284" r:id="Rc08eb660b1b74482"/>
+    <p:sldId xmlns:r="http://schemas.openxmlformats.org/officeDocument/2006/relationships" id="285" r:id="Rf197cce8d6574203"/>
   </p:sldIdLst>
   <p:sldSz cx="12192000" cy="6858000"/>
   <p:notesSz cx="6858000" cy="9144000"/>
@@ -1999,6 +2006,606 @@
 </p:notes>
 </file>
 
+<file path=ppt/notesSlides/notesSlide24.xml><?xml version="1.0" encoding="utf-8"?>
+<p:notes xmlns:p="http://schemas.openxmlformats.org/presentationml/2006/main">
+  <p:cSld>
+    <p:spTree>
+      <p:nvGrpSpPr>
+        <p:cNvPr id="1" name=""/>
+        <p:cNvGrpSpPr/>
+        <p:nvPr/>
+      </p:nvGrpSpPr>
+      <p:grpSpPr>
+        <a:xfrm xmlns:a="http://schemas.openxmlformats.org/drawingml/2006/main"/>
+      </p:grpSpPr>
+      <p:sp>
+        <p:nvSpPr>
+          <p:cNvPr id="2" name="Slide Image Placeholder 1"/>
+          <p:cNvSpPr>
+            <a:spLocks xmlns:a="http://schemas.openxmlformats.org/drawingml/2006/main" noGrp="1"/>
+          </p:cNvSpPr>
+          <p:nvPr>
+            <p:ph type="sldImg" idx="0"/>
+          </p:nvPr>
+        </p:nvSpPr>
+        <p:spPr/>
+      </p:sp>
+      <p:sp>
+        <p:nvSpPr>
+          <p:cNvPr id="3" name="Notes Placeholder 2"/>
+          <p:cNvSpPr>
+            <a:spLocks xmlns:a="http://schemas.openxmlformats.org/drawingml/2006/main" noGrp="1"/>
+          </p:cNvSpPr>
+          <p:nvPr>
+            <p:ph type="body" idx="1"/>
+          </p:nvPr>
+        </p:nvSpPr>
+        <p:spPr/>
+        <p:txBody>
+          <a:bodyPr xmlns:a="http://schemas.openxmlformats.org/drawingml/2006/main"/>
+          <a:lstStyle xmlns:a="http://schemas.openxmlformats.org/drawingml/2006/main"/>
+          <a:p xmlns:a="http://schemas.openxmlformats.org/drawingml/2006/main">
+            <a:r>
+              <a:t>This section asks whether signed-return dependence changes with movement capacity, using the already accepted ATR-percent classifier rather than designing new bins from this result.</a:t>
+            </a:r>
+          </a:p>
+          <a:p xmlns:a="http://schemas.openxmlformats.org/drawingml/2006/main">
+            <a:r>
+              <a:t/>
+            </a:r>
+          </a:p>
+          <a:p xmlns:a="http://schemas.openxmlformats.org/drawingml/2006/main">
+            <a:r>
+              <a:t>[Sources]</a:t>
+            </a:r>
+          </a:p>
+          <a:p xmlns:a="http://schemas.openxmlformats.org/drawingml/2006/main">
+            <a:r>
+              <a:t>- operator_hypothesis_lab/docs/GEN5_HYP_REG_01_1_ATR_PERCENT_VOLATILITY_RESULTS.md</a:t>
+            </a:r>
+          </a:p>
+          <a:p xmlns:a="http://schemas.openxmlformats.org/drawingml/2006/main">
+            <a:r>
+              <a:t>- operator_hypothesis_lab/docs/TSLA_ATRP_CONDITIONED_RETURN_HORIZON_GRID_2018_2023.md</a:t>
+            </a:r>
+          </a:p>
+          <a:p xmlns:a="http://schemas.openxmlformats.org/drawingml/2006/main">
+            <a:r>
+              <a:t>[/Sources]</a:t>
+            </a:r>
+          </a:p>
+        </p:txBody>
+      </p:sp>
+      <p:sp>
+        <p:nvSpPr>
+          <p:cNvPr id="4" name="Slide Number Placeholder 3"/>
+          <p:cNvSpPr>
+            <a:spLocks xmlns:a="http://schemas.openxmlformats.org/drawingml/2006/main" noGrp="1"/>
+          </p:cNvSpPr>
+          <p:nvPr>
+            <p:ph type="sldNum" idx="5"/>
+          </p:nvPr>
+        </p:nvSpPr>
+        <p:spPr/>
+        <p:txBody>
+          <a:bodyPr xmlns:a="http://schemas.openxmlformats.org/drawingml/2006/main"/>
+          <a:lstStyle xmlns:a="http://schemas.openxmlformats.org/drawingml/2006/main"/>
+          <a:p xmlns:a="http://schemas.openxmlformats.org/drawingml/2006/main"/>
+        </p:txBody>
+      </p:sp>
+    </p:spTree>
+  </p:cSld>
+  <p:clrMapOvr>
+    <a:masterClrMapping xmlns:a="http://schemas.openxmlformats.org/drawingml/2006/main"/>
+  </p:clrMapOvr>
+</p:notes>
+</file>
+
+<file path=ppt/notesSlides/notesSlide25.xml><?xml version="1.0" encoding="utf-8"?>
+<p:notes xmlns:p="http://schemas.openxmlformats.org/presentationml/2006/main">
+  <p:cSld>
+    <p:spTree>
+      <p:nvGrpSpPr>
+        <p:cNvPr id="1" name=""/>
+        <p:cNvGrpSpPr/>
+        <p:nvPr/>
+      </p:nvGrpSpPr>
+      <p:grpSpPr>
+        <a:xfrm xmlns:a="http://schemas.openxmlformats.org/drawingml/2006/main"/>
+      </p:grpSpPr>
+      <p:sp>
+        <p:nvSpPr>
+          <p:cNvPr id="2" name="Slide Image Placeholder 1"/>
+          <p:cNvSpPr>
+            <a:spLocks xmlns:a="http://schemas.openxmlformats.org/drawingml/2006/main" noGrp="1"/>
+          </p:cNvSpPr>
+          <p:nvPr>
+            <p:ph type="sldImg" idx="0"/>
+          </p:nvPr>
+        </p:nvSpPr>
+        <p:spPr/>
+      </p:sp>
+      <p:sp>
+        <p:nvSpPr>
+          <p:cNvPr id="3" name="Notes Placeholder 2"/>
+          <p:cNvSpPr>
+            <a:spLocks xmlns:a="http://schemas.openxmlformats.org/drawingml/2006/main" noGrp="1"/>
+          </p:cNvSpPr>
+          <p:nvPr>
+            <p:ph type="body" idx="1"/>
+          </p:nvPr>
+        </p:nvSpPr>
+        <p:spPr/>
+        <p:txBody>
+          <a:bodyPr xmlns:a="http://schemas.openxmlformats.org/drawingml/2006/main"/>
+          <a:lstStyle xmlns:a="http://schemas.openxmlformats.org/drawingml/2006/main"/>
+          <a:p xmlns:a="http://schemas.openxmlformats.org/drawingml/2006/main">
+            <a:r>
+              <a:t>The state definition is reused exactly: Wilder ATR14 divided by close, current ATR-percent ranked against the prior 252 completed observations, and the accepted 30/40–60/70 hysteresis. State t is known before future returns begin.</a:t>
+            </a:r>
+          </a:p>
+          <a:p xmlns:a="http://schemas.openxmlformats.org/drawingml/2006/main">
+            <a:r>
+              <a:t/>
+            </a:r>
+          </a:p>
+          <a:p xmlns:a="http://schemas.openxmlformats.org/drawingml/2006/main">
+            <a:r>
+              <a:t>[Sources]</a:t>
+            </a:r>
+          </a:p>
+          <a:p xmlns:a="http://schemas.openxmlformats.org/drawingml/2006/main">
+            <a:r>
+              <a:t>- runs/research_workbench/operator_hypothesis_lab/tsla_atrp_conditioned_return_horizon_grid_20260825/run_spec.csv</a:t>
+            </a:r>
+          </a:p>
+          <a:p xmlns:a="http://schemas.openxmlformats.org/drawingml/2006/main">
+            <a:r>
+              <a:t>- runs/research_workbench/operator_hypothesis_lab/tsla_atrp_conditioned_return_horizon_grid_20260825/source_checks.csv</a:t>
+            </a:r>
+          </a:p>
+          <a:p xmlns:a="http://schemas.openxmlformats.org/drawingml/2006/main">
+            <a:r>
+              <a:t>- runs/research_workbench/operator_hypothesis_lab/hyp_reg_01_1_atr_percent_20260814/hyp_reg_01_1_daily_state_ledger.csv</a:t>
+            </a:r>
+          </a:p>
+          <a:p xmlns:a="http://schemas.openxmlformats.org/drawingml/2006/main">
+            <a:r>
+              <a:t>[/Sources]</a:t>
+            </a:r>
+          </a:p>
+        </p:txBody>
+      </p:sp>
+      <p:sp>
+        <p:nvSpPr>
+          <p:cNvPr id="4" name="Slide Number Placeholder 3"/>
+          <p:cNvSpPr>
+            <a:spLocks xmlns:a="http://schemas.openxmlformats.org/drawingml/2006/main" noGrp="1"/>
+          </p:cNvSpPr>
+          <p:nvPr>
+            <p:ph type="sldNum" idx="5"/>
+          </p:nvPr>
+        </p:nvSpPr>
+        <p:spPr/>
+        <p:txBody>
+          <a:bodyPr xmlns:a="http://schemas.openxmlformats.org/drawingml/2006/main"/>
+          <a:lstStyle xmlns:a="http://schemas.openxmlformats.org/drawingml/2006/main"/>
+          <a:p xmlns:a="http://schemas.openxmlformats.org/drawingml/2006/main"/>
+        </p:txBody>
+      </p:sp>
+    </p:spTree>
+  </p:cSld>
+  <p:clrMapOvr>
+    <a:masterClrMapping xmlns:a="http://schemas.openxmlformats.org/drawingml/2006/main"/>
+  </p:clrMapOvr>
+</p:notes>
+</file>
+
+<file path=ppt/notesSlides/notesSlide26.xml><?xml version="1.0" encoding="utf-8"?>
+<p:notes xmlns:p="http://schemas.openxmlformats.org/presentationml/2006/main">
+  <p:cSld>
+    <p:spTree>
+      <p:nvGrpSpPr>
+        <p:cNvPr id="1" name=""/>
+        <p:cNvGrpSpPr/>
+        <p:nvPr/>
+      </p:nvGrpSpPr>
+      <p:grpSpPr>
+        <a:xfrm xmlns:a="http://schemas.openxmlformats.org/drawingml/2006/main"/>
+      </p:grpSpPr>
+      <p:sp>
+        <p:nvSpPr>
+          <p:cNvPr id="2" name="Slide Image Placeholder 1"/>
+          <p:cNvSpPr>
+            <a:spLocks xmlns:a="http://schemas.openxmlformats.org/drawingml/2006/main" noGrp="1"/>
+          </p:cNvSpPr>
+          <p:nvPr>
+            <p:ph type="sldImg" idx="0"/>
+          </p:nvPr>
+        </p:nvSpPr>
+        <p:spPr/>
+      </p:sp>
+      <p:sp>
+        <p:nvSpPr>
+          <p:cNvPr id="3" name="Notes Placeholder 2"/>
+          <p:cNvSpPr>
+            <a:spLocks xmlns:a="http://schemas.openxmlformats.org/drawingml/2006/main" noGrp="1"/>
+          </p:cNvSpPr>
+          <p:nvPr>
+            <p:ph type="body" idx="1"/>
+          </p:nvPr>
+        </p:nvSpPr>
+        <p:spPr/>
+        <p:txBody>
+          <a:bodyPr xmlns:a="http://schemas.openxmlformats.org/drawingml/2006/main"/>
+          <a:lstStyle xmlns:a="http://schemas.openxmlformats.org/drawingml/2006/main"/>
+          <a:p xmlns:a="http://schemas.openxmlformats.org/drawingml/2006/main">
+            <a:r>
+              <a:t>LOW ATR-percent anchors produce positive point estimates throughout the grid, but the strongest cell's interval crosses zero and no LOW cell survives the within-state scan.</a:t>
+            </a:r>
+          </a:p>
+          <a:p xmlns:a="http://schemas.openxmlformats.org/drawingml/2006/main">
+            <a:r>
+              <a:t/>
+            </a:r>
+          </a:p>
+          <a:p xmlns:a="http://schemas.openxmlformats.org/drawingml/2006/main">
+            <a:r>
+              <a:t>[Sources]</a:t>
+            </a:r>
+          </a:p>
+          <a:p xmlns:a="http://schemas.openxmlformats.org/drawingml/2006/main">
+            <a:r>
+              <a:t>- runs/research_workbench/operator_hypothesis_lab/tsla_atrp_conditioned_return_horizon_grid_20260825/low_pearson_matrix.csv</a:t>
+            </a:r>
+          </a:p>
+          <a:p xmlns:a="http://schemas.openxmlformats.org/drawingml/2006/main">
+            <a:r>
+              <a:t>- runs/research_workbench/operator_hypothesis_lab/tsla_atrp_conditioned_return_horizon_grid_20260825/conditioned_horizon_grid_statistics.csv</a:t>
+            </a:r>
+          </a:p>
+          <a:p xmlns:a="http://schemas.openxmlformats.org/drawingml/2006/main">
+            <a:r>
+              <a:t>- runs/research_workbench/operator_hypothesis_lab/tsla_atrp_conditioned_return_horizon_grid_20260825/visuals/tsla_atrp_low_pearson_heatmap.png</a:t>
+            </a:r>
+          </a:p>
+          <a:p xmlns:a="http://schemas.openxmlformats.org/drawingml/2006/main">
+            <a:r>
+              <a:t>[/Sources]</a:t>
+            </a:r>
+          </a:p>
+        </p:txBody>
+      </p:sp>
+      <p:sp>
+        <p:nvSpPr>
+          <p:cNvPr id="4" name="Slide Number Placeholder 3"/>
+          <p:cNvSpPr>
+            <a:spLocks xmlns:a="http://schemas.openxmlformats.org/drawingml/2006/main" noGrp="1"/>
+          </p:cNvSpPr>
+          <p:nvPr>
+            <p:ph type="sldNum" idx="5"/>
+          </p:nvPr>
+        </p:nvSpPr>
+        <p:spPr/>
+        <p:txBody>
+          <a:bodyPr xmlns:a="http://schemas.openxmlformats.org/drawingml/2006/main"/>
+          <a:lstStyle xmlns:a="http://schemas.openxmlformats.org/drawingml/2006/main"/>
+          <a:p xmlns:a="http://schemas.openxmlformats.org/drawingml/2006/main"/>
+        </p:txBody>
+      </p:sp>
+    </p:spTree>
+  </p:cSld>
+  <p:clrMapOvr>
+    <a:masterClrMapping xmlns:a="http://schemas.openxmlformats.org/drawingml/2006/main"/>
+  </p:clrMapOvr>
+</p:notes>
+</file>
+
+<file path=ppt/notesSlides/notesSlide27.xml><?xml version="1.0" encoding="utf-8"?>
+<p:notes xmlns:p="http://schemas.openxmlformats.org/presentationml/2006/main">
+  <p:cSld>
+    <p:spTree>
+      <p:nvGrpSpPr>
+        <p:cNvPr id="1" name=""/>
+        <p:cNvGrpSpPr/>
+        <p:nvPr/>
+      </p:nvGrpSpPr>
+      <p:grpSpPr>
+        <a:xfrm xmlns:a="http://schemas.openxmlformats.org/drawingml/2006/main"/>
+      </p:grpSpPr>
+      <p:sp>
+        <p:nvSpPr>
+          <p:cNvPr id="2" name="Slide Image Placeholder 1"/>
+          <p:cNvSpPr>
+            <a:spLocks xmlns:a="http://schemas.openxmlformats.org/drawingml/2006/main" noGrp="1"/>
+          </p:cNvSpPr>
+          <p:nvPr>
+            <p:ph type="sldImg" idx="0"/>
+          </p:nvPr>
+        </p:nvSpPr>
+        <p:spPr/>
+      </p:sp>
+      <p:sp>
+        <p:nvSpPr>
+          <p:cNvPr id="3" name="Notes Placeholder 2"/>
+          <p:cNvSpPr>
+            <a:spLocks xmlns:a="http://schemas.openxmlformats.org/drawingml/2006/main" noGrp="1"/>
+          </p:cNvSpPr>
+          <p:nvPr>
+            <p:ph type="body" idx="1"/>
+          </p:nvPr>
+        </p:nvSpPr>
+        <p:spPr/>
+        <p:txBody>
+          <a:bodyPr xmlns:a="http://schemas.openxmlformats.org/drawingml/2006/main"/>
+          <a:lstStyle xmlns:a="http://schemas.openxmlformats.org/drawingml/2006/main"/>
+          <a:p xmlns:a="http://schemas.openxmlformats.org/drawingml/2006/main">
+            <a:r>
+              <a:t>MEDIUM ATR-percent anchors show the most statistically stable continuation pattern. Under the strict correction across all 486 tests, the 5/3, 10/2, and 10/3 cells remain.</a:t>
+            </a:r>
+          </a:p>
+          <a:p xmlns:a="http://schemas.openxmlformats.org/drawingml/2006/main">
+            <a:r>
+              <a:t/>
+            </a:r>
+          </a:p>
+          <a:p xmlns:a="http://schemas.openxmlformats.org/drawingml/2006/main">
+            <a:r>
+              <a:t>[Sources]</a:t>
+            </a:r>
+          </a:p>
+          <a:p xmlns:a="http://schemas.openxmlformats.org/drawingml/2006/main">
+            <a:r>
+              <a:t>- runs/research_workbench/operator_hypothesis_lab/tsla_atrp_conditioned_return_horizon_grid_20260825/medium_pearson_matrix.csv</a:t>
+            </a:r>
+          </a:p>
+          <a:p xmlns:a="http://schemas.openxmlformats.org/drawingml/2006/main">
+            <a:r>
+              <a:t>- runs/research_workbench/operator_hypothesis_lab/tsla_atrp_conditioned_return_horizon_grid_20260825/conditioned_horizon_grid_statistics.csv</a:t>
+            </a:r>
+          </a:p>
+          <a:p xmlns:a="http://schemas.openxmlformats.org/drawingml/2006/main">
+            <a:r>
+              <a:t>- runs/research_workbench/operator_hypothesis_lab/tsla_atrp_conditioned_return_horizon_grid_20260825/visuals/tsla_atrp_medium_pearson_heatmap.png</a:t>
+            </a:r>
+          </a:p>
+          <a:p xmlns:a="http://schemas.openxmlformats.org/drawingml/2006/main">
+            <a:r>
+              <a:t>[/Sources]</a:t>
+            </a:r>
+          </a:p>
+        </p:txBody>
+      </p:sp>
+      <p:sp>
+        <p:nvSpPr>
+          <p:cNvPr id="4" name="Slide Number Placeholder 3"/>
+          <p:cNvSpPr>
+            <a:spLocks xmlns:a="http://schemas.openxmlformats.org/drawingml/2006/main" noGrp="1"/>
+          </p:cNvSpPr>
+          <p:nvPr>
+            <p:ph type="sldNum" idx="5"/>
+          </p:nvPr>
+        </p:nvSpPr>
+        <p:spPr/>
+        <p:txBody>
+          <a:bodyPr xmlns:a="http://schemas.openxmlformats.org/drawingml/2006/main"/>
+          <a:lstStyle xmlns:a="http://schemas.openxmlformats.org/drawingml/2006/main"/>
+          <a:p xmlns:a="http://schemas.openxmlformats.org/drawingml/2006/main"/>
+        </p:txBody>
+      </p:sp>
+    </p:spTree>
+  </p:cSld>
+  <p:clrMapOvr>
+    <a:masterClrMapping xmlns:a="http://schemas.openxmlformats.org/drawingml/2006/main"/>
+  </p:clrMapOvr>
+</p:notes>
+</file>
+
+<file path=ppt/notesSlides/notesSlide28.xml><?xml version="1.0" encoding="utf-8"?>
+<p:notes xmlns:p="http://schemas.openxmlformats.org/presentationml/2006/main">
+  <p:cSld>
+    <p:spTree>
+      <p:nvGrpSpPr>
+        <p:cNvPr id="1" name=""/>
+        <p:cNvGrpSpPr/>
+        <p:nvPr/>
+      </p:nvGrpSpPr>
+      <p:grpSpPr>
+        <a:xfrm xmlns:a="http://schemas.openxmlformats.org/drawingml/2006/main"/>
+      </p:grpSpPr>
+      <p:sp>
+        <p:nvSpPr>
+          <p:cNvPr id="2" name="Slide Image Placeholder 1"/>
+          <p:cNvSpPr>
+            <a:spLocks xmlns:a="http://schemas.openxmlformats.org/drawingml/2006/main" noGrp="1"/>
+          </p:cNvSpPr>
+          <p:nvPr>
+            <p:ph type="sldImg" idx="0"/>
+          </p:nvPr>
+        </p:nvSpPr>
+        <p:spPr/>
+      </p:sp>
+      <p:sp>
+        <p:nvSpPr>
+          <p:cNvPr id="3" name="Notes Placeholder 2"/>
+          <p:cNvSpPr>
+            <a:spLocks xmlns:a="http://schemas.openxmlformats.org/drawingml/2006/main" noGrp="1"/>
+          </p:cNvSpPr>
+          <p:nvPr>
+            <p:ph type="body" idx="1"/>
+          </p:nvPr>
+        </p:nvSpPr>
+        <p:spPr/>
+        <p:txBody>
+          <a:bodyPr xmlns:a="http://schemas.openxmlformats.org/drawingml/2006/main"/>
+          <a:lstStyle xmlns:a="http://schemas.openxmlformats.org/drawingml/2006/main"/>
+          <a:p xmlns:a="http://schemas.openxmlformats.org/drawingml/2006/main">
+            <a:r>
+              <a:t>HIGH ATR-percent anchors reverse the sign of the broad surface, especially at longer horizons. The most extreme cell is visually strong but its dependence-robust interval still crosses zero.</a:t>
+            </a:r>
+          </a:p>
+          <a:p xmlns:a="http://schemas.openxmlformats.org/drawingml/2006/main">
+            <a:r>
+              <a:t/>
+            </a:r>
+          </a:p>
+          <a:p xmlns:a="http://schemas.openxmlformats.org/drawingml/2006/main">
+            <a:r>
+              <a:t>[Sources]</a:t>
+            </a:r>
+          </a:p>
+          <a:p xmlns:a="http://schemas.openxmlformats.org/drawingml/2006/main">
+            <a:r>
+              <a:t>- runs/research_workbench/operator_hypothesis_lab/tsla_atrp_conditioned_return_horizon_grid_20260825/high_pearson_matrix.csv</a:t>
+            </a:r>
+          </a:p>
+          <a:p xmlns:a="http://schemas.openxmlformats.org/drawingml/2006/main">
+            <a:r>
+              <a:t>- runs/research_workbench/operator_hypothesis_lab/tsla_atrp_conditioned_return_horizon_grid_20260825/conditioned_horizon_grid_statistics.csv</a:t>
+            </a:r>
+          </a:p>
+          <a:p xmlns:a="http://schemas.openxmlformats.org/drawingml/2006/main">
+            <a:r>
+              <a:t>- runs/research_workbench/operator_hypothesis_lab/tsla_atrp_conditioned_return_horizon_grid_20260825/visuals/tsla_atrp_high_pearson_heatmap.png</a:t>
+            </a:r>
+          </a:p>
+          <a:p xmlns:a="http://schemas.openxmlformats.org/drawingml/2006/main">
+            <a:r>
+              <a:t>[/Sources]</a:t>
+            </a:r>
+          </a:p>
+        </p:txBody>
+      </p:sp>
+      <p:sp>
+        <p:nvSpPr>
+          <p:cNvPr id="4" name="Slide Number Placeholder 3"/>
+          <p:cNvSpPr>
+            <a:spLocks xmlns:a="http://schemas.openxmlformats.org/drawingml/2006/main" noGrp="1"/>
+          </p:cNvSpPr>
+          <p:nvPr>
+            <p:ph type="sldNum" idx="5"/>
+          </p:nvPr>
+        </p:nvSpPr>
+        <p:spPr/>
+        <p:txBody>
+          <a:bodyPr xmlns:a="http://schemas.openxmlformats.org/drawingml/2006/main"/>
+          <a:lstStyle xmlns:a="http://schemas.openxmlformats.org/drawingml/2006/main"/>
+          <a:p xmlns:a="http://schemas.openxmlformats.org/drawingml/2006/main"/>
+        </p:txBody>
+      </p:sp>
+    </p:spTree>
+  </p:cSld>
+  <p:clrMapOvr>
+    <a:masterClrMapping xmlns:a="http://schemas.openxmlformats.org/drawingml/2006/main"/>
+  </p:clrMapOvr>
+</p:notes>
+</file>
+
+<file path=ppt/notesSlides/notesSlide29.xml><?xml version="1.0" encoding="utf-8"?>
+<p:notes xmlns:p="http://schemas.openxmlformats.org/presentationml/2006/main">
+  <p:cSld>
+    <p:spTree>
+      <p:nvGrpSpPr>
+        <p:cNvPr id="1" name=""/>
+        <p:cNvGrpSpPr/>
+        <p:nvPr/>
+      </p:nvGrpSpPr>
+      <p:grpSpPr>
+        <a:xfrm xmlns:a="http://schemas.openxmlformats.org/drawingml/2006/main"/>
+      </p:grpSpPr>
+      <p:sp>
+        <p:nvSpPr>
+          <p:cNvPr id="2" name="Slide Image Placeholder 1"/>
+          <p:cNvSpPr>
+            <a:spLocks xmlns:a="http://schemas.openxmlformats.org/drawingml/2006/main" noGrp="1"/>
+          </p:cNvSpPr>
+          <p:nvPr>
+            <p:ph type="sldImg" idx="0"/>
+          </p:nvPr>
+        </p:nvSpPr>
+        <p:spPr/>
+      </p:sp>
+      <p:sp>
+        <p:nvSpPr>
+          <p:cNvPr id="3" name="Notes Placeholder 2"/>
+          <p:cNvSpPr>
+            <a:spLocks xmlns:a="http://schemas.openxmlformats.org/drawingml/2006/main" noGrp="1"/>
+          </p:cNvSpPr>
+          <p:nvPr>
+            <p:ph type="body" idx="1"/>
+          </p:nvPr>
+        </p:nvSpPr>
+        <p:spPr/>
+        <p:txBody>
+          <a:bodyPr xmlns:a="http://schemas.openxmlformats.org/drawingml/2006/main"/>
+          <a:lstStyle xmlns:a="http://schemas.openxmlformats.org/drawingml/2006/main"/>
+          <a:p xmlns:a="http://schemas.openxmlformats.org/drawingml/2006/main">
+            <a:r>
+              <a:t>The largest correlation contrast is -0.548 at 25 prior and 15 forward; its within-family interaction q is 0.038 but strict omnibus q is 0.081. Three smaller HIGH-minus-MEDIUM interactions survive the omnibus correction.</a:t>
+            </a:r>
+          </a:p>
+          <a:p xmlns:a="http://schemas.openxmlformats.org/drawingml/2006/main">
+            <a:r>
+              <a:t/>
+            </a:r>
+          </a:p>
+          <a:p xmlns:a="http://schemas.openxmlformats.org/drawingml/2006/main">
+            <a:r>
+              <a:t>[Sources]</a:t>
+            </a:r>
+          </a:p>
+          <a:p xmlns:a="http://schemas.openxmlformats.org/drawingml/2006/main">
+            <a:r>
+              <a:t>- runs/research_workbench/operator_hypothesis_lab/tsla_atrp_conditioned_return_horizon_grid_20260825/high_minus_medium_pearson_difference_matrix.csv</a:t>
+            </a:r>
+          </a:p>
+          <a:p xmlns:a="http://schemas.openxmlformats.org/drawingml/2006/main">
+            <a:r>
+              <a:t>- runs/research_workbench/operator_hypothesis_lab/tsla_atrp_conditioned_return_horizon_grid_20260825/pairwise_state_comparison_statistics.csv</a:t>
+            </a:r>
+          </a:p>
+          <a:p xmlns:a="http://schemas.openxmlformats.org/drawingml/2006/main">
+            <a:r>
+              <a:t>- runs/research_workbench/operator_hypothesis_lab/tsla_atrp_conditioned_return_horizon_grid_20260825/high_minus_medium_interaction_bh_q_matrix.csv</a:t>
+            </a:r>
+          </a:p>
+          <a:p xmlns:a="http://schemas.openxmlformats.org/drawingml/2006/main">
+            <a:r>
+              <a:t>- runs/research_workbench/operator_hypothesis_lab/tsla_atrp_conditioned_return_horizon_grid_20260825/visuals/tsla_atrp_high_minus_medium_pearson_heatmap.png</a:t>
+            </a:r>
+          </a:p>
+          <a:p xmlns:a="http://schemas.openxmlformats.org/drawingml/2006/main">
+            <a:r>
+              <a:t>[/Sources]</a:t>
+            </a:r>
+          </a:p>
+        </p:txBody>
+      </p:sp>
+      <p:sp>
+        <p:nvSpPr>
+          <p:cNvPr id="4" name="Slide Number Placeholder 3"/>
+          <p:cNvSpPr>
+            <a:spLocks xmlns:a="http://schemas.openxmlformats.org/drawingml/2006/main" noGrp="1"/>
+          </p:cNvSpPr>
+          <p:nvPr>
+            <p:ph type="sldNum" idx="5"/>
+          </p:nvPr>
+        </p:nvSpPr>
+        <p:spPr/>
+        <p:txBody>
+          <a:bodyPr xmlns:a="http://schemas.openxmlformats.org/drawingml/2006/main"/>
+          <a:lstStyle xmlns:a="http://schemas.openxmlformats.org/drawingml/2006/main"/>
+          <a:p xmlns:a="http://schemas.openxmlformats.org/drawingml/2006/main"/>
+        </p:txBody>
+      </p:sp>
+    </p:spTree>
+  </p:cSld>
+  <p:clrMapOvr>
+    <a:masterClrMapping xmlns:a="http://schemas.openxmlformats.org/drawingml/2006/main"/>
+  </p:clrMapOvr>
+</p:notes>
+</file>
+
 <file path=ppt/notesSlides/notesSlide3.xml><?xml version="1.0" encoding="utf-8"?>
 <p:notes xmlns:p="http://schemas.openxmlformats.org/presentationml/2006/main">
   <p:cSld>
@@ -2060,6 +2667,106 @@
           <a:p xmlns:a="http://schemas.openxmlformats.org/drawingml/2006/main">
             <a:r>
               <a:t>- runs/research_workbench/operator_hypothesis_lab/tsla_lagged_return_dependence_statistics_20260825/pair_checks.csv</a:t>
+            </a:r>
+          </a:p>
+          <a:p xmlns:a="http://schemas.openxmlformats.org/drawingml/2006/main">
+            <a:r>
+              <a:t>[/Sources]</a:t>
+            </a:r>
+          </a:p>
+        </p:txBody>
+      </p:sp>
+      <p:sp>
+        <p:nvSpPr>
+          <p:cNvPr id="4" name="Slide Number Placeholder 3"/>
+          <p:cNvSpPr>
+            <a:spLocks xmlns:a="http://schemas.openxmlformats.org/drawingml/2006/main" noGrp="1"/>
+          </p:cNvSpPr>
+          <p:nvPr>
+            <p:ph type="sldNum" idx="5"/>
+          </p:nvPr>
+        </p:nvSpPr>
+        <p:spPr/>
+        <p:txBody>
+          <a:bodyPr xmlns:a="http://schemas.openxmlformats.org/drawingml/2006/main"/>
+          <a:lstStyle xmlns:a="http://schemas.openxmlformats.org/drawingml/2006/main"/>
+          <a:p xmlns:a="http://schemas.openxmlformats.org/drawingml/2006/main"/>
+        </p:txBody>
+      </p:sp>
+    </p:spTree>
+  </p:cSld>
+  <p:clrMapOvr>
+    <a:masterClrMapping xmlns:a="http://schemas.openxmlformats.org/drawingml/2006/main"/>
+  </p:clrMapOvr>
+</p:notes>
+</file>
+
+<file path=ppt/notesSlides/notesSlide30.xml><?xml version="1.0" encoding="utf-8"?>
+<p:notes xmlns:p="http://schemas.openxmlformats.org/presentationml/2006/main">
+  <p:cSld>
+    <p:spTree>
+      <p:nvGrpSpPr>
+        <p:cNvPr id="1" name=""/>
+        <p:cNvGrpSpPr/>
+        <p:nvPr/>
+      </p:nvGrpSpPr>
+      <p:grpSpPr>
+        <a:xfrm xmlns:a="http://schemas.openxmlformats.org/drawingml/2006/main"/>
+      </p:grpSpPr>
+      <p:sp>
+        <p:nvSpPr>
+          <p:cNvPr id="2" name="Slide Image Placeholder 1"/>
+          <p:cNvSpPr>
+            <a:spLocks xmlns:a="http://schemas.openxmlformats.org/drawingml/2006/main" noGrp="1"/>
+          </p:cNvSpPr>
+          <p:nvPr>
+            <p:ph type="sldImg" idx="0"/>
+          </p:nvPr>
+        </p:nvSpPr>
+        <p:spPr/>
+      </p:sp>
+      <p:sp>
+        <p:nvSpPr>
+          <p:cNvPr id="3" name="Notes Placeholder 2"/>
+          <p:cNvSpPr>
+            <a:spLocks xmlns:a="http://schemas.openxmlformats.org/drawingml/2006/main" noGrp="1"/>
+          </p:cNvSpPr>
+          <p:nvPr>
+            <p:ph type="body" idx="1"/>
+          </p:nvPr>
+        </p:nvSpPr>
+        <p:spPr/>
+        <p:txBody>
+          <a:bodyPr xmlns:a="http://schemas.openxmlformats.org/drawingml/2006/main"/>
+          <a:lstStyle xmlns:a="http://schemas.openxmlformats.org/drawingml/2006/main"/>
+          <a:p xmlns:a="http://schemas.openxmlformats.org/drawingml/2006/main">
+            <a:r>
+              <a:t>The ATR-percent split is the clearest conditional map in this descriptive lane and is partially multiplicity-robust, but it is still a same-sample replication candidate rather than a trading rule. The ER20 direction split and external-context filter are bookmarked, not opened here.</a:t>
+            </a:r>
+          </a:p>
+          <a:p xmlns:a="http://schemas.openxmlformats.org/drawingml/2006/main">
+            <a:r>
+              <a:t/>
+            </a:r>
+          </a:p>
+          <a:p xmlns:a="http://schemas.openxmlformats.org/drawingml/2006/main">
+            <a:r>
+              <a:t>[Sources]</a:t>
+            </a:r>
+          </a:p>
+          <a:p xmlns:a="http://schemas.openxmlformats.org/drawingml/2006/main">
+            <a:r>
+              <a:t>- runs/research_workbench/operator_hypothesis_lab/tsla_atrp_conditioned_return_horizon_grid_20260825/report.md</a:t>
+            </a:r>
+          </a:p>
+          <a:p xmlns:a="http://schemas.openxmlformats.org/drawingml/2006/main">
+            <a:r>
+              <a:t>- runs/research_workbench/operator_hypothesis_lab/tsla_atrp_conditioned_return_horizon_grid_20260825/conditioned_horizon_grid_statistics.csv</a:t>
+            </a:r>
+          </a:p>
+          <a:p xmlns:a="http://schemas.openxmlformats.org/drawingml/2006/main">
+            <a:r>
+              <a:t>- runs/research_workbench/operator_hypothesis_lab/tsla_atrp_conditioned_return_horizon_grid_20260825/pairwise_state_comparison_statistics.csv</a:t>
             </a:r>
           </a:p>
           <a:p xmlns:a="http://schemas.openxmlformats.org/drawingml/2006/main">
@@ -2717,7 +3424,7 @@
   </p:cSld>
   <p:clrMap bg1="lt1" tx1="dk1" bg2="lt2" tx2="dk2" accent1="accent1" accent2="accent2" accent3="accent3" accent4="accent4" accent5="accent5" accent6="accent6" hlink="hlink" folHlink="folHlink"/>
   <p:sldLayoutIdLst>
-    <p:sldLayoutId xmlns:r="http://schemas.openxmlformats.org/officeDocument/2006/relationships" id="2147483649" r:id="R5ff77f7aa68e41d8"/>
+    <p:sldLayoutId xmlns:r="http://schemas.openxmlformats.org/officeDocument/2006/relationships" id="2147483649" r:id="R292de2d17219467d"/>
   </p:sldLayoutIdLst>
   <p:txStyles>
     <p:titleStyle>
@@ -3896,7 +4603,7 @@
           <p:nvPr/>
         </p:nvPicPr>
         <p:blipFill>
-          <a:blip xmlns:r="http://schemas.openxmlformats.org/officeDocument/2006/relationships" xmlns:a="http://schemas.openxmlformats.org/drawingml/2006/main" r:embed="R7ae0722f17364403"/>
+          <a:blip xmlns:r="http://schemas.openxmlformats.org/officeDocument/2006/relationships" xmlns:a="http://schemas.openxmlformats.org/drawingml/2006/main" r:embed="R56bc2161bcbf44d9"/>
           <a:stretch xmlns:a="http://schemas.openxmlformats.org/drawingml/2006/main"/>
         </p:blipFill>
         <p:spPr>
@@ -7817,7 +8524,7 @@
           <p:nvPr/>
         </p:nvPicPr>
         <p:blipFill>
-          <a:blip xmlns:r="http://schemas.openxmlformats.org/officeDocument/2006/relationships" xmlns:a="http://schemas.openxmlformats.org/drawingml/2006/main" r:embed="R5c8de20f28b04419"/>
+          <a:blip xmlns:r="http://schemas.openxmlformats.org/officeDocument/2006/relationships" xmlns:a="http://schemas.openxmlformats.org/drawingml/2006/main" r:embed="R5ce294c17730419d"/>
           <a:stretch xmlns:a="http://schemas.openxmlformats.org/drawingml/2006/main"/>
         </p:blipFill>
         <p:spPr>
@@ -8722,7 +9429,7 @@
           <p:nvPr/>
         </p:nvPicPr>
         <p:blipFill>
-          <a:blip xmlns:r="http://schemas.openxmlformats.org/officeDocument/2006/relationships" xmlns:a="http://schemas.openxmlformats.org/drawingml/2006/main" r:embed="R37dd7decee8d40dc"/>
+          <a:blip xmlns:r="http://schemas.openxmlformats.org/officeDocument/2006/relationships" xmlns:a="http://schemas.openxmlformats.org/drawingml/2006/main" r:embed="R289a279bf7814f58"/>
           <a:stretch xmlns:a="http://schemas.openxmlformats.org/drawingml/2006/main"/>
         </p:blipFill>
         <p:spPr>
@@ -9526,7 +10233,7 @@
           <p:nvPr/>
         </p:nvPicPr>
         <p:blipFill>
-          <a:blip xmlns:r="http://schemas.openxmlformats.org/officeDocument/2006/relationships" xmlns:a="http://schemas.openxmlformats.org/drawingml/2006/main" r:embed="R895f943fe56c4a50"/>
+          <a:blip xmlns:r="http://schemas.openxmlformats.org/officeDocument/2006/relationships" xmlns:a="http://schemas.openxmlformats.org/drawingml/2006/main" r:embed="Rac4bc51d55e94bb3"/>
           <a:stretch xmlns:a="http://schemas.openxmlformats.org/drawingml/2006/main"/>
         </p:blipFill>
         <p:spPr>
@@ -13879,7 +14586,7 @@
           <p:nvPr/>
         </p:nvPicPr>
         <p:blipFill>
-          <a:blip xmlns:r="http://schemas.openxmlformats.org/officeDocument/2006/relationships" xmlns:a="http://schemas.openxmlformats.org/drawingml/2006/main" r:embed="Rc836beb74f174414"/>
+          <a:blip xmlns:r="http://schemas.openxmlformats.org/officeDocument/2006/relationships" xmlns:a="http://schemas.openxmlformats.org/drawingml/2006/main" r:embed="Rea91341bf18248b7"/>
           <a:stretch xmlns:a="http://schemas.openxmlformats.org/drawingml/2006/main"/>
         </p:blipFill>
         <p:spPr>
@@ -14291,7 +14998,7 @@
           <p:nvPr/>
         </p:nvPicPr>
         <p:blipFill>
-          <a:blip xmlns:r="http://schemas.openxmlformats.org/officeDocument/2006/relationships" xmlns:a="http://schemas.openxmlformats.org/drawingml/2006/main" r:embed="Red47e276ad054fc6"/>
+          <a:blip xmlns:r="http://schemas.openxmlformats.org/officeDocument/2006/relationships" xmlns:a="http://schemas.openxmlformats.org/drawingml/2006/main" r:embed="Rf1cee17a749742af"/>
           <a:stretch xmlns:a="http://schemas.openxmlformats.org/drawingml/2006/main"/>
         </p:blipFill>
         <p:spPr>
@@ -15196,7 +15903,7 @@
           <p:nvPr/>
         </p:nvPicPr>
         <p:blipFill>
-          <a:blip xmlns:r="http://schemas.openxmlformats.org/officeDocument/2006/relationships" xmlns:a="http://schemas.openxmlformats.org/drawingml/2006/main" r:embed="R234661b337a044a4"/>
+          <a:blip xmlns:r="http://schemas.openxmlformats.org/officeDocument/2006/relationships" xmlns:a="http://schemas.openxmlformats.org/drawingml/2006/main" r:embed="R1cdc019cc28c4648"/>
           <a:stretch xmlns:a="http://schemas.openxmlformats.org/drawingml/2006/main"/>
         </p:blipFill>
         <p:spPr>
@@ -16397,6 +17104,4060 @@
 </p:sld>
 </file>
 
+<file path=ppt/slides/slide24.xml><?xml version="1.0" encoding="utf-8"?>
+<p:sld xmlns:p="http://schemas.openxmlformats.org/presentationml/2006/main">
+  <p:cSld>
+    <p:bg>
+      <p:bgPr>
+        <a:solidFill xmlns:a="http://schemas.openxmlformats.org/drawingml/2006/main">
+          <a:srgbClr val="FFFFFF"/>
+        </a:solidFill>
+      </p:bgPr>
+    </p:bg>
+    <p:spTree>
+      <p:nvGrpSpPr>
+        <p:cNvPr id="1" name=""/>
+        <p:cNvGrpSpPr/>
+        <p:nvPr/>
+      </p:nvGrpSpPr>
+      <p:grpSpPr>
+        <a:xfrm xmlns:a="http://schemas.openxmlformats.org/drawingml/2006/main"/>
+      </p:grpSpPr>
+      <p:sp>
+        <p:nvSpPr>
+          <p:cNvPr id="7" name="">
+            <a:extLst xmlns:a="http://schemas.openxmlformats.org/drawingml/2006/main">
+              <a:ext uri="{FF2B5EF4-FFF2-40B4-BE49-F238E27FC236}">
+                <a16:creationId xmlns:a16="http://schemas.microsoft.com/office/drawing/2014/main" id="{52BC51E6-6E84-4C1E-8D3E-0D1B2ADE0DA7}"/>
+              </a:ext>
+            </a:extLst>
+          </p:cNvPr>
+          <p:cNvSpPr>
+            <a:spLocks xmlns:a="http://schemas.openxmlformats.org/drawingml/2006/main" noGrp="1"/>
+          </p:cNvSpPr>
+          <p:nvPr/>
+        </p:nvSpPr>
+        <p:spPr>
+          <a:xfrm xmlns:a="http://schemas.openxmlformats.org/drawingml/2006/main">
+            <a:off x="457200" y="400050"/>
+            <a:ext cx="4000500" cy="266700"/>
+          </a:xfrm>
+          <a:prstGeom xmlns:a="http://schemas.openxmlformats.org/drawingml/2006/main" prst="rect">
+            <a:avLst/>
+          </a:prstGeom>
+          <a:noFill xmlns:a="http://schemas.openxmlformats.org/drawingml/2006/main"/>
+          <a:ln xmlns:a="http://schemas.openxmlformats.org/drawingml/2006/main" w="0">
+            <a:noFill/>
+            <a:prstDash val="solid"/>
+          </a:ln>
+        </p:spPr>
+        <p:txBody>
+          <a:bodyPr xmlns:a="http://schemas.openxmlformats.org/drawingml/2006/main" wrap="square" lIns="0" tIns="0" rIns="0" bIns="0" anchor="t">
+            <a:normAutofit fontScale="100000"/>
+          </a:bodyPr>
+          <a:lstStyle xmlns:a="http://schemas.openxmlformats.org/drawingml/2006/main"/>
+          <a:p xmlns:a="http://schemas.openxmlformats.org/drawingml/2006/main">
+            <a:pPr algn="l">
+              <a:buNone/>
+              <a:defRPr sz="1350" b="1">
+                <a:solidFill>
+                  <a:srgbClr val="667384"/>
+                </a:solidFill>
+                <a:latin typeface="Arial"/>
+                <a:ea typeface="Arial"/>
+                <a:cs typeface="Arial"/>
+              </a:defRPr>
+            </a:pPr>
+            <a:r>
+              <a:rPr sz="1350" b="1">
+                <a:solidFill>
+                  <a:srgbClr val="667384"/>
+                </a:solidFill>
+                <a:latin typeface="Arial"/>
+                <a:ea typeface="Arial"/>
+                <a:cs typeface="Arial"/>
+              </a:rPr>
+              <a:t>VOLATILITY CONDITIONING</a:t>
+            </a:r>
+          </a:p>
+        </p:txBody>
+      </p:sp>
+      <p:sp>
+        <p:nvSpPr>
+          <p:cNvPr id="2" name="">
+            <a:extLst xmlns:a="http://schemas.openxmlformats.org/drawingml/2006/main">
+              <a:ext uri="{FF2B5EF4-FFF2-40B4-BE49-F238E27FC236}">
+                <a16:creationId xmlns:a16="http://schemas.microsoft.com/office/drawing/2014/main" id="{D5FBD659-315B-4902-8A62-88F3460EC6CC}"/>
+              </a:ext>
+            </a:extLst>
+          </p:cNvPr>
+          <p:cNvSpPr>
+            <a:spLocks xmlns:a="http://schemas.openxmlformats.org/drawingml/2006/main" noGrp="1"/>
+          </p:cNvSpPr>
+          <p:nvPr/>
+        </p:nvSpPr>
+        <p:spPr>
+          <a:xfrm xmlns:a="http://schemas.openxmlformats.org/drawingml/2006/main">
+            <a:off x="457200" y="1562100"/>
+            <a:ext cx="10763250" cy="1809750"/>
+          </a:xfrm>
+          <a:prstGeom xmlns:a="http://schemas.openxmlformats.org/drawingml/2006/main" prst="rect">
+            <a:avLst/>
+          </a:prstGeom>
+          <a:noFill xmlns:a="http://schemas.openxmlformats.org/drawingml/2006/main"/>
+          <a:ln xmlns:a="http://schemas.openxmlformats.org/drawingml/2006/main" w="0">
+            <a:noFill/>
+            <a:prstDash val="solid"/>
+          </a:ln>
+        </p:spPr>
+        <p:txBody>
+          <a:bodyPr xmlns:a="http://schemas.openxmlformats.org/drawingml/2006/main" wrap="square" lIns="0" tIns="0" rIns="0" bIns="0" anchor="t">
+            <a:noAutofit/>
+          </a:bodyPr>
+          <a:lstStyle xmlns:a="http://schemas.openxmlformats.org/drawingml/2006/main"/>
+          <a:p xmlns:a="http://schemas.openxmlformats.org/drawingml/2006/main">
+            <a:pPr algn="l">
+              <a:buNone/>
+              <a:defRPr sz="5100" b="1">
+                <a:solidFill>
+                  <a:srgbClr val="000000"/>
+                </a:solidFill>
+                <a:latin typeface="Arial"/>
+                <a:ea typeface="Arial"/>
+                <a:cs typeface="Arial"/>
+              </a:defRPr>
+            </a:pPr>
+            <a:r>
+              <a:rPr sz="5100" b="1">
+                <a:solidFill>
+                  <a:srgbClr val="000000"/>
+                </a:solidFill>
+                <a:latin typeface="Arial"/>
+                <a:ea typeface="Arial"/>
+                <a:cs typeface="Arial"/>
+              </a:rPr>
+              <a:t>Does movement capacity separate</a:t>
+            </a:r>
+          </a:p>
+          <a:p xmlns:a="http://schemas.openxmlformats.org/drawingml/2006/main">
+            <a:pPr algn="l">
+              <a:buNone/>
+              <a:defRPr sz="5100" b="1">
+                <a:solidFill>
+                  <a:srgbClr val="000000"/>
+                </a:solidFill>
+                <a:latin typeface="Arial"/>
+                <a:ea typeface="Arial"/>
+                <a:cs typeface="Arial"/>
+              </a:defRPr>
+            </a:pPr>
+            <a:r>
+              <a:rPr sz="5100" b="1">
+                <a:solidFill>
+                  <a:srgbClr val="000000"/>
+                </a:solidFill>
+                <a:latin typeface="Arial"/>
+                <a:ea typeface="Arial"/>
+                <a:cs typeface="Arial"/>
+              </a:rPr>
+              <a:t>continuation from reversal?</a:t>
+            </a:r>
+          </a:p>
+        </p:txBody>
+      </p:sp>
+      <p:sp>
+        <p:nvSpPr>
+          <p:cNvPr id="3" name="">
+            <a:extLst xmlns:a="http://schemas.openxmlformats.org/drawingml/2006/main">
+              <a:ext uri="{FF2B5EF4-FFF2-40B4-BE49-F238E27FC236}">
+                <a16:creationId xmlns:a16="http://schemas.microsoft.com/office/drawing/2014/main" id="{108F8D12-F796-4339-A513-DF003E6E5740}"/>
+              </a:ext>
+            </a:extLst>
+          </p:cNvPr>
+          <p:cNvSpPr>
+            <a:spLocks xmlns:a="http://schemas.openxmlformats.org/drawingml/2006/main" noGrp="1"/>
+          </p:cNvSpPr>
+          <p:nvPr/>
+        </p:nvSpPr>
+        <p:spPr>
+          <a:xfrm xmlns:a="http://schemas.openxmlformats.org/drawingml/2006/main">
+            <a:off x="457200" y="3714750"/>
+            <a:ext cx="1257300" cy="76200"/>
+          </a:xfrm>
+          <a:prstGeom xmlns:a="http://schemas.openxmlformats.org/drawingml/2006/main" prst="rect">
+            <a:avLst/>
+          </a:prstGeom>
+          <a:solidFill xmlns:a="http://schemas.openxmlformats.org/drawingml/2006/main">
+            <a:srgbClr val="3D8DFF"/>
+          </a:solidFill>
+          <a:ln xmlns:a="http://schemas.openxmlformats.org/drawingml/2006/main" w="0">
+            <a:solidFill>
+              <a:srgbClr val="3D8DFF"/>
+            </a:solidFill>
+            <a:prstDash val="solid"/>
+          </a:ln>
+        </p:spPr>
+      </p:sp>
+      <p:sp>
+        <p:nvSpPr>
+          <p:cNvPr id="4" name="">
+            <a:extLst xmlns:a="http://schemas.openxmlformats.org/drawingml/2006/main">
+              <a:ext uri="{FF2B5EF4-FFF2-40B4-BE49-F238E27FC236}">
+                <a16:creationId xmlns:a16="http://schemas.microsoft.com/office/drawing/2014/main" id="{8345830B-E6EE-4175-94D1-A484215C8069}"/>
+              </a:ext>
+            </a:extLst>
+          </p:cNvPr>
+          <p:cNvSpPr>
+            <a:spLocks xmlns:a="http://schemas.openxmlformats.org/drawingml/2006/main" noGrp="1"/>
+          </p:cNvSpPr>
+          <p:nvPr/>
+        </p:nvSpPr>
+        <p:spPr>
+          <a:xfrm xmlns:a="http://schemas.openxmlformats.org/drawingml/2006/main">
+            <a:off x="457200" y="4171950"/>
+            <a:ext cx="9239250" cy="685800"/>
+          </a:xfrm>
+          <a:prstGeom xmlns:a="http://schemas.openxmlformats.org/drawingml/2006/main" prst="rect">
+            <a:avLst/>
+          </a:prstGeom>
+          <a:noFill xmlns:a="http://schemas.openxmlformats.org/drawingml/2006/main"/>
+          <a:ln xmlns:a="http://schemas.openxmlformats.org/drawingml/2006/main" w="0">
+            <a:noFill/>
+            <a:prstDash val="solid"/>
+          </a:ln>
+        </p:spPr>
+        <p:txBody>
+          <a:bodyPr xmlns:a="http://schemas.openxmlformats.org/drawingml/2006/main" wrap="square" lIns="0" tIns="0" rIns="0" bIns="0" anchor="t">
+            <a:normAutofit fontScale="94643"/>
+          </a:bodyPr>
+          <a:lstStyle xmlns:a="http://schemas.openxmlformats.org/drawingml/2006/main"/>
+          <a:p xmlns:a="http://schemas.openxmlformats.org/drawingml/2006/main">
+            <a:pPr algn="l">
+              <a:buNone/>
+              <a:defRPr sz="2550" b="0">
+                <a:solidFill>
+                  <a:srgbClr val="273548"/>
+                </a:solidFill>
+                <a:latin typeface="Arial"/>
+                <a:ea typeface="Arial"/>
+                <a:cs typeface="Arial"/>
+              </a:defRPr>
+            </a:pPr>
+            <a:r>
+              <a:rPr sz="2550" b="0">
+                <a:solidFill>
+                  <a:srgbClr val="273548"/>
+                </a:solidFill>
+                <a:latin typeface="Arial"/>
+                <a:ea typeface="Arial"/>
+                <a:cs typeface="Arial"/>
+              </a:rPr>
+              <a:t>Reuse the accepted ATR% state already known at the anchor close.</a:t>
+            </a:r>
+          </a:p>
+        </p:txBody>
+      </p:sp>
+      <p:sp>
+        <p:nvSpPr>
+          <p:cNvPr id="5" name="">
+            <a:extLst xmlns:a="http://schemas.openxmlformats.org/drawingml/2006/main">
+              <a:ext uri="{FF2B5EF4-FFF2-40B4-BE49-F238E27FC236}">
+                <a16:creationId xmlns:a16="http://schemas.microsoft.com/office/drawing/2014/main" id="{93B3AAD9-855C-47E7-9BA0-F94B71F3F42B}"/>
+              </a:ext>
+            </a:extLst>
+          </p:cNvPr>
+          <p:cNvSpPr>
+            <a:spLocks xmlns:a="http://schemas.openxmlformats.org/drawingml/2006/main" noGrp="1"/>
+          </p:cNvSpPr>
+          <p:nvPr/>
+        </p:nvSpPr>
+        <p:spPr>
+          <a:xfrm xmlns:a="http://schemas.openxmlformats.org/drawingml/2006/main">
+            <a:off x="457200" y="5429250"/>
+            <a:ext cx="10191750" cy="609600"/>
+          </a:xfrm>
+          <a:prstGeom xmlns:a="http://schemas.openxmlformats.org/drawingml/2006/main" prst="rect">
+            <a:avLst/>
+          </a:prstGeom>
+          <a:noFill xmlns:a="http://schemas.openxmlformats.org/drawingml/2006/main"/>
+          <a:ln xmlns:a="http://schemas.openxmlformats.org/drawingml/2006/main" w="0">
+            <a:noFill/>
+            <a:prstDash val="solid"/>
+          </a:ln>
+        </p:spPr>
+        <p:txBody>
+          <a:bodyPr xmlns:a="http://schemas.openxmlformats.org/drawingml/2006/main" wrap="square" lIns="0" tIns="0" rIns="0" bIns="0" anchor="t">
+            <a:normAutofit fontScale="100000"/>
+          </a:bodyPr>
+          <a:lstStyle xmlns:a="http://schemas.openxmlformats.org/drawingml/2006/main"/>
+          <a:p xmlns:a="http://schemas.openxmlformats.org/drawingml/2006/main">
+            <a:pPr algn="l">
+              <a:buNone/>
+              <a:defRPr sz="1650" b="0">
+                <a:solidFill>
+                  <a:srgbClr val="667384"/>
+                </a:solidFill>
+                <a:latin typeface="Arial"/>
+                <a:ea typeface="Arial"/>
+                <a:cs typeface="Arial"/>
+              </a:defRPr>
+            </a:pPr>
+            <a:r>
+              <a:rPr sz="1650" b="0">
+                <a:solidFill>
+                  <a:srgbClr val="667384"/>
+                </a:solidFill>
+                <a:latin typeface="Arial"/>
+                <a:ea typeface="Arial"/>
+                <a:cs typeface="Arial"/>
+              </a:rPr>
+              <a:t>LOW, MEDIUM, and HIGH inherit HYP-REG-01.1's fixed causal classifier. No threshold search.</a:t>
+            </a:r>
+          </a:p>
+        </p:txBody>
+      </p:sp>
+      <p:sp>
+        <p:nvSpPr>
+          <p:cNvPr id="6" name="">
+            <a:extLst xmlns:a="http://schemas.openxmlformats.org/drawingml/2006/main">
+              <a:ext uri="{FF2B5EF4-FFF2-40B4-BE49-F238E27FC236}">
+                <a16:creationId xmlns:a16="http://schemas.microsoft.com/office/drawing/2014/main" id="{C26E2559-6393-4E7F-A448-E0578397EEA2}"/>
+              </a:ext>
+            </a:extLst>
+          </p:cNvPr>
+          <p:cNvSpPr>
+            <a:spLocks xmlns:a="http://schemas.openxmlformats.org/drawingml/2006/main" noGrp="1"/>
+          </p:cNvSpPr>
+          <p:nvPr/>
+        </p:nvSpPr>
+        <p:spPr>
+          <a:xfrm xmlns:a="http://schemas.openxmlformats.org/drawingml/2006/main">
+            <a:off x="11239500" y="6496050"/>
+            <a:ext cx="495300" cy="190500"/>
+          </a:xfrm>
+          <a:prstGeom xmlns:a="http://schemas.openxmlformats.org/drawingml/2006/main" prst="rect">
+            <a:avLst/>
+          </a:prstGeom>
+          <a:noFill xmlns:a="http://schemas.openxmlformats.org/drawingml/2006/main"/>
+          <a:ln xmlns:a="http://schemas.openxmlformats.org/drawingml/2006/main" w="0">
+            <a:noFill/>
+            <a:prstDash val="solid"/>
+          </a:ln>
+        </p:spPr>
+        <p:txBody>
+          <a:bodyPr xmlns:a="http://schemas.openxmlformats.org/drawingml/2006/main" wrap="square" lIns="0" tIns="0" rIns="0" bIns="0" anchor="t">
+            <a:normAutofit fontScale="100000"/>
+          </a:bodyPr>
+          <a:lstStyle xmlns:a="http://schemas.openxmlformats.org/drawingml/2006/main"/>
+          <a:p xmlns:a="http://schemas.openxmlformats.org/drawingml/2006/main">
+            <a:pPr algn="r">
+              <a:buNone/>
+              <a:defRPr sz="1050" b="0">
+                <a:solidFill>
+                  <a:srgbClr val="667384"/>
+                </a:solidFill>
+                <a:latin typeface="Arial"/>
+                <a:ea typeface="Arial"/>
+                <a:cs typeface="Arial"/>
+              </a:defRPr>
+            </a:pPr>
+            <a:r>
+              <a:rPr sz="1050" b="0">
+                <a:solidFill>
+                  <a:srgbClr val="667384"/>
+                </a:solidFill>
+                <a:latin typeface="Arial"/>
+                <a:ea typeface="Arial"/>
+                <a:cs typeface="Arial"/>
+              </a:rPr>
+              <a:t>24</a:t>
+            </a:r>
+          </a:p>
+        </p:txBody>
+      </p:sp>
+    </p:spTree>
+    <p:extLst>
+      <p:ext uri="{BB962C8B-B14F-4D97-AF65-F5344CB8AC3E}">
+        <p14:creationId xmlns:p14="http://schemas.microsoft.com/office/powerpoint/2010/main" val="80248067"/>
+      </p:ext>
+    </p:extLst>
+  </p:cSld>
+</p:sld>
+</file>
+
+<file path=ppt/slides/slide25.xml><?xml version="1.0" encoding="utf-8"?>
+<p:sld xmlns:p="http://schemas.openxmlformats.org/presentationml/2006/main">
+  <p:cSld>
+    <p:bg>
+      <p:bgPr>
+        <a:solidFill xmlns:a="http://schemas.openxmlformats.org/drawingml/2006/main">
+          <a:srgbClr val="FFFFFF"/>
+        </a:solidFill>
+      </p:bgPr>
+    </p:bg>
+    <p:spTree>
+      <p:nvGrpSpPr>
+        <p:cNvPr id="1" name=""/>
+        <p:cNvGrpSpPr/>
+        <p:nvPr/>
+      </p:nvGrpSpPr>
+      <p:grpSpPr>
+        <a:xfrm xmlns:a="http://schemas.openxmlformats.org/drawingml/2006/main"/>
+      </p:grpSpPr>
+      <p:sp>
+        <p:nvSpPr>
+          <p:cNvPr id="30" name="section-3">
+            <a:extLst xmlns:a="http://schemas.openxmlformats.org/drawingml/2006/main">
+              <a:ext uri="{FF2B5EF4-FFF2-40B4-BE49-F238E27FC236}">
+                <a16:creationId xmlns:a16="http://schemas.microsoft.com/office/drawing/2014/main" id="{D21E8F50-BA1C-4536-B715-AAD5A74ED82B}"/>
+              </a:ext>
+            </a:extLst>
+          </p:cNvPr>
+          <p:cNvSpPr>
+            <a:spLocks xmlns:a="http://schemas.openxmlformats.org/drawingml/2006/main" noGrp="1"/>
+          </p:cNvSpPr>
+          <p:nvPr/>
+        </p:nvSpPr>
+        <p:spPr>
+          <a:xfrm xmlns:a="http://schemas.openxmlformats.org/drawingml/2006/main">
+            <a:off x="457200" y="228600"/>
+            <a:ext cx="4191000" cy="228600"/>
+          </a:xfrm>
+          <a:prstGeom xmlns:a="http://schemas.openxmlformats.org/drawingml/2006/main" prst="rect">
+            <a:avLst/>
+          </a:prstGeom>
+          <a:noFill xmlns:a="http://schemas.openxmlformats.org/drawingml/2006/main"/>
+          <a:ln xmlns:a="http://schemas.openxmlformats.org/drawingml/2006/main" w="0">
+            <a:noFill/>
+            <a:prstDash val="solid"/>
+          </a:ln>
+        </p:spPr>
+        <p:txBody>
+          <a:bodyPr xmlns:a="http://schemas.openxmlformats.org/drawingml/2006/main" wrap="square" lIns="0" tIns="0" rIns="0" bIns="0" anchor="t">
+            <a:normAutofit fontScale="100000"/>
+          </a:bodyPr>
+          <a:lstStyle xmlns:a="http://schemas.openxmlformats.org/drawingml/2006/main"/>
+          <a:p xmlns:a="http://schemas.openxmlformats.org/drawingml/2006/main">
+            <a:pPr algn="l">
+              <a:buNone/>
+              <a:defRPr sz="1200" b="1">
+                <a:solidFill>
+                  <a:srgbClr val="667384"/>
+                </a:solidFill>
+                <a:latin typeface="Arial"/>
+                <a:ea typeface="Arial"/>
+                <a:cs typeface="Arial"/>
+              </a:defRPr>
+            </a:pPr>
+            <a:r>
+              <a:rPr sz="1200" b="1">
+                <a:solidFill>
+                  <a:srgbClr val="667384"/>
+                </a:solidFill>
+                <a:latin typeface="Arial"/>
+                <a:ea typeface="Arial"/>
+                <a:cs typeface="Arial"/>
+              </a:rPr>
+              <a:t>TSLA DESCRIPTIVE MICROSCOPE</a:t>
+            </a:r>
+          </a:p>
+        </p:txBody>
+      </p:sp>
+      <p:sp>
+        <p:nvSpPr>
+          <p:cNvPr id="2" name="title-3">
+            <a:extLst xmlns:a="http://schemas.openxmlformats.org/drawingml/2006/main">
+              <a:ext uri="{FF2B5EF4-FFF2-40B4-BE49-F238E27FC236}">
+                <a16:creationId xmlns:a16="http://schemas.microsoft.com/office/drawing/2014/main" id="{622D00AB-54E7-40F8-BC73-9A3D2344F481}"/>
+              </a:ext>
+            </a:extLst>
+          </p:cNvPr>
+          <p:cNvSpPr>
+            <a:spLocks xmlns:a="http://schemas.openxmlformats.org/drawingml/2006/main" noGrp="1"/>
+          </p:cNvSpPr>
+          <p:nvPr/>
+        </p:nvSpPr>
+        <p:spPr>
+          <a:xfrm xmlns:a="http://schemas.openxmlformats.org/drawingml/2006/main">
+            <a:off x="457200" y="533400"/>
+            <a:ext cx="11277600" cy="628650"/>
+          </a:xfrm>
+          <a:prstGeom xmlns:a="http://schemas.openxmlformats.org/drawingml/2006/main" prst="rect">
+            <a:avLst/>
+          </a:prstGeom>
+          <a:noFill xmlns:a="http://schemas.openxmlformats.org/drawingml/2006/main"/>
+          <a:ln xmlns:a="http://schemas.openxmlformats.org/drawingml/2006/main" w="0">
+            <a:noFill/>
+            <a:prstDash val="solid"/>
+          </a:ln>
+        </p:spPr>
+        <p:txBody>
+          <a:bodyPr xmlns:a="http://schemas.openxmlformats.org/drawingml/2006/main" wrap="square" lIns="0" tIns="0" rIns="0" bIns="0" anchor="t">
+            <a:normAutofit fontScale="96639"/>
+          </a:bodyPr>
+          <a:lstStyle xmlns:a="http://schemas.openxmlformats.org/drawingml/2006/main"/>
+          <a:p xmlns:a="http://schemas.openxmlformats.org/drawingml/2006/main">
+            <a:pPr algn="l">
+              <a:buNone/>
+              <a:defRPr sz="3525" b="1">
+                <a:solidFill>
+                  <a:srgbClr val="000000"/>
+                </a:solidFill>
+                <a:latin typeface="Arial"/>
+                <a:ea typeface="Arial"/>
+                <a:cs typeface="Arial"/>
+              </a:defRPr>
+            </a:pPr>
+            <a:r>
+              <a:rPr sz="3525" b="1">
+                <a:solidFill>
+                  <a:srgbClr val="000000"/>
+                </a:solidFill>
+                <a:latin typeface="Arial"/>
+                <a:ea typeface="Arial"/>
+                <a:cs typeface="Arial"/>
+              </a:rPr>
+              <a:t>Condition on accepted ATR% before reading the future</a:t>
+            </a:r>
+          </a:p>
+        </p:txBody>
+      </p:sp>
+      <p:sp>
+        <p:nvSpPr>
+          <p:cNvPr id="3" name="">
+            <a:extLst xmlns:a="http://schemas.openxmlformats.org/drawingml/2006/main">
+              <a:ext uri="{FF2B5EF4-FFF2-40B4-BE49-F238E27FC236}">
+                <a16:creationId xmlns:a16="http://schemas.microsoft.com/office/drawing/2014/main" id="{C3977435-894D-461F-A4F7-CD91DF8A8A55}"/>
+              </a:ext>
+            </a:extLst>
+          </p:cNvPr>
+          <p:cNvSpPr>
+            <a:spLocks xmlns:a="http://schemas.openxmlformats.org/drawingml/2006/main" noGrp="1"/>
+          </p:cNvSpPr>
+          <p:nvPr/>
+        </p:nvSpPr>
+        <p:spPr>
+          <a:xfrm xmlns:a="http://schemas.openxmlformats.org/drawingml/2006/main">
+            <a:off x="457200" y="1200150"/>
+            <a:ext cx="11277600" cy="19050"/>
+          </a:xfrm>
+          <a:prstGeom xmlns:a="http://schemas.openxmlformats.org/drawingml/2006/main" prst="rect">
+            <a:avLst/>
+          </a:prstGeom>
+          <a:solidFill xmlns:a="http://schemas.openxmlformats.org/drawingml/2006/main">
+            <a:srgbClr val="B8BCC4"/>
+          </a:solidFill>
+          <a:ln xmlns:a="http://schemas.openxmlformats.org/drawingml/2006/main" w="0">
+            <a:solidFill>
+              <a:srgbClr val="B8BCC4"/>
+            </a:solidFill>
+            <a:prstDash val="solid"/>
+          </a:ln>
+        </p:spPr>
+      </p:sp>
+      <p:sp>
+        <p:nvSpPr>
+          <p:cNvPr id="4" name="footer-left-3">
+            <a:extLst xmlns:a="http://schemas.openxmlformats.org/drawingml/2006/main">
+              <a:ext uri="{FF2B5EF4-FFF2-40B4-BE49-F238E27FC236}">
+                <a16:creationId xmlns:a16="http://schemas.microsoft.com/office/drawing/2014/main" id="{FC53CCFE-82C8-49A0-BC48-206B3BC8CC1B}"/>
+              </a:ext>
+            </a:extLst>
+          </p:cNvPr>
+          <p:cNvSpPr>
+            <a:spLocks xmlns:a="http://schemas.openxmlformats.org/drawingml/2006/main" noGrp="1"/>
+          </p:cNvSpPr>
+          <p:nvPr/>
+        </p:nvSpPr>
+        <p:spPr>
+          <a:xfrm xmlns:a="http://schemas.openxmlformats.org/drawingml/2006/main">
+            <a:off x="457200" y="6515100"/>
+            <a:ext cx="3429000" cy="171450"/>
+          </a:xfrm>
+          <a:prstGeom xmlns:a="http://schemas.openxmlformats.org/drawingml/2006/main" prst="rect">
+            <a:avLst/>
+          </a:prstGeom>
+          <a:noFill xmlns:a="http://schemas.openxmlformats.org/drawingml/2006/main"/>
+          <a:ln xmlns:a="http://schemas.openxmlformats.org/drawingml/2006/main" w="0">
+            <a:noFill/>
+            <a:prstDash val="solid"/>
+          </a:ln>
+        </p:spPr>
+        <p:txBody>
+          <a:bodyPr xmlns:a="http://schemas.openxmlformats.org/drawingml/2006/main" wrap="square" lIns="0" tIns="0" rIns="0" bIns="0" anchor="t">
+            <a:normAutofit fontScale="100000"/>
+          </a:bodyPr>
+          <a:lstStyle xmlns:a="http://schemas.openxmlformats.org/drawingml/2006/main"/>
+          <a:p xmlns:a="http://schemas.openxmlformats.org/drawingml/2006/main">
+            <a:pPr algn="l">
+              <a:buNone/>
+              <a:defRPr sz="1050" b="0">
+                <a:solidFill>
+                  <a:srgbClr val="667384"/>
+                </a:solidFill>
+                <a:latin typeface="Arial"/>
+                <a:ea typeface="Arial"/>
+                <a:cs typeface="Arial"/>
+              </a:defRPr>
+            </a:pPr>
+            <a:r>
+              <a:rPr sz="1050" b="0">
+                <a:solidFill>
+                  <a:srgbClr val="667384"/>
+                </a:solidFill>
+                <a:latin typeface="Arial"/>
+                <a:ea typeface="Arial"/>
+                <a:cs typeface="Arial"/>
+              </a:rPr>
+              <a:t>Adjusted daily TSLA | 2018-2023</a:t>
+            </a:r>
+          </a:p>
+        </p:txBody>
+      </p:sp>
+      <p:sp>
+        <p:nvSpPr>
+          <p:cNvPr id="5" name="footer-number-3">
+            <a:extLst xmlns:a="http://schemas.openxmlformats.org/drawingml/2006/main">
+              <a:ext uri="{FF2B5EF4-FFF2-40B4-BE49-F238E27FC236}">
+                <a16:creationId xmlns:a16="http://schemas.microsoft.com/office/drawing/2014/main" id="{B9F045FD-2505-4635-89F0-EDCD31EF4080}"/>
+              </a:ext>
+            </a:extLst>
+          </p:cNvPr>
+          <p:cNvSpPr>
+            <a:spLocks xmlns:a="http://schemas.openxmlformats.org/drawingml/2006/main" noGrp="1"/>
+          </p:cNvSpPr>
+          <p:nvPr/>
+        </p:nvSpPr>
+        <p:spPr>
+          <a:xfrm xmlns:a="http://schemas.openxmlformats.org/drawingml/2006/main">
+            <a:off x="11239500" y="6496050"/>
+            <a:ext cx="495300" cy="190500"/>
+          </a:xfrm>
+          <a:prstGeom xmlns:a="http://schemas.openxmlformats.org/drawingml/2006/main" prst="rect">
+            <a:avLst/>
+          </a:prstGeom>
+          <a:noFill xmlns:a="http://schemas.openxmlformats.org/drawingml/2006/main"/>
+          <a:ln xmlns:a="http://schemas.openxmlformats.org/drawingml/2006/main" w="0">
+            <a:noFill/>
+            <a:prstDash val="solid"/>
+          </a:ln>
+        </p:spPr>
+        <p:txBody>
+          <a:bodyPr xmlns:a="http://schemas.openxmlformats.org/drawingml/2006/main" wrap="square" lIns="0" tIns="0" rIns="0" bIns="0" anchor="t">
+            <a:normAutofit fontScale="100000"/>
+          </a:bodyPr>
+          <a:lstStyle xmlns:a="http://schemas.openxmlformats.org/drawingml/2006/main"/>
+          <a:p xmlns:a="http://schemas.openxmlformats.org/drawingml/2006/main">
+            <a:pPr algn="r">
+              <a:buNone/>
+              <a:defRPr sz="1050" b="0">
+                <a:solidFill>
+                  <a:srgbClr val="667384"/>
+                </a:solidFill>
+                <a:latin typeface="Arial"/>
+                <a:ea typeface="Arial"/>
+                <a:cs typeface="Arial"/>
+              </a:defRPr>
+            </a:pPr>
+            <a:r>
+              <a:rPr sz="1050" b="0">
+                <a:solidFill>
+                  <a:srgbClr val="667384"/>
+                </a:solidFill>
+                <a:latin typeface="Arial"/>
+                <a:ea typeface="Arial"/>
+                <a:cs typeface="Arial"/>
+              </a:rPr>
+              <a:t>25</a:t>
+            </a:r>
+          </a:p>
+        </p:txBody>
+      </p:sp>
+      <p:sp>
+        <p:nvSpPr>
+          <p:cNvPr id="6" name="">
+            <a:extLst xmlns:a="http://schemas.openxmlformats.org/drawingml/2006/main">
+              <a:ext uri="{FF2B5EF4-FFF2-40B4-BE49-F238E27FC236}">
+                <a16:creationId xmlns:a16="http://schemas.microsoft.com/office/drawing/2014/main" id="{551133C9-969B-4370-A80C-D9B73CA522F0}"/>
+              </a:ext>
+            </a:extLst>
+          </p:cNvPr>
+          <p:cNvSpPr>
+            <a:spLocks xmlns:a="http://schemas.openxmlformats.org/drawingml/2006/main" noGrp="1"/>
+          </p:cNvSpPr>
+          <p:nvPr/>
+        </p:nvSpPr>
+        <p:spPr>
+          <a:xfrm xmlns:a="http://schemas.openxmlformats.org/drawingml/2006/main">
+            <a:off x="628650" y="1752600"/>
+            <a:ext cx="5429250" cy="762000"/>
+          </a:xfrm>
+          <a:prstGeom xmlns:a="http://schemas.openxmlformats.org/drawingml/2006/main" prst="rect">
+            <a:avLst/>
+          </a:prstGeom>
+          <a:noFill xmlns:a="http://schemas.openxmlformats.org/drawingml/2006/main"/>
+          <a:ln xmlns:a="http://schemas.openxmlformats.org/drawingml/2006/main" w="0">
+            <a:noFill/>
+            <a:prstDash val="solid"/>
+          </a:ln>
+        </p:spPr>
+        <p:txBody>
+          <a:bodyPr xmlns:a="http://schemas.openxmlformats.org/drawingml/2006/main" wrap="square" lIns="0" tIns="0" rIns="0" bIns="0" anchor="t">
+            <a:normAutofit fontScale="100000"/>
+          </a:bodyPr>
+          <a:lstStyle xmlns:a="http://schemas.openxmlformats.org/drawingml/2006/main"/>
+          <a:p xmlns:a="http://schemas.openxmlformats.org/drawingml/2006/main">
+            <a:pPr algn="l">
+              <a:buNone/>
+              <a:defRPr sz="3300" b="1">
+                <a:solidFill>
+                  <a:srgbClr val="3D8DFF"/>
+                </a:solidFill>
+                <a:latin typeface="Arial"/>
+                <a:ea typeface="Arial"/>
+                <a:cs typeface="Arial"/>
+              </a:defRPr>
+            </a:pPr>
+            <a:r>
+              <a:rPr sz="3300" b="1">
+                <a:solidFill>
+                  <a:srgbClr val="3D8DFF"/>
+                </a:solidFill>
+                <a:latin typeface="Arial"/>
+                <a:ea typeface="Arial"/>
+                <a:cs typeface="Arial"/>
+              </a:rPr>
+              <a:t>State[t]  then  R+(f)</a:t>
+            </a:r>
+          </a:p>
+        </p:txBody>
+      </p:sp>
+      <p:sp>
+        <p:nvSpPr>
+          <p:cNvPr id="7" name="">
+            <a:extLst xmlns:a="http://schemas.openxmlformats.org/drawingml/2006/main">
+              <a:ext uri="{FF2B5EF4-FFF2-40B4-BE49-F238E27FC236}">
+                <a16:creationId xmlns:a16="http://schemas.microsoft.com/office/drawing/2014/main" id="{82D8EB97-B391-424E-82EB-0DEEC881C286}"/>
+              </a:ext>
+            </a:extLst>
+          </p:cNvPr>
+          <p:cNvSpPr>
+            <a:spLocks xmlns:a="http://schemas.openxmlformats.org/drawingml/2006/main" noGrp="1"/>
+          </p:cNvSpPr>
+          <p:nvPr/>
+        </p:nvSpPr>
+        <p:spPr>
+          <a:xfrm xmlns:a="http://schemas.openxmlformats.org/drawingml/2006/main">
+            <a:off x="628650" y="2724150"/>
+            <a:ext cx="5048250" cy="990600"/>
+          </a:xfrm>
+          <a:prstGeom xmlns:a="http://schemas.openxmlformats.org/drawingml/2006/main" prst="rect">
+            <a:avLst/>
+          </a:prstGeom>
+          <a:noFill xmlns:a="http://schemas.openxmlformats.org/drawingml/2006/main"/>
+          <a:ln xmlns:a="http://schemas.openxmlformats.org/drawingml/2006/main" w="0">
+            <a:noFill/>
+            <a:prstDash val="solid"/>
+          </a:ln>
+        </p:spPr>
+        <p:txBody>
+          <a:bodyPr xmlns:a="http://schemas.openxmlformats.org/drawingml/2006/main" wrap="square" lIns="0" tIns="0" rIns="0" bIns="0" anchor="t">
+            <a:normAutofit fontScale="100000"/>
+          </a:bodyPr>
+          <a:lstStyle xmlns:a="http://schemas.openxmlformats.org/drawingml/2006/main"/>
+          <a:p xmlns:a="http://schemas.openxmlformats.org/drawingml/2006/main">
+            <a:pPr algn="l">
+              <a:buNone/>
+              <a:defRPr sz="1875" b="0">
+                <a:solidFill>
+                  <a:srgbClr val="273548"/>
+                </a:solidFill>
+                <a:latin typeface="Arial"/>
+                <a:ea typeface="Arial"/>
+                <a:cs typeface="Arial"/>
+              </a:defRPr>
+            </a:pPr>
+            <a:r>
+              <a:rPr sz="1875" b="0">
+                <a:solidFill>
+                  <a:srgbClr val="273548"/>
+                </a:solidFill>
+                <a:latin typeface="Arial"/>
+                <a:ea typeface="Arial"/>
+                <a:cs typeface="Arial"/>
+              </a:rPr>
+              <a:t>ATR% state is assigned at anchor close t. Prior return ends at t; following return begins after t. It measures capacity—not direction.</a:t>
+            </a:r>
+          </a:p>
+        </p:txBody>
+      </p:sp>
+      <p:sp>
+        <p:nvSpPr>
+          <p:cNvPr id="8" name="">
+            <a:extLst xmlns:a="http://schemas.openxmlformats.org/drawingml/2006/main">
+              <a:ext uri="{FF2B5EF4-FFF2-40B4-BE49-F238E27FC236}">
+                <a16:creationId xmlns:a16="http://schemas.microsoft.com/office/drawing/2014/main" id="{8FD10794-EB76-4BB0-B74E-31375B660ECD}"/>
+              </a:ext>
+            </a:extLst>
+          </p:cNvPr>
+          <p:cNvSpPr>
+            <a:spLocks xmlns:a="http://schemas.openxmlformats.org/drawingml/2006/main" noGrp="1"/>
+          </p:cNvSpPr>
+          <p:nvPr/>
+        </p:nvSpPr>
+        <p:spPr>
+          <a:xfrm xmlns:a="http://schemas.openxmlformats.org/drawingml/2006/main">
+            <a:off x="628650" y="4095750"/>
+            <a:ext cx="4953000" cy="1695450"/>
+          </a:xfrm>
+          <a:prstGeom xmlns:a="http://schemas.openxmlformats.org/drawingml/2006/main" prst="rect">
+            <a:avLst/>
+          </a:prstGeom>
+          <a:solidFill xmlns:a="http://schemas.openxmlformats.org/drawingml/2006/main">
+            <a:srgbClr val="EDEDED"/>
+          </a:solidFill>
+          <a:ln xmlns:a="http://schemas.openxmlformats.org/drawingml/2006/main" w="0">
+            <a:solidFill>
+              <a:srgbClr val="EDEDED"/>
+            </a:solidFill>
+            <a:prstDash val="solid"/>
+          </a:ln>
+        </p:spPr>
+      </p:sp>
+      <p:sp>
+        <p:nvSpPr>
+          <p:cNvPr id="9" name="">
+            <a:extLst xmlns:a="http://schemas.openxmlformats.org/drawingml/2006/main">
+              <a:ext uri="{FF2B5EF4-FFF2-40B4-BE49-F238E27FC236}">
+                <a16:creationId xmlns:a16="http://schemas.microsoft.com/office/drawing/2014/main" id="{E8834C39-6D46-429B-A2ED-F97A068A843A}"/>
+              </a:ext>
+            </a:extLst>
+          </p:cNvPr>
+          <p:cNvSpPr>
+            <a:spLocks xmlns:a="http://schemas.openxmlformats.org/drawingml/2006/main" noGrp="1"/>
+          </p:cNvSpPr>
+          <p:nvPr/>
+        </p:nvSpPr>
+        <p:spPr>
+          <a:xfrm xmlns:a="http://schemas.openxmlformats.org/drawingml/2006/main">
+            <a:off x="628650" y="4095750"/>
+            <a:ext cx="76200" cy="1695450"/>
+          </a:xfrm>
+          <a:prstGeom xmlns:a="http://schemas.openxmlformats.org/drawingml/2006/main" prst="rect">
+            <a:avLst/>
+          </a:prstGeom>
+          <a:solidFill xmlns:a="http://schemas.openxmlformats.org/drawingml/2006/main">
+            <a:srgbClr val="3D8DFF"/>
+          </a:solidFill>
+          <a:ln xmlns:a="http://schemas.openxmlformats.org/drawingml/2006/main" w="0">
+            <a:solidFill>
+              <a:srgbClr val="3D8DFF"/>
+            </a:solidFill>
+            <a:prstDash val="solid"/>
+          </a:ln>
+        </p:spPr>
+      </p:sp>
+      <p:sp>
+        <p:nvSpPr>
+          <p:cNvPr id="10" name="">
+            <a:extLst xmlns:a="http://schemas.openxmlformats.org/drawingml/2006/main">
+              <a:ext uri="{FF2B5EF4-FFF2-40B4-BE49-F238E27FC236}">
+                <a16:creationId xmlns:a16="http://schemas.microsoft.com/office/drawing/2014/main" id="{743D83BD-5D8C-4BCB-B02F-81EB74163C70}"/>
+              </a:ext>
+            </a:extLst>
+          </p:cNvPr>
+          <p:cNvSpPr>
+            <a:spLocks xmlns:a="http://schemas.openxmlformats.org/drawingml/2006/main" noGrp="1"/>
+          </p:cNvSpPr>
+          <p:nvPr/>
+        </p:nvSpPr>
+        <p:spPr>
+          <a:xfrm xmlns:a="http://schemas.openxmlformats.org/drawingml/2006/main">
+            <a:off x="895350" y="4267200"/>
+            <a:ext cx="4495800" cy="590550"/>
+          </a:xfrm>
+          <a:prstGeom xmlns:a="http://schemas.openxmlformats.org/drawingml/2006/main" prst="rect">
+            <a:avLst/>
+          </a:prstGeom>
+          <a:noFill xmlns:a="http://schemas.openxmlformats.org/drawingml/2006/main"/>
+          <a:ln xmlns:a="http://schemas.openxmlformats.org/drawingml/2006/main" w="0">
+            <a:noFill/>
+            <a:prstDash val="solid"/>
+          </a:ln>
+        </p:spPr>
+        <p:txBody>
+          <a:bodyPr xmlns:a="http://schemas.openxmlformats.org/drawingml/2006/main" wrap="square" lIns="0" tIns="0" rIns="0" bIns="0" anchor="t">
+            <a:normAutofit fontScale="100000"/>
+          </a:bodyPr>
+          <a:lstStyle xmlns:a="http://schemas.openxmlformats.org/drawingml/2006/main"/>
+          <a:p xmlns:a="http://schemas.openxmlformats.org/drawingml/2006/main">
+            <a:pPr algn="l">
+              <a:buNone/>
+              <a:defRPr sz="3225" b="1">
+                <a:solidFill>
+                  <a:srgbClr val="3D8DFF"/>
+                </a:solidFill>
+                <a:latin typeface="Arial"/>
+                <a:ea typeface="Arial"/>
+                <a:cs typeface="Arial"/>
+              </a:defRPr>
+            </a:pPr>
+            <a:r>
+              <a:rPr sz="3225" b="1">
+                <a:solidFill>
+                  <a:srgbClr val="3D8DFF"/>
+                </a:solidFill>
+                <a:latin typeface="Arial"/>
+                <a:ea typeface="Arial"/>
+                <a:cs typeface="Arial"/>
+              </a:rPr>
+              <a:t>3</a:t>
+            </a:r>
+          </a:p>
+        </p:txBody>
+      </p:sp>
+      <p:sp>
+        <p:nvSpPr>
+          <p:cNvPr id="11" name="">
+            <a:extLst xmlns:a="http://schemas.openxmlformats.org/drawingml/2006/main">
+              <a:ext uri="{FF2B5EF4-FFF2-40B4-BE49-F238E27FC236}">
+                <a16:creationId xmlns:a16="http://schemas.microsoft.com/office/drawing/2014/main" id="{ED88569D-B256-4A8E-9334-C068F39865EA}"/>
+              </a:ext>
+            </a:extLst>
+          </p:cNvPr>
+          <p:cNvSpPr>
+            <a:spLocks xmlns:a="http://schemas.openxmlformats.org/drawingml/2006/main" noGrp="1"/>
+          </p:cNvSpPr>
+          <p:nvPr/>
+        </p:nvSpPr>
+        <p:spPr>
+          <a:xfrm xmlns:a="http://schemas.openxmlformats.org/drawingml/2006/main">
+            <a:off x="895350" y="4933950"/>
+            <a:ext cx="4495800" cy="704850"/>
+          </a:xfrm>
+          <a:prstGeom xmlns:a="http://schemas.openxmlformats.org/drawingml/2006/main" prst="rect">
+            <a:avLst/>
+          </a:prstGeom>
+          <a:noFill xmlns:a="http://schemas.openxmlformats.org/drawingml/2006/main"/>
+          <a:ln xmlns:a="http://schemas.openxmlformats.org/drawingml/2006/main" w="0">
+            <a:noFill/>
+            <a:prstDash val="solid"/>
+          </a:ln>
+        </p:spPr>
+        <p:txBody>
+          <a:bodyPr xmlns:a="http://schemas.openxmlformats.org/drawingml/2006/main" wrap="square" lIns="0" tIns="0" rIns="0" bIns="0" anchor="t">
+            <a:normAutofit fontScale="100000"/>
+          </a:bodyPr>
+          <a:lstStyle xmlns:a="http://schemas.openxmlformats.org/drawingml/2006/main"/>
+          <a:p xmlns:a="http://schemas.openxmlformats.org/drawingml/2006/main">
+            <a:pPr algn="l">
+              <a:buNone/>
+              <a:defRPr sz="1350" b="0">
+                <a:solidFill>
+                  <a:srgbClr val="273548"/>
+                </a:solidFill>
+                <a:latin typeface="Arial"/>
+                <a:ea typeface="Arial"/>
+                <a:cs typeface="Arial"/>
+              </a:defRPr>
+            </a:pPr>
+            <a:r>
+              <a:rPr sz="1350" b="0">
+                <a:solidFill>
+                  <a:srgbClr val="273548"/>
+                </a:solidFill>
+                <a:latin typeface="Arial"/>
+                <a:ea typeface="Arial"/>
+                <a:cs typeface="Arial"/>
+              </a:rPr>
+              <a:t>accepted volatility states</a:t>
+            </a:r>
+          </a:p>
+        </p:txBody>
+      </p:sp>
+      <p:sp>
+        <p:nvSpPr>
+          <p:cNvPr id="12" name="">
+            <a:extLst xmlns:a="http://schemas.openxmlformats.org/drawingml/2006/main">
+              <a:ext uri="{FF2B5EF4-FFF2-40B4-BE49-F238E27FC236}">
+                <a16:creationId xmlns:a16="http://schemas.microsoft.com/office/drawing/2014/main" id="{1139CAED-155E-4498-A477-F11A6F4A02F8}"/>
+              </a:ext>
+            </a:extLst>
+          </p:cNvPr>
+          <p:cNvSpPr>
+            <a:spLocks xmlns:a="http://schemas.openxmlformats.org/drawingml/2006/main" noGrp="1"/>
+          </p:cNvSpPr>
+          <p:nvPr/>
+        </p:nvSpPr>
+        <p:spPr>
+          <a:xfrm xmlns:a="http://schemas.openxmlformats.org/drawingml/2006/main">
+            <a:off x="6667500" y="1676400"/>
+            <a:ext cx="4191000" cy="400050"/>
+          </a:xfrm>
+          <a:prstGeom xmlns:a="http://schemas.openxmlformats.org/drawingml/2006/main" prst="rect">
+            <a:avLst/>
+          </a:prstGeom>
+          <a:noFill xmlns:a="http://schemas.openxmlformats.org/drawingml/2006/main"/>
+          <a:ln xmlns:a="http://schemas.openxmlformats.org/drawingml/2006/main" w="0">
+            <a:noFill/>
+            <a:prstDash val="solid"/>
+          </a:ln>
+        </p:spPr>
+        <p:txBody>
+          <a:bodyPr xmlns:a="http://schemas.openxmlformats.org/drawingml/2006/main" wrap="square" lIns="0" tIns="0" rIns="0" bIns="0" anchor="t">
+            <a:normAutofit fontScale="100000"/>
+          </a:bodyPr>
+          <a:lstStyle xmlns:a="http://schemas.openxmlformats.org/drawingml/2006/main"/>
+          <a:p xmlns:a="http://schemas.openxmlformats.org/drawingml/2006/main">
+            <a:pPr algn="l">
+              <a:buNone/>
+              <a:defRPr sz="2250" b="1">
+                <a:solidFill>
+                  <a:srgbClr val="000000"/>
+                </a:solidFill>
+                <a:latin typeface="Arial"/>
+                <a:ea typeface="Arial"/>
+                <a:cs typeface="Arial"/>
+              </a:defRPr>
+            </a:pPr>
+            <a:r>
+              <a:rPr sz="2250" b="1">
+                <a:solidFill>
+                  <a:srgbClr val="000000"/>
+                </a:solidFill>
+                <a:latin typeface="Arial"/>
+                <a:ea typeface="Arial"/>
+                <a:cs typeface="Arial"/>
+              </a:rPr>
+              <a:t>Fixed conditioning</a:t>
+            </a:r>
+          </a:p>
+        </p:txBody>
+      </p:sp>
+      <p:sp>
+        <p:nvSpPr>
+          <p:cNvPr id="13" name="">
+            <a:extLst xmlns:a="http://schemas.openxmlformats.org/drawingml/2006/main">
+              <a:ext uri="{FF2B5EF4-FFF2-40B4-BE49-F238E27FC236}">
+                <a16:creationId xmlns:a16="http://schemas.microsoft.com/office/drawing/2014/main" id="{09D8E2E5-6744-4962-977E-E85B48910BDF}"/>
+              </a:ext>
+            </a:extLst>
+          </p:cNvPr>
+          <p:cNvSpPr>
+            <a:spLocks xmlns:a="http://schemas.openxmlformats.org/drawingml/2006/main" noGrp="1"/>
+          </p:cNvSpPr>
+          <p:nvPr/>
+        </p:nvSpPr>
+        <p:spPr>
+          <a:xfrm xmlns:a="http://schemas.openxmlformats.org/drawingml/2006/main">
+            <a:off x="6667500" y="2286000"/>
+            <a:ext cx="1809750" cy="323850"/>
+          </a:xfrm>
+          <a:prstGeom xmlns:a="http://schemas.openxmlformats.org/drawingml/2006/main" prst="rect">
+            <a:avLst/>
+          </a:prstGeom>
+          <a:noFill xmlns:a="http://schemas.openxmlformats.org/drawingml/2006/main"/>
+          <a:ln xmlns:a="http://schemas.openxmlformats.org/drawingml/2006/main" w="0">
+            <a:noFill/>
+            <a:prstDash val="solid"/>
+          </a:ln>
+        </p:spPr>
+        <p:txBody>
+          <a:bodyPr xmlns:a="http://schemas.openxmlformats.org/drawingml/2006/main" wrap="square" lIns="0" tIns="0" rIns="0" bIns="0" anchor="t">
+            <a:normAutofit fontScale="100000"/>
+          </a:bodyPr>
+          <a:lstStyle xmlns:a="http://schemas.openxmlformats.org/drawingml/2006/main"/>
+          <a:p xmlns:a="http://schemas.openxmlformats.org/drawingml/2006/main">
+            <a:pPr algn="l">
+              <a:buNone/>
+              <a:defRPr sz="1500" b="1">
+                <a:solidFill>
+                  <a:srgbClr val="667384"/>
+                </a:solidFill>
+                <a:latin typeface="Arial"/>
+                <a:ea typeface="Arial"/>
+                <a:cs typeface="Arial"/>
+              </a:defRPr>
+            </a:pPr>
+            <a:r>
+              <a:rPr sz="1500" b="1">
+                <a:solidFill>
+                  <a:srgbClr val="667384"/>
+                </a:solidFill>
+                <a:latin typeface="Arial"/>
+                <a:ea typeface="Arial"/>
+                <a:cs typeface="Arial"/>
+              </a:rPr>
+              <a:t>Metric</a:t>
+            </a:r>
+          </a:p>
+        </p:txBody>
+      </p:sp>
+      <p:sp>
+        <p:nvSpPr>
+          <p:cNvPr id="14" name="">
+            <a:extLst xmlns:a="http://schemas.openxmlformats.org/drawingml/2006/main">
+              <a:ext uri="{FF2B5EF4-FFF2-40B4-BE49-F238E27FC236}">
+                <a16:creationId xmlns:a16="http://schemas.microsoft.com/office/drawing/2014/main" id="{60FD2958-8D30-49E2-9398-075A839B2785}"/>
+              </a:ext>
+            </a:extLst>
+          </p:cNvPr>
+          <p:cNvSpPr>
+            <a:spLocks xmlns:a="http://schemas.openxmlformats.org/drawingml/2006/main" noGrp="1"/>
+          </p:cNvSpPr>
+          <p:nvPr/>
+        </p:nvSpPr>
+        <p:spPr>
+          <a:xfrm xmlns:a="http://schemas.openxmlformats.org/drawingml/2006/main">
+            <a:off x="8572500" y="2286000"/>
+            <a:ext cx="2952750" cy="419100"/>
+          </a:xfrm>
+          <a:prstGeom xmlns:a="http://schemas.openxmlformats.org/drawingml/2006/main" prst="rect">
+            <a:avLst/>
+          </a:prstGeom>
+          <a:noFill xmlns:a="http://schemas.openxmlformats.org/drawingml/2006/main"/>
+          <a:ln xmlns:a="http://schemas.openxmlformats.org/drawingml/2006/main" w="0">
+            <a:noFill/>
+            <a:prstDash val="solid"/>
+          </a:ln>
+        </p:spPr>
+        <p:txBody>
+          <a:bodyPr xmlns:a="http://schemas.openxmlformats.org/drawingml/2006/main" wrap="square" lIns="0" tIns="0" rIns="0" bIns="0" anchor="t">
+            <a:normAutofit fontScale="100000"/>
+          </a:bodyPr>
+          <a:lstStyle xmlns:a="http://schemas.openxmlformats.org/drawingml/2006/main"/>
+          <a:p xmlns:a="http://schemas.openxmlformats.org/drawingml/2006/main">
+            <a:pPr algn="l">
+              <a:buNone/>
+              <a:defRPr sz="1500" b="0">
+                <a:solidFill>
+                  <a:srgbClr val="273548"/>
+                </a:solidFill>
+                <a:latin typeface="Arial"/>
+                <a:ea typeface="Arial"/>
+                <a:cs typeface="Arial"/>
+              </a:defRPr>
+            </a:pPr>
+            <a:r>
+              <a:rPr sz="1500" b="0">
+                <a:solidFill>
+                  <a:srgbClr val="273548"/>
+                </a:solidFill>
+                <a:latin typeface="Arial"/>
+                <a:ea typeface="Arial"/>
+                <a:cs typeface="Arial"/>
+              </a:rPr>
+              <a:t>Wilder ATR14 / close</a:t>
+            </a:r>
+          </a:p>
+        </p:txBody>
+      </p:sp>
+      <p:sp>
+        <p:nvSpPr>
+          <p:cNvPr id="15" name="">
+            <a:extLst xmlns:a="http://schemas.openxmlformats.org/drawingml/2006/main">
+              <a:ext uri="{FF2B5EF4-FFF2-40B4-BE49-F238E27FC236}">
+                <a16:creationId xmlns:a16="http://schemas.microsoft.com/office/drawing/2014/main" id="{B5F0B4C3-3792-489F-A37E-FD53597FE449}"/>
+              </a:ext>
+            </a:extLst>
+          </p:cNvPr>
+          <p:cNvSpPr>
+            <a:spLocks xmlns:a="http://schemas.openxmlformats.org/drawingml/2006/main" noGrp="1"/>
+          </p:cNvSpPr>
+          <p:nvPr/>
+        </p:nvSpPr>
+        <p:spPr>
+          <a:xfrm xmlns:a="http://schemas.openxmlformats.org/drawingml/2006/main">
+            <a:off x="6667500" y="2743200"/>
+            <a:ext cx="4857750" cy="9525"/>
+          </a:xfrm>
+          <a:prstGeom xmlns:a="http://schemas.openxmlformats.org/drawingml/2006/main" prst="rect">
+            <a:avLst/>
+          </a:prstGeom>
+          <a:solidFill xmlns:a="http://schemas.openxmlformats.org/drawingml/2006/main">
+            <a:srgbClr val="B8BCC4"/>
+          </a:solidFill>
+          <a:ln xmlns:a="http://schemas.openxmlformats.org/drawingml/2006/main" w="0">
+            <a:solidFill>
+              <a:srgbClr val="B8BCC4"/>
+            </a:solidFill>
+            <a:prstDash val="solid"/>
+          </a:ln>
+        </p:spPr>
+      </p:sp>
+      <p:sp>
+        <p:nvSpPr>
+          <p:cNvPr id="16" name="">
+            <a:extLst xmlns:a="http://schemas.openxmlformats.org/drawingml/2006/main">
+              <a:ext uri="{FF2B5EF4-FFF2-40B4-BE49-F238E27FC236}">
+                <a16:creationId xmlns:a16="http://schemas.microsoft.com/office/drawing/2014/main" id="{1F168646-6439-4EB2-88F0-0C08EDC14E3F}"/>
+              </a:ext>
+            </a:extLst>
+          </p:cNvPr>
+          <p:cNvSpPr>
+            <a:spLocks xmlns:a="http://schemas.openxmlformats.org/drawingml/2006/main" noGrp="1"/>
+          </p:cNvSpPr>
+          <p:nvPr/>
+        </p:nvSpPr>
+        <p:spPr>
+          <a:xfrm xmlns:a="http://schemas.openxmlformats.org/drawingml/2006/main">
+            <a:off x="6667500" y="2876550"/>
+            <a:ext cx="1809750" cy="323850"/>
+          </a:xfrm>
+          <a:prstGeom xmlns:a="http://schemas.openxmlformats.org/drawingml/2006/main" prst="rect">
+            <a:avLst/>
+          </a:prstGeom>
+          <a:noFill xmlns:a="http://schemas.openxmlformats.org/drawingml/2006/main"/>
+          <a:ln xmlns:a="http://schemas.openxmlformats.org/drawingml/2006/main" w="0">
+            <a:noFill/>
+            <a:prstDash val="solid"/>
+          </a:ln>
+        </p:spPr>
+        <p:txBody>
+          <a:bodyPr xmlns:a="http://schemas.openxmlformats.org/drawingml/2006/main" wrap="square" lIns="0" tIns="0" rIns="0" bIns="0" anchor="t">
+            <a:normAutofit fontScale="100000"/>
+          </a:bodyPr>
+          <a:lstStyle xmlns:a="http://schemas.openxmlformats.org/drawingml/2006/main"/>
+          <a:p xmlns:a="http://schemas.openxmlformats.org/drawingml/2006/main">
+            <a:pPr algn="l">
+              <a:buNone/>
+              <a:defRPr sz="1500" b="1">
+                <a:solidFill>
+                  <a:srgbClr val="667384"/>
+                </a:solidFill>
+                <a:latin typeface="Arial"/>
+                <a:ea typeface="Arial"/>
+                <a:cs typeface="Arial"/>
+              </a:defRPr>
+            </a:pPr>
+            <a:r>
+              <a:rPr sz="1500" b="1">
+                <a:solidFill>
+                  <a:srgbClr val="667384"/>
+                </a:solidFill>
+                <a:latin typeface="Arial"/>
+                <a:ea typeface="Arial"/>
+                <a:cs typeface="Arial"/>
+              </a:rPr>
+              <a:t>Memory</a:t>
+            </a:r>
+          </a:p>
+        </p:txBody>
+      </p:sp>
+      <p:sp>
+        <p:nvSpPr>
+          <p:cNvPr id="17" name="">
+            <a:extLst xmlns:a="http://schemas.openxmlformats.org/drawingml/2006/main">
+              <a:ext uri="{FF2B5EF4-FFF2-40B4-BE49-F238E27FC236}">
+                <a16:creationId xmlns:a16="http://schemas.microsoft.com/office/drawing/2014/main" id="{5CE87A9A-C6B3-4232-84C2-9C442CAD9C05}"/>
+              </a:ext>
+            </a:extLst>
+          </p:cNvPr>
+          <p:cNvSpPr>
+            <a:spLocks xmlns:a="http://schemas.openxmlformats.org/drawingml/2006/main" noGrp="1"/>
+          </p:cNvSpPr>
+          <p:nvPr/>
+        </p:nvSpPr>
+        <p:spPr>
+          <a:xfrm xmlns:a="http://schemas.openxmlformats.org/drawingml/2006/main">
+            <a:off x="8572500" y="2876550"/>
+            <a:ext cx="2952750" cy="419100"/>
+          </a:xfrm>
+          <a:prstGeom xmlns:a="http://schemas.openxmlformats.org/drawingml/2006/main" prst="rect">
+            <a:avLst/>
+          </a:prstGeom>
+          <a:noFill xmlns:a="http://schemas.openxmlformats.org/drawingml/2006/main"/>
+          <a:ln xmlns:a="http://schemas.openxmlformats.org/drawingml/2006/main" w="0">
+            <a:noFill/>
+            <a:prstDash val="solid"/>
+          </a:ln>
+        </p:spPr>
+        <p:txBody>
+          <a:bodyPr xmlns:a="http://schemas.openxmlformats.org/drawingml/2006/main" wrap="square" lIns="0" tIns="0" rIns="0" bIns="0" anchor="t">
+            <a:normAutofit fontScale="100000"/>
+          </a:bodyPr>
+          <a:lstStyle xmlns:a="http://schemas.openxmlformats.org/drawingml/2006/main"/>
+          <a:p xmlns:a="http://schemas.openxmlformats.org/drawingml/2006/main">
+            <a:pPr algn="l">
+              <a:buNone/>
+              <a:defRPr sz="1500" b="0">
+                <a:solidFill>
+                  <a:srgbClr val="273548"/>
+                </a:solidFill>
+                <a:latin typeface="Arial"/>
+                <a:ea typeface="Arial"/>
+                <a:cs typeface="Arial"/>
+              </a:defRPr>
+            </a:pPr>
+            <a:r>
+              <a:rPr sz="1500" b="0">
+                <a:solidFill>
+                  <a:srgbClr val="273548"/>
+                </a:solidFill>
+                <a:latin typeface="Arial"/>
+                <a:ea typeface="Arial"/>
+                <a:cs typeface="Arial"/>
+              </a:rPr>
+              <a:t>Prior 252 completed sessions</a:t>
+            </a:r>
+          </a:p>
+        </p:txBody>
+      </p:sp>
+      <p:sp>
+        <p:nvSpPr>
+          <p:cNvPr id="18" name="">
+            <a:extLst xmlns:a="http://schemas.openxmlformats.org/drawingml/2006/main">
+              <a:ext uri="{FF2B5EF4-FFF2-40B4-BE49-F238E27FC236}">
+                <a16:creationId xmlns:a16="http://schemas.microsoft.com/office/drawing/2014/main" id="{4C822C36-1982-4EF0-A9F3-89DAA8EAA125}"/>
+              </a:ext>
+            </a:extLst>
+          </p:cNvPr>
+          <p:cNvSpPr>
+            <a:spLocks xmlns:a="http://schemas.openxmlformats.org/drawingml/2006/main" noGrp="1"/>
+          </p:cNvSpPr>
+          <p:nvPr/>
+        </p:nvSpPr>
+        <p:spPr>
+          <a:xfrm xmlns:a="http://schemas.openxmlformats.org/drawingml/2006/main">
+            <a:off x="6667500" y="3333750"/>
+            <a:ext cx="4857750" cy="9525"/>
+          </a:xfrm>
+          <a:prstGeom xmlns:a="http://schemas.openxmlformats.org/drawingml/2006/main" prst="rect">
+            <a:avLst/>
+          </a:prstGeom>
+          <a:solidFill xmlns:a="http://schemas.openxmlformats.org/drawingml/2006/main">
+            <a:srgbClr val="B8BCC4"/>
+          </a:solidFill>
+          <a:ln xmlns:a="http://schemas.openxmlformats.org/drawingml/2006/main" w="0">
+            <a:solidFill>
+              <a:srgbClr val="B8BCC4"/>
+            </a:solidFill>
+            <a:prstDash val="solid"/>
+          </a:ln>
+        </p:spPr>
+      </p:sp>
+      <p:sp>
+        <p:nvSpPr>
+          <p:cNvPr id="19" name="">
+            <a:extLst xmlns:a="http://schemas.openxmlformats.org/drawingml/2006/main">
+              <a:ext uri="{FF2B5EF4-FFF2-40B4-BE49-F238E27FC236}">
+                <a16:creationId xmlns:a16="http://schemas.microsoft.com/office/drawing/2014/main" id="{FFA764C4-9BB1-4E82-A1F0-6E930868FEC3}"/>
+              </a:ext>
+            </a:extLst>
+          </p:cNvPr>
+          <p:cNvSpPr>
+            <a:spLocks xmlns:a="http://schemas.openxmlformats.org/drawingml/2006/main" noGrp="1"/>
+          </p:cNvSpPr>
+          <p:nvPr/>
+        </p:nvSpPr>
+        <p:spPr>
+          <a:xfrm xmlns:a="http://schemas.openxmlformats.org/drawingml/2006/main">
+            <a:off x="6667500" y="3467100"/>
+            <a:ext cx="1809750" cy="323850"/>
+          </a:xfrm>
+          <a:prstGeom xmlns:a="http://schemas.openxmlformats.org/drawingml/2006/main" prst="rect">
+            <a:avLst/>
+          </a:prstGeom>
+          <a:noFill xmlns:a="http://schemas.openxmlformats.org/drawingml/2006/main"/>
+          <a:ln xmlns:a="http://schemas.openxmlformats.org/drawingml/2006/main" w="0">
+            <a:noFill/>
+            <a:prstDash val="solid"/>
+          </a:ln>
+        </p:spPr>
+        <p:txBody>
+          <a:bodyPr xmlns:a="http://schemas.openxmlformats.org/drawingml/2006/main" wrap="square" lIns="0" tIns="0" rIns="0" bIns="0" anchor="t">
+            <a:normAutofit fontScale="100000"/>
+          </a:bodyPr>
+          <a:lstStyle xmlns:a="http://schemas.openxmlformats.org/drawingml/2006/main"/>
+          <a:p xmlns:a="http://schemas.openxmlformats.org/drawingml/2006/main">
+            <a:pPr algn="l">
+              <a:buNone/>
+              <a:defRPr sz="1500" b="1">
+                <a:solidFill>
+                  <a:srgbClr val="667384"/>
+                </a:solidFill>
+                <a:latin typeface="Arial"/>
+                <a:ea typeface="Arial"/>
+                <a:cs typeface="Arial"/>
+              </a:defRPr>
+            </a:pPr>
+            <a:r>
+              <a:rPr sz="1500" b="1">
+                <a:solidFill>
+                  <a:srgbClr val="667384"/>
+                </a:solidFill>
+                <a:latin typeface="Arial"/>
+                <a:ea typeface="Arial"/>
+                <a:cs typeface="Arial"/>
+              </a:rPr>
+              <a:t>States</a:t>
+            </a:r>
+          </a:p>
+        </p:txBody>
+      </p:sp>
+      <p:sp>
+        <p:nvSpPr>
+          <p:cNvPr id="20" name="">
+            <a:extLst xmlns:a="http://schemas.openxmlformats.org/drawingml/2006/main">
+              <a:ext uri="{FF2B5EF4-FFF2-40B4-BE49-F238E27FC236}">
+                <a16:creationId xmlns:a16="http://schemas.microsoft.com/office/drawing/2014/main" id="{62A04E11-771F-482D-97D0-41D18323CD03}"/>
+              </a:ext>
+            </a:extLst>
+          </p:cNvPr>
+          <p:cNvSpPr>
+            <a:spLocks xmlns:a="http://schemas.openxmlformats.org/drawingml/2006/main" noGrp="1"/>
+          </p:cNvSpPr>
+          <p:nvPr/>
+        </p:nvSpPr>
+        <p:spPr>
+          <a:xfrm xmlns:a="http://schemas.openxmlformats.org/drawingml/2006/main">
+            <a:off x="8572500" y="3467100"/>
+            <a:ext cx="2952750" cy="419100"/>
+          </a:xfrm>
+          <a:prstGeom xmlns:a="http://schemas.openxmlformats.org/drawingml/2006/main" prst="rect">
+            <a:avLst/>
+          </a:prstGeom>
+          <a:noFill xmlns:a="http://schemas.openxmlformats.org/drawingml/2006/main"/>
+          <a:ln xmlns:a="http://schemas.openxmlformats.org/drawingml/2006/main" w="0">
+            <a:noFill/>
+            <a:prstDash val="solid"/>
+          </a:ln>
+        </p:spPr>
+        <p:txBody>
+          <a:bodyPr xmlns:a="http://schemas.openxmlformats.org/drawingml/2006/main" wrap="square" lIns="0" tIns="0" rIns="0" bIns="0" anchor="t">
+            <a:normAutofit fontScale="100000"/>
+          </a:bodyPr>
+          <a:lstStyle xmlns:a="http://schemas.openxmlformats.org/drawingml/2006/main"/>
+          <a:p xmlns:a="http://schemas.openxmlformats.org/drawingml/2006/main">
+            <a:pPr algn="l">
+              <a:buNone/>
+              <a:defRPr sz="1500" b="0">
+                <a:solidFill>
+                  <a:srgbClr val="273548"/>
+                </a:solidFill>
+                <a:latin typeface="Arial"/>
+                <a:ea typeface="Arial"/>
+                <a:cs typeface="Arial"/>
+              </a:defRPr>
+            </a:pPr>
+            <a:r>
+              <a:rPr sz="1500" b="0">
+                <a:solidFill>
+                  <a:srgbClr val="273548"/>
+                </a:solidFill>
+                <a:latin typeface="Arial"/>
+                <a:ea typeface="Arial"/>
+                <a:cs typeface="Arial"/>
+              </a:rPr>
+              <a:t>LOW / MEDIUM / HIGH</a:t>
+            </a:r>
+          </a:p>
+        </p:txBody>
+      </p:sp>
+      <p:sp>
+        <p:nvSpPr>
+          <p:cNvPr id="21" name="">
+            <a:extLst xmlns:a="http://schemas.openxmlformats.org/drawingml/2006/main">
+              <a:ext uri="{FF2B5EF4-FFF2-40B4-BE49-F238E27FC236}">
+                <a16:creationId xmlns:a16="http://schemas.microsoft.com/office/drawing/2014/main" id="{2AEA1D46-2EB0-459D-9313-BA82DEAD9553}"/>
+              </a:ext>
+            </a:extLst>
+          </p:cNvPr>
+          <p:cNvSpPr>
+            <a:spLocks xmlns:a="http://schemas.openxmlformats.org/drawingml/2006/main" noGrp="1"/>
+          </p:cNvSpPr>
+          <p:nvPr/>
+        </p:nvSpPr>
+        <p:spPr>
+          <a:xfrm xmlns:a="http://schemas.openxmlformats.org/drawingml/2006/main">
+            <a:off x="6667500" y="3924300"/>
+            <a:ext cx="4857750" cy="9525"/>
+          </a:xfrm>
+          <a:prstGeom xmlns:a="http://schemas.openxmlformats.org/drawingml/2006/main" prst="rect">
+            <a:avLst/>
+          </a:prstGeom>
+          <a:solidFill xmlns:a="http://schemas.openxmlformats.org/drawingml/2006/main">
+            <a:srgbClr val="B8BCC4"/>
+          </a:solidFill>
+          <a:ln xmlns:a="http://schemas.openxmlformats.org/drawingml/2006/main" w="0">
+            <a:solidFill>
+              <a:srgbClr val="B8BCC4"/>
+            </a:solidFill>
+            <a:prstDash val="solid"/>
+          </a:ln>
+        </p:spPr>
+      </p:sp>
+      <p:sp>
+        <p:nvSpPr>
+          <p:cNvPr id="22" name="">
+            <a:extLst xmlns:a="http://schemas.openxmlformats.org/drawingml/2006/main">
+              <a:ext uri="{FF2B5EF4-FFF2-40B4-BE49-F238E27FC236}">
+                <a16:creationId xmlns:a16="http://schemas.microsoft.com/office/drawing/2014/main" id="{AAD0A15B-41F8-429C-8446-F9003B5B4E6F}"/>
+              </a:ext>
+            </a:extLst>
+          </p:cNvPr>
+          <p:cNvSpPr>
+            <a:spLocks xmlns:a="http://schemas.openxmlformats.org/drawingml/2006/main" noGrp="1"/>
+          </p:cNvSpPr>
+          <p:nvPr/>
+        </p:nvSpPr>
+        <p:spPr>
+          <a:xfrm xmlns:a="http://schemas.openxmlformats.org/drawingml/2006/main">
+            <a:off x="6667500" y="4057650"/>
+            <a:ext cx="1809750" cy="323850"/>
+          </a:xfrm>
+          <a:prstGeom xmlns:a="http://schemas.openxmlformats.org/drawingml/2006/main" prst="rect">
+            <a:avLst/>
+          </a:prstGeom>
+          <a:noFill xmlns:a="http://schemas.openxmlformats.org/drawingml/2006/main"/>
+          <a:ln xmlns:a="http://schemas.openxmlformats.org/drawingml/2006/main" w="0">
+            <a:noFill/>
+            <a:prstDash val="solid"/>
+          </a:ln>
+        </p:spPr>
+        <p:txBody>
+          <a:bodyPr xmlns:a="http://schemas.openxmlformats.org/drawingml/2006/main" wrap="square" lIns="0" tIns="0" rIns="0" bIns="0" anchor="t">
+            <a:normAutofit fontScale="100000"/>
+          </a:bodyPr>
+          <a:lstStyle xmlns:a="http://schemas.openxmlformats.org/drawingml/2006/main"/>
+          <a:p xmlns:a="http://schemas.openxmlformats.org/drawingml/2006/main">
+            <a:pPr algn="l">
+              <a:buNone/>
+              <a:defRPr sz="1500" b="1">
+                <a:solidFill>
+                  <a:srgbClr val="667384"/>
+                </a:solidFill>
+                <a:latin typeface="Arial"/>
+                <a:ea typeface="Arial"/>
+                <a:cs typeface="Arial"/>
+              </a:defRPr>
+            </a:pPr>
+            <a:r>
+              <a:rPr sz="1500" b="1">
+                <a:solidFill>
+                  <a:srgbClr val="667384"/>
+                </a:solidFill>
+                <a:latin typeface="Arial"/>
+                <a:ea typeface="Arial"/>
+                <a:cs typeface="Arial"/>
+              </a:rPr>
+              <a:t>Hysteresis</a:t>
+            </a:r>
+          </a:p>
+        </p:txBody>
+      </p:sp>
+      <p:sp>
+        <p:nvSpPr>
+          <p:cNvPr id="23" name="">
+            <a:extLst xmlns:a="http://schemas.openxmlformats.org/drawingml/2006/main">
+              <a:ext uri="{FF2B5EF4-FFF2-40B4-BE49-F238E27FC236}">
+                <a16:creationId xmlns:a16="http://schemas.microsoft.com/office/drawing/2014/main" id="{A13F5128-0043-4265-B48A-E7E4E9B6F96C}"/>
+              </a:ext>
+            </a:extLst>
+          </p:cNvPr>
+          <p:cNvSpPr>
+            <a:spLocks xmlns:a="http://schemas.openxmlformats.org/drawingml/2006/main" noGrp="1"/>
+          </p:cNvSpPr>
+          <p:nvPr/>
+        </p:nvSpPr>
+        <p:spPr>
+          <a:xfrm xmlns:a="http://schemas.openxmlformats.org/drawingml/2006/main">
+            <a:off x="8572500" y="4057650"/>
+            <a:ext cx="2952750" cy="419100"/>
+          </a:xfrm>
+          <a:prstGeom xmlns:a="http://schemas.openxmlformats.org/drawingml/2006/main" prst="rect">
+            <a:avLst/>
+          </a:prstGeom>
+          <a:noFill xmlns:a="http://schemas.openxmlformats.org/drawingml/2006/main"/>
+          <a:ln xmlns:a="http://schemas.openxmlformats.org/drawingml/2006/main" w="0">
+            <a:noFill/>
+            <a:prstDash val="solid"/>
+          </a:ln>
+        </p:spPr>
+        <p:txBody>
+          <a:bodyPr xmlns:a="http://schemas.openxmlformats.org/drawingml/2006/main" wrap="square" lIns="0" tIns="0" rIns="0" bIns="0" anchor="t">
+            <a:normAutofit fontScale="100000"/>
+          </a:bodyPr>
+          <a:lstStyle xmlns:a="http://schemas.openxmlformats.org/drawingml/2006/main"/>
+          <a:p xmlns:a="http://schemas.openxmlformats.org/drawingml/2006/main">
+            <a:pPr algn="l">
+              <a:buNone/>
+              <a:defRPr sz="1500" b="0">
+                <a:solidFill>
+                  <a:srgbClr val="273548"/>
+                </a:solidFill>
+                <a:latin typeface="Arial"/>
+                <a:ea typeface="Arial"/>
+                <a:cs typeface="Arial"/>
+              </a:defRPr>
+            </a:pPr>
+            <a:r>
+              <a:rPr sz="1500" b="0">
+                <a:solidFill>
+                  <a:srgbClr val="273548"/>
+                </a:solidFill>
+                <a:latin typeface="Arial"/>
+                <a:ea typeface="Arial"/>
+                <a:cs typeface="Arial"/>
+              </a:rPr>
+              <a:t>30/40 and 60/70 gates</a:t>
+            </a:r>
+          </a:p>
+        </p:txBody>
+      </p:sp>
+      <p:sp>
+        <p:nvSpPr>
+          <p:cNvPr id="24" name="">
+            <a:extLst xmlns:a="http://schemas.openxmlformats.org/drawingml/2006/main">
+              <a:ext uri="{FF2B5EF4-FFF2-40B4-BE49-F238E27FC236}">
+                <a16:creationId xmlns:a16="http://schemas.microsoft.com/office/drawing/2014/main" id="{1BB63F79-B572-4EF7-8C82-E4140C6E382C}"/>
+              </a:ext>
+            </a:extLst>
+          </p:cNvPr>
+          <p:cNvSpPr>
+            <a:spLocks xmlns:a="http://schemas.openxmlformats.org/drawingml/2006/main" noGrp="1"/>
+          </p:cNvSpPr>
+          <p:nvPr/>
+        </p:nvSpPr>
+        <p:spPr>
+          <a:xfrm xmlns:a="http://schemas.openxmlformats.org/drawingml/2006/main">
+            <a:off x="6667500" y="4514850"/>
+            <a:ext cx="4857750" cy="9525"/>
+          </a:xfrm>
+          <a:prstGeom xmlns:a="http://schemas.openxmlformats.org/drawingml/2006/main" prst="rect">
+            <a:avLst/>
+          </a:prstGeom>
+          <a:solidFill xmlns:a="http://schemas.openxmlformats.org/drawingml/2006/main">
+            <a:srgbClr val="B8BCC4"/>
+          </a:solidFill>
+          <a:ln xmlns:a="http://schemas.openxmlformats.org/drawingml/2006/main" w="0">
+            <a:solidFill>
+              <a:srgbClr val="B8BCC4"/>
+            </a:solidFill>
+            <a:prstDash val="solid"/>
+          </a:ln>
+        </p:spPr>
+      </p:sp>
+      <p:sp>
+        <p:nvSpPr>
+          <p:cNvPr id="25" name="">
+            <a:extLst xmlns:a="http://schemas.openxmlformats.org/drawingml/2006/main">
+              <a:ext uri="{FF2B5EF4-FFF2-40B4-BE49-F238E27FC236}">
+                <a16:creationId xmlns:a16="http://schemas.microsoft.com/office/drawing/2014/main" id="{F58FD0A4-5938-4ECC-AC99-491391233E24}"/>
+              </a:ext>
+            </a:extLst>
+          </p:cNvPr>
+          <p:cNvSpPr>
+            <a:spLocks xmlns:a="http://schemas.openxmlformats.org/drawingml/2006/main" noGrp="1"/>
+          </p:cNvSpPr>
+          <p:nvPr/>
+        </p:nvSpPr>
+        <p:spPr>
+          <a:xfrm xmlns:a="http://schemas.openxmlformats.org/drawingml/2006/main">
+            <a:off x="6667500" y="4648200"/>
+            <a:ext cx="1809750" cy="323850"/>
+          </a:xfrm>
+          <a:prstGeom xmlns:a="http://schemas.openxmlformats.org/drawingml/2006/main" prst="rect">
+            <a:avLst/>
+          </a:prstGeom>
+          <a:noFill xmlns:a="http://schemas.openxmlformats.org/drawingml/2006/main"/>
+          <a:ln xmlns:a="http://schemas.openxmlformats.org/drawingml/2006/main" w="0">
+            <a:noFill/>
+            <a:prstDash val="solid"/>
+          </a:ln>
+        </p:spPr>
+        <p:txBody>
+          <a:bodyPr xmlns:a="http://schemas.openxmlformats.org/drawingml/2006/main" wrap="square" lIns="0" tIns="0" rIns="0" bIns="0" anchor="t">
+            <a:normAutofit fontScale="100000"/>
+          </a:bodyPr>
+          <a:lstStyle xmlns:a="http://schemas.openxmlformats.org/drawingml/2006/main"/>
+          <a:p xmlns:a="http://schemas.openxmlformats.org/drawingml/2006/main">
+            <a:pPr algn="l">
+              <a:buNone/>
+              <a:defRPr sz="1500" b="1">
+                <a:solidFill>
+                  <a:srgbClr val="667384"/>
+                </a:solidFill>
+                <a:latin typeface="Arial"/>
+                <a:ea typeface="Arial"/>
+                <a:cs typeface="Arial"/>
+              </a:defRPr>
+            </a:pPr>
+            <a:r>
+              <a:rPr sz="1500" b="1">
+                <a:solidFill>
+                  <a:srgbClr val="667384"/>
+                </a:solidFill>
+                <a:latin typeface="Arial"/>
+                <a:ea typeface="Arial"/>
+                <a:cs typeface="Arial"/>
+              </a:rPr>
+              <a:t>Timing</a:t>
+            </a:r>
+          </a:p>
+        </p:txBody>
+      </p:sp>
+      <p:sp>
+        <p:nvSpPr>
+          <p:cNvPr id="26" name="">
+            <a:extLst xmlns:a="http://schemas.openxmlformats.org/drawingml/2006/main">
+              <a:ext uri="{FF2B5EF4-FFF2-40B4-BE49-F238E27FC236}">
+                <a16:creationId xmlns:a16="http://schemas.microsoft.com/office/drawing/2014/main" id="{AA292260-C22B-4C56-9ED9-C8744785B552}"/>
+              </a:ext>
+            </a:extLst>
+          </p:cNvPr>
+          <p:cNvSpPr>
+            <a:spLocks xmlns:a="http://schemas.openxmlformats.org/drawingml/2006/main" noGrp="1"/>
+          </p:cNvSpPr>
+          <p:nvPr/>
+        </p:nvSpPr>
+        <p:spPr>
+          <a:xfrm xmlns:a="http://schemas.openxmlformats.org/drawingml/2006/main">
+            <a:off x="8572500" y="4648200"/>
+            <a:ext cx="2952750" cy="419100"/>
+          </a:xfrm>
+          <a:prstGeom xmlns:a="http://schemas.openxmlformats.org/drawingml/2006/main" prst="rect">
+            <a:avLst/>
+          </a:prstGeom>
+          <a:noFill xmlns:a="http://schemas.openxmlformats.org/drawingml/2006/main"/>
+          <a:ln xmlns:a="http://schemas.openxmlformats.org/drawingml/2006/main" w="0">
+            <a:noFill/>
+            <a:prstDash val="solid"/>
+          </a:ln>
+        </p:spPr>
+        <p:txBody>
+          <a:bodyPr xmlns:a="http://schemas.openxmlformats.org/drawingml/2006/main" wrap="square" lIns="0" tIns="0" rIns="0" bIns="0" anchor="t">
+            <a:normAutofit fontScale="100000"/>
+          </a:bodyPr>
+          <a:lstStyle xmlns:a="http://schemas.openxmlformats.org/drawingml/2006/main"/>
+          <a:p xmlns:a="http://schemas.openxmlformats.org/drawingml/2006/main">
+            <a:pPr algn="l">
+              <a:buNone/>
+              <a:defRPr sz="1500" b="0">
+                <a:solidFill>
+                  <a:srgbClr val="273548"/>
+                </a:solidFill>
+                <a:latin typeface="Arial"/>
+                <a:ea typeface="Arial"/>
+                <a:cs typeface="Arial"/>
+              </a:defRPr>
+            </a:pPr>
+            <a:r>
+              <a:rPr sz="1500" b="0">
+                <a:solidFill>
+                  <a:srgbClr val="273548"/>
+                </a:solidFill>
+                <a:latin typeface="Arial"/>
+                <a:ea typeface="Arial"/>
+                <a:cs typeface="Arial"/>
+              </a:rPr>
+              <a:t>Known at anchor close t</a:t>
+            </a:r>
+          </a:p>
+        </p:txBody>
+      </p:sp>
+      <p:sp>
+        <p:nvSpPr>
+          <p:cNvPr id="27" name="">
+            <a:extLst xmlns:a="http://schemas.openxmlformats.org/drawingml/2006/main">
+              <a:ext uri="{FF2B5EF4-FFF2-40B4-BE49-F238E27FC236}">
+                <a16:creationId xmlns:a16="http://schemas.microsoft.com/office/drawing/2014/main" id="{6C617A11-8542-47F5-AD42-16C68CB863E7}"/>
+              </a:ext>
+            </a:extLst>
+          </p:cNvPr>
+          <p:cNvSpPr>
+            <a:spLocks xmlns:a="http://schemas.openxmlformats.org/drawingml/2006/main" noGrp="1"/>
+          </p:cNvSpPr>
+          <p:nvPr/>
+        </p:nvSpPr>
+        <p:spPr>
+          <a:xfrm xmlns:a="http://schemas.openxmlformats.org/drawingml/2006/main">
+            <a:off x="6667500" y="5105400"/>
+            <a:ext cx="4857750" cy="9525"/>
+          </a:xfrm>
+          <a:prstGeom xmlns:a="http://schemas.openxmlformats.org/drawingml/2006/main" prst="rect">
+            <a:avLst/>
+          </a:prstGeom>
+          <a:solidFill xmlns:a="http://schemas.openxmlformats.org/drawingml/2006/main">
+            <a:srgbClr val="B8BCC4"/>
+          </a:solidFill>
+          <a:ln xmlns:a="http://schemas.openxmlformats.org/drawingml/2006/main" w="0">
+            <a:solidFill>
+              <a:srgbClr val="B8BCC4"/>
+            </a:solidFill>
+            <a:prstDash val="solid"/>
+          </a:ln>
+        </p:spPr>
+      </p:sp>
+      <p:sp>
+        <p:nvSpPr>
+          <p:cNvPr id="28" name="">
+            <a:extLst xmlns:a="http://schemas.openxmlformats.org/drawingml/2006/main">
+              <a:ext uri="{FF2B5EF4-FFF2-40B4-BE49-F238E27FC236}">
+                <a16:creationId xmlns:a16="http://schemas.microsoft.com/office/drawing/2014/main" id="{D3258514-91F0-4BFE-BE7D-A95A1C826021}"/>
+              </a:ext>
+            </a:extLst>
+          </p:cNvPr>
+          <p:cNvSpPr>
+            <a:spLocks xmlns:a="http://schemas.openxmlformats.org/drawingml/2006/main" noGrp="1"/>
+          </p:cNvSpPr>
+          <p:nvPr/>
+        </p:nvSpPr>
+        <p:spPr>
+          <a:xfrm xmlns:a="http://schemas.openxmlformats.org/drawingml/2006/main">
+            <a:off x="6667500" y="5238750"/>
+            <a:ext cx="1809750" cy="323850"/>
+          </a:xfrm>
+          <a:prstGeom xmlns:a="http://schemas.openxmlformats.org/drawingml/2006/main" prst="rect">
+            <a:avLst/>
+          </a:prstGeom>
+          <a:noFill xmlns:a="http://schemas.openxmlformats.org/drawingml/2006/main"/>
+          <a:ln xmlns:a="http://schemas.openxmlformats.org/drawingml/2006/main" w="0">
+            <a:noFill/>
+            <a:prstDash val="solid"/>
+          </a:ln>
+        </p:spPr>
+        <p:txBody>
+          <a:bodyPr xmlns:a="http://schemas.openxmlformats.org/drawingml/2006/main" wrap="square" lIns="0" tIns="0" rIns="0" bIns="0" anchor="t">
+            <a:normAutofit fontScale="100000"/>
+          </a:bodyPr>
+          <a:lstStyle xmlns:a="http://schemas.openxmlformats.org/drawingml/2006/main"/>
+          <a:p xmlns:a="http://schemas.openxmlformats.org/drawingml/2006/main">
+            <a:pPr algn="l">
+              <a:buNone/>
+              <a:defRPr sz="1500" b="1">
+                <a:solidFill>
+                  <a:srgbClr val="667384"/>
+                </a:solidFill>
+                <a:latin typeface="Arial"/>
+                <a:ea typeface="Arial"/>
+                <a:cs typeface="Arial"/>
+              </a:defRPr>
+            </a:pPr>
+            <a:r>
+              <a:rPr sz="1500" b="1">
+                <a:solidFill>
+                  <a:srgbClr val="667384"/>
+                </a:solidFill>
+                <a:latin typeface="Arial"/>
+                <a:ea typeface="Arial"/>
+                <a:cs typeface="Arial"/>
+              </a:rPr>
+              <a:t>Surface</a:t>
+            </a:r>
+          </a:p>
+        </p:txBody>
+      </p:sp>
+      <p:sp>
+        <p:nvSpPr>
+          <p:cNvPr id="29" name="">
+            <a:extLst xmlns:a="http://schemas.openxmlformats.org/drawingml/2006/main">
+              <a:ext uri="{FF2B5EF4-FFF2-40B4-BE49-F238E27FC236}">
+                <a16:creationId xmlns:a16="http://schemas.microsoft.com/office/drawing/2014/main" id="{F73C58E3-8C22-4D23-8076-93E173576113}"/>
+              </a:ext>
+            </a:extLst>
+          </p:cNvPr>
+          <p:cNvSpPr>
+            <a:spLocks xmlns:a="http://schemas.openxmlformats.org/drawingml/2006/main" noGrp="1"/>
+          </p:cNvSpPr>
+          <p:nvPr/>
+        </p:nvSpPr>
+        <p:spPr>
+          <a:xfrm xmlns:a="http://schemas.openxmlformats.org/drawingml/2006/main">
+            <a:off x="8572500" y="5238750"/>
+            <a:ext cx="2952750" cy="419100"/>
+          </a:xfrm>
+          <a:prstGeom xmlns:a="http://schemas.openxmlformats.org/drawingml/2006/main" prst="rect">
+            <a:avLst/>
+          </a:prstGeom>
+          <a:noFill xmlns:a="http://schemas.openxmlformats.org/drawingml/2006/main"/>
+          <a:ln xmlns:a="http://schemas.openxmlformats.org/drawingml/2006/main" w="0">
+            <a:noFill/>
+            <a:prstDash val="solid"/>
+          </a:ln>
+        </p:spPr>
+        <p:txBody>
+          <a:bodyPr xmlns:a="http://schemas.openxmlformats.org/drawingml/2006/main" wrap="square" lIns="0" tIns="0" rIns="0" bIns="0" anchor="t">
+            <a:normAutofit fontScale="100000"/>
+          </a:bodyPr>
+          <a:lstStyle xmlns:a="http://schemas.openxmlformats.org/drawingml/2006/main"/>
+          <a:p xmlns:a="http://schemas.openxmlformats.org/drawingml/2006/main">
+            <a:pPr algn="l">
+              <a:buNone/>
+              <a:defRPr sz="1500" b="0">
+                <a:solidFill>
+                  <a:srgbClr val="273548"/>
+                </a:solidFill>
+                <a:latin typeface="Arial"/>
+                <a:ea typeface="Arial"/>
+                <a:cs typeface="Arial"/>
+              </a:defRPr>
+            </a:pPr>
+            <a:r>
+              <a:rPr sz="1500" b="0">
+                <a:solidFill>
+                  <a:srgbClr val="273548"/>
+                </a:solidFill>
+                <a:latin typeface="Arial"/>
+                <a:ea typeface="Arial"/>
+                <a:cs typeface="Arial"/>
+              </a:rPr>
+              <a:t>Same 81 horizon pairs</a:t>
+            </a:r>
+          </a:p>
+        </p:txBody>
+      </p:sp>
+    </p:spTree>
+    <p:extLst>
+      <p:ext uri="{BB962C8B-B14F-4D97-AF65-F5344CB8AC3E}">
+        <p14:creationId xmlns:p14="http://schemas.microsoft.com/office/powerpoint/2010/main" val="1397283360"/>
+      </p:ext>
+    </p:extLst>
+  </p:cSld>
+</p:sld>
+</file>
+
+<file path=ppt/slides/slide26.xml><?xml version="1.0" encoding="utf-8"?>
+<p:sld xmlns:p="http://schemas.openxmlformats.org/presentationml/2006/main">
+  <p:cSld>
+    <p:bg>
+      <p:bgPr>
+        <a:solidFill xmlns:a="http://schemas.openxmlformats.org/drawingml/2006/main">
+          <a:srgbClr val="FFFFFF"/>
+        </a:solidFill>
+      </p:bgPr>
+    </p:bg>
+    <p:spTree>
+      <p:nvGrpSpPr>
+        <p:cNvPr id="1" name=""/>
+        <p:cNvGrpSpPr/>
+        <p:nvPr/>
+      </p:nvGrpSpPr>
+      <p:grpSpPr>
+        <a:xfrm xmlns:a="http://schemas.openxmlformats.org/drawingml/2006/main"/>
+      </p:grpSpPr>
+      <p:sp>
+        <p:nvSpPr>
+          <p:cNvPr id="9" name="section-4">
+            <a:extLst xmlns:a="http://schemas.openxmlformats.org/drawingml/2006/main">
+              <a:ext uri="{FF2B5EF4-FFF2-40B4-BE49-F238E27FC236}">
+                <a16:creationId xmlns:a16="http://schemas.microsoft.com/office/drawing/2014/main" id="{8AE0A271-669A-49F0-A82E-C4438BEE27D9}"/>
+              </a:ext>
+            </a:extLst>
+          </p:cNvPr>
+          <p:cNvSpPr>
+            <a:spLocks xmlns:a="http://schemas.openxmlformats.org/drawingml/2006/main" noGrp="1"/>
+          </p:cNvSpPr>
+          <p:nvPr/>
+        </p:nvSpPr>
+        <p:spPr>
+          <a:xfrm xmlns:a="http://schemas.openxmlformats.org/drawingml/2006/main">
+            <a:off x="457200" y="228600"/>
+            <a:ext cx="4191000" cy="228600"/>
+          </a:xfrm>
+          <a:prstGeom xmlns:a="http://schemas.openxmlformats.org/drawingml/2006/main" prst="rect">
+            <a:avLst/>
+          </a:prstGeom>
+          <a:noFill xmlns:a="http://schemas.openxmlformats.org/drawingml/2006/main"/>
+          <a:ln xmlns:a="http://schemas.openxmlformats.org/drawingml/2006/main" w="0">
+            <a:noFill/>
+            <a:prstDash val="solid"/>
+          </a:ln>
+        </p:spPr>
+        <p:txBody>
+          <a:bodyPr xmlns:a="http://schemas.openxmlformats.org/drawingml/2006/main" wrap="square" lIns="0" tIns="0" rIns="0" bIns="0" anchor="t">
+            <a:normAutofit fontScale="100000"/>
+          </a:bodyPr>
+          <a:lstStyle xmlns:a="http://schemas.openxmlformats.org/drawingml/2006/main"/>
+          <a:p xmlns:a="http://schemas.openxmlformats.org/drawingml/2006/main">
+            <a:pPr algn="l">
+              <a:buNone/>
+              <a:defRPr sz="1200" b="1">
+                <a:solidFill>
+                  <a:srgbClr val="667384"/>
+                </a:solidFill>
+                <a:latin typeface="Arial"/>
+                <a:ea typeface="Arial"/>
+                <a:cs typeface="Arial"/>
+              </a:defRPr>
+            </a:pPr>
+            <a:r>
+              <a:rPr sz="1200" b="1">
+                <a:solidFill>
+                  <a:srgbClr val="667384"/>
+                </a:solidFill>
+                <a:latin typeface="Arial"/>
+                <a:ea typeface="Arial"/>
+                <a:cs typeface="Arial"/>
+              </a:rPr>
+              <a:t>TSLA DESCRIPTIVE MICROSCOPE</a:t>
+            </a:r>
+          </a:p>
+        </p:txBody>
+      </p:sp>
+      <p:sp>
+        <p:nvSpPr>
+          <p:cNvPr id="2" name="title-4">
+            <a:extLst xmlns:a="http://schemas.openxmlformats.org/drawingml/2006/main">
+              <a:ext uri="{FF2B5EF4-FFF2-40B4-BE49-F238E27FC236}">
+                <a16:creationId xmlns:a16="http://schemas.microsoft.com/office/drawing/2014/main" id="{50C6F92F-721A-4252-9CF8-B5C9B01C7310}"/>
+              </a:ext>
+            </a:extLst>
+          </p:cNvPr>
+          <p:cNvSpPr>
+            <a:spLocks xmlns:a="http://schemas.openxmlformats.org/drawingml/2006/main" noGrp="1"/>
+          </p:cNvSpPr>
+          <p:nvPr/>
+        </p:nvSpPr>
+        <p:spPr>
+          <a:xfrm xmlns:a="http://schemas.openxmlformats.org/drawingml/2006/main">
+            <a:off x="457200" y="533400"/>
+            <a:ext cx="11277600" cy="628650"/>
+          </a:xfrm>
+          <a:prstGeom xmlns:a="http://schemas.openxmlformats.org/drawingml/2006/main" prst="rect">
+            <a:avLst/>
+          </a:prstGeom>
+          <a:noFill xmlns:a="http://schemas.openxmlformats.org/drawingml/2006/main"/>
+          <a:ln xmlns:a="http://schemas.openxmlformats.org/drawingml/2006/main" w="0">
+            <a:noFill/>
+            <a:prstDash val="solid"/>
+          </a:ln>
+        </p:spPr>
+        <p:txBody>
+          <a:bodyPr xmlns:a="http://schemas.openxmlformats.org/drawingml/2006/main" wrap="square" lIns="0" tIns="0" rIns="0" bIns="0" anchor="t">
+            <a:normAutofit fontScale="100000"/>
+          </a:bodyPr>
+          <a:lstStyle xmlns:a="http://schemas.openxmlformats.org/drawingml/2006/main"/>
+          <a:p xmlns:a="http://schemas.openxmlformats.org/drawingml/2006/main">
+            <a:pPr algn="l">
+              <a:buNone/>
+              <a:defRPr sz="3525" b="1">
+                <a:solidFill>
+                  <a:srgbClr val="000000"/>
+                </a:solidFill>
+                <a:latin typeface="Arial"/>
+                <a:ea typeface="Arial"/>
+                <a:cs typeface="Arial"/>
+              </a:defRPr>
+            </a:pPr>
+            <a:r>
+              <a:rPr sz="3525" b="1">
+                <a:solidFill>
+                  <a:srgbClr val="000000"/>
+                </a:solidFill>
+                <a:latin typeface="Arial"/>
+                <a:ea typeface="Arial"/>
+                <a:cs typeface="Arial"/>
+              </a:rPr>
+              <a:t>LOW ATR% is broadly positive, but no cell passes</a:t>
+            </a:r>
+          </a:p>
+        </p:txBody>
+      </p:sp>
+      <p:sp>
+        <p:nvSpPr>
+          <p:cNvPr id="3" name="">
+            <a:extLst xmlns:a="http://schemas.openxmlformats.org/drawingml/2006/main">
+              <a:ext uri="{FF2B5EF4-FFF2-40B4-BE49-F238E27FC236}">
+                <a16:creationId xmlns:a16="http://schemas.microsoft.com/office/drawing/2014/main" id="{242399F2-4D0A-4337-B17E-DB3599DC380F}"/>
+              </a:ext>
+            </a:extLst>
+          </p:cNvPr>
+          <p:cNvSpPr>
+            <a:spLocks xmlns:a="http://schemas.openxmlformats.org/drawingml/2006/main" noGrp="1"/>
+          </p:cNvSpPr>
+          <p:nvPr/>
+        </p:nvSpPr>
+        <p:spPr>
+          <a:xfrm xmlns:a="http://schemas.openxmlformats.org/drawingml/2006/main">
+            <a:off x="457200" y="1200150"/>
+            <a:ext cx="11277600" cy="19050"/>
+          </a:xfrm>
+          <a:prstGeom xmlns:a="http://schemas.openxmlformats.org/drawingml/2006/main" prst="rect">
+            <a:avLst/>
+          </a:prstGeom>
+          <a:solidFill xmlns:a="http://schemas.openxmlformats.org/drawingml/2006/main">
+            <a:srgbClr val="B8BCC4"/>
+          </a:solidFill>
+          <a:ln xmlns:a="http://schemas.openxmlformats.org/drawingml/2006/main" w="0">
+            <a:solidFill>
+              <a:srgbClr val="B8BCC4"/>
+            </a:solidFill>
+            <a:prstDash val="solid"/>
+          </a:ln>
+        </p:spPr>
+      </p:sp>
+      <p:sp>
+        <p:nvSpPr>
+          <p:cNvPr id="4" name="footer-left-4">
+            <a:extLst xmlns:a="http://schemas.openxmlformats.org/drawingml/2006/main">
+              <a:ext uri="{FF2B5EF4-FFF2-40B4-BE49-F238E27FC236}">
+                <a16:creationId xmlns:a16="http://schemas.microsoft.com/office/drawing/2014/main" id="{BF8B82CA-1E48-4669-BAD8-1FF8C09FCBFB}"/>
+              </a:ext>
+            </a:extLst>
+          </p:cNvPr>
+          <p:cNvSpPr>
+            <a:spLocks xmlns:a="http://schemas.openxmlformats.org/drawingml/2006/main" noGrp="1"/>
+          </p:cNvSpPr>
+          <p:nvPr/>
+        </p:nvSpPr>
+        <p:spPr>
+          <a:xfrm xmlns:a="http://schemas.openxmlformats.org/drawingml/2006/main">
+            <a:off x="457200" y="6515100"/>
+            <a:ext cx="3429000" cy="171450"/>
+          </a:xfrm>
+          <a:prstGeom xmlns:a="http://schemas.openxmlformats.org/drawingml/2006/main" prst="rect">
+            <a:avLst/>
+          </a:prstGeom>
+          <a:noFill xmlns:a="http://schemas.openxmlformats.org/drawingml/2006/main"/>
+          <a:ln xmlns:a="http://schemas.openxmlformats.org/drawingml/2006/main" w="0">
+            <a:noFill/>
+            <a:prstDash val="solid"/>
+          </a:ln>
+        </p:spPr>
+        <p:txBody>
+          <a:bodyPr xmlns:a="http://schemas.openxmlformats.org/drawingml/2006/main" wrap="square" lIns="0" tIns="0" rIns="0" bIns="0" anchor="t">
+            <a:normAutofit fontScale="100000"/>
+          </a:bodyPr>
+          <a:lstStyle xmlns:a="http://schemas.openxmlformats.org/drawingml/2006/main"/>
+          <a:p xmlns:a="http://schemas.openxmlformats.org/drawingml/2006/main">
+            <a:pPr algn="l">
+              <a:buNone/>
+              <a:defRPr sz="1050" b="0">
+                <a:solidFill>
+                  <a:srgbClr val="667384"/>
+                </a:solidFill>
+                <a:latin typeface="Arial"/>
+                <a:ea typeface="Arial"/>
+                <a:cs typeface="Arial"/>
+              </a:defRPr>
+            </a:pPr>
+            <a:r>
+              <a:rPr sz="1050" b="0">
+                <a:solidFill>
+                  <a:srgbClr val="667384"/>
+                </a:solidFill>
+                <a:latin typeface="Arial"/>
+                <a:ea typeface="Arial"/>
+                <a:cs typeface="Arial"/>
+              </a:rPr>
+              <a:t>Adjusted daily TSLA | 2018-2023</a:t>
+            </a:r>
+          </a:p>
+        </p:txBody>
+      </p:sp>
+      <p:sp>
+        <p:nvSpPr>
+          <p:cNvPr id="5" name="footer-number-4">
+            <a:extLst xmlns:a="http://schemas.openxmlformats.org/drawingml/2006/main">
+              <a:ext uri="{FF2B5EF4-FFF2-40B4-BE49-F238E27FC236}">
+                <a16:creationId xmlns:a16="http://schemas.microsoft.com/office/drawing/2014/main" id="{05959AEC-B0A5-45F0-A65B-C94C3E5A032F}"/>
+              </a:ext>
+            </a:extLst>
+          </p:cNvPr>
+          <p:cNvSpPr>
+            <a:spLocks xmlns:a="http://schemas.openxmlformats.org/drawingml/2006/main" noGrp="1"/>
+          </p:cNvSpPr>
+          <p:nvPr/>
+        </p:nvSpPr>
+        <p:spPr>
+          <a:xfrm xmlns:a="http://schemas.openxmlformats.org/drawingml/2006/main">
+            <a:off x="11239500" y="6496050"/>
+            <a:ext cx="495300" cy="190500"/>
+          </a:xfrm>
+          <a:prstGeom xmlns:a="http://schemas.openxmlformats.org/drawingml/2006/main" prst="rect">
+            <a:avLst/>
+          </a:prstGeom>
+          <a:noFill xmlns:a="http://schemas.openxmlformats.org/drawingml/2006/main"/>
+          <a:ln xmlns:a="http://schemas.openxmlformats.org/drawingml/2006/main" w="0">
+            <a:noFill/>
+            <a:prstDash val="solid"/>
+          </a:ln>
+        </p:spPr>
+        <p:txBody>
+          <a:bodyPr xmlns:a="http://schemas.openxmlformats.org/drawingml/2006/main" wrap="square" lIns="0" tIns="0" rIns="0" bIns="0" anchor="t">
+            <a:normAutofit fontScale="100000"/>
+          </a:bodyPr>
+          <a:lstStyle xmlns:a="http://schemas.openxmlformats.org/drawingml/2006/main"/>
+          <a:p xmlns:a="http://schemas.openxmlformats.org/drawingml/2006/main">
+            <a:pPr algn="r">
+              <a:buNone/>
+              <a:defRPr sz="1050" b="0">
+                <a:solidFill>
+                  <a:srgbClr val="667384"/>
+                </a:solidFill>
+                <a:latin typeface="Arial"/>
+                <a:ea typeface="Arial"/>
+                <a:cs typeface="Arial"/>
+              </a:defRPr>
+            </a:pPr>
+            <a:r>
+              <a:rPr sz="1050" b="0">
+                <a:solidFill>
+                  <a:srgbClr val="667384"/>
+                </a:solidFill>
+                <a:latin typeface="Arial"/>
+                <a:ea typeface="Arial"/>
+                <a:cs typeface="Arial"/>
+              </a:rPr>
+              <a:t>26</a:t>
+            </a:r>
+          </a:p>
+        </p:txBody>
+      </p:sp>
+      <p:sp>
+        <p:nvSpPr>
+          <p:cNvPr id="6" name="">
+            <a:extLst xmlns:a="http://schemas.openxmlformats.org/drawingml/2006/main">
+              <a:ext uri="{FF2B5EF4-FFF2-40B4-BE49-F238E27FC236}">
+                <a16:creationId xmlns:a16="http://schemas.microsoft.com/office/drawing/2014/main" id="{9C8DEA29-E57D-4C8D-8538-2028FF89DA7C}"/>
+              </a:ext>
+            </a:extLst>
+          </p:cNvPr>
+          <p:cNvSpPr>
+            <a:spLocks xmlns:a="http://schemas.openxmlformats.org/drawingml/2006/main" noGrp="1"/>
+          </p:cNvSpPr>
+          <p:nvPr/>
+        </p:nvSpPr>
+        <p:spPr>
+          <a:xfrm xmlns:a="http://schemas.openxmlformats.org/drawingml/2006/main">
+            <a:off x="1000125" y="1352550"/>
+            <a:ext cx="10191750" cy="4905375"/>
+          </a:xfrm>
+          <a:prstGeom xmlns:a="http://schemas.openxmlformats.org/drawingml/2006/main" prst="rect">
+            <a:avLst/>
+          </a:prstGeom>
+          <a:solidFill xmlns:a="http://schemas.openxmlformats.org/drawingml/2006/main">
+            <a:srgbClr val="FFFFFF"/>
+          </a:solidFill>
+          <a:ln xmlns:a="http://schemas.openxmlformats.org/drawingml/2006/main" w="9525">
+            <a:solidFill>
+              <a:srgbClr val="B8BCC4"/>
+            </a:solidFill>
+            <a:prstDash val="solid"/>
+          </a:ln>
+        </p:spPr>
+      </p:sp>
+      <p:sp>
+        <p:nvSpPr>
+          <p:cNvPr id="8" name="">
+            <a:extLst xmlns:a="http://schemas.openxmlformats.org/drawingml/2006/main">
+              <a:ext uri="{FF2B5EF4-FFF2-40B4-BE49-F238E27FC236}">
+                <a16:creationId xmlns:a16="http://schemas.microsoft.com/office/drawing/2014/main" id="{4346A5F2-8CC4-4151-9BDB-346D47A3096B}"/>
+              </a:ext>
+            </a:extLst>
+          </p:cNvPr>
+          <p:cNvSpPr>
+            <a:spLocks xmlns:a="http://schemas.openxmlformats.org/drawingml/2006/main" noGrp="1"/>
+          </p:cNvSpPr>
+          <p:nvPr/>
+        </p:nvSpPr>
+        <p:spPr>
+          <a:xfrm xmlns:a="http://schemas.openxmlformats.org/drawingml/2006/main">
+            <a:off x="1143000" y="6286500"/>
+            <a:ext cx="9906000" cy="171450"/>
+          </a:xfrm>
+          <a:prstGeom xmlns:a="http://schemas.openxmlformats.org/drawingml/2006/main" prst="rect">
+            <a:avLst/>
+          </a:prstGeom>
+          <a:noFill xmlns:a="http://schemas.openxmlformats.org/drawingml/2006/main"/>
+          <a:ln xmlns:a="http://schemas.openxmlformats.org/drawingml/2006/main" w="0">
+            <a:noFill/>
+            <a:prstDash val="solid"/>
+          </a:ln>
+        </p:spPr>
+        <p:txBody>
+          <a:bodyPr xmlns:a="http://schemas.openxmlformats.org/drawingml/2006/main" wrap="square" lIns="0" tIns="0" rIns="0" bIns="0" anchor="t">
+            <a:normAutofit fontScale="93750"/>
+          </a:bodyPr>
+          <a:lstStyle xmlns:a="http://schemas.openxmlformats.org/drawingml/2006/main"/>
+          <a:p xmlns:a="http://schemas.openxmlformats.org/drawingml/2006/main">
+            <a:pPr algn="ctr">
+              <a:buNone/>
+              <a:defRPr sz="1200" b="0">
+                <a:solidFill>
+                  <a:srgbClr val="667384"/>
+                </a:solidFill>
+                <a:latin typeface="Arial"/>
+                <a:ea typeface="Arial"/>
+                <a:cs typeface="Arial"/>
+              </a:defRPr>
+            </a:pPr>
+            <a:r>
+              <a:rPr sz="1200" b="0">
+                <a:solidFill>
+                  <a:srgbClr val="667384"/>
+                </a:solidFill>
+                <a:latin typeface="Arial"/>
+                <a:ea typeface="Arial"/>
+                <a:cs typeface="Arial"/>
+              </a:rPr>
+              <a:t>All 81 cells positive; strongest +0.198 at 10 prior / 25 forward; 0/81 within-state BH passes.</a:t>
+            </a:r>
+          </a:p>
+        </p:txBody>
+      </p:sp>
+      <p:pic>
+        <p:nvPicPr>
+          <p:cNvPr id="18" name=""/>
+          <p:cNvPicPr>
+            <a:picLocks xmlns:a="http://schemas.openxmlformats.org/drawingml/2006/main" noChangeAspect="1"/>
+          </p:cNvPicPr>
+          <p:nvPr/>
+        </p:nvPicPr>
+        <p:blipFill>
+          <a:blip xmlns:r="http://schemas.openxmlformats.org/officeDocument/2006/relationships" xmlns:a="http://schemas.openxmlformats.org/drawingml/2006/main" r:embed="R0ae3be0cccb447e3"/>
+          <a:stretch xmlns:a="http://schemas.openxmlformats.org/drawingml/2006/main"/>
+        </p:blipFill>
+        <p:spPr>
+          <a:xfrm xmlns:a="http://schemas.openxmlformats.org/drawingml/2006/main" flipH="0" flipV="0">
+            <a:off x="2942545" y="1352550"/>
+            <a:ext cx="6306911" cy="4905375"/>
+          </a:xfrm>
+          <a:prstGeom xmlns:a="http://schemas.openxmlformats.org/drawingml/2006/main" prst="rect">
+            <a:avLst/>
+          </a:prstGeom>
+        </p:spPr>
+      </p:pic>
+    </p:spTree>
+    <p:extLst>
+      <p:ext uri="{BB962C8B-B14F-4D97-AF65-F5344CB8AC3E}">
+        <p14:creationId xmlns:p14="http://schemas.microsoft.com/office/powerpoint/2010/main" val="400872380"/>
+      </p:ext>
+    </p:extLst>
+  </p:cSld>
+</p:sld>
+</file>
+
+<file path=ppt/slides/slide27.xml><?xml version="1.0" encoding="utf-8"?>
+<p:sld xmlns:p="http://schemas.openxmlformats.org/presentationml/2006/main">
+  <p:cSld>
+    <p:bg>
+      <p:bgPr>
+        <a:solidFill xmlns:a="http://schemas.openxmlformats.org/drawingml/2006/main">
+          <a:srgbClr val="FFFFFF"/>
+        </a:solidFill>
+      </p:bgPr>
+    </p:bg>
+    <p:spTree>
+      <p:nvGrpSpPr>
+        <p:cNvPr id="1" name=""/>
+        <p:cNvGrpSpPr/>
+        <p:nvPr/>
+      </p:nvGrpSpPr>
+      <p:grpSpPr>
+        <a:xfrm xmlns:a="http://schemas.openxmlformats.org/drawingml/2006/main"/>
+      </p:grpSpPr>
+      <p:sp>
+        <p:nvSpPr>
+          <p:cNvPr id="9" name="section-4">
+            <a:extLst xmlns:a="http://schemas.openxmlformats.org/drawingml/2006/main">
+              <a:ext uri="{FF2B5EF4-FFF2-40B4-BE49-F238E27FC236}">
+                <a16:creationId xmlns:a16="http://schemas.microsoft.com/office/drawing/2014/main" id="{8AE0A271-669A-49F0-A82E-C4438BEE27D9}"/>
+              </a:ext>
+            </a:extLst>
+          </p:cNvPr>
+          <p:cNvSpPr>
+            <a:spLocks xmlns:a="http://schemas.openxmlformats.org/drawingml/2006/main" noGrp="1"/>
+          </p:cNvSpPr>
+          <p:nvPr/>
+        </p:nvSpPr>
+        <p:spPr>
+          <a:xfrm xmlns:a="http://schemas.openxmlformats.org/drawingml/2006/main">
+            <a:off x="457200" y="228600"/>
+            <a:ext cx="4191000" cy="228600"/>
+          </a:xfrm>
+          <a:prstGeom xmlns:a="http://schemas.openxmlformats.org/drawingml/2006/main" prst="rect">
+            <a:avLst/>
+          </a:prstGeom>
+          <a:noFill xmlns:a="http://schemas.openxmlformats.org/drawingml/2006/main"/>
+          <a:ln xmlns:a="http://schemas.openxmlformats.org/drawingml/2006/main" w="0">
+            <a:noFill/>
+            <a:prstDash val="solid"/>
+          </a:ln>
+        </p:spPr>
+        <p:txBody>
+          <a:bodyPr xmlns:a="http://schemas.openxmlformats.org/drawingml/2006/main" wrap="square" lIns="0" tIns="0" rIns="0" bIns="0" anchor="t">
+            <a:normAutofit fontScale="100000"/>
+          </a:bodyPr>
+          <a:lstStyle xmlns:a="http://schemas.openxmlformats.org/drawingml/2006/main"/>
+          <a:p xmlns:a="http://schemas.openxmlformats.org/drawingml/2006/main">
+            <a:pPr algn="l">
+              <a:buNone/>
+              <a:defRPr sz="1200" b="1">
+                <a:solidFill>
+                  <a:srgbClr val="667384"/>
+                </a:solidFill>
+                <a:latin typeface="Arial"/>
+                <a:ea typeface="Arial"/>
+                <a:cs typeface="Arial"/>
+              </a:defRPr>
+            </a:pPr>
+            <a:r>
+              <a:rPr sz="1200" b="1">
+                <a:solidFill>
+                  <a:srgbClr val="667384"/>
+                </a:solidFill>
+                <a:latin typeface="Arial"/>
+                <a:ea typeface="Arial"/>
+                <a:cs typeface="Arial"/>
+              </a:rPr>
+              <a:t>TSLA DESCRIPTIVE MICROSCOPE</a:t>
+            </a:r>
+          </a:p>
+        </p:txBody>
+      </p:sp>
+      <p:sp>
+        <p:nvSpPr>
+          <p:cNvPr id="2" name="title-4">
+            <a:extLst xmlns:a="http://schemas.openxmlformats.org/drawingml/2006/main">
+              <a:ext uri="{FF2B5EF4-FFF2-40B4-BE49-F238E27FC236}">
+                <a16:creationId xmlns:a16="http://schemas.microsoft.com/office/drawing/2014/main" id="{50C6F92F-721A-4252-9CF8-B5C9B01C7310}"/>
+              </a:ext>
+            </a:extLst>
+          </p:cNvPr>
+          <p:cNvSpPr>
+            <a:spLocks xmlns:a="http://schemas.openxmlformats.org/drawingml/2006/main" noGrp="1"/>
+          </p:cNvSpPr>
+          <p:nvPr/>
+        </p:nvSpPr>
+        <p:spPr>
+          <a:xfrm xmlns:a="http://schemas.openxmlformats.org/drawingml/2006/main">
+            <a:off x="457200" y="533400"/>
+            <a:ext cx="11277600" cy="628650"/>
+          </a:xfrm>
+          <a:prstGeom xmlns:a="http://schemas.openxmlformats.org/drawingml/2006/main" prst="rect">
+            <a:avLst/>
+          </a:prstGeom>
+          <a:noFill xmlns:a="http://schemas.openxmlformats.org/drawingml/2006/main"/>
+          <a:ln xmlns:a="http://schemas.openxmlformats.org/drawingml/2006/main" w="0">
+            <a:noFill/>
+            <a:prstDash val="solid"/>
+          </a:ln>
+        </p:spPr>
+        <p:txBody>
+          <a:bodyPr xmlns:a="http://schemas.openxmlformats.org/drawingml/2006/main" wrap="square" lIns="0" tIns="0" rIns="0" bIns="0" anchor="t">
+            <a:normAutofit fontScale="96973"/>
+          </a:bodyPr>
+          <a:lstStyle xmlns:a="http://schemas.openxmlformats.org/drawingml/2006/main"/>
+          <a:p xmlns:a="http://schemas.openxmlformats.org/drawingml/2006/main">
+            <a:pPr algn="l">
+              <a:buNone/>
+              <a:defRPr sz="3525" b="1">
+                <a:solidFill>
+                  <a:srgbClr val="000000"/>
+                </a:solidFill>
+                <a:latin typeface="Arial"/>
+                <a:ea typeface="Arial"/>
+                <a:cs typeface="Arial"/>
+              </a:defRPr>
+            </a:pPr>
+            <a:r>
+              <a:rPr sz="3525" b="1">
+                <a:solidFill>
+                  <a:srgbClr val="000000"/>
+                </a:solidFill>
+                <a:latin typeface="Arial"/>
+                <a:ea typeface="Arial"/>
+                <a:cs typeface="Arial"/>
+              </a:rPr>
+              <a:t>MEDIUM ATR% contains the stable continuation island</a:t>
+            </a:r>
+          </a:p>
+        </p:txBody>
+      </p:sp>
+      <p:sp>
+        <p:nvSpPr>
+          <p:cNvPr id="3" name="">
+            <a:extLst xmlns:a="http://schemas.openxmlformats.org/drawingml/2006/main">
+              <a:ext uri="{FF2B5EF4-FFF2-40B4-BE49-F238E27FC236}">
+                <a16:creationId xmlns:a16="http://schemas.microsoft.com/office/drawing/2014/main" id="{242399F2-4D0A-4337-B17E-DB3599DC380F}"/>
+              </a:ext>
+            </a:extLst>
+          </p:cNvPr>
+          <p:cNvSpPr>
+            <a:spLocks xmlns:a="http://schemas.openxmlformats.org/drawingml/2006/main" noGrp="1"/>
+          </p:cNvSpPr>
+          <p:nvPr/>
+        </p:nvSpPr>
+        <p:spPr>
+          <a:xfrm xmlns:a="http://schemas.openxmlformats.org/drawingml/2006/main">
+            <a:off x="457200" y="1200150"/>
+            <a:ext cx="11277600" cy="19050"/>
+          </a:xfrm>
+          <a:prstGeom xmlns:a="http://schemas.openxmlformats.org/drawingml/2006/main" prst="rect">
+            <a:avLst/>
+          </a:prstGeom>
+          <a:solidFill xmlns:a="http://schemas.openxmlformats.org/drawingml/2006/main">
+            <a:srgbClr val="B8BCC4"/>
+          </a:solidFill>
+          <a:ln xmlns:a="http://schemas.openxmlformats.org/drawingml/2006/main" w="0">
+            <a:solidFill>
+              <a:srgbClr val="B8BCC4"/>
+            </a:solidFill>
+            <a:prstDash val="solid"/>
+          </a:ln>
+        </p:spPr>
+      </p:sp>
+      <p:sp>
+        <p:nvSpPr>
+          <p:cNvPr id="4" name="footer-left-4">
+            <a:extLst xmlns:a="http://schemas.openxmlformats.org/drawingml/2006/main">
+              <a:ext uri="{FF2B5EF4-FFF2-40B4-BE49-F238E27FC236}">
+                <a16:creationId xmlns:a16="http://schemas.microsoft.com/office/drawing/2014/main" id="{BF8B82CA-1E48-4669-BAD8-1FF8C09FCBFB}"/>
+              </a:ext>
+            </a:extLst>
+          </p:cNvPr>
+          <p:cNvSpPr>
+            <a:spLocks xmlns:a="http://schemas.openxmlformats.org/drawingml/2006/main" noGrp="1"/>
+          </p:cNvSpPr>
+          <p:nvPr/>
+        </p:nvSpPr>
+        <p:spPr>
+          <a:xfrm xmlns:a="http://schemas.openxmlformats.org/drawingml/2006/main">
+            <a:off x="457200" y="6515100"/>
+            <a:ext cx="3429000" cy="171450"/>
+          </a:xfrm>
+          <a:prstGeom xmlns:a="http://schemas.openxmlformats.org/drawingml/2006/main" prst="rect">
+            <a:avLst/>
+          </a:prstGeom>
+          <a:noFill xmlns:a="http://schemas.openxmlformats.org/drawingml/2006/main"/>
+          <a:ln xmlns:a="http://schemas.openxmlformats.org/drawingml/2006/main" w="0">
+            <a:noFill/>
+            <a:prstDash val="solid"/>
+          </a:ln>
+        </p:spPr>
+        <p:txBody>
+          <a:bodyPr xmlns:a="http://schemas.openxmlformats.org/drawingml/2006/main" wrap="square" lIns="0" tIns="0" rIns="0" bIns="0" anchor="t">
+            <a:normAutofit fontScale="100000"/>
+          </a:bodyPr>
+          <a:lstStyle xmlns:a="http://schemas.openxmlformats.org/drawingml/2006/main"/>
+          <a:p xmlns:a="http://schemas.openxmlformats.org/drawingml/2006/main">
+            <a:pPr algn="l">
+              <a:buNone/>
+              <a:defRPr sz="1050" b="0">
+                <a:solidFill>
+                  <a:srgbClr val="667384"/>
+                </a:solidFill>
+                <a:latin typeface="Arial"/>
+                <a:ea typeface="Arial"/>
+                <a:cs typeface="Arial"/>
+              </a:defRPr>
+            </a:pPr>
+            <a:r>
+              <a:rPr sz="1050" b="0">
+                <a:solidFill>
+                  <a:srgbClr val="667384"/>
+                </a:solidFill>
+                <a:latin typeface="Arial"/>
+                <a:ea typeface="Arial"/>
+                <a:cs typeface="Arial"/>
+              </a:rPr>
+              <a:t>Adjusted daily TSLA | 2018-2023</a:t>
+            </a:r>
+          </a:p>
+        </p:txBody>
+      </p:sp>
+      <p:sp>
+        <p:nvSpPr>
+          <p:cNvPr id="5" name="footer-number-4">
+            <a:extLst xmlns:a="http://schemas.openxmlformats.org/drawingml/2006/main">
+              <a:ext uri="{FF2B5EF4-FFF2-40B4-BE49-F238E27FC236}">
+                <a16:creationId xmlns:a16="http://schemas.microsoft.com/office/drawing/2014/main" id="{05959AEC-B0A5-45F0-A65B-C94C3E5A032F}"/>
+              </a:ext>
+            </a:extLst>
+          </p:cNvPr>
+          <p:cNvSpPr>
+            <a:spLocks xmlns:a="http://schemas.openxmlformats.org/drawingml/2006/main" noGrp="1"/>
+          </p:cNvSpPr>
+          <p:nvPr/>
+        </p:nvSpPr>
+        <p:spPr>
+          <a:xfrm xmlns:a="http://schemas.openxmlformats.org/drawingml/2006/main">
+            <a:off x="11239500" y="6496050"/>
+            <a:ext cx="495300" cy="190500"/>
+          </a:xfrm>
+          <a:prstGeom xmlns:a="http://schemas.openxmlformats.org/drawingml/2006/main" prst="rect">
+            <a:avLst/>
+          </a:prstGeom>
+          <a:noFill xmlns:a="http://schemas.openxmlformats.org/drawingml/2006/main"/>
+          <a:ln xmlns:a="http://schemas.openxmlformats.org/drawingml/2006/main" w="0">
+            <a:noFill/>
+            <a:prstDash val="solid"/>
+          </a:ln>
+        </p:spPr>
+        <p:txBody>
+          <a:bodyPr xmlns:a="http://schemas.openxmlformats.org/drawingml/2006/main" wrap="square" lIns="0" tIns="0" rIns="0" bIns="0" anchor="t">
+            <a:normAutofit fontScale="100000"/>
+          </a:bodyPr>
+          <a:lstStyle xmlns:a="http://schemas.openxmlformats.org/drawingml/2006/main"/>
+          <a:p xmlns:a="http://schemas.openxmlformats.org/drawingml/2006/main">
+            <a:pPr algn="r">
+              <a:buNone/>
+              <a:defRPr sz="1050" b="0">
+                <a:solidFill>
+                  <a:srgbClr val="667384"/>
+                </a:solidFill>
+                <a:latin typeface="Arial"/>
+                <a:ea typeface="Arial"/>
+                <a:cs typeface="Arial"/>
+              </a:defRPr>
+            </a:pPr>
+            <a:r>
+              <a:rPr sz="1050" b="0">
+                <a:solidFill>
+                  <a:srgbClr val="667384"/>
+                </a:solidFill>
+                <a:latin typeface="Arial"/>
+                <a:ea typeface="Arial"/>
+                <a:cs typeface="Arial"/>
+              </a:rPr>
+              <a:t>27</a:t>
+            </a:r>
+          </a:p>
+        </p:txBody>
+      </p:sp>
+      <p:sp>
+        <p:nvSpPr>
+          <p:cNvPr id="6" name="">
+            <a:extLst xmlns:a="http://schemas.openxmlformats.org/drawingml/2006/main">
+              <a:ext uri="{FF2B5EF4-FFF2-40B4-BE49-F238E27FC236}">
+                <a16:creationId xmlns:a16="http://schemas.microsoft.com/office/drawing/2014/main" id="{9C8DEA29-E57D-4C8D-8538-2028FF89DA7C}"/>
+              </a:ext>
+            </a:extLst>
+          </p:cNvPr>
+          <p:cNvSpPr>
+            <a:spLocks xmlns:a="http://schemas.openxmlformats.org/drawingml/2006/main" noGrp="1"/>
+          </p:cNvSpPr>
+          <p:nvPr/>
+        </p:nvSpPr>
+        <p:spPr>
+          <a:xfrm xmlns:a="http://schemas.openxmlformats.org/drawingml/2006/main">
+            <a:off x="1000125" y="1352550"/>
+            <a:ext cx="10191750" cy="4905375"/>
+          </a:xfrm>
+          <a:prstGeom xmlns:a="http://schemas.openxmlformats.org/drawingml/2006/main" prst="rect">
+            <a:avLst/>
+          </a:prstGeom>
+          <a:solidFill xmlns:a="http://schemas.openxmlformats.org/drawingml/2006/main">
+            <a:srgbClr val="FFFFFF"/>
+          </a:solidFill>
+          <a:ln xmlns:a="http://schemas.openxmlformats.org/drawingml/2006/main" w="9525">
+            <a:solidFill>
+              <a:srgbClr val="B8BCC4"/>
+            </a:solidFill>
+            <a:prstDash val="solid"/>
+          </a:ln>
+        </p:spPr>
+      </p:sp>
+      <p:sp>
+        <p:nvSpPr>
+          <p:cNvPr id="8" name="">
+            <a:extLst xmlns:a="http://schemas.openxmlformats.org/drawingml/2006/main">
+              <a:ext uri="{FF2B5EF4-FFF2-40B4-BE49-F238E27FC236}">
+                <a16:creationId xmlns:a16="http://schemas.microsoft.com/office/drawing/2014/main" id="{4346A5F2-8CC4-4151-9BDB-346D47A3096B}"/>
+              </a:ext>
+            </a:extLst>
+          </p:cNvPr>
+          <p:cNvSpPr>
+            <a:spLocks xmlns:a="http://schemas.openxmlformats.org/drawingml/2006/main" noGrp="1"/>
+          </p:cNvSpPr>
+          <p:nvPr/>
+        </p:nvSpPr>
+        <p:spPr>
+          <a:xfrm xmlns:a="http://schemas.openxmlformats.org/drawingml/2006/main">
+            <a:off x="1143000" y="6286500"/>
+            <a:ext cx="9906000" cy="171450"/>
+          </a:xfrm>
+          <a:prstGeom xmlns:a="http://schemas.openxmlformats.org/drawingml/2006/main" prst="rect">
+            <a:avLst/>
+          </a:prstGeom>
+          <a:noFill xmlns:a="http://schemas.openxmlformats.org/drawingml/2006/main"/>
+          <a:ln xmlns:a="http://schemas.openxmlformats.org/drawingml/2006/main" w="0">
+            <a:noFill/>
+            <a:prstDash val="solid"/>
+          </a:ln>
+        </p:spPr>
+        <p:txBody>
+          <a:bodyPr xmlns:a="http://schemas.openxmlformats.org/drawingml/2006/main" wrap="square" lIns="0" tIns="0" rIns="0" bIns="0" anchor="t">
+            <a:normAutofit fontScale="93750"/>
+          </a:bodyPr>
+          <a:lstStyle xmlns:a="http://schemas.openxmlformats.org/drawingml/2006/main"/>
+          <a:p xmlns:a="http://schemas.openxmlformats.org/drawingml/2006/main">
+            <a:pPr algn="ctr">
+              <a:buNone/>
+              <a:defRPr sz="1200" b="0">
+                <a:solidFill>
+                  <a:srgbClr val="667384"/>
+                </a:solidFill>
+                <a:latin typeface="Arial"/>
+                <a:ea typeface="Arial"/>
+                <a:cs typeface="Arial"/>
+              </a:defRPr>
+            </a:pPr>
+            <a:r>
+              <a:rPr sz="1200" b="0">
+                <a:solidFill>
+                  <a:srgbClr val="667384"/>
+                </a:solidFill>
+                <a:latin typeface="Arial"/>
+                <a:ea typeface="Arial"/>
+                <a:cs typeface="Arial"/>
+              </a:rPr>
+              <a:t>All 81 cells positive; 21/81 within-state BH passes; strict survivors cluster at 5–10 prior / 2–3 forward.</a:t>
+            </a:r>
+          </a:p>
+        </p:txBody>
+      </p:sp>
+      <p:pic>
+        <p:nvPicPr>
+          <p:cNvPr id="18" name=""/>
+          <p:cNvPicPr>
+            <a:picLocks xmlns:a="http://schemas.openxmlformats.org/drawingml/2006/main" noChangeAspect="1"/>
+          </p:cNvPicPr>
+          <p:nvPr/>
+        </p:nvPicPr>
+        <p:blipFill>
+          <a:blip xmlns:r="http://schemas.openxmlformats.org/officeDocument/2006/relationships" xmlns:a="http://schemas.openxmlformats.org/drawingml/2006/main" r:embed="R0dfa96f2513646e1"/>
+          <a:stretch xmlns:a="http://schemas.openxmlformats.org/drawingml/2006/main"/>
+        </p:blipFill>
+        <p:spPr>
+          <a:xfrm xmlns:a="http://schemas.openxmlformats.org/drawingml/2006/main" flipH="0" flipV="0">
+            <a:off x="2942545" y="1352550"/>
+            <a:ext cx="6306911" cy="4905375"/>
+          </a:xfrm>
+          <a:prstGeom xmlns:a="http://schemas.openxmlformats.org/drawingml/2006/main" prst="rect">
+            <a:avLst/>
+          </a:prstGeom>
+        </p:spPr>
+      </p:pic>
+    </p:spTree>
+    <p:extLst>
+      <p:ext uri="{BB962C8B-B14F-4D97-AF65-F5344CB8AC3E}">
+        <p14:creationId xmlns:p14="http://schemas.microsoft.com/office/powerpoint/2010/main" val="400872380"/>
+      </p:ext>
+    </p:extLst>
+  </p:cSld>
+</p:sld>
+</file>
+
+<file path=ppt/slides/slide28.xml><?xml version="1.0" encoding="utf-8"?>
+<p:sld xmlns:p="http://schemas.openxmlformats.org/presentationml/2006/main">
+  <p:cSld>
+    <p:bg>
+      <p:bgPr>
+        <a:solidFill xmlns:a="http://schemas.openxmlformats.org/drawingml/2006/main">
+          <a:srgbClr val="FFFFFF"/>
+        </a:solidFill>
+      </p:bgPr>
+    </p:bg>
+    <p:spTree>
+      <p:nvGrpSpPr>
+        <p:cNvPr id="1" name=""/>
+        <p:cNvGrpSpPr/>
+        <p:nvPr/>
+      </p:nvGrpSpPr>
+      <p:grpSpPr>
+        <a:xfrm xmlns:a="http://schemas.openxmlformats.org/drawingml/2006/main"/>
+      </p:grpSpPr>
+      <p:sp>
+        <p:nvSpPr>
+          <p:cNvPr id="9" name="section-4">
+            <a:extLst xmlns:a="http://schemas.openxmlformats.org/drawingml/2006/main">
+              <a:ext uri="{FF2B5EF4-FFF2-40B4-BE49-F238E27FC236}">
+                <a16:creationId xmlns:a16="http://schemas.microsoft.com/office/drawing/2014/main" id="{8AE0A271-669A-49F0-A82E-C4438BEE27D9}"/>
+              </a:ext>
+            </a:extLst>
+          </p:cNvPr>
+          <p:cNvSpPr>
+            <a:spLocks xmlns:a="http://schemas.openxmlformats.org/drawingml/2006/main" noGrp="1"/>
+          </p:cNvSpPr>
+          <p:nvPr/>
+        </p:nvSpPr>
+        <p:spPr>
+          <a:xfrm xmlns:a="http://schemas.openxmlformats.org/drawingml/2006/main">
+            <a:off x="457200" y="228600"/>
+            <a:ext cx="4191000" cy="228600"/>
+          </a:xfrm>
+          <a:prstGeom xmlns:a="http://schemas.openxmlformats.org/drawingml/2006/main" prst="rect">
+            <a:avLst/>
+          </a:prstGeom>
+          <a:noFill xmlns:a="http://schemas.openxmlformats.org/drawingml/2006/main"/>
+          <a:ln xmlns:a="http://schemas.openxmlformats.org/drawingml/2006/main" w="0">
+            <a:noFill/>
+            <a:prstDash val="solid"/>
+          </a:ln>
+        </p:spPr>
+        <p:txBody>
+          <a:bodyPr xmlns:a="http://schemas.openxmlformats.org/drawingml/2006/main" wrap="square" lIns="0" tIns="0" rIns="0" bIns="0" anchor="t">
+            <a:normAutofit fontScale="100000"/>
+          </a:bodyPr>
+          <a:lstStyle xmlns:a="http://schemas.openxmlformats.org/drawingml/2006/main"/>
+          <a:p xmlns:a="http://schemas.openxmlformats.org/drawingml/2006/main">
+            <a:pPr algn="l">
+              <a:buNone/>
+              <a:defRPr sz="1200" b="1">
+                <a:solidFill>
+                  <a:srgbClr val="667384"/>
+                </a:solidFill>
+                <a:latin typeface="Arial"/>
+                <a:ea typeface="Arial"/>
+                <a:cs typeface="Arial"/>
+              </a:defRPr>
+            </a:pPr>
+            <a:r>
+              <a:rPr sz="1200" b="1">
+                <a:solidFill>
+                  <a:srgbClr val="667384"/>
+                </a:solidFill>
+                <a:latin typeface="Arial"/>
+                <a:ea typeface="Arial"/>
+                <a:cs typeface="Arial"/>
+              </a:rPr>
+              <a:t>TSLA DESCRIPTIVE MICROSCOPE</a:t>
+            </a:r>
+          </a:p>
+        </p:txBody>
+      </p:sp>
+      <p:sp>
+        <p:nvSpPr>
+          <p:cNvPr id="2" name="title-4">
+            <a:extLst xmlns:a="http://schemas.openxmlformats.org/drawingml/2006/main">
+              <a:ext uri="{FF2B5EF4-FFF2-40B4-BE49-F238E27FC236}">
+                <a16:creationId xmlns:a16="http://schemas.microsoft.com/office/drawing/2014/main" id="{50C6F92F-721A-4252-9CF8-B5C9B01C7310}"/>
+              </a:ext>
+            </a:extLst>
+          </p:cNvPr>
+          <p:cNvSpPr>
+            <a:spLocks xmlns:a="http://schemas.openxmlformats.org/drawingml/2006/main" noGrp="1"/>
+          </p:cNvSpPr>
+          <p:nvPr/>
+        </p:nvSpPr>
+        <p:spPr>
+          <a:xfrm xmlns:a="http://schemas.openxmlformats.org/drawingml/2006/main">
+            <a:off x="457200" y="533400"/>
+            <a:ext cx="11277600" cy="628650"/>
+          </a:xfrm>
+          <a:prstGeom xmlns:a="http://schemas.openxmlformats.org/drawingml/2006/main" prst="rect">
+            <a:avLst/>
+          </a:prstGeom>
+          <a:noFill xmlns:a="http://schemas.openxmlformats.org/drawingml/2006/main"/>
+          <a:ln xmlns:a="http://schemas.openxmlformats.org/drawingml/2006/main" w="0">
+            <a:noFill/>
+            <a:prstDash val="solid"/>
+          </a:ln>
+        </p:spPr>
+        <p:txBody>
+          <a:bodyPr xmlns:a="http://schemas.openxmlformats.org/drawingml/2006/main" wrap="square" lIns="0" tIns="0" rIns="0" bIns="0" anchor="t">
+            <a:normAutofit fontScale="100000"/>
+          </a:bodyPr>
+          <a:lstStyle xmlns:a="http://schemas.openxmlformats.org/drawingml/2006/main"/>
+          <a:p xmlns:a="http://schemas.openxmlformats.org/drawingml/2006/main">
+            <a:pPr algn="l">
+              <a:buNone/>
+              <a:defRPr sz="3525" b="1">
+                <a:solidFill>
+                  <a:srgbClr val="000000"/>
+                </a:solidFill>
+                <a:latin typeface="Arial"/>
+                <a:ea typeface="Arial"/>
+                <a:cs typeface="Arial"/>
+              </a:defRPr>
+            </a:pPr>
+            <a:r>
+              <a:rPr sz="3525" b="1">
+                <a:solidFill>
+                  <a:srgbClr val="000000"/>
+                </a:solidFill>
+                <a:latin typeface="Arial"/>
+                <a:ea typeface="Arial"/>
+                <a:cs typeface="Arial"/>
+              </a:rPr>
+              <a:t>HIGH ATR% flips the surface toward reversal</a:t>
+            </a:r>
+          </a:p>
+        </p:txBody>
+      </p:sp>
+      <p:sp>
+        <p:nvSpPr>
+          <p:cNvPr id="3" name="">
+            <a:extLst xmlns:a="http://schemas.openxmlformats.org/drawingml/2006/main">
+              <a:ext uri="{FF2B5EF4-FFF2-40B4-BE49-F238E27FC236}">
+                <a16:creationId xmlns:a16="http://schemas.microsoft.com/office/drawing/2014/main" id="{242399F2-4D0A-4337-B17E-DB3599DC380F}"/>
+              </a:ext>
+            </a:extLst>
+          </p:cNvPr>
+          <p:cNvSpPr>
+            <a:spLocks xmlns:a="http://schemas.openxmlformats.org/drawingml/2006/main" noGrp="1"/>
+          </p:cNvSpPr>
+          <p:nvPr/>
+        </p:nvSpPr>
+        <p:spPr>
+          <a:xfrm xmlns:a="http://schemas.openxmlformats.org/drawingml/2006/main">
+            <a:off x="457200" y="1200150"/>
+            <a:ext cx="11277600" cy="19050"/>
+          </a:xfrm>
+          <a:prstGeom xmlns:a="http://schemas.openxmlformats.org/drawingml/2006/main" prst="rect">
+            <a:avLst/>
+          </a:prstGeom>
+          <a:solidFill xmlns:a="http://schemas.openxmlformats.org/drawingml/2006/main">
+            <a:srgbClr val="B8BCC4"/>
+          </a:solidFill>
+          <a:ln xmlns:a="http://schemas.openxmlformats.org/drawingml/2006/main" w="0">
+            <a:solidFill>
+              <a:srgbClr val="B8BCC4"/>
+            </a:solidFill>
+            <a:prstDash val="solid"/>
+          </a:ln>
+        </p:spPr>
+      </p:sp>
+      <p:sp>
+        <p:nvSpPr>
+          <p:cNvPr id="4" name="footer-left-4">
+            <a:extLst xmlns:a="http://schemas.openxmlformats.org/drawingml/2006/main">
+              <a:ext uri="{FF2B5EF4-FFF2-40B4-BE49-F238E27FC236}">
+                <a16:creationId xmlns:a16="http://schemas.microsoft.com/office/drawing/2014/main" id="{BF8B82CA-1E48-4669-BAD8-1FF8C09FCBFB}"/>
+              </a:ext>
+            </a:extLst>
+          </p:cNvPr>
+          <p:cNvSpPr>
+            <a:spLocks xmlns:a="http://schemas.openxmlformats.org/drawingml/2006/main" noGrp="1"/>
+          </p:cNvSpPr>
+          <p:nvPr/>
+        </p:nvSpPr>
+        <p:spPr>
+          <a:xfrm xmlns:a="http://schemas.openxmlformats.org/drawingml/2006/main">
+            <a:off x="457200" y="6515100"/>
+            <a:ext cx="3429000" cy="171450"/>
+          </a:xfrm>
+          <a:prstGeom xmlns:a="http://schemas.openxmlformats.org/drawingml/2006/main" prst="rect">
+            <a:avLst/>
+          </a:prstGeom>
+          <a:noFill xmlns:a="http://schemas.openxmlformats.org/drawingml/2006/main"/>
+          <a:ln xmlns:a="http://schemas.openxmlformats.org/drawingml/2006/main" w="0">
+            <a:noFill/>
+            <a:prstDash val="solid"/>
+          </a:ln>
+        </p:spPr>
+        <p:txBody>
+          <a:bodyPr xmlns:a="http://schemas.openxmlformats.org/drawingml/2006/main" wrap="square" lIns="0" tIns="0" rIns="0" bIns="0" anchor="t">
+            <a:normAutofit fontScale="100000"/>
+          </a:bodyPr>
+          <a:lstStyle xmlns:a="http://schemas.openxmlformats.org/drawingml/2006/main"/>
+          <a:p xmlns:a="http://schemas.openxmlformats.org/drawingml/2006/main">
+            <a:pPr algn="l">
+              <a:buNone/>
+              <a:defRPr sz="1050" b="0">
+                <a:solidFill>
+                  <a:srgbClr val="667384"/>
+                </a:solidFill>
+                <a:latin typeface="Arial"/>
+                <a:ea typeface="Arial"/>
+                <a:cs typeface="Arial"/>
+              </a:defRPr>
+            </a:pPr>
+            <a:r>
+              <a:rPr sz="1050" b="0">
+                <a:solidFill>
+                  <a:srgbClr val="667384"/>
+                </a:solidFill>
+                <a:latin typeface="Arial"/>
+                <a:ea typeface="Arial"/>
+                <a:cs typeface="Arial"/>
+              </a:rPr>
+              <a:t>Adjusted daily TSLA | 2018-2023</a:t>
+            </a:r>
+          </a:p>
+        </p:txBody>
+      </p:sp>
+      <p:sp>
+        <p:nvSpPr>
+          <p:cNvPr id="5" name="footer-number-4">
+            <a:extLst xmlns:a="http://schemas.openxmlformats.org/drawingml/2006/main">
+              <a:ext uri="{FF2B5EF4-FFF2-40B4-BE49-F238E27FC236}">
+                <a16:creationId xmlns:a16="http://schemas.microsoft.com/office/drawing/2014/main" id="{05959AEC-B0A5-45F0-A65B-C94C3E5A032F}"/>
+              </a:ext>
+            </a:extLst>
+          </p:cNvPr>
+          <p:cNvSpPr>
+            <a:spLocks xmlns:a="http://schemas.openxmlformats.org/drawingml/2006/main" noGrp="1"/>
+          </p:cNvSpPr>
+          <p:nvPr/>
+        </p:nvSpPr>
+        <p:spPr>
+          <a:xfrm xmlns:a="http://schemas.openxmlformats.org/drawingml/2006/main">
+            <a:off x="11239500" y="6496050"/>
+            <a:ext cx="495300" cy="190500"/>
+          </a:xfrm>
+          <a:prstGeom xmlns:a="http://schemas.openxmlformats.org/drawingml/2006/main" prst="rect">
+            <a:avLst/>
+          </a:prstGeom>
+          <a:noFill xmlns:a="http://schemas.openxmlformats.org/drawingml/2006/main"/>
+          <a:ln xmlns:a="http://schemas.openxmlformats.org/drawingml/2006/main" w="0">
+            <a:noFill/>
+            <a:prstDash val="solid"/>
+          </a:ln>
+        </p:spPr>
+        <p:txBody>
+          <a:bodyPr xmlns:a="http://schemas.openxmlformats.org/drawingml/2006/main" wrap="square" lIns="0" tIns="0" rIns="0" bIns="0" anchor="t">
+            <a:normAutofit fontScale="100000"/>
+          </a:bodyPr>
+          <a:lstStyle xmlns:a="http://schemas.openxmlformats.org/drawingml/2006/main"/>
+          <a:p xmlns:a="http://schemas.openxmlformats.org/drawingml/2006/main">
+            <a:pPr algn="r">
+              <a:buNone/>
+              <a:defRPr sz="1050" b="0">
+                <a:solidFill>
+                  <a:srgbClr val="667384"/>
+                </a:solidFill>
+                <a:latin typeface="Arial"/>
+                <a:ea typeface="Arial"/>
+                <a:cs typeface="Arial"/>
+              </a:defRPr>
+            </a:pPr>
+            <a:r>
+              <a:rPr sz="1050" b="0">
+                <a:solidFill>
+                  <a:srgbClr val="667384"/>
+                </a:solidFill>
+                <a:latin typeface="Arial"/>
+                <a:ea typeface="Arial"/>
+                <a:cs typeface="Arial"/>
+              </a:rPr>
+              <a:t>28</a:t>
+            </a:r>
+          </a:p>
+        </p:txBody>
+      </p:sp>
+      <p:sp>
+        <p:nvSpPr>
+          <p:cNvPr id="6" name="">
+            <a:extLst xmlns:a="http://schemas.openxmlformats.org/drawingml/2006/main">
+              <a:ext uri="{FF2B5EF4-FFF2-40B4-BE49-F238E27FC236}">
+                <a16:creationId xmlns:a16="http://schemas.microsoft.com/office/drawing/2014/main" id="{9C8DEA29-E57D-4C8D-8538-2028FF89DA7C}"/>
+              </a:ext>
+            </a:extLst>
+          </p:cNvPr>
+          <p:cNvSpPr>
+            <a:spLocks xmlns:a="http://schemas.openxmlformats.org/drawingml/2006/main" noGrp="1"/>
+          </p:cNvSpPr>
+          <p:nvPr/>
+        </p:nvSpPr>
+        <p:spPr>
+          <a:xfrm xmlns:a="http://schemas.openxmlformats.org/drawingml/2006/main">
+            <a:off x="1000125" y="1352550"/>
+            <a:ext cx="10191750" cy="4905375"/>
+          </a:xfrm>
+          <a:prstGeom xmlns:a="http://schemas.openxmlformats.org/drawingml/2006/main" prst="rect">
+            <a:avLst/>
+          </a:prstGeom>
+          <a:solidFill xmlns:a="http://schemas.openxmlformats.org/drawingml/2006/main">
+            <a:srgbClr val="FFFFFF"/>
+          </a:solidFill>
+          <a:ln xmlns:a="http://schemas.openxmlformats.org/drawingml/2006/main" w="9525">
+            <a:solidFill>
+              <a:srgbClr val="B8BCC4"/>
+            </a:solidFill>
+            <a:prstDash val="solid"/>
+          </a:ln>
+        </p:spPr>
+      </p:sp>
+      <p:sp>
+        <p:nvSpPr>
+          <p:cNvPr id="8" name="">
+            <a:extLst xmlns:a="http://schemas.openxmlformats.org/drawingml/2006/main">
+              <a:ext uri="{FF2B5EF4-FFF2-40B4-BE49-F238E27FC236}">
+                <a16:creationId xmlns:a16="http://schemas.microsoft.com/office/drawing/2014/main" id="{4346A5F2-8CC4-4151-9BDB-346D47A3096B}"/>
+              </a:ext>
+            </a:extLst>
+          </p:cNvPr>
+          <p:cNvSpPr>
+            <a:spLocks xmlns:a="http://schemas.openxmlformats.org/drawingml/2006/main" noGrp="1"/>
+          </p:cNvSpPr>
+          <p:nvPr/>
+        </p:nvSpPr>
+        <p:spPr>
+          <a:xfrm xmlns:a="http://schemas.openxmlformats.org/drawingml/2006/main">
+            <a:off x="1143000" y="6286500"/>
+            <a:ext cx="9906000" cy="171450"/>
+          </a:xfrm>
+          <a:prstGeom xmlns:a="http://schemas.openxmlformats.org/drawingml/2006/main" prst="rect">
+            <a:avLst/>
+          </a:prstGeom>
+          <a:noFill xmlns:a="http://schemas.openxmlformats.org/drawingml/2006/main"/>
+          <a:ln xmlns:a="http://schemas.openxmlformats.org/drawingml/2006/main" w="0">
+            <a:noFill/>
+            <a:prstDash val="solid"/>
+          </a:ln>
+        </p:spPr>
+        <p:txBody>
+          <a:bodyPr xmlns:a="http://schemas.openxmlformats.org/drawingml/2006/main" wrap="square" lIns="0" tIns="0" rIns="0" bIns="0" anchor="t">
+            <a:normAutofit fontScale="93750"/>
+          </a:bodyPr>
+          <a:lstStyle xmlns:a="http://schemas.openxmlformats.org/drawingml/2006/main"/>
+          <a:p xmlns:a="http://schemas.openxmlformats.org/drawingml/2006/main">
+            <a:pPr algn="ctr">
+              <a:buNone/>
+              <a:defRPr sz="1200" b="0">
+                <a:solidFill>
+                  <a:srgbClr val="667384"/>
+                </a:solidFill>
+                <a:latin typeface="Arial"/>
+                <a:ea typeface="Arial"/>
+                <a:cs typeface="Arial"/>
+              </a:defRPr>
+            </a:pPr>
+            <a:r>
+              <a:rPr sz="1200" b="0">
+                <a:solidFill>
+                  <a:srgbClr val="667384"/>
+                </a:solidFill>
+                <a:latin typeface="Arial"/>
+                <a:ea typeface="Arial"/>
+                <a:cs typeface="Arial"/>
+              </a:rPr>
+              <a:t>77/81 cells negative; strongest -0.301 at 20 prior / 20 forward; 0/81 within-state BH passes.</a:t>
+            </a:r>
+          </a:p>
+        </p:txBody>
+      </p:sp>
+      <p:pic>
+        <p:nvPicPr>
+          <p:cNvPr id="18" name=""/>
+          <p:cNvPicPr>
+            <a:picLocks xmlns:a="http://schemas.openxmlformats.org/drawingml/2006/main" noChangeAspect="1"/>
+          </p:cNvPicPr>
+          <p:nvPr/>
+        </p:nvPicPr>
+        <p:blipFill>
+          <a:blip xmlns:r="http://schemas.openxmlformats.org/officeDocument/2006/relationships" xmlns:a="http://schemas.openxmlformats.org/drawingml/2006/main" r:embed="R73bedb1da1d04027"/>
+          <a:stretch xmlns:a="http://schemas.openxmlformats.org/drawingml/2006/main"/>
+        </p:blipFill>
+        <p:spPr>
+          <a:xfrm xmlns:a="http://schemas.openxmlformats.org/drawingml/2006/main" flipH="0" flipV="0">
+            <a:off x="2942545" y="1352550"/>
+            <a:ext cx="6306911" cy="4905375"/>
+          </a:xfrm>
+          <a:prstGeom xmlns:a="http://schemas.openxmlformats.org/drawingml/2006/main" prst="rect">
+            <a:avLst/>
+          </a:prstGeom>
+        </p:spPr>
+      </p:pic>
+    </p:spTree>
+    <p:extLst>
+      <p:ext uri="{BB962C8B-B14F-4D97-AF65-F5344CB8AC3E}">
+        <p14:creationId xmlns:p14="http://schemas.microsoft.com/office/powerpoint/2010/main" val="400872380"/>
+      </p:ext>
+    </p:extLst>
+  </p:cSld>
+</p:sld>
+</file>
+
+<file path=ppt/slides/slide29.xml><?xml version="1.0" encoding="utf-8"?>
+<p:sld xmlns:p="http://schemas.openxmlformats.org/presentationml/2006/main">
+  <p:cSld>
+    <p:bg>
+      <p:bgPr>
+        <a:solidFill xmlns:a="http://schemas.openxmlformats.org/drawingml/2006/main">
+          <a:srgbClr val="FFFFFF"/>
+        </a:solidFill>
+      </p:bgPr>
+    </p:bg>
+    <p:spTree>
+      <p:nvGrpSpPr>
+        <p:cNvPr id="1" name=""/>
+        <p:cNvGrpSpPr/>
+        <p:nvPr/>
+      </p:nvGrpSpPr>
+      <p:grpSpPr>
+        <a:xfrm xmlns:a="http://schemas.openxmlformats.org/drawingml/2006/main"/>
+      </p:grpSpPr>
+      <p:sp>
+        <p:nvSpPr>
+          <p:cNvPr id="20" name="section-7">
+            <a:extLst xmlns:a="http://schemas.openxmlformats.org/drawingml/2006/main">
+              <a:ext uri="{FF2B5EF4-FFF2-40B4-BE49-F238E27FC236}">
+                <a16:creationId xmlns:a16="http://schemas.microsoft.com/office/drawing/2014/main" id="{BAC8373F-594E-467B-A8F8-56439CEBE044}"/>
+              </a:ext>
+            </a:extLst>
+          </p:cNvPr>
+          <p:cNvSpPr>
+            <a:spLocks xmlns:a="http://schemas.openxmlformats.org/drawingml/2006/main" noGrp="1"/>
+          </p:cNvSpPr>
+          <p:nvPr/>
+        </p:nvSpPr>
+        <p:spPr>
+          <a:xfrm xmlns:a="http://schemas.openxmlformats.org/drawingml/2006/main">
+            <a:off x="457200" y="228600"/>
+            <a:ext cx="4191000" cy="228600"/>
+          </a:xfrm>
+          <a:prstGeom xmlns:a="http://schemas.openxmlformats.org/drawingml/2006/main" prst="rect">
+            <a:avLst/>
+          </a:prstGeom>
+          <a:noFill xmlns:a="http://schemas.openxmlformats.org/drawingml/2006/main"/>
+          <a:ln xmlns:a="http://schemas.openxmlformats.org/drawingml/2006/main" w="0">
+            <a:noFill/>
+            <a:prstDash val="solid"/>
+          </a:ln>
+        </p:spPr>
+        <p:txBody>
+          <a:bodyPr xmlns:a="http://schemas.openxmlformats.org/drawingml/2006/main" wrap="square" lIns="0" tIns="0" rIns="0" bIns="0" anchor="t">
+            <a:normAutofit fontScale="100000"/>
+          </a:bodyPr>
+          <a:lstStyle xmlns:a="http://schemas.openxmlformats.org/drawingml/2006/main"/>
+          <a:p xmlns:a="http://schemas.openxmlformats.org/drawingml/2006/main">
+            <a:pPr algn="l">
+              <a:buNone/>
+              <a:defRPr sz="1200" b="1">
+                <a:solidFill>
+                  <a:srgbClr val="667384"/>
+                </a:solidFill>
+                <a:latin typeface="Arial"/>
+                <a:ea typeface="Arial"/>
+                <a:cs typeface="Arial"/>
+              </a:defRPr>
+            </a:pPr>
+            <a:r>
+              <a:rPr sz="1200" b="1">
+                <a:solidFill>
+                  <a:srgbClr val="667384"/>
+                </a:solidFill>
+                <a:latin typeface="Arial"/>
+                <a:ea typeface="Arial"/>
+                <a:cs typeface="Arial"/>
+              </a:rPr>
+              <a:t>TSLA DESCRIPTIVE MICROSCOPE</a:t>
+            </a:r>
+          </a:p>
+        </p:txBody>
+      </p:sp>
+      <p:sp>
+        <p:nvSpPr>
+          <p:cNvPr id="2" name="title-7">
+            <a:extLst xmlns:a="http://schemas.openxmlformats.org/drawingml/2006/main">
+              <a:ext uri="{FF2B5EF4-FFF2-40B4-BE49-F238E27FC236}">
+                <a16:creationId xmlns:a16="http://schemas.microsoft.com/office/drawing/2014/main" id="{7592E6E5-EA60-427F-BAB4-42C154D8CC5F}"/>
+              </a:ext>
+            </a:extLst>
+          </p:cNvPr>
+          <p:cNvSpPr>
+            <a:spLocks xmlns:a="http://schemas.openxmlformats.org/drawingml/2006/main" noGrp="1"/>
+          </p:cNvSpPr>
+          <p:nvPr/>
+        </p:nvSpPr>
+        <p:spPr>
+          <a:xfrm xmlns:a="http://schemas.openxmlformats.org/drawingml/2006/main">
+            <a:off x="457200" y="533400"/>
+            <a:ext cx="11277600" cy="628650"/>
+          </a:xfrm>
+          <a:prstGeom xmlns:a="http://schemas.openxmlformats.org/drawingml/2006/main" prst="rect">
+            <a:avLst/>
+          </a:prstGeom>
+          <a:noFill xmlns:a="http://schemas.openxmlformats.org/drawingml/2006/main"/>
+          <a:ln xmlns:a="http://schemas.openxmlformats.org/drawingml/2006/main" w="0">
+            <a:noFill/>
+            <a:prstDash val="solid"/>
+          </a:ln>
+        </p:spPr>
+        <p:txBody>
+          <a:bodyPr xmlns:a="http://schemas.openxmlformats.org/drawingml/2006/main" wrap="square" lIns="0" tIns="0" rIns="0" bIns="0" anchor="t">
+            <a:normAutofit fontScale="100000"/>
+          </a:bodyPr>
+          <a:lstStyle xmlns:a="http://schemas.openxmlformats.org/drawingml/2006/main"/>
+          <a:p xmlns:a="http://schemas.openxmlformats.org/drawingml/2006/main">
+            <a:pPr algn="l">
+              <a:buNone/>
+              <a:defRPr sz="3525" b="1">
+                <a:solidFill>
+                  <a:srgbClr val="000000"/>
+                </a:solidFill>
+                <a:latin typeface="Arial"/>
+                <a:ea typeface="Arial"/>
+                <a:cs typeface="Arial"/>
+              </a:defRPr>
+            </a:pPr>
+            <a:r>
+              <a:rPr sz="3525" b="1">
+                <a:solidFill>
+                  <a:srgbClr val="000000"/>
+                </a:solidFill>
+                <a:latin typeface="Arial"/>
+                <a:ea typeface="Arial"/>
+                <a:cs typeface="Arial"/>
+              </a:rPr>
+              <a:t>HIGH and MEDIUM contain direct state differences</a:t>
+            </a:r>
+          </a:p>
+        </p:txBody>
+      </p:sp>
+      <p:sp>
+        <p:nvSpPr>
+          <p:cNvPr id="3" name="">
+            <a:extLst xmlns:a="http://schemas.openxmlformats.org/drawingml/2006/main">
+              <a:ext uri="{FF2B5EF4-FFF2-40B4-BE49-F238E27FC236}">
+                <a16:creationId xmlns:a16="http://schemas.microsoft.com/office/drawing/2014/main" id="{C852E1AC-5CE8-4847-87B1-81C28A4EFEDE}"/>
+              </a:ext>
+            </a:extLst>
+          </p:cNvPr>
+          <p:cNvSpPr>
+            <a:spLocks xmlns:a="http://schemas.openxmlformats.org/drawingml/2006/main" noGrp="1"/>
+          </p:cNvSpPr>
+          <p:nvPr/>
+        </p:nvSpPr>
+        <p:spPr>
+          <a:xfrm xmlns:a="http://schemas.openxmlformats.org/drawingml/2006/main">
+            <a:off x="457200" y="1200150"/>
+            <a:ext cx="11277600" cy="19050"/>
+          </a:xfrm>
+          <a:prstGeom xmlns:a="http://schemas.openxmlformats.org/drawingml/2006/main" prst="rect">
+            <a:avLst/>
+          </a:prstGeom>
+          <a:solidFill xmlns:a="http://schemas.openxmlformats.org/drawingml/2006/main">
+            <a:srgbClr val="B8BCC4"/>
+          </a:solidFill>
+          <a:ln xmlns:a="http://schemas.openxmlformats.org/drawingml/2006/main" w="0">
+            <a:solidFill>
+              <a:srgbClr val="B8BCC4"/>
+            </a:solidFill>
+            <a:prstDash val="solid"/>
+          </a:ln>
+        </p:spPr>
+      </p:sp>
+      <p:sp>
+        <p:nvSpPr>
+          <p:cNvPr id="4" name="footer-left-7">
+            <a:extLst xmlns:a="http://schemas.openxmlformats.org/drawingml/2006/main">
+              <a:ext uri="{FF2B5EF4-FFF2-40B4-BE49-F238E27FC236}">
+                <a16:creationId xmlns:a16="http://schemas.microsoft.com/office/drawing/2014/main" id="{4896B590-20BC-4B46-9282-D9F5A22A0CC5}"/>
+              </a:ext>
+            </a:extLst>
+          </p:cNvPr>
+          <p:cNvSpPr>
+            <a:spLocks xmlns:a="http://schemas.openxmlformats.org/drawingml/2006/main" noGrp="1"/>
+          </p:cNvSpPr>
+          <p:nvPr/>
+        </p:nvSpPr>
+        <p:spPr>
+          <a:xfrm xmlns:a="http://schemas.openxmlformats.org/drawingml/2006/main">
+            <a:off x="457200" y="6515100"/>
+            <a:ext cx="3429000" cy="171450"/>
+          </a:xfrm>
+          <a:prstGeom xmlns:a="http://schemas.openxmlformats.org/drawingml/2006/main" prst="rect">
+            <a:avLst/>
+          </a:prstGeom>
+          <a:noFill xmlns:a="http://schemas.openxmlformats.org/drawingml/2006/main"/>
+          <a:ln xmlns:a="http://schemas.openxmlformats.org/drawingml/2006/main" w="0">
+            <a:noFill/>
+            <a:prstDash val="solid"/>
+          </a:ln>
+        </p:spPr>
+        <p:txBody>
+          <a:bodyPr xmlns:a="http://schemas.openxmlformats.org/drawingml/2006/main" wrap="square" lIns="0" tIns="0" rIns="0" bIns="0" anchor="t">
+            <a:normAutofit fontScale="100000"/>
+          </a:bodyPr>
+          <a:lstStyle xmlns:a="http://schemas.openxmlformats.org/drawingml/2006/main"/>
+          <a:p xmlns:a="http://schemas.openxmlformats.org/drawingml/2006/main">
+            <a:pPr algn="l">
+              <a:buNone/>
+              <a:defRPr sz="1050" b="0">
+                <a:solidFill>
+                  <a:srgbClr val="667384"/>
+                </a:solidFill>
+                <a:latin typeface="Arial"/>
+                <a:ea typeface="Arial"/>
+                <a:cs typeface="Arial"/>
+              </a:defRPr>
+            </a:pPr>
+            <a:r>
+              <a:rPr sz="1050" b="0">
+                <a:solidFill>
+                  <a:srgbClr val="667384"/>
+                </a:solidFill>
+                <a:latin typeface="Arial"/>
+                <a:ea typeface="Arial"/>
+                <a:cs typeface="Arial"/>
+              </a:rPr>
+              <a:t>Adjusted daily TSLA | 2018-2023</a:t>
+            </a:r>
+          </a:p>
+        </p:txBody>
+      </p:sp>
+      <p:sp>
+        <p:nvSpPr>
+          <p:cNvPr id="5" name="footer-number-7">
+            <a:extLst xmlns:a="http://schemas.openxmlformats.org/drawingml/2006/main">
+              <a:ext uri="{FF2B5EF4-FFF2-40B4-BE49-F238E27FC236}">
+                <a16:creationId xmlns:a16="http://schemas.microsoft.com/office/drawing/2014/main" id="{1503EFAF-F487-4981-AFDC-23F1B41A7207}"/>
+              </a:ext>
+            </a:extLst>
+          </p:cNvPr>
+          <p:cNvSpPr>
+            <a:spLocks xmlns:a="http://schemas.openxmlformats.org/drawingml/2006/main" noGrp="1"/>
+          </p:cNvSpPr>
+          <p:nvPr/>
+        </p:nvSpPr>
+        <p:spPr>
+          <a:xfrm xmlns:a="http://schemas.openxmlformats.org/drawingml/2006/main">
+            <a:off x="11239500" y="6496050"/>
+            <a:ext cx="495300" cy="190500"/>
+          </a:xfrm>
+          <a:prstGeom xmlns:a="http://schemas.openxmlformats.org/drawingml/2006/main" prst="rect">
+            <a:avLst/>
+          </a:prstGeom>
+          <a:noFill xmlns:a="http://schemas.openxmlformats.org/drawingml/2006/main"/>
+          <a:ln xmlns:a="http://schemas.openxmlformats.org/drawingml/2006/main" w="0">
+            <a:noFill/>
+            <a:prstDash val="solid"/>
+          </a:ln>
+        </p:spPr>
+        <p:txBody>
+          <a:bodyPr xmlns:a="http://schemas.openxmlformats.org/drawingml/2006/main" wrap="square" lIns="0" tIns="0" rIns="0" bIns="0" anchor="t">
+            <a:normAutofit fontScale="100000"/>
+          </a:bodyPr>
+          <a:lstStyle xmlns:a="http://schemas.openxmlformats.org/drawingml/2006/main"/>
+          <a:p xmlns:a="http://schemas.openxmlformats.org/drawingml/2006/main">
+            <a:pPr algn="r">
+              <a:buNone/>
+              <a:defRPr sz="1050" b="0">
+                <a:solidFill>
+                  <a:srgbClr val="667384"/>
+                </a:solidFill>
+                <a:latin typeface="Arial"/>
+                <a:ea typeface="Arial"/>
+                <a:cs typeface="Arial"/>
+              </a:defRPr>
+            </a:pPr>
+            <a:r>
+              <a:rPr sz="1050" b="0">
+                <a:solidFill>
+                  <a:srgbClr val="667384"/>
+                </a:solidFill>
+                <a:latin typeface="Arial"/>
+                <a:ea typeface="Arial"/>
+                <a:cs typeface="Arial"/>
+              </a:rPr>
+              <a:t>29</a:t>
+            </a:r>
+          </a:p>
+        </p:txBody>
+      </p:sp>
+      <p:sp>
+        <p:nvSpPr>
+          <p:cNvPr id="6" name="">
+            <a:extLst xmlns:a="http://schemas.openxmlformats.org/drawingml/2006/main">
+              <a:ext uri="{FF2B5EF4-FFF2-40B4-BE49-F238E27FC236}">
+                <a16:creationId xmlns:a16="http://schemas.microsoft.com/office/drawing/2014/main" id="{4AA770DD-55E6-42DB-942A-6938E642B1A0}"/>
+              </a:ext>
+            </a:extLst>
+          </p:cNvPr>
+          <p:cNvSpPr>
+            <a:spLocks xmlns:a="http://schemas.openxmlformats.org/drawingml/2006/main" noGrp="1"/>
+          </p:cNvSpPr>
+          <p:nvPr/>
+        </p:nvSpPr>
+        <p:spPr>
+          <a:xfrm xmlns:a="http://schemas.openxmlformats.org/drawingml/2006/main">
+            <a:off x="342900" y="1428750"/>
+            <a:ext cx="7677150" cy="4762500"/>
+          </a:xfrm>
+          <a:prstGeom xmlns:a="http://schemas.openxmlformats.org/drawingml/2006/main" prst="rect">
+            <a:avLst/>
+          </a:prstGeom>
+          <a:solidFill xmlns:a="http://schemas.openxmlformats.org/drawingml/2006/main">
+            <a:srgbClr val="FFFFFF"/>
+          </a:solidFill>
+          <a:ln xmlns:a="http://schemas.openxmlformats.org/drawingml/2006/main" w="9525">
+            <a:solidFill>
+              <a:srgbClr val="B8BCC4"/>
+            </a:solidFill>
+            <a:prstDash val="solid"/>
+          </a:ln>
+        </p:spPr>
+      </p:sp>
+      <p:sp>
+        <p:nvSpPr>
+          <p:cNvPr id="8" name="">
+            <a:extLst xmlns:a="http://schemas.openxmlformats.org/drawingml/2006/main">
+              <a:ext uri="{FF2B5EF4-FFF2-40B4-BE49-F238E27FC236}">
+                <a16:creationId xmlns:a16="http://schemas.microsoft.com/office/drawing/2014/main" id="{925D1653-1738-47C8-BFA1-9C9390285CC4}"/>
+              </a:ext>
+            </a:extLst>
+          </p:cNvPr>
+          <p:cNvSpPr>
+            <a:spLocks xmlns:a="http://schemas.openxmlformats.org/drawingml/2006/main" noGrp="1"/>
+          </p:cNvSpPr>
+          <p:nvPr/>
+        </p:nvSpPr>
+        <p:spPr>
+          <a:xfrm xmlns:a="http://schemas.openxmlformats.org/drawingml/2006/main">
+            <a:off x="8362950" y="1504950"/>
+            <a:ext cx="3143250" cy="1428750"/>
+          </a:xfrm>
+          <a:prstGeom xmlns:a="http://schemas.openxmlformats.org/drawingml/2006/main" prst="rect">
+            <a:avLst/>
+          </a:prstGeom>
+          <a:solidFill xmlns:a="http://schemas.openxmlformats.org/drawingml/2006/main">
+            <a:srgbClr val="EDEDED"/>
+          </a:solidFill>
+          <a:ln xmlns:a="http://schemas.openxmlformats.org/drawingml/2006/main" w="0">
+            <a:solidFill>
+              <a:srgbClr val="EDEDED"/>
+            </a:solidFill>
+            <a:prstDash val="solid"/>
+          </a:ln>
+        </p:spPr>
+      </p:sp>
+      <p:sp>
+        <p:nvSpPr>
+          <p:cNvPr id="9" name="">
+            <a:extLst xmlns:a="http://schemas.openxmlformats.org/drawingml/2006/main">
+              <a:ext uri="{FF2B5EF4-FFF2-40B4-BE49-F238E27FC236}">
+                <a16:creationId xmlns:a16="http://schemas.microsoft.com/office/drawing/2014/main" id="{AD911094-04B5-4E98-9749-4F832E6A7030}"/>
+              </a:ext>
+            </a:extLst>
+          </p:cNvPr>
+          <p:cNvSpPr>
+            <a:spLocks xmlns:a="http://schemas.openxmlformats.org/drawingml/2006/main" noGrp="1"/>
+          </p:cNvSpPr>
+          <p:nvPr/>
+        </p:nvSpPr>
+        <p:spPr>
+          <a:xfrm xmlns:a="http://schemas.openxmlformats.org/drawingml/2006/main">
+            <a:off x="8362950" y="1504950"/>
+            <a:ext cx="76200" cy="1428750"/>
+          </a:xfrm>
+          <a:prstGeom xmlns:a="http://schemas.openxmlformats.org/drawingml/2006/main" prst="rect">
+            <a:avLst/>
+          </a:prstGeom>
+          <a:solidFill xmlns:a="http://schemas.openxmlformats.org/drawingml/2006/main">
+            <a:srgbClr val="E45756"/>
+          </a:solidFill>
+          <a:ln xmlns:a="http://schemas.openxmlformats.org/drawingml/2006/main" w="0">
+            <a:solidFill>
+              <a:srgbClr val="E45756"/>
+            </a:solidFill>
+            <a:prstDash val="solid"/>
+          </a:ln>
+        </p:spPr>
+      </p:sp>
+      <p:sp>
+        <p:nvSpPr>
+          <p:cNvPr id="10" name="">
+            <a:extLst xmlns:a="http://schemas.openxmlformats.org/drawingml/2006/main">
+              <a:ext uri="{FF2B5EF4-FFF2-40B4-BE49-F238E27FC236}">
+                <a16:creationId xmlns:a16="http://schemas.microsoft.com/office/drawing/2014/main" id="{8259A327-4374-4B4E-A3BA-F8E016498564}"/>
+              </a:ext>
+            </a:extLst>
+          </p:cNvPr>
+          <p:cNvSpPr>
+            <a:spLocks xmlns:a="http://schemas.openxmlformats.org/drawingml/2006/main" noGrp="1"/>
+          </p:cNvSpPr>
+          <p:nvPr/>
+        </p:nvSpPr>
+        <p:spPr>
+          <a:xfrm xmlns:a="http://schemas.openxmlformats.org/drawingml/2006/main">
+            <a:off x="8629650" y="1676400"/>
+            <a:ext cx="2686050" cy="590550"/>
+          </a:xfrm>
+          <a:prstGeom xmlns:a="http://schemas.openxmlformats.org/drawingml/2006/main" prst="rect">
+            <a:avLst/>
+          </a:prstGeom>
+          <a:noFill xmlns:a="http://schemas.openxmlformats.org/drawingml/2006/main"/>
+          <a:ln xmlns:a="http://schemas.openxmlformats.org/drawingml/2006/main" w="0">
+            <a:noFill/>
+            <a:prstDash val="solid"/>
+          </a:ln>
+        </p:spPr>
+        <p:txBody>
+          <a:bodyPr xmlns:a="http://schemas.openxmlformats.org/drawingml/2006/main" wrap="square" lIns="0" tIns="0" rIns="0" bIns="0" anchor="t">
+            <a:normAutofit fontScale="100000"/>
+          </a:bodyPr>
+          <a:lstStyle xmlns:a="http://schemas.openxmlformats.org/drawingml/2006/main"/>
+          <a:p xmlns:a="http://schemas.openxmlformats.org/drawingml/2006/main">
+            <a:pPr algn="l">
+              <a:buNone/>
+              <a:defRPr sz="3225" b="1">
+                <a:solidFill>
+                  <a:srgbClr val="E45756"/>
+                </a:solidFill>
+                <a:latin typeface="Arial"/>
+                <a:ea typeface="Arial"/>
+                <a:cs typeface="Arial"/>
+              </a:defRPr>
+            </a:pPr>
+            <a:r>
+              <a:rPr sz="3225" b="1">
+                <a:solidFill>
+                  <a:srgbClr val="E45756"/>
+                </a:solidFill>
+                <a:latin typeface="Arial"/>
+                <a:ea typeface="Arial"/>
+                <a:cs typeface="Arial"/>
+              </a:rPr>
+              <a:t>-0.548</a:t>
+            </a:r>
+          </a:p>
+        </p:txBody>
+      </p:sp>
+      <p:sp>
+        <p:nvSpPr>
+          <p:cNvPr id="11" name="">
+            <a:extLst xmlns:a="http://schemas.openxmlformats.org/drawingml/2006/main">
+              <a:ext uri="{FF2B5EF4-FFF2-40B4-BE49-F238E27FC236}">
+                <a16:creationId xmlns:a16="http://schemas.microsoft.com/office/drawing/2014/main" id="{BE341AE3-547D-4111-ADFF-14E5545F2DBF}"/>
+              </a:ext>
+            </a:extLst>
+          </p:cNvPr>
+          <p:cNvSpPr>
+            <a:spLocks xmlns:a="http://schemas.openxmlformats.org/drawingml/2006/main" noGrp="1"/>
+          </p:cNvSpPr>
+          <p:nvPr/>
+        </p:nvSpPr>
+        <p:spPr>
+          <a:xfrm xmlns:a="http://schemas.openxmlformats.org/drawingml/2006/main">
+            <a:off x="8629650" y="2343150"/>
+            <a:ext cx="2686050" cy="438150"/>
+          </a:xfrm>
+          <a:prstGeom xmlns:a="http://schemas.openxmlformats.org/drawingml/2006/main" prst="rect">
+            <a:avLst/>
+          </a:prstGeom>
+          <a:noFill xmlns:a="http://schemas.openxmlformats.org/drawingml/2006/main"/>
+          <a:ln xmlns:a="http://schemas.openxmlformats.org/drawingml/2006/main" w="0">
+            <a:noFill/>
+            <a:prstDash val="solid"/>
+          </a:ln>
+        </p:spPr>
+        <p:txBody>
+          <a:bodyPr xmlns:a="http://schemas.openxmlformats.org/drawingml/2006/main" wrap="square" lIns="0" tIns="0" rIns="0" bIns="0" anchor="t">
+            <a:normAutofit fontScale="100000"/>
+          </a:bodyPr>
+          <a:lstStyle xmlns:a="http://schemas.openxmlformats.org/drawingml/2006/main"/>
+          <a:p xmlns:a="http://schemas.openxmlformats.org/drawingml/2006/main">
+            <a:pPr algn="l">
+              <a:buNone/>
+              <a:defRPr sz="1350" b="0">
+                <a:solidFill>
+                  <a:srgbClr val="273548"/>
+                </a:solidFill>
+                <a:latin typeface="Arial"/>
+                <a:ea typeface="Arial"/>
+                <a:cs typeface="Arial"/>
+              </a:defRPr>
+            </a:pPr>
+            <a:r>
+              <a:rPr sz="1350" b="0">
+                <a:solidFill>
+                  <a:srgbClr val="273548"/>
+                </a:solidFill>
+                <a:latin typeface="Arial"/>
+                <a:ea typeface="Arial"/>
+                <a:cs typeface="Arial"/>
+              </a:rPr>
+              <a:t>largest correlation change: 25 prior / 15 forward</a:t>
+            </a:r>
+          </a:p>
+        </p:txBody>
+      </p:sp>
+      <p:sp>
+        <p:nvSpPr>
+          <p:cNvPr id="12" name="">
+            <a:extLst xmlns:a="http://schemas.openxmlformats.org/drawingml/2006/main">
+              <a:ext uri="{FF2B5EF4-FFF2-40B4-BE49-F238E27FC236}">
+                <a16:creationId xmlns:a16="http://schemas.microsoft.com/office/drawing/2014/main" id="{627B1C2D-BD18-4B6C-8DC8-10694F2FD365}"/>
+              </a:ext>
+            </a:extLst>
+          </p:cNvPr>
+          <p:cNvSpPr>
+            <a:spLocks xmlns:a="http://schemas.openxmlformats.org/drawingml/2006/main" noGrp="1"/>
+          </p:cNvSpPr>
+          <p:nvPr/>
+        </p:nvSpPr>
+        <p:spPr>
+          <a:xfrm xmlns:a="http://schemas.openxmlformats.org/drawingml/2006/main">
+            <a:off x="8362950" y="3143250"/>
+            <a:ext cx="3143250" cy="1428750"/>
+          </a:xfrm>
+          <a:prstGeom xmlns:a="http://schemas.openxmlformats.org/drawingml/2006/main" prst="rect">
+            <a:avLst/>
+          </a:prstGeom>
+          <a:solidFill xmlns:a="http://schemas.openxmlformats.org/drawingml/2006/main">
+            <a:srgbClr val="EDEDED"/>
+          </a:solidFill>
+          <a:ln xmlns:a="http://schemas.openxmlformats.org/drawingml/2006/main" w="0">
+            <a:solidFill>
+              <a:srgbClr val="EDEDED"/>
+            </a:solidFill>
+            <a:prstDash val="solid"/>
+          </a:ln>
+        </p:spPr>
+      </p:sp>
+      <p:sp>
+        <p:nvSpPr>
+          <p:cNvPr id="13" name="">
+            <a:extLst xmlns:a="http://schemas.openxmlformats.org/drawingml/2006/main">
+              <a:ext uri="{FF2B5EF4-FFF2-40B4-BE49-F238E27FC236}">
+                <a16:creationId xmlns:a16="http://schemas.microsoft.com/office/drawing/2014/main" id="{1A4050CC-5568-4F8A-B026-EC7B8ABEFB7A}"/>
+              </a:ext>
+            </a:extLst>
+          </p:cNvPr>
+          <p:cNvSpPr>
+            <a:spLocks xmlns:a="http://schemas.openxmlformats.org/drawingml/2006/main" noGrp="1"/>
+          </p:cNvSpPr>
+          <p:nvPr/>
+        </p:nvSpPr>
+        <p:spPr>
+          <a:xfrm xmlns:a="http://schemas.openxmlformats.org/drawingml/2006/main">
+            <a:off x="8362950" y="3143250"/>
+            <a:ext cx="76200" cy="1428750"/>
+          </a:xfrm>
+          <a:prstGeom xmlns:a="http://schemas.openxmlformats.org/drawingml/2006/main" prst="rect">
+            <a:avLst/>
+          </a:prstGeom>
+          <a:solidFill xmlns:a="http://schemas.openxmlformats.org/drawingml/2006/main">
+            <a:srgbClr val="3D8DFF"/>
+          </a:solidFill>
+          <a:ln xmlns:a="http://schemas.openxmlformats.org/drawingml/2006/main" w="0">
+            <a:solidFill>
+              <a:srgbClr val="3D8DFF"/>
+            </a:solidFill>
+            <a:prstDash val="solid"/>
+          </a:ln>
+        </p:spPr>
+      </p:sp>
+      <p:sp>
+        <p:nvSpPr>
+          <p:cNvPr id="14" name="">
+            <a:extLst xmlns:a="http://schemas.openxmlformats.org/drawingml/2006/main">
+              <a:ext uri="{FF2B5EF4-FFF2-40B4-BE49-F238E27FC236}">
+                <a16:creationId xmlns:a16="http://schemas.microsoft.com/office/drawing/2014/main" id="{502FF9D4-D051-476B-B68A-15DCA6B44FE9}"/>
+              </a:ext>
+            </a:extLst>
+          </p:cNvPr>
+          <p:cNvSpPr>
+            <a:spLocks xmlns:a="http://schemas.openxmlformats.org/drawingml/2006/main" noGrp="1"/>
+          </p:cNvSpPr>
+          <p:nvPr/>
+        </p:nvSpPr>
+        <p:spPr>
+          <a:xfrm xmlns:a="http://schemas.openxmlformats.org/drawingml/2006/main">
+            <a:off x="8629650" y="3314700"/>
+            <a:ext cx="2686050" cy="590550"/>
+          </a:xfrm>
+          <a:prstGeom xmlns:a="http://schemas.openxmlformats.org/drawingml/2006/main" prst="rect">
+            <a:avLst/>
+          </a:prstGeom>
+          <a:noFill xmlns:a="http://schemas.openxmlformats.org/drawingml/2006/main"/>
+          <a:ln xmlns:a="http://schemas.openxmlformats.org/drawingml/2006/main" w="0">
+            <a:noFill/>
+            <a:prstDash val="solid"/>
+          </a:ln>
+        </p:spPr>
+        <p:txBody>
+          <a:bodyPr xmlns:a="http://schemas.openxmlformats.org/drawingml/2006/main" wrap="square" lIns="0" tIns="0" rIns="0" bIns="0" anchor="t">
+            <a:normAutofit fontScale="100000"/>
+          </a:bodyPr>
+          <a:lstStyle xmlns:a="http://schemas.openxmlformats.org/drawingml/2006/main"/>
+          <a:p xmlns:a="http://schemas.openxmlformats.org/drawingml/2006/main">
+            <a:pPr algn="l">
+              <a:buNone/>
+              <a:defRPr sz="3225" b="1">
+                <a:solidFill>
+                  <a:srgbClr val="3D8DFF"/>
+                </a:solidFill>
+                <a:latin typeface="Arial"/>
+                <a:ea typeface="Arial"/>
+                <a:cs typeface="Arial"/>
+              </a:defRPr>
+            </a:pPr>
+            <a:r>
+              <a:rPr sz="3225" b="1">
+                <a:solidFill>
+                  <a:srgbClr val="3D8DFF"/>
+                </a:solidFill>
+                <a:latin typeface="Arial"/>
+                <a:ea typeface="Arial"/>
+                <a:cs typeface="Arial"/>
+              </a:rPr>
+              <a:t>q = 0.038</a:t>
+            </a:r>
+          </a:p>
+        </p:txBody>
+      </p:sp>
+      <p:sp>
+        <p:nvSpPr>
+          <p:cNvPr id="15" name="">
+            <a:extLst xmlns:a="http://schemas.openxmlformats.org/drawingml/2006/main">
+              <a:ext uri="{FF2B5EF4-FFF2-40B4-BE49-F238E27FC236}">
+                <a16:creationId xmlns:a16="http://schemas.microsoft.com/office/drawing/2014/main" id="{03DFBB46-08D6-4497-AA7C-C2049757E9DE}"/>
+              </a:ext>
+            </a:extLst>
+          </p:cNvPr>
+          <p:cNvSpPr>
+            <a:spLocks xmlns:a="http://schemas.openxmlformats.org/drawingml/2006/main" noGrp="1"/>
+          </p:cNvSpPr>
+          <p:nvPr/>
+        </p:nvSpPr>
+        <p:spPr>
+          <a:xfrm xmlns:a="http://schemas.openxmlformats.org/drawingml/2006/main">
+            <a:off x="8629650" y="3981450"/>
+            <a:ext cx="2686050" cy="438150"/>
+          </a:xfrm>
+          <a:prstGeom xmlns:a="http://schemas.openxmlformats.org/drawingml/2006/main" prst="rect">
+            <a:avLst/>
+          </a:prstGeom>
+          <a:noFill xmlns:a="http://schemas.openxmlformats.org/drawingml/2006/main"/>
+          <a:ln xmlns:a="http://schemas.openxmlformats.org/drawingml/2006/main" w="0">
+            <a:noFill/>
+            <a:prstDash val="solid"/>
+          </a:ln>
+        </p:spPr>
+        <p:txBody>
+          <a:bodyPr xmlns:a="http://schemas.openxmlformats.org/drawingml/2006/main" wrap="square" lIns="0" tIns="0" rIns="0" bIns="0" anchor="t">
+            <a:normAutofit fontScale="100000"/>
+          </a:bodyPr>
+          <a:lstStyle xmlns:a="http://schemas.openxmlformats.org/drawingml/2006/main"/>
+          <a:p xmlns:a="http://schemas.openxmlformats.org/drawingml/2006/main">
+            <a:pPr algn="l">
+              <a:buNone/>
+              <a:defRPr sz="1350" b="0">
+                <a:solidFill>
+                  <a:srgbClr val="273548"/>
+                </a:solidFill>
+                <a:latin typeface="Arial"/>
+                <a:ea typeface="Arial"/>
+                <a:cs typeface="Arial"/>
+              </a:defRPr>
+            </a:pPr>
+            <a:r>
+              <a:rPr sz="1350" b="0">
+                <a:solidFill>
+                  <a:srgbClr val="273548"/>
+                </a:solidFill>
+                <a:latin typeface="Arial"/>
+                <a:ea typeface="Arial"/>
+                <a:cs typeface="Arial"/>
+              </a:rPr>
+              <a:t>within HIGH-minus-MEDIUM family</a:t>
+            </a:r>
+          </a:p>
+        </p:txBody>
+      </p:sp>
+      <p:sp>
+        <p:nvSpPr>
+          <p:cNvPr id="16" name="">
+            <a:extLst xmlns:a="http://schemas.openxmlformats.org/drawingml/2006/main">
+              <a:ext uri="{FF2B5EF4-FFF2-40B4-BE49-F238E27FC236}">
+                <a16:creationId xmlns:a16="http://schemas.microsoft.com/office/drawing/2014/main" id="{509D61CC-6E5E-49EC-A5F6-E861E8561441}"/>
+              </a:ext>
+            </a:extLst>
+          </p:cNvPr>
+          <p:cNvSpPr>
+            <a:spLocks xmlns:a="http://schemas.openxmlformats.org/drawingml/2006/main" noGrp="1"/>
+          </p:cNvSpPr>
+          <p:nvPr/>
+        </p:nvSpPr>
+        <p:spPr>
+          <a:xfrm xmlns:a="http://schemas.openxmlformats.org/drawingml/2006/main">
+            <a:off x="8362950" y="4781550"/>
+            <a:ext cx="3143250" cy="1428750"/>
+          </a:xfrm>
+          <a:prstGeom xmlns:a="http://schemas.openxmlformats.org/drawingml/2006/main" prst="rect">
+            <a:avLst/>
+          </a:prstGeom>
+          <a:solidFill xmlns:a="http://schemas.openxmlformats.org/drawingml/2006/main">
+            <a:srgbClr val="EDEDED"/>
+          </a:solidFill>
+          <a:ln xmlns:a="http://schemas.openxmlformats.org/drawingml/2006/main" w="0">
+            <a:solidFill>
+              <a:srgbClr val="EDEDED"/>
+            </a:solidFill>
+            <a:prstDash val="solid"/>
+          </a:ln>
+        </p:spPr>
+      </p:sp>
+      <p:sp>
+        <p:nvSpPr>
+          <p:cNvPr id="17" name="">
+            <a:extLst xmlns:a="http://schemas.openxmlformats.org/drawingml/2006/main">
+              <a:ext uri="{FF2B5EF4-FFF2-40B4-BE49-F238E27FC236}">
+                <a16:creationId xmlns:a16="http://schemas.microsoft.com/office/drawing/2014/main" id="{A935608E-4DDE-41BA-8DF2-831CF419565B}"/>
+              </a:ext>
+            </a:extLst>
+          </p:cNvPr>
+          <p:cNvSpPr>
+            <a:spLocks xmlns:a="http://schemas.openxmlformats.org/drawingml/2006/main" noGrp="1"/>
+          </p:cNvSpPr>
+          <p:nvPr/>
+        </p:nvSpPr>
+        <p:spPr>
+          <a:xfrm xmlns:a="http://schemas.openxmlformats.org/drawingml/2006/main">
+            <a:off x="8362950" y="4781550"/>
+            <a:ext cx="76200" cy="1428750"/>
+          </a:xfrm>
+          <a:prstGeom xmlns:a="http://schemas.openxmlformats.org/drawingml/2006/main" prst="rect">
+            <a:avLst/>
+          </a:prstGeom>
+          <a:solidFill xmlns:a="http://schemas.openxmlformats.org/drawingml/2006/main">
+            <a:srgbClr val="273548"/>
+          </a:solidFill>
+          <a:ln xmlns:a="http://schemas.openxmlformats.org/drawingml/2006/main" w="0">
+            <a:solidFill>
+              <a:srgbClr val="273548"/>
+            </a:solidFill>
+            <a:prstDash val="solid"/>
+          </a:ln>
+        </p:spPr>
+      </p:sp>
+      <p:sp>
+        <p:nvSpPr>
+          <p:cNvPr id="18" name="">
+            <a:extLst xmlns:a="http://schemas.openxmlformats.org/drawingml/2006/main">
+              <a:ext uri="{FF2B5EF4-FFF2-40B4-BE49-F238E27FC236}">
+                <a16:creationId xmlns:a16="http://schemas.microsoft.com/office/drawing/2014/main" id="{088A976D-39D1-4C6C-803F-0D3F8BAE4A28}"/>
+              </a:ext>
+            </a:extLst>
+          </p:cNvPr>
+          <p:cNvSpPr>
+            <a:spLocks xmlns:a="http://schemas.openxmlformats.org/drawingml/2006/main" noGrp="1"/>
+          </p:cNvSpPr>
+          <p:nvPr/>
+        </p:nvSpPr>
+        <p:spPr>
+          <a:xfrm xmlns:a="http://schemas.openxmlformats.org/drawingml/2006/main">
+            <a:off x="8629650" y="4953000"/>
+            <a:ext cx="2686050" cy="590550"/>
+          </a:xfrm>
+          <a:prstGeom xmlns:a="http://schemas.openxmlformats.org/drawingml/2006/main" prst="rect">
+            <a:avLst/>
+          </a:prstGeom>
+          <a:noFill xmlns:a="http://schemas.openxmlformats.org/drawingml/2006/main"/>
+          <a:ln xmlns:a="http://schemas.openxmlformats.org/drawingml/2006/main" w="0">
+            <a:noFill/>
+            <a:prstDash val="solid"/>
+          </a:ln>
+        </p:spPr>
+        <p:txBody>
+          <a:bodyPr xmlns:a="http://schemas.openxmlformats.org/drawingml/2006/main" wrap="square" lIns="0" tIns="0" rIns="0" bIns="0" anchor="t">
+            <a:normAutofit fontScale="100000"/>
+          </a:bodyPr>
+          <a:lstStyle xmlns:a="http://schemas.openxmlformats.org/drawingml/2006/main"/>
+          <a:p xmlns:a="http://schemas.openxmlformats.org/drawingml/2006/main">
+            <a:pPr algn="l">
+              <a:buNone/>
+              <a:defRPr sz="3225" b="1">
+                <a:solidFill>
+                  <a:srgbClr val="273548"/>
+                </a:solidFill>
+                <a:latin typeface="Arial"/>
+                <a:ea typeface="Arial"/>
+                <a:cs typeface="Arial"/>
+              </a:defRPr>
+            </a:pPr>
+            <a:r>
+              <a:rPr sz="3225" b="1">
+                <a:solidFill>
+                  <a:srgbClr val="273548"/>
+                </a:solidFill>
+                <a:latin typeface="Arial"/>
+                <a:ea typeface="Arial"/>
+                <a:cs typeface="Arial"/>
+              </a:rPr>
+              <a:t>3 / 243</a:t>
+            </a:r>
+          </a:p>
+        </p:txBody>
+      </p:sp>
+      <p:sp>
+        <p:nvSpPr>
+          <p:cNvPr id="19" name="">
+            <a:extLst xmlns:a="http://schemas.openxmlformats.org/drawingml/2006/main">
+              <a:ext uri="{FF2B5EF4-FFF2-40B4-BE49-F238E27FC236}">
+                <a16:creationId xmlns:a16="http://schemas.microsoft.com/office/drawing/2014/main" id="{AA1E116E-13CC-4735-B31A-B5C1846B2D22}"/>
+              </a:ext>
+            </a:extLst>
+          </p:cNvPr>
+          <p:cNvSpPr>
+            <a:spLocks xmlns:a="http://schemas.openxmlformats.org/drawingml/2006/main" noGrp="1"/>
+          </p:cNvSpPr>
+          <p:nvPr/>
+        </p:nvSpPr>
+        <p:spPr>
+          <a:xfrm xmlns:a="http://schemas.openxmlformats.org/drawingml/2006/main">
+            <a:off x="8629650" y="5619750"/>
+            <a:ext cx="2686050" cy="438150"/>
+          </a:xfrm>
+          <a:prstGeom xmlns:a="http://schemas.openxmlformats.org/drawingml/2006/main" prst="rect">
+            <a:avLst/>
+          </a:prstGeom>
+          <a:noFill xmlns:a="http://schemas.openxmlformats.org/drawingml/2006/main"/>
+          <a:ln xmlns:a="http://schemas.openxmlformats.org/drawingml/2006/main" w="0">
+            <a:noFill/>
+            <a:prstDash val="solid"/>
+          </a:ln>
+        </p:spPr>
+        <p:txBody>
+          <a:bodyPr xmlns:a="http://schemas.openxmlformats.org/drawingml/2006/main" wrap="square" lIns="0" tIns="0" rIns="0" bIns="0" anchor="t">
+            <a:normAutofit fontScale="100000"/>
+          </a:bodyPr>
+          <a:lstStyle xmlns:a="http://schemas.openxmlformats.org/drawingml/2006/main"/>
+          <a:p xmlns:a="http://schemas.openxmlformats.org/drawingml/2006/main">
+            <a:pPr algn="l">
+              <a:buNone/>
+              <a:defRPr sz="1350" b="0">
+                <a:solidFill>
+                  <a:srgbClr val="273548"/>
+                </a:solidFill>
+                <a:latin typeface="Arial"/>
+                <a:ea typeface="Arial"/>
+                <a:cs typeface="Arial"/>
+              </a:defRPr>
+            </a:pPr>
+            <a:r>
+              <a:rPr sz="1350" b="0">
+                <a:solidFill>
+                  <a:srgbClr val="273548"/>
+                </a:solidFill>
+                <a:latin typeface="Arial"/>
+                <a:ea typeface="Arial"/>
+                <a:cs typeface="Arial"/>
+              </a:rPr>
+              <a:t>pairwise cells surviving strict omnibus BH</a:t>
+            </a:r>
+          </a:p>
+        </p:txBody>
+      </p:sp>
+      <p:pic>
+        <p:nvPicPr>
+          <p:cNvPr id="40" name=""/>
+          <p:cNvPicPr>
+            <a:picLocks xmlns:a="http://schemas.openxmlformats.org/drawingml/2006/main" noChangeAspect="1"/>
+          </p:cNvPicPr>
+          <p:nvPr/>
+        </p:nvPicPr>
+        <p:blipFill>
+          <a:blip xmlns:r="http://schemas.openxmlformats.org/officeDocument/2006/relationships" xmlns:a="http://schemas.openxmlformats.org/drawingml/2006/main" r:embed="Rc767c798367e4772"/>
+          <a:stretch xmlns:a="http://schemas.openxmlformats.org/drawingml/2006/main"/>
+        </p:blipFill>
+        <p:spPr>
+          <a:xfrm xmlns:a="http://schemas.openxmlformats.org/drawingml/2006/main" flipH="0" flipV="0">
+            <a:off x="609600" y="1428750"/>
+            <a:ext cx="7143750" cy="4762500"/>
+          </a:xfrm>
+          <a:prstGeom xmlns:a="http://schemas.openxmlformats.org/drawingml/2006/main" prst="rect">
+            <a:avLst/>
+          </a:prstGeom>
+        </p:spPr>
+      </p:pic>
+    </p:spTree>
+    <p:extLst>
+      <p:ext uri="{BB962C8B-B14F-4D97-AF65-F5344CB8AC3E}">
+        <p14:creationId xmlns:p14="http://schemas.microsoft.com/office/powerpoint/2010/main" val="1583170704"/>
+      </p:ext>
+    </p:extLst>
+  </p:cSld>
+</p:sld>
+</file>
+
 <file path=ppt/slides/slide3.xml><?xml version="1.0" encoding="utf-8"?>
 <p:sld xmlns:p="http://schemas.openxmlformats.org/presentationml/2006/main">
   <p:cSld>
@@ -17923,6 +22684,1184 @@
     <p:extLst>
       <p:ext uri="{BB962C8B-B14F-4D97-AF65-F5344CB8AC3E}">
         <p14:creationId xmlns:p14="http://schemas.microsoft.com/office/powerpoint/2010/main" val="1397283360"/>
+      </p:ext>
+    </p:extLst>
+  </p:cSld>
+</p:sld>
+</file>
+
+<file path=ppt/slides/slide30.xml><?xml version="1.0" encoding="utf-8"?>
+<p:sld xmlns:p="http://schemas.openxmlformats.org/presentationml/2006/main">
+  <p:cSld>
+    <p:bg>
+      <p:bgPr>
+        <a:solidFill xmlns:a="http://schemas.openxmlformats.org/drawingml/2006/main">
+          <a:srgbClr val="FFFFFF"/>
+        </a:solidFill>
+      </p:bgPr>
+    </p:bg>
+    <p:spTree>
+      <p:nvGrpSpPr>
+        <p:cNvPr id="1" name=""/>
+        <p:cNvGrpSpPr/>
+        <p:nvPr/>
+      </p:nvGrpSpPr>
+      <p:grpSpPr>
+        <a:xfrm xmlns:a="http://schemas.openxmlformats.org/drawingml/2006/main"/>
+      </p:grpSpPr>
+      <p:sp>
+        <p:nvSpPr>
+          <p:cNvPr id="24" name="section-11">
+            <a:extLst xmlns:a="http://schemas.openxmlformats.org/drawingml/2006/main">
+              <a:ext uri="{FF2B5EF4-FFF2-40B4-BE49-F238E27FC236}">
+                <a16:creationId xmlns:a16="http://schemas.microsoft.com/office/drawing/2014/main" id="{272ED433-B59C-436C-9DFB-4D317B90A13F}"/>
+              </a:ext>
+            </a:extLst>
+          </p:cNvPr>
+          <p:cNvSpPr>
+            <a:spLocks xmlns:a="http://schemas.openxmlformats.org/drawingml/2006/main" noGrp="1"/>
+          </p:cNvSpPr>
+          <p:nvPr/>
+        </p:nvSpPr>
+        <p:spPr>
+          <a:xfrm xmlns:a="http://schemas.openxmlformats.org/drawingml/2006/main">
+            <a:off x="457200" y="228600"/>
+            <a:ext cx="4191000" cy="228600"/>
+          </a:xfrm>
+          <a:prstGeom xmlns:a="http://schemas.openxmlformats.org/drawingml/2006/main" prst="rect">
+            <a:avLst/>
+          </a:prstGeom>
+          <a:noFill xmlns:a="http://schemas.openxmlformats.org/drawingml/2006/main"/>
+          <a:ln xmlns:a="http://schemas.openxmlformats.org/drawingml/2006/main" w="0">
+            <a:noFill/>
+            <a:prstDash val="solid"/>
+          </a:ln>
+        </p:spPr>
+        <p:txBody>
+          <a:bodyPr xmlns:a="http://schemas.openxmlformats.org/drawingml/2006/main" wrap="square" lIns="0" tIns="0" rIns="0" bIns="0" anchor="t">
+            <a:normAutofit fontScale="100000"/>
+          </a:bodyPr>
+          <a:lstStyle xmlns:a="http://schemas.openxmlformats.org/drawingml/2006/main"/>
+          <a:p xmlns:a="http://schemas.openxmlformats.org/drawingml/2006/main">
+            <a:pPr algn="l">
+              <a:buNone/>
+              <a:defRPr sz="1200" b="1">
+                <a:solidFill>
+                  <a:srgbClr val="667384"/>
+                </a:solidFill>
+                <a:latin typeface="Arial"/>
+                <a:ea typeface="Arial"/>
+                <a:cs typeface="Arial"/>
+              </a:defRPr>
+            </a:pPr>
+            <a:r>
+              <a:rPr sz="1200" b="1">
+                <a:solidFill>
+                  <a:srgbClr val="667384"/>
+                </a:solidFill>
+                <a:latin typeface="Arial"/>
+                <a:ea typeface="Arial"/>
+                <a:cs typeface="Arial"/>
+              </a:rPr>
+              <a:t>TSLA DESCRIPTIVE MICROSCOPE</a:t>
+            </a:r>
+          </a:p>
+        </p:txBody>
+      </p:sp>
+      <p:sp>
+        <p:nvSpPr>
+          <p:cNvPr id="2" name="title-11">
+            <a:extLst xmlns:a="http://schemas.openxmlformats.org/drawingml/2006/main">
+              <a:ext uri="{FF2B5EF4-FFF2-40B4-BE49-F238E27FC236}">
+                <a16:creationId xmlns:a16="http://schemas.microsoft.com/office/drawing/2014/main" id="{3EC40708-7E00-432C-8ECE-907FA5705292}"/>
+              </a:ext>
+            </a:extLst>
+          </p:cNvPr>
+          <p:cNvSpPr>
+            <a:spLocks xmlns:a="http://schemas.openxmlformats.org/drawingml/2006/main" noGrp="1"/>
+          </p:cNvSpPr>
+          <p:nvPr/>
+        </p:nvSpPr>
+        <p:spPr>
+          <a:xfrm xmlns:a="http://schemas.openxmlformats.org/drawingml/2006/main">
+            <a:off x="457200" y="533400"/>
+            <a:ext cx="11277600" cy="628650"/>
+          </a:xfrm>
+          <a:prstGeom xmlns:a="http://schemas.openxmlformats.org/drawingml/2006/main" prst="rect">
+            <a:avLst/>
+          </a:prstGeom>
+          <a:noFill xmlns:a="http://schemas.openxmlformats.org/drawingml/2006/main"/>
+          <a:ln xmlns:a="http://schemas.openxmlformats.org/drawingml/2006/main" w="0">
+            <a:noFill/>
+            <a:prstDash val="solid"/>
+          </a:ln>
+        </p:spPr>
+        <p:txBody>
+          <a:bodyPr xmlns:a="http://schemas.openxmlformats.org/drawingml/2006/main" wrap="square" lIns="0" tIns="0" rIns="0" bIns="0" anchor="t">
+            <a:normAutofit fontScale="88324"/>
+          </a:bodyPr>
+          <a:lstStyle xmlns:a="http://schemas.openxmlformats.org/drawingml/2006/main"/>
+          <a:p xmlns:a="http://schemas.openxmlformats.org/drawingml/2006/main">
+            <a:pPr algn="l">
+              <a:buNone/>
+              <a:defRPr sz="3525" b="1">
+                <a:solidFill>
+                  <a:srgbClr val="000000"/>
+                </a:solidFill>
+                <a:latin typeface="Arial"/>
+                <a:ea typeface="Arial"/>
+                <a:cs typeface="Arial"/>
+              </a:defRPr>
+            </a:pPr>
+            <a:r>
+              <a:rPr sz="3525" b="1">
+                <a:solidFill>
+                  <a:srgbClr val="000000"/>
+                </a:solidFill>
+                <a:latin typeface="Arial"/>
+                <a:ea typeface="Arial"/>
+                <a:cs typeface="Arial"/>
+              </a:rPr>
+              <a:t>ATR% changes the map—and leaves a replication candidate</a:t>
+            </a:r>
+          </a:p>
+        </p:txBody>
+      </p:sp>
+      <p:sp>
+        <p:nvSpPr>
+          <p:cNvPr id="3" name="">
+            <a:extLst xmlns:a="http://schemas.openxmlformats.org/drawingml/2006/main">
+              <a:ext uri="{FF2B5EF4-FFF2-40B4-BE49-F238E27FC236}">
+                <a16:creationId xmlns:a16="http://schemas.microsoft.com/office/drawing/2014/main" id="{D5CA0FCE-75E8-41EF-A76A-23E9E2120C6A}"/>
+              </a:ext>
+            </a:extLst>
+          </p:cNvPr>
+          <p:cNvSpPr>
+            <a:spLocks xmlns:a="http://schemas.openxmlformats.org/drawingml/2006/main" noGrp="1"/>
+          </p:cNvSpPr>
+          <p:nvPr/>
+        </p:nvSpPr>
+        <p:spPr>
+          <a:xfrm xmlns:a="http://schemas.openxmlformats.org/drawingml/2006/main">
+            <a:off x="457200" y="1200150"/>
+            <a:ext cx="11277600" cy="19050"/>
+          </a:xfrm>
+          <a:prstGeom xmlns:a="http://schemas.openxmlformats.org/drawingml/2006/main" prst="rect">
+            <a:avLst/>
+          </a:prstGeom>
+          <a:solidFill xmlns:a="http://schemas.openxmlformats.org/drawingml/2006/main">
+            <a:srgbClr val="B8BCC4"/>
+          </a:solidFill>
+          <a:ln xmlns:a="http://schemas.openxmlformats.org/drawingml/2006/main" w="0">
+            <a:solidFill>
+              <a:srgbClr val="B8BCC4"/>
+            </a:solidFill>
+            <a:prstDash val="solid"/>
+          </a:ln>
+        </p:spPr>
+      </p:sp>
+      <p:sp>
+        <p:nvSpPr>
+          <p:cNvPr id="4" name="footer-left-11">
+            <a:extLst xmlns:a="http://schemas.openxmlformats.org/drawingml/2006/main">
+              <a:ext uri="{FF2B5EF4-FFF2-40B4-BE49-F238E27FC236}">
+                <a16:creationId xmlns:a16="http://schemas.microsoft.com/office/drawing/2014/main" id="{700DA765-80E0-4197-8700-00D867B86FA2}"/>
+              </a:ext>
+            </a:extLst>
+          </p:cNvPr>
+          <p:cNvSpPr>
+            <a:spLocks xmlns:a="http://schemas.openxmlformats.org/drawingml/2006/main" noGrp="1"/>
+          </p:cNvSpPr>
+          <p:nvPr/>
+        </p:nvSpPr>
+        <p:spPr>
+          <a:xfrm xmlns:a="http://schemas.openxmlformats.org/drawingml/2006/main">
+            <a:off x="457200" y="6515100"/>
+            <a:ext cx="3429000" cy="171450"/>
+          </a:xfrm>
+          <a:prstGeom xmlns:a="http://schemas.openxmlformats.org/drawingml/2006/main" prst="rect">
+            <a:avLst/>
+          </a:prstGeom>
+          <a:noFill xmlns:a="http://schemas.openxmlformats.org/drawingml/2006/main"/>
+          <a:ln xmlns:a="http://schemas.openxmlformats.org/drawingml/2006/main" w="0">
+            <a:noFill/>
+            <a:prstDash val="solid"/>
+          </a:ln>
+        </p:spPr>
+        <p:txBody>
+          <a:bodyPr xmlns:a="http://schemas.openxmlformats.org/drawingml/2006/main" wrap="square" lIns="0" tIns="0" rIns="0" bIns="0" anchor="t">
+            <a:normAutofit fontScale="100000"/>
+          </a:bodyPr>
+          <a:lstStyle xmlns:a="http://schemas.openxmlformats.org/drawingml/2006/main"/>
+          <a:p xmlns:a="http://schemas.openxmlformats.org/drawingml/2006/main">
+            <a:pPr algn="l">
+              <a:buNone/>
+              <a:defRPr sz="1050" b="0">
+                <a:solidFill>
+                  <a:srgbClr val="667384"/>
+                </a:solidFill>
+                <a:latin typeface="Arial"/>
+                <a:ea typeface="Arial"/>
+                <a:cs typeface="Arial"/>
+              </a:defRPr>
+            </a:pPr>
+            <a:r>
+              <a:rPr sz="1050" b="0">
+                <a:solidFill>
+                  <a:srgbClr val="667384"/>
+                </a:solidFill>
+                <a:latin typeface="Arial"/>
+                <a:ea typeface="Arial"/>
+                <a:cs typeface="Arial"/>
+              </a:rPr>
+              <a:t>Adjusted daily TSLA | 2018-2023</a:t>
+            </a:r>
+          </a:p>
+        </p:txBody>
+      </p:sp>
+      <p:sp>
+        <p:nvSpPr>
+          <p:cNvPr id="5" name="footer-number-11">
+            <a:extLst xmlns:a="http://schemas.openxmlformats.org/drawingml/2006/main">
+              <a:ext uri="{FF2B5EF4-FFF2-40B4-BE49-F238E27FC236}">
+                <a16:creationId xmlns:a16="http://schemas.microsoft.com/office/drawing/2014/main" id="{83896276-4112-4532-AF7C-776C67C58B77}"/>
+              </a:ext>
+            </a:extLst>
+          </p:cNvPr>
+          <p:cNvSpPr>
+            <a:spLocks xmlns:a="http://schemas.openxmlformats.org/drawingml/2006/main" noGrp="1"/>
+          </p:cNvSpPr>
+          <p:nvPr/>
+        </p:nvSpPr>
+        <p:spPr>
+          <a:xfrm xmlns:a="http://schemas.openxmlformats.org/drawingml/2006/main">
+            <a:off x="11239500" y="6496050"/>
+            <a:ext cx="495300" cy="190500"/>
+          </a:xfrm>
+          <a:prstGeom xmlns:a="http://schemas.openxmlformats.org/drawingml/2006/main" prst="rect">
+            <a:avLst/>
+          </a:prstGeom>
+          <a:noFill xmlns:a="http://schemas.openxmlformats.org/drawingml/2006/main"/>
+          <a:ln xmlns:a="http://schemas.openxmlformats.org/drawingml/2006/main" w="0">
+            <a:noFill/>
+            <a:prstDash val="solid"/>
+          </a:ln>
+        </p:spPr>
+        <p:txBody>
+          <a:bodyPr xmlns:a="http://schemas.openxmlformats.org/drawingml/2006/main" wrap="square" lIns="0" tIns="0" rIns="0" bIns="0" anchor="t">
+            <a:normAutofit fontScale="100000"/>
+          </a:bodyPr>
+          <a:lstStyle xmlns:a="http://schemas.openxmlformats.org/drawingml/2006/main"/>
+          <a:p xmlns:a="http://schemas.openxmlformats.org/drawingml/2006/main">
+            <a:pPr algn="r">
+              <a:buNone/>
+              <a:defRPr sz="1050" b="0">
+                <a:solidFill>
+                  <a:srgbClr val="667384"/>
+                </a:solidFill>
+                <a:latin typeface="Arial"/>
+                <a:ea typeface="Arial"/>
+                <a:cs typeface="Arial"/>
+              </a:defRPr>
+            </a:pPr>
+            <a:r>
+              <a:rPr sz="1050" b="0">
+                <a:solidFill>
+                  <a:srgbClr val="667384"/>
+                </a:solidFill>
+                <a:latin typeface="Arial"/>
+                <a:ea typeface="Arial"/>
+                <a:cs typeface="Arial"/>
+              </a:rPr>
+              <a:t>30</a:t>
+            </a:r>
+          </a:p>
+        </p:txBody>
+      </p:sp>
+      <p:sp>
+        <p:nvSpPr>
+          <p:cNvPr id="6" name="">
+            <a:extLst xmlns:a="http://schemas.openxmlformats.org/drawingml/2006/main">
+              <a:ext uri="{FF2B5EF4-FFF2-40B4-BE49-F238E27FC236}">
+                <a16:creationId xmlns:a16="http://schemas.microsoft.com/office/drawing/2014/main" id="{10F4BA85-46C5-47BD-BA74-EC806E663D58}"/>
+              </a:ext>
+            </a:extLst>
+          </p:cNvPr>
+          <p:cNvSpPr>
+            <a:spLocks xmlns:a="http://schemas.openxmlformats.org/drawingml/2006/main" noGrp="1"/>
+          </p:cNvSpPr>
+          <p:nvPr/>
+        </p:nvSpPr>
+        <p:spPr>
+          <a:xfrm xmlns:a="http://schemas.openxmlformats.org/drawingml/2006/main">
+            <a:off x="552450" y="1600200"/>
+            <a:ext cx="95250" cy="895350"/>
+          </a:xfrm>
+          <a:prstGeom xmlns:a="http://schemas.openxmlformats.org/drawingml/2006/main" prst="rect">
+            <a:avLst/>
+          </a:prstGeom>
+          <a:solidFill xmlns:a="http://schemas.openxmlformats.org/drawingml/2006/main">
+            <a:srgbClr val="E45756"/>
+          </a:solidFill>
+          <a:ln xmlns:a="http://schemas.openxmlformats.org/drawingml/2006/main" w="0">
+            <a:solidFill>
+              <a:srgbClr val="E45756"/>
+            </a:solidFill>
+            <a:prstDash val="solid"/>
+          </a:ln>
+        </p:spPr>
+      </p:sp>
+      <p:sp>
+        <p:nvSpPr>
+          <p:cNvPr id="7" name="">
+            <a:extLst xmlns:a="http://schemas.openxmlformats.org/drawingml/2006/main">
+              <a:ext uri="{FF2B5EF4-FFF2-40B4-BE49-F238E27FC236}">
+                <a16:creationId xmlns:a16="http://schemas.microsoft.com/office/drawing/2014/main" id="{7EF5B945-9D04-48FA-BA66-96DE813A9715}"/>
+              </a:ext>
+            </a:extLst>
+          </p:cNvPr>
+          <p:cNvSpPr>
+            <a:spLocks xmlns:a="http://schemas.openxmlformats.org/drawingml/2006/main" noGrp="1"/>
+          </p:cNvSpPr>
+          <p:nvPr/>
+        </p:nvSpPr>
+        <p:spPr>
+          <a:xfrm xmlns:a="http://schemas.openxmlformats.org/drawingml/2006/main">
+            <a:off x="876300" y="1581150"/>
+            <a:ext cx="2095500" cy="285750"/>
+          </a:xfrm>
+          <a:prstGeom xmlns:a="http://schemas.openxmlformats.org/drawingml/2006/main" prst="rect">
+            <a:avLst/>
+          </a:prstGeom>
+          <a:noFill xmlns:a="http://schemas.openxmlformats.org/drawingml/2006/main"/>
+          <a:ln xmlns:a="http://schemas.openxmlformats.org/drawingml/2006/main" w="0">
+            <a:noFill/>
+            <a:prstDash val="solid"/>
+          </a:ln>
+        </p:spPr>
+        <p:txBody>
+          <a:bodyPr xmlns:a="http://schemas.openxmlformats.org/drawingml/2006/main" wrap="square" lIns="0" tIns="0" rIns="0" bIns="0" anchor="t">
+            <a:normAutofit fontScale="100000"/>
+          </a:bodyPr>
+          <a:lstStyle xmlns:a="http://schemas.openxmlformats.org/drawingml/2006/main"/>
+          <a:p xmlns:a="http://schemas.openxmlformats.org/drawingml/2006/main">
+            <a:pPr algn="l">
+              <a:buNone/>
+              <a:defRPr sz="1350" b="1">
+                <a:solidFill>
+                  <a:srgbClr val="E45756"/>
+                </a:solidFill>
+                <a:latin typeface="Arial"/>
+                <a:ea typeface="Arial"/>
+                <a:cs typeface="Arial"/>
+              </a:defRPr>
+            </a:pPr>
+            <a:r>
+              <a:rPr sz="1350" b="1">
+                <a:solidFill>
+                  <a:srgbClr val="E45756"/>
+                </a:solidFill>
+                <a:latin typeface="Arial"/>
+                <a:ea typeface="Arial"/>
+                <a:cs typeface="Arial"/>
+              </a:rPr>
+              <a:t>LOW MAP</a:t>
+            </a:r>
+          </a:p>
+        </p:txBody>
+      </p:sp>
+      <p:sp>
+        <p:nvSpPr>
+          <p:cNvPr id="8" name="">
+            <a:extLst xmlns:a="http://schemas.openxmlformats.org/drawingml/2006/main">
+              <a:ext uri="{FF2B5EF4-FFF2-40B4-BE49-F238E27FC236}">
+                <a16:creationId xmlns:a16="http://schemas.microsoft.com/office/drawing/2014/main" id="{655CF75D-5F23-4C7F-BE9C-764036D0B9E8}"/>
+              </a:ext>
+            </a:extLst>
+          </p:cNvPr>
+          <p:cNvSpPr>
+            <a:spLocks xmlns:a="http://schemas.openxmlformats.org/drawingml/2006/main" noGrp="1"/>
+          </p:cNvSpPr>
+          <p:nvPr/>
+        </p:nvSpPr>
+        <p:spPr>
+          <a:xfrm xmlns:a="http://schemas.openxmlformats.org/drawingml/2006/main">
+            <a:off x="3105150" y="1562100"/>
+            <a:ext cx="4762500" cy="419100"/>
+          </a:xfrm>
+          <a:prstGeom xmlns:a="http://schemas.openxmlformats.org/drawingml/2006/main" prst="rect">
+            <a:avLst/>
+          </a:prstGeom>
+          <a:noFill xmlns:a="http://schemas.openxmlformats.org/drawingml/2006/main"/>
+          <a:ln xmlns:a="http://schemas.openxmlformats.org/drawingml/2006/main" w="0">
+            <a:noFill/>
+            <a:prstDash val="solid"/>
+          </a:ln>
+        </p:spPr>
+        <p:txBody>
+          <a:bodyPr xmlns:a="http://schemas.openxmlformats.org/drawingml/2006/main" wrap="square" lIns="0" tIns="0" rIns="0" bIns="0" anchor="t">
+            <a:normAutofit fontScale="70513"/>
+          </a:bodyPr>
+          <a:lstStyle xmlns:a="http://schemas.openxmlformats.org/drawingml/2006/main"/>
+          <a:p xmlns:a="http://schemas.openxmlformats.org/drawingml/2006/main">
+            <a:pPr algn="l">
+              <a:buNone/>
+              <a:defRPr sz="1950" b="1">
+                <a:solidFill>
+                  <a:srgbClr val="273548"/>
+                </a:solidFill>
+                <a:latin typeface="Arial"/>
+                <a:ea typeface="Arial"/>
+                <a:cs typeface="Arial"/>
+              </a:defRPr>
+            </a:pPr>
+            <a:r>
+              <a:rPr sz="1950" b="1">
+                <a:solidFill>
+                  <a:srgbClr val="273548"/>
+                </a:solidFill>
+                <a:latin typeface="Arial"/>
+                <a:ea typeface="Arial"/>
+                <a:cs typeface="Arial"/>
+              </a:rPr>
+              <a:t>All cells are positive, but none survive the within-state scan</a:t>
+            </a:r>
+          </a:p>
+        </p:txBody>
+      </p:sp>
+      <p:sp>
+        <p:nvSpPr>
+          <p:cNvPr id="9" name="">
+            <a:extLst xmlns:a="http://schemas.openxmlformats.org/drawingml/2006/main">
+              <a:ext uri="{FF2B5EF4-FFF2-40B4-BE49-F238E27FC236}">
+                <a16:creationId xmlns:a16="http://schemas.microsoft.com/office/drawing/2014/main" id="{3E0B76F2-4514-4DD8-934B-ABE42A34E950}"/>
+              </a:ext>
+            </a:extLst>
+          </p:cNvPr>
+          <p:cNvSpPr>
+            <a:spLocks xmlns:a="http://schemas.openxmlformats.org/drawingml/2006/main" noGrp="1"/>
+          </p:cNvSpPr>
+          <p:nvPr/>
+        </p:nvSpPr>
+        <p:spPr>
+          <a:xfrm xmlns:a="http://schemas.openxmlformats.org/drawingml/2006/main">
+            <a:off x="8096250" y="1581150"/>
+            <a:ext cx="3333750" cy="704850"/>
+          </a:xfrm>
+          <a:prstGeom xmlns:a="http://schemas.openxmlformats.org/drawingml/2006/main" prst="rect">
+            <a:avLst/>
+          </a:prstGeom>
+          <a:noFill xmlns:a="http://schemas.openxmlformats.org/drawingml/2006/main"/>
+          <a:ln xmlns:a="http://schemas.openxmlformats.org/drawingml/2006/main" w="0">
+            <a:noFill/>
+            <a:prstDash val="solid"/>
+          </a:ln>
+        </p:spPr>
+        <p:txBody>
+          <a:bodyPr xmlns:a="http://schemas.openxmlformats.org/drawingml/2006/main" wrap="square" lIns="0" tIns="0" rIns="0" bIns="0" anchor="t">
+            <a:normAutofit fontScale="100000"/>
+          </a:bodyPr>
+          <a:lstStyle xmlns:a="http://schemas.openxmlformats.org/drawingml/2006/main"/>
+          <a:p xmlns:a="http://schemas.openxmlformats.org/drawingml/2006/main">
+            <a:pPr algn="l">
+              <a:buNone/>
+              <a:defRPr sz="1425" b="0">
+                <a:solidFill>
+                  <a:srgbClr val="667384"/>
+                </a:solidFill>
+                <a:latin typeface="Arial"/>
+                <a:ea typeface="Arial"/>
+                <a:cs typeface="Arial"/>
+              </a:defRPr>
+            </a:pPr>
+            <a:r>
+              <a:rPr sz="1425" b="0">
+                <a:solidFill>
+                  <a:srgbClr val="667384"/>
+                </a:solidFill>
+                <a:latin typeface="Arial"/>
+                <a:ea typeface="Arial"/>
+                <a:cs typeface="Arial"/>
+              </a:rPr>
+              <a:t>Max +0.198; 0/81 BH passes</a:t>
+            </a:r>
+          </a:p>
+        </p:txBody>
+      </p:sp>
+      <p:sp>
+        <p:nvSpPr>
+          <p:cNvPr id="10" name="">
+            <a:extLst xmlns:a="http://schemas.openxmlformats.org/drawingml/2006/main">
+              <a:ext uri="{FF2B5EF4-FFF2-40B4-BE49-F238E27FC236}">
+                <a16:creationId xmlns:a16="http://schemas.microsoft.com/office/drawing/2014/main" id="{294777C3-6D2F-4277-840E-7E984FB4554D}"/>
+              </a:ext>
+            </a:extLst>
+          </p:cNvPr>
+          <p:cNvSpPr>
+            <a:spLocks xmlns:a="http://schemas.openxmlformats.org/drawingml/2006/main" noGrp="1"/>
+          </p:cNvSpPr>
+          <p:nvPr/>
+        </p:nvSpPr>
+        <p:spPr>
+          <a:xfrm xmlns:a="http://schemas.openxmlformats.org/drawingml/2006/main">
+            <a:off x="876300" y="2590800"/>
+            <a:ext cx="10553700" cy="9525"/>
+          </a:xfrm>
+          <a:prstGeom xmlns:a="http://schemas.openxmlformats.org/drawingml/2006/main" prst="rect">
+            <a:avLst/>
+          </a:prstGeom>
+          <a:solidFill xmlns:a="http://schemas.openxmlformats.org/drawingml/2006/main">
+            <a:srgbClr val="B8BCC4"/>
+          </a:solidFill>
+          <a:ln xmlns:a="http://schemas.openxmlformats.org/drawingml/2006/main" w="0">
+            <a:solidFill>
+              <a:srgbClr val="B8BCC4"/>
+            </a:solidFill>
+            <a:prstDash val="solid"/>
+          </a:ln>
+        </p:spPr>
+      </p:sp>
+      <p:sp>
+        <p:nvSpPr>
+          <p:cNvPr id="11" name="">
+            <a:extLst xmlns:a="http://schemas.openxmlformats.org/drawingml/2006/main">
+              <a:ext uri="{FF2B5EF4-FFF2-40B4-BE49-F238E27FC236}">
+                <a16:creationId xmlns:a16="http://schemas.microsoft.com/office/drawing/2014/main" id="{F894CF3F-AD63-423C-8F01-64C507896579}"/>
+              </a:ext>
+            </a:extLst>
+          </p:cNvPr>
+          <p:cNvSpPr>
+            <a:spLocks xmlns:a="http://schemas.openxmlformats.org/drawingml/2006/main" noGrp="1"/>
+          </p:cNvSpPr>
+          <p:nvPr/>
+        </p:nvSpPr>
+        <p:spPr>
+          <a:xfrm xmlns:a="http://schemas.openxmlformats.org/drawingml/2006/main">
+            <a:off x="552450" y="2800350"/>
+            <a:ext cx="95250" cy="895350"/>
+          </a:xfrm>
+          <a:prstGeom xmlns:a="http://schemas.openxmlformats.org/drawingml/2006/main" prst="rect">
+            <a:avLst/>
+          </a:prstGeom>
+          <a:solidFill xmlns:a="http://schemas.openxmlformats.org/drawingml/2006/main">
+            <a:srgbClr val="2A9D6F"/>
+          </a:solidFill>
+          <a:ln xmlns:a="http://schemas.openxmlformats.org/drawingml/2006/main" w="0">
+            <a:solidFill>
+              <a:srgbClr val="2A9D6F"/>
+            </a:solidFill>
+            <a:prstDash val="solid"/>
+          </a:ln>
+        </p:spPr>
+      </p:sp>
+      <p:sp>
+        <p:nvSpPr>
+          <p:cNvPr id="12" name="">
+            <a:extLst xmlns:a="http://schemas.openxmlformats.org/drawingml/2006/main">
+              <a:ext uri="{FF2B5EF4-FFF2-40B4-BE49-F238E27FC236}">
+                <a16:creationId xmlns:a16="http://schemas.microsoft.com/office/drawing/2014/main" id="{D3953D03-6A7A-4FEE-B242-02BF0319C169}"/>
+              </a:ext>
+            </a:extLst>
+          </p:cNvPr>
+          <p:cNvSpPr>
+            <a:spLocks xmlns:a="http://schemas.openxmlformats.org/drawingml/2006/main" noGrp="1"/>
+          </p:cNvSpPr>
+          <p:nvPr/>
+        </p:nvSpPr>
+        <p:spPr>
+          <a:xfrm xmlns:a="http://schemas.openxmlformats.org/drawingml/2006/main">
+            <a:off x="876300" y="2781300"/>
+            <a:ext cx="2095500" cy="285750"/>
+          </a:xfrm>
+          <a:prstGeom xmlns:a="http://schemas.openxmlformats.org/drawingml/2006/main" prst="rect">
+            <a:avLst/>
+          </a:prstGeom>
+          <a:noFill xmlns:a="http://schemas.openxmlformats.org/drawingml/2006/main"/>
+          <a:ln xmlns:a="http://schemas.openxmlformats.org/drawingml/2006/main" w="0">
+            <a:noFill/>
+            <a:prstDash val="solid"/>
+          </a:ln>
+        </p:spPr>
+        <p:txBody>
+          <a:bodyPr xmlns:a="http://schemas.openxmlformats.org/drawingml/2006/main" wrap="square" lIns="0" tIns="0" rIns="0" bIns="0" anchor="t">
+            <a:normAutofit fontScale="100000"/>
+          </a:bodyPr>
+          <a:lstStyle xmlns:a="http://schemas.openxmlformats.org/drawingml/2006/main"/>
+          <a:p xmlns:a="http://schemas.openxmlformats.org/drawingml/2006/main">
+            <a:pPr algn="l">
+              <a:buNone/>
+              <a:defRPr sz="1350" b="1">
+                <a:solidFill>
+                  <a:srgbClr val="2A9D6F"/>
+                </a:solidFill>
+                <a:latin typeface="Arial"/>
+                <a:ea typeface="Arial"/>
+                <a:cs typeface="Arial"/>
+              </a:defRPr>
+            </a:pPr>
+            <a:r>
+              <a:rPr sz="1350" b="1">
+                <a:solidFill>
+                  <a:srgbClr val="2A9D6F"/>
+                </a:solidFill>
+                <a:latin typeface="Arial"/>
+                <a:ea typeface="Arial"/>
+                <a:cs typeface="Arial"/>
+              </a:rPr>
+              <a:t>MEDIUM MAP</a:t>
+            </a:r>
+          </a:p>
+        </p:txBody>
+      </p:sp>
+      <p:sp>
+        <p:nvSpPr>
+          <p:cNvPr id="13" name="">
+            <a:extLst xmlns:a="http://schemas.openxmlformats.org/drawingml/2006/main">
+              <a:ext uri="{FF2B5EF4-FFF2-40B4-BE49-F238E27FC236}">
+                <a16:creationId xmlns:a16="http://schemas.microsoft.com/office/drawing/2014/main" id="{52D1DBE8-EAF6-4492-89E7-5C97A3A6A395}"/>
+              </a:ext>
+            </a:extLst>
+          </p:cNvPr>
+          <p:cNvSpPr>
+            <a:spLocks xmlns:a="http://schemas.openxmlformats.org/drawingml/2006/main" noGrp="1"/>
+          </p:cNvSpPr>
+          <p:nvPr/>
+        </p:nvSpPr>
+        <p:spPr>
+          <a:xfrm xmlns:a="http://schemas.openxmlformats.org/drawingml/2006/main">
+            <a:off x="3105150" y="2762250"/>
+            <a:ext cx="4762500" cy="419100"/>
+          </a:xfrm>
+          <a:prstGeom xmlns:a="http://schemas.openxmlformats.org/drawingml/2006/main" prst="rect">
+            <a:avLst/>
+          </a:prstGeom>
+          <a:noFill xmlns:a="http://schemas.openxmlformats.org/drawingml/2006/main"/>
+          <a:ln xmlns:a="http://schemas.openxmlformats.org/drawingml/2006/main" w="0">
+            <a:noFill/>
+            <a:prstDash val="solid"/>
+          </a:ln>
+        </p:spPr>
+        <p:txBody>
+          <a:bodyPr xmlns:a="http://schemas.openxmlformats.org/drawingml/2006/main" wrap="square" lIns="0" tIns="0" rIns="0" bIns="0" anchor="t">
+            <a:normAutofit fontScale="70513"/>
+          </a:bodyPr>
+          <a:lstStyle xmlns:a="http://schemas.openxmlformats.org/drawingml/2006/main"/>
+          <a:p xmlns:a="http://schemas.openxmlformats.org/drawingml/2006/main">
+            <a:pPr algn="l">
+              <a:buNone/>
+              <a:defRPr sz="1950" b="1">
+                <a:solidFill>
+                  <a:srgbClr val="273548"/>
+                </a:solidFill>
+                <a:latin typeface="Arial"/>
+                <a:ea typeface="Arial"/>
+                <a:cs typeface="Arial"/>
+              </a:defRPr>
+            </a:pPr>
+            <a:r>
+              <a:rPr sz="1950" b="1">
+                <a:solidFill>
+                  <a:srgbClr val="273548"/>
+                </a:solidFill>
+                <a:latin typeface="Arial"/>
+                <a:ea typeface="Arial"/>
+                <a:cs typeface="Arial"/>
+              </a:rPr>
+              <a:t>A continuation island survives around 5–10 prior / 2–3 forward</a:t>
+            </a:r>
+          </a:p>
+        </p:txBody>
+      </p:sp>
+      <p:sp>
+        <p:nvSpPr>
+          <p:cNvPr id="14" name="">
+            <a:extLst xmlns:a="http://schemas.openxmlformats.org/drawingml/2006/main">
+              <a:ext uri="{FF2B5EF4-FFF2-40B4-BE49-F238E27FC236}">
+                <a16:creationId xmlns:a16="http://schemas.microsoft.com/office/drawing/2014/main" id="{2CAF0156-C9E6-4210-8A8A-BFEDD044631B}"/>
+              </a:ext>
+            </a:extLst>
+          </p:cNvPr>
+          <p:cNvSpPr>
+            <a:spLocks xmlns:a="http://schemas.openxmlformats.org/drawingml/2006/main" noGrp="1"/>
+          </p:cNvSpPr>
+          <p:nvPr/>
+        </p:nvSpPr>
+        <p:spPr>
+          <a:xfrm xmlns:a="http://schemas.openxmlformats.org/drawingml/2006/main">
+            <a:off x="8096250" y="2781300"/>
+            <a:ext cx="3333750" cy="704850"/>
+          </a:xfrm>
+          <a:prstGeom xmlns:a="http://schemas.openxmlformats.org/drawingml/2006/main" prst="rect">
+            <a:avLst/>
+          </a:prstGeom>
+          <a:noFill xmlns:a="http://schemas.openxmlformats.org/drawingml/2006/main"/>
+          <a:ln xmlns:a="http://schemas.openxmlformats.org/drawingml/2006/main" w="0">
+            <a:noFill/>
+            <a:prstDash val="solid"/>
+          </a:ln>
+        </p:spPr>
+        <p:txBody>
+          <a:bodyPr xmlns:a="http://schemas.openxmlformats.org/drawingml/2006/main" wrap="square" lIns="0" tIns="0" rIns="0" bIns="0" anchor="t">
+            <a:normAutofit fontScale="100000"/>
+          </a:bodyPr>
+          <a:lstStyle xmlns:a="http://schemas.openxmlformats.org/drawingml/2006/main"/>
+          <a:p xmlns:a="http://schemas.openxmlformats.org/drawingml/2006/main">
+            <a:pPr algn="l">
+              <a:buNone/>
+              <a:defRPr sz="1425" b="0">
+                <a:solidFill>
+                  <a:srgbClr val="667384"/>
+                </a:solidFill>
+                <a:latin typeface="Arial"/>
+                <a:ea typeface="Arial"/>
+                <a:cs typeface="Arial"/>
+              </a:defRPr>
+            </a:pPr>
+            <a:r>
+              <a:rPr sz="1425" b="0">
+                <a:solidFill>
+                  <a:srgbClr val="667384"/>
+                </a:solidFill>
+                <a:latin typeface="Arial"/>
+                <a:ea typeface="Arial"/>
+                <a:cs typeface="Arial"/>
+              </a:rPr>
+              <a:t>21/81 family; 3 strict omnibus passes</a:t>
+            </a:r>
+          </a:p>
+        </p:txBody>
+      </p:sp>
+      <p:sp>
+        <p:nvSpPr>
+          <p:cNvPr id="15" name="">
+            <a:extLst xmlns:a="http://schemas.openxmlformats.org/drawingml/2006/main">
+              <a:ext uri="{FF2B5EF4-FFF2-40B4-BE49-F238E27FC236}">
+                <a16:creationId xmlns:a16="http://schemas.microsoft.com/office/drawing/2014/main" id="{B126165D-5B65-44DB-99BD-15ED33F9B90F}"/>
+              </a:ext>
+            </a:extLst>
+          </p:cNvPr>
+          <p:cNvSpPr>
+            <a:spLocks xmlns:a="http://schemas.openxmlformats.org/drawingml/2006/main" noGrp="1"/>
+          </p:cNvSpPr>
+          <p:nvPr/>
+        </p:nvSpPr>
+        <p:spPr>
+          <a:xfrm xmlns:a="http://schemas.openxmlformats.org/drawingml/2006/main">
+            <a:off x="876300" y="3790950"/>
+            <a:ext cx="10553700" cy="9525"/>
+          </a:xfrm>
+          <a:prstGeom xmlns:a="http://schemas.openxmlformats.org/drawingml/2006/main" prst="rect">
+            <a:avLst/>
+          </a:prstGeom>
+          <a:solidFill xmlns:a="http://schemas.openxmlformats.org/drawingml/2006/main">
+            <a:srgbClr val="B8BCC4"/>
+          </a:solidFill>
+          <a:ln xmlns:a="http://schemas.openxmlformats.org/drawingml/2006/main" w="0">
+            <a:solidFill>
+              <a:srgbClr val="B8BCC4"/>
+            </a:solidFill>
+            <a:prstDash val="solid"/>
+          </a:ln>
+        </p:spPr>
+      </p:sp>
+      <p:sp>
+        <p:nvSpPr>
+          <p:cNvPr id="16" name="">
+            <a:extLst xmlns:a="http://schemas.openxmlformats.org/drawingml/2006/main">
+              <a:ext uri="{FF2B5EF4-FFF2-40B4-BE49-F238E27FC236}">
+                <a16:creationId xmlns:a16="http://schemas.microsoft.com/office/drawing/2014/main" id="{7DC0911F-9587-4B19-84C6-11974DB2A91C}"/>
+              </a:ext>
+            </a:extLst>
+          </p:cNvPr>
+          <p:cNvSpPr>
+            <a:spLocks xmlns:a="http://schemas.openxmlformats.org/drawingml/2006/main" noGrp="1"/>
+          </p:cNvSpPr>
+          <p:nvPr/>
+        </p:nvSpPr>
+        <p:spPr>
+          <a:xfrm xmlns:a="http://schemas.openxmlformats.org/drawingml/2006/main">
+            <a:off x="552450" y="4000500"/>
+            <a:ext cx="95250" cy="895350"/>
+          </a:xfrm>
+          <a:prstGeom xmlns:a="http://schemas.openxmlformats.org/drawingml/2006/main" prst="rect">
+            <a:avLst/>
+          </a:prstGeom>
+          <a:solidFill xmlns:a="http://schemas.openxmlformats.org/drawingml/2006/main">
+            <a:srgbClr val="3D8DFF"/>
+          </a:solidFill>
+          <a:ln xmlns:a="http://schemas.openxmlformats.org/drawingml/2006/main" w="0">
+            <a:solidFill>
+              <a:srgbClr val="3D8DFF"/>
+            </a:solidFill>
+            <a:prstDash val="solid"/>
+          </a:ln>
+        </p:spPr>
+      </p:sp>
+      <p:sp>
+        <p:nvSpPr>
+          <p:cNvPr id="17" name="">
+            <a:extLst xmlns:a="http://schemas.openxmlformats.org/drawingml/2006/main">
+              <a:ext uri="{FF2B5EF4-FFF2-40B4-BE49-F238E27FC236}">
+                <a16:creationId xmlns:a16="http://schemas.microsoft.com/office/drawing/2014/main" id="{DAB53991-F50C-4B95-9F23-DAE86BCEDF3B}"/>
+              </a:ext>
+            </a:extLst>
+          </p:cNvPr>
+          <p:cNvSpPr>
+            <a:spLocks xmlns:a="http://schemas.openxmlformats.org/drawingml/2006/main" noGrp="1"/>
+          </p:cNvSpPr>
+          <p:nvPr/>
+        </p:nvSpPr>
+        <p:spPr>
+          <a:xfrm xmlns:a="http://schemas.openxmlformats.org/drawingml/2006/main">
+            <a:off x="876300" y="3981450"/>
+            <a:ext cx="2095500" cy="285750"/>
+          </a:xfrm>
+          <a:prstGeom xmlns:a="http://schemas.openxmlformats.org/drawingml/2006/main" prst="rect">
+            <a:avLst/>
+          </a:prstGeom>
+          <a:noFill xmlns:a="http://schemas.openxmlformats.org/drawingml/2006/main"/>
+          <a:ln xmlns:a="http://schemas.openxmlformats.org/drawingml/2006/main" w="0">
+            <a:noFill/>
+            <a:prstDash val="solid"/>
+          </a:ln>
+        </p:spPr>
+        <p:txBody>
+          <a:bodyPr xmlns:a="http://schemas.openxmlformats.org/drawingml/2006/main" wrap="square" lIns="0" tIns="0" rIns="0" bIns="0" anchor="t">
+            <a:normAutofit fontScale="100000"/>
+          </a:bodyPr>
+          <a:lstStyle xmlns:a="http://schemas.openxmlformats.org/drawingml/2006/main"/>
+          <a:p xmlns:a="http://schemas.openxmlformats.org/drawingml/2006/main">
+            <a:pPr algn="l">
+              <a:buNone/>
+              <a:defRPr sz="1350" b="1">
+                <a:solidFill>
+                  <a:srgbClr val="3D8DFF"/>
+                </a:solidFill>
+                <a:latin typeface="Arial"/>
+                <a:ea typeface="Arial"/>
+                <a:cs typeface="Arial"/>
+              </a:defRPr>
+            </a:pPr>
+            <a:r>
+              <a:rPr sz="1350" b="1">
+                <a:solidFill>
+                  <a:srgbClr val="3D8DFF"/>
+                </a:solidFill>
+                <a:latin typeface="Arial"/>
+                <a:ea typeface="Arial"/>
+                <a:cs typeface="Arial"/>
+              </a:rPr>
+              <a:t>HIGH MAP</a:t>
+            </a:r>
+          </a:p>
+        </p:txBody>
+      </p:sp>
+      <p:sp>
+        <p:nvSpPr>
+          <p:cNvPr id="18" name="">
+            <a:extLst xmlns:a="http://schemas.openxmlformats.org/drawingml/2006/main">
+              <a:ext uri="{FF2B5EF4-FFF2-40B4-BE49-F238E27FC236}">
+                <a16:creationId xmlns:a16="http://schemas.microsoft.com/office/drawing/2014/main" id="{5DFACF3B-08BC-4148-A40A-2004DFB81D71}"/>
+              </a:ext>
+            </a:extLst>
+          </p:cNvPr>
+          <p:cNvSpPr>
+            <a:spLocks xmlns:a="http://schemas.openxmlformats.org/drawingml/2006/main" noGrp="1"/>
+          </p:cNvSpPr>
+          <p:nvPr/>
+        </p:nvSpPr>
+        <p:spPr>
+          <a:xfrm xmlns:a="http://schemas.openxmlformats.org/drawingml/2006/main">
+            <a:off x="3105150" y="3962400"/>
+            <a:ext cx="4762500" cy="419100"/>
+          </a:xfrm>
+          <a:prstGeom xmlns:a="http://schemas.openxmlformats.org/drawingml/2006/main" prst="rect">
+            <a:avLst/>
+          </a:prstGeom>
+          <a:noFill xmlns:a="http://schemas.openxmlformats.org/drawingml/2006/main"/>
+          <a:ln xmlns:a="http://schemas.openxmlformats.org/drawingml/2006/main" w="0">
+            <a:noFill/>
+            <a:prstDash val="solid"/>
+          </a:ln>
+        </p:spPr>
+        <p:txBody>
+          <a:bodyPr xmlns:a="http://schemas.openxmlformats.org/drawingml/2006/main" wrap="square" lIns="0" tIns="0" rIns="0" bIns="0" anchor="t">
+            <a:normAutofit fontScale="70513"/>
+          </a:bodyPr>
+          <a:lstStyle xmlns:a="http://schemas.openxmlformats.org/drawingml/2006/main"/>
+          <a:p xmlns:a="http://schemas.openxmlformats.org/drawingml/2006/main">
+            <a:pPr algn="l">
+              <a:buNone/>
+              <a:defRPr sz="1950" b="1">
+                <a:solidFill>
+                  <a:srgbClr val="273548"/>
+                </a:solidFill>
+                <a:latin typeface="Arial"/>
+                <a:ea typeface="Arial"/>
+                <a:cs typeface="Arial"/>
+              </a:defRPr>
+            </a:pPr>
+            <a:r>
+              <a:rPr sz="1950" b="1">
+                <a:solidFill>
+                  <a:srgbClr val="273548"/>
+                </a:solidFill>
+                <a:latin typeface="Arial"/>
+                <a:ea typeface="Arial"/>
+                <a:cs typeface="Arial"/>
+              </a:rPr>
+              <a:t>The surface broadly reverses, especially at longer horizons</a:t>
+            </a:r>
+          </a:p>
+        </p:txBody>
+      </p:sp>
+      <p:sp>
+        <p:nvSpPr>
+          <p:cNvPr id="19" name="">
+            <a:extLst xmlns:a="http://schemas.openxmlformats.org/drawingml/2006/main">
+              <a:ext uri="{FF2B5EF4-FFF2-40B4-BE49-F238E27FC236}">
+                <a16:creationId xmlns:a16="http://schemas.microsoft.com/office/drawing/2014/main" id="{C907D23B-44A2-43C4-9658-4C6E38430BF5}"/>
+              </a:ext>
+            </a:extLst>
+          </p:cNvPr>
+          <p:cNvSpPr>
+            <a:spLocks xmlns:a="http://schemas.openxmlformats.org/drawingml/2006/main" noGrp="1"/>
+          </p:cNvSpPr>
+          <p:nvPr/>
+        </p:nvSpPr>
+        <p:spPr>
+          <a:xfrm xmlns:a="http://schemas.openxmlformats.org/drawingml/2006/main">
+            <a:off x="8096250" y="3981450"/>
+            <a:ext cx="3333750" cy="704850"/>
+          </a:xfrm>
+          <a:prstGeom xmlns:a="http://schemas.openxmlformats.org/drawingml/2006/main" prst="rect">
+            <a:avLst/>
+          </a:prstGeom>
+          <a:noFill xmlns:a="http://schemas.openxmlformats.org/drawingml/2006/main"/>
+          <a:ln xmlns:a="http://schemas.openxmlformats.org/drawingml/2006/main" w="0">
+            <a:noFill/>
+            <a:prstDash val="solid"/>
+          </a:ln>
+        </p:spPr>
+        <p:txBody>
+          <a:bodyPr xmlns:a="http://schemas.openxmlformats.org/drawingml/2006/main" wrap="square" lIns="0" tIns="0" rIns="0" bIns="0" anchor="t">
+            <a:normAutofit fontScale="100000"/>
+          </a:bodyPr>
+          <a:lstStyle xmlns:a="http://schemas.openxmlformats.org/drawingml/2006/main"/>
+          <a:p xmlns:a="http://schemas.openxmlformats.org/drawingml/2006/main">
+            <a:pPr algn="l">
+              <a:buNone/>
+              <a:defRPr sz="1425" b="0">
+                <a:solidFill>
+                  <a:srgbClr val="667384"/>
+                </a:solidFill>
+                <a:latin typeface="Arial"/>
+                <a:ea typeface="Arial"/>
+                <a:cs typeface="Arial"/>
+              </a:defRPr>
+            </a:pPr>
+            <a:r>
+              <a:rPr sz="1425" b="0">
+                <a:solidFill>
+                  <a:srgbClr val="667384"/>
+                </a:solidFill>
+                <a:latin typeface="Arial"/>
+                <a:ea typeface="Arial"/>
+                <a:cs typeface="Arial"/>
+              </a:rPr>
+              <a:t>77/81 negative; max |r| = 0.301</a:t>
+            </a:r>
+          </a:p>
+        </p:txBody>
+      </p:sp>
+      <p:sp>
+        <p:nvSpPr>
+          <p:cNvPr id="20" name="">
+            <a:extLst xmlns:a="http://schemas.openxmlformats.org/drawingml/2006/main">
+              <a:ext uri="{FF2B5EF4-FFF2-40B4-BE49-F238E27FC236}">
+                <a16:creationId xmlns:a16="http://schemas.microsoft.com/office/drawing/2014/main" id="{8042DFC4-7E22-47E6-8C53-1E63A8411C3A}"/>
+              </a:ext>
+            </a:extLst>
+          </p:cNvPr>
+          <p:cNvSpPr>
+            <a:spLocks xmlns:a="http://schemas.openxmlformats.org/drawingml/2006/main" noGrp="1"/>
+          </p:cNvSpPr>
+          <p:nvPr/>
+        </p:nvSpPr>
+        <p:spPr>
+          <a:xfrm xmlns:a="http://schemas.openxmlformats.org/drawingml/2006/main">
+            <a:off x="876300" y="4991100"/>
+            <a:ext cx="10553700" cy="9525"/>
+          </a:xfrm>
+          <a:prstGeom xmlns:a="http://schemas.openxmlformats.org/drawingml/2006/main" prst="rect">
+            <a:avLst/>
+          </a:prstGeom>
+          <a:solidFill xmlns:a="http://schemas.openxmlformats.org/drawingml/2006/main">
+            <a:srgbClr val="B8BCC4"/>
+          </a:solidFill>
+          <a:ln xmlns:a="http://schemas.openxmlformats.org/drawingml/2006/main" w="0">
+            <a:solidFill>
+              <a:srgbClr val="B8BCC4"/>
+            </a:solidFill>
+            <a:prstDash val="solid"/>
+          </a:ln>
+        </p:spPr>
+      </p:sp>
+      <p:sp>
+        <p:nvSpPr>
+          <p:cNvPr id="21" name="">
+            <a:extLst xmlns:a="http://schemas.openxmlformats.org/drawingml/2006/main">
+              <a:ext uri="{FF2B5EF4-FFF2-40B4-BE49-F238E27FC236}">
+                <a16:creationId xmlns:a16="http://schemas.microsoft.com/office/drawing/2014/main" id="{F4066D54-676B-4D0F-93B6-2152B57E41AF}"/>
+              </a:ext>
+            </a:extLst>
+          </p:cNvPr>
+          <p:cNvSpPr>
+            <a:spLocks xmlns:a="http://schemas.openxmlformats.org/drawingml/2006/main" noGrp="1"/>
+          </p:cNvSpPr>
+          <p:nvPr/>
+        </p:nvSpPr>
+        <p:spPr>
+          <a:xfrm xmlns:a="http://schemas.openxmlformats.org/drawingml/2006/main">
+            <a:off x="552450" y="5353050"/>
+            <a:ext cx="10877550" cy="781050"/>
+          </a:xfrm>
+          <a:prstGeom xmlns:a="http://schemas.openxmlformats.org/drawingml/2006/main" prst="rect">
+            <a:avLst/>
+          </a:prstGeom>
+          <a:solidFill xmlns:a="http://schemas.openxmlformats.org/drawingml/2006/main">
+            <a:srgbClr val="EAF5FB"/>
+          </a:solidFill>
+          <a:ln xmlns:a="http://schemas.openxmlformats.org/drawingml/2006/main" w="0">
+            <a:solidFill>
+              <a:srgbClr val="EAF5FB"/>
+            </a:solidFill>
+            <a:prstDash val="solid"/>
+          </a:ln>
+        </p:spPr>
+      </p:sp>
+      <p:sp>
+        <p:nvSpPr>
+          <p:cNvPr id="22" name="">
+            <a:extLst xmlns:a="http://schemas.openxmlformats.org/drawingml/2006/main">
+              <a:ext uri="{FF2B5EF4-FFF2-40B4-BE49-F238E27FC236}">
+                <a16:creationId xmlns:a16="http://schemas.microsoft.com/office/drawing/2014/main" id="{6E4C79AE-EB98-4B5B-B3D3-11ED0D4C729B}"/>
+              </a:ext>
+            </a:extLst>
+          </p:cNvPr>
+          <p:cNvSpPr>
+            <a:spLocks xmlns:a="http://schemas.openxmlformats.org/drawingml/2006/main" noGrp="1"/>
+          </p:cNvSpPr>
+          <p:nvPr/>
+        </p:nvSpPr>
+        <p:spPr>
+          <a:xfrm xmlns:a="http://schemas.openxmlformats.org/drawingml/2006/main">
+            <a:off x="781050" y="5524500"/>
+            <a:ext cx="2476500" cy="323850"/>
+          </a:xfrm>
+          <a:prstGeom xmlns:a="http://schemas.openxmlformats.org/drawingml/2006/main" prst="rect">
+            <a:avLst/>
+          </a:prstGeom>
+          <a:noFill xmlns:a="http://schemas.openxmlformats.org/drawingml/2006/main"/>
+          <a:ln xmlns:a="http://schemas.openxmlformats.org/drawingml/2006/main" w="0">
+            <a:noFill/>
+            <a:prstDash val="solid"/>
+          </a:ln>
+        </p:spPr>
+        <p:txBody>
+          <a:bodyPr xmlns:a="http://schemas.openxmlformats.org/drawingml/2006/main" wrap="square" lIns="0" tIns="0" rIns="0" bIns="0" anchor="t">
+            <a:normAutofit fontScale="84715"/>
+          </a:bodyPr>
+          <a:lstStyle xmlns:a="http://schemas.openxmlformats.org/drawingml/2006/main"/>
+          <a:p xmlns:a="http://schemas.openxmlformats.org/drawingml/2006/main">
+            <a:pPr algn="l">
+              <a:buNone/>
+              <a:defRPr sz="1725" b="1">
+                <a:solidFill>
+                  <a:srgbClr val="3D8DFF"/>
+                </a:solidFill>
+                <a:latin typeface="Arial"/>
+                <a:ea typeface="Arial"/>
+                <a:cs typeface="Arial"/>
+              </a:defRPr>
+            </a:pPr>
+            <a:r>
+              <a:rPr sz="1725" b="1">
+                <a:solidFill>
+                  <a:srgbClr val="3D8DFF"/>
+                </a:solidFill>
+                <a:latin typeface="Arial"/>
+                <a:ea typeface="Arial"/>
+                <a:cs typeface="Arial"/>
+              </a:rPr>
+              <a:t>Bookmarked next questions</a:t>
+            </a:r>
+          </a:p>
+        </p:txBody>
+      </p:sp>
+      <p:sp>
+        <p:nvSpPr>
+          <p:cNvPr id="23" name="">
+            <a:extLst xmlns:a="http://schemas.openxmlformats.org/drawingml/2006/main">
+              <a:ext uri="{FF2B5EF4-FFF2-40B4-BE49-F238E27FC236}">
+                <a16:creationId xmlns:a16="http://schemas.microsoft.com/office/drawing/2014/main" id="{3320D60E-6067-4236-80ED-A898A863026E}"/>
+              </a:ext>
+            </a:extLst>
+          </p:cNvPr>
+          <p:cNvSpPr>
+            <a:spLocks xmlns:a="http://schemas.openxmlformats.org/drawingml/2006/main" noGrp="1"/>
+          </p:cNvSpPr>
+          <p:nvPr/>
+        </p:nvSpPr>
+        <p:spPr>
+          <a:xfrm xmlns:a="http://schemas.openxmlformats.org/drawingml/2006/main">
+            <a:off x="3333750" y="5486400"/>
+            <a:ext cx="7810500" cy="419100"/>
+          </a:xfrm>
+          <a:prstGeom xmlns:a="http://schemas.openxmlformats.org/drawingml/2006/main" prst="rect">
+            <a:avLst/>
+          </a:prstGeom>
+          <a:noFill xmlns:a="http://schemas.openxmlformats.org/drawingml/2006/main"/>
+          <a:ln xmlns:a="http://schemas.openxmlformats.org/drawingml/2006/main" w="0">
+            <a:noFill/>
+            <a:prstDash val="solid"/>
+          </a:ln>
+        </p:spPr>
+        <p:txBody>
+          <a:bodyPr xmlns:a="http://schemas.openxmlformats.org/drawingml/2006/main" wrap="square" lIns="0" tIns="0" rIns="0" bIns="0" anchor="t">
+            <a:normAutofit fontScale="76389"/>
+          </a:bodyPr>
+          <a:lstStyle xmlns:a="http://schemas.openxmlformats.org/drawingml/2006/main"/>
+          <a:p xmlns:a="http://schemas.openxmlformats.org/drawingml/2006/main">
+            <a:pPr algn="l">
+              <a:buNone/>
+              <a:defRPr sz="1800" b="1">
+                <a:solidFill>
+                  <a:srgbClr val="273548"/>
+                </a:solidFill>
+                <a:latin typeface="Arial"/>
+                <a:ea typeface="Arial"/>
+                <a:cs typeface="Arial"/>
+              </a:defRPr>
+            </a:pPr>
+            <a:r>
+              <a:rPr sz="1800" b="1">
+                <a:solidFill>
+                  <a:srgbClr val="273548"/>
+                </a:solidFill>
+                <a:latin typeface="Arial"/>
+                <a:ea typeface="Arial"/>
+                <a:cs typeface="Arial"/>
+              </a:rPr>
+              <a:t>Replicate ATR% on a frozen sample. Then split green ER20 into up/down direction and test external market context.</a:t>
+            </a:r>
+          </a:p>
+        </p:txBody>
+      </p:sp>
+    </p:spTree>
+    <p:extLst>
+      <p:ext uri="{BB962C8B-B14F-4D97-AF65-F5344CB8AC3E}">
+        <p14:creationId xmlns:p14="http://schemas.microsoft.com/office/powerpoint/2010/main" val="666536286"/>
       </p:ext>
     </p:extLst>
   </p:cSld>
@@ -18259,7 +24198,7 @@
           <p:nvPr/>
         </p:nvPicPr>
         <p:blipFill>
-          <a:blip xmlns:r="http://schemas.openxmlformats.org/officeDocument/2006/relationships" xmlns:a="http://schemas.openxmlformats.org/drawingml/2006/main" r:embed="R7edbd1339a784db8"/>
+          <a:blip xmlns:r="http://schemas.openxmlformats.org/officeDocument/2006/relationships" xmlns:a="http://schemas.openxmlformats.org/drawingml/2006/main" r:embed="Rc2c7f769338e45a4"/>
           <a:stretch xmlns:a="http://schemas.openxmlformats.org/drawingml/2006/main"/>
         </p:blipFill>
         <p:spPr>
@@ -18671,7 +24610,7 @@
           <p:nvPr/>
         </p:nvPicPr>
         <p:blipFill>
-          <a:blip xmlns:r="http://schemas.openxmlformats.org/officeDocument/2006/relationships" xmlns:a="http://schemas.openxmlformats.org/drawingml/2006/main" r:embed="R05df032fe7e44623"/>
+          <a:blip xmlns:r="http://schemas.openxmlformats.org/officeDocument/2006/relationships" xmlns:a="http://schemas.openxmlformats.org/drawingml/2006/main" r:embed="R321943bf56324648"/>
           <a:stretch xmlns:a="http://schemas.openxmlformats.org/drawingml/2006/main"/>
         </p:blipFill>
         <p:spPr>
@@ -19733,7 +25672,7 @@
           <p:nvPr/>
         </p:nvPicPr>
         <p:blipFill>
-          <a:blip xmlns:r="http://schemas.openxmlformats.org/officeDocument/2006/relationships" xmlns:a="http://schemas.openxmlformats.org/drawingml/2006/main" r:embed="R68c31d3e6af841f8"/>
+          <a:blip xmlns:r="http://schemas.openxmlformats.org/officeDocument/2006/relationships" xmlns:a="http://schemas.openxmlformats.org/drawingml/2006/main" r:embed="Rb459fa0b30344a67"/>
           <a:stretch xmlns:a="http://schemas.openxmlformats.org/drawingml/2006/main"/>
         </p:blipFill>
         <p:spPr>
@@ -20638,7 +26577,7 @@
           <p:nvPr/>
         </p:nvPicPr>
         <p:blipFill>
-          <a:blip xmlns:r="http://schemas.openxmlformats.org/officeDocument/2006/relationships" xmlns:a="http://schemas.openxmlformats.org/drawingml/2006/main" r:embed="R0c54da1429b249a0"/>
+          <a:blip xmlns:r="http://schemas.openxmlformats.org/officeDocument/2006/relationships" xmlns:a="http://schemas.openxmlformats.org/drawingml/2006/main" r:embed="R472b74b356914a8a"/>
           <a:stretch xmlns:a="http://schemas.openxmlformats.org/drawingml/2006/main"/>
         </p:blipFill>
         <p:spPr>
@@ -21442,7 +27381,7 @@
           <p:nvPr/>
         </p:nvPicPr>
         <p:blipFill>
-          <a:blip xmlns:r="http://schemas.openxmlformats.org/officeDocument/2006/relationships" xmlns:a="http://schemas.openxmlformats.org/drawingml/2006/main" r:embed="R7b08d525103f4a86"/>
+          <a:blip xmlns:r="http://schemas.openxmlformats.org/officeDocument/2006/relationships" xmlns:a="http://schemas.openxmlformats.org/drawingml/2006/main" r:embed="Rcc88488bccb44203"/>
           <a:stretch xmlns:a="http://schemas.openxmlformats.org/drawingml/2006/main"/>
         </p:blipFill>
         <p:spPr>

--- a/operator_hypothesis_lab/presentations/tsla_descriptive_microscope_evidence.pptx
+++ b/operator_hypothesis_lab/presentations/tsla_descriptive_microscope_evidence.pptx
@@ -2,42 +2,43 @@
 <file path=ppt/presentation.xml><?xml version="1.0" encoding="utf-8"?>
 <p:presentation xmlns:p="http://schemas.openxmlformats.org/presentationml/2006/main">
   <p:sldMasterIdLst>
-    <p:sldMasterId xmlns:r="http://schemas.openxmlformats.org/officeDocument/2006/relationships" id="2147483648" r:id="Reb843da5173647aa"/>
+    <p:sldMasterId xmlns:r="http://schemas.openxmlformats.org/officeDocument/2006/relationships" id="2147483648" r:id="R8784b9d88eb04a77"/>
   </p:sldMasterIdLst>
   <p:notesMasterIdLst>
-    <p:notesMasterId xmlns:r="http://schemas.openxmlformats.org/officeDocument/2006/relationships" r:id="Rd8fc8777ce8b4b36"/>
+    <p:notesMasterId xmlns:r="http://schemas.openxmlformats.org/officeDocument/2006/relationships" r:id="Rd4a0359dc2924145"/>
   </p:notesMasterIdLst>
   <p:sldIdLst>
-    <p:sldId xmlns:r="http://schemas.openxmlformats.org/officeDocument/2006/relationships" id="256" r:id="R63902cd3df904b09"/>
-    <p:sldId xmlns:r="http://schemas.openxmlformats.org/officeDocument/2006/relationships" id="257" r:id="Rc3b1b92a27454849"/>
-    <p:sldId xmlns:r="http://schemas.openxmlformats.org/officeDocument/2006/relationships" id="258" r:id="R8215d72e601042f7"/>
-    <p:sldId xmlns:r="http://schemas.openxmlformats.org/officeDocument/2006/relationships" id="259" r:id="R6c5a6d101c9a4f28"/>
-    <p:sldId xmlns:r="http://schemas.openxmlformats.org/officeDocument/2006/relationships" id="260" r:id="Rc362f307e3924d5a"/>
-    <p:sldId xmlns:r="http://schemas.openxmlformats.org/officeDocument/2006/relationships" id="261" r:id="R3c1e37d2ca2c4e82"/>
-    <p:sldId xmlns:r="http://schemas.openxmlformats.org/officeDocument/2006/relationships" id="262" r:id="R048a3f4a33b74b91"/>
-    <p:sldId xmlns:r="http://schemas.openxmlformats.org/officeDocument/2006/relationships" id="263" r:id="Red344faaa8ba49d8"/>
-    <p:sldId xmlns:r="http://schemas.openxmlformats.org/officeDocument/2006/relationships" id="264" r:id="Rd08eefb8905741af"/>
-    <p:sldId xmlns:r="http://schemas.openxmlformats.org/officeDocument/2006/relationships" id="265" r:id="R9f7dafc8f9bb431b"/>
-    <p:sldId xmlns:r="http://schemas.openxmlformats.org/officeDocument/2006/relationships" id="266" r:id="R81e4ce78c2b64caf"/>
-    <p:sldId xmlns:r="http://schemas.openxmlformats.org/officeDocument/2006/relationships" id="267" r:id="Ra53fe406658e42c5"/>
-    <p:sldId xmlns:r="http://schemas.openxmlformats.org/officeDocument/2006/relationships" id="268" r:id="Rbe0235201b9f43cc"/>
-    <p:sldId xmlns:r="http://schemas.openxmlformats.org/officeDocument/2006/relationships" id="269" r:id="R9d9fe8cecb614130"/>
-    <p:sldId xmlns:r="http://schemas.openxmlformats.org/officeDocument/2006/relationships" id="270" r:id="R3755445df2314ad5"/>
-    <p:sldId xmlns:r="http://schemas.openxmlformats.org/officeDocument/2006/relationships" id="271" r:id="R376f8aae59e14dfb"/>
-    <p:sldId xmlns:r="http://schemas.openxmlformats.org/officeDocument/2006/relationships" id="272" r:id="Rce11102322054118"/>
-    <p:sldId xmlns:r="http://schemas.openxmlformats.org/officeDocument/2006/relationships" id="273" r:id="Rdf0b1a57102c496e"/>
-    <p:sldId xmlns:r="http://schemas.openxmlformats.org/officeDocument/2006/relationships" id="274" r:id="R5c397b28c5254ce9"/>
-    <p:sldId xmlns:r="http://schemas.openxmlformats.org/officeDocument/2006/relationships" id="275" r:id="Rad7276fc2ba14134"/>
-    <p:sldId xmlns:r="http://schemas.openxmlformats.org/officeDocument/2006/relationships" id="276" r:id="R17512c94dd114f05"/>
-    <p:sldId xmlns:r="http://schemas.openxmlformats.org/officeDocument/2006/relationships" id="277" r:id="Ra712361768c247ac"/>
-    <p:sldId xmlns:r="http://schemas.openxmlformats.org/officeDocument/2006/relationships" id="278" r:id="Rf00890273f9342cd"/>
-    <p:sldId xmlns:r="http://schemas.openxmlformats.org/officeDocument/2006/relationships" id="279" r:id="R8bafadd3c9c14419"/>
-    <p:sldId xmlns:r="http://schemas.openxmlformats.org/officeDocument/2006/relationships" id="280" r:id="Rdffbb9be272f4b7c"/>
-    <p:sldId xmlns:r="http://schemas.openxmlformats.org/officeDocument/2006/relationships" id="281" r:id="Ra9cb828de4b643a3"/>
-    <p:sldId xmlns:r="http://schemas.openxmlformats.org/officeDocument/2006/relationships" id="282" r:id="Raacf707921284382"/>
-    <p:sldId xmlns:r="http://schemas.openxmlformats.org/officeDocument/2006/relationships" id="283" r:id="Recebf945e77f4c21"/>
-    <p:sldId xmlns:r="http://schemas.openxmlformats.org/officeDocument/2006/relationships" id="284" r:id="Rc08eb660b1b74482"/>
-    <p:sldId xmlns:r="http://schemas.openxmlformats.org/officeDocument/2006/relationships" id="285" r:id="Rf197cce8d6574203"/>
+    <p:sldId xmlns:r="http://schemas.openxmlformats.org/officeDocument/2006/relationships" id="256" r:id="Ra856ea82b1f24691"/>
+    <p:sldId xmlns:r="http://schemas.openxmlformats.org/officeDocument/2006/relationships" id="257" r:id="R738ada6bc0a642e9"/>
+    <p:sldId xmlns:r="http://schemas.openxmlformats.org/officeDocument/2006/relationships" id="258" r:id="Rb64df74bfd4f4ea1"/>
+    <p:sldId xmlns:r="http://schemas.openxmlformats.org/officeDocument/2006/relationships" id="259" r:id="R769ae138f9504f10"/>
+    <p:sldId xmlns:r="http://schemas.openxmlformats.org/officeDocument/2006/relationships" id="260" r:id="R9e8a54764f9f4237"/>
+    <p:sldId xmlns:r="http://schemas.openxmlformats.org/officeDocument/2006/relationships" id="261" r:id="R3289a9d1be36412b"/>
+    <p:sldId xmlns:r="http://schemas.openxmlformats.org/officeDocument/2006/relationships" id="262" r:id="R7226d268e68c4588"/>
+    <p:sldId xmlns:r="http://schemas.openxmlformats.org/officeDocument/2006/relationships" id="263" r:id="R89e884d3145340ed"/>
+    <p:sldId xmlns:r="http://schemas.openxmlformats.org/officeDocument/2006/relationships" id="264" r:id="Re09e93c3c0fa455c"/>
+    <p:sldId xmlns:r="http://schemas.openxmlformats.org/officeDocument/2006/relationships" id="265" r:id="R67f0fd8180f24c98"/>
+    <p:sldId xmlns:r="http://schemas.openxmlformats.org/officeDocument/2006/relationships" id="266" r:id="Rb9137075e1664967"/>
+    <p:sldId xmlns:r="http://schemas.openxmlformats.org/officeDocument/2006/relationships" id="267" r:id="Rb87db3e7d5ba4a3a"/>
+    <p:sldId xmlns:r="http://schemas.openxmlformats.org/officeDocument/2006/relationships" id="268" r:id="Rb164100bbee94752"/>
+    <p:sldId xmlns:r="http://schemas.openxmlformats.org/officeDocument/2006/relationships" id="269" r:id="Rf41834c2c2554a2d"/>
+    <p:sldId xmlns:r="http://schemas.openxmlformats.org/officeDocument/2006/relationships" id="270" r:id="Rd115eed1654a4d45"/>
+    <p:sldId xmlns:r="http://schemas.openxmlformats.org/officeDocument/2006/relationships" id="271" r:id="R1915b87901aa4ae8"/>
+    <p:sldId xmlns:r="http://schemas.openxmlformats.org/officeDocument/2006/relationships" id="272" r:id="Rab08085a89ec4be0"/>
+    <p:sldId xmlns:r="http://schemas.openxmlformats.org/officeDocument/2006/relationships" id="273" r:id="R6a0cead665214d25"/>
+    <p:sldId xmlns:r="http://schemas.openxmlformats.org/officeDocument/2006/relationships" id="274" r:id="R4c2780eeef9041dd"/>
+    <p:sldId xmlns:r="http://schemas.openxmlformats.org/officeDocument/2006/relationships" id="275" r:id="R33f5770978b743f9"/>
+    <p:sldId xmlns:r="http://schemas.openxmlformats.org/officeDocument/2006/relationships" id="276" r:id="R698610770dc74bb5"/>
+    <p:sldId xmlns:r="http://schemas.openxmlformats.org/officeDocument/2006/relationships" id="277" r:id="R25a1037079ba4109"/>
+    <p:sldId xmlns:r="http://schemas.openxmlformats.org/officeDocument/2006/relationships" id="278" r:id="Rf2d3fd44323e486b"/>
+    <p:sldId xmlns:r="http://schemas.openxmlformats.org/officeDocument/2006/relationships" id="279" r:id="Rf5336442302b42ac"/>
+    <p:sldId xmlns:r="http://schemas.openxmlformats.org/officeDocument/2006/relationships" id="280" r:id="R71b81cb4596f46d6"/>
+    <p:sldId xmlns:r="http://schemas.openxmlformats.org/officeDocument/2006/relationships" id="281" r:id="R34c4264d362646f4"/>
+    <p:sldId xmlns:r="http://schemas.openxmlformats.org/officeDocument/2006/relationships" id="282" r:id="R77d11d352233451f"/>
+    <p:sldId xmlns:r="http://schemas.openxmlformats.org/officeDocument/2006/relationships" id="283" r:id="Rdc885d4a6f3749b4"/>
+    <p:sldId xmlns:r="http://schemas.openxmlformats.org/officeDocument/2006/relationships" id="284" r:id="R7ecbec7979cd4a4d"/>
+    <p:sldId xmlns:r="http://schemas.openxmlformats.org/officeDocument/2006/relationships" id="285" r:id="Re52bc379730e41a5"/>
+    <p:sldId xmlns:r="http://schemas.openxmlformats.org/officeDocument/2006/relationships" id="286" r:id="Rba546ac1250d4b29"/>
   </p:sldIdLst>
   <p:sldSz cx="12192000" cy="6858000"/>
   <p:notesSz cx="6858000" cy="9144000"/>
@@ -2241,7 +2242,7 @@
           <a:lstStyle xmlns:a="http://schemas.openxmlformats.org/drawingml/2006/main"/>
           <a:p xmlns:a="http://schemas.openxmlformats.org/drawingml/2006/main">
             <a:r>
-              <a:t>LOW ATR-percent anchors produce positive point estimates throughout the grid, but the strongest cell's interval crosses zero and no LOW cell survives the within-state scan.</a:t>
+              <a:t>This companion view makes the accepted volatility classifier visible in price time. Blue, gold, and red mean LOW, MEDIUM, and HIGH movement capacity; they do not mean bearish, neutral, and bullish. The lower panel shows the causal trailing ATR-percent rank and accepted hysteretic state at each close.</a:t>
             </a:r>
           </a:p>
           <a:p xmlns:a="http://schemas.openxmlformats.org/drawingml/2006/main">
@@ -2256,17 +2257,22 @@
           </a:p>
           <a:p xmlns:a="http://schemas.openxmlformats.org/drawingml/2006/main">
             <a:r>
-              <a:t>- runs/research_workbench/operator_hypothesis_lab/tsla_atrp_conditioned_return_horizon_grid_20260825/low_pearson_matrix.csv</a:t>
-            </a:r>
-          </a:p>
-          <a:p xmlns:a="http://schemas.openxmlformats.org/drawingml/2006/main">
-            <a:r>
-              <a:t>- runs/research_workbench/operator_hypothesis_lab/tsla_atrp_conditioned_return_horizon_grid_20260825/conditioned_horizon_grid_statistics.csv</a:t>
-            </a:r>
-          </a:p>
-          <a:p xmlns:a="http://schemas.openxmlformats.org/drawingml/2006/main">
-            <a:r>
-              <a:t>- runs/research_workbench/operator_hypothesis_lab/tsla_atrp_conditioned_return_horizon_grid_20260825/visuals/tsla_atrp_low_pearson_heatmap.png</a:t>
+              <a:t>- runs/research_workbench/operator_hypothesis_lab/tsla_atrp_conditioned_return_horizon_grid_20260825/visuals/tsla_atrp_state_price_bands.png</a:t>
+            </a:r>
+          </a:p>
+          <a:p xmlns:a="http://schemas.openxmlformats.org/drawingml/2006/main">
+            <a:r>
+              <a:t>- runs/research_workbench/operator_hypothesis_lab/tsla_atrp_conditioned_return_horizon_grid_20260825/tsla_atrp_state_chart_ledger.csv</a:t>
+            </a:r>
+          </a:p>
+          <a:p xmlns:a="http://schemas.openxmlformats.org/drawingml/2006/main">
+            <a:r>
+              <a:t>- runs/research_workbench/operator_hypothesis_lab/tsla_atrp_conditioned_return_horizon_grid_20260825/tsla_atrp_state_spans.csv</a:t>
+            </a:r>
+          </a:p>
+          <a:p xmlns:a="http://schemas.openxmlformats.org/drawingml/2006/main">
+            <a:r>
+              <a:t>- runs/research_workbench/operator_hypothesis_lab/hyp_reg_01_1_atr_percent_20260814/hyp_reg_01_1_daily_state_ledger.csv</a:t>
             </a:r>
           </a:p>
           <a:p xmlns:a="http://schemas.openxmlformats.org/drawingml/2006/main">
@@ -2341,7 +2347,7 @@
           <a:lstStyle xmlns:a="http://schemas.openxmlformats.org/drawingml/2006/main"/>
           <a:p xmlns:a="http://schemas.openxmlformats.org/drawingml/2006/main">
             <a:r>
-              <a:t>MEDIUM ATR-percent anchors show the most statistically stable continuation pattern. Under the strict correction across all 486 tests, the 5/3, 10/2, and 10/3 cells remain.</a:t>
+              <a:t>LOW ATR-percent anchors produce positive point estimates throughout the grid, but the strongest cell's interval crosses zero and no LOW cell survives the within-state scan.</a:t>
             </a:r>
           </a:p>
           <a:p xmlns:a="http://schemas.openxmlformats.org/drawingml/2006/main">
@@ -2356,7 +2362,7 @@
           </a:p>
           <a:p xmlns:a="http://schemas.openxmlformats.org/drawingml/2006/main">
             <a:r>
-              <a:t>- runs/research_workbench/operator_hypothesis_lab/tsla_atrp_conditioned_return_horizon_grid_20260825/medium_pearson_matrix.csv</a:t>
+              <a:t>- runs/research_workbench/operator_hypothesis_lab/tsla_atrp_conditioned_return_horizon_grid_20260825/low_pearson_matrix.csv</a:t>
             </a:r>
           </a:p>
           <a:p xmlns:a="http://schemas.openxmlformats.org/drawingml/2006/main">
@@ -2366,7 +2372,7 @@
           </a:p>
           <a:p xmlns:a="http://schemas.openxmlformats.org/drawingml/2006/main">
             <a:r>
-              <a:t>- runs/research_workbench/operator_hypothesis_lab/tsla_atrp_conditioned_return_horizon_grid_20260825/visuals/tsla_atrp_medium_pearson_heatmap.png</a:t>
+              <a:t>- runs/research_workbench/operator_hypothesis_lab/tsla_atrp_conditioned_return_horizon_grid_20260825/visuals/tsla_atrp_low_pearson_heatmap.png</a:t>
             </a:r>
           </a:p>
           <a:p xmlns:a="http://schemas.openxmlformats.org/drawingml/2006/main">
@@ -2441,7 +2447,7 @@
           <a:lstStyle xmlns:a="http://schemas.openxmlformats.org/drawingml/2006/main"/>
           <a:p xmlns:a="http://schemas.openxmlformats.org/drawingml/2006/main">
             <a:r>
-              <a:t>HIGH ATR-percent anchors reverse the sign of the broad surface, especially at longer horizons. The most extreme cell is visually strong but its dependence-robust interval still crosses zero.</a:t>
+              <a:t>MEDIUM ATR-percent anchors show the most statistically stable continuation pattern. Under the strict correction across all 486 tests, the 5/3, 10/2, and 10/3 cells remain.</a:t>
             </a:r>
           </a:p>
           <a:p xmlns:a="http://schemas.openxmlformats.org/drawingml/2006/main">
@@ -2456,7 +2462,7 @@
           </a:p>
           <a:p xmlns:a="http://schemas.openxmlformats.org/drawingml/2006/main">
             <a:r>
-              <a:t>- runs/research_workbench/operator_hypothesis_lab/tsla_atrp_conditioned_return_horizon_grid_20260825/high_pearson_matrix.csv</a:t>
+              <a:t>- runs/research_workbench/operator_hypothesis_lab/tsla_atrp_conditioned_return_horizon_grid_20260825/medium_pearson_matrix.csv</a:t>
             </a:r>
           </a:p>
           <a:p xmlns:a="http://schemas.openxmlformats.org/drawingml/2006/main">
@@ -2466,7 +2472,7 @@
           </a:p>
           <a:p xmlns:a="http://schemas.openxmlformats.org/drawingml/2006/main">
             <a:r>
-              <a:t>- runs/research_workbench/operator_hypothesis_lab/tsla_atrp_conditioned_return_horizon_grid_20260825/visuals/tsla_atrp_high_pearson_heatmap.png</a:t>
+              <a:t>- runs/research_workbench/operator_hypothesis_lab/tsla_atrp_conditioned_return_horizon_grid_20260825/visuals/tsla_atrp_medium_pearson_heatmap.png</a:t>
             </a:r>
           </a:p>
           <a:p xmlns:a="http://schemas.openxmlformats.org/drawingml/2006/main">
@@ -2541,7 +2547,7 @@
           <a:lstStyle xmlns:a="http://schemas.openxmlformats.org/drawingml/2006/main"/>
           <a:p xmlns:a="http://schemas.openxmlformats.org/drawingml/2006/main">
             <a:r>
-              <a:t>The largest correlation contrast is -0.548 at 25 prior and 15 forward; its within-family interaction q is 0.038 but strict omnibus q is 0.081. Three smaller HIGH-minus-MEDIUM interactions survive the omnibus correction.</a:t>
+              <a:t>HIGH ATR-percent anchors reverse the sign of the broad surface, especially at longer horizons. The most extreme cell is visually strong but its dependence-robust interval still crosses zero.</a:t>
             </a:r>
           </a:p>
           <a:p xmlns:a="http://schemas.openxmlformats.org/drawingml/2006/main">
@@ -2556,22 +2562,17 @@
           </a:p>
           <a:p xmlns:a="http://schemas.openxmlformats.org/drawingml/2006/main">
             <a:r>
-              <a:t>- runs/research_workbench/operator_hypothesis_lab/tsla_atrp_conditioned_return_horizon_grid_20260825/high_minus_medium_pearson_difference_matrix.csv</a:t>
-            </a:r>
-          </a:p>
-          <a:p xmlns:a="http://schemas.openxmlformats.org/drawingml/2006/main">
-            <a:r>
-              <a:t>- runs/research_workbench/operator_hypothesis_lab/tsla_atrp_conditioned_return_horizon_grid_20260825/pairwise_state_comparison_statistics.csv</a:t>
-            </a:r>
-          </a:p>
-          <a:p xmlns:a="http://schemas.openxmlformats.org/drawingml/2006/main">
-            <a:r>
-              <a:t>- runs/research_workbench/operator_hypothesis_lab/tsla_atrp_conditioned_return_horizon_grid_20260825/high_minus_medium_interaction_bh_q_matrix.csv</a:t>
-            </a:r>
-          </a:p>
-          <a:p xmlns:a="http://schemas.openxmlformats.org/drawingml/2006/main">
-            <a:r>
-              <a:t>- runs/research_workbench/operator_hypothesis_lab/tsla_atrp_conditioned_return_horizon_grid_20260825/visuals/tsla_atrp_high_minus_medium_pearson_heatmap.png</a:t>
+              <a:t>- runs/research_workbench/operator_hypothesis_lab/tsla_atrp_conditioned_return_horizon_grid_20260825/high_pearson_matrix.csv</a:t>
+            </a:r>
+          </a:p>
+          <a:p xmlns:a="http://schemas.openxmlformats.org/drawingml/2006/main">
+            <a:r>
+              <a:t>- runs/research_workbench/operator_hypothesis_lab/tsla_atrp_conditioned_return_horizon_grid_20260825/conditioned_horizon_grid_statistics.csv</a:t>
+            </a:r>
+          </a:p>
+          <a:p xmlns:a="http://schemas.openxmlformats.org/drawingml/2006/main">
+            <a:r>
+              <a:t>- runs/research_workbench/operator_hypothesis_lab/tsla_atrp_conditioned_return_horizon_grid_20260825/visuals/tsla_atrp_high_pearson_heatmap.png</a:t>
             </a:r>
           </a:p>
           <a:p xmlns:a="http://schemas.openxmlformats.org/drawingml/2006/main">
@@ -2702,6 +2703,111 @@
 </file>
 
 <file path=ppt/notesSlides/notesSlide30.xml><?xml version="1.0" encoding="utf-8"?>
+<p:notes xmlns:p="http://schemas.openxmlformats.org/presentationml/2006/main">
+  <p:cSld>
+    <p:spTree>
+      <p:nvGrpSpPr>
+        <p:cNvPr id="1" name=""/>
+        <p:cNvGrpSpPr/>
+        <p:nvPr/>
+      </p:nvGrpSpPr>
+      <p:grpSpPr>
+        <a:xfrm xmlns:a="http://schemas.openxmlformats.org/drawingml/2006/main"/>
+      </p:grpSpPr>
+      <p:sp>
+        <p:nvSpPr>
+          <p:cNvPr id="2" name="Slide Image Placeholder 1"/>
+          <p:cNvSpPr>
+            <a:spLocks xmlns:a="http://schemas.openxmlformats.org/drawingml/2006/main" noGrp="1"/>
+          </p:cNvSpPr>
+          <p:nvPr>
+            <p:ph type="sldImg" idx="0"/>
+          </p:nvPr>
+        </p:nvSpPr>
+        <p:spPr/>
+      </p:sp>
+      <p:sp>
+        <p:nvSpPr>
+          <p:cNvPr id="3" name="Notes Placeholder 2"/>
+          <p:cNvSpPr>
+            <a:spLocks xmlns:a="http://schemas.openxmlformats.org/drawingml/2006/main" noGrp="1"/>
+          </p:cNvSpPr>
+          <p:nvPr>
+            <p:ph type="body" idx="1"/>
+          </p:nvPr>
+        </p:nvSpPr>
+        <p:spPr/>
+        <p:txBody>
+          <a:bodyPr xmlns:a="http://schemas.openxmlformats.org/drawingml/2006/main"/>
+          <a:lstStyle xmlns:a="http://schemas.openxmlformats.org/drawingml/2006/main"/>
+          <a:p xmlns:a="http://schemas.openxmlformats.org/drawingml/2006/main">
+            <a:r>
+              <a:t>The largest correlation contrast is -0.548 at 25 prior and 15 forward; its within-family interaction q is 0.038 but strict omnibus q is 0.081. Three smaller HIGH-minus-MEDIUM interactions survive the omnibus correction.</a:t>
+            </a:r>
+          </a:p>
+          <a:p xmlns:a="http://schemas.openxmlformats.org/drawingml/2006/main">
+            <a:r>
+              <a:t/>
+            </a:r>
+          </a:p>
+          <a:p xmlns:a="http://schemas.openxmlformats.org/drawingml/2006/main">
+            <a:r>
+              <a:t>[Sources]</a:t>
+            </a:r>
+          </a:p>
+          <a:p xmlns:a="http://schemas.openxmlformats.org/drawingml/2006/main">
+            <a:r>
+              <a:t>- runs/research_workbench/operator_hypothesis_lab/tsla_atrp_conditioned_return_horizon_grid_20260825/high_minus_medium_pearson_difference_matrix.csv</a:t>
+            </a:r>
+          </a:p>
+          <a:p xmlns:a="http://schemas.openxmlformats.org/drawingml/2006/main">
+            <a:r>
+              <a:t>- runs/research_workbench/operator_hypothesis_lab/tsla_atrp_conditioned_return_horizon_grid_20260825/pairwise_state_comparison_statistics.csv</a:t>
+            </a:r>
+          </a:p>
+          <a:p xmlns:a="http://schemas.openxmlformats.org/drawingml/2006/main">
+            <a:r>
+              <a:t>- runs/research_workbench/operator_hypothesis_lab/tsla_atrp_conditioned_return_horizon_grid_20260825/high_minus_medium_interaction_bh_q_matrix.csv</a:t>
+            </a:r>
+          </a:p>
+          <a:p xmlns:a="http://schemas.openxmlformats.org/drawingml/2006/main">
+            <a:r>
+              <a:t>- runs/research_workbench/operator_hypothesis_lab/tsla_atrp_conditioned_return_horizon_grid_20260825/visuals/tsla_atrp_high_minus_medium_pearson_heatmap.png</a:t>
+            </a:r>
+          </a:p>
+          <a:p xmlns:a="http://schemas.openxmlformats.org/drawingml/2006/main">
+            <a:r>
+              <a:t>[/Sources]</a:t>
+            </a:r>
+          </a:p>
+        </p:txBody>
+      </p:sp>
+      <p:sp>
+        <p:nvSpPr>
+          <p:cNvPr id="4" name="Slide Number Placeholder 3"/>
+          <p:cNvSpPr>
+            <a:spLocks xmlns:a="http://schemas.openxmlformats.org/drawingml/2006/main" noGrp="1"/>
+          </p:cNvSpPr>
+          <p:nvPr>
+            <p:ph type="sldNum" idx="5"/>
+          </p:nvPr>
+        </p:nvSpPr>
+        <p:spPr/>
+        <p:txBody>
+          <a:bodyPr xmlns:a="http://schemas.openxmlformats.org/drawingml/2006/main"/>
+          <a:lstStyle xmlns:a="http://schemas.openxmlformats.org/drawingml/2006/main"/>
+          <a:p xmlns:a="http://schemas.openxmlformats.org/drawingml/2006/main"/>
+        </p:txBody>
+      </p:sp>
+    </p:spTree>
+  </p:cSld>
+  <p:clrMapOvr>
+    <a:masterClrMapping xmlns:a="http://schemas.openxmlformats.org/drawingml/2006/main"/>
+  </p:clrMapOvr>
+</p:notes>
+</file>
+
+<file path=ppt/notesSlides/notesSlide31.xml><?xml version="1.0" encoding="utf-8"?>
 <p:notes xmlns:p="http://schemas.openxmlformats.org/presentationml/2006/main">
   <p:cSld>
     <p:spTree>
@@ -3424,7 +3530,7 @@
   </p:cSld>
   <p:clrMap bg1="lt1" tx1="dk1" bg2="lt2" tx2="dk2" accent1="accent1" accent2="accent2" accent3="accent3" accent4="accent4" accent5="accent5" accent6="accent6" hlink="hlink" folHlink="folHlink"/>
   <p:sldLayoutIdLst>
-    <p:sldLayoutId xmlns:r="http://schemas.openxmlformats.org/officeDocument/2006/relationships" id="2147483649" r:id="R292de2d17219467d"/>
+    <p:sldLayoutId xmlns:r="http://schemas.openxmlformats.org/officeDocument/2006/relationships" id="2147483649" r:id="R92246c71310d46c6"/>
   </p:sldLayoutIdLst>
   <p:txStyles>
     <p:titleStyle>
@@ -4603,7 +4709,7 @@
           <p:nvPr/>
         </p:nvPicPr>
         <p:blipFill>
-          <a:blip xmlns:r="http://schemas.openxmlformats.org/officeDocument/2006/relationships" xmlns:a="http://schemas.openxmlformats.org/drawingml/2006/main" r:embed="R56bc2161bcbf44d9"/>
+          <a:blip xmlns:r="http://schemas.openxmlformats.org/officeDocument/2006/relationships" xmlns:a="http://schemas.openxmlformats.org/drawingml/2006/main" r:embed="R09a06b7a1b4448ba"/>
           <a:stretch xmlns:a="http://schemas.openxmlformats.org/drawingml/2006/main"/>
         </p:blipFill>
         <p:spPr>
@@ -8524,7 +8630,7 @@
           <p:nvPr/>
         </p:nvPicPr>
         <p:blipFill>
-          <a:blip xmlns:r="http://schemas.openxmlformats.org/officeDocument/2006/relationships" xmlns:a="http://schemas.openxmlformats.org/drawingml/2006/main" r:embed="R5ce294c17730419d"/>
+          <a:blip xmlns:r="http://schemas.openxmlformats.org/officeDocument/2006/relationships" xmlns:a="http://schemas.openxmlformats.org/drawingml/2006/main" r:embed="Rbfa95d3868d0430e"/>
           <a:stretch xmlns:a="http://schemas.openxmlformats.org/drawingml/2006/main"/>
         </p:blipFill>
         <p:spPr>
@@ -9429,7 +9535,7 @@
           <p:nvPr/>
         </p:nvPicPr>
         <p:blipFill>
-          <a:blip xmlns:r="http://schemas.openxmlformats.org/officeDocument/2006/relationships" xmlns:a="http://schemas.openxmlformats.org/drawingml/2006/main" r:embed="R289a279bf7814f58"/>
+          <a:blip xmlns:r="http://schemas.openxmlformats.org/officeDocument/2006/relationships" xmlns:a="http://schemas.openxmlformats.org/drawingml/2006/main" r:embed="R79622c9646664e71"/>
           <a:stretch xmlns:a="http://schemas.openxmlformats.org/drawingml/2006/main"/>
         </p:blipFill>
         <p:spPr>
@@ -10233,7 +10339,7 @@
           <p:nvPr/>
         </p:nvPicPr>
         <p:blipFill>
-          <a:blip xmlns:r="http://schemas.openxmlformats.org/officeDocument/2006/relationships" xmlns:a="http://schemas.openxmlformats.org/drawingml/2006/main" r:embed="Rac4bc51d55e94bb3"/>
+          <a:blip xmlns:r="http://schemas.openxmlformats.org/officeDocument/2006/relationships" xmlns:a="http://schemas.openxmlformats.org/drawingml/2006/main" r:embed="R62069b35f6314be2"/>
           <a:stretch xmlns:a="http://schemas.openxmlformats.org/drawingml/2006/main"/>
         </p:blipFill>
         <p:spPr>
@@ -14586,7 +14692,7 @@
           <p:nvPr/>
         </p:nvPicPr>
         <p:blipFill>
-          <a:blip xmlns:r="http://schemas.openxmlformats.org/officeDocument/2006/relationships" xmlns:a="http://schemas.openxmlformats.org/drawingml/2006/main" r:embed="Rea91341bf18248b7"/>
+          <a:blip xmlns:r="http://schemas.openxmlformats.org/officeDocument/2006/relationships" xmlns:a="http://schemas.openxmlformats.org/drawingml/2006/main" r:embed="Rdfb41a89193e446f"/>
           <a:stretch xmlns:a="http://schemas.openxmlformats.org/drawingml/2006/main"/>
         </p:blipFill>
         <p:spPr>
@@ -14998,7 +15104,7 @@
           <p:nvPr/>
         </p:nvPicPr>
         <p:blipFill>
-          <a:blip xmlns:r="http://schemas.openxmlformats.org/officeDocument/2006/relationships" xmlns:a="http://schemas.openxmlformats.org/drawingml/2006/main" r:embed="Rf1cee17a749742af"/>
+          <a:blip xmlns:r="http://schemas.openxmlformats.org/officeDocument/2006/relationships" xmlns:a="http://schemas.openxmlformats.org/drawingml/2006/main" r:embed="R568f535318ed4a37"/>
           <a:stretch xmlns:a="http://schemas.openxmlformats.org/drawingml/2006/main"/>
         </p:blipFill>
         <p:spPr>
@@ -15903,7 +16009,7 @@
           <p:nvPr/>
         </p:nvPicPr>
         <p:blipFill>
-          <a:blip xmlns:r="http://schemas.openxmlformats.org/officeDocument/2006/relationships" xmlns:a="http://schemas.openxmlformats.org/drawingml/2006/main" r:embed="R1cdc019cc28c4648"/>
+          <a:blip xmlns:r="http://schemas.openxmlformats.org/officeDocument/2006/relationships" xmlns:a="http://schemas.openxmlformats.org/drawingml/2006/main" r:embed="R6d3711f7ae974143"/>
           <a:stretch xmlns:a="http://schemas.openxmlformats.org/drawingml/2006/main"/>
         </p:blipFill>
         <p:spPr>
@@ -19038,10 +19144,10 @@
       </p:grpSpPr>
       <p:sp>
         <p:nvSpPr>
-          <p:cNvPr id="9" name="section-4">
-            <a:extLst xmlns:a="http://schemas.openxmlformats.org/drawingml/2006/main">
-              <a:ext uri="{FF2B5EF4-FFF2-40B4-BE49-F238E27FC236}">
-                <a16:creationId xmlns:a16="http://schemas.microsoft.com/office/drawing/2014/main" id="{8AE0A271-669A-49F0-A82E-C4438BEE27D9}"/>
+          <p:cNvPr id="14" name="section-5">
+            <a:extLst xmlns:a="http://schemas.openxmlformats.org/drawingml/2006/main">
+              <a:ext uri="{FF2B5EF4-FFF2-40B4-BE49-F238E27FC236}">
+                <a16:creationId xmlns:a16="http://schemas.microsoft.com/office/drawing/2014/main" id="{7D217279-BBB9-4442-BD43-E35AFD380A36}"/>
               </a:ext>
             </a:extLst>
           </p:cNvPr>
@@ -19097,10 +19203,10 @@
       </p:sp>
       <p:sp>
         <p:nvSpPr>
-          <p:cNvPr id="2" name="title-4">
-            <a:extLst xmlns:a="http://schemas.openxmlformats.org/drawingml/2006/main">
-              <a:ext uri="{FF2B5EF4-FFF2-40B4-BE49-F238E27FC236}">
-                <a16:creationId xmlns:a16="http://schemas.microsoft.com/office/drawing/2014/main" id="{50C6F92F-721A-4252-9CF8-B5C9B01C7310}"/>
+          <p:cNvPr id="2" name="title-5">
+            <a:extLst xmlns:a="http://schemas.openxmlformats.org/drawingml/2006/main">
+              <a:ext uri="{FF2B5EF4-FFF2-40B4-BE49-F238E27FC236}">
+                <a16:creationId xmlns:a16="http://schemas.microsoft.com/office/drawing/2014/main" id="{ACF70291-6FC2-4F25-8EF7-C5343297C791}"/>
               </a:ext>
             </a:extLst>
           </p:cNvPr>
@@ -19149,7 +19255,7 @@
                 <a:ea typeface="Arial"/>
                 <a:cs typeface="Arial"/>
               </a:rPr>
-              <a:t>LOW ATR% is broadly positive, but no cell passes</a:t>
+              <a:t>ATR% shows movement capacity—not direction</a:t>
             </a:r>
           </a:p>
         </p:txBody>
@@ -19159,7 +19265,7 @@
           <p:cNvPr id="3" name="">
             <a:extLst xmlns:a="http://schemas.openxmlformats.org/drawingml/2006/main">
               <a:ext uri="{FF2B5EF4-FFF2-40B4-BE49-F238E27FC236}">
-                <a16:creationId xmlns:a16="http://schemas.microsoft.com/office/drawing/2014/main" id="{242399F2-4D0A-4337-B17E-DB3599DC380F}"/>
+                <a16:creationId xmlns:a16="http://schemas.microsoft.com/office/drawing/2014/main" id="{DC8E3755-2109-4A95-AAD7-09D4B54CD317}"/>
               </a:ext>
             </a:extLst>
           </p:cNvPr>
@@ -19189,10 +19295,10 @@
       </p:sp>
       <p:sp>
         <p:nvSpPr>
-          <p:cNvPr id="4" name="footer-left-4">
-            <a:extLst xmlns:a="http://schemas.openxmlformats.org/drawingml/2006/main">
-              <a:ext uri="{FF2B5EF4-FFF2-40B4-BE49-F238E27FC236}">
-                <a16:creationId xmlns:a16="http://schemas.microsoft.com/office/drawing/2014/main" id="{BF8B82CA-1E48-4669-BAD8-1FF8C09FCBFB}"/>
+          <p:cNvPr id="4" name="footer-left-5">
+            <a:extLst xmlns:a="http://schemas.openxmlformats.org/drawingml/2006/main">
+              <a:ext uri="{FF2B5EF4-FFF2-40B4-BE49-F238E27FC236}">
+                <a16:creationId xmlns:a16="http://schemas.microsoft.com/office/drawing/2014/main" id="{3D616FCB-FD1B-4926-8056-5988E7D3FD76}"/>
               </a:ext>
             </a:extLst>
           </p:cNvPr>
@@ -19248,10 +19354,10 @@
       </p:sp>
       <p:sp>
         <p:nvSpPr>
-          <p:cNvPr id="5" name="footer-number-4">
-            <a:extLst xmlns:a="http://schemas.openxmlformats.org/drawingml/2006/main">
-              <a:ext uri="{FF2B5EF4-FFF2-40B4-BE49-F238E27FC236}">
-                <a16:creationId xmlns:a16="http://schemas.microsoft.com/office/drawing/2014/main" id="{05959AEC-B0A5-45F0-A65B-C94C3E5A032F}"/>
+          <p:cNvPr id="5" name="footer-number-5">
+            <a:extLst xmlns:a="http://schemas.openxmlformats.org/drawingml/2006/main">
+              <a:ext uri="{FF2B5EF4-FFF2-40B4-BE49-F238E27FC236}">
+                <a16:creationId xmlns:a16="http://schemas.microsoft.com/office/drawing/2014/main" id="{7E3BECCF-F54F-4D27-BB58-7ED627475AF5}"/>
               </a:ext>
             </a:extLst>
           </p:cNvPr>
@@ -19310,19 +19416,19 @@
           <p:cNvPr id="6" name="">
             <a:extLst xmlns:a="http://schemas.openxmlformats.org/drawingml/2006/main">
               <a:ext uri="{FF2B5EF4-FFF2-40B4-BE49-F238E27FC236}">
-                <a16:creationId xmlns:a16="http://schemas.microsoft.com/office/drawing/2014/main" id="{9C8DEA29-E57D-4C8D-8538-2028FF89DA7C}"/>
-              </a:ext>
-            </a:extLst>
-          </p:cNvPr>
-          <p:cNvSpPr>
-            <a:spLocks xmlns:a="http://schemas.openxmlformats.org/drawingml/2006/main" noGrp="1"/>
-          </p:cNvSpPr>
-          <p:nvPr/>
-        </p:nvSpPr>
-        <p:spPr>
-          <a:xfrm xmlns:a="http://schemas.openxmlformats.org/drawingml/2006/main">
-            <a:off x="1000125" y="1352550"/>
-            <a:ext cx="10191750" cy="4905375"/>
+                <a16:creationId xmlns:a16="http://schemas.microsoft.com/office/drawing/2014/main" id="{C96C60D3-C5F7-4C39-991D-FB86EB75687F}"/>
+              </a:ext>
+            </a:extLst>
+          </p:cNvPr>
+          <p:cNvSpPr>
+            <a:spLocks xmlns:a="http://schemas.openxmlformats.org/drawingml/2006/main" noGrp="1"/>
+          </p:cNvSpPr>
+          <p:nvPr/>
+        </p:nvSpPr>
+        <p:spPr>
+          <a:xfrm xmlns:a="http://schemas.openxmlformats.org/drawingml/2006/main">
+            <a:off x="323850" y="1381125"/>
+            <a:ext cx="8572500" cy="4819650"/>
           </a:xfrm>
           <a:prstGeom xmlns:a="http://schemas.openxmlformats.org/drawingml/2006/main" prst="rect">
             <a:avLst/>
@@ -19343,76 +19449,345 @@
           <p:cNvPr id="8" name="">
             <a:extLst xmlns:a="http://schemas.openxmlformats.org/drawingml/2006/main">
               <a:ext uri="{FF2B5EF4-FFF2-40B4-BE49-F238E27FC236}">
-                <a16:creationId xmlns:a16="http://schemas.microsoft.com/office/drawing/2014/main" id="{4346A5F2-8CC4-4151-9BDB-346D47A3096B}"/>
-              </a:ext>
-            </a:extLst>
-          </p:cNvPr>
-          <p:cNvSpPr>
-            <a:spLocks xmlns:a="http://schemas.openxmlformats.org/drawingml/2006/main" noGrp="1"/>
-          </p:cNvSpPr>
-          <p:nvPr/>
-        </p:nvSpPr>
-        <p:spPr>
-          <a:xfrm xmlns:a="http://schemas.openxmlformats.org/drawingml/2006/main">
-            <a:off x="1143000" y="6286500"/>
-            <a:ext cx="9906000" cy="171450"/>
-          </a:xfrm>
-          <a:prstGeom xmlns:a="http://schemas.openxmlformats.org/drawingml/2006/main" prst="rect">
-            <a:avLst/>
-          </a:prstGeom>
-          <a:noFill xmlns:a="http://schemas.openxmlformats.org/drawingml/2006/main"/>
-          <a:ln xmlns:a="http://schemas.openxmlformats.org/drawingml/2006/main" w="0">
-            <a:noFill/>
-            <a:prstDash val="solid"/>
-          </a:ln>
-        </p:spPr>
-        <p:txBody>
-          <a:bodyPr xmlns:a="http://schemas.openxmlformats.org/drawingml/2006/main" wrap="square" lIns="0" tIns="0" rIns="0" bIns="0" anchor="t">
-            <a:normAutofit fontScale="93750"/>
-          </a:bodyPr>
-          <a:lstStyle xmlns:a="http://schemas.openxmlformats.org/drawingml/2006/main"/>
-          <a:p xmlns:a="http://schemas.openxmlformats.org/drawingml/2006/main">
-            <a:pPr algn="ctr">
-              <a:buNone/>
-              <a:defRPr sz="1200" b="0">
-                <a:solidFill>
-                  <a:srgbClr val="667384"/>
-                </a:solidFill>
-                <a:latin typeface="Arial"/>
-                <a:ea typeface="Arial"/>
-                <a:cs typeface="Arial"/>
-              </a:defRPr>
-            </a:pPr>
-            <a:r>
-              <a:rPr sz="1200" b="0">
-                <a:solidFill>
-                  <a:srgbClr val="667384"/>
-                </a:solidFill>
-                <a:latin typeface="Arial"/>
-                <a:ea typeface="Arial"/>
-                <a:cs typeface="Arial"/>
-              </a:rPr>
-              <a:t>All 81 cells positive; strongest +0.198 at 10 prior / 25 forward; 0/81 within-state BH passes.</a:t>
+                <a16:creationId xmlns:a16="http://schemas.microsoft.com/office/drawing/2014/main" id="{C5B493DE-9AA4-4FF1-8BE2-28F352E8FA07}"/>
+              </a:ext>
+            </a:extLst>
+          </p:cNvPr>
+          <p:cNvSpPr>
+            <a:spLocks xmlns:a="http://schemas.openxmlformats.org/drawingml/2006/main" noGrp="1"/>
+          </p:cNvSpPr>
+          <p:nvPr/>
+        </p:nvSpPr>
+        <p:spPr>
+          <a:xfrm xmlns:a="http://schemas.openxmlformats.org/drawingml/2006/main">
+            <a:off x="9201150" y="1581150"/>
+            <a:ext cx="2190750" cy="361950"/>
+          </a:xfrm>
+          <a:prstGeom xmlns:a="http://schemas.openxmlformats.org/drawingml/2006/main" prst="rect">
+            <a:avLst/>
+          </a:prstGeom>
+          <a:noFill xmlns:a="http://schemas.openxmlformats.org/drawingml/2006/main"/>
+          <a:ln xmlns:a="http://schemas.openxmlformats.org/drawingml/2006/main" w="0">
+            <a:noFill/>
+            <a:prstDash val="solid"/>
+          </a:ln>
+        </p:spPr>
+        <p:txBody>
+          <a:bodyPr xmlns:a="http://schemas.openxmlformats.org/drawingml/2006/main" wrap="square" lIns="0" tIns="0" rIns="0" bIns="0" anchor="t">
+            <a:normAutofit fontScale="100000"/>
+          </a:bodyPr>
+          <a:lstStyle xmlns:a="http://schemas.openxmlformats.org/drawingml/2006/main"/>
+          <a:p xmlns:a="http://schemas.openxmlformats.org/drawingml/2006/main">
+            <a:pPr algn="l">
+              <a:buNone/>
+              <a:defRPr sz="2100" b="1">
+                <a:solidFill>
+                  <a:srgbClr val="000000"/>
+                </a:solidFill>
+                <a:latin typeface="Arial"/>
+                <a:ea typeface="Arial"/>
+                <a:cs typeface="Arial"/>
+              </a:defRPr>
+            </a:pPr>
+            <a:r>
+              <a:rPr sz="2100" b="1">
+                <a:solidFill>
+                  <a:srgbClr val="000000"/>
+                </a:solidFill>
+                <a:latin typeface="Arial"/>
+                <a:ea typeface="Arial"/>
+                <a:cs typeface="Arial"/>
+              </a:rPr>
+              <a:t>How</a:t>
+            </a:r>
+          </a:p>
+        </p:txBody>
+      </p:sp>
+      <p:sp>
+        <p:nvSpPr>
+          <p:cNvPr id="9" name="">
+            <a:extLst xmlns:a="http://schemas.openxmlformats.org/drawingml/2006/main">
+              <a:ext uri="{FF2B5EF4-FFF2-40B4-BE49-F238E27FC236}">
+                <a16:creationId xmlns:a16="http://schemas.microsoft.com/office/drawing/2014/main" id="{5B6B1C17-35A6-411A-A67C-A4A72F63EF67}"/>
+              </a:ext>
+            </a:extLst>
+          </p:cNvPr>
+          <p:cNvSpPr>
+            <a:spLocks xmlns:a="http://schemas.openxmlformats.org/drawingml/2006/main" noGrp="1"/>
+          </p:cNvSpPr>
+          <p:nvPr/>
+        </p:nvSpPr>
+        <p:spPr>
+          <a:xfrm xmlns:a="http://schemas.openxmlformats.org/drawingml/2006/main">
+            <a:off x="9201150" y="2038350"/>
+            <a:ext cx="2400300" cy="1143000"/>
+          </a:xfrm>
+          <a:prstGeom xmlns:a="http://schemas.openxmlformats.org/drawingml/2006/main" prst="rect">
+            <a:avLst/>
+          </a:prstGeom>
+          <a:noFill xmlns:a="http://schemas.openxmlformats.org/drawingml/2006/main"/>
+          <a:ln xmlns:a="http://schemas.openxmlformats.org/drawingml/2006/main" w="0">
+            <a:noFill/>
+            <a:prstDash val="solid"/>
+          </a:ln>
+        </p:spPr>
+        <p:txBody>
+          <a:bodyPr xmlns:a="http://schemas.openxmlformats.org/drawingml/2006/main" wrap="square" lIns="0" tIns="0" rIns="0" bIns="0" anchor="t">
+            <a:normAutofit fontScale="100000"/>
+          </a:bodyPr>
+          <a:lstStyle xmlns:a="http://schemas.openxmlformats.org/drawingml/2006/main"/>
+          <a:p xmlns:a="http://schemas.openxmlformats.org/drawingml/2006/main">
+            <a:pPr algn="l">
+              <a:buNone/>
+              <a:defRPr sz="1500" b="0">
+                <a:solidFill>
+                  <a:srgbClr val="273548"/>
+                </a:solidFill>
+                <a:latin typeface="Arial"/>
+                <a:ea typeface="Arial"/>
+                <a:cs typeface="Arial"/>
+              </a:defRPr>
+            </a:pPr>
+            <a:r>
+              <a:rPr sz="1500" b="0">
+                <a:solidFill>
+                  <a:srgbClr val="273548"/>
+                </a:solidFill>
+                <a:latin typeface="Arial"/>
+                <a:ea typeface="Arial"/>
+                <a:cs typeface="Arial"/>
+              </a:rPr>
+              <a:t>Accepted state uses Wilder ATR14 / close, ranked against the prior 252 completed ATR% observations.</a:t>
+            </a:r>
+          </a:p>
+        </p:txBody>
+      </p:sp>
+      <p:sp>
+        <p:nvSpPr>
+          <p:cNvPr id="10" name="">
+            <a:extLst xmlns:a="http://schemas.openxmlformats.org/drawingml/2006/main">
+              <a:ext uri="{FF2B5EF4-FFF2-40B4-BE49-F238E27FC236}">
+                <a16:creationId xmlns:a16="http://schemas.microsoft.com/office/drawing/2014/main" id="{1E6C96CB-CC04-417E-9ADF-6D8B711B5273}"/>
+              </a:ext>
+            </a:extLst>
+          </p:cNvPr>
+          <p:cNvSpPr>
+            <a:spLocks xmlns:a="http://schemas.openxmlformats.org/drawingml/2006/main" noGrp="1"/>
+          </p:cNvSpPr>
+          <p:nvPr/>
+        </p:nvSpPr>
+        <p:spPr>
+          <a:xfrm xmlns:a="http://schemas.openxmlformats.org/drawingml/2006/main">
+            <a:off x="9201150" y="3409950"/>
+            <a:ext cx="2190750" cy="361950"/>
+          </a:xfrm>
+          <a:prstGeom xmlns:a="http://schemas.openxmlformats.org/drawingml/2006/main" prst="rect">
+            <a:avLst/>
+          </a:prstGeom>
+          <a:noFill xmlns:a="http://schemas.openxmlformats.org/drawingml/2006/main"/>
+          <a:ln xmlns:a="http://schemas.openxmlformats.org/drawingml/2006/main" w="0">
+            <a:noFill/>
+            <a:prstDash val="solid"/>
+          </a:ln>
+        </p:spPr>
+        <p:txBody>
+          <a:bodyPr xmlns:a="http://schemas.openxmlformats.org/drawingml/2006/main" wrap="square" lIns="0" tIns="0" rIns="0" bIns="0" anchor="t">
+            <a:normAutofit fontScale="100000"/>
+          </a:bodyPr>
+          <a:lstStyle xmlns:a="http://schemas.openxmlformats.org/drawingml/2006/main"/>
+          <a:p xmlns:a="http://schemas.openxmlformats.org/drawingml/2006/main">
+            <a:pPr algn="l">
+              <a:buNone/>
+              <a:defRPr sz="2100" b="1">
+                <a:solidFill>
+                  <a:srgbClr val="000000"/>
+                </a:solidFill>
+                <a:latin typeface="Arial"/>
+                <a:ea typeface="Arial"/>
+                <a:cs typeface="Arial"/>
+              </a:defRPr>
+            </a:pPr>
+            <a:r>
+              <a:rPr sz="2100" b="1">
+                <a:solidFill>
+                  <a:srgbClr val="000000"/>
+                </a:solidFill>
+                <a:latin typeface="Arial"/>
+                <a:ea typeface="Arial"/>
+                <a:cs typeface="Arial"/>
+              </a:rPr>
+              <a:t>Read</a:t>
+            </a:r>
+          </a:p>
+        </p:txBody>
+      </p:sp>
+      <p:sp>
+        <p:nvSpPr>
+          <p:cNvPr id="11" name="">
+            <a:extLst xmlns:a="http://schemas.openxmlformats.org/drawingml/2006/main">
+              <a:ext uri="{FF2B5EF4-FFF2-40B4-BE49-F238E27FC236}">
+                <a16:creationId xmlns:a16="http://schemas.microsoft.com/office/drawing/2014/main" id="{6C2CCFF6-12C5-4DA0-960D-99266D20441C}"/>
+              </a:ext>
+            </a:extLst>
+          </p:cNvPr>
+          <p:cNvSpPr>
+            <a:spLocks xmlns:a="http://schemas.openxmlformats.org/drawingml/2006/main" noGrp="1"/>
+          </p:cNvSpPr>
+          <p:nvPr/>
+        </p:nvSpPr>
+        <p:spPr>
+          <a:xfrm xmlns:a="http://schemas.openxmlformats.org/drawingml/2006/main">
+            <a:off x="9201150" y="3867150"/>
+            <a:ext cx="2400300" cy="1657350"/>
+          </a:xfrm>
+          <a:prstGeom xmlns:a="http://schemas.openxmlformats.org/drawingml/2006/main" prst="rect">
+            <a:avLst/>
+          </a:prstGeom>
+          <a:noFill xmlns:a="http://schemas.openxmlformats.org/drawingml/2006/main"/>
+          <a:ln xmlns:a="http://schemas.openxmlformats.org/drawingml/2006/main" w="0">
+            <a:noFill/>
+            <a:prstDash val="solid"/>
+          </a:ln>
+        </p:spPr>
+        <p:txBody>
+          <a:bodyPr xmlns:a="http://schemas.openxmlformats.org/drawingml/2006/main" wrap="square" lIns="0" tIns="0" rIns="0" bIns="0" anchor="t">
+            <a:normAutofit fontScale="100000"/>
+          </a:bodyPr>
+          <a:lstStyle xmlns:a="http://schemas.openxmlformats.org/drawingml/2006/main"/>
+          <a:p xmlns:a="http://schemas.openxmlformats.org/drawingml/2006/main">
+            <a:pPr algn="l">
+              <a:buNone/>
+              <a:defRPr sz="1500" b="0">
+                <a:solidFill>
+                  <a:srgbClr val="273548"/>
+                </a:solidFill>
+                <a:latin typeface="Arial"/>
+                <a:ea typeface="Arial"/>
+                <a:cs typeface="Arial"/>
+              </a:defRPr>
+            </a:pPr>
+            <a:r>
+              <a:rPr sz="1500" b="0">
+                <a:solidFill>
+                  <a:srgbClr val="273548"/>
+                </a:solidFill>
+                <a:latin typeface="Arial"/>
+                <a:ea typeface="Arial"/>
+                <a:cs typeface="Arial"/>
+              </a:rPr>
+              <a:t>Blue marks LOW, gold MEDIUM, and red HIGH movement capacity. Price and the causal trailing ATR% rank are shown together.</a:t>
+            </a:r>
+          </a:p>
+        </p:txBody>
+      </p:sp>
+      <p:sp>
+        <p:nvSpPr>
+          <p:cNvPr id="12" name="">
+            <a:extLst xmlns:a="http://schemas.openxmlformats.org/drawingml/2006/main">
+              <a:ext uri="{FF2B5EF4-FFF2-40B4-BE49-F238E27FC236}">
+                <a16:creationId xmlns:a16="http://schemas.microsoft.com/office/drawing/2014/main" id="{0ACC076C-14CF-4CC6-9A1F-9DE2F654A640}"/>
+              </a:ext>
+            </a:extLst>
+          </p:cNvPr>
+          <p:cNvSpPr>
+            <a:spLocks xmlns:a="http://schemas.openxmlformats.org/drawingml/2006/main" noGrp="1"/>
+          </p:cNvSpPr>
+          <p:nvPr/>
+        </p:nvSpPr>
+        <p:spPr>
+          <a:xfrm xmlns:a="http://schemas.openxmlformats.org/drawingml/2006/main">
+            <a:off x="9201150" y="5715000"/>
+            <a:ext cx="2400300" cy="38100"/>
+          </a:xfrm>
+          <a:prstGeom xmlns:a="http://schemas.openxmlformats.org/drawingml/2006/main" prst="rect">
+            <a:avLst/>
+          </a:prstGeom>
+          <a:solidFill xmlns:a="http://schemas.openxmlformats.org/drawingml/2006/main">
+            <a:srgbClr val="2A9D6F"/>
+          </a:solidFill>
+          <a:ln xmlns:a="http://schemas.openxmlformats.org/drawingml/2006/main" w="0">
+            <a:solidFill>
+              <a:srgbClr val="2A9D6F"/>
+            </a:solidFill>
+            <a:prstDash val="solid"/>
+          </a:ln>
+        </p:spPr>
+      </p:sp>
+      <p:sp>
+        <p:nvSpPr>
+          <p:cNvPr id="13" name="">
+            <a:extLst xmlns:a="http://schemas.openxmlformats.org/drawingml/2006/main">
+              <a:ext uri="{FF2B5EF4-FFF2-40B4-BE49-F238E27FC236}">
+                <a16:creationId xmlns:a16="http://schemas.microsoft.com/office/drawing/2014/main" id="{75B62FEB-4FFC-484D-8635-E7157EEBB857}"/>
+              </a:ext>
+            </a:extLst>
+          </p:cNvPr>
+          <p:cNvSpPr>
+            <a:spLocks xmlns:a="http://schemas.openxmlformats.org/drawingml/2006/main" noGrp="1"/>
+          </p:cNvSpPr>
+          <p:nvPr/>
+        </p:nvSpPr>
+        <p:spPr>
+          <a:xfrm xmlns:a="http://schemas.openxmlformats.org/drawingml/2006/main">
+            <a:off x="9201150" y="5867400"/>
+            <a:ext cx="2400300" cy="419100"/>
+          </a:xfrm>
+          <a:prstGeom xmlns:a="http://schemas.openxmlformats.org/drawingml/2006/main" prst="rect">
+            <a:avLst/>
+          </a:prstGeom>
+          <a:noFill xmlns:a="http://schemas.openxmlformats.org/drawingml/2006/main"/>
+          <a:ln xmlns:a="http://schemas.openxmlformats.org/drawingml/2006/main" w="0">
+            <a:noFill/>
+            <a:prstDash val="solid"/>
+          </a:ln>
+        </p:spPr>
+        <p:txBody>
+          <a:bodyPr xmlns:a="http://schemas.openxmlformats.org/drawingml/2006/main" wrap="square" lIns="0" tIns="0" rIns="0" bIns="0" anchor="t">
+            <a:normAutofit fontScale="100000"/>
+          </a:bodyPr>
+          <a:lstStyle xmlns:a="http://schemas.openxmlformats.org/drawingml/2006/main"/>
+          <a:p xmlns:a="http://schemas.openxmlformats.org/drawingml/2006/main">
+            <a:pPr algn="l">
+              <a:buNone/>
+              <a:defRPr sz="1275" b="1">
+                <a:solidFill>
+                  <a:srgbClr val="2A9D6F"/>
+                </a:solidFill>
+                <a:latin typeface="Arial"/>
+                <a:ea typeface="Arial"/>
+                <a:cs typeface="Arial"/>
+              </a:defRPr>
+            </a:pPr>
+            <a:r>
+              <a:rPr sz="1275" b="1">
+                <a:solidFill>
+                  <a:srgbClr val="2A9D6F"/>
+                </a:solidFill>
+                <a:latin typeface="Arial"/>
+                <a:ea typeface="Arial"/>
+                <a:cs typeface="Arial"/>
+              </a:rPr>
+              <a:t>Descriptive state—not a future-return claim</a:t>
             </a:r>
           </a:p>
         </p:txBody>
       </p:sp>
       <p:pic>
         <p:nvPicPr>
-          <p:cNvPr id="18" name=""/>
+          <p:cNvPr id="28" name=""/>
           <p:cNvPicPr>
             <a:picLocks xmlns:a="http://schemas.openxmlformats.org/drawingml/2006/main" noChangeAspect="1"/>
           </p:cNvPicPr>
           <p:nvPr/>
         </p:nvPicPr>
         <p:blipFill>
-          <a:blip xmlns:r="http://schemas.openxmlformats.org/officeDocument/2006/relationships" xmlns:a="http://schemas.openxmlformats.org/drawingml/2006/main" r:embed="R0ae3be0cccb447e3"/>
+          <a:blip xmlns:r="http://schemas.openxmlformats.org/officeDocument/2006/relationships" xmlns:a="http://schemas.openxmlformats.org/drawingml/2006/main" r:embed="R4af3966987f646be"/>
           <a:stretch xmlns:a="http://schemas.openxmlformats.org/drawingml/2006/main"/>
         </p:blipFill>
         <p:spPr>
           <a:xfrm xmlns:a="http://schemas.openxmlformats.org/drawingml/2006/main" flipH="0" flipV="0">
-            <a:off x="2942545" y="1352550"/>
-            <a:ext cx="6306911" cy="4905375"/>
+            <a:off x="325967" y="1381125"/>
+            <a:ext cx="8568267" cy="4819650"/>
           </a:xfrm>
           <a:prstGeom xmlns:a="http://schemas.openxmlformats.org/drawingml/2006/main" prst="rect">
             <a:avLst/>
@@ -19422,7 +19797,7 @@
     </p:spTree>
     <p:extLst>
       <p:ext uri="{BB962C8B-B14F-4D97-AF65-F5344CB8AC3E}">
-        <p14:creationId xmlns:p14="http://schemas.microsoft.com/office/powerpoint/2010/main" val="400872380"/>
+        <p14:creationId xmlns:p14="http://schemas.microsoft.com/office/powerpoint/2010/main" val="317191340"/>
       </p:ext>
     </p:extLst>
   </p:cSld>
@@ -19537,7 +19912,7 @@
         </p:spPr>
         <p:txBody>
           <a:bodyPr xmlns:a="http://schemas.openxmlformats.org/drawingml/2006/main" wrap="square" lIns="0" tIns="0" rIns="0" bIns="0" anchor="t">
-            <a:normAutofit fontScale="96973"/>
+            <a:normAutofit fontScale="100000"/>
           </a:bodyPr>
           <a:lstStyle xmlns:a="http://schemas.openxmlformats.org/drawingml/2006/main"/>
           <a:p xmlns:a="http://schemas.openxmlformats.org/drawingml/2006/main">
@@ -19561,7 +19936,7 @@
                 <a:ea typeface="Arial"/>
                 <a:cs typeface="Arial"/>
               </a:rPr>
-              <a:t>MEDIUM ATR% contains the stable continuation island</a:t>
+              <a:t>LOW ATR% is broadly positive, but no cell passes</a:t>
             </a:r>
           </a:p>
         </p:txBody>
@@ -19804,7 +20179,7 @@
                 <a:ea typeface="Arial"/>
                 <a:cs typeface="Arial"/>
               </a:rPr>
-              <a:t>All 81 cells positive; 21/81 within-state BH passes; strict survivors cluster at 5–10 prior / 2–3 forward.</a:t>
+              <a:t>All 81 cells positive; strongest +0.198 at 10 prior / 25 forward; 0/81 within-state BH passes.</a:t>
             </a:r>
           </a:p>
         </p:txBody>
@@ -19818,7 +20193,7 @@
           <p:nvPr/>
         </p:nvPicPr>
         <p:blipFill>
-          <a:blip xmlns:r="http://schemas.openxmlformats.org/officeDocument/2006/relationships" xmlns:a="http://schemas.openxmlformats.org/drawingml/2006/main" r:embed="R0dfa96f2513646e1"/>
+          <a:blip xmlns:r="http://schemas.openxmlformats.org/officeDocument/2006/relationships" xmlns:a="http://schemas.openxmlformats.org/drawingml/2006/main" r:embed="Rfab5cec8d9694f55"/>
           <a:stretch xmlns:a="http://schemas.openxmlformats.org/drawingml/2006/main"/>
         </p:blipFill>
         <p:spPr>
@@ -19949,7 +20324,7 @@
         </p:spPr>
         <p:txBody>
           <a:bodyPr xmlns:a="http://schemas.openxmlformats.org/drawingml/2006/main" wrap="square" lIns="0" tIns="0" rIns="0" bIns="0" anchor="t">
-            <a:normAutofit fontScale="100000"/>
+            <a:normAutofit fontScale="96973"/>
           </a:bodyPr>
           <a:lstStyle xmlns:a="http://schemas.openxmlformats.org/drawingml/2006/main"/>
           <a:p xmlns:a="http://schemas.openxmlformats.org/drawingml/2006/main">
@@ -19973,7 +20348,7 @@
                 <a:ea typeface="Arial"/>
                 <a:cs typeface="Arial"/>
               </a:rPr>
-              <a:t>HIGH ATR% flips the surface toward reversal</a:t>
+              <a:t>MEDIUM ATR% contains the stable continuation island</a:t>
             </a:r>
           </a:p>
         </p:txBody>
@@ -20216,7 +20591,7 @@
                 <a:ea typeface="Arial"/>
                 <a:cs typeface="Arial"/>
               </a:rPr>
-              <a:t>77/81 cells negative; strongest -0.301 at 20 prior / 20 forward; 0/81 within-state BH passes.</a:t>
+              <a:t>All 81 cells positive; 21/81 within-state BH passes; strict survivors cluster at 5–10 prior / 2–3 forward.</a:t>
             </a:r>
           </a:p>
         </p:txBody>
@@ -20230,7 +20605,7 @@
           <p:nvPr/>
         </p:nvPicPr>
         <p:blipFill>
-          <a:blip xmlns:r="http://schemas.openxmlformats.org/officeDocument/2006/relationships" xmlns:a="http://schemas.openxmlformats.org/drawingml/2006/main" r:embed="R73bedb1da1d04027"/>
+          <a:blip xmlns:r="http://schemas.openxmlformats.org/officeDocument/2006/relationships" xmlns:a="http://schemas.openxmlformats.org/drawingml/2006/main" r:embed="Rd42cf5fa0c1545c1"/>
           <a:stretch xmlns:a="http://schemas.openxmlformats.org/drawingml/2006/main"/>
         </p:blipFill>
         <p:spPr>
@@ -20274,10 +20649,10 @@
       </p:grpSpPr>
       <p:sp>
         <p:nvSpPr>
-          <p:cNvPr id="20" name="section-7">
-            <a:extLst xmlns:a="http://schemas.openxmlformats.org/drawingml/2006/main">
-              <a:ext uri="{FF2B5EF4-FFF2-40B4-BE49-F238E27FC236}">
-                <a16:creationId xmlns:a16="http://schemas.microsoft.com/office/drawing/2014/main" id="{BAC8373F-594E-467B-A8F8-56439CEBE044}"/>
+          <p:cNvPr id="9" name="section-4">
+            <a:extLst xmlns:a="http://schemas.openxmlformats.org/drawingml/2006/main">
+              <a:ext uri="{FF2B5EF4-FFF2-40B4-BE49-F238E27FC236}">
+                <a16:creationId xmlns:a16="http://schemas.microsoft.com/office/drawing/2014/main" id="{8AE0A271-669A-49F0-A82E-C4438BEE27D9}"/>
               </a:ext>
             </a:extLst>
           </p:cNvPr>
@@ -20333,10 +20708,10 @@
       </p:sp>
       <p:sp>
         <p:nvSpPr>
-          <p:cNvPr id="2" name="title-7">
-            <a:extLst xmlns:a="http://schemas.openxmlformats.org/drawingml/2006/main">
-              <a:ext uri="{FF2B5EF4-FFF2-40B4-BE49-F238E27FC236}">
-                <a16:creationId xmlns:a16="http://schemas.microsoft.com/office/drawing/2014/main" id="{7592E6E5-EA60-427F-BAB4-42C154D8CC5F}"/>
+          <p:cNvPr id="2" name="title-4">
+            <a:extLst xmlns:a="http://schemas.openxmlformats.org/drawingml/2006/main">
+              <a:ext uri="{FF2B5EF4-FFF2-40B4-BE49-F238E27FC236}">
+                <a16:creationId xmlns:a16="http://schemas.microsoft.com/office/drawing/2014/main" id="{50C6F92F-721A-4252-9CF8-B5C9B01C7310}"/>
               </a:ext>
             </a:extLst>
           </p:cNvPr>
@@ -20385,7 +20760,7 @@
                 <a:ea typeface="Arial"/>
                 <a:cs typeface="Arial"/>
               </a:rPr>
-              <a:t>HIGH and MEDIUM contain direct state differences</a:t>
+              <a:t>HIGH ATR% flips the surface toward reversal</a:t>
             </a:r>
           </a:p>
         </p:txBody>
@@ -20395,7 +20770,7 @@
           <p:cNvPr id="3" name="">
             <a:extLst xmlns:a="http://schemas.openxmlformats.org/drawingml/2006/main">
               <a:ext uri="{FF2B5EF4-FFF2-40B4-BE49-F238E27FC236}">
-                <a16:creationId xmlns:a16="http://schemas.microsoft.com/office/drawing/2014/main" id="{C852E1AC-5CE8-4847-87B1-81C28A4EFEDE}"/>
+                <a16:creationId xmlns:a16="http://schemas.microsoft.com/office/drawing/2014/main" id="{242399F2-4D0A-4337-B17E-DB3599DC380F}"/>
               </a:ext>
             </a:extLst>
           </p:cNvPr>
@@ -20425,10 +20800,10 @@
       </p:sp>
       <p:sp>
         <p:nvSpPr>
-          <p:cNvPr id="4" name="footer-left-7">
-            <a:extLst xmlns:a="http://schemas.openxmlformats.org/drawingml/2006/main">
-              <a:ext uri="{FF2B5EF4-FFF2-40B4-BE49-F238E27FC236}">
-                <a16:creationId xmlns:a16="http://schemas.microsoft.com/office/drawing/2014/main" id="{4896B590-20BC-4B46-9282-D9F5A22A0CC5}"/>
+          <p:cNvPr id="4" name="footer-left-4">
+            <a:extLst xmlns:a="http://schemas.openxmlformats.org/drawingml/2006/main">
+              <a:ext uri="{FF2B5EF4-FFF2-40B4-BE49-F238E27FC236}">
+                <a16:creationId xmlns:a16="http://schemas.microsoft.com/office/drawing/2014/main" id="{BF8B82CA-1E48-4669-BAD8-1FF8C09FCBFB}"/>
               </a:ext>
             </a:extLst>
           </p:cNvPr>
@@ -20484,10 +20859,10 @@
       </p:sp>
       <p:sp>
         <p:nvSpPr>
-          <p:cNvPr id="5" name="footer-number-7">
-            <a:extLst xmlns:a="http://schemas.openxmlformats.org/drawingml/2006/main">
-              <a:ext uri="{FF2B5EF4-FFF2-40B4-BE49-F238E27FC236}">
-                <a16:creationId xmlns:a16="http://schemas.microsoft.com/office/drawing/2014/main" id="{1503EFAF-F487-4981-AFDC-23F1B41A7207}"/>
+          <p:cNvPr id="5" name="footer-number-4">
+            <a:extLst xmlns:a="http://schemas.openxmlformats.org/drawingml/2006/main">
+              <a:ext uri="{FF2B5EF4-FFF2-40B4-BE49-F238E27FC236}">
+                <a16:creationId xmlns:a16="http://schemas.microsoft.com/office/drawing/2014/main" id="{05959AEC-B0A5-45F0-A65B-C94C3E5A032F}"/>
               </a:ext>
             </a:extLst>
           </p:cNvPr>
@@ -20546,19 +20921,19 @@
           <p:cNvPr id="6" name="">
             <a:extLst xmlns:a="http://schemas.openxmlformats.org/drawingml/2006/main">
               <a:ext uri="{FF2B5EF4-FFF2-40B4-BE49-F238E27FC236}">
-                <a16:creationId xmlns:a16="http://schemas.microsoft.com/office/drawing/2014/main" id="{4AA770DD-55E6-42DB-942A-6938E642B1A0}"/>
-              </a:ext>
-            </a:extLst>
-          </p:cNvPr>
-          <p:cNvSpPr>
-            <a:spLocks xmlns:a="http://schemas.openxmlformats.org/drawingml/2006/main" noGrp="1"/>
-          </p:cNvSpPr>
-          <p:nvPr/>
-        </p:nvSpPr>
-        <p:spPr>
-          <a:xfrm xmlns:a="http://schemas.openxmlformats.org/drawingml/2006/main">
-            <a:off x="342900" y="1428750"/>
-            <a:ext cx="7677150" cy="4762500"/>
+                <a16:creationId xmlns:a16="http://schemas.microsoft.com/office/drawing/2014/main" id="{9C8DEA29-E57D-4C8D-8538-2028FF89DA7C}"/>
+              </a:ext>
+            </a:extLst>
+          </p:cNvPr>
+          <p:cNvSpPr>
+            <a:spLocks xmlns:a="http://schemas.openxmlformats.org/drawingml/2006/main" noGrp="1"/>
+          </p:cNvSpPr>
+          <p:nvPr/>
+        </p:nvSpPr>
+        <p:spPr>
+          <a:xfrm xmlns:a="http://schemas.openxmlformats.org/drawingml/2006/main">
+            <a:off x="1000125" y="1352550"/>
+            <a:ext cx="10191750" cy="4905375"/>
           </a:xfrm>
           <a:prstGeom xmlns:a="http://schemas.openxmlformats.org/drawingml/2006/main" prst="rect">
             <a:avLst/>
@@ -20579,569 +20954,76 @@
           <p:cNvPr id="8" name="">
             <a:extLst xmlns:a="http://schemas.openxmlformats.org/drawingml/2006/main">
               <a:ext uri="{FF2B5EF4-FFF2-40B4-BE49-F238E27FC236}">
-                <a16:creationId xmlns:a16="http://schemas.microsoft.com/office/drawing/2014/main" id="{925D1653-1738-47C8-BFA1-9C9390285CC4}"/>
-              </a:ext>
-            </a:extLst>
-          </p:cNvPr>
-          <p:cNvSpPr>
-            <a:spLocks xmlns:a="http://schemas.openxmlformats.org/drawingml/2006/main" noGrp="1"/>
-          </p:cNvSpPr>
-          <p:nvPr/>
-        </p:nvSpPr>
-        <p:spPr>
-          <a:xfrm xmlns:a="http://schemas.openxmlformats.org/drawingml/2006/main">
-            <a:off x="8362950" y="1504950"/>
-            <a:ext cx="3143250" cy="1428750"/>
-          </a:xfrm>
-          <a:prstGeom xmlns:a="http://schemas.openxmlformats.org/drawingml/2006/main" prst="rect">
-            <a:avLst/>
-          </a:prstGeom>
-          <a:solidFill xmlns:a="http://schemas.openxmlformats.org/drawingml/2006/main">
-            <a:srgbClr val="EDEDED"/>
-          </a:solidFill>
-          <a:ln xmlns:a="http://schemas.openxmlformats.org/drawingml/2006/main" w="0">
-            <a:solidFill>
-              <a:srgbClr val="EDEDED"/>
-            </a:solidFill>
-            <a:prstDash val="solid"/>
-          </a:ln>
-        </p:spPr>
-      </p:sp>
-      <p:sp>
-        <p:nvSpPr>
-          <p:cNvPr id="9" name="">
-            <a:extLst xmlns:a="http://schemas.openxmlformats.org/drawingml/2006/main">
-              <a:ext uri="{FF2B5EF4-FFF2-40B4-BE49-F238E27FC236}">
-                <a16:creationId xmlns:a16="http://schemas.microsoft.com/office/drawing/2014/main" id="{AD911094-04B5-4E98-9749-4F832E6A7030}"/>
-              </a:ext>
-            </a:extLst>
-          </p:cNvPr>
-          <p:cNvSpPr>
-            <a:spLocks xmlns:a="http://schemas.openxmlformats.org/drawingml/2006/main" noGrp="1"/>
-          </p:cNvSpPr>
-          <p:nvPr/>
-        </p:nvSpPr>
-        <p:spPr>
-          <a:xfrm xmlns:a="http://schemas.openxmlformats.org/drawingml/2006/main">
-            <a:off x="8362950" y="1504950"/>
-            <a:ext cx="76200" cy="1428750"/>
-          </a:xfrm>
-          <a:prstGeom xmlns:a="http://schemas.openxmlformats.org/drawingml/2006/main" prst="rect">
-            <a:avLst/>
-          </a:prstGeom>
-          <a:solidFill xmlns:a="http://schemas.openxmlformats.org/drawingml/2006/main">
-            <a:srgbClr val="E45756"/>
-          </a:solidFill>
-          <a:ln xmlns:a="http://schemas.openxmlformats.org/drawingml/2006/main" w="0">
-            <a:solidFill>
-              <a:srgbClr val="E45756"/>
-            </a:solidFill>
-            <a:prstDash val="solid"/>
-          </a:ln>
-        </p:spPr>
-      </p:sp>
-      <p:sp>
-        <p:nvSpPr>
-          <p:cNvPr id="10" name="">
-            <a:extLst xmlns:a="http://schemas.openxmlformats.org/drawingml/2006/main">
-              <a:ext uri="{FF2B5EF4-FFF2-40B4-BE49-F238E27FC236}">
-                <a16:creationId xmlns:a16="http://schemas.microsoft.com/office/drawing/2014/main" id="{8259A327-4374-4B4E-A3BA-F8E016498564}"/>
-              </a:ext>
-            </a:extLst>
-          </p:cNvPr>
-          <p:cNvSpPr>
-            <a:spLocks xmlns:a="http://schemas.openxmlformats.org/drawingml/2006/main" noGrp="1"/>
-          </p:cNvSpPr>
-          <p:nvPr/>
-        </p:nvSpPr>
-        <p:spPr>
-          <a:xfrm xmlns:a="http://schemas.openxmlformats.org/drawingml/2006/main">
-            <a:off x="8629650" y="1676400"/>
-            <a:ext cx="2686050" cy="590550"/>
-          </a:xfrm>
-          <a:prstGeom xmlns:a="http://schemas.openxmlformats.org/drawingml/2006/main" prst="rect">
-            <a:avLst/>
-          </a:prstGeom>
-          <a:noFill xmlns:a="http://schemas.openxmlformats.org/drawingml/2006/main"/>
-          <a:ln xmlns:a="http://schemas.openxmlformats.org/drawingml/2006/main" w="0">
-            <a:noFill/>
-            <a:prstDash val="solid"/>
-          </a:ln>
-        </p:spPr>
-        <p:txBody>
-          <a:bodyPr xmlns:a="http://schemas.openxmlformats.org/drawingml/2006/main" wrap="square" lIns="0" tIns="0" rIns="0" bIns="0" anchor="t">
-            <a:normAutofit fontScale="100000"/>
-          </a:bodyPr>
-          <a:lstStyle xmlns:a="http://schemas.openxmlformats.org/drawingml/2006/main"/>
-          <a:p xmlns:a="http://schemas.openxmlformats.org/drawingml/2006/main">
-            <a:pPr algn="l">
-              <a:buNone/>
-              <a:defRPr sz="3225" b="1">
-                <a:solidFill>
-                  <a:srgbClr val="E45756"/>
-                </a:solidFill>
-                <a:latin typeface="Arial"/>
-                <a:ea typeface="Arial"/>
-                <a:cs typeface="Arial"/>
-              </a:defRPr>
-            </a:pPr>
-            <a:r>
-              <a:rPr sz="3225" b="1">
-                <a:solidFill>
-                  <a:srgbClr val="E45756"/>
-                </a:solidFill>
-                <a:latin typeface="Arial"/>
-                <a:ea typeface="Arial"/>
-                <a:cs typeface="Arial"/>
-              </a:rPr>
-              <a:t>-0.548</a:t>
-            </a:r>
-          </a:p>
-        </p:txBody>
-      </p:sp>
-      <p:sp>
-        <p:nvSpPr>
-          <p:cNvPr id="11" name="">
-            <a:extLst xmlns:a="http://schemas.openxmlformats.org/drawingml/2006/main">
-              <a:ext uri="{FF2B5EF4-FFF2-40B4-BE49-F238E27FC236}">
-                <a16:creationId xmlns:a16="http://schemas.microsoft.com/office/drawing/2014/main" id="{BE341AE3-547D-4111-ADFF-14E5545F2DBF}"/>
-              </a:ext>
-            </a:extLst>
-          </p:cNvPr>
-          <p:cNvSpPr>
-            <a:spLocks xmlns:a="http://schemas.openxmlformats.org/drawingml/2006/main" noGrp="1"/>
-          </p:cNvSpPr>
-          <p:nvPr/>
-        </p:nvSpPr>
-        <p:spPr>
-          <a:xfrm xmlns:a="http://schemas.openxmlformats.org/drawingml/2006/main">
-            <a:off x="8629650" y="2343150"/>
-            <a:ext cx="2686050" cy="438150"/>
-          </a:xfrm>
-          <a:prstGeom xmlns:a="http://schemas.openxmlformats.org/drawingml/2006/main" prst="rect">
-            <a:avLst/>
-          </a:prstGeom>
-          <a:noFill xmlns:a="http://schemas.openxmlformats.org/drawingml/2006/main"/>
-          <a:ln xmlns:a="http://schemas.openxmlformats.org/drawingml/2006/main" w="0">
-            <a:noFill/>
-            <a:prstDash val="solid"/>
-          </a:ln>
-        </p:spPr>
-        <p:txBody>
-          <a:bodyPr xmlns:a="http://schemas.openxmlformats.org/drawingml/2006/main" wrap="square" lIns="0" tIns="0" rIns="0" bIns="0" anchor="t">
-            <a:normAutofit fontScale="100000"/>
-          </a:bodyPr>
-          <a:lstStyle xmlns:a="http://schemas.openxmlformats.org/drawingml/2006/main"/>
-          <a:p xmlns:a="http://schemas.openxmlformats.org/drawingml/2006/main">
-            <a:pPr algn="l">
-              <a:buNone/>
-              <a:defRPr sz="1350" b="0">
-                <a:solidFill>
-                  <a:srgbClr val="273548"/>
-                </a:solidFill>
-                <a:latin typeface="Arial"/>
-                <a:ea typeface="Arial"/>
-                <a:cs typeface="Arial"/>
-              </a:defRPr>
-            </a:pPr>
-            <a:r>
-              <a:rPr sz="1350" b="0">
-                <a:solidFill>
-                  <a:srgbClr val="273548"/>
-                </a:solidFill>
-                <a:latin typeface="Arial"/>
-                <a:ea typeface="Arial"/>
-                <a:cs typeface="Arial"/>
-              </a:rPr>
-              <a:t>largest correlation change: 25 prior / 15 forward</a:t>
-            </a:r>
-          </a:p>
-        </p:txBody>
-      </p:sp>
-      <p:sp>
-        <p:nvSpPr>
-          <p:cNvPr id="12" name="">
-            <a:extLst xmlns:a="http://schemas.openxmlformats.org/drawingml/2006/main">
-              <a:ext uri="{FF2B5EF4-FFF2-40B4-BE49-F238E27FC236}">
-                <a16:creationId xmlns:a16="http://schemas.microsoft.com/office/drawing/2014/main" id="{627B1C2D-BD18-4B6C-8DC8-10694F2FD365}"/>
-              </a:ext>
-            </a:extLst>
-          </p:cNvPr>
-          <p:cNvSpPr>
-            <a:spLocks xmlns:a="http://schemas.openxmlformats.org/drawingml/2006/main" noGrp="1"/>
-          </p:cNvSpPr>
-          <p:nvPr/>
-        </p:nvSpPr>
-        <p:spPr>
-          <a:xfrm xmlns:a="http://schemas.openxmlformats.org/drawingml/2006/main">
-            <a:off x="8362950" y="3143250"/>
-            <a:ext cx="3143250" cy="1428750"/>
-          </a:xfrm>
-          <a:prstGeom xmlns:a="http://schemas.openxmlformats.org/drawingml/2006/main" prst="rect">
-            <a:avLst/>
-          </a:prstGeom>
-          <a:solidFill xmlns:a="http://schemas.openxmlformats.org/drawingml/2006/main">
-            <a:srgbClr val="EDEDED"/>
-          </a:solidFill>
-          <a:ln xmlns:a="http://schemas.openxmlformats.org/drawingml/2006/main" w="0">
-            <a:solidFill>
-              <a:srgbClr val="EDEDED"/>
-            </a:solidFill>
-            <a:prstDash val="solid"/>
-          </a:ln>
-        </p:spPr>
-      </p:sp>
-      <p:sp>
-        <p:nvSpPr>
-          <p:cNvPr id="13" name="">
-            <a:extLst xmlns:a="http://schemas.openxmlformats.org/drawingml/2006/main">
-              <a:ext uri="{FF2B5EF4-FFF2-40B4-BE49-F238E27FC236}">
-                <a16:creationId xmlns:a16="http://schemas.microsoft.com/office/drawing/2014/main" id="{1A4050CC-5568-4F8A-B026-EC7B8ABEFB7A}"/>
-              </a:ext>
-            </a:extLst>
-          </p:cNvPr>
-          <p:cNvSpPr>
-            <a:spLocks xmlns:a="http://schemas.openxmlformats.org/drawingml/2006/main" noGrp="1"/>
-          </p:cNvSpPr>
-          <p:nvPr/>
-        </p:nvSpPr>
-        <p:spPr>
-          <a:xfrm xmlns:a="http://schemas.openxmlformats.org/drawingml/2006/main">
-            <a:off x="8362950" y="3143250"/>
-            <a:ext cx="76200" cy="1428750"/>
-          </a:xfrm>
-          <a:prstGeom xmlns:a="http://schemas.openxmlformats.org/drawingml/2006/main" prst="rect">
-            <a:avLst/>
-          </a:prstGeom>
-          <a:solidFill xmlns:a="http://schemas.openxmlformats.org/drawingml/2006/main">
-            <a:srgbClr val="3D8DFF"/>
-          </a:solidFill>
-          <a:ln xmlns:a="http://schemas.openxmlformats.org/drawingml/2006/main" w="0">
-            <a:solidFill>
-              <a:srgbClr val="3D8DFF"/>
-            </a:solidFill>
-            <a:prstDash val="solid"/>
-          </a:ln>
-        </p:spPr>
-      </p:sp>
-      <p:sp>
-        <p:nvSpPr>
-          <p:cNvPr id="14" name="">
-            <a:extLst xmlns:a="http://schemas.openxmlformats.org/drawingml/2006/main">
-              <a:ext uri="{FF2B5EF4-FFF2-40B4-BE49-F238E27FC236}">
-                <a16:creationId xmlns:a16="http://schemas.microsoft.com/office/drawing/2014/main" id="{502FF9D4-D051-476B-B68A-15DCA6B44FE9}"/>
-              </a:ext>
-            </a:extLst>
-          </p:cNvPr>
-          <p:cNvSpPr>
-            <a:spLocks xmlns:a="http://schemas.openxmlformats.org/drawingml/2006/main" noGrp="1"/>
-          </p:cNvSpPr>
-          <p:nvPr/>
-        </p:nvSpPr>
-        <p:spPr>
-          <a:xfrm xmlns:a="http://schemas.openxmlformats.org/drawingml/2006/main">
-            <a:off x="8629650" y="3314700"/>
-            <a:ext cx="2686050" cy="590550"/>
-          </a:xfrm>
-          <a:prstGeom xmlns:a="http://schemas.openxmlformats.org/drawingml/2006/main" prst="rect">
-            <a:avLst/>
-          </a:prstGeom>
-          <a:noFill xmlns:a="http://schemas.openxmlformats.org/drawingml/2006/main"/>
-          <a:ln xmlns:a="http://schemas.openxmlformats.org/drawingml/2006/main" w="0">
-            <a:noFill/>
-            <a:prstDash val="solid"/>
-          </a:ln>
-        </p:spPr>
-        <p:txBody>
-          <a:bodyPr xmlns:a="http://schemas.openxmlformats.org/drawingml/2006/main" wrap="square" lIns="0" tIns="0" rIns="0" bIns="0" anchor="t">
-            <a:normAutofit fontScale="100000"/>
-          </a:bodyPr>
-          <a:lstStyle xmlns:a="http://schemas.openxmlformats.org/drawingml/2006/main"/>
-          <a:p xmlns:a="http://schemas.openxmlformats.org/drawingml/2006/main">
-            <a:pPr algn="l">
-              <a:buNone/>
-              <a:defRPr sz="3225" b="1">
-                <a:solidFill>
-                  <a:srgbClr val="3D8DFF"/>
-                </a:solidFill>
-                <a:latin typeface="Arial"/>
-                <a:ea typeface="Arial"/>
-                <a:cs typeface="Arial"/>
-              </a:defRPr>
-            </a:pPr>
-            <a:r>
-              <a:rPr sz="3225" b="1">
-                <a:solidFill>
-                  <a:srgbClr val="3D8DFF"/>
-                </a:solidFill>
-                <a:latin typeface="Arial"/>
-                <a:ea typeface="Arial"/>
-                <a:cs typeface="Arial"/>
-              </a:rPr>
-              <a:t>q = 0.038</a:t>
-            </a:r>
-          </a:p>
-        </p:txBody>
-      </p:sp>
-      <p:sp>
-        <p:nvSpPr>
-          <p:cNvPr id="15" name="">
-            <a:extLst xmlns:a="http://schemas.openxmlformats.org/drawingml/2006/main">
-              <a:ext uri="{FF2B5EF4-FFF2-40B4-BE49-F238E27FC236}">
-                <a16:creationId xmlns:a16="http://schemas.microsoft.com/office/drawing/2014/main" id="{03DFBB46-08D6-4497-AA7C-C2049757E9DE}"/>
-              </a:ext>
-            </a:extLst>
-          </p:cNvPr>
-          <p:cNvSpPr>
-            <a:spLocks xmlns:a="http://schemas.openxmlformats.org/drawingml/2006/main" noGrp="1"/>
-          </p:cNvSpPr>
-          <p:nvPr/>
-        </p:nvSpPr>
-        <p:spPr>
-          <a:xfrm xmlns:a="http://schemas.openxmlformats.org/drawingml/2006/main">
-            <a:off x="8629650" y="3981450"/>
-            <a:ext cx="2686050" cy="438150"/>
-          </a:xfrm>
-          <a:prstGeom xmlns:a="http://schemas.openxmlformats.org/drawingml/2006/main" prst="rect">
-            <a:avLst/>
-          </a:prstGeom>
-          <a:noFill xmlns:a="http://schemas.openxmlformats.org/drawingml/2006/main"/>
-          <a:ln xmlns:a="http://schemas.openxmlformats.org/drawingml/2006/main" w="0">
-            <a:noFill/>
-            <a:prstDash val="solid"/>
-          </a:ln>
-        </p:spPr>
-        <p:txBody>
-          <a:bodyPr xmlns:a="http://schemas.openxmlformats.org/drawingml/2006/main" wrap="square" lIns="0" tIns="0" rIns="0" bIns="0" anchor="t">
-            <a:normAutofit fontScale="100000"/>
-          </a:bodyPr>
-          <a:lstStyle xmlns:a="http://schemas.openxmlformats.org/drawingml/2006/main"/>
-          <a:p xmlns:a="http://schemas.openxmlformats.org/drawingml/2006/main">
-            <a:pPr algn="l">
-              <a:buNone/>
-              <a:defRPr sz="1350" b="0">
-                <a:solidFill>
-                  <a:srgbClr val="273548"/>
-                </a:solidFill>
-                <a:latin typeface="Arial"/>
-                <a:ea typeface="Arial"/>
-                <a:cs typeface="Arial"/>
-              </a:defRPr>
-            </a:pPr>
-            <a:r>
-              <a:rPr sz="1350" b="0">
-                <a:solidFill>
-                  <a:srgbClr val="273548"/>
-                </a:solidFill>
-                <a:latin typeface="Arial"/>
-                <a:ea typeface="Arial"/>
-                <a:cs typeface="Arial"/>
-              </a:rPr>
-              <a:t>within HIGH-minus-MEDIUM family</a:t>
-            </a:r>
-          </a:p>
-        </p:txBody>
-      </p:sp>
-      <p:sp>
-        <p:nvSpPr>
-          <p:cNvPr id="16" name="">
-            <a:extLst xmlns:a="http://schemas.openxmlformats.org/drawingml/2006/main">
-              <a:ext uri="{FF2B5EF4-FFF2-40B4-BE49-F238E27FC236}">
-                <a16:creationId xmlns:a16="http://schemas.microsoft.com/office/drawing/2014/main" id="{509D61CC-6E5E-49EC-A5F6-E861E8561441}"/>
-              </a:ext>
-            </a:extLst>
-          </p:cNvPr>
-          <p:cNvSpPr>
-            <a:spLocks xmlns:a="http://schemas.openxmlformats.org/drawingml/2006/main" noGrp="1"/>
-          </p:cNvSpPr>
-          <p:nvPr/>
-        </p:nvSpPr>
-        <p:spPr>
-          <a:xfrm xmlns:a="http://schemas.openxmlformats.org/drawingml/2006/main">
-            <a:off x="8362950" y="4781550"/>
-            <a:ext cx="3143250" cy="1428750"/>
-          </a:xfrm>
-          <a:prstGeom xmlns:a="http://schemas.openxmlformats.org/drawingml/2006/main" prst="rect">
-            <a:avLst/>
-          </a:prstGeom>
-          <a:solidFill xmlns:a="http://schemas.openxmlformats.org/drawingml/2006/main">
-            <a:srgbClr val="EDEDED"/>
-          </a:solidFill>
-          <a:ln xmlns:a="http://schemas.openxmlformats.org/drawingml/2006/main" w="0">
-            <a:solidFill>
-              <a:srgbClr val="EDEDED"/>
-            </a:solidFill>
-            <a:prstDash val="solid"/>
-          </a:ln>
-        </p:spPr>
-      </p:sp>
-      <p:sp>
-        <p:nvSpPr>
-          <p:cNvPr id="17" name="">
-            <a:extLst xmlns:a="http://schemas.openxmlformats.org/drawingml/2006/main">
-              <a:ext uri="{FF2B5EF4-FFF2-40B4-BE49-F238E27FC236}">
-                <a16:creationId xmlns:a16="http://schemas.microsoft.com/office/drawing/2014/main" id="{A935608E-4DDE-41BA-8DF2-831CF419565B}"/>
-              </a:ext>
-            </a:extLst>
-          </p:cNvPr>
-          <p:cNvSpPr>
-            <a:spLocks xmlns:a="http://schemas.openxmlformats.org/drawingml/2006/main" noGrp="1"/>
-          </p:cNvSpPr>
-          <p:nvPr/>
-        </p:nvSpPr>
-        <p:spPr>
-          <a:xfrm xmlns:a="http://schemas.openxmlformats.org/drawingml/2006/main">
-            <a:off x="8362950" y="4781550"/>
-            <a:ext cx="76200" cy="1428750"/>
-          </a:xfrm>
-          <a:prstGeom xmlns:a="http://schemas.openxmlformats.org/drawingml/2006/main" prst="rect">
-            <a:avLst/>
-          </a:prstGeom>
-          <a:solidFill xmlns:a="http://schemas.openxmlformats.org/drawingml/2006/main">
-            <a:srgbClr val="273548"/>
-          </a:solidFill>
-          <a:ln xmlns:a="http://schemas.openxmlformats.org/drawingml/2006/main" w="0">
-            <a:solidFill>
-              <a:srgbClr val="273548"/>
-            </a:solidFill>
-            <a:prstDash val="solid"/>
-          </a:ln>
-        </p:spPr>
-      </p:sp>
-      <p:sp>
-        <p:nvSpPr>
-          <p:cNvPr id="18" name="">
-            <a:extLst xmlns:a="http://schemas.openxmlformats.org/drawingml/2006/main">
-              <a:ext uri="{FF2B5EF4-FFF2-40B4-BE49-F238E27FC236}">
-                <a16:creationId xmlns:a16="http://schemas.microsoft.com/office/drawing/2014/main" id="{088A976D-39D1-4C6C-803F-0D3F8BAE4A28}"/>
-              </a:ext>
-            </a:extLst>
-          </p:cNvPr>
-          <p:cNvSpPr>
-            <a:spLocks xmlns:a="http://schemas.openxmlformats.org/drawingml/2006/main" noGrp="1"/>
-          </p:cNvSpPr>
-          <p:nvPr/>
-        </p:nvSpPr>
-        <p:spPr>
-          <a:xfrm xmlns:a="http://schemas.openxmlformats.org/drawingml/2006/main">
-            <a:off x="8629650" y="4953000"/>
-            <a:ext cx="2686050" cy="590550"/>
-          </a:xfrm>
-          <a:prstGeom xmlns:a="http://schemas.openxmlformats.org/drawingml/2006/main" prst="rect">
-            <a:avLst/>
-          </a:prstGeom>
-          <a:noFill xmlns:a="http://schemas.openxmlformats.org/drawingml/2006/main"/>
-          <a:ln xmlns:a="http://schemas.openxmlformats.org/drawingml/2006/main" w="0">
-            <a:noFill/>
-            <a:prstDash val="solid"/>
-          </a:ln>
-        </p:spPr>
-        <p:txBody>
-          <a:bodyPr xmlns:a="http://schemas.openxmlformats.org/drawingml/2006/main" wrap="square" lIns="0" tIns="0" rIns="0" bIns="0" anchor="t">
-            <a:normAutofit fontScale="100000"/>
-          </a:bodyPr>
-          <a:lstStyle xmlns:a="http://schemas.openxmlformats.org/drawingml/2006/main"/>
-          <a:p xmlns:a="http://schemas.openxmlformats.org/drawingml/2006/main">
-            <a:pPr algn="l">
-              <a:buNone/>
-              <a:defRPr sz="3225" b="1">
-                <a:solidFill>
-                  <a:srgbClr val="273548"/>
-                </a:solidFill>
-                <a:latin typeface="Arial"/>
-                <a:ea typeface="Arial"/>
-                <a:cs typeface="Arial"/>
-              </a:defRPr>
-            </a:pPr>
-            <a:r>
-              <a:rPr sz="3225" b="1">
-                <a:solidFill>
-                  <a:srgbClr val="273548"/>
-                </a:solidFill>
-                <a:latin typeface="Arial"/>
-                <a:ea typeface="Arial"/>
-                <a:cs typeface="Arial"/>
-              </a:rPr>
-              <a:t>3 / 243</a:t>
-            </a:r>
-          </a:p>
-        </p:txBody>
-      </p:sp>
-      <p:sp>
-        <p:nvSpPr>
-          <p:cNvPr id="19" name="">
-            <a:extLst xmlns:a="http://schemas.openxmlformats.org/drawingml/2006/main">
-              <a:ext uri="{FF2B5EF4-FFF2-40B4-BE49-F238E27FC236}">
-                <a16:creationId xmlns:a16="http://schemas.microsoft.com/office/drawing/2014/main" id="{AA1E116E-13CC-4735-B31A-B5C1846B2D22}"/>
-              </a:ext>
-            </a:extLst>
-          </p:cNvPr>
-          <p:cNvSpPr>
-            <a:spLocks xmlns:a="http://schemas.openxmlformats.org/drawingml/2006/main" noGrp="1"/>
-          </p:cNvSpPr>
-          <p:nvPr/>
-        </p:nvSpPr>
-        <p:spPr>
-          <a:xfrm xmlns:a="http://schemas.openxmlformats.org/drawingml/2006/main">
-            <a:off x="8629650" y="5619750"/>
-            <a:ext cx="2686050" cy="438150"/>
-          </a:xfrm>
-          <a:prstGeom xmlns:a="http://schemas.openxmlformats.org/drawingml/2006/main" prst="rect">
-            <a:avLst/>
-          </a:prstGeom>
-          <a:noFill xmlns:a="http://schemas.openxmlformats.org/drawingml/2006/main"/>
-          <a:ln xmlns:a="http://schemas.openxmlformats.org/drawingml/2006/main" w="0">
-            <a:noFill/>
-            <a:prstDash val="solid"/>
-          </a:ln>
-        </p:spPr>
-        <p:txBody>
-          <a:bodyPr xmlns:a="http://schemas.openxmlformats.org/drawingml/2006/main" wrap="square" lIns="0" tIns="0" rIns="0" bIns="0" anchor="t">
-            <a:normAutofit fontScale="100000"/>
-          </a:bodyPr>
-          <a:lstStyle xmlns:a="http://schemas.openxmlformats.org/drawingml/2006/main"/>
-          <a:p xmlns:a="http://schemas.openxmlformats.org/drawingml/2006/main">
-            <a:pPr algn="l">
-              <a:buNone/>
-              <a:defRPr sz="1350" b="0">
-                <a:solidFill>
-                  <a:srgbClr val="273548"/>
-                </a:solidFill>
-                <a:latin typeface="Arial"/>
-                <a:ea typeface="Arial"/>
-                <a:cs typeface="Arial"/>
-              </a:defRPr>
-            </a:pPr>
-            <a:r>
-              <a:rPr sz="1350" b="0">
-                <a:solidFill>
-                  <a:srgbClr val="273548"/>
-                </a:solidFill>
-                <a:latin typeface="Arial"/>
-                <a:ea typeface="Arial"/>
-                <a:cs typeface="Arial"/>
-              </a:rPr>
-              <a:t>pairwise cells surviving strict omnibus BH</a:t>
+                <a16:creationId xmlns:a16="http://schemas.microsoft.com/office/drawing/2014/main" id="{4346A5F2-8CC4-4151-9BDB-346D47A3096B}"/>
+              </a:ext>
+            </a:extLst>
+          </p:cNvPr>
+          <p:cNvSpPr>
+            <a:spLocks xmlns:a="http://schemas.openxmlformats.org/drawingml/2006/main" noGrp="1"/>
+          </p:cNvSpPr>
+          <p:nvPr/>
+        </p:nvSpPr>
+        <p:spPr>
+          <a:xfrm xmlns:a="http://schemas.openxmlformats.org/drawingml/2006/main">
+            <a:off x="1143000" y="6286500"/>
+            <a:ext cx="9906000" cy="171450"/>
+          </a:xfrm>
+          <a:prstGeom xmlns:a="http://schemas.openxmlformats.org/drawingml/2006/main" prst="rect">
+            <a:avLst/>
+          </a:prstGeom>
+          <a:noFill xmlns:a="http://schemas.openxmlformats.org/drawingml/2006/main"/>
+          <a:ln xmlns:a="http://schemas.openxmlformats.org/drawingml/2006/main" w="0">
+            <a:noFill/>
+            <a:prstDash val="solid"/>
+          </a:ln>
+        </p:spPr>
+        <p:txBody>
+          <a:bodyPr xmlns:a="http://schemas.openxmlformats.org/drawingml/2006/main" wrap="square" lIns="0" tIns="0" rIns="0" bIns="0" anchor="t">
+            <a:normAutofit fontScale="93750"/>
+          </a:bodyPr>
+          <a:lstStyle xmlns:a="http://schemas.openxmlformats.org/drawingml/2006/main"/>
+          <a:p xmlns:a="http://schemas.openxmlformats.org/drawingml/2006/main">
+            <a:pPr algn="ctr">
+              <a:buNone/>
+              <a:defRPr sz="1200" b="0">
+                <a:solidFill>
+                  <a:srgbClr val="667384"/>
+                </a:solidFill>
+                <a:latin typeface="Arial"/>
+                <a:ea typeface="Arial"/>
+                <a:cs typeface="Arial"/>
+              </a:defRPr>
+            </a:pPr>
+            <a:r>
+              <a:rPr sz="1200" b="0">
+                <a:solidFill>
+                  <a:srgbClr val="667384"/>
+                </a:solidFill>
+                <a:latin typeface="Arial"/>
+                <a:ea typeface="Arial"/>
+                <a:cs typeface="Arial"/>
+              </a:rPr>
+              <a:t>77/81 cells negative; strongest -0.301 at 20 prior / 20 forward; 0/81 within-state BH passes.</a:t>
             </a:r>
           </a:p>
         </p:txBody>
       </p:sp>
       <p:pic>
         <p:nvPicPr>
-          <p:cNvPr id="40" name=""/>
+          <p:cNvPr id="18" name=""/>
           <p:cNvPicPr>
             <a:picLocks xmlns:a="http://schemas.openxmlformats.org/drawingml/2006/main" noChangeAspect="1"/>
           </p:cNvPicPr>
           <p:nvPr/>
         </p:nvPicPr>
         <p:blipFill>
-          <a:blip xmlns:r="http://schemas.openxmlformats.org/officeDocument/2006/relationships" xmlns:a="http://schemas.openxmlformats.org/drawingml/2006/main" r:embed="Rc767c798367e4772"/>
+          <a:blip xmlns:r="http://schemas.openxmlformats.org/officeDocument/2006/relationships" xmlns:a="http://schemas.openxmlformats.org/drawingml/2006/main" r:embed="Rde716d7962a84bfa"/>
           <a:stretch xmlns:a="http://schemas.openxmlformats.org/drawingml/2006/main"/>
         </p:blipFill>
         <p:spPr>
           <a:xfrm xmlns:a="http://schemas.openxmlformats.org/drawingml/2006/main" flipH="0" flipV="0">
-            <a:off x="609600" y="1428750"/>
-            <a:ext cx="7143750" cy="4762500"/>
+            <a:off x="2942545" y="1352550"/>
+            <a:ext cx="6306911" cy="4905375"/>
           </a:xfrm>
           <a:prstGeom xmlns:a="http://schemas.openxmlformats.org/drawingml/2006/main" prst="rect">
             <a:avLst/>
@@ -21151,7 +21033,7 @@
     </p:spTree>
     <p:extLst>
       <p:ext uri="{BB962C8B-B14F-4D97-AF65-F5344CB8AC3E}">
-        <p14:creationId xmlns:p14="http://schemas.microsoft.com/office/powerpoint/2010/main" val="1583170704"/>
+        <p14:creationId xmlns:p14="http://schemas.microsoft.com/office/powerpoint/2010/main" val="400872380"/>
       </p:ext>
     </p:extLst>
   </p:cSld>
@@ -22711,10 +22593,10 @@
       </p:grpSpPr>
       <p:sp>
         <p:nvSpPr>
-          <p:cNvPr id="24" name="section-11">
-            <a:extLst xmlns:a="http://schemas.openxmlformats.org/drawingml/2006/main">
-              <a:ext uri="{FF2B5EF4-FFF2-40B4-BE49-F238E27FC236}">
-                <a16:creationId xmlns:a16="http://schemas.microsoft.com/office/drawing/2014/main" id="{272ED433-B59C-436C-9DFB-4D317B90A13F}"/>
+          <p:cNvPr id="20" name="section-7">
+            <a:extLst xmlns:a="http://schemas.openxmlformats.org/drawingml/2006/main">
+              <a:ext uri="{FF2B5EF4-FFF2-40B4-BE49-F238E27FC236}">
+                <a16:creationId xmlns:a16="http://schemas.microsoft.com/office/drawing/2014/main" id="{BAC8373F-594E-467B-A8F8-56439CEBE044}"/>
               </a:ext>
             </a:extLst>
           </p:cNvPr>
@@ -22770,10 +22652,10 @@
       </p:sp>
       <p:sp>
         <p:nvSpPr>
-          <p:cNvPr id="2" name="title-11">
-            <a:extLst xmlns:a="http://schemas.openxmlformats.org/drawingml/2006/main">
-              <a:ext uri="{FF2B5EF4-FFF2-40B4-BE49-F238E27FC236}">
-                <a16:creationId xmlns:a16="http://schemas.microsoft.com/office/drawing/2014/main" id="{3EC40708-7E00-432C-8ECE-907FA5705292}"/>
+          <p:cNvPr id="2" name="title-7">
+            <a:extLst xmlns:a="http://schemas.openxmlformats.org/drawingml/2006/main">
+              <a:ext uri="{FF2B5EF4-FFF2-40B4-BE49-F238E27FC236}">
+                <a16:creationId xmlns:a16="http://schemas.microsoft.com/office/drawing/2014/main" id="{7592E6E5-EA60-427F-BAB4-42C154D8CC5F}"/>
               </a:ext>
             </a:extLst>
           </p:cNvPr>
@@ -22798,7 +22680,7 @@
         </p:spPr>
         <p:txBody>
           <a:bodyPr xmlns:a="http://schemas.openxmlformats.org/drawingml/2006/main" wrap="square" lIns="0" tIns="0" rIns="0" bIns="0" anchor="t">
-            <a:normAutofit fontScale="88324"/>
+            <a:normAutofit fontScale="100000"/>
           </a:bodyPr>
           <a:lstStyle xmlns:a="http://schemas.openxmlformats.org/drawingml/2006/main"/>
           <a:p xmlns:a="http://schemas.openxmlformats.org/drawingml/2006/main">
@@ -22822,7 +22704,7 @@
                 <a:ea typeface="Arial"/>
                 <a:cs typeface="Arial"/>
               </a:rPr>
-              <a:t>ATR% changes the map—and leaves a replication candidate</a:t>
+              <a:t>HIGH and MEDIUM contain direct state differences</a:t>
             </a:r>
           </a:p>
         </p:txBody>
@@ -22832,7 +22714,7 @@
           <p:cNvPr id="3" name="">
             <a:extLst xmlns:a="http://schemas.openxmlformats.org/drawingml/2006/main">
               <a:ext uri="{FF2B5EF4-FFF2-40B4-BE49-F238E27FC236}">
-                <a16:creationId xmlns:a16="http://schemas.microsoft.com/office/drawing/2014/main" id="{D5CA0FCE-75E8-41EF-A76A-23E9E2120C6A}"/>
+                <a16:creationId xmlns:a16="http://schemas.microsoft.com/office/drawing/2014/main" id="{C852E1AC-5CE8-4847-87B1-81C28A4EFEDE}"/>
               </a:ext>
             </a:extLst>
           </p:cNvPr>
@@ -22862,10 +22744,10 @@
       </p:sp>
       <p:sp>
         <p:nvSpPr>
-          <p:cNvPr id="4" name="footer-left-11">
-            <a:extLst xmlns:a="http://schemas.openxmlformats.org/drawingml/2006/main">
-              <a:ext uri="{FF2B5EF4-FFF2-40B4-BE49-F238E27FC236}">
-                <a16:creationId xmlns:a16="http://schemas.microsoft.com/office/drawing/2014/main" id="{700DA765-80E0-4197-8700-00D867B86FA2}"/>
+          <p:cNvPr id="4" name="footer-left-7">
+            <a:extLst xmlns:a="http://schemas.openxmlformats.org/drawingml/2006/main">
+              <a:ext uri="{FF2B5EF4-FFF2-40B4-BE49-F238E27FC236}">
+                <a16:creationId xmlns:a16="http://schemas.microsoft.com/office/drawing/2014/main" id="{4896B590-20BC-4B46-9282-D9F5A22A0CC5}"/>
               </a:ext>
             </a:extLst>
           </p:cNvPr>
@@ -22921,10 +22803,10 @@
       </p:sp>
       <p:sp>
         <p:nvSpPr>
-          <p:cNvPr id="5" name="footer-number-11">
-            <a:extLst xmlns:a="http://schemas.openxmlformats.org/drawingml/2006/main">
-              <a:ext uri="{FF2B5EF4-FFF2-40B4-BE49-F238E27FC236}">
-                <a16:creationId xmlns:a16="http://schemas.microsoft.com/office/drawing/2014/main" id="{83896276-4112-4532-AF7C-776C67C58B77}"/>
+          <p:cNvPr id="5" name="footer-number-7">
+            <a:extLst xmlns:a="http://schemas.openxmlformats.org/drawingml/2006/main">
+              <a:ext uri="{FF2B5EF4-FFF2-40B4-BE49-F238E27FC236}">
+                <a16:creationId xmlns:a16="http://schemas.microsoft.com/office/drawing/2014/main" id="{1503EFAF-F487-4981-AFDC-23F1B41A7207}"/>
               </a:ext>
             </a:extLst>
           </p:cNvPr>
@@ -22974,6 +22856,911 @@
                 <a:cs typeface="Arial"/>
               </a:rPr>
               <a:t>30</a:t>
+            </a:r>
+          </a:p>
+        </p:txBody>
+      </p:sp>
+      <p:sp>
+        <p:nvSpPr>
+          <p:cNvPr id="6" name="">
+            <a:extLst xmlns:a="http://schemas.openxmlformats.org/drawingml/2006/main">
+              <a:ext uri="{FF2B5EF4-FFF2-40B4-BE49-F238E27FC236}">
+                <a16:creationId xmlns:a16="http://schemas.microsoft.com/office/drawing/2014/main" id="{4AA770DD-55E6-42DB-942A-6938E642B1A0}"/>
+              </a:ext>
+            </a:extLst>
+          </p:cNvPr>
+          <p:cNvSpPr>
+            <a:spLocks xmlns:a="http://schemas.openxmlformats.org/drawingml/2006/main" noGrp="1"/>
+          </p:cNvSpPr>
+          <p:nvPr/>
+        </p:nvSpPr>
+        <p:spPr>
+          <a:xfrm xmlns:a="http://schemas.openxmlformats.org/drawingml/2006/main">
+            <a:off x="342900" y="1428750"/>
+            <a:ext cx="7677150" cy="4762500"/>
+          </a:xfrm>
+          <a:prstGeom xmlns:a="http://schemas.openxmlformats.org/drawingml/2006/main" prst="rect">
+            <a:avLst/>
+          </a:prstGeom>
+          <a:solidFill xmlns:a="http://schemas.openxmlformats.org/drawingml/2006/main">
+            <a:srgbClr val="FFFFFF"/>
+          </a:solidFill>
+          <a:ln xmlns:a="http://schemas.openxmlformats.org/drawingml/2006/main" w="9525">
+            <a:solidFill>
+              <a:srgbClr val="B8BCC4"/>
+            </a:solidFill>
+            <a:prstDash val="solid"/>
+          </a:ln>
+        </p:spPr>
+      </p:sp>
+      <p:sp>
+        <p:nvSpPr>
+          <p:cNvPr id="8" name="">
+            <a:extLst xmlns:a="http://schemas.openxmlformats.org/drawingml/2006/main">
+              <a:ext uri="{FF2B5EF4-FFF2-40B4-BE49-F238E27FC236}">
+                <a16:creationId xmlns:a16="http://schemas.microsoft.com/office/drawing/2014/main" id="{925D1653-1738-47C8-BFA1-9C9390285CC4}"/>
+              </a:ext>
+            </a:extLst>
+          </p:cNvPr>
+          <p:cNvSpPr>
+            <a:spLocks xmlns:a="http://schemas.openxmlformats.org/drawingml/2006/main" noGrp="1"/>
+          </p:cNvSpPr>
+          <p:nvPr/>
+        </p:nvSpPr>
+        <p:spPr>
+          <a:xfrm xmlns:a="http://schemas.openxmlformats.org/drawingml/2006/main">
+            <a:off x="8362950" y="1504950"/>
+            <a:ext cx="3143250" cy="1428750"/>
+          </a:xfrm>
+          <a:prstGeom xmlns:a="http://schemas.openxmlformats.org/drawingml/2006/main" prst="rect">
+            <a:avLst/>
+          </a:prstGeom>
+          <a:solidFill xmlns:a="http://schemas.openxmlformats.org/drawingml/2006/main">
+            <a:srgbClr val="EDEDED"/>
+          </a:solidFill>
+          <a:ln xmlns:a="http://schemas.openxmlformats.org/drawingml/2006/main" w="0">
+            <a:solidFill>
+              <a:srgbClr val="EDEDED"/>
+            </a:solidFill>
+            <a:prstDash val="solid"/>
+          </a:ln>
+        </p:spPr>
+      </p:sp>
+      <p:sp>
+        <p:nvSpPr>
+          <p:cNvPr id="9" name="">
+            <a:extLst xmlns:a="http://schemas.openxmlformats.org/drawingml/2006/main">
+              <a:ext uri="{FF2B5EF4-FFF2-40B4-BE49-F238E27FC236}">
+                <a16:creationId xmlns:a16="http://schemas.microsoft.com/office/drawing/2014/main" id="{AD911094-04B5-4E98-9749-4F832E6A7030}"/>
+              </a:ext>
+            </a:extLst>
+          </p:cNvPr>
+          <p:cNvSpPr>
+            <a:spLocks xmlns:a="http://schemas.openxmlformats.org/drawingml/2006/main" noGrp="1"/>
+          </p:cNvSpPr>
+          <p:nvPr/>
+        </p:nvSpPr>
+        <p:spPr>
+          <a:xfrm xmlns:a="http://schemas.openxmlformats.org/drawingml/2006/main">
+            <a:off x="8362950" y="1504950"/>
+            <a:ext cx="76200" cy="1428750"/>
+          </a:xfrm>
+          <a:prstGeom xmlns:a="http://schemas.openxmlformats.org/drawingml/2006/main" prst="rect">
+            <a:avLst/>
+          </a:prstGeom>
+          <a:solidFill xmlns:a="http://schemas.openxmlformats.org/drawingml/2006/main">
+            <a:srgbClr val="E45756"/>
+          </a:solidFill>
+          <a:ln xmlns:a="http://schemas.openxmlformats.org/drawingml/2006/main" w="0">
+            <a:solidFill>
+              <a:srgbClr val="E45756"/>
+            </a:solidFill>
+            <a:prstDash val="solid"/>
+          </a:ln>
+        </p:spPr>
+      </p:sp>
+      <p:sp>
+        <p:nvSpPr>
+          <p:cNvPr id="10" name="">
+            <a:extLst xmlns:a="http://schemas.openxmlformats.org/drawingml/2006/main">
+              <a:ext uri="{FF2B5EF4-FFF2-40B4-BE49-F238E27FC236}">
+                <a16:creationId xmlns:a16="http://schemas.microsoft.com/office/drawing/2014/main" id="{8259A327-4374-4B4E-A3BA-F8E016498564}"/>
+              </a:ext>
+            </a:extLst>
+          </p:cNvPr>
+          <p:cNvSpPr>
+            <a:spLocks xmlns:a="http://schemas.openxmlformats.org/drawingml/2006/main" noGrp="1"/>
+          </p:cNvSpPr>
+          <p:nvPr/>
+        </p:nvSpPr>
+        <p:spPr>
+          <a:xfrm xmlns:a="http://schemas.openxmlformats.org/drawingml/2006/main">
+            <a:off x="8629650" y="1676400"/>
+            <a:ext cx="2686050" cy="590550"/>
+          </a:xfrm>
+          <a:prstGeom xmlns:a="http://schemas.openxmlformats.org/drawingml/2006/main" prst="rect">
+            <a:avLst/>
+          </a:prstGeom>
+          <a:noFill xmlns:a="http://schemas.openxmlformats.org/drawingml/2006/main"/>
+          <a:ln xmlns:a="http://schemas.openxmlformats.org/drawingml/2006/main" w="0">
+            <a:noFill/>
+            <a:prstDash val="solid"/>
+          </a:ln>
+        </p:spPr>
+        <p:txBody>
+          <a:bodyPr xmlns:a="http://schemas.openxmlformats.org/drawingml/2006/main" wrap="square" lIns="0" tIns="0" rIns="0" bIns="0" anchor="t">
+            <a:normAutofit fontScale="100000"/>
+          </a:bodyPr>
+          <a:lstStyle xmlns:a="http://schemas.openxmlformats.org/drawingml/2006/main"/>
+          <a:p xmlns:a="http://schemas.openxmlformats.org/drawingml/2006/main">
+            <a:pPr algn="l">
+              <a:buNone/>
+              <a:defRPr sz="3225" b="1">
+                <a:solidFill>
+                  <a:srgbClr val="E45756"/>
+                </a:solidFill>
+                <a:latin typeface="Arial"/>
+                <a:ea typeface="Arial"/>
+                <a:cs typeface="Arial"/>
+              </a:defRPr>
+            </a:pPr>
+            <a:r>
+              <a:rPr sz="3225" b="1">
+                <a:solidFill>
+                  <a:srgbClr val="E45756"/>
+                </a:solidFill>
+                <a:latin typeface="Arial"/>
+                <a:ea typeface="Arial"/>
+                <a:cs typeface="Arial"/>
+              </a:rPr>
+              <a:t>-0.548</a:t>
+            </a:r>
+          </a:p>
+        </p:txBody>
+      </p:sp>
+      <p:sp>
+        <p:nvSpPr>
+          <p:cNvPr id="11" name="">
+            <a:extLst xmlns:a="http://schemas.openxmlformats.org/drawingml/2006/main">
+              <a:ext uri="{FF2B5EF4-FFF2-40B4-BE49-F238E27FC236}">
+                <a16:creationId xmlns:a16="http://schemas.microsoft.com/office/drawing/2014/main" id="{BE341AE3-547D-4111-ADFF-14E5545F2DBF}"/>
+              </a:ext>
+            </a:extLst>
+          </p:cNvPr>
+          <p:cNvSpPr>
+            <a:spLocks xmlns:a="http://schemas.openxmlformats.org/drawingml/2006/main" noGrp="1"/>
+          </p:cNvSpPr>
+          <p:nvPr/>
+        </p:nvSpPr>
+        <p:spPr>
+          <a:xfrm xmlns:a="http://schemas.openxmlformats.org/drawingml/2006/main">
+            <a:off x="8629650" y="2343150"/>
+            <a:ext cx="2686050" cy="438150"/>
+          </a:xfrm>
+          <a:prstGeom xmlns:a="http://schemas.openxmlformats.org/drawingml/2006/main" prst="rect">
+            <a:avLst/>
+          </a:prstGeom>
+          <a:noFill xmlns:a="http://schemas.openxmlformats.org/drawingml/2006/main"/>
+          <a:ln xmlns:a="http://schemas.openxmlformats.org/drawingml/2006/main" w="0">
+            <a:noFill/>
+            <a:prstDash val="solid"/>
+          </a:ln>
+        </p:spPr>
+        <p:txBody>
+          <a:bodyPr xmlns:a="http://schemas.openxmlformats.org/drawingml/2006/main" wrap="square" lIns="0" tIns="0" rIns="0" bIns="0" anchor="t">
+            <a:normAutofit fontScale="100000"/>
+          </a:bodyPr>
+          <a:lstStyle xmlns:a="http://schemas.openxmlformats.org/drawingml/2006/main"/>
+          <a:p xmlns:a="http://schemas.openxmlformats.org/drawingml/2006/main">
+            <a:pPr algn="l">
+              <a:buNone/>
+              <a:defRPr sz="1350" b="0">
+                <a:solidFill>
+                  <a:srgbClr val="273548"/>
+                </a:solidFill>
+                <a:latin typeface="Arial"/>
+                <a:ea typeface="Arial"/>
+                <a:cs typeface="Arial"/>
+              </a:defRPr>
+            </a:pPr>
+            <a:r>
+              <a:rPr sz="1350" b="0">
+                <a:solidFill>
+                  <a:srgbClr val="273548"/>
+                </a:solidFill>
+                <a:latin typeface="Arial"/>
+                <a:ea typeface="Arial"/>
+                <a:cs typeface="Arial"/>
+              </a:rPr>
+              <a:t>largest correlation change: 25 prior / 15 forward</a:t>
+            </a:r>
+          </a:p>
+        </p:txBody>
+      </p:sp>
+      <p:sp>
+        <p:nvSpPr>
+          <p:cNvPr id="12" name="">
+            <a:extLst xmlns:a="http://schemas.openxmlformats.org/drawingml/2006/main">
+              <a:ext uri="{FF2B5EF4-FFF2-40B4-BE49-F238E27FC236}">
+                <a16:creationId xmlns:a16="http://schemas.microsoft.com/office/drawing/2014/main" id="{627B1C2D-BD18-4B6C-8DC8-10694F2FD365}"/>
+              </a:ext>
+            </a:extLst>
+          </p:cNvPr>
+          <p:cNvSpPr>
+            <a:spLocks xmlns:a="http://schemas.openxmlformats.org/drawingml/2006/main" noGrp="1"/>
+          </p:cNvSpPr>
+          <p:nvPr/>
+        </p:nvSpPr>
+        <p:spPr>
+          <a:xfrm xmlns:a="http://schemas.openxmlformats.org/drawingml/2006/main">
+            <a:off x="8362950" y="3143250"/>
+            <a:ext cx="3143250" cy="1428750"/>
+          </a:xfrm>
+          <a:prstGeom xmlns:a="http://schemas.openxmlformats.org/drawingml/2006/main" prst="rect">
+            <a:avLst/>
+          </a:prstGeom>
+          <a:solidFill xmlns:a="http://schemas.openxmlformats.org/drawingml/2006/main">
+            <a:srgbClr val="EDEDED"/>
+          </a:solidFill>
+          <a:ln xmlns:a="http://schemas.openxmlformats.org/drawingml/2006/main" w="0">
+            <a:solidFill>
+              <a:srgbClr val="EDEDED"/>
+            </a:solidFill>
+            <a:prstDash val="solid"/>
+          </a:ln>
+        </p:spPr>
+      </p:sp>
+      <p:sp>
+        <p:nvSpPr>
+          <p:cNvPr id="13" name="">
+            <a:extLst xmlns:a="http://schemas.openxmlformats.org/drawingml/2006/main">
+              <a:ext uri="{FF2B5EF4-FFF2-40B4-BE49-F238E27FC236}">
+                <a16:creationId xmlns:a16="http://schemas.microsoft.com/office/drawing/2014/main" id="{1A4050CC-5568-4F8A-B026-EC7B8ABEFB7A}"/>
+              </a:ext>
+            </a:extLst>
+          </p:cNvPr>
+          <p:cNvSpPr>
+            <a:spLocks xmlns:a="http://schemas.openxmlformats.org/drawingml/2006/main" noGrp="1"/>
+          </p:cNvSpPr>
+          <p:nvPr/>
+        </p:nvSpPr>
+        <p:spPr>
+          <a:xfrm xmlns:a="http://schemas.openxmlformats.org/drawingml/2006/main">
+            <a:off x="8362950" y="3143250"/>
+            <a:ext cx="76200" cy="1428750"/>
+          </a:xfrm>
+          <a:prstGeom xmlns:a="http://schemas.openxmlformats.org/drawingml/2006/main" prst="rect">
+            <a:avLst/>
+          </a:prstGeom>
+          <a:solidFill xmlns:a="http://schemas.openxmlformats.org/drawingml/2006/main">
+            <a:srgbClr val="3D8DFF"/>
+          </a:solidFill>
+          <a:ln xmlns:a="http://schemas.openxmlformats.org/drawingml/2006/main" w="0">
+            <a:solidFill>
+              <a:srgbClr val="3D8DFF"/>
+            </a:solidFill>
+            <a:prstDash val="solid"/>
+          </a:ln>
+        </p:spPr>
+      </p:sp>
+      <p:sp>
+        <p:nvSpPr>
+          <p:cNvPr id="14" name="">
+            <a:extLst xmlns:a="http://schemas.openxmlformats.org/drawingml/2006/main">
+              <a:ext uri="{FF2B5EF4-FFF2-40B4-BE49-F238E27FC236}">
+                <a16:creationId xmlns:a16="http://schemas.microsoft.com/office/drawing/2014/main" id="{502FF9D4-D051-476B-B68A-15DCA6B44FE9}"/>
+              </a:ext>
+            </a:extLst>
+          </p:cNvPr>
+          <p:cNvSpPr>
+            <a:spLocks xmlns:a="http://schemas.openxmlformats.org/drawingml/2006/main" noGrp="1"/>
+          </p:cNvSpPr>
+          <p:nvPr/>
+        </p:nvSpPr>
+        <p:spPr>
+          <a:xfrm xmlns:a="http://schemas.openxmlformats.org/drawingml/2006/main">
+            <a:off x="8629650" y="3314700"/>
+            <a:ext cx="2686050" cy="590550"/>
+          </a:xfrm>
+          <a:prstGeom xmlns:a="http://schemas.openxmlformats.org/drawingml/2006/main" prst="rect">
+            <a:avLst/>
+          </a:prstGeom>
+          <a:noFill xmlns:a="http://schemas.openxmlformats.org/drawingml/2006/main"/>
+          <a:ln xmlns:a="http://schemas.openxmlformats.org/drawingml/2006/main" w="0">
+            <a:noFill/>
+            <a:prstDash val="solid"/>
+          </a:ln>
+        </p:spPr>
+        <p:txBody>
+          <a:bodyPr xmlns:a="http://schemas.openxmlformats.org/drawingml/2006/main" wrap="square" lIns="0" tIns="0" rIns="0" bIns="0" anchor="t">
+            <a:normAutofit fontScale="100000"/>
+          </a:bodyPr>
+          <a:lstStyle xmlns:a="http://schemas.openxmlformats.org/drawingml/2006/main"/>
+          <a:p xmlns:a="http://schemas.openxmlformats.org/drawingml/2006/main">
+            <a:pPr algn="l">
+              <a:buNone/>
+              <a:defRPr sz="3225" b="1">
+                <a:solidFill>
+                  <a:srgbClr val="3D8DFF"/>
+                </a:solidFill>
+                <a:latin typeface="Arial"/>
+                <a:ea typeface="Arial"/>
+                <a:cs typeface="Arial"/>
+              </a:defRPr>
+            </a:pPr>
+            <a:r>
+              <a:rPr sz="3225" b="1">
+                <a:solidFill>
+                  <a:srgbClr val="3D8DFF"/>
+                </a:solidFill>
+                <a:latin typeface="Arial"/>
+                <a:ea typeface="Arial"/>
+                <a:cs typeface="Arial"/>
+              </a:rPr>
+              <a:t>q = 0.038</a:t>
+            </a:r>
+          </a:p>
+        </p:txBody>
+      </p:sp>
+      <p:sp>
+        <p:nvSpPr>
+          <p:cNvPr id="15" name="">
+            <a:extLst xmlns:a="http://schemas.openxmlformats.org/drawingml/2006/main">
+              <a:ext uri="{FF2B5EF4-FFF2-40B4-BE49-F238E27FC236}">
+                <a16:creationId xmlns:a16="http://schemas.microsoft.com/office/drawing/2014/main" id="{03DFBB46-08D6-4497-AA7C-C2049757E9DE}"/>
+              </a:ext>
+            </a:extLst>
+          </p:cNvPr>
+          <p:cNvSpPr>
+            <a:spLocks xmlns:a="http://schemas.openxmlformats.org/drawingml/2006/main" noGrp="1"/>
+          </p:cNvSpPr>
+          <p:nvPr/>
+        </p:nvSpPr>
+        <p:spPr>
+          <a:xfrm xmlns:a="http://schemas.openxmlformats.org/drawingml/2006/main">
+            <a:off x="8629650" y="3981450"/>
+            <a:ext cx="2686050" cy="438150"/>
+          </a:xfrm>
+          <a:prstGeom xmlns:a="http://schemas.openxmlformats.org/drawingml/2006/main" prst="rect">
+            <a:avLst/>
+          </a:prstGeom>
+          <a:noFill xmlns:a="http://schemas.openxmlformats.org/drawingml/2006/main"/>
+          <a:ln xmlns:a="http://schemas.openxmlformats.org/drawingml/2006/main" w="0">
+            <a:noFill/>
+            <a:prstDash val="solid"/>
+          </a:ln>
+        </p:spPr>
+        <p:txBody>
+          <a:bodyPr xmlns:a="http://schemas.openxmlformats.org/drawingml/2006/main" wrap="square" lIns="0" tIns="0" rIns="0" bIns="0" anchor="t">
+            <a:normAutofit fontScale="100000"/>
+          </a:bodyPr>
+          <a:lstStyle xmlns:a="http://schemas.openxmlformats.org/drawingml/2006/main"/>
+          <a:p xmlns:a="http://schemas.openxmlformats.org/drawingml/2006/main">
+            <a:pPr algn="l">
+              <a:buNone/>
+              <a:defRPr sz="1350" b="0">
+                <a:solidFill>
+                  <a:srgbClr val="273548"/>
+                </a:solidFill>
+                <a:latin typeface="Arial"/>
+                <a:ea typeface="Arial"/>
+                <a:cs typeface="Arial"/>
+              </a:defRPr>
+            </a:pPr>
+            <a:r>
+              <a:rPr sz="1350" b="0">
+                <a:solidFill>
+                  <a:srgbClr val="273548"/>
+                </a:solidFill>
+                <a:latin typeface="Arial"/>
+                <a:ea typeface="Arial"/>
+                <a:cs typeface="Arial"/>
+              </a:rPr>
+              <a:t>within HIGH-minus-MEDIUM family</a:t>
+            </a:r>
+          </a:p>
+        </p:txBody>
+      </p:sp>
+      <p:sp>
+        <p:nvSpPr>
+          <p:cNvPr id="16" name="">
+            <a:extLst xmlns:a="http://schemas.openxmlformats.org/drawingml/2006/main">
+              <a:ext uri="{FF2B5EF4-FFF2-40B4-BE49-F238E27FC236}">
+                <a16:creationId xmlns:a16="http://schemas.microsoft.com/office/drawing/2014/main" id="{509D61CC-6E5E-49EC-A5F6-E861E8561441}"/>
+              </a:ext>
+            </a:extLst>
+          </p:cNvPr>
+          <p:cNvSpPr>
+            <a:spLocks xmlns:a="http://schemas.openxmlformats.org/drawingml/2006/main" noGrp="1"/>
+          </p:cNvSpPr>
+          <p:nvPr/>
+        </p:nvSpPr>
+        <p:spPr>
+          <a:xfrm xmlns:a="http://schemas.openxmlformats.org/drawingml/2006/main">
+            <a:off x="8362950" y="4781550"/>
+            <a:ext cx="3143250" cy="1428750"/>
+          </a:xfrm>
+          <a:prstGeom xmlns:a="http://schemas.openxmlformats.org/drawingml/2006/main" prst="rect">
+            <a:avLst/>
+          </a:prstGeom>
+          <a:solidFill xmlns:a="http://schemas.openxmlformats.org/drawingml/2006/main">
+            <a:srgbClr val="EDEDED"/>
+          </a:solidFill>
+          <a:ln xmlns:a="http://schemas.openxmlformats.org/drawingml/2006/main" w="0">
+            <a:solidFill>
+              <a:srgbClr val="EDEDED"/>
+            </a:solidFill>
+            <a:prstDash val="solid"/>
+          </a:ln>
+        </p:spPr>
+      </p:sp>
+      <p:sp>
+        <p:nvSpPr>
+          <p:cNvPr id="17" name="">
+            <a:extLst xmlns:a="http://schemas.openxmlformats.org/drawingml/2006/main">
+              <a:ext uri="{FF2B5EF4-FFF2-40B4-BE49-F238E27FC236}">
+                <a16:creationId xmlns:a16="http://schemas.microsoft.com/office/drawing/2014/main" id="{A935608E-4DDE-41BA-8DF2-831CF419565B}"/>
+              </a:ext>
+            </a:extLst>
+          </p:cNvPr>
+          <p:cNvSpPr>
+            <a:spLocks xmlns:a="http://schemas.openxmlformats.org/drawingml/2006/main" noGrp="1"/>
+          </p:cNvSpPr>
+          <p:nvPr/>
+        </p:nvSpPr>
+        <p:spPr>
+          <a:xfrm xmlns:a="http://schemas.openxmlformats.org/drawingml/2006/main">
+            <a:off x="8362950" y="4781550"/>
+            <a:ext cx="76200" cy="1428750"/>
+          </a:xfrm>
+          <a:prstGeom xmlns:a="http://schemas.openxmlformats.org/drawingml/2006/main" prst="rect">
+            <a:avLst/>
+          </a:prstGeom>
+          <a:solidFill xmlns:a="http://schemas.openxmlformats.org/drawingml/2006/main">
+            <a:srgbClr val="273548"/>
+          </a:solidFill>
+          <a:ln xmlns:a="http://schemas.openxmlformats.org/drawingml/2006/main" w="0">
+            <a:solidFill>
+              <a:srgbClr val="273548"/>
+            </a:solidFill>
+            <a:prstDash val="solid"/>
+          </a:ln>
+        </p:spPr>
+      </p:sp>
+      <p:sp>
+        <p:nvSpPr>
+          <p:cNvPr id="18" name="">
+            <a:extLst xmlns:a="http://schemas.openxmlformats.org/drawingml/2006/main">
+              <a:ext uri="{FF2B5EF4-FFF2-40B4-BE49-F238E27FC236}">
+                <a16:creationId xmlns:a16="http://schemas.microsoft.com/office/drawing/2014/main" id="{088A976D-39D1-4C6C-803F-0D3F8BAE4A28}"/>
+              </a:ext>
+            </a:extLst>
+          </p:cNvPr>
+          <p:cNvSpPr>
+            <a:spLocks xmlns:a="http://schemas.openxmlformats.org/drawingml/2006/main" noGrp="1"/>
+          </p:cNvSpPr>
+          <p:nvPr/>
+        </p:nvSpPr>
+        <p:spPr>
+          <a:xfrm xmlns:a="http://schemas.openxmlformats.org/drawingml/2006/main">
+            <a:off x="8629650" y="4953000"/>
+            <a:ext cx="2686050" cy="590550"/>
+          </a:xfrm>
+          <a:prstGeom xmlns:a="http://schemas.openxmlformats.org/drawingml/2006/main" prst="rect">
+            <a:avLst/>
+          </a:prstGeom>
+          <a:noFill xmlns:a="http://schemas.openxmlformats.org/drawingml/2006/main"/>
+          <a:ln xmlns:a="http://schemas.openxmlformats.org/drawingml/2006/main" w="0">
+            <a:noFill/>
+            <a:prstDash val="solid"/>
+          </a:ln>
+        </p:spPr>
+        <p:txBody>
+          <a:bodyPr xmlns:a="http://schemas.openxmlformats.org/drawingml/2006/main" wrap="square" lIns="0" tIns="0" rIns="0" bIns="0" anchor="t">
+            <a:normAutofit fontScale="100000"/>
+          </a:bodyPr>
+          <a:lstStyle xmlns:a="http://schemas.openxmlformats.org/drawingml/2006/main"/>
+          <a:p xmlns:a="http://schemas.openxmlformats.org/drawingml/2006/main">
+            <a:pPr algn="l">
+              <a:buNone/>
+              <a:defRPr sz="3225" b="1">
+                <a:solidFill>
+                  <a:srgbClr val="273548"/>
+                </a:solidFill>
+                <a:latin typeface="Arial"/>
+                <a:ea typeface="Arial"/>
+                <a:cs typeface="Arial"/>
+              </a:defRPr>
+            </a:pPr>
+            <a:r>
+              <a:rPr sz="3225" b="1">
+                <a:solidFill>
+                  <a:srgbClr val="273548"/>
+                </a:solidFill>
+                <a:latin typeface="Arial"/>
+                <a:ea typeface="Arial"/>
+                <a:cs typeface="Arial"/>
+              </a:rPr>
+              <a:t>3 / 243</a:t>
+            </a:r>
+          </a:p>
+        </p:txBody>
+      </p:sp>
+      <p:sp>
+        <p:nvSpPr>
+          <p:cNvPr id="19" name="">
+            <a:extLst xmlns:a="http://schemas.openxmlformats.org/drawingml/2006/main">
+              <a:ext uri="{FF2B5EF4-FFF2-40B4-BE49-F238E27FC236}">
+                <a16:creationId xmlns:a16="http://schemas.microsoft.com/office/drawing/2014/main" id="{AA1E116E-13CC-4735-B31A-B5C1846B2D22}"/>
+              </a:ext>
+            </a:extLst>
+          </p:cNvPr>
+          <p:cNvSpPr>
+            <a:spLocks xmlns:a="http://schemas.openxmlformats.org/drawingml/2006/main" noGrp="1"/>
+          </p:cNvSpPr>
+          <p:nvPr/>
+        </p:nvSpPr>
+        <p:spPr>
+          <a:xfrm xmlns:a="http://schemas.openxmlformats.org/drawingml/2006/main">
+            <a:off x="8629650" y="5619750"/>
+            <a:ext cx="2686050" cy="438150"/>
+          </a:xfrm>
+          <a:prstGeom xmlns:a="http://schemas.openxmlformats.org/drawingml/2006/main" prst="rect">
+            <a:avLst/>
+          </a:prstGeom>
+          <a:noFill xmlns:a="http://schemas.openxmlformats.org/drawingml/2006/main"/>
+          <a:ln xmlns:a="http://schemas.openxmlformats.org/drawingml/2006/main" w="0">
+            <a:noFill/>
+            <a:prstDash val="solid"/>
+          </a:ln>
+        </p:spPr>
+        <p:txBody>
+          <a:bodyPr xmlns:a="http://schemas.openxmlformats.org/drawingml/2006/main" wrap="square" lIns="0" tIns="0" rIns="0" bIns="0" anchor="t">
+            <a:normAutofit fontScale="100000"/>
+          </a:bodyPr>
+          <a:lstStyle xmlns:a="http://schemas.openxmlformats.org/drawingml/2006/main"/>
+          <a:p xmlns:a="http://schemas.openxmlformats.org/drawingml/2006/main">
+            <a:pPr algn="l">
+              <a:buNone/>
+              <a:defRPr sz="1350" b="0">
+                <a:solidFill>
+                  <a:srgbClr val="273548"/>
+                </a:solidFill>
+                <a:latin typeface="Arial"/>
+                <a:ea typeface="Arial"/>
+                <a:cs typeface="Arial"/>
+              </a:defRPr>
+            </a:pPr>
+            <a:r>
+              <a:rPr sz="1350" b="0">
+                <a:solidFill>
+                  <a:srgbClr val="273548"/>
+                </a:solidFill>
+                <a:latin typeface="Arial"/>
+                <a:ea typeface="Arial"/>
+                <a:cs typeface="Arial"/>
+              </a:rPr>
+              <a:t>pairwise cells surviving strict omnibus BH</a:t>
+            </a:r>
+          </a:p>
+        </p:txBody>
+      </p:sp>
+      <p:pic>
+        <p:nvPicPr>
+          <p:cNvPr id="40" name=""/>
+          <p:cNvPicPr>
+            <a:picLocks xmlns:a="http://schemas.openxmlformats.org/drawingml/2006/main" noChangeAspect="1"/>
+          </p:cNvPicPr>
+          <p:nvPr/>
+        </p:nvPicPr>
+        <p:blipFill>
+          <a:blip xmlns:r="http://schemas.openxmlformats.org/officeDocument/2006/relationships" xmlns:a="http://schemas.openxmlformats.org/drawingml/2006/main" r:embed="R0cba53e679374f80"/>
+          <a:stretch xmlns:a="http://schemas.openxmlformats.org/drawingml/2006/main"/>
+        </p:blipFill>
+        <p:spPr>
+          <a:xfrm xmlns:a="http://schemas.openxmlformats.org/drawingml/2006/main" flipH="0" flipV="0">
+            <a:off x="609600" y="1428750"/>
+            <a:ext cx="7143750" cy="4762500"/>
+          </a:xfrm>
+          <a:prstGeom xmlns:a="http://schemas.openxmlformats.org/drawingml/2006/main" prst="rect">
+            <a:avLst/>
+          </a:prstGeom>
+        </p:spPr>
+      </p:pic>
+    </p:spTree>
+    <p:extLst>
+      <p:ext uri="{BB962C8B-B14F-4D97-AF65-F5344CB8AC3E}">
+        <p14:creationId xmlns:p14="http://schemas.microsoft.com/office/powerpoint/2010/main" val="1583170704"/>
+      </p:ext>
+    </p:extLst>
+  </p:cSld>
+</p:sld>
+</file>
+
+<file path=ppt/slides/slide31.xml><?xml version="1.0" encoding="utf-8"?>
+<p:sld xmlns:p="http://schemas.openxmlformats.org/presentationml/2006/main">
+  <p:cSld>
+    <p:bg>
+      <p:bgPr>
+        <a:solidFill xmlns:a="http://schemas.openxmlformats.org/drawingml/2006/main">
+          <a:srgbClr val="FFFFFF"/>
+        </a:solidFill>
+      </p:bgPr>
+    </p:bg>
+    <p:spTree>
+      <p:nvGrpSpPr>
+        <p:cNvPr id="1" name=""/>
+        <p:cNvGrpSpPr/>
+        <p:nvPr/>
+      </p:nvGrpSpPr>
+      <p:grpSpPr>
+        <a:xfrm xmlns:a="http://schemas.openxmlformats.org/drawingml/2006/main"/>
+      </p:grpSpPr>
+      <p:sp>
+        <p:nvSpPr>
+          <p:cNvPr id="24" name="section-11">
+            <a:extLst xmlns:a="http://schemas.openxmlformats.org/drawingml/2006/main">
+              <a:ext uri="{FF2B5EF4-FFF2-40B4-BE49-F238E27FC236}">
+                <a16:creationId xmlns:a16="http://schemas.microsoft.com/office/drawing/2014/main" id="{272ED433-B59C-436C-9DFB-4D317B90A13F}"/>
+              </a:ext>
+            </a:extLst>
+          </p:cNvPr>
+          <p:cNvSpPr>
+            <a:spLocks xmlns:a="http://schemas.openxmlformats.org/drawingml/2006/main" noGrp="1"/>
+          </p:cNvSpPr>
+          <p:nvPr/>
+        </p:nvSpPr>
+        <p:spPr>
+          <a:xfrm xmlns:a="http://schemas.openxmlformats.org/drawingml/2006/main">
+            <a:off x="457200" y="228600"/>
+            <a:ext cx="4191000" cy="228600"/>
+          </a:xfrm>
+          <a:prstGeom xmlns:a="http://schemas.openxmlformats.org/drawingml/2006/main" prst="rect">
+            <a:avLst/>
+          </a:prstGeom>
+          <a:noFill xmlns:a="http://schemas.openxmlformats.org/drawingml/2006/main"/>
+          <a:ln xmlns:a="http://schemas.openxmlformats.org/drawingml/2006/main" w="0">
+            <a:noFill/>
+            <a:prstDash val="solid"/>
+          </a:ln>
+        </p:spPr>
+        <p:txBody>
+          <a:bodyPr xmlns:a="http://schemas.openxmlformats.org/drawingml/2006/main" wrap="square" lIns="0" tIns="0" rIns="0" bIns="0" anchor="t">
+            <a:normAutofit fontScale="100000"/>
+          </a:bodyPr>
+          <a:lstStyle xmlns:a="http://schemas.openxmlformats.org/drawingml/2006/main"/>
+          <a:p xmlns:a="http://schemas.openxmlformats.org/drawingml/2006/main">
+            <a:pPr algn="l">
+              <a:buNone/>
+              <a:defRPr sz="1200" b="1">
+                <a:solidFill>
+                  <a:srgbClr val="667384"/>
+                </a:solidFill>
+                <a:latin typeface="Arial"/>
+                <a:ea typeface="Arial"/>
+                <a:cs typeface="Arial"/>
+              </a:defRPr>
+            </a:pPr>
+            <a:r>
+              <a:rPr sz="1200" b="1">
+                <a:solidFill>
+                  <a:srgbClr val="667384"/>
+                </a:solidFill>
+                <a:latin typeface="Arial"/>
+                <a:ea typeface="Arial"/>
+                <a:cs typeface="Arial"/>
+              </a:rPr>
+              <a:t>TSLA DESCRIPTIVE MICROSCOPE</a:t>
+            </a:r>
+          </a:p>
+        </p:txBody>
+      </p:sp>
+      <p:sp>
+        <p:nvSpPr>
+          <p:cNvPr id="2" name="title-11">
+            <a:extLst xmlns:a="http://schemas.openxmlformats.org/drawingml/2006/main">
+              <a:ext uri="{FF2B5EF4-FFF2-40B4-BE49-F238E27FC236}">
+                <a16:creationId xmlns:a16="http://schemas.microsoft.com/office/drawing/2014/main" id="{3EC40708-7E00-432C-8ECE-907FA5705292}"/>
+              </a:ext>
+            </a:extLst>
+          </p:cNvPr>
+          <p:cNvSpPr>
+            <a:spLocks xmlns:a="http://schemas.openxmlformats.org/drawingml/2006/main" noGrp="1"/>
+          </p:cNvSpPr>
+          <p:nvPr/>
+        </p:nvSpPr>
+        <p:spPr>
+          <a:xfrm xmlns:a="http://schemas.openxmlformats.org/drawingml/2006/main">
+            <a:off x="457200" y="533400"/>
+            <a:ext cx="11277600" cy="628650"/>
+          </a:xfrm>
+          <a:prstGeom xmlns:a="http://schemas.openxmlformats.org/drawingml/2006/main" prst="rect">
+            <a:avLst/>
+          </a:prstGeom>
+          <a:noFill xmlns:a="http://schemas.openxmlformats.org/drawingml/2006/main"/>
+          <a:ln xmlns:a="http://schemas.openxmlformats.org/drawingml/2006/main" w="0">
+            <a:noFill/>
+            <a:prstDash val="solid"/>
+          </a:ln>
+        </p:spPr>
+        <p:txBody>
+          <a:bodyPr xmlns:a="http://schemas.openxmlformats.org/drawingml/2006/main" wrap="square" lIns="0" tIns="0" rIns="0" bIns="0" anchor="t">
+            <a:normAutofit fontScale="88324"/>
+          </a:bodyPr>
+          <a:lstStyle xmlns:a="http://schemas.openxmlformats.org/drawingml/2006/main"/>
+          <a:p xmlns:a="http://schemas.openxmlformats.org/drawingml/2006/main">
+            <a:pPr algn="l">
+              <a:buNone/>
+              <a:defRPr sz="3525" b="1">
+                <a:solidFill>
+                  <a:srgbClr val="000000"/>
+                </a:solidFill>
+                <a:latin typeface="Arial"/>
+                <a:ea typeface="Arial"/>
+                <a:cs typeface="Arial"/>
+              </a:defRPr>
+            </a:pPr>
+            <a:r>
+              <a:rPr sz="3525" b="1">
+                <a:solidFill>
+                  <a:srgbClr val="000000"/>
+                </a:solidFill>
+                <a:latin typeface="Arial"/>
+                <a:ea typeface="Arial"/>
+                <a:cs typeface="Arial"/>
+              </a:rPr>
+              <a:t>ATR% changes the map—and leaves a replication candidate</a:t>
+            </a:r>
+          </a:p>
+        </p:txBody>
+      </p:sp>
+      <p:sp>
+        <p:nvSpPr>
+          <p:cNvPr id="3" name="">
+            <a:extLst xmlns:a="http://schemas.openxmlformats.org/drawingml/2006/main">
+              <a:ext uri="{FF2B5EF4-FFF2-40B4-BE49-F238E27FC236}">
+                <a16:creationId xmlns:a16="http://schemas.microsoft.com/office/drawing/2014/main" id="{D5CA0FCE-75E8-41EF-A76A-23E9E2120C6A}"/>
+              </a:ext>
+            </a:extLst>
+          </p:cNvPr>
+          <p:cNvSpPr>
+            <a:spLocks xmlns:a="http://schemas.openxmlformats.org/drawingml/2006/main" noGrp="1"/>
+          </p:cNvSpPr>
+          <p:nvPr/>
+        </p:nvSpPr>
+        <p:spPr>
+          <a:xfrm xmlns:a="http://schemas.openxmlformats.org/drawingml/2006/main">
+            <a:off x="457200" y="1200150"/>
+            <a:ext cx="11277600" cy="19050"/>
+          </a:xfrm>
+          <a:prstGeom xmlns:a="http://schemas.openxmlformats.org/drawingml/2006/main" prst="rect">
+            <a:avLst/>
+          </a:prstGeom>
+          <a:solidFill xmlns:a="http://schemas.openxmlformats.org/drawingml/2006/main">
+            <a:srgbClr val="B8BCC4"/>
+          </a:solidFill>
+          <a:ln xmlns:a="http://schemas.openxmlformats.org/drawingml/2006/main" w="0">
+            <a:solidFill>
+              <a:srgbClr val="B8BCC4"/>
+            </a:solidFill>
+            <a:prstDash val="solid"/>
+          </a:ln>
+        </p:spPr>
+      </p:sp>
+      <p:sp>
+        <p:nvSpPr>
+          <p:cNvPr id="4" name="footer-left-11">
+            <a:extLst xmlns:a="http://schemas.openxmlformats.org/drawingml/2006/main">
+              <a:ext uri="{FF2B5EF4-FFF2-40B4-BE49-F238E27FC236}">
+                <a16:creationId xmlns:a16="http://schemas.microsoft.com/office/drawing/2014/main" id="{700DA765-80E0-4197-8700-00D867B86FA2}"/>
+              </a:ext>
+            </a:extLst>
+          </p:cNvPr>
+          <p:cNvSpPr>
+            <a:spLocks xmlns:a="http://schemas.openxmlformats.org/drawingml/2006/main" noGrp="1"/>
+          </p:cNvSpPr>
+          <p:nvPr/>
+        </p:nvSpPr>
+        <p:spPr>
+          <a:xfrm xmlns:a="http://schemas.openxmlformats.org/drawingml/2006/main">
+            <a:off x="457200" y="6515100"/>
+            <a:ext cx="3429000" cy="171450"/>
+          </a:xfrm>
+          <a:prstGeom xmlns:a="http://schemas.openxmlformats.org/drawingml/2006/main" prst="rect">
+            <a:avLst/>
+          </a:prstGeom>
+          <a:noFill xmlns:a="http://schemas.openxmlformats.org/drawingml/2006/main"/>
+          <a:ln xmlns:a="http://schemas.openxmlformats.org/drawingml/2006/main" w="0">
+            <a:noFill/>
+            <a:prstDash val="solid"/>
+          </a:ln>
+        </p:spPr>
+        <p:txBody>
+          <a:bodyPr xmlns:a="http://schemas.openxmlformats.org/drawingml/2006/main" wrap="square" lIns="0" tIns="0" rIns="0" bIns="0" anchor="t">
+            <a:normAutofit fontScale="100000"/>
+          </a:bodyPr>
+          <a:lstStyle xmlns:a="http://schemas.openxmlformats.org/drawingml/2006/main"/>
+          <a:p xmlns:a="http://schemas.openxmlformats.org/drawingml/2006/main">
+            <a:pPr algn="l">
+              <a:buNone/>
+              <a:defRPr sz="1050" b="0">
+                <a:solidFill>
+                  <a:srgbClr val="667384"/>
+                </a:solidFill>
+                <a:latin typeface="Arial"/>
+                <a:ea typeface="Arial"/>
+                <a:cs typeface="Arial"/>
+              </a:defRPr>
+            </a:pPr>
+            <a:r>
+              <a:rPr sz="1050" b="0">
+                <a:solidFill>
+                  <a:srgbClr val="667384"/>
+                </a:solidFill>
+                <a:latin typeface="Arial"/>
+                <a:ea typeface="Arial"/>
+                <a:cs typeface="Arial"/>
+              </a:rPr>
+              <a:t>Adjusted daily TSLA | 2018-2023</a:t>
+            </a:r>
+          </a:p>
+        </p:txBody>
+      </p:sp>
+      <p:sp>
+        <p:nvSpPr>
+          <p:cNvPr id="5" name="footer-number-11">
+            <a:extLst xmlns:a="http://schemas.openxmlformats.org/drawingml/2006/main">
+              <a:ext uri="{FF2B5EF4-FFF2-40B4-BE49-F238E27FC236}">
+                <a16:creationId xmlns:a16="http://schemas.microsoft.com/office/drawing/2014/main" id="{83896276-4112-4532-AF7C-776C67C58B77}"/>
+              </a:ext>
+            </a:extLst>
+          </p:cNvPr>
+          <p:cNvSpPr>
+            <a:spLocks xmlns:a="http://schemas.openxmlformats.org/drawingml/2006/main" noGrp="1"/>
+          </p:cNvSpPr>
+          <p:nvPr/>
+        </p:nvSpPr>
+        <p:spPr>
+          <a:xfrm xmlns:a="http://schemas.openxmlformats.org/drawingml/2006/main">
+            <a:off x="11239500" y="6496050"/>
+            <a:ext cx="495300" cy="190500"/>
+          </a:xfrm>
+          <a:prstGeom xmlns:a="http://schemas.openxmlformats.org/drawingml/2006/main" prst="rect">
+            <a:avLst/>
+          </a:prstGeom>
+          <a:noFill xmlns:a="http://schemas.openxmlformats.org/drawingml/2006/main"/>
+          <a:ln xmlns:a="http://schemas.openxmlformats.org/drawingml/2006/main" w="0">
+            <a:noFill/>
+            <a:prstDash val="solid"/>
+          </a:ln>
+        </p:spPr>
+        <p:txBody>
+          <a:bodyPr xmlns:a="http://schemas.openxmlformats.org/drawingml/2006/main" wrap="square" lIns="0" tIns="0" rIns="0" bIns="0" anchor="t">
+            <a:normAutofit fontScale="100000"/>
+          </a:bodyPr>
+          <a:lstStyle xmlns:a="http://schemas.openxmlformats.org/drawingml/2006/main"/>
+          <a:p xmlns:a="http://schemas.openxmlformats.org/drawingml/2006/main">
+            <a:pPr algn="r">
+              <a:buNone/>
+              <a:defRPr sz="1050" b="0">
+                <a:solidFill>
+                  <a:srgbClr val="667384"/>
+                </a:solidFill>
+                <a:latin typeface="Arial"/>
+                <a:ea typeface="Arial"/>
+                <a:cs typeface="Arial"/>
+              </a:defRPr>
+            </a:pPr>
+            <a:r>
+              <a:rPr sz="1050" b="0">
+                <a:solidFill>
+                  <a:srgbClr val="667384"/>
+                </a:solidFill>
+                <a:latin typeface="Arial"/>
+                <a:ea typeface="Arial"/>
+                <a:cs typeface="Arial"/>
+              </a:rPr>
+              <a:t>31</a:t>
             </a:r>
           </a:p>
         </p:txBody>
@@ -24198,7 +24985,7 @@
           <p:nvPr/>
         </p:nvPicPr>
         <p:blipFill>
-          <a:blip xmlns:r="http://schemas.openxmlformats.org/officeDocument/2006/relationships" xmlns:a="http://schemas.openxmlformats.org/drawingml/2006/main" r:embed="Rc2c7f769338e45a4"/>
+          <a:blip xmlns:r="http://schemas.openxmlformats.org/officeDocument/2006/relationships" xmlns:a="http://schemas.openxmlformats.org/drawingml/2006/main" r:embed="R3e6ac7e05ab44faa"/>
           <a:stretch xmlns:a="http://schemas.openxmlformats.org/drawingml/2006/main"/>
         </p:blipFill>
         <p:spPr>
@@ -24610,7 +25397,7 @@
           <p:nvPr/>
         </p:nvPicPr>
         <p:blipFill>
-          <a:blip xmlns:r="http://schemas.openxmlformats.org/officeDocument/2006/relationships" xmlns:a="http://schemas.openxmlformats.org/drawingml/2006/main" r:embed="R321943bf56324648"/>
+          <a:blip xmlns:r="http://schemas.openxmlformats.org/officeDocument/2006/relationships" xmlns:a="http://schemas.openxmlformats.org/drawingml/2006/main" r:embed="Rc01ec9e6b94b4f52"/>
           <a:stretch xmlns:a="http://schemas.openxmlformats.org/drawingml/2006/main"/>
         </p:blipFill>
         <p:spPr>
@@ -25672,7 +26459,7 @@
           <p:nvPr/>
         </p:nvPicPr>
         <p:blipFill>
-          <a:blip xmlns:r="http://schemas.openxmlformats.org/officeDocument/2006/relationships" xmlns:a="http://schemas.openxmlformats.org/drawingml/2006/main" r:embed="Rb459fa0b30344a67"/>
+          <a:blip xmlns:r="http://schemas.openxmlformats.org/officeDocument/2006/relationships" xmlns:a="http://schemas.openxmlformats.org/drawingml/2006/main" r:embed="R45df43d5ea58424a"/>
           <a:stretch xmlns:a="http://schemas.openxmlformats.org/drawingml/2006/main"/>
         </p:blipFill>
         <p:spPr>
@@ -26577,7 +27364,7 @@
           <p:nvPr/>
         </p:nvPicPr>
         <p:blipFill>
-          <a:blip xmlns:r="http://schemas.openxmlformats.org/officeDocument/2006/relationships" xmlns:a="http://schemas.openxmlformats.org/drawingml/2006/main" r:embed="R472b74b356914a8a"/>
+          <a:blip xmlns:r="http://schemas.openxmlformats.org/officeDocument/2006/relationships" xmlns:a="http://schemas.openxmlformats.org/drawingml/2006/main" r:embed="Rc7dd42bd33944d1f"/>
           <a:stretch xmlns:a="http://schemas.openxmlformats.org/drawingml/2006/main"/>
         </p:blipFill>
         <p:spPr>
@@ -27381,7 +28168,7 @@
           <p:nvPr/>
         </p:nvPicPr>
         <p:blipFill>
-          <a:blip xmlns:r="http://schemas.openxmlformats.org/officeDocument/2006/relationships" xmlns:a="http://schemas.openxmlformats.org/drawingml/2006/main" r:embed="Rcc88488bccb44203"/>
+          <a:blip xmlns:r="http://schemas.openxmlformats.org/officeDocument/2006/relationships" xmlns:a="http://schemas.openxmlformats.org/drawingml/2006/main" r:embed="R68bc16d9e41544fa"/>
           <a:stretch xmlns:a="http://schemas.openxmlformats.org/drawingml/2006/main"/>
         </p:blipFill>
         <p:spPr>

--- a/operator_hypothesis_lab/presentations/tsla_descriptive_microscope_evidence.pptx
+++ b/operator_hypothesis_lab/presentations/tsla_descriptive_microscope_evidence.pptx
@@ -2,43 +2,51 @@
 <file path=ppt/presentation.xml><?xml version="1.0" encoding="utf-8"?>
 <p:presentation xmlns:p="http://schemas.openxmlformats.org/presentationml/2006/main">
   <p:sldMasterIdLst>
-    <p:sldMasterId xmlns:r="http://schemas.openxmlformats.org/officeDocument/2006/relationships" id="2147483648" r:id="R8784b9d88eb04a77"/>
+    <p:sldMasterId xmlns:r="http://schemas.openxmlformats.org/officeDocument/2006/relationships" id="2147483648" r:id="Rf943fbde9bda42c0"/>
   </p:sldMasterIdLst>
   <p:notesMasterIdLst>
-    <p:notesMasterId xmlns:r="http://schemas.openxmlformats.org/officeDocument/2006/relationships" r:id="Rd4a0359dc2924145"/>
+    <p:notesMasterId xmlns:r="http://schemas.openxmlformats.org/officeDocument/2006/relationships" r:id="Rc6a094860ff44a11"/>
   </p:notesMasterIdLst>
   <p:sldIdLst>
-    <p:sldId xmlns:r="http://schemas.openxmlformats.org/officeDocument/2006/relationships" id="256" r:id="Ra856ea82b1f24691"/>
-    <p:sldId xmlns:r="http://schemas.openxmlformats.org/officeDocument/2006/relationships" id="257" r:id="R738ada6bc0a642e9"/>
-    <p:sldId xmlns:r="http://schemas.openxmlformats.org/officeDocument/2006/relationships" id="258" r:id="Rb64df74bfd4f4ea1"/>
-    <p:sldId xmlns:r="http://schemas.openxmlformats.org/officeDocument/2006/relationships" id="259" r:id="R769ae138f9504f10"/>
-    <p:sldId xmlns:r="http://schemas.openxmlformats.org/officeDocument/2006/relationships" id="260" r:id="R9e8a54764f9f4237"/>
-    <p:sldId xmlns:r="http://schemas.openxmlformats.org/officeDocument/2006/relationships" id="261" r:id="R3289a9d1be36412b"/>
-    <p:sldId xmlns:r="http://schemas.openxmlformats.org/officeDocument/2006/relationships" id="262" r:id="R7226d268e68c4588"/>
-    <p:sldId xmlns:r="http://schemas.openxmlformats.org/officeDocument/2006/relationships" id="263" r:id="R89e884d3145340ed"/>
-    <p:sldId xmlns:r="http://schemas.openxmlformats.org/officeDocument/2006/relationships" id="264" r:id="Re09e93c3c0fa455c"/>
-    <p:sldId xmlns:r="http://schemas.openxmlformats.org/officeDocument/2006/relationships" id="265" r:id="R67f0fd8180f24c98"/>
-    <p:sldId xmlns:r="http://schemas.openxmlformats.org/officeDocument/2006/relationships" id="266" r:id="Rb9137075e1664967"/>
-    <p:sldId xmlns:r="http://schemas.openxmlformats.org/officeDocument/2006/relationships" id="267" r:id="Rb87db3e7d5ba4a3a"/>
-    <p:sldId xmlns:r="http://schemas.openxmlformats.org/officeDocument/2006/relationships" id="268" r:id="Rb164100bbee94752"/>
-    <p:sldId xmlns:r="http://schemas.openxmlformats.org/officeDocument/2006/relationships" id="269" r:id="Rf41834c2c2554a2d"/>
-    <p:sldId xmlns:r="http://schemas.openxmlformats.org/officeDocument/2006/relationships" id="270" r:id="Rd115eed1654a4d45"/>
-    <p:sldId xmlns:r="http://schemas.openxmlformats.org/officeDocument/2006/relationships" id="271" r:id="R1915b87901aa4ae8"/>
-    <p:sldId xmlns:r="http://schemas.openxmlformats.org/officeDocument/2006/relationships" id="272" r:id="Rab08085a89ec4be0"/>
-    <p:sldId xmlns:r="http://schemas.openxmlformats.org/officeDocument/2006/relationships" id="273" r:id="R6a0cead665214d25"/>
-    <p:sldId xmlns:r="http://schemas.openxmlformats.org/officeDocument/2006/relationships" id="274" r:id="R4c2780eeef9041dd"/>
-    <p:sldId xmlns:r="http://schemas.openxmlformats.org/officeDocument/2006/relationships" id="275" r:id="R33f5770978b743f9"/>
-    <p:sldId xmlns:r="http://schemas.openxmlformats.org/officeDocument/2006/relationships" id="276" r:id="R698610770dc74bb5"/>
-    <p:sldId xmlns:r="http://schemas.openxmlformats.org/officeDocument/2006/relationships" id="277" r:id="R25a1037079ba4109"/>
-    <p:sldId xmlns:r="http://schemas.openxmlformats.org/officeDocument/2006/relationships" id="278" r:id="Rf2d3fd44323e486b"/>
-    <p:sldId xmlns:r="http://schemas.openxmlformats.org/officeDocument/2006/relationships" id="279" r:id="Rf5336442302b42ac"/>
-    <p:sldId xmlns:r="http://schemas.openxmlformats.org/officeDocument/2006/relationships" id="280" r:id="R71b81cb4596f46d6"/>
-    <p:sldId xmlns:r="http://schemas.openxmlformats.org/officeDocument/2006/relationships" id="281" r:id="R34c4264d362646f4"/>
-    <p:sldId xmlns:r="http://schemas.openxmlformats.org/officeDocument/2006/relationships" id="282" r:id="R77d11d352233451f"/>
-    <p:sldId xmlns:r="http://schemas.openxmlformats.org/officeDocument/2006/relationships" id="283" r:id="Rdc885d4a6f3749b4"/>
-    <p:sldId xmlns:r="http://schemas.openxmlformats.org/officeDocument/2006/relationships" id="284" r:id="R7ecbec7979cd4a4d"/>
-    <p:sldId xmlns:r="http://schemas.openxmlformats.org/officeDocument/2006/relationships" id="285" r:id="Re52bc379730e41a5"/>
-    <p:sldId xmlns:r="http://schemas.openxmlformats.org/officeDocument/2006/relationships" id="286" r:id="Rba546ac1250d4b29"/>
+    <p:sldId xmlns:r="http://schemas.openxmlformats.org/officeDocument/2006/relationships" id="256" r:id="R2e2e7d4214a54802"/>
+    <p:sldId xmlns:r="http://schemas.openxmlformats.org/officeDocument/2006/relationships" id="257" r:id="Rbd377b414a0840ea"/>
+    <p:sldId xmlns:r="http://schemas.openxmlformats.org/officeDocument/2006/relationships" id="258" r:id="R890e391e25454234"/>
+    <p:sldId xmlns:r="http://schemas.openxmlformats.org/officeDocument/2006/relationships" id="259" r:id="Rf354c05140dd4105"/>
+    <p:sldId xmlns:r="http://schemas.openxmlformats.org/officeDocument/2006/relationships" id="260" r:id="R15ae1e739f5148aa"/>
+    <p:sldId xmlns:r="http://schemas.openxmlformats.org/officeDocument/2006/relationships" id="261" r:id="R31a6c5523d194ad5"/>
+    <p:sldId xmlns:r="http://schemas.openxmlformats.org/officeDocument/2006/relationships" id="262" r:id="R4c2e6c0c226f4230"/>
+    <p:sldId xmlns:r="http://schemas.openxmlformats.org/officeDocument/2006/relationships" id="263" r:id="R5cb7bc1ab54a451e"/>
+    <p:sldId xmlns:r="http://schemas.openxmlformats.org/officeDocument/2006/relationships" id="264" r:id="R9b5bc857102a49d8"/>
+    <p:sldId xmlns:r="http://schemas.openxmlformats.org/officeDocument/2006/relationships" id="265" r:id="R1078b63cb4504c07"/>
+    <p:sldId xmlns:r="http://schemas.openxmlformats.org/officeDocument/2006/relationships" id="266" r:id="R1b025873cd9b4769"/>
+    <p:sldId xmlns:r="http://schemas.openxmlformats.org/officeDocument/2006/relationships" id="267" r:id="R4a8caeb0fb664357"/>
+    <p:sldId xmlns:r="http://schemas.openxmlformats.org/officeDocument/2006/relationships" id="268" r:id="R9c3f53b9382a412e"/>
+    <p:sldId xmlns:r="http://schemas.openxmlformats.org/officeDocument/2006/relationships" id="269" r:id="Rd8e10428f0894808"/>
+    <p:sldId xmlns:r="http://schemas.openxmlformats.org/officeDocument/2006/relationships" id="270" r:id="Rc03d8d9de8734812"/>
+    <p:sldId xmlns:r="http://schemas.openxmlformats.org/officeDocument/2006/relationships" id="271" r:id="Rd5f1514c594b4b01"/>
+    <p:sldId xmlns:r="http://schemas.openxmlformats.org/officeDocument/2006/relationships" id="272" r:id="Rf81f42d6869b49f8"/>
+    <p:sldId xmlns:r="http://schemas.openxmlformats.org/officeDocument/2006/relationships" id="273" r:id="Reba9c01b23a84228"/>
+    <p:sldId xmlns:r="http://schemas.openxmlformats.org/officeDocument/2006/relationships" id="274" r:id="Rb8fef170887b42dd"/>
+    <p:sldId xmlns:r="http://schemas.openxmlformats.org/officeDocument/2006/relationships" id="275" r:id="Ra3bb16977bde415a"/>
+    <p:sldId xmlns:r="http://schemas.openxmlformats.org/officeDocument/2006/relationships" id="276" r:id="Rf58770a37c8c4d59"/>
+    <p:sldId xmlns:r="http://schemas.openxmlformats.org/officeDocument/2006/relationships" id="277" r:id="Rb7194cf94e3d4423"/>
+    <p:sldId xmlns:r="http://schemas.openxmlformats.org/officeDocument/2006/relationships" id="278" r:id="Rfca26cdb5e424b25"/>
+    <p:sldId xmlns:r="http://schemas.openxmlformats.org/officeDocument/2006/relationships" id="279" r:id="R740770566bea4bca"/>
+    <p:sldId xmlns:r="http://schemas.openxmlformats.org/officeDocument/2006/relationships" id="280" r:id="R3f073eed5a344d38"/>
+    <p:sldId xmlns:r="http://schemas.openxmlformats.org/officeDocument/2006/relationships" id="281" r:id="R0ac306db99f747cc"/>
+    <p:sldId xmlns:r="http://schemas.openxmlformats.org/officeDocument/2006/relationships" id="282" r:id="R45d5e8bebd7f41be"/>
+    <p:sldId xmlns:r="http://schemas.openxmlformats.org/officeDocument/2006/relationships" id="283" r:id="R41583a3f724f4587"/>
+    <p:sldId xmlns:r="http://schemas.openxmlformats.org/officeDocument/2006/relationships" id="284" r:id="R48e7b755b4294491"/>
+    <p:sldId xmlns:r="http://schemas.openxmlformats.org/officeDocument/2006/relationships" id="285" r:id="R4680fcd22bd94819"/>
+    <p:sldId xmlns:r="http://schemas.openxmlformats.org/officeDocument/2006/relationships" id="286" r:id="R8703efb122fe4915"/>
+    <p:sldId xmlns:r="http://schemas.openxmlformats.org/officeDocument/2006/relationships" id="287" r:id="R5754dac1c4394605"/>
+    <p:sldId xmlns:r="http://schemas.openxmlformats.org/officeDocument/2006/relationships" id="288" r:id="R5e4c0d7c984c4e18"/>
+    <p:sldId xmlns:r="http://schemas.openxmlformats.org/officeDocument/2006/relationships" id="289" r:id="R0a69a380517745c9"/>
+    <p:sldId xmlns:r="http://schemas.openxmlformats.org/officeDocument/2006/relationships" id="290" r:id="R4a101aa557264ed9"/>
+    <p:sldId xmlns:r="http://schemas.openxmlformats.org/officeDocument/2006/relationships" id="291" r:id="R51a29db170d5403e"/>
+    <p:sldId xmlns:r="http://schemas.openxmlformats.org/officeDocument/2006/relationships" id="292" r:id="Rb9a1a0e2fe2241d1"/>
+    <p:sldId xmlns:r="http://schemas.openxmlformats.org/officeDocument/2006/relationships" id="293" r:id="R144c0f611b6c4fe6"/>
+    <p:sldId xmlns:r="http://schemas.openxmlformats.org/officeDocument/2006/relationships" id="294" r:id="Rfba988c9a7b54208"/>
   </p:sldIdLst>
   <p:sldSz cx="12192000" cy="6858000"/>
   <p:notesSz cx="6858000" cy="9144000"/>
@@ -2907,6 +2915,796 @@
 </p:notes>
 </file>
 
+<file path=ppt/notesSlides/notesSlide32.xml><?xml version="1.0" encoding="utf-8"?>
+<p:notes xmlns:p="http://schemas.openxmlformats.org/presentationml/2006/main">
+  <p:cSld>
+    <p:spTree>
+      <p:nvGrpSpPr>
+        <p:cNvPr id="1" name=""/>
+        <p:cNvGrpSpPr/>
+        <p:nvPr/>
+      </p:nvGrpSpPr>
+      <p:grpSpPr>
+        <a:xfrm xmlns:a="http://schemas.openxmlformats.org/drawingml/2006/main"/>
+      </p:grpSpPr>
+      <p:sp>
+        <p:nvSpPr>
+          <p:cNvPr id="2" name="Slide Image Placeholder 1"/>
+          <p:cNvSpPr>
+            <a:spLocks xmlns:a="http://schemas.openxmlformats.org/drawingml/2006/main" noGrp="1"/>
+          </p:cNvSpPr>
+          <p:nvPr>
+            <p:ph type="sldImg" idx="0"/>
+          </p:nvPr>
+        </p:nvSpPr>
+        <p:spPr/>
+      </p:sp>
+      <p:sp>
+        <p:nvSpPr>
+          <p:cNvPr id="3" name="Notes Placeholder 2"/>
+          <p:cNvSpPr>
+            <a:spLocks xmlns:a="http://schemas.openxmlformats.org/drawingml/2006/main" noGrp="1"/>
+          </p:cNvSpPr>
+          <p:nvPr>
+            <p:ph type="body" idx="1"/>
+          </p:nvPr>
+        </p:nvSpPr>
+        <p:spPr/>
+        <p:txBody>
+          <a:bodyPr xmlns:a="http://schemas.openxmlformats.org/drawingml/2006/main"/>
+          <a:lstStyle xmlns:a="http://schemas.openxmlformats.org/drawingml/2006/main"/>
+          <a:p xmlns:a="http://schemas.openxmlformats.org/drawingml/2006/main">
+            <a:r>
+              <a:t>This section changes one authority only. TSLA still supplies every prior and following return. SPY supplies the already accepted causal ATR-percent state at the anchor close.</a:t>
+            </a:r>
+          </a:p>
+          <a:p xmlns:a="http://schemas.openxmlformats.org/drawingml/2006/main">
+            <a:r>
+              <a:t/>
+            </a:r>
+          </a:p>
+          <a:p xmlns:a="http://schemas.openxmlformats.org/drawingml/2006/main">
+            <a:r>
+              <a:t>[Sources]</a:t>
+            </a:r>
+          </a:p>
+          <a:p xmlns:a="http://schemas.openxmlformats.org/drawingml/2006/main">
+            <a:r>
+              <a:t>- runs/research_workbench/operator_hypothesis_lab/tsla_spy_atrp_conditioned_return_horizon_grid_20260825/run_spec.csv</a:t>
+            </a:r>
+          </a:p>
+          <a:p xmlns:a="http://schemas.openxmlformats.org/drawingml/2006/main">
+            <a:r>
+              <a:t>- runs/research_workbench/operator_hypothesis_lab/hyp_reg_01_1_atr_percent_20260814/hyp_reg_01_1_daily_state_ledger.csv</a:t>
+            </a:r>
+          </a:p>
+          <a:p xmlns:a="http://schemas.openxmlformats.org/drawingml/2006/main">
+            <a:r>
+              <a:t>[/Sources]</a:t>
+            </a:r>
+          </a:p>
+        </p:txBody>
+      </p:sp>
+      <p:sp>
+        <p:nvSpPr>
+          <p:cNvPr id="4" name="Slide Number Placeholder 3"/>
+          <p:cNvSpPr>
+            <a:spLocks xmlns:a="http://schemas.openxmlformats.org/drawingml/2006/main" noGrp="1"/>
+          </p:cNvSpPr>
+          <p:nvPr>
+            <p:ph type="sldNum" idx="5"/>
+          </p:nvPr>
+        </p:nvSpPr>
+        <p:spPr/>
+        <p:txBody>
+          <a:bodyPr xmlns:a="http://schemas.openxmlformats.org/drawingml/2006/main"/>
+          <a:lstStyle xmlns:a="http://schemas.openxmlformats.org/drawingml/2006/main"/>
+          <a:p xmlns:a="http://schemas.openxmlformats.org/drawingml/2006/main"/>
+        </p:txBody>
+      </p:sp>
+    </p:spTree>
+  </p:cSld>
+  <p:clrMapOvr>
+    <a:masterClrMapping xmlns:a="http://schemas.openxmlformats.org/drawingml/2006/main"/>
+  </p:clrMapOvr>
+</p:notes>
+</file>
+
+<file path=ppt/notesSlides/notesSlide33.xml><?xml version="1.0" encoding="utf-8"?>
+<p:notes xmlns:p="http://schemas.openxmlformats.org/presentationml/2006/main">
+  <p:cSld>
+    <p:spTree>
+      <p:nvGrpSpPr>
+        <p:cNvPr id="1" name=""/>
+        <p:cNvGrpSpPr/>
+        <p:nvPr/>
+      </p:nvGrpSpPr>
+      <p:grpSpPr>
+        <a:xfrm xmlns:a="http://schemas.openxmlformats.org/drawingml/2006/main"/>
+      </p:grpSpPr>
+      <p:sp>
+        <p:nvSpPr>
+          <p:cNvPr id="2" name="Slide Image Placeholder 1"/>
+          <p:cNvSpPr>
+            <a:spLocks xmlns:a="http://schemas.openxmlformats.org/drawingml/2006/main" noGrp="1"/>
+          </p:cNvSpPr>
+          <p:nvPr>
+            <p:ph type="sldImg" idx="0"/>
+          </p:nvPr>
+        </p:nvSpPr>
+        <p:spPr/>
+      </p:sp>
+      <p:sp>
+        <p:nvSpPr>
+          <p:cNvPr id="3" name="Notes Placeholder 2"/>
+          <p:cNvSpPr>
+            <a:spLocks xmlns:a="http://schemas.openxmlformats.org/drawingml/2006/main" noGrp="1"/>
+          </p:cNvSpPr>
+          <p:nvPr>
+            <p:ph type="body" idx="1"/>
+          </p:nvPr>
+        </p:nvSpPr>
+        <p:spPr/>
+        <p:txBody>
+          <a:bodyPr xmlns:a="http://schemas.openxmlformats.org/drawingml/2006/main"/>
+          <a:lstStyle xmlns:a="http://schemas.openxmlformats.org/drawingml/2006/main"/>
+          <a:p xmlns:a="http://schemas.openxmlformats.org/drawingml/2006/main">
+            <a:r>
+              <a:t>The SPY classifier is reused exactly: Wilder ATR14 divided by adjusted close, prior-252 causal percentile, and 30/40 plus 60/70 hysteresis. No state definition or horizon changes after seeing TSLA returns.</a:t>
+            </a:r>
+          </a:p>
+          <a:p xmlns:a="http://schemas.openxmlformats.org/drawingml/2006/main">
+            <a:r>
+              <a:t/>
+            </a:r>
+          </a:p>
+          <a:p xmlns:a="http://schemas.openxmlformats.org/drawingml/2006/main">
+            <a:r>
+              <a:t>[Sources]</a:t>
+            </a:r>
+          </a:p>
+          <a:p xmlns:a="http://schemas.openxmlformats.org/drawingml/2006/main">
+            <a:r>
+              <a:t>- runs/research_workbench/operator_hypothesis_lab/tsla_spy_atrp_conditioned_return_horizon_grid_20260825/run_spec.csv</a:t>
+            </a:r>
+          </a:p>
+          <a:p xmlns:a="http://schemas.openxmlformats.org/drawingml/2006/main">
+            <a:r>
+              <a:t>- runs/research_workbench/operator_hypothesis_lab/tsla_spy_atrp_conditioned_return_horizon_grid_20260825/source_checks.csv</a:t>
+            </a:r>
+          </a:p>
+          <a:p xmlns:a="http://schemas.openxmlformats.org/drawingml/2006/main">
+            <a:r>
+              <a:t>- runs/research_workbench/operator_hypothesis_lab/hyp_reg_01_1_atr_percent_20260814/hyp_reg_01_1_daily_state_ledger.csv</a:t>
+            </a:r>
+          </a:p>
+          <a:p xmlns:a="http://schemas.openxmlformats.org/drawingml/2006/main">
+            <a:r>
+              <a:t>[/Sources]</a:t>
+            </a:r>
+          </a:p>
+        </p:txBody>
+      </p:sp>
+      <p:sp>
+        <p:nvSpPr>
+          <p:cNvPr id="4" name="Slide Number Placeholder 3"/>
+          <p:cNvSpPr>
+            <a:spLocks xmlns:a="http://schemas.openxmlformats.org/drawingml/2006/main" noGrp="1"/>
+          </p:cNvSpPr>
+          <p:nvPr>
+            <p:ph type="sldNum" idx="5"/>
+          </p:nvPr>
+        </p:nvSpPr>
+        <p:spPr/>
+        <p:txBody>
+          <a:bodyPr xmlns:a="http://schemas.openxmlformats.org/drawingml/2006/main"/>
+          <a:lstStyle xmlns:a="http://schemas.openxmlformats.org/drawingml/2006/main"/>
+          <a:p xmlns:a="http://schemas.openxmlformats.org/drawingml/2006/main"/>
+        </p:txBody>
+      </p:sp>
+    </p:spTree>
+  </p:cSld>
+  <p:clrMapOvr>
+    <a:masterClrMapping xmlns:a="http://schemas.openxmlformats.org/drawingml/2006/main"/>
+  </p:clrMapOvr>
+</p:notes>
+</file>
+
+<file path=ppt/notesSlides/notesSlide34.xml><?xml version="1.0" encoding="utf-8"?>
+<p:notes xmlns:p="http://schemas.openxmlformats.org/presentationml/2006/main">
+  <p:cSld>
+    <p:spTree>
+      <p:nvGrpSpPr>
+        <p:cNvPr id="1" name=""/>
+        <p:cNvGrpSpPr/>
+        <p:nvPr/>
+      </p:nvGrpSpPr>
+      <p:grpSpPr>
+        <a:xfrm xmlns:a="http://schemas.openxmlformats.org/drawingml/2006/main"/>
+      </p:grpSpPr>
+      <p:sp>
+        <p:nvSpPr>
+          <p:cNvPr id="2" name="Slide Image Placeholder 1"/>
+          <p:cNvSpPr>
+            <a:spLocks xmlns:a="http://schemas.openxmlformats.org/drawingml/2006/main" noGrp="1"/>
+          </p:cNvSpPr>
+          <p:nvPr>
+            <p:ph type="sldImg" idx="0"/>
+          </p:nvPr>
+        </p:nvSpPr>
+        <p:spPr/>
+      </p:sp>
+      <p:sp>
+        <p:nvSpPr>
+          <p:cNvPr id="3" name="Notes Placeholder 2"/>
+          <p:cNvSpPr>
+            <a:spLocks xmlns:a="http://schemas.openxmlformats.org/drawingml/2006/main" noGrp="1"/>
+          </p:cNvSpPr>
+          <p:nvPr>
+            <p:ph type="body" idx="1"/>
+          </p:nvPr>
+        </p:nvSpPr>
+        <p:spPr/>
+        <p:txBody>
+          <a:bodyPr xmlns:a="http://schemas.openxmlformats.org/drawingml/2006/main"/>
+          <a:lstStyle xmlns:a="http://schemas.openxmlformats.org/drawingml/2006/main"/>
+          <a:p xmlns:a="http://schemas.openxmlformats.org/drawingml/2006/main">
+            <a:r>
+              <a:t>The price stays TSLA, while every colored band and the lower-panel percentile come from SPY. This visual checks alignment in time; it does not claim that SPY state causes TSLA returns.</a:t>
+            </a:r>
+          </a:p>
+          <a:p xmlns:a="http://schemas.openxmlformats.org/drawingml/2006/main">
+            <a:r>
+              <a:t/>
+            </a:r>
+          </a:p>
+          <a:p xmlns:a="http://schemas.openxmlformats.org/drawingml/2006/main">
+            <a:r>
+              <a:t>[Sources]</a:t>
+            </a:r>
+          </a:p>
+          <a:p xmlns:a="http://schemas.openxmlformats.org/drawingml/2006/main">
+            <a:r>
+              <a:t>- runs/research_workbench/operator_hypothesis_lab/tsla_spy_atrp_conditioned_return_horizon_grid_20260825/visuals/tsla_spy_atrp_state_price_bands.png</a:t>
+            </a:r>
+          </a:p>
+          <a:p xmlns:a="http://schemas.openxmlformats.org/drawingml/2006/main">
+            <a:r>
+              <a:t>- runs/research_workbench/operator_hypothesis_lab/tsla_spy_atrp_conditioned_return_horizon_grid_20260825/tsla_spy_atrp_state_chart_ledger.csv</a:t>
+            </a:r>
+          </a:p>
+          <a:p xmlns:a="http://schemas.openxmlformats.org/drawingml/2006/main">
+            <a:r>
+              <a:t>- runs/research_workbench/operator_hypothesis_lab/tsla_spy_atrp_conditioned_return_horizon_grid_20260825/tsla_spy_atrp_state_spans.csv</a:t>
+            </a:r>
+          </a:p>
+          <a:p xmlns:a="http://schemas.openxmlformats.org/drawingml/2006/main">
+            <a:r>
+              <a:t>- runs/research_workbench/operator_hypothesis_lab/hyp_reg_01_1_atr_percent_20260814/hyp_reg_01_1_daily_state_ledger.csv</a:t>
+            </a:r>
+          </a:p>
+          <a:p xmlns:a="http://schemas.openxmlformats.org/drawingml/2006/main">
+            <a:r>
+              <a:t>[/Sources]</a:t>
+            </a:r>
+          </a:p>
+        </p:txBody>
+      </p:sp>
+      <p:sp>
+        <p:nvSpPr>
+          <p:cNvPr id="4" name="Slide Number Placeholder 3"/>
+          <p:cNvSpPr>
+            <a:spLocks xmlns:a="http://schemas.openxmlformats.org/drawingml/2006/main" noGrp="1"/>
+          </p:cNvSpPr>
+          <p:nvPr>
+            <p:ph type="sldNum" idx="5"/>
+          </p:nvPr>
+        </p:nvSpPr>
+        <p:spPr/>
+        <p:txBody>
+          <a:bodyPr xmlns:a="http://schemas.openxmlformats.org/drawingml/2006/main"/>
+          <a:lstStyle xmlns:a="http://schemas.openxmlformats.org/drawingml/2006/main"/>
+          <a:p xmlns:a="http://schemas.openxmlformats.org/drawingml/2006/main"/>
+        </p:txBody>
+      </p:sp>
+    </p:spTree>
+  </p:cSld>
+  <p:clrMapOvr>
+    <a:masterClrMapping xmlns:a="http://schemas.openxmlformats.org/drawingml/2006/main"/>
+  </p:clrMapOvr>
+</p:notes>
+</file>
+
+<file path=ppt/notesSlides/notesSlide35.xml><?xml version="1.0" encoding="utf-8"?>
+<p:notes xmlns:p="http://schemas.openxmlformats.org/presentationml/2006/main">
+  <p:cSld>
+    <p:spTree>
+      <p:nvGrpSpPr>
+        <p:cNvPr id="1" name=""/>
+        <p:cNvGrpSpPr/>
+        <p:nvPr/>
+      </p:nvGrpSpPr>
+      <p:grpSpPr>
+        <a:xfrm xmlns:a="http://schemas.openxmlformats.org/drawingml/2006/main"/>
+      </p:grpSpPr>
+      <p:sp>
+        <p:nvSpPr>
+          <p:cNvPr id="2" name="Slide Image Placeholder 1"/>
+          <p:cNvSpPr>
+            <a:spLocks xmlns:a="http://schemas.openxmlformats.org/drawingml/2006/main" noGrp="1"/>
+          </p:cNvSpPr>
+          <p:nvPr>
+            <p:ph type="sldImg" idx="0"/>
+          </p:nvPr>
+        </p:nvSpPr>
+        <p:spPr/>
+      </p:sp>
+      <p:sp>
+        <p:nvSpPr>
+          <p:cNvPr id="3" name="Notes Placeholder 2"/>
+          <p:cNvSpPr>
+            <a:spLocks xmlns:a="http://schemas.openxmlformats.org/drawingml/2006/main" noGrp="1"/>
+          </p:cNvSpPr>
+          <p:nvPr>
+            <p:ph type="body" idx="1"/>
+          </p:nvPr>
+        </p:nvSpPr>
+        <p:spPr/>
+        <p:txBody>
+          <a:bodyPr xmlns:a="http://schemas.openxmlformats.org/drawingml/2006/main"/>
+          <a:lstStyle xmlns:a="http://schemas.openxmlformats.org/drawingml/2006/main"/>
+          <a:p xmlns:a="http://schemas.openxmlformats.org/drawingml/2006/main">
+            <a:r>
+              <a:t>SPY LOW ATR-percent sessions contain the clearest TSLA continuation geometry. The pattern is broad, but no single within-state cell survives its 81-cell BH-FDR family.</a:t>
+            </a:r>
+          </a:p>
+          <a:p xmlns:a="http://schemas.openxmlformats.org/drawingml/2006/main">
+            <a:r>
+              <a:t/>
+            </a:r>
+          </a:p>
+          <a:p xmlns:a="http://schemas.openxmlformats.org/drawingml/2006/main">
+            <a:r>
+              <a:t>[Sources]</a:t>
+            </a:r>
+          </a:p>
+          <a:p xmlns:a="http://schemas.openxmlformats.org/drawingml/2006/main">
+            <a:r>
+              <a:t>- runs/research_workbench/operator_hypothesis_lab/tsla_spy_atrp_conditioned_return_horizon_grid_20260825/visuals/tsla_spy_atrp_low_pearson_heatmap.png</a:t>
+            </a:r>
+          </a:p>
+          <a:p xmlns:a="http://schemas.openxmlformats.org/drawingml/2006/main">
+            <a:r>
+              <a:t>- runs/research_workbench/operator_hypothesis_lab/tsla_spy_atrp_conditioned_return_horizon_grid_20260825/conditioned_horizon_grid_statistics.csv</a:t>
+            </a:r>
+          </a:p>
+          <a:p xmlns:a="http://schemas.openxmlformats.org/drawingml/2006/main">
+            <a:r>
+              <a:t>[/Sources]</a:t>
+            </a:r>
+          </a:p>
+        </p:txBody>
+      </p:sp>
+      <p:sp>
+        <p:nvSpPr>
+          <p:cNvPr id="4" name="Slide Number Placeholder 3"/>
+          <p:cNvSpPr>
+            <a:spLocks xmlns:a="http://schemas.openxmlformats.org/drawingml/2006/main" noGrp="1"/>
+          </p:cNvSpPr>
+          <p:nvPr>
+            <p:ph type="sldNum" idx="5"/>
+          </p:nvPr>
+        </p:nvSpPr>
+        <p:spPr/>
+        <p:txBody>
+          <a:bodyPr xmlns:a="http://schemas.openxmlformats.org/drawingml/2006/main"/>
+          <a:lstStyle xmlns:a="http://schemas.openxmlformats.org/drawingml/2006/main"/>
+          <a:p xmlns:a="http://schemas.openxmlformats.org/drawingml/2006/main"/>
+        </p:txBody>
+      </p:sp>
+    </p:spTree>
+  </p:cSld>
+  <p:clrMapOvr>
+    <a:masterClrMapping xmlns:a="http://schemas.openxmlformats.org/drawingml/2006/main"/>
+  </p:clrMapOvr>
+</p:notes>
+</file>
+
+<file path=ppt/notesSlides/notesSlide36.xml><?xml version="1.0" encoding="utf-8"?>
+<p:notes xmlns:p="http://schemas.openxmlformats.org/presentationml/2006/main">
+  <p:cSld>
+    <p:spTree>
+      <p:nvGrpSpPr>
+        <p:cNvPr id="1" name=""/>
+        <p:cNvGrpSpPr/>
+        <p:nvPr/>
+      </p:nvGrpSpPr>
+      <p:grpSpPr>
+        <a:xfrm xmlns:a="http://schemas.openxmlformats.org/drawingml/2006/main"/>
+      </p:grpSpPr>
+      <p:sp>
+        <p:nvSpPr>
+          <p:cNvPr id="2" name="Slide Image Placeholder 1"/>
+          <p:cNvSpPr>
+            <a:spLocks xmlns:a="http://schemas.openxmlformats.org/drawingml/2006/main" noGrp="1"/>
+          </p:cNvSpPr>
+          <p:nvPr>
+            <p:ph type="sldImg" idx="0"/>
+          </p:nvPr>
+        </p:nvSpPr>
+        <p:spPr/>
+      </p:sp>
+      <p:sp>
+        <p:nvSpPr>
+          <p:cNvPr id="3" name="Notes Placeholder 2"/>
+          <p:cNvSpPr>
+            <a:spLocks xmlns:a="http://schemas.openxmlformats.org/drawingml/2006/main" noGrp="1"/>
+          </p:cNvSpPr>
+          <p:nvPr>
+            <p:ph type="body" idx="1"/>
+          </p:nvPr>
+        </p:nvSpPr>
+        <p:spPr/>
+        <p:txBody>
+          <a:bodyPr xmlns:a="http://schemas.openxmlformats.org/drawingml/2006/main"/>
+          <a:lstStyle xmlns:a="http://schemas.openxmlformats.org/drawingml/2006/main"/>
+          <a:p xmlns:a="http://schemas.openxmlformats.org/drawingml/2006/main">
+            <a:r>
+              <a:t>SPY MEDIUM ATR-percent sessions reverse the long-forward portion of the TSLA map. This differs sharply from TSLA's own MEDIUM state, which held the earlier positive continuation island.</a:t>
+            </a:r>
+          </a:p>
+          <a:p xmlns:a="http://schemas.openxmlformats.org/drawingml/2006/main">
+            <a:r>
+              <a:t/>
+            </a:r>
+          </a:p>
+          <a:p xmlns:a="http://schemas.openxmlformats.org/drawingml/2006/main">
+            <a:r>
+              <a:t>[Sources]</a:t>
+            </a:r>
+          </a:p>
+          <a:p xmlns:a="http://schemas.openxmlformats.org/drawingml/2006/main">
+            <a:r>
+              <a:t>- runs/research_workbench/operator_hypothesis_lab/tsla_spy_atrp_conditioned_return_horizon_grid_20260825/visuals/tsla_spy_atrp_medium_pearson_heatmap.png</a:t>
+            </a:r>
+          </a:p>
+          <a:p xmlns:a="http://schemas.openxmlformats.org/drawingml/2006/main">
+            <a:r>
+              <a:t>- runs/research_workbench/operator_hypothesis_lab/tsla_spy_atrp_conditioned_return_horizon_grid_20260825/conditioned_horizon_grid_statistics.csv</a:t>
+            </a:r>
+          </a:p>
+          <a:p xmlns:a="http://schemas.openxmlformats.org/drawingml/2006/main">
+            <a:r>
+              <a:t>- runs/research_workbench/operator_hypothesis_lab/tsla_spy_atrp_conditioned_return_horizon_grid_20260825/own_vs_external_atrp_map_summary.csv</a:t>
+            </a:r>
+          </a:p>
+          <a:p xmlns:a="http://schemas.openxmlformats.org/drawingml/2006/main">
+            <a:r>
+              <a:t>[/Sources]</a:t>
+            </a:r>
+          </a:p>
+        </p:txBody>
+      </p:sp>
+      <p:sp>
+        <p:nvSpPr>
+          <p:cNvPr id="4" name="Slide Number Placeholder 3"/>
+          <p:cNvSpPr>
+            <a:spLocks xmlns:a="http://schemas.openxmlformats.org/drawingml/2006/main" noGrp="1"/>
+          </p:cNvSpPr>
+          <p:nvPr>
+            <p:ph type="sldNum" idx="5"/>
+          </p:nvPr>
+        </p:nvSpPr>
+        <p:spPr/>
+        <p:txBody>
+          <a:bodyPr xmlns:a="http://schemas.openxmlformats.org/drawingml/2006/main"/>
+          <a:lstStyle xmlns:a="http://schemas.openxmlformats.org/drawingml/2006/main"/>
+          <a:p xmlns:a="http://schemas.openxmlformats.org/drawingml/2006/main"/>
+        </p:txBody>
+      </p:sp>
+    </p:spTree>
+  </p:cSld>
+  <p:clrMapOvr>
+    <a:masterClrMapping xmlns:a="http://schemas.openxmlformats.org/drawingml/2006/main"/>
+  </p:clrMapOvr>
+</p:notes>
+</file>
+
+<file path=ppt/notesSlides/notesSlide37.xml><?xml version="1.0" encoding="utf-8"?>
+<p:notes xmlns:p="http://schemas.openxmlformats.org/presentationml/2006/main">
+  <p:cSld>
+    <p:spTree>
+      <p:nvGrpSpPr>
+        <p:cNvPr id="1" name=""/>
+        <p:cNvGrpSpPr/>
+        <p:nvPr/>
+      </p:nvGrpSpPr>
+      <p:grpSpPr>
+        <a:xfrm xmlns:a="http://schemas.openxmlformats.org/drawingml/2006/main"/>
+      </p:grpSpPr>
+      <p:sp>
+        <p:nvSpPr>
+          <p:cNvPr id="2" name="Slide Image Placeholder 1"/>
+          <p:cNvSpPr>
+            <a:spLocks xmlns:a="http://schemas.openxmlformats.org/drawingml/2006/main" noGrp="1"/>
+          </p:cNvSpPr>
+          <p:nvPr>
+            <p:ph type="sldImg" idx="0"/>
+          </p:nvPr>
+        </p:nvSpPr>
+        <p:spPr/>
+      </p:sp>
+      <p:sp>
+        <p:nvSpPr>
+          <p:cNvPr id="3" name="Notes Placeholder 2"/>
+          <p:cNvSpPr>
+            <a:spLocks xmlns:a="http://schemas.openxmlformats.org/drawingml/2006/main" noGrp="1"/>
+          </p:cNvSpPr>
+          <p:nvPr>
+            <p:ph type="body" idx="1"/>
+          </p:nvPr>
+        </p:nvSpPr>
+        <p:spPr/>
+        <p:txBody>
+          <a:bodyPr xmlns:a="http://schemas.openxmlformats.org/drawingml/2006/main"/>
+          <a:lstStyle xmlns:a="http://schemas.openxmlformats.org/drawingml/2006/main"/>
+          <a:p xmlns:a="http://schemas.openxmlformats.org/drawingml/2006/main">
+            <a:r>
+              <a:t>SPY HIGH ATR-percent does not reproduce the broad reversal seen under TSLA's own HIGH ATR-percent state. Most cells are mildly positive, with a small negative corner at the longest prior horizons.</a:t>
+            </a:r>
+          </a:p>
+          <a:p xmlns:a="http://schemas.openxmlformats.org/drawingml/2006/main">
+            <a:r>
+              <a:t/>
+            </a:r>
+          </a:p>
+          <a:p xmlns:a="http://schemas.openxmlformats.org/drawingml/2006/main">
+            <a:r>
+              <a:t>[Sources]</a:t>
+            </a:r>
+          </a:p>
+          <a:p xmlns:a="http://schemas.openxmlformats.org/drawingml/2006/main">
+            <a:r>
+              <a:t>- runs/research_workbench/operator_hypothesis_lab/tsla_spy_atrp_conditioned_return_horizon_grid_20260825/visuals/tsla_spy_atrp_high_pearson_heatmap.png</a:t>
+            </a:r>
+          </a:p>
+          <a:p xmlns:a="http://schemas.openxmlformats.org/drawingml/2006/main">
+            <a:r>
+              <a:t>- runs/research_workbench/operator_hypothesis_lab/tsla_spy_atrp_conditioned_return_horizon_grid_20260825/conditioned_horizon_grid_statistics.csv</a:t>
+            </a:r>
+          </a:p>
+          <a:p xmlns:a="http://schemas.openxmlformats.org/drawingml/2006/main">
+            <a:r>
+              <a:t>- runs/research_workbench/operator_hypothesis_lab/tsla_spy_atrp_conditioned_return_horizon_grid_20260825/own_vs_external_atrp_map_summary.csv</a:t>
+            </a:r>
+          </a:p>
+          <a:p xmlns:a="http://schemas.openxmlformats.org/drawingml/2006/main">
+            <a:r>
+              <a:t>[/Sources]</a:t>
+            </a:r>
+          </a:p>
+        </p:txBody>
+      </p:sp>
+      <p:sp>
+        <p:nvSpPr>
+          <p:cNvPr id="4" name="Slide Number Placeholder 3"/>
+          <p:cNvSpPr>
+            <a:spLocks xmlns:a="http://schemas.openxmlformats.org/drawingml/2006/main" noGrp="1"/>
+          </p:cNvSpPr>
+          <p:nvPr>
+            <p:ph type="sldNum" idx="5"/>
+          </p:nvPr>
+        </p:nvSpPr>
+        <p:spPr/>
+        <p:txBody>
+          <a:bodyPr xmlns:a="http://schemas.openxmlformats.org/drawingml/2006/main"/>
+          <a:lstStyle xmlns:a="http://schemas.openxmlformats.org/drawingml/2006/main"/>
+          <a:p xmlns:a="http://schemas.openxmlformats.org/drawingml/2006/main"/>
+        </p:txBody>
+      </p:sp>
+    </p:spTree>
+  </p:cSld>
+  <p:clrMapOvr>
+    <a:masterClrMapping xmlns:a="http://schemas.openxmlformats.org/drawingml/2006/main"/>
+  </p:clrMapOvr>
+</p:notes>
+</file>
+
+<file path=ppt/notesSlides/notesSlide38.xml><?xml version="1.0" encoding="utf-8"?>
+<p:notes xmlns:p="http://schemas.openxmlformats.org/presentationml/2006/main">
+  <p:cSld>
+    <p:spTree>
+      <p:nvGrpSpPr>
+        <p:cNvPr id="1" name=""/>
+        <p:cNvGrpSpPr/>
+        <p:nvPr/>
+      </p:nvGrpSpPr>
+      <p:grpSpPr>
+        <a:xfrm xmlns:a="http://schemas.openxmlformats.org/drawingml/2006/main"/>
+      </p:grpSpPr>
+      <p:sp>
+        <p:nvSpPr>
+          <p:cNvPr id="2" name="Slide Image Placeholder 1"/>
+          <p:cNvSpPr>
+            <a:spLocks xmlns:a="http://schemas.openxmlformats.org/drawingml/2006/main" noGrp="1"/>
+          </p:cNvSpPr>
+          <p:nvPr>
+            <p:ph type="sldImg" idx="0"/>
+          </p:nvPr>
+        </p:nvSpPr>
+        <p:spPr/>
+      </p:sp>
+      <p:sp>
+        <p:nvSpPr>
+          <p:cNvPr id="3" name="Notes Placeholder 2"/>
+          <p:cNvSpPr>
+            <a:spLocks xmlns:a="http://schemas.openxmlformats.org/drawingml/2006/main" noGrp="1"/>
+          </p:cNvSpPr>
+          <p:nvPr>
+            <p:ph type="body" idx="1"/>
+          </p:nvPr>
+        </p:nvSpPr>
+        <p:spPr/>
+        <p:txBody>
+          <a:bodyPr xmlns:a="http://schemas.openxmlformats.org/drawingml/2006/main"/>
+          <a:lstStyle xmlns:a="http://schemas.openxmlformats.org/drawingml/2006/main"/>
+          <a:p xmlns:a="http://schemas.openxmlformats.org/drawingml/2006/main">
+            <a:r>
+              <a:t>The largest direct contrast is LOW continuation versus MEDIUM reversal at 5 prior and 15 forward sessions. Three neighboring MEDIUM-minus-LOW interactions survive their 81-cell family correction, but no pairwise interaction survives the stricter 486-test omnibus correction.</a:t>
+            </a:r>
+          </a:p>
+          <a:p xmlns:a="http://schemas.openxmlformats.org/drawingml/2006/main">
+            <a:r>
+              <a:t/>
+            </a:r>
+          </a:p>
+          <a:p xmlns:a="http://schemas.openxmlformats.org/drawingml/2006/main">
+            <a:r>
+              <a:t>[Sources]</a:t>
+            </a:r>
+          </a:p>
+          <a:p xmlns:a="http://schemas.openxmlformats.org/drawingml/2006/main">
+            <a:r>
+              <a:t>- runs/research_workbench/operator_hypothesis_lab/tsla_spy_atrp_conditioned_return_horizon_grid_20260825/visuals/tsla_spy_atrp_medium_minus_low_pearson_heatmap.png</a:t>
+            </a:r>
+          </a:p>
+          <a:p xmlns:a="http://schemas.openxmlformats.org/drawingml/2006/main">
+            <a:r>
+              <a:t>- runs/research_workbench/operator_hypothesis_lab/tsla_spy_atrp_conditioned_return_horizon_grid_20260825/pairwise_state_comparison_statistics.csv</a:t>
+            </a:r>
+          </a:p>
+          <a:p xmlns:a="http://schemas.openxmlformats.org/drawingml/2006/main">
+            <a:r>
+              <a:t>[/Sources]</a:t>
+            </a:r>
+          </a:p>
+        </p:txBody>
+      </p:sp>
+      <p:sp>
+        <p:nvSpPr>
+          <p:cNvPr id="4" name="Slide Number Placeholder 3"/>
+          <p:cNvSpPr>
+            <a:spLocks xmlns:a="http://schemas.openxmlformats.org/drawingml/2006/main" noGrp="1"/>
+          </p:cNvSpPr>
+          <p:nvPr>
+            <p:ph type="sldNum" idx="5"/>
+          </p:nvPr>
+        </p:nvSpPr>
+        <p:spPr/>
+        <p:txBody>
+          <a:bodyPr xmlns:a="http://schemas.openxmlformats.org/drawingml/2006/main"/>
+          <a:lstStyle xmlns:a="http://schemas.openxmlformats.org/drawingml/2006/main"/>
+          <a:p xmlns:a="http://schemas.openxmlformats.org/drawingml/2006/main"/>
+        </p:txBody>
+      </p:sp>
+    </p:spTree>
+  </p:cSld>
+  <p:clrMapOvr>
+    <a:masterClrMapping xmlns:a="http://schemas.openxmlformats.org/drawingml/2006/main"/>
+  </p:clrMapOvr>
+</p:notes>
+</file>
+
+<file path=ppt/notesSlides/notesSlide39.xml><?xml version="1.0" encoding="utf-8"?>
+<p:notes xmlns:p="http://schemas.openxmlformats.org/presentationml/2006/main">
+  <p:cSld>
+    <p:spTree>
+      <p:nvGrpSpPr>
+        <p:cNvPr id="1" name=""/>
+        <p:cNvGrpSpPr/>
+        <p:nvPr/>
+      </p:nvGrpSpPr>
+      <p:grpSpPr>
+        <a:xfrm xmlns:a="http://schemas.openxmlformats.org/drawingml/2006/main"/>
+      </p:grpSpPr>
+      <p:sp>
+        <p:nvSpPr>
+          <p:cNvPr id="2" name="Slide Image Placeholder 1"/>
+          <p:cNvSpPr>
+            <a:spLocks xmlns:a="http://schemas.openxmlformats.org/drawingml/2006/main" noGrp="1"/>
+          </p:cNvSpPr>
+          <p:nvPr>
+            <p:ph type="sldImg" idx="0"/>
+          </p:nvPr>
+        </p:nvSpPr>
+        <p:spPr/>
+      </p:sp>
+      <p:sp>
+        <p:nvSpPr>
+          <p:cNvPr id="3" name="Notes Placeholder 2"/>
+          <p:cNvSpPr>
+            <a:spLocks xmlns:a="http://schemas.openxmlformats.org/drawingml/2006/main" noGrp="1"/>
+          </p:cNvSpPr>
+          <p:nvPr>
+            <p:ph type="body" idx="1"/>
+          </p:nvPr>
+        </p:nvSpPr>
+        <p:spPr/>
+        <p:txBody>
+          <a:bodyPr xmlns:a="http://schemas.openxmlformats.org/drawingml/2006/main"/>
+          <a:lstStyle xmlns:a="http://schemas.openxmlformats.org/drawingml/2006/main"/>
+          <a:p xmlns:a="http://schemas.openxmlformats.org/drawingml/2006/main">
+            <a:r>
+              <a:t>External SPY conditioning is coherent enough to justify more descriptive cross-sectional brainstorming, but it does not confirm an edge. LOW is the most portable geometry; MEDIUM changes almost completely; HIGH keeps a related ordering while most signs shift.</a:t>
+            </a:r>
+          </a:p>
+          <a:p xmlns:a="http://schemas.openxmlformats.org/drawingml/2006/main">
+            <a:r>
+              <a:t/>
+            </a:r>
+          </a:p>
+          <a:p xmlns:a="http://schemas.openxmlformats.org/drawingml/2006/main">
+            <a:r>
+              <a:t>[Sources]</a:t>
+            </a:r>
+          </a:p>
+          <a:p xmlns:a="http://schemas.openxmlformats.org/drawingml/2006/main">
+            <a:r>
+              <a:t>- runs/research_workbench/operator_hypothesis_lab/tsla_spy_atrp_conditioned_return_horizon_grid_20260825/own_vs_external_atrp_map_summary.csv</a:t>
+            </a:r>
+          </a:p>
+          <a:p xmlns:a="http://schemas.openxmlformats.org/drawingml/2006/main">
+            <a:r>
+              <a:t>- runs/research_workbench/operator_hypothesis_lab/tsla_spy_atrp_conditioned_return_horizon_grid_20260825/report.md</a:t>
+            </a:r>
+          </a:p>
+          <a:p xmlns:a="http://schemas.openxmlformats.org/drawingml/2006/main">
+            <a:r>
+              <a:t>- runs/research_workbench/operator_hypothesis_lab/tsla_atrp_conditioned_return_horizon_grid_20260825/conditioned_horizon_grid_statistics.csv</a:t>
+            </a:r>
+          </a:p>
+          <a:p xmlns:a="http://schemas.openxmlformats.org/drawingml/2006/main">
+            <a:r>
+              <a:t>[/Sources]</a:t>
+            </a:r>
+          </a:p>
+        </p:txBody>
+      </p:sp>
+      <p:sp>
+        <p:nvSpPr>
+          <p:cNvPr id="4" name="Slide Number Placeholder 3"/>
+          <p:cNvSpPr>
+            <a:spLocks xmlns:a="http://schemas.openxmlformats.org/drawingml/2006/main" noGrp="1"/>
+          </p:cNvSpPr>
+          <p:nvPr>
+            <p:ph type="sldNum" idx="5"/>
+          </p:nvPr>
+        </p:nvSpPr>
+        <p:spPr/>
+        <p:txBody>
+          <a:bodyPr xmlns:a="http://schemas.openxmlformats.org/drawingml/2006/main"/>
+          <a:lstStyle xmlns:a="http://schemas.openxmlformats.org/drawingml/2006/main"/>
+          <a:p xmlns:a="http://schemas.openxmlformats.org/drawingml/2006/main"/>
+        </p:txBody>
+      </p:sp>
+    </p:spTree>
+  </p:cSld>
+  <p:clrMapOvr>
+    <a:masterClrMapping xmlns:a="http://schemas.openxmlformats.org/drawingml/2006/main"/>
+  </p:clrMapOvr>
+</p:notes>
+</file>
+
 <file path=ppt/notesSlides/notesSlide4.xml><?xml version="1.0" encoding="utf-8"?>
 <p:notes xmlns:p="http://schemas.openxmlformats.org/presentationml/2006/main">
   <p:cSld>
@@ -3530,7 +4328,7 @@
   </p:cSld>
   <p:clrMap bg1="lt1" tx1="dk1" bg2="lt2" tx2="dk2" accent1="accent1" accent2="accent2" accent3="accent3" accent4="accent4" accent5="accent5" accent6="accent6" hlink="hlink" folHlink="folHlink"/>
   <p:sldLayoutIdLst>
-    <p:sldLayoutId xmlns:r="http://schemas.openxmlformats.org/officeDocument/2006/relationships" id="2147483649" r:id="R92246c71310d46c6"/>
+    <p:sldLayoutId xmlns:r="http://schemas.openxmlformats.org/officeDocument/2006/relationships" id="2147483649" r:id="Rd948ee55fcb74a97"/>
   </p:sldLayoutIdLst>
   <p:txStyles>
     <p:titleStyle>
@@ -4709,7 +5507,7 @@
           <p:nvPr/>
         </p:nvPicPr>
         <p:blipFill>
-          <a:blip xmlns:r="http://schemas.openxmlformats.org/officeDocument/2006/relationships" xmlns:a="http://schemas.openxmlformats.org/drawingml/2006/main" r:embed="R09a06b7a1b4448ba"/>
+          <a:blip xmlns:r="http://schemas.openxmlformats.org/officeDocument/2006/relationships" xmlns:a="http://schemas.openxmlformats.org/drawingml/2006/main" r:embed="R73fd724018224152"/>
           <a:stretch xmlns:a="http://schemas.openxmlformats.org/drawingml/2006/main"/>
         </p:blipFill>
         <p:spPr>
@@ -8630,7 +9428,7 @@
           <p:nvPr/>
         </p:nvPicPr>
         <p:blipFill>
-          <a:blip xmlns:r="http://schemas.openxmlformats.org/officeDocument/2006/relationships" xmlns:a="http://schemas.openxmlformats.org/drawingml/2006/main" r:embed="Rbfa95d3868d0430e"/>
+          <a:blip xmlns:r="http://schemas.openxmlformats.org/officeDocument/2006/relationships" xmlns:a="http://schemas.openxmlformats.org/drawingml/2006/main" r:embed="Rca1578dd46bb40a0"/>
           <a:stretch xmlns:a="http://schemas.openxmlformats.org/drawingml/2006/main"/>
         </p:blipFill>
         <p:spPr>
@@ -9535,7 +10333,7 @@
           <p:nvPr/>
         </p:nvPicPr>
         <p:blipFill>
-          <a:blip xmlns:r="http://schemas.openxmlformats.org/officeDocument/2006/relationships" xmlns:a="http://schemas.openxmlformats.org/drawingml/2006/main" r:embed="R79622c9646664e71"/>
+          <a:blip xmlns:r="http://schemas.openxmlformats.org/officeDocument/2006/relationships" xmlns:a="http://schemas.openxmlformats.org/drawingml/2006/main" r:embed="R7c68ddb48c43437b"/>
           <a:stretch xmlns:a="http://schemas.openxmlformats.org/drawingml/2006/main"/>
         </p:blipFill>
         <p:spPr>
@@ -10339,7 +11137,7 @@
           <p:nvPr/>
         </p:nvPicPr>
         <p:blipFill>
-          <a:blip xmlns:r="http://schemas.openxmlformats.org/officeDocument/2006/relationships" xmlns:a="http://schemas.openxmlformats.org/drawingml/2006/main" r:embed="R62069b35f6314be2"/>
+          <a:blip xmlns:r="http://schemas.openxmlformats.org/officeDocument/2006/relationships" xmlns:a="http://schemas.openxmlformats.org/drawingml/2006/main" r:embed="R6a70d1dff826462a"/>
           <a:stretch xmlns:a="http://schemas.openxmlformats.org/drawingml/2006/main"/>
         </p:blipFill>
         <p:spPr>
@@ -14692,7 +15490,7 @@
           <p:nvPr/>
         </p:nvPicPr>
         <p:blipFill>
-          <a:blip xmlns:r="http://schemas.openxmlformats.org/officeDocument/2006/relationships" xmlns:a="http://schemas.openxmlformats.org/drawingml/2006/main" r:embed="Rdfb41a89193e446f"/>
+          <a:blip xmlns:r="http://schemas.openxmlformats.org/officeDocument/2006/relationships" xmlns:a="http://schemas.openxmlformats.org/drawingml/2006/main" r:embed="Rb48eb01551f04684"/>
           <a:stretch xmlns:a="http://schemas.openxmlformats.org/drawingml/2006/main"/>
         </p:blipFill>
         <p:spPr>
@@ -15104,7 +15902,7 @@
           <p:nvPr/>
         </p:nvPicPr>
         <p:blipFill>
-          <a:blip xmlns:r="http://schemas.openxmlformats.org/officeDocument/2006/relationships" xmlns:a="http://schemas.openxmlformats.org/drawingml/2006/main" r:embed="R568f535318ed4a37"/>
+          <a:blip xmlns:r="http://schemas.openxmlformats.org/officeDocument/2006/relationships" xmlns:a="http://schemas.openxmlformats.org/drawingml/2006/main" r:embed="R8b22ca6706164d25"/>
           <a:stretch xmlns:a="http://schemas.openxmlformats.org/drawingml/2006/main"/>
         </p:blipFill>
         <p:spPr>
@@ -16009,7 +16807,7 @@
           <p:nvPr/>
         </p:nvPicPr>
         <p:blipFill>
-          <a:blip xmlns:r="http://schemas.openxmlformats.org/officeDocument/2006/relationships" xmlns:a="http://schemas.openxmlformats.org/drawingml/2006/main" r:embed="R6d3711f7ae974143"/>
+          <a:blip xmlns:r="http://schemas.openxmlformats.org/officeDocument/2006/relationships" xmlns:a="http://schemas.openxmlformats.org/drawingml/2006/main" r:embed="R824d603f35424cd0"/>
           <a:stretch xmlns:a="http://schemas.openxmlformats.org/drawingml/2006/main"/>
         </p:blipFill>
         <p:spPr>
@@ -19781,7 +20579,7 @@
           <p:nvPr/>
         </p:nvPicPr>
         <p:blipFill>
-          <a:blip xmlns:r="http://schemas.openxmlformats.org/officeDocument/2006/relationships" xmlns:a="http://schemas.openxmlformats.org/drawingml/2006/main" r:embed="R4af3966987f646be"/>
+          <a:blip xmlns:r="http://schemas.openxmlformats.org/officeDocument/2006/relationships" xmlns:a="http://schemas.openxmlformats.org/drawingml/2006/main" r:embed="Rcccb688cf08e4e65"/>
           <a:stretch xmlns:a="http://schemas.openxmlformats.org/drawingml/2006/main"/>
         </p:blipFill>
         <p:spPr>
@@ -20193,7 +20991,7 @@
           <p:nvPr/>
         </p:nvPicPr>
         <p:blipFill>
-          <a:blip xmlns:r="http://schemas.openxmlformats.org/officeDocument/2006/relationships" xmlns:a="http://schemas.openxmlformats.org/drawingml/2006/main" r:embed="Rfab5cec8d9694f55"/>
+          <a:blip xmlns:r="http://schemas.openxmlformats.org/officeDocument/2006/relationships" xmlns:a="http://schemas.openxmlformats.org/drawingml/2006/main" r:embed="R2175905a5c0845b0"/>
           <a:stretch xmlns:a="http://schemas.openxmlformats.org/drawingml/2006/main"/>
         </p:blipFill>
         <p:spPr>
@@ -20605,7 +21403,7 @@
           <p:nvPr/>
         </p:nvPicPr>
         <p:blipFill>
-          <a:blip xmlns:r="http://schemas.openxmlformats.org/officeDocument/2006/relationships" xmlns:a="http://schemas.openxmlformats.org/drawingml/2006/main" r:embed="Rd42cf5fa0c1545c1"/>
+          <a:blip xmlns:r="http://schemas.openxmlformats.org/officeDocument/2006/relationships" xmlns:a="http://schemas.openxmlformats.org/drawingml/2006/main" r:embed="R19c05996bc8e4b93"/>
           <a:stretch xmlns:a="http://schemas.openxmlformats.org/drawingml/2006/main"/>
         </p:blipFill>
         <p:spPr>
@@ -21017,7 +21815,7 @@
           <p:nvPr/>
         </p:nvPicPr>
         <p:blipFill>
-          <a:blip xmlns:r="http://schemas.openxmlformats.org/officeDocument/2006/relationships" xmlns:a="http://schemas.openxmlformats.org/drawingml/2006/main" r:embed="Rde716d7962a84bfa"/>
+          <a:blip xmlns:r="http://schemas.openxmlformats.org/officeDocument/2006/relationships" xmlns:a="http://schemas.openxmlformats.org/drawingml/2006/main" r:embed="R35f0e8b2d9294041"/>
           <a:stretch xmlns:a="http://schemas.openxmlformats.org/drawingml/2006/main"/>
         </p:blipFill>
         <p:spPr>
@@ -23454,7 +24252,7 @@
           <p:nvPr/>
         </p:nvPicPr>
         <p:blipFill>
-          <a:blip xmlns:r="http://schemas.openxmlformats.org/officeDocument/2006/relationships" xmlns:a="http://schemas.openxmlformats.org/drawingml/2006/main" r:embed="R0cba53e679374f80"/>
+          <a:blip xmlns:r="http://schemas.openxmlformats.org/officeDocument/2006/relationships" xmlns:a="http://schemas.openxmlformats.org/drawingml/2006/main" r:embed="Ra6bb86f2b93044e4"/>
           <a:stretch xmlns:a="http://schemas.openxmlformats.org/drawingml/2006/main"/>
         </p:blipFill>
         <p:spPr>
@@ -24655,6 +25453,5895 @@
 </p:sld>
 </file>
 
+<file path=ppt/slides/slide32.xml><?xml version="1.0" encoding="utf-8"?>
+<p:sld xmlns:p="http://schemas.openxmlformats.org/presentationml/2006/main">
+  <p:cSld>
+    <p:bg>
+      <p:bgPr>
+        <a:solidFill xmlns:a="http://schemas.openxmlformats.org/drawingml/2006/main">
+          <a:srgbClr val="FFFFFF"/>
+        </a:solidFill>
+      </p:bgPr>
+    </p:bg>
+    <p:spTree>
+      <p:nvGrpSpPr>
+        <p:cNvPr id="1" name=""/>
+        <p:cNvGrpSpPr/>
+        <p:nvPr/>
+      </p:nvGrpSpPr>
+      <p:grpSpPr>
+        <a:xfrm xmlns:a="http://schemas.openxmlformats.org/drawingml/2006/main"/>
+      </p:grpSpPr>
+      <p:sp>
+        <p:nvSpPr>
+          <p:cNvPr id="7" name="">
+            <a:extLst xmlns:a="http://schemas.openxmlformats.org/drawingml/2006/main">
+              <a:ext uri="{FF2B5EF4-FFF2-40B4-BE49-F238E27FC236}">
+                <a16:creationId xmlns:a16="http://schemas.microsoft.com/office/drawing/2014/main" id="{52BC51E6-6E84-4C1E-8D3E-0D1B2ADE0DA7}"/>
+              </a:ext>
+            </a:extLst>
+          </p:cNvPr>
+          <p:cNvSpPr>
+            <a:spLocks xmlns:a="http://schemas.openxmlformats.org/drawingml/2006/main" noGrp="1"/>
+          </p:cNvSpPr>
+          <p:nvPr/>
+        </p:nvSpPr>
+        <p:spPr>
+          <a:xfrm xmlns:a="http://schemas.openxmlformats.org/drawingml/2006/main">
+            <a:off x="457200" y="400050"/>
+            <a:ext cx="4000500" cy="266700"/>
+          </a:xfrm>
+          <a:prstGeom xmlns:a="http://schemas.openxmlformats.org/drawingml/2006/main" prst="rect">
+            <a:avLst/>
+          </a:prstGeom>
+          <a:noFill xmlns:a="http://schemas.openxmlformats.org/drawingml/2006/main"/>
+          <a:ln xmlns:a="http://schemas.openxmlformats.org/drawingml/2006/main" w="0">
+            <a:noFill/>
+            <a:prstDash val="solid"/>
+          </a:ln>
+        </p:spPr>
+        <p:txBody>
+          <a:bodyPr xmlns:a="http://schemas.openxmlformats.org/drawingml/2006/main" wrap="square" lIns="0" tIns="0" rIns="0" bIns="0" anchor="t">
+            <a:normAutofit fontScale="100000"/>
+          </a:bodyPr>
+          <a:lstStyle xmlns:a="http://schemas.openxmlformats.org/drawingml/2006/main"/>
+          <a:p xmlns:a="http://schemas.openxmlformats.org/drawingml/2006/main">
+            <a:pPr algn="l">
+              <a:buNone/>
+              <a:defRPr sz="1350" b="1">
+                <a:solidFill>
+                  <a:srgbClr val="667384"/>
+                </a:solidFill>
+                <a:latin typeface="Arial"/>
+                <a:ea typeface="Arial"/>
+                <a:cs typeface="Arial"/>
+              </a:defRPr>
+            </a:pPr>
+            <a:r>
+              <a:rPr sz="1350" b="1">
+                <a:solidFill>
+                  <a:srgbClr val="667384"/>
+                </a:solidFill>
+                <a:latin typeface="Arial"/>
+                <a:ea typeface="Arial"/>
+                <a:cs typeface="Arial"/>
+              </a:rPr>
+              <a:t>EXTERNAL MARKET CONTEXT</a:t>
+            </a:r>
+          </a:p>
+        </p:txBody>
+      </p:sp>
+      <p:sp>
+        <p:nvSpPr>
+          <p:cNvPr id="2" name="">
+            <a:extLst xmlns:a="http://schemas.openxmlformats.org/drawingml/2006/main">
+              <a:ext uri="{FF2B5EF4-FFF2-40B4-BE49-F238E27FC236}">
+                <a16:creationId xmlns:a16="http://schemas.microsoft.com/office/drawing/2014/main" id="{D5FBD659-315B-4902-8A62-88F3460EC6CC}"/>
+              </a:ext>
+            </a:extLst>
+          </p:cNvPr>
+          <p:cNvSpPr>
+            <a:spLocks xmlns:a="http://schemas.openxmlformats.org/drawingml/2006/main" noGrp="1"/>
+          </p:cNvSpPr>
+          <p:nvPr/>
+        </p:nvSpPr>
+        <p:spPr>
+          <a:xfrm xmlns:a="http://schemas.openxmlformats.org/drawingml/2006/main">
+            <a:off x="457200" y="1562100"/>
+            <a:ext cx="10763250" cy="1809750"/>
+          </a:xfrm>
+          <a:prstGeom xmlns:a="http://schemas.openxmlformats.org/drawingml/2006/main" prst="rect">
+            <a:avLst/>
+          </a:prstGeom>
+          <a:noFill xmlns:a="http://schemas.openxmlformats.org/drawingml/2006/main"/>
+          <a:ln xmlns:a="http://schemas.openxmlformats.org/drawingml/2006/main" w="0">
+            <a:noFill/>
+            <a:prstDash val="solid"/>
+          </a:ln>
+        </p:spPr>
+        <p:txBody>
+          <a:bodyPr xmlns:a="http://schemas.openxmlformats.org/drawingml/2006/main" wrap="square" lIns="0" tIns="0" rIns="0" bIns="0" anchor="t">
+            <a:noAutofit/>
+          </a:bodyPr>
+          <a:lstStyle xmlns:a="http://schemas.openxmlformats.org/drawingml/2006/main"/>
+          <a:p xmlns:a="http://schemas.openxmlformats.org/drawingml/2006/main">
+            <a:pPr algn="l">
+              <a:buNone/>
+              <a:defRPr sz="5100" b="1">
+                <a:solidFill>
+                  <a:srgbClr val="000000"/>
+                </a:solidFill>
+                <a:latin typeface="Arial"/>
+                <a:ea typeface="Arial"/>
+                <a:cs typeface="Arial"/>
+              </a:defRPr>
+            </a:pPr>
+            <a:r>
+              <a:rPr sz="5100" b="1">
+                <a:solidFill>
+                  <a:srgbClr val="000000"/>
+                </a:solidFill>
+                <a:latin typeface="Arial"/>
+                <a:ea typeface="Arial"/>
+                <a:cs typeface="Arial"/>
+              </a:rPr>
+              <a:t>Can SPY movement capacity organize TSLA returns?</a:t>
+            </a:r>
+          </a:p>
+        </p:txBody>
+      </p:sp>
+      <p:sp>
+        <p:nvSpPr>
+          <p:cNvPr id="3" name="">
+            <a:extLst xmlns:a="http://schemas.openxmlformats.org/drawingml/2006/main">
+              <a:ext uri="{FF2B5EF4-FFF2-40B4-BE49-F238E27FC236}">
+                <a16:creationId xmlns:a16="http://schemas.microsoft.com/office/drawing/2014/main" id="{108F8D12-F796-4339-A513-DF003E6E5740}"/>
+              </a:ext>
+            </a:extLst>
+          </p:cNvPr>
+          <p:cNvSpPr>
+            <a:spLocks xmlns:a="http://schemas.openxmlformats.org/drawingml/2006/main" noGrp="1"/>
+          </p:cNvSpPr>
+          <p:nvPr/>
+        </p:nvSpPr>
+        <p:spPr>
+          <a:xfrm xmlns:a="http://schemas.openxmlformats.org/drawingml/2006/main">
+            <a:off x="457200" y="3714750"/>
+            <a:ext cx="1257300" cy="76200"/>
+          </a:xfrm>
+          <a:prstGeom xmlns:a="http://schemas.openxmlformats.org/drawingml/2006/main" prst="rect">
+            <a:avLst/>
+          </a:prstGeom>
+          <a:solidFill xmlns:a="http://schemas.openxmlformats.org/drawingml/2006/main">
+            <a:srgbClr val="3D8DFF"/>
+          </a:solidFill>
+          <a:ln xmlns:a="http://schemas.openxmlformats.org/drawingml/2006/main" w="0">
+            <a:solidFill>
+              <a:srgbClr val="3D8DFF"/>
+            </a:solidFill>
+            <a:prstDash val="solid"/>
+          </a:ln>
+        </p:spPr>
+      </p:sp>
+      <p:sp>
+        <p:nvSpPr>
+          <p:cNvPr id="4" name="">
+            <a:extLst xmlns:a="http://schemas.openxmlformats.org/drawingml/2006/main">
+              <a:ext uri="{FF2B5EF4-FFF2-40B4-BE49-F238E27FC236}">
+                <a16:creationId xmlns:a16="http://schemas.microsoft.com/office/drawing/2014/main" id="{8345830B-E6EE-4175-94D1-A484215C8069}"/>
+              </a:ext>
+            </a:extLst>
+          </p:cNvPr>
+          <p:cNvSpPr>
+            <a:spLocks xmlns:a="http://schemas.openxmlformats.org/drawingml/2006/main" noGrp="1"/>
+          </p:cNvSpPr>
+          <p:nvPr/>
+        </p:nvSpPr>
+        <p:spPr>
+          <a:xfrm xmlns:a="http://schemas.openxmlformats.org/drawingml/2006/main">
+            <a:off x="457200" y="4171950"/>
+            <a:ext cx="9239250" cy="685800"/>
+          </a:xfrm>
+          <a:prstGeom xmlns:a="http://schemas.openxmlformats.org/drawingml/2006/main" prst="rect">
+            <a:avLst/>
+          </a:prstGeom>
+          <a:noFill xmlns:a="http://schemas.openxmlformats.org/drawingml/2006/main"/>
+          <a:ln xmlns:a="http://schemas.openxmlformats.org/drawingml/2006/main" w="0">
+            <a:noFill/>
+            <a:prstDash val="solid"/>
+          </a:ln>
+        </p:spPr>
+        <p:txBody>
+          <a:bodyPr xmlns:a="http://schemas.openxmlformats.org/drawingml/2006/main" wrap="square" lIns="0" tIns="0" rIns="0" bIns="0" anchor="t">
+            <a:normAutofit fontScale="97881"/>
+          </a:bodyPr>
+          <a:lstStyle xmlns:a="http://schemas.openxmlformats.org/drawingml/2006/main"/>
+          <a:p xmlns:a="http://schemas.openxmlformats.org/drawingml/2006/main">
+            <a:pPr algn="l">
+              <a:buNone/>
+              <a:defRPr sz="2550" b="0">
+                <a:solidFill>
+                  <a:srgbClr val="273548"/>
+                </a:solidFill>
+                <a:latin typeface="Arial"/>
+                <a:ea typeface="Arial"/>
+                <a:cs typeface="Arial"/>
+              </a:defRPr>
+            </a:pPr>
+            <a:r>
+              <a:rPr sz="2550" b="0">
+                <a:solidFill>
+                  <a:srgbClr val="273548"/>
+                </a:solidFill>
+                <a:latin typeface="Arial"/>
+                <a:ea typeface="Arial"/>
+                <a:cs typeface="Arial"/>
+              </a:rPr>
+              <a:t>Use SPY's accepted ATR% state at the same TSLA anchor close.</a:t>
+            </a:r>
+          </a:p>
+        </p:txBody>
+      </p:sp>
+      <p:sp>
+        <p:nvSpPr>
+          <p:cNvPr id="5" name="">
+            <a:extLst xmlns:a="http://schemas.openxmlformats.org/drawingml/2006/main">
+              <a:ext uri="{FF2B5EF4-FFF2-40B4-BE49-F238E27FC236}">
+                <a16:creationId xmlns:a16="http://schemas.microsoft.com/office/drawing/2014/main" id="{93B3AAD9-855C-47E7-9BA0-F94B71F3F42B}"/>
+              </a:ext>
+            </a:extLst>
+          </p:cNvPr>
+          <p:cNvSpPr>
+            <a:spLocks xmlns:a="http://schemas.openxmlformats.org/drawingml/2006/main" noGrp="1"/>
+          </p:cNvSpPr>
+          <p:nvPr/>
+        </p:nvSpPr>
+        <p:spPr>
+          <a:xfrm xmlns:a="http://schemas.openxmlformats.org/drawingml/2006/main">
+            <a:off x="457200" y="5429250"/>
+            <a:ext cx="10191750" cy="609600"/>
+          </a:xfrm>
+          <a:prstGeom xmlns:a="http://schemas.openxmlformats.org/drawingml/2006/main" prst="rect">
+            <a:avLst/>
+          </a:prstGeom>
+          <a:noFill xmlns:a="http://schemas.openxmlformats.org/drawingml/2006/main"/>
+          <a:ln xmlns:a="http://schemas.openxmlformats.org/drawingml/2006/main" w="0">
+            <a:noFill/>
+            <a:prstDash val="solid"/>
+          </a:ln>
+        </p:spPr>
+        <p:txBody>
+          <a:bodyPr xmlns:a="http://schemas.openxmlformats.org/drawingml/2006/main" wrap="square" lIns="0" tIns="0" rIns="0" bIns="0" anchor="t">
+            <a:normAutofit fontScale="100000"/>
+          </a:bodyPr>
+          <a:lstStyle xmlns:a="http://schemas.openxmlformats.org/drawingml/2006/main"/>
+          <a:p xmlns:a="http://schemas.openxmlformats.org/drawingml/2006/main">
+            <a:pPr algn="l">
+              <a:buNone/>
+              <a:defRPr sz="1650" b="0">
+                <a:solidFill>
+                  <a:srgbClr val="667384"/>
+                </a:solidFill>
+                <a:latin typeface="Arial"/>
+                <a:ea typeface="Arial"/>
+                <a:cs typeface="Arial"/>
+              </a:defRPr>
+            </a:pPr>
+            <a:r>
+              <a:rPr sz="1650" b="0">
+                <a:solidFill>
+                  <a:srgbClr val="667384"/>
+                </a:solidFill>
+                <a:latin typeface="Arial"/>
+                <a:ea typeface="Arial"/>
+                <a:cs typeface="Arial"/>
+              </a:rPr>
+              <a:t>TSLA, sample, return windows, and uncertainty stay fixed. No threshold search.</a:t>
+            </a:r>
+          </a:p>
+        </p:txBody>
+      </p:sp>
+      <p:sp>
+        <p:nvSpPr>
+          <p:cNvPr id="6" name="">
+            <a:extLst xmlns:a="http://schemas.openxmlformats.org/drawingml/2006/main">
+              <a:ext uri="{FF2B5EF4-FFF2-40B4-BE49-F238E27FC236}">
+                <a16:creationId xmlns:a16="http://schemas.microsoft.com/office/drawing/2014/main" id="{C26E2559-6393-4E7F-A448-E0578397EEA2}"/>
+              </a:ext>
+            </a:extLst>
+          </p:cNvPr>
+          <p:cNvSpPr>
+            <a:spLocks xmlns:a="http://schemas.openxmlformats.org/drawingml/2006/main" noGrp="1"/>
+          </p:cNvSpPr>
+          <p:nvPr/>
+        </p:nvSpPr>
+        <p:spPr>
+          <a:xfrm xmlns:a="http://schemas.openxmlformats.org/drawingml/2006/main">
+            <a:off x="11239500" y="6496050"/>
+            <a:ext cx="495300" cy="190500"/>
+          </a:xfrm>
+          <a:prstGeom xmlns:a="http://schemas.openxmlformats.org/drawingml/2006/main" prst="rect">
+            <a:avLst/>
+          </a:prstGeom>
+          <a:noFill xmlns:a="http://schemas.openxmlformats.org/drawingml/2006/main"/>
+          <a:ln xmlns:a="http://schemas.openxmlformats.org/drawingml/2006/main" w="0">
+            <a:noFill/>
+            <a:prstDash val="solid"/>
+          </a:ln>
+        </p:spPr>
+        <p:txBody>
+          <a:bodyPr xmlns:a="http://schemas.openxmlformats.org/drawingml/2006/main" wrap="square" lIns="0" tIns="0" rIns="0" bIns="0" anchor="t">
+            <a:normAutofit fontScale="100000"/>
+          </a:bodyPr>
+          <a:lstStyle xmlns:a="http://schemas.openxmlformats.org/drawingml/2006/main"/>
+          <a:p xmlns:a="http://schemas.openxmlformats.org/drawingml/2006/main">
+            <a:pPr algn="r">
+              <a:buNone/>
+              <a:defRPr sz="1050" b="0">
+                <a:solidFill>
+                  <a:srgbClr val="667384"/>
+                </a:solidFill>
+                <a:latin typeface="Arial"/>
+                <a:ea typeface="Arial"/>
+                <a:cs typeface="Arial"/>
+              </a:defRPr>
+            </a:pPr>
+            <a:r>
+              <a:rPr sz="1050" b="0">
+                <a:solidFill>
+                  <a:srgbClr val="667384"/>
+                </a:solidFill>
+                <a:latin typeface="Arial"/>
+                <a:ea typeface="Arial"/>
+                <a:cs typeface="Arial"/>
+              </a:rPr>
+              <a:t>32</a:t>
+            </a:r>
+          </a:p>
+        </p:txBody>
+      </p:sp>
+    </p:spTree>
+    <p:extLst>
+      <p:ext uri="{BB962C8B-B14F-4D97-AF65-F5344CB8AC3E}">
+        <p14:creationId xmlns:p14="http://schemas.microsoft.com/office/powerpoint/2010/main" val="80248067"/>
+      </p:ext>
+    </p:extLst>
+  </p:cSld>
+</p:sld>
+</file>
+
+<file path=ppt/slides/slide33.xml><?xml version="1.0" encoding="utf-8"?>
+<p:sld xmlns:p="http://schemas.openxmlformats.org/presentationml/2006/main">
+  <p:cSld>
+    <p:bg>
+      <p:bgPr>
+        <a:solidFill xmlns:a="http://schemas.openxmlformats.org/drawingml/2006/main">
+          <a:srgbClr val="FFFFFF"/>
+        </a:solidFill>
+      </p:bgPr>
+    </p:bg>
+    <p:spTree>
+      <p:nvGrpSpPr>
+        <p:cNvPr id="1" name=""/>
+        <p:cNvGrpSpPr/>
+        <p:nvPr/>
+      </p:nvGrpSpPr>
+      <p:grpSpPr>
+        <a:xfrm xmlns:a="http://schemas.openxmlformats.org/drawingml/2006/main"/>
+      </p:grpSpPr>
+      <p:sp>
+        <p:nvSpPr>
+          <p:cNvPr id="30" name="section-3">
+            <a:extLst xmlns:a="http://schemas.openxmlformats.org/drawingml/2006/main">
+              <a:ext uri="{FF2B5EF4-FFF2-40B4-BE49-F238E27FC236}">
+                <a16:creationId xmlns:a16="http://schemas.microsoft.com/office/drawing/2014/main" id="{D21E8F50-BA1C-4536-B715-AAD5A74ED82B}"/>
+              </a:ext>
+            </a:extLst>
+          </p:cNvPr>
+          <p:cNvSpPr>
+            <a:spLocks xmlns:a="http://schemas.openxmlformats.org/drawingml/2006/main" noGrp="1"/>
+          </p:cNvSpPr>
+          <p:nvPr/>
+        </p:nvSpPr>
+        <p:spPr>
+          <a:xfrm xmlns:a="http://schemas.openxmlformats.org/drawingml/2006/main">
+            <a:off x="457200" y="228600"/>
+            <a:ext cx="4191000" cy="228600"/>
+          </a:xfrm>
+          <a:prstGeom xmlns:a="http://schemas.openxmlformats.org/drawingml/2006/main" prst="rect">
+            <a:avLst/>
+          </a:prstGeom>
+          <a:noFill xmlns:a="http://schemas.openxmlformats.org/drawingml/2006/main"/>
+          <a:ln xmlns:a="http://schemas.openxmlformats.org/drawingml/2006/main" w="0">
+            <a:noFill/>
+            <a:prstDash val="solid"/>
+          </a:ln>
+        </p:spPr>
+        <p:txBody>
+          <a:bodyPr xmlns:a="http://schemas.openxmlformats.org/drawingml/2006/main" wrap="square" lIns="0" tIns="0" rIns="0" bIns="0" anchor="t">
+            <a:normAutofit fontScale="100000"/>
+          </a:bodyPr>
+          <a:lstStyle xmlns:a="http://schemas.openxmlformats.org/drawingml/2006/main"/>
+          <a:p xmlns:a="http://schemas.openxmlformats.org/drawingml/2006/main">
+            <a:pPr algn="l">
+              <a:buNone/>
+              <a:defRPr sz="1200" b="1">
+                <a:solidFill>
+                  <a:srgbClr val="667384"/>
+                </a:solidFill>
+                <a:latin typeface="Arial"/>
+                <a:ea typeface="Arial"/>
+                <a:cs typeface="Arial"/>
+              </a:defRPr>
+            </a:pPr>
+            <a:r>
+              <a:rPr sz="1200" b="1">
+                <a:solidFill>
+                  <a:srgbClr val="667384"/>
+                </a:solidFill>
+                <a:latin typeface="Arial"/>
+                <a:ea typeface="Arial"/>
+                <a:cs typeface="Arial"/>
+              </a:rPr>
+              <a:t>TSLA DESCRIPTIVE MICROSCOPE</a:t>
+            </a:r>
+          </a:p>
+        </p:txBody>
+      </p:sp>
+      <p:sp>
+        <p:nvSpPr>
+          <p:cNvPr id="2" name="title-3">
+            <a:extLst xmlns:a="http://schemas.openxmlformats.org/drawingml/2006/main">
+              <a:ext uri="{FF2B5EF4-FFF2-40B4-BE49-F238E27FC236}">
+                <a16:creationId xmlns:a16="http://schemas.microsoft.com/office/drawing/2014/main" id="{622D00AB-54E7-40F8-BC73-9A3D2344F481}"/>
+              </a:ext>
+            </a:extLst>
+          </p:cNvPr>
+          <p:cNvSpPr>
+            <a:spLocks xmlns:a="http://schemas.openxmlformats.org/drawingml/2006/main" noGrp="1"/>
+          </p:cNvSpPr>
+          <p:nvPr/>
+        </p:nvSpPr>
+        <p:spPr>
+          <a:xfrm xmlns:a="http://schemas.openxmlformats.org/drawingml/2006/main">
+            <a:off x="457200" y="533400"/>
+            <a:ext cx="11277600" cy="628650"/>
+          </a:xfrm>
+          <a:prstGeom xmlns:a="http://schemas.openxmlformats.org/drawingml/2006/main" prst="rect">
+            <a:avLst/>
+          </a:prstGeom>
+          <a:noFill xmlns:a="http://schemas.openxmlformats.org/drawingml/2006/main"/>
+          <a:ln xmlns:a="http://schemas.openxmlformats.org/drawingml/2006/main" w="0">
+            <a:noFill/>
+            <a:prstDash val="solid"/>
+          </a:ln>
+        </p:spPr>
+        <p:txBody>
+          <a:bodyPr xmlns:a="http://schemas.openxmlformats.org/drawingml/2006/main" wrap="square" lIns="0" tIns="0" rIns="0" bIns="0" anchor="t">
+            <a:normAutofit fontScale="98424"/>
+          </a:bodyPr>
+          <a:lstStyle xmlns:a="http://schemas.openxmlformats.org/drawingml/2006/main"/>
+          <a:p xmlns:a="http://schemas.openxmlformats.org/drawingml/2006/main">
+            <a:pPr algn="l">
+              <a:buNone/>
+              <a:defRPr sz="3525" b="1">
+                <a:solidFill>
+                  <a:srgbClr val="000000"/>
+                </a:solidFill>
+                <a:latin typeface="Arial"/>
+                <a:ea typeface="Arial"/>
+                <a:cs typeface="Arial"/>
+              </a:defRPr>
+            </a:pPr>
+            <a:r>
+              <a:rPr sz="3525" b="1">
+                <a:solidFill>
+                  <a:srgbClr val="000000"/>
+                </a:solidFill>
+                <a:latin typeface="Arial"/>
+                <a:ea typeface="Arial"/>
+                <a:cs typeface="Arial"/>
+              </a:rPr>
+              <a:t>Condition on SPY ATR% before reading TSLA's future</a:t>
+            </a:r>
+          </a:p>
+        </p:txBody>
+      </p:sp>
+      <p:sp>
+        <p:nvSpPr>
+          <p:cNvPr id="3" name="">
+            <a:extLst xmlns:a="http://schemas.openxmlformats.org/drawingml/2006/main">
+              <a:ext uri="{FF2B5EF4-FFF2-40B4-BE49-F238E27FC236}">
+                <a16:creationId xmlns:a16="http://schemas.microsoft.com/office/drawing/2014/main" id="{C3977435-894D-461F-A4F7-CD91DF8A8A55}"/>
+              </a:ext>
+            </a:extLst>
+          </p:cNvPr>
+          <p:cNvSpPr>
+            <a:spLocks xmlns:a="http://schemas.openxmlformats.org/drawingml/2006/main" noGrp="1"/>
+          </p:cNvSpPr>
+          <p:nvPr/>
+        </p:nvSpPr>
+        <p:spPr>
+          <a:xfrm xmlns:a="http://schemas.openxmlformats.org/drawingml/2006/main">
+            <a:off x="457200" y="1200150"/>
+            <a:ext cx="11277600" cy="19050"/>
+          </a:xfrm>
+          <a:prstGeom xmlns:a="http://schemas.openxmlformats.org/drawingml/2006/main" prst="rect">
+            <a:avLst/>
+          </a:prstGeom>
+          <a:solidFill xmlns:a="http://schemas.openxmlformats.org/drawingml/2006/main">
+            <a:srgbClr val="B8BCC4"/>
+          </a:solidFill>
+          <a:ln xmlns:a="http://schemas.openxmlformats.org/drawingml/2006/main" w="0">
+            <a:solidFill>
+              <a:srgbClr val="B8BCC4"/>
+            </a:solidFill>
+            <a:prstDash val="solid"/>
+          </a:ln>
+        </p:spPr>
+      </p:sp>
+      <p:sp>
+        <p:nvSpPr>
+          <p:cNvPr id="4" name="footer-left-3">
+            <a:extLst xmlns:a="http://schemas.openxmlformats.org/drawingml/2006/main">
+              <a:ext uri="{FF2B5EF4-FFF2-40B4-BE49-F238E27FC236}">
+                <a16:creationId xmlns:a16="http://schemas.microsoft.com/office/drawing/2014/main" id="{FC53CCFE-82C8-49A0-BC48-206B3BC8CC1B}"/>
+              </a:ext>
+            </a:extLst>
+          </p:cNvPr>
+          <p:cNvSpPr>
+            <a:spLocks xmlns:a="http://schemas.openxmlformats.org/drawingml/2006/main" noGrp="1"/>
+          </p:cNvSpPr>
+          <p:nvPr/>
+        </p:nvSpPr>
+        <p:spPr>
+          <a:xfrm xmlns:a="http://schemas.openxmlformats.org/drawingml/2006/main">
+            <a:off x="457200" y="6515100"/>
+            <a:ext cx="3429000" cy="171450"/>
+          </a:xfrm>
+          <a:prstGeom xmlns:a="http://schemas.openxmlformats.org/drawingml/2006/main" prst="rect">
+            <a:avLst/>
+          </a:prstGeom>
+          <a:noFill xmlns:a="http://schemas.openxmlformats.org/drawingml/2006/main"/>
+          <a:ln xmlns:a="http://schemas.openxmlformats.org/drawingml/2006/main" w="0">
+            <a:noFill/>
+            <a:prstDash val="solid"/>
+          </a:ln>
+        </p:spPr>
+        <p:txBody>
+          <a:bodyPr xmlns:a="http://schemas.openxmlformats.org/drawingml/2006/main" wrap="square" lIns="0" tIns="0" rIns="0" bIns="0" anchor="t">
+            <a:normAutofit fontScale="100000"/>
+          </a:bodyPr>
+          <a:lstStyle xmlns:a="http://schemas.openxmlformats.org/drawingml/2006/main"/>
+          <a:p xmlns:a="http://schemas.openxmlformats.org/drawingml/2006/main">
+            <a:pPr algn="l">
+              <a:buNone/>
+              <a:defRPr sz="1050" b="0">
+                <a:solidFill>
+                  <a:srgbClr val="667384"/>
+                </a:solidFill>
+                <a:latin typeface="Arial"/>
+                <a:ea typeface="Arial"/>
+                <a:cs typeface="Arial"/>
+              </a:defRPr>
+            </a:pPr>
+            <a:r>
+              <a:rPr sz="1050" b="0">
+                <a:solidFill>
+                  <a:srgbClr val="667384"/>
+                </a:solidFill>
+                <a:latin typeface="Arial"/>
+                <a:ea typeface="Arial"/>
+                <a:cs typeface="Arial"/>
+              </a:rPr>
+              <a:t>Adjusted daily TSLA | 2018-2023</a:t>
+            </a:r>
+          </a:p>
+        </p:txBody>
+      </p:sp>
+      <p:sp>
+        <p:nvSpPr>
+          <p:cNvPr id="5" name="footer-number-3">
+            <a:extLst xmlns:a="http://schemas.openxmlformats.org/drawingml/2006/main">
+              <a:ext uri="{FF2B5EF4-FFF2-40B4-BE49-F238E27FC236}">
+                <a16:creationId xmlns:a16="http://schemas.microsoft.com/office/drawing/2014/main" id="{B9F045FD-2505-4635-89F0-EDCD31EF4080}"/>
+              </a:ext>
+            </a:extLst>
+          </p:cNvPr>
+          <p:cNvSpPr>
+            <a:spLocks xmlns:a="http://schemas.openxmlformats.org/drawingml/2006/main" noGrp="1"/>
+          </p:cNvSpPr>
+          <p:nvPr/>
+        </p:nvSpPr>
+        <p:spPr>
+          <a:xfrm xmlns:a="http://schemas.openxmlformats.org/drawingml/2006/main">
+            <a:off x="11239500" y="6496050"/>
+            <a:ext cx="495300" cy="190500"/>
+          </a:xfrm>
+          <a:prstGeom xmlns:a="http://schemas.openxmlformats.org/drawingml/2006/main" prst="rect">
+            <a:avLst/>
+          </a:prstGeom>
+          <a:noFill xmlns:a="http://schemas.openxmlformats.org/drawingml/2006/main"/>
+          <a:ln xmlns:a="http://schemas.openxmlformats.org/drawingml/2006/main" w="0">
+            <a:noFill/>
+            <a:prstDash val="solid"/>
+          </a:ln>
+        </p:spPr>
+        <p:txBody>
+          <a:bodyPr xmlns:a="http://schemas.openxmlformats.org/drawingml/2006/main" wrap="square" lIns="0" tIns="0" rIns="0" bIns="0" anchor="t">
+            <a:normAutofit fontScale="100000"/>
+          </a:bodyPr>
+          <a:lstStyle xmlns:a="http://schemas.openxmlformats.org/drawingml/2006/main"/>
+          <a:p xmlns:a="http://schemas.openxmlformats.org/drawingml/2006/main">
+            <a:pPr algn="r">
+              <a:buNone/>
+              <a:defRPr sz="1050" b="0">
+                <a:solidFill>
+                  <a:srgbClr val="667384"/>
+                </a:solidFill>
+                <a:latin typeface="Arial"/>
+                <a:ea typeface="Arial"/>
+                <a:cs typeface="Arial"/>
+              </a:defRPr>
+            </a:pPr>
+            <a:r>
+              <a:rPr sz="1050" b="0">
+                <a:solidFill>
+                  <a:srgbClr val="667384"/>
+                </a:solidFill>
+                <a:latin typeface="Arial"/>
+                <a:ea typeface="Arial"/>
+                <a:cs typeface="Arial"/>
+              </a:rPr>
+              <a:t>33</a:t>
+            </a:r>
+          </a:p>
+        </p:txBody>
+      </p:sp>
+      <p:sp>
+        <p:nvSpPr>
+          <p:cNvPr id="6" name="">
+            <a:extLst xmlns:a="http://schemas.openxmlformats.org/drawingml/2006/main">
+              <a:ext uri="{FF2B5EF4-FFF2-40B4-BE49-F238E27FC236}">
+                <a16:creationId xmlns:a16="http://schemas.microsoft.com/office/drawing/2014/main" id="{551133C9-969B-4370-A80C-D9B73CA522F0}"/>
+              </a:ext>
+            </a:extLst>
+          </p:cNvPr>
+          <p:cNvSpPr>
+            <a:spLocks xmlns:a="http://schemas.openxmlformats.org/drawingml/2006/main" noGrp="1"/>
+          </p:cNvSpPr>
+          <p:nvPr/>
+        </p:nvSpPr>
+        <p:spPr>
+          <a:xfrm xmlns:a="http://schemas.openxmlformats.org/drawingml/2006/main">
+            <a:off x="628650" y="1752600"/>
+            <a:ext cx="5429250" cy="762000"/>
+          </a:xfrm>
+          <a:prstGeom xmlns:a="http://schemas.openxmlformats.org/drawingml/2006/main" prst="rect">
+            <a:avLst/>
+          </a:prstGeom>
+          <a:noFill xmlns:a="http://schemas.openxmlformats.org/drawingml/2006/main"/>
+          <a:ln xmlns:a="http://schemas.openxmlformats.org/drawingml/2006/main" w="0">
+            <a:noFill/>
+            <a:prstDash val="solid"/>
+          </a:ln>
+        </p:spPr>
+        <p:txBody>
+          <a:bodyPr xmlns:a="http://schemas.openxmlformats.org/drawingml/2006/main" wrap="square" lIns="0" tIns="0" rIns="0" bIns="0" anchor="t">
+            <a:normAutofit fontScale="100000"/>
+          </a:bodyPr>
+          <a:lstStyle xmlns:a="http://schemas.openxmlformats.org/drawingml/2006/main"/>
+          <a:p xmlns:a="http://schemas.openxmlformats.org/drawingml/2006/main">
+            <a:pPr algn="l">
+              <a:buNone/>
+              <a:defRPr sz="3300" b="1">
+                <a:solidFill>
+                  <a:srgbClr val="3D8DFF"/>
+                </a:solidFill>
+                <a:latin typeface="Arial"/>
+                <a:ea typeface="Arial"/>
+                <a:cs typeface="Arial"/>
+              </a:defRPr>
+            </a:pPr>
+            <a:r>
+              <a:rPr sz="3300" b="1">
+                <a:solidFill>
+                  <a:srgbClr val="3D8DFF"/>
+                </a:solidFill>
+                <a:latin typeface="Arial"/>
+                <a:ea typeface="Arial"/>
+                <a:cs typeface="Arial"/>
+              </a:rPr>
+              <a:t>SPY state  →  TSLA future</a:t>
+            </a:r>
+          </a:p>
+        </p:txBody>
+      </p:sp>
+      <p:sp>
+        <p:nvSpPr>
+          <p:cNvPr id="7" name="">
+            <a:extLst xmlns:a="http://schemas.openxmlformats.org/drawingml/2006/main">
+              <a:ext uri="{FF2B5EF4-FFF2-40B4-BE49-F238E27FC236}">
+                <a16:creationId xmlns:a16="http://schemas.microsoft.com/office/drawing/2014/main" id="{82D8EB97-B391-424E-82EB-0DEEC881C286}"/>
+              </a:ext>
+            </a:extLst>
+          </p:cNvPr>
+          <p:cNvSpPr>
+            <a:spLocks xmlns:a="http://schemas.openxmlformats.org/drawingml/2006/main" noGrp="1"/>
+          </p:cNvSpPr>
+          <p:nvPr/>
+        </p:nvSpPr>
+        <p:spPr>
+          <a:xfrm xmlns:a="http://schemas.openxmlformats.org/drawingml/2006/main">
+            <a:off x="628650" y="2724150"/>
+            <a:ext cx="5048250" cy="990600"/>
+          </a:xfrm>
+          <a:prstGeom xmlns:a="http://schemas.openxmlformats.org/drawingml/2006/main" prst="rect">
+            <a:avLst/>
+          </a:prstGeom>
+          <a:noFill xmlns:a="http://schemas.openxmlformats.org/drawingml/2006/main"/>
+          <a:ln xmlns:a="http://schemas.openxmlformats.org/drawingml/2006/main" w="0">
+            <a:noFill/>
+            <a:prstDash val="solid"/>
+          </a:ln>
+        </p:spPr>
+        <p:txBody>
+          <a:bodyPr xmlns:a="http://schemas.openxmlformats.org/drawingml/2006/main" wrap="square" lIns="0" tIns="0" rIns="0" bIns="0" anchor="t">
+            <a:normAutofit fontScale="100000"/>
+          </a:bodyPr>
+          <a:lstStyle xmlns:a="http://schemas.openxmlformats.org/drawingml/2006/main"/>
+          <a:p xmlns:a="http://schemas.openxmlformats.org/drawingml/2006/main">
+            <a:pPr algn="l">
+              <a:buNone/>
+              <a:defRPr sz="1875" b="0">
+                <a:solidFill>
+                  <a:srgbClr val="273548"/>
+                </a:solidFill>
+                <a:latin typeface="Arial"/>
+                <a:ea typeface="Arial"/>
+                <a:cs typeface="Arial"/>
+              </a:defRPr>
+            </a:pPr>
+            <a:r>
+              <a:rPr sz="1875" b="0">
+                <a:solidFill>
+                  <a:srgbClr val="273548"/>
+                </a:solidFill>
+                <a:latin typeface="Arial"/>
+                <a:ea typeface="Arial"/>
+                <a:cs typeface="Arial"/>
+              </a:rPr>
+              <a:t>SPY labels anchor close t. TSLA prior return ends at t; TSLA following return begins after t.</a:t>
+            </a:r>
+          </a:p>
+        </p:txBody>
+      </p:sp>
+      <p:sp>
+        <p:nvSpPr>
+          <p:cNvPr id="8" name="">
+            <a:extLst xmlns:a="http://schemas.openxmlformats.org/drawingml/2006/main">
+              <a:ext uri="{FF2B5EF4-FFF2-40B4-BE49-F238E27FC236}">
+                <a16:creationId xmlns:a16="http://schemas.microsoft.com/office/drawing/2014/main" id="{8FD10794-EB76-4BB0-B74E-31375B660ECD}"/>
+              </a:ext>
+            </a:extLst>
+          </p:cNvPr>
+          <p:cNvSpPr>
+            <a:spLocks xmlns:a="http://schemas.openxmlformats.org/drawingml/2006/main" noGrp="1"/>
+          </p:cNvSpPr>
+          <p:nvPr/>
+        </p:nvSpPr>
+        <p:spPr>
+          <a:xfrm xmlns:a="http://schemas.openxmlformats.org/drawingml/2006/main">
+            <a:off x="628650" y="4095750"/>
+            <a:ext cx="4953000" cy="1695450"/>
+          </a:xfrm>
+          <a:prstGeom xmlns:a="http://schemas.openxmlformats.org/drawingml/2006/main" prst="rect">
+            <a:avLst/>
+          </a:prstGeom>
+          <a:solidFill xmlns:a="http://schemas.openxmlformats.org/drawingml/2006/main">
+            <a:srgbClr val="EDEDED"/>
+          </a:solidFill>
+          <a:ln xmlns:a="http://schemas.openxmlformats.org/drawingml/2006/main" w="0">
+            <a:solidFill>
+              <a:srgbClr val="EDEDED"/>
+            </a:solidFill>
+            <a:prstDash val="solid"/>
+          </a:ln>
+        </p:spPr>
+      </p:sp>
+      <p:sp>
+        <p:nvSpPr>
+          <p:cNvPr id="9" name="">
+            <a:extLst xmlns:a="http://schemas.openxmlformats.org/drawingml/2006/main">
+              <a:ext uri="{FF2B5EF4-FFF2-40B4-BE49-F238E27FC236}">
+                <a16:creationId xmlns:a16="http://schemas.microsoft.com/office/drawing/2014/main" id="{E8834C39-6D46-429B-A2ED-F97A068A843A}"/>
+              </a:ext>
+            </a:extLst>
+          </p:cNvPr>
+          <p:cNvSpPr>
+            <a:spLocks xmlns:a="http://schemas.openxmlformats.org/drawingml/2006/main" noGrp="1"/>
+          </p:cNvSpPr>
+          <p:nvPr/>
+        </p:nvSpPr>
+        <p:spPr>
+          <a:xfrm xmlns:a="http://schemas.openxmlformats.org/drawingml/2006/main">
+            <a:off x="628650" y="4095750"/>
+            <a:ext cx="76200" cy="1695450"/>
+          </a:xfrm>
+          <a:prstGeom xmlns:a="http://schemas.openxmlformats.org/drawingml/2006/main" prst="rect">
+            <a:avLst/>
+          </a:prstGeom>
+          <a:solidFill xmlns:a="http://schemas.openxmlformats.org/drawingml/2006/main">
+            <a:srgbClr val="3D8DFF"/>
+          </a:solidFill>
+          <a:ln xmlns:a="http://schemas.openxmlformats.org/drawingml/2006/main" w="0">
+            <a:solidFill>
+              <a:srgbClr val="3D8DFF"/>
+            </a:solidFill>
+            <a:prstDash val="solid"/>
+          </a:ln>
+        </p:spPr>
+      </p:sp>
+      <p:sp>
+        <p:nvSpPr>
+          <p:cNvPr id="10" name="">
+            <a:extLst xmlns:a="http://schemas.openxmlformats.org/drawingml/2006/main">
+              <a:ext uri="{FF2B5EF4-FFF2-40B4-BE49-F238E27FC236}">
+                <a16:creationId xmlns:a16="http://schemas.microsoft.com/office/drawing/2014/main" id="{743D83BD-5D8C-4BCB-B02F-81EB74163C70}"/>
+              </a:ext>
+            </a:extLst>
+          </p:cNvPr>
+          <p:cNvSpPr>
+            <a:spLocks xmlns:a="http://schemas.openxmlformats.org/drawingml/2006/main" noGrp="1"/>
+          </p:cNvSpPr>
+          <p:nvPr/>
+        </p:nvSpPr>
+        <p:spPr>
+          <a:xfrm xmlns:a="http://schemas.openxmlformats.org/drawingml/2006/main">
+            <a:off x="895350" y="4267200"/>
+            <a:ext cx="4495800" cy="590550"/>
+          </a:xfrm>
+          <a:prstGeom xmlns:a="http://schemas.openxmlformats.org/drawingml/2006/main" prst="rect">
+            <a:avLst/>
+          </a:prstGeom>
+          <a:noFill xmlns:a="http://schemas.openxmlformats.org/drawingml/2006/main"/>
+          <a:ln xmlns:a="http://schemas.openxmlformats.org/drawingml/2006/main" w="0">
+            <a:noFill/>
+            <a:prstDash val="solid"/>
+          </a:ln>
+        </p:spPr>
+        <p:txBody>
+          <a:bodyPr xmlns:a="http://schemas.openxmlformats.org/drawingml/2006/main" wrap="square" lIns="0" tIns="0" rIns="0" bIns="0" anchor="t">
+            <a:normAutofit fontScale="100000"/>
+          </a:bodyPr>
+          <a:lstStyle xmlns:a="http://schemas.openxmlformats.org/drawingml/2006/main"/>
+          <a:p xmlns:a="http://schemas.openxmlformats.org/drawingml/2006/main">
+            <a:pPr algn="l">
+              <a:buNone/>
+              <a:defRPr sz="3225" b="1">
+                <a:solidFill>
+                  <a:srgbClr val="3D8DFF"/>
+                </a:solidFill>
+                <a:latin typeface="Arial"/>
+                <a:ea typeface="Arial"/>
+                <a:cs typeface="Arial"/>
+              </a:defRPr>
+            </a:pPr>
+            <a:r>
+              <a:rPr sz="3225" b="1">
+                <a:solidFill>
+                  <a:srgbClr val="3D8DFF"/>
+                </a:solidFill>
+                <a:latin typeface="Arial"/>
+                <a:ea typeface="Arial"/>
+                <a:cs typeface="Arial"/>
+              </a:rPr>
+              <a:t>3</a:t>
+            </a:r>
+          </a:p>
+        </p:txBody>
+      </p:sp>
+      <p:sp>
+        <p:nvSpPr>
+          <p:cNvPr id="11" name="">
+            <a:extLst xmlns:a="http://schemas.openxmlformats.org/drawingml/2006/main">
+              <a:ext uri="{FF2B5EF4-FFF2-40B4-BE49-F238E27FC236}">
+                <a16:creationId xmlns:a16="http://schemas.microsoft.com/office/drawing/2014/main" id="{ED88569D-B256-4A8E-9334-C068F39865EA}"/>
+              </a:ext>
+            </a:extLst>
+          </p:cNvPr>
+          <p:cNvSpPr>
+            <a:spLocks xmlns:a="http://schemas.openxmlformats.org/drawingml/2006/main" noGrp="1"/>
+          </p:cNvSpPr>
+          <p:nvPr/>
+        </p:nvSpPr>
+        <p:spPr>
+          <a:xfrm xmlns:a="http://schemas.openxmlformats.org/drawingml/2006/main">
+            <a:off x="895350" y="4933950"/>
+            <a:ext cx="4495800" cy="704850"/>
+          </a:xfrm>
+          <a:prstGeom xmlns:a="http://schemas.openxmlformats.org/drawingml/2006/main" prst="rect">
+            <a:avLst/>
+          </a:prstGeom>
+          <a:noFill xmlns:a="http://schemas.openxmlformats.org/drawingml/2006/main"/>
+          <a:ln xmlns:a="http://schemas.openxmlformats.org/drawingml/2006/main" w="0">
+            <a:noFill/>
+            <a:prstDash val="solid"/>
+          </a:ln>
+        </p:spPr>
+        <p:txBody>
+          <a:bodyPr xmlns:a="http://schemas.openxmlformats.org/drawingml/2006/main" wrap="square" lIns="0" tIns="0" rIns="0" bIns="0" anchor="t">
+            <a:normAutofit fontScale="100000"/>
+          </a:bodyPr>
+          <a:lstStyle xmlns:a="http://schemas.openxmlformats.org/drawingml/2006/main"/>
+          <a:p xmlns:a="http://schemas.openxmlformats.org/drawingml/2006/main">
+            <a:pPr algn="l">
+              <a:buNone/>
+              <a:defRPr sz="1350" b="0">
+                <a:solidFill>
+                  <a:srgbClr val="273548"/>
+                </a:solidFill>
+                <a:latin typeface="Arial"/>
+                <a:ea typeface="Arial"/>
+                <a:cs typeface="Arial"/>
+              </a:defRPr>
+            </a:pPr>
+            <a:r>
+              <a:rPr sz="1350" b="0">
+                <a:solidFill>
+                  <a:srgbClr val="273548"/>
+                </a:solidFill>
+                <a:latin typeface="Arial"/>
+                <a:ea typeface="Arial"/>
+                <a:cs typeface="Arial"/>
+              </a:rPr>
+              <a:t>accepted external states</a:t>
+            </a:r>
+          </a:p>
+        </p:txBody>
+      </p:sp>
+      <p:sp>
+        <p:nvSpPr>
+          <p:cNvPr id="12" name="">
+            <a:extLst xmlns:a="http://schemas.openxmlformats.org/drawingml/2006/main">
+              <a:ext uri="{FF2B5EF4-FFF2-40B4-BE49-F238E27FC236}">
+                <a16:creationId xmlns:a16="http://schemas.microsoft.com/office/drawing/2014/main" id="{1139CAED-155E-4498-A477-F11A6F4A02F8}"/>
+              </a:ext>
+            </a:extLst>
+          </p:cNvPr>
+          <p:cNvSpPr>
+            <a:spLocks xmlns:a="http://schemas.openxmlformats.org/drawingml/2006/main" noGrp="1"/>
+          </p:cNvSpPr>
+          <p:nvPr/>
+        </p:nvSpPr>
+        <p:spPr>
+          <a:xfrm xmlns:a="http://schemas.openxmlformats.org/drawingml/2006/main">
+            <a:off x="6667500" y="1676400"/>
+            <a:ext cx="4191000" cy="400050"/>
+          </a:xfrm>
+          <a:prstGeom xmlns:a="http://schemas.openxmlformats.org/drawingml/2006/main" prst="rect">
+            <a:avLst/>
+          </a:prstGeom>
+          <a:noFill xmlns:a="http://schemas.openxmlformats.org/drawingml/2006/main"/>
+          <a:ln xmlns:a="http://schemas.openxmlformats.org/drawingml/2006/main" w="0">
+            <a:noFill/>
+            <a:prstDash val="solid"/>
+          </a:ln>
+        </p:spPr>
+        <p:txBody>
+          <a:bodyPr xmlns:a="http://schemas.openxmlformats.org/drawingml/2006/main" wrap="square" lIns="0" tIns="0" rIns="0" bIns="0" anchor="t">
+            <a:normAutofit fontScale="100000"/>
+          </a:bodyPr>
+          <a:lstStyle xmlns:a="http://schemas.openxmlformats.org/drawingml/2006/main"/>
+          <a:p xmlns:a="http://schemas.openxmlformats.org/drawingml/2006/main">
+            <a:pPr algn="l">
+              <a:buNone/>
+              <a:defRPr sz="2250" b="1">
+                <a:solidFill>
+                  <a:srgbClr val="000000"/>
+                </a:solidFill>
+                <a:latin typeface="Arial"/>
+                <a:ea typeface="Arial"/>
+                <a:cs typeface="Arial"/>
+              </a:defRPr>
+            </a:pPr>
+            <a:r>
+              <a:rPr sz="2250" b="1">
+                <a:solidFill>
+                  <a:srgbClr val="000000"/>
+                </a:solidFill>
+                <a:latin typeface="Arial"/>
+                <a:ea typeface="Arial"/>
+                <a:cs typeface="Arial"/>
+              </a:rPr>
+              <a:t>Fixed conditioning</a:t>
+            </a:r>
+          </a:p>
+        </p:txBody>
+      </p:sp>
+      <p:sp>
+        <p:nvSpPr>
+          <p:cNvPr id="13" name="">
+            <a:extLst xmlns:a="http://schemas.openxmlformats.org/drawingml/2006/main">
+              <a:ext uri="{FF2B5EF4-FFF2-40B4-BE49-F238E27FC236}">
+                <a16:creationId xmlns:a16="http://schemas.microsoft.com/office/drawing/2014/main" id="{09D8E2E5-6744-4962-977E-E85B48910BDF}"/>
+              </a:ext>
+            </a:extLst>
+          </p:cNvPr>
+          <p:cNvSpPr>
+            <a:spLocks xmlns:a="http://schemas.openxmlformats.org/drawingml/2006/main" noGrp="1"/>
+          </p:cNvSpPr>
+          <p:nvPr/>
+        </p:nvSpPr>
+        <p:spPr>
+          <a:xfrm xmlns:a="http://schemas.openxmlformats.org/drawingml/2006/main">
+            <a:off x="6667500" y="2286000"/>
+            <a:ext cx="1809750" cy="323850"/>
+          </a:xfrm>
+          <a:prstGeom xmlns:a="http://schemas.openxmlformats.org/drawingml/2006/main" prst="rect">
+            <a:avLst/>
+          </a:prstGeom>
+          <a:noFill xmlns:a="http://schemas.openxmlformats.org/drawingml/2006/main"/>
+          <a:ln xmlns:a="http://schemas.openxmlformats.org/drawingml/2006/main" w="0">
+            <a:noFill/>
+            <a:prstDash val="solid"/>
+          </a:ln>
+        </p:spPr>
+        <p:txBody>
+          <a:bodyPr xmlns:a="http://schemas.openxmlformats.org/drawingml/2006/main" wrap="square" lIns="0" tIns="0" rIns="0" bIns="0" anchor="t">
+            <a:normAutofit fontScale="100000"/>
+          </a:bodyPr>
+          <a:lstStyle xmlns:a="http://schemas.openxmlformats.org/drawingml/2006/main"/>
+          <a:p xmlns:a="http://schemas.openxmlformats.org/drawingml/2006/main">
+            <a:pPr algn="l">
+              <a:buNone/>
+              <a:defRPr sz="1500" b="1">
+                <a:solidFill>
+                  <a:srgbClr val="667384"/>
+                </a:solidFill>
+                <a:latin typeface="Arial"/>
+                <a:ea typeface="Arial"/>
+                <a:cs typeface="Arial"/>
+              </a:defRPr>
+            </a:pPr>
+            <a:r>
+              <a:rPr sz="1500" b="1">
+                <a:solidFill>
+                  <a:srgbClr val="667384"/>
+                </a:solidFill>
+                <a:latin typeface="Arial"/>
+                <a:ea typeface="Arial"/>
+                <a:cs typeface="Arial"/>
+              </a:rPr>
+              <a:t>Metric</a:t>
+            </a:r>
+          </a:p>
+        </p:txBody>
+      </p:sp>
+      <p:sp>
+        <p:nvSpPr>
+          <p:cNvPr id="14" name="">
+            <a:extLst xmlns:a="http://schemas.openxmlformats.org/drawingml/2006/main">
+              <a:ext uri="{FF2B5EF4-FFF2-40B4-BE49-F238E27FC236}">
+                <a16:creationId xmlns:a16="http://schemas.microsoft.com/office/drawing/2014/main" id="{60FD2958-8D30-49E2-9398-075A839B2785}"/>
+              </a:ext>
+            </a:extLst>
+          </p:cNvPr>
+          <p:cNvSpPr>
+            <a:spLocks xmlns:a="http://schemas.openxmlformats.org/drawingml/2006/main" noGrp="1"/>
+          </p:cNvSpPr>
+          <p:nvPr/>
+        </p:nvSpPr>
+        <p:spPr>
+          <a:xfrm xmlns:a="http://schemas.openxmlformats.org/drawingml/2006/main">
+            <a:off x="8572500" y="2286000"/>
+            <a:ext cx="2952750" cy="419100"/>
+          </a:xfrm>
+          <a:prstGeom xmlns:a="http://schemas.openxmlformats.org/drawingml/2006/main" prst="rect">
+            <a:avLst/>
+          </a:prstGeom>
+          <a:noFill xmlns:a="http://schemas.openxmlformats.org/drawingml/2006/main"/>
+          <a:ln xmlns:a="http://schemas.openxmlformats.org/drawingml/2006/main" w="0">
+            <a:noFill/>
+            <a:prstDash val="solid"/>
+          </a:ln>
+        </p:spPr>
+        <p:txBody>
+          <a:bodyPr xmlns:a="http://schemas.openxmlformats.org/drawingml/2006/main" wrap="square" lIns="0" tIns="0" rIns="0" bIns="0" anchor="t">
+            <a:normAutofit fontScale="100000"/>
+          </a:bodyPr>
+          <a:lstStyle xmlns:a="http://schemas.openxmlformats.org/drawingml/2006/main"/>
+          <a:p xmlns:a="http://schemas.openxmlformats.org/drawingml/2006/main">
+            <a:pPr algn="l">
+              <a:buNone/>
+              <a:defRPr sz="1500" b="0">
+                <a:solidFill>
+                  <a:srgbClr val="273548"/>
+                </a:solidFill>
+                <a:latin typeface="Arial"/>
+                <a:ea typeface="Arial"/>
+                <a:cs typeface="Arial"/>
+              </a:defRPr>
+            </a:pPr>
+            <a:r>
+              <a:rPr sz="1500" b="0">
+                <a:solidFill>
+                  <a:srgbClr val="273548"/>
+                </a:solidFill>
+                <a:latin typeface="Arial"/>
+                <a:ea typeface="Arial"/>
+                <a:cs typeface="Arial"/>
+              </a:rPr>
+              <a:t>Wilder ATR14 / SPY close</a:t>
+            </a:r>
+          </a:p>
+        </p:txBody>
+      </p:sp>
+      <p:sp>
+        <p:nvSpPr>
+          <p:cNvPr id="15" name="">
+            <a:extLst xmlns:a="http://schemas.openxmlformats.org/drawingml/2006/main">
+              <a:ext uri="{FF2B5EF4-FFF2-40B4-BE49-F238E27FC236}">
+                <a16:creationId xmlns:a16="http://schemas.microsoft.com/office/drawing/2014/main" id="{B5F0B4C3-3792-489F-A37E-FD53597FE449}"/>
+              </a:ext>
+            </a:extLst>
+          </p:cNvPr>
+          <p:cNvSpPr>
+            <a:spLocks xmlns:a="http://schemas.openxmlformats.org/drawingml/2006/main" noGrp="1"/>
+          </p:cNvSpPr>
+          <p:nvPr/>
+        </p:nvSpPr>
+        <p:spPr>
+          <a:xfrm xmlns:a="http://schemas.openxmlformats.org/drawingml/2006/main">
+            <a:off x="6667500" y="2743200"/>
+            <a:ext cx="4857750" cy="9525"/>
+          </a:xfrm>
+          <a:prstGeom xmlns:a="http://schemas.openxmlformats.org/drawingml/2006/main" prst="rect">
+            <a:avLst/>
+          </a:prstGeom>
+          <a:solidFill xmlns:a="http://schemas.openxmlformats.org/drawingml/2006/main">
+            <a:srgbClr val="B8BCC4"/>
+          </a:solidFill>
+          <a:ln xmlns:a="http://schemas.openxmlformats.org/drawingml/2006/main" w="0">
+            <a:solidFill>
+              <a:srgbClr val="B8BCC4"/>
+            </a:solidFill>
+            <a:prstDash val="solid"/>
+          </a:ln>
+        </p:spPr>
+      </p:sp>
+      <p:sp>
+        <p:nvSpPr>
+          <p:cNvPr id="16" name="">
+            <a:extLst xmlns:a="http://schemas.openxmlformats.org/drawingml/2006/main">
+              <a:ext uri="{FF2B5EF4-FFF2-40B4-BE49-F238E27FC236}">
+                <a16:creationId xmlns:a16="http://schemas.microsoft.com/office/drawing/2014/main" id="{1F168646-6439-4EB2-88F0-0C08EDC14E3F}"/>
+              </a:ext>
+            </a:extLst>
+          </p:cNvPr>
+          <p:cNvSpPr>
+            <a:spLocks xmlns:a="http://schemas.openxmlformats.org/drawingml/2006/main" noGrp="1"/>
+          </p:cNvSpPr>
+          <p:nvPr/>
+        </p:nvSpPr>
+        <p:spPr>
+          <a:xfrm xmlns:a="http://schemas.openxmlformats.org/drawingml/2006/main">
+            <a:off x="6667500" y="2876550"/>
+            <a:ext cx="1809750" cy="323850"/>
+          </a:xfrm>
+          <a:prstGeom xmlns:a="http://schemas.openxmlformats.org/drawingml/2006/main" prst="rect">
+            <a:avLst/>
+          </a:prstGeom>
+          <a:noFill xmlns:a="http://schemas.openxmlformats.org/drawingml/2006/main"/>
+          <a:ln xmlns:a="http://schemas.openxmlformats.org/drawingml/2006/main" w="0">
+            <a:noFill/>
+            <a:prstDash val="solid"/>
+          </a:ln>
+        </p:spPr>
+        <p:txBody>
+          <a:bodyPr xmlns:a="http://schemas.openxmlformats.org/drawingml/2006/main" wrap="square" lIns="0" tIns="0" rIns="0" bIns="0" anchor="t">
+            <a:normAutofit fontScale="100000"/>
+          </a:bodyPr>
+          <a:lstStyle xmlns:a="http://schemas.openxmlformats.org/drawingml/2006/main"/>
+          <a:p xmlns:a="http://schemas.openxmlformats.org/drawingml/2006/main">
+            <a:pPr algn="l">
+              <a:buNone/>
+              <a:defRPr sz="1500" b="1">
+                <a:solidFill>
+                  <a:srgbClr val="667384"/>
+                </a:solidFill>
+                <a:latin typeface="Arial"/>
+                <a:ea typeface="Arial"/>
+                <a:cs typeface="Arial"/>
+              </a:defRPr>
+            </a:pPr>
+            <a:r>
+              <a:rPr sz="1500" b="1">
+                <a:solidFill>
+                  <a:srgbClr val="667384"/>
+                </a:solidFill>
+                <a:latin typeface="Arial"/>
+                <a:ea typeface="Arial"/>
+                <a:cs typeface="Arial"/>
+              </a:rPr>
+              <a:t>Memory</a:t>
+            </a:r>
+          </a:p>
+        </p:txBody>
+      </p:sp>
+      <p:sp>
+        <p:nvSpPr>
+          <p:cNvPr id="17" name="">
+            <a:extLst xmlns:a="http://schemas.openxmlformats.org/drawingml/2006/main">
+              <a:ext uri="{FF2B5EF4-FFF2-40B4-BE49-F238E27FC236}">
+                <a16:creationId xmlns:a16="http://schemas.microsoft.com/office/drawing/2014/main" id="{5CE87A9A-C6B3-4232-84C2-9C442CAD9C05}"/>
+              </a:ext>
+            </a:extLst>
+          </p:cNvPr>
+          <p:cNvSpPr>
+            <a:spLocks xmlns:a="http://schemas.openxmlformats.org/drawingml/2006/main" noGrp="1"/>
+          </p:cNvSpPr>
+          <p:nvPr/>
+        </p:nvSpPr>
+        <p:spPr>
+          <a:xfrm xmlns:a="http://schemas.openxmlformats.org/drawingml/2006/main">
+            <a:off x="8572500" y="2876550"/>
+            <a:ext cx="2952750" cy="419100"/>
+          </a:xfrm>
+          <a:prstGeom xmlns:a="http://schemas.openxmlformats.org/drawingml/2006/main" prst="rect">
+            <a:avLst/>
+          </a:prstGeom>
+          <a:noFill xmlns:a="http://schemas.openxmlformats.org/drawingml/2006/main"/>
+          <a:ln xmlns:a="http://schemas.openxmlformats.org/drawingml/2006/main" w="0">
+            <a:noFill/>
+            <a:prstDash val="solid"/>
+          </a:ln>
+        </p:spPr>
+        <p:txBody>
+          <a:bodyPr xmlns:a="http://schemas.openxmlformats.org/drawingml/2006/main" wrap="square" lIns="0" tIns="0" rIns="0" bIns="0" anchor="t">
+            <a:normAutofit fontScale="100000"/>
+          </a:bodyPr>
+          <a:lstStyle xmlns:a="http://schemas.openxmlformats.org/drawingml/2006/main"/>
+          <a:p xmlns:a="http://schemas.openxmlformats.org/drawingml/2006/main">
+            <a:pPr algn="l">
+              <a:buNone/>
+              <a:defRPr sz="1500" b="0">
+                <a:solidFill>
+                  <a:srgbClr val="273548"/>
+                </a:solidFill>
+                <a:latin typeface="Arial"/>
+                <a:ea typeface="Arial"/>
+                <a:cs typeface="Arial"/>
+              </a:defRPr>
+            </a:pPr>
+            <a:r>
+              <a:rPr sz="1500" b="0">
+                <a:solidFill>
+                  <a:srgbClr val="273548"/>
+                </a:solidFill>
+                <a:latin typeface="Arial"/>
+                <a:ea typeface="Arial"/>
+                <a:cs typeface="Arial"/>
+              </a:rPr>
+              <a:t>Prior 252 completed sessions</a:t>
+            </a:r>
+          </a:p>
+        </p:txBody>
+      </p:sp>
+      <p:sp>
+        <p:nvSpPr>
+          <p:cNvPr id="18" name="">
+            <a:extLst xmlns:a="http://schemas.openxmlformats.org/drawingml/2006/main">
+              <a:ext uri="{FF2B5EF4-FFF2-40B4-BE49-F238E27FC236}">
+                <a16:creationId xmlns:a16="http://schemas.microsoft.com/office/drawing/2014/main" id="{4C822C36-1982-4EF0-A9F3-89DAA8EAA125}"/>
+              </a:ext>
+            </a:extLst>
+          </p:cNvPr>
+          <p:cNvSpPr>
+            <a:spLocks xmlns:a="http://schemas.openxmlformats.org/drawingml/2006/main" noGrp="1"/>
+          </p:cNvSpPr>
+          <p:nvPr/>
+        </p:nvSpPr>
+        <p:spPr>
+          <a:xfrm xmlns:a="http://schemas.openxmlformats.org/drawingml/2006/main">
+            <a:off x="6667500" y="3333750"/>
+            <a:ext cx="4857750" cy="9525"/>
+          </a:xfrm>
+          <a:prstGeom xmlns:a="http://schemas.openxmlformats.org/drawingml/2006/main" prst="rect">
+            <a:avLst/>
+          </a:prstGeom>
+          <a:solidFill xmlns:a="http://schemas.openxmlformats.org/drawingml/2006/main">
+            <a:srgbClr val="B8BCC4"/>
+          </a:solidFill>
+          <a:ln xmlns:a="http://schemas.openxmlformats.org/drawingml/2006/main" w="0">
+            <a:solidFill>
+              <a:srgbClr val="B8BCC4"/>
+            </a:solidFill>
+            <a:prstDash val="solid"/>
+          </a:ln>
+        </p:spPr>
+      </p:sp>
+      <p:sp>
+        <p:nvSpPr>
+          <p:cNvPr id="19" name="">
+            <a:extLst xmlns:a="http://schemas.openxmlformats.org/drawingml/2006/main">
+              <a:ext uri="{FF2B5EF4-FFF2-40B4-BE49-F238E27FC236}">
+                <a16:creationId xmlns:a16="http://schemas.microsoft.com/office/drawing/2014/main" id="{FFA764C4-9BB1-4E82-A1F0-6E930868FEC3}"/>
+              </a:ext>
+            </a:extLst>
+          </p:cNvPr>
+          <p:cNvSpPr>
+            <a:spLocks xmlns:a="http://schemas.openxmlformats.org/drawingml/2006/main" noGrp="1"/>
+          </p:cNvSpPr>
+          <p:nvPr/>
+        </p:nvSpPr>
+        <p:spPr>
+          <a:xfrm xmlns:a="http://schemas.openxmlformats.org/drawingml/2006/main">
+            <a:off x="6667500" y="3467100"/>
+            <a:ext cx="1809750" cy="323850"/>
+          </a:xfrm>
+          <a:prstGeom xmlns:a="http://schemas.openxmlformats.org/drawingml/2006/main" prst="rect">
+            <a:avLst/>
+          </a:prstGeom>
+          <a:noFill xmlns:a="http://schemas.openxmlformats.org/drawingml/2006/main"/>
+          <a:ln xmlns:a="http://schemas.openxmlformats.org/drawingml/2006/main" w="0">
+            <a:noFill/>
+            <a:prstDash val="solid"/>
+          </a:ln>
+        </p:spPr>
+        <p:txBody>
+          <a:bodyPr xmlns:a="http://schemas.openxmlformats.org/drawingml/2006/main" wrap="square" lIns="0" tIns="0" rIns="0" bIns="0" anchor="t">
+            <a:normAutofit fontScale="100000"/>
+          </a:bodyPr>
+          <a:lstStyle xmlns:a="http://schemas.openxmlformats.org/drawingml/2006/main"/>
+          <a:p xmlns:a="http://schemas.openxmlformats.org/drawingml/2006/main">
+            <a:pPr algn="l">
+              <a:buNone/>
+              <a:defRPr sz="1500" b="1">
+                <a:solidFill>
+                  <a:srgbClr val="667384"/>
+                </a:solidFill>
+                <a:latin typeface="Arial"/>
+                <a:ea typeface="Arial"/>
+                <a:cs typeface="Arial"/>
+              </a:defRPr>
+            </a:pPr>
+            <a:r>
+              <a:rPr sz="1500" b="1">
+                <a:solidFill>
+                  <a:srgbClr val="667384"/>
+                </a:solidFill>
+                <a:latin typeface="Arial"/>
+                <a:ea typeface="Arial"/>
+                <a:cs typeface="Arial"/>
+              </a:rPr>
+              <a:t>States</a:t>
+            </a:r>
+          </a:p>
+        </p:txBody>
+      </p:sp>
+      <p:sp>
+        <p:nvSpPr>
+          <p:cNvPr id="20" name="">
+            <a:extLst xmlns:a="http://schemas.openxmlformats.org/drawingml/2006/main">
+              <a:ext uri="{FF2B5EF4-FFF2-40B4-BE49-F238E27FC236}">
+                <a16:creationId xmlns:a16="http://schemas.microsoft.com/office/drawing/2014/main" id="{62A04E11-771F-482D-97D0-41D18323CD03}"/>
+              </a:ext>
+            </a:extLst>
+          </p:cNvPr>
+          <p:cNvSpPr>
+            <a:spLocks xmlns:a="http://schemas.openxmlformats.org/drawingml/2006/main" noGrp="1"/>
+          </p:cNvSpPr>
+          <p:nvPr/>
+        </p:nvSpPr>
+        <p:spPr>
+          <a:xfrm xmlns:a="http://schemas.openxmlformats.org/drawingml/2006/main">
+            <a:off x="8572500" y="3467100"/>
+            <a:ext cx="2952750" cy="419100"/>
+          </a:xfrm>
+          <a:prstGeom xmlns:a="http://schemas.openxmlformats.org/drawingml/2006/main" prst="rect">
+            <a:avLst/>
+          </a:prstGeom>
+          <a:noFill xmlns:a="http://schemas.openxmlformats.org/drawingml/2006/main"/>
+          <a:ln xmlns:a="http://schemas.openxmlformats.org/drawingml/2006/main" w="0">
+            <a:noFill/>
+            <a:prstDash val="solid"/>
+          </a:ln>
+        </p:spPr>
+        <p:txBody>
+          <a:bodyPr xmlns:a="http://schemas.openxmlformats.org/drawingml/2006/main" wrap="square" lIns="0" tIns="0" rIns="0" bIns="0" anchor="t">
+            <a:normAutofit fontScale="100000"/>
+          </a:bodyPr>
+          <a:lstStyle xmlns:a="http://schemas.openxmlformats.org/drawingml/2006/main"/>
+          <a:p xmlns:a="http://schemas.openxmlformats.org/drawingml/2006/main">
+            <a:pPr algn="l">
+              <a:buNone/>
+              <a:defRPr sz="1500" b="0">
+                <a:solidFill>
+                  <a:srgbClr val="273548"/>
+                </a:solidFill>
+                <a:latin typeface="Arial"/>
+                <a:ea typeface="Arial"/>
+                <a:cs typeface="Arial"/>
+              </a:defRPr>
+            </a:pPr>
+            <a:r>
+              <a:rPr sz="1500" b="0">
+                <a:solidFill>
+                  <a:srgbClr val="273548"/>
+                </a:solidFill>
+                <a:latin typeface="Arial"/>
+                <a:ea typeface="Arial"/>
+                <a:cs typeface="Arial"/>
+              </a:rPr>
+              <a:t>LOW / MEDIUM / HIGH</a:t>
+            </a:r>
+          </a:p>
+        </p:txBody>
+      </p:sp>
+      <p:sp>
+        <p:nvSpPr>
+          <p:cNvPr id="21" name="">
+            <a:extLst xmlns:a="http://schemas.openxmlformats.org/drawingml/2006/main">
+              <a:ext uri="{FF2B5EF4-FFF2-40B4-BE49-F238E27FC236}">
+                <a16:creationId xmlns:a16="http://schemas.microsoft.com/office/drawing/2014/main" id="{2AEA1D46-2EB0-459D-9313-BA82DEAD9553}"/>
+              </a:ext>
+            </a:extLst>
+          </p:cNvPr>
+          <p:cNvSpPr>
+            <a:spLocks xmlns:a="http://schemas.openxmlformats.org/drawingml/2006/main" noGrp="1"/>
+          </p:cNvSpPr>
+          <p:nvPr/>
+        </p:nvSpPr>
+        <p:spPr>
+          <a:xfrm xmlns:a="http://schemas.openxmlformats.org/drawingml/2006/main">
+            <a:off x="6667500" y="3924300"/>
+            <a:ext cx="4857750" cy="9525"/>
+          </a:xfrm>
+          <a:prstGeom xmlns:a="http://schemas.openxmlformats.org/drawingml/2006/main" prst="rect">
+            <a:avLst/>
+          </a:prstGeom>
+          <a:solidFill xmlns:a="http://schemas.openxmlformats.org/drawingml/2006/main">
+            <a:srgbClr val="B8BCC4"/>
+          </a:solidFill>
+          <a:ln xmlns:a="http://schemas.openxmlformats.org/drawingml/2006/main" w="0">
+            <a:solidFill>
+              <a:srgbClr val="B8BCC4"/>
+            </a:solidFill>
+            <a:prstDash val="solid"/>
+          </a:ln>
+        </p:spPr>
+      </p:sp>
+      <p:sp>
+        <p:nvSpPr>
+          <p:cNvPr id="22" name="">
+            <a:extLst xmlns:a="http://schemas.openxmlformats.org/drawingml/2006/main">
+              <a:ext uri="{FF2B5EF4-FFF2-40B4-BE49-F238E27FC236}">
+                <a16:creationId xmlns:a16="http://schemas.microsoft.com/office/drawing/2014/main" id="{AAD0A15B-41F8-429C-8446-F9003B5B4E6F}"/>
+              </a:ext>
+            </a:extLst>
+          </p:cNvPr>
+          <p:cNvSpPr>
+            <a:spLocks xmlns:a="http://schemas.openxmlformats.org/drawingml/2006/main" noGrp="1"/>
+          </p:cNvSpPr>
+          <p:nvPr/>
+        </p:nvSpPr>
+        <p:spPr>
+          <a:xfrm xmlns:a="http://schemas.openxmlformats.org/drawingml/2006/main">
+            <a:off x="6667500" y="4057650"/>
+            <a:ext cx="1809750" cy="323850"/>
+          </a:xfrm>
+          <a:prstGeom xmlns:a="http://schemas.openxmlformats.org/drawingml/2006/main" prst="rect">
+            <a:avLst/>
+          </a:prstGeom>
+          <a:noFill xmlns:a="http://schemas.openxmlformats.org/drawingml/2006/main"/>
+          <a:ln xmlns:a="http://schemas.openxmlformats.org/drawingml/2006/main" w="0">
+            <a:noFill/>
+            <a:prstDash val="solid"/>
+          </a:ln>
+        </p:spPr>
+        <p:txBody>
+          <a:bodyPr xmlns:a="http://schemas.openxmlformats.org/drawingml/2006/main" wrap="square" lIns="0" tIns="0" rIns="0" bIns="0" anchor="t">
+            <a:normAutofit fontScale="100000"/>
+          </a:bodyPr>
+          <a:lstStyle xmlns:a="http://schemas.openxmlformats.org/drawingml/2006/main"/>
+          <a:p xmlns:a="http://schemas.openxmlformats.org/drawingml/2006/main">
+            <a:pPr algn="l">
+              <a:buNone/>
+              <a:defRPr sz="1500" b="1">
+                <a:solidFill>
+                  <a:srgbClr val="667384"/>
+                </a:solidFill>
+                <a:latin typeface="Arial"/>
+                <a:ea typeface="Arial"/>
+                <a:cs typeface="Arial"/>
+              </a:defRPr>
+            </a:pPr>
+            <a:r>
+              <a:rPr sz="1500" b="1">
+                <a:solidFill>
+                  <a:srgbClr val="667384"/>
+                </a:solidFill>
+                <a:latin typeface="Arial"/>
+                <a:ea typeface="Arial"/>
+                <a:cs typeface="Arial"/>
+              </a:rPr>
+              <a:t>Hysteresis</a:t>
+            </a:r>
+          </a:p>
+        </p:txBody>
+      </p:sp>
+      <p:sp>
+        <p:nvSpPr>
+          <p:cNvPr id="23" name="">
+            <a:extLst xmlns:a="http://schemas.openxmlformats.org/drawingml/2006/main">
+              <a:ext uri="{FF2B5EF4-FFF2-40B4-BE49-F238E27FC236}">
+                <a16:creationId xmlns:a16="http://schemas.microsoft.com/office/drawing/2014/main" id="{A13F5128-0043-4265-B48A-E7E4E9B6F96C}"/>
+              </a:ext>
+            </a:extLst>
+          </p:cNvPr>
+          <p:cNvSpPr>
+            <a:spLocks xmlns:a="http://schemas.openxmlformats.org/drawingml/2006/main" noGrp="1"/>
+          </p:cNvSpPr>
+          <p:nvPr/>
+        </p:nvSpPr>
+        <p:spPr>
+          <a:xfrm xmlns:a="http://schemas.openxmlformats.org/drawingml/2006/main">
+            <a:off x="8572500" y="4057650"/>
+            <a:ext cx="2952750" cy="419100"/>
+          </a:xfrm>
+          <a:prstGeom xmlns:a="http://schemas.openxmlformats.org/drawingml/2006/main" prst="rect">
+            <a:avLst/>
+          </a:prstGeom>
+          <a:noFill xmlns:a="http://schemas.openxmlformats.org/drawingml/2006/main"/>
+          <a:ln xmlns:a="http://schemas.openxmlformats.org/drawingml/2006/main" w="0">
+            <a:noFill/>
+            <a:prstDash val="solid"/>
+          </a:ln>
+        </p:spPr>
+        <p:txBody>
+          <a:bodyPr xmlns:a="http://schemas.openxmlformats.org/drawingml/2006/main" wrap="square" lIns="0" tIns="0" rIns="0" bIns="0" anchor="t">
+            <a:normAutofit fontScale="100000"/>
+          </a:bodyPr>
+          <a:lstStyle xmlns:a="http://schemas.openxmlformats.org/drawingml/2006/main"/>
+          <a:p xmlns:a="http://schemas.openxmlformats.org/drawingml/2006/main">
+            <a:pPr algn="l">
+              <a:buNone/>
+              <a:defRPr sz="1500" b="0">
+                <a:solidFill>
+                  <a:srgbClr val="273548"/>
+                </a:solidFill>
+                <a:latin typeface="Arial"/>
+                <a:ea typeface="Arial"/>
+                <a:cs typeface="Arial"/>
+              </a:defRPr>
+            </a:pPr>
+            <a:r>
+              <a:rPr sz="1500" b="0">
+                <a:solidFill>
+                  <a:srgbClr val="273548"/>
+                </a:solidFill>
+                <a:latin typeface="Arial"/>
+                <a:ea typeface="Arial"/>
+                <a:cs typeface="Arial"/>
+              </a:rPr>
+              <a:t>30/40 and 60/70 gates</a:t>
+            </a:r>
+          </a:p>
+        </p:txBody>
+      </p:sp>
+      <p:sp>
+        <p:nvSpPr>
+          <p:cNvPr id="24" name="">
+            <a:extLst xmlns:a="http://schemas.openxmlformats.org/drawingml/2006/main">
+              <a:ext uri="{FF2B5EF4-FFF2-40B4-BE49-F238E27FC236}">
+                <a16:creationId xmlns:a16="http://schemas.microsoft.com/office/drawing/2014/main" id="{1BB63F79-B572-4EF7-8C82-E4140C6E382C}"/>
+              </a:ext>
+            </a:extLst>
+          </p:cNvPr>
+          <p:cNvSpPr>
+            <a:spLocks xmlns:a="http://schemas.openxmlformats.org/drawingml/2006/main" noGrp="1"/>
+          </p:cNvSpPr>
+          <p:nvPr/>
+        </p:nvSpPr>
+        <p:spPr>
+          <a:xfrm xmlns:a="http://schemas.openxmlformats.org/drawingml/2006/main">
+            <a:off x="6667500" y="4514850"/>
+            <a:ext cx="4857750" cy="9525"/>
+          </a:xfrm>
+          <a:prstGeom xmlns:a="http://schemas.openxmlformats.org/drawingml/2006/main" prst="rect">
+            <a:avLst/>
+          </a:prstGeom>
+          <a:solidFill xmlns:a="http://schemas.openxmlformats.org/drawingml/2006/main">
+            <a:srgbClr val="B8BCC4"/>
+          </a:solidFill>
+          <a:ln xmlns:a="http://schemas.openxmlformats.org/drawingml/2006/main" w="0">
+            <a:solidFill>
+              <a:srgbClr val="B8BCC4"/>
+            </a:solidFill>
+            <a:prstDash val="solid"/>
+          </a:ln>
+        </p:spPr>
+      </p:sp>
+      <p:sp>
+        <p:nvSpPr>
+          <p:cNvPr id="25" name="">
+            <a:extLst xmlns:a="http://schemas.openxmlformats.org/drawingml/2006/main">
+              <a:ext uri="{FF2B5EF4-FFF2-40B4-BE49-F238E27FC236}">
+                <a16:creationId xmlns:a16="http://schemas.microsoft.com/office/drawing/2014/main" id="{F58FD0A4-5938-4ECC-AC99-491391233E24}"/>
+              </a:ext>
+            </a:extLst>
+          </p:cNvPr>
+          <p:cNvSpPr>
+            <a:spLocks xmlns:a="http://schemas.openxmlformats.org/drawingml/2006/main" noGrp="1"/>
+          </p:cNvSpPr>
+          <p:nvPr/>
+        </p:nvSpPr>
+        <p:spPr>
+          <a:xfrm xmlns:a="http://schemas.openxmlformats.org/drawingml/2006/main">
+            <a:off x="6667500" y="4648200"/>
+            <a:ext cx="1809750" cy="323850"/>
+          </a:xfrm>
+          <a:prstGeom xmlns:a="http://schemas.openxmlformats.org/drawingml/2006/main" prst="rect">
+            <a:avLst/>
+          </a:prstGeom>
+          <a:noFill xmlns:a="http://schemas.openxmlformats.org/drawingml/2006/main"/>
+          <a:ln xmlns:a="http://schemas.openxmlformats.org/drawingml/2006/main" w="0">
+            <a:noFill/>
+            <a:prstDash val="solid"/>
+          </a:ln>
+        </p:spPr>
+        <p:txBody>
+          <a:bodyPr xmlns:a="http://schemas.openxmlformats.org/drawingml/2006/main" wrap="square" lIns="0" tIns="0" rIns="0" bIns="0" anchor="t">
+            <a:normAutofit fontScale="100000"/>
+          </a:bodyPr>
+          <a:lstStyle xmlns:a="http://schemas.openxmlformats.org/drawingml/2006/main"/>
+          <a:p xmlns:a="http://schemas.openxmlformats.org/drawingml/2006/main">
+            <a:pPr algn="l">
+              <a:buNone/>
+              <a:defRPr sz="1500" b="1">
+                <a:solidFill>
+                  <a:srgbClr val="667384"/>
+                </a:solidFill>
+                <a:latin typeface="Arial"/>
+                <a:ea typeface="Arial"/>
+                <a:cs typeface="Arial"/>
+              </a:defRPr>
+            </a:pPr>
+            <a:r>
+              <a:rPr sz="1500" b="1">
+                <a:solidFill>
+                  <a:srgbClr val="667384"/>
+                </a:solidFill>
+                <a:latin typeface="Arial"/>
+                <a:ea typeface="Arial"/>
+                <a:cs typeface="Arial"/>
+              </a:rPr>
+              <a:t>Timing</a:t>
+            </a:r>
+          </a:p>
+        </p:txBody>
+      </p:sp>
+      <p:sp>
+        <p:nvSpPr>
+          <p:cNvPr id="26" name="">
+            <a:extLst xmlns:a="http://schemas.openxmlformats.org/drawingml/2006/main">
+              <a:ext uri="{FF2B5EF4-FFF2-40B4-BE49-F238E27FC236}">
+                <a16:creationId xmlns:a16="http://schemas.microsoft.com/office/drawing/2014/main" id="{AA292260-C22B-4C56-9ED9-C8744785B552}"/>
+              </a:ext>
+            </a:extLst>
+          </p:cNvPr>
+          <p:cNvSpPr>
+            <a:spLocks xmlns:a="http://schemas.openxmlformats.org/drawingml/2006/main" noGrp="1"/>
+          </p:cNvSpPr>
+          <p:nvPr/>
+        </p:nvSpPr>
+        <p:spPr>
+          <a:xfrm xmlns:a="http://schemas.openxmlformats.org/drawingml/2006/main">
+            <a:off x="8572500" y="4648200"/>
+            <a:ext cx="2952750" cy="419100"/>
+          </a:xfrm>
+          <a:prstGeom xmlns:a="http://schemas.openxmlformats.org/drawingml/2006/main" prst="rect">
+            <a:avLst/>
+          </a:prstGeom>
+          <a:noFill xmlns:a="http://schemas.openxmlformats.org/drawingml/2006/main"/>
+          <a:ln xmlns:a="http://schemas.openxmlformats.org/drawingml/2006/main" w="0">
+            <a:noFill/>
+            <a:prstDash val="solid"/>
+          </a:ln>
+        </p:spPr>
+        <p:txBody>
+          <a:bodyPr xmlns:a="http://schemas.openxmlformats.org/drawingml/2006/main" wrap="square" lIns="0" tIns="0" rIns="0" bIns="0" anchor="t">
+            <a:normAutofit fontScale="100000"/>
+          </a:bodyPr>
+          <a:lstStyle xmlns:a="http://schemas.openxmlformats.org/drawingml/2006/main"/>
+          <a:p xmlns:a="http://schemas.openxmlformats.org/drawingml/2006/main">
+            <a:pPr algn="l">
+              <a:buNone/>
+              <a:defRPr sz="1500" b="0">
+                <a:solidFill>
+                  <a:srgbClr val="273548"/>
+                </a:solidFill>
+                <a:latin typeface="Arial"/>
+                <a:ea typeface="Arial"/>
+                <a:cs typeface="Arial"/>
+              </a:defRPr>
+            </a:pPr>
+            <a:r>
+              <a:rPr sz="1500" b="0">
+                <a:solidFill>
+                  <a:srgbClr val="273548"/>
+                </a:solidFill>
+                <a:latin typeface="Arial"/>
+                <a:ea typeface="Arial"/>
+                <a:cs typeface="Arial"/>
+              </a:rPr>
+              <a:t>Known at anchor close t</a:t>
+            </a:r>
+          </a:p>
+        </p:txBody>
+      </p:sp>
+      <p:sp>
+        <p:nvSpPr>
+          <p:cNvPr id="27" name="">
+            <a:extLst xmlns:a="http://schemas.openxmlformats.org/drawingml/2006/main">
+              <a:ext uri="{FF2B5EF4-FFF2-40B4-BE49-F238E27FC236}">
+                <a16:creationId xmlns:a16="http://schemas.microsoft.com/office/drawing/2014/main" id="{6C617A11-8542-47F5-AD42-16C68CB863E7}"/>
+              </a:ext>
+            </a:extLst>
+          </p:cNvPr>
+          <p:cNvSpPr>
+            <a:spLocks xmlns:a="http://schemas.openxmlformats.org/drawingml/2006/main" noGrp="1"/>
+          </p:cNvSpPr>
+          <p:nvPr/>
+        </p:nvSpPr>
+        <p:spPr>
+          <a:xfrm xmlns:a="http://schemas.openxmlformats.org/drawingml/2006/main">
+            <a:off x="6667500" y="5105400"/>
+            <a:ext cx="4857750" cy="9525"/>
+          </a:xfrm>
+          <a:prstGeom xmlns:a="http://schemas.openxmlformats.org/drawingml/2006/main" prst="rect">
+            <a:avLst/>
+          </a:prstGeom>
+          <a:solidFill xmlns:a="http://schemas.openxmlformats.org/drawingml/2006/main">
+            <a:srgbClr val="B8BCC4"/>
+          </a:solidFill>
+          <a:ln xmlns:a="http://schemas.openxmlformats.org/drawingml/2006/main" w="0">
+            <a:solidFill>
+              <a:srgbClr val="B8BCC4"/>
+            </a:solidFill>
+            <a:prstDash val="solid"/>
+          </a:ln>
+        </p:spPr>
+      </p:sp>
+      <p:sp>
+        <p:nvSpPr>
+          <p:cNvPr id="28" name="">
+            <a:extLst xmlns:a="http://schemas.openxmlformats.org/drawingml/2006/main">
+              <a:ext uri="{FF2B5EF4-FFF2-40B4-BE49-F238E27FC236}">
+                <a16:creationId xmlns:a16="http://schemas.microsoft.com/office/drawing/2014/main" id="{D3258514-91F0-4BFE-BE7D-A95A1C826021}"/>
+              </a:ext>
+            </a:extLst>
+          </p:cNvPr>
+          <p:cNvSpPr>
+            <a:spLocks xmlns:a="http://schemas.openxmlformats.org/drawingml/2006/main" noGrp="1"/>
+          </p:cNvSpPr>
+          <p:nvPr/>
+        </p:nvSpPr>
+        <p:spPr>
+          <a:xfrm xmlns:a="http://schemas.openxmlformats.org/drawingml/2006/main">
+            <a:off x="6667500" y="5238750"/>
+            <a:ext cx="1809750" cy="323850"/>
+          </a:xfrm>
+          <a:prstGeom xmlns:a="http://schemas.openxmlformats.org/drawingml/2006/main" prst="rect">
+            <a:avLst/>
+          </a:prstGeom>
+          <a:noFill xmlns:a="http://schemas.openxmlformats.org/drawingml/2006/main"/>
+          <a:ln xmlns:a="http://schemas.openxmlformats.org/drawingml/2006/main" w="0">
+            <a:noFill/>
+            <a:prstDash val="solid"/>
+          </a:ln>
+        </p:spPr>
+        <p:txBody>
+          <a:bodyPr xmlns:a="http://schemas.openxmlformats.org/drawingml/2006/main" wrap="square" lIns="0" tIns="0" rIns="0" bIns="0" anchor="t">
+            <a:normAutofit fontScale="100000"/>
+          </a:bodyPr>
+          <a:lstStyle xmlns:a="http://schemas.openxmlformats.org/drawingml/2006/main"/>
+          <a:p xmlns:a="http://schemas.openxmlformats.org/drawingml/2006/main">
+            <a:pPr algn="l">
+              <a:buNone/>
+              <a:defRPr sz="1500" b="1">
+                <a:solidFill>
+                  <a:srgbClr val="667384"/>
+                </a:solidFill>
+                <a:latin typeface="Arial"/>
+                <a:ea typeface="Arial"/>
+                <a:cs typeface="Arial"/>
+              </a:defRPr>
+            </a:pPr>
+            <a:r>
+              <a:rPr sz="1500" b="1">
+                <a:solidFill>
+                  <a:srgbClr val="667384"/>
+                </a:solidFill>
+                <a:latin typeface="Arial"/>
+                <a:ea typeface="Arial"/>
+                <a:cs typeface="Arial"/>
+              </a:rPr>
+              <a:t>Surface</a:t>
+            </a:r>
+          </a:p>
+        </p:txBody>
+      </p:sp>
+      <p:sp>
+        <p:nvSpPr>
+          <p:cNvPr id="29" name="">
+            <a:extLst xmlns:a="http://schemas.openxmlformats.org/drawingml/2006/main">
+              <a:ext uri="{FF2B5EF4-FFF2-40B4-BE49-F238E27FC236}">
+                <a16:creationId xmlns:a16="http://schemas.microsoft.com/office/drawing/2014/main" id="{F73C58E3-8C22-4D23-8076-93E173576113}"/>
+              </a:ext>
+            </a:extLst>
+          </p:cNvPr>
+          <p:cNvSpPr>
+            <a:spLocks xmlns:a="http://schemas.openxmlformats.org/drawingml/2006/main" noGrp="1"/>
+          </p:cNvSpPr>
+          <p:nvPr/>
+        </p:nvSpPr>
+        <p:spPr>
+          <a:xfrm xmlns:a="http://schemas.openxmlformats.org/drawingml/2006/main">
+            <a:off x="8572500" y="5238750"/>
+            <a:ext cx="2952750" cy="419100"/>
+          </a:xfrm>
+          <a:prstGeom xmlns:a="http://schemas.openxmlformats.org/drawingml/2006/main" prst="rect">
+            <a:avLst/>
+          </a:prstGeom>
+          <a:noFill xmlns:a="http://schemas.openxmlformats.org/drawingml/2006/main"/>
+          <a:ln xmlns:a="http://schemas.openxmlformats.org/drawingml/2006/main" w="0">
+            <a:noFill/>
+            <a:prstDash val="solid"/>
+          </a:ln>
+        </p:spPr>
+        <p:txBody>
+          <a:bodyPr xmlns:a="http://schemas.openxmlformats.org/drawingml/2006/main" wrap="square" lIns="0" tIns="0" rIns="0" bIns="0" anchor="t">
+            <a:normAutofit fontScale="100000"/>
+          </a:bodyPr>
+          <a:lstStyle xmlns:a="http://schemas.openxmlformats.org/drawingml/2006/main"/>
+          <a:p xmlns:a="http://schemas.openxmlformats.org/drawingml/2006/main">
+            <a:pPr algn="l">
+              <a:buNone/>
+              <a:defRPr sz="1500" b="0">
+                <a:solidFill>
+                  <a:srgbClr val="273548"/>
+                </a:solidFill>
+                <a:latin typeface="Arial"/>
+                <a:ea typeface="Arial"/>
+                <a:cs typeface="Arial"/>
+              </a:defRPr>
+            </a:pPr>
+            <a:r>
+              <a:rPr sz="1500" b="0">
+                <a:solidFill>
+                  <a:srgbClr val="273548"/>
+                </a:solidFill>
+                <a:latin typeface="Arial"/>
+                <a:ea typeface="Arial"/>
+                <a:cs typeface="Arial"/>
+              </a:rPr>
+              <a:t>Same 81 horizon pairs</a:t>
+            </a:r>
+          </a:p>
+        </p:txBody>
+      </p:sp>
+    </p:spTree>
+    <p:extLst>
+      <p:ext uri="{BB962C8B-B14F-4D97-AF65-F5344CB8AC3E}">
+        <p14:creationId xmlns:p14="http://schemas.microsoft.com/office/powerpoint/2010/main" val="1397283360"/>
+      </p:ext>
+    </p:extLst>
+  </p:cSld>
+</p:sld>
+</file>
+
+<file path=ppt/slides/slide34.xml><?xml version="1.0" encoding="utf-8"?>
+<p:sld xmlns:p="http://schemas.openxmlformats.org/presentationml/2006/main">
+  <p:cSld>
+    <p:bg>
+      <p:bgPr>
+        <a:solidFill xmlns:a="http://schemas.openxmlformats.org/drawingml/2006/main">
+          <a:srgbClr val="FFFFFF"/>
+        </a:solidFill>
+      </p:bgPr>
+    </p:bg>
+    <p:spTree>
+      <p:nvGrpSpPr>
+        <p:cNvPr id="1" name=""/>
+        <p:cNvGrpSpPr/>
+        <p:nvPr/>
+      </p:nvGrpSpPr>
+      <p:grpSpPr>
+        <a:xfrm xmlns:a="http://schemas.openxmlformats.org/drawingml/2006/main"/>
+      </p:grpSpPr>
+      <p:sp>
+        <p:nvSpPr>
+          <p:cNvPr id="14" name="section-5">
+            <a:extLst xmlns:a="http://schemas.openxmlformats.org/drawingml/2006/main">
+              <a:ext uri="{FF2B5EF4-FFF2-40B4-BE49-F238E27FC236}">
+                <a16:creationId xmlns:a16="http://schemas.microsoft.com/office/drawing/2014/main" id="{7D217279-BBB9-4442-BD43-E35AFD380A36}"/>
+              </a:ext>
+            </a:extLst>
+          </p:cNvPr>
+          <p:cNvSpPr>
+            <a:spLocks xmlns:a="http://schemas.openxmlformats.org/drawingml/2006/main" noGrp="1"/>
+          </p:cNvSpPr>
+          <p:nvPr/>
+        </p:nvSpPr>
+        <p:spPr>
+          <a:xfrm xmlns:a="http://schemas.openxmlformats.org/drawingml/2006/main">
+            <a:off x="457200" y="228600"/>
+            <a:ext cx="4191000" cy="228600"/>
+          </a:xfrm>
+          <a:prstGeom xmlns:a="http://schemas.openxmlformats.org/drawingml/2006/main" prst="rect">
+            <a:avLst/>
+          </a:prstGeom>
+          <a:noFill xmlns:a="http://schemas.openxmlformats.org/drawingml/2006/main"/>
+          <a:ln xmlns:a="http://schemas.openxmlformats.org/drawingml/2006/main" w="0">
+            <a:noFill/>
+            <a:prstDash val="solid"/>
+          </a:ln>
+        </p:spPr>
+        <p:txBody>
+          <a:bodyPr xmlns:a="http://schemas.openxmlformats.org/drawingml/2006/main" wrap="square" lIns="0" tIns="0" rIns="0" bIns="0" anchor="t">
+            <a:normAutofit fontScale="100000"/>
+          </a:bodyPr>
+          <a:lstStyle xmlns:a="http://schemas.openxmlformats.org/drawingml/2006/main"/>
+          <a:p xmlns:a="http://schemas.openxmlformats.org/drawingml/2006/main">
+            <a:pPr algn="l">
+              <a:buNone/>
+              <a:defRPr sz="1200" b="1">
+                <a:solidFill>
+                  <a:srgbClr val="667384"/>
+                </a:solidFill>
+                <a:latin typeface="Arial"/>
+                <a:ea typeface="Arial"/>
+                <a:cs typeface="Arial"/>
+              </a:defRPr>
+            </a:pPr>
+            <a:r>
+              <a:rPr sz="1200" b="1">
+                <a:solidFill>
+                  <a:srgbClr val="667384"/>
+                </a:solidFill>
+                <a:latin typeface="Arial"/>
+                <a:ea typeface="Arial"/>
+                <a:cs typeface="Arial"/>
+              </a:rPr>
+              <a:t>TSLA DESCRIPTIVE MICROSCOPE</a:t>
+            </a:r>
+          </a:p>
+        </p:txBody>
+      </p:sp>
+      <p:sp>
+        <p:nvSpPr>
+          <p:cNvPr id="2" name="title-5">
+            <a:extLst xmlns:a="http://schemas.openxmlformats.org/drawingml/2006/main">
+              <a:ext uri="{FF2B5EF4-FFF2-40B4-BE49-F238E27FC236}">
+                <a16:creationId xmlns:a16="http://schemas.microsoft.com/office/drawing/2014/main" id="{ACF70291-6FC2-4F25-8EF7-C5343297C791}"/>
+              </a:ext>
+            </a:extLst>
+          </p:cNvPr>
+          <p:cNvSpPr>
+            <a:spLocks xmlns:a="http://schemas.openxmlformats.org/drawingml/2006/main" noGrp="1"/>
+          </p:cNvSpPr>
+          <p:nvPr/>
+        </p:nvSpPr>
+        <p:spPr>
+          <a:xfrm xmlns:a="http://schemas.openxmlformats.org/drawingml/2006/main">
+            <a:off x="457200" y="533400"/>
+            <a:ext cx="11277600" cy="628650"/>
+          </a:xfrm>
+          <a:prstGeom xmlns:a="http://schemas.openxmlformats.org/drawingml/2006/main" prst="rect">
+            <a:avLst/>
+          </a:prstGeom>
+          <a:noFill xmlns:a="http://schemas.openxmlformats.org/drawingml/2006/main"/>
+          <a:ln xmlns:a="http://schemas.openxmlformats.org/drawingml/2006/main" w="0">
+            <a:noFill/>
+            <a:prstDash val="solid"/>
+          </a:ln>
+        </p:spPr>
+        <p:txBody>
+          <a:bodyPr xmlns:a="http://schemas.openxmlformats.org/drawingml/2006/main" wrap="square" lIns="0" tIns="0" rIns="0" bIns="0" anchor="t">
+            <a:normAutofit fontScale="100000"/>
+          </a:bodyPr>
+          <a:lstStyle xmlns:a="http://schemas.openxmlformats.org/drawingml/2006/main"/>
+          <a:p xmlns:a="http://schemas.openxmlformats.org/drawingml/2006/main">
+            <a:pPr algn="l">
+              <a:buNone/>
+              <a:defRPr sz="3525" b="1">
+                <a:solidFill>
+                  <a:srgbClr val="000000"/>
+                </a:solidFill>
+                <a:latin typeface="Arial"/>
+                <a:ea typeface="Arial"/>
+                <a:cs typeface="Arial"/>
+              </a:defRPr>
+            </a:pPr>
+            <a:r>
+              <a:rPr sz="3525" b="1">
+                <a:solidFill>
+                  <a:srgbClr val="000000"/>
+                </a:solidFill>
+                <a:latin typeface="Arial"/>
+                <a:ea typeface="Arial"/>
+                <a:cs typeface="Arial"/>
+              </a:rPr>
+              <a:t>SPY ATR% supplies context—not TSLA direction</a:t>
+            </a:r>
+          </a:p>
+        </p:txBody>
+      </p:sp>
+      <p:sp>
+        <p:nvSpPr>
+          <p:cNvPr id="3" name="">
+            <a:extLst xmlns:a="http://schemas.openxmlformats.org/drawingml/2006/main">
+              <a:ext uri="{FF2B5EF4-FFF2-40B4-BE49-F238E27FC236}">
+                <a16:creationId xmlns:a16="http://schemas.microsoft.com/office/drawing/2014/main" id="{DC8E3755-2109-4A95-AAD7-09D4B54CD317}"/>
+              </a:ext>
+            </a:extLst>
+          </p:cNvPr>
+          <p:cNvSpPr>
+            <a:spLocks xmlns:a="http://schemas.openxmlformats.org/drawingml/2006/main" noGrp="1"/>
+          </p:cNvSpPr>
+          <p:nvPr/>
+        </p:nvSpPr>
+        <p:spPr>
+          <a:xfrm xmlns:a="http://schemas.openxmlformats.org/drawingml/2006/main">
+            <a:off x="457200" y="1200150"/>
+            <a:ext cx="11277600" cy="19050"/>
+          </a:xfrm>
+          <a:prstGeom xmlns:a="http://schemas.openxmlformats.org/drawingml/2006/main" prst="rect">
+            <a:avLst/>
+          </a:prstGeom>
+          <a:solidFill xmlns:a="http://schemas.openxmlformats.org/drawingml/2006/main">
+            <a:srgbClr val="B8BCC4"/>
+          </a:solidFill>
+          <a:ln xmlns:a="http://schemas.openxmlformats.org/drawingml/2006/main" w="0">
+            <a:solidFill>
+              <a:srgbClr val="B8BCC4"/>
+            </a:solidFill>
+            <a:prstDash val="solid"/>
+          </a:ln>
+        </p:spPr>
+      </p:sp>
+      <p:sp>
+        <p:nvSpPr>
+          <p:cNvPr id="4" name="footer-left-5">
+            <a:extLst xmlns:a="http://schemas.openxmlformats.org/drawingml/2006/main">
+              <a:ext uri="{FF2B5EF4-FFF2-40B4-BE49-F238E27FC236}">
+                <a16:creationId xmlns:a16="http://schemas.microsoft.com/office/drawing/2014/main" id="{3D616FCB-FD1B-4926-8056-5988E7D3FD76}"/>
+              </a:ext>
+            </a:extLst>
+          </p:cNvPr>
+          <p:cNvSpPr>
+            <a:spLocks xmlns:a="http://schemas.openxmlformats.org/drawingml/2006/main" noGrp="1"/>
+          </p:cNvSpPr>
+          <p:nvPr/>
+        </p:nvSpPr>
+        <p:spPr>
+          <a:xfrm xmlns:a="http://schemas.openxmlformats.org/drawingml/2006/main">
+            <a:off x="457200" y="6515100"/>
+            <a:ext cx="3429000" cy="171450"/>
+          </a:xfrm>
+          <a:prstGeom xmlns:a="http://schemas.openxmlformats.org/drawingml/2006/main" prst="rect">
+            <a:avLst/>
+          </a:prstGeom>
+          <a:noFill xmlns:a="http://schemas.openxmlformats.org/drawingml/2006/main"/>
+          <a:ln xmlns:a="http://schemas.openxmlformats.org/drawingml/2006/main" w="0">
+            <a:noFill/>
+            <a:prstDash val="solid"/>
+          </a:ln>
+        </p:spPr>
+        <p:txBody>
+          <a:bodyPr xmlns:a="http://schemas.openxmlformats.org/drawingml/2006/main" wrap="square" lIns="0" tIns="0" rIns="0" bIns="0" anchor="t">
+            <a:normAutofit fontScale="100000"/>
+          </a:bodyPr>
+          <a:lstStyle xmlns:a="http://schemas.openxmlformats.org/drawingml/2006/main"/>
+          <a:p xmlns:a="http://schemas.openxmlformats.org/drawingml/2006/main">
+            <a:pPr algn="l">
+              <a:buNone/>
+              <a:defRPr sz="1050" b="0">
+                <a:solidFill>
+                  <a:srgbClr val="667384"/>
+                </a:solidFill>
+                <a:latin typeface="Arial"/>
+                <a:ea typeface="Arial"/>
+                <a:cs typeface="Arial"/>
+              </a:defRPr>
+            </a:pPr>
+            <a:r>
+              <a:rPr sz="1050" b="0">
+                <a:solidFill>
+                  <a:srgbClr val="667384"/>
+                </a:solidFill>
+                <a:latin typeface="Arial"/>
+                <a:ea typeface="Arial"/>
+                <a:cs typeface="Arial"/>
+              </a:rPr>
+              <a:t>Adjusted daily TSLA | 2018-2023</a:t>
+            </a:r>
+          </a:p>
+        </p:txBody>
+      </p:sp>
+      <p:sp>
+        <p:nvSpPr>
+          <p:cNvPr id="5" name="footer-number-5">
+            <a:extLst xmlns:a="http://schemas.openxmlformats.org/drawingml/2006/main">
+              <a:ext uri="{FF2B5EF4-FFF2-40B4-BE49-F238E27FC236}">
+                <a16:creationId xmlns:a16="http://schemas.microsoft.com/office/drawing/2014/main" id="{7E3BECCF-F54F-4D27-BB58-7ED627475AF5}"/>
+              </a:ext>
+            </a:extLst>
+          </p:cNvPr>
+          <p:cNvSpPr>
+            <a:spLocks xmlns:a="http://schemas.openxmlformats.org/drawingml/2006/main" noGrp="1"/>
+          </p:cNvSpPr>
+          <p:nvPr/>
+        </p:nvSpPr>
+        <p:spPr>
+          <a:xfrm xmlns:a="http://schemas.openxmlformats.org/drawingml/2006/main">
+            <a:off x="11239500" y="6496050"/>
+            <a:ext cx="495300" cy="190500"/>
+          </a:xfrm>
+          <a:prstGeom xmlns:a="http://schemas.openxmlformats.org/drawingml/2006/main" prst="rect">
+            <a:avLst/>
+          </a:prstGeom>
+          <a:noFill xmlns:a="http://schemas.openxmlformats.org/drawingml/2006/main"/>
+          <a:ln xmlns:a="http://schemas.openxmlformats.org/drawingml/2006/main" w="0">
+            <a:noFill/>
+            <a:prstDash val="solid"/>
+          </a:ln>
+        </p:spPr>
+        <p:txBody>
+          <a:bodyPr xmlns:a="http://schemas.openxmlformats.org/drawingml/2006/main" wrap="square" lIns="0" tIns="0" rIns="0" bIns="0" anchor="t">
+            <a:normAutofit fontScale="100000"/>
+          </a:bodyPr>
+          <a:lstStyle xmlns:a="http://schemas.openxmlformats.org/drawingml/2006/main"/>
+          <a:p xmlns:a="http://schemas.openxmlformats.org/drawingml/2006/main">
+            <a:pPr algn="r">
+              <a:buNone/>
+              <a:defRPr sz="1050" b="0">
+                <a:solidFill>
+                  <a:srgbClr val="667384"/>
+                </a:solidFill>
+                <a:latin typeface="Arial"/>
+                <a:ea typeface="Arial"/>
+                <a:cs typeface="Arial"/>
+              </a:defRPr>
+            </a:pPr>
+            <a:r>
+              <a:rPr sz="1050" b="0">
+                <a:solidFill>
+                  <a:srgbClr val="667384"/>
+                </a:solidFill>
+                <a:latin typeface="Arial"/>
+                <a:ea typeface="Arial"/>
+                <a:cs typeface="Arial"/>
+              </a:rPr>
+              <a:t>34</a:t>
+            </a:r>
+          </a:p>
+        </p:txBody>
+      </p:sp>
+      <p:sp>
+        <p:nvSpPr>
+          <p:cNvPr id="6" name="">
+            <a:extLst xmlns:a="http://schemas.openxmlformats.org/drawingml/2006/main">
+              <a:ext uri="{FF2B5EF4-FFF2-40B4-BE49-F238E27FC236}">
+                <a16:creationId xmlns:a16="http://schemas.microsoft.com/office/drawing/2014/main" id="{C96C60D3-C5F7-4C39-991D-FB86EB75687F}"/>
+              </a:ext>
+            </a:extLst>
+          </p:cNvPr>
+          <p:cNvSpPr>
+            <a:spLocks xmlns:a="http://schemas.openxmlformats.org/drawingml/2006/main" noGrp="1"/>
+          </p:cNvSpPr>
+          <p:nvPr/>
+        </p:nvSpPr>
+        <p:spPr>
+          <a:xfrm xmlns:a="http://schemas.openxmlformats.org/drawingml/2006/main">
+            <a:off x="323850" y="1381125"/>
+            <a:ext cx="8572500" cy="4819650"/>
+          </a:xfrm>
+          <a:prstGeom xmlns:a="http://schemas.openxmlformats.org/drawingml/2006/main" prst="rect">
+            <a:avLst/>
+          </a:prstGeom>
+          <a:solidFill xmlns:a="http://schemas.openxmlformats.org/drawingml/2006/main">
+            <a:srgbClr val="FFFFFF"/>
+          </a:solidFill>
+          <a:ln xmlns:a="http://schemas.openxmlformats.org/drawingml/2006/main" w="9525">
+            <a:solidFill>
+              <a:srgbClr val="B8BCC4"/>
+            </a:solidFill>
+            <a:prstDash val="solid"/>
+          </a:ln>
+        </p:spPr>
+      </p:sp>
+      <p:sp>
+        <p:nvSpPr>
+          <p:cNvPr id="8" name="">
+            <a:extLst xmlns:a="http://schemas.openxmlformats.org/drawingml/2006/main">
+              <a:ext uri="{FF2B5EF4-FFF2-40B4-BE49-F238E27FC236}">
+                <a16:creationId xmlns:a16="http://schemas.microsoft.com/office/drawing/2014/main" id="{C5B493DE-9AA4-4FF1-8BE2-28F352E8FA07}"/>
+              </a:ext>
+            </a:extLst>
+          </p:cNvPr>
+          <p:cNvSpPr>
+            <a:spLocks xmlns:a="http://schemas.openxmlformats.org/drawingml/2006/main" noGrp="1"/>
+          </p:cNvSpPr>
+          <p:nvPr/>
+        </p:nvSpPr>
+        <p:spPr>
+          <a:xfrm xmlns:a="http://schemas.openxmlformats.org/drawingml/2006/main">
+            <a:off x="9201150" y="1581150"/>
+            <a:ext cx="2190750" cy="361950"/>
+          </a:xfrm>
+          <a:prstGeom xmlns:a="http://schemas.openxmlformats.org/drawingml/2006/main" prst="rect">
+            <a:avLst/>
+          </a:prstGeom>
+          <a:noFill xmlns:a="http://schemas.openxmlformats.org/drawingml/2006/main"/>
+          <a:ln xmlns:a="http://schemas.openxmlformats.org/drawingml/2006/main" w="0">
+            <a:noFill/>
+            <a:prstDash val="solid"/>
+          </a:ln>
+        </p:spPr>
+        <p:txBody>
+          <a:bodyPr xmlns:a="http://schemas.openxmlformats.org/drawingml/2006/main" wrap="square" lIns="0" tIns="0" rIns="0" bIns="0" anchor="t">
+            <a:normAutofit fontScale="100000"/>
+          </a:bodyPr>
+          <a:lstStyle xmlns:a="http://schemas.openxmlformats.org/drawingml/2006/main"/>
+          <a:p xmlns:a="http://schemas.openxmlformats.org/drawingml/2006/main">
+            <a:pPr algn="l">
+              <a:buNone/>
+              <a:defRPr sz="2100" b="1">
+                <a:solidFill>
+                  <a:srgbClr val="000000"/>
+                </a:solidFill>
+                <a:latin typeface="Arial"/>
+                <a:ea typeface="Arial"/>
+                <a:cs typeface="Arial"/>
+              </a:defRPr>
+            </a:pPr>
+            <a:r>
+              <a:rPr sz="2100" b="1">
+                <a:solidFill>
+                  <a:srgbClr val="000000"/>
+                </a:solidFill>
+                <a:latin typeface="Arial"/>
+                <a:ea typeface="Arial"/>
+                <a:cs typeface="Arial"/>
+              </a:rPr>
+              <a:t>How</a:t>
+            </a:r>
+          </a:p>
+        </p:txBody>
+      </p:sp>
+      <p:sp>
+        <p:nvSpPr>
+          <p:cNvPr id="9" name="">
+            <a:extLst xmlns:a="http://schemas.openxmlformats.org/drawingml/2006/main">
+              <a:ext uri="{FF2B5EF4-FFF2-40B4-BE49-F238E27FC236}">
+                <a16:creationId xmlns:a16="http://schemas.microsoft.com/office/drawing/2014/main" id="{5B6B1C17-35A6-411A-A67C-A4A72F63EF67}"/>
+              </a:ext>
+            </a:extLst>
+          </p:cNvPr>
+          <p:cNvSpPr>
+            <a:spLocks xmlns:a="http://schemas.openxmlformats.org/drawingml/2006/main" noGrp="1"/>
+          </p:cNvSpPr>
+          <p:nvPr/>
+        </p:nvSpPr>
+        <p:spPr>
+          <a:xfrm xmlns:a="http://schemas.openxmlformats.org/drawingml/2006/main">
+            <a:off x="9201150" y="2038350"/>
+            <a:ext cx="2400300" cy="1143000"/>
+          </a:xfrm>
+          <a:prstGeom xmlns:a="http://schemas.openxmlformats.org/drawingml/2006/main" prst="rect">
+            <a:avLst/>
+          </a:prstGeom>
+          <a:noFill xmlns:a="http://schemas.openxmlformats.org/drawingml/2006/main"/>
+          <a:ln xmlns:a="http://schemas.openxmlformats.org/drawingml/2006/main" w="0">
+            <a:noFill/>
+            <a:prstDash val="solid"/>
+          </a:ln>
+        </p:spPr>
+        <p:txBody>
+          <a:bodyPr xmlns:a="http://schemas.openxmlformats.org/drawingml/2006/main" wrap="square" lIns="0" tIns="0" rIns="0" bIns="0" anchor="t">
+            <a:normAutofit fontScale="100000"/>
+          </a:bodyPr>
+          <a:lstStyle xmlns:a="http://schemas.openxmlformats.org/drawingml/2006/main"/>
+          <a:p xmlns:a="http://schemas.openxmlformats.org/drawingml/2006/main">
+            <a:pPr algn="l">
+              <a:buNone/>
+              <a:defRPr sz="1500" b="0">
+                <a:solidFill>
+                  <a:srgbClr val="273548"/>
+                </a:solidFill>
+                <a:latin typeface="Arial"/>
+                <a:ea typeface="Arial"/>
+                <a:cs typeface="Arial"/>
+              </a:defRPr>
+            </a:pPr>
+            <a:r>
+              <a:rPr sz="1500" b="0">
+                <a:solidFill>
+                  <a:srgbClr val="273548"/>
+                </a:solidFill>
+                <a:latin typeface="Arial"/>
+                <a:ea typeface="Arial"/>
+                <a:cs typeface="Arial"/>
+              </a:rPr>
+              <a:t>Accepted SPY state uses Wilder ATR14 / close, ranked against the prior 252 completed SPY ATR% observations.</a:t>
+            </a:r>
+          </a:p>
+        </p:txBody>
+      </p:sp>
+      <p:sp>
+        <p:nvSpPr>
+          <p:cNvPr id="10" name="">
+            <a:extLst xmlns:a="http://schemas.openxmlformats.org/drawingml/2006/main">
+              <a:ext uri="{FF2B5EF4-FFF2-40B4-BE49-F238E27FC236}">
+                <a16:creationId xmlns:a16="http://schemas.microsoft.com/office/drawing/2014/main" id="{1E6C96CB-CC04-417E-9ADF-6D8B711B5273}"/>
+              </a:ext>
+            </a:extLst>
+          </p:cNvPr>
+          <p:cNvSpPr>
+            <a:spLocks xmlns:a="http://schemas.openxmlformats.org/drawingml/2006/main" noGrp="1"/>
+          </p:cNvSpPr>
+          <p:nvPr/>
+        </p:nvSpPr>
+        <p:spPr>
+          <a:xfrm xmlns:a="http://schemas.openxmlformats.org/drawingml/2006/main">
+            <a:off x="9201150" y="3409950"/>
+            <a:ext cx="2190750" cy="361950"/>
+          </a:xfrm>
+          <a:prstGeom xmlns:a="http://schemas.openxmlformats.org/drawingml/2006/main" prst="rect">
+            <a:avLst/>
+          </a:prstGeom>
+          <a:noFill xmlns:a="http://schemas.openxmlformats.org/drawingml/2006/main"/>
+          <a:ln xmlns:a="http://schemas.openxmlformats.org/drawingml/2006/main" w="0">
+            <a:noFill/>
+            <a:prstDash val="solid"/>
+          </a:ln>
+        </p:spPr>
+        <p:txBody>
+          <a:bodyPr xmlns:a="http://schemas.openxmlformats.org/drawingml/2006/main" wrap="square" lIns="0" tIns="0" rIns="0" bIns="0" anchor="t">
+            <a:normAutofit fontScale="100000"/>
+          </a:bodyPr>
+          <a:lstStyle xmlns:a="http://schemas.openxmlformats.org/drawingml/2006/main"/>
+          <a:p xmlns:a="http://schemas.openxmlformats.org/drawingml/2006/main">
+            <a:pPr algn="l">
+              <a:buNone/>
+              <a:defRPr sz="2100" b="1">
+                <a:solidFill>
+                  <a:srgbClr val="000000"/>
+                </a:solidFill>
+                <a:latin typeface="Arial"/>
+                <a:ea typeface="Arial"/>
+                <a:cs typeface="Arial"/>
+              </a:defRPr>
+            </a:pPr>
+            <a:r>
+              <a:rPr sz="2100" b="1">
+                <a:solidFill>
+                  <a:srgbClr val="000000"/>
+                </a:solidFill>
+                <a:latin typeface="Arial"/>
+                <a:ea typeface="Arial"/>
+                <a:cs typeface="Arial"/>
+              </a:rPr>
+              <a:t>Read</a:t>
+            </a:r>
+          </a:p>
+        </p:txBody>
+      </p:sp>
+      <p:sp>
+        <p:nvSpPr>
+          <p:cNvPr id="11" name="">
+            <a:extLst xmlns:a="http://schemas.openxmlformats.org/drawingml/2006/main">
+              <a:ext uri="{FF2B5EF4-FFF2-40B4-BE49-F238E27FC236}">
+                <a16:creationId xmlns:a16="http://schemas.microsoft.com/office/drawing/2014/main" id="{6C2CCFF6-12C5-4DA0-960D-99266D20441C}"/>
+              </a:ext>
+            </a:extLst>
+          </p:cNvPr>
+          <p:cNvSpPr>
+            <a:spLocks xmlns:a="http://schemas.openxmlformats.org/drawingml/2006/main" noGrp="1"/>
+          </p:cNvSpPr>
+          <p:nvPr/>
+        </p:nvSpPr>
+        <p:spPr>
+          <a:xfrm xmlns:a="http://schemas.openxmlformats.org/drawingml/2006/main">
+            <a:off x="9201150" y="3867150"/>
+            <a:ext cx="2400300" cy="1657350"/>
+          </a:xfrm>
+          <a:prstGeom xmlns:a="http://schemas.openxmlformats.org/drawingml/2006/main" prst="rect">
+            <a:avLst/>
+          </a:prstGeom>
+          <a:noFill xmlns:a="http://schemas.openxmlformats.org/drawingml/2006/main"/>
+          <a:ln xmlns:a="http://schemas.openxmlformats.org/drawingml/2006/main" w="0">
+            <a:noFill/>
+            <a:prstDash val="solid"/>
+          </a:ln>
+        </p:spPr>
+        <p:txBody>
+          <a:bodyPr xmlns:a="http://schemas.openxmlformats.org/drawingml/2006/main" wrap="square" lIns="0" tIns="0" rIns="0" bIns="0" anchor="t">
+            <a:normAutofit fontScale="100000"/>
+          </a:bodyPr>
+          <a:lstStyle xmlns:a="http://schemas.openxmlformats.org/drawingml/2006/main"/>
+          <a:p xmlns:a="http://schemas.openxmlformats.org/drawingml/2006/main">
+            <a:pPr algn="l">
+              <a:buNone/>
+              <a:defRPr sz="1500" b="0">
+                <a:solidFill>
+                  <a:srgbClr val="273548"/>
+                </a:solidFill>
+                <a:latin typeface="Arial"/>
+                <a:ea typeface="Arial"/>
+                <a:cs typeface="Arial"/>
+              </a:defRPr>
+            </a:pPr>
+            <a:r>
+              <a:rPr sz="1500" b="0">
+                <a:solidFill>
+                  <a:srgbClr val="273548"/>
+                </a:solidFill>
+                <a:latin typeface="Arial"/>
+                <a:ea typeface="Arial"/>
+                <a:cs typeface="Arial"/>
+              </a:rPr>
+              <a:t>Bands are SPY states over TSLA price. Blue LOW and red HIGH describe movement capacity—not bullish or bearish calls.</a:t>
+            </a:r>
+          </a:p>
+        </p:txBody>
+      </p:sp>
+      <p:sp>
+        <p:nvSpPr>
+          <p:cNvPr id="12" name="">
+            <a:extLst xmlns:a="http://schemas.openxmlformats.org/drawingml/2006/main">
+              <a:ext uri="{FF2B5EF4-FFF2-40B4-BE49-F238E27FC236}">
+                <a16:creationId xmlns:a16="http://schemas.microsoft.com/office/drawing/2014/main" id="{0ACC076C-14CF-4CC6-9A1F-9DE2F654A640}"/>
+              </a:ext>
+            </a:extLst>
+          </p:cNvPr>
+          <p:cNvSpPr>
+            <a:spLocks xmlns:a="http://schemas.openxmlformats.org/drawingml/2006/main" noGrp="1"/>
+          </p:cNvSpPr>
+          <p:nvPr/>
+        </p:nvSpPr>
+        <p:spPr>
+          <a:xfrm xmlns:a="http://schemas.openxmlformats.org/drawingml/2006/main">
+            <a:off x="9201150" y="5715000"/>
+            <a:ext cx="2400300" cy="38100"/>
+          </a:xfrm>
+          <a:prstGeom xmlns:a="http://schemas.openxmlformats.org/drawingml/2006/main" prst="rect">
+            <a:avLst/>
+          </a:prstGeom>
+          <a:solidFill xmlns:a="http://schemas.openxmlformats.org/drawingml/2006/main">
+            <a:srgbClr val="2A9D6F"/>
+          </a:solidFill>
+          <a:ln xmlns:a="http://schemas.openxmlformats.org/drawingml/2006/main" w="0">
+            <a:solidFill>
+              <a:srgbClr val="2A9D6F"/>
+            </a:solidFill>
+            <a:prstDash val="solid"/>
+          </a:ln>
+        </p:spPr>
+      </p:sp>
+      <p:sp>
+        <p:nvSpPr>
+          <p:cNvPr id="13" name="">
+            <a:extLst xmlns:a="http://schemas.openxmlformats.org/drawingml/2006/main">
+              <a:ext uri="{FF2B5EF4-FFF2-40B4-BE49-F238E27FC236}">
+                <a16:creationId xmlns:a16="http://schemas.microsoft.com/office/drawing/2014/main" id="{75B62FEB-4FFC-484D-8635-E7157EEBB857}"/>
+              </a:ext>
+            </a:extLst>
+          </p:cNvPr>
+          <p:cNvSpPr>
+            <a:spLocks xmlns:a="http://schemas.openxmlformats.org/drawingml/2006/main" noGrp="1"/>
+          </p:cNvSpPr>
+          <p:nvPr/>
+        </p:nvSpPr>
+        <p:spPr>
+          <a:xfrm xmlns:a="http://schemas.openxmlformats.org/drawingml/2006/main">
+            <a:off x="9201150" y="5867400"/>
+            <a:ext cx="2400300" cy="419100"/>
+          </a:xfrm>
+          <a:prstGeom xmlns:a="http://schemas.openxmlformats.org/drawingml/2006/main" prst="rect">
+            <a:avLst/>
+          </a:prstGeom>
+          <a:noFill xmlns:a="http://schemas.openxmlformats.org/drawingml/2006/main"/>
+          <a:ln xmlns:a="http://schemas.openxmlformats.org/drawingml/2006/main" w="0">
+            <a:noFill/>
+            <a:prstDash val="solid"/>
+          </a:ln>
+        </p:spPr>
+        <p:txBody>
+          <a:bodyPr xmlns:a="http://schemas.openxmlformats.org/drawingml/2006/main" wrap="square" lIns="0" tIns="0" rIns="0" bIns="0" anchor="t">
+            <a:normAutofit fontScale="100000"/>
+          </a:bodyPr>
+          <a:lstStyle xmlns:a="http://schemas.openxmlformats.org/drawingml/2006/main"/>
+          <a:p xmlns:a="http://schemas.openxmlformats.org/drawingml/2006/main">
+            <a:pPr algn="l">
+              <a:buNone/>
+              <a:defRPr sz="1275" b="1">
+                <a:solidFill>
+                  <a:srgbClr val="2A9D6F"/>
+                </a:solidFill>
+                <a:latin typeface="Arial"/>
+                <a:ea typeface="Arial"/>
+                <a:cs typeface="Arial"/>
+              </a:defRPr>
+            </a:pPr>
+            <a:r>
+              <a:rPr sz="1275" b="1">
+                <a:solidFill>
+                  <a:srgbClr val="2A9D6F"/>
+                </a:solidFill>
+                <a:latin typeface="Arial"/>
+                <a:ea typeface="Arial"/>
+                <a:cs typeface="Arial"/>
+              </a:rPr>
+              <a:t>Descriptive state—not a future-return claim</a:t>
+            </a:r>
+          </a:p>
+        </p:txBody>
+      </p:sp>
+      <p:pic>
+        <p:nvPicPr>
+          <p:cNvPr id="28" name=""/>
+          <p:cNvPicPr>
+            <a:picLocks xmlns:a="http://schemas.openxmlformats.org/drawingml/2006/main" noChangeAspect="1"/>
+          </p:cNvPicPr>
+          <p:nvPr/>
+        </p:nvPicPr>
+        <p:blipFill>
+          <a:blip xmlns:r="http://schemas.openxmlformats.org/officeDocument/2006/relationships" xmlns:a="http://schemas.openxmlformats.org/drawingml/2006/main" r:embed="Rdcb9f657c9134c9f"/>
+          <a:stretch xmlns:a="http://schemas.openxmlformats.org/drawingml/2006/main"/>
+        </p:blipFill>
+        <p:spPr>
+          <a:xfrm xmlns:a="http://schemas.openxmlformats.org/drawingml/2006/main" flipH="0" flipV="0">
+            <a:off x="325967" y="1381125"/>
+            <a:ext cx="8568267" cy="4819650"/>
+          </a:xfrm>
+          <a:prstGeom xmlns:a="http://schemas.openxmlformats.org/drawingml/2006/main" prst="rect">
+            <a:avLst/>
+          </a:prstGeom>
+        </p:spPr>
+      </p:pic>
+    </p:spTree>
+    <p:extLst>
+      <p:ext uri="{BB962C8B-B14F-4D97-AF65-F5344CB8AC3E}">
+        <p14:creationId xmlns:p14="http://schemas.microsoft.com/office/powerpoint/2010/main" val="317191340"/>
+      </p:ext>
+    </p:extLst>
+  </p:cSld>
+</p:sld>
+</file>
+
+<file path=ppt/slides/slide35.xml><?xml version="1.0" encoding="utf-8"?>
+<p:sld xmlns:p="http://schemas.openxmlformats.org/presentationml/2006/main">
+  <p:cSld>
+    <p:bg>
+      <p:bgPr>
+        <a:solidFill xmlns:a="http://schemas.openxmlformats.org/drawingml/2006/main">
+          <a:srgbClr val="FFFFFF"/>
+        </a:solidFill>
+      </p:bgPr>
+    </p:bg>
+    <p:spTree>
+      <p:nvGrpSpPr>
+        <p:cNvPr id="1" name=""/>
+        <p:cNvGrpSpPr/>
+        <p:nvPr/>
+      </p:nvGrpSpPr>
+      <p:grpSpPr>
+        <a:xfrm xmlns:a="http://schemas.openxmlformats.org/drawingml/2006/main"/>
+      </p:grpSpPr>
+      <p:sp>
+        <p:nvSpPr>
+          <p:cNvPr id="9" name="section-4">
+            <a:extLst xmlns:a="http://schemas.openxmlformats.org/drawingml/2006/main">
+              <a:ext uri="{FF2B5EF4-FFF2-40B4-BE49-F238E27FC236}">
+                <a16:creationId xmlns:a16="http://schemas.microsoft.com/office/drawing/2014/main" id="{8AE0A271-669A-49F0-A82E-C4438BEE27D9}"/>
+              </a:ext>
+            </a:extLst>
+          </p:cNvPr>
+          <p:cNvSpPr>
+            <a:spLocks xmlns:a="http://schemas.openxmlformats.org/drawingml/2006/main" noGrp="1"/>
+          </p:cNvSpPr>
+          <p:nvPr/>
+        </p:nvSpPr>
+        <p:spPr>
+          <a:xfrm xmlns:a="http://schemas.openxmlformats.org/drawingml/2006/main">
+            <a:off x="457200" y="228600"/>
+            <a:ext cx="4191000" cy="228600"/>
+          </a:xfrm>
+          <a:prstGeom xmlns:a="http://schemas.openxmlformats.org/drawingml/2006/main" prst="rect">
+            <a:avLst/>
+          </a:prstGeom>
+          <a:noFill xmlns:a="http://schemas.openxmlformats.org/drawingml/2006/main"/>
+          <a:ln xmlns:a="http://schemas.openxmlformats.org/drawingml/2006/main" w="0">
+            <a:noFill/>
+            <a:prstDash val="solid"/>
+          </a:ln>
+        </p:spPr>
+        <p:txBody>
+          <a:bodyPr xmlns:a="http://schemas.openxmlformats.org/drawingml/2006/main" wrap="square" lIns="0" tIns="0" rIns="0" bIns="0" anchor="t">
+            <a:normAutofit fontScale="100000"/>
+          </a:bodyPr>
+          <a:lstStyle xmlns:a="http://schemas.openxmlformats.org/drawingml/2006/main"/>
+          <a:p xmlns:a="http://schemas.openxmlformats.org/drawingml/2006/main">
+            <a:pPr algn="l">
+              <a:buNone/>
+              <a:defRPr sz="1200" b="1">
+                <a:solidFill>
+                  <a:srgbClr val="667384"/>
+                </a:solidFill>
+                <a:latin typeface="Arial"/>
+                <a:ea typeface="Arial"/>
+                <a:cs typeface="Arial"/>
+              </a:defRPr>
+            </a:pPr>
+            <a:r>
+              <a:rPr sz="1200" b="1">
+                <a:solidFill>
+                  <a:srgbClr val="667384"/>
+                </a:solidFill>
+                <a:latin typeface="Arial"/>
+                <a:ea typeface="Arial"/>
+                <a:cs typeface="Arial"/>
+              </a:rPr>
+              <a:t>TSLA DESCRIPTIVE MICROSCOPE</a:t>
+            </a:r>
+          </a:p>
+        </p:txBody>
+      </p:sp>
+      <p:sp>
+        <p:nvSpPr>
+          <p:cNvPr id="2" name="title-4">
+            <a:extLst xmlns:a="http://schemas.openxmlformats.org/drawingml/2006/main">
+              <a:ext uri="{FF2B5EF4-FFF2-40B4-BE49-F238E27FC236}">
+                <a16:creationId xmlns:a16="http://schemas.microsoft.com/office/drawing/2014/main" id="{50C6F92F-721A-4252-9CF8-B5C9B01C7310}"/>
+              </a:ext>
+            </a:extLst>
+          </p:cNvPr>
+          <p:cNvSpPr>
+            <a:spLocks xmlns:a="http://schemas.openxmlformats.org/drawingml/2006/main" noGrp="1"/>
+          </p:cNvSpPr>
+          <p:nvPr/>
+        </p:nvSpPr>
+        <p:spPr>
+          <a:xfrm xmlns:a="http://schemas.openxmlformats.org/drawingml/2006/main">
+            <a:off x="457200" y="533400"/>
+            <a:ext cx="11277600" cy="628650"/>
+          </a:xfrm>
+          <a:prstGeom xmlns:a="http://schemas.openxmlformats.org/drawingml/2006/main" prst="rect">
+            <a:avLst/>
+          </a:prstGeom>
+          <a:noFill xmlns:a="http://schemas.openxmlformats.org/drawingml/2006/main"/>
+          <a:ln xmlns:a="http://schemas.openxmlformats.org/drawingml/2006/main" w="0">
+            <a:noFill/>
+            <a:prstDash val="solid"/>
+          </a:ln>
+        </p:spPr>
+        <p:txBody>
+          <a:bodyPr xmlns:a="http://schemas.openxmlformats.org/drawingml/2006/main" wrap="square" lIns="0" tIns="0" rIns="0" bIns="0" anchor="t">
+            <a:normAutofit fontScale="100000"/>
+          </a:bodyPr>
+          <a:lstStyle xmlns:a="http://schemas.openxmlformats.org/drawingml/2006/main"/>
+          <a:p xmlns:a="http://schemas.openxmlformats.org/drawingml/2006/main">
+            <a:pPr algn="l">
+              <a:buNone/>
+              <a:defRPr sz="3525" b="1">
+                <a:solidFill>
+                  <a:srgbClr val="000000"/>
+                </a:solidFill>
+                <a:latin typeface="Arial"/>
+                <a:ea typeface="Arial"/>
+                <a:cs typeface="Arial"/>
+              </a:defRPr>
+            </a:pPr>
+            <a:r>
+              <a:rPr sz="3525" b="1">
+                <a:solidFill>
+                  <a:srgbClr val="000000"/>
+                </a:solidFill>
+                <a:latin typeface="Arial"/>
+                <a:ea typeface="Arial"/>
+                <a:cs typeface="Arial"/>
+              </a:rPr>
+              <a:t>SPY LOW reveals TSLA continuation</a:t>
+            </a:r>
+          </a:p>
+        </p:txBody>
+      </p:sp>
+      <p:sp>
+        <p:nvSpPr>
+          <p:cNvPr id="3" name="">
+            <a:extLst xmlns:a="http://schemas.openxmlformats.org/drawingml/2006/main">
+              <a:ext uri="{FF2B5EF4-FFF2-40B4-BE49-F238E27FC236}">
+                <a16:creationId xmlns:a16="http://schemas.microsoft.com/office/drawing/2014/main" id="{242399F2-4D0A-4337-B17E-DB3599DC380F}"/>
+              </a:ext>
+            </a:extLst>
+          </p:cNvPr>
+          <p:cNvSpPr>
+            <a:spLocks xmlns:a="http://schemas.openxmlformats.org/drawingml/2006/main" noGrp="1"/>
+          </p:cNvSpPr>
+          <p:nvPr/>
+        </p:nvSpPr>
+        <p:spPr>
+          <a:xfrm xmlns:a="http://schemas.openxmlformats.org/drawingml/2006/main">
+            <a:off x="457200" y="1200150"/>
+            <a:ext cx="11277600" cy="19050"/>
+          </a:xfrm>
+          <a:prstGeom xmlns:a="http://schemas.openxmlformats.org/drawingml/2006/main" prst="rect">
+            <a:avLst/>
+          </a:prstGeom>
+          <a:solidFill xmlns:a="http://schemas.openxmlformats.org/drawingml/2006/main">
+            <a:srgbClr val="B8BCC4"/>
+          </a:solidFill>
+          <a:ln xmlns:a="http://schemas.openxmlformats.org/drawingml/2006/main" w="0">
+            <a:solidFill>
+              <a:srgbClr val="B8BCC4"/>
+            </a:solidFill>
+            <a:prstDash val="solid"/>
+          </a:ln>
+        </p:spPr>
+      </p:sp>
+      <p:sp>
+        <p:nvSpPr>
+          <p:cNvPr id="4" name="footer-left-4">
+            <a:extLst xmlns:a="http://schemas.openxmlformats.org/drawingml/2006/main">
+              <a:ext uri="{FF2B5EF4-FFF2-40B4-BE49-F238E27FC236}">
+                <a16:creationId xmlns:a16="http://schemas.microsoft.com/office/drawing/2014/main" id="{BF8B82CA-1E48-4669-BAD8-1FF8C09FCBFB}"/>
+              </a:ext>
+            </a:extLst>
+          </p:cNvPr>
+          <p:cNvSpPr>
+            <a:spLocks xmlns:a="http://schemas.openxmlformats.org/drawingml/2006/main" noGrp="1"/>
+          </p:cNvSpPr>
+          <p:nvPr/>
+        </p:nvSpPr>
+        <p:spPr>
+          <a:xfrm xmlns:a="http://schemas.openxmlformats.org/drawingml/2006/main">
+            <a:off x="457200" y="6515100"/>
+            <a:ext cx="3429000" cy="171450"/>
+          </a:xfrm>
+          <a:prstGeom xmlns:a="http://schemas.openxmlformats.org/drawingml/2006/main" prst="rect">
+            <a:avLst/>
+          </a:prstGeom>
+          <a:noFill xmlns:a="http://schemas.openxmlformats.org/drawingml/2006/main"/>
+          <a:ln xmlns:a="http://schemas.openxmlformats.org/drawingml/2006/main" w="0">
+            <a:noFill/>
+            <a:prstDash val="solid"/>
+          </a:ln>
+        </p:spPr>
+        <p:txBody>
+          <a:bodyPr xmlns:a="http://schemas.openxmlformats.org/drawingml/2006/main" wrap="square" lIns="0" tIns="0" rIns="0" bIns="0" anchor="t">
+            <a:normAutofit fontScale="100000"/>
+          </a:bodyPr>
+          <a:lstStyle xmlns:a="http://schemas.openxmlformats.org/drawingml/2006/main"/>
+          <a:p xmlns:a="http://schemas.openxmlformats.org/drawingml/2006/main">
+            <a:pPr algn="l">
+              <a:buNone/>
+              <a:defRPr sz="1050" b="0">
+                <a:solidFill>
+                  <a:srgbClr val="667384"/>
+                </a:solidFill>
+                <a:latin typeface="Arial"/>
+                <a:ea typeface="Arial"/>
+                <a:cs typeface="Arial"/>
+              </a:defRPr>
+            </a:pPr>
+            <a:r>
+              <a:rPr sz="1050" b="0">
+                <a:solidFill>
+                  <a:srgbClr val="667384"/>
+                </a:solidFill>
+                <a:latin typeface="Arial"/>
+                <a:ea typeface="Arial"/>
+                <a:cs typeface="Arial"/>
+              </a:rPr>
+              <a:t>Adjusted daily TSLA | 2018-2023</a:t>
+            </a:r>
+          </a:p>
+        </p:txBody>
+      </p:sp>
+      <p:sp>
+        <p:nvSpPr>
+          <p:cNvPr id="5" name="footer-number-4">
+            <a:extLst xmlns:a="http://schemas.openxmlformats.org/drawingml/2006/main">
+              <a:ext uri="{FF2B5EF4-FFF2-40B4-BE49-F238E27FC236}">
+                <a16:creationId xmlns:a16="http://schemas.microsoft.com/office/drawing/2014/main" id="{05959AEC-B0A5-45F0-A65B-C94C3E5A032F}"/>
+              </a:ext>
+            </a:extLst>
+          </p:cNvPr>
+          <p:cNvSpPr>
+            <a:spLocks xmlns:a="http://schemas.openxmlformats.org/drawingml/2006/main" noGrp="1"/>
+          </p:cNvSpPr>
+          <p:nvPr/>
+        </p:nvSpPr>
+        <p:spPr>
+          <a:xfrm xmlns:a="http://schemas.openxmlformats.org/drawingml/2006/main">
+            <a:off x="11239500" y="6496050"/>
+            <a:ext cx="495300" cy="190500"/>
+          </a:xfrm>
+          <a:prstGeom xmlns:a="http://schemas.openxmlformats.org/drawingml/2006/main" prst="rect">
+            <a:avLst/>
+          </a:prstGeom>
+          <a:noFill xmlns:a="http://schemas.openxmlformats.org/drawingml/2006/main"/>
+          <a:ln xmlns:a="http://schemas.openxmlformats.org/drawingml/2006/main" w="0">
+            <a:noFill/>
+            <a:prstDash val="solid"/>
+          </a:ln>
+        </p:spPr>
+        <p:txBody>
+          <a:bodyPr xmlns:a="http://schemas.openxmlformats.org/drawingml/2006/main" wrap="square" lIns="0" tIns="0" rIns="0" bIns="0" anchor="t">
+            <a:normAutofit fontScale="100000"/>
+          </a:bodyPr>
+          <a:lstStyle xmlns:a="http://schemas.openxmlformats.org/drawingml/2006/main"/>
+          <a:p xmlns:a="http://schemas.openxmlformats.org/drawingml/2006/main">
+            <a:pPr algn="r">
+              <a:buNone/>
+              <a:defRPr sz="1050" b="0">
+                <a:solidFill>
+                  <a:srgbClr val="667384"/>
+                </a:solidFill>
+                <a:latin typeface="Arial"/>
+                <a:ea typeface="Arial"/>
+                <a:cs typeface="Arial"/>
+              </a:defRPr>
+            </a:pPr>
+            <a:r>
+              <a:rPr sz="1050" b="0">
+                <a:solidFill>
+                  <a:srgbClr val="667384"/>
+                </a:solidFill>
+                <a:latin typeface="Arial"/>
+                <a:ea typeface="Arial"/>
+                <a:cs typeface="Arial"/>
+              </a:rPr>
+              <a:t>35</a:t>
+            </a:r>
+          </a:p>
+        </p:txBody>
+      </p:sp>
+      <p:sp>
+        <p:nvSpPr>
+          <p:cNvPr id="6" name="">
+            <a:extLst xmlns:a="http://schemas.openxmlformats.org/drawingml/2006/main">
+              <a:ext uri="{FF2B5EF4-FFF2-40B4-BE49-F238E27FC236}">
+                <a16:creationId xmlns:a16="http://schemas.microsoft.com/office/drawing/2014/main" id="{9C8DEA29-E57D-4C8D-8538-2028FF89DA7C}"/>
+              </a:ext>
+            </a:extLst>
+          </p:cNvPr>
+          <p:cNvSpPr>
+            <a:spLocks xmlns:a="http://schemas.openxmlformats.org/drawingml/2006/main" noGrp="1"/>
+          </p:cNvSpPr>
+          <p:nvPr/>
+        </p:nvSpPr>
+        <p:spPr>
+          <a:xfrm xmlns:a="http://schemas.openxmlformats.org/drawingml/2006/main">
+            <a:off x="1000125" y="1352550"/>
+            <a:ext cx="10191750" cy="4905375"/>
+          </a:xfrm>
+          <a:prstGeom xmlns:a="http://schemas.openxmlformats.org/drawingml/2006/main" prst="rect">
+            <a:avLst/>
+          </a:prstGeom>
+          <a:solidFill xmlns:a="http://schemas.openxmlformats.org/drawingml/2006/main">
+            <a:srgbClr val="FFFFFF"/>
+          </a:solidFill>
+          <a:ln xmlns:a="http://schemas.openxmlformats.org/drawingml/2006/main" w="9525">
+            <a:solidFill>
+              <a:srgbClr val="B8BCC4"/>
+            </a:solidFill>
+            <a:prstDash val="solid"/>
+          </a:ln>
+        </p:spPr>
+      </p:sp>
+      <p:sp>
+        <p:nvSpPr>
+          <p:cNvPr id="8" name="">
+            <a:extLst xmlns:a="http://schemas.openxmlformats.org/drawingml/2006/main">
+              <a:ext uri="{FF2B5EF4-FFF2-40B4-BE49-F238E27FC236}">
+                <a16:creationId xmlns:a16="http://schemas.microsoft.com/office/drawing/2014/main" id="{4346A5F2-8CC4-4151-9BDB-346D47A3096B}"/>
+              </a:ext>
+            </a:extLst>
+          </p:cNvPr>
+          <p:cNvSpPr>
+            <a:spLocks xmlns:a="http://schemas.openxmlformats.org/drawingml/2006/main" noGrp="1"/>
+          </p:cNvSpPr>
+          <p:nvPr/>
+        </p:nvSpPr>
+        <p:spPr>
+          <a:xfrm xmlns:a="http://schemas.openxmlformats.org/drawingml/2006/main">
+            <a:off x="1143000" y="6286500"/>
+            <a:ext cx="9906000" cy="171450"/>
+          </a:xfrm>
+          <a:prstGeom xmlns:a="http://schemas.openxmlformats.org/drawingml/2006/main" prst="rect">
+            <a:avLst/>
+          </a:prstGeom>
+          <a:noFill xmlns:a="http://schemas.openxmlformats.org/drawingml/2006/main"/>
+          <a:ln xmlns:a="http://schemas.openxmlformats.org/drawingml/2006/main" w="0">
+            <a:noFill/>
+            <a:prstDash val="solid"/>
+          </a:ln>
+        </p:spPr>
+        <p:txBody>
+          <a:bodyPr xmlns:a="http://schemas.openxmlformats.org/drawingml/2006/main" wrap="square" lIns="0" tIns="0" rIns="0" bIns="0" anchor="t">
+            <a:normAutofit fontScale="93750"/>
+          </a:bodyPr>
+          <a:lstStyle xmlns:a="http://schemas.openxmlformats.org/drawingml/2006/main"/>
+          <a:p xmlns:a="http://schemas.openxmlformats.org/drawingml/2006/main">
+            <a:pPr algn="ctr">
+              <a:buNone/>
+              <a:defRPr sz="1200" b="0">
+                <a:solidFill>
+                  <a:srgbClr val="667384"/>
+                </a:solidFill>
+                <a:latin typeface="Arial"/>
+                <a:ea typeface="Arial"/>
+                <a:cs typeface="Arial"/>
+              </a:defRPr>
+            </a:pPr>
+            <a:r>
+              <a:rPr sz="1200" b="0">
+                <a:solidFill>
+                  <a:srgbClr val="667384"/>
+                </a:solidFill>
+                <a:latin typeface="Arial"/>
+                <a:ea typeface="Arial"/>
+                <a:cs typeface="Arial"/>
+              </a:rPr>
+              <a:t>72/81 cells positive; strongest +0.228 at 5 prior / 10 forward; 0/81 within-state BH passes.</a:t>
+            </a:r>
+          </a:p>
+        </p:txBody>
+      </p:sp>
+      <p:pic>
+        <p:nvPicPr>
+          <p:cNvPr id="18" name=""/>
+          <p:cNvPicPr>
+            <a:picLocks xmlns:a="http://schemas.openxmlformats.org/drawingml/2006/main" noChangeAspect="1"/>
+          </p:cNvPicPr>
+          <p:nvPr/>
+        </p:nvPicPr>
+        <p:blipFill>
+          <a:blip xmlns:r="http://schemas.openxmlformats.org/officeDocument/2006/relationships" xmlns:a="http://schemas.openxmlformats.org/drawingml/2006/main" r:embed="R12f2b917ce894b65"/>
+          <a:stretch xmlns:a="http://schemas.openxmlformats.org/drawingml/2006/main"/>
+        </p:blipFill>
+        <p:spPr>
+          <a:xfrm xmlns:a="http://schemas.openxmlformats.org/drawingml/2006/main" flipH="0" flipV="0">
+            <a:off x="2942545" y="1352550"/>
+            <a:ext cx="6306911" cy="4905375"/>
+          </a:xfrm>
+          <a:prstGeom xmlns:a="http://schemas.openxmlformats.org/drawingml/2006/main" prst="rect">
+            <a:avLst/>
+          </a:prstGeom>
+        </p:spPr>
+      </p:pic>
+    </p:spTree>
+    <p:extLst>
+      <p:ext uri="{BB962C8B-B14F-4D97-AF65-F5344CB8AC3E}">
+        <p14:creationId xmlns:p14="http://schemas.microsoft.com/office/powerpoint/2010/main" val="400872380"/>
+      </p:ext>
+    </p:extLst>
+  </p:cSld>
+</p:sld>
+</file>
+
+<file path=ppt/slides/slide36.xml><?xml version="1.0" encoding="utf-8"?>
+<p:sld xmlns:p="http://schemas.openxmlformats.org/presentationml/2006/main">
+  <p:cSld>
+    <p:bg>
+      <p:bgPr>
+        <a:solidFill xmlns:a="http://schemas.openxmlformats.org/drawingml/2006/main">
+          <a:srgbClr val="FFFFFF"/>
+        </a:solidFill>
+      </p:bgPr>
+    </p:bg>
+    <p:spTree>
+      <p:nvGrpSpPr>
+        <p:cNvPr id="1" name=""/>
+        <p:cNvGrpSpPr/>
+        <p:nvPr/>
+      </p:nvGrpSpPr>
+      <p:grpSpPr>
+        <a:xfrm xmlns:a="http://schemas.openxmlformats.org/drawingml/2006/main"/>
+      </p:grpSpPr>
+      <p:sp>
+        <p:nvSpPr>
+          <p:cNvPr id="9" name="section-4">
+            <a:extLst xmlns:a="http://schemas.openxmlformats.org/drawingml/2006/main">
+              <a:ext uri="{FF2B5EF4-FFF2-40B4-BE49-F238E27FC236}">
+                <a16:creationId xmlns:a16="http://schemas.microsoft.com/office/drawing/2014/main" id="{8AE0A271-669A-49F0-A82E-C4438BEE27D9}"/>
+              </a:ext>
+            </a:extLst>
+          </p:cNvPr>
+          <p:cNvSpPr>
+            <a:spLocks xmlns:a="http://schemas.openxmlformats.org/drawingml/2006/main" noGrp="1"/>
+          </p:cNvSpPr>
+          <p:nvPr/>
+        </p:nvSpPr>
+        <p:spPr>
+          <a:xfrm xmlns:a="http://schemas.openxmlformats.org/drawingml/2006/main">
+            <a:off x="457200" y="228600"/>
+            <a:ext cx="4191000" cy="228600"/>
+          </a:xfrm>
+          <a:prstGeom xmlns:a="http://schemas.openxmlformats.org/drawingml/2006/main" prst="rect">
+            <a:avLst/>
+          </a:prstGeom>
+          <a:noFill xmlns:a="http://schemas.openxmlformats.org/drawingml/2006/main"/>
+          <a:ln xmlns:a="http://schemas.openxmlformats.org/drawingml/2006/main" w="0">
+            <a:noFill/>
+            <a:prstDash val="solid"/>
+          </a:ln>
+        </p:spPr>
+        <p:txBody>
+          <a:bodyPr xmlns:a="http://schemas.openxmlformats.org/drawingml/2006/main" wrap="square" lIns="0" tIns="0" rIns="0" bIns="0" anchor="t">
+            <a:normAutofit fontScale="100000"/>
+          </a:bodyPr>
+          <a:lstStyle xmlns:a="http://schemas.openxmlformats.org/drawingml/2006/main"/>
+          <a:p xmlns:a="http://schemas.openxmlformats.org/drawingml/2006/main">
+            <a:pPr algn="l">
+              <a:buNone/>
+              <a:defRPr sz="1200" b="1">
+                <a:solidFill>
+                  <a:srgbClr val="667384"/>
+                </a:solidFill>
+                <a:latin typeface="Arial"/>
+                <a:ea typeface="Arial"/>
+                <a:cs typeface="Arial"/>
+              </a:defRPr>
+            </a:pPr>
+            <a:r>
+              <a:rPr sz="1200" b="1">
+                <a:solidFill>
+                  <a:srgbClr val="667384"/>
+                </a:solidFill>
+                <a:latin typeface="Arial"/>
+                <a:ea typeface="Arial"/>
+                <a:cs typeface="Arial"/>
+              </a:rPr>
+              <a:t>TSLA DESCRIPTIVE MICROSCOPE</a:t>
+            </a:r>
+          </a:p>
+        </p:txBody>
+      </p:sp>
+      <p:sp>
+        <p:nvSpPr>
+          <p:cNvPr id="2" name="title-4">
+            <a:extLst xmlns:a="http://schemas.openxmlformats.org/drawingml/2006/main">
+              <a:ext uri="{FF2B5EF4-FFF2-40B4-BE49-F238E27FC236}">
+                <a16:creationId xmlns:a16="http://schemas.microsoft.com/office/drawing/2014/main" id="{50C6F92F-721A-4252-9CF8-B5C9B01C7310}"/>
+              </a:ext>
+            </a:extLst>
+          </p:cNvPr>
+          <p:cNvSpPr>
+            <a:spLocks xmlns:a="http://schemas.openxmlformats.org/drawingml/2006/main" noGrp="1"/>
+          </p:cNvSpPr>
+          <p:nvPr/>
+        </p:nvSpPr>
+        <p:spPr>
+          <a:xfrm xmlns:a="http://schemas.openxmlformats.org/drawingml/2006/main">
+            <a:off x="457200" y="533400"/>
+            <a:ext cx="11277600" cy="628650"/>
+          </a:xfrm>
+          <a:prstGeom xmlns:a="http://schemas.openxmlformats.org/drawingml/2006/main" prst="rect">
+            <a:avLst/>
+          </a:prstGeom>
+          <a:noFill xmlns:a="http://schemas.openxmlformats.org/drawingml/2006/main"/>
+          <a:ln xmlns:a="http://schemas.openxmlformats.org/drawingml/2006/main" w="0">
+            <a:noFill/>
+            <a:prstDash val="solid"/>
+          </a:ln>
+        </p:spPr>
+        <p:txBody>
+          <a:bodyPr xmlns:a="http://schemas.openxmlformats.org/drawingml/2006/main" wrap="square" lIns="0" tIns="0" rIns="0" bIns="0" anchor="t">
+            <a:normAutofit fontScale="100000"/>
+          </a:bodyPr>
+          <a:lstStyle xmlns:a="http://schemas.openxmlformats.org/drawingml/2006/main"/>
+          <a:p xmlns:a="http://schemas.openxmlformats.org/drawingml/2006/main">
+            <a:pPr algn="l">
+              <a:buNone/>
+              <a:defRPr sz="3525" b="1">
+                <a:solidFill>
+                  <a:srgbClr val="000000"/>
+                </a:solidFill>
+                <a:latin typeface="Arial"/>
+                <a:ea typeface="Arial"/>
+                <a:cs typeface="Arial"/>
+              </a:defRPr>
+            </a:pPr>
+            <a:r>
+              <a:rPr sz="3525" b="1">
+                <a:solidFill>
+                  <a:srgbClr val="000000"/>
+                </a:solidFill>
+                <a:latin typeface="Arial"/>
+                <a:ea typeface="Arial"/>
+                <a:cs typeface="Arial"/>
+              </a:rPr>
+              <a:t>SPY MEDIUM turns long-forward returns negative</a:t>
+            </a:r>
+          </a:p>
+        </p:txBody>
+      </p:sp>
+      <p:sp>
+        <p:nvSpPr>
+          <p:cNvPr id="3" name="">
+            <a:extLst xmlns:a="http://schemas.openxmlformats.org/drawingml/2006/main">
+              <a:ext uri="{FF2B5EF4-FFF2-40B4-BE49-F238E27FC236}">
+                <a16:creationId xmlns:a16="http://schemas.microsoft.com/office/drawing/2014/main" id="{242399F2-4D0A-4337-B17E-DB3599DC380F}"/>
+              </a:ext>
+            </a:extLst>
+          </p:cNvPr>
+          <p:cNvSpPr>
+            <a:spLocks xmlns:a="http://schemas.openxmlformats.org/drawingml/2006/main" noGrp="1"/>
+          </p:cNvSpPr>
+          <p:nvPr/>
+        </p:nvSpPr>
+        <p:spPr>
+          <a:xfrm xmlns:a="http://schemas.openxmlformats.org/drawingml/2006/main">
+            <a:off x="457200" y="1200150"/>
+            <a:ext cx="11277600" cy="19050"/>
+          </a:xfrm>
+          <a:prstGeom xmlns:a="http://schemas.openxmlformats.org/drawingml/2006/main" prst="rect">
+            <a:avLst/>
+          </a:prstGeom>
+          <a:solidFill xmlns:a="http://schemas.openxmlformats.org/drawingml/2006/main">
+            <a:srgbClr val="B8BCC4"/>
+          </a:solidFill>
+          <a:ln xmlns:a="http://schemas.openxmlformats.org/drawingml/2006/main" w="0">
+            <a:solidFill>
+              <a:srgbClr val="B8BCC4"/>
+            </a:solidFill>
+            <a:prstDash val="solid"/>
+          </a:ln>
+        </p:spPr>
+      </p:sp>
+      <p:sp>
+        <p:nvSpPr>
+          <p:cNvPr id="4" name="footer-left-4">
+            <a:extLst xmlns:a="http://schemas.openxmlformats.org/drawingml/2006/main">
+              <a:ext uri="{FF2B5EF4-FFF2-40B4-BE49-F238E27FC236}">
+                <a16:creationId xmlns:a16="http://schemas.microsoft.com/office/drawing/2014/main" id="{BF8B82CA-1E48-4669-BAD8-1FF8C09FCBFB}"/>
+              </a:ext>
+            </a:extLst>
+          </p:cNvPr>
+          <p:cNvSpPr>
+            <a:spLocks xmlns:a="http://schemas.openxmlformats.org/drawingml/2006/main" noGrp="1"/>
+          </p:cNvSpPr>
+          <p:nvPr/>
+        </p:nvSpPr>
+        <p:spPr>
+          <a:xfrm xmlns:a="http://schemas.openxmlformats.org/drawingml/2006/main">
+            <a:off x="457200" y="6515100"/>
+            <a:ext cx="3429000" cy="171450"/>
+          </a:xfrm>
+          <a:prstGeom xmlns:a="http://schemas.openxmlformats.org/drawingml/2006/main" prst="rect">
+            <a:avLst/>
+          </a:prstGeom>
+          <a:noFill xmlns:a="http://schemas.openxmlformats.org/drawingml/2006/main"/>
+          <a:ln xmlns:a="http://schemas.openxmlformats.org/drawingml/2006/main" w="0">
+            <a:noFill/>
+            <a:prstDash val="solid"/>
+          </a:ln>
+        </p:spPr>
+        <p:txBody>
+          <a:bodyPr xmlns:a="http://schemas.openxmlformats.org/drawingml/2006/main" wrap="square" lIns="0" tIns="0" rIns="0" bIns="0" anchor="t">
+            <a:normAutofit fontScale="100000"/>
+          </a:bodyPr>
+          <a:lstStyle xmlns:a="http://schemas.openxmlformats.org/drawingml/2006/main"/>
+          <a:p xmlns:a="http://schemas.openxmlformats.org/drawingml/2006/main">
+            <a:pPr algn="l">
+              <a:buNone/>
+              <a:defRPr sz="1050" b="0">
+                <a:solidFill>
+                  <a:srgbClr val="667384"/>
+                </a:solidFill>
+                <a:latin typeface="Arial"/>
+                <a:ea typeface="Arial"/>
+                <a:cs typeface="Arial"/>
+              </a:defRPr>
+            </a:pPr>
+            <a:r>
+              <a:rPr sz="1050" b="0">
+                <a:solidFill>
+                  <a:srgbClr val="667384"/>
+                </a:solidFill>
+                <a:latin typeface="Arial"/>
+                <a:ea typeface="Arial"/>
+                <a:cs typeface="Arial"/>
+              </a:rPr>
+              <a:t>Adjusted daily TSLA | 2018-2023</a:t>
+            </a:r>
+          </a:p>
+        </p:txBody>
+      </p:sp>
+      <p:sp>
+        <p:nvSpPr>
+          <p:cNvPr id="5" name="footer-number-4">
+            <a:extLst xmlns:a="http://schemas.openxmlformats.org/drawingml/2006/main">
+              <a:ext uri="{FF2B5EF4-FFF2-40B4-BE49-F238E27FC236}">
+                <a16:creationId xmlns:a16="http://schemas.microsoft.com/office/drawing/2014/main" id="{05959AEC-B0A5-45F0-A65B-C94C3E5A032F}"/>
+              </a:ext>
+            </a:extLst>
+          </p:cNvPr>
+          <p:cNvSpPr>
+            <a:spLocks xmlns:a="http://schemas.openxmlformats.org/drawingml/2006/main" noGrp="1"/>
+          </p:cNvSpPr>
+          <p:nvPr/>
+        </p:nvSpPr>
+        <p:spPr>
+          <a:xfrm xmlns:a="http://schemas.openxmlformats.org/drawingml/2006/main">
+            <a:off x="11239500" y="6496050"/>
+            <a:ext cx="495300" cy="190500"/>
+          </a:xfrm>
+          <a:prstGeom xmlns:a="http://schemas.openxmlformats.org/drawingml/2006/main" prst="rect">
+            <a:avLst/>
+          </a:prstGeom>
+          <a:noFill xmlns:a="http://schemas.openxmlformats.org/drawingml/2006/main"/>
+          <a:ln xmlns:a="http://schemas.openxmlformats.org/drawingml/2006/main" w="0">
+            <a:noFill/>
+            <a:prstDash val="solid"/>
+          </a:ln>
+        </p:spPr>
+        <p:txBody>
+          <a:bodyPr xmlns:a="http://schemas.openxmlformats.org/drawingml/2006/main" wrap="square" lIns="0" tIns="0" rIns="0" bIns="0" anchor="t">
+            <a:normAutofit fontScale="100000"/>
+          </a:bodyPr>
+          <a:lstStyle xmlns:a="http://schemas.openxmlformats.org/drawingml/2006/main"/>
+          <a:p xmlns:a="http://schemas.openxmlformats.org/drawingml/2006/main">
+            <a:pPr algn="r">
+              <a:buNone/>
+              <a:defRPr sz="1050" b="0">
+                <a:solidFill>
+                  <a:srgbClr val="667384"/>
+                </a:solidFill>
+                <a:latin typeface="Arial"/>
+                <a:ea typeface="Arial"/>
+                <a:cs typeface="Arial"/>
+              </a:defRPr>
+            </a:pPr>
+            <a:r>
+              <a:rPr sz="1050" b="0">
+                <a:solidFill>
+                  <a:srgbClr val="667384"/>
+                </a:solidFill>
+                <a:latin typeface="Arial"/>
+                <a:ea typeface="Arial"/>
+                <a:cs typeface="Arial"/>
+              </a:rPr>
+              <a:t>36</a:t>
+            </a:r>
+          </a:p>
+        </p:txBody>
+      </p:sp>
+      <p:sp>
+        <p:nvSpPr>
+          <p:cNvPr id="6" name="">
+            <a:extLst xmlns:a="http://schemas.openxmlformats.org/drawingml/2006/main">
+              <a:ext uri="{FF2B5EF4-FFF2-40B4-BE49-F238E27FC236}">
+                <a16:creationId xmlns:a16="http://schemas.microsoft.com/office/drawing/2014/main" id="{9C8DEA29-E57D-4C8D-8538-2028FF89DA7C}"/>
+              </a:ext>
+            </a:extLst>
+          </p:cNvPr>
+          <p:cNvSpPr>
+            <a:spLocks xmlns:a="http://schemas.openxmlformats.org/drawingml/2006/main" noGrp="1"/>
+          </p:cNvSpPr>
+          <p:nvPr/>
+        </p:nvSpPr>
+        <p:spPr>
+          <a:xfrm xmlns:a="http://schemas.openxmlformats.org/drawingml/2006/main">
+            <a:off x="1000125" y="1352550"/>
+            <a:ext cx="10191750" cy="4905375"/>
+          </a:xfrm>
+          <a:prstGeom xmlns:a="http://schemas.openxmlformats.org/drawingml/2006/main" prst="rect">
+            <a:avLst/>
+          </a:prstGeom>
+          <a:solidFill xmlns:a="http://schemas.openxmlformats.org/drawingml/2006/main">
+            <a:srgbClr val="FFFFFF"/>
+          </a:solidFill>
+          <a:ln xmlns:a="http://schemas.openxmlformats.org/drawingml/2006/main" w="9525">
+            <a:solidFill>
+              <a:srgbClr val="B8BCC4"/>
+            </a:solidFill>
+            <a:prstDash val="solid"/>
+          </a:ln>
+        </p:spPr>
+      </p:sp>
+      <p:sp>
+        <p:nvSpPr>
+          <p:cNvPr id="8" name="">
+            <a:extLst xmlns:a="http://schemas.openxmlformats.org/drawingml/2006/main">
+              <a:ext uri="{FF2B5EF4-FFF2-40B4-BE49-F238E27FC236}">
+                <a16:creationId xmlns:a16="http://schemas.microsoft.com/office/drawing/2014/main" id="{4346A5F2-8CC4-4151-9BDB-346D47A3096B}"/>
+              </a:ext>
+            </a:extLst>
+          </p:cNvPr>
+          <p:cNvSpPr>
+            <a:spLocks xmlns:a="http://schemas.openxmlformats.org/drawingml/2006/main" noGrp="1"/>
+          </p:cNvSpPr>
+          <p:nvPr/>
+        </p:nvSpPr>
+        <p:spPr>
+          <a:xfrm xmlns:a="http://schemas.openxmlformats.org/drawingml/2006/main">
+            <a:off x="1143000" y="6286500"/>
+            <a:ext cx="9906000" cy="171450"/>
+          </a:xfrm>
+          <a:prstGeom xmlns:a="http://schemas.openxmlformats.org/drawingml/2006/main" prst="rect">
+            <a:avLst/>
+          </a:prstGeom>
+          <a:noFill xmlns:a="http://schemas.openxmlformats.org/drawingml/2006/main"/>
+          <a:ln xmlns:a="http://schemas.openxmlformats.org/drawingml/2006/main" w="0">
+            <a:noFill/>
+            <a:prstDash val="solid"/>
+          </a:ln>
+        </p:spPr>
+        <p:txBody>
+          <a:bodyPr xmlns:a="http://schemas.openxmlformats.org/drawingml/2006/main" wrap="square" lIns="0" tIns="0" rIns="0" bIns="0" anchor="t">
+            <a:normAutofit fontScale="93750"/>
+          </a:bodyPr>
+          <a:lstStyle xmlns:a="http://schemas.openxmlformats.org/drawingml/2006/main"/>
+          <a:p xmlns:a="http://schemas.openxmlformats.org/drawingml/2006/main">
+            <a:pPr algn="ctr">
+              <a:buNone/>
+              <a:defRPr sz="1200" b="0">
+                <a:solidFill>
+                  <a:srgbClr val="667384"/>
+                </a:solidFill>
+                <a:latin typeface="Arial"/>
+                <a:ea typeface="Arial"/>
+                <a:cs typeface="Arial"/>
+              </a:defRPr>
+            </a:pPr>
+            <a:r>
+              <a:rPr sz="1200" b="0">
+                <a:solidFill>
+                  <a:srgbClr val="667384"/>
+                </a:solidFill>
+                <a:latin typeface="Arial"/>
+                <a:ea typeface="Arial"/>
+                <a:cs typeface="Arial"/>
+              </a:rPr>
+              <a:t>67/81 cells negative; strongest -0.191 at 15 prior / 20 forward; 0/81 within-state BH passes.</a:t>
+            </a:r>
+          </a:p>
+        </p:txBody>
+      </p:sp>
+      <p:pic>
+        <p:nvPicPr>
+          <p:cNvPr id="18" name=""/>
+          <p:cNvPicPr>
+            <a:picLocks xmlns:a="http://schemas.openxmlformats.org/drawingml/2006/main" noChangeAspect="1"/>
+          </p:cNvPicPr>
+          <p:nvPr/>
+        </p:nvPicPr>
+        <p:blipFill>
+          <a:blip xmlns:r="http://schemas.openxmlformats.org/officeDocument/2006/relationships" xmlns:a="http://schemas.openxmlformats.org/drawingml/2006/main" r:embed="R4ac029ed2fe84955"/>
+          <a:stretch xmlns:a="http://schemas.openxmlformats.org/drawingml/2006/main"/>
+        </p:blipFill>
+        <p:spPr>
+          <a:xfrm xmlns:a="http://schemas.openxmlformats.org/drawingml/2006/main" flipH="0" flipV="0">
+            <a:off x="2942545" y="1352550"/>
+            <a:ext cx="6306911" cy="4905375"/>
+          </a:xfrm>
+          <a:prstGeom xmlns:a="http://schemas.openxmlformats.org/drawingml/2006/main" prst="rect">
+            <a:avLst/>
+          </a:prstGeom>
+        </p:spPr>
+      </p:pic>
+    </p:spTree>
+    <p:extLst>
+      <p:ext uri="{BB962C8B-B14F-4D97-AF65-F5344CB8AC3E}">
+        <p14:creationId xmlns:p14="http://schemas.microsoft.com/office/powerpoint/2010/main" val="400872380"/>
+      </p:ext>
+    </p:extLst>
+  </p:cSld>
+</p:sld>
+</file>
+
+<file path=ppt/slides/slide37.xml><?xml version="1.0" encoding="utf-8"?>
+<p:sld xmlns:p="http://schemas.openxmlformats.org/presentationml/2006/main">
+  <p:cSld>
+    <p:bg>
+      <p:bgPr>
+        <a:solidFill xmlns:a="http://schemas.openxmlformats.org/drawingml/2006/main">
+          <a:srgbClr val="FFFFFF"/>
+        </a:solidFill>
+      </p:bgPr>
+    </p:bg>
+    <p:spTree>
+      <p:nvGrpSpPr>
+        <p:cNvPr id="1" name=""/>
+        <p:cNvGrpSpPr/>
+        <p:nvPr/>
+      </p:nvGrpSpPr>
+      <p:grpSpPr>
+        <a:xfrm xmlns:a="http://schemas.openxmlformats.org/drawingml/2006/main"/>
+      </p:grpSpPr>
+      <p:sp>
+        <p:nvSpPr>
+          <p:cNvPr id="9" name="section-4">
+            <a:extLst xmlns:a="http://schemas.openxmlformats.org/drawingml/2006/main">
+              <a:ext uri="{FF2B5EF4-FFF2-40B4-BE49-F238E27FC236}">
+                <a16:creationId xmlns:a16="http://schemas.microsoft.com/office/drawing/2014/main" id="{8AE0A271-669A-49F0-A82E-C4438BEE27D9}"/>
+              </a:ext>
+            </a:extLst>
+          </p:cNvPr>
+          <p:cNvSpPr>
+            <a:spLocks xmlns:a="http://schemas.openxmlformats.org/drawingml/2006/main" noGrp="1"/>
+          </p:cNvSpPr>
+          <p:nvPr/>
+        </p:nvSpPr>
+        <p:spPr>
+          <a:xfrm xmlns:a="http://schemas.openxmlformats.org/drawingml/2006/main">
+            <a:off x="457200" y="228600"/>
+            <a:ext cx="4191000" cy="228600"/>
+          </a:xfrm>
+          <a:prstGeom xmlns:a="http://schemas.openxmlformats.org/drawingml/2006/main" prst="rect">
+            <a:avLst/>
+          </a:prstGeom>
+          <a:noFill xmlns:a="http://schemas.openxmlformats.org/drawingml/2006/main"/>
+          <a:ln xmlns:a="http://schemas.openxmlformats.org/drawingml/2006/main" w="0">
+            <a:noFill/>
+            <a:prstDash val="solid"/>
+          </a:ln>
+        </p:spPr>
+        <p:txBody>
+          <a:bodyPr xmlns:a="http://schemas.openxmlformats.org/drawingml/2006/main" wrap="square" lIns="0" tIns="0" rIns="0" bIns="0" anchor="t">
+            <a:normAutofit fontScale="100000"/>
+          </a:bodyPr>
+          <a:lstStyle xmlns:a="http://schemas.openxmlformats.org/drawingml/2006/main"/>
+          <a:p xmlns:a="http://schemas.openxmlformats.org/drawingml/2006/main">
+            <a:pPr algn="l">
+              <a:buNone/>
+              <a:defRPr sz="1200" b="1">
+                <a:solidFill>
+                  <a:srgbClr val="667384"/>
+                </a:solidFill>
+                <a:latin typeface="Arial"/>
+                <a:ea typeface="Arial"/>
+                <a:cs typeface="Arial"/>
+              </a:defRPr>
+            </a:pPr>
+            <a:r>
+              <a:rPr sz="1200" b="1">
+                <a:solidFill>
+                  <a:srgbClr val="667384"/>
+                </a:solidFill>
+                <a:latin typeface="Arial"/>
+                <a:ea typeface="Arial"/>
+                <a:cs typeface="Arial"/>
+              </a:rPr>
+              <a:t>TSLA DESCRIPTIVE MICROSCOPE</a:t>
+            </a:r>
+          </a:p>
+        </p:txBody>
+      </p:sp>
+      <p:sp>
+        <p:nvSpPr>
+          <p:cNvPr id="2" name="title-4">
+            <a:extLst xmlns:a="http://schemas.openxmlformats.org/drawingml/2006/main">
+              <a:ext uri="{FF2B5EF4-FFF2-40B4-BE49-F238E27FC236}">
+                <a16:creationId xmlns:a16="http://schemas.microsoft.com/office/drawing/2014/main" id="{50C6F92F-721A-4252-9CF8-B5C9B01C7310}"/>
+              </a:ext>
+            </a:extLst>
+          </p:cNvPr>
+          <p:cNvSpPr>
+            <a:spLocks xmlns:a="http://schemas.openxmlformats.org/drawingml/2006/main" noGrp="1"/>
+          </p:cNvSpPr>
+          <p:nvPr/>
+        </p:nvSpPr>
+        <p:spPr>
+          <a:xfrm xmlns:a="http://schemas.openxmlformats.org/drawingml/2006/main">
+            <a:off x="457200" y="533400"/>
+            <a:ext cx="11277600" cy="628650"/>
+          </a:xfrm>
+          <a:prstGeom xmlns:a="http://schemas.openxmlformats.org/drawingml/2006/main" prst="rect">
+            <a:avLst/>
+          </a:prstGeom>
+          <a:noFill xmlns:a="http://schemas.openxmlformats.org/drawingml/2006/main"/>
+          <a:ln xmlns:a="http://schemas.openxmlformats.org/drawingml/2006/main" w="0">
+            <a:noFill/>
+            <a:prstDash val="solid"/>
+          </a:ln>
+        </p:spPr>
+        <p:txBody>
+          <a:bodyPr xmlns:a="http://schemas.openxmlformats.org/drawingml/2006/main" wrap="square" lIns="0" tIns="0" rIns="0" bIns="0" anchor="t">
+            <a:normAutofit fontScale="100000"/>
+          </a:bodyPr>
+          <a:lstStyle xmlns:a="http://schemas.openxmlformats.org/drawingml/2006/main"/>
+          <a:p xmlns:a="http://schemas.openxmlformats.org/drawingml/2006/main">
+            <a:pPr algn="l">
+              <a:buNone/>
+              <a:defRPr sz="3525" b="1">
+                <a:solidFill>
+                  <a:srgbClr val="000000"/>
+                </a:solidFill>
+                <a:latin typeface="Arial"/>
+                <a:ea typeface="Arial"/>
+                <a:cs typeface="Arial"/>
+              </a:defRPr>
+            </a:pPr>
+            <a:r>
+              <a:rPr sz="3525" b="1">
+                <a:solidFill>
+                  <a:srgbClr val="000000"/>
+                </a:solidFill>
+                <a:latin typeface="Arial"/>
+                <a:ea typeface="Arial"/>
+                <a:cs typeface="Arial"/>
+              </a:rPr>
+              <a:t>SPY HIGH leaves a mild TSLA surface</a:t>
+            </a:r>
+          </a:p>
+        </p:txBody>
+      </p:sp>
+      <p:sp>
+        <p:nvSpPr>
+          <p:cNvPr id="3" name="">
+            <a:extLst xmlns:a="http://schemas.openxmlformats.org/drawingml/2006/main">
+              <a:ext uri="{FF2B5EF4-FFF2-40B4-BE49-F238E27FC236}">
+                <a16:creationId xmlns:a16="http://schemas.microsoft.com/office/drawing/2014/main" id="{242399F2-4D0A-4337-B17E-DB3599DC380F}"/>
+              </a:ext>
+            </a:extLst>
+          </p:cNvPr>
+          <p:cNvSpPr>
+            <a:spLocks xmlns:a="http://schemas.openxmlformats.org/drawingml/2006/main" noGrp="1"/>
+          </p:cNvSpPr>
+          <p:nvPr/>
+        </p:nvSpPr>
+        <p:spPr>
+          <a:xfrm xmlns:a="http://schemas.openxmlformats.org/drawingml/2006/main">
+            <a:off x="457200" y="1200150"/>
+            <a:ext cx="11277600" cy="19050"/>
+          </a:xfrm>
+          <a:prstGeom xmlns:a="http://schemas.openxmlformats.org/drawingml/2006/main" prst="rect">
+            <a:avLst/>
+          </a:prstGeom>
+          <a:solidFill xmlns:a="http://schemas.openxmlformats.org/drawingml/2006/main">
+            <a:srgbClr val="B8BCC4"/>
+          </a:solidFill>
+          <a:ln xmlns:a="http://schemas.openxmlformats.org/drawingml/2006/main" w="0">
+            <a:solidFill>
+              <a:srgbClr val="B8BCC4"/>
+            </a:solidFill>
+            <a:prstDash val="solid"/>
+          </a:ln>
+        </p:spPr>
+      </p:sp>
+      <p:sp>
+        <p:nvSpPr>
+          <p:cNvPr id="4" name="footer-left-4">
+            <a:extLst xmlns:a="http://schemas.openxmlformats.org/drawingml/2006/main">
+              <a:ext uri="{FF2B5EF4-FFF2-40B4-BE49-F238E27FC236}">
+                <a16:creationId xmlns:a16="http://schemas.microsoft.com/office/drawing/2014/main" id="{BF8B82CA-1E48-4669-BAD8-1FF8C09FCBFB}"/>
+              </a:ext>
+            </a:extLst>
+          </p:cNvPr>
+          <p:cNvSpPr>
+            <a:spLocks xmlns:a="http://schemas.openxmlformats.org/drawingml/2006/main" noGrp="1"/>
+          </p:cNvSpPr>
+          <p:nvPr/>
+        </p:nvSpPr>
+        <p:spPr>
+          <a:xfrm xmlns:a="http://schemas.openxmlformats.org/drawingml/2006/main">
+            <a:off x="457200" y="6515100"/>
+            <a:ext cx="3429000" cy="171450"/>
+          </a:xfrm>
+          <a:prstGeom xmlns:a="http://schemas.openxmlformats.org/drawingml/2006/main" prst="rect">
+            <a:avLst/>
+          </a:prstGeom>
+          <a:noFill xmlns:a="http://schemas.openxmlformats.org/drawingml/2006/main"/>
+          <a:ln xmlns:a="http://schemas.openxmlformats.org/drawingml/2006/main" w="0">
+            <a:noFill/>
+            <a:prstDash val="solid"/>
+          </a:ln>
+        </p:spPr>
+        <p:txBody>
+          <a:bodyPr xmlns:a="http://schemas.openxmlformats.org/drawingml/2006/main" wrap="square" lIns="0" tIns="0" rIns="0" bIns="0" anchor="t">
+            <a:normAutofit fontScale="100000"/>
+          </a:bodyPr>
+          <a:lstStyle xmlns:a="http://schemas.openxmlformats.org/drawingml/2006/main"/>
+          <a:p xmlns:a="http://schemas.openxmlformats.org/drawingml/2006/main">
+            <a:pPr algn="l">
+              <a:buNone/>
+              <a:defRPr sz="1050" b="0">
+                <a:solidFill>
+                  <a:srgbClr val="667384"/>
+                </a:solidFill>
+                <a:latin typeface="Arial"/>
+                <a:ea typeface="Arial"/>
+                <a:cs typeface="Arial"/>
+              </a:defRPr>
+            </a:pPr>
+            <a:r>
+              <a:rPr sz="1050" b="0">
+                <a:solidFill>
+                  <a:srgbClr val="667384"/>
+                </a:solidFill>
+                <a:latin typeface="Arial"/>
+                <a:ea typeface="Arial"/>
+                <a:cs typeface="Arial"/>
+              </a:rPr>
+              <a:t>Adjusted daily TSLA | 2018-2023</a:t>
+            </a:r>
+          </a:p>
+        </p:txBody>
+      </p:sp>
+      <p:sp>
+        <p:nvSpPr>
+          <p:cNvPr id="5" name="footer-number-4">
+            <a:extLst xmlns:a="http://schemas.openxmlformats.org/drawingml/2006/main">
+              <a:ext uri="{FF2B5EF4-FFF2-40B4-BE49-F238E27FC236}">
+                <a16:creationId xmlns:a16="http://schemas.microsoft.com/office/drawing/2014/main" id="{05959AEC-B0A5-45F0-A65B-C94C3E5A032F}"/>
+              </a:ext>
+            </a:extLst>
+          </p:cNvPr>
+          <p:cNvSpPr>
+            <a:spLocks xmlns:a="http://schemas.openxmlformats.org/drawingml/2006/main" noGrp="1"/>
+          </p:cNvSpPr>
+          <p:nvPr/>
+        </p:nvSpPr>
+        <p:spPr>
+          <a:xfrm xmlns:a="http://schemas.openxmlformats.org/drawingml/2006/main">
+            <a:off x="11239500" y="6496050"/>
+            <a:ext cx="495300" cy="190500"/>
+          </a:xfrm>
+          <a:prstGeom xmlns:a="http://schemas.openxmlformats.org/drawingml/2006/main" prst="rect">
+            <a:avLst/>
+          </a:prstGeom>
+          <a:noFill xmlns:a="http://schemas.openxmlformats.org/drawingml/2006/main"/>
+          <a:ln xmlns:a="http://schemas.openxmlformats.org/drawingml/2006/main" w="0">
+            <a:noFill/>
+            <a:prstDash val="solid"/>
+          </a:ln>
+        </p:spPr>
+        <p:txBody>
+          <a:bodyPr xmlns:a="http://schemas.openxmlformats.org/drawingml/2006/main" wrap="square" lIns="0" tIns="0" rIns="0" bIns="0" anchor="t">
+            <a:normAutofit fontScale="100000"/>
+          </a:bodyPr>
+          <a:lstStyle xmlns:a="http://schemas.openxmlformats.org/drawingml/2006/main"/>
+          <a:p xmlns:a="http://schemas.openxmlformats.org/drawingml/2006/main">
+            <a:pPr algn="r">
+              <a:buNone/>
+              <a:defRPr sz="1050" b="0">
+                <a:solidFill>
+                  <a:srgbClr val="667384"/>
+                </a:solidFill>
+                <a:latin typeface="Arial"/>
+                <a:ea typeface="Arial"/>
+                <a:cs typeface="Arial"/>
+              </a:defRPr>
+            </a:pPr>
+            <a:r>
+              <a:rPr sz="1050" b="0">
+                <a:solidFill>
+                  <a:srgbClr val="667384"/>
+                </a:solidFill>
+                <a:latin typeface="Arial"/>
+                <a:ea typeface="Arial"/>
+                <a:cs typeface="Arial"/>
+              </a:rPr>
+              <a:t>37</a:t>
+            </a:r>
+          </a:p>
+        </p:txBody>
+      </p:sp>
+      <p:sp>
+        <p:nvSpPr>
+          <p:cNvPr id="6" name="">
+            <a:extLst xmlns:a="http://schemas.openxmlformats.org/drawingml/2006/main">
+              <a:ext uri="{FF2B5EF4-FFF2-40B4-BE49-F238E27FC236}">
+                <a16:creationId xmlns:a16="http://schemas.microsoft.com/office/drawing/2014/main" id="{9C8DEA29-E57D-4C8D-8538-2028FF89DA7C}"/>
+              </a:ext>
+            </a:extLst>
+          </p:cNvPr>
+          <p:cNvSpPr>
+            <a:spLocks xmlns:a="http://schemas.openxmlformats.org/drawingml/2006/main" noGrp="1"/>
+          </p:cNvSpPr>
+          <p:nvPr/>
+        </p:nvSpPr>
+        <p:spPr>
+          <a:xfrm xmlns:a="http://schemas.openxmlformats.org/drawingml/2006/main">
+            <a:off x="1000125" y="1352550"/>
+            <a:ext cx="10191750" cy="4905375"/>
+          </a:xfrm>
+          <a:prstGeom xmlns:a="http://schemas.openxmlformats.org/drawingml/2006/main" prst="rect">
+            <a:avLst/>
+          </a:prstGeom>
+          <a:solidFill xmlns:a="http://schemas.openxmlformats.org/drawingml/2006/main">
+            <a:srgbClr val="FFFFFF"/>
+          </a:solidFill>
+          <a:ln xmlns:a="http://schemas.openxmlformats.org/drawingml/2006/main" w="9525">
+            <a:solidFill>
+              <a:srgbClr val="B8BCC4"/>
+            </a:solidFill>
+            <a:prstDash val="solid"/>
+          </a:ln>
+        </p:spPr>
+      </p:sp>
+      <p:sp>
+        <p:nvSpPr>
+          <p:cNvPr id="8" name="">
+            <a:extLst xmlns:a="http://schemas.openxmlformats.org/drawingml/2006/main">
+              <a:ext uri="{FF2B5EF4-FFF2-40B4-BE49-F238E27FC236}">
+                <a16:creationId xmlns:a16="http://schemas.microsoft.com/office/drawing/2014/main" id="{4346A5F2-8CC4-4151-9BDB-346D47A3096B}"/>
+              </a:ext>
+            </a:extLst>
+          </p:cNvPr>
+          <p:cNvSpPr>
+            <a:spLocks xmlns:a="http://schemas.openxmlformats.org/drawingml/2006/main" noGrp="1"/>
+          </p:cNvSpPr>
+          <p:nvPr/>
+        </p:nvSpPr>
+        <p:spPr>
+          <a:xfrm xmlns:a="http://schemas.openxmlformats.org/drawingml/2006/main">
+            <a:off x="1143000" y="6286500"/>
+            <a:ext cx="9906000" cy="171450"/>
+          </a:xfrm>
+          <a:prstGeom xmlns:a="http://schemas.openxmlformats.org/drawingml/2006/main" prst="rect">
+            <a:avLst/>
+          </a:prstGeom>
+          <a:noFill xmlns:a="http://schemas.openxmlformats.org/drawingml/2006/main"/>
+          <a:ln xmlns:a="http://schemas.openxmlformats.org/drawingml/2006/main" w="0">
+            <a:noFill/>
+            <a:prstDash val="solid"/>
+          </a:ln>
+        </p:spPr>
+        <p:txBody>
+          <a:bodyPr xmlns:a="http://schemas.openxmlformats.org/drawingml/2006/main" wrap="square" lIns="0" tIns="0" rIns="0" bIns="0" anchor="t">
+            <a:normAutofit fontScale="93750"/>
+          </a:bodyPr>
+          <a:lstStyle xmlns:a="http://schemas.openxmlformats.org/drawingml/2006/main"/>
+          <a:p xmlns:a="http://schemas.openxmlformats.org/drawingml/2006/main">
+            <a:pPr algn="ctr">
+              <a:buNone/>
+              <a:defRPr sz="1200" b="0">
+                <a:solidFill>
+                  <a:srgbClr val="667384"/>
+                </a:solidFill>
+                <a:latin typeface="Arial"/>
+                <a:ea typeface="Arial"/>
+                <a:cs typeface="Arial"/>
+              </a:defRPr>
+            </a:pPr>
+            <a:r>
+              <a:rPr sz="1200" b="0">
+                <a:solidFill>
+                  <a:srgbClr val="667384"/>
+                </a:solidFill>
+                <a:latin typeface="Arial"/>
+                <a:ea typeface="Arial"/>
+                <a:cs typeface="Arial"/>
+              </a:rPr>
+              <a:t>60/81 cells positive; max |r| = 0.103 at 25 prior / 15 forward; 0/81 within-state BH passes.</a:t>
+            </a:r>
+          </a:p>
+        </p:txBody>
+      </p:sp>
+      <p:pic>
+        <p:nvPicPr>
+          <p:cNvPr id="18" name=""/>
+          <p:cNvPicPr>
+            <a:picLocks xmlns:a="http://schemas.openxmlformats.org/drawingml/2006/main" noChangeAspect="1"/>
+          </p:cNvPicPr>
+          <p:nvPr/>
+        </p:nvPicPr>
+        <p:blipFill>
+          <a:blip xmlns:r="http://schemas.openxmlformats.org/officeDocument/2006/relationships" xmlns:a="http://schemas.openxmlformats.org/drawingml/2006/main" r:embed="R645ad257bc454044"/>
+          <a:stretch xmlns:a="http://schemas.openxmlformats.org/drawingml/2006/main"/>
+        </p:blipFill>
+        <p:spPr>
+          <a:xfrm xmlns:a="http://schemas.openxmlformats.org/drawingml/2006/main" flipH="0" flipV="0">
+            <a:off x="2942545" y="1352550"/>
+            <a:ext cx="6306911" cy="4905375"/>
+          </a:xfrm>
+          <a:prstGeom xmlns:a="http://schemas.openxmlformats.org/drawingml/2006/main" prst="rect">
+            <a:avLst/>
+          </a:prstGeom>
+        </p:spPr>
+      </p:pic>
+    </p:spTree>
+    <p:extLst>
+      <p:ext uri="{BB962C8B-B14F-4D97-AF65-F5344CB8AC3E}">
+        <p14:creationId xmlns:p14="http://schemas.microsoft.com/office/powerpoint/2010/main" val="400872380"/>
+      </p:ext>
+    </p:extLst>
+  </p:cSld>
+</p:sld>
+</file>
+
+<file path=ppt/slides/slide38.xml><?xml version="1.0" encoding="utf-8"?>
+<p:sld xmlns:p="http://schemas.openxmlformats.org/presentationml/2006/main">
+  <p:cSld>
+    <p:bg>
+      <p:bgPr>
+        <a:solidFill xmlns:a="http://schemas.openxmlformats.org/drawingml/2006/main">
+          <a:srgbClr val="FFFFFF"/>
+        </a:solidFill>
+      </p:bgPr>
+    </p:bg>
+    <p:spTree>
+      <p:nvGrpSpPr>
+        <p:cNvPr id="1" name=""/>
+        <p:cNvGrpSpPr/>
+        <p:nvPr/>
+      </p:nvGrpSpPr>
+      <p:grpSpPr>
+        <a:xfrm xmlns:a="http://schemas.openxmlformats.org/drawingml/2006/main"/>
+      </p:grpSpPr>
+      <p:sp>
+        <p:nvSpPr>
+          <p:cNvPr id="20" name="section-7">
+            <a:extLst xmlns:a="http://schemas.openxmlformats.org/drawingml/2006/main">
+              <a:ext uri="{FF2B5EF4-FFF2-40B4-BE49-F238E27FC236}">
+                <a16:creationId xmlns:a16="http://schemas.microsoft.com/office/drawing/2014/main" id="{BAC8373F-594E-467B-A8F8-56439CEBE044}"/>
+              </a:ext>
+            </a:extLst>
+          </p:cNvPr>
+          <p:cNvSpPr>
+            <a:spLocks xmlns:a="http://schemas.openxmlformats.org/drawingml/2006/main" noGrp="1"/>
+          </p:cNvSpPr>
+          <p:nvPr/>
+        </p:nvSpPr>
+        <p:spPr>
+          <a:xfrm xmlns:a="http://schemas.openxmlformats.org/drawingml/2006/main">
+            <a:off x="457200" y="228600"/>
+            <a:ext cx="4191000" cy="228600"/>
+          </a:xfrm>
+          <a:prstGeom xmlns:a="http://schemas.openxmlformats.org/drawingml/2006/main" prst="rect">
+            <a:avLst/>
+          </a:prstGeom>
+          <a:noFill xmlns:a="http://schemas.openxmlformats.org/drawingml/2006/main"/>
+          <a:ln xmlns:a="http://schemas.openxmlformats.org/drawingml/2006/main" w="0">
+            <a:noFill/>
+            <a:prstDash val="solid"/>
+          </a:ln>
+        </p:spPr>
+        <p:txBody>
+          <a:bodyPr xmlns:a="http://schemas.openxmlformats.org/drawingml/2006/main" wrap="square" lIns="0" tIns="0" rIns="0" bIns="0" anchor="t">
+            <a:normAutofit fontScale="100000"/>
+          </a:bodyPr>
+          <a:lstStyle xmlns:a="http://schemas.openxmlformats.org/drawingml/2006/main"/>
+          <a:p xmlns:a="http://schemas.openxmlformats.org/drawingml/2006/main">
+            <a:pPr algn="l">
+              <a:buNone/>
+              <a:defRPr sz="1200" b="1">
+                <a:solidFill>
+                  <a:srgbClr val="667384"/>
+                </a:solidFill>
+                <a:latin typeface="Arial"/>
+                <a:ea typeface="Arial"/>
+                <a:cs typeface="Arial"/>
+              </a:defRPr>
+            </a:pPr>
+            <a:r>
+              <a:rPr sz="1200" b="1">
+                <a:solidFill>
+                  <a:srgbClr val="667384"/>
+                </a:solidFill>
+                <a:latin typeface="Arial"/>
+                <a:ea typeface="Arial"/>
+                <a:cs typeface="Arial"/>
+              </a:rPr>
+              <a:t>TSLA DESCRIPTIVE MICROSCOPE</a:t>
+            </a:r>
+          </a:p>
+        </p:txBody>
+      </p:sp>
+      <p:sp>
+        <p:nvSpPr>
+          <p:cNvPr id="2" name="title-7">
+            <a:extLst xmlns:a="http://schemas.openxmlformats.org/drawingml/2006/main">
+              <a:ext uri="{FF2B5EF4-FFF2-40B4-BE49-F238E27FC236}">
+                <a16:creationId xmlns:a16="http://schemas.microsoft.com/office/drawing/2014/main" id="{7592E6E5-EA60-427F-BAB4-42C154D8CC5F}"/>
+              </a:ext>
+            </a:extLst>
+          </p:cNvPr>
+          <p:cNvSpPr>
+            <a:spLocks xmlns:a="http://schemas.openxmlformats.org/drawingml/2006/main" noGrp="1"/>
+          </p:cNvSpPr>
+          <p:nvPr/>
+        </p:nvSpPr>
+        <p:spPr>
+          <a:xfrm xmlns:a="http://schemas.openxmlformats.org/drawingml/2006/main">
+            <a:off x="457200" y="533400"/>
+            <a:ext cx="11277600" cy="628650"/>
+          </a:xfrm>
+          <a:prstGeom xmlns:a="http://schemas.openxmlformats.org/drawingml/2006/main" prst="rect">
+            <a:avLst/>
+          </a:prstGeom>
+          <a:noFill xmlns:a="http://schemas.openxmlformats.org/drawingml/2006/main"/>
+          <a:ln xmlns:a="http://schemas.openxmlformats.org/drawingml/2006/main" w="0">
+            <a:noFill/>
+            <a:prstDash val="solid"/>
+          </a:ln>
+        </p:spPr>
+        <p:txBody>
+          <a:bodyPr xmlns:a="http://schemas.openxmlformats.org/drawingml/2006/main" wrap="square" lIns="0" tIns="0" rIns="0" bIns="0" anchor="t">
+            <a:normAutofit fontScale="100000"/>
+          </a:bodyPr>
+          <a:lstStyle xmlns:a="http://schemas.openxmlformats.org/drawingml/2006/main"/>
+          <a:p xmlns:a="http://schemas.openxmlformats.org/drawingml/2006/main">
+            <a:pPr algn="l">
+              <a:buNone/>
+              <a:defRPr sz="3525" b="1">
+                <a:solidFill>
+                  <a:srgbClr val="000000"/>
+                </a:solidFill>
+                <a:latin typeface="Arial"/>
+                <a:ea typeface="Arial"/>
+                <a:cs typeface="Arial"/>
+              </a:defRPr>
+            </a:pPr>
+            <a:r>
+              <a:rPr sz="3525" b="1">
+                <a:solidFill>
+                  <a:srgbClr val="000000"/>
+                </a:solidFill>
+                <a:latin typeface="Arial"/>
+                <a:ea typeface="Arial"/>
+                <a:cs typeface="Arial"/>
+              </a:rPr>
+              <a:t>SPY LOW versus MEDIUM is the clearest contrast</a:t>
+            </a:r>
+          </a:p>
+        </p:txBody>
+      </p:sp>
+      <p:sp>
+        <p:nvSpPr>
+          <p:cNvPr id="3" name="">
+            <a:extLst xmlns:a="http://schemas.openxmlformats.org/drawingml/2006/main">
+              <a:ext uri="{FF2B5EF4-FFF2-40B4-BE49-F238E27FC236}">
+                <a16:creationId xmlns:a16="http://schemas.microsoft.com/office/drawing/2014/main" id="{C852E1AC-5CE8-4847-87B1-81C28A4EFEDE}"/>
+              </a:ext>
+            </a:extLst>
+          </p:cNvPr>
+          <p:cNvSpPr>
+            <a:spLocks xmlns:a="http://schemas.openxmlformats.org/drawingml/2006/main" noGrp="1"/>
+          </p:cNvSpPr>
+          <p:nvPr/>
+        </p:nvSpPr>
+        <p:spPr>
+          <a:xfrm xmlns:a="http://schemas.openxmlformats.org/drawingml/2006/main">
+            <a:off x="457200" y="1200150"/>
+            <a:ext cx="11277600" cy="19050"/>
+          </a:xfrm>
+          <a:prstGeom xmlns:a="http://schemas.openxmlformats.org/drawingml/2006/main" prst="rect">
+            <a:avLst/>
+          </a:prstGeom>
+          <a:solidFill xmlns:a="http://schemas.openxmlformats.org/drawingml/2006/main">
+            <a:srgbClr val="B8BCC4"/>
+          </a:solidFill>
+          <a:ln xmlns:a="http://schemas.openxmlformats.org/drawingml/2006/main" w="0">
+            <a:solidFill>
+              <a:srgbClr val="B8BCC4"/>
+            </a:solidFill>
+            <a:prstDash val="solid"/>
+          </a:ln>
+        </p:spPr>
+      </p:sp>
+      <p:sp>
+        <p:nvSpPr>
+          <p:cNvPr id="4" name="footer-left-7">
+            <a:extLst xmlns:a="http://schemas.openxmlformats.org/drawingml/2006/main">
+              <a:ext uri="{FF2B5EF4-FFF2-40B4-BE49-F238E27FC236}">
+                <a16:creationId xmlns:a16="http://schemas.microsoft.com/office/drawing/2014/main" id="{4896B590-20BC-4B46-9282-D9F5A22A0CC5}"/>
+              </a:ext>
+            </a:extLst>
+          </p:cNvPr>
+          <p:cNvSpPr>
+            <a:spLocks xmlns:a="http://schemas.openxmlformats.org/drawingml/2006/main" noGrp="1"/>
+          </p:cNvSpPr>
+          <p:nvPr/>
+        </p:nvSpPr>
+        <p:spPr>
+          <a:xfrm xmlns:a="http://schemas.openxmlformats.org/drawingml/2006/main">
+            <a:off x="457200" y="6515100"/>
+            <a:ext cx="3429000" cy="171450"/>
+          </a:xfrm>
+          <a:prstGeom xmlns:a="http://schemas.openxmlformats.org/drawingml/2006/main" prst="rect">
+            <a:avLst/>
+          </a:prstGeom>
+          <a:noFill xmlns:a="http://schemas.openxmlformats.org/drawingml/2006/main"/>
+          <a:ln xmlns:a="http://schemas.openxmlformats.org/drawingml/2006/main" w="0">
+            <a:noFill/>
+            <a:prstDash val="solid"/>
+          </a:ln>
+        </p:spPr>
+        <p:txBody>
+          <a:bodyPr xmlns:a="http://schemas.openxmlformats.org/drawingml/2006/main" wrap="square" lIns="0" tIns="0" rIns="0" bIns="0" anchor="t">
+            <a:normAutofit fontScale="100000"/>
+          </a:bodyPr>
+          <a:lstStyle xmlns:a="http://schemas.openxmlformats.org/drawingml/2006/main"/>
+          <a:p xmlns:a="http://schemas.openxmlformats.org/drawingml/2006/main">
+            <a:pPr algn="l">
+              <a:buNone/>
+              <a:defRPr sz="1050" b="0">
+                <a:solidFill>
+                  <a:srgbClr val="667384"/>
+                </a:solidFill>
+                <a:latin typeface="Arial"/>
+                <a:ea typeface="Arial"/>
+                <a:cs typeface="Arial"/>
+              </a:defRPr>
+            </a:pPr>
+            <a:r>
+              <a:rPr sz="1050" b="0">
+                <a:solidFill>
+                  <a:srgbClr val="667384"/>
+                </a:solidFill>
+                <a:latin typeface="Arial"/>
+                <a:ea typeface="Arial"/>
+                <a:cs typeface="Arial"/>
+              </a:rPr>
+              <a:t>Adjusted daily TSLA | 2018-2023</a:t>
+            </a:r>
+          </a:p>
+        </p:txBody>
+      </p:sp>
+      <p:sp>
+        <p:nvSpPr>
+          <p:cNvPr id="5" name="footer-number-7">
+            <a:extLst xmlns:a="http://schemas.openxmlformats.org/drawingml/2006/main">
+              <a:ext uri="{FF2B5EF4-FFF2-40B4-BE49-F238E27FC236}">
+                <a16:creationId xmlns:a16="http://schemas.microsoft.com/office/drawing/2014/main" id="{1503EFAF-F487-4981-AFDC-23F1B41A7207}"/>
+              </a:ext>
+            </a:extLst>
+          </p:cNvPr>
+          <p:cNvSpPr>
+            <a:spLocks xmlns:a="http://schemas.openxmlformats.org/drawingml/2006/main" noGrp="1"/>
+          </p:cNvSpPr>
+          <p:nvPr/>
+        </p:nvSpPr>
+        <p:spPr>
+          <a:xfrm xmlns:a="http://schemas.openxmlformats.org/drawingml/2006/main">
+            <a:off x="11239500" y="6496050"/>
+            <a:ext cx="495300" cy="190500"/>
+          </a:xfrm>
+          <a:prstGeom xmlns:a="http://schemas.openxmlformats.org/drawingml/2006/main" prst="rect">
+            <a:avLst/>
+          </a:prstGeom>
+          <a:noFill xmlns:a="http://schemas.openxmlformats.org/drawingml/2006/main"/>
+          <a:ln xmlns:a="http://schemas.openxmlformats.org/drawingml/2006/main" w="0">
+            <a:noFill/>
+            <a:prstDash val="solid"/>
+          </a:ln>
+        </p:spPr>
+        <p:txBody>
+          <a:bodyPr xmlns:a="http://schemas.openxmlformats.org/drawingml/2006/main" wrap="square" lIns="0" tIns="0" rIns="0" bIns="0" anchor="t">
+            <a:normAutofit fontScale="100000"/>
+          </a:bodyPr>
+          <a:lstStyle xmlns:a="http://schemas.openxmlformats.org/drawingml/2006/main"/>
+          <a:p xmlns:a="http://schemas.openxmlformats.org/drawingml/2006/main">
+            <a:pPr algn="r">
+              <a:buNone/>
+              <a:defRPr sz="1050" b="0">
+                <a:solidFill>
+                  <a:srgbClr val="667384"/>
+                </a:solidFill>
+                <a:latin typeface="Arial"/>
+                <a:ea typeface="Arial"/>
+                <a:cs typeface="Arial"/>
+              </a:defRPr>
+            </a:pPr>
+            <a:r>
+              <a:rPr sz="1050" b="0">
+                <a:solidFill>
+                  <a:srgbClr val="667384"/>
+                </a:solidFill>
+                <a:latin typeface="Arial"/>
+                <a:ea typeface="Arial"/>
+                <a:cs typeface="Arial"/>
+              </a:rPr>
+              <a:t>38</a:t>
+            </a:r>
+          </a:p>
+        </p:txBody>
+      </p:sp>
+      <p:sp>
+        <p:nvSpPr>
+          <p:cNvPr id="6" name="">
+            <a:extLst xmlns:a="http://schemas.openxmlformats.org/drawingml/2006/main">
+              <a:ext uri="{FF2B5EF4-FFF2-40B4-BE49-F238E27FC236}">
+                <a16:creationId xmlns:a16="http://schemas.microsoft.com/office/drawing/2014/main" id="{4AA770DD-55E6-42DB-942A-6938E642B1A0}"/>
+              </a:ext>
+            </a:extLst>
+          </p:cNvPr>
+          <p:cNvSpPr>
+            <a:spLocks xmlns:a="http://schemas.openxmlformats.org/drawingml/2006/main" noGrp="1"/>
+          </p:cNvSpPr>
+          <p:nvPr/>
+        </p:nvSpPr>
+        <p:spPr>
+          <a:xfrm xmlns:a="http://schemas.openxmlformats.org/drawingml/2006/main">
+            <a:off x="342900" y="1428750"/>
+            <a:ext cx="7677150" cy="4762500"/>
+          </a:xfrm>
+          <a:prstGeom xmlns:a="http://schemas.openxmlformats.org/drawingml/2006/main" prst="rect">
+            <a:avLst/>
+          </a:prstGeom>
+          <a:solidFill xmlns:a="http://schemas.openxmlformats.org/drawingml/2006/main">
+            <a:srgbClr val="FFFFFF"/>
+          </a:solidFill>
+          <a:ln xmlns:a="http://schemas.openxmlformats.org/drawingml/2006/main" w="9525">
+            <a:solidFill>
+              <a:srgbClr val="B8BCC4"/>
+            </a:solidFill>
+            <a:prstDash val="solid"/>
+          </a:ln>
+        </p:spPr>
+      </p:sp>
+      <p:sp>
+        <p:nvSpPr>
+          <p:cNvPr id="8" name="">
+            <a:extLst xmlns:a="http://schemas.openxmlformats.org/drawingml/2006/main">
+              <a:ext uri="{FF2B5EF4-FFF2-40B4-BE49-F238E27FC236}">
+                <a16:creationId xmlns:a16="http://schemas.microsoft.com/office/drawing/2014/main" id="{925D1653-1738-47C8-BFA1-9C9390285CC4}"/>
+              </a:ext>
+            </a:extLst>
+          </p:cNvPr>
+          <p:cNvSpPr>
+            <a:spLocks xmlns:a="http://schemas.openxmlformats.org/drawingml/2006/main" noGrp="1"/>
+          </p:cNvSpPr>
+          <p:nvPr/>
+        </p:nvSpPr>
+        <p:spPr>
+          <a:xfrm xmlns:a="http://schemas.openxmlformats.org/drawingml/2006/main">
+            <a:off x="8362950" y="1504950"/>
+            <a:ext cx="3143250" cy="1428750"/>
+          </a:xfrm>
+          <a:prstGeom xmlns:a="http://schemas.openxmlformats.org/drawingml/2006/main" prst="rect">
+            <a:avLst/>
+          </a:prstGeom>
+          <a:solidFill xmlns:a="http://schemas.openxmlformats.org/drawingml/2006/main">
+            <a:srgbClr val="EDEDED"/>
+          </a:solidFill>
+          <a:ln xmlns:a="http://schemas.openxmlformats.org/drawingml/2006/main" w="0">
+            <a:solidFill>
+              <a:srgbClr val="EDEDED"/>
+            </a:solidFill>
+            <a:prstDash val="solid"/>
+          </a:ln>
+        </p:spPr>
+      </p:sp>
+      <p:sp>
+        <p:nvSpPr>
+          <p:cNvPr id="9" name="">
+            <a:extLst xmlns:a="http://schemas.openxmlformats.org/drawingml/2006/main">
+              <a:ext uri="{FF2B5EF4-FFF2-40B4-BE49-F238E27FC236}">
+                <a16:creationId xmlns:a16="http://schemas.microsoft.com/office/drawing/2014/main" id="{AD911094-04B5-4E98-9749-4F832E6A7030}"/>
+              </a:ext>
+            </a:extLst>
+          </p:cNvPr>
+          <p:cNvSpPr>
+            <a:spLocks xmlns:a="http://schemas.openxmlformats.org/drawingml/2006/main" noGrp="1"/>
+          </p:cNvSpPr>
+          <p:nvPr/>
+        </p:nvSpPr>
+        <p:spPr>
+          <a:xfrm xmlns:a="http://schemas.openxmlformats.org/drawingml/2006/main">
+            <a:off x="8362950" y="1504950"/>
+            <a:ext cx="76200" cy="1428750"/>
+          </a:xfrm>
+          <a:prstGeom xmlns:a="http://schemas.openxmlformats.org/drawingml/2006/main" prst="rect">
+            <a:avLst/>
+          </a:prstGeom>
+          <a:solidFill xmlns:a="http://schemas.openxmlformats.org/drawingml/2006/main">
+            <a:srgbClr val="E45756"/>
+          </a:solidFill>
+          <a:ln xmlns:a="http://schemas.openxmlformats.org/drawingml/2006/main" w="0">
+            <a:solidFill>
+              <a:srgbClr val="E45756"/>
+            </a:solidFill>
+            <a:prstDash val="solid"/>
+          </a:ln>
+        </p:spPr>
+      </p:sp>
+      <p:sp>
+        <p:nvSpPr>
+          <p:cNvPr id="10" name="">
+            <a:extLst xmlns:a="http://schemas.openxmlformats.org/drawingml/2006/main">
+              <a:ext uri="{FF2B5EF4-FFF2-40B4-BE49-F238E27FC236}">
+                <a16:creationId xmlns:a16="http://schemas.microsoft.com/office/drawing/2014/main" id="{8259A327-4374-4B4E-A3BA-F8E016498564}"/>
+              </a:ext>
+            </a:extLst>
+          </p:cNvPr>
+          <p:cNvSpPr>
+            <a:spLocks xmlns:a="http://schemas.openxmlformats.org/drawingml/2006/main" noGrp="1"/>
+          </p:cNvSpPr>
+          <p:nvPr/>
+        </p:nvSpPr>
+        <p:spPr>
+          <a:xfrm xmlns:a="http://schemas.openxmlformats.org/drawingml/2006/main">
+            <a:off x="8629650" y="1676400"/>
+            <a:ext cx="2686050" cy="590550"/>
+          </a:xfrm>
+          <a:prstGeom xmlns:a="http://schemas.openxmlformats.org/drawingml/2006/main" prst="rect">
+            <a:avLst/>
+          </a:prstGeom>
+          <a:noFill xmlns:a="http://schemas.openxmlformats.org/drawingml/2006/main"/>
+          <a:ln xmlns:a="http://schemas.openxmlformats.org/drawingml/2006/main" w="0">
+            <a:noFill/>
+            <a:prstDash val="solid"/>
+          </a:ln>
+        </p:spPr>
+        <p:txBody>
+          <a:bodyPr xmlns:a="http://schemas.openxmlformats.org/drawingml/2006/main" wrap="square" lIns="0" tIns="0" rIns="0" bIns="0" anchor="t">
+            <a:normAutofit fontScale="100000"/>
+          </a:bodyPr>
+          <a:lstStyle xmlns:a="http://schemas.openxmlformats.org/drawingml/2006/main"/>
+          <a:p xmlns:a="http://schemas.openxmlformats.org/drawingml/2006/main">
+            <a:pPr algn="l">
+              <a:buNone/>
+              <a:defRPr sz="3225" b="1">
+                <a:solidFill>
+                  <a:srgbClr val="E45756"/>
+                </a:solidFill>
+                <a:latin typeface="Arial"/>
+                <a:ea typeface="Arial"/>
+                <a:cs typeface="Arial"/>
+              </a:defRPr>
+            </a:pPr>
+            <a:r>
+              <a:rPr sz="3225" b="1">
+                <a:solidFill>
+                  <a:srgbClr val="E45756"/>
+                </a:solidFill>
+                <a:latin typeface="Arial"/>
+                <a:ea typeface="Arial"/>
+                <a:cs typeface="Arial"/>
+              </a:rPr>
+              <a:t>-0.389</a:t>
+            </a:r>
+          </a:p>
+        </p:txBody>
+      </p:sp>
+      <p:sp>
+        <p:nvSpPr>
+          <p:cNvPr id="11" name="">
+            <a:extLst xmlns:a="http://schemas.openxmlformats.org/drawingml/2006/main">
+              <a:ext uri="{FF2B5EF4-FFF2-40B4-BE49-F238E27FC236}">
+                <a16:creationId xmlns:a16="http://schemas.microsoft.com/office/drawing/2014/main" id="{BE341AE3-547D-4111-ADFF-14E5545F2DBF}"/>
+              </a:ext>
+            </a:extLst>
+          </p:cNvPr>
+          <p:cNvSpPr>
+            <a:spLocks xmlns:a="http://schemas.openxmlformats.org/drawingml/2006/main" noGrp="1"/>
+          </p:cNvSpPr>
+          <p:nvPr/>
+        </p:nvSpPr>
+        <p:spPr>
+          <a:xfrm xmlns:a="http://schemas.openxmlformats.org/drawingml/2006/main">
+            <a:off x="8629650" y="2343150"/>
+            <a:ext cx="2686050" cy="438150"/>
+          </a:xfrm>
+          <a:prstGeom xmlns:a="http://schemas.openxmlformats.org/drawingml/2006/main" prst="rect">
+            <a:avLst/>
+          </a:prstGeom>
+          <a:noFill xmlns:a="http://schemas.openxmlformats.org/drawingml/2006/main"/>
+          <a:ln xmlns:a="http://schemas.openxmlformats.org/drawingml/2006/main" w="0">
+            <a:noFill/>
+            <a:prstDash val="solid"/>
+          </a:ln>
+        </p:spPr>
+        <p:txBody>
+          <a:bodyPr xmlns:a="http://schemas.openxmlformats.org/drawingml/2006/main" wrap="square" lIns="0" tIns="0" rIns="0" bIns="0" anchor="t">
+            <a:normAutofit fontScale="100000"/>
+          </a:bodyPr>
+          <a:lstStyle xmlns:a="http://schemas.openxmlformats.org/drawingml/2006/main"/>
+          <a:p xmlns:a="http://schemas.openxmlformats.org/drawingml/2006/main">
+            <a:pPr algn="l">
+              <a:buNone/>
+              <a:defRPr sz="1350" b="0">
+                <a:solidFill>
+                  <a:srgbClr val="273548"/>
+                </a:solidFill>
+                <a:latin typeface="Arial"/>
+                <a:ea typeface="Arial"/>
+                <a:cs typeface="Arial"/>
+              </a:defRPr>
+            </a:pPr>
+            <a:r>
+              <a:rPr sz="1350" b="0">
+                <a:solidFill>
+                  <a:srgbClr val="273548"/>
+                </a:solidFill>
+                <a:latin typeface="Arial"/>
+                <a:ea typeface="Arial"/>
+                <a:cs typeface="Arial"/>
+              </a:rPr>
+              <a:t>largest correlation change: 5 prior / 15 forward</a:t>
+            </a:r>
+          </a:p>
+        </p:txBody>
+      </p:sp>
+      <p:sp>
+        <p:nvSpPr>
+          <p:cNvPr id="12" name="">
+            <a:extLst xmlns:a="http://schemas.openxmlformats.org/drawingml/2006/main">
+              <a:ext uri="{FF2B5EF4-FFF2-40B4-BE49-F238E27FC236}">
+                <a16:creationId xmlns:a16="http://schemas.microsoft.com/office/drawing/2014/main" id="{627B1C2D-BD18-4B6C-8DC8-10694F2FD365}"/>
+              </a:ext>
+            </a:extLst>
+          </p:cNvPr>
+          <p:cNvSpPr>
+            <a:spLocks xmlns:a="http://schemas.openxmlformats.org/drawingml/2006/main" noGrp="1"/>
+          </p:cNvSpPr>
+          <p:nvPr/>
+        </p:nvSpPr>
+        <p:spPr>
+          <a:xfrm xmlns:a="http://schemas.openxmlformats.org/drawingml/2006/main">
+            <a:off x="8362950" y="3143250"/>
+            <a:ext cx="3143250" cy="1428750"/>
+          </a:xfrm>
+          <a:prstGeom xmlns:a="http://schemas.openxmlformats.org/drawingml/2006/main" prst="rect">
+            <a:avLst/>
+          </a:prstGeom>
+          <a:solidFill xmlns:a="http://schemas.openxmlformats.org/drawingml/2006/main">
+            <a:srgbClr val="EDEDED"/>
+          </a:solidFill>
+          <a:ln xmlns:a="http://schemas.openxmlformats.org/drawingml/2006/main" w="0">
+            <a:solidFill>
+              <a:srgbClr val="EDEDED"/>
+            </a:solidFill>
+            <a:prstDash val="solid"/>
+          </a:ln>
+        </p:spPr>
+      </p:sp>
+      <p:sp>
+        <p:nvSpPr>
+          <p:cNvPr id="13" name="">
+            <a:extLst xmlns:a="http://schemas.openxmlformats.org/drawingml/2006/main">
+              <a:ext uri="{FF2B5EF4-FFF2-40B4-BE49-F238E27FC236}">
+                <a16:creationId xmlns:a16="http://schemas.microsoft.com/office/drawing/2014/main" id="{1A4050CC-5568-4F8A-B026-EC7B8ABEFB7A}"/>
+              </a:ext>
+            </a:extLst>
+          </p:cNvPr>
+          <p:cNvSpPr>
+            <a:spLocks xmlns:a="http://schemas.openxmlformats.org/drawingml/2006/main" noGrp="1"/>
+          </p:cNvSpPr>
+          <p:nvPr/>
+        </p:nvSpPr>
+        <p:spPr>
+          <a:xfrm xmlns:a="http://schemas.openxmlformats.org/drawingml/2006/main">
+            <a:off x="8362950" y="3143250"/>
+            <a:ext cx="76200" cy="1428750"/>
+          </a:xfrm>
+          <a:prstGeom xmlns:a="http://schemas.openxmlformats.org/drawingml/2006/main" prst="rect">
+            <a:avLst/>
+          </a:prstGeom>
+          <a:solidFill xmlns:a="http://schemas.openxmlformats.org/drawingml/2006/main">
+            <a:srgbClr val="3D8DFF"/>
+          </a:solidFill>
+          <a:ln xmlns:a="http://schemas.openxmlformats.org/drawingml/2006/main" w="0">
+            <a:solidFill>
+              <a:srgbClr val="3D8DFF"/>
+            </a:solidFill>
+            <a:prstDash val="solid"/>
+          </a:ln>
+        </p:spPr>
+      </p:sp>
+      <p:sp>
+        <p:nvSpPr>
+          <p:cNvPr id="14" name="">
+            <a:extLst xmlns:a="http://schemas.openxmlformats.org/drawingml/2006/main">
+              <a:ext uri="{FF2B5EF4-FFF2-40B4-BE49-F238E27FC236}">
+                <a16:creationId xmlns:a16="http://schemas.microsoft.com/office/drawing/2014/main" id="{502FF9D4-D051-476B-B68A-15DCA6B44FE9}"/>
+              </a:ext>
+            </a:extLst>
+          </p:cNvPr>
+          <p:cNvSpPr>
+            <a:spLocks xmlns:a="http://schemas.openxmlformats.org/drawingml/2006/main" noGrp="1"/>
+          </p:cNvSpPr>
+          <p:nvPr/>
+        </p:nvSpPr>
+        <p:spPr>
+          <a:xfrm xmlns:a="http://schemas.openxmlformats.org/drawingml/2006/main">
+            <a:off x="8629650" y="3314700"/>
+            <a:ext cx="2686050" cy="590550"/>
+          </a:xfrm>
+          <a:prstGeom xmlns:a="http://schemas.openxmlformats.org/drawingml/2006/main" prst="rect">
+            <a:avLst/>
+          </a:prstGeom>
+          <a:noFill xmlns:a="http://schemas.openxmlformats.org/drawingml/2006/main"/>
+          <a:ln xmlns:a="http://schemas.openxmlformats.org/drawingml/2006/main" w="0">
+            <a:noFill/>
+            <a:prstDash val="solid"/>
+          </a:ln>
+        </p:spPr>
+        <p:txBody>
+          <a:bodyPr xmlns:a="http://schemas.openxmlformats.org/drawingml/2006/main" wrap="square" lIns="0" tIns="0" rIns="0" bIns="0" anchor="t">
+            <a:normAutofit fontScale="100000"/>
+          </a:bodyPr>
+          <a:lstStyle xmlns:a="http://schemas.openxmlformats.org/drawingml/2006/main"/>
+          <a:p xmlns:a="http://schemas.openxmlformats.org/drawingml/2006/main">
+            <a:pPr algn="l">
+              <a:buNone/>
+              <a:defRPr sz="3225" b="1">
+                <a:solidFill>
+                  <a:srgbClr val="3D8DFF"/>
+                </a:solidFill>
+                <a:latin typeface="Arial"/>
+                <a:ea typeface="Arial"/>
+                <a:cs typeface="Arial"/>
+              </a:defRPr>
+            </a:pPr>
+            <a:r>
+              <a:rPr sz="3225" b="1">
+                <a:solidFill>
+                  <a:srgbClr val="3D8DFF"/>
+                </a:solidFill>
+                <a:latin typeface="Arial"/>
+                <a:ea typeface="Arial"/>
+                <a:cs typeface="Arial"/>
+              </a:rPr>
+              <a:t>q = 0.016</a:t>
+            </a:r>
+          </a:p>
+        </p:txBody>
+      </p:sp>
+      <p:sp>
+        <p:nvSpPr>
+          <p:cNvPr id="15" name="">
+            <a:extLst xmlns:a="http://schemas.openxmlformats.org/drawingml/2006/main">
+              <a:ext uri="{FF2B5EF4-FFF2-40B4-BE49-F238E27FC236}">
+                <a16:creationId xmlns:a16="http://schemas.microsoft.com/office/drawing/2014/main" id="{03DFBB46-08D6-4497-AA7C-C2049757E9DE}"/>
+              </a:ext>
+            </a:extLst>
+          </p:cNvPr>
+          <p:cNvSpPr>
+            <a:spLocks xmlns:a="http://schemas.openxmlformats.org/drawingml/2006/main" noGrp="1"/>
+          </p:cNvSpPr>
+          <p:nvPr/>
+        </p:nvSpPr>
+        <p:spPr>
+          <a:xfrm xmlns:a="http://schemas.openxmlformats.org/drawingml/2006/main">
+            <a:off x="8629650" y="3981450"/>
+            <a:ext cx="2686050" cy="438150"/>
+          </a:xfrm>
+          <a:prstGeom xmlns:a="http://schemas.openxmlformats.org/drawingml/2006/main" prst="rect">
+            <a:avLst/>
+          </a:prstGeom>
+          <a:noFill xmlns:a="http://schemas.openxmlformats.org/drawingml/2006/main"/>
+          <a:ln xmlns:a="http://schemas.openxmlformats.org/drawingml/2006/main" w="0">
+            <a:noFill/>
+            <a:prstDash val="solid"/>
+          </a:ln>
+        </p:spPr>
+        <p:txBody>
+          <a:bodyPr xmlns:a="http://schemas.openxmlformats.org/drawingml/2006/main" wrap="square" lIns="0" tIns="0" rIns="0" bIns="0" anchor="t">
+            <a:normAutofit fontScale="100000"/>
+          </a:bodyPr>
+          <a:lstStyle xmlns:a="http://schemas.openxmlformats.org/drawingml/2006/main"/>
+          <a:p xmlns:a="http://schemas.openxmlformats.org/drawingml/2006/main">
+            <a:pPr algn="l">
+              <a:buNone/>
+              <a:defRPr sz="1350" b="0">
+                <a:solidFill>
+                  <a:srgbClr val="273548"/>
+                </a:solidFill>
+                <a:latin typeface="Arial"/>
+                <a:ea typeface="Arial"/>
+                <a:cs typeface="Arial"/>
+              </a:defRPr>
+            </a:pPr>
+            <a:r>
+              <a:rPr sz="1350" b="0">
+                <a:solidFill>
+                  <a:srgbClr val="273548"/>
+                </a:solidFill>
+                <a:latin typeface="Arial"/>
+                <a:ea typeface="Arial"/>
+                <a:cs typeface="Arial"/>
+              </a:rPr>
+              <a:t>within MEDIUM-minus-LOW family</a:t>
+            </a:r>
+          </a:p>
+        </p:txBody>
+      </p:sp>
+      <p:sp>
+        <p:nvSpPr>
+          <p:cNvPr id="16" name="">
+            <a:extLst xmlns:a="http://schemas.openxmlformats.org/drawingml/2006/main">
+              <a:ext uri="{FF2B5EF4-FFF2-40B4-BE49-F238E27FC236}">
+                <a16:creationId xmlns:a16="http://schemas.microsoft.com/office/drawing/2014/main" id="{509D61CC-6E5E-49EC-A5F6-E861E8561441}"/>
+              </a:ext>
+            </a:extLst>
+          </p:cNvPr>
+          <p:cNvSpPr>
+            <a:spLocks xmlns:a="http://schemas.openxmlformats.org/drawingml/2006/main" noGrp="1"/>
+          </p:cNvSpPr>
+          <p:nvPr/>
+        </p:nvSpPr>
+        <p:spPr>
+          <a:xfrm xmlns:a="http://schemas.openxmlformats.org/drawingml/2006/main">
+            <a:off x="8362950" y="4781550"/>
+            <a:ext cx="3143250" cy="1428750"/>
+          </a:xfrm>
+          <a:prstGeom xmlns:a="http://schemas.openxmlformats.org/drawingml/2006/main" prst="rect">
+            <a:avLst/>
+          </a:prstGeom>
+          <a:solidFill xmlns:a="http://schemas.openxmlformats.org/drawingml/2006/main">
+            <a:srgbClr val="EDEDED"/>
+          </a:solidFill>
+          <a:ln xmlns:a="http://schemas.openxmlformats.org/drawingml/2006/main" w="0">
+            <a:solidFill>
+              <a:srgbClr val="EDEDED"/>
+            </a:solidFill>
+            <a:prstDash val="solid"/>
+          </a:ln>
+        </p:spPr>
+      </p:sp>
+      <p:sp>
+        <p:nvSpPr>
+          <p:cNvPr id="17" name="">
+            <a:extLst xmlns:a="http://schemas.openxmlformats.org/drawingml/2006/main">
+              <a:ext uri="{FF2B5EF4-FFF2-40B4-BE49-F238E27FC236}">
+                <a16:creationId xmlns:a16="http://schemas.microsoft.com/office/drawing/2014/main" id="{A935608E-4DDE-41BA-8DF2-831CF419565B}"/>
+              </a:ext>
+            </a:extLst>
+          </p:cNvPr>
+          <p:cNvSpPr>
+            <a:spLocks xmlns:a="http://schemas.openxmlformats.org/drawingml/2006/main" noGrp="1"/>
+          </p:cNvSpPr>
+          <p:nvPr/>
+        </p:nvSpPr>
+        <p:spPr>
+          <a:xfrm xmlns:a="http://schemas.openxmlformats.org/drawingml/2006/main">
+            <a:off x="8362950" y="4781550"/>
+            <a:ext cx="76200" cy="1428750"/>
+          </a:xfrm>
+          <a:prstGeom xmlns:a="http://schemas.openxmlformats.org/drawingml/2006/main" prst="rect">
+            <a:avLst/>
+          </a:prstGeom>
+          <a:solidFill xmlns:a="http://schemas.openxmlformats.org/drawingml/2006/main">
+            <a:srgbClr val="273548"/>
+          </a:solidFill>
+          <a:ln xmlns:a="http://schemas.openxmlformats.org/drawingml/2006/main" w="0">
+            <a:solidFill>
+              <a:srgbClr val="273548"/>
+            </a:solidFill>
+            <a:prstDash val="solid"/>
+          </a:ln>
+        </p:spPr>
+      </p:sp>
+      <p:sp>
+        <p:nvSpPr>
+          <p:cNvPr id="18" name="">
+            <a:extLst xmlns:a="http://schemas.openxmlformats.org/drawingml/2006/main">
+              <a:ext uri="{FF2B5EF4-FFF2-40B4-BE49-F238E27FC236}">
+                <a16:creationId xmlns:a16="http://schemas.microsoft.com/office/drawing/2014/main" id="{088A976D-39D1-4C6C-803F-0D3F8BAE4A28}"/>
+              </a:ext>
+            </a:extLst>
+          </p:cNvPr>
+          <p:cNvSpPr>
+            <a:spLocks xmlns:a="http://schemas.openxmlformats.org/drawingml/2006/main" noGrp="1"/>
+          </p:cNvSpPr>
+          <p:nvPr/>
+        </p:nvSpPr>
+        <p:spPr>
+          <a:xfrm xmlns:a="http://schemas.openxmlformats.org/drawingml/2006/main">
+            <a:off x="8629650" y="4953000"/>
+            <a:ext cx="2686050" cy="590550"/>
+          </a:xfrm>
+          <a:prstGeom xmlns:a="http://schemas.openxmlformats.org/drawingml/2006/main" prst="rect">
+            <a:avLst/>
+          </a:prstGeom>
+          <a:noFill xmlns:a="http://schemas.openxmlformats.org/drawingml/2006/main"/>
+          <a:ln xmlns:a="http://schemas.openxmlformats.org/drawingml/2006/main" w="0">
+            <a:noFill/>
+            <a:prstDash val="solid"/>
+          </a:ln>
+        </p:spPr>
+        <p:txBody>
+          <a:bodyPr xmlns:a="http://schemas.openxmlformats.org/drawingml/2006/main" wrap="square" lIns="0" tIns="0" rIns="0" bIns="0" anchor="t">
+            <a:normAutofit fontScale="100000"/>
+          </a:bodyPr>
+          <a:lstStyle xmlns:a="http://schemas.openxmlformats.org/drawingml/2006/main"/>
+          <a:p xmlns:a="http://schemas.openxmlformats.org/drawingml/2006/main">
+            <a:pPr algn="l">
+              <a:buNone/>
+              <a:defRPr sz="3225" b="1">
+                <a:solidFill>
+                  <a:srgbClr val="273548"/>
+                </a:solidFill>
+                <a:latin typeface="Arial"/>
+                <a:ea typeface="Arial"/>
+                <a:cs typeface="Arial"/>
+              </a:defRPr>
+            </a:pPr>
+            <a:r>
+              <a:rPr sz="3225" b="1">
+                <a:solidFill>
+                  <a:srgbClr val="273548"/>
+                </a:solidFill>
+                <a:latin typeface="Arial"/>
+                <a:ea typeface="Arial"/>
+                <a:cs typeface="Arial"/>
+              </a:rPr>
+              <a:t>0 / 243</a:t>
+            </a:r>
+          </a:p>
+        </p:txBody>
+      </p:sp>
+      <p:sp>
+        <p:nvSpPr>
+          <p:cNvPr id="19" name="">
+            <a:extLst xmlns:a="http://schemas.openxmlformats.org/drawingml/2006/main">
+              <a:ext uri="{FF2B5EF4-FFF2-40B4-BE49-F238E27FC236}">
+                <a16:creationId xmlns:a16="http://schemas.microsoft.com/office/drawing/2014/main" id="{AA1E116E-13CC-4735-B31A-B5C1846B2D22}"/>
+              </a:ext>
+            </a:extLst>
+          </p:cNvPr>
+          <p:cNvSpPr>
+            <a:spLocks xmlns:a="http://schemas.openxmlformats.org/drawingml/2006/main" noGrp="1"/>
+          </p:cNvSpPr>
+          <p:nvPr/>
+        </p:nvSpPr>
+        <p:spPr>
+          <a:xfrm xmlns:a="http://schemas.openxmlformats.org/drawingml/2006/main">
+            <a:off x="8629650" y="5619750"/>
+            <a:ext cx="2686050" cy="438150"/>
+          </a:xfrm>
+          <a:prstGeom xmlns:a="http://schemas.openxmlformats.org/drawingml/2006/main" prst="rect">
+            <a:avLst/>
+          </a:prstGeom>
+          <a:noFill xmlns:a="http://schemas.openxmlformats.org/drawingml/2006/main"/>
+          <a:ln xmlns:a="http://schemas.openxmlformats.org/drawingml/2006/main" w="0">
+            <a:noFill/>
+            <a:prstDash val="solid"/>
+          </a:ln>
+        </p:spPr>
+        <p:txBody>
+          <a:bodyPr xmlns:a="http://schemas.openxmlformats.org/drawingml/2006/main" wrap="square" lIns="0" tIns="0" rIns="0" bIns="0" anchor="t">
+            <a:normAutofit fontScale="100000"/>
+          </a:bodyPr>
+          <a:lstStyle xmlns:a="http://schemas.openxmlformats.org/drawingml/2006/main"/>
+          <a:p xmlns:a="http://schemas.openxmlformats.org/drawingml/2006/main">
+            <a:pPr algn="l">
+              <a:buNone/>
+              <a:defRPr sz="1350" b="0">
+                <a:solidFill>
+                  <a:srgbClr val="273548"/>
+                </a:solidFill>
+                <a:latin typeface="Arial"/>
+                <a:ea typeface="Arial"/>
+                <a:cs typeface="Arial"/>
+              </a:defRPr>
+            </a:pPr>
+            <a:r>
+              <a:rPr sz="1350" b="0">
+                <a:solidFill>
+                  <a:srgbClr val="273548"/>
+                </a:solidFill>
+                <a:latin typeface="Arial"/>
+                <a:ea typeface="Arial"/>
+                <a:cs typeface="Arial"/>
+              </a:rPr>
+              <a:t>pairwise cells surviving strict omnibus BH</a:t>
+            </a:r>
+          </a:p>
+        </p:txBody>
+      </p:sp>
+      <p:pic>
+        <p:nvPicPr>
+          <p:cNvPr id="40" name=""/>
+          <p:cNvPicPr>
+            <a:picLocks xmlns:a="http://schemas.openxmlformats.org/drawingml/2006/main" noChangeAspect="1"/>
+          </p:cNvPicPr>
+          <p:nvPr/>
+        </p:nvPicPr>
+        <p:blipFill>
+          <a:blip xmlns:r="http://schemas.openxmlformats.org/officeDocument/2006/relationships" xmlns:a="http://schemas.openxmlformats.org/drawingml/2006/main" r:embed="R62f36352ad9c4879"/>
+          <a:stretch xmlns:a="http://schemas.openxmlformats.org/drawingml/2006/main"/>
+        </p:blipFill>
+        <p:spPr>
+          <a:xfrm xmlns:a="http://schemas.openxmlformats.org/drawingml/2006/main" flipH="0" flipV="0">
+            <a:off x="609600" y="1428750"/>
+            <a:ext cx="7143750" cy="4762500"/>
+          </a:xfrm>
+          <a:prstGeom xmlns:a="http://schemas.openxmlformats.org/drawingml/2006/main" prst="rect">
+            <a:avLst/>
+          </a:prstGeom>
+        </p:spPr>
+      </p:pic>
+    </p:spTree>
+    <p:extLst>
+      <p:ext uri="{BB962C8B-B14F-4D97-AF65-F5344CB8AC3E}">
+        <p14:creationId xmlns:p14="http://schemas.microsoft.com/office/powerpoint/2010/main" val="1583170704"/>
+      </p:ext>
+    </p:extLst>
+  </p:cSld>
+</p:sld>
+</file>
+
+<file path=ppt/slides/slide39.xml><?xml version="1.0" encoding="utf-8"?>
+<p:sld xmlns:p="http://schemas.openxmlformats.org/presentationml/2006/main">
+  <p:cSld>
+    <p:bg>
+      <p:bgPr>
+        <a:solidFill xmlns:a="http://schemas.openxmlformats.org/drawingml/2006/main">
+          <a:srgbClr val="FFFFFF"/>
+        </a:solidFill>
+      </p:bgPr>
+    </p:bg>
+    <p:spTree>
+      <p:nvGrpSpPr>
+        <p:cNvPr id="1" name=""/>
+        <p:cNvGrpSpPr/>
+        <p:nvPr/>
+      </p:nvGrpSpPr>
+      <p:grpSpPr>
+        <a:xfrm xmlns:a="http://schemas.openxmlformats.org/drawingml/2006/main"/>
+      </p:grpSpPr>
+      <p:sp>
+        <p:nvSpPr>
+          <p:cNvPr id="24" name="section-11">
+            <a:extLst xmlns:a="http://schemas.openxmlformats.org/drawingml/2006/main">
+              <a:ext uri="{FF2B5EF4-FFF2-40B4-BE49-F238E27FC236}">
+                <a16:creationId xmlns:a16="http://schemas.microsoft.com/office/drawing/2014/main" id="{272ED433-B59C-436C-9DFB-4D317B90A13F}"/>
+              </a:ext>
+            </a:extLst>
+          </p:cNvPr>
+          <p:cNvSpPr>
+            <a:spLocks xmlns:a="http://schemas.openxmlformats.org/drawingml/2006/main" noGrp="1"/>
+          </p:cNvSpPr>
+          <p:nvPr/>
+        </p:nvSpPr>
+        <p:spPr>
+          <a:xfrm xmlns:a="http://schemas.openxmlformats.org/drawingml/2006/main">
+            <a:off x="457200" y="228600"/>
+            <a:ext cx="4191000" cy="228600"/>
+          </a:xfrm>
+          <a:prstGeom xmlns:a="http://schemas.openxmlformats.org/drawingml/2006/main" prst="rect">
+            <a:avLst/>
+          </a:prstGeom>
+          <a:noFill xmlns:a="http://schemas.openxmlformats.org/drawingml/2006/main"/>
+          <a:ln xmlns:a="http://schemas.openxmlformats.org/drawingml/2006/main" w="0">
+            <a:noFill/>
+            <a:prstDash val="solid"/>
+          </a:ln>
+        </p:spPr>
+        <p:txBody>
+          <a:bodyPr xmlns:a="http://schemas.openxmlformats.org/drawingml/2006/main" wrap="square" lIns="0" tIns="0" rIns="0" bIns="0" anchor="t">
+            <a:normAutofit fontScale="100000"/>
+          </a:bodyPr>
+          <a:lstStyle xmlns:a="http://schemas.openxmlformats.org/drawingml/2006/main"/>
+          <a:p xmlns:a="http://schemas.openxmlformats.org/drawingml/2006/main">
+            <a:pPr algn="l">
+              <a:buNone/>
+              <a:defRPr sz="1200" b="1">
+                <a:solidFill>
+                  <a:srgbClr val="667384"/>
+                </a:solidFill>
+                <a:latin typeface="Arial"/>
+                <a:ea typeface="Arial"/>
+                <a:cs typeface="Arial"/>
+              </a:defRPr>
+            </a:pPr>
+            <a:r>
+              <a:rPr sz="1200" b="1">
+                <a:solidFill>
+                  <a:srgbClr val="667384"/>
+                </a:solidFill>
+                <a:latin typeface="Arial"/>
+                <a:ea typeface="Arial"/>
+                <a:cs typeface="Arial"/>
+              </a:rPr>
+              <a:t>TSLA DESCRIPTIVE MICROSCOPE</a:t>
+            </a:r>
+          </a:p>
+        </p:txBody>
+      </p:sp>
+      <p:sp>
+        <p:nvSpPr>
+          <p:cNvPr id="2" name="title-11">
+            <a:extLst xmlns:a="http://schemas.openxmlformats.org/drawingml/2006/main">
+              <a:ext uri="{FF2B5EF4-FFF2-40B4-BE49-F238E27FC236}">
+                <a16:creationId xmlns:a16="http://schemas.microsoft.com/office/drawing/2014/main" id="{3EC40708-7E00-432C-8ECE-907FA5705292}"/>
+              </a:ext>
+            </a:extLst>
+          </p:cNvPr>
+          <p:cNvSpPr>
+            <a:spLocks xmlns:a="http://schemas.openxmlformats.org/drawingml/2006/main" noGrp="1"/>
+          </p:cNvSpPr>
+          <p:nvPr/>
+        </p:nvSpPr>
+        <p:spPr>
+          <a:xfrm xmlns:a="http://schemas.openxmlformats.org/drawingml/2006/main">
+            <a:off x="457200" y="533400"/>
+            <a:ext cx="11277600" cy="628650"/>
+          </a:xfrm>
+          <a:prstGeom xmlns:a="http://schemas.openxmlformats.org/drawingml/2006/main" prst="rect">
+            <a:avLst/>
+          </a:prstGeom>
+          <a:noFill xmlns:a="http://schemas.openxmlformats.org/drawingml/2006/main"/>
+          <a:ln xmlns:a="http://schemas.openxmlformats.org/drawingml/2006/main" w="0">
+            <a:noFill/>
+            <a:prstDash val="solid"/>
+          </a:ln>
+        </p:spPr>
+        <p:txBody>
+          <a:bodyPr xmlns:a="http://schemas.openxmlformats.org/drawingml/2006/main" wrap="square" lIns="0" tIns="0" rIns="0" bIns="0" anchor="t">
+            <a:normAutofit fontScale="92007"/>
+          </a:bodyPr>
+          <a:lstStyle xmlns:a="http://schemas.openxmlformats.org/drawingml/2006/main"/>
+          <a:p xmlns:a="http://schemas.openxmlformats.org/drawingml/2006/main">
+            <a:pPr algn="l">
+              <a:buNone/>
+              <a:defRPr sz="3525" b="1">
+                <a:solidFill>
+                  <a:srgbClr val="000000"/>
+                </a:solidFill>
+                <a:latin typeface="Arial"/>
+                <a:ea typeface="Arial"/>
+                <a:cs typeface="Arial"/>
+              </a:defRPr>
+            </a:pPr>
+            <a:r>
+              <a:rPr sz="3525" b="1">
+                <a:solidFill>
+                  <a:srgbClr val="000000"/>
+                </a:solidFill>
+                <a:latin typeface="Arial"/>
+                <a:ea typeface="Arial"/>
+                <a:cs typeface="Arial"/>
+              </a:rPr>
+              <a:t>External context changes the map—but confirms no edge</a:t>
+            </a:r>
+          </a:p>
+        </p:txBody>
+      </p:sp>
+      <p:sp>
+        <p:nvSpPr>
+          <p:cNvPr id="3" name="">
+            <a:extLst xmlns:a="http://schemas.openxmlformats.org/drawingml/2006/main">
+              <a:ext uri="{FF2B5EF4-FFF2-40B4-BE49-F238E27FC236}">
+                <a16:creationId xmlns:a16="http://schemas.microsoft.com/office/drawing/2014/main" id="{D5CA0FCE-75E8-41EF-A76A-23E9E2120C6A}"/>
+              </a:ext>
+            </a:extLst>
+          </p:cNvPr>
+          <p:cNvSpPr>
+            <a:spLocks xmlns:a="http://schemas.openxmlformats.org/drawingml/2006/main" noGrp="1"/>
+          </p:cNvSpPr>
+          <p:nvPr/>
+        </p:nvSpPr>
+        <p:spPr>
+          <a:xfrm xmlns:a="http://schemas.openxmlformats.org/drawingml/2006/main">
+            <a:off x="457200" y="1200150"/>
+            <a:ext cx="11277600" cy="19050"/>
+          </a:xfrm>
+          <a:prstGeom xmlns:a="http://schemas.openxmlformats.org/drawingml/2006/main" prst="rect">
+            <a:avLst/>
+          </a:prstGeom>
+          <a:solidFill xmlns:a="http://schemas.openxmlformats.org/drawingml/2006/main">
+            <a:srgbClr val="B8BCC4"/>
+          </a:solidFill>
+          <a:ln xmlns:a="http://schemas.openxmlformats.org/drawingml/2006/main" w="0">
+            <a:solidFill>
+              <a:srgbClr val="B8BCC4"/>
+            </a:solidFill>
+            <a:prstDash val="solid"/>
+          </a:ln>
+        </p:spPr>
+      </p:sp>
+      <p:sp>
+        <p:nvSpPr>
+          <p:cNvPr id="4" name="footer-left-11">
+            <a:extLst xmlns:a="http://schemas.openxmlformats.org/drawingml/2006/main">
+              <a:ext uri="{FF2B5EF4-FFF2-40B4-BE49-F238E27FC236}">
+                <a16:creationId xmlns:a16="http://schemas.microsoft.com/office/drawing/2014/main" id="{700DA765-80E0-4197-8700-00D867B86FA2}"/>
+              </a:ext>
+            </a:extLst>
+          </p:cNvPr>
+          <p:cNvSpPr>
+            <a:spLocks xmlns:a="http://schemas.openxmlformats.org/drawingml/2006/main" noGrp="1"/>
+          </p:cNvSpPr>
+          <p:nvPr/>
+        </p:nvSpPr>
+        <p:spPr>
+          <a:xfrm xmlns:a="http://schemas.openxmlformats.org/drawingml/2006/main">
+            <a:off x="457200" y="6515100"/>
+            <a:ext cx="3429000" cy="171450"/>
+          </a:xfrm>
+          <a:prstGeom xmlns:a="http://schemas.openxmlformats.org/drawingml/2006/main" prst="rect">
+            <a:avLst/>
+          </a:prstGeom>
+          <a:noFill xmlns:a="http://schemas.openxmlformats.org/drawingml/2006/main"/>
+          <a:ln xmlns:a="http://schemas.openxmlformats.org/drawingml/2006/main" w="0">
+            <a:noFill/>
+            <a:prstDash val="solid"/>
+          </a:ln>
+        </p:spPr>
+        <p:txBody>
+          <a:bodyPr xmlns:a="http://schemas.openxmlformats.org/drawingml/2006/main" wrap="square" lIns="0" tIns="0" rIns="0" bIns="0" anchor="t">
+            <a:normAutofit fontScale="100000"/>
+          </a:bodyPr>
+          <a:lstStyle xmlns:a="http://schemas.openxmlformats.org/drawingml/2006/main"/>
+          <a:p xmlns:a="http://schemas.openxmlformats.org/drawingml/2006/main">
+            <a:pPr algn="l">
+              <a:buNone/>
+              <a:defRPr sz="1050" b="0">
+                <a:solidFill>
+                  <a:srgbClr val="667384"/>
+                </a:solidFill>
+                <a:latin typeface="Arial"/>
+                <a:ea typeface="Arial"/>
+                <a:cs typeface="Arial"/>
+              </a:defRPr>
+            </a:pPr>
+            <a:r>
+              <a:rPr sz="1050" b="0">
+                <a:solidFill>
+                  <a:srgbClr val="667384"/>
+                </a:solidFill>
+                <a:latin typeface="Arial"/>
+                <a:ea typeface="Arial"/>
+                <a:cs typeface="Arial"/>
+              </a:rPr>
+              <a:t>Adjusted daily TSLA | 2018-2023</a:t>
+            </a:r>
+          </a:p>
+        </p:txBody>
+      </p:sp>
+      <p:sp>
+        <p:nvSpPr>
+          <p:cNvPr id="5" name="footer-number-11">
+            <a:extLst xmlns:a="http://schemas.openxmlformats.org/drawingml/2006/main">
+              <a:ext uri="{FF2B5EF4-FFF2-40B4-BE49-F238E27FC236}">
+                <a16:creationId xmlns:a16="http://schemas.microsoft.com/office/drawing/2014/main" id="{83896276-4112-4532-AF7C-776C67C58B77}"/>
+              </a:ext>
+            </a:extLst>
+          </p:cNvPr>
+          <p:cNvSpPr>
+            <a:spLocks xmlns:a="http://schemas.openxmlformats.org/drawingml/2006/main" noGrp="1"/>
+          </p:cNvSpPr>
+          <p:nvPr/>
+        </p:nvSpPr>
+        <p:spPr>
+          <a:xfrm xmlns:a="http://schemas.openxmlformats.org/drawingml/2006/main">
+            <a:off x="11239500" y="6496050"/>
+            <a:ext cx="495300" cy="190500"/>
+          </a:xfrm>
+          <a:prstGeom xmlns:a="http://schemas.openxmlformats.org/drawingml/2006/main" prst="rect">
+            <a:avLst/>
+          </a:prstGeom>
+          <a:noFill xmlns:a="http://schemas.openxmlformats.org/drawingml/2006/main"/>
+          <a:ln xmlns:a="http://schemas.openxmlformats.org/drawingml/2006/main" w="0">
+            <a:noFill/>
+            <a:prstDash val="solid"/>
+          </a:ln>
+        </p:spPr>
+        <p:txBody>
+          <a:bodyPr xmlns:a="http://schemas.openxmlformats.org/drawingml/2006/main" wrap="square" lIns="0" tIns="0" rIns="0" bIns="0" anchor="t">
+            <a:normAutofit fontScale="100000"/>
+          </a:bodyPr>
+          <a:lstStyle xmlns:a="http://schemas.openxmlformats.org/drawingml/2006/main"/>
+          <a:p xmlns:a="http://schemas.openxmlformats.org/drawingml/2006/main">
+            <a:pPr algn="r">
+              <a:buNone/>
+              <a:defRPr sz="1050" b="0">
+                <a:solidFill>
+                  <a:srgbClr val="667384"/>
+                </a:solidFill>
+                <a:latin typeface="Arial"/>
+                <a:ea typeface="Arial"/>
+                <a:cs typeface="Arial"/>
+              </a:defRPr>
+            </a:pPr>
+            <a:r>
+              <a:rPr sz="1050" b="0">
+                <a:solidFill>
+                  <a:srgbClr val="667384"/>
+                </a:solidFill>
+                <a:latin typeface="Arial"/>
+                <a:ea typeface="Arial"/>
+                <a:cs typeface="Arial"/>
+              </a:rPr>
+              <a:t>39</a:t>
+            </a:r>
+          </a:p>
+        </p:txBody>
+      </p:sp>
+      <p:sp>
+        <p:nvSpPr>
+          <p:cNvPr id="6" name="">
+            <a:extLst xmlns:a="http://schemas.openxmlformats.org/drawingml/2006/main">
+              <a:ext uri="{FF2B5EF4-FFF2-40B4-BE49-F238E27FC236}">
+                <a16:creationId xmlns:a16="http://schemas.microsoft.com/office/drawing/2014/main" id="{10F4BA85-46C5-47BD-BA74-EC806E663D58}"/>
+              </a:ext>
+            </a:extLst>
+          </p:cNvPr>
+          <p:cNvSpPr>
+            <a:spLocks xmlns:a="http://schemas.openxmlformats.org/drawingml/2006/main" noGrp="1"/>
+          </p:cNvSpPr>
+          <p:nvPr/>
+        </p:nvSpPr>
+        <p:spPr>
+          <a:xfrm xmlns:a="http://schemas.openxmlformats.org/drawingml/2006/main">
+            <a:off x="552450" y="1600200"/>
+            <a:ext cx="95250" cy="895350"/>
+          </a:xfrm>
+          <a:prstGeom xmlns:a="http://schemas.openxmlformats.org/drawingml/2006/main" prst="rect">
+            <a:avLst/>
+          </a:prstGeom>
+          <a:solidFill xmlns:a="http://schemas.openxmlformats.org/drawingml/2006/main">
+            <a:srgbClr val="E45756"/>
+          </a:solidFill>
+          <a:ln xmlns:a="http://schemas.openxmlformats.org/drawingml/2006/main" w="0">
+            <a:solidFill>
+              <a:srgbClr val="E45756"/>
+            </a:solidFill>
+            <a:prstDash val="solid"/>
+          </a:ln>
+        </p:spPr>
+      </p:sp>
+      <p:sp>
+        <p:nvSpPr>
+          <p:cNvPr id="7" name="">
+            <a:extLst xmlns:a="http://schemas.openxmlformats.org/drawingml/2006/main">
+              <a:ext uri="{FF2B5EF4-FFF2-40B4-BE49-F238E27FC236}">
+                <a16:creationId xmlns:a16="http://schemas.microsoft.com/office/drawing/2014/main" id="{7EF5B945-9D04-48FA-BA66-96DE813A9715}"/>
+              </a:ext>
+            </a:extLst>
+          </p:cNvPr>
+          <p:cNvSpPr>
+            <a:spLocks xmlns:a="http://schemas.openxmlformats.org/drawingml/2006/main" noGrp="1"/>
+          </p:cNvSpPr>
+          <p:nvPr/>
+        </p:nvSpPr>
+        <p:spPr>
+          <a:xfrm xmlns:a="http://schemas.openxmlformats.org/drawingml/2006/main">
+            <a:off x="876300" y="1581150"/>
+            <a:ext cx="2095500" cy="285750"/>
+          </a:xfrm>
+          <a:prstGeom xmlns:a="http://schemas.openxmlformats.org/drawingml/2006/main" prst="rect">
+            <a:avLst/>
+          </a:prstGeom>
+          <a:noFill xmlns:a="http://schemas.openxmlformats.org/drawingml/2006/main"/>
+          <a:ln xmlns:a="http://schemas.openxmlformats.org/drawingml/2006/main" w="0">
+            <a:noFill/>
+            <a:prstDash val="solid"/>
+          </a:ln>
+        </p:spPr>
+        <p:txBody>
+          <a:bodyPr xmlns:a="http://schemas.openxmlformats.org/drawingml/2006/main" wrap="square" lIns="0" tIns="0" rIns="0" bIns="0" anchor="t">
+            <a:normAutofit fontScale="100000"/>
+          </a:bodyPr>
+          <a:lstStyle xmlns:a="http://schemas.openxmlformats.org/drawingml/2006/main"/>
+          <a:p xmlns:a="http://schemas.openxmlformats.org/drawingml/2006/main">
+            <a:pPr algn="l">
+              <a:buNone/>
+              <a:defRPr sz="1350" b="1">
+                <a:solidFill>
+                  <a:srgbClr val="E45756"/>
+                </a:solidFill>
+                <a:latin typeface="Arial"/>
+                <a:ea typeface="Arial"/>
+                <a:cs typeface="Arial"/>
+              </a:defRPr>
+            </a:pPr>
+            <a:r>
+              <a:rPr sz="1350" b="1">
+                <a:solidFill>
+                  <a:srgbClr val="E45756"/>
+                </a:solidFill>
+                <a:latin typeface="Arial"/>
+                <a:ea typeface="Arial"/>
+                <a:cs typeface="Arial"/>
+              </a:rPr>
+              <a:t>SPY LOW MAP</a:t>
+            </a:r>
+          </a:p>
+        </p:txBody>
+      </p:sp>
+      <p:sp>
+        <p:nvSpPr>
+          <p:cNvPr id="8" name="">
+            <a:extLst xmlns:a="http://schemas.openxmlformats.org/drawingml/2006/main">
+              <a:ext uri="{FF2B5EF4-FFF2-40B4-BE49-F238E27FC236}">
+                <a16:creationId xmlns:a16="http://schemas.microsoft.com/office/drawing/2014/main" id="{655CF75D-5F23-4C7F-BE9C-764036D0B9E8}"/>
+              </a:ext>
+            </a:extLst>
+          </p:cNvPr>
+          <p:cNvSpPr>
+            <a:spLocks xmlns:a="http://schemas.openxmlformats.org/drawingml/2006/main" noGrp="1"/>
+          </p:cNvSpPr>
+          <p:nvPr/>
+        </p:nvSpPr>
+        <p:spPr>
+          <a:xfrm xmlns:a="http://schemas.openxmlformats.org/drawingml/2006/main">
+            <a:off x="3105150" y="1562100"/>
+            <a:ext cx="4762500" cy="419100"/>
+          </a:xfrm>
+          <a:prstGeom xmlns:a="http://schemas.openxmlformats.org/drawingml/2006/main" prst="rect">
+            <a:avLst/>
+          </a:prstGeom>
+          <a:noFill xmlns:a="http://schemas.openxmlformats.org/drawingml/2006/main"/>
+          <a:ln xmlns:a="http://schemas.openxmlformats.org/drawingml/2006/main" w="0">
+            <a:noFill/>
+            <a:prstDash val="solid"/>
+          </a:ln>
+        </p:spPr>
+        <p:txBody>
+          <a:bodyPr xmlns:a="http://schemas.openxmlformats.org/drawingml/2006/main" wrap="square" lIns="0" tIns="0" rIns="0" bIns="0" anchor="t">
+            <a:normAutofit fontScale="75010"/>
+          </a:bodyPr>
+          <a:lstStyle xmlns:a="http://schemas.openxmlformats.org/drawingml/2006/main"/>
+          <a:p xmlns:a="http://schemas.openxmlformats.org/drawingml/2006/main">
+            <a:pPr algn="l">
+              <a:buNone/>
+              <a:defRPr sz="1950" b="1">
+                <a:solidFill>
+                  <a:srgbClr val="273548"/>
+                </a:solidFill>
+                <a:latin typeface="Arial"/>
+                <a:ea typeface="Arial"/>
+                <a:cs typeface="Arial"/>
+              </a:defRPr>
+            </a:pPr>
+            <a:r>
+              <a:rPr sz="1950" b="1">
+                <a:solidFill>
+                  <a:srgbClr val="273548"/>
+                </a:solidFill>
+                <a:latin typeface="Arial"/>
+                <a:ea typeface="Arial"/>
+                <a:cs typeface="Arial"/>
+              </a:rPr>
+              <a:t>Broadly preserves the positive continuation geometry</a:t>
+            </a:r>
+          </a:p>
+        </p:txBody>
+      </p:sp>
+      <p:sp>
+        <p:nvSpPr>
+          <p:cNvPr id="9" name="">
+            <a:extLst xmlns:a="http://schemas.openxmlformats.org/drawingml/2006/main">
+              <a:ext uri="{FF2B5EF4-FFF2-40B4-BE49-F238E27FC236}">
+                <a16:creationId xmlns:a16="http://schemas.microsoft.com/office/drawing/2014/main" id="{3E0B76F2-4514-4DD8-934B-ABE42A34E950}"/>
+              </a:ext>
+            </a:extLst>
+          </p:cNvPr>
+          <p:cNvSpPr>
+            <a:spLocks xmlns:a="http://schemas.openxmlformats.org/drawingml/2006/main" noGrp="1"/>
+          </p:cNvSpPr>
+          <p:nvPr/>
+        </p:nvSpPr>
+        <p:spPr>
+          <a:xfrm xmlns:a="http://schemas.openxmlformats.org/drawingml/2006/main">
+            <a:off x="8096250" y="1581150"/>
+            <a:ext cx="3333750" cy="704850"/>
+          </a:xfrm>
+          <a:prstGeom xmlns:a="http://schemas.openxmlformats.org/drawingml/2006/main" prst="rect">
+            <a:avLst/>
+          </a:prstGeom>
+          <a:noFill xmlns:a="http://schemas.openxmlformats.org/drawingml/2006/main"/>
+          <a:ln xmlns:a="http://schemas.openxmlformats.org/drawingml/2006/main" w="0">
+            <a:noFill/>
+            <a:prstDash val="solid"/>
+          </a:ln>
+        </p:spPr>
+        <p:txBody>
+          <a:bodyPr xmlns:a="http://schemas.openxmlformats.org/drawingml/2006/main" wrap="square" lIns="0" tIns="0" rIns="0" bIns="0" anchor="t">
+            <a:normAutofit fontScale="100000"/>
+          </a:bodyPr>
+          <a:lstStyle xmlns:a="http://schemas.openxmlformats.org/drawingml/2006/main"/>
+          <a:p xmlns:a="http://schemas.openxmlformats.org/drawingml/2006/main">
+            <a:pPr algn="l">
+              <a:buNone/>
+              <a:defRPr sz="1425" b="0">
+                <a:solidFill>
+                  <a:srgbClr val="667384"/>
+                </a:solidFill>
+                <a:latin typeface="Arial"/>
+                <a:ea typeface="Arial"/>
+                <a:cs typeface="Arial"/>
+              </a:defRPr>
+            </a:pPr>
+            <a:r>
+              <a:rPr sz="1425" b="0">
+                <a:solidFill>
+                  <a:srgbClr val="667384"/>
+                </a:solidFill>
+                <a:latin typeface="Arial"/>
+                <a:ea typeface="Arial"/>
+                <a:cs typeface="Arial"/>
+              </a:rPr>
+              <a:t>72/81 same sign vs own LOW; mean r +0.091</a:t>
+            </a:r>
+          </a:p>
+        </p:txBody>
+      </p:sp>
+      <p:sp>
+        <p:nvSpPr>
+          <p:cNvPr id="10" name="">
+            <a:extLst xmlns:a="http://schemas.openxmlformats.org/drawingml/2006/main">
+              <a:ext uri="{FF2B5EF4-FFF2-40B4-BE49-F238E27FC236}">
+                <a16:creationId xmlns:a16="http://schemas.microsoft.com/office/drawing/2014/main" id="{294777C3-6D2F-4277-840E-7E984FB4554D}"/>
+              </a:ext>
+            </a:extLst>
+          </p:cNvPr>
+          <p:cNvSpPr>
+            <a:spLocks xmlns:a="http://schemas.openxmlformats.org/drawingml/2006/main" noGrp="1"/>
+          </p:cNvSpPr>
+          <p:nvPr/>
+        </p:nvSpPr>
+        <p:spPr>
+          <a:xfrm xmlns:a="http://schemas.openxmlformats.org/drawingml/2006/main">
+            <a:off x="876300" y="2590800"/>
+            <a:ext cx="10553700" cy="9525"/>
+          </a:xfrm>
+          <a:prstGeom xmlns:a="http://schemas.openxmlformats.org/drawingml/2006/main" prst="rect">
+            <a:avLst/>
+          </a:prstGeom>
+          <a:solidFill xmlns:a="http://schemas.openxmlformats.org/drawingml/2006/main">
+            <a:srgbClr val="B8BCC4"/>
+          </a:solidFill>
+          <a:ln xmlns:a="http://schemas.openxmlformats.org/drawingml/2006/main" w="0">
+            <a:solidFill>
+              <a:srgbClr val="B8BCC4"/>
+            </a:solidFill>
+            <a:prstDash val="solid"/>
+          </a:ln>
+        </p:spPr>
+      </p:sp>
+      <p:sp>
+        <p:nvSpPr>
+          <p:cNvPr id="11" name="">
+            <a:extLst xmlns:a="http://schemas.openxmlformats.org/drawingml/2006/main">
+              <a:ext uri="{FF2B5EF4-FFF2-40B4-BE49-F238E27FC236}">
+                <a16:creationId xmlns:a16="http://schemas.microsoft.com/office/drawing/2014/main" id="{F894CF3F-AD63-423C-8F01-64C507896579}"/>
+              </a:ext>
+            </a:extLst>
+          </p:cNvPr>
+          <p:cNvSpPr>
+            <a:spLocks xmlns:a="http://schemas.openxmlformats.org/drawingml/2006/main" noGrp="1"/>
+          </p:cNvSpPr>
+          <p:nvPr/>
+        </p:nvSpPr>
+        <p:spPr>
+          <a:xfrm xmlns:a="http://schemas.openxmlformats.org/drawingml/2006/main">
+            <a:off x="552450" y="2800350"/>
+            <a:ext cx="95250" cy="895350"/>
+          </a:xfrm>
+          <a:prstGeom xmlns:a="http://schemas.openxmlformats.org/drawingml/2006/main" prst="rect">
+            <a:avLst/>
+          </a:prstGeom>
+          <a:solidFill xmlns:a="http://schemas.openxmlformats.org/drawingml/2006/main">
+            <a:srgbClr val="2A9D6F"/>
+          </a:solidFill>
+          <a:ln xmlns:a="http://schemas.openxmlformats.org/drawingml/2006/main" w="0">
+            <a:solidFill>
+              <a:srgbClr val="2A9D6F"/>
+            </a:solidFill>
+            <a:prstDash val="solid"/>
+          </a:ln>
+        </p:spPr>
+      </p:sp>
+      <p:sp>
+        <p:nvSpPr>
+          <p:cNvPr id="12" name="">
+            <a:extLst xmlns:a="http://schemas.openxmlformats.org/drawingml/2006/main">
+              <a:ext uri="{FF2B5EF4-FFF2-40B4-BE49-F238E27FC236}">
+                <a16:creationId xmlns:a16="http://schemas.microsoft.com/office/drawing/2014/main" id="{D3953D03-6A7A-4FEE-B242-02BF0319C169}"/>
+              </a:ext>
+            </a:extLst>
+          </p:cNvPr>
+          <p:cNvSpPr>
+            <a:spLocks xmlns:a="http://schemas.openxmlformats.org/drawingml/2006/main" noGrp="1"/>
+          </p:cNvSpPr>
+          <p:nvPr/>
+        </p:nvSpPr>
+        <p:spPr>
+          <a:xfrm xmlns:a="http://schemas.openxmlformats.org/drawingml/2006/main">
+            <a:off x="876300" y="2781300"/>
+            <a:ext cx="2095500" cy="285750"/>
+          </a:xfrm>
+          <a:prstGeom xmlns:a="http://schemas.openxmlformats.org/drawingml/2006/main" prst="rect">
+            <a:avLst/>
+          </a:prstGeom>
+          <a:noFill xmlns:a="http://schemas.openxmlformats.org/drawingml/2006/main"/>
+          <a:ln xmlns:a="http://schemas.openxmlformats.org/drawingml/2006/main" w="0">
+            <a:noFill/>
+            <a:prstDash val="solid"/>
+          </a:ln>
+        </p:spPr>
+        <p:txBody>
+          <a:bodyPr xmlns:a="http://schemas.openxmlformats.org/drawingml/2006/main" wrap="square" lIns="0" tIns="0" rIns="0" bIns="0" anchor="t">
+            <a:normAutofit fontScale="100000"/>
+          </a:bodyPr>
+          <a:lstStyle xmlns:a="http://schemas.openxmlformats.org/drawingml/2006/main"/>
+          <a:p xmlns:a="http://schemas.openxmlformats.org/drawingml/2006/main">
+            <a:pPr algn="l">
+              <a:buNone/>
+              <a:defRPr sz="1350" b="1">
+                <a:solidFill>
+                  <a:srgbClr val="2A9D6F"/>
+                </a:solidFill>
+                <a:latin typeface="Arial"/>
+                <a:ea typeface="Arial"/>
+                <a:cs typeface="Arial"/>
+              </a:defRPr>
+            </a:pPr>
+            <a:r>
+              <a:rPr sz="1350" b="1">
+                <a:solidFill>
+                  <a:srgbClr val="2A9D6F"/>
+                </a:solidFill>
+                <a:latin typeface="Arial"/>
+                <a:ea typeface="Arial"/>
+                <a:cs typeface="Arial"/>
+              </a:rPr>
+              <a:t>SPY MEDIUM MAP</a:t>
+            </a:r>
+          </a:p>
+        </p:txBody>
+      </p:sp>
+      <p:sp>
+        <p:nvSpPr>
+          <p:cNvPr id="13" name="">
+            <a:extLst xmlns:a="http://schemas.openxmlformats.org/drawingml/2006/main">
+              <a:ext uri="{FF2B5EF4-FFF2-40B4-BE49-F238E27FC236}">
+                <a16:creationId xmlns:a16="http://schemas.microsoft.com/office/drawing/2014/main" id="{52D1DBE8-EAF6-4492-89E7-5C97A3A6A395}"/>
+              </a:ext>
+            </a:extLst>
+          </p:cNvPr>
+          <p:cNvSpPr>
+            <a:spLocks xmlns:a="http://schemas.openxmlformats.org/drawingml/2006/main" noGrp="1"/>
+          </p:cNvSpPr>
+          <p:nvPr/>
+        </p:nvSpPr>
+        <p:spPr>
+          <a:xfrm xmlns:a="http://schemas.openxmlformats.org/drawingml/2006/main">
+            <a:off x="3105150" y="2762250"/>
+            <a:ext cx="4762500" cy="419100"/>
+          </a:xfrm>
+          <a:prstGeom xmlns:a="http://schemas.openxmlformats.org/drawingml/2006/main" prst="rect">
+            <a:avLst/>
+          </a:prstGeom>
+          <a:noFill xmlns:a="http://schemas.openxmlformats.org/drawingml/2006/main"/>
+          <a:ln xmlns:a="http://schemas.openxmlformats.org/drawingml/2006/main" w="0">
+            <a:noFill/>
+            <a:prstDash val="solid"/>
+          </a:ln>
+        </p:spPr>
+        <p:txBody>
+          <a:bodyPr xmlns:a="http://schemas.openxmlformats.org/drawingml/2006/main" wrap="square" lIns="0" tIns="0" rIns="0" bIns="0" anchor="t">
+            <a:normAutofit fontScale="85683"/>
+          </a:bodyPr>
+          <a:lstStyle xmlns:a="http://schemas.openxmlformats.org/drawingml/2006/main"/>
+          <a:p xmlns:a="http://schemas.openxmlformats.org/drawingml/2006/main">
+            <a:pPr algn="l">
+              <a:buNone/>
+              <a:defRPr sz="1950" b="1">
+                <a:solidFill>
+                  <a:srgbClr val="273548"/>
+                </a:solidFill>
+                <a:latin typeface="Arial"/>
+                <a:ea typeface="Arial"/>
+                <a:cs typeface="Arial"/>
+              </a:defRPr>
+            </a:pPr>
+            <a:r>
+              <a:rPr sz="1950" b="1">
+                <a:solidFill>
+                  <a:srgbClr val="273548"/>
+                </a:solidFill>
+                <a:latin typeface="Arial"/>
+                <a:ea typeface="Arial"/>
+                <a:cs typeface="Arial"/>
+              </a:rPr>
+              <a:t>Reverses the own-asset MEDIUM interpretation</a:t>
+            </a:r>
+          </a:p>
+        </p:txBody>
+      </p:sp>
+      <p:sp>
+        <p:nvSpPr>
+          <p:cNvPr id="14" name="">
+            <a:extLst xmlns:a="http://schemas.openxmlformats.org/drawingml/2006/main">
+              <a:ext uri="{FF2B5EF4-FFF2-40B4-BE49-F238E27FC236}">
+                <a16:creationId xmlns:a16="http://schemas.microsoft.com/office/drawing/2014/main" id="{2CAF0156-C9E6-4210-8A8A-BFEDD044631B}"/>
+              </a:ext>
+            </a:extLst>
+          </p:cNvPr>
+          <p:cNvSpPr>
+            <a:spLocks xmlns:a="http://schemas.openxmlformats.org/drawingml/2006/main" noGrp="1"/>
+          </p:cNvSpPr>
+          <p:nvPr/>
+        </p:nvSpPr>
+        <p:spPr>
+          <a:xfrm xmlns:a="http://schemas.openxmlformats.org/drawingml/2006/main">
+            <a:off x="8096250" y="2781300"/>
+            <a:ext cx="3333750" cy="704850"/>
+          </a:xfrm>
+          <a:prstGeom xmlns:a="http://schemas.openxmlformats.org/drawingml/2006/main" prst="rect">
+            <a:avLst/>
+          </a:prstGeom>
+          <a:noFill xmlns:a="http://schemas.openxmlformats.org/drawingml/2006/main"/>
+          <a:ln xmlns:a="http://schemas.openxmlformats.org/drawingml/2006/main" w="0">
+            <a:noFill/>
+            <a:prstDash val="solid"/>
+          </a:ln>
+        </p:spPr>
+        <p:txBody>
+          <a:bodyPr xmlns:a="http://schemas.openxmlformats.org/drawingml/2006/main" wrap="square" lIns="0" tIns="0" rIns="0" bIns="0" anchor="t">
+            <a:normAutofit fontScale="100000"/>
+          </a:bodyPr>
+          <a:lstStyle xmlns:a="http://schemas.openxmlformats.org/drawingml/2006/main"/>
+          <a:p xmlns:a="http://schemas.openxmlformats.org/drawingml/2006/main">
+            <a:pPr algn="l">
+              <a:buNone/>
+              <a:defRPr sz="1425" b="0">
+                <a:solidFill>
+                  <a:srgbClr val="667384"/>
+                </a:solidFill>
+                <a:latin typeface="Arial"/>
+                <a:ea typeface="Arial"/>
+                <a:cs typeface="Arial"/>
+              </a:defRPr>
+            </a:pPr>
+            <a:r>
+              <a:rPr sz="1425" b="0">
+                <a:solidFill>
+                  <a:srgbClr val="667384"/>
+                </a:solidFill>
+                <a:latin typeface="Arial"/>
+                <a:ea typeface="Arial"/>
+                <a:cs typeface="Arial"/>
+              </a:rPr>
+              <a:t>14/81 same sign; mean r -0.058</a:t>
+            </a:r>
+          </a:p>
+        </p:txBody>
+      </p:sp>
+      <p:sp>
+        <p:nvSpPr>
+          <p:cNvPr id="15" name="">
+            <a:extLst xmlns:a="http://schemas.openxmlformats.org/drawingml/2006/main">
+              <a:ext uri="{FF2B5EF4-FFF2-40B4-BE49-F238E27FC236}">
+                <a16:creationId xmlns:a16="http://schemas.microsoft.com/office/drawing/2014/main" id="{B126165D-5B65-44DB-99BD-15ED33F9B90F}"/>
+              </a:ext>
+            </a:extLst>
+          </p:cNvPr>
+          <p:cNvSpPr>
+            <a:spLocks xmlns:a="http://schemas.openxmlformats.org/drawingml/2006/main" noGrp="1"/>
+          </p:cNvSpPr>
+          <p:nvPr/>
+        </p:nvSpPr>
+        <p:spPr>
+          <a:xfrm xmlns:a="http://schemas.openxmlformats.org/drawingml/2006/main">
+            <a:off x="876300" y="3790950"/>
+            <a:ext cx="10553700" cy="9525"/>
+          </a:xfrm>
+          <a:prstGeom xmlns:a="http://schemas.openxmlformats.org/drawingml/2006/main" prst="rect">
+            <a:avLst/>
+          </a:prstGeom>
+          <a:solidFill xmlns:a="http://schemas.openxmlformats.org/drawingml/2006/main">
+            <a:srgbClr val="B8BCC4"/>
+          </a:solidFill>
+          <a:ln xmlns:a="http://schemas.openxmlformats.org/drawingml/2006/main" w="0">
+            <a:solidFill>
+              <a:srgbClr val="B8BCC4"/>
+            </a:solidFill>
+            <a:prstDash val="solid"/>
+          </a:ln>
+        </p:spPr>
+      </p:sp>
+      <p:sp>
+        <p:nvSpPr>
+          <p:cNvPr id="16" name="">
+            <a:extLst xmlns:a="http://schemas.openxmlformats.org/drawingml/2006/main">
+              <a:ext uri="{FF2B5EF4-FFF2-40B4-BE49-F238E27FC236}">
+                <a16:creationId xmlns:a16="http://schemas.microsoft.com/office/drawing/2014/main" id="{7DC0911F-9587-4B19-84C6-11974DB2A91C}"/>
+              </a:ext>
+            </a:extLst>
+          </p:cNvPr>
+          <p:cNvSpPr>
+            <a:spLocks xmlns:a="http://schemas.openxmlformats.org/drawingml/2006/main" noGrp="1"/>
+          </p:cNvSpPr>
+          <p:nvPr/>
+        </p:nvSpPr>
+        <p:spPr>
+          <a:xfrm xmlns:a="http://schemas.openxmlformats.org/drawingml/2006/main">
+            <a:off x="552450" y="4000500"/>
+            <a:ext cx="95250" cy="895350"/>
+          </a:xfrm>
+          <a:prstGeom xmlns:a="http://schemas.openxmlformats.org/drawingml/2006/main" prst="rect">
+            <a:avLst/>
+          </a:prstGeom>
+          <a:solidFill xmlns:a="http://schemas.openxmlformats.org/drawingml/2006/main">
+            <a:srgbClr val="3D8DFF"/>
+          </a:solidFill>
+          <a:ln xmlns:a="http://schemas.openxmlformats.org/drawingml/2006/main" w="0">
+            <a:solidFill>
+              <a:srgbClr val="3D8DFF"/>
+            </a:solidFill>
+            <a:prstDash val="solid"/>
+          </a:ln>
+        </p:spPr>
+      </p:sp>
+      <p:sp>
+        <p:nvSpPr>
+          <p:cNvPr id="17" name="">
+            <a:extLst xmlns:a="http://schemas.openxmlformats.org/drawingml/2006/main">
+              <a:ext uri="{FF2B5EF4-FFF2-40B4-BE49-F238E27FC236}">
+                <a16:creationId xmlns:a16="http://schemas.microsoft.com/office/drawing/2014/main" id="{DAB53991-F50C-4B95-9F23-DAE86BCEDF3B}"/>
+              </a:ext>
+            </a:extLst>
+          </p:cNvPr>
+          <p:cNvSpPr>
+            <a:spLocks xmlns:a="http://schemas.openxmlformats.org/drawingml/2006/main" noGrp="1"/>
+          </p:cNvSpPr>
+          <p:nvPr/>
+        </p:nvSpPr>
+        <p:spPr>
+          <a:xfrm xmlns:a="http://schemas.openxmlformats.org/drawingml/2006/main">
+            <a:off x="876300" y="3981450"/>
+            <a:ext cx="2095500" cy="285750"/>
+          </a:xfrm>
+          <a:prstGeom xmlns:a="http://schemas.openxmlformats.org/drawingml/2006/main" prst="rect">
+            <a:avLst/>
+          </a:prstGeom>
+          <a:noFill xmlns:a="http://schemas.openxmlformats.org/drawingml/2006/main"/>
+          <a:ln xmlns:a="http://schemas.openxmlformats.org/drawingml/2006/main" w="0">
+            <a:noFill/>
+            <a:prstDash val="solid"/>
+          </a:ln>
+        </p:spPr>
+        <p:txBody>
+          <a:bodyPr xmlns:a="http://schemas.openxmlformats.org/drawingml/2006/main" wrap="square" lIns="0" tIns="0" rIns="0" bIns="0" anchor="t">
+            <a:normAutofit fontScale="100000"/>
+          </a:bodyPr>
+          <a:lstStyle xmlns:a="http://schemas.openxmlformats.org/drawingml/2006/main"/>
+          <a:p xmlns:a="http://schemas.openxmlformats.org/drawingml/2006/main">
+            <a:pPr algn="l">
+              <a:buNone/>
+              <a:defRPr sz="1350" b="1">
+                <a:solidFill>
+                  <a:srgbClr val="3D8DFF"/>
+                </a:solidFill>
+                <a:latin typeface="Arial"/>
+                <a:ea typeface="Arial"/>
+                <a:cs typeface="Arial"/>
+              </a:defRPr>
+            </a:pPr>
+            <a:r>
+              <a:rPr sz="1350" b="1">
+                <a:solidFill>
+                  <a:srgbClr val="3D8DFF"/>
+                </a:solidFill>
+                <a:latin typeface="Arial"/>
+                <a:ea typeface="Arial"/>
+                <a:cs typeface="Arial"/>
+              </a:rPr>
+              <a:t>SPY HIGH MAP</a:t>
+            </a:r>
+          </a:p>
+        </p:txBody>
+      </p:sp>
+      <p:sp>
+        <p:nvSpPr>
+          <p:cNvPr id="18" name="">
+            <a:extLst xmlns:a="http://schemas.openxmlformats.org/drawingml/2006/main">
+              <a:ext uri="{FF2B5EF4-FFF2-40B4-BE49-F238E27FC236}">
+                <a16:creationId xmlns:a16="http://schemas.microsoft.com/office/drawing/2014/main" id="{5DFACF3B-08BC-4148-A40A-2004DFB81D71}"/>
+              </a:ext>
+            </a:extLst>
+          </p:cNvPr>
+          <p:cNvSpPr>
+            <a:spLocks xmlns:a="http://schemas.openxmlformats.org/drawingml/2006/main" noGrp="1"/>
+          </p:cNvSpPr>
+          <p:nvPr/>
+        </p:nvSpPr>
+        <p:spPr>
+          <a:xfrm xmlns:a="http://schemas.openxmlformats.org/drawingml/2006/main">
+            <a:off x="3105150" y="3962400"/>
+            <a:ext cx="4762500" cy="419100"/>
+          </a:xfrm>
+          <a:prstGeom xmlns:a="http://schemas.openxmlformats.org/drawingml/2006/main" prst="rect">
+            <a:avLst/>
+          </a:prstGeom>
+          <a:noFill xmlns:a="http://schemas.openxmlformats.org/drawingml/2006/main"/>
+          <a:ln xmlns:a="http://schemas.openxmlformats.org/drawingml/2006/main" w="0">
+            <a:noFill/>
+            <a:prstDash val="solid"/>
+          </a:ln>
+        </p:spPr>
+        <p:txBody>
+          <a:bodyPr xmlns:a="http://schemas.openxmlformats.org/drawingml/2006/main" wrap="square" lIns="0" tIns="0" rIns="0" bIns="0" anchor="t">
+            <a:normAutofit fontScale="97048"/>
+          </a:bodyPr>
+          <a:lstStyle xmlns:a="http://schemas.openxmlformats.org/drawingml/2006/main"/>
+          <a:p xmlns:a="http://schemas.openxmlformats.org/drawingml/2006/main">
+            <a:pPr algn="l">
+              <a:buNone/>
+              <a:defRPr sz="1950" b="1">
+                <a:solidFill>
+                  <a:srgbClr val="273548"/>
+                </a:solidFill>
+                <a:latin typeface="Arial"/>
+                <a:ea typeface="Arial"/>
+                <a:cs typeface="Arial"/>
+              </a:defRPr>
+            </a:pPr>
+            <a:r>
+              <a:rPr sz="1950" b="1">
+                <a:solidFill>
+                  <a:srgbClr val="273548"/>
+                </a:solidFill>
+                <a:latin typeface="Arial"/>
+                <a:ea typeface="Arial"/>
+                <a:cs typeface="Arial"/>
+              </a:rPr>
+              <a:t>Mild and mixed—not broad TSLA reversal</a:t>
+            </a:r>
+          </a:p>
+        </p:txBody>
+      </p:sp>
+      <p:sp>
+        <p:nvSpPr>
+          <p:cNvPr id="19" name="">
+            <a:extLst xmlns:a="http://schemas.openxmlformats.org/drawingml/2006/main">
+              <a:ext uri="{FF2B5EF4-FFF2-40B4-BE49-F238E27FC236}">
+                <a16:creationId xmlns:a16="http://schemas.microsoft.com/office/drawing/2014/main" id="{C907D23B-44A2-43C4-9658-4C6E38430BF5}"/>
+              </a:ext>
+            </a:extLst>
+          </p:cNvPr>
+          <p:cNvSpPr>
+            <a:spLocks xmlns:a="http://schemas.openxmlformats.org/drawingml/2006/main" noGrp="1"/>
+          </p:cNvSpPr>
+          <p:nvPr/>
+        </p:nvSpPr>
+        <p:spPr>
+          <a:xfrm xmlns:a="http://schemas.openxmlformats.org/drawingml/2006/main">
+            <a:off x="8096250" y="3981450"/>
+            <a:ext cx="3333750" cy="704850"/>
+          </a:xfrm>
+          <a:prstGeom xmlns:a="http://schemas.openxmlformats.org/drawingml/2006/main" prst="rect">
+            <a:avLst/>
+          </a:prstGeom>
+          <a:noFill xmlns:a="http://schemas.openxmlformats.org/drawingml/2006/main"/>
+          <a:ln xmlns:a="http://schemas.openxmlformats.org/drawingml/2006/main" w="0">
+            <a:noFill/>
+            <a:prstDash val="solid"/>
+          </a:ln>
+        </p:spPr>
+        <p:txBody>
+          <a:bodyPr xmlns:a="http://schemas.openxmlformats.org/drawingml/2006/main" wrap="square" lIns="0" tIns="0" rIns="0" bIns="0" anchor="t">
+            <a:normAutofit fontScale="100000"/>
+          </a:bodyPr>
+          <a:lstStyle xmlns:a="http://schemas.openxmlformats.org/drawingml/2006/main"/>
+          <a:p xmlns:a="http://schemas.openxmlformats.org/drawingml/2006/main">
+            <a:pPr algn="l">
+              <a:buNone/>
+              <a:defRPr sz="1425" b="0">
+                <a:solidFill>
+                  <a:srgbClr val="667384"/>
+                </a:solidFill>
+                <a:latin typeface="Arial"/>
+                <a:ea typeface="Arial"/>
+                <a:cs typeface="Arial"/>
+              </a:defRPr>
+            </a:pPr>
+            <a:r>
+              <a:rPr sz="1425" b="0">
+                <a:solidFill>
+                  <a:srgbClr val="667384"/>
+                </a:solidFill>
+                <a:latin typeface="Arial"/>
+                <a:ea typeface="Arial"/>
+                <a:cs typeface="Arial"/>
+              </a:rPr>
+              <a:t>25/81 same sign; mean r +0.031</a:t>
+            </a:r>
+          </a:p>
+        </p:txBody>
+      </p:sp>
+      <p:sp>
+        <p:nvSpPr>
+          <p:cNvPr id="20" name="">
+            <a:extLst xmlns:a="http://schemas.openxmlformats.org/drawingml/2006/main">
+              <a:ext uri="{FF2B5EF4-FFF2-40B4-BE49-F238E27FC236}">
+                <a16:creationId xmlns:a16="http://schemas.microsoft.com/office/drawing/2014/main" id="{8042DFC4-7E22-47E6-8C53-1E63A8411C3A}"/>
+              </a:ext>
+            </a:extLst>
+          </p:cNvPr>
+          <p:cNvSpPr>
+            <a:spLocks xmlns:a="http://schemas.openxmlformats.org/drawingml/2006/main" noGrp="1"/>
+          </p:cNvSpPr>
+          <p:nvPr/>
+        </p:nvSpPr>
+        <p:spPr>
+          <a:xfrm xmlns:a="http://schemas.openxmlformats.org/drawingml/2006/main">
+            <a:off x="876300" y="4991100"/>
+            <a:ext cx="10553700" cy="9525"/>
+          </a:xfrm>
+          <a:prstGeom xmlns:a="http://schemas.openxmlformats.org/drawingml/2006/main" prst="rect">
+            <a:avLst/>
+          </a:prstGeom>
+          <a:solidFill xmlns:a="http://schemas.openxmlformats.org/drawingml/2006/main">
+            <a:srgbClr val="B8BCC4"/>
+          </a:solidFill>
+          <a:ln xmlns:a="http://schemas.openxmlformats.org/drawingml/2006/main" w="0">
+            <a:solidFill>
+              <a:srgbClr val="B8BCC4"/>
+            </a:solidFill>
+            <a:prstDash val="solid"/>
+          </a:ln>
+        </p:spPr>
+      </p:sp>
+      <p:sp>
+        <p:nvSpPr>
+          <p:cNvPr id="21" name="">
+            <a:extLst xmlns:a="http://schemas.openxmlformats.org/drawingml/2006/main">
+              <a:ext uri="{FF2B5EF4-FFF2-40B4-BE49-F238E27FC236}">
+                <a16:creationId xmlns:a16="http://schemas.microsoft.com/office/drawing/2014/main" id="{F4066D54-676B-4D0F-93B6-2152B57E41AF}"/>
+              </a:ext>
+            </a:extLst>
+          </p:cNvPr>
+          <p:cNvSpPr>
+            <a:spLocks xmlns:a="http://schemas.openxmlformats.org/drawingml/2006/main" noGrp="1"/>
+          </p:cNvSpPr>
+          <p:nvPr/>
+        </p:nvSpPr>
+        <p:spPr>
+          <a:xfrm xmlns:a="http://schemas.openxmlformats.org/drawingml/2006/main">
+            <a:off x="552450" y="5353050"/>
+            <a:ext cx="10877550" cy="781050"/>
+          </a:xfrm>
+          <a:prstGeom xmlns:a="http://schemas.openxmlformats.org/drawingml/2006/main" prst="rect">
+            <a:avLst/>
+          </a:prstGeom>
+          <a:solidFill xmlns:a="http://schemas.openxmlformats.org/drawingml/2006/main">
+            <a:srgbClr val="EAF5FB"/>
+          </a:solidFill>
+          <a:ln xmlns:a="http://schemas.openxmlformats.org/drawingml/2006/main" w="0">
+            <a:solidFill>
+              <a:srgbClr val="EAF5FB"/>
+            </a:solidFill>
+            <a:prstDash val="solid"/>
+          </a:ln>
+        </p:spPr>
+      </p:sp>
+      <p:sp>
+        <p:nvSpPr>
+          <p:cNvPr id="22" name="">
+            <a:extLst xmlns:a="http://schemas.openxmlformats.org/drawingml/2006/main">
+              <a:ext uri="{FF2B5EF4-FFF2-40B4-BE49-F238E27FC236}">
+                <a16:creationId xmlns:a16="http://schemas.microsoft.com/office/drawing/2014/main" id="{6E4C79AE-EB98-4B5B-B3D3-11ED0D4C729B}"/>
+              </a:ext>
+            </a:extLst>
+          </p:cNvPr>
+          <p:cNvSpPr>
+            <a:spLocks xmlns:a="http://schemas.openxmlformats.org/drawingml/2006/main" noGrp="1"/>
+          </p:cNvSpPr>
+          <p:nvPr/>
+        </p:nvSpPr>
+        <p:spPr>
+          <a:xfrm xmlns:a="http://schemas.openxmlformats.org/drawingml/2006/main">
+            <a:off x="781050" y="5524500"/>
+            <a:ext cx="2476500" cy="323850"/>
+          </a:xfrm>
+          <a:prstGeom xmlns:a="http://schemas.openxmlformats.org/drawingml/2006/main" prst="rect">
+            <a:avLst/>
+          </a:prstGeom>
+          <a:noFill xmlns:a="http://schemas.openxmlformats.org/drawingml/2006/main"/>
+          <a:ln xmlns:a="http://schemas.openxmlformats.org/drawingml/2006/main" w="0">
+            <a:noFill/>
+            <a:prstDash val="solid"/>
+          </a:ln>
+        </p:spPr>
+        <p:txBody>
+          <a:bodyPr xmlns:a="http://schemas.openxmlformats.org/drawingml/2006/main" wrap="square" lIns="0" tIns="0" rIns="0" bIns="0" anchor="t">
+            <a:normAutofit fontScale="100000"/>
+          </a:bodyPr>
+          <a:lstStyle xmlns:a="http://schemas.openxmlformats.org/drawingml/2006/main"/>
+          <a:p xmlns:a="http://schemas.openxmlformats.org/drawingml/2006/main">
+            <a:pPr algn="l">
+              <a:buNone/>
+              <a:defRPr sz="1725" b="1">
+                <a:solidFill>
+                  <a:srgbClr val="3D8DFF"/>
+                </a:solidFill>
+                <a:latin typeface="Arial"/>
+                <a:ea typeface="Arial"/>
+                <a:cs typeface="Arial"/>
+              </a:defRPr>
+            </a:pPr>
+            <a:r>
+              <a:rPr sz="1725" b="1">
+                <a:solidFill>
+                  <a:srgbClr val="3D8DFF"/>
+                </a:solidFill>
+                <a:latin typeface="Arial"/>
+                <a:ea typeface="Arial"/>
+                <a:cs typeface="Arial"/>
+              </a:rPr>
+              <a:t>What this earns</a:t>
+            </a:r>
+          </a:p>
+        </p:txBody>
+      </p:sp>
+      <p:sp>
+        <p:nvSpPr>
+          <p:cNvPr id="23" name="">
+            <a:extLst xmlns:a="http://schemas.openxmlformats.org/drawingml/2006/main">
+              <a:ext uri="{FF2B5EF4-FFF2-40B4-BE49-F238E27FC236}">
+                <a16:creationId xmlns:a16="http://schemas.microsoft.com/office/drawing/2014/main" id="{3320D60E-6067-4236-80ED-A898A863026E}"/>
+              </a:ext>
+            </a:extLst>
+          </p:cNvPr>
+          <p:cNvSpPr>
+            <a:spLocks xmlns:a="http://schemas.openxmlformats.org/drawingml/2006/main" noGrp="1"/>
+          </p:cNvSpPr>
+          <p:nvPr/>
+        </p:nvSpPr>
+        <p:spPr>
+          <a:xfrm xmlns:a="http://schemas.openxmlformats.org/drawingml/2006/main">
+            <a:off x="3333750" y="5486400"/>
+            <a:ext cx="7810500" cy="419100"/>
+          </a:xfrm>
+          <a:prstGeom xmlns:a="http://schemas.openxmlformats.org/drawingml/2006/main" prst="rect">
+            <a:avLst/>
+          </a:prstGeom>
+          <a:noFill xmlns:a="http://schemas.openxmlformats.org/drawingml/2006/main"/>
+          <a:ln xmlns:a="http://schemas.openxmlformats.org/drawingml/2006/main" w="0">
+            <a:noFill/>
+            <a:prstDash val="solid"/>
+          </a:ln>
+        </p:spPr>
+        <p:txBody>
+          <a:bodyPr xmlns:a="http://schemas.openxmlformats.org/drawingml/2006/main" wrap="square" lIns="0" tIns="0" rIns="0" bIns="0" anchor="t">
+            <a:normAutofit fontScale="76389"/>
+          </a:bodyPr>
+          <a:lstStyle xmlns:a="http://schemas.openxmlformats.org/drawingml/2006/main"/>
+          <a:p xmlns:a="http://schemas.openxmlformats.org/drawingml/2006/main">
+            <a:pPr algn="l">
+              <a:buNone/>
+              <a:defRPr sz="1800" b="1">
+                <a:solidFill>
+                  <a:srgbClr val="273548"/>
+                </a:solidFill>
+                <a:latin typeface="Arial"/>
+                <a:ea typeface="Arial"/>
+                <a:cs typeface="Arial"/>
+              </a:defRPr>
+            </a:pPr>
+            <a:r>
+              <a:rPr sz="1800" b="1">
+                <a:solidFill>
+                  <a:srgbClr val="273548"/>
+                </a:solidFill>
+                <a:latin typeface="Arial"/>
+                <a:ea typeface="Arial"/>
+                <a:cs typeface="Arial"/>
+              </a:rPr>
+              <a:t>External context is a promising descriptive axis. Next: brainstorm cross-sectional cues; keep replication and strategy gates closed.</a:t>
+            </a:r>
+          </a:p>
+        </p:txBody>
+      </p:sp>
+    </p:spTree>
+    <p:extLst>
+      <p:ext uri="{BB962C8B-B14F-4D97-AF65-F5344CB8AC3E}">
+        <p14:creationId xmlns:p14="http://schemas.microsoft.com/office/powerpoint/2010/main" val="666536286"/>
+      </p:ext>
+    </p:extLst>
+  </p:cSld>
+</p:sld>
+</file>
+
 <file path=ppt/slides/slide4.xml><?xml version="1.0" encoding="utf-8"?>
 <p:sld xmlns:p="http://schemas.openxmlformats.org/presentationml/2006/main">
   <p:cSld>
@@ -24985,7 +31672,7 @@
           <p:nvPr/>
         </p:nvPicPr>
         <p:blipFill>
-          <a:blip xmlns:r="http://schemas.openxmlformats.org/officeDocument/2006/relationships" xmlns:a="http://schemas.openxmlformats.org/drawingml/2006/main" r:embed="R3e6ac7e05ab44faa"/>
+          <a:blip xmlns:r="http://schemas.openxmlformats.org/officeDocument/2006/relationships" xmlns:a="http://schemas.openxmlformats.org/drawingml/2006/main" r:embed="Ra949ebc4e2474916"/>
           <a:stretch xmlns:a="http://schemas.openxmlformats.org/drawingml/2006/main"/>
         </p:blipFill>
         <p:spPr>
@@ -25397,7 +32084,7 @@
           <p:nvPr/>
         </p:nvPicPr>
         <p:blipFill>
-          <a:blip xmlns:r="http://schemas.openxmlformats.org/officeDocument/2006/relationships" xmlns:a="http://schemas.openxmlformats.org/drawingml/2006/main" r:embed="Rc01ec9e6b94b4f52"/>
+          <a:blip xmlns:r="http://schemas.openxmlformats.org/officeDocument/2006/relationships" xmlns:a="http://schemas.openxmlformats.org/drawingml/2006/main" r:embed="Rd465e83e98b0463b"/>
           <a:stretch xmlns:a="http://schemas.openxmlformats.org/drawingml/2006/main"/>
         </p:blipFill>
         <p:spPr>
@@ -26459,7 +33146,7 @@
           <p:nvPr/>
         </p:nvPicPr>
         <p:blipFill>
-          <a:blip xmlns:r="http://schemas.openxmlformats.org/officeDocument/2006/relationships" xmlns:a="http://schemas.openxmlformats.org/drawingml/2006/main" r:embed="R45df43d5ea58424a"/>
+          <a:blip xmlns:r="http://schemas.openxmlformats.org/officeDocument/2006/relationships" xmlns:a="http://schemas.openxmlformats.org/drawingml/2006/main" r:embed="R781f521f02dc4ad4"/>
           <a:stretch xmlns:a="http://schemas.openxmlformats.org/drawingml/2006/main"/>
         </p:blipFill>
         <p:spPr>
@@ -27364,7 +34051,7 @@
           <p:nvPr/>
         </p:nvPicPr>
         <p:blipFill>
-          <a:blip xmlns:r="http://schemas.openxmlformats.org/officeDocument/2006/relationships" xmlns:a="http://schemas.openxmlformats.org/drawingml/2006/main" r:embed="Rc7dd42bd33944d1f"/>
+          <a:blip xmlns:r="http://schemas.openxmlformats.org/officeDocument/2006/relationships" xmlns:a="http://schemas.openxmlformats.org/drawingml/2006/main" r:embed="Rc217c1025a9949e1"/>
           <a:stretch xmlns:a="http://schemas.openxmlformats.org/drawingml/2006/main"/>
         </p:blipFill>
         <p:spPr>
@@ -28168,7 +34855,7 @@
           <p:nvPr/>
         </p:nvPicPr>
         <p:blipFill>
-          <a:blip xmlns:r="http://schemas.openxmlformats.org/officeDocument/2006/relationships" xmlns:a="http://schemas.openxmlformats.org/drawingml/2006/main" r:embed="R68bc16d9e41544fa"/>
+          <a:blip xmlns:r="http://schemas.openxmlformats.org/officeDocument/2006/relationships" xmlns:a="http://schemas.openxmlformats.org/drawingml/2006/main" r:embed="R9afdb1b461664544"/>
           <a:stretch xmlns:a="http://schemas.openxmlformats.org/drawingml/2006/main"/>
         </p:blipFill>
         <p:spPr>

--- a/operator_hypothesis_lab/presentations/tsla_descriptive_microscope_evidence.pptx
+++ b/operator_hypothesis_lab/presentations/tsla_descriptive_microscope_evidence.pptx
@@ -2,51 +2,59 @@
 <file path=ppt/presentation.xml><?xml version="1.0" encoding="utf-8"?>
 <p:presentation xmlns:p="http://schemas.openxmlformats.org/presentationml/2006/main">
   <p:sldMasterIdLst>
-    <p:sldMasterId xmlns:r="http://schemas.openxmlformats.org/officeDocument/2006/relationships" id="2147483648" r:id="Rf943fbde9bda42c0"/>
+    <p:sldMasterId xmlns:r="http://schemas.openxmlformats.org/officeDocument/2006/relationships" id="2147483648" r:id="Raa3e25d4ed5e4085"/>
   </p:sldMasterIdLst>
   <p:notesMasterIdLst>
-    <p:notesMasterId xmlns:r="http://schemas.openxmlformats.org/officeDocument/2006/relationships" r:id="Rc6a094860ff44a11"/>
+    <p:notesMasterId xmlns:r="http://schemas.openxmlformats.org/officeDocument/2006/relationships" r:id="Rf51b9448f31b48fb"/>
   </p:notesMasterIdLst>
   <p:sldIdLst>
-    <p:sldId xmlns:r="http://schemas.openxmlformats.org/officeDocument/2006/relationships" id="256" r:id="R2e2e7d4214a54802"/>
-    <p:sldId xmlns:r="http://schemas.openxmlformats.org/officeDocument/2006/relationships" id="257" r:id="Rbd377b414a0840ea"/>
-    <p:sldId xmlns:r="http://schemas.openxmlformats.org/officeDocument/2006/relationships" id="258" r:id="R890e391e25454234"/>
-    <p:sldId xmlns:r="http://schemas.openxmlformats.org/officeDocument/2006/relationships" id="259" r:id="Rf354c05140dd4105"/>
-    <p:sldId xmlns:r="http://schemas.openxmlformats.org/officeDocument/2006/relationships" id="260" r:id="R15ae1e739f5148aa"/>
-    <p:sldId xmlns:r="http://schemas.openxmlformats.org/officeDocument/2006/relationships" id="261" r:id="R31a6c5523d194ad5"/>
-    <p:sldId xmlns:r="http://schemas.openxmlformats.org/officeDocument/2006/relationships" id="262" r:id="R4c2e6c0c226f4230"/>
-    <p:sldId xmlns:r="http://schemas.openxmlformats.org/officeDocument/2006/relationships" id="263" r:id="R5cb7bc1ab54a451e"/>
-    <p:sldId xmlns:r="http://schemas.openxmlformats.org/officeDocument/2006/relationships" id="264" r:id="R9b5bc857102a49d8"/>
-    <p:sldId xmlns:r="http://schemas.openxmlformats.org/officeDocument/2006/relationships" id="265" r:id="R1078b63cb4504c07"/>
-    <p:sldId xmlns:r="http://schemas.openxmlformats.org/officeDocument/2006/relationships" id="266" r:id="R1b025873cd9b4769"/>
-    <p:sldId xmlns:r="http://schemas.openxmlformats.org/officeDocument/2006/relationships" id="267" r:id="R4a8caeb0fb664357"/>
-    <p:sldId xmlns:r="http://schemas.openxmlformats.org/officeDocument/2006/relationships" id="268" r:id="R9c3f53b9382a412e"/>
-    <p:sldId xmlns:r="http://schemas.openxmlformats.org/officeDocument/2006/relationships" id="269" r:id="Rd8e10428f0894808"/>
-    <p:sldId xmlns:r="http://schemas.openxmlformats.org/officeDocument/2006/relationships" id="270" r:id="Rc03d8d9de8734812"/>
-    <p:sldId xmlns:r="http://schemas.openxmlformats.org/officeDocument/2006/relationships" id="271" r:id="Rd5f1514c594b4b01"/>
-    <p:sldId xmlns:r="http://schemas.openxmlformats.org/officeDocument/2006/relationships" id="272" r:id="Rf81f42d6869b49f8"/>
-    <p:sldId xmlns:r="http://schemas.openxmlformats.org/officeDocument/2006/relationships" id="273" r:id="Reba9c01b23a84228"/>
-    <p:sldId xmlns:r="http://schemas.openxmlformats.org/officeDocument/2006/relationships" id="274" r:id="Rb8fef170887b42dd"/>
-    <p:sldId xmlns:r="http://schemas.openxmlformats.org/officeDocument/2006/relationships" id="275" r:id="Ra3bb16977bde415a"/>
-    <p:sldId xmlns:r="http://schemas.openxmlformats.org/officeDocument/2006/relationships" id="276" r:id="Rf58770a37c8c4d59"/>
-    <p:sldId xmlns:r="http://schemas.openxmlformats.org/officeDocument/2006/relationships" id="277" r:id="Rb7194cf94e3d4423"/>
-    <p:sldId xmlns:r="http://schemas.openxmlformats.org/officeDocument/2006/relationships" id="278" r:id="Rfca26cdb5e424b25"/>
-    <p:sldId xmlns:r="http://schemas.openxmlformats.org/officeDocument/2006/relationships" id="279" r:id="R740770566bea4bca"/>
-    <p:sldId xmlns:r="http://schemas.openxmlformats.org/officeDocument/2006/relationships" id="280" r:id="R3f073eed5a344d38"/>
-    <p:sldId xmlns:r="http://schemas.openxmlformats.org/officeDocument/2006/relationships" id="281" r:id="R0ac306db99f747cc"/>
-    <p:sldId xmlns:r="http://schemas.openxmlformats.org/officeDocument/2006/relationships" id="282" r:id="R45d5e8bebd7f41be"/>
-    <p:sldId xmlns:r="http://schemas.openxmlformats.org/officeDocument/2006/relationships" id="283" r:id="R41583a3f724f4587"/>
-    <p:sldId xmlns:r="http://schemas.openxmlformats.org/officeDocument/2006/relationships" id="284" r:id="R48e7b755b4294491"/>
-    <p:sldId xmlns:r="http://schemas.openxmlformats.org/officeDocument/2006/relationships" id="285" r:id="R4680fcd22bd94819"/>
-    <p:sldId xmlns:r="http://schemas.openxmlformats.org/officeDocument/2006/relationships" id="286" r:id="R8703efb122fe4915"/>
-    <p:sldId xmlns:r="http://schemas.openxmlformats.org/officeDocument/2006/relationships" id="287" r:id="R5754dac1c4394605"/>
-    <p:sldId xmlns:r="http://schemas.openxmlformats.org/officeDocument/2006/relationships" id="288" r:id="R5e4c0d7c984c4e18"/>
-    <p:sldId xmlns:r="http://schemas.openxmlformats.org/officeDocument/2006/relationships" id="289" r:id="R0a69a380517745c9"/>
-    <p:sldId xmlns:r="http://schemas.openxmlformats.org/officeDocument/2006/relationships" id="290" r:id="R4a101aa557264ed9"/>
-    <p:sldId xmlns:r="http://schemas.openxmlformats.org/officeDocument/2006/relationships" id="291" r:id="R51a29db170d5403e"/>
-    <p:sldId xmlns:r="http://schemas.openxmlformats.org/officeDocument/2006/relationships" id="292" r:id="Rb9a1a0e2fe2241d1"/>
-    <p:sldId xmlns:r="http://schemas.openxmlformats.org/officeDocument/2006/relationships" id="293" r:id="R144c0f611b6c4fe6"/>
-    <p:sldId xmlns:r="http://schemas.openxmlformats.org/officeDocument/2006/relationships" id="294" r:id="Rfba988c9a7b54208"/>
+    <p:sldId xmlns:r="http://schemas.openxmlformats.org/officeDocument/2006/relationships" id="256" r:id="R313a5049ab8a4864"/>
+    <p:sldId xmlns:r="http://schemas.openxmlformats.org/officeDocument/2006/relationships" id="257" r:id="R684cbccb2f7e4318"/>
+    <p:sldId xmlns:r="http://schemas.openxmlformats.org/officeDocument/2006/relationships" id="258" r:id="Rd43546b846144632"/>
+    <p:sldId xmlns:r="http://schemas.openxmlformats.org/officeDocument/2006/relationships" id="259" r:id="R0904e4d02a814bb7"/>
+    <p:sldId xmlns:r="http://schemas.openxmlformats.org/officeDocument/2006/relationships" id="260" r:id="R8e09c44530074483"/>
+    <p:sldId xmlns:r="http://schemas.openxmlformats.org/officeDocument/2006/relationships" id="261" r:id="R721fc2acff584c39"/>
+    <p:sldId xmlns:r="http://schemas.openxmlformats.org/officeDocument/2006/relationships" id="262" r:id="Rd2aa90204ef24012"/>
+    <p:sldId xmlns:r="http://schemas.openxmlformats.org/officeDocument/2006/relationships" id="263" r:id="Rcd04d46655c145fe"/>
+    <p:sldId xmlns:r="http://schemas.openxmlformats.org/officeDocument/2006/relationships" id="264" r:id="Ra9dfb8e255eb4b02"/>
+    <p:sldId xmlns:r="http://schemas.openxmlformats.org/officeDocument/2006/relationships" id="265" r:id="Rb7d67d22881a45c8"/>
+    <p:sldId xmlns:r="http://schemas.openxmlformats.org/officeDocument/2006/relationships" id="266" r:id="R3c84d70927e94082"/>
+    <p:sldId xmlns:r="http://schemas.openxmlformats.org/officeDocument/2006/relationships" id="267" r:id="R3e3c3532c54f4420"/>
+    <p:sldId xmlns:r="http://schemas.openxmlformats.org/officeDocument/2006/relationships" id="268" r:id="R8aad5b2af05e4e5c"/>
+    <p:sldId xmlns:r="http://schemas.openxmlformats.org/officeDocument/2006/relationships" id="269" r:id="Rc55dc2cb98bb46d4"/>
+    <p:sldId xmlns:r="http://schemas.openxmlformats.org/officeDocument/2006/relationships" id="270" r:id="R4d819f68cee542ed"/>
+    <p:sldId xmlns:r="http://schemas.openxmlformats.org/officeDocument/2006/relationships" id="271" r:id="R0d42e4668d274ac5"/>
+    <p:sldId xmlns:r="http://schemas.openxmlformats.org/officeDocument/2006/relationships" id="272" r:id="R79c2eb965516494b"/>
+    <p:sldId xmlns:r="http://schemas.openxmlformats.org/officeDocument/2006/relationships" id="273" r:id="R954c99706f734499"/>
+    <p:sldId xmlns:r="http://schemas.openxmlformats.org/officeDocument/2006/relationships" id="274" r:id="R0398773095274bdc"/>
+    <p:sldId xmlns:r="http://schemas.openxmlformats.org/officeDocument/2006/relationships" id="275" r:id="Rb84cd2bde81242a9"/>
+    <p:sldId xmlns:r="http://schemas.openxmlformats.org/officeDocument/2006/relationships" id="276" r:id="R423a26e500944dbe"/>
+    <p:sldId xmlns:r="http://schemas.openxmlformats.org/officeDocument/2006/relationships" id="277" r:id="R3df9a2887d8f4e2f"/>
+    <p:sldId xmlns:r="http://schemas.openxmlformats.org/officeDocument/2006/relationships" id="278" r:id="Rd083ca2f4d724ed2"/>
+    <p:sldId xmlns:r="http://schemas.openxmlformats.org/officeDocument/2006/relationships" id="279" r:id="Redd7b39a7fb94d92"/>
+    <p:sldId xmlns:r="http://schemas.openxmlformats.org/officeDocument/2006/relationships" id="280" r:id="R5421ed5703624a59"/>
+    <p:sldId xmlns:r="http://schemas.openxmlformats.org/officeDocument/2006/relationships" id="281" r:id="R9db9f6e3ddf24225"/>
+    <p:sldId xmlns:r="http://schemas.openxmlformats.org/officeDocument/2006/relationships" id="282" r:id="Rc0474df3b3154a02"/>
+    <p:sldId xmlns:r="http://schemas.openxmlformats.org/officeDocument/2006/relationships" id="283" r:id="R7ee856aa3152409f"/>
+    <p:sldId xmlns:r="http://schemas.openxmlformats.org/officeDocument/2006/relationships" id="284" r:id="R84c9d85854434e78"/>
+    <p:sldId xmlns:r="http://schemas.openxmlformats.org/officeDocument/2006/relationships" id="285" r:id="R2e2f68cc1d35493b"/>
+    <p:sldId xmlns:r="http://schemas.openxmlformats.org/officeDocument/2006/relationships" id="286" r:id="Rd29086b680074c57"/>
+    <p:sldId xmlns:r="http://schemas.openxmlformats.org/officeDocument/2006/relationships" id="287" r:id="R72fc35660c4c41b3"/>
+    <p:sldId xmlns:r="http://schemas.openxmlformats.org/officeDocument/2006/relationships" id="288" r:id="R8696844d662f4101"/>
+    <p:sldId xmlns:r="http://schemas.openxmlformats.org/officeDocument/2006/relationships" id="289" r:id="R60f162416f0141b9"/>
+    <p:sldId xmlns:r="http://schemas.openxmlformats.org/officeDocument/2006/relationships" id="290" r:id="R6ebc6a583f954f05"/>
+    <p:sldId xmlns:r="http://schemas.openxmlformats.org/officeDocument/2006/relationships" id="291" r:id="R64a4b505c47e4413"/>
+    <p:sldId xmlns:r="http://schemas.openxmlformats.org/officeDocument/2006/relationships" id="292" r:id="R48f36925b500402f"/>
+    <p:sldId xmlns:r="http://schemas.openxmlformats.org/officeDocument/2006/relationships" id="293" r:id="R6c0d37603b884ae0"/>
+    <p:sldId xmlns:r="http://schemas.openxmlformats.org/officeDocument/2006/relationships" id="294" r:id="R2c4defe485a44e64"/>
+    <p:sldId xmlns:r="http://schemas.openxmlformats.org/officeDocument/2006/relationships" id="295" r:id="R1d87594a02074737"/>
+    <p:sldId xmlns:r="http://schemas.openxmlformats.org/officeDocument/2006/relationships" id="296" r:id="R80d1cf4c7a804586"/>
+    <p:sldId xmlns:r="http://schemas.openxmlformats.org/officeDocument/2006/relationships" id="297" r:id="R882bd4d039874f5f"/>
+    <p:sldId xmlns:r="http://schemas.openxmlformats.org/officeDocument/2006/relationships" id="298" r:id="R4b9c8c9bfd514e47"/>
+    <p:sldId xmlns:r="http://schemas.openxmlformats.org/officeDocument/2006/relationships" id="299" r:id="R73a590281d6e4224"/>
+    <p:sldId xmlns:r="http://schemas.openxmlformats.org/officeDocument/2006/relationships" id="300" r:id="R6865d80adb884244"/>
+    <p:sldId xmlns:r="http://schemas.openxmlformats.org/officeDocument/2006/relationships" id="301" r:id="R17874fd54bbc445e"/>
+    <p:sldId xmlns:r="http://schemas.openxmlformats.org/officeDocument/2006/relationships" id="302" r:id="Rc074c18c1d0d4b2a"/>
   </p:sldIdLst>
   <p:sldSz cx="12192000" cy="6858000"/>
   <p:notesSz cx="6858000" cy="9144000"/>
@@ -3800,6 +3808,656 @@
 </p:notes>
 </file>
 
+<file path=ppt/notesSlides/notesSlide40.xml><?xml version="1.0" encoding="utf-8"?>
+<p:notes xmlns:p="http://schemas.openxmlformats.org/presentationml/2006/main">
+  <p:cSld>
+    <p:spTree>
+      <p:nvGrpSpPr>
+        <p:cNvPr id="1" name=""/>
+        <p:cNvGrpSpPr/>
+        <p:nvPr/>
+      </p:nvGrpSpPr>
+      <p:grpSpPr>
+        <a:xfrm xmlns:a="http://schemas.openxmlformats.org/drawingml/2006/main"/>
+      </p:grpSpPr>
+      <p:sp>
+        <p:nvSpPr>
+          <p:cNvPr id="2" name="Slide Image Placeholder 1"/>
+          <p:cNvSpPr>
+            <a:spLocks xmlns:a="http://schemas.openxmlformats.org/drawingml/2006/main" noGrp="1"/>
+          </p:cNvSpPr>
+          <p:nvPr>
+            <p:ph type="sldImg" idx="0"/>
+          </p:nvPr>
+        </p:nvSpPr>
+        <p:spPr/>
+      </p:sp>
+      <p:sp>
+        <p:nvSpPr>
+          <p:cNvPr id="3" name="Notes Placeholder 2"/>
+          <p:cNvSpPr>
+            <a:spLocks xmlns:a="http://schemas.openxmlformats.org/drawingml/2006/main" noGrp="1"/>
+          </p:cNvSpPr>
+          <p:nvPr>
+            <p:ph type="body" idx="1"/>
+          </p:nvPr>
+        </p:nvSpPr>
+        <p:spPr/>
+        <p:txBody>
+          <a:bodyPr xmlns:a="http://schemas.openxmlformats.org/drawingml/2006/main"/>
+          <a:lstStyle xmlns:a="http://schemas.openxmlformats.org/drawingml/2006/main"/>
+          <a:p xmlns:a="http://schemas.openxmlformats.org/drawingml/2006/main">
+            <a:r>
+              <a:t>[Sources]</a:t>
+            </a:r>
+          </a:p>
+          <a:p xmlns:a="http://schemas.openxmlformats.org/drawingml/2006/main">
+            <a:r>
+              <a:t>Internal Gen5 packet: runs/research_workbench/operator_hypothesis_lab/tsla_qqq_atrp_conditioned_return_horizon_grid_20260825/</a:t>
+            </a:r>
+          </a:p>
+          <a:p xmlns:a="http://schemas.openxmlformats.org/drawingml/2006/main">
+            <a:r>
+              <a:t>Internal Gen5 note: operator_hypothesis_lab/docs/TSLA_QQQ_ATRP_CONDITIONED_RETURN_HORIZON_GRID_2018_2023.md</a:t>
+            </a:r>
+          </a:p>
+        </p:txBody>
+      </p:sp>
+      <p:sp>
+        <p:nvSpPr>
+          <p:cNvPr id="4" name="Slide Number Placeholder 3"/>
+          <p:cNvSpPr>
+            <a:spLocks xmlns:a="http://schemas.openxmlformats.org/drawingml/2006/main" noGrp="1"/>
+          </p:cNvSpPr>
+          <p:nvPr>
+            <p:ph type="sldNum" idx="5"/>
+          </p:nvPr>
+        </p:nvSpPr>
+        <p:spPr/>
+        <p:txBody>
+          <a:bodyPr xmlns:a="http://schemas.openxmlformats.org/drawingml/2006/main"/>
+          <a:lstStyle xmlns:a="http://schemas.openxmlformats.org/drawingml/2006/main"/>
+          <a:p xmlns:a="http://schemas.openxmlformats.org/drawingml/2006/main"/>
+        </p:txBody>
+      </p:sp>
+    </p:spTree>
+  </p:cSld>
+  <p:clrMapOvr>
+    <a:masterClrMapping xmlns:a="http://schemas.openxmlformats.org/drawingml/2006/main"/>
+  </p:clrMapOvr>
+</p:notes>
+</file>
+
+<file path=ppt/notesSlides/notesSlide41.xml><?xml version="1.0" encoding="utf-8"?>
+<p:notes xmlns:p="http://schemas.openxmlformats.org/presentationml/2006/main">
+  <p:cSld>
+    <p:spTree>
+      <p:nvGrpSpPr>
+        <p:cNvPr id="1" name=""/>
+        <p:cNvGrpSpPr/>
+        <p:nvPr/>
+      </p:nvGrpSpPr>
+      <p:grpSpPr>
+        <a:xfrm xmlns:a="http://schemas.openxmlformats.org/drawingml/2006/main"/>
+      </p:grpSpPr>
+      <p:sp>
+        <p:nvSpPr>
+          <p:cNvPr id="2" name="Slide Image Placeholder 1"/>
+          <p:cNvSpPr>
+            <a:spLocks xmlns:a="http://schemas.openxmlformats.org/drawingml/2006/main" noGrp="1"/>
+          </p:cNvSpPr>
+          <p:nvPr>
+            <p:ph type="sldImg" idx="0"/>
+          </p:nvPr>
+        </p:nvSpPr>
+        <p:spPr/>
+      </p:sp>
+      <p:sp>
+        <p:nvSpPr>
+          <p:cNvPr id="3" name="Notes Placeholder 2"/>
+          <p:cNvSpPr>
+            <a:spLocks xmlns:a="http://schemas.openxmlformats.org/drawingml/2006/main" noGrp="1"/>
+          </p:cNvSpPr>
+          <p:nvPr>
+            <p:ph type="body" idx="1"/>
+          </p:nvPr>
+        </p:nvSpPr>
+        <p:spPr/>
+        <p:txBody>
+          <a:bodyPr xmlns:a="http://schemas.openxmlformats.org/drawingml/2006/main"/>
+          <a:lstStyle xmlns:a="http://schemas.openxmlformats.org/drawingml/2006/main"/>
+          <a:p xmlns:a="http://schemas.openxmlformats.org/drawingml/2006/main">
+            <a:r>
+              <a:t>[Sources]</a:t>
+            </a:r>
+          </a:p>
+          <a:p xmlns:a="http://schemas.openxmlformats.org/drawingml/2006/main">
+            <a:r>
+              <a:t>Internal Gen5 packet: runs/research_workbench/operator_hypothesis_lab/tsla_qqq_atrp_conditioned_return_horizon_grid_20260825/</a:t>
+            </a:r>
+          </a:p>
+          <a:p xmlns:a="http://schemas.openxmlformats.org/drawingml/2006/main">
+            <a:r>
+              <a:t>Internal Gen5 note: operator_hypothesis_lab/docs/TSLA_QQQ_ATRP_CONDITIONED_RETURN_HORIZON_GRID_2018_2023.md</a:t>
+            </a:r>
+          </a:p>
+        </p:txBody>
+      </p:sp>
+      <p:sp>
+        <p:nvSpPr>
+          <p:cNvPr id="4" name="Slide Number Placeholder 3"/>
+          <p:cNvSpPr>
+            <a:spLocks xmlns:a="http://schemas.openxmlformats.org/drawingml/2006/main" noGrp="1"/>
+          </p:cNvSpPr>
+          <p:nvPr>
+            <p:ph type="sldNum" idx="5"/>
+          </p:nvPr>
+        </p:nvSpPr>
+        <p:spPr/>
+        <p:txBody>
+          <a:bodyPr xmlns:a="http://schemas.openxmlformats.org/drawingml/2006/main"/>
+          <a:lstStyle xmlns:a="http://schemas.openxmlformats.org/drawingml/2006/main"/>
+          <a:p xmlns:a="http://schemas.openxmlformats.org/drawingml/2006/main"/>
+        </p:txBody>
+      </p:sp>
+    </p:spTree>
+  </p:cSld>
+  <p:clrMapOvr>
+    <a:masterClrMapping xmlns:a="http://schemas.openxmlformats.org/drawingml/2006/main"/>
+  </p:clrMapOvr>
+</p:notes>
+</file>
+
+<file path=ppt/notesSlides/notesSlide42.xml><?xml version="1.0" encoding="utf-8"?>
+<p:notes xmlns:p="http://schemas.openxmlformats.org/presentationml/2006/main">
+  <p:cSld>
+    <p:spTree>
+      <p:nvGrpSpPr>
+        <p:cNvPr id="1" name=""/>
+        <p:cNvGrpSpPr/>
+        <p:nvPr/>
+      </p:nvGrpSpPr>
+      <p:grpSpPr>
+        <a:xfrm xmlns:a="http://schemas.openxmlformats.org/drawingml/2006/main"/>
+      </p:grpSpPr>
+      <p:sp>
+        <p:nvSpPr>
+          <p:cNvPr id="2" name="Slide Image Placeholder 1"/>
+          <p:cNvSpPr>
+            <a:spLocks xmlns:a="http://schemas.openxmlformats.org/drawingml/2006/main" noGrp="1"/>
+          </p:cNvSpPr>
+          <p:nvPr>
+            <p:ph type="sldImg" idx="0"/>
+          </p:nvPr>
+        </p:nvSpPr>
+        <p:spPr/>
+      </p:sp>
+      <p:sp>
+        <p:nvSpPr>
+          <p:cNvPr id="3" name="Notes Placeholder 2"/>
+          <p:cNvSpPr>
+            <a:spLocks xmlns:a="http://schemas.openxmlformats.org/drawingml/2006/main" noGrp="1"/>
+          </p:cNvSpPr>
+          <p:nvPr>
+            <p:ph type="body" idx="1"/>
+          </p:nvPr>
+        </p:nvSpPr>
+        <p:spPr/>
+        <p:txBody>
+          <a:bodyPr xmlns:a="http://schemas.openxmlformats.org/drawingml/2006/main"/>
+          <a:lstStyle xmlns:a="http://schemas.openxmlformats.org/drawingml/2006/main"/>
+          <a:p xmlns:a="http://schemas.openxmlformats.org/drawingml/2006/main">
+            <a:r>
+              <a:t>[Sources]</a:t>
+            </a:r>
+          </a:p>
+          <a:p xmlns:a="http://schemas.openxmlformats.org/drawingml/2006/main">
+            <a:r>
+              <a:t>Internal Gen5 packet: runs/research_workbench/operator_hypothesis_lab/tsla_qqq_atrp_conditioned_return_horizon_grid_20260825/</a:t>
+            </a:r>
+          </a:p>
+          <a:p xmlns:a="http://schemas.openxmlformats.org/drawingml/2006/main">
+            <a:r>
+              <a:t>Internal Gen5 note: operator_hypothesis_lab/docs/TSLA_QQQ_ATRP_CONDITIONED_RETURN_HORIZON_GRID_2018_2023.md</a:t>
+            </a:r>
+          </a:p>
+        </p:txBody>
+      </p:sp>
+      <p:sp>
+        <p:nvSpPr>
+          <p:cNvPr id="4" name="Slide Number Placeholder 3"/>
+          <p:cNvSpPr>
+            <a:spLocks xmlns:a="http://schemas.openxmlformats.org/drawingml/2006/main" noGrp="1"/>
+          </p:cNvSpPr>
+          <p:nvPr>
+            <p:ph type="sldNum" idx="5"/>
+          </p:nvPr>
+        </p:nvSpPr>
+        <p:spPr/>
+        <p:txBody>
+          <a:bodyPr xmlns:a="http://schemas.openxmlformats.org/drawingml/2006/main"/>
+          <a:lstStyle xmlns:a="http://schemas.openxmlformats.org/drawingml/2006/main"/>
+          <a:p xmlns:a="http://schemas.openxmlformats.org/drawingml/2006/main"/>
+        </p:txBody>
+      </p:sp>
+    </p:spTree>
+  </p:cSld>
+  <p:clrMapOvr>
+    <a:masterClrMapping xmlns:a="http://schemas.openxmlformats.org/drawingml/2006/main"/>
+  </p:clrMapOvr>
+</p:notes>
+</file>
+
+<file path=ppt/notesSlides/notesSlide43.xml><?xml version="1.0" encoding="utf-8"?>
+<p:notes xmlns:p="http://schemas.openxmlformats.org/presentationml/2006/main">
+  <p:cSld>
+    <p:spTree>
+      <p:nvGrpSpPr>
+        <p:cNvPr id="1" name=""/>
+        <p:cNvGrpSpPr/>
+        <p:nvPr/>
+      </p:nvGrpSpPr>
+      <p:grpSpPr>
+        <a:xfrm xmlns:a="http://schemas.openxmlformats.org/drawingml/2006/main"/>
+      </p:grpSpPr>
+      <p:sp>
+        <p:nvSpPr>
+          <p:cNvPr id="2" name="Slide Image Placeholder 1"/>
+          <p:cNvSpPr>
+            <a:spLocks xmlns:a="http://schemas.openxmlformats.org/drawingml/2006/main" noGrp="1"/>
+          </p:cNvSpPr>
+          <p:nvPr>
+            <p:ph type="sldImg" idx="0"/>
+          </p:nvPr>
+        </p:nvSpPr>
+        <p:spPr/>
+      </p:sp>
+      <p:sp>
+        <p:nvSpPr>
+          <p:cNvPr id="3" name="Notes Placeholder 2"/>
+          <p:cNvSpPr>
+            <a:spLocks xmlns:a="http://schemas.openxmlformats.org/drawingml/2006/main" noGrp="1"/>
+          </p:cNvSpPr>
+          <p:nvPr>
+            <p:ph type="body" idx="1"/>
+          </p:nvPr>
+        </p:nvSpPr>
+        <p:spPr/>
+        <p:txBody>
+          <a:bodyPr xmlns:a="http://schemas.openxmlformats.org/drawingml/2006/main"/>
+          <a:lstStyle xmlns:a="http://schemas.openxmlformats.org/drawingml/2006/main"/>
+          <a:p xmlns:a="http://schemas.openxmlformats.org/drawingml/2006/main">
+            <a:r>
+              <a:t>[Sources]</a:t>
+            </a:r>
+          </a:p>
+          <a:p xmlns:a="http://schemas.openxmlformats.org/drawingml/2006/main">
+            <a:r>
+              <a:t>Internal Gen5 packet: runs/research_workbench/operator_hypothesis_lab/tsla_qqq_atrp_conditioned_return_horizon_grid_20260825/</a:t>
+            </a:r>
+          </a:p>
+          <a:p xmlns:a="http://schemas.openxmlformats.org/drawingml/2006/main">
+            <a:r>
+              <a:t>Internal Gen5 note: operator_hypothesis_lab/docs/TSLA_QQQ_ATRP_CONDITIONED_RETURN_HORIZON_GRID_2018_2023.md</a:t>
+            </a:r>
+          </a:p>
+        </p:txBody>
+      </p:sp>
+      <p:sp>
+        <p:nvSpPr>
+          <p:cNvPr id="4" name="Slide Number Placeholder 3"/>
+          <p:cNvSpPr>
+            <a:spLocks xmlns:a="http://schemas.openxmlformats.org/drawingml/2006/main" noGrp="1"/>
+          </p:cNvSpPr>
+          <p:nvPr>
+            <p:ph type="sldNum" idx="5"/>
+          </p:nvPr>
+        </p:nvSpPr>
+        <p:spPr/>
+        <p:txBody>
+          <a:bodyPr xmlns:a="http://schemas.openxmlformats.org/drawingml/2006/main"/>
+          <a:lstStyle xmlns:a="http://schemas.openxmlformats.org/drawingml/2006/main"/>
+          <a:p xmlns:a="http://schemas.openxmlformats.org/drawingml/2006/main"/>
+        </p:txBody>
+      </p:sp>
+    </p:spTree>
+  </p:cSld>
+  <p:clrMapOvr>
+    <a:masterClrMapping xmlns:a="http://schemas.openxmlformats.org/drawingml/2006/main"/>
+  </p:clrMapOvr>
+</p:notes>
+</file>
+
+<file path=ppt/notesSlides/notesSlide44.xml><?xml version="1.0" encoding="utf-8"?>
+<p:notes xmlns:p="http://schemas.openxmlformats.org/presentationml/2006/main">
+  <p:cSld>
+    <p:spTree>
+      <p:nvGrpSpPr>
+        <p:cNvPr id="1" name=""/>
+        <p:cNvGrpSpPr/>
+        <p:nvPr/>
+      </p:nvGrpSpPr>
+      <p:grpSpPr>
+        <a:xfrm xmlns:a="http://schemas.openxmlformats.org/drawingml/2006/main"/>
+      </p:grpSpPr>
+      <p:sp>
+        <p:nvSpPr>
+          <p:cNvPr id="2" name="Slide Image Placeholder 1"/>
+          <p:cNvSpPr>
+            <a:spLocks xmlns:a="http://schemas.openxmlformats.org/drawingml/2006/main" noGrp="1"/>
+          </p:cNvSpPr>
+          <p:nvPr>
+            <p:ph type="sldImg" idx="0"/>
+          </p:nvPr>
+        </p:nvSpPr>
+        <p:spPr/>
+      </p:sp>
+      <p:sp>
+        <p:nvSpPr>
+          <p:cNvPr id="3" name="Notes Placeholder 2"/>
+          <p:cNvSpPr>
+            <a:spLocks xmlns:a="http://schemas.openxmlformats.org/drawingml/2006/main" noGrp="1"/>
+          </p:cNvSpPr>
+          <p:nvPr>
+            <p:ph type="body" idx="1"/>
+          </p:nvPr>
+        </p:nvSpPr>
+        <p:spPr/>
+        <p:txBody>
+          <a:bodyPr xmlns:a="http://schemas.openxmlformats.org/drawingml/2006/main"/>
+          <a:lstStyle xmlns:a="http://schemas.openxmlformats.org/drawingml/2006/main"/>
+          <a:p xmlns:a="http://schemas.openxmlformats.org/drawingml/2006/main">
+            <a:r>
+              <a:t>[Sources]</a:t>
+            </a:r>
+          </a:p>
+          <a:p xmlns:a="http://schemas.openxmlformats.org/drawingml/2006/main">
+            <a:r>
+              <a:t>Internal Gen5 packet: runs/research_workbench/operator_hypothesis_lab/tsla_qqq_atrp_conditioned_return_horizon_grid_20260825/</a:t>
+            </a:r>
+          </a:p>
+          <a:p xmlns:a="http://schemas.openxmlformats.org/drawingml/2006/main">
+            <a:r>
+              <a:t>Internal Gen5 note: operator_hypothesis_lab/docs/TSLA_QQQ_ATRP_CONDITIONED_RETURN_HORIZON_GRID_2018_2023.md</a:t>
+            </a:r>
+          </a:p>
+        </p:txBody>
+      </p:sp>
+      <p:sp>
+        <p:nvSpPr>
+          <p:cNvPr id="4" name="Slide Number Placeholder 3"/>
+          <p:cNvSpPr>
+            <a:spLocks xmlns:a="http://schemas.openxmlformats.org/drawingml/2006/main" noGrp="1"/>
+          </p:cNvSpPr>
+          <p:nvPr>
+            <p:ph type="sldNum" idx="5"/>
+          </p:nvPr>
+        </p:nvSpPr>
+        <p:spPr/>
+        <p:txBody>
+          <a:bodyPr xmlns:a="http://schemas.openxmlformats.org/drawingml/2006/main"/>
+          <a:lstStyle xmlns:a="http://schemas.openxmlformats.org/drawingml/2006/main"/>
+          <a:p xmlns:a="http://schemas.openxmlformats.org/drawingml/2006/main"/>
+        </p:txBody>
+      </p:sp>
+    </p:spTree>
+  </p:cSld>
+  <p:clrMapOvr>
+    <a:masterClrMapping xmlns:a="http://schemas.openxmlformats.org/drawingml/2006/main"/>
+  </p:clrMapOvr>
+</p:notes>
+</file>
+
+<file path=ppt/notesSlides/notesSlide45.xml><?xml version="1.0" encoding="utf-8"?>
+<p:notes xmlns:p="http://schemas.openxmlformats.org/presentationml/2006/main">
+  <p:cSld>
+    <p:spTree>
+      <p:nvGrpSpPr>
+        <p:cNvPr id="1" name=""/>
+        <p:cNvGrpSpPr/>
+        <p:nvPr/>
+      </p:nvGrpSpPr>
+      <p:grpSpPr>
+        <a:xfrm xmlns:a="http://schemas.openxmlformats.org/drawingml/2006/main"/>
+      </p:grpSpPr>
+      <p:sp>
+        <p:nvSpPr>
+          <p:cNvPr id="2" name="Slide Image Placeholder 1"/>
+          <p:cNvSpPr>
+            <a:spLocks xmlns:a="http://schemas.openxmlformats.org/drawingml/2006/main" noGrp="1"/>
+          </p:cNvSpPr>
+          <p:nvPr>
+            <p:ph type="sldImg" idx="0"/>
+          </p:nvPr>
+        </p:nvSpPr>
+        <p:spPr/>
+      </p:sp>
+      <p:sp>
+        <p:nvSpPr>
+          <p:cNvPr id="3" name="Notes Placeholder 2"/>
+          <p:cNvSpPr>
+            <a:spLocks xmlns:a="http://schemas.openxmlformats.org/drawingml/2006/main" noGrp="1"/>
+          </p:cNvSpPr>
+          <p:nvPr>
+            <p:ph type="body" idx="1"/>
+          </p:nvPr>
+        </p:nvSpPr>
+        <p:spPr/>
+        <p:txBody>
+          <a:bodyPr xmlns:a="http://schemas.openxmlformats.org/drawingml/2006/main"/>
+          <a:lstStyle xmlns:a="http://schemas.openxmlformats.org/drawingml/2006/main"/>
+          <a:p xmlns:a="http://schemas.openxmlformats.org/drawingml/2006/main">
+            <a:r>
+              <a:t>[Sources]</a:t>
+            </a:r>
+          </a:p>
+          <a:p xmlns:a="http://schemas.openxmlformats.org/drawingml/2006/main">
+            <a:r>
+              <a:t>Internal Gen5 packet: runs/research_workbench/operator_hypothesis_lab/tsla_qqq_atrp_conditioned_return_horizon_grid_20260825/</a:t>
+            </a:r>
+          </a:p>
+          <a:p xmlns:a="http://schemas.openxmlformats.org/drawingml/2006/main">
+            <a:r>
+              <a:t>Internal Gen5 note: operator_hypothesis_lab/docs/TSLA_QQQ_ATRP_CONDITIONED_RETURN_HORIZON_GRID_2018_2023.md</a:t>
+            </a:r>
+          </a:p>
+        </p:txBody>
+      </p:sp>
+      <p:sp>
+        <p:nvSpPr>
+          <p:cNvPr id="4" name="Slide Number Placeholder 3"/>
+          <p:cNvSpPr>
+            <a:spLocks xmlns:a="http://schemas.openxmlformats.org/drawingml/2006/main" noGrp="1"/>
+          </p:cNvSpPr>
+          <p:nvPr>
+            <p:ph type="sldNum" idx="5"/>
+          </p:nvPr>
+        </p:nvSpPr>
+        <p:spPr/>
+        <p:txBody>
+          <a:bodyPr xmlns:a="http://schemas.openxmlformats.org/drawingml/2006/main"/>
+          <a:lstStyle xmlns:a="http://schemas.openxmlformats.org/drawingml/2006/main"/>
+          <a:p xmlns:a="http://schemas.openxmlformats.org/drawingml/2006/main"/>
+        </p:txBody>
+      </p:sp>
+    </p:spTree>
+  </p:cSld>
+  <p:clrMapOvr>
+    <a:masterClrMapping xmlns:a="http://schemas.openxmlformats.org/drawingml/2006/main"/>
+  </p:clrMapOvr>
+</p:notes>
+</file>
+
+<file path=ppt/notesSlides/notesSlide46.xml><?xml version="1.0" encoding="utf-8"?>
+<p:notes xmlns:p="http://schemas.openxmlformats.org/presentationml/2006/main">
+  <p:cSld>
+    <p:spTree>
+      <p:nvGrpSpPr>
+        <p:cNvPr id="1" name=""/>
+        <p:cNvGrpSpPr/>
+        <p:nvPr/>
+      </p:nvGrpSpPr>
+      <p:grpSpPr>
+        <a:xfrm xmlns:a="http://schemas.openxmlformats.org/drawingml/2006/main"/>
+      </p:grpSpPr>
+      <p:sp>
+        <p:nvSpPr>
+          <p:cNvPr id="2" name="Slide Image Placeholder 1"/>
+          <p:cNvSpPr>
+            <a:spLocks xmlns:a="http://schemas.openxmlformats.org/drawingml/2006/main" noGrp="1"/>
+          </p:cNvSpPr>
+          <p:nvPr>
+            <p:ph type="sldImg" idx="0"/>
+          </p:nvPr>
+        </p:nvSpPr>
+        <p:spPr/>
+      </p:sp>
+      <p:sp>
+        <p:nvSpPr>
+          <p:cNvPr id="3" name="Notes Placeholder 2"/>
+          <p:cNvSpPr>
+            <a:spLocks xmlns:a="http://schemas.openxmlformats.org/drawingml/2006/main" noGrp="1"/>
+          </p:cNvSpPr>
+          <p:nvPr>
+            <p:ph type="body" idx="1"/>
+          </p:nvPr>
+        </p:nvSpPr>
+        <p:spPr/>
+        <p:txBody>
+          <a:bodyPr xmlns:a="http://schemas.openxmlformats.org/drawingml/2006/main"/>
+          <a:lstStyle xmlns:a="http://schemas.openxmlformats.org/drawingml/2006/main"/>
+          <a:p xmlns:a="http://schemas.openxmlformats.org/drawingml/2006/main">
+            <a:r>
+              <a:t>[Sources]</a:t>
+            </a:r>
+          </a:p>
+          <a:p xmlns:a="http://schemas.openxmlformats.org/drawingml/2006/main">
+            <a:r>
+              <a:t>Internal Gen5 packet: runs/research_workbench/operator_hypothesis_lab/tsla_qqq_atrp_conditioned_return_horizon_grid_20260825/</a:t>
+            </a:r>
+          </a:p>
+          <a:p xmlns:a="http://schemas.openxmlformats.org/drawingml/2006/main">
+            <a:r>
+              <a:t>Internal Gen5 note: operator_hypothesis_lab/docs/TSLA_QQQ_ATRP_CONDITIONED_RETURN_HORIZON_GRID_2018_2023.md</a:t>
+            </a:r>
+          </a:p>
+        </p:txBody>
+      </p:sp>
+      <p:sp>
+        <p:nvSpPr>
+          <p:cNvPr id="4" name="Slide Number Placeholder 3"/>
+          <p:cNvSpPr>
+            <a:spLocks xmlns:a="http://schemas.openxmlformats.org/drawingml/2006/main" noGrp="1"/>
+          </p:cNvSpPr>
+          <p:nvPr>
+            <p:ph type="sldNum" idx="5"/>
+          </p:nvPr>
+        </p:nvSpPr>
+        <p:spPr/>
+        <p:txBody>
+          <a:bodyPr xmlns:a="http://schemas.openxmlformats.org/drawingml/2006/main"/>
+          <a:lstStyle xmlns:a="http://schemas.openxmlformats.org/drawingml/2006/main"/>
+          <a:p xmlns:a="http://schemas.openxmlformats.org/drawingml/2006/main"/>
+        </p:txBody>
+      </p:sp>
+    </p:spTree>
+  </p:cSld>
+  <p:clrMapOvr>
+    <a:masterClrMapping xmlns:a="http://schemas.openxmlformats.org/drawingml/2006/main"/>
+  </p:clrMapOvr>
+</p:notes>
+</file>
+
+<file path=ppt/notesSlides/notesSlide47.xml><?xml version="1.0" encoding="utf-8"?>
+<p:notes xmlns:p="http://schemas.openxmlformats.org/presentationml/2006/main">
+  <p:cSld>
+    <p:spTree>
+      <p:nvGrpSpPr>
+        <p:cNvPr id="1" name=""/>
+        <p:cNvGrpSpPr/>
+        <p:nvPr/>
+      </p:nvGrpSpPr>
+      <p:grpSpPr>
+        <a:xfrm xmlns:a="http://schemas.openxmlformats.org/drawingml/2006/main"/>
+      </p:grpSpPr>
+      <p:sp>
+        <p:nvSpPr>
+          <p:cNvPr id="2" name="Slide Image Placeholder 1"/>
+          <p:cNvSpPr>
+            <a:spLocks xmlns:a="http://schemas.openxmlformats.org/drawingml/2006/main" noGrp="1"/>
+          </p:cNvSpPr>
+          <p:nvPr>
+            <p:ph type="sldImg" idx="0"/>
+          </p:nvPr>
+        </p:nvSpPr>
+        <p:spPr/>
+      </p:sp>
+      <p:sp>
+        <p:nvSpPr>
+          <p:cNvPr id="3" name="Notes Placeholder 2"/>
+          <p:cNvSpPr>
+            <a:spLocks xmlns:a="http://schemas.openxmlformats.org/drawingml/2006/main" noGrp="1"/>
+          </p:cNvSpPr>
+          <p:nvPr>
+            <p:ph type="body" idx="1"/>
+          </p:nvPr>
+        </p:nvSpPr>
+        <p:spPr/>
+        <p:txBody>
+          <a:bodyPr xmlns:a="http://schemas.openxmlformats.org/drawingml/2006/main"/>
+          <a:lstStyle xmlns:a="http://schemas.openxmlformats.org/drawingml/2006/main"/>
+          <a:p xmlns:a="http://schemas.openxmlformats.org/drawingml/2006/main">
+            <a:r>
+              <a:t>[Sources]</a:t>
+            </a:r>
+          </a:p>
+          <a:p xmlns:a="http://schemas.openxmlformats.org/drawingml/2006/main">
+            <a:r>
+              <a:t>Internal Gen5 packet: runs/research_workbench/operator_hypothesis_lab/tsla_qqq_atrp_conditioned_return_horizon_grid_20260825/</a:t>
+            </a:r>
+          </a:p>
+          <a:p xmlns:a="http://schemas.openxmlformats.org/drawingml/2006/main">
+            <a:r>
+              <a:t>Internal Gen5 note: operator_hypothesis_lab/docs/TSLA_QQQ_ATRP_CONDITIONED_RETURN_HORIZON_GRID_2018_2023.md</a:t>
+            </a:r>
+          </a:p>
+          <a:p xmlns:a="http://schemas.openxmlformats.org/drawingml/2006/main">
+            <a:r>
+              <a:t>Internal Gen5 comparison packet: runs/research_workbench/operator_hypothesis_lab/tsla_atrp_conditioned_return_horizon_grid_20260825/</a:t>
+            </a:r>
+          </a:p>
+          <a:p xmlns:a="http://schemas.openxmlformats.org/drawingml/2006/main">
+            <a:r>
+              <a:t>Internal Gen5 comparison packet: runs/research_workbench/operator_hypothesis_lab/tsla_spy_atrp_conditioned_return_horizon_grid_20260825/</a:t>
+            </a:r>
+          </a:p>
+        </p:txBody>
+      </p:sp>
+      <p:sp>
+        <p:nvSpPr>
+          <p:cNvPr id="4" name="Slide Number Placeholder 3"/>
+          <p:cNvSpPr>
+            <a:spLocks xmlns:a="http://schemas.openxmlformats.org/drawingml/2006/main" noGrp="1"/>
+          </p:cNvSpPr>
+          <p:nvPr>
+            <p:ph type="sldNum" idx="5"/>
+          </p:nvPr>
+        </p:nvSpPr>
+        <p:spPr/>
+        <p:txBody>
+          <a:bodyPr xmlns:a="http://schemas.openxmlformats.org/drawingml/2006/main"/>
+          <a:lstStyle xmlns:a="http://schemas.openxmlformats.org/drawingml/2006/main"/>
+          <a:p xmlns:a="http://schemas.openxmlformats.org/drawingml/2006/main"/>
+        </p:txBody>
+      </p:sp>
+    </p:spTree>
+  </p:cSld>
+  <p:clrMapOvr>
+    <a:masterClrMapping xmlns:a="http://schemas.openxmlformats.org/drawingml/2006/main"/>
+  </p:clrMapOvr>
+</p:notes>
+</file>
+
 <file path=ppt/notesSlides/notesSlide5.xml><?xml version="1.0" encoding="utf-8"?>
 <p:notes xmlns:p="http://schemas.openxmlformats.org/presentationml/2006/main">
   <p:cSld>
@@ -4328,7 +4986,7 @@
   </p:cSld>
   <p:clrMap bg1="lt1" tx1="dk1" bg2="lt2" tx2="dk2" accent1="accent1" accent2="accent2" accent3="accent3" accent4="accent4" accent5="accent5" accent6="accent6" hlink="hlink" folHlink="folHlink"/>
   <p:sldLayoutIdLst>
-    <p:sldLayoutId xmlns:r="http://schemas.openxmlformats.org/officeDocument/2006/relationships" id="2147483649" r:id="Rd948ee55fcb74a97"/>
+    <p:sldLayoutId xmlns:r="http://schemas.openxmlformats.org/officeDocument/2006/relationships" id="2147483649" r:id="Ra112cd237886420e"/>
   </p:sldLayoutIdLst>
   <p:txStyles>
     <p:titleStyle>
@@ -5507,7 +6165,7 @@
           <p:nvPr/>
         </p:nvPicPr>
         <p:blipFill>
-          <a:blip xmlns:r="http://schemas.openxmlformats.org/officeDocument/2006/relationships" xmlns:a="http://schemas.openxmlformats.org/drawingml/2006/main" r:embed="R73fd724018224152"/>
+          <a:blip xmlns:r="http://schemas.openxmlformats.org/officeDocument/2006/relationships" xmlns:a="http://schemas.openxmlformats.org/drawingml/2006/main" r:embed="R0c61f548654742b1"/>
           <a:stretch xmlns:a="http://schemas.openxmlformats.org/drawingml/2006/main"/>
         </p:blipFill>
         <p:spPr>
@@ -9428,7 +10086,7 @@
           <p:nvPr/>
         </p:nvPicPr>
         <p:blipFill>
-          <a:blip xmlns:r="http://schemas.openxmlformats.org/officeDocument/2006/relationships" xmlns:a="http://schemas.openxmlformats.org/drawingml/2006/main" r:embed="Rca1578dd46bb40a0"/>
+          <a:blip xmlns:r="http://schemas.openxmlformats.org/officeDocument/2006/relationships" xmlns:a="http://schemas.openxmlformats.org/drawingml/2006/main" r:embed="Rb32b24a26cf44627"/>
           <a:stretch xmlns:a="http://schemas.openxmlformats.org/drawingml/2006/main"/>
         </p:blipFill>
         <p:spPr>
@@ -10333,7 +10991,7 @@
           <p:nvPr/>
         </p:nvPicPr>
         <p:blipFill>
-          <a:blip xmlns:r="http://schemas.openxmlformats.org/officeDocument/2006/relationships" xmlns:a="http://schemas.openxmlformats.org/drawingml/2006/main" r:embed="R7c68ddb48c43437b"/>
+          <a:blip xmlns:r="http://schemas.openxmlformats.org/officeDocument/2006/relationships" xmlns:a="http://schemas.openxmlformats.org/drawingml/2006/main" r:embed="Rb508f8a0a89949ec"/>
           <a:stretch xmlns:a="http://schemas.openxmlformats.org/drawingml/2006/main"/>
         </p:blipFill>
         <p:spPr>
@@ -11137,7 +11795,7 @@
           <p:nvPr/>
         </p:nvPicPr>
         <p:blipFill>
-          <a:blip xmlns:r="http://schemas.openxmlformats.org/officeDocument/2006/relationships" xmlns:a="http://schemas.openxmlformats.org/drawingml/2006/main" r:embed="R6a70d1dff826462a"/>
+          <a:blip xmlns:r="http://schemas.openxmlformats.org/officeDocument/2006/relationships" xmlns:a="http://schemas.openxmlformats.org/drawingml/2006/main" r:embed="R65ca3541ff8a4144"/>
           <a:stretch xmlns:a="http://schemas.openxmlformats.org/drawingml/2006/main"/>
         </p:blipFill>
         <p:spPr>
@@ -15490,7 +16148,7 @@
           <p:nvPr/>
         </p:nvPicPr>
         <p:blipFill>
-          <a:blip xmlns:r="http://schemas.openxmlformats.org/officeDocument/2006/relationships" xmlns:a="http://schemas.openxmlformats.org/drawingml/2006/main" r:embed="Rb48eb01551f04684"/>
+          <a:blip xmlns:r="http://schemas.openxmlformats.org/officeDocument/2006/relationships" xmlns:a="http://schemas.openxmlformats.org/drawingml/2006/main" r:embed="R98a3647ddd0f4572"/>
           <a:stretch xmlns:a="http://schemas.openxmlformats.org/drawingml/2006/main"/>
         </p:blipFill>
         <p:spPr>
@@ -15902,7 +16560,7 @@
           <p:nvPr/>
         </p:nvPicPr>
         <p:blipFill>
-          <a:blip xmlns:r="http://schemas.openxmlformats.org/officeDocument/2006/relationships" xmlns:a="http://schemas.openxmlformats.org/drawingml/2006/main" r:embed="R8b22ca6706164d25"/>
+          <a:blip xmlns:r="http://schemas.openxmlformats.org/officeDocument/2006/relationships" xmlns:a="http://schemas.openxmlformats.org/drawingml/2006/main" r:embed="Rbc164a49640a404f"/>
           <a:stretch xmlns:a="http://schemas.openxmlformats.org/drawingml/2006/main"/>
         </p:blipFill>
         <p:spPr>
@@ -16807,7 +17465,7 @@
           <p:nvPr/>
         </p:nvPicPr>
         <p:blipFill>
-          <a:blip xmlns:r="http://schemas.openxmlformats.org/officeDocument/2006/relationships" xmlns:a="http://schemas.openxmlformats.org/drawingml/2006/main" r:embed="R824d603f35424cd0"/>
+          <a:blip xmlns:r="http://schemas.openxmlformats.org/officeDocument/2006/relationships" xmlns:a="http://schemas.openxmlformats.org/drawingml/2006/main" r:embed="R21d56559149f45b3"/>
           <a:stretch xmlns:a="http://schemas.openxmlformats.org/drawingml/2006/main"/>
         </p:blipFill>
         <p:spPr>
@@ -20579,7 +21237,7 @@
           <p:nvPr/>
         </p:nvPicPr>
         <p:blipFill>
-          <a:blip xmlns:r="http://schemas.openxmlformats.org/officeDocument/2006/relationships" xmlns:a="http://schemas.openxmlformats.org/drawingml/2006/main" r:embed="Rcccb688cf08e4e65"/>
+          <a:blip xmlns:r="http://schemas.openxmlformats.org/officeDocument/2006/relationships" xmlns:a="http://schemas.openxmlformats.org/drawingml/2006/main" r:embed="R3caa4fb53afb4eba"/>
           <a:stretch xmlns:a="http://schemas.openxmlformats.org/drawingml/2006/main"/>
         </p:blipFill>
         <p:spPr>
@@ -20991,7 +21649,7 @@
           <p:nvPr/>
         </p:nvPicPr>
         <p:blipFill>
-          <a:blip xmlns:r="http://schemas.openxmlformats.org/officeDocument/2006/relationships" xmlns:a="http://schemas.openxmlformats.org/drawingml/2006/main" r:embed="R2175905a5c0845b0"/>
+          <a:blip xmlns:r="http://schemas.openxmlformats.org/officeDocument/2006/relationships" xmlns:a="http://schemas.openxmlformats.org/drawingml/2006/main" r:embed="R215cf6c7e6be493d"/>
           <a:stretch xmlns:a="http://schemas.openxmlformats.org/drawingml/2006/main"/>
         </p:blipFill>
         <p:spPr>
@@ -21403,7 +22061,7 @@
           <p:nvPr/>
         </p:nvPicPr>
         <p:blipFill>
-          <a:blip xmlns:r="http://schemas.openxmlformats.org/officeDocument/2006/relationships" xmlns:a="http://schemas.openxmlformats.org/drawingml/2006/main" r:embed="R19c05996bc8e4b93"/>
+          <a:blip xmlns:r="http://schemas.openxmlformats.org/officeDocument/2006/relationships" xmlns:a="http://schemas.openxmlformats.org/drawingml/2006/main" r:embed="R51a3221d49424f21"/>
           <a:stretch xmlns:a="http://schemas.openxmlformats.org/drawingml/2006/main"/>
         </p:blipFill>
         <p:spPr>
@@ -21815,7 +22473,7 @@
           <p:nvPr/>
         </p:nvPicPr>
         <p:blipFill>
-          <a:blip xmlns:r="http://schemas.openxmlformats.org/officeDocument/2006/relationships" xmlns:a="http://schemas.openxmlformats.org/drawingml/2006/main" r:embed="R35f0e8b2d9294041"/>
+          <a:blip xmlns:r="http://schemas.openxmlformats.org/officeDocument/2006/relationships" xmlns:a="http://schemas.openxmlformats.org/drawingml/2006/main" r:embed="R30212ee070b34749"/>
           <a:stretch xmlns:a="http://schemas.openxmlformats.org/drawingml/2006/main"/>
         </p:blipFill>
         <p:spPr>
@@ -24252,7 +24910,7 @@
           <p:nvPr/>
         </p:nvPicPr>
         <p:blipFill>
-          <a:blip xmlns:r="http://schemas.openxmlformats.org/officeDocument/2006/relationships" xmlns:a="http://schemas.openxmlformats.org/drawingml/2006/main" r:embed="Ra6bb86f2b93044e4"/>
+          <a:blip xmlns:r="http://schemas.openxmlformats.org/officeDocument/2006/relationships" xmlns:a="http://schemas.openxmlformats.org/drawingml/2006/main" r:embed="R3ea218be5da44f8d"/>
           <a:stretch xmlns:a="http://schemas.openxmlformats.org/drawingml/2006/main"/>
         </p:blipFill>
         <p:spPr>
@@ -28000,7 +28658,7 @@
           <p:nvPr/>
         </p:nvPicPr>
         <p:blipFill>
-          <a:blip xmlns:r="http://schemas.openxmlformats.org/officeDocument/2006/relationships" xmlns:a="http://schemas.openxmlformats.org/drawingml/2006/main" r:embed="Rdcb9f657c9134c9f"/>
+          <a:blip xmlns:r="http://schemas.openxmlformats.org/officeDocument/2006/relationships" xmlns:a="http://schemas.openxmlformats.org/drawingml/2006/main" r:embed="Rddb4a04661994f25"/>
           <a:stretch xmlns:a="http://schemas.openxmlformats.org/drawingml/2006/main"/>
         </p:blipFill>
         <p:spPr>
@@ -28412,7 +29070,7 @@
           <p:nvPr/>
         </p:nvPicPr>
         <p:blipFill>
-          <a:blip xmlns:r="http://schemas.openxmlformats.org/officeDocument/2006/relationships" xmlns:a="http://schemas.openxmlformats.org/drawingml/2006/main" r:embed="R12f2b917ce894b65"/>
+          <a:blip xmlns:r="http://schemas.openxmlformats.org/officeDocument/2006/relationships" xmlns:a="http://schemas.openxmlformats.org/drawingml/2006/main" r:embed="R4b9ea7e26e444570"/>
           <a:stretch xmlns:a="http://schemas.openxmlformats.org/drawingml/2006/main"/>
         </p:blipFill>
         <p:spPr>
@@ -28824,7 +29482,7 @@
           <p:nvPr/>
         </p:nvPicPr>
         <p:blipFill>
-          <a:blip xmlns:r="http://schemas.openxmlformats.org/officeDocument/2006/relationships" xmlns:a="http://schemas.openxmlformats.org/drawingml/2006/main" r:embed="R4ac029ed2fe84955"/>
+          <a:blip xmlns:r="http://schemas.openxmlformats.org/officeDocument/2006/relationships" xmlns:a="http://schemas.openxmlformats.org/drawingml/2006/main" r:embed="R2573bf6f558e42e5"/>
           <a:stretch xmlns:a="http://schemas.openxmlformats.org/drawingml/2006/main"/>
         </p:blipFill>
         <p:spPr>
@@ -29236,7 +29894,7 @@
           <p:nvPr/>
         </p:nvPicPr>
         <p:blipFill>
-          <a:blip xmlns:r="http://schemas.openxmlformats.org/officeDocument/2006/relationships" xmlns:a="http://schemas.openxmlformats.org/drawingml/2006/main" r:embed="R645ad257bc454044"/>
+          <a:blip xmlns:r="http://schemas.openxmlformats.org/officeDocument/2006/relationships" xmlns:a="http://schemas.openxmlformats.org/drawingml/2006/main" r:embed="Ra64e0a85fa3f4cc3"/>
           <a:stretch xmlns:a="http://schemas.openxmlformats.org/drawingml/2006/main"/>
         </p:blipFill>
         <p:spPr>
@@ -30141,7 +30799,7 @@
           <p:nvPr/>
         </p:nvPicPr>
         <p:blipFill>
-          <a:blip xmlns:r="http://schemas.openxmlformats.org/officeDocument/2006/relationships" xmlns:a="http://schemas.openxmlformats.org/drawingml/2006/main" r:embed="R62f36352ad9c4879"/>
+          <a:blip xmlns:r="http://schemas.openxmlformats.org/officeDocument/2006/relationships" xmlns:a="http://schemas.openxmlformats.org/drawingml/2006/main" r:embed="R9bba36a4bfec4c38"/>
           <a:stretch xmlns:a="http://schemas.openxmlformats.org/drawingml/2006/main"/>
         </p:blipFill>
         <p:spPr>
@@ -31672,7 +32330,7 @@
           <p:nvPr/>
         </p:nvPicPr>
         <p:blipFill>
-          <a:blip xmlns:r="http://schemas.openxmlformats.org/officeDocument/2006/relationships" xmlns:a="http://schemas.openxmlformats.org/drawingml/2006/main" r:embed="Ra949ebc4e2474916"/>
+          <a:blip xmlns:r="http://schemas.openxmlformats.org/officeDocument/2006/relationships" xmlns:a="http://schemas.openxmlformats.org/drawingml/2006/main" r:embed="Rd2e356d696154848"/>
           <a:stretch xmlns:a="http://schemas.openxmlformats.org/drawingml/2006/main"/>
         </p:blipFill>
         <p:spPr>
@@ -31748,6 +32406,5895 @@
     <p:extLst>
       <p:ext uri="{BB962C8B-B14F-4D97-AF65-F5344CB8AC3E}">
         <p14:creationId xmlns:p14="http://schemas.microsoft.com/office/powerpoint/2010/main" val="400872380"/>
+      </p:ext>
+    </p:extLst>
+  </p:cSld>
+</p:sld>
+</file>
+
+<file path=ppt/slides/slide40.xml><?xml version="1.0" encoding="utf-8"?>
+<p:sld xmlns:p="http://schemas.openxmlformats.org/presentationml/2006/main">
+  <p:cSld>
+    <p:bg>
+      <p:bgPr>
+        <a:solidFill xmlns:a="http://schemas.openxmlformats.org/drawingml/2006/main">
+          <a:srgbClr val="FFFFFF"/>
+        </a:solidFill>
+      </p:bgPr>
+    </p:bg>
+    <p:spTree>
+      <p:nvGrpSpPr>
+        <p:cNvPr id="1" name=""/>
+        <p:cNvGrpSpPr/>
+        <p:nvPr/>
+      </p:nvGrpSpPr>
+      <p:grpSpPr>
+        <a:xfrm xmlns:a="http://schemas.openxmlformats.org/drawingml/2006/main"/>
+      </p:grpSpPr>
+      <p:sp>
+        <p:nvSpPr>
+          <p:cNvPr id="7" name="">
+            <a:extLst xmlns:a="http://schemas.openxmlformats.org/drawingml/2006/main">
+              <a:ext uri="{FF2B5EF4-FFF2-40B4-BE49-F238E27FC236}">
+                <a16:creationId xmlns:a16="http://schemas.microsoft.com/office/drawing/2014/main" id="{52BC51E6-6E84-4C1E-8D3E-0D1B2ADE0DA7}"/>
+              </a:ext>
+            </a:extLst>
+          </p:cNvPr>
+          <p:cNvSpPr>
+            <a:spLocks xmlns:a="http://schemas.openxmlformats.org/drawingml/2006/main" noGrp="1"/>
+          </p:cNvSpPr>
+          <p:nvPr/>
+        </p:nvSpPr>
+        <p:spPr>
+          <a:xfrm xmlns:a="http://schemas.openxmlformats.org/drawingml/2006/main">
+            <a:off x="457200" y="400050"/>
+            <a:ext cx="4000500" cy="266700"/>
+          </a:xfrm>
+          <a:prstGeom xmlns:a="http://schemas.openxmlformats.org/drawingml/2006/main" prst="rect">
+            <a:avLst/>
+          </a:prstGeom>
+          <a:noFill xmlns:a="http://schemas.openxmlformats.org/drawingml/2006/main"/>
+          <a:ln xmlns:a="http://schemas.openxmlformats.org/drawingml/2006/main" w="0">
+            <a:noFill/>
+            <a:prstDash val="solid"/>
+          </a:ln>
+        </p:spPr>
+        <p:txBody>
+          <a:bodyPr xmlns:a="http://schemas.openxmlformats.org/drawingml/2006/main" wrap="square" lIns="0" tIns="0" rIns="0" bIns="0" anchor="t">
+            <a:normAutofit fontScale="100000"/>
+          </a:bodyPr>
+          <a:lstStyle xmlns:a="http://schemas.openxmlformats.org/drawingml/2006/main"/>
+          <a:p xmlns:a="http://schemas.openxmlformats.org/drawingml/2006/main">
+            <a:pPr algn="l">
+              <a:buNone/>
+              <a:defRPr sz="1350" b="1">
+                <a:solidFill>
+                  <a:srgbClr val="667384"/>
+                </a:solidFill>
+                <a:latin typeface="Arial"/>
+                <a:ea typeface="Arial"/>
+                <a:cs typeface="Arial"/>
+              </a:defRPr>
+            </a:pPr>
+            <a:r>
+              <a:rPr sz="1350" b="1">
+                <a:solidFill>
+                  <a:srgbClr val="667384"/>
+                </a:solidFill>
+                <a:latin typeface="Arial"/>
+                <a:ea typeface="Arial"/>
+                <a:cs typeface="Arial"/>
+              </a:rPr>
+              <a:t>QUASI-EXTERNAL MARKET CONTEXT</a:t>
+            </a:r>
+          </a:p>
+        </p:txBody>
+      </p:sp>
+      <p:sp>
+        <p:nvSpPr>
+          <p:cNvPr id="2" name="">
+            <a:extLst xmlns:a="http://schemas.openxmlformats.org/drawingml/2006/main">
+              <a:ext uri="{FF2B5EF4-FFF2-40B4-BE49-F238E27FC236}">
+                <a16:creationId xmlns:a16="http://schemas.microsoft.com/office/drawing/2014/main" id="{D5FBD659-315B-4902-8A62-88F3460EC6CC}"/>
+              </a:ext>
+            </a:extLst>
+          </p:cNvPr>
+          <p:cNvSpPr>
+            <a:spLocks xmlns:a="http://schemas.openxmlformats.org/drawingml/2006/main" noGrp="1"/>
+          </p:cNvSpPr>
+          <p:nvPr/>
+        </p:nvSpPr>
+        <p:spPr>
+          <a:xfrm xmlns:a="http://schemas.openxmlformats.org/drawingml/2006/main">
+            <a:off x="457200" y="1562100"/>
+            <a:ext cx="10763250" cy="1809750"/>
+          </a:xfrm>
+          <a:prstGeom xmlns:a="http://schemas.openxmlformats.org/drawingml/2006/main" prst="rect">
+            <a:avLst/>
+          </a:prstGeom>
+          <a:noFill xmlns:a="http://schemas.openxmlformats.org/drawingml/2006/main"/>
+          <a:ln xmlns:a="http://schemas.openxmlformats.org/drawingml/2006/main" w="0">
+            <a:noFill/>
+            <a:prstDash val="solid"/>
+          </a:ln>
+        </p:spPr>
+        <p:txBody>
+          <a:bodyPr xmlns:a="http://schemas.openxmlformats.org/drawingml/2006/main" wrap="square" lIns="0" tIns="0" rIns="0" bIns="0" anchor="t">
+            <a:noAutofit/>
+          </a:bodyPr>
+          <a:lstStyle xmlns:a="http://schemas.openxmlformats.org/drawingml/2006/main"/>
+          <a:p xmlns:a="http://schemas.openxmlformats.org/drawingml/2006/main">
+            <a:pPr algn="l">
+              <a:buNone/>
+              <a:defRPr sz="5100" b="1">
+                <a:solidFill>
+                  <a:srgbClr val="000000"/>
+                </a:solidFill>
+                <a:latin typeface="Arial"/>
+                <a:ea typeface="Arial"/>
+                <a:cs typeface="Arial"/>
+              </a:defRPr>
+            </a:pPr>
+            <a:r>
+              <a:rPr sz="5100" b="1">
+                <a:solidFill>
+                  <a:srgbClr val="000000"/>
+                </a:solidFill>
+                <a:latin typeface="Arial"/>
+                <a:ea typeface="Arial"/>
+                <a:cs typeface="Arial"/>
+              </a:rPr>
+              <a:t>Can QQQ movement capacity organize TSLA returns?</a:t>
+            </a:r>
+          </a:p>
+        </p:txBody>
+      </p:sp>
+      <p:sp>
+        <p:nvSpPr>
+          <p:cNvPr id="3" name="">
+            <a:extLst xmlns:a="http://schemas.openxmlformats.org/drawingml/2006/main">
+              <a:ext uri="{FF2B5EF4-FFF2-40B4-BE49-F238E27FC236}">
+                <a16:creationId xmlns:a16="http://schemas.microsoft.com/office/drawing/2014/main" id="{108F8D12-F796-4339-A513-DF003E6E5740}"/>
+              </a:ext>
+            </a:extLst>
+          </p:cNvPr>
+          <p:cNvSpPr>
+            <a:spLocks xmlns:a="http://schemas.openxmlformats.org/drawingml/2006/main" noGrp="1"/>
+          </p:cNvSpPr>
+          <p:nvPr/>
+        </p:nvSpPr>
+        <p:spPr>
+          <a:xfrm xmlns:a="http://schemas.openxmlformats.org/drawingml/2006/main">
+            <a:off x="457200" y="3714750"/>
+            <a:ext cx="1257300" cy="76200"/>
+          </a:xfrm>
+          <a:prstGeom xmlns:a="http://schemas.openxmlformats.org/drawingml/2006/main" prst="rect">
+            <a:avLst/>
+          </a:prstGeom>
+          <a:solidFill xmlns:a="http://schemas.openxmlformats.org/drawingml/2006/main">
+            <a:srgbClr val="3D8DFF"/>
+          </a:solidFill>
+          <a:ln xmlns:a="http://schemas.openxmlformats.org/drawingml/2006/main" w="0">
+            <a:solidFill>
+              <a:srgbClr val="3D8DFF"/>
+            </a:solidFill>
+            <a:prstDash val="solid"/>
+          </a:ln>
+        </p:spPr>
+      </p:sp>
+      <p:sp>
+        <p:nvSpPr>
+          <p:cNvPr id="4" name="">
+            <a:extLst xmlns:a="http://schemas.openxmlformats.org/drawingml/2006/main">
+              <a:ext uri="{FF2B5EF4-FFF2-40B4-BE49-F238E27FC236}">
+                <a16:creationId xmlns:a16="http://schemas.microsoft.com/office/drawing/2014/main" id="{8345830B-E6EE-4175-94D1-A484215C8069}"/>
+              </a:ext>
+            </a:extLst>
+          </p:cNvPr>
+          <p:cNvSpPr>
+            <a:spLocks xmlns:a="http://schemas.openxmlformats.org/drawingml/2006/main" noGrp="1"/>
+          </p:cNvSpPr>
+          <p:nvPr/>
+        </p:nvSpPr>
+        <p:spPr>
+          <a:xfrm xmlns:a="http://schemas.openxmlformats.org/drawingml/2006/main">
+            <a:off x="457200" y="4171950"/>
+            <a:ext cx="9239250" cy="685800"/>
+          </a:xfrm>
+          <a:prstGeom xmlns:a="http://schemas.openxmlformats.org/drawingml/2006/main" prst="rect">
+            <a:avLst/>
+          </a:prstGeom>
+          <a:noFill xmlns:a="http://schemas.openxmlformats.org/drawingml/2006/main"/>
+          <a:ln xmlns:a="http://schemas.openxmlformats.org/drawingml/2006/main" w="0">
+            <a:noFill/>
+            <a:prstDash val="solid"/>
+          </a:ln>
+        </p:spPr>
+        <p:txBody>
+          <a:bodyPr xmlns:a="http://schemas.openxmlformats.org/drawingml/2006/main" wrap="square" lIns="0" tIns="0" rIns="0" bIns="0" anchor="t">
+            <a:normAutofit fontScale="96563"/>
+          </a:bodyPr>
+          <a:lstStyle xmlns:a="http://schemas.openxmlformats.org/drawingml/2006/main"/>
+          <a:p xmlns:a="http://schemas.openxmlformats.org/drawingml/2006/main">
+            <a:pPr algn="l">
+              <a:buNone/>
+              <a:defRPr sz="2550" b="0">
+                <a:solidFill>
+                  <a:srgbClr val="273548"/>
+                </a:solidFill>
+                <a:latin typeface="Arial"/>
+                <a:ea typeface="Arial"/>
+                <a:cs typeface="Arial"/>
+              </a:defRPr>
+            </a:pPr>
+            <a:r>
+              <a:rPr sz="2550" b="0">
+                <a:solidFill>
+                  <a:srgbClr val="273548"/>
+                </a:solidFill>
+                <a:latin typeface="Arial"/>
+                <a:ea typeface="Arial"/>
+                <a:cs typeface="Arial"/>
+              </a:rPr>
+              <a:t>Use QQQ's accepted ATR% state at the same TSLA anchor close.</a:t>
+            </a:r>
+          </a:p>
+        </p:txBody>
+      </p:sp>
+      <p:sp>
+        <p:nvSpPr>
+          <p:cNvPr id="5" name="">
+            <a:extLst xmlns:a="http://schemas.openxmlformats.org/drawingml/2006/main">
+              <a:ext uri="{FF2B5EF4-FFF2-40B4-BE49-F238E27FC236}">
+                <a16:creationId xmlns:a16="http://schemas.microsoft.com/office/drawing/2014/main" id="{93B3AAD9-855C-47E7-9BA0-F94B71F3F42B}"/>
+              </a:ext>
+            </a:extLst>
+          </p:cNvPr>
+          <p:cNvSpPr>
+            <a:spLocks xmlns:a="http://schemas.openxmlformats.org/drawingml/2006/main" noGrp="1"/>
+          </p:cNvSpPr>
+          <p:nvPr/>
+        </p:nvSpPr>
+        <p:spPr>
+          <a:xfrm xmlns:a="http://schemas.openxmlformats.org/drawingml/2006/main">
+            <a:off x="457200" y="5429250"/>
+            <a:ext cx="10191750" cy="609600"/>
+          </a:xfrm>
+          <a:prstGeom xmlns:a="http://schemas.openxmlformats.org/drawingml/2006/main" prst="rect">
+            <a:avLst/>
+          </a:prstGeom>
+          <a:noFill xmlns:a="http://schemas.openxmlformats.org/drawingml/2006/main"/>
+          <a:ln xmlns:a="http://schemas.openxmlformats.org/drawingml/2006/main" w="0">
+            <a:noFill/>
+            <a:prstDash val="solid"/>
+          </a:ln>
+        </p:spPr>
+        <p:txBody>
+          <a:bodyPr xmlns:a="http://schemas.openxmlformats.org/drawingml/2006/main" wrap="square" lIns="0" tIns="0" rIns="0" bIns="0" anchor="t">
+            <a:normAutofit fontScale="100000"/>
+          </a:bodyPr>
+          <a:lstStyle xmlns:a="http://schemas.openxmlformats.org/drawingml/2006/main"/>
+          <a:p xmlns:a="http://schemas.openxmlformats.org/drawingml/2006/main">
+            <a:pPr algn="l">
+              <a:buNone/>
+              <a:defRPr sz="1650" b="0">
+                <a:solidFill>
+                  <a:srgbClr val="667384"/>
+                </a:solidFill>
+                <a:latin typeface="Arial"/>
+                <a:ea typeface="Arial"/>
+                <a:cs typeface="Arial"/>
+              </a:defRPr>
+            </a:pPr>
+            <a:r>
+              <a:rPr sz="1650" b="0">
+                <a:solidFill>
+                  <a:srgbClr val="667384"/>
+                </a:solidFill>
+                <a:latin typeface="Arial"/>
+                <a:ea typeface="Arial"/>
+                <a:cs typeface="Arial"/>
+              </a:rPr>
+              <a:t>TSLA, sample, return windows, and uncertainty stay fixed. QQQ is quasi-external; no threshold search.</a:t>
+            </a:r>
+          </a:p>
+        </p:txBody>
+      </p:sp>
+      <p:sp>
+        <p:nvSpPr>
+          <p:cNvPr id="6" name="">
+            <a:extLst xmlns:a="http://schemas.openxmlformats.org/drawingml/2006/main">
+              <a:ext uri="{FF2B5EF4-FFF2-40B4-BE49-F238E27FC236}">
+                <a16:creationId xmlns:a16="http://schemas.microsoft.com/office/drawing/2014/main" id="{C26E2559-6393-4E7F-A448-E0578397EEA2}"/>
+              </a:ext>
+            </a:extLst>
+          </p:cNvPr>
+          <p:cNvSpPr>
+            <a:spLocks xmlns:a="http://schemas.openxmlformats.org/drawingml/2006/main" noGrp="1"/>
+          </p:cNvSpPr>
+          <p:nvPr/>
+        </p:nvSpPr>
+        <p:spPr>
+          <a:xfrm xmlns:a="http://schemas.openxmlformats.org/drawingml/2006/main">
+            <a:off x="11239500" y="6496050"/>
+            <a:ext cx="495300" cy="190500"/>
+          </a:xfrm>
+          <a:prstGeom xmlns:a="http://schemas.openxmlformats.org/drawingml/2006/main" prst="rect">
+            <a:avLst/>
+          </a:prstGeom>
+          <a:noFill xmlns:a="http://schemas.openxmlformats.org/drawingml/2006/main"/>
+          <a:ln xmlns:a="http://schemas.openxmlformats.org/drawingml/2006/main" w="0">
+            <a:noFill/>
+            <a:prstDash val="solid"/>
+          </a:ln>
+        </p:spPr>
+        <p:txBody>
+          <a:bodyPr xmlns:a="http://schemas.openxmlformats.org/drawingml/2006/main" wrap="square" lIns="0" tIns="0" rIns="0" bIns="0" anchor="t">
+            <a:normAutofit fontScale="100000"/>
+          </a:bodyPr>
+          <a:lstStyle xmlns:a="http://schemas.openxmlformats.org/drawingml/2006/main"/>
+          <a:p xmlns:a="http://schemas.openxmlformats.org/drawingml/2006/main">
+            <a:pPr algn="r">
+              <a:buNone/>
+              <a:defRPr sz="1050" b="0">
+                <a:solidFill>
+                  <a:srgbClr val="667384"/>
+                </a:solidFill>
+                <a:latin typeface="Arial"/>
+                <a:ea typeface="Arial"/>
+                <a:cs typeface="Arial"/>
+              </a:defRPr>
+            </a:pPr>
+            <a:r>
+              <a:rPr sz="1050" b="0">
+                <a:solidFill>
+                  <a:srgbClr val="667384"/>
+                </a:solidFill>
+                <a:latin typeface="Arial"/>
+                <a:ea typeface="Arial"/>
+                <a:cs typeface="Arial"/>
+              </a:rPr>
+              <a:t>40</a:t>
+            </a:r>
+          </a:p>
+        </p:txBody>
+      </p:sp>
+    </p:spTree>
+    <p:extLst>
+      <p:ext uri="{BB962C8B-B14F-4D97-AF65-F5344CB8AC3E}">
+        <p14:creationId xmlns:p14="http://schemas.microsoft.com/office/powerpoint/2010/main" val="80248067"/>
+      </p:ext>
+    </p:extLst>
+  </p:cSld>
+</p:sld>
+</file>
+
+<file path=ppt/slides/slide41.xml><?xml version="1.0" encoding="utf-8"?>
+<p:sld xmlns:p="http://schemas.openxmlformats.org/presentationml/2006/main">
+  <p:cSld>
+    <p:bg>
+      <p:bgPr>
+        <a:solidFill xmlns:a="http://schemas.openxmlformats.org/drawingml/2006/main">
+          <a:srgbClr val="FFFFFF"/>
+        </a:solidFill>
+      </p:bgPr>
+    </p:bg>
+    <p:spTree>
+      <p:nvGrpSpPr>
+        <p:cNvPr id="1" name=""/>
+        <p:cNvGrpSpPr/>
+        <p:nvPr/>
+      </p:nvGrpSpPr>
+      <p:grpSpPr>
+        <a:xfrm xmlns:a="http://schemas.openxmlformats.org/drawingml/2006/main"/>
+      </p:grpSpPr>
+      <p:sp>
+        <p:nvSpPr>
+          <p:cNvPr id="30" name="section-3">
+            <a:extLst xmlns:a="http://schemas.openxmlformats.org/drawingml/2006/main">
+              <a:ext uri="{FF2B5EF4-FFF2-40B4-BE49-F238E27FC236}">
+                <a16:creationId xmlns:a16="http://schemas.microsoft.com/office/drawing/2014/main" id="{D21E8F50-BA1C-4536-B715-AAD5A74ED82B}"/>
+              </a:ext>
+            </a:extLst>
+          </p:cNvPr>
+          <p:cNvSpPr>
+            <a:spLocks xmlns:a="http://schemas.openxmlformats.org/drawingml/2006/main" noGrp="1"/>
+          </p:cNvSpPr>
+          <p:nvPr/>
+        </p:nvSpPr>
+        <p:spPr>
+          <a:xfrm xmlns:a="http://schemas.openxmlformats.org/drawingml/2006/main">
+            <a:off x="457200" y="228600"/>
+            <a:ext cx="4191000" cy="228600"/>
+          </a:xfrm>
+          <a:prstGeom xmlns:a="http://schemas.openxmlformats.org/drawingml/2006/main" prst="rect">
+            <a:avLst/>
+          </a:prstGeom>
+          <a:noFill xmlns:a="http://schemas.openxmlformats.org/drawingml/2006/main"/>
+          <a:ln xmlns:a="http://schemas.openxmlformats.org/drawingml/2006/main" w="0">
+            <a:noFill/>
+            <a:prstDash val="solid"/>
+          </a:ln>
+        </p:spPr>
+        <p:txBody>
+          <a:bodyPr xmlns:a="http://schemas.openxmlformats.org/drawingml/2006/main" wrap="square" lIns="0" tIns="0" rIns="0" bIns="0" anchor="t">
+            <a:normAutofit fontScale="100000"/>
+          </a:bodyPr>
+          <a:lstStyle xmlns:a="http://schemas.openxmlformats.org/drawingml/2006/main"/>
+          <a:p xmlns:a="http://schemas.openxmlformats.org/drawingml/2006/main">
+            <a:pPr algn="l">
+              <a:buNone/>
+              <a:defRPr sz="1200" b="1">
+                <a:solidFill>
+                  <a:srgbClr val="667384"/>
+                </a:solidFill>
+                <a:latin typeface="Arial"/>
+                <a:ea typeface="Arial"/>
+                <a:cs typeface="Arial"/>
+              </a:defRPr>
+            </a:pPr>
+            <a:r>
+              <a:rPr sz="1200" b="1">
+                <a:solidFill>
+                  <a:srgbClr val="667384"/>
+                </a:solidFill>
+                <a:latin typeface="Arial"/>
+                <a:ea typeface="Arial"/>
+                <a:cs typeface="Arial"/>
+              </a:rPr>
+              <a:t>TSLA DESCRIPTIVE MICROSCOPE</a:t>
+            </a:r>
+          </a:p>
+        </p:txBody>
+      </p:sp>
+      <p:sp>
+        <p:nvSpPr>
+          <p:cNvPr id="2" name="title-3">
+            <a:extLst xmlns:a="http://schemas.openxmlformats.org/drawingml/2006/main">
+              <a:ext uri="{FF2B5EF4-FFF2-40B4-BE49-F238E27FC236}">
+                <a16:creationId xmlns:a16="http://schemas.microsoft.com/office/drawing/2014/main" id="{622D00AB-54E7-40F8-BC73-9A3D2344F481}"/>
+              </a:ext>
+            </a:extLst>
+          </p:cNvPr>
+          <p:cNvSpPr>
+            <a:spLocks xmlns:a="http://schemas.openxmlformats.org/drawingml/2006/main" noGrp="1"/>
+          </p:cNvSpPr>
+          <p:nvPr/>
+        </p:nvSpPr>
+        <p:spPr>
+          <a:xfrm xmlns:a="http://schemas.openxmlformats.org/drawingml/2006/main">
+            <a:off x="457200" y="533400"/>
+            <a:ext cx="11277600" cy="628650"/>
+          </a:xfrm>
+          <a:prstGeom xmlns:a="http://schemas.openxmlformats.org/drawingml/2006/main" prst="rect">
+            <a:avLst/>
+          </a:prstGeom>
+          <a:noFill xmlns:a="http://schemas.openxmlformats.org/drawingml/2006/main"/>
+          <a:ln xmlns:a="http://schemas.openxmlformats.org/drawingml/2006/main" w="0">
+            <a:noFill/>
+            <a:prstDash val="solid"/>
+          </a:ln>
+        </p:spPr>
+        <p:txBody>
+          <a:bodyPr xmlns:a="http://schemas.openxmlformats.org/drawingml/2006/main" wrap="square" lIns="0" tIns="0" rIns="0" bIns="0" anchor="t">
+            <a:normAutofit fontScale="100000"/>
+          </a:bodyPr>
+          <a:lstStyle xmlns:a="http://schemas.openxmlformats.org/drawingml/2006/main"/>
+          <a:p xmlns:a="http://schemas.openxmlformats.org/drawingml/2006/main">
+            <a:pPr algn="l">
+              <a:buNone/>
+              <a:defRPr sz="3525" b="1">
+                <a:solidFill>
+                  <a:srgbClr val="000000"/>
+                </a:solidFill>
+                <a:latin typeface="Arial"/>
+                <a:ea typeface="Arial"/>
+                <a:cs typeface="Arial"/>
+              </a:defRPr>
+            </a:pPr>
+            <a:r>
+              <a:rPr sz="3525" b="1">
+                <a:solidFill>
+                  <a:srgbClr val="000000"/>
+                </a:solidFill>
+                <a:latin typeface="Arial"/>
+                <a:ea typeface="Arial"/>
+                <a:cs typeface="Arial"/>
+              </a:rPr>
+              <a:t>Condition on QQQ ATR% to read TSLA's future</a:t>
+            </a:r>
+          </a:p>
+        </p:txBody>
+      </p:sp>
+      <p:sp>
+        <p:nvSpPr>
+          <p:cNvPr id="3" name="">
+            <a:extLst xmlns:a="http://schemas.openxmlformats.org/drawingml/2006/main">
+              <a:ext uri="{FF2B5EF4-FFF2-40B4-BE49-F238E27FC236}">
+                <a16:creationId xmlns:a16="http://schemas.microsoft.com/office/drawing/2014/main" id="{C3977435-894D-461F-A4F7-CD91DF8A8A55}"/>
+              </a:ext>
+            </a:extLst>
+          </p:cNvPr>
+          <p:cNvSpPr>
+            <a:spLocks xmlns:a="http://schemas.openxmlformats.org/drawingml/2006/main" noGrp="1"/>
+          </p:cNvSpPr>
+          <p:nvPr/>
+        </p:nvSpPr>
+        <p:spPr>
+          <a:xfrm xmlns:a="http://schemas.openxmlformats.org/drawingml/2006/main">
+            <a:off x="457200" y="1200150"/>
+            <a:ext cx="11277600" cy="19050"/>
+          </a:xfrm>
+          <a:prstGeom xmlns:a="http://schemas.openxmlformats.org/drawingml/2006/main" prst="rect">
+            <a:avLst/>
+          </a:prstGeom>
+          <a:solidFill xmlns:a="http://schemas.openxmlformats.org/drawingml/2006/main">
+            <a:srgbClr val="B8BCC4"/>
+          </a:solidFill>
+          <a:ln xmlns:a="http://schemas.openxmlformats.org/drawingml/2006/main" w="0">
+            <a:solidFill>
+              <a:srgbClr val="B8BCC4"/>
+            </a:solidFill>
+            <a:prstDash val="solid"/>
+          </a:ln>
+        </p:spPr>
+      </p:sp>
+      <p:sp>
+        <p:nvSpPr>
+          <p:cNvPr id="4" name="footer-left-3">
+            <a:extLst xmlns:a="http://schemas.openxmlformats.org/drawingml/2006/main">
+              <a:ext uri="{FF2B5EF4-FFF2-40B4-BE49-F238E27FC236}">
+                <a16:creationId xmlns:a16="http://schemas.microsoft.com/office/drawing/2014/main" id="{FC53CCFE-82C8-49A0-BC48-206B3BC8CC1B}"/>
+              </a:ext>
+            </a:extLst>
+          </p:cNvPr>
+          <p:cNvSpPr>
+            <a:spLocks xmlns:a="http://schemas.openxmlformats.org/drawingml/2006/main" noGrp="1"/>
+          </p:cNvSpPr>
+          <p:nvPr/>
+        </p:nvSpPr>
+        <p:spPr>
+          <a:xfrm xmlns:a="http://schemas.openxmlformats.org/drawingml/2006/main">
+            <a:off x="457200" y="6515100"/>
+            <a:ext cx="3429000" cy="171450"/>
+          </a:xfrm>
+          <a:prstGeom xmlns:a="http://schemas.openxmlformats.org/drawingml/2006/main" prst="rect">
+            <a:avLst/>
+          </a:prstGeom>
+          <a:noFill xmlns:a="http://schemas.openxmlformats.org/drawingml/2006/main"/>
+          <a:ln xmlns:a="http://schemas.openxmlformats.org/drawingml/2006/main" w="0">
+            <a:noFill/>
+            <a:prstDash val="solid"/>
+          </a:ln>
+        </p:spPr>
+        <p:txBody>
+          <a:bodyPr xmlns:a="http://schemas.openxmlformats.org/drawingml/2006/main" wrap="square" lIns="0" tIns="0" rIns="0" bIns="0" anchor="t">
+            <a:normAutofit fontScale="100000"/>
+          </a:bodyPr>
+          <a:lstStyle xmlns:a="http://schemas.openxmlformats.org/drawingml/2006/main"/>
+          <a:p xmlns:a="http://schemas.openxmlformats.org/drawingml/2006/main">
+            <a:pPr algn="l">
+              <a:buNone/>
+              <a:defRPr sz="1050" b="0">
+                <a:solidFill>
+                  <a:srgbClr val="667384"/>
+                </a:solidFill>
+                <a:latin typeface="Arial"/>
+                <a:ea typeface="Arial"/>
+                <a:cs typeface="Arial"/>
+              </a:defRPr>
+            </a:pPr>
+            <a:r>
+              <a:rPr sz="1050" b="0">
+                <a:solidFill>
+                  <a:srgbClr val="667384"/>
+                </a:solidFill>
+                <a:latin typeface="Arial"/>
+                <a:ea typeface="Arial"/>
+                <a:cs typeface="Arial"/>
+              </a:rPr>
+              <a:t>Adjusted daily TSLA | 2018-2023</a:t>
+            </a:r>
+          </a:p>
+        </p:txBody>
+      </p:sp>
+      <p:sp>
+        <p:nvSpPr>
+          <p:cNvPr id="5" name="footer-number-3">
+            <a:extLst xmlns:a="http://schemas.openxmlformats.org/drawingml/2006/main">
+              <a:ext uri="{FF2B5EF4-FFF2-40B4-BE49-F238E27FC236}">
+                <a16:creationId xmlns:a16="http://schemas.microsoft.com/office/drawing/2014/main" id="{B9F045FD-2505-4635-89F0-EDCD31EF4080}"/>
+              </a:ext>
+            </a:extLst>
+          </p:cNvPr>
+          <p:cNvSpPr>
+            <a:spLocks xmlns:a="http://schemas.openxmlformats.org/drawingml/2006/main" noGrp="1"/>
+          </p:cNvSpPr>
+          <p:nvPr/>
+        </p:nvSpPr>
+        <p:spPr>
+          <a:xfrm xmlns:a="http://schemas.openxmlformats.org/drawingml/2006/main">
+            <a:off x="11239500" y="6496050"/>
+            <a:ext cx="495300" cy="190500"/>
+          </a:xfrm>
+          <a:prstGeom xmlns:a="http://schemas.openxmlformats.org/drawingml/2006/main" prst="rect">
+            <a:avLst/>
+          </a:prstGeom>
+          <a:noFill xmlns:a="http://schemas.openxmlformats.org/drawingml/2006/main"/>
+          <a:ln xmlns:a="http://schemas.openxmlformats.org/drawingml/2006/main" w="0">
+            <a:noFill/>
+            <a:prstDash val="solid"/>
+          </a:ln>
+        </p:spPr>
+        <p:txBody>
+          <a:bodyPr xmlns:a="http://schemas.openxmlformats.org/drawingml/2006/main" wrap="square" lIns="0" tIns="0" rIns="0" bIns="0" anchor="t">
+            <a:normAutofit fontScale="100000"/>
+          </a:bodyPr>
+          <a:lstStyle xmlns:a="http://schemas.openxmlformats.org/drawingml/2006/main"/>
+          <a:p xmlns:a="http://schemas.openxmlformats.org/drawingml/2006/main">
+            <a:pPr algn="r">
+              <a:buNone/>
+              <a:defRPr sz="1050" b="0">
+                <a:solidFill>
+                  <a:srgbClr val="667384"/>
+                </a:solidFill>
+                <a:latin typeface="Arial"/>
+                <a:ea typeface="Arial"/>
+                <a:cs typeface="Arial"/>
+              </a:defRPr>
+            </a:pPr>
+            <a:r>
+              <a:rPr sz="1050" b="0">
+                <a:solidFill>
+                  <a:srgbClr val="667384"/>
+                </a:solidFill>
+                <a:latin typeface="Arial"/>
+                <a:ea typeface="Arial"/>
+                <a:cs typeface="Arial"/>
+              </a:rPr>
+              <a:t>41</a:t>
+            </a:r>
+          </a:p>
+        </p:txBody>
+      </p:sp>
+      <p:sp>
+        <p:nvSpPr>
+          <p:cNvPr id="6" name="">
+            <a:extLst xmlns:a="http://schemas.openxmlformats.org/drawingml/2006/main">
+              <a:ext uri="{FF2B5EF4-FFF2-40B4-BE49-F238E27FC236}">
+                <a16:creationId xmlns:a16="http://schemas.microsoft.com/office/drawing/2014/main" id="{551133C9-969B-4370-A80C-D9B73CA522F0}"/>
+              </a:ext>
+            </a:extLst>
+          </p:cNvPr>
+          <p:cNvSpPr>
+            <a:spLocks xmlns:a="http://schemas.openxmlformats.org/drawingml/2006/main" noGrp="1"/>
+          </p:cNvSpPr>
+          <p:nvPr/>
+        </p:nvSpPr>
+        <p:spPr>
+          <a:xfrm xmlns:a="http://schemas.openxmlformats.org/drawingml/2006/main">
+            <a:off x="628650" y="1752600"/>
+            <a:ext cx="5429250" cy="762000"/>
+          </a:xfrm>
+          <a:prstGeom xmlns:a="http://schemas.openxmlformats.org/drawingml/2006/main" prst="rect">
+            <a:avLst/>
+          </a:prstGeom>
+          <a:noFill xmlns:a="http://schemas.openxmlformats.org/drawingml/2006/main"/>
+          <a:ln xmlns:a="http://schemas.openxmlformats.org/drawingml/2006/main" w="0">
+            <a:noFill/>
+            <a:prstDash val="solid"/>
+          </a:ln>
+        </p:spPr>
+        <p:txBody>
+          <a:bodyPr xmlns:a="http://schemas.openxmlformats.org/drawingml/2006/main" wrap="square" lIns="0" tIns="0" rIns="0" bIns="0" anchor="t">
+            <a:normAutofit fontScale="100000"/>
+          </a:bodyPr>
+          <a:lstStyle xmlns:a="http://schemas.openxmlformats.org/drawingml/2006/main"/>
+          <a:p xmlns:a="http://schemas.openxmlformats.org/drawingml/2006/main">
+            <a:pPr algn="l">
+              <a:buNone/>
+              <a:defRPr sz="3300" b="1">
+                <a:solidFill>
+                  <a:srgbClr val="3D8DFF"/>
+                </a:solidFill>
+                <a:latin typeface="Arial"/>
+                <a:ea typeface="Arial"/>
+                <a:cs typeface="Arial"/>
+              </a:defRPr>
+            </a:pPr>
+            <a:r>
+              <a:rPr sz="3300" b="1">
+                <a:solidFill>
+                  <a:srgbClr val="3D8DFF"/>
+                </a:solidFill>
+                <a:latin typeface="Arial"/>
+                <a:ea typeface="Arial"/>
+                <a:cs typeface="Arial"/>
+              </a:rPr>
+              <a:t>QQQ state  →  TSLA future</a:t>
+            </a:r>
+          </a:p>
+        </p:txBody>
+      </p:sp>
+      <p:sp>
+        <p:nvSpPr>
+          <p:cNvPr id="7" name="">
+            <a:extLst xmlns:a="http://schemas.openxmlformats.org/drawingml/2006/main">
+              <a:ext uri="{FF2B5EF4-FFF2-40B4-BE49-F238E27FC236}">
+                <a16:creationId xmlns:a16="http://schemas.microsoft.com/office/drawing/2014/main" id="{82D8EB97-B391-424E-82EB-0DEEC881C286}"/>
+              </a:ext>
+            </a:extLst>
+          </p:cNvPr>
+          <p:cNvSpPr>
+            <a:spLocks xmlns:a="http://schemas.openxmlformats.org/drawingml/2006/main" noGrp="1"/>
+          </p:cNvSpPr>
+          <p:nvPr/>
+        </p:nvSpPr>
+        <p:spPr>
+          <a:xfrm xmlns:a="http://schemas.openxmlformats.org/drawingml/2006/main">
+            <a:off x="628650" y="2724150"/>
+            <a:ext cx="5048250" cy="990600"/>
+          </a:xfrm>
+          <a:prstGeom xmlns:a="http://schemas.openxmlformats.org/drawingml/2006/main" prst="rect">
+            <a:avLst/>
+          </a:prstGeom>
+          <a:noFill xmlns:a="http://schemas.openxmlformats.org/drawingml/2006/main"/>
+          <a:ln xmlns:a="http://schemas.openxmlformats.org/drawingml/2006/main" w="0">
+            <a:noFill/>
+            <a:prstDash val="solid"/>
+          </a:ln>
+        </p:spPr>
+        <p:txBody>
+          <a:bodyPr xmlns:a="http://schemas.openxmlformats.org/drawingml/2006/main" wrap="square" lIns="0" tIns="0" rIns="0" bIns="0" anchor="t">
+            <a:normAutofit fontScale="100000"/>
+          </a:bodyPr>
+          <a:lstStyle xmlns:a="http://schemas.openxmlformats.org/drawingml/2006/main"/>
+          <a:p xmlns:a="http://schemas.openxmlformats.org/drawingml/2006/main">
+            <a:pPr algn="l">
+              <a:buNone/>
+              <a:defRPr sz="1875" b="0">
+                <a:solidFill>
+                  <a:srgbClr val="273548"/>
+                </a:solidFill>
+                <a:latin typeface="Arial"/>
+                <a:ea typeface="Arial"/>
+                <a:cs typeface="Arial"/>
+              </a:defRPr>
+            </a:pPr>
+            <a:r>
+              <a:rPr sz="1875" b="0">
+                <a:solidFill>
+                  <a:srgbClr val="273548"/>
+                </a:solidFill>
+                <a:latin typeface="Arial"/>
+                <a:ea typeface="Arial"/>
+                <a:cs typeface="Arial"/>
+              </a:rPr>
+              <a:t>QQQ labels anchor close t. TSLA prior return ends at t; TSLA following return begins after t.</a:t>
+            </a:r>
+          </a:p>
+        </p:txBody>
+      </p:sp>
+      <p:sp>
+        <p:nvSpPr>
+          <p:cNvPr id="8" name="">
+            <a:extLst xmlns:a="http://schemas.openxmlformats.org/drawingml/2006/main">
+              <a:ext uri="{FF2B5EF4-FFF2-40B4-BE49-F238E27FC236}">
+                <a16:creationId xmlns:a16="http://schemas.microsoft.com/office/drawing/2014/main" id="{8FD10794-EB76-4BB0-B74E-31375B660ECD}"/>
+              </a:ext>
+            </a:extLst>
+          </p:cNvPr>
+          <p:cNvSpPr>
+            <a:spLocks xmlns:a="http://schemas.openxmlformats.org/drawingml/2006/main" noGrp="1"/>
+          </p:cNvSpPr>
+          <p:nvPr/>
+        </p:nvSpPr>
+        <p:spPr>
+          <a:xfrm xmlns:a="http://schemas.openxmlformats.org/drawingml/2006/main">
+            <a:off x="628650" y="4095750"/>
+            <a:ext cx="4953000" cy="1695450"/>
+          </a:xfrm>
+          <a:prstGeom xmlns:a="http://schemas.openxmlformats.org/drawingml/2006/main" prst="rect">
+            <a:avLst/>
+          </a:prstGeom>
+          <a:solidFill xmlns:a="http://schemas.openxmlformats.org/drawingml/2006/main">
+            <a:srgbClr val="EDEDED"/>
+          </a:solidFill>
+          <a:ln xmlns:a="http://schemas.openxmlformats.org/drawingml/2006/main" w="0">
+            <a:solidFill>
+              <a:srgbClr val="EDEDED"/>
+            </a:solidFill>
+            <a:prstDash val="solid"/>
+          </a:ln>
+        </p:spPr>
+      </p:sp>
+      <p:sp>
+        <p:nvSpPr>
+          <p:cNvPr id="9" name="">
+            <a:extLst xmlns:a="http://schemas.openxmlformats.org/drawingml/2006/main">
+              <a:ext uri="{FF2B5EF4-FFF2-40B4-BE49-F238E27FC236}">
+                <a16:creationId xmlns:a16="http://schemas.microsoft.com/office/drawing/2014/main" id="{E8834C39-6D46-429B-A2ED-F97A068A843A}"/>
+              </a:ext>
+            </a:extLst>
+          </p:cNvPr>
+          <p:cNvSpPr>
+            <a:spLocks xmlns:a="http://schemas.openxmlformats.org/drawingml/2006/main" noGrp="1"/>
+          </p:cNvSpPr>
+          <p:nvPr/>
+        </p:nvSpPr>
+        <p:spPr>
+          <a:xfrm xmlns:a="http://schemas.openxmlformats.org/drawingml/2006/main">
+            <a:off x="628650" y="4095750"/>
+            <a:ext cx="76200" cy="1695450"/>
+          </a:xfrm>
+          <a:prstGeom xmlns:a="http://schemas.openxmlformats.org/drawingml/2006/main" prst="rect">
+            <a:avLst/>
+          </a:prstGeom>
+          <a:solidFill xmlns:a="http://schemas.openxmlformats.org/drawingml/2006/main">
+            <a:srgbClr val="3D8DFF"/>
+          </a:solidFill>
+          <a:ln xmlns:a="http://schemas.openxmlformats.org/drawingml/2006/main" w="0">
+            <a:solidFill>
+              <a:srgbClr val="3D8DFF"/>
+            </a:solidFill>
+            <a:prstDash val="solid"/>
+          </a:ln>
+        </p:spPr>
+      </p:sp>
+      <p:sp>
+        <p:nvSpPr>
+          <p:cNvPr id="10" name="">
+            <a:extLst xmlns:a="http://schemas.openxmlformats.org/drawingml/2006/main">
+              <a:ext uri="{FF2B5EF4-FFF2-40B4-BE49-F238E27FC236}">
+                <a16:creationId xmlns:a16="http://schemas.microsoft.com/office/drawing/2014/main" id="{743D83BD-5D8C-4BCB-B02F-81EB74163C70}"/>
+              </a:ext>
+            </a:extLst>
+          </p:cNvPr>
+          <p:cNvSpPr>
+            <a:spLocks xmlns:a="http://schemas.openxmlformats.org/drawingml/2006/main" noGrp="1"/>
+          </p:cNvSpPr>
+          <p:nvPr/>
+        </p:nvSpPr>
+        <p:spPr>
+          <a:xfrm xmlns:a="http://schemas.openxmlformats.org/drawingml/2006/main">
+            <a:off x="895350" y="4267200"/>
+            <a:ext cx="4495800" cy="590550"/>
+          </a:xfrm>
+          <a:prstGeom xmlns:a="http://schemas.openxmlformats.org/drawingml/2006/main" prst="rect">
+            <a:avLst/>
+          </a:prstGeom>
+          <a:noFill xmlns:a="http://schemas.openxmlformats.org/drawingml/2006/main"/>
+          <a:ln xmlns:a="http://schemas.openxmlformats.org/drawingml/2006/main" w="0">
+            <a:noFill/>
+            <a:prstDash val="solid"/>
+          </a:ln>
+        </p:spPr>
+        <p:txBody>
+          <a:bodyPr xmlns:a="http://schemas.openxmlformats.org/drawingml/2006/main" wrap="square" lIns="0" tIns="0" rIns="0" bIns="0" anchor="t">
+            <a:normAutofit fontScale="100000"/>
+          </a:bodyPr>
+          <a:lstStyle xmlns:a="http://schemas.openxmlformats.org/drawingml/2006/main"/>
+          <a:p xmlns:a="http://schemas.openxmlformats.org/drawingml/2006/main">
+            <a:pPr algn="l">
+              <a:buNone/>
+              <a:defRPr sz="3225" b="1">
+                <a:solidFill>
+                  <a:srgbClr val="3D8DFF"/>
+                </a:solidFill>
+                <a:latin typeface="Arial"/>
+                <a:ea typeface="Arial"/>
+                <a:cs typeface="Arial"/>
+              </a:defRPr>
+            </a:pPr>
+            <a:r>
+              <a:rPr sz="3225" b="1">
+                <a:solidFill>
+                  <a:srgbClr val="3D8DFF"/>
+                </a:solidFill>
+                <a:latin typeface="Arial"/>
+                <a:ea typeface="Arial"/>
+                <a:cs typeface="Arial"/>
+              </a:rPr>
+              <a:t>3</a:t>
+            </a:r>
+          </a:p>
+        </p:txBody>
+      </p:sp>
+      <p:sp>
+        <p:nvSpPr>
+          <p:cNvPr id="11" name="">
+            <a:extLst xmlns:a="http://schemas.openxmlformats.org/drawingml/2006/main">
+              <a:ext uri="{FF2B5EF4-FFF2-40B4-BE49-F238E27FC236}">
+                <a16:creationId xmlns:a16="http://schemas.microsoft.com/office/drawing/2014/main" id="{ED88569D-B256-4A8E-9334-C068F39865EA}"/>
+              </a:ext>
+            </a:extLst>
+          </p:cNvPr>
+          <p:cNvSpPr>
+            <a:spLocks xmlns:a="http://schemas.openxmlformats.org/drawingml/2006/main" noGrp="1"/>
+          </p:cNvSpPr>
+          <p:nvPr/>
+        </p:nvSpPr>
+        <p:spPr>
+          <a:xfrm xmlns:a="http://schemas.openxmlformats.org/drawingml/2006/main">
+            <a:off x="895350" y="4933950"/>
+            <a:ext cx="4495800" cy="704850"/>
+          </a:xfrm>
+          <a:prstGeom xmlns:a="http://schemas.openxmlformats.org/drawingml/2006/main" prst="rect">
+            <a:avLst/>
+          </a:prstGeom>
+          <a:noFill xmlns:a="http://schemas.openxmlformats.org/drawingml/2006/main"/>
+          <a:ln xmlns:a="http://schemas.openxmlformats.org/drawingml/2006/main" w="0">
+            <a:noFill/>
+            <a:prstDash val="solid"/>
+          </a:ln>
+        </p:spPr>
+        <p:txBody>
+          <a:bodyPr xmlns:a="http://schemas.openxmlformats.org/drawingml/2006/main" wrap="square" lIns="0" tIns="0" rIns="0" bIns="0" anchor="t">
+            <a:normAutofit fontScale="100000"/>
+          </a:bodyPr>
+          <a:lstStyle xmlns:a="http://schemas.openxmlformats.org/drawingml/2006/main"/>
+          <a:p xmlns:a="http://schemas.openxmlformats.org/drawingml/2006/main">
+            <a:pPr algn="l">
+              <a:buNone/>
+              <a:defRPr sz="1350" b="0">
+                <a:solidFill>
+                  <a:srgbClr val="273548"/>
+                </a:solidFill>
+                <a:latin typeface="Arial"/>
+                <a:ea typeface="Arial"/>
+                <a:cs typeface="Arial"/>
+              </a:defRPr>
+            </a:pPr>
+            <a:r>
+              <a:rPr sz="1350" b="0">
+                <a:solidFill>
+                  <a:srgbClr val="273548"/>
+                </a:solidFill>
+                <a:latin typeface="Arial"/>
+                <a:ea typeface="Arial"/>
+                <a:cs typeface="Arial"/>
+              </a:rPr>
+              <a:t>accepted external states</a:t>
+            </a:r>
+          </a:p>
+        </p:txBody>
+      </p:sp>
+      <p:sp>
+        <p:nvSpPr>
+          <p:cNvPr id="12" name="">
+            <a:extLst xmlns:a="http://schemas.openxmlformats.org/drawingml/2006/main">
+              <a:ext uri="{FF2B5EF4-FFF2-40B4-BE49-F238E27FC236}">
+                <a16:creationId xmlns:a16="http://schemas.microsoft.com/office/drawing/2014/main" id="{1139CAED-155E-4498-A477-F11A6F4A02F8}"/>
+              </a:ext>
+            </a:extLst>
+          </p:cNvPr>
+          <p:cNvSpPr>
+            <a:spLocks xmlns:a="http://schemas.openxmlformats.org/drawingml/2006/main" noGrp="1"/>
+          </p:cNvSpPr>
+          <p:nvPr/>
+        </p:nvSpPr>
+        <p:spPr>
+          <a:xfrm xmlns:a="http://schemas.openxmlformats.org/drawingml/2006/main">
+            <a:off x="6667500" y="1676400"/>
+            <a:ext cx="4191000" cy="400050"/>
+          </a:xfrm>
+          <a:prstGeom xmlns:a="http://schemas.openxmlformats.org/drawingml/2006/main" prst="rect">
+            <a:avLst/>
+          </a:prstGeom>
+          <a:noFill xmlns:a="http://schemas.openxmlformats.org/drawingml/2006/main"/>
+          <a:ln xmlns:a="http://schemas.openxmlformats.org/drawingml/2006/main" w="0">
+            <a:noFill/>
+            <a:prstDash val="solid"/>
+          </a:ln>
+        </p:spPr>
+        <p:txBody>
+          <a:bodyPr xmlns:a="http://schemas.openxmlformats.org/drawingml/2006/main" wrap="square" lIns="0" tIns="0" rIns="0" bIns="0" anchor="t">
+            <a:normAutofit fontScale="100000"/>
+          </a:bodyPr>
+          <a:lstStyle xmlns:a="http://schemas.openxmlformats.org/drawingml/2006/main"/>
+          <a:p xmlns:a="http://schemas.openxmlformats.org/drawingml/2006/main">
+            <a:pPr algn="l">
+              <a:buNone/>
+              <a:defRPr sz="2250" b="1">
+                <a:solidFill>
+                  <a:srgbClr val="000000"/>
+                </a:solidFill>
+                <a:latin typeface="Arial"/>
+                <a:ea typeface="Arial"/>
+                <a:cs typeface="Arial"/>
+              </a:defRPr>
+            </a:pPr>
+            <a:r>
+              <a:rPr sz="2250" b="1">
+                <a:solidFill>
+                  <a:srgbClr val="000000"/>
+                </a:solidFill>
+                <a:latin typeface="Arial"/>
+                <a:ea typeface="Arial"/>
+                <a:cs typeface="Arial"/>
+              </a:rPr>
+              <a:t>Fixed conditioning</a:t>
+            </a:r>
+          </a:p>
+        </p:txBody>
+      </p:sp>
+      <p:sp>
+        <p:nvSpPr>
+          <p:cNvPr id="13" name="">
+            <a:extLst xmlns:a="http://schemas.openxmlformats.org/drawingml/2006/main">
+              <a:ext uri="{FF2B5EF4-FFF2-40B4-BE49-F238E27FC236}">
+                <a16:creationId xmlns:a16="http://schemas.microsoft.com/office/drawing/2014/main" id="{09D8E2E5-6744-4962-977E-E85B48910BDF}"/>
+              </a:ext>
+            </a:extLst>
+          </p:cNvPr>
+          <p:cNvSpPr>
+            <a:spLocks xmlns:a="http://schemas.openxmlformats.org/drawingml/2006/main" noGrp="1"/>
+          </p:cNvSpPr>
+          <p:nvPr/>
+        </p:nvSpPr>
+        <p:spPr>
+          <a:xfrm xmlns:a="http://schemas.openxmlformats.org/drawingml/2006/main">
+            <a:off x="6667500" y="2286000"/>
+            <a:ext cx="1809750" cy="323850"/>
+          </a:xfrm>
+          <a:prstGeom xmlns:a="http://schemas.openxmlformats.org/drawingml/2006/main" prst="rect">
+            <a:avLst/>
+          </a:prstGeom>
+          <a:noFill xmlns:a="http://schemas.openxmlformats.org/drawingml/2006/main"/>
+          <a:ln xmlns:a="http://schemas.openxmlformats.org/drawingml/2006/main" w="0">
+            <a:noFill/>
+            <a:prstDash val="solid"/>
+          </a:ln>
+        </p:spPr>
+        <p:txBody>
+          <a:bodyPr xmlns:a="http://schemas.openxmlformats.org/drawingml/2006/main" wrap="square" lIns="0" tIns="0" rIns="0" bIns="0" anchor="t">
+            <a:normAutofit fontScale="100000"/>
+          </a:bodyPr>
+          <a:lstStyle xmlns:a="http://schemas.openxmlformats.org/drawingml/2006/main"/>
+          <a:p xmlns:a="http://schemas.openxmlformats.org/drawingml/2006/main">
+            <a:pPr algn="l">
+              <a:buNone/>
+              <a:defRPr sz="1500" b="1">
+                <a:solidFill>
+                  <a:srgbClr val="667384"/>
+                </a:solidFill>
+                <a:latin typeface="Arial"/>
+                <a:ea typeface="Arial"/>
+                <a:cs typeface="Arial"/>
+              </a:defRPr>
+            </a:pPr>
+            <a:r>
+              <a:rPr sz="1500" b="1">
+                <a:solidFill>
+                  <a:srgbClr val="667384"/>
+                </a:solidFill>
+                <a:latin typeface="Arial"/>
+                <a:ea typeface="Arial"/>
+                <a:cs typeface="Arial"/>
+              </a:rPr>
+              <a:t>Metric</a:t>
+            </a:r>
+          </a:p>
+        </p:txBody>
+      </p:sp>
+      <p:sp>
+        <p:nvSpPr>
+          <p:cNvPr id="14" name="">
+            <a:extLst xmlns:a="http://schemas.openxmlformats.org/drawingml/2006/main">
+              <a:ext uri="{FF2B5EF4-FFF2-40B4-BE49-F238E27FC236}">
+                <a16:creationId xmlns:a16="http://schemas.microsoft.com/office/drawing/2014/main" id="{60FD2958-8D30-49E2-9398-075A839B2785}"/>
+              </a:ext>
+            </a:extLst>
+          </p:cNvPr>
+          <p:cNvSpPr>
+            <a:spLocks xmlns:a="http://schemas.openxmlformats.org/drawingml/2006/main" noGrp="1"/>
+          </p:cNvSpPr>
+          <p:nvPr/>
+        </p:nvSpPr>
+        <p:spPr>
+          <a:xfrm xmlns:a="http://schemas.openxmlformats.org/drawingml/2006/main">
+            <a:off x="8572500" y="2286000"/>
+            <a:ext cx="2952750" cy="419100"/>
+          </a:xfrm>
+          <a:prstGeom xmlns:a="http://schemas.openxmlformats.org/drawingml/2006/main" prst="rect">
+            <a:avLst/>
+          </a:prstGeom>
+          <a:noFill xmlns:a="http://schemas.openxmlformats.org/drawingml/2006/main"/>
+          <a:ln xmlns:a="http://schemas.openxmlformats.org/drawingml/2006/main" w="0">
+            <a:noFill/>
+            <a:prstDash val="solid"/>
+          </a:ln>
+        </p:spPr>
+        <p:txBody>
+          <a:bodyPr xmlns:a="http://schemas.openxmlformats.org/drawingml/2006/main" wrap="square" lIns="0" tIns="0" rIns="0" bIns="0" anchor="t">
+            <a:normAutofit fontScale="100000"/>
+          </a:bodyPr>
+          <a:lstStyle xmlns:a="http://schemas.openxmlformats.org/drawingml/2006/main"/>
+          <a:p xmlns:a="http://schemas.openxmlformats.org/drawingml/2006/main">
+            <a:pPr algn="l">
+              <a:buNone/>
+              <a:defRPr sz="1500" b="0">
+                <a:solidFill>
+                  <a:srgbClr val="273548"/>
+                </a:solidFill>
+                <a:latin typeface="Arial"/>
+                <a:ea typeface="Arial"/>
+                <a:cs typeface="Arial"/>
+              </a:defRPr>
+            </a:pPr>
+            <a:r>
+              <a:rPr sz="1500" b="0">
+                <a:solidFill>
+                  <a:srgbClr val="273548"/>
+                </a:solidFill>
+                <a:latin typeface="Arial"/>
+                <a:ea typeface="Arial"/>
+                <a:cs typeface="Arial"/>
+              </a:rPr>
+              <a:t>Wilder ATR14 / QQQ close</a:t>
+            </a:r>
+          </a:p>
+        </p:txBody>
+      </p:sp>
+      <p:sp>
+        <p:nvSpPr>
+          <p:cNvPr id="15" name="">
+            <a:extLst xmlns:a="http://schemas.openxmlformats.org/drawingml/2006/main">
+              <a:ext uri="{FF2B5EF4-FFF2-40B4-BE49-F238E27FC236}">
+                <a16:creationId xmlns:a16="http://schemas.microsoft.com/office/drawing/2014/main" id="{B5F0B4C3-3792-489F-A37E-FD53597FE449}"/>
+              </a:ext>
+            </a:extLst>
+          </p:cNvPr>
+          <p:cNvSpPr>
+            <a:spLocks xmlns:a="http://schemas.openxmlformats.org/drawingml/2006/main" noGrp="1"/>
+          </p:cNvSpPr>
+          <p:nvPr/>
+        </p:nvSpPr>
+        <p:spPr>
+          <a:xfrm xmlns:a="http://schemas.openxmlformats.org/drawingml/2006/main">
+            <a:off x="6667500" y="2743200"/>
+            <a:ext cx="4857750" cy="9525"/>
+          </a:xfrm>
+          <a:prstGeom xmlns:a="http://schemas.openxmlformats.org/drawingml/2006/main" prst="rect">
+            <a:avLst/>
+          </a:prstGeom>
+          <a:solidFill xmlns:a="http://schemas.openxmlformats.org/drawingml/2006/main">
+            <a:srgbClr val="B8BCC4"/>
+          </a:solidFill>
+          <a:ln xmlns:a="http://schemas.openxmlformats.org/drawingml/2006/main" w="0">
+            <a:solidFill>
+              <a:srgbClr val="B8BCC4"/>
+            </a:solidFill>
+            <a:prstDash val="solid"/>
+          </a:ln>
+        </p:spPr>
+      </p:sp>
+      <p:sp>
+        <p:nvSpPr>
+          <p:cNvPr id="16" name="">
+            <a:extLst xmlns:a="http://schemas.openxmlformats.org/drawingml/2006/main">
+              <a:ext uri="{FF2B5EF4-FFF2-40B4-BE49-F238E27FC236}">
+                <a16:creationId xmlns:a16="http://schemas.microsoft.com/office/drawing/2014/main" id="{1F168646-6439-4EB2-88F0-0C08EDC14E3F}"/>
+              </a:ext>
+            </a:extLst>
+          </p:cNvPr>
+          <p:cNvSpPr>
+            <a:spLocks xmlns:a="http://schemas.openxmlformats.org/drawingml/2006/main" noGrp="1"/>
+          </p:cNvSpPr>
+          <p:nvPr/>
+        </p:nvSpPr>
+        <p:spPr>
+          <a:xfrm xmlns:a="http://schemas.openxmlformats.org/drawingml/2006/main">
+            <a:off x="6667500" y="2876550"/>
+            <a:ext cx="1809750" cy="323850"/>
+          </a:xfrm>
+          <a:prstGeom xmlns:a="http://schemas.openxmlformats.org/drawingml/2006/main" prst="rect">
+            <a:avLst/>
+          </a:prstGeom>
+          <a:noFill xmlns:a="http://schemas.openxmlformats.org/drawingml/2006/main"/>
+          <a:ln xmlns:a="http://schemas.openxmlformats.org/drawingml/2006/main" w="0">
+            <a:noFill/>
+            <a:prstDash val="solid"/>
+          </a:ln>
+        </p:spPr>
+        <p:txBody>
+          <a:bodyPr xmlns:a="http://schemas.openxmlformats.org/drawingml/2006/main" wrap="square" lIns="0" tIns="0" rIns="0" bIns="0" anchor="t">
+            <a:normAutofit fontScale="100000"/>
+          </a:bodyPr>
+          <a:lstStyle xmlns:a="http://schemas.openxmlformats.org/drawingml/2006/main"/>
+          <a:p xmlns:a="http://schemas.openxmlformats.org/drawingml/2006/main">
+            <a:pPr algn="l">
+              <a:buNone/>
+              <a:defRPr sz="1500" b="1">
+                <a:solidFill>
+                  <a:srgbClr val="667384"/>
+                </a:solidFill>
+                <a:latin typeface="Arial"/>
+                <a:ea typeface="Arial"/>
+                <a:cs typeface="Arial"/>
+              </a:defRPr>
+            </a:pPr>
+            <a:r>
+              <a:rPr sz="1500" b="1">
+                <a:solidFill>
+                  <a:srgbClr val="667384"/>
+                </a:solidFill>
+                <a:latin typeface="Arial"/>
+                <a:ea typeface="Arial"/>
+                <a:cs typeface="Arial"/>
+              </a:rPr>
+              <a:t>Memory</a:t>
+            </a:r>
+          </a:p>
+        </p:txBody>
+      </p:sp>
+      <p:sp>
+        <p:nvSpPr>
+          <p:cNvPr id="17" name="">
+            <a:extLst xmlns:a="http://schemas.openxmlformats.org/drawingml/2006/main">
+              <a:ext uri="{FF2B5EF4-FFF2-40B4-BE49-F238E27FC236}">
+                <a16:creationId xmlns:a16="http://schemas.microsoft.com/office/drawing/2014/main" id="{5CE87A9A-C6B3-4232-84C2-9C442CAD9C05}"/>
+              </a:ext>
+            </a:extLst>
+          </p:cNvPr>
+          <p:cNvSpPr>
+            <a:spLocks xmlns:a="http://schemas.openxmlformats.org/drawingml/2006/main" noGrp="1"/>
+          </p:cNvSpPr>
+          <p:nvPr/>
+        </p:nvSpPr>
+        <p:spPr>
+          <a:xfrm xmlns:a="http://schemas.openxmlformats.org/drawingml/2006/main">
+            <a:off x="8572500" y="2876550"/>
+            <a:ext cx="2952750" cy="419100"/>
+          </a:xfrm>
+          <a:prstGeom xmlns:a="http://schemas.openxmlformats.org/drawingml/2006/main" prst="rect">
+            <a:avLst/>
+          </a:prstGeom>
+          <a:noFill xmlns:a="http://schemas.openxmlformats.org/drawingml/2006/main"/>
+          <a:ln xmlns:a="http://schemas.openxmlformats.org/drawingml/2006/main" w="0">
+            <a:noFill/>
+            <a:prstDash val="solid"/>
+          </a:ln>
+        </p:spPr>
+        <p:txBody>
+          <a:bodyPr xmlns:a="http://schemas.openxmlformats.org/drawingml/2006/main" wrap="square" lIns="0" tIns="0" rIns="0" bIns="0" anchor="t">
+            <a:normAutofit fontScale="100000"/>
+          </a:bodyPr>
+          <a:lstStyle xmlns:a="http://schemas.openxmlformats.org/drawingml/2006/main"/>
+          <a:p xmlns:a="http://schemas.openxmlformats.org/drawingml/2006/main">
+            <a:pPr algn="l">
+              <a:buNone/>
+              <a:defRPr sz="1500" b="0">
+                <a:solidFill>
+                  <a:srgbClr val="273548"/>
+                </a:solidFill>
+                <a:latin typeface="Arial"/>
+                <a:ea typeface="Arial"/>
+                <a:cs typeface="Arial"/>
+              </a:defRPr>
+            </a:pPr>
+            <a:r>
+              <a:rPr sz="1500" b="0">
+                <a:solidFill>
+                  <a:srgbClr val="273548"/>
+                </a:solidFill>
+                <a:latin typeface="Arial"/>
+                <a:ea typeface="Arial"/>
+                <a:cs typeface="Arial"/>
+              </a:rPr>
+              <a:t>Prior 252 completed sessions</a:t>
+            </a:r>
+          </a:p>
+        </p:txBody>
+      </p:sp>
+      <p:sp>
+        <p:nvSpPr>
+          <p:cNvPr id="18" name="">
+            <a:extLst xmlns:a="http://schemas.openxmlformats.org/drawingml/2006/main">
+              <a:ext uri="{FF2B5EF4-FFF2-40B4-BE49-F238E27FC236}">
+                <a16:creationId xmlns:a16="http://schemas.microsoft.com/office/drawing/2014/main" id="{4C822C36-1982-4EF0-A9F3-89DAA8EAA125}"/>
+              </a:ext>
+            </a:extLst>
+          </p:cNvPr>
+          <p:cNvSpPr>
+            <a:spLocks xmlns:a="http://schemas.openxmlformats.org/drawingml/2006/main" noGrp="1"/>
+          </p:cNvSpPr>
+          <p:nvPr/>
+        </p:nvSpPr>
+        <p:spPr>
+          <a:xfrm xmlns:a="http://schemas.openxmlformats.org/drawingml/2006/main">
+            <a:off x="6667500" y="3333750"/>
+            <a:ext cx="4857750" cy="9525"/>
+          </a:xfrm>
+          <a:prstGeom xmlns:a="http://schemas.openxmlformats.org/drawingml/2006/main" prst="rect">
+            <a:avLst/>
+          </a:prstGeom>
+          <a:solidFill xmlns:a="http://schemas.openxmlformats.org/drawingml/2006/main">
+            <a:srgbClr val="B8BCC4"/>
+          </a:solidFill>
+          <a:ln xmlns:a="http://schemas.openxmlformats.org/drawingml/2006/main" w="0">
+            <a:solidFill>
+              <a:srgbClr val="B8BCC4"/>
+            </a:solidFill>
+            <a:prstDash val="solid"/>
+          </a:ln>
+        </p:spPr>
+      </p:sp>
+      <p:sp>
+        <p:nvSpPr>
+          <p:cNvPr id="19" name="">
+            <a:extLst xmlns:a="http://schemas.openxmlformats.org/drawingml/2006/main">
+              <a:ext uri="{FF2B5EF4-FFF2-40B4-BE49-F238E27FC236}">
+                <a16:creationId xmlns:a16="http://schemas.microsoft.com/office/drawing/2014/main" id="{FFA764C4-9BB1-4E82-A1F0-6E930868FEC3}"/>
+              </a:ext>
+            </a:extLst>
+          </p:cNvPr>
+          <p:cNvSpPr>
+            <a:spLocks xmlns:a="http://schemas.openxmlformats.org/drawingml/2006/main" noGrp="1"/>
+          </p:cNvSpPr>
+          <p:nvPr/>
+        </p:nvSpPr>
+        <p:spPr>
+          <a:xfrm xmlns:a="http://schemas.openxmlformats.org/drawingml/2006/main">
+            <a:off x="6667500" y="3467100"/>
+            <a:ext cx="1809750" cy="323850"/>
+          </a:xfrm>
+          <a:prstGeom xmlns:a="http://schemas.openxmlformats.org/drawingml/2006/main" prst="rect">
+            <a:avLst/>
+          </a:prstGeom>
+          <a:noFill xmlns:a="http://schemas.openxmlformats.org/drawingml/2006/main"/>
+          <a:ln xmlns:a="http://schemas.openxmlformats.org/drawingml/2006/main" w="0">
+            <a:noFill/>
+            <a:prstDash val="solid"/>
+          </a:ln>
+        </p:spPr>
+        <p:txBody>
+          <a:bodyPr xmlns:a="http://schemas.openxmlformats.org/drawingml/2006/main" wrap="square" lIns="0" tIns="0" rIns="0" bIns="0" anchor="t">
+            <a:normAutofit fontScale="100000"/>
+          </a:bodyPr>
+          <a:lstStyle xmlns:a="http://schemas.openxmlformats.org/drawingml/2006/main"/>
+          <a:p xmlns:a="http://schemas.openxmlformats.org/drawingml/2006/main">
+            <a:pPr algn="l">
+              <a:buNone/>
+              <a:defRPr sz="1500" b="1">
+                <a:solidFill>
+                  <a:srgbClr val="667384"/>
+                </a:solidFill>
+                <a:latin typeface="Arial"/>
+                <a:ea typeface="Arial"/>
+                <a:cs typeface="Arial"/>
+              </a:defRPr>
+            </a:pPr>
+            <a:r>
+              <a:rPr sz="1500" b="1">
+                <a:solidFill>
+                  <a:srgbClr val="667384"/>
+                </a:solidFill>
+                <a:latin typeface="Arial"/>
+                <a:ea typeface="Arial"/>
+                <a:cs typeface="Arial"/>
+              </a:rPr>
+              <a:t>States</a:t>
+            </a:r>
+          </a:p>
+        </p:txBody>
+      </p:sp>
+      <p:sp>
+        <p:nvSpPr>
+          <p:cNvPr id="20" name="">
+            <a:extLst xmlns:a="http://schemas.openxmlformats.org/drawingml/2006/main">
+              <a:ext uri="{FF2B5EF4-FFF2-40B4-BE49-F238E27FC236}">
+                <a16:creationId xmlns:a16="http://schemas.microsoft.com/office/drawing/2014/main" id="{62A04E11-771F-482D-97D0-41D18323CD03}"/>
+              </a:ext>
+            </a:extLst>
+          </p:cNvPr>
+          <p:cNvSpPr>
+            <a:spLocks xmlns:a="http://schemas.openxmlformats.org/drawingml/2006/main" noGrp="1"/>
+          </p:cNvSpPr>
+          <p:nvPr/>
+        </p:nvSpPr>
+        <p:spPr>
+          <a:xfrm xmlns:a="http://schemas.openxmlformats.org/drawingml/2006/main">
+            <a:off x="8572500" y="3467100"/>
+            <a:ext cx="2952750" cy="419100"/>
+          </a:xfrm>
+          <a:prstGeom xmlns:a="http://schemas.openxmlformats.org/drawingml/2006/main" prst="rect">
+            <a:avLst/>
+          </a:prstGeom>
+          <a:noFill xmlns:a="http://schemas.openxmlformats.org/drawingml/2006/main"/>
+          <a:ln xmlns:a="http://schemas.openxmlformats.org/drawingml/2006/main" w="0">
+            <a:noFill/>
+            <a:prstDash val="solid"/>
+          </a:ln>
+        </p:spPr>
+        <p:txBody>
+          <a:bodyPr xmlns:a="http://schemas.openxmlformats.org/drawingml/2006/main" wrap="square" lIns="0" tIns="0" rIns="0" bIns="0" anchor="t">
+            <a:normAutofit fontScale="100000"/>
+          </a:bodyPr>
+          <a:lstStyle xmlns:a="http://schemas.openxmlformats.org/drawingml/2006/main"/>
+          <a:p xmlns:a="http://schemas.openxmlformats.org/drawingml/2006/main">
+            <a:pPr algn="l">
+              <a:buNone/>
+              <a:defRPr sz="1500" b="0">
+                <a:solidFill>
+                  <a:srgbClr val="273548"/>
+                </a:solidFill>
+                <a:latin typeface="Arial"/>
+                <a:ea typeface="Arial"/>
+                <a:cs typeface="Arial"/>
+              </a:defRPr>
+            </a:pPr>
+            <a:r>
+              <a:rPr sz="1500" b="0">
+                <a:solidFill>
+                  <a:srgbClr val="273548"/>
+                </a:solidFill>
+                <a:latin typeface="Arial"/>
+                <a:ea typeface="Arial"/>
+                <a:cs typeface="Arial"/>
+              </a:rPr>
+              <a:t>LOW / MEDIUM / HIGH</a:t>
+            </a:r>
+          </a:p>
+        </p:txBody>
+      </p:sp>
+      <p:sp>
+        <p:nvSpPr>
+          <p:cNvPr id="21" name="">
+            <a:extLst xmlns:a="http://schemas.openxmlformats.org/drawingml/2006/main">
+              <a:ext uri="{FF2B5EF4-FFF2-40B4-BE49-F238E27FC236}">
+                <a16:creationId xmlns:a16="http://schemas.microsoft.com/office/drawing/2014/main" id="{2AEA1D46-2EB0-459D-9313-BA82DEAD9553}"/>
+              </a:ext>
+            </a:extLst>
+          </p:cNvPr>
+          <p:cNvSpPr>
+            <a:spLocks xmlns:a="http://schemas.openxmlformats.org/drawingml/2006/main" noGrp="1"/>
+          </p:cNvSpPr>
+          <p:nvPr/>
+        </p:nvSpPr>
+        <p:spPr>
+          <a:xfrm xmlns:a="http://schemas.openxmlformats.org/drawingml/2006/main">
+            <a:off x="6667500" y="3924300"/>
+            <a:ext cx="4857750" cy="9525"/>
+          </a:xfrm>
+          <a:prstGeom xmlns:a="http://schemas.openxmlformats.org/drawingml/2006/main" prst="rect">
+            <a:avLst/>
+          </a:prstGeom>
+          <a:solidFill xmlns:a="http://schemas.openxmlformats.org/drawingml/2006/main">
+            <a:srgbClr val="B8BCC4"/>
+          </a:solidFill>
+          <a:ln xmlns:a="http://schemas.openxmlformats.org/drawingml/2006/main" w="0">
+            <a:solidFill>
+              <a:srgbClr val="B8BCC4"/>
+            </a:solidFill>
+            <a:prstDash val="solid"/>
+          </a:ln>
+        </p:spPr>
+      </p:sp>
+      <p:sp>
+        <p:nvSpPr>
+          <p:cNvPr id="22" name="">
+            <a:extLst xmlns:a="http://schemas.openxmlformats.org/drawingml/2006/main">
+              <a:ext uri="{FF2B5EF4-FFF2-40B4-BE49-F238E27FC236}">
+                <a16:creationId xmlns:a16="http://schemas.microsoft.com/office/drawing/2014/main" id="{AAD0A15B-41F8-429C-8446-F9003B5B4E6F}"/>
+              </a:ext>
+            </a:extLst>
+          </p:cNvPr>
+          <p:cNvSpPr>
+            <a:spLocks xmlns:a="http://schemas.openxmlformats.org/drawingml/2006/main" noGrp="1"/>
+          </p:cNvSpPr>
+          <p:nvPr/>
+        </p:nvSpPr>
+        <p:spPr>
+          <a:xfrm xmlns:a="http://schemas.openxmlformats.org/drawingml/2006/main">
+            <a:off x="6667500" y="4057650"/>
+            <a:ext cx="1809750" cy="323850"/>
+          </a:xfrm>
+          <a:prstGeom xmlns:a="http://schemas.openxmlformats.org/drawingml/2006/main" prst="rect">
+            <a:avLst/>
+          </a:prstGeom>
+          <a:noFill xmlns:a="http://schemas.openxmlformats.org/drawingml/2006/main"/>
+          <a:ln xmlns:a="http://schemas.openxmlformats.org/drawingml/2006/main" w="0">
+            <a:noFill/>
+            <a:prstDash val="solid"/>
+          </a:ln>
+        </p:spPr>
+        <p:txBody>
+          <a:bodyPr xmlns:a="http://schemas.openxmlformats.org/drawingml/2006/main" wrap="square" lIns="0" tIns="0" rIns="0" bIns="0" anchor="t">
+            <a:normAutofit fontScale="100000"/>
+          </a:bodyPr>
+          <a:lstStyle xmlns:a="http://schemas.openxmlformats.org/drawingml/2006/main"/>
+          <a:p xmlns:a="http://schemas.openxmlformats.org/drawingml/2006/main">
+            <a:pPr algn="l">
+              <a:buNone/>
+              <a:defRPr sz="1500" b="1">
+                <a:solidFill>
+                  <a:srgbClr val="667384"/>
+                </a:solidFill>
+                <a:latin typeface="Arial"/>
+                <a:ea typeface="Arial"/>
+                <a:cs typeface="Arial"/>
+              </a:defRPr>
+            </a:pPr>
+            <a:r>
+              <a:rPr sz="1500" b="1">
+                <a:solidFill>
+                  <a:srgbClr val="667384"/>
+                </a:solidFill>
+                <a:latin typeface="Arial"/>
+                <a:ea typeface="Arial"/>
+                <a:cs typeface="Arial"/>
+              </a:rPr>
+              <a:t>Hysteresis</a:t>
+            </a:r>
+          </a:p>
+        </p:txBody>
+      </p:sp>
+      <p:sp>
+        <p:nvSpPr>
+          <p:cNvPr id="23" name="">
+            <a:extLst xmlns:a="http://schemas.openxmlformats.org/drawingml/2006/main">
+              <a:ext uri="{FF2B5EF4-FFF2-40B4-BE49-F238E27FC236}">
+                <a16:creationId xmlns:a16="http://schemas.microsoft.com/office/drawing/2014/main" id="{A13F5128-0043-4265-B48A-E7E4E9B6F96C}"/>
+              </a:ext>
+            </a:extLst>
+          </p:cNvPr>
+          <p:cNvSpPr>
+            <a:spLocks xmlns:a="http://schemas.openxmlformats.org/drawingml/2006/main" noGrp="1"/>
+          </p:cNvSpPr>
+          <p:nvPr/>
+        </p:nvSpPr>
+        <p:spPr>
+          <a:xfrm xmlns:a="http://schemas.openxmlformats.org/drawingml/2006/main">
+            <a:off x="8572500" y="4057650"/>
+            <a:ext cx="2952750" cy="419100"/>
+          </a:xfrm>
+          <a:prstGeom xmlns:a="http://schemas.openxmlformats.org/drawingml/2006/main" prst="rect">
+            <a:avLst/>
+          </a:prstGeom>
+          <a:noFill xmlns:a="http://schemas.openxmlformats.org/drawingml/2006/main"/>
+          <a:ln xmlns:a="http://schemas.openxmlformats.org/drawingml/2006/main" w="0">
+            <a:noFill/>
+            <a:prstDash val="solid"/>
+          </a:ln>
+        </p:spPr>
+        <p:txBody>
+          <a:bodyPr xmlns:a="http://schemas.openxmlformats.org/drawingml/2006/main" wrap="square" lIns="0" tIns="0" rIns="0" bIns="0" anchor="t">
+            <a:normAutofit fontScale="100000"/>
+          </a:bodyPr>
+          <a:lstStyle xmlns:a="http://schemas.openxmlformats.org/drawingml/2006/main"/>
+          <a:p xmlns:a="http://schemas.openxmlformats.org/drawingml/2006/main">
+            <a:pPr algn="l">
+              <a:buNone/>
+              <a:defRPr sz="1500" b="0">
+                <a:solidFill>
+                  <a:srgbClr val="273548"/>
+                </a:solidFill>
+                <a:latin typeface="Arial"/>
+                <a:ea typeface="Arial"/>
+                <a:cs typeface="Arial"/>
+              </a:defRPr>
+            </a:pPr>
+            <a:r>
+              <a:rPr sz="1500" b="0">
+                <a:solidFill>
+                  <a:srgbClr val="273548"/>
+                </a:solidFill>
+                <a:latin typeface="Arial"/>
+                <a:ea typeface="Arial"/>
+                <a:cs typeface="Arial"/>
+              </a:rPr>
+              <a:t>30/40 and 60/70 gates</a:t>
+            </a:r>
+          </a:p>
+        </p:txBody>
+      </p:sp>
+      <p:sp>
+        <p:nvSpPr>
+          <p:cNvPr id="24" name="">
+            <a:extLst xmlns:a="http://schemas.openxmlformats.org/drawingml/2006/main">
+              <a:ext uri="{FF2B5EF4-FFF2-40B4-BE49-F238E27FC236}">
+                <a16:creationId xmlns:a16="http://schemas.microsoft.com/office/drawing/2014/main" id="{1BB63F79-B572-4EF7-8C82-E4140C6E382C}"/>
+              </a:ext>
+            </a:extLst>
+          </p:cNvPr>
+          <p:cNvSpPr>
+            <a:spLocks xmlns:a="http://schemas.openxmlformats.org/drawingml/2006/main" noGrp="1"/>
+          </p:cNvSpPr>
+          <p:nvPr/>
+        </p:nvSpPr>
+        <p:spPr>
+          <a:xfrm xmlns:a="http://schemas.openxmlformats.org/drawingml/2006/main">
+            <a:off x="6667500" y="4514850"/>
+            <a:ext cx="4857750" cy="9525"/>
+          </a:xfrm>
+          <a:prstGeom xmlns:a="http://schemas.openxmlformats.org/drawingml/2006/main" prst="rect">
+            <a:avLst/>
+          </a:prstGeom>
+          <a:solidFill xmlns:a="http://schemas.openxmlformats.org/drawingml/2006/main">
+            <a:srgbClr val="B8BCC4"/>
+          </a:solidFill>
+          <a:ln xmlns:a="http://schemas.openxmlformats.org/drawingml/2006/main" w="0">
+            <a:solidFill>
+              <a:srgbClr val="B8BCC4"/>
+            </a:solidFill>
+            <a:prstDash val="solid"/>
+          </a:ln>
+        </p:spPr>
+      </p:sp>
+      <p:sp>
+        <p:nvSpPr>
+          <p:cNvPr id="25" name="">
+            <a:extLst xmlns:a="http://schemas.openxmlformats.org/drawingml/2006/main">
+              <a:ext uri="{FF2B5EF4-FFF2-40B4-BE49-F238E27FC236}">
+                <a16:creationId xmlns:a16="http://schemas.microsoft.com/office/drawing/2014/main" id="{F58FD0A4-5938-4ECC-AC99-491391233E24}"/>
+              </a:ext>
+            </a:extLst>
+          </p:cNvPr>
+          <p:cNvSpPr>
+            <a:spLocks xmlns:a="http://schemas.openxmlformats.org/drawingml/2006/main" noGrp="1"/>
+          </p:cNvSpPr>
+          <p:nvPr/>
+        </p:nvSpPr>
+        <p:spPr>
+          <a:xfrm xmlns:a="http://schemas.openxmlformats.org/drawingml/2006/main">
+            <a:off x="6667500" y="4648200"/>
+            <a:ext cx="1809750" cy="323850"/>
+          </a:xfrm>
+          <a:prstGeom xmlns:a="http://schemas.openxmlformats.org/drawingml/2006/main" prst="rect">
+            <a:avLst/>
+          </a:prstGeom>
+          <a:noFill xmlns:a="http://schemas.openxmlformats.org/drawingml/2006/main"/>
+          <a:ln xmlns:a="http://schemas.openxmlformats.org/drawingml/2006/main" w="0">
+            <a:noFill/>
+            <a:prstDash val="solid"/>
+          </a:ln>
+        </p:spPr>
+        <p:txBody>
+          <a:bodyPr xmlns:a="http://schemas.openxmlformats.org/drawingml/2006/main" wrap="square" lIns="0" tIns="0" rIns="0" bIns="0" anchor="t">
+            <a:normAutofit fontScale="100000"/>
+          </a:bodyPr>
+          <a:lstStyle xmlns:a="http://schemas.openxmlformats.org/drawingml/2006/main"/>
+          <a:p xmlns:a="http://schemas.openxmlformats.org/drawingml/2006/main">
+            <a:pPr algn="l">
+              <a:buNone/>
+              <a:defRPr sz="1500" b="1">
+                <a:solidFill>
+                  <a:srgbClr val="667384"/>
+                </a:solidFill>
+                <a:latin typeface="Arial"/>
+                <a:ea typeface="Arial"/>
+                <a:cs typeface="Arial"/>
+              </a:defRPr>
+            </a:pPr>
+            <a:r>
+              <a:rPr sz="1500" b="1">
+                <a:solidFill>
+                  <a:srgbClr val="667384"/>
+                </a:solidFill>
+                <a:latin typeface="Arial"/>
+                <a:ea typeface="Arial"/>
+                <a:cs typeface="Arial"/>
+              </a:rPr>
+              <a:t>Timing</a:t>
+            </a:r>
+          </a:p>
+        </p:txBody>
+      </p:sp>
+      <p:sp>
+        <p:nvSpPr>
+          <p:cNvPr id="26" name="">
+            <a:extLst xmlns:a="http://schemas.openxmlformats.org/drawingml/2006/main">
+              <a:ext uri="{FF2B5EF4-FFF2-40B4-BE49-F238E27FC236}">
+                <a16:creationId xmlns:a16="http://schemas.microsoft.com/office/drawing/2014/main" id="{AA292260-C22B-4C56-9ED9-C8744785B552}"/>
+              </a:ext>
+            </a:extLst>
+          </p:cNvPr>
+          <p:cNvSpPr>
+            <a:spLocks xmlns:a="http://schemas.openxmlformats.org/drawingml/2006/main" noGrp="1"/>
+          </p:cNvSpPr>
+          <p:nvPr/>
+        </p:nvSpPr>
+        <p:spPr>
+          <a:xfrm xmlns:a="http://schemas.openxmlformats.org/drawingml/2006/main">
+            <a:off x="8572500" y="4648200"/>
+            <a:ext cx="2952750" cy="419100"/>
+          </a:xfrm>
+          <a:prstGeom xmlns:a="http://schemas.openxmlformats.org/drawingml/2006/main" prst="rect">
+            <a:avLst/>
+          </a:prstGeom>
+          <a:noFill xmlns:a="http://schemas.openxmlformats.org/drawingml/2006/main"/>
+          <a:ln xmlns:a="http://schemas.openxmlformats.org/drawingml/2006/main" w="0">
+            <a:noFill/>
+            <a:prstDash val="solid"/>
+          </a:ln>
+        </p:spPr>
+        <p:txBody>
+          <a:bodyPr xmlns:a="http://schemas.openxmlformats.org/drawingml/2006/main" wrap="square" lIns="0" tIns="0" rIns="0" bIns="0" anchor="t">
+            <a:normAutofit fontScale="100000"/>
+          </a:bodyPr>
+          <a:lstStyle xmlns:a="http://schemas.openxmlformats.org/drawingml/2006/main"/>
+          <a:p xmlns:a="http://schemas.openxmlformats.org/drawingml/2006/main">
+            <a:pPr algn="l">
+              <a:buNone/>
+              <a:defRPr sz="1500" b="0">
+                <a:solidFill>
+                  <a:srgbClr val="273548"/>
+                </a:solidFill>
+                <a:latin typeface="Arial"/>
+                <a:ea typeface="Arial"/>
+                <a:cs typeface="Arial"/>
+              </a:defRPr>
+            </a:pPr>
+            <a:r>
+              <a:rPr sz="1500" b="0">
+                <a:solidFill>
+                  <a:srgbClr val="273548"/>
+                </a:solidFill>
+                <a:latin typeface="Arial"/>
+                <a:ea typeface="Arial"/>
+                <a:cs typeface="Arial"/>
+              </a:rPr>
+              <a:t>Known at anchor close t</a:t>
+            </a:r>
+          </a:p>
+        </p:txBody>
+      </p:sp>
+      <p:sp>
+        <p:nvSpPr>
+          <p:cNvPr id="27" name="">
+            <a:extLst xmlns:a="http://schemas.openxmlformats.org/drawingml/2006/main">
+              <a:ext uri="{FF2B5EF4-FFF2-40B4-BE49-F238E27FC236}">
+                <a16:creationId xmlns:a16="http://schemas.microsoft.com/office/drawing/2014/main" id="{6C617A11-8542-47F5-AD42-16C68CB863E7}"/>
+              </a:ext>
+            </a:extLst>
+          </p:cNvPr>
+          <p:cNvSpPr>
+            <a:spLocks xmlns:a="http://schemas.openxmlformats.org/drawingml/2006/main" noGrp="1"/>
+          </p:cNvSpPr>
+          <p:nvPr/>
+        </p:nvSpPr>
+        <p:spPr>
+          <a:xfrm xmlns:a="http://schemas.openxmlformats.org/drawingml/2006/main">
+            <a:off x="6667500" y="5105400"/>
+            <a:ext cx="4857750" cy="9525"/>
+          </a:xfrm>
+          <a:prstGeom xmlns:a="http://schemas.openxmlformats.org/drawingml/2006/main" prst="rect">
+            <a:avLst/>
+          </a:prstGeom>
+          <a:solidFill xmlns:a="http://schemas.openxmlformats.org/drawingml/2006/main">
+            <a:srgbClr val="B8BCC4"/>
+          </a:solidFill>
+          <a:ln xmlns:a="http://schemas.openxmlformats.org/drawingml/2006/main" w="0">
+            <a:solidFill>
+              <a:srgbClr val="B8BCC4"/>
+            </a:solidFill>
+            <a:prstDash val="solid"/>
+          </a:ln>
+        </p:spPr>
+      </p:sp>
+      <p:sp>
+        <p:nvSpPr>
+          <p:cNvPr id="28" name="">
+            <a:extLst xmlns:a="http://schemas.openxmlformats.org/drawingml/2006/main">
+              <a:ext uri="{FF2B5EF4-FFF2-40B4-BE49-F238E27FC236}">
+                <a16:creationId xmlns:a16="http://schemas.microsoft.com/office/drawing/2014/main" id="{D3258514-91F0-4BFE-BE7D-A95A1C826021}"/>
+              </a:ext>
+            </a:extLst>
+          </p:cNvPr>
+          <p:cNvSpPr>
+            <a:spLocks xmlns:a="http://schemas.openxmlformats.org/drawingml/2006/main" noGrp="1"/>
+          </p:cNvSpPr>
+          <p:nvPr/>
+        </p:nvSpPr>
+        <p:spPr>
+          <a:xfrm xmlns:a="http://schemas.openxmlformats.org/drawingml/2006/main">
+            <a:off x="6667500" y="5238750"/>
+            <a:ext cx="1809750" cy="323850"/>
+          </a:xfrm>
+          <a:prstGeom xmlns:a="http://schemas.openxmlformats.org/drawingml/2006/main" prst="rect">
+            <a:avLst/>
+          </a:prstGeom>
+          <a:noFill xmlns:a="http://schemas.openxmlformats.org/drawingml/2006/main"/>
+          <a:ln xmlns:a="http://schemas.openxmlformats.org/drawingml/2006/main" w="0">
+            <a:noFill/>
+            <a:prstDash val="solid"/>
+          </a:ln>
+        </p:spPr>
+        <p:txBody>
+          <a:bodyPr xmlns:a="http://schemas.openxmlformats.org/drawingml/2006/main" wrap="square" lIns="0" tIns="0" rIns="0" bIns="0" anchor="t">
+            <a:normAutofit fontScale="100000"/>
+          </a:bodyPr>
+          <a:lstStyle xmlns:a="http://schemas.openxmlformats.org/drawingml/2006/main"/>
+          <a:p xmlns:a="http://schemas.openxmlformats.org/drawingml/2006/main">
+            <a:pPr algn="l">
+              <a:buNone/>
+              <a:defRPr sz="1500" b="1">
+                <a:solidFill>
+                  <a:srgbClr val="667384"/>
+                </a:solidFill>
+                <a:latin typeface="Arial"/>
+                <a:ea typeface="Arial"/>
+                <a:cs typeface="Arial"/>
+              </a:defRPr>
+            </a:pPr>
+            <a:r>
+              <a:rPr sz="1500" b="1">
+                <a:solidFill>
+                  <a:srgbClr val="667384"/>
+                </a:solidFill>
+                <a:latin typeface="Arial"/>
+                <a:ea typeface="Arial"/>
+                <a:cs typeface="Arial"/>
+              </a:rPr>
+              <a:t>Surface</a:t>
+            </a:r>
+          </a:p>
+        </p:txBody>
+      </p:sp>
+      <p:sp>
+        <p:nvSpPr>
+          <p:cNvPr id="29" name="">
+            <a:extLst xmlns:a="http://schemas.openxmlformats.org/drawingml/2006/main">
+              <a:ext uri="{FF2B5EF4-FFF2-40B4-BE49-F238E27FC236}">
+                <a16:creationId xmlns:a16="http://schemas.microsoft.com/office/drawing/2014/main" id="{F73C58E3-8C22-4D23-8076-93E173576113}"/>
+              </a:ext>
+            </a:extLst>
+          </p:cNvPr>
+          <p:cNvSpPr>
+            <a:spLocks xmlns:a="http://schemas.openxmlformats.org/drawingml/2006/main" noGrp="1"/>
+          </p:cNvSpPr>
+          <p:nvPr/>
+        </p:nvSpPr>
+        <p:spPr>
+          <a:xfrm xmlns:a="http://schemas.openxmlformats.org/drawingml/2006/main">
+            <a:off x="8572500" y="5238750"/>
+            <a:ext cx="2952750" cy="419100"/>
+          </a:xfrm>
+          <a:prstGeom xmlns:a="http://schemas.openxmlformats.org/drawingml/2006/main" prst="rect">
+            <a:avLst/>
+          </a:prstGeom>
+          <a:noFill xmlns:a="http://schemas.openxmlformats.org/drawingml/2006/main"/>
+          <a:ln xmlns:a="http://schemas.openxmlformats.org/drawingml/2006/main" w="0">
+            <a:noFill/>
+            <a:prstDash val="solid"/>
+          </a:ln>
+        </p:spPr>
+        <p:txBody>
+          <a:bodyPr xmlns:a="http://schemas.openxmlformats.org/drawingml/2006/main" wrap="square" lIns="0" tIns="0" rIns="0" bIns="0" anchor="t">
+            <a:normAutofit fontScale="100000"/>
+          </a:bodyPr>
+          <a:lstStyle xmlns:a="http://schemas.openxmlformats.org/drawingml/2006/main"/>
+          <a:p xmlns:a="http://schemas.openxmlformats.org/drawingml/2006/main">
+            <a:pPr algn="l">
+              <a:buNone/>
+              <a:defRPr sz="1500" b="0">
+                <a:solidFill>
+                  <a:srgbClr val="273548"/>
+                </a:solidFill>
+                <a:latin typeface="Arial"/>
+                <a:ea typeface="Arial"/>
+                <a:cs typeface="Arial"/>
+              </a:defRPr>
+            </a:pPr>
+            <a:r>
+              <a:rPr sz="1500" b="0">
+                <a:solidFill>
+                  <a:srgbClr val="273548"/>
+                </a:solidFill>
+                <a:latin typeface="Arial"/>
+                <a:ea typeface="Arial"/>
+                <a:cs typeface="Arial"/>
+              </a:rPr>
+              <a:t>Same 81 horizon pairs</a:t>
+            </a:r>
+          </a:p>
+        </p:txBody>
+      </p:sp>
+    </p:spTree>
+    <p:extLst>
+      <p:ext uri="{BB962C8B-B14F-4D97-AF65-F5344CB8AC3E}">
+        <p14:creationId xmlns:p14="http://schemas.microsoft.com/office/powerpoint/2010/main" val="1397283360"/>
+      </p:ext>
+    </p:extLst>
+  </p:cSld>
+</p:sld>
+</file>
+
+<file path=ppt/slides/slide42.xml><?xml version="1.0" encoding="utf-8"?>
+<p:sld xmlns:p="http://schemas.openxmlformats.org/presentationml/2006/main">
+  <p:cSld>
+    <p:bg>
+      <p:bgPr>
+        <a:solidFill xmlns:a="http://schemas.openxmlformats.org/drawingml/2006/main">
+          <a:srgbClr val="FFFFFF"/>
+        </a:solidFill>
+      </p:bgPr>
+    </p:bg>
+    <p:spTree>
+      <p:nvGrpSpPr>
+        <p:cNvPr id="1" name=""/>
+        <p:cNvGrpSpPr/>
+        <p:nvPr/>
+      </p:nvGrpSpPr>
+      <p:grpSpPr>
+        <a:xfrm xmlns:a="http://schemas.openxmlformats.org/drawingml/2006/main"/>
+      </p:grpSpPr>
+      <p:sp>
+        <p:nvSpPr>
+          <p:cNvPr id="14" name="section-5">
+            <a:extLst xmlns:a="http://schemas.openxmlformats.org/drawingml/2006/main">
+              <a:ext uri="{FF2B5EF4-FFF2-40B4-BE49-F238E27FC236}">
+                <a16:creationId xmlns:a16="http://schemas.microsoft.com/office/drawing/2014/main" id="{7D217279-BBB9-4442-BD43-E35AFD380A36}"/>
+              </a:ext>
+            </a:extLst>
+          </p:cNvPr>
+          <p:cNvSpPr>
+            <a:spLocks xmlns:a="http://schemas.openxmlformats.org/drawingml/2006/main" noGrp="1"/>
+          </p:cNvSpPr>
+          <p:nvPr/>
+        </p:nvSpPr>
+        <p:spPr>
+          <a:xfrm xmlns:a="http://schemas.openxmlformats.org/drawingml/2006/main">
+            <a:off x="457200" y="228600"/>
+            <a:ext cx="4191000" cy="228600"/>
+          </a:xfrm>
+          <a:prstGeom xmlns:a="http://schemas.openxmlformats.org/drawingml/2006/main" prst="rect">
+            <a:avLst/>
+          </a:prstGeom>
+          <a:noFill xmlns:a="http://schemas.openxmlformats.org/drawingml/2006/main"/>
+          <a:ln xmlns:a="http://schemas.openxmlformats.org/drawingml/2006/main" w="0">
+            <a:noFill/>
+            <a:prstDash val="solid"/>
+          </a:ln>
+        </p:spPr>
+        <p:txBody>
+          <a:bodyPr xmlns:a="http://schemas.openxmlformats.org/drawingml/2006/main" wrap="square" lIns="0" tIns="0" rIns="0" bIns="0" anchor="t">
+            <a:normAutofit fontScale="100000"/>
+          </a:bodyPr>
+          <a:lstStyle xmlns:a="http://schemas.openxmlformats.org/drawingml/2006/main"/>
+          <a:p xmlns:a="http://schemas.openxmlformats.org/drawingml/2006/main">
+            <a:pPr algn="l">
+              <a:buNone/>
+              <a:defRPr sz="1200" b="1">
+                <a:solidFill>
+                  <a:srgbClr val="667384"/>
+                </a:solidFill>
+                <a:latin typeface="Arial"/>
+                <a:ea typeface="Arial"/>
+                <a:cs typeface="Arial"/>
+              </a:defRPr>
+            </a:pPr>
+            <a:r>
+              <a:rPr sz="1200" b="1">
+                <a:solidFill>
+                  <a:srgbClr val="667384"/>
+                </a:solidFill>
+                <a:latin typeface="Arial"/>
+                <a:ea typeface="Arial"/>
+                <a:cs typeface="Arial"/>
+              </a:rPr>
+              <a:t>TSLA DESCRIPTIVE MICROSCOPE</a:t>
+            </a:r>
+          </a:p>
+        </p:txBody>
+      </p:sp>
+      <p:sp>
+        <p:nvSpPr>
+          <p:cNvPr id="2" name="title-5">
+            <a:extLst xmlns:a="http://schemas.openxmlformats.org/drawingml/2006/main">
+              <a:ext uri="{FF2B5EF4-FFF2-40B4-BE49-F238E27FC236}">
+                <a16:creationId xmlns:a16="http://schemas.microsoft.com/office/drawing/2014/main" id="{ACF70291-6FC2-4F25-8EF7-C5343297C791}"/>
+              </a:ext>
+            </a:extLst>
+          </p:cNvPr>
+          <p:cNvSpPr>
+            <a:spLocks xmlns:a="http://schemas.openxmlformats.org/drawingml/2006/main" noGrp="1"/>
+          </p:cNvSpPr>
+          <p:nvPr/>
+        </p:nvSpPr>
+        <p:spPr>
+          <a:xfrm xmlns:a="http://schemas.openxmlformats.org/drawingml/2006/main">
+            <a:off x="457200" y="533400"/>
+            <a:ext cx="11277600" cy="628650"/>
+          </a:xfrm>
+          <a:prstGeom xmlns:a="http://schemas.openxmlformats.org/drawingml/2006/main" prst="rect">
+            <a:avLst/>
+          </a:prstGeom>
+          <a:noFill xmlns:a="http://schemas.openxmlformats.org/drawingml/2006/main"/>
+          <a:ln xmlns:a="http://schemas.openxmlformats.org/drawingml/2006/main" w="0">
+            <a:noFill/>
+            <a:prstDash val="solid"/>
+          </a:ln>
+        </p:spPr>
+        <p:txBody>
+          <a:bodyPr xmlns:a="http://schemas.openxmlformats.org/drawingml/2006/main" wrap="square" lIns="0" tIns="0" rIns="0" bIns="0" anchor="t">
+            <a:normAutofit fontScale="100000"/>
+          </a:bodyPr>
+          <a:lstStyle xmlns:a="http://schemas.openxmlformats.org/drawingml/2006/main"/>
+          <a:p xmlns:a="http://schemas.openxmlformats.org/drawingml/2006/main">
+            <a:pPr algn="l">
+              <a:buNone/>
+              <a:defRPr sz="3525" b="1">
+                <a:solidFill>
+                  <a:srgbClr val="000000"/>
+                </a:solidFill>
+                <a:latin typeface="Arial"/>
+                <a:ea typeface="Arial"/>
+                <a:cs typeface="Arial"/>
+              </a:defRPr>
+            </a:pPr>
+            <a:r>
+              <a:rPr sz="3525" b="1">
+                <a:solidFill>
+                  <a:srgbClr val="000000"/>
+                </a:solidFill>
+                <a:latin typeface="Arial"/>
+                <a:ea typeface="Arial"/>
+                <a:cs typeface="Arial"/>
+              </a:rPr>
+              <a:t>QQQ ATR% supplies context—not TSLA direction</a:t>
+            </a:r>
+          </a:p>
+        </p:txBody>
+      </p:sp>
+      <p:sp>
+        <p:nvSpPr>
+          <p:cNvPr id="3" name="">
+            <a:extLst xmlns:a="http://schemas.openxmlformats.org/drawingml/2006/main">
+              <a:ext uri="{FF2B5EF4-FFF2-40B4-BE49-F238E27FC236}">
+                <a16:creationId xmlns:a16="http://schemas.microsoft.com/office/drawing/2014/main" id="{DC8E3755-2109-4A95-AAD7-09D4B54CD317}"/>
+              </a:ext>
+            </a:extLst>
+          </p:cNvPr>
+          <p:cNvSpPr>
+            <a:spLocks xmlns:a="http://schemas.openxmlformats.org/drawingml/2006/main" noGrp="1"/>
+          </p:cNvSpPr>
+          <p:nvPr/>
+        </p:nvSpPr>
+        <p:spPr>
+          <a:xfrm xmlns:a="http://schemas.openxmlformats.org/drawingml/2006/main">
+            <a:off x="457200" y="1200150"/>
+            <a:ext cx="11277600" cy="19050"/>
+          </a:xfrm>
+          <a:prstGeom xmlns:a="http://schemas.openxmlformats.org/drawingml/2006/main" prst="rect">
+            <a:avLst/>
+          </a:prstGeom>
+          <a:solidFill xmlns:a="http://schemas.openxmlformats.org/drawingml/2006/main">
+            <a:srgbClr val="B8BCC4"/>
+          </a:solidFill>
+          <a:ln xmlns:a="http://schemas.openxmlformats.org/drawingml/2006/main" w="0">
+            <a:solidFill>
+              <a:srgbClr val="B8BCC4"/>
+            </a:solidFill>
+            <a:prstDash val="solid"/>
+          </a:ln>
+        </p:spPr>
+      </p:sp>
+      <p:sp>
+        <p:nvSpPr>
+          <p:cNvPr id="4" name="footer-left-5">
+            <a:extLst xmlns:a="http://schemas.openxmlformats.org/drawingml/2006/main">
+              <a:ext uri="{FF2B5EF4-FFF2-40B4-BE49-F238E27FC236}">
+                <a16:creationId xmlns:a16="http://schemas.microsoft.com/office/drawing/2014/main" id="{3D616FCB-FD1B-4926-8056-5988E7D3FD76}"/>
+              </a:ext>
+            </a:extLst>
+          </p:cNvPr>
+          <p:cNvSpPr>
+            <a:spLocks xmlns:a="http://schemas.openxmlformats.org/drawingml/2006/main" noGrp="1"/>
+          </p:cNvSpPr>
+          <p:nvPr/>
+        </p:nvSpPr>
+        <p:spPr>
+          <a:xfrm xmlns:a="http://schemas.openxmlformats.org/drawingml/2006/main">
+            <a:off x="457200" y="6515100"/>
+            <a:ext cx="3429000" cy="171450"/>
+          </a:xfrm>
+          <a:prstGeom xmlns:a="http://schemas.openxmlformats.org/drawingml/2006/main" prst="rect">
+            <a:avLst/>
+          </a:prstGeom>
+          <a:noFill xmlns:a="http://schemas.openxmlformats.org/drawingml/2006/main"/>
+          <a:ln xmlns:a="http://schemas.openxmlformats.org/drawingml/2006/main" w="0">
+            <a:noFill/>
+            <a:prstDash val="solid"/>
+          </a:ln>
+        </p:spPr>
+        <p:txBody>
+          <a:bodyPr xmlns:a="http://schemas.openxmlformats.org/drawingml/2006/main" wrap="square" lIns="0" tIns="0" rIns="0" bIns="0" anchor="t">
+            <a:normAutofit fontScale="100000"/>
+          </a:bodyPr>
+          <a:lstStyle xmlns:a="http://schemas.openxmlformats.org/drawingml/2006/main"/>
+          <a:p xmlns:a="http://schemas.openxmlformats.org/drawingml/2006/main">
+            <a:pPr algn="l">
+              <a:buNone/>
+              <a:defRPr sz="1050" b="0">
+                <a:solidFill>
+                  <a:srgbClr val="667384"/>
+                </a:solidFill>
+                <a:latin typeface="Arial"/>
+                <a:ea typeface="Arial"/>
+                <a:cs typeface="Arial"/>
+              </a:defRPr>
+            </a:pPr>
+            <a:r>
+              <a:rPr sz="1050" b="0">
+                <a:solidFill>
+                  <a:srgbClr val="667384"/>
+                </a:solidFill>
+                <a:latin typeface="Arial"/>
+                <a:ea typeface="Arial"/>
+                <a:cs typeface="Arial"/>
+              </a:rPr>
+              <a:t>Adjusted daily TSLA | 2018-2023</a:t>
+            </a:r>
+          </a:p>
+        </p:txBody>
+      </p:sp>
+      <p:sp>
+        <p:nvSpPr>
+          <p:cNvPr id="5" name="footer-number-5">
+            <a:extLst xmlns:a="http://schemas.openxmlformats.org/drawingml/2006/main">
+              <a:ext uri="{FF2B5EF4-FFF2-40B4-BE49-F238E27FC236}">
+                <a16:creationId xmlns:a16="http://schemas.microsoft.com/office/drawing/2014/main" id="{7E3BECCF-F54F-4D27-BB58-7ED627475AF5}"/>
+              </a:ext>
+            </a:extLst>
+          </p:cNvPr>
+          <p:cNvSpPr>
+            <a:spLocks xmlns:a="http://schemas.openxmlformats.org/drawingml/2006/main" noGrp="1"/>
+          </p:cNvSpPr>
+          <p:nvPr/>
+        </p:nvSpPr>
+        <p:spPr>
+          <a:xfrm xmlns:a="http://schemas.openxmlformats.org/drawingml/2006/main">
+            <a:off x="11239500" y="6496050"/>
+            <a:ext cx="495300" cy="190500"/>
+          </a:xfrm>
+          <a:prstGeom xmlns:a="http://schemas.openxmlformats.org/drawingml/2006/main" prst="rect">
+            <a:avLst/>
+          </a:prstGeom>
+          <a:noFill xmlns:a="http://schemas.openxmlformats.org/drawingml/2006/main"/>
+          <a:ln xmlns:a="http://schemas.openxmlformats.org/drawingml/2006/main" w="0">
+            <a:noFill/>
+            <a:prstDash val="solid"/>
+          </a:ln>
+        </p:spPr>
+        <p:txBody>
+          <a:bodyPr xmlns:a="http://schemas.openxmlformats.org/drawingml/2006/main" wrap="square" lIns="0" tIns="0" rIns="0" bIns="0" anchor="t">
+            <a:normAutofit fontScale="100000"/>
+          </a:bodyPr>
+          <a:lstStyle xmlns:a="http://schemas.openxmlformats.org/drawingml/2006/main"/>
+          <a:p xmlns:a="http://schemas.openxmlformats.org/drawingml/2006/main">
+            <a:pPr algn="r">
+              <a:buNone/>
+              <a:defRPr sz="1050" b="0">
+                <a:solidFill>
+                  <a:srgbClr val="667384"/>
+                </a:solidFill>
+                <a:latin typeface="Arial"/>
+                <a:ea typeface="Arial"/>
+                <a:cs typeface="Arial"/>
+              </a:defRPr>
+            </a:pPr>
+            <a:r>
+              <a:rPr sz="1050" b="0">
+                <a:solidFill>
+                  <a:srgbClr val="667384"/>
+                </a:solidFill>
+                <a:latin typeface="Arial"/>
+                <a:ea typeface="Arial"/>
+                <a:cs typeface="Arial"/>
+              </a:rPr>
+              <a:t>42</a:t>
+            </a:r>
+          </a:p>
+        </p:txBody>
+      </p:sp>
+      <p:sp>
+        <p:nvSpPr>
+          <p:cNvPr id="6" name="">
+            <a:extLst xmlns:a="http://schemas.openxmlformats.org/drawingml/2006/main">
+              <a:ext uri="{FF2B5EF4-FFF2-40B4-BE49-F238E27FC236}">
+                <a16:creationId xmlns:a16="http://schemas.microsoft.com/office/drawing/2014/main" id="{C96C60D3-C5F7-4C39-991D-FB86EB75687F}"/>
+              </a:ext>
+            </a:extLst>
+          </p:cNvPr>
+          <p:cNvSpPr>
+            <a:spLocks xmlns:a="http://schemas.openxmlformats.org/drawingml/2006/main" noGrp="1"/>
+          </p:cNvSpPr>
+          <p:nvPr/>
+        </p:nvSpPr>
+        <p:spPr>
+          <a:xfrm xmlns:a="http://schemas.openxmlformats.org/drawingml/2006/main">
+            <a:off x="323850" y="1381125"/>
+            <a:ext cx="8572500" cy="4819650"/>
+          </a:xfrm>
+          <a:prstGeom xmlns:a="http://schemas.openxmlformats.org/drawingml/2006/main" prst="rect">
+            <a:avLst/>
+          </a:prstGeom>
+          <a:solidFill xmlns:a="http://schemas.openxmlformats.org/drawingml/2006/main">
+            <a:srgbClr val="FFFFFF"/>
+          </a:solidFill>
+          <a:ln xmlns:a="http://schemas.openxmlformats.org/drawingml/2006/main" w="9525">
+            <a:solidFill>
+              <a:srgbClr val="B8BCC4"/>
+            </a:solidFill>
+            <a:prstDash val="solid"/>
+          </a:ln>
+        </p:spPr>
+      </p:sp>
+      <p:sp>
+        <p:nvSpPr>
+          <p:cNvPr id="8" name="">
+            <a:extLst xmlns:a="http://schemas.openxmlformats.org/drawingml/2006/main">
+              <a:ext uri="{FF2B5EF4-FFF2-40B4-BE49-F238E27FC236}">
+                <a16:creationId xmlns:a16="http://schemas.microsoft.com/office/drawing/2014/main" id="{C5B493DE-9AA4-4FF1-8BE2-28F352E8FA07}"/>
+              </a:ext>
+            </a:extLst>
+          </p:cNvPr>
+          <p:cNvSpPr>
+            <a:spLocks xmlns:a="http://schemas.openxmlformats.org/drawingml/2006/main" noGrp="1"/>
+          </p:cNvSpPr>
+          <p:nvPr/>
+        </p:nvSpPr>
+        <p:spPr>
+          <a:xfrm xmlns:a="http://schemas.openxmlformats.org/drawingml/2006/main">
+            <a:off x="9201150" y="1581150"/>
+            <a:ext cx="2190750" cy="361950"/>
+          </a:xfrm>
+          <a:prstGeom xmlns:a="http://schemas.openxmlformats.org/drawingml/2006/main" prst="rect">
+            <a:avLst/>
+          </a:prstGeom>
+          <a:noFill xmlns:a="http://schemas.openxmlformats.org/drawingml/2006/main"/>
+          <a:ln xmlns:a="http://schemas.openxmlformats.org/drawingml/2006/main" w="0">
+            <a:noFill/>
+            <a:prstDash val="solid"/>
+          </a:ln>
+        </p:spPr>
+        <p:txBody>
+          <a:bodyPr xmlns:a="http://schemas.openxmlformats.org/drawingml/2006/main" wrap="square" lIns="0" tIns="0" rIns="0" bIns="0" anchor="t">
+            <a:normAutofit fontScale="100000"/>
+          </a:bodyPr>
+          <a:lstStyle xmlns:a="http://schemas.openxmlformats.org/drawingml/2006/main"/>
+          <a:p xmlns:a="http://schemas.openxmlformats.org/drawingml/2006/main">
+            <a:pPr algn="l">
+              <a:buNone/>
+              <a:defRPr sz="2100" b="1">
+                <a:solidFill>
+                  <a:srgbClr val="000000"/>
+                </a:solidFill>
+                <a:latin typeface="Arial"/>
+                <a:ea typeface="Arial"/>
+                <a:cs typeface="Arial"/>
+              </a:defRPr>
+            </a:pPr>
+            <a:r>
+              <a:rPr sz="2100" b="1">
+                <a:solidFill>
+                  <a:srgbClr val="000000"/>
+                </a:solidFill>
+                <a:latin typeface="Arial"/>
+                <a:ea typeface="Arial"/>
+                <a:cs typeface="Arial"/>
+              </a:rPr>
+              <a:t>How</a:t>
+            </a:r>
+          </a:p>
+        </p:txBody>
+      </p:sp>
+      <p:sp>
+        <p:nvSpPr>
+          <p:cNvPr id="9" name="">
+            <a:extLst xmlns:a="http://schemas.openxmlformats.org/drawingml/2006/main">
+              <a:ext uri="{FF2B5EF4-FFF2-40B4-BE49-F238E27FC236}">
+                <a16:creationId xmlns:a16="http://schemas.microsoft.com/office/drawing/2014/main" id="{5B6B1C17-35A6-411A-A67C-A4A72F63EF67}"/>
+              </a:ext>
+            </a:extLst>
+          </p:cNvPr>
+          <p:cNvSpPr>
+            <a:spLocks xmlns:a="http://schemas.openxmlformats.org/drawingml/2006/main" noGrp="1"/>
+          </p:cNvSpPr>
+          <p:nvPr/>
+        </p:nvSpPr>
+        <p:spPr>
+          <a:xfrm xmlns:a="http://schemas.openxmlformats.org/drawingml/2006/main">
+            <a:off x="9201150" y="2038350"/>
+            <a:ext cx="2400300" cy="1143000"/>
+          </a:xfrm>
+          <a:prstGeom xmlns:a="http://schemas.openxmlformats.org/drawingml/2006/main" prst="rect">
+            <a:avLst/>
+          </a:prstGeom>
+          <a:noFill xmlns:a="http://schemas.openxmlformats.org/drawingml/2006/main"/>
+          <a:ln xmlns:a="http://schemas.openxmlformats.org/drawingml/2006/main" w="0">
+            <a:noFill/>
+            <a:prstDash val="solid"/>
+          </a:ln>
+        </p:spPr>
+        <p:txBody>
+          <a:bodyPr xmlns:a="http://schemas.openxmlformats.org/drawingml/2006/main" wrap="square" lIns="0" tIns="0" rIns="0" bIns="0" anchor="t">
+            <a:normAutofit fontScale="100000"/>
+          </a:bodyPr>
+          <a:lstStyle xmlns:a="http://schemas.openxmlformats.org/drawingml/2006/main"/>
+          <a:p xmlns:a="http://schemas.openxmlformats.org/drawingml/2006/main">
+            <a:pPr algn="l">
+              <a:buNone/>
+              <a:defRPr sz="1500" b="0">
+                <a:solidFill>
+                  <a:srgbClr val="273548"/>
+                </a:solidFill>
+                <a:latin typeface="Arial"/>
+                <a:ea typeface="Arial"/>
+                <a:cs typeface="Arial"/>
+              </a:defRPr>
+            </a:pPr>
+            <a:r>
+              <a:rPr sz="1500" b="0">
+                <a:solidFill>
+                  <a:srgbClr val="273548"/>
+                </a:solidFill>
+                <a:latin typeface="Arial"/>
+                <a:ea typeface="Arial"/>
+                <a:cs typeface="Arial"/>
+              </a:rPr>
+              <a:t>Accepted QQQ state uses Wilder ATR14 / close, ranked against the prior 252 completed QQQ ATR% observations.</a:t>
+            </a:r>
+          </a:p>
+        </p:txBody>
+      </p:sp>
+      <p:sp>
+        <p:nvSpPr>
+          <p:cNvPr id="10" name="">
+            <a:extLst xmlns:a="http://schemas.openxmlformats.org/drawingml/2006/main">
+              <a:ext uri="{FF2B5EF4-FFF2-40B4-BE49-F238E27FC236}">
+                <a16:creationId xmlns:a16="http://schemas.microsoft.com/office/drawing/2014/main" id="{1E6C96CB-CC04-417E-9ADF-6D8B711B5273}"/>
+              </a:ext>
+            </a:extLst>
+          </p:cNvPr>
+          <p:cNvSpPr>
+            <a:spLocks xmlns:a="http://schemas.openxmlformats.org/drawingml/2006/main" noGrp="1"/>
+          </p:cNvSpPr>
+          <p:nvPr/>
+        </p:nvSpPr>
+        <p:spPr>
+          <a:xfrm xmlns:a="http://schemas.openxmlformats.org/drawingml/2006/main">
+            <a:off x="9201150" y="3409950"/>
+            <a:ext cx="2190750" cy="361950"/>
+          </a:xfrm>
+          <a:prstGeom xmlns:a="http://schemas.openxmlformats.org/drawingml/2006/main" prst="rect">
+            <a:avLst/>
+          </a:prstGeom>
+          <a:noFill xmlns:a="http://schemas.openxmlformats.org/drawingml/2006/main"/>
+          <a:ln xmlns:a="http://schemas.openxmlformats.org/drawingml/2006/main" w="0">
+            <a:noFill/>
+            <a:prstDash val="solid"/>
+          </a:ln>
+        </p:spPr>
+        <p:txBody>
+          <a:bodyPr xmlns:a="http://schemas.openxmlformats.org/drawingml/2006/main" wrap="square" lIns="0" tIns="0" rIns="0" bIns="0" anchor="t">
+            <a:normAutofit fontScale="100000"/>
+          </a:bodyPr>
+          <a:lstStyle xmlns:a="http://schemas.openxmlformats.org/drawingml/2006/main"/>
+          <a:p xmlns:a="http://schemas.openxmlformats.org/drawingml/2006/main">
+            <a:pPr algn="l">
+              <a:buNone/>
+              <a:defRPr sz="2100" b="1">
+                <a:solidFill>
+                  <a:srgbClr val="000000"/>
+                </a:solidFill>
+                <a:latin typeface="Arial"/>
+                <a:ea typeface="Arial"/>
+                <a:cs typeface="Arial"/>
+              </a:defRPr>
+            </a:pPr>
+            <a:r>
+              <a:rPr sz="2100" b="1">
+                <a:solidFill>
+                  <a:srgbClr val="000000"/>
+                </a:solidFill>
+                <a:latin typeface="Arial"/>
+                <a:ea typeface="Arial"/>
+                <a:cs typeface="Arial"/>
+              </a:rPr>
+              <a:t>Read</a:t>
+            </a:r>
+          </a:p>
+        </p:txBody>
+      </p:sp>
+      <p:sp>
+        <p:nvSpPr>
+          <p:cNvPr id="11" name="">
+            <a:extLst xmlns:a="http://schemas.openxmlformats.org/drawingml/2006/main">
+              <a:ext uri="{FF2B5EF4-FFF2-40B4-BE49-F238E27FC236}">
+                <a16:creationId xmlns:a16="http://schemas.microsoft.com/office/drawing/2014/main" id="{6C2CCFF6-12C5-4DA0-960D-99266D20441C}"/>
+              </a:ext>
+            </a:extLst>
+          </p:cNvPr>
+          <p:cNvSpPr>
+            <a:spLocks xmlns:a="http://schemas.openxmlformats.org/drawingml/2006/main" noGrp="1"/>
+          </p:cNvSpPr>
+          <p:nvPr/>
+        </p:nvSpPr>
+        <p:spPr>
+          <a:xfrm xmlns:a="http://schemas.openxmlformats.org/drawingml/2006/main">
+            <a:off x="9201150" y="3867150"/>
+            <a:ext cx="2400300" cy="1657350"/>
+          </a:xfrm>
+          <a:prstGeom xmlns:a="http://schemas.openxmlformats.org/drawingml/2006/main" prst="rect">
+            <a:avLst/>
+          </a:prstGeom>
+          <a:noFill xmlns:a="http://schemas.openxmlformats.org/drawingml/2006/main"/>
+          <a:ln xmlns:a="http://schemas.openxmlformats.org/drawingml/2006/main" w="0">
+            <a:noFill/>
+            <a:prstDash val="solid"/>
+          </a:ln>
+        </p:spPr>
+        <p:txBody>
+          <a:bodyPr xmlns:a="http://schemas.openxmlformats.org/drawingml/2006/main" wrap="square" lIns="0" tIns="0" rIns="0" bIns="0" anchor="t">
+            <a:normAutofit fontScale="100000"/>
+          </a:bodyPr>
+          <a:lstStyle xmlns:a="http://schemas.openxmlformats.org/drawingml/2006/main"/>
+          <a:p xmlns:a="http://schemas.openxmlformats.org/drawingml/2006/main">
+            <a:pPr algn="l">
+              <a:buNone/>
+              <a:defRPr sz="1500" b="0">
+                <a:solidFill>
+                  <a:srgbClr val="273548"/>
+                </a:solidFill>
+                <a:latin typeface="Arial"/>
+                <a:ea typeface="Arial"/>
+                <a:cs typeface="Arial"/>
+              </a:defRPr>
+            </a:pPr>
+            <a:r>
+              <a:rPr sz="1500" b="0">
+                <a:solidFill>
+                  <a:srgbClr val="273548"/>
+                </a:solidFill>
+                <a:latin typeface="Arial"/>
+                <a:ea typeface="Arial"/>
+                <a:cs typeface="Arial"/>
+              </a:rPr>
+              <a:t>Bands are QQQ states over TSLA price. Blue LOW and red HIGH describe movement capacity—not bullish or bearish calls.</a:t>
+            </a:r>
+          </a:p>
+        </p:txBody>
+      </p:sp>
+      <p:sp>
+        <p:nvSpPr>
+          <p:cNvPr id="12" name="">
+            <a:extLst xmlns:a="http://schemas.openxmlformats.org/drawingml/2006/main">
+              <a:ext uri="{FF2B5EF4-FFF2-40B4-BE49-F238E27FC236}">
+                <a16:creationId xmlns:a16="http://schemas.microsoft.com/office/drawing/2014/main" id="{0ACC076C-14CF-4CC6-9A1F-9DE2F654A640}"/>
+              </a:ext>
+            </a:extLst>
+          </p:cNvPr>
+          <p:cNvSpPr>
+            <a:spLocks xmlns:a="http://schemas.openxmlformats.org/drawingml/2006/main" noGrp="1"/>
+          </p:cNvSpPr>
+          <p:nvPr/>
+        </p:nvSpPr>
+        <p:spPr>
+          <a:xfrm xmlns:a="http://schemas.openxmlformats.org/drawingml/2006/main">
+            <a:off x="9201150" y="5715000"/>
+            <a:ext cx="2400300" cy="38100"/>
+          </a:xfrm>
+          <a:prstGeom xmlns:a="http://schemas.openxmlformats.org/drawingml/2006/main" prst="rect">
+            <a:avLst/>
+          </a:prstGeom>
+          <a:solidFill xmlns:a="http://schemas.openxmlformats.org/drawingml/2006/main">
+            <a:srgbClr val="2A9D6F"/>
+          </a:solidFill>
+          <a:ln xmlns:a="http://schemas.openxmlformats.org/drawingml/2006/main" w="0">
+            <a:solidFill>
+              <a:srgbClr val="2A9D6F"/>
+            </a:solidFill>
+            <a:prstDash val="solid"/>
+          </a:ln>
+        </p:spPr>
+      </p:sp>
+      <p:sp>
+        <p:nvSpPr>
+          <p:cNvPr id="13" name="">
+            <a:extLst xmlns:a="http://schemas.openxmlformats.org/drawingml/2006/main">
+              <a:ext uri="{FF2B5EF4-FFF2-40B4-BE49-F238E27FC236}">
+                <a16:creationId xmlns:a16="http://schemas.microsoft.com/office/drawing/2014/main" id="{75B62FEB-4FFC-484D-8635-E7157EEBB857}"/>
+              </a:ext>
+            </a:extLst>
+          </p:cNvPr>
+          <p:cNvSpPr>
+            <a:spLocks xmlns:a="http://schemas.openxmlformats.org/drawingml/2006/main" noGrp="1"/>
+          </p:cNvSpPr>
+          <p:nvPr/>
+        </p:nvSpPr>
+        <p:spPr>
+          <a:xfrm xmlns:a="http://schemas.openxmlformats.org/drawingml/2006/main">
+            <a:off x="9201150" y="5867400"/>
+            <a:ext cx="2400300" cy="419100"/>
+          </a:xfrm>
+          <a:prstGeom xmlns:a="http://schemas.openxmlformats.org/drawingml/2006/main" prst="rect">
+            <a:avLst/>
+          </a:prstGeom>
+          <a:noFill xmlns:a="http://schemas.openxmlformats.org/drawingml/2006/main"/>
+          <a:ln xmlns:a="http://schemas.openxmlformats.org/drawingml/2006/main" w="0">
+            <a:noFill/>
+            <a:prstDash val="solid"/>
+          </a:ln>
+        </p:spPr>
+        <p:txBody>
+          <a:bodyPr xmlns:a="http://schemas.openxmlformats.org/drawingml/2006/main" wrap="square" lIns="0" tIns="0" rIns="0" bIns="0" anchor="t">
+            <a:normAutofit fontScale="100000"/>
+          </a:bodyPr>
+          <a:lstStyle xmlns:a="http://schemas.openxmlformats.org/drawingml/2006/main"/>
+          <a:p xmlns:a="http://schemas.openxmlformats.org/drawingml/2006/main">
+            <a:pPr algn="l">
+              <a:buNone/>
+              <a:defRPr sz="1275" b="1">
+                <a:solidFill>
+                  <a:srgbClr val="2A9D6F"/>
+                </a:solidFill>
+                <a:latin typeface="Arial"/>
+                <a:ea typeface="Arial"/>
+                <a:cs typeface="Arial"/>
+              </a:defRPr>
+            </a:pPr>
+            <a:r>
+              <a:rPr sz="1275" b="1">
+                <a:solidFill>
+                  <a:srgbClr val="2A9D6F"/>
+                </a:solidFill>
+                <a:latin typeface="Arial"/>
+                <a:ea typeface="Arial"/>
+                <a:cs typeface="Arial"/>
+              </a:rPr>
+              <a:t>Descriptive state—not a future-return claim</a:t>
+            </a:r>
+          </a:p>
+        </p:txBody>
+      </p:sp>
+      <p:pic>
+        <p:nvPicPr>
+          <p:cNvPr id="28" name=""/>
+          <p:cNvPicPr>
+            <a:picLocks xmlns:a="http://schemas.openxmlformats.org/drawingml/2006/main" noChangeAspect="1"/>
+          </p:cNvPicPr>
+          <p:nvPr/>
+        </p:nvPicPr>
+        <p:blipFill>
+          <a:blip xmlns:r="http://schemas.openxmlformats.org/officeDocument/2006/relationships" xmlns:a="http://schemas.openxmlformats.org/drawingml/2006/main" r:embed="Rcbbf63d5d7c74fda"/>
+          <a:stretch xmlns:a="http://schemas.openxmlformats.org/drawingml/2006/main"/>
+        </p:blipFill>
+        <p:spPr>
+          <a:xfrm xmlns:a="http://schemas.openxmlformats.org/drawingml/2006/main" flipH="0" flipV="0">
+            <a:off x="325967" y="1381125"/>
+            <a:ext cx="8568267" cy="4819650"/>
+          </a:xfrm>
+          <a:prstGeom xmlns:a="http://schemas.openxmlformats.org/drawingml/2006/main" prst="rect">
+            <a:avLst/>
+          </a:prstGeom>
+        </p:spPr>
+      </p:pic>
+    </p:spTree>
+    <p:extLst>
+      <p:ext uri="{BB962C8B-B14F-4D97-AF65-F5344CB8AC3E}">
+        <p14:creationId xmlns:p14="http://schemas.microsoft.com/office/powerpoint/2010/main" val="317191340"/>
+      </p:ext>
+    </p:extLst>
+  </p:cSld>
+</p:sld>
+</file>
+
+<file path=ppt/slides/slide43.xml><?xml version="1.0" encoding="utf-8"?>
+<p:sld xmlns:p="http://schemas.openxmlformats.org/presentationml/2006/main">
+  <p:cSld>
+    <p:bg>
+      <p:bgPr>
+        <a:solidFill xmlns:a="http://schemas.openxmlformats.org/drawingml/2006/main">
+          <a:srgbClr val="FFFFFF"/>
+        </a:solidFill>
+      </p:bgPr>
+    </p:bg>
+    <p:spTree>
+      <p:nvGrpSpPr>
+        <p:cNvPr id="1" name=""/>
+        <p:cNvGrpSpPr/>
+        <p:nvPr/>
+      </p:nvGrpSpPr>
+      <p:grpSpPr>
+        <a:xfrm xmlns:a="http://schemas.openxmlformats.org/drawingml/2006/main"/>
+      </p:grpSpPr>
+      <p:sp>
+        <p:nvSpPr>
+          <p:cNvPr id="9" name="section-4">
+            <a:extLst xmlns:a="http://schemas.openxmlformats.org/drawingml/2006/main">
+              <a:ext uri="{FF2B5EF4-FFF2-40B4-BE49-F238E27FC236}">
+                <a16:creationId xmlns:a16="http://schemas.microsoft.com/office/drawing/2014/main" id="{8AE0A271-669A-49F0-A82E-C4438BEE27D9}"/>
+              </a:ext>
+            </a:extLst>
+          </p:cNvPr>
+          <p:cNvSpPr>
+            <a:spLocks xmlns:a="http://schemas.openxmlformats.org/drawingml/2006/main" noGrp="1"/>
+          </p:cNvSpPr>
+          <p:nvPr/>
+        </p:nvSpPr>
+        <p:spPr>
+          <a:xfrm xmlns:a="http://schemas.openxmlformats.org/drawingml/2006/main">
+            <a:off x="457200" y="228600"/>
+            <a:ext cx="4191000" cy="228600"/>
+          </a:xfrm>
+          <a:prstGeom xmlns:a="http://schemas.openxmlformats.org/drawingml/2006/main" prst="rect">
+            <a:avLst/>
+          </a:prstGeom>
+          <a:noFill xmlns:a="http://schemas.openxmlformats.org/drawingml/2006/main"/>
+          <a:ln xmlns:a="http://schemas.openxmlformats.org/drawingml/2006/main" w="0">
+            <a:noFill/>
+            <a:prstDash val="solid"/>
+          </a:ln>
+        </p:spPr>
+        <p:txBody>
+          <a:bodyPr xmlns:a="http://schemas.openxmlformats.org/drawingml/2006/main" wrap="square" lIns="0" tIns="0" rIns="0" bIns="0" anchor="t">
+            <a:normAutofit fontScale="100000"/>
+          </a:bodyPr>
+          <a:lstStyle xmlns:a="http://schemas.openxmlformats.org/drawingml/2006/main"/>
+          <a:p xmlns:a="http://schemas.openxmlformats.org/drawingml/2006/main">
+            <a:pPr algn="l">
+              <a:buNone/>
+              <a:defRPr sz="1200" b="1">
+                <a:solidFill>
+                  <a:srgbClr val="667384"/>
+                </a:solidFill>
+                <a:latin typeface="Arial"/>
+                <a:ea typeface="Arial"/>
+                <a:cs typeface="Arial"/>
+              </a:defRPr>
+            </a:pPr>
+            <a:r>
+              <a:rPr sz="1200" b="1">
+                <a:solidFill>
+                  <a:srgbClr val="667384"/>
+                </a:solidFill>
+                <a:latin typeface="Arial"/>
+                <a:ea typeface="Arial"/>
+                <a:cs typeface="Arial"/>
+              </a:rPr>
+              <a:t>TSLA DESCRIPTIVE MICROSCOPE</a:t>
+            </a:r>
+          </a:p>
+        </p:txBody>
+      </p:sp>
+      <p:sp>
+        <p:nvSpPr>
+          <p:cNvPr id="2" name="title-4">
+            <a:extLst xmlns:a="http://schemas.openxmlformats.org/drawingml/2006/main">
+              <a:ext uri="{FF2B5EF4-FFF2-40B4-BE49-F238E27FC236}">
+                <a16:creationId xmlns:a16="http://schemas.microsoft.com/office/drawing/2014/main" id="{50C6F92F-721A-4252-9CF8-B5C9B01C7310}"/>
+              </a:ext>
+            </a:extLst>
+          </p:cNvPr>
+          <p:cNvSpPr>
+            <a:spLocks xmlns:a="http://schemas.openxmlformats.org/drawingml/2006/main" noGrp="1"/>
+          </p:cNvSpPr>
+          <p:nvPr/>
+        </p:nvSpPr>
+        <p:spPr>
+          <a:xfrm xmlns:a="http://schemas.openxmlformats.org/drawingml/2006/main">
+            <a:off x="457200" y="533400"/>
+            <a:ext cx="11277600" cy="628650"/>
+          </a:xfrm>
+          <a:prstGeom xmlns:a="http://schemas.openxmlformats.org/drawingml/2006/main" prst="rect">
+            <a:avLst/>
+          </a:prstGeom>
+          <a:noFill xmlns:a="http://schemas.openxmlformats.org/drawingml/2006/main"/>
+          <a:ln xmlns:a="http://schemas.openxmlformats.org/drawingml/2006/main" w="0">
+            <a:noFill/>
+            <a:prstDash val="solid"/>
+          </a:ln>
+        </p:spPr>
+        <p:txBody>
+          <a:bodyPr xmlns:a="http://schemas.openxmlformats.org/drawingml/2006/main" wrap="square" lIns="0" tIns="0" rIns="0" bIns="0" anchor="t">
+            <a:normAutofit fontScale="100000"/>
+          </a:bodyPr>
+          <a:lstStyle xmlns:a="http://schemas.openxmlformats.org/drawingml/2006/main"/>
+          <a:p xmlns:a="http://schemas.openxmlformats.org/drawingml/2006/main">
+            <a:pPr algn="l">
+              <a:buNone/>
+              <a:defRPr sz="3525" b="1">
+                <a:solidFill>
+                  <a:srgbClr val="000000"/>
+                </a:solidFill>
+                <a:latin typeface="Arial"/>
+                <a:ea typeface="Arial"/>
+                <a:cs typeface="Arial"/>
+              </a:defRPr>
+            </a:pPr>
+            <a:r>
+              <a:rPr sz="3525" b="1">
+                <a:solidFill>
+                  <a:srgbClr val="000000"/>
+                </a:solidFill>
+                <a:latin typeface="Arial"/>
+                <a:ea typeface="Arial"/>
+                <a:cs typeface="Arial"/>
+              </a:rPr>
+              <a:t>QQQ LOW reveals broad TSLA continuation</a:t>
+            </a:r>
+          </a:p>
+        </p:txBody>
+      </p:sp>
+      <p:sp>
+        <p:nvSpPr>
+          <p:cNvPr id="3" name="">
+            <a:extLst xmlns:a="http://schemas.openxmlformats.org/drawingml/2006/main">
+              <a:ext uri="{FF2B5EF4-FFF2-40B4-BE49-F238E27FC236}">
+                <a16:creationId xmlns:a16="http://schemas.microsoft.com/office/drawing/2014/main" id="{242399F2-4D0A-4337-B17E-DB3599DC380F}"/>
+              </a:ext>
+            </a:extLst>
+          </p:cNvPr>
+          <p:cNvSpPr>
+            <a:spLocks xmlns:a="http://schemas.openxmlformats.org/drawingml/2006/main" noGrp="1"/>
+          </p:cNvSpPr>
+          <p:nvPr/>
+        </p:nvSpPr>
+        <p:spPr>
+          <a:xfrm xmlns:a="http://schemas.openxmlformats.org/drawingml/2006/main">
+            <a:off x="457200" y="1200150"/>
+            <a:ext cx="11277600" cy="19050"/>
+          </a:xfrm>
+          <a:prstGeom xmlns:a="http://schemas.openxmlformats.org/drawingml/2006/main" prst="rect">
+            <a:avLst/>
+          </a:prstGeom>
+          <a:solidFill xmlns:a="http://schemas.openxmlformats.org/drawingml/2006/main">
+            <a:srgbClr val="B8BCC4"/>
+          </a:solidFill>
+          <a:ln xmlns:a="http://schemas.openxmlformats.org/drawingml/2006/main" w="0">
+            <a:solidFill>
+              <a:srgbClr val="B8BCC4"/>
+            </a:solidFill>
+            <a:prstDash val="solid"/>
+          </a:ln>
+        </p:spPr>
+      </p:sp>
+      <p:sp>
+        <p:nvSpPr>
+          <p:cNvPr id="4" name="footer-left-4">
+            <a:extLst xmlns:a="http://schemas.openxmlformats.org/drawingml/2006/main">
+              <a:ext uri="{FF2B5EF4-FFF2-40B4-BE49-F238E27FC236}">
+                <a16:creationId xmlns:a16="http://schemas.microsoft.com/office/drawing/2014/main" id="{BF8B82CA-1E48-4669-BAD8-1FF8C09FCBFB}"/>
+              </a:ext>
+            </a:extLst>
+          </p:cNvPr>
+          <p:cNvSpPr>
+            <a:spLocks xmlns:a="http://schemas.openxmlformats.org/drawingml/2006/main" noGrp="1"/>
+          </p:cNvSpPr>
+          <p:nvPr/>
+        </p:nvSpPr>
+        <p:spPr>
+          <a:xfrm xmlns:a="http://schemas.openxmlformats.org/drawingml/2006/main">
+            <a:off x="457200" y="6515100"/>
+            <a:ext cx="3429000" cy="171450"/>
+          </a:xfrm>
+          <a:prstGeom xmlns:a="http://schemas.openxmlformats.org/drawingml/2006/main" prst="rect">
+            <a:avLst/>
+          </a:prstGeom>
+          <a:noFill xmlns:a="http://schemas.openxmlformats.org/drawingml/2006/main"/>
+          <a:ln xmlns:a="http://schemas.openxmlformats.org/drawingml/2006/main" w="0">
+            <a:noFill/>
+            <a:prstDash val="solid"/>
+          </a:ln>
+        </p:spPr>
+        <p:txBody>
+          <a:bodyPr xmlns:a="http://schemas.openxmlformats.org/drawingml/2006/main" wrap="square" lIns="0" tIns="0" rIns="0" bIns="0" anchor="t">
+            <a:normAutofit fontScale="100000"/>
+          </a:bodyPr>
+          <a:lstStyle xmlns:a="http://schemas.openxmlformats.org/drawingml/2006/main"/>
+          <a:p xmlns:a="http://schemas.openxmlformats.org/drawingml/2006/main">
+            <a:pPr algn="l">
+              <a:buNone/>
+              <a:defRPr sz="1050" b="0">
+                <a:solidFill>
+                  <a:srgbClr val="667384"/>
+                </a:solidFill>
+                <a:latin typeface="Arial"/>
+                <a:ea typeface="Arial"/>
+                <a:cs typeface="Arial"/>
+              </a:defRPr>
+            </a:pPr>
+            <a:r>
+              <a:rPr sz="1050" b="0">
+                <a:solidFill>
+                  <a:srgbClr val="667384"/>
+                </a:solidFill>
+                <a:latin typeface="Arial"/>
+                <a:ea typeface="Arial"/>
+                <a:cs typeface="Arial"/>
+              </a:rPr>
+              <a:t>Adjusted daily TSLA | 2018-2023</a:t>
+            </a:r>
+          </a:p>
+        </p:txBody>
+      </p:sp>
+      <p:sp>
+        <p:nvSpPr>
+          <p:cNvPr id="5" name="footer-number-4">
+            <a:extLst xmlns:a="http://schemas.openxmlformats.org/drawingml/2006/main">
+              <a:ext uri="{FF2B5EF4-FFF2-40B4-BE49-F238E27FC236}">
+                <a16:creationId xmlns:a16="http://schemas.microsoft.com/office/drawing/2014/main" id="{05959AEC-B0A5-45F0-A65B-C94C3E5A032F}"/>
+              </a:ext>
+            </a:extLst>
+          </p:cNvPr>
+          <p:cNvSpPr>
+            <a:spLocks xmlns:a="http://schemas.openxmlformats.org/drawingml/2006/main" noGrp="1"/>
+          </p:cNvSpPr>
+          <p:nvPr/>
+        </p:nvSpPr>
+        <p:spPr>
+          <a:xfrm xmlns:a="http://schemas.openxmlformats.org/drawingml/2006/main">
+            <a:off x="11239500" y="6496050"/>
+            <a:ext cx="495300" cy="190500"/>
+          </a:xfrm>
+          <a:prstGeom xmlns:a="http://schemas.openxmlformats.org/drawingml/2006/main" prst="rect">
+            <a:avLst/>
+          </a:prstGeom>
+          <a:noFill xmlns:a="http://schemas.openxmlformats.org/drawingml/2006/main"/>
+          <a:ln xmlns:a="http://schemas.openxmlformats.org/drawingml/2006/main" w="0">
+            <a:noFill/>
+            <a:prstDash val="solid"/>
+          </a:ln>
+        </p:spPr>
+        <p:txBody>
+          <a:bodyPr xmlns:a="http://schemas.openxmlformats.org/drawingml/2006/main" wrap="square" lIns="0" tIns="0" rIns="0" bIns="0" anchor="t">
+            <a:normAutofit fontScale="100000"/>
+          </a:bodyPr>
+          <a:lstStyle xmlns:a="http://schemas.openxmlformats.org/drawingml/2006/main"/>
+          <a:p xmlns:a="http://schemas.openxmlformats.org/drawingml/2006/main">
+            <a:pPr algn="r">
+              <a:buNone/>
+              <a:defRPr sz="1050" b="0">
+                <a:solidFill>
+                  <a:srgbClr val="667384"/>
+                </a:solidFill>
+                <a:latin typeface="Arial"/>
+                <a:ea typeface="Arial"/>
+                <a:cs typeface="Arial"/>
+              </a:defRPr>
+            </a:pPr>
+            <a:r>
+              <a:rPr sz="1050" b="0">
+                <a:solidFill>
+                  <a:srgbClr val="667384"/>
+                </a:solidFill>
+                <a:latin typeface="Arial"/>
+                <a:ea typeface="Arial"/>
+                <a:cs typeface="Arial"/>
+              </a:rPr>
+              <a:t>43</a:t>
+            </a:r>
+          </a:p>
+        </p:txBody>
+      </p:sp>
+      <p:sp>
+        <p:nvSpPr>
+          <p:cNvPr id="6" name="">
+            <a:extLst xmlns:a="http://schemas.openxmlformats.org/drawingml/2006/main">
+              <a:ext uri="{FF2B5EF4-FFF2-40B4-BE49-F238E27FC236}">
+                <a16:creationId xmlns:a16="http://schemas.microsoft.com/office/drawing/2014/main" id="{9C8DEA29-E57D-4C8D-8538-2028FF89DA7C}"/>
+              </a:ext>
+            </a:extLst>
+          </p:cNvPr>
+          <p:cNvSpPr>
+            <a:spLocks xmlns:a="http://schemas.openxmlformats.org/drawingml/2006/main" noGrp="1"/>
+          </p:cNvSpPr>
+          <p:nvPr/>
+        </p:nvSpPr>
+        <p:spPr>
+          <a:xfrm xmlns:a="http://schemas.openxmlformats.org/drawingml/2006/main">
+            <a:off x="1000125" y="1352550"/>
+            <a:ext cx="10191750" cy="4905375"/>
+          </a:xfrm>
+          <a:prstGeom xmlns:a="http://schemas.openxmlformats.org/drawingml/2006/main" prst="rect">
+            <a:avLst/>
+          </a:prstGeom>
+          <a:solidFill xmlns:a="http://schemas.openxmlformats.org/drawingml/2006/main">
+            <a:srgbClr val="FFFFFF"/>
+          </a:solidFill>
+          <a:ln xmlns:a="http://schemas.openxmlformats.org/drawingml/2006/main" w="9525">
+            <a:solidFill>
+              <a:srgbClr val="B8BCC4"/>
+            </a:solidFill>
+            <a:prstDash val="solid"/>
+          </a:ln>
+        </p:spPr>
+      </p:sp>
+      <p:sp>
+        <p:nvSpPr>
+          <p:cNvPr id="8" name="">
+            <a:extLst xmlns:a="http://schemas.openxmlformats.org/drawingml/2006/main">
+              <a:ext uri="{FF2B5EF4-FFF2-40B4-BE49-F238E27FC236}">
+                <a16:creationId xmlns:a16="http://schemas.microsoft.com/office/drawing/2014/main" id="{4346A5F2-8CC4-4151-9BDB-346D47A3096B}"/>
+              </a:ext>
+            </a:extLst>
+          </p:cNvPr>
+          <p:cNvSpPr>
+            <a:spLocks xmlns:a="http://schemas.openxmlformats.org/drawingml/2006/main" noGrp="1"/>
+          </p:cNvSpPr>
+          <p:nvPr/>
+        </p:nvSpPr>
+        <p:spPr>
+          <a:xfrm xmlns:a="http://schemas.openxmlformats.org/drawingml/2006/main">
+            <a:off x="1143000" y="6286500"/>
+            <a:ext cx="9906000" cy="171450"/>
+          </a:xfrm>
+          <a:prstGeom xmlns:a="http://schemas.openxmlformats.org/drawingml/2006/main" prst="rect">
+            <a:avLst/>
+          </a:prstGeom>
+          <a:noFill xmlns:a="http://schemas.openxmlformats.org/drawingml/2006/main"/>
+          <a:ln xmlns:a="http://schemas.openxmlformats.org/drawingml/2006/main" w="0">
+            <a:noFill/>
+            <a:prstDash val="solid"/>
+          </a:ln>
+        </p:spPr>
+        <p:txBody>
+          <a:bodyPr xmlns:a="http://schemas.openxmlformats.org/drawingml/2006/main" wrap="square" lIns="0" tIns="0" rIns="0" bIns="0" anchor="t">
+            <a:normAutofit fontScale="93750"/>
+          </a:bodyPr>
+          <a:lstStyle xmlns:a="http://schemas.openxmlformats.org/drawingml/2006/main"/>
+          <a:p xmlns:a="http://schemas.openxmlformats.org/drawingml/2006/main">
+            <a:pPr algn="ctr">
+              <a:buNone/>
+              <a:defRPr sz="1200" b="0">
+                <a:solidFill>
+                  <a:srgbClr val="667384"/>
+                </a:solidFill>
+                <a:latin typeface="Arial"/>
+                <a:ea typeface="Arial"/>
+                <a:cs typeface="Arial"/>
+              </a:defRPr>
+            </a:pPr>
+            <a:r>
+              <a:rPr sz="1200" b="0">
+                <a:solidFill>
+                  <a:srgbClr val="667384"/>
+                </a:solidFill>
+                <a:latin typeface="Arial"/>
+                <a:ea typeface="Arial"/>
+                <a:cs typeface="Arial"/>
+              </a:rPr>
+              <a:t>77/81 cells positive; strongest +0.260 at 10 prior / 5 forward; family q = 0.051, so 0/81 passes.</a:t>
+            </a:r>
+          </a:p>
+        </p:txBody>
+      </p:sp>
+      <p:pic>
+        <p:nvPicPr>
+          <p:cNvPr id="18" name=""/>
+          <p:cNvPicPr>
+            <a:picLocks xmlns:a="http://schemas.openxmlformats.org/drawingml/2006/main" noChangeAspect="1"/>
+          </p:cNvPicPr>
+          <p:nvPr/>
+        </p:nvPicPr>
+        <p:blipFill>
+          <a:blip xmlns:r="http://schemas.openxmlformats.org/officeDocument/2006/relationships" xmlns:a="http://schemas.openxmlformats.org/drawingml/2006/main" r:embed="R1e7c5212cbfa4434"/>
+          <a:stretch xmlns:a="http://schemas.openxmlformats.org/drawingml/2006/main"/>
+        </p:blipFill>
+        <p:spPr>
+          <a:xfrm xmlns:a="http://schemas.openxmlformats.org/drawingml/2006/main" flipH="0" flipV="0">
+            <a:off x="2942545" y="1352550"/>
+            <a:ext cx="6306911" cy="4905375"/>
+          </a:xfrm>
+          <a:prstGeom xmlns:a="http://schemas.openxmlformats.org/drawingml/2006/main" prst="rect">
+            <a:avLst/>
+          </a:prstGeom>
+        </p:spPr>
+      </p:pic>
+    </p:spTree>
+    <p:extLst>
+      <p:ext uri="{BB962C8B-B14F-4D97-AF65-F5344CB8AC3E}">
+        <p14:creationId xmlns:p14="http://schemas.microsoft.com/office/powerpoint/2010/main" val="400872380"/>
+      </p:ext>
+    </p:extLst>
+  </p:cSld>
+</p:sld>
+</file>
+
+<file path=ppt/slides/slide44.xml><?xml version="1.0" encoding="utf-8"?>
+<p:sld xmlns:p="http://schemas.openxmlformats.org/presentationml/2006/main">
+  <p:cSld>
+    <p:bg>
+      <p:bgPr>
+        <a:solidFill xmlns:a="http://schemas.openxmlformats.org/drawingml/2006/main">
+          <a:srgbClr val="FFFFFF"/>
+        </a:solidFill>
+      </p:bgPr>
+    </p:bg>
+    <p:spTree>
+      <p:nvGrpSpPr>
+        <p:cNvPr id="1" name=""/>
+        <p:cNvGrpSpPr/>
+        <p:nvPr/>
+      </p:nvGrpSpPr>
+      <p:grpSpPr>
+        <a:xfrm xmlns:a="http://schemas.openxmlformats.org/drawingml/2006/main"/>
+      </p:grpSpPr>
+      <p:sp>
+        <p:nvSpPr>
+          <p:cNvPr id="9" name="section-4">
+            <a:extLst xmlns:a="http://schemas.openxmlformats.org/drawingml/2006/main">
+              <a:ext uri="{FF2B5EF4-FFF2-40B4-BE49-F238E27FC236}">
+                <a16:creationId xmlns:a16="http://schemas.microsoft.com/office/drawing/2014/main" id="{8AE0A271-669A-49F0-A82E-C4438BEE27D9}"/>
+              </a:ext>
+            </a:extLst>
+          </p:cNvPr>
+          <p:cNvSpPr>
+            <a:spLocks xmlns:a="http://schemas.openxmlformats.org/drawingml/2006/main" noGrp="1"/>
+          </p:cNvSpPr>
+          <p:nvPr/>
+        </p:nvSpPr>
+        <p:spPr>
+          <a:xfrm xmlns:a="http://schemas.openxmlformats.org/drawingml/2006/main">
+            <a:off x="457200" y="228600"/>
+            <a:ext cx="4191000" cy="228600"/>
+          </a:xfrm>
+          <a:prstGeom xmlns:a="http://schemas.openxmlformats.org/drawingml/2006/main" prst="rect">
+            <a:avLst/>
+          </a:prstGeom>
+          <a:noFill xmlns:a="http://schemas.openxmlformats.org/drawingml/2006/main"/>
+          <a:ln xmlns:a="http://schemas.openxmlformats.org/drawingml/2006/main" w="0">
+            <a:noFill/>
+            <a:prstDash val="solid"/>
+          </a:ln>
+        </p:spPr>
+        <p:txBody>
+          <a:bodyPr xmlns:a="http://schemas.openxmlformats.org/drawingml/2006/main" wrap="square" lIns="0" tIns="0" rIns="0" bIns="0" anchor="t">
+            <a:normAutofit fontScale="100000"/>
+          </a:bodyPr>
+          <a:lstStyle xmlns:a="http://schemas.openxmlformats.org/drawingml/2006/main"/>
+          <a:p xmlns:a="http://schemas.openxmlformats.org/drawingml/2006/main">
+            <a:pPr algn="l">
+              <a:buNone/>
+              <a:defRPr sz="1200" b="1">
+                <a:solidFill>
+                  <a:srgbClr val="667384"/>
+                </a:solidFill>
+                <a:latin typeface="Arial"/>
+                <a:ea typeface="Arial"/>
+                <a:cs typeface="Arial"/>
+              </a:defRPr>
+            </a:pPr>
+            <a:r>
+              <a:rPr sz="1200" b="1">
+                <a:solidFill>
+                  <a:srgbClr val="667384"/>
+                </a:solidFill>
+                <a:latin typeface="Arial"/>
+                <a:ea typeface="Arial"/>
+                <a:cs typeface="Arial"/>
+              </a:rPr>
+              <a:t>TSLA DESCRIPTIVE MICROSCOPE</a:t>
+            </a:r>
+          </a:p>
+        </p:txBody>
+      </p:sp>
+      <p:sp>
+        <p:nvSpPr>
+          <p:cNvPr id="2" name="title-4">
+            <a:extLst xmlns:a="http://schemas.openxmlformats.org/drawingml/2006/main">
+              <a:ext uri="{FF2B5EF4-FFF2-40B4-BE49-F238E27FC236}">
+                <a16:creationId xmlns:a16="http://schemas.microsoft.com/office/drawing/2014/main" id="{50C6F92F-721A-4252-9CF8-B5C9B01C7310}"/>
+              </a:ext>
+            </a:extLst>
+          </p:cNvPr>
+          <p:cNvSpPr>
+            <a:spLocks xmlns:a="http://schemas.openxmlformats.org/drawingml/2006/main" noGrp="1"/>
+          </p:cNvSpPr>
+          <p:nvPr/>
+        </p:nvSpPr>
+        <p:spPr>
+          <a:xfrm xmlns:a="http://schemas.openxmlformats.org/drawingml/2006/main">
+            <a:off x="457200" y="533400"/>
+            <a:ext cx="11277600" cy="628650"/>
+          </a:xfrm>
+          <a:prstGeom xmlns:a="http://schemas.openxmlformats.org/drawingml/2006/main" prst="rect">
+            <a:avLst/>
+          </a:prstGeom>
+          <a:noFill xmlns:a="http://schemas.openxmlformats.org/drawingml/2006/main"/>
+          <a:ln xmlns:a="http://schemas.openxmlformats.org/drawingml/2006/main" w="0">
+            <a:noFill/>
+            <a:prstDash val="solid"/>
+          </a:ln>
+        </p:spPr>
+        <p:txBody>
+          <a:bodyPr xmlns:a="http://schemas.openxmlformats.org/drawingml/2006/main" wrap="square" lIns="0" tIns="0" rIns="0" bIns="0" anchor="t">
+            <a:normAutofit fontScale="100000"/>
+          </a:bodyPr>
+          <a:lstStyle xmlns:a="http://schemas.openxmlformats.org/drawingml/2006/main"/>
+          <a:p xmlns:a="http://schemas.openxmlformats.org/drawingml/2006/main">
+            <a:pPr algn="l">
+              <a:buNone/>
+              <a:defRPr sz="3525" b="1">
+                <a:solidFill>
+                  <a:srgbClr val="000000"/>
+                </a:solidFill>
+                <a:latin typeface="Arial"/>
+                <a:ea typeface="Arial"/>
+                <a:cs typeface="Arial"/>
+              </a:defRPr>
+            </a:pPr>
+            <a:r>
+              <a:rPr sz="3525" b="1">
+                <a:solidFill>
+                  <a:srgbClr val="000000"/>
+                </a:solidFill>
+                <a:latin typeface="Arial"/>
+                <a:ea typeface="Arial"/>
+                <a:cs typeface="Arial"/>
+              </a:rPr>
+              <a:t>QQQ MEDIUM weakens at longer horizons</a:t>
+            </a:r>
+          </a:p>
+        </p:txBody>
+      </p:sp>
+      <p:sp>
+        <p:nvSpPr>
+          <p:cNvPr id="3" name="">
+            <a:extLst xmlns:a="http://schemas.openxmlformats.org/drawingml/2006/main">
+              <a:ext uri="{FF2B5EF4-FFF2-40B4-BE49-F238E27FC236}">
+                <a16:creationId xmlns:a16="http://schemas.microsoft.com/office/drawing/2014/main" id="{242399F2-4D0A-4337-B17E-DB3599DC380F}"/>
+              </a:ext>
+            </a:extLst>
+          </p:cNvPr>
+          <p:cNvSpPr>
+            <a:spLocks xmlns:a="http://schemas.openxmlformats.org/drawingml/2006/main" noGrp="1"/>
+          </p:cNvSpPr>
+          <p:nvPr/>
+        </p:nvSpPr>
+        <p:spPr>
+          <a:xfrm xmlns:a="http://schemas.openxmlformats.org/drawingml/2006/main">
+            <a:off x="457200" y="1200150"/>
+            <a:ext cx="11277600" cy="19050"/>
+          </a:xfrm>
+          <a:prstGeom xmlns:a="http://schemas.openxmlformats.org/drawingml/2006/main" prst="rect">
+            <a:avLst/>
+          </a:prstGeom>
+          <a:solidFill xmlns:a="http://schemas.openxmlformats.org/drawingml/2006/main">
+            <a:srgbClr val="B8BCC4"/>
+          </a:solidFill>
+          <a:ln xmlns:a="http://schemas.openxmlformats.org/drawingml/2006/main" w="0">
+            <a:solidFill>
+              <a:srgbClr val="B8BCC4"/>
+            </a:solidFill>
+            <a:prstDash val="solid"/>
+          </a:ln>
+        </p:spPr>
+      </p:sp>
+      <p:sp>
+        <p:nvSpPr>
+          <p:cNvPr id="4" name="footer-left-4">
+            <a:extLst xmlns:a="http://schemas.openxmlformats.org/drawingml/2006/main">
+              <a:ext uri="{FF2B5EF4-FFF2-40B4-BE49-F238E27FC236}">
+                <a16:creationId xmlns:a16="http://schemas.microsoft.com/office/drawing/2014/main" id="{BF8B82CA-1E48-4669-BAD8-1FF8C09FCBFB}"/>
+              </a:ext>
+            </a:extLst>
+          </p:cNvPr>
+          <p:cNvSpPr>
+            <a:spLocks xmlns:a="http://schemas.openxmlformats.org/drawingml/2006/main" noGrp="1"/>
+          </p:cNvSpPr>
+          <p:nvPr/>
+        </p:nvSpPr>
+        <p:spPr>
+          <a:xfrm xmlns:a="http://schemas.openxmlformats.org/drawingml/2006/main">
+            <a:off x="457200" y="6515100"/>
+            <a:ext cx="3429000" cy="171450"/>
+          </a:xfrm>
+          <a:prstGeom xmlns:a="http://schemas.openxmlformats.org/drawingml/2006/main" prst="rect">
+            <a:avLst/>
+          </a:prstGeom>
+          <a:noFill xmlns:a="http://schemas.openxmlformats.org/drawingml/2006/main"/>
+          <a:ln xmlns:a="http://schemas.openxmlformats.org/drawingml/2006/main" w="0">
+            <a:noFill/>
+            <a:prstDash val="solid"/>
+          </a:ln>
+        </p:spPr>
+        <p:txBody>
+          <a:bodyPr xmlns:a="http://schemas.openxmlformats.org/drawingml/2006/main" wrap="square" lIns="0" tIns="0" rIns="0" bIns="0" anchor="t">
+            <a:normAutofit fontScale="100000"/>
+          </a:bodyPr>
+          <a:lstStyle xmlns:a="http://schemas.openxmlformats.org/drawingml/2006/main"/>
+          <a:p xmlns:a="http://schemas.openxmlformats.org/drawingml/2006/main">
+            <a:pPr algn="l">
+              <a:buNone/>
+              <a:defRPr sz="1050" b="0">
+                <a:solidFill>
+                  <a:srgbClr val="667384"/>
+                </a:solidFill>
+                <a:latin typeface="Arial"/>
+                <a:ea typeface="Arial"/>
+                <a:cs typeface="Arial"/>
+              </a:defRPr>
+            </a:pPr>
+            <a:r>
+              <a:rPr sz="1050" b="0">
+                <a:solidFill>
+                  <a:srgbClr val="667384"/>
+                </a:solidFill>
+                <a:latin typeface="Arial"/>
+                <a:ea typeface="Arial"/>
+                <a:cs typeface="Arial"/>
+              </a:rPr>
+              <a:t>Adjusted daily TSLA | 2018-2023</a:t>
+            </a:r>
+          </a:p>
+        </p:txBody>
+      </p:sp>
+      <p:sp>
+        <p:nvSpPr>
+          <p:cNvPr id="5" name="footer-number-4">
+            <a:extLst xmlns:a="http://schemas.openxmlformats.org/drawingml/2006/main">
+              <a:ext uri="{FF2B5EF4-FFF2-40B4-BE49-F238E27FC236}">
+                <a16:creationId xmlns:a16="http://schemas.microsoft.com/office/drawing/2014/main" id="{05959AEC-B0A5-45F0-A65B-C94C3E5A032F}"/>
+              </a:ext>
+            </a:extLst>
+          </p:cNvPr>
+          <p:cNvSpPr>
+            <a:spLocks xmlns:a="http://schemas.openxmlformats.org/drawingml/2006/main" noGrp="1"/>
+          </p:cNvSpPr>
+          <p:nvPr/>
+        </p:nvSpPr>
+        <p:spPr>
+          <a:xfrm xmlns:a="http://schemas.openxmlformats.org/drawingml/2006/main">
+            <a:off x="11239500" y="6496050"/>
+            <a:ext cx="495300" cy="190500"/>
+          </a:xfrm>
+          <a:prstGeom xmlns:a="http://schemas.openxmlformats.org/drawingml/2006/main" prst="rect">
+            <a:avLst/>
+          </a:prstGeom>
+          <a:noFill xmlns:a="http://schemas.openxmlformats.org/drawingml/2006/main"/>
+          <a:ln xmlns:a="http://schemas.openxmlformats.org/drawingml/2006/main" w="0">
+            <a:noFill/>
+            <a:prstDash val="solid"/>
+          </a:ln>
+        </p:spPr>
+        <p:txBody>
+          <a:bodyPr xmlns:a="http://schemas.openxmlformats.org/drawingml/2006/main" wrap="square" lIns="0" tIns="0" rIns="0" bIns="0" anchor="t">
+            <a:normAutofit fontScale="100000"/>
+          </a:bodyPr>
+          <a:lstStyle xmlns:a="http://schemas.openxmlformats.org/drawingml/2006/main"/>
+          <a:p xmlns:a="http://schemas.openxmlformats.org/drawingml/2006/main">
+            <a:pPr algn="r">
+              <a:buNone/>
+              <a:defRPr sz="1050" b="0">
+                <a:solidFill>
+                  <a:srgbClr val="667384"/>
+                </a:solidFill>
+                <a:latin typeface="Arial"/>
+                <a:ea typeface="Arial"/>
+                <a:cs typeface="Arial"/>
+              </a:defRPr>
+            </a:pPr>
+            <a:r>
+              <a:rPr sz="1050" b="0">
+                <a:solidFill>
+                  <a:srgbClr val="667384"/>
+                </a:solidFill>
+                <a:latin typeface="Arial"/>
+                <a:ea typeface="Arial"/>
+                <a:cs typeface="Arial"/>
+              </a:rPr>
+              <a:t>44</a:t>
+            </a:r>
+          </a:p>
+        </p:txBody>
+      </p:sp>
+      <p:sp>
+        <p:nvSpPr>
+          <p:cNvPr id="6" name="">
+            <a:extLst xmlns:a="http://schemas.openxmlformats.org/drawingml/2006/main">
+              <a:ext uri="{FF2B5EF4-FFF2-40B4-BE49-F238E27FC236}">
+                <a16:creationId xmlns:a16="http://schemas.microsoft.com/office/drawing/2014/main" id="{9C8DEA29-E57D-4C8D-8538-2028FF89DA7C}"/>
+              </a:ext>
+            </a:extLst>
+          </p:cNvPr>
+          <p:cNvSpPr>
+            <a:spLocks xmlns:a="http://schemas.openxmlformats.org/drawingml/2006/main" noGrp="1"/>
+          </p:cNvSpPr>
+          <p:nvPr/>
+        </p:nvSpPr>
+        <p:spPr>
+          <a:xfrm xmlns:a="http://schemas.openxmlformats.org/drawingml/2006/main">
+            <a:off x="1000125" y="1352550"/>
+            <a:ext cx="10191750" cy="4905375"/>
+          </a:xfrm>
+          <a:prstGeom xmlns:a="http://schemas.openxmlformats.org/drawingml/2006/main" prst="rect">
+            <a:avLst/>
+          </a:prstGeom>
+          <a:solidFill xmlns:a="http://schemas.openxmlformats.org/drawingml/2006/main">
+            <a:srgbClr val="FFFFFF"/>
+          </a:solidFill>
+          <a:ln xmlns:a="http://schemas.openxmlformats.org/drawingml/2006/main" w="9525">
+            <a:solidFill>
+              <a:srgbClr val="B8BCC4"/>
+            </a:solidFill>
+            <a:prstDash val="solid"/>
+          </a:ln>
+        </p:spPr>
+      </p:sp>
+      <p:sp>
+        <p:nvSpPr>
+          <p:cNvPr id="8" name="">
+            <a:extLst xmlns:a="http://schemas.openxmlformats.org/drawingml/2006/main">
+              <a:ext uri="{FF2B5EF4-FFF2-40B4-BE49-F238E27FC236}">
+                <a16:creationId xmlns:a16="http://schemas.microsoft.com/office/drawing/2014/main" id="{4346A5F2-8CC4-4151-9BDB-346D47A3096B}"/>
+              </a:ext>
+            </a:extLst>
+          </p:cNvPr>
+          <p:cNvSpPr>
+            <a:spLocks xmlns:a="http://schemas.openxmlformats.org/drawingml/2006/main" noGrp="1"/>
+          </p:cNvSpPr>
+          <p:nvPr/>
+        </p:nvSpPr>
+        <p:spPr>
+          <a:xfrm xmlns:a="http://schemas.openxmlformats.org/drawingml/2006/main">
+            <a:off x="1143000" y="6286500"/>
+            <a:ext cx="9906000" cy="171450"/>
+          </a:xfrm>
+          <a:prstGeom xmlns:a="http://schemas.openxmlformats.org/drawingml/2006/main" prst="rect">
+            <a:avLst/>
+          </a:prstGeom>
+          <a:noFill xmlns:a="http://schemas.openxmlformats.org/drawingml/2006/main"/>
+          <a:ln xmlns:a="http://schemas.openxmlformats.org/drawingml/2006/main" w="0">
+            <a:noFill/>
+            <a:prstDash val="solid"/>
+          </a:ln>
+        </p:spPr>
+        <p:txBody>
+          <a:bodyPr xmlns:a="http://schemas.openxmlformats.org/drawingml/2006/main" wrap="square" lIns="0" tIns="0" rIns="0" bIns="0" anchor="t">
+            <a:normAutofit fontScale="93750"/>
+          </a:bodyPr>
+          <a:lstStyle xmlns:a="http://schemas.openxmlformats.org/drawingml/2006/main"/>
+          <a:p xmlns:a="http://schemas.openxmlformats.org/drawingml/2006/main">
+            <a:pPr algn="ctr">
+              <a:buNone/>
+              <a:defRPr sz="1200" b="0">
+                <a:solidFill>
+                  <a:srgbClr val="667384"/>
+                </a:solidFill>
+                <a:latin typeface="Arial"/>
+                <a:ea typeface="Arial"/>
+                <a:cs typeface="Arial"/>
+              </a:defRPr>
+            </a:pPr>
+            <a:r>
+              <a:rPr sz="1200" b="0">
+                <a:solidFill>
+                  <a:srgbClr val="667384"/>
+                </a:solidFill>
+                <a:latin typeface="Arial"/>
+                <a:ea typeface="Arial"/>
+                <a:cs typeface="Arial"/>
+              </a:rPr>
+              <a:t>44/81 cells positive; long/long cells turn negative; strongest -0.224 at 20 prior / 25 forward; 0/81 passes.</a:t>
+            </a:r>
+          </a:p>
+        </p:txBody>
+      </p:sp>
+      <p:pic>
+        <p:nvPicPr>
+          <p:cNvPr id="18" name=""/>
+          <p:cNvPicPr>
+            <a:picLocks xmlns:a="http://schemas.openxmlformats.org/drawingml/2006/main" noChangeAspect="1"/>
+          </p:cNvPicPr>
+          <p:nvPr/>
+        </p:nvPicPr>
+        <p:blipFill>
+          <a:blip xmlns:r="http://schemas.openxmlformats.org/officeDocument/2006/relationships" xmlns:a="http://schemas.openxmlformats.org/drawingml/2006/main" r:embed="R2c2d3ddfd03a4304"/>
+          <a:stretch xmlns:a="http://schemas.openxmlformats.org/drawingml/2006/main"/>
+        </p:blipFill>
+        <p:spPr>
+          <a:xfrm xmlns:a="http://schemas.openxmlformats.org/drawingml/2006/main" flipH="0" flipV="0">
+            <a:off x="2942545" y="1352550"/>
+            <a:ext cx="6306911" cy="4905375"/>
+          </a:xfrm>
+          <a:prstGeom xmlns:a="http://schemas.openxmlformats.org/drawingml/2006/main" prst="rect">
+            <a:avLst/>
+          </a:prstGeom>
+        </p:spPr>
+      </p:pic>
+    </p:spTree>
+    <p:extLst>
+      <p:ext uri="{BB962C8B-B14F-4D97-AF65-F5344CB8AC3E}">
+        <p14:creationId xmlns:p14="http://schemas.microsoft.com/office/powerpoint/2010/main" val="400872380"/>
+      </p:ext>
+    </p:extLst>
+  </p:cSld>
+</p:sld>
+</file>
+
+<file path=ppt/slides/slide45.xml><?xml version="1.0" encoding="utf-8"?>
+<p:sld xmlns:p="http://schemas.openxmlformats.org/presentationml/2006/main">
+  <p:cSld>
+    <p:bg>
+      <p:bgPr>
+        <a:solidFill xmlns:a="http://schemas.openxmlformats.org/drawingml/2006/main">
+          <a:srgbClr val="FFFFFF"/>
+        </a:solidFill>
+      </p:bgPr>
+    </p:bg>
+    <p:spTree>
+      <p:nvGrpSpPr>
+        <p:cNvPr id="1" name=""/>
+        <p:cNvGrpSpPr/>
+        <p:nvPr/>
+      </p:nvGrpSpPr>
+      <p:grpSpPr>
+        <a:xfrm xmlns:a="http://schemas.openxmlformats.org/drawingml/2006/main"/>
+      </p:grpSpPr>
+      <p:sp>
+        <p:nvSpPr>
+          <p:cNvPr id="9" name="section-4">
+            <a:extLst xmlns:a="http://schemas.openxmlformats.org/drawingml/2006/main">
+              <a:ext uri="{FF2B5EF4-FFF2-40B4-BE49-F238E27FC236}">
+                <a16:creationId xmlns:a16="http://schemas.microsoft.com/office/drawing/2014/main" id="{8AE0A271-669A-49F0-A82E-C4438BEE27D9}"/>
+              </a:ext>
+            </a:extLst>
+          </p:cNvPr>
+          <p:cNvSpPr>
+            <a:spLocks xmlns:a="http://schemas.openxmlformats.org/drawingml/2006/main" noGrp="1"/>
+          </p:cNvSpPr>
+          <p:nvPr/>
+        </p:nvSpPr>
+        <p:spPr>
+          <a:xfrm xmlns:a="http://schemas.openxmlformats.org/drawingml/2006/main">
+            <a:off x="457200" y="228600"/>
+            <a:ext cx="4191000" cy="228600"/>
+          </a:xfrm>
+          <a:prstGeom xmlns:a="http://schemas.openxmlformats.org/drawingml/2006/main" prst="rect">
+            <a:avLst/>
+          </a:prstGeom>
+          <a:noFill xmlns:a="http://schemas.openxmlformats.org/drawingml/2006/main"/>
+          <a:ln xmlns:a="http://schemas.openxmlformats.org/drawingml/2006/main" w="0">
+            <a:noFill/>
+            <a:prstDash val="solid"/>
+          </a:ln>
+        </p:spPr>
+        <p:txBody>
+          <a:bodyPr xmlns:a="http://schemas.openxmlformats.org/drawingml/2006/main" wrap="square" lIns="0" tIns="0" rIns="0" bIns="0" anchor="t">
+            <a:normAutofit fontScale="100000"/>
+          </a:bodyPr>
+          <a:lstStyle xmlns:a="http://schemas.openxmlformats.org/drawingml/2006/main"/>
+          <a:p xmlns:a="http://schemas.openxmlformats.org/drawingml/2006/main">
+            <a:pPr algn="l">
+              <a:buNone/>
+              <a:defRPr sz="1200" b="1">
+                <a:solidFill>
+                  <a:srgbClr val="667384"/>
+                </a:solidFill>
+                <a:latin typeface="Arial"/>
+                <a:ea typeface="Arial"/>
+                <a:cs typeface="Arial"/>
+              </a:defRPr>
+            </a:pPr>
+            <a:r>
+              <a:rPr sz="1200" b="1">
+                <a:solidFill>
+                  <a:srgbClr val="667384"/>
+                </a:solidFill>
+                <a:latin typeface="Arial"/>
+                <a:ea typeface="Arial"/>
+                <a:cs typeface="Arial"/>
+              </a:rPr>
+              <a:t>TSLA DESCRIPTIVE MICROSCOPE</a:t>
+            </a:r>
+          </a:p>
+        </p:txBody>
+      </p:sp>
+      <p:sp>
+        <p:nvSpPr>
+          <p:cNvPr id="2" name="title-4">
+            <a:extLst xmlns:a="http://schemas.openxmlformats.org/drawingml/2006/main">
+              <a:ext uri="{FF2B5EF4-FFF2-40B4-BE49-F238E27FC236}">
+                <a16:creationId xmlns:a16="http://schemas.microsoft.com/office/drawing/2014/main" id="{50C6F92F-721A-4252-9CF8-B5C9B01C7310}"/>
+              </a:ext>
+            </a:extLst>
+          </p:cNvPr>
+          <p:cNvSpPr>
+            <a:spLocks xmlns:a="http://schemas.openxmlformats.org/drawingml/2006/main" noGrp="1"/>
+          </p:cNvSpPr>
+          <p:nvPr/>
+        </p:nvSpPr>
+        <p:spPr>
+          <a:xfrm xmlns:a="http://schemas.openxmlformats.org/drawingml/2006/main">
+            <a:off x="457200" y="533400"/>
+            <a:ext cx="11277600" cy="628650"/>
+          </a:xfrm>
+          <a:prstGeom xmlns:a="http://schemas.openxmlformats.org/drawingml/2006/main" prst="rect">
+            <a:avLst/>
+          </a:prstGeom>
+          <a:noFill xmlns:a="http://schemas.openxmlformats.org/drawingml/2006/main"/>
+          <a:ln xmlns:a="http://schemas.openxmlformats.org/drawingml/2006/main" w="0">
+            <a:noFill/>
+            <a:prstDash val="solid"/>
+          </a:ln>
+        </p:spPr>
+        <p:txBody>
+          <a:bodyPr xmlns:a="http://schemas.openxmlformats.org/drawingml/2006/main" wrap="square" lIns="0" tIns="0" rIns="0" bIns="0" anchor="t">
+            <a:normAutofit fontScale="100000"/>
+          </a:bodyPr>
+          <a:lstStyle xmlns:a="http://schemas.openxmlformats.org/drawingml/2006/main"/>
+          <a:p xmlns:a="http://schemas.openxmlformats.org/drawingml/2006/main">
+            <a:pPr algn="l">
+              <a:buNone/>
+              <a:defRPr sz="3525" b="1">
+                <a:solidFill>
+                  <a:srgbClr val="000000"/>
+                </a:solidFill>
+                <a:latin typeface="Arial"/>
+                <a:ea typeface="Arial"/>
+                <a:cs typeface="Arial"/>
+              </a:defRPr>
+            </a:pPr>
+            <a:r>
+              <a:rPr sz="3525" b="1">
+                <a:solidFill>
+                  <a:srgbClr val="000000"/>
+                </a:solidFill>
+                <a:latin typeface="Arial"/>
+                <a:ea typeface="Arial"/>
+                <a:cs typeface="Arial"/>
+              </a:rPr>
+              <a:t>QQQ HIGH leaves a mild negative TSLA surface</a:t>
+            </a:r>
+          </a:p>
+        </p:txBody>
+      </p:sp>
+      <p:sp>
+        <p:nvSpPr>
+          <p:cNvPr id="3" name="">
+            <a:extLst xmlns:a="http://schemas.openxmlformats.org/drawingml/2006/main">
+              <a:ext uri="{FF2B5EF4-FFF2-40B4-BE49-F238E27FC236}">
+                <a16:creationId xmlns:a16="http://schemas.microsoft.com/office/drawing/2014/main" id="{242399F2-4D0A-4337-B17E-DB3599DC380F}"/>
+              </a:ext>
+            </a:extLst>
+          </p:cNvPr>
+          <p:cNvSpPr>
+            <a:spLocks xmlns:a="http://schemas.openxmlformats.org/drawingml/2006/main" noGrp="1"/>
+          </p:cNvSpPr>
+          <p:nvPr/>
+        </p:nvSpPr>
+        <p:spPr>
+          <a:xfrm xmlns:a="http://schemas.openxmlformats.org/drawingml/2006/main">
+            <a:off x="457200" y="1200150"/>
+            <a:ext cx="11277600" cy="19050"/>
+          </a:xfrm>
+          <a:prstGeom xmlns:a="http://schemas.openxmlformats.org/drawingml/2006/main" prst="rect">
+            <a:avLst/>
+          </a:prstGeom>
+          <a:solidFill xmlns:a="http://schemas.openxmlformats.org/drawingml/2006/main">
+            <a:srgbClr val="B8BCC4"/>
+          </a:solidFill>
+          <a:ln xmlns:a="http://schemas.openxmlformats.org/drawingml/2006/main" w="0">
+            <a:solidFill>
+              <a:srgbClr val="B8BCC4"/>
+            </a:solidFill>
+            <a:prstDash val="solid"/>
+          </a:ln>
+        </p:spPr>
+      </p:sp>
+      <p:sp>
+        <p:nvSpPr>
+          <p:cNvPr id="4" name="footer-left-4">
+            <a:extLst xmlns:a="http://schemas.openxmlformats.org/drawingml/2006/main">
+              <a:ext uri="{FF2B5EF4-FFF2-40B4-BE49-F238E27FC236}">
+                <a16:creationId xmlns:a16="http://schemas.microsoft.com/office/drawing/2014/main" id="{BF8B82CA-1E48-4669-BAD8-1FF8C09FCBFB}"/>
+              </a:ext>
+            </a:extLst>
+          </p:cNvPr>
+          <p:cNvSpPr>
+            <a:spLocks xmlns:a="http://schemas.openxmlformats.org/drawingml/2006/main" noGrp="1"/>
+          </p:cNvSpPr>
+          <p:nvPr/>
+        </p:nvSpPr>
+        <p:spPr>
+          <a:xfrm xmlns:a="http://schemas.openxmlformats.org/drawingml/2006/main">
+            <a:off x="457200" y="6515100"/>
+            <a:ext cx="3429000" cy="171450"/>
+          </a:xfrm>
+          <a:prstGeom xmlns:a="http://schemas.openxmlformats.org/drawingml/2006/main" prst="rect">
+            <a:avLst/>
+          </a:prstGeom>
+          <a:noFill xmlns:a="http://schemas.openxmlformats.org/drawingml/2006/main"/>
+          <a:ln xmlns:a="http://schemas.openxmlformats.org/drawingml/2006/main" w="0">
+            <a:noFill/>
+            <a:prstDash val="solid"/>
+          </a:ln>
+        </p:spPr>
+        <p:txBody>
+          <a:bodyPr xmlns:a="http://schemas.openxmlformats.org/drawingml/2006/main" wrap="square" lIns="0" tIns="0" rIns="0" bIns="0" anchor="t">
+            <a:normAutofit fontScale="100000"/>
+          </a:bodyPr>
+          <a:lstStyle xmlns:a="http://schemas.openxmlformats.org/drawingml/2006/main"/>
+          <a:p xmlns:a="http://schemas.openxmlformats.org/drawingml/2006/main">
+            <a:pPr algn="l">
+              <a:buNone/>
+              <a:defRPr sz="1050" b="0">
+                <a:solidFill>
+                  <a:srgbClr val="667384"/>
+                </a:solidFill>
+                <a:latin typeface="Arial"/>
+                <a:ea typeface="Arial"/>
+                <a:cs typeface="Arial"/>
+              </a:defRPr>
+            </a:pPr>
+            <a:r>
+              <a:rPr sz="1050" b="0">
+                <a:solidFill>
+                  <a:srgbClr val="667384"/>
+                </a:solidFill>
+                <a:latin typeface="Arial"/>
+                <a:ea typeface="Arial"/>
+                <a:cs typeface="Arial"/>
+              </a:rPr>
+              <a:t>Adjusted daily TSLA | 2018-2023</a:t>
+            </a:r>
+          </a:p>
+        </p:txBody>
+      </p:sp>
+      <p:sp>
+        <p:nvSpPr>
+          <p:cNvPr id="5" name="footer-number-4">
+            <a:extLst xmlns:a="http://schemas.openxmlformats.org/drawingml/2006/main">
+              <a:ext uri="{FF2B5EF4-FFF2-40B4-BE49-F238E27FC236}">
+                <a16:creationId xmlns:a16="http://schemas.microsoft.com/office/drawing/2014/main" id="{05959AEC-B0A5-45F0-A65B-C94C3E5A032F}"/>
+              </a:ext>
+            </a:extLst>
+          </p:cNvPr>
+          <p:cNvSpPr>
+            <a:spLocks xmlns:a="http://schemas.openxmlformats.org/drawingml/2006/main" noGrp="1"/>
+          </p:cNvSpPr>
+          <p:nvPr/>
+        </p:nvSpPr>
+        <p:spPr>
+          <a:xfrm xmlns:a="http://schemas.openxmlformats.org/drawingml/2006/main">
+            <a:off x="11239500" y="6496050"/>
+            <a:ext cx="495300" cy="190500"/>
+          </a:xfrm>
+          <a:prstGeom xmlns:a="http://schemas.openxmlformats.org/drawingml/2006/main" prst="rect">
+            <a:avLst/>
+          </a:prstGeom>
+          <a:noFill xmlns:a="http://schemas.openxmlformats.org/drawingml/2006/main"/>
+          <a:ln xmlns:a="http://schemas.openxmlformats.org/drawingml/2006/main" w="0">
+            <a:noFill/>
+            <a:prstDash val="solid"/>
+          </a:ln>
+        </p:spPr>
+        <p:txBody>
+          <a:bodyPr xmlns:a="http://schemas.openxmlformats.org/drawingml/2006/main" wrap="square" lIns="0" tIns="0" rIns="0" bIns="0" anchor="t">
+            <a:normAutofit fontScale="100000"/>
+          </a:bodyPr>
+          <a:lstStyle xmlns:a="http://schemas.openxmlformats.org/drawingml/2006/main"/>
+          <a:p xmlns:a="http://schemas.openxmlformats.org/drawingml/2006/main">
+            <a:pPr algn="r">
+              <a:buNone/>
+              <a:defRPr sz="1050" b="0">
+                <a:solidFill>
+                  <a:srgbClr val="667384"/>
+                </a:solidFill>
+                <a:latin typeface="Arial"/>
+                <a:ea typeface="Arial"/>
+                <a:cs typeface="Arial"/>
+              </a:defRPr>
+            </a:pPr>
+            <a:r>
+              <a:rPr sz="1050" b="0">
+                <a:solidFill>
+                  <a:srgbClr val="667384"/>
+                </a:solidFill>
+                <a:latin typeface="Arial"/>
+                <a:ea typeface="Arial"/>
+                <a:cs typeface="Arial"/>
+              </a:rPr>
+              <a:t>45</a:t>
+            </a:r>
+          </a:p>
+        </p:txBody>
+      </p:sp>
+      <p:sp>
+        <p:nvSpPr>
+          <p:cNvPr id="6" name="">
+            <a:extLst xmlns:a="http://schemas.openxmlformats.org/drawingml/2006/main">
+              <a:ext uri="{FF2B5EF4-FFF2-40B4-BE49-F238E27FC236}">
+                <a16:creationId xmlns:a16="http://schemas.microsoft.com/office/drawing/2014/main" id="{9C8DEA29-E57D-4C8D-8538-2028FF89DA7C}"/>
+              </a:ext>
+            </a:extLst>
+          </p:cNvPr>
+          <p:cNvSpPr>
+            <a:spLocks xmlns:a="http://schemas.openxmlformats.org/drawingml/2006/main" noGrp="1"/>
+          </p:cNvSpPr>
+          <p:nvPr/>
+        </p:nvSpPr>
+        <p:spPr>
+          <a:xfrm xmlns:a="http://schemas.openxmlformats.org/drawingml/2006/main">
+            <a:off x="1000125" y="1352550"/>
+            <a:ext cx="10191750" cy="4905375"/>
+          </a:xfrm>
+          <a:prstGeom xmlns:a="http://schemas.openxmlformats.org/drawingml/2006/main" prst="rect">
+            <a:avLst/>
+          </a:prstGeom>
+          <a:solidFill xmlns:a="http://schemas.openxmlformats.org/drawingml/2006/main">
+            <a:srgbClr val="FFFFFF"/>
+          </a:solidFill>
+          <a:ln xmlns:a="http://schemas.openxmlformats.org/drawingml/2006/main" w="9525">
+            <a:solidFill>
+              <a:srgbClr val="B8BCC4"/>
+            </a:solidFill>
+            <a:prstDash val="solid"/>
+          </a:ln>
+        </p:spPr>
+      </p:sp>
+      <p:sp>
+        <p:nvSpPr>
+          <p:cNvPr id="8" name="">
+            <a:extLst xmlns:a="http://schemas.openxmlformats.org/drawingml/2006/main">
+              <a:ext uri="{FF2B5EF4-FFF2-40B4-BE49-F238E27FC236}">
+                <a16:creationId xmlns:a16="http://schemas.microsoft.com/office/drawing/2014/main" id="{4346A5F2-8CC4-4151-9BDB-346D47A3096B}"/>
+              </a:ext>
+            </a:extLst>
+          </p:cNvPr>
+          <p:cNvSpPr>
+            <a:spLocks xmlns:a="http://schemas.openxmlformats.org/drawingml/2006/main" noGrp="1"/>
+          </p:cNvSpPr>
+          <p:nvPr/>
+        </p:nvSpPr>
+        <p:spPr>
+          <a:xfrm xmlns:a="http://schemas.openxmlformats.org/drawingml/2006/main">
+            <a:off x="1143000" y="6286500"/>
+            <a:ext cx="9906000" cy="171450"/>
+          </a:xfrm>
+          <a:prstGeom xmlns:a="http://schemas.openxmlformats.org/drawingml/2006/main" prst="rect">
+            <a:avLst/>
+          </a:prstGeom>
+          <a:noFill xmlns:a="http://schemas.openxmlformats.org/drawingml/2006/main"/>
+          <a:ln xmlns:a="http://schemas.openxmlformats.org/drawingml/2006/main" w="0">
+            <a:noFill/>
+            <a:prstDash val="solid"/>
+          </a:ln>
+        </p:spPr>
+        <p:txBody>
+          <a:bodyPr xmlns:a="http://schemas.openxmlformats.org/drawingml/2006/main" wrap="square" lIns="0" tIns="0" rIns="0" bIns="0" anchor="t">
+            <a:normAutofit fontScale="93750"/>
+          </a:bodyPr>
+          <a:lstStyle xmlns:a="http://schemas.openxmlformats.org/drawingml/2006/main"/>
+          <a:p xmlns:a="http://schemas.openxmlformats.org/drawingml/2006/main">
+            <a:pPr algn="ctr">
+              <a:buNone/>
+              <a:defRPr sz="1200" b="0">
+                <a:solidFill>
+                  <a:srgbClr val="667384"/>
+                </a:solidFill>
+                <a:latin typeface="Arial"/>
+                <a:ea typeface="Arial"/>
+                <a:cs typeface="Arial"/>
+              </a:defRPr>
+            </a:pPr>
+            <a:r>
+              <a:rPr sz="1200" b="0">
+                <a:solidFill>
+                  <a:srgbClr val="667384"/>
+                </a:solidFill>
+                <a:latin typeface="Arial"/>
+                <a:ea typeface="Arial"/>
+                <a:cs typeface="Arial"/>
+              </a:rPr>
+              <a:t>59/81 cells negative; max |r| = 0.112 at 25 prior / 15 forward; 0/81 within-state BH passes.</a:t>
+            </a:r>
+          </a:p>
+        </p:txBody>
+      </p:sp>
+      <p:pic>
+        <p:nvPicPr>
+          <p:cNvPr id="18" name=""/>
+          <p:cNvPicPr>
+            <a:picLocks xmlns:a="http://schemas.openxmlformats.org/drawingml/2006/main" noChangeAspect="1"/>
+          </p:cNvPicPr>
+          <p:nvPr/>
+        </p:nvPicPr>
+        <p:blipFill>
+          <a:blip xmlns:r="http://schemas.openxmlformats.org/officeDocument/2006/relationships" xmlns:a="http://schemas.openxmlformats.org/drawingml/2006/main" r:embed="R99ba1f666db942dd"/>
+          <a:stretch xmlns:a="http://schemas.openxmlformats.org/drawingml/2006/main"/>
+        </p:blipFill>
+        <p:spPr>
+          <a:xfrm xmlns:a="http://schemas.openxmlformats.org/drawingml/2006/main" flipH="0" flipV="0">
+            <a:off x="2942545" y="1352550"/>
+            <a:ext cx="6306911" cy="4905375"/>
+          </a:xfrm>
+          <a:prstGeom xmlns:a="http://schemas.openxmlformats.org/drawingml/2006/main" prst="rect">
+            <a:avLst/>
+          </a:prstGeom>
+        </p:spPr>
+      </p:pic>
+    </p:spTree>
+    <p:extLst>
+      <p:ext uri="{BB962C8B-B14F-4D97-AF65-F5344CB8AC3E}">
+        <p14:creationId xmlns:p14="http://schemas.microsoft.com/office/powerpoint/2010/main" val="400872380"/>
+      </p:ext>
+    </p:extLst>
+  </p:cSld>
+</p:sld>
+</file>
+
+<file path=ppt/slides/slide46.xml><?xml version="1.0" encoding="utf-8"?>
+<p:sld xmlns:p="http://schemas.openxmlformats.org/presentationml/2006/main">
+  <p:cSld>
+    <p:bg>
+      <p:bgPr>
+        <a:solidFill xmlns:a="http://schemas.openxmlformats.org/drawingml/2006/main">
+          <a:srgbClr val="FFFFFF"/>
+        </a:solidFill>
+      </p:bgPr>
+    </p:bg>
+    <p:spTree>
+      <p:nvGrpSpPr>
+        <p:cNvPr id="1" name=""/>
+        <p:cNvGrpSpPr/>
+        <p:nvPr/>
+      </p:nvGrpSpPr>
+      <p:grpSpPr>
+        <a:xfrm xmlns:a="http://schemas.openxmlformats.org/drawingml/2006/main"/>
+      </p:grpSpPr>
+      <p:sp>
+        <p:nvSpPr>
+          <p:cNvPr id="20" name="section-7">
+            <a:extLst xmlns:a="http://schemas.openxmlformats.org/drawingml/2006/main">
+              <a:ext uri="{FF2B5EF4-FFF2-40B4-BE49-F238E27FC236}">
+                <a16:creationId xmlns:a16="http://schemas.microsoft.com/office/drawing/2014/main" id="{BAC8373F-594E-467B-A8F8-56439CEBE044}"/>
+              </a:ext>
+            </a:extLst>
+          </p:cNvPr>
+          <p:cNvSpPr>
+            <a:spLocks xmlns:a="http://schemas.openxmlformats.org/drawingml/2006/main" noGrp="1"/>
+          </p:cNvSpPr>
+          <p:nvPr/>
+        </p:nvSpPr>
+        <p:spPr>
+          <a:xfrm xmlns:a="http://schemas.openxmlformats.org/drawingml/2006/main">
+            <a:off x="457200" y="228600"/>
+            <a:ext cx="4191000" cy="228600"/>
+          </a:xfrm>
+          <a:prstGeom xmlns:a="http://schemas.openxmlformats.org/drawingml/2006/main" prst="rect">
+            <a:avLst/>
+          </a:prstGeom>
+          <a:noFill xmlns:a="http://schemas.openxmlformats.org/drawingml/2006/main"/>
+          <a:ln xmlns:a="http://schemas.openxmlformats.org/drawingml/2006/main" w="0">
+            <a:noFill/>
+            <a:prstDash val="solid"/>
+          </a:ln>
+        </p:spPr>
+        <p:txBody>
+          <a:bodyPr xmlns:a="http://schemas.openxmlformats.org/drawingml/2006/main" wrap="square" lIns="0" tIns="0" rIns="0" bIns="0" anchor="t">
+            <a:normAutofit fontScale="100000"/>
+          </a:bodyPr>
+          <a:lstStyle xmlns:a="http://schemas.openxmlformats.org/drawingml/2006/main"/>
+          <a:p xmlns:a="http://schemas.openxmlformats.org/drawingml/2006/main">
+            <a:pPr algn="l">
+              <a:buNone/>
+              <a:defRPr sz="1200" b="1">
+                <a:solidFill>
+                  <a:srgbClr val="667384"/>
+                </a:solidFill>
+                <a:latin typeface="Arial"/>
+                <a:ea typeface="Arial"/>
+                <a:cs typeface="Arial"/>
+              </a:defRPr>
+            </a:pPr>
+            <a:r>
+              <a:rPr sz="1200" b="1">
+                <a:solidFill>
+                  <a:srgbClr val="667384"/>
+                </a:solidFill>
+                <a:latin typeface="Arial"/>
+                <a:ea typeface="Arial"/>
+                <a:cs typeface="Arial"/>
+              </a:rPr>
+              <a:t>TSLA DESCRIPTIVE MICROSCOPE</a:t>
+            </a:r>
+          </a:p>
+        </p:txBody>
+      </p:sp>
+      <p:sp>
+        <p:nvSpPr>
+          <p:cNvPr id="2" name="title-7">
+            <a:extLst xmlns:a="http://schemas.openxmlformats.org/drawingml/2006/main">
+              <a:ext uri="{FF2B5EF4-FFF2-40B4-BE49-F238E27FC236}">
+                <a16:creationId xmlns:a16="http://schemas.microsoft.com/office/drawing/2014/main" id="{7592E6E5-EA60-427F-BAB4-42C154D8CC5F}"/>
+              </a:ext>
+            </a:extLst>
+          </p:cNvPr>
+          <p:cNvSpPr>
+            <a:spLocks xmlns:a="http://schemas.openxmlformats.org/drawingml/2006/main" noGrp="1"/>
+          </p:cNvSpPr>
+          <p:nvPr/>
+        </p:nvSpPr>
+        <p:spPr>
+          <a:xfrm xmlns:a="http://schemas.openxmlformats.org/drawingml/2006/main">
+            <a:off x="457200" y="533400"/>
+            <a:ext cx="11277600" cy="628650"/>
+          </a:xfrm>
+          <a:prstGeom xmlns:a="http://schemas.openxmlformats.org/drawingml/2006/main" prst="rect">
+            <a:avLst/>
+          </a:prstGeom>
+          <a:noFill xmlns:a="http://schemas.openxmlformats.org/drawingml/2006/main"/>
+          <a:ln xmlns:a="http://schemas.openxmlformats.org/drawingml/2006/main" w="0">
+            <a:noFill/>
+            <a:prstDash val="solid"/>
+          </a:ln>
+        </p:spPr>
+        <p:txBody>
+          <a:bodyPr xmlns:a="http://schemas.openxmlformats.org/drawingml/2006/main" wrap="square" lIns="0" tIns="0" rIns="0" bIns="0" anchor="t">
+            <a:normAutofit fontScale="100000"/>
+          </a:bodyPr>
+          <a:lstStyle xmlns:a="http://schemas.openxmlformats.org/drawingml/2006/main"/>
+          <a:p xmlns:a="http://schemas.openxmlformats.org/drawingml/2006/main">
+            <a:pPr algn="l">
+              <a:buNone/>
+              <a:defRPr sz="3525" b="1">
+                <a:solidFill>
+                  <a:srgbClr val="000000"/>
+                </a:solidFill>
+                <a:latin typeface="Arial"/>
+                <a:ea typeface="Arial"/>
+                <a:cs typeface="Arial"/>
+              </a:defRPr>
+            </a:pPr>
+            <a:r>
+              <a:rPr sz="3525" b="1">
+                <a:solidFill>
+                  <a:srgbClr val="000000"/>
+                </a:solidFill>
+                <a:latin typeface="Arial"/>
+                <a:ea typeface="Arial"/>
+                <a:cs typeface="Arial"/>
+              </a:rPr>
+              <a:t>QQQ LOW versus MEDIUM is the clearest contrast</a:t>
+            </a:r>
+          </a:p>
+        </p:txBody>
+      </p:sp>
+      <p:sp>
+        <p:nvSpPr>
+          <p:cNvPr id="3" name="">
+            <a:extLst xmlns:a="http://schemas.openxmlformats.org/drawingml/2006/main">
+              <a:ext uri="{FF2B5EF4-FFF2-40B4-BE49-F238E27FC236}">
+                <a16:creationId xmlns:a16="http://schemas.microsoft.com/office/drawing/2014/main" id="{C852E1AC-5CE8-4847-87B1-81C28A4EFEDE}"/>
+              </a:ext>
+            </a:extLst>
+          </p:cNvPr>
+          <p:cNvSpPr>
+            <a:spLocks xmlns:a="http://schemas.openxmlformats.org/drawingml/2006/main" noGrp="1"/>
+          </p:cNvSpPr>
+          <p:nvPr/>
+        </p:nvSpPr>
+        <p:spPr>
+          <a:xfrm xmlns:a="http://schemas.openxmlformats.org/drawingml/2006/main">
+            <a:off x="457200" y="1200150"/>
+            <a:ext cx="11277600" cy="19050"/>
+          </a:xfrm>
+          <a:prstGeom xmlns:a="http://schemas.openxmlformats.org/drawingml/2006/main" prst="rect">
+            <a:avLst/>
+          </a:prstGeom>
+          <a:solidFill xmlns:a="http://schemas.openxmlformats.org/drawingml/2006/main">
+            <a:srgbClr val="B8BCC4"/>
+          </a:solidFill>
+          <a:ln xmlns:a="http://schemas.openxmlformats.org/drawingml/2006/main" w="0">
+            <a:solidFill>
+              <a:srgbClr val="B8BCC4"/>
+            </a:solidFill>
+            <a:prstDash val="solid"/>
+          </a:ln>
+        </p:spPr>
+      </p:sp>
+      <p:sp>
+        <p:nvSpPr>
+          <p:cNvPr id="4" name="footer-left-7">
+            <a:extLst xmlns:a="http://schemas.openxmlformats.org/drawingml/2006/main">
+              <a:ext uri="{FF2B5EF4-FFF2-40B4-BE49-F238E27FC236}">
+                <a16:creationId xmlns:a16="http://schemas.microsoft.com/office/drawing/2014/main" id="{4896B590-20BC-4B46-9282-D9F5A22A0CC5}"/>
+              </a:ext>
+            </a:extLst>
+          </p:cNvPr>
+          <p:cNvSpPr>
+            <a:spLocks xmlns:a="http://schemas.openxmlformats.org/drawingml/2006/main" noGrp="1"/>
+          </p:cNvSpPr>
+          <p:nvPr/>
+        </p:nvSpPr>
+        <p:spPr>
+          <a:xfrm xmlns:a="http://schemas.openxmlformats.org/drawingml/2006/main">
+            <a:off x="457200" y="6515100"/>
+            <a:ext cx="3429000" cy="171450"/>
+          </a:xfrm>
+          <a:prstGeom xmlns:a="http://schemas.openxmlformats.org/drawingml/2006/main" prst="rect">
+            <a:avLst/>
+          </a:prstGeom>
+          <a:noFill xmlns:a="http://schemas.openxmlformats.org/drawingml/2006/main"/>
+          <a:ln xmlns:a="http://schemas.openxmlformats.org/drawingml/2006/main" w="0">
+            <a:noFill/>
+            <a:prstDash val="solid"/>
+          </a:ln>
+        </p:spPr>
+        <p:txBody>
+          <a:bodyPr xmlns:a="http://schemas.openxmlformats.org/drawingml/2006/main" wrap="square" lIns="0" tIns="0" rIns="0" bIns="0" anchor="t">
+            <a:normAutofit fontScale="100000"/>
+          </a:bodyPr>
+          <a:lstStyle xmlns:a="http://schemas.openxmlformats.org/drawingml/2006/main"/>
+          <a:p xmlns:a="http://schemas.openxmlformats.org/drawingml/2006/main">
+            <a:pPr algn="l">
+              <a:buNone/>
+              <a:defRPr sz="1050" b="0">
+                <a:solidFill>
+                  <a:srgbClr val="667384"/>
+                </a:solidFill>
+                <a:latin typeface="Arial"/>
+                <a:ea typeface="Arial"/>
+                <a:cs typeface="Arial"/>
+              </a:defRPr>
+            </a:pPr>
+            <a:r>
+              <a:rPr sz="1050" b="0">
+                <a:solidFill>
+                  <a:srgbClr val="667384"/>
+                </a:solidFill>
+                <a:latin typeface="Arial"/>
+                <a:ea typeface="Arial"/>
+                <a:cs typeface="Arial"/>
+              </a:rPr>
+              <a:t>Adjusted daily TSLA | 2018-2023</a:t>
+            </a:r>
+          </a:p>
+        </p:txBody>
+      </p:sp>
+      <p:sp>
+        <p:nvSpPr>
+          <p:cNvPr id="5" name="footer-number-7">
+            <a:extLst xmlns:a="http://schemas.openxmlformats.org/drawingml/2006/main">
+              <a:ext uri="{FF2B5EF4-FFF2-40B4-BE49-F238E27FC236}">
+                <a16:creationId xmlns:a16="http://schemas.microsoft.com/office/drawing/2014/main" id="{1503EFAF-F487-4981-AFDC-23F1B41A7207}"/>
+              </a:ext>
+            </a:extLst>
+          </p:cNvPr>
+          <p:cNvSpPr>
+            <a:spLocks xmlns:a="http://schemas.openxmlformats.org/drawingml/2006/main" noGrp="1"/>
+          </p:cNvSpPr>
+          <p:nvPr/>
+        </p:nvSpPr>
+        <p:spPr>
+          <a:xfrm xmlns:a="http://schemas.openxmlformats.org/drawingml/2006/main">
+            <a:off x="11239500" y="6496050"/>
+            <a:ext cx="495300" cy="190500"/>
+          </a:xfrm>
+          <a:prstGeom xmlns:a="http://schemas.openxmlformats.org/drawingml/2006/main" prst="rect">
+            <a:avLst/>
+          </a:prstGeom>
+          <a:noFill xmlns:a="http://schemas.openxmlformats.org/drawingml/2006/main"/>
+          <a:ln xmlns:a="http://schemas.openxmlformats.org/drawingml/2006/main" w="0">
+            <a:noFill/>
+            <a:prstDash val="solid"/>
+          </a:ln>
+        </p:spPr>
+        <p:txBody>
+          <a:bodyPr xmlns:a="http://schemas.openxmlformats.org/drawingml/2006/main" wrap="square" lIns="0" tIns="0" rIns="0" bIns="0" anchor="t">
+            <a:normAutofit fontScale="100000"/>
+          </a:bodyPr>
+          <a:lstStyle xmlns:a="http://schemas.openxmlformats.org/drawingml/2006/main"/>
+          <a:p xmlns:a="http://schemas.openxmlformats.org/drawingml/2006/main">
+            <a:pPr algn="r">
+              <a:buNone/>
+              <a:defRPr sz="1050" b="0">
+                <a:solidFill>
+                  <a:srgbClr val="667384"/>
+                </a:solidFill>
+                <a:latin typeface="Arial"/>
+                <a:ea typeface="Arial"/>
+                <a:cs typeface="Arial"/>
+              </a:defRPr>
+            </a:pPr>
+            <a:r>
+              <a:rPr sz="1050" b="0">
+                <a:solidFill>
+                  <a:srgbClr val="667384"/>
+                </a:solidFill>
+                <a:latin typeface="Arial"/>
+                <a:ea typeface="Arial"/>
+                <a:cs typeface="Arial"/>
+              </a:rPr>
+              <a:t>46</a:t>
+            </a:r>
+          </a:p>
+        </p:txBody>
+      </p:sp>
+      <p:sp>
+        <p:nvSpPr>
+          <p:cNvPr id="6" name="">
+            <a:extLst xmlns:a="http://schemas.openxmlformats.org/drawingml/2006/main">
+              <a:ext uri="{FF2B5EF4-FFF2-40B4-BE49-F238E27FC236}">
+                <a16:creationId xmlns:a16="http://schemas.microsoft.com/office/drawing/2014/main" id="{4AA770DD-55E6-42DB-942A-6938E642B1A0}"/>
+              </a:ext>
+            </a:extLst>
+          </p:cNvPr>
+          <p:cNvSpPr>
+            <a:spLocks xmlns:a="http://schemas.openxmlformats.org/drawingml/2006/main" noGrp="1"/>
+          </p:cNvSpPr>
+          <p:nvPr/>
+        </p:nvSpPr>
+        <p:spPr>
+          <a:xfrm xmlns:a="http://schemas.openxmlformats.org/drawingml/2006/main">
+            <a:off x="342900" y="1428750"/>
+            <a:ext cx="7677150" cy="4762500"/>
+          </a:xfrm>
+          <a:prstGeom xmlns:a="http://schemas.openxmlformats.org/drawingml/2006/main" prst="rect">
+            <a:avLst/>
+          </a:prstGeom>
+          <a:solidFill xmlns:a="http://schemas.openxmlformats.org/drawingml/2006/main">
+            <a:srgbClr val="FFFFFF"/>
+          </a:solidFill>
+          <a:ln xmlns:a="http://schemas.openxmlformats.org/drawingml/2006/main" w="9525">
+            <a:solidFill>
+              <a:srgbClr val="B8BCC4"/>
+            </a:solidFill>
+            <a:prstDash val="solid"/>
+          </a:ln>
+        </p:spPr>
+      </p:sp>
+      <p:sp>
+        <p:nvSpPr>
+          <p:cNvPr id="8" name="">
+            <a:extLst xmlns:a="http://schemas.openxmlformats.org/drawingml/2006/main">
+              <a:ext uri="{FF2B5EF4-FFF2-40B4-BE49-F238E27FC236}">
+                <a16:creationId xmlns:a16="http://schemas.microsoft.com/office/drawing/2014/main" id="{925D1653-1738-47C8-BFA1-9C9390285CC4}"/>
+              </a:ext>
+            </a:extLst>
+          </p:cNvPr>
+          <p:cNvSpPr>
+            <a:spLocks xmlns:a="http://schemas.openxmlformats.org/drawingml/2006/main" noGrp="1"/>
+          </p:cNvSpPr>
+          <p:nvPr/>
+        </p:nvSpPr>
+        <p:spPr>
+          <a:xfrm xmlns:a="http://schemas.openxmlformats.org/drawingml/2006/main">
+            <a:off x="8362950" y="1504950"/>
+            <a:ext cx="3143250" cy="1428750"/>
+          </a:xfrm>
+          <a:prstGeom xmlns:a="http://schemas.openxmlformats.org/drawingml/2006/main" prst="rect">
+            <a:avLst/>
+          </a:prstGeom>
+          <a:solidFill xmlns:a="http://schemas.openxmlformats.org/drawingml/2006/main">
+            <a:srgbClr val="EDEDED"/>
+          </a:solidFill>
+          <a:ln xmlns:a="http://schemas.openxmlformats.org/drawingml/2006/main" w="0">
+            <a:solidFill>
+              <a:srgbClr val="EDEDED"/>
+            </a:solidFill>
+            <a:prstDash val="solid"/>
+          </a:ln>
+        </p:spPr>
+      </p:sp>
+      <p:sp>
+        <p:nvSpPr>
+          <p:cNvPr id="9" name="">
+            <a:extLst xmlns:a="http://schemas.openxmlformats.org/drawingml/2006/main">
+              <a:ext uri="{FF2B5EF4-FFF2-40B4-BE49-F238E27FC236}">
+                <a16:creationId xmlns:a16="http://schemas.microsoft.com/office/drawing/2014/main" id="{AD911094-04B5-4E98-9749-4F832E6A7030}"/>
+              </a:ext>
+            </a:extLst>
+          </p:cNvPr>
+          <p:cNvSpPr>
+            <a:spLocks xmlns:a="http://schemas.openxmlformats.org/drawingml/2006/main" noGrp="1"/>
+          </p:cNvSpPr>
+          <p:nvPr/>
+        </p:nvSpPr>
+        <p:spPr>
+          <a:xfrm xmlns:a="http://schemas.openxmlformats.org/drawingml/2006/main">
+            <a:off x="8362950" y="1504950"/>
+            <a:ext cx="76200" cy="1428750"/>
+          </a:xfrm>
+          <a:prstGeom xmlns:a="http://schemas.openxmlformats.org/drawingml/2006/main" prst="rect">
+            <a:avLst/>
+          </a:prstGeom>
+          <a:solidFill xmlns:a="http://schemas.openxmlformats.org/drawingml/2006/main">
+            <a:srgbClr val="E45756"/>
+          </a:solidFill>
+          <a:ln xmlns:a="http://schemas.openxmlformats.org/drawingml/2006/main" w="0">
+            <a:solidFill>
+              <a:srgbClr val="E45756"/>
+            </a:solidFill>
+            <a:prstDash val="solid"/>
+          </a:ln>
+        </p:spPr>
+      </p:sp>
+      <p:sp>
+        <p:nvSpPr>
+          <p:cNvPr id="10" name="">
+            <a:extLst xmlns:a="http://schemas.openxmlformats.org/drawingml/2006/main">
+              <a:ext uri="{FF2B5EF4-FFF2-40B4-BE49-F238E27FC236}">
+                <a16:creationId xmlns:a16="http://schemas.microsoft.com/office/drawing/2014/main" id="{8259A327-4374-4B4E-A3BA-F8E016498564}"/>
+              </a:ext>
+            </a:extLst>
+          </p:cNvPr>
+          <p:cNvSpPr>
+            <a:spLocks xmlns:a="http://schemas.openxmlformats.org/drawingml/2006/main" noGrp="1"/>
+          </p:cNvSpPr>
+          <p:nvPr/>
+        </p:nvSpPr>
+        <p:spPr>
+          <a:xfrm xmlns:a="http://schemas.openxmlformats.org/drawingml/2006/main">
+            <a:off x="8629650" y="1676400"/>
+            <a:ext cx="2686050" cy="590550"/>
+          </a:xfrm>
+          <a:prstGeom xmlns:a="http://schemas.openxmlformats.org/drawingml/2006/main" prst="rect">
+            <a:avLst/>
+          </a:prstGeom>
+          <a:noFill xmlns:a="http://schemas.openxmlformats.org/drawingml/2006/main"/>
+          <a:ln xmlns:a="http://schemas.openxmlformats.org/drawingml/2006/main" w="0">
+            <a:noFill/>
+            <a:prstDash val="solid"/>
+          </a:ln>
+        </p:spPr>
+        <p:txBody>
+          <a:bodyPr xmlns:a="http://schemas.openxmlformats.org/drawingml/2006/main" wrap="square" lIns="0" tIns="0" rIns="0" bIns="0" anchor="t">
+            <a:normAutofit fontScale="100000"/>
+          </a:bodyPr>
+          <a:lstStyle xmlns:a="http://schemas.openxmlformats.org/drawingml/2006/main"/>
+          <a:p xmlns:a="http://schemas.openxmlformats.org/drawingml/2006/main">
+            <a:pPr algn="l">
+              <a:buNone/>
+              <a:defRPr sz="3225" b="1">
+                <a:solidFill>
+                  <a:srgbClr val="E45756"/>
+                </a:solidFill>
+                <a:latin typeface="Arial"/>
+                <a:ea typeface="Arial"/>
+                <a:cs typeface="Arial"/>
+              </a:defRPr>
+            </a:pPr>
+            <a:r>
+              <a:rPr sz="3225" b="1">
+                <a:solidFill>
+                  <a:srgbClr val="E45756"/>
+                </a:solidFill>
+                <a:latin typeface="Arial"/>
+                <a:ea typeface="Arial"/>
+                <a:cs typeface="Arial"/>
+              </a:rPr>
+              <a:t>-0.342</a:t>
+            </a:r>
+          </a:p>
+        </p:txBody>
+      </p:sp>
+      <p:sp>
+        <p:nvSpPr>
+          <p:cNvPr id="11" name="">
+            <a:extLst xmlns:a="http://schemas.openxmlformats.org/drawingml/2006/main">
+              <a:ext uri="{FF2B5EF4-FFF2-40B4-BE49-F238E27FC236}">
+                <a16:creationId xmlns:a16="http://schemas.microsoft.com/office/drawing/2014/main" id="{BE341AE3-547D-4111-ADFF-14E5545F2DBF}"/>
+              </a:ext>
+            </a:extLst>
+          </p:cNvPr>
+          <p:cNvSpPr>
+            <a:spLocks xmlns:a="http://schemas.openxmlformats.org/drawingml/2006/main" noGrp="1"/>
+          </p:cNvSpPr>
+          <p:nvPr/>
+        </p:nvSpPr>
+        <p:spPr>
+          <a:xfrm xmlns:a="http://schemas.openxmlformats.org/drawingml/2006/main">
+            <a:off x="8629650" y="2343150"/>
+            <a:ext cx="2686050" cy="438150"/>
+          </a:xfrm>
+          <a:prstGeom xmlns:a="http://schemas.openxmlformats.org/drawingml/2006/main" prst="rect">
+            <a:avLst/>
+          </a:prstGeom>
+          <a:noFill xmlns:a="http://schemas.openxmlformats.org/drawingml/2006/main"/>
+          <a:ln xmlns:a="http://schemas.openxmlformats.org/drawingml/2006/main" w="0">
+            <a:noFill/>
+            <a:prstDash val="solid"/>
+          </a:ln>
+        </p:spPr>
+        <p:txBody>
+          <a:bodyPr xmlns:a="http://schemas.openxmlformats.org/drawingml/2006/main" wrap="square" lIns="0" tIns="0" rIns="0" bIns="0" anchor="t">
+            <a:normAutofit fontScale="100000"/>
+          </a:bodyPr>
+          <a:lstStyle xmlns:a="http://schemas.openxmlformats.org/drawingml/2006/main"/>
+          <a:p xmlns:a="http://schemas.openxmlformats.org/drawingml/2006/main">
+            <a:pPr algn="l">
+              <a:buNone/>
+              <a:defRPr sz="1350" b="0">
+                <a:solidFill>
+                  <a:srgbClr val="273548"/>
+                </a:solidFill>
+                <a:latin typeface="Arial"/>
+                <a:ea typeface="Arial"/>
+                <a:cs typeface="Arial"/>
+              </a:defRPr>
+            </a:pPr>
+            <a:r>
+              <a:rPr sz="1350" b="0">
+                <a:solidFill>
+                  <a:srgbClr val="273548"/>
+                </a:solidFill>
+                <a:latin typeface="Arial"/>
+                <a:ea typeface="Arial"/>
+                <a:cs typeface="Arial"/>
+              </a:rPr>
+              <a:t>largest correlation change: 10 prior / 15 forward</a:t>
+            </a:r>
+          </a:p>
+        </p:txBody>
+      </p:sp>
+      <p:sp>
+        <p:nvSpPr>
+          <p:cNvPr id="12" name="">
+            <a:extLst xmlns:a="http://schemas.openxmlformats.org/drawingml/2006/main">
+              <a:ext uri="{FF2B5EF4-FFF2-40B4-BE49-F238E27FC236}">
+                <a16:creationId xmlns:a16="http://schemas.microsoft.com/office/drawing/2014/main" id="{627B1C2D-BD18-4B6C-8DC8-10694F2FD365}"/>
+              </a:ext>
+            </a:extLst>
+          </p:cNvPr>
+          <p:cNvSpPr>
+            <a:spLocks xmlns:a="http://schemas.openxmlformats.org/drawingml/2006/main" noGrp="1"/>
+          </p:cNvSpPr>
+          <p:nvPr/>
+        </p:nvSpPr>
+        <p:spPr>
+          <a:xfrm xmlns:a="http://schemas.openxmlformats.org/drawingml/2006/main">
+            <a:off x="8362950" y="3143250"/>
+            <a:ext cx="3143250" cy="1428750"/>
+          </a:xfrm>
+          <a:prstGeom xmlns:a="http://schemas.openxmlformats.org/drawingml/2006/main" prst="rect">
+            <a:avLst/>
+          </a:prstGeom>
+          <a:solidFill xmlns:a="http://schemas.openxmlformats.org/drawingml/2006/main">
+            <a:srgbClr val="EDEDED"/>
+          </a:solidFill>
+          <a:ln xmlns:a="http://schemas.openxmlformats.org/drawingml/2006/main" w="0">
+            <a:solidFill>
+              <a:srgbClr val="EDEDED"/>
+            </a:solidFill>
+            <a:prstDash val="solid"/>
+          </a:ln>
+        </p:spPr>
+      </p:sp>
+      <p:sp>
+        <p:nvSpPr>
+          <p:cNvPr id="13" name="">
+            <a:extLst xmlns:a="http://schemas.openxmlformats.org/drawingml/2006/main">
+              <a:ext uri="{FF2B5EF4-FFF2-40B4-BE49-F238E27FC236}">
+                <a16:creationId xmlns:a16="http://schemas.microsoft.com/office/drawing/2014/main" id="{1A4050CC-5568-4F8A-B026-EC7B8ABEFB7A}"/>
+              </a:ext>
+            </a:extLst>
+          </p:cNvPr>
+          <p:cNvSpPr>
+            <a:spLocks xmlns:a="http://schemas.openxmlformats.org/drawingml/2006/main" noGrp="1"/>
+          </p:cNvSpPr>
+          <p:nvPr/>
+        </p:nvSpPr>
+        <p:spPr>
+          <a:xfrm xmlns:a="http://schemas.openxmlformats.org/drawingml/2006/main">
+            <a:off x="8362950" y="3143250"/>
+            <a:ext cx="76200" cy="1428750"/>
+          </a:xfrm>
+          <a:prstGeom xmlns:a="http://schemas.openxmlformats.org/drawingml/2006/main" prst="rect">
+            <a:avLst/>
+          </a:prstGeom>
+          <a:solidFill xmlns:a="http://schemas.openxmlformats.org/drawingml/2006/main">
+            <a:srgbClr val="3D8DFF"/>
+          </a:solidFill>
+          <a:ln xmlns:a="http://schemas.openxmlformats.org/drawingml/2006/main" w="0">
+            <a:solidFill>
+              <a:srgbClr val="3D8DFF"/>
+            </a:solidFill>
+            <a:prstDash val="solid"/>
+          </a:ln>
+        </p:spPr>
+      </p:sp>
+      <p:sp>
+        <p:nvSpPr>
+          <p:cNvPr id="14" name="">
+            <a:extLst xmlns:a="http://schemas.openxmlformats.org/drawingml/2006/main">
+              <a:ext uri="{FF2B5EF4-FFF2-40B4-BE49-F238E27FC236}">
+                <a16:creationId xmlns:a16="http://schemas.microsoft.com/office/drawing/2014/main" id="{502FF9D4-D051-476B-B68A-15DCA6B44FE9}"/>
+              </a:ext>
+            </a:extLst>
+          </p:cNvPr>
+          <p:cNvSpPr>
+            <a:spLocks xmlns:a="http://schemas.openxmlformats.org/drawingml/2006/main" noGrp="1"/>
+          </p:cNvSpPr>
+          <p:nvPr/>
+        </p:nvSpPr>
+        <p:spPr>
+          <a:xfrm xmlns:a="http://schemas.openxmlformats.org/drawingml/2006/main">
+            <a:off x="8629650" y="3314700"/>
+            <a:ext cx="2686050" cy="590550"/>
+          </a:xfrm>
+          <a:prstGeom xmlns:a="http://schemas.openxmlformats.org/drawingml/2006/main" prst="rect">
+            <a:avLst/>
+          </a:prstGeom>
+          <a:noFill xmlns:a="http://schemas.openxmlformats.org/drawingml/2006/main"/>
+          <a:ln xmlns:a="http://schemas.openxmlformats.org/drawingml/2006/main" w="0">
+            <a:noFill/>
+            <a:prstDash val="solid"/>
+          </a:ln>
+        </p:spPr>
+        <p:txBody>
+          <a:bodyPr xmlns:a="http://schemas.openxmlformats.org/drawingml/2006/main" wrap="square" lIns="0" tIns="0" rIns="0" bIns="0" anchor="t">
+            <a:normAutofit fontScale="100000"/>
+          </a:bodyPr>
+          <a:lstStyle xmlns:a="http://schemas.openxmlformats.org/drawingml/2006/main"/>
+          <a:p xmlns:a="http://schemas.openxmlformats.org/drawingml/2006/main">
+            <a:pPr algn="l">
+              <a:buNone/>
+              <a:defRPr sz="3225" b="1">
+                <a:solidFill>
+                  <a:srgbClr val="3D8DFF"/>
+                </a:solidFill>
+                <a:latin typeface="Arial"/>
+                <a:ea typeface="Arial"/>
+                <a:cs typeface="Arial"/>
+              </a:defRPr>
+            </a:pPr>
+            <a:r>
+              <a:rPr sz="3225" b="1">
+                <a:solidFill>
+                  <a:srgbClr val="3D8DFF"/>
+                </a:solidFill>
+                <a:latin typeface="Arial"/>
+                <a:ea typeface="Arial"/>
+                <a:cs typeface="Arial"/>
+              </a:rPr>
+              <a:t>q = 0.274</a:t>
+            </a:r>
+          </a:p>
+        </p:txBody>
+      </p:sp>
+      <p:sp>
+        <p:nvSpPr>
+          <p:cNvPr id="15" name="">
+            <a:extLst xmlns:a="http://schemas.openxmlformats.org/drawingml/2006/main">
+              <a:ext uri="{FF2B5EF4-FFF2-40B4-BE49-F238E27FC236}">
+                <a16:creationId xmlns:a16="http://schemas.microsoft.com/office/drawing/2014/main" id="{03DFBB46-08D6-4497-AA7C-C2049757E9DE}"/>
+              </a:ext>
+            </a:extLst>
+          </p:cNvPr>
+          <p:cNvSpPr>
+            <a:spLocks xmlns:a="http://schemas.openxmlformats.org/drawingml/2006/main" noGrp="1"/>
+          </p:cNvSpPr>
+          <p:nvPr/>
+        </p:nvSpPr>
+        <p:spPr>
+          <a:xfrm xmlns:a="http://schemas.openxmlformats.org/drawingml/2006/main">
+            <a:off x="8629650" y="3981450"/>
+            <a:ext cx="2686050" cy="438150"/>
+          </a:xfrm>
+          <a:prstGeom xmlns:a="http://schemas.openxmlformats.org/drawingml/2006/main" prst="rect">
+            <a:avLst/>
+          </a:prstGeom>
+          <a:noFill xmlns:a="http://schemas.openxmlformats.org/drawingml/2006/main"/>
+          <a:ln xmlns:a="http://schemas.openxmlformats.org/drawingml/2006/main" w="0">
+            <a:noFill/>
+            <a:prstDash val="solid"/>
+          </a:ln>
+        </p:spPr>
+        <p:txBody>
+          <a:bodyPr xmlns:a="http://schemas.openxmlformats.org/drawingml/2006/main" wrap="square" lIns="0" tIns="0" rIns="0" bIns="0" anchor="t">
+            <a:normAutofit fontScale="100000"/>
+          </a:bodyPr>
+          <a:lstStyle xmlns:a="http://schemas.openxmlformats.org/drawingml/2006/main"/>
+          <a:p xmlns:a="http://schemas.openxmlformats.org/drawingml/2006/main">
+            <a:pPr algn="l">
+              <a:buNone/>
+              <a:defRPr sz="1350" b="0">
+                <a:solidFill>
+                  <a:srgbClr val="273548"/>
+                </a:solidFill>
+                <a:latin typeface="Arial"/>
+                <a:ea typeface="Arial"/>
+                <a:cs typeface="Arial"/>
+              </a:defRPr>
+            </a:pPr>
+            <a:r>
+              <a:rPr sz="1350" b="0">
+                <a:solidFill>
+                  <a:srgbClr val="273548"/>
+                </a:solidFill>
+                <a:latin typeface="Arial"/>
+                <a:ea typeface="Arial"/>
+                <a:cs typeface="Arial"/>
+              </a:rPr>
+              <a:t>within MEDIUM-minus-LOW family</a:t>
+            </a:r>
+          </a:p>
+        </p:txBody>
+      </p:sp>
+      <p:sp>
+        <p:nvSpPr>
+          <p:cNvPr id="16" name="">
+            <a:extLst xmlns:a="http://schemas.openxmlformats.org/drawingml/2006/main">
+              <a:ext uri="{FF2B5EF4-FFF2-40B4-BE49-F238E27FC236}">
+                <a16:creationId xmlns:a16="http://schemas.microsoft.com/office/drawing/2014/main" id="{509D61CC-6E5E-49EC-A5F6-E861E8561441}"/>
+              </a:ext>
+            </a:extLst>
+          </p:cNvPr>
+          <p:cNvSpPr>
+            <a:spLocks xmlns:a="http://schemas.openxmlformats.org/drawingml/2006/main" noGrp="1"/>
+          </p:cNvSpPr>
+          <p:nvPr/>
+        </p:nvSpPr>
+        <p:spPr>
+          <a:xfrm xmlns:a="http://schemas.openxmlformats.org/drawingml/2006/main">
+            <a:off x="8362950" y="4781550"/>
+            <a:ext cx="3143250" cy="1428750"/>
+          </a:xfrm>
+          <a:prstGeom xmlns:a="http://schemas.openxmlformats.org/drawingml/2006/main" prst="rect">
+            <a:avLst/>
+          </a:prstGeom>
+          <a:solidFill xmlns:a="http://schemas.openxmlformats.org/drawingml/2006/main">
+            <a:srgbClr val="EDEDED"/>
+          </a:solidFill>
+          <a:ln xmlns:a="http://schemas.openxmlformats.org/drawingml/2006/main" w="0">
+            <a:solidFill>
+              <a:srgbClr val="EDEDED"/>
+            </a:solidFill>
+            <a:prstDash val="solid"/>
+          </a:ln>
+        </p:spPr>
+      </p:sp>
+      <p:sp>
+        <p:nvSpPr>
+          <p:cNvPr id="17" name="">
+            <a:extLst xmlns:a="http://schemas.openxmlformats.org/drawingml/2006/main">
+              <a:ext uri="{FF2B5EF4-FFF2-40B4-BE49-F238E27FC236}">
+                <a16:creationId xmlns:a16="http://schemas.microsoft.com/office/drawing/2014/main" id="{A935608E-4DDE-41BA-8DF2-831CF419565B}"/>
+              </a:ext>
+            </a:extLst>
+          </p:cNvPr>
+          <p:cNvSpPr>
+            <a:spLocks xmlns:a="http://schemas.openxmlformats.org/drawingml/2006/main" noGrp="1"/>
+          </p:cNvSpPr>
+          <p:nvPr/>
+        </p:nvSpPr>
+        <p:spPr>
+          <a:xfrm xmlns:a="http://schemas.openxmlformats.org/drawingml/2006/main">
+            <a:off x="8362950" y="4781550"/>
+            <a:ext cx="76200" cy="1428750"/>
+          </a:xfrm>
+          <a:prstGeom xmlns:a="http://schemas.openxmlformats.org/drawingml/2006/main" prst="rect">
+            <a:avLst/>
+          </a:prstGeom>
+          <a:solidFill xmlns:a="http://schemas.openxmlformats.org/drawingml/2006/main">
+            <a:srgbClr val="273548"/>
+          </a:solidFill>
+          <a:ln xmlns:a="http://schemas.openxmlformats.org/drawingml/2006/main" w="0">
+            <a:solidFill>
+              <a:srgbClr val="273548"/>
+            </a:solidFill>
+            <a:prstDash val="solid"/>
+          </a:ln>
+        </p:spPr>
+      </p:sp>
+      <p:sp>
+        <p:nvSpPr>
+          <p:cNvPr id="18" name="">
+            <a:extLst xmlns:a="http://schemas.openxmlformats.org/drawingml/2006/main">
+              <a:ext uri="{FF2B5EF4-FFF2-40B4-BE49-F238E27FC236}">
+                <a16:creationId xmlns:a16="http://schemas.microsoft.com/office/drawing/2014/main" id="{088A976D-39D1-4C6C-803F-0D3F8BAE4A28}"/>
+              </a:ext>
+            </a:extLst>
+          </p:cNvPr>
+          <p:cNvSpPr>
+            <a:spLocks xmlns:a="http://schemas.openxmlformats.org/drawingml/2006/main" noGrp="1"/>
+          </p:cNvSpPr>
+          <p:nvPr/>
+        </p:nvSpPr>
+        <p:spPr>
+          <a:xfrm xmlns:a="http://schemas.openxmlformats.org/drawingml/2006/main">
+            <a:off x="8629650" y="4953000"/>
+            <a:ext cx="2686050" cy="590550"/>
+          </a:xfrm>
+          <a:prstGeom xmlns:a="http://schemas.openxmlformats.org/drawingml/2006/main" prst="rect">
+            <a:avLst/>
+          </a:prstGeom>
+          <a:noFill xmlns:a="http://schemas.openxmlformats.org/drawingml/2006/main"/>
+          <a:ln xmlns:a="http://schemas.openxmlformats.org/drawingml/2006/main" w="0">
+            <a:noFill/>
+            <a:prstDash val="solid"/>
+          </a:ln>
+        </p:spPr>
+        <p:txBody>
+          <a:bodyPr xmlns:a="http://schemas.openxmlformats.org/drawingml/2006/main" wrap="square" lIns="0" tIns="0" rIns="0" bIns="0" anchor="t">
+            <a:normAutofit fontScale="100000"/>
+          </a:bodyPr>
+          <a:lstStyle xmlns:a="http://schemas.openxmlformats.org/drawingml/2006/main"/>
+          <a:p xmlns:a="http://schemas.openxmlformats.org/drawingml/2006/main">
+            <a:pPr algn="l">
+              <a:buNone/>
+              <a:defRPr sz="3225" b="1">
+                <a:solidFill>
+                  <a:srgbClr val="273548"/>
+                </a:solidFill>
+                <a:latin typeface="Arial"/>
+                <a:ea typeface="Arial"/>
+                <a:cs typeface="Arial"/>
+              </a:defRPr>
+            </a:pPr>
+            <a:r>
+              <a:rPr sz="3225" b="1">
+                <a:solidFill>
+                  <a:srgbClr val="273548"/>
+                </a:solidFill>
+                <a:latin typeface="Arial"/>
+                <a:ea typeface="Arial"/>
+                <a:cs typeface="Arial"/>
+              </a:rPr>
+              <a:t>0 / 243</a:t>
+            </a:r>
+          </a:p>
+        </p:txBody>
+      </p:sp>
+      <p:sp>
+        <p:nvSpPr>
+          <p:cNvPr id="19" name="">
+            <a:extLst xmlns:a="http://schemas.openxmlformats.org/drawingml/2006/main">
+              <a:ext uri="{FF2B5EF4-FFF2-40B4-BE49-F238E27FC236}">
+                <a16:creationId xmlns:a16="http://schemas.microsoft.com/office/drawing/2014/main" id="{AA1E116E-13CC-4735-B31A-B5C1846B2D22}"/>
+              </a:ext>
+            </a:extLst>
+          </p:cNvPr>
+          <p:cNvSpPr>
+            <a:spLocks xmlns:a="http://schemas.openxmlformats.org/drawingml/2006/main" noGrp="1"/>
+          </p:cNvSpPr>
+          <p:nvPr/>
+        </p:nvSpPr>
+        <p:spPr>
+          <a:xfrm xmlns:a="http://schemas.openxmlformats.org/drawingml/2006/main">
+            <a:off x="8629650" y="5619750"/>
+            <a:ext cx="2686050" cy="438150"/>
+          </a:xfrm>
+          <a:prstGeom xmlns:a="http://schemas.openxmlformats.org/drawingml/2006/main" prst="rect">
+            <a:avLst/>
+          </a:prstGeom>
+          <a:noFill xmlns:a="http://schemas.openxmlformats.org/drawingml/2006/main"/>
+          <a:ln xmlns:a="http://schemas.openxmlformats.org/drawingml/2006/main" w="0">
+            <a:noFill/>
+            <a:prstDash val="solid"/>
+          </a:ln>
+        </p:spPr>
+        <p:txBody>
+          <a:bodyPr xmlns:a="http://schemas.openxmlformats.org/drawingml/2006/main" wrap="square" lIns="0" tIns="0" rIns="0" bIns="0" anchor="t">
+            <a:normAutofit fontScale="100000"/>
+          </a:bodyPr>
+          <a:lstStyle xmlns:a="http://schemas.openxmlformats.org/drawingml/2006/main"/>
+          <a:p xmlns:a="http://schemas.openxmlformats.org/drawingml/2006/main">
+            <a:pPr algn="l">
+              <a:buNone/>
+              <a:defRPr sz="1350" b="0">
+                <a:solidFill>
+                  <a:srgbClr val="273548"/>
+                </a:solidFill>
+                <a:latin typeface="Arial"/>
+                <a:ea typeface="Arial"/>
+                <a:cs typeface="Arial"/>
+              </a:defRPr>
+            </a:pPr>
+            <a:r>
+              <a:rPr sz="1350" b="0">
+                <a:solidFill>
+                  <a:srgbClr val="273548"/>
+                </a:solidFill>
+                <a:latin typeface="Arial"/>
+                <a:ea typeface="Arial"/>
+                <a:cs typeface="Arial"/>
+              </a:rPr>
+              <a:t>pairwise cells surviving strict omnibus BH</a:t>
+            </a:r>
+          </a:p>
+        </p:txBody>
+      </p:sp>
+      <p:pic>
+        <p:nvPicPr>
+          <p:cNvPr id="40" name=""/>
+          <p:cNvPicPr>
+            <a:picLocks xmlns:a="http://schemas.openxmlformats.org/drawingml/2006/main" noChangeAspect="1"/>
+          </p:cNvPicPr>
+          <p:nvPr/>
+        </p:nvPicPr>
+        <p:blipFill>
+          <a:blip xmlns:r="http://schemas.openxmlformats.org/officeDocument/2006/relationships" xmlns:a="http://schemas.openxmlformats.org/drawingml/2006/main" r:embed="R2e18e1a825f7426e"/>
+          <a:stretch xmlns:a="http://schemas.openxmlformats.org/drawingml/2006/main"/>
+        </p:blipFill>
+        <p:spPr>
+          <a:xfrm xmlns:a="http://schemas.openxmlformats.org/drawingml/2006/main" flipH="0" flipV="0">
+            <a:off x="609600" y="1428750"/>
+            <a:ext cx="7143750" cy="4762500"/>
+          </a:xfrm>
+          <a:prstGeom xmlns:a="http://schemas.openxmlformats.org/drawingml/2006/main" prst="rect">
+            <a:avLst/>
+          </a:prstGeom>
+        </p:spPr>
+      </p:pic>
+    </p:spTree>
+    <p:extLst>
+      <p:ext uri="{BB962C8B-B14F-4D97-AF65-F5344CB8AC3E}">
+        <p14:creationId xmlns:p14="http://schemas.microsoft.com/office/powerpoint/2010/main" val="1583170704"/>
+      </p:ext>
+    </p:extLst>
+  </p:cSld>
+</p:sld>
+</file>
+
+<file path=ppt/slides/slide47.xml><?xml version="1.0" encoding="utf-8"?>
+<p:sld xmlns:p="http://schemas.openxmlformats.org/presentationml/2006/main">
+  <p:cSld>
+    <p:bg>
+      <p:bgPr>
+        <a:solidFill xmlns:a="http://schemas.openxmlformats.org/drawingml/2006/main">
+          <a:srgbClr val="FFFFFF"/>
+        </a:solidFill>
+      </p:bgPr>
+    </p:bg>
+    <p:spTree>
+      <p:nvGrpSpPr>
+        <p:cNvPr id="1" name=""/>
+        <p:cNvGrpSpPr/>
+        <p:nvPr/>
+      </p:nvGrpSpPr>
+      <p:grpSpPr>
+        <a:xfrm xmlns:a="http://schemas.openxmlformats.org/drawingml/2006/main"/>
+      </p:grpSpPr>
+      <p:sp>
+        <p:nvSpPr>
+          <p:cNvPr id="24" name="section-11">
+            <a:extLst xmlns:a="http://schemas.openxmlformats.org/drawingml/2006/main">
+              <a:ext uri="{FF2B5EF4-FFF2-40B4-BE49-F238E27FC236}">
+                <a16:creationId xmlns:a16="http://schemas.microsoft.com/office/drawing/2014/main" id="{272ED433-B59C-436C-9DFB-4D317B90A13F}"/>
+              </a:ext>
+            </a:extLst>
+          </p:cNvPr>
+          <p:cNvSpPr>
+            <a:spLocks xmlns:a="http://schemas.openxmlformats.org/drawingml/2006/main" noGrp="1"/>
+          </p:cNvSpPr>
+          <p:nvPr/>
+        </p:nvSpPr>
+        <p:spPr>
+          <a:xfrm xmlns:a="http://schemas.openxmlformats.org/drawingml/2006/main">
+            <a:off x="457200" y="228600"/>
+            <a:ext cx="4191000" cy="228600"/>
+          </a:xfrm>
+          <a:prstGeom xmlns:a="http://schemas.openxmlformats.org/drawingml/2006/main" prst="rect">
+            <a:avLst/>
+          </a:prstGeom>
+          <a:noFill xmlns:a="http://schemas.openxmlformats.org/drawingml/2006/main"/>
+          <a:ln xmlns:a="http://schemas.openxmlformats.org/drawingml/2006/main" w="0">
+            <a:noFill/>
+            <a:prstDash val="solid"/>
+          </a:ln>
+        </p:spPr>
+        <p:txBody>
+          <a:bodyPr xmlns:a="http://schemas.openxmlformats.org/drawingml/2006/main" wrap="square" lIns="0" tIns="0" rIns="0" bIns="0" anchor="t">
+            <a:normAutofit fontScale="100000"/>
+          </a:bodyPr>
+          <a:lstStyle xmlns:a="http://schemas.openxmlformats.org/drawingml/2006/main"/>
+          <a:p xmlns:a="http://schemas.openxmlformats.org/drawingml/2006/main">
+            <a:pPr algn="l">
+              <a:buNone/>
+              <a:defRPr sz="1200" b="1">
+                <a:solidFill>
+                  <a:srgbClr val="667384"/>
+                </a:solidFill>
+                <a:latin typeface="Arial"/>
+                <a:ea typeface="Arial"/>
+                <a:cs typeface="Arial"/>
+              </a:defRPr>
+            </a:pPr>
+            <a:r>
+              <a:rPr sz="1200" b="1">
+                <a:solidFill>
+                  <a:srgbClr val="667384"/>
+                </a:solidFill>
+                <a:latin typeface="Arial"/>
+                <a:ea typeface="Arial"/>
+                <a:cs typeface="Arial"/>
+              </a:rPr>
+              <a:t>TSLA DESCRIPTIVE MICROSCOPE</a:t>
+            </a:r>
+          </a:p>
+        </p:txBody>
+      </p:sp>
+      <p:sp>
+        <p:nvSpPr>
+          <p:cNvPr id="2" name="title-11">
+            <a:extLst xmlns:a="http://schemas.openxmlformats.org/drawingml/2006/main">
+              <a:ext uri="{FF2B5EF4-FFF2-40B4-BE49-F238E27FC236}">
+                <a16:creationId xmlns:a16="http://schemas.microsoft.com/office/drawing/2014/main" id="{3EC40708-7E00-432C-8ECE-907FA5705292}"/>
+              </a:ext>
+            </a:extLst>
+          </p:cNvPr>
+          <p:cNvSpPr>
+            <a:spLocks xmlns:a="http://schemas.openxmlformats.org/drawingml/2006/main" noGrp="1"/>
+          </p:cNvSpPr>
+          <p:nvPr/>
+        </p:nvSpPr>
+        <p:spPr>
+          <a:xfrm xmlns:a="http://schemas.openxmlformats.org/drawingml/2006/main">
+            <a:off x="457200" y="533400"/>
+            <a:ext cx="11277600" cy="628650"/>
+          </a:xfrm>
+          <a:prstGeom xmlns:a="http://schemas.openxmlformats.org/drawingml/2006/main" prst="rect">
+            <a:avLst/>
+          </a:prstGeom>
+          <a:noFill xmlns:a="http://schemas.openxmlformats.org/drawingml/2006/main"/>
+          <a:ln xmlns:a="http://schemas.openxmlformats.org/drawingml/2006/main" w="0">
+            <a:noFill/>
+            <a:prstDash val="solid"/>
+          </a:ln>
+        </p:spPr>
+        <p:txBody>
+          <a:bodyPr xmlns:a="http://schemas.openxmlformats.org/drawingml/2006/main" wrap="square" lIns="0" tIns="0" rIns="0" bIns="0" anchor="t">
+            <a:normAutofit fontScale="100000"/>
+          </a:bodyPr>
+          <a:lstStyle xmlns:a="http://schemas.openxmlformats.org/drawingml/2006/main"/>
+          <a:p xmlns:a="http://schemas.openxmlformats.org/drawingml/2006/main">
+            <a:pPr algn="l">
+              <a:buNone/>
+              <a:defRPr sz="3525" b="1">
+                <a:solidFill>
+                  <a:srgbClr val="000000"/>
+                </a:solidFill>
+                <a:latin typeface="Arial"/>
+                <a:ea typeface="Arial"/>
+                <a:cs typeface="Arial"/>
+              </a:defRPr>
+            </a:pPr>
+            <a:r>
+              <a:rPr sz="3525" b="1">
+                <a:solidFill>
+                  <a:srgbClr val="000000"/>
+                </a:solidFill>
+                <a:latin typeface="Arial"/>
+                <a:ea typeface="Arial"/>
+                <a:cs typeface="Arial"/>
+              </a:rPr>
+              <a:t>QQQ reshapes TSLA returns—but leaves no edge</a:t>
+            </a:r>
+          </a:p>
+        </p:txBody>
+      </p:sp>
+      <p:sp>
+        <p:nvSpPr>
+          <p:cNvPr id="3" name="">
+            <a:extLst xmlns:a="http://schemas.openxmlformats.org/drawingml/2006/main">
+              <a:ext uri="{FF2B5EF4-FFF2-40B4-BE49-F238E27FC236}">
+                <a16:creationId xmlns:a16="http://schemas.microsoft.com/office/drawing/2014/main" id="{D5CA0FCE-75E8-41EF-A76A-23E9E2120C6A}"/>
+              </a:ext>
+            </a:extLst>
+          </p:cNvPr>
+          <p:cNvSpPr>
+            <a:spLocks xmlns:a="http://schemas.openxmlformats.org/drawingml/2006/main" noGrp="1"/>
+          </p:cNvSpPr>
+          <p:nvPr/>
+        </p:nvSpPr>
+        <p:spPr>
+          <a:xfrm xmlns:a="http://schemas.openxmlformats.org/drawingml/2006/main">
+            <a:off x="457200" y="1200150"/>
+            <a:ext cx="11277600" cy="19050"/>
+          </a:xfrm>
+          <a:prstGeom xmlns:a="http://schemas.openxmlformats.org/drawingml/2006/main" prst="rect">
+            <a:avLst/>
+          </a:prstGeom>
+          <a:solidFill xmlns:a="http://schemas.openxmlformats.org/drawingml/2006/main">
+            <a:srgbClr val="B8BCC4"/>
+          </a:solidFill>
+          <a:ln xmlns:a="http://schemas.openxmlformats.org/drawingml/2006/main" w="0">
+            <a:solidFill>
+              <a:srgbClr val="B8BCC4"/>
+            </a:solidFill>
+            <a:prstDash val="solid"/>
+          </a:ln>
+        </p:spPr>
+      </p:sp>
+      <p:sp>
+        <p:nvSpPr>
+          <p:cNvPr id="4" name="footer-left-11">
+            <a:extLst xmlns:a="http://schemas.openxmlformats.org/drawingml/2006/main">
+              <a:ext uri="{FF2B5EF4-FFF2-40B4-BE49-F238E27FC236}">
+                <a16:creationId xmlns:a16="http://schemas.microsoft.com/office/drawing/2014/main" id="{700DA765-80E0-4197-8700-00D867B86FA2}"/>
+              </a:ext>
+            </a:extLst>
+          </p:cNvPr>
+          <p:cNvSpPr>
+            <a:spLocks xmlns:a="http://schemas.openxmlformats.org/drawingml/2006/main" noGrp="1"/>
+          </p:cNvSpPr>
+          <p:nvPr/>
+        </p:nvSpPr>
+        <p:spPr>
+          <a:xfrm xmlns:a="http://schemas.openxmlformats.org/drawingml/2006/main">
+            <a:off x="457200" y="6515100"/>
+            <a:ext cx="3429000" cy="171450"/>
+          </a:xfrm>
+          <a:prstGeom xmlns:a="http://schemas.openxmlformats.org/drawingml/2006/main" prst="rect">
+            <a:avLst/>
+          </a:prstGeom>
+          <a:noFill xmlns:a="http://schemas.openxmlformats.org/drawingml/2006/main"/>
+          <a:ln xmlns:a="http://schemas.openxmlformats.org/drawingml/2006/main" w="0">
+            <a:noFill/>
+            <a:prstDash val="solid"/>
+          </a:ln>
+        </p:spPr>
+        <p:txBody>
+          <a:bodyPr xmlns:a="http://schemas.openxmlformats.org/drawingml/2006/main" wrap="square" lIns="0" tIns="0" rIns="0" bIns="0" anchor="t">
+            <a:normAutofit fontScale="100000"/>
+          </a:bodyPr>
+          <a:lstStyle xmlns:a="http://schemas.openxmlformats.org/drawingml/2006/main"/>
+          <a:p xmlns:a="http://schemas.openxmlformats.org/drawingml/2006/main">
+            <a:pPr algn="l">
+              <a:buNone/>
+              <a:defRPr sz="1050" b="0">
+                <a:solidFill>
+                  <a:srgbClr val="667384"/>
+                </a:solidFill>
+                <a:latin typeface="Arial"/>
+                <a:ea typeface="Arial"/>
+                <a:cs typeface="Arial"/>
+              </a:defRPr>
+            </a:pPr>
+            <a:r>
+              <a:rPr sz="1050" b="0">
+                <a:solidFill>
+                  <a:srgbClr val="667384"/>
+                </a:solidFill>
+                <a:latin typeface="Arial"/>
+                <a:ea typeface="Arial"/>
+                <a:cs typeface="Arial"/>
+              </a:rPr>
+              <a:t>Adjusted daily TSLA | 2018-2023</a:t>
+            </a:r>
+          </a:p>
+        </p:txBody>
+      </p:sp>
+      <p:sp>
+        <p:nvSpPr>
+          <p:cNvPr id="5" name="footer-number-11">
+            <a:extLst xmlns:a="http://schemas.openxmlformats.org/drawingml/2006/main">
+              <a:ext uri="{FF2B5EF4-FFF2-40B4-BE49-F238E27FC236}">
+                <a16:creationId xmlns:a16="http://schemas.microsoft.com/office/drawing/2014/main" id="{83896276-4112-4532-AF7C-776C67C58B77}"/>
+              </a:ext>
+            </a:extLst>
+          </p:cNvPr>
+          <p:cNvSpPr>
+            <a:spLocks xmlns:a="http://schemas.openxmlformats.org/drawingml/2006/main" noGrp="1"/>
+          </p:cNvSpPr>
+          <p:nvPr/>
+        </p:nvSpPr>
+        <p:spPr>
+          <a:xfrm xmlns:a="http://schemas.openxmlformats.org/drawingml/2006/main">
+            <a:off x="11239500" y="6496050"/>
+            <a:ext cx="495300" cy="190500"/>
+          </a:xfrm>
+          <a:prstGeom xmlns:a="http://schemas.openxmlformats.org/drawingml/2006/main" prst="rect">
+            <a:avLst/>
+          </a:prstGeom>
+          <a:noFill xmlns:a="http://schemas.openxmlformats.org/drawingml/2006/main"/>
+          <a:ln xmlns:a="http://schemas.openxmlformats.org/drawingml/2006/main" w="0">
+            <a:noFill/>
+            <a:prstDash val="solid"/>
+          </a:ln>
+        </p:spPr>
+        <p:txBody>
+          <a:bodyPr xmlns:a="http://schemas.openxmlformats.org/drawingml/2006/main" wrap="square" lIns="0" tIns="0" rIns="0" bIns="0" anchor="t">
+            <a:normAutofit fontScale="100000"/>
+          </a:bodyPr>
+          <a:lstStyle xmlns:a="http://schemas.openxmlformats.org/drawingml/2006/main"/>
+          <a:p xmlns:a="http://schemas.openxmlformats.org/drawingml/2006/main">
+            <a:pPr algn="r">
+              <a:buNone/>
+              <a:defRPr sz="1050" b="0">
+                <a:solidFill>
+                  <a:srgbClr val="667384"/>
+                </a:solidFill>
+                <a:latin typeface="Arial"/>
+                <a:ea typeface="Arial"/>
+                <a:cs typeface="Arial"/>
+              </a:defRPr>
+            </a:pPr>
+            <a:r>
+              <a:rPr sz="1050" b="0">
+                <a:solidFill>
+                  <a:srgbClr val="667384"/>
+                </a:solidFill>
+                <a:latin typeface="Arial"/>
+                <a:ea typeface="Arial"/>
+                <a:cs typeface="Arial"/>
+              </a:rPr>
+              <a:t>47</a:t>
+            </a:r>
+          </a:p>
+        </p:txBody>
+      </p:sp>
+      <p:sp>
+        <p:nvSpPr>
+          <p:cNvPr id="6" name="">
+            <a:extLst xmlns:a="http://schemas.openxmlformats.org/drawingml/2006/main">
+              <a:ext uri="{FF2B5EF4-FFF2-40B4-BE49-F238E27FC236}">
+                <a16:creationId xmlns:a16="http://schemas.microsoft.com/office/drawing/2014/main" id="{10F4BA85-46C5-47BD-BA74-EC806E663D58}"/>
+              </a:ext>
+            </a:extLst>
+          </p:cNvPr>
+          <p:cNvSpPr>
+            <a:spLocks xmlns:a="http://schemas.openxmlformats.org/drawingml/2006/main" noGrp="1"/>
+          </p:cNvSpPr>
+          <p:nvPr/>
+        </p:nvSpPr>
+        <p:spPr>
+          <a:xfrm xmlns:a="http://schemas.openxmlformats.org/drawingml/2006/main">
+            <a:off x="552450" y="1600200"/>
+            <a:ext cx="95250" cy="895350"/>
+          </a:xfrm>
+          <a:prstGeom xmlns:a="http://schemas.openxmlformats.org/drawingml/2006/main" prst="rect">
+            <a:avLst/>
+          </a:prstGeom>
+          <a:solidFill xmlns:a="http://schemas.openxmlformats.org/drawingml/2006/main">
+            <a:srgbClr val="E45756"/>
+          </a:solidFill>
+          <a:ln xmlns:a="http://schemas.openxmlformats.org/drawingml/2006/main" w="0">
+            <a:solidFill>
+              <a:srgbClr val="E45756"/>
+            </a:solidFill>
+            <a:prstDash val="solid"/>
+          </a:ln>
+        </p:spPr>
+      </p:sp>
+      <p:sp>
+        <p:nvSpPr>
+          <p:cNvPr id="7" name="">
+            <a:extLst xmlns:a="http://schemas.openxmlformats.org/drawingml/2006/main">
+              <a:ext uri="{FF2B5EF4-FFF2-40B4-BE49-F238E27FC236}">
+                <a16:creationId xmlns:a16="http://schemas.microsoft.com/office/drawing/2014/main" id="{7EF5B945-9D04-48FA-BA66-96DE813A9715}"/>
+              </a:ext>
+            </a:extLst>
+          </p:cNvPr>
+          <p:cNvSpPr>
+            <a:spLocks xmlns:a="http://schemas.openxmlformats.org/drawingml/2006/main" noGrp="1"/>
+          </p:cNvSpPr>
+          <p:nvPr/>
+        </p:nvSpPr>
+        <p:spPr>
+          <a:xfrm xmlns:a="http://schemas.openxmlformats.org/drawingml/2006/main">
+            <a:off x="876300" y="1581150"/>
+            <a:ext cx="2095500" cy="285750"/>
+          </a:xfrm>
+          <a:prstGeom xmlns:a="http://schemas.openxmlformats.org/drawingml/2006/main" prst="rect">
+            <a:avLst/>
+          </a:prstGeom>
+          <a:noFill xmlns:a="http://schemas.openxmlformats.org/drawingml/2006/main"/>
+          <a:ln xmlns:a="http://schemas.openxmlformats.org/drawingml/2006/main" w="0">
+            <a:noFill/>
+            <a:prstDash val="solid"/>
+          </a:ln>
+        </p:spPr>
+        <p:txBody>
+          <a:bodyPr xmlns:a="http://schemas.openxmlformats.org/drawingml/2006/main" wrap="square" lIns="0" tIns="0" rIns="0" bIns="0" anchor="t">
+            <a:normAutofit fontScale="100000"/>
+          </a:bodyPr>
+          <a:lstStyle xmlns:a="http://schemas.openxmlformats.org/drawingml/2006/main"/>
+          <a:p xmlns:a="http://schemas.openxmlformats.org/drawingml/2006/main">
+            <a:pPr algn="l">
+              <a:buNone/>
+              <a:defRPr sz="1350" b="1">
+                <a:solidFill>
+                  <a:srgbClr val="E45756"/>
+                </a:solidFill>
+                <a:latin typeface="Arial"/>
+                <a:ea typeface="Arial"/>
+                <a:cs typeface="Arial"/>
+              </a:defRPr>
+            </a:pPr>
+            <a:r>
+              <a:rPr sz="1350" b="1">
+                <a:solidFill>
+                  <a:srgbClr val="E45756"/>
+                </a:solidFill>
+                <a:latin typeface="Arial"/>
+                <a:ea typeface="Arial"/>
+                <a:cs typeface="Arial"/>
+              </a:rPr>
+              <a:t>QQQ LOW MAP</a:t>
+            </a:r>
+          </a:p>
+        </p:txBody>
+      </p:sp>
+      <p:sp>
+        <p:nvSpPr>
+          <p:cNvPr id="8" name="">
+            <a:extLst xmlns:a="http://schemas.openxmlformats.org/drawingml/2006/main">
+              <a:ext uri="{FF2B5EF4-FFF2-40B4-BE49-F238E27FC236}">
+                <a16:creationId xmlns:a16="http://schemas.microsoft.com/office/drawing/2014/main" id="{655CF75D-5F23-4C7F-BE9C-764036D0B9E8}"/>
+              </a:ext>
+            </a:extLst>
+          </p:cNvPr>
+          <p:cNvSpPr>
+            <a:spLocks xmlns:a="http://schemas.openxmlformats.org/drawingml/2006/main" noGrp="1"/>
+          </p:cNvSpPr>
+          <p:nvPr/>
+        </p:nvSpPr>
+        <p:spPr>
+          <a:xfrm xmlns:a="http://schemas.openxmlformats.org/drawingml/2006/main">
+            <a:off x="3105150" y="1562100"/>
+            <a:ext cx="4762500" cy="419100"/>
+          </a:xfrm>
+          <a:prstGeom xmlns:a="http://schemas.openxmlformats.org/drawingml/2006/main" prst="rect">
+            <a:avLst/>
+          </a:prstGeom>
+          <a:noFill xmlns:a="http://schemas.openxmlformats.org/drawingml/2006/main"/>
+          <a:ln xmlns:a="http://schemas.openxmlformats.org/drawingml/2006/main" w="0">
+            <a:noFill/>
+            <a:prstDash val="solid"/>
+          </a:ln>
+        </p:spPr>
+        <p:txBody>
+          <a:bodyPr xmlns:a="http://schemas.openxmlformats.org/drawingml/2006/main" wrap="square" lIns="0" tIns="0" rIns="0" bIns="0" anchor="t">
+            <a:normAutofit fontScale="92856"/>
+          </a:bodyPr>
+          <a:lstStyle xmlns:a="http://schemas.openxmlformats.org/drawingml/2006/main"/>
+          <a:p xmlns:a="http://schemas.openxmlformats.org/drawingml/2006/main">
+            <a:pPr algn="l">
+              <a:buNone/>
+              <a:defRPr sz="1950" b="1">
+                <a:solidFill>
+                  <a:srgbClr val="273548"/>
+                </a:solidFill>
+                <a:latin typeface="Arial"/>
+                <a:ea typeface="Arial"/>
+                <a:cs typeface="Arial"/>
+              </a:defRPr>
+            </a:pPr>
+            <a:r>
+              <a:rPr sz="1950" b="1">
+                <a:solidFill>
+                  <a:srgbClr val="273548"/>
+                </a:solidFill>
+                <a:latin typeface="Arial"/>
+                <a:ea typeface="Arial"/>
+                <a:cs typeface="Arial"/>
+              </a:rPr>
+              <a:t>Preserves the broad continuation geometry</a:t>
+            </a:r>
+          </a:p>
+        </p:txBody>
+      </p:sp>
+      <p:sp>
+        <p:nvSpPr>
+          <p:cNvPr id="9" name="">
+            <a:extLst xmlns:a="http://schemas.openxmlformats.org/drawingml/2006/main">
+              <a:ext uri="{FF2B5EF4-FFF2-40B4-BE49-F238E27FC236}">
+                <a16:creationId xmlns:a16="http://schemas.microsoft.com/office/drawing/2014/main" id="{3E0B76F2-4514-4DD8-934B-ABE42A34E950}"/>
+              </a:ext>
+            </a:extLst>
+          </p:cNvPr>
+          <p:cNvSpPr>
+            <a:spLocks xmlns:a="http://schemas.openxmlformats.org/drawingml/2006/main" noGrp="1"/>
+          </p:cNvSpPr>
+          <p:nvPr/>
+        </p:nvSpPr>
+        <p:spPr>
+          <a:xfrm xmlns:a="http://schemas.openxmlformats.org/drawingml/2006/main">
+            <a:off x="8096250" y="1581150"/>
+            <a:ext cx="3333750" cy="704850"/>
+          </a:xfrm>
+          <a:prstGeom xmlns:a="http://schemas.openxmlformats.org/drawingml/2006/main" prst="rect">
+            <a:avLst/>
+          </a:prstGeom>
+          <a:noFill xmlns:a="http://schemas.openxmlformats.org/drawingml/2006/main"/>
+          <a:ln xmlns:a="http://schemas.openxmlformats.org/drawingml/2006/main" w="0">
+            <a:noFill/>
+            <a:prstDash val="solid"/>
+          </a:ln>
+        </p:spPr>
+        <p:txBody>
+          <a:bodyPr xmlns:a="http://schemas.openxmlformats.org/drawingml/2006/main" wrap="square" lIns="0" tIns="0" rIns="0" bIns="0" anchor="t">
+            <a:normAutofit fontScale="100000"/>
+          </a:bodyPr>
+          <a:lstStyle xmlns:a="http://schemas.openxmlformats.org/drawingml/2006/main"/>
+          <a:p xmlns:a="http://schemas.openxmlformats.org/drawingml/2006/main">
+            <a:pPr algn="l">
+              <a:buNone/>
+              <a:defRPr sz="1425" b="0">
+                <a:solidFill>
+                  <a:srgbClr val="667384"/>
+                </a:solidFill>
+                <a:latin typeface="Arial"/>
+                <a:ea typeface="Arial"/>
+                <a:cs typeface="Arial"/>
+              </a:defRPr>
+            </a:pPr>
+            <a:r>
+              <a:rPr sz="1425" b="0">
+                <a:solidFill>
+                  <a:srgbClr val="667384"/>
+                </a:solidFill>
+                <a:latin typeface="Arial"/>
+                <a:ea typeface="Arial"/>
+                <a:cs typeface="Arial"/>
+              </a:rPr>
+              <a:t>77/81 positive; 77/81 same sign vs own; mean r +0.123</a:t>
+            </a:r>
+          </a:p>
+        </p:txBody>
+      </p:sp>
+      <p:sp>
+        <p:nvSpPr>
+          <p:cNvPr id="10" name="">
+            <a:extLst xmlns:a="http://schemas.openxmlformats.org/drawingml/2006/main">
+              <a:ext uri="{FF2B5EF4-FFF2-40B4-BE49-F238E27FC236}">
+                <a16:creationId xmlns:a16="http://schemas.microsoft.com/office/drawing/2014/main" id="{294777C3-6D2F-4277-840E-7E984FB4554D}"/>
+              </a:ext>
+            </a:extLst>
+          </p:cNvPr>
+          <p:cNvSpPr>
+            <a:spLocks xmlns:a="http://schemas.openxmlformats.org/drawingml/2006/main" noGrp="1"/>
+          </p:cNvSpPr>
+          <p:nvPr/>
+        </p:nvSpPr>
+        <p:spPr>
+          <a:xfrm xmlns:a="http://schemas.openxmlformats.org/drawingml/2006/main">
+            <a:off x="876300" y="2590800"/>
+            <a:ext cx="10553700" cy="9525"/>
+          </a:xfrm>
+          <a:prstGeom xmlns:a="http://schemas.openxmlformats.org/drawingml/2006/main" prst="rect">
+            <a:avLst/>
+          </a:prstGeom>
+          <a:solidFill xmlns:a="http://schemas.openxmlformats.org/drawingml/2006/main">
+            <a:srgbClr val="B8BCC4"/>
+          </a:solidFill>
+          <a:ln xmlns:a="http://schemas.openxmlformats.org/drawingml/2006/main" w="0">
+            <a:solidFill>
+              <a:srgbClr val="B8BCC4"/>
+            </a:solidFill>
+            <a:prstDash val="solid"/>
+          </a:ln>
+        </p:spPr>
+      </p:sp>
+      <p:sp>
+        <p:nvSpPr>
+          <p:cNvPr id="11" name="">
+            <a:extLst xmlns:a="http://schemas.openxmlformats.org/drawingml/2006/main">
+              <a:ext uri="{FF2B5EF4-FFF2-40B4-BE49-F238E27FC236}">
+                <a16:creationId xmlns:a16="http://schemas.microsoft.com/office/drawing/2014/main" id="{F894CF3F-AD63-423C-8F01-64C507896579}"/>
+              </a:ext>
+            </a:extLst>
+          </p:cNvPr>
+          <p:cNvSpPr>
+            <a:spLocks xmlns:a="http://schemas.openxmlformats.org/drawingml/2006/main" noGrp="1"/>
+          </p:cNvSpPr>
+          <p:nvPr/>
+        </p:nvSpPr>
+        <p:spPr>
+          <a:xfrm xmlns:a="http://schemas.openxmlformats.org/drawingml/2006/main">
+            <a:off x="552450" y="2800350"/>
+            <a:ext cx="95250" cy="895350"/>
+          </a:xfrm>
+          <a:prstGeom xmlns:a="http://schemas.openxmlformats.org/drawingml/2006/main" prst="rect">
+            <a:avLst/>
+          </a:prstGeom>
+          <a:solidFill xmlns:a="http://schemas.openxmlformats.org/drawingml/2006/main">
+            <a:srgbClr val="2A9D6F"/>
+          </a:solidFill>
+          <a:ln xmlns:a="http://schemas.openxmlformats.org/drawingml/2006/main" w="0">
+            <a:solidFill>
+              <a:srgbClr val="2A9D6F"/>
+            </a:solidFill>
+            <a:prstDash val="solid"/>
+          </a:ln>
+        </p:spPr>
+      </p:sp>
+      <p:sp>
+        <p:nvSpPr>
+          <p:cNvPr id="12" name="">
+            <a:extLst xmlns:a="http://schemas.openxmlformats.org/drawingml/2006/main">
+              <a:ext uri="{FF2B5EF4-FFF2-40B4-BE49-F238E27FC236}">
+                <a16:creationId xmlns:a16="http://schemas.microsoft.com/office/drawing/2014/main" id="{D3953D03-6A7A-4FEE-B242-02BF0319C169}"/>
+              </a:ext>
+            </a:extLst>
+          </p:cNvPr>
+          <p:cNvSpPr>
+            <a:spLocks xmlns:a="http://schemas.openxmlformats.org/drawingml/2006/main" noGrp="1"/>
+          </p:cNvSpPr>
+          <p:nvPr/>
+        </p:nvSpPr>
+        <p:spPr>
+          <a:xfrm xmlns:a="http://schemas.openxmlformats.org/drawingml/2006/main">
+            <a:off x="876300" y="2781300"/>
+            <a:ext cx="2095500" cy="285750"/>
+          </a:xfrm>
+          <a:prstGeom xmlns:a="http://schemas.openxmlformats.org/drawingml/2006/main" prst="rect">
+            <a:avLst/>
+          </a:prstGeom>
+          <a:noFill xmlns:a="http://schemas.openxmlformats.org/drawingml/2006/main"/>
+          <a:ln xmlns:a="http://schemas.openxmlformats.org/drawingml/2006/main" w="0">
+            <a:noFill/>
+            <a:prstDash val="solid"/>
+          </a:ln>
+        </p:spPr>
+        <p:txBody>
+          <a:bodyPr xmlns:a="http://schemas.openxmlformats.org/drawingml/2006/main" wrap="square" lIns="0" tIns="0" rIns="0" bIns="0" anchor="t">
+            <a:normAutofit fontScale="100000"/>
+          </a:bodyPr>
+          <a:lstStyle xmlns:a="http://schemas.openxmlformats.org/drawingml/2006/main"/>
+          <a:p xmlns:a="http://schemas.openxmlformats.org/drawingml/2006/main">
+            <a:pPr algn="l">
+              <a:buNone/>
+              <a:defRPr sz="1350" b="1">
+                <a:solidFill>
+                  <a:srgbClr val="2A9D6F"/>
+                </a:solidFill>
+                <a:latin typeface="Arial"/>
+                <a:ea typeface="Arial"/>
+                <a:cs typeface="Arial"/>
+              </a:defRPr>
+            </a:pPr>
+            <a:r>
+              <a:rPr sz="1350" b="1">
+                <a:solidFill>
+                  <a:srgbClr val="2A9D6F"/>
+                </a:solidFill>
+                <a:latin typeface="Arial"/>
+                <a:ea typeface="Arial"/>
+                <a:cs typeface="Arial"/>
+              </a:rPr>
+              <a:t>QQQ MEDIUM MAP</a:t>
+            </a:r>
+          </a:p>
+        </p:txBody>
+      </p:sp>
+      <p:sp>
+        <p:nvSpPr>
+          <p:cNvPr id="13" name="">
+            <a:extLst xmlns:a="http://schemas.openxmlformats.org/drawingml/2006/main">
+              <a:ext uri="{FF2B5EF4-FFF2-40B4-BE49-F238E27FC236}">
+                <a16:creationId xmlns:a16="http://schemas.microsoft.com/office/drawing/2014/main" id="{52D1DBE8-EAF6-4492-89E7-5C97A3A6A395}"/>
+              </a:ext>
+            </a:extLst>
+          </p:cNvPr>
+          <p:cNvSpPr>
+            <a:spLocks xmlns:a="http://schemas.openxmlformats.org/drawingml/2006/main" noGrp="1"/>
+          </p:cNvSpPr>
+          <p:nvPr/>
+        </p:nvSpPr>
+        <p:spPr>
+          <a:xfrm xmlns:a="http://schemas.openxmlformats.org/drawingml/2006/main">
+            <a:off x="3105150" y="2762250"/>
+            <a:ext cx="4762500" cy="419100"/>
+          </a:xfrm>
+          <a:prstGeom xmlns:a="http://schemas.openxmlformats.org/drawingml/2006/main" prst="rect">
+            <a:avLst/>
+          </a:prstGeom>
+          <a:noFill xmlns:a="http://schemas.openxmlformats.org/drawingml/2006/main"/>
+          <a:ln xmlns:a="http://schemas.openxmlformats.org/drawingml/2006/main" w="0">
+            <a:noFill/>
+            <a:prstDash val="solid"/>
+          </a:ln>
+        </p:spPr>
+        <p:txBody>
+          <a:bodyPr xmlns:a="http://schemas.openxmlformats.org/drawingml/2006/main" wrap="square" lIns="0" tIns="0" rIns="0" bIns="0" anchor="t">
+            <a:normAutofit fontScale="70513"/>
+          </a:bodyPr>
+          <a:lstStyle xmlns:a="http://schemas.openxmlformats.org/drawingml/2006/main"/>
+          <a:p xmlns:a="http://schemas.openxmlformats.org/drawingml/2006/main">
+            <a:pPr algn="l">
+              <a:buNone/>
+              <a:defRPr sz="1950" b="1">
+                <a:solidFill>
+                  <a:srgbClr val="273548"/>
+                </a:solidFill>
+                <a:latin typeface="Arial"/>
+                <a:ea typeface="Arial"/>
+                <a:cs typeface="Arial"/>
+              </a:defRPr>
+            </a:pPr>
+            <a:r>
+              <a:rPr sz="1950" b="1">
+                <a:solidFill>
+                  <a:srgbClr val="273548"/>
+                </a:solidFill>
+                <a:latin typeface="Arial"/>
+                <a:ea typeface="Arial"/>
+                <a:cs typeface="Arial"/>
+              </a:rPr>
+              <a:t>Weakens own-asset MEDIUM; long horizons turn negative</a:t>
+            </a:r>
+          </a:p>
+        </p:txBody>
+      </p:sp>
+      <p:sp>
+        <p:nvSpPr>
+          <p:cNvPr id="14" name="">
+            <a:extLst xmlns:a="http://schemas.openxmlformats.org/drawingml/2006/main">
+              <a:ext uri="{FF2B5EF4-FFF2-40B4-BE49-F238E27FC236}">
+                <a16:creationId xmlns:a16="http://schemas.microsoft.com/office/drawing/2014/main" id="{2CAF0156-C9E6-4210-8A8A-BFEDD044631B}"/>
+              </a:ext>
+            </a:extLst>
+          </p:cNvPr>
+          <p:cNvSpPr>
+            <a:spLocks xmlns:a="http://schemas.openxmlformats.org/drawingml/2006/main" noGrp="1"/>
+          </p:cNvSpPr>
+          <p:nvPr/>
+        </p:nvSpPr>
+        <p:spPr>
+          <a:xfrm xmlns:a="http://schemas.openxmlformats.org/drawingml/2006/main">
+            <a:off x="8096250" y="2781300"/>
+            <a:ext cx="3333750" cy="704850"/>
+          </a:xfrm>
+          <a:prstGeom xmlns:a="http://schemas.openxmlformats.org/drawingml/2006/main" prst="rect">
+            <a:avLst/>
+          </a:prstGeom>
+          <a:noFill xmlns:a="http://schemas.openxmlformats.org/drawingml/2006/main"/>
+          <a:ln xmlns:a="http://schemas.openxmlformats.org/drawingml/2006/main" w="0">
+            <a:noFill/>
+            <a:prstDash val="solid"/>
+          </a:ln>
+        </p:spPr>
+        <p:txBody>
+          <a:bodyPr xmlns:a="http://schemas.openxmlformats.org/drawingml/2006/main" wrap="square" lIns="0" tIns="0" rIns="0" bIns="0" anchor="t">
+            <a:normAutofit fontScale="100000"/>
+          </a:bodyPr>
+          <a:lstStyle xmlns:a="http://schemas.openxmlformats.org/drawingml/2006/main"/>
+          <a:p xmlns:a="http://schemas.openxmlformats.org/drawingml/2006/main">
+            <a:pPr algn="l">
+              <a:buNone/>
+              <a:defRPr sz="1425" b="0">
+                <a:solidFill>
+                  <a:srgbClr val="667384"/>
+                </a:solidFill>
+                <a:latin typeface="Arial"/>
+                <a:ea typeface="Arial"/>
+                <a:cs typeface="Arial"/>
+              </a:defRPr>
+            </a:pPr>
+            <a:r>
+              <a:rPr sz="1425" b="0">
+                <a:solidFill>
+                  <a:srgbClr val="667384"/>
+                </a:solidFill>
+                <a:latin typeface="Arial"/>
+                <a:ea typeface="Arial"/>
+                <a:cs typeface="Arial"/>
+              </a:rPr>
+              <a:t>44/81 positive; 44/81 same sign vs own; mean r -0.010</a:t>
+            </a:r>
+          </a:p>
+        </p:txBody>
+      </p:sp>
+      <p:sp>
+        <p:nvSpPr>
+          <p:cNvPr id="15" name="">
+            <a:extLst xmlns:a="http://schemas.openxmlformats.org/drawingml/2006/main">
+              <a:ext uri="{FF2B5EF4-FFF2-40B4-BE49-F238E27FC236}">
+                <a16:creationId xmlns:a16="http://schemas.microsoft.com/office/drawing/2014/main" id="{B126165D-5B65-44DB-99BD-15ED33F9B90F}"/>
+              </a:ext>
+            </a:extLst>
+          </p:cNvPr>
+          <p:cNvSpPr>
+            <a:spLocks xmlns:a="http://schemas.openxmlformats.org/drawingml/2006/main" noGrp="1"/>
+          </p:cNvSpPr>
+          <p:nvPr/>
+        </p:nvSpPr>
+        <p:spPr>
+          <a:xfrm xmlns:a="http://schemas.openxmlformats.org/drawingml/2006/main">
+            <a:off x="876300" y="3790950"/>
+            <a:ext cx="10553700" cy="9525"/>
+          </a:xfrm>
+          <a:prstGeom xmlns:a="http://schemas.openxmlformats.org/drawingml/2006/main" prst="rect">
+            <a:avLst/>
+          </a:prstGeom>
+          <a:solidFill xmlns:a="http://schemas.openxmlformats.org/drawingml/2006/main">
+            <a:srgbClr val="B8BCC4"/>
+          </a:solidFill>
+          <a:ln xmlns:a="http://schemas.openxmlformats.org/drawingml/2006/main" w="0">
+            <a:solidFill>
+              <a:srgbClr val="B8BCC4"/>
+            </a:solidFill>
+            <a:prstDash val="solid"/>
+          </a:ln>
+        </p:spPr>
+      </p:sp>
+      <p:sp>
+        <p:nvSpPr>
+          <p:cNvPr id="16" name="">
+            <a:extLst xmlns:a="http://schemas.openxmlformats.org/drawingml/2006/main">
+              <a:ext uri="{FF2B5EF4-FFF2-40B4-BE49-F238E27FC236}">
+                <a16:creationId xmlns:a16="http://schemas.microsoft.com/office/drawing/2014/main" id="{7DC0911F-9587-4B19-84C6-11974DB2A91C}"/>
+              </a:ext>
+            </a:extLst>
+          </p:cNvPr>
+          <p:cNvSpPr>
+            <a:spLocks xmlns:a="http://schemas.openxmlformats.org/drawingml/2006/main" noGrp="1"/>
+          </p:cNvSpPr>
+          <p:nvPr/>
+        </p:nvSpPr>
+        <p:spPr>
+          <a:xfrm xmlns:a="http://schemas.openxmlformats.org/drawingml/2006/main">
+            <a:off x="552450" y="4000500"/>
+            <a:ext cx="95250" cy="895350"/>
+          </a:xfrm>
+          <a:prstGeom xmlns:a="http://schemas.openxmlformats.org/drawingml/2006/main" prst="rect">
+            <a:avLst/>
+          </a:prstGeom>
+          <a:solidFill xmlns:a="http://schemas.openxmlformats.org/drawingml/2006/main">
+            <a:srgbClr val="3D8DFF"/>
+          </a:solidFill>
+          <a:ln xmlns:a="http://schemas.openxmlformats.org/drawingml/2006/main" w="0">
+            <a:solidFill>
+              <a:srgbClr val="3D8DFF"/>
+            </a:solidFill>
+            <a:prstDash val="solid"/>
+          </a:ln>
+        </p:spPr>
+      </p:sp>
+      <p:sp>
+        <p:nvSpPr>
+          <p:cNvPr id="17" name="">
+            <a:extLst xmlns:a="http://schemas.openxmlformats.org/drawingml/2006/main">
+              <a:ext uri="{FF2B5EF4-FFF2-40B4-BE49-F238E27FC236}">
+                <a16:creationId xmlns:a16="http://schemas.microsoft.com/office/drawing/2014/main" id="{DAB53991-F50C-4B95-9F23-DAE86BCEDF3B}"/>
+              </a:ext>
+            </a:extLst>
+          </p:cNvPr>
+          <p:cNvSpPr>
+            <a:spLocks xmlns:a="http://schemas.openxmlformats.org/drawingml/2006/main" noGrp="1"/>
+          </p:cNvSpPr>
+          <p:nvPr/>
+        </p:nvSpPr>
+        <p:spPr>
+          <a:xfrm xmlns:a="http://schemas.openxmlformats.org/drawingml/2006/main">
+            <a:off x="876300" y="3981450"/>
+            <a:ext cx="2095500" cy="285750"/>
+          </a:xfrm>
+          <a:prstGeom xmlns:a="http://schemas.openxmlformats.org/drawingml/2006/main" prst="rect">
+            <a:avLst/>
+          </a:prstGeom>
+          <a:noFill xmlns:a="http://schemas.openxmlformats.org/drawingml/2006/main"/>
+          <a:ln xmlns:a="http://schemas.openxmlformats.org/drawingml/2006/main" w="0">
+            <a:noFill/>
+            <a:prstDash val="solid"/>
+          </a:ln>
+        </p:spPr>
+        <p:txBody>
+          <a:bodyPr xmlns:a="http://schemas.openxmlformats.org/drawingml/2006/main" wrap="square" lIns="0" tIns="0" rIns="0" bIns="0" anchor="t">
+            <a:normAutofit fontScale="100000"/>
+          </a:bodyPr>
+          <a:lstStyle xmlns:a="http://schemas.openxmlformats.org/drawingml/2006/main"/>
+          <a:p xmlns:a="http://schemas.openxmlformats.org/drawingml/2006/main">
+            <a:pPr algn="l">
+              <a:buNone/>
+              <a:defRPr sz="1350" b="1">
+                <a:solidFill>
+                  <a:srgbClr val="3D8DFF"/>
+                </a:solidFill>
+                <a:latin typeface="Arial"/>
+                <a:ea typeface="Arial"/>
+                <a:cs typeface="Arial"/>
+              </a:defRPr>
+            </a:pPr>
+            <a:r>
+              <a:rPr sz="1350" b="1">
+                <a:solidFill>
+                  <a:srgbClr val="3D8DFF"/>
+                </a:solidFill>
+                <a:latin typeface="Arial"/>
+                <a:ea typeface="Arial"/>
+                <a:cs typeface="Arial"/>
+              </a:rPr>
+              <a:t>QQQ HIGH MAP</a:t>
+            </a:r>
+          </a:p>
+        </p:txBody>
+      </p:sp>
+      <p:sp>
+        <p:nvSpPr>
+          <p:cNvPr id="18" name="">
+            <a:extLst xmlns:a="http://schemas.openxmlformats.org/drawingml/2006/main">
+              <a:ext uri="{FF2B5EF4-FFF2-40B4-BE49-F238E27FC236}">
+                <a16:creationId xmlns:a16="http://schemas.microsoft.com/office/drawing/2014/main" id="{5DFACF3B-08BC-4148-A40A-2004DFB81D71}"/>
+              </a:ext>
+            </a:extLst>
+          </p:cNvPr>
+          <p:cNvSpPr>
+            <a:spLocks xmlns:a="http://schemas.openxmlformats.org/drawingml/2006/main" noGrp="1"/>
+          </p:cNvSpPr>
+          <p:nvPr/>
+        </p:nvSpPr>
+        <p:spPr>
+          <a:xfrm xmlns:a="http://schemas.openxmlformats.org/drawingml/2006/main">
+            <a:off x="3105150" y="3962400"/>
+            <a:ext cx="4762500" cy="419100"/>
+          </a:xfrm>
+          <a:prstGeom xmlns:a="http://schemas.openxmlformats.org/drawingml/2006/main" prst="rect">
+            <a:avLst/>
+          </a:prstGeom>
+          <a:noFill xmlns:a="http://schemas.openxmlformats.org/drawingml/2006/main"/>
+          <a:ln xmlns:a="http://schemas.openxmlformats.org/drawingml/2006/main" w="0">
+            <a:noFill/>
+            <a:prstDash val="solid"/>
+          </a:ln>
+        </p:spPr>
+        <p:txBody>
+          <a:bodyPr xmlns:a="http://schemas.openxmlformats.org/drawingml/2006/main" wrap="square" lIns="0" tIns="0" rIns="0" bIns="0" anchor="t">
+            <a:normAutofit fontScale="70513"/>
+          </a:bodyPr>
+          <a:lstStyle xmlns:a="http://schemas.openxmlformats.org/drawingml/2006/main"/>
+          <a:p xmlns:a="http://schemas.openxmlformats.org/drawingml/2006/main">
+            <a:pPr algn="l">
+              <a:buNone/>
+              <a:defRPr sz="1950" b="1">
+                <a:solidFill>
+                  <a:srgbClr val="273548"/>
+                </a:solidFill>
+                <a:latin typeface="Arial"/>
+                <a:ea typeface="Arial"/>
+                <a:cs typeface="Arial"/>
+              </a:defRPr>
+            </a:pPr>
+            <a:r>
+              <a:rPr sz="1950" b="1">
+                <a:solidFill>
+                  <a:srgbClr val="273548"/>
+                </a:solidFill>
+                <a:latin typeface="Arial"/>
+                <a:ea typeface="Arial"/>
+                <a:cs typeface="Arial"/>
+              </a:rPr>
+              <a:t>Mild negative map; closer to TSLA-own HIGH than SPY HIGH</a:t>
+            </a:r>
+          </a:p>
+        </p:txBody>
+      </p:sp>
+      <p:sp>
+        <p:nvSpPr>
+          <p:cNvPr id="19" name="">
+            <a:extLst xmlns:a="http://schemas.openxmlformats.org/drawingml/2006/main">
+              <a:ext uri="{FF2B5EF4-FFF2-40B4-BE49-F238E27FC236}">
+                <a16:creationId xmlns:a16="http://schemas.microsoft.com/office/drawing/2014/main" id="{C907D23B-44A2-43C4-9658-4C6E38430BF5}"/>
+              </a:ext>
+            </a:extLst>
+          </p:cNvPr>
+          <p:cNvSpPr>
+            <a:spLocks xmlns:a="http://schemas.openxmlformats.org/drawingml/2006/main" noGrp="1"/>
+          </p:cNvSpPr>
+          <p:nvPr/>
+        </p:nvSpPr>
+        <p:spPr>
+          <a:xfrm xmlns:a="http://schemas.openxmlformats.org/drawingml/2006/main">
+            <a:off x="8096250" y="3981450"/>
+            <a:ext cx="3333750" cy="704850"/>
+          </a:xfrm>
+          <a:prstGeom xmlns:a="http://schemas.openxmlformats.org/drawingml/2006/main" prst="rect">
+            <a:avLst/>
+          </a:prstGeom>
+          <a:noFill xmlns:a="http://schemas.openxmlformats.org/drawingml/2006/main"/>
+          <a:ln xmlns:a="http://schemas.openxmlformats.org/drawingml/2006/main" w="0">
+            <a:noFill/>
+            <a:prstDash val="solid"/>
+          </a:ln>
+        </p:spPr>
+        <p:txBody>
+          <a:bodyPr xmlns:a="http://schemas.openxmlformats.org/drawingml/2006/main" wrap="square" lIns="0" tIns="0" rIns="0" bIns="0" anchor="t">
+            <a:normAutofit fontScale="100000"/>
+          </a:bodyPr>
+          <a:lstStyle xmlns:a="http://schemas.openxmlformats.org/drawingml/2006/main"/>
+          <a:p xmlns:a="http://schemas.openxmlformats.org/drawingml/2006/main">
+            <a:pPr algn="l">
+              <a:buNone/>
+              <a:defRPr sz="1425" b="0">
+                <a:solidFill>
+                  <a:srgbClr val="667384"/>
+                </a:solidFill>
+                <a:latin typeface="Arial"/>
+                <a:ea typeface="Arial"/>
+                <a:cs typeface="Arial"/>
+              </a:defRPr>
+            </a:pPr>
+            <a:r>
+              <a:rPr sz="1425" b="0">
+                <a:solidFill>
+                  <a:srgbClr val="667384"/>
+                </a:solidFill>
+                <a:latin typeface="Arial"/>
+                <a:ea typeface="Arial"/>
+                <a:cs typeface="Arial"/>
+              </a:rPr>
+              <a:t>59/81 negative; 63/81 same sign vs own; mean r -0.022</a:t>
+            </a:r>
+          </a:p>
+        </p:txBody>
+      </p:sp>
+      <p:sp>
+        <p:nvSpPr>
+          <p:cNvPr id="20" name="">
+            <a:extLst xmlns:a="http://schemas.openxmlformats.org/drawingml/2006/main">
+              <a:ext uri="{FF2B5EF4-FFF2-40B4-BE49-F238E27FC236}">
+                <a16:creationId xmlns:a16="http://schemas.microsoft.com/office/drawing/2014/main" id="{8042DFC4-7E22-47E6-8C53-1E63A8411C3A}"/>
+              </a:ext>
+            </a:extLst>
+          </p:cNvPr>
+          <p:cNvSpPr>
+            <a:spLocks xmlns:a="http://schemas.openxmlformats.org/drawingml/2006/main" noGrp="1"/>
+          </p:cNvSpPr>
+          <p:nvPr/>
+        </p:nvSpPr>
+        <p:spPr>
+          <a:xfrm xmlns:a="http://schemas.openxmlformats.org/drawingml/2006/main">
+            <a:off x="876300" y="4991100"/>
+            <a:ext cx="10553700" cy="9525"/>
+          </a:xfrm>
+          <a:prstGeom xmlns:a="http://schemas.openxmlformats.org/drawingml/2006/main" prst="rect">
+            <a:avLst/>
+          </a:prstGeom>
+          <a:solidFill xmlns:a="http://schemas.openxmlformats.org/drawingml/2006/main">
+            <a:srgbClr val="B8BCC4"/>
+          </a:solidFill>
+          <a:ln xmlns:a="http://schemas.openxmlformats.org/drawingml/2006/main" w="0">
+            <a:solidFill>
+              <a:srgbClr val="B8BCC4"/>
+            </a:solidFill>
+            <a:prstDash val="solid"/>
+          </a:ln>
+        </p:spPr>
+      </p:sp>
+      <p:sp>
+        <p:nvSpPr>
+          <p:cNvPr id="21" name="">
+            <a:extLst xmlns:a="http://schemas.openxmlformats.org/drawingml/2006/main">
+              <a:ext uri="{FF2B5EF4-FFF2-40B4-BE49-F238E27FC236}">
+                <a16:creationId xmlns:a16="http://schemas.microsoft.com/office/drawing/2014/main" id="{F4066D54-676B-4D0F-93B6-2152B57E41AF}"/>
+              </a:ext>
+            </a:extLst>
+          </p:cNvPr>
+          <p:cNvSpPr>
+            <a:spLocks xmlns:a="http://schemas.openxmlformats.org/drawingml/2006/main" noGrp="1"/>
+          </p:cNvSpPr>
+          <p:nvPr/>
+        </p:nvSpPr>
+        <p:spPr>
+          <a:xfrm xmlns:a="http://schemas.openxmlformats.org/drawingml/2006/main">
+            <a:off x="552450" y="5353050"/>
+            <a:ext cx="10877550" cy="781050"/>
+          </a:xfrm>
+          <a:prstGeom xmlns:a="http://schemas.openxmlformats.org/drawingml/2006/main" prst="rect">
+            <a:avLst/>
+          </a:prstGeom>
+          <a:solidFill xmlns:a="http://schemas.openxmlformats.org/drawingml/2006/main">
+            <a:srgbClr val="EAF5FB"/>
+          </a:solidFill>
+          <a:ln xmlns:a="http://schemas.openxmlformats.org/drawingml/2006/main" w="0">
+            <a:solidFill>
+              <a:srgbClr val="EAF5FB"/>
+            </a:solidFill>
+            <a:prstDash val="solid"/>
+          </a:ln>
+        </p:spPr>
+      </p:sp>
+      <p:sp>
+        <p:nvSpPr>
+          <p:cNvPr id="22" name="">
+            <a:extLst xmlns:a="http://schemas.openxmlformats.org/drawingml/2006/main">
+              <a:ext uri="{FF2B5EF4-FFF2-40B4-BE49-F238E27FC236}">
+                <a16:creationId xmlns:a16="http://schemas.microsoft.com/office/drawing/2014/main" id="{6E4C79AE-EB98-4B5B-B3D3-11ED0D4C729B}"/>
+              </a:ext>
+            </a:extLst>
+          </p:cNvPr>
+          <p:cNvSpPr>
+            <a:spLocks xmlns:a="http://schemas.openxmlformats.org/drawingml/2006/main" noGrp="1"/>
+          </p:cNvSpPr>
+          <p:nvPr/>
+        </p:nvSpPr>
+        <p:spPr>
+          <a:xfrm xmlns:a="http://schemas.openxmlformats.org/drawingml/2006/main">
+            <a:off x="781050" y="5524500"/>
+            <a:ext cx="2476500" cy="323850"/>
+          </a:xfrm>
+          <a:prstGeom xmlns:a="http://schemas.openxmlformats.org/drawingml/2006/main" prst="rect">
+            <a:avLst/>
+          </a:prstGeom>
+          <a:noFill xmlns:a="http://schemas.openxmlformats.org/drawingml/2006/main"/>
+          <a:ln xmlns:a="http://schemas.openxmlformats.org/drawingml/2006/main" w="0">
+            <a:noFill/>
+            <a:prstDash val="solid"/>
+          </a:ln>
+        </p:spPr>
+        <p:txBody>
+          <a:bodyPr xmlns:a="http://schemas.openxmlformats.org/drawingml/2006/main" wrap="square" lIns="0" tIns="0" rIns="0" bIns="0" anchor="t">
+            <a:normAutofit fontScale="100000"/>
+          </a:bodyPr>
+          <a:lstStyle xmlns:a="http://schemas.openxmlformats.org/drawingml/2006/main"/>
+          <a:p xmlns:a="http://schemas.openxmlformats.org/drawingml/2006/main">
+            <a:pPr algn="l">
+              <a:buNone/>
+              <a:defRPr sz="1725" b="1">
+                <a:solidFill>
+                  <a:srgbClr val="3D8DFF"/>
+                </a:solidFill>
+                <a:latin typeface="Arial"/>
+                <a:ea typeface="Arial"/>
+                <a:cs typeface="Arial"/>
+              </a:defRPr>
+            </a:pPr>
+            <a:r>
+              <a:rPr sz="1725" b="1">
+                <a:solidFill>
+                  <a:srgbClr val="3D8DFF"/>
+                </a:solidFill>
+                <a:latin typeface="Arial"/>
+                <a:ea typeface="Arial"/>
+                <a:cs typeface="Arial"/>
+              </a:rPr>
+              <a:t>What this earns</a:t>
+            </a:r>
+          </a:p>
+        </p:txBody>
+      </p:sp>
+      <p:sp>
+        <p:nvSpPr>
+          <p:cNvPr id="23" name="">
+            <a:extLst xmlns:a="http://schemas.openxmlformats.org/drawingml/2006/main">
+              <a:ext uri="{FF2B5EF4-FFF2-40B4-BE49-F238E27FC236}">
+                <a16:creationId xmlns:a16="http://schemas.microsoft.com/office/drawing/2014/main" id="{3320D60E-6067-4236-80ED-A898A863026E}"/>
+              </a:ext>
+            </a:extLst>
+          </p:cNvPr>
+          <p:cNvSpPr>
+            <a:spLocks xmlns:a="http://schemas.openxmlformats.org/drawingml/2006/main" noGrp="1"/>
+          </p:cNvSpPr>
+          <p:nvPr/>
+        </p:nvSpPr>
+        <p:spPr>
+          <a:xfrm xmlns:a="http://schemas.openxmlformats.org/drawingml/2006/main">
+            <a:off x="3333750" y="5486400"/>
+            <a:ext cx="7810500" cy="419100"/>
+          </a:xfrm>
+          <a:prstGeom xmlns:a="http://schemas.openxmlformats.org/drawingml/2006/main" prst="rect">
+            <a:avLst/>
+          </a:prstGeom>
+          <a:noFill xmlns:a="http://schemas.openxmlformats.org/drawingml/2006/main"/>
+          <a:ln xmlns:a="http://schemas.openxmlformats.org/drawingml/2006/main" w="0">
+            <a:noFill/>
+            <a:prstDash val="solid"/>
+          </a:ln>
+        </p:spPr>
+        <p:txBody>
+          <a:bodyPr xmlns:a="http://schemas.openxmlformats.org/drawingml/2006/main" wrap="square" lIns="0" tIns="0" rIns="0" bIns="0" anchor="t">
+            <a:normAutofit fontScale="76389"/>
+          </a:bodyPr>
+          <a:lstStyle xmlns:a="http://schemas.openxmlformats.org/drawingml/2006/main"/>
+          <a:p xmlns:a="http://schemas.openxmlformats.org/drawingml/2006/main">
+            <a:pPr algn="l">
+              <a:buNone/>
+              <a:defRPr sz="1800" b="1">
+                <a:solidFill>
+                  <a:srgbClr val="273548"/>
+                </a:solidFill>
+                <a:latin typeface="Arial"/>
+                <a:ea typeface="Arial"/>
+                <a:cs typeface="Arial"/>
+              </a:defRPr>
+            </a:pPr>
+            <a:r>
+              <a:rPr sz="1800" b="1">
+                <a:solidFill>
+                  <a:srgbClr val="273548"/>
+                </a:solidFill>
+                <a:latin typeface="Arial"/>
+                <a:ea typeface="Arial"/>
+                <a:cs typeface="Arial"/>
+              </a:rPr>
+              <a:t>QQQ is a coherent quasi-external axis—not independent evidence. Next: frozen QQQ/SPY lead–lag grid; keep strategy gates closed.</a:t>
+            </a:r>
+          </a:p>
+        </p:txBody>
+      </p:sp>
+    </p:spTree>
+    <p:extLst>
+      <p:ext uri="{BB962C8B-B14F-4D97-AF65-F5344CB8AC3E}">
+        <p14:creationId xmlns:p14="http://schemas.microsoft.com/office/powerpoint/2010/main" val="666536286"/>
       </p:ext>
     </p:extLst>
   </p:cSld>
@@ -32084,7 +38631,7 @@
           <p:nvPr/>
         </p:nvPicPr>
         <p:blipFill>
-          <a:blip xmlns:r="http://schemas.openxmlformats.org/officeDocument/2006/relationships" xmlns:a="http://schemas.openxmlformats.org/drawingml/2006/main" r:embed="Rd465e83e98b0463b"/>
+          <a:blip xmlns:r="http://schemas.openxmlformats.org/officeDocument/2006/relationships" xmlns:a="http://schemas.openxmlformats.org/drawingml/2006/main" r:embed="R8c8ff13369c4450d"/>
           <a:stretch xmlns:a="http://schemas.openxmlformats.org/drawingml/2006/main"/>
         </p:blipFill>
         <p:spPr>
@@ -33146,7 +39693,7 @@
           <p:nvPr/>
         </p:nvPicPr>
         <p:blipFill>
-          <a:blip xmlns:r="http://schemas.openxmlformats.org/officeDocument/2006/relationships" xmlns:a="http://schemas.openxmlformats.org/drawingml/2006/main" r:embed="R781f521f02dc4ad4"/>
+          <a:blip xmlns:r="http://schemas.openxmlformats.org/officeDocument/2006/relationships" xmlns:a="http://schemas.openxmlformats.org/drawingml/2006/main" r:embed="R6c170401382e4b68"/>
           <a:stretch xmlns:a="http://schemas.openxmlformats.org/drawingml/2006/main"/>
         </p:blipFill>
         <p:spPr>
@@ -34051,7 +40598,7 @@
           <p:nvPr/>
         </p:nvPicPr>
         <p:blipFill>
-          <a:blip xmlns:r="http://schemas.openxmlformats.org/officeDocument/2006/relationships" xmlns:a="http://schemas.openxmlformats.org/drawingml/2006/main" r:embed="Rc217c1025a9949e1"/>
+          <a:blip xmlns:r="http://schemas.openxmlformats.org/officeDocument/2006/relationships" xmlns:a="http://schemas.openxmlformats.org/drawingml/2006/main" r:embed="R198f8196e94149a5"/>
           <a:stretch xmlns:a="http://schemas.openxmlformats.org/drawingml/2006/main"/>
         </p:blipFill>
         <p:spPr>
@@ -34855,7 +41402,7 @@
           <p:nvPr/>
         </p:nvPicPr>
         <p:blipFill>
-          <a:blip xmlns:r="http://schemas.openxmlformats.org/officeDocument/2006/relationships" xmlns:a="http://schemas.openxmlformats.org/drawingml/2006/main" r:embed="R9afdb1b461664544"/>
+          <a:blip xmlns:r="http://schemas.openxmlformats.org/officeDocument/2006/relationships" xmlns:a="http://schemas.openxmlformats.org/drawingml/2006/main" r:embed="R9f8ac34b6219429b"/>
           <a:stretch xmlns:a="http://schemas.openxmlformats.org/drawingml/2006/main"/>
         </p:blipFill>
         <p:spPr>

--- a/operator_hypothesis_lab/presentations/tsla_descriptive_microscope_evidence.pptx
+++ b/operator_hypothesis_lab/presentations/tsla_descriptive_microscope_evidence.pptx
@@ -2,59 +2,65 @@
 <file path=ppt/presentation.xml><?xml version="1.0" encoding="utf-8"?>
 <p:presentation xmlns:p="http://schemas.openxmlformats.org/presentationml/2006/main">
   <p:sldMasterIdLst>
-    <p:sldMasterId xmlns:r="http://schemas.openxmlformats.org/officeDocument/2006/relationships" id="2147483648" r:id="Raa3e25d4ed5e4085"/>
+    <p:sldMasterId xmlns:r="http://schemas.openxmlformats.org/officeDocument/2006/relationships" id="2147483648" r:id="R2d0c60dfa8154058"/>
   </p:sldMasterIdLst>
   <p:notesMasterIdLst>
-    <p:notesMasterId xmlns:r="http://schemas.openxmlformats.org/officeDocument/2006/relationships" r:id="Rf51b9448f31b48fb"/>
+    <p:notesMasterId xmlns:r="http://schemas.openxmlformats.org/officeDocument/2006/relationships" r:id="Rc909d29ae35c4d05"/>
   </p:notesMasterIdLst>
   <p:sldIdLst>
-    <p:sldId xmlns:r="http://schemas.openxmlformats.org/officeDocument/2006/relationships" id="256" r:id="R313a5049ab8a4864"/>
-    <p:sldId xmlns:r="http://schemas.openxmlformats.org/officeDocument/2006/relationships" id="257" r:id="R684cbccb2f7e4318"/>
-    <p:sldId xmlns:r="http://schemas.openxmlformats.org/officeDocument/2006/relationships" id="258" r:id="Rd43546b846144632"/>
-    <p:sldId xmlns:r="http://schemas.openxmlformats.org/officeDocument/2006/relationships" id="259" r:id="R0904e4d02a814bb7"/>
-    <p:sldId xmlns:r="http://schemas.openxmlformats.org/officeDocument/2006/relationships" id="260" r:id="R8e09c44530074483"/>
-    <p:sldId xmlns:r="http://schemas.openxmlformats.org/officeDocument/2006/relationships" id="261" r:id="R721fc2acff584c39"/>
-    <p:sldId xmlns:r="http://schemas.openxmlformats.org/officeDocument/2006/relationships" id="262" r:id="Rd2aa90204ef24012"/>
-    <p:sldId xmlns:r="http://schemas.openxmlformats.org/officeDocument/2006/relationships" id="263" r:id="Rcd04d46655c145fe"/>
-    <p:sldId xmlns:r="http://schemas.openxmlformats.org/officeDocument/2006/relationships" id="264" r:id="Ra9dfb8e255eb4b02"/>
-    <p:sldId xmlns:r="http://schemas.openxmlformats.org/officeDocument/2006/relationships" id="265" r:id="Rb7d67d22881a45c8"/>
-    <p:sldId xmlns:r="http://schemas.openxmlformats.org/officeDocument/2006/relationships" id="266" r:id="R3c84d70927e94082"/>
-    <p:sldId xmlns:r="http://schemas.openxmlformats.org/officeDocument/2006/relationships" id="267" r:id="R3e3c3532c54f4420"/>
-    <p:sldId xmlns:r="http://schemas.openxmlformats.org/officeDocument/2006/relationships" id="268" r:id="R8aad5b2af05e4e5c"/>
-    <p:sldId xmlns:r="http://schemas.openxmlformats.org/officeDocument/2006/relationships" id="269" r:id="Rc55dc2cb98bb46d4"/>
-    <p:sldId xmlns:r="http://schemas.openxmlformats.org/officeDocument/2006/relationships" id="270" r:id="R4d819f68cee542ed"/>
-    <p:sldId xmlns:r="http://schemas.openxmlformats.org/officeDocument/2006/relationships" id="271" r:id="R0d42e4668d274ac5"/>
-    <p:sldId xmlns:r="http://schemas.openxmlformats.org/officeDocument/2006/relationships" id="272" r:id="R79c2eb965516494b"/>
-    <p:sldId xmlns:r="http://schemas.openxmlformats.org/officeDocument/2006/relationships" id="273" r:id="R954c99706f734499"/>
-    <p:sldId xmlns:r="http://schemas.openxmlformats.org/officeDocument/2006/relationships" id="274" r:id="R0398773095274bdc"/>
-    <p:sldId xmlns:r="http://schemas.openxmlformats.org/officeDocument/2006/relationships" id="275" r:id="Rb84cd2bde81242a9"/>
-    <p:sldId xmlns:r="http://schemas.openxmlformats.org/officeDocument/2006/relationships" id="276" r:id="R423a26e500944dbe"/>
-    <p:sldId xmlns:r="http://schemas.openxmlformats.org/officeDocument/2006/relationships" id="277" r:id="R3df9a2887d8f4e2f"/>
-    <p:sldId xmlns:r="http://schemas.openxmlformats.org/officeDocument/2006/relationships" id="278" r:id="Rd083ca2f4d724ed2"/>
-    <p:sldId xmlns:r="http://schemas.openxmlformats.org/officeDocument/2006/relationships" id="279" r:id="Redd7b39a7fb94d92"/>
-    <p:sldId xmlns:r="http://schemas.openxmlformats.org/officeDocument/2006/relationships" id="280" r:id="R5421ed5703624a59"/>
-    <p:sldId xmlns:r="http://schemas.openxmlformats.org/officeDocument/2006/relationships" id="281" r:id="R9db9f6e3ddf24225"/>
-    <p:sldId xmlns:r="http://schemas.openxmlformats.org/officeDocument/2006/relationships" id="282" r:id="Rc0474df3b3154a02"/>
-    <p:sldId xmlns:r="http://schemas.openxmlformats.org/officeDocument/2006/relationships" id="283" r:id="R7ee856aa3152409f"/>
-    <p:sldId xmlns:r="http://schemas.openxmlformats.org/officeDocument/2006/relationships" id="284" r:id="R84c9d85854434e78"/>
-    <p:sldId xmlns:r="http://schemas.openxmlformats.org/officeDocument/2006/relationships" id="285" r:id="R2e2f68cc1d35493b"/>
-    <p:sldId xmlns:r="http://schemas.openxmlformats.org/officeDocument/2006/relationships" id="286" r:id="Rd29086b680074c57"/>
-    <p:sldId xmlns:r="http://schemas.openxmlformats.org/officeDocument/2006/relationships" id="287" r:id="R72fc35660c4c41b3"/>
-    <p:sldId xmlns:r="http://schemas.openxmlformats.org/officeDocument/2006/relationships" id="288" r:id="R8696844d662f4101"/>
-    <p:sldId xmlns:r="http://schemas.openxmlformats.org/officeDocument/2006/relationships" id="289" r:id="R60f162416f0141b9"/>
-    <p:sldId xmlns:r="http://schemas.openxmlformats.org/officeDocument/2006/relationships" id="290" r:id="R6ebc6a583f954f05"/>
-    <p:sldId xmlns:r="http://schemas.openxmlformats.org/officeDocument/2006/relationships" id="291" r:id="R64a4b505c47e4413"/>
-    <p:sldId xmlns:r="http://schemas.openxmlformats.org/officeDocument/2006/relationships" id="292" r:id="R48f36925b500402f"/>
-    <p:sldId xmlns:r="http://schemas.openxmlformats.org/officeDocument/2006/relationships" id="293" r:id="R6c0d37603b884ae0"/>
-    <p:sldId xmlns:r="http://schemas.openxmlformats.org/officeDocument/2006/relationships" id="294" r:id="R2c4defe485a44e64"/>
-    <p:sldId xmlns:r="http://schemas.openxmlformats.org/officeDocument/2006/relationships" id="295" r:id="R1d87594a02074737"/>
-    <p:sldId xmlns:r="http://schemas.openxmlformats.org/officeDocument/2006/relationships" id="296" r:id="R80d1cf4c7a804586"/>
-    <p:sldId xmlns:r="http://schemas.openxmlformats.org/officeDocument/2006/relationships" id="297" r:id="R882bd4d039874f5f"/>
-    <p:sldId xmlns:r="http://schemas.openxmlformats.org/officeDocument/2006/relationships" id="298" r:id="R4b9c8c9bfd514e47"/>
-    <p:sldId xmlns:r="http://schemas.openxmlformats.org/officeDocument/2006/relationships" id="299" r:id="R73a590281d6e4224"/>
-    <p:sldId xmlns:r="http://schemas.openxmlformats.org/officeDocument/2006/relationships" id="300" r:id="R6865d80adb884244"/>
-    <p:sldId xmlns:r="http://schemas.openxmlformats.org/officeDocument/2006/relationships" id="301" r:id="R17874fd54bbc445e"/>
-    <p:sldId xmlns:r="http://schemas.openxmlformats.org/officeDocument/2006/relationships" id="302" r:id="Rc074c18c1d0d4b2a"/>
+    <p:sldId xmlns:r="http://schemas.openxmlformats.org/officeDocument/2006/relationships" id="256" r:id="Rb5da33f69b824c39"/>
+    <p:sldId xmlns:r="http://schemas.openxmlformats.org/officeDocument/2006/relationships" id="257" r:id="R86485ec219bc4914"/>
+    <p:sldId xmlns:r="http://schemas.openxmlformats.org/officeDocument/2006/relationships" id="258" r:id="R507cec9fd33b456f"/>
+    <p:sldId xmlns:r="http://schemas.openxmlformats.org/officeDocument/2006/relationships" id="259" r:id="R1298cd02b5df4ce3"/>
+    <p:sldId xmlns:r="http://schemas.openxmlformats.org/officeDocument/2006/relationships" id="260" r:id="Rbe97eac3eecc4559"/>
+    <p:sldId xmlns:r="http://schemas.openxmlformats.org/officeDocument/2006/relationships" id="261" r:id="R8d8f3e588f32481f"/>
+    <p:sldId xmlns:r="http://schemas.openxmlformats.org/officeDocument/2006/relationships" id="262" r:id="Rc058de0f50f44cc9"/>
+    <p:sldId xmlns:r="http://schemas.openxmlformats.org/officeDocument/2006/relationships" id="263" r:id="Rf384f44496b44ebd"/>
+    <p:sldId xmlns:r="http://schemas.openxmlformats.org/officeDocument/2006/relationships" id="264" r:id="R9700962d23de46c8"/>
+    <p:sldId xmlns:r="http://schemas.openxmlformats.org/officeDocument/2006/relationships" id="265" r:id="R28f3beb482344672"/>
+    <p:sldId xmlns:r="http://schemas.openxmlformats.org/officeDocument/2006/relationships" id="266" r:id="R159eae1c65254443"/>
+    <p:sldId xmlns:r="http://schemas.openxmlformats.org/officeDocument/2006/relationships" id="267" r:id="Rb764c1a112754d06"/>
+    <p:sldId xmlns:r="http://schemas.openxmlformats.org/officeDocument/2006/relationships" id="268" r:id="R299a86d13f0748aa"/>
+    <p:sldId xmlns:r="http://schemas.openxmlformats.org/officeDocument/2006/relationships" id="269" r:id="R19677b2f514b4cd1"/>
+    <p:sldId xmlns:r="http://schemas.openxmlformats.org/officeDocument/2006/relationships" id="270" r:id="R1f6ba1e54b7b4da8"/>
+    <p:sldId xmlns:r="http://schemas.openxmlformats.org/officeDocument/2006/relationships" id="271" r:id="R8665125a4f5341cc"/>
+    <p:sldId xmlns:r="http://schemas.openxmlformats.org/officeDocument/2006/relationships" id="272" r:id="R5e69029554114e12"/>
+    <p:sldId xmlns:r="http://schemas.openxmlformats.org/officeDocument/2006/relationships" id="273" r:id="Racb65886ade94225"/>
+    <p:sldId xmlns:r="http://schemas.openxmlformats.org/officeDocument/2006/relationships" id="274" r:id="R9a01683007d444b9"/>
+    <p:sldId xmlns:r="http://schemas.openxmlformats.org/officeDocument/2006/relationships" id="275" r:id="R53c16fbdd6bd45d3"/>
+    <p:sldId xmlns:r="http://schemas.openxmlformats.org/officeDocument/2006/relationships" id="276" r:id="Rff86cf4a30724c42"/>
+    <p:sldId xmlns:r="http://schemas.openxmlformats.org/officeDocument/2006/relationships" id="277" r:id="Rbd31e32d4a344bfc"/>
+    <p:sldId xmlns:r="http://schemas.openxmlformats.org/officeDocument/2006/relationships" id="278" r:id="Rf158738c48164368"/>
+    <p:sldId xmlns:r="http://schemas.openxmlformats.org/officeDocument/2006/relationships" id="279" r:id="R3aa2b53991164f9f"/>
+    <p:sldId xmlns:r="http://schemas.openxmlformats.org/officeDocument/2006/relationships" id="280" r:id="R94cb0c3a9787486a"/>
+    <p:sldId xmlns:r="http://schemas.openxmlformats.org/officeDocument/2006/relationships" id="281" r:id="Re91ad19faf0f4475"/>
+    <p:sldId xmlns:r="http://schemas.openxmlformats.org/officeDocument/2006/relationships" id="282" r:id="Rdcdabb6a27444b08"/>
+    <p:sldId xmlns:r="http://schemas.openxmlformats.org/officeDocument/2006/relationships" id="283" r:id="R5591180664d9418f"/>
+    <p:sldId xmlns:r="http://schemas.openxmlformats.org/officeDocument/2006/relationships" id="284" r:id="R60580597089b43e2"/>
+    <p:sldId xmlns:r="http://schemas.openxmlformats.org/officeDocument/2006/relationships" id="285" r:id="Rcdae2b7c6abc4176"/>
+    <p:sldId xmlns:r="http://schemas.openxmlformats.org/officeDocument/2006/relationships" id="286" r:id="Rc8ecab206c4149a3"/>
+    <p:sldId xmlns:r="http://schemas.openxmlformats.org/officeDocument/2006/relationships" id="287" r:id="R48352f625278406f"/>
+    <p:sldId xmlns:r="http://schemas.openxmlformats.org/officeDocument/2006/relationships" id="288" r:id="Re98a7faeef234284"/>
+    <p:sldId xmlns:r="http://schemas.openxmlformats.org/officeDocument/2006/relationships" id="289" r:id="R62e758bbbe9f4a2a"/>
+    <p:sldId xmlns:r="http://schemas.openxmlformats.org/officeDocument/2006/relationships" id="290" r:id="Rf71bacf99c4d41a9"/>
+    <p:sldId xmlns:r="http://schemas.openxmlformats.org/officeDocument/2006/relationships" id="291" r:id="R6115b0548474494d"/>
+    <p:sldId xmlns:r="http://schemas.openxmlformats.org/officeDocument/2006/relationships" id="292" r:id="Rae2888d3ec4d4c7d"/>
+    <p:sldId xmlns:r="http://schemas.openxmlformats.org/officeDocument/2006/relationships" id="293" r:id="R5c128c99c3a64973"/>
+    <p:sldId xmlns:r="http://schemas.openxmlformats.org/officeDocument/2006/relationships" id="294" r:id="Rae827422b6194e12"/>
+    <p:sldId xmlns:r="http://schemas.openxmlformats.org/officeDocument/2006/relationships" id="295" r:id="R950565b7faba499e"/>
+    <p:sldId xmlns:r="http://schemas.openxmlformats.org/officeDocument/2006/relationships" id="296" r:id="R57dba2d151ff4b10"/>
+    <p:sldId xmlns:r="http://schemas.openxmlformats.org/officeDocument/2006/relationships" id="297" r:id="R44623d04a653437d"/>
+    <p:sldId xmlns:r="http://schemas.openxmlformats.org/officeDocument/2006/relationships" id="298" r:id="R675eacbfc68742d6"/>
+    <p:sldId xmlns:r="http://schemas.openxmlformats.org/officeDocument/2006/relationships" id="299" r:id="R49d100e88b9444a3"/>
+    <p:sldId xmlns:r="http://schemas.openxmlformats.org/officeDocument/2006/relationships" id="300" r:id="R9c17e4d3a4644dfd"/>
+    <p:sldId xmlns:r="http://schemas.openxmlformats.org/officeDocument/2006/relationships" id="301" r:id="Rfd9b5ed52224450c"/>
+    <p:sldId xmlns:r="http://schemas.openxmlformats.org/officeDocument/2006/relationships" id="302" r:id="R17f5d8bd4b2e4953"/>
+    <p:sldId xmlns:r="http://schemas.openxmlformats.org/officeDocument/2006/relationships" id="303" r:id="R1afb64cd08f448da"/>
+    <p:sldId xmlns:r="http://schemas.openxmlformats.org/officeDocument/2006/relationships" id="304" r:id="R4fe355cdbcf2424b"/>
+    <p:sldId xmlns:r="http://schemas.openxmlformats.org/officeDocument/2006/relationships" id="305" r:id="Rdd458d252e874f3c"/>
+    <p:sldId xmlns:r="http://schemas.openxmlformats.org/officeDocument/2006/relationships" id="306" r:id="R2e28cbb731d94a3f"/>
+    <p:sldId xmlns:r="http://schemas.openxmlformats.org/officeDocument/2006/relationships" id="307" r:id="R5f3d2787aef84bdb"/>
+    <p:sldId xmlns:r="http://schemas.openxmlformats.org/officeDocument/2006/relationships" id="308" r:id="R13d54c743bae45da"/>
   </p:sldIdLst>
   <p:sldSz cx="12192000" cy="6858000"/>
   <p:notesSz cx="6858000" cy="9144000"/>
@@ -4458,6 +4464,166 @@
 </p:notes>
 </file>
 
+<file path=ppt/notesSlides/notesSlide48.xml><?xml version="1.0" encoding="utf-8"?>
+<p:notes xmlns:p="http://schemas.openxmlformats.org/presentationml/2006/main">
+  <p:cSld>
+    <p:spTree>
+      <p:nvGrpSpPr>
+        <p:cNvPr id="1" name=""/>
+        <p:cNvGrpSpPr/>
+        <p:nvPr/>
+      </p:nvGrpSpPr>
+      <p:grpSpPr>
+        <a:xfrm xmlns:a="http://schemas.openxmlformats.org/drawingml/2006/main"/>
+      </p:grpSpPr>
+      <p:sp>
+        <p:nvSpPr>
+          <p:cNvPr id="2" name="Slide Image Placeholder 1"/>
+          <p:cNvSpPr>
+            <a:spLocks xmlns:a="http://schemas.openxmlformats.org/drawingml/2006/main" noGrp="1"/>
+          </p:cNvSpPr>
+          <p:nvPr>
+            <p:ph type="sldImg" idx="0"/>
+          </p:nvPr>
+        </p:nvSpPr>
+        <p:spPr/>
+      </p:sp>
+      <p:sp>
+        <p:nvSpPr>
+          <p:cNvPr id="3" name="Notes Placeholder 2"/>
+          <p:cNvSpPr>
+            <a:spLocks xmlns:a="http://schemas.openxmlformats.org/drawingml/2006/main" noGrp="1"/>
+          </p:cNvSpPr>
+          <p:nvPr>
+            <p:ph type="body" idx="1"/>
+          </p:nvPr>
+        </p:nvSpPr>
+        <p:spPr/>
+        <p:txBody>
+          <a:bodyPr xmlns:a="http://schemas.openxmlformats.org/drawingml/2006/main"/>
+          <a:lstStyle xmlns:a="http://schemas.openxmlformats.org/drawingml/2006/main"/>
+          <a:p xmlns:a="http://schemas.openxmlformats.org/drawingml/2006/main">
+            <a:r>
+              <a:t>[Sources]</a:t>
+            </a:r>
+          </a:p>
+          <a:p xmlns:a="http://schemas.openxmlformats.org/drawingml/2006/main">
+            <a:r>
+              <a:t>Internal Gen5 packet: runs/research_workbench/operator_hypothesis_lab/tsla_qqq_spy_prior_return_horizon_grid_20260825/</a:t>
+            </a:r>
+          </a:p>
+          <a:p xmlns:a="http://schemas.openxmlformats.org/drawingml/2006/main">
+            <a:r>
+              <a:t>Internal Gen5 note: operator_hypothesis_lab/docs/TSLA_QQQ_SPY_PRIOR_RETURN_HORIZON_GRID_2018_2023.md</a:t>
+            </a:r>
+          </a:p>
+        </p:txBody>
+      </p:sp>
+      <p:sp>
+        <p:nvSpPr>
+          <p:cNvPr id="4" name="Slide Number Placeholder 3"/>
+          <p:cNvSpPr>
+            <a:spLocks xmlns:a="http://schemas.openxmlformats.org/drawingml/2006/main" noGrp="1"/>
+          </p:cNvSpPr>
+          <p:nvPr>
+            <p:ph type="sldNum" idx="5"/>
+          </p:nvPr>
+        </p:nvSpPr>
+        <p:spPr/>
+        <p:txBody>
+          <a:bodyPr xmlns:a="http://schemas.openxmlformats.org/drawingml/2006/main"/>
+          <a:lstStyle xmlns:a="http://schemas.openxmlformats.org/drawingml/2006/main"/>
+          <a:p xmlns:a="http://schemas.openxmlformats.org/drawingml/2006/main"/>
+        </p:txBody>
+      </p:sp>
+    </p:spTree>
+  </p:cSld>
+  <p:clrMapOvr>
+    <a:masterClrMapping xmlns:a="http://schemas.openxmlformats.org/drawingml/2006/main"/>
+  </p:clrMapOvr>
+</p:notes>
+</file>
+
+<file path=ppt/notesSlides/notesSlide49.xml><?xml version="1.0" encoding="utf-8"?>
+<p:notes xmlns:p="http://schemas.openxmlformats.org/presentationml/2006/main">
+  <p:cSld>
+    <p:spTree>
+      <p:nvGrpSpPr>
+        <p:cNvPr id="1" name=""/>
+        <p:cNvGrpSpPr/>
+        <p:nvPr/>
+      </p:nvGrpSpPr>
+      <p:grpSpPr>
+        <a:xfrm xmlns:a="http://schemas.openxmlformats.org/drawingml/2006/main"/>
+      </p:grpSpPr>
+      <p:sp>
+        <p:nvSpPr>
+          <p:cNvPr id="2" name="Slide Image Placeholder 1"/>
+          <p:cNvSpPr>
+            <a:spLocks xmlns:a="http://schemas.openxmlformats.org/drawingml/2006/main" noGrp="1"/>
+          </p:cNvSpPr>
+          <p:nvPr>
+            <p:ph type="sldImg" idx="0"/>
+          </p:nvPr>
+        </p:nvSpPr>
+        <p:spPr/>
+      </p:sp>
+      <p:sp>
+        <p:nvSpPr>
+          <p:cNvPr id="3" name="Notes Placeholder 2"/>
+          <p:cNvSpPr>
+            <a:spLocks xmlns:a="http://schemas.openxmlformats.org/drawingml/2006/main" noGrp="1"/>
+          </p:cNvSpPr>
+          <p:nvPr>
+            <p:ph type="body" idx="1"/>
+          </p:nvPr>
+        </p:nvSpPr>
+        <p:spPr/>
+        <p:txBody>
+          <a:bodyPr xmlns:a="http://schemas.openxmlformats.org/drawingml/2006/main"/>
+          <a:lstStyle xmlns:a="http://schemas.openxmlformats.org/drawingml/2006/main"/>
+          <a:p xmlns:a="http://schemas.openxmlformats.org/drawingml/2006/main">
+            <a:r>
+              <a:t>[Sources]</a:t>
+            </a:r>
+          </a:p>
+          <a:p xmlns:a="http://schemas.openxmlformats.org/drawingml/2006/main">
+            <a:r>
+              <a:t>Internal Gen5 packet: runs/research_workbench/operator_hypothesis_lab/tsla_qqq_spy_prior_return_horizon_grid_20260825/</a:t>
+            </a:r>
+          </a:p>
+          <a:p xmlns:a="http://schemas.openxmlformats.org/drawingml/2006/main">
+            <a:r>
+              <a:t>Internal Gen5 note: operator_hypothesis_lab/docs/TSLA_QQQ_SPY_PRIOR_RETURN_HORIZON_GRID_2018_2023.md</a:t>
+            </a:r>
+          </a:p>
+        </p:txBody>
+      </p:sp>
+      <p:sp>
+        <p:nvSpPr>
+          <p:cNvPr id="4" name="Slide Number Placeholder 3"/>
+          <p:cNvSpPr>
+            <a:spLocks xmlns:a="http://schemas.openxmlformats.org/drawingml/2006/main" noGrp="1"/>
+          </p:cNvSpPr>
+          <p:nvPr>
+            <p:ph type="sldNum" idx="5"/>
+          </p:nvPr>
+        </p:nvSpPr>
+        <p:spPr/>
+        <p:txBody>
+          <a:bodyPr xmlns:a="http://schemas.openxmlformats.org/drawingml/2006/main"/>
+          <a:lstStyle xmlns:a="http://schemas.openxmlformats.org/drawingml/2006/main"/>
+          <a:p xmlns:a="http://schemas.openxmlformats.org/drawingml/2006/main"/>
+        </p:txBody>
+      </p:sp>
+    </p:spTree>
+  </p:cSld>
+  <p:clrMapOvr>
+    <a:masterClrMapping xmlns:a="http://schemas.openxmlformats.org/drawingml/2006/main"/>
+  </p:clrMapOvr>
+</p:notes>
+</file>
+
 <file path=ppt/notesSlides/notesSlide5.xml><?xml version="1.0" encoding="utf-8"?>
 <p:notes xmlns:p="http://schemas.openxmlformats.org/presentationml/2006/main">
   <p:cSld>
@@ -4524,6 +4690,331 @@
           <a:p xmlns:a="http://schemas.openxmlformats.org/drawingml/2006/main">
             <a:r>
               <a:t>[/Sources]</a:t>
+            </a:r>
+          </a:p>
+        </p:txBody>
+      </p:sp>
+      <p:sp>
+        <p:nvSpPr>
+          <p:cNvPr id="4" name="Slide Number Placeholder 3"/>
+          <p:cNvSpPr>
+            <a:spLocks xmlns:a="http://schemas.openxmlformats.org/drawingml/2006/main" noGrp="1"/>
+          </p:cNvSpPr>
+          <p:nvPr>
+            <p:ph type="sldNum" idx="5"/>
+          </p:nvPr>
+        </p:nvSpPr>
+        <p:spPr/>
+        <p:txBody>
+          <a:bodyPr xmlns:a="http://schemas.openxmlformats.org/drawingml/2006/main"/>
+          <a:lstStyle xmlns:a="http://schemas.openxmlformats.org/drawingml/2006/main"/>
+          <a:p xmlns:a="http://schemas.openxmlformats.org/drawingml/2006/main"/>
+        </p:txBody>
+      </p:sp>
+    </p:spTree>
+  </p:cSld>
+  <p:clrMapOvr>
+    <a:masterClrMapping xmlns:a="http://schemas.openxmlformats.org/drawingml/2006/main"/>
+  </p:clrMapOvr>
+</p:notes>
+</file>
+
+<file path=ppt/notesSlides/notesSlide50.xml><?xml version="1.0" encoding="utf-8"?>
+<p:notes xmlns:p="http://schemas.openxmlformats.org/presentationml/2006/main">
+  <p:cSld>
+    <p:spTree>
+      <p:nvGrpSpPr>
+        <p:cNvPr id="1" name=""/>
+        <p:cNvGrpSpPr/>
+        <p:nvPr/>
+      </p:nvGrpSpPr>
+      <p:grpSpPr>
+        <a:xfrm xmlns:a="http://schemas.openxmlformats.org/drawingml/2006/main"/>
+      </p:grpSpPr>
+      <p:sp>
+        <p:nvSpPr>
+          <p:cNvPr id="2" name="Slide Image Placeholder 1"/>
+          <p:cNvSpPr>
+            <a:spLocks xmlns:a="http://schemas.openxmlformats.org/drawingml/2006/main" noGrp="1"/>
+          </p:cNvSpPr>
+          <p:nvPr>
+            <p:ph type="sldImg" idx="0"/>
+          </p:nvPr>
+        </p:nvSpPr>
+        <p:spPr/>
+      </p:sp>
+      <p:sp>
+        <p:nvSpPr>
+          <p:cNvPr id="3" name="Notes Placeholder 2"/>
+          <p:cNvSpPr>
+            <a:spLocks xmlns:a="http://schemas.openxmlformats.org/drawingml/2006/main" noGrp="1"/>
+          </p:cNvSpPr>
+          <p:nvPr>
+            <p:ph type="body" idx="1"/>
+          </p:nvPr>
+        </p:nvSpPr>
+        <p:spPr/>
+        <p:txBody>
+          <a:bodyPr xmlns:a="http://schemas.openxmlformats.org/drawingml/2006/main"/>
+          <a:lstStyle xmlns:a="http://schemas.openxmlformats.org/drawingml/2006/main"/>
+          <a:p xmlns:a="http://schemas.openxmlformats.org/drawingml/2006/main">
+            <a:r>
+              <a:t>[Sources]</a:t>
+            </a:r>
+          </a:p>
+          <a:p xmlns:a="http://schemas.openxmlformats.org/drawingml/2006/main">
+            <a:r>
+              <a:t>Internal Gen5 packet: runs/research_workbench/operator_hypothesis_lab/tsla_qqq_spy_prior_return_horizon_grid_20260825/</a:t>
+            </a:r>
+          </a:p>
+          <a:p xmlns:a="http://schemas.openxmlformats.org/drawingml/2006/main">
+            <a:r>
+              <a:t>Internal Gen5 note: operator_hypothesis_lab/docs/TSLA_QQQ_SPY_PRIOR_RETURN_HORIZON_GRID_2018_2023.md</a:t>
+            </a:r>
+          </a:p>
+        </p:txBody>
+      </p:sp>
+      <p:sp>
+        <p:nvSpPr>
+          <p:cNvPr id="4" name="Slide Number Placeholder 3"/>
+          <p:cNvSpPr>
+            <a:spLocks xmlns:a="http://schemas.openxmlformats.org/drawingml/2006/main" noGrp="1"/>
+          </p:cNvSpPr>
+          <p:nvPr>
+            <p:ph type="sldNum" idx="5"/>
+          </p:nvPr>
+        </p:nvSpPr>
+        <p:spPr/>
+        <p:txBody>
+          <a:bodyPr xmlns:a="http://schemas.openxmlformats.org/drawingml/2006/main"/>
+          <a:lstStyle xmlns:a="http://schemas.openxmlformats.org/drawingml/2006/main"/>
+          <a:p xmlns:a="http://schemas.openxmlformats.org/drawingml/2006/main"/>
+        </p:txBody>
+      </p:sp>
+    </p:spTree>
+  </p:cSld>
+  <p:clrMapOvr>
+    <a:masterClrMapping xmlns:a="http://schemas.openxmlformats.org/drawingml/2006/main"/>
+  </p:clrMapOvr>
+</p:notes>
+</file>
+
+<file path=ppt/notesSlides/notesSlide51.xml><?xml version="1.0" encoding="utf-8"?>
+<p:notes xmlns:p="http://schemas.openxmlformats.org/presentationml/2006/main">
+  <p:cSld>
+    <p:spTree>
+      <p:nvGrpSpPr>
+        <p:cNvPr id="1" name=""/>
+        <p:cNvGrpSpPr/>
+        <p:nvPr/>
+      </p:nvGrpSpPr>
+      <p:grpSpPr>
+        <a:xfrm xmlns:a="http://schemas.openxmlformats.org/drawingml/2006/main"/>
+      </p:grpSpPr>
+      <p:sp>
+        <p:nvSpPr>
+          <p:cNvPr id="2" name="Slide Image Placeholder 1"/>
+          <p:cNvSpPr>
+            <a:spLocks xmlns:a="http://schemas.openxmlformats.org/drawingml/2006/main" noGrp="1"/>
+          </p:cNvSpPr>
+          <p:nvPr>
+            <p:ph type="sldImg" idx="0"/>
+          </p:nvPr>
+        </p:nvSpPr>
+        <p:spPr/>
+      </p:sp>
+      <p:sp>
+        <p:nvSpPr>
+          <p:cNvPr id="3" name="Notes Placeholder 2"/>
+          <p:cNvSpPr>
+            <a:spLocks xmlns:a="http://schemas.openxmlformats.org/drawingml/2006/main" noGrp="1"/>
+          </p:cNvSpPr>
+          <p:nvPr>
+            <p:ph type="body" idx="1"/>
+          </p:nvPr>
+        </p:nvSpPr>
+        <p:spPr/>
+        <p:txBody>
+          <a:bodyPr xmlns:a="http://schemas.openxmlformats.org/drawingml/2006/main"/>
+          <a:lstStyle xmlns:a="http://schemas.openxmlformats.org/drawingml/2006/main"/>
+          <a:p xmlns:a="http://schemas.openxmlformats.org/drawingml/2006/main">
+            <a:r>
+              <a:t>[Sources]</a:t>
+            </a:r>
+          </a:p>
+          <a:p xmlns:a="http://schemas.openxmlformats.org/drawingml/2006/main">
+            <a:r>
+              <a:t>Internal Gen5 packet: runs/research_workbench/operator_hypothesis_lab/tsla_qqq_spy_prior_return_horizon_grid_20260825/</a:t>
+            </a:r>
+          </a:p>
+          <a:p xmlns:a="http://schemas.openxmlformats.org/drawingml/2006/main">
+            <a:r>
+              <a:t>Internal Gen5 note: operator_hypothesis_lab/docs/TSLA_QQQ_SPY_PRIOR_RETURN_HORIZON_GRID_2018_2023.md</a:t>
+            </a:r>
+          </a:p>
+        </p:txBody>
+      </p:sp>
+      <p:sp>
+        <p:nvSpPr>
+          <p:cNvPr id="4" name="Slide Number Placeholder 3"/>
+          <p:cNvSpPr>
+            <a:spLocks xmlns:a="http://schemas.openxmlformats.org/drawingml/2006/main" noGrp="1"/>
+          </p:cNvSpPr>
+          <p:nvPr>
+            <p:ph type="sldNum" idx="5"/>
+          </p:nvPr>
+        </p:nvSpPr>
+        <p:spPr/>
+        <p:txBody>
+          <a:bodyPr xmlns:a="http://schemas.openxmlformats.org/drawingml/2006/main"/>
+          <a:lstStyle xmlns:a="http://schemas.openxmlformats.org/drawingml/2006/main"/>
+          <a:p xmlns:a="http://schemas.openxmlformats.org/drawingml/2006/main"/>
+        </p:txBody>
+      </p:sp>
+    </p:spTree>
+  </p:cSld>
+  <p:clrMapOvr>
+    <a:masterClrMapping xmlns:a="http://schemas.openxmlformats.org/drawingml/2006/main"/>
+  </p:clrMapOvr>
+</p:notes>
+</file>
+
+<file path=ppt/notesSlides/notesSlide52.xml><?xml version="1.0" encoding="utf-8"?>
+<p:notes xmlns:p="http://schemas.openxmlformats.org/presentationml/2006/main">
+  <p:cSld>
+    <p:spTree>
+      <p:nvGrpSpPr>
+        <p:cNvPr id="1" name=""/>
+        <p:cNvGrpSpPr/>
+        <p:nvPr/>
+      </p:nvGrpSpPr>
+      <p:grpSpPr>
+        <a:xfrm xmlns:a="http://schemas.openxmlformats.org/drawingml/2006/main"/>
+      </p:grpSpPr>
+      <p:sp>
+        <p:nvSpPr>
+          <p:cNvPr id="2" name="Slide Image Placeholder 1"/>
+          <p:cNvSpPr>
+            <a:spLocks xmlns:a="http://schemas.openxmlformats.org/drawingml/2006/main" noGrp="1"/>
+          </p:cNvSpPr>
+          <p:nvPr>
+            <p:ph type="sldImg" idx="0"/>
+          </p:nvPr>
+        </p:nvSpPr>
+        <p:spPr/>
+      </p:sp>
+      <p:sp>
+        <p:nvSpPr>
+          <p:cNvPr id="3" name="Notes Placeholder 2"/>
+          <p:cNvSpPr>
+            <a:spLocks xmlns:a="http://schemas.openxmlformats.org/drawingml/2006/main" noGrp="1"/>
+          </p:cNvSpPr>
+          <p:nvPr>
+            <p:ph type="body" idx="1"/>
+          </p:nvPr>
+        </p:nvSpPr>
+        <p:spPr/>
+        <p:txBody>
+          <a:bodyPr xmlns:a="http://schemas.openxmlformats.org/drawingml/2006/main"/>
+          <a:lstStyle xmlns:a="http://schemas.openxmlformats.org/drawingml/2006/main"/>
+          <a:p xmlns:a="http://schemas.openxmlformats.org/drawingml/2006/main">
+            <a:r>
+              <a:t>[Sources]</a:t>
+            </a:r>
+          </a:p>
+          <a:p xmlns:a="http://schemas.openxmlformats.org/drawingml/2006/main">
+            <a:r>
+              <a:t>Internal Gen5 packet: runs/research_workbench/operator_hypothesis_lab/tsla_qqq_spy_prior_return_horizon_grid_20260825/</a:t>
+            </a:r>
+          </a:p>
+          <a:p xmlns:a="http://schemas.openxmlformats.org/drawingml/2006/main">
+            <a:r>
+              <a:t>Internal Gen5 note: operator_hypothesis_lab/docs/TSLA_QQQ_SPY_PRIOR_RETURN_HORIZON_GRID_2018_2023.md</a:t>
+            </a:r>
+          </a:p>
+        </p:txBody>
+      </p:sp>
+      <p:sp>
+        <p:nvSpPr>
+          <p:cNvPr id="4" name="Slide Number Placeholder 3"/>
+          <p:cNvSpPr>
+            <a:spLocks xmlns:a="http://schemas.openxmlformats.org/drawingml/2006/main" noGrp="1"/>
+          </p:cNvSpPr>
+          <p:nvPr>
+            <p:ph type="sldNum" idx="5"/>
+          </p:nvPr>
+        </p:nvSpPr>
+        <p:spPr/>
+        <p:txBody>
+          <a:bodyPr xmlns:a="http://schemas.openxmlformats.org/drawingml/2006/main"/>
+          <a:lstStyle xmlns:a="http://schemas.openxmlformats.org/drawingml/2006/main"/>
+          <a:p xmlns:a="http://schemas.openxmlformats.org/drawingml/2006/main"/>
+        </p:txBody>
+      </p:sp>
+    </p:spTree>
+  </p:cSld>
+  <p:clrMapOvr>
+    <a:masterClrMapping xmlns:a="http://schemas.openxmlformats.org/drawingml/2006/main"/>
+  </p:clrMapOvr>
+</p:notes>
+</file>
+
+<file path=ppt/notesSlides/notesSlide53.xml><?xml version="1.0" encoding="utf-8"?>
+<p:notes xmlns:p="http://schemas.openxmlformats.org/presentationml/2006/main">
+  <p:cSld>
+    <p:spTree>
+      <p:nvGrpSpPr>
+        <p:cNvPr id="1" name=""/>
+        <p:cNvGrpSpPr/>
+        <p:nvPr/>
+      </p:nvGrpSpPr>
+      <p:grpSpPr>
+        <a:xfrm xmlns:a="http://schemas.openxmlformats.org/drawingml/2006/main"/>
+      </p:grpSpPr>
+      <p:sp>
+        <p:nvSpPr>
+          <p:cNvPr id="2" name="Slide Image Placeholder 1"/>
+          <p:cNvSpPr>
+            <a:spLocks xmlns:a="http://schemas.openxmlformats.org/drawingml/2006/main" noGrp="1"/>
+          </p:cNvSpPr>
+          <p:nvPr>
+            <p:ph type="sldImg" idx="0"/>
+          </p:nvPr>
+        </p:nvSpPr>
+        <p:spPr/>
+      </p:sp>
+      <p:sp>
+        <p:nvSpPr>
+          <p:cNvPr id="3" name="Notes Placeholder 2"/>
+          <p:cNvSpPr>
+            <a:spLocks xmlns:a="http://schemas.openxmlformats.org/drawingml/2006/main" noGrp="1"/>
+          </p:cNvSpPr>
+          <p:nvPr>
+            <p:ph type="body" idx="1"/>
+          </p:nvPr>
+        </p:nvSpPr>
+        <p:spPr/>
+        <p:txBody>
+          <a:bodyPr xmlns:a="http://schemas.openxmlformats.org/drawingml/2006/main"/>
+          <a:lstStyle xmlns:a="http://schemas.openxmlformats.org/drawingml/2006/main"/>
+          <a:p xmlns:a="http://schemas.openxmlformats.org/drawingml/2006/main">
+            <a:r>
+              <a:t>[Sources]</a:t>
+            </a:r>
+          </a:p>
+          <a:p xmlns:a="http://schemas.openxmlformats.org/drawingml/2006/main">
+            <a:r>
+              <a:t>Internal Gen5 packet: runs/research_workbench/operator_hypothesis_lab/tsla_qqq_spy_prior_return_horizon_grid_20260825/</a:t>
+            </a:r>
+          </a:p>
+          <a:p xmlns:a="http://schemas.openxmlformats.org/drawingml/2006/main">
+            <a:r>
+              <a:t>Internal Gen5 note: operator_hypothesis_lab/docs/TSLA_QQQ_SPY_PRIOR_RETURN_HORIZON_GRID_2018_2023.md</a:t>
+            </a:r>
+          </a:p>
+          <a:p xmlns:a="http://schemas.openxmlformats.org/drawingml/2006/main">
+            <a:r>
+              <a:t>Internal Gen5 comparison packet: runs/research_workbench/operator_hypothesis_lab/tsla_return_horizon_grid_20260824/</a:t>
             </a:r>
           </a:p>
         </p:txBody>
@@ -4986,7 +5477,7 @@
   </p:cSld>
   <p:clrMap bg1="lt1" tx1="dk1" bg2="lt2" tx2="dk2" accent1="accent1" accent2="accent2" accent3="accent3" accent4="accent4" accent5="accent5" accent6="accent6" hlink="hlink" folHlink="folHlink"/>
   <p:sldLayoutIdLst>
-    <p:sldLayoutId xmlns:r="http://schemas.openxmlformats.org/officeDocument/2006/relationships" id="2147483649" r:id="Ra112cd237886420e"/>
+    <p:sldLayoutId xmlns:r="http://schemas.openxmlformats.org/officeDocument/2006/relationships" id="2147483649" r:id="Rb0dbce1e837d4a3a"/>
   </p:sldLayoutIdLst>
   <p:txStyles>
     <p:titleStyle>
@@ -6165,7 +6656,7 @@
           <p:nvPr/>
         </p:nvPicPr>
         <p:blipFill>
-          <a:blip xmlns:r="http://schemas.openxmlformats.org/officeDocument/2006/relationships" xmlns:a="http://schemas.openxmlformats.org/drawingml/2006/main" r:embed="R0c61f548654742b1"/>
+          <a:blip xmlns:r="http://schemas.openxmlformats.org/officeDocument/2006/relationships" xmlns:a="http://schemas.openxmlformats.org/drawingml/2006/main" r:embed="Rcab7b7c0b1cb40ed"/>
           <a:stretch xmlns:a="http://schemas.openxmlformats.org/drawingml/2006/main"/>
         </p:blipFill>
         <p:spPr>
@@ -10086,7 +10577,7 @@
           <p:nvPr/>
         </p:nvPicPr>
         <p:blipFill>
-          <a:blip xmlns:r="http://schemas.openxmlformats.org/officeDocument/2006/relationships" xmlns:a="http://schemas.openxmlformats.org/drawingml/2006/main" r:embed="Rb32b24a26cf44627"/>
+          <a:blip xmlns:r="http://schemas.openxmlformats.org/officeDocument/2006/relationships" xmlns:a="http://schemas.openxmlformats.org/drawingml/2006/main" r:embed="R6dbf029c19894815"/>
           <a:stretch xmlns:a="http://schemas.openxmlformats.org/drawingml/2006/main"/>
         </p:blipFill>
         <p:spPr>
@@ -10991,7 +11482,7 @@
           <p:nvPr/>
         </p:nvPicPr>
         <p:blipFill>
-          <a:blip xmlns:r="http://schemas.openxmlformats.org/officeDocument/2006/relationships" xmlns:a="http://schemas.openxmlformats.org/drawingml/2006/main" r:embed="Rb508f8a0a89949ec"/>
+          <a:blip xmlns:r="http://schemas.openxmlformats.org/officeDocument/2006/relationships" xmlns:a="http://schemas.openxmlformats.org/drawingml/2006/main" r:embed="Reaf50aa0b4334874"/>
           <a:stretch xmlns:a="http://schemas.openxmlformats.org/drawingml/2006/main"/>
         </p:blipFill>
         <p:spPr>
@@ -11795,7 +12286,7 @@
           <p:nvPr/>
         </p:nvPicPr>
         <p:blipFill>
-          <a:blip xmlns:r="http://schemas.openxmlformats.org/officeDocument/2006/relationships" xmlns:a="http://schemas.openxmlformats.org/drawingml/2006/main" r:embed="R65ca3541ff8a4144"/>
+          <a:blip xmlns:r="http://schemas.openxmlformats.org/officeDocument/2006/relationships" xmlns:a="http://schemas.openxmlformats.org/drawingml/2006/main" r:embed="R075c54dcde854ec5"/>
           <a:stretch xmlns:a="http://schemas.openxmlformats.org/drawingml/2006/main"/>
         </p:blipFill>
         <p:spPr>
@@ -16148,7 +16639,7 @@
           <p:nvPr/>
         </p:nvPicPr>
         <p:blipFill>
-          <a:blip xmlns:r="http://schemas.openxmlformats.org/officeDocument/2006/relationships" xmlns:a="http://schemas.openxmlformats.org/drawingml/2006/main" r:embed="R98a3647ddd0f4572"/>
+          <a:blip xmlns:r="http://schemas.openxmlformats.org/officeDocument/2006/relationships" xmlns:a="http://schemas.openxmlformats.org/drawingml/2006/main" r:embed="R0ec84b4d1e4049ff"/>
           <a:stretch xmlns:a="http://schemas.openxmlformats.org/drawingml/2006/main"/>
         </p:blipFill>
         <p:spPr>
@@ -16560,7 +17051,7 @@
           <p:nvPr/>
         </p:nvPicPr>
         <p:blipFill>
-          <a:blip xmlns:r="http://schemas.openxmlformats.org/officeDocument/2006/relationships" xmlns:a="http://schemas.openxmlformats.org/drawingml/2006/main" r:embed="Rbc164a49640a404f"/>
+          <a:blip xmlns:r="http://schemas.openxmlformats.org/officeDocument/2006/relationships" xmlns:a="http://schemas.openxmlformats.org/drawingml/2006/main" r:embed="R0a1aaa9241c84c8d"/>
           <a:stretch xmlns:a="http://schemas.openxmlformats.org/drawingml/2006/main"/>
         </p:blipFill>
         <p:spPr>
@@ -17465,7 +17956,7 @@
           <p:nvPr/>
         </p:nvPicPr>
         <p:blipFill>
-          <a:blip xmlns:r="http://schemas.openxmlformats.org/officeDocument/2006/relationships" xmlns:a="http://schemas.openxmlformats.org/drawingml/2006/main" r:embed="R21d56559149f45b3"/>
+          <a:blip xmlns:r="http://schemas.openxmlformats.org/officeDocument/2006/relationships" xmlns:a="http://schemas.openxmlformats.org/drawingml/2006/main" r:embed="R470effb4594349cd"/>
           <a:stretch xmlns:a="http://schemas.openxmlformats.org/drawingml/2006/main"/>
         </p:blipFill>
         <p:spPr>
@@ -21237,7 +21728,7 @@
           <p:nvPr/>
         </p:nvPicPr>
         <p:blipFill>
-          <a:blip xmlns:r="http://schemas.openxmlformats.org/officeDocument/2006/relationships" xmlns:a="http://schemas.openxmlformats.org/drawingml/2006/main" r:embed="R3caa4fb53afb4eba"/>
+          <a:blip xmlns:r="http://schemas.openxmlformats.org/officeDocument/2006/relationships" xmlns:a="http://schemas.openxmlformats.org/drawingml/2006/main" r:embed="R7fa0a0942b9f4d2b"/>
           <a:stretch xmlns:a="http://schemas.openxmlformats.org/drawingml/2006/main"/>
         </p:blipFill>
         <p:spPr>
@@ -21649,7 +22140,7 @@
           <p:nvPr/>
         </p:nvPicPr>
         <p:blipFill>
-          <a:blip xmlns:r="http://schemas.openxmlformats.org/officeDocument/2006/relationships" xmlns:a="http://schemas.openxmlformats.org/drawingml/2006/main" r:embed="R215cf6c7e6be493d"/>
+          <a:blip xmlns:r="http://schemas.openxmlformats.org/officeDocument/2006/relationships" xmlns:a="http://schemas.openxmlformats.org/drawingml/2006/main" r:embed="R3598d30657ac4505"/>
           <a:stretch xmlns:a="http://schemas.openxmlformats.org/drawingml/2006/main"/>
         </p:blipFill>
         <p:spPr>
@@ -22061,7 +22552,7 @@
           <p:nvPr/>
         </p:nvPicPr>
         <p:blipFill>
-          <a:blip xmlns:r="http://schemas.openxmlformats.org/officeDocument/2006/relationships" xmlns:a="http://schemas.openxmlformats.org/drawingml/2006/main" r:embed="R51a3221d49424f21"/>
+          <a:blip xmlns:r="http://schemas.openxmlformats.org/officeDocument/2006/relationships" xmlns:a="http://schemas.openxmlformats.org/drawingml/2006/main" r:embed="Rc03ae16d0eb04a4a"/>
           <a:stretch xmlns:a="http://schemas.openxmlformats.org/drawingml/2006/main"/>
         </p:blipFill>
         <p:spPr>
@@ -22473,7 +22964,7 @@
           <p:nvPr/>
         </p:nvPicPr>
         <p:blipFill>
-          <a:blip xmlns:r="http://schemas.openxmlformats.org/officeDocument/2006/relationships" xmlns:a="http://schemas.openxmlformats.org/drawingml/2006/main" r:embed="R30212ee070b34749"/>
+          <a:blip xmlns:r="http://schemas.openxmlformats.org/officeDocument/2006/relationships" xmlns:a="http://schemas.openxmlformats.org/drawingml/2006/main" r:embed="Rc94cd0e81912432b"/>
           <a:stretch xmlns:a="http://schemas.openxmlformats.org/drawingml/2006/main"/>
         </p:blipFill>
         <p:spPr>
@@ -24910,7 +25401,7 @@
           <p:nvPr/>
         </p:nvPicPr>
         <p:blipFill>
-          <a:blip xmlns:r="http://schemas.openxmlformats.org/officeDocument/2006/relationships" xmlns:a="http://schemas.openxmlformats.org/drawingml/2006/main" r:embed="R3ea218be5da44f8d"/>
+          <a:blip xmlns:r="http://schemas.openxmlformats.org/officeDocument/2006/relationships" xmlns:a="http://schemas.openxmlformats.org/drawingml/2006/main" r:embed="R0bc69edbf6d04db4"/>
           <a:stretch xmlns:a="http://schemas.openxmlformats.org/drawingml/2006/main"/>
         </p:blipFill>
         <p:spPr>
@@ -28651,14 +29142,36 @@
       </p:sp>
       <p:pic>
         <p:nvPicPr>
-          <p:cNvPr id="28" name=""/>
+          <p:cNvPr id="29" name=""/>
           <p:cNvPicPr>
             <a:picLocks xmlns:a="http://schemas.openxmlformats.org/drawingml/2006/main" noChangeAspect="1"/>
           </p:cNvPicPr>
           <p:nvPr/>
         </p:nvPicPr>
         <p:blipFill>
-          <a:blip xmlns:r="http://schemas.openxmlformats.org/officeDocument/2006/relationships" xmlns:a="http://schemas.openxmlformats.org/drawingml/2006/main" r:embed="Rddb4a04661994f25"/>
+          <a:blip xmlns:r="http://schemas.openxmlformats.org/officeDocument/2006/relationships" xmlns:a="http://schemas.openxmlformats.org/drawingml/2006/main" r:embed="R18baa9981447494d"/>
+          <a:stretch xmlns:a="http://schemas.openxmlformats.org/drawingml/2006/main"/>
+        </p:blipFill>
+        <p:spPr>
+          <a:xfrm xmlns:a="http://schemas.openxmlformats.org/drawingml/2006/main" flipH="0" flipV="0">
+            <a:off x="325967" y="1381125"/>
+            <a:ext cx="8568267" cy="4819650"/>
+          </a:xfrm>
+          <a:prstGeom xmlns:a="http://schemas.openxmlformats.org/drawingml/2006/main" prst="rect">
+            <a:avLst/>
+          </a:prstGeom>
+        </p:spPr>
+      </p:pic>
+      <p:pic>
+        <p:nvPicPr>
+          <p:cNvPr id="30" name=""/>
+          <p:cNvPicPr>
+            <a:picLocks xmlns:a="http://schemas.openxmlformats.org/drawingml/2006/main" noChangeAspect="1"/>
+          </p:cNvPicPr>
+          <p:nvPr/>
+        </p:nvPicPr>
+        <p:blipFill>
+          <a:blip xmlns:r="http://schemas.openxmlformats.org/officeDocument/2006/relationships" xmlns:a="http://schemas.openxmlformats.org/drawingml/2006/main" r:embed="R264e646452964028"/>
           <a:stretch xmlns:a="http://schemas.openxmlformats.org/drawingml/2006/main"/>
         </p:blipFill>
         <p:spPr>
@@ -29063,14 +29576,36 @@
       </p:sp>
       <p:pic>
         <p:nvPicPr>
-          <p:cNvPr id="18" name=""/>
+          <p:cNvPr id="19" name=""/>
           <p:cNvPicPr>
             <a:picLocks xmlns:a="http://schemas.openxmlformats.org/drawingml/2006/main" noChangeAspect="1"/>
           </p:cNvPicPr>
           <p:nvPr/>
         </p:nvPicPr>
         <p:blipFill>
-          <a:blip xmlns:r="http://schemas.openxmlformats.org/officeDocument/2006/relationships" xmlns:a="http://schemas.openxmlformats.org/drawingml/2006/main" r:embed="R4b9ea7e26e444570"/>
+          <a:blip xmlns:r="http://schemas.openxmlformats.org/officeDocument/2006/relationships" xmlns:a="http://schemas.openxmlformats.org/drawingml/2006/main" r:embed="R6d0bab586b6c4923"/>
+          <a:stretch xmlns:a="http://schemas.openxmlformats.org/drawingml/2006/main"/>
+        </p:blipFill>
+        <p:spPr>
+          <a:xfrm xmlns:a="http://schemas.openxmlformats.org/drawingml/2006/main" flipH="0" flipV="0">
+            <a:off x="2942545" y="1352550"/>
+            <a:ext cx="6306911" cy="4905375"/>
+          </a:xfrm>
+          <a:prstGeom xmlns:a="http://schemas.openxmlformats.org/drawingml/2006/main" prst="rect">
+            <a:avLst/>
+          </a:prstGeom>
+        </p:spPr>
+      </p:pic>
+      <p:pic>
+        <p:nvPicPr>
+          <p:cNvPr id="20" name=""/>
+          <p:cNvPicPr>
+            <a:picLocks xmlns:a="http://schemas.openxmlformats.org/drawingml/2006/main" noChangeAspect="1"/>
+          </p:cNvPicPr>
+          <p:nvPr/>
+        </p:nvPicPr>
+        <p:blipFill>
+          <a:blip xmlns:r="http://schemas.openxmlformats.org/officeDocument/2006/relationships" xmlns:a="http://schemas.openxmlformats.org/drawingml/2006/main" r:embed="Rcd0b2122601f4376"/>
           <a:stretch xmlns:a="http://schemas.openxmlformats.org/drawingml/2006/main"/>
         </p:blipFill>
         <p:spPr>
@@ -29475,14 +30010,36 @@
       </p:sp>
       <p:pic>
         <p:nvPicPr>
-          <p:cNvPr id="18" name=""/>
+          <p:cNvPr id="19" name=""/>
           <p:cNvPicPr>
             <a:picLocks xmlns:a="http://schemas.openxmlformats.org/drawingml/2006/main" noChangeAspect="1"/>
           </p:cNvPicPr>
           <p:nvPr/>
         </p:nvPicPr>
         <p:blipFill>
-          <a:blip xmlns:r="http://schemas.openxmlformats.org/officeDocument/2006/relationships" xmlns:a="http://schemas.openxmlformats.org/drawingml/2006/main" r:embed="R2573bf6f558e42e5"/>
+          <a:blip xmlns:r="http://schemas.openxmlformats.org/officeDocument/2006/relationships" xmlns:a="http://schemas.openxmlformats.org/drawingml/2006/main" r:embed="Re2235d9a399946fc"/>
+          <a:stretch xmlns:a="http://schemas.openxmlformats.org/drawingml/2006/main"/>
+        </p:blipFill>
+        <p:spPr>
+          <a:xfrm xmlns:a="http://schemas.openxmlformats.org/drawingml/2006/main" flipH="0" flipV="0">
+            <a:off x="2942545" y="1352550"/>
+            <a:ext cx="6306911" cy="4905375"/>
+          </a:xfrm>
+          <a:prstGeom xmlns:a="http://schemas.openxmlformats.org/drawingml/2006/main" prst="rect">
+            <a:avLst/>
+          </a:prstGeom>
+        </p:spPr>
+      </p:pic>
+      <p:pic>
+        <p:nvPicPr>
+          <p:cNvPr id="20" name=""/>
+          <p:cNvPicPr>
+            <a:picLocks xmlns:a="http://schemas.openxmlformats.org/drawingml/2006/main" noChangeAspect="1"/>
+          </p:cNvPicPr>
+          <p:nvPr/>
+        </p:nvPicPr>
+        <p:blipFill>
+          <a:blip xmlns:r="http://schemas.openxmlformats.org/officeDocument/2006/relationships" xmlns:a="http://schemas.openxmlformats.org/drawingml/2006/main" r:embed="R2fb79264e7474fa9"/>
           <a:stretch xmlns:a="http://schemas.openxmlformats.org/drawingml/2006/main"/>
         </p:blipFill>
         <p:spPr>
@@ -29887,14 +30444,36 @@
       </p:sp>
       <p:pic>
         <p:nvPicPr>
-          <p:cNvPr id="18" name=""/>
+          <p:cNvPr id="19" name=""/>
           <p:cNvPicPr>
             <a:picLocks xmlns:a="http://schemas.openxmlformats.org/drawingml/2006/main" noChangeAspect="1"/>
           </p:cNvPicPr>
           <p:nvPr/>
         </p:nvPicPr>
         <p:blipFill>
-          <a:blip xmlns:r="http://schemas.openxmlformats.org/officeDocument/2006/relationships" xmlns:a="http://schemas.openxmlformats.org/drawingml/2006/main" r:embed="Ra64e0a85fa3f4cc3"/>
+          <a:blip xmlns:r="http://schemas.openxmlformats.org/officeDocument/2006/relationships" xmlns:a="http://schemas.openxmlformats.org/drawingml/2006/main" r:embed="Rf62d6f3bd4964097"/>
+          <a:stretch xmlns:a="http://schemas.openxmlformats.org/drawingml/2006/main"/>
+        </p:blipFill>
+        <p:spPr>
+          <a:xfrm xmlns:a="http://schemas.openxmlformats.org/drawingml/2006/main" flipH="0" flipV="0">
+            <a:off x="2942545" y="1352550"/>
+            <a:ext cx="6306911" cy="4905375"/>
+          </a:xfrm>
+          <a:prstGeom xmlns:a="http://schemas.openxmlformats.org/drawingml/2006/main" prst="rect">
+            <a:avLst/>
+          </a:prstGeom>
+        </p:spPr>
+      </p:pic>
+      <p:pic>
+        <p:nvPicPr>
+          <p:cNvPr id="20" name=""/>
+          <p:cNvPicPr>
+            <a:picLocks xmlns:a="http://schemas.openxmlformats.org/drawingml/2006/main" noChangeAspect="1"/>
+          </p:cNvPicPr>
+          <p:nvPr/>
+        </p:nvPicPr>
+        <p:blipFill>
+          <a:blip xmlns:r="http://schemas.openxmlformats.org/officeDocument/2006/relationships" xmlns:a="http://schemas.openxmlformats.org/drawingml/2006/main" r:embed="Rcff7f4fdf5974f35"/>
           <a:stretch xmlns:a="http://schemas.openxmlformats.org/drawingml/2006/main"/>
         </p:blipFill>
         <p:spPr>
@@ -30792,14 +31371,36 @@
       </p:sp>
       <p:pic>
         <p:nvPicPr>
-          <p:cNvPr id="40" name=""/>
+          <p:cNvPr id="41" name=""/>
           <p:cNvPicPr>
             <a:picLocks xmlns:a="http://schemas.openxmlformats.org/drawingml/2006/main" noChangeAspect="1"/>
           </p:cNvPicPr>
           <p:nvPr/>
         </p:nvPicPr>
         <p:blipFill>
-          <a:blip xmlns:r="http://schemas.openxmlformats.org/officeDocument/2006/relationships" xmlns:a="http://schemas.openxmlformats.org/drawingml/2006/main" r:embed="R9bba36a4bfec4c38"/>
+          <a:blip xmlns:r="http://schemas.openxmlformats.org/officeDocument/2006/relationships" xmlns:a="http://schemas.openxmlformats.org/drawingml/2006/main" r:embed="R16b45566989146a5"/>
+          <a:stretch xmlns:a="http://schemas.openxmlformats.org/drawingml/2006/main"/>
+        </p:blipFill>
+        <p:spPr>
+          <a:xfrm xmlns:a="http://schemas.openxmlformats.org/drawingml/2006/main" flipH="0" flipV="0">
+            <a:off x="609600" y="1428750"/>
+            <a:ext cx="7143750" cy="4762500"/>
+          </a:xfrm>
+          <a:prstGeom xmlns:a="http://schemas.openxmlformats.org/drawingml/2006/main" prst="rect">
+            <a:avLst/>
+          </a:prstGeom>
+        </p:spPr>
+      </p:pic>
+      <p:pic>
+        <p:nvPicPr>
+          <p:cNvPr id="42" name=""/>
+          <p:cNvPicPr>
+            <a:picLocks xmlns:a="http://schemas.openxmlformats.org/drawingml/2006/main" noChangeAspect="1"/>
+          </p:cNvPicPr>
+          <p:nvPr/>
+        </p:nvPicPr>
+        <p:blipFill>
+          <a:blip xmlns:r="http://schemas.openxmlformats.org/officeDocument/2006/relationships" xmlns:a="http://schemas.openxmlformats.org/drawingml/2006/main" r:embed="Re5dfa0ca2a854822"/>
           <a:stretch xmlns:a="http://schemas.openxmlformats.org/drawingml/2006/main"/>
         </p:blipFill>
         <p:spPr>
@@ -32330,7 +32931,7 @@
           <p:nvPr/>
         </p:nvPicPr>
         <p:blipFill>
-          <a:blip xmlns:r="http://schemas.openxmlformats.org/officeDocument/2006/relationships" xmlns:a="http://schemas.openxmlformats.org/drawingml/2006/main" r:embed="Rd2e356d696154848"/>
+          <a:blip xmlns:r="http://schemas.openxmlformats.org/officeDocument/2006/relationships" xmlns:a="http://schemas.openxmlformats.org/drawingml/2006/main" r:embed="R7ad2fa2f815d4d6d"/>
           <a:stretch xmlns:a="http://schemas.openxmlformats.org/drawingml/2006/main"/>
         </p:blipFill>
         <p:spPr>
@@ -34952,14 +35553,36 @@
       </p:sp>
       <p:pic>
         <p:nvPicPr>
-          <p:cNvPr id="28" name=""/>
+          <p:cNvPr id="29" name=""/>
           <p:cNvPicPr>
             <a:picLocks xmlns:a="http://schemas.openxmlformats.org/drawingml/2006/main" noChangeAspect="1"/>
           </p:cNvPicPr>
           <p:nvPr/>
         </p:nvPicPr>
         <p:blipFill>
-          <a:blip xmlns:r="http://schemas.openxmlformats.org/officeDocument/2006/relationships" xmlns:a="http://schemas.openxmlformats.org/drawingml/2006/main" r:embed="Rcbbf63d5d7c74fda"/>
+          <a:blip xmlns:r="http://schemas.openxmlformats.org/officeDocument/2006/relationships" xmlns:a="http://schemas.openxmlformats.org/drawingml/2006/main" r:embed="Rf627b50688354903"/>
+          <a:stretch xmlns:a="http://schemas.openxmlformats.org/drawingml/2006/main"/>
+        </p:blipFill>
+        <p:spPr>
+          <a:xfrm xmlns:a="http://schemas.openxmlformats.org/drawingml/2006/main" flipH="0" flipV="0">
+            <a:off x="325967" y="1381125"/>
+            <a:ext cx="8568267" cy="4819650"/>
+          </a:xfrm>
+          <a:prstGeom xmlns:a="http://schemas.openxmlformats.org/drawingml/2006/main" prst="rect">
+            <a:avLst/>
+          </a:prstGeom>
+        </p:spPr>
+      </p:pic>
+      <p:pic>
+        <p:nvPicPr>
+          <p:cNvPr id="30" name=""/>
+          <p:cNvPicPr>
+            <a:picLocks xmlns:a="http://schemas.openxmlformats.org/drawingml/2006/main" noChangeAspect="1"/>
+          </p:cNvPicPr>
+          <p:nvPr/>
+        </p:nvPicPr>
+        <p:blipFill>
+          <a:blip xmlns:r="http://schemas.openxmlformats.org/officeDocument/2006/relationships" xmlns:a="http://schemas.openxmlformats.org/drawingml/2006/main" r:embed="R58945659d51f44a1"/>
           <a:stretch xmlns:a="http://schemas.openxmlformats.org/drawingml/2006/main"/>
         </p:blipFill>
         <p:spPr>
@@ -35364,14 +35987,36 @@
       </p:sp>
       <p:pic>
         <p:nvPicPr>
-          <p:cNvPr id="18" name=""/>
+          <p:cNvPr id="19" name=""/>
           <p:cNvPicPr>
             <a:picLocks xmlns:a="http://schemas.openxmlformats.org/drawingml/2006/main" noChangeAspect="1"/>
           </p:cNvPicPr>
           <p:nvPr/>
         </p:nvPicPr>
         <p:blipFill>
-          <a:blip xmlns:r="http://schemas.openxmlformats.org/officeDocument/2006/relationships" xmlns:a="http://schemas.openxmlformats.org/drawingml/2006/main" r:embed="R1e7c5212cbfa4434"/>
+          <a:blip xmlns:r="http://schemas.openxmlformats.org/officeDocument/2006/relationships" xmlns:a="http://schemas.openxmlformats.org/drawingml/2006/main" r:embed="R4f41a6a53e0c4f93"/>
+          <a:stretch xmlns:a="http://schemas.openxmlformats.org/drawingml/2006/main"/>
+        </p:blipFill>
+        <p:spPr>
+          <a:xfrm xmlns:a="http://schemas.openxmlformats.org/drawingml/2006/main" flipH="0" flipV="0">
+            <a:off x="2942545" y="1352550"/>
+            <a:ext cx="6306911" cy="4905375"/>
+          </a:xfrm>
+          <a:prstGeom xmlns:a="http://schemas.openxmlformats.org/drawingml/2006/main" prst="rect">
+            <a:avLst/>
+          </a:prstGeom>
+        </p:spPr>
+      </p:pic>
+      <p:pic>
+        <p:nvPicPr>
+          <p:cNvPr id="20" name=""/>
+          <p:cNvPicPr>
+            <a:picLocks xmlns:a="http://schemas.openxmlformats.org/drawingml/2006/main" noChangeAspect="1"/>
+          </p:cNvPicPr>
+          <p:nvPr/>
+        </p:nvPicPr>
+        <p:blipFill>
+          <a:blip xmlns:r="http://schemas.openxmlformats.org/officeDocument/2006/relationships" xmlns:a="http://schemas.openxmlformats.org/drawingml/2006/main" r:embed="R687a21721adb418a"/>
           <a:stretch xmlns:a="http://schemas.openxmlformats.org/drawingml/2006/main"/>
         </p:blipFill>
         <p:spPr>
@@ -35776,14 +36421,36 @@
       </p:sp>
       <p:pic>
         <p:nvPicPr>
-          <p:cNvPr id="18" name=""/>
+          <p:cNvPr id="19" name=""/>
           <p:cNvPicPr>
             <a:picLocks xmlns:a="http://schemas.openxmlformats.org/drawingml/2006/main" noChangeAspect="1"/>
           </p:cNvPicPr>
           <p:nvPr/>
         </p:nvPicPr>
         <p:blipFill>
-          <a:blip xmlns:r="http://schemas.openxmlformats.org/officeDocument/2006/relationships" xmlns:a="http://schemas.openxmlformats.org/drawingml/2006/main" r:embed="R2c2d3ddfd03a4304"/>
+          <a:blip xmlns:r="http://schemas.openxmlformats.org/officeDocument/2006/relationships" xmlns:a="http://schemas.openxmlformats.org/drawingml/2006/main" r:embed="R2baf666064904f43"/>
+          <a:stretch xmlns:a="http://schemas.openxmlformats.org/drawingml/2006/main"/>
+        </p:blipFill>
+        <p:spPr>
+          <a:xfrm xmlns:a="http://schemas.openxmlformats.org/drawingml/2006/main" flipH="0" flipV="0">
+            <a:off x="2942545" y="1352550"/>
+            <a:ext cx="6306911" cy="4905375"/>
+          </a:xfrm>
+          <a:prstGeom xmlns:a="http://schemas.openxmlformats.org/drawingml/2006/main" prst="rect">
+            <a:avLst/>
+          </a:prstGeom>
+        </p:spPr>
+      </p:pic>
+      <p:pic>
+        <p:nvPicPr>
+          <p:cNvPr id="20" name=""/>
+          <p:cNvPicPr>
+            <a:picLocks xmlns:a="http://schemas.openxmlformats.org/drawingml/2006/main" noChangeAspect="1"/>
+          </p:cNvPicPr>
+          <p:nvPr/>
+        </p:nvPicPr>
+        <p:blipFill>
+          <a:blip xmlns:r="http://schemas.openxmlformats.org/officeDocument/2006/relationships" xmlns:a="http://schemas.openxmlformats.org/drawingml/2006/main" r:embed="R984a13127eb343cf"/>
           <a:stretch xmlns:a="http://schemas.openxmlformats.org/drawingml/2006/main"/>
         </p:blipFill>
         <p:spPr>
@@ -36188,14 +36855,36 @@
       </p:sp>
       <p:pic>
         <p:nvPicPr>
-          <p:cNvPr id="18" name=""/>
+          <p:cNvPr id="19" name=""/>
           <p:cNvPicPr>
             <a:picLocks xmlns:a="http://schemas.openxmlformats.org/drawingml/2006/main" noChangeAspect="1"/>
           </p:cNvPicPr>
           <p:nvPr/>
         </p:nvPicPr>
         <p:blipFill>
-          <a:blip xmlns:r="http://schemas.openxmlformats.org/officeDocument/2006/relationships" xmlns:a="http://schemas.openxmlformats.org/drawingml/2006/main" r:embed="R99ba1f666db942dd"/>
+          <a:blip xmlns:r="http://schemas.openxmlformats.org/officeDocument/2006/relationships" xmlns:a="http://schemas.openxmlformats.org/drawingml/2006/main" r:embed="Rea75e8986eae4477"/>
+          <a:stretch xmlns:a="http://schemas.openxmlformats.org/drawingml/2006/main"/>
+        </p:blipFill>
+        <p:spPr>
+          <a:xfrm xmlns:a="http://schemas.openxmlformats.org/drawingml/2006/main" flipH="0" flipV="0">
+            <a:off x="2942545" y="1352550"/>
+            <a:ext cx="6306911" cy="4905375"/>
+          </a:xfrm>
+          <a:prstGeom xmlns:a="http://schemas.openxmlformats.org/drawingml/2006/main" prst="rect">
+            <a:avLst/>
+          </a:prstGeom>
+        </p:spPr>
+      </p:pic>
+      <p:pic>
+        <p:nvPicPr>
+          <p:cNvPr id="20" name=""/>
+          <p:cNvPicPr>
+            <a:picLocks xmlns:a="http://schemas.openxmlformats.org/drawingml/2006/main" noChangeAspect="1"/>
+          </p:cNvPicPr>
+          <p:nvPr/>
+        </p:nvPicPr>
+        <p:blipFill>
+          <a:blip xmlns:r="http://schemas.openxmlformats.org/officeDocument/2006/relationships" xmlns:a="http://schemas.openxmlformats.org/drawingml/2006/main" r:embed="Rae891186be36471b"/>
           <a:stretch xmlns:a="http://schemas.openxmlformats.org/drawingml/2006/main"/>
         </p:blipFill>
         <p:spPr>
@@ -37093,14 +37782,36 @@
       </p:sp>
       <p:pic>
         <p:nvPicPr>
-          <p:cNvPr id="40" name=""/>
+          <p:cNvPr id="41" name=""/>
           <p:cNvPicPr>
             <a:picLocks xmlns:a="http://schemas.openxmlformats.org/drawingml/2006/main" noChangeAspect="1"/>
           </p:cNvPicPr>
           <p:nvPr/>
         </p:nvPicPr>
         <p:blipFill>
-          <a:blip xmlns:r="http://schemas.openxmlformats.org/officeDocument/2006/relationships" xmlns:a="http://schemas.openxmlformats.org/drawingml/2006/main" r:embed="R2e18e1a825f7426e"/>
+          <a:blip xmlns:r="http://schemas.openxmlformats.org/officeDocument/2006/relationships" xmlns:a="http://schemas.openxmlformats.org/drawingml/2006/main" r:embed="R440add1ae3854a4d"/>
+          <a:stretch xmlns:a="http://schemas.openxmlformats.org/drawingml/2006/main"/>
+        </p:blipFill>
+        <p:spPr>
+          <a:xfrm xmlns:a="http://schemas.openxmlformats.org/drawingml/2006/main" flipH="0" flipV="0">
+            <a:off x="609600" y="1428750"/>
+            <a:ext cx="7143750" cy="4762500"/>
+          </a:xfrm>
+          <a:prstGeom xmlns:a="http://schemas.openxmlformats.org/drawingml/2006/main" prst="rect">
+            <a:avLst/>
+          </a:prstGeom>
+        </p:spPr>
+      </p:pic>
+      <p:pic>
+        <p:nvPicPr>
+          <p:cNvPr id="42" name=""/>
+          <p:cNvPicPr>
+            <a:picLocks xmlns:a="http://schemas.openxmlformats.org/drawingml/2006/main" noChangeAspect="1"/>
+          </p:cNvPicPr>
+          <p:nvPr/>
+        </p:nvPicPr>
+        <p:blipFill>
+          <a:blip xmlns:r="http://schemas.openxmlformats.org/officeDocument/2006/relationships" xmlns:a="http://schemas.openxmlformats.org/drawingml/2006/main" r:embed="R0ced9f43c1dd4407"/>
           <a:stretch xmlns:a="http://schemas.openxmlformats.org/drawingml/2006/main"/>
         </p:blipFill>
         <p:spPr>
@@ -38301,6 +39012,1895 @@
 </p:sld>
 </file>
 
+<file path=ppt/slides/slide48.xml><?xml version="1.0" encoding="utf-8"?>
+<p:sld xmlns:p="http://schemas.openxmlformats.org/presentationml/2006/main">
+  <p:cSld>
+    <p:bg>
+      <p:bgPr>
+        <a:solidFill xmlns:a="http://schemas.openxmlformats.org/drawingml/2006/main">
+          <a:srgbClr val="FFFFFF"/>
+        </a:solidFill>
+      </p:bgPr>
+    </p:bg>
+    <p:spTree>
+      <p:nvGrpSpPr>
+        <p:cNvPr id="1" name=""/>
+        <p:cNvGrpSpPr/>
+        <p:nvPr/>
+      </p:nvGrpSpPr>
+      <p:grpSpPr>
+        <a:xfrm xmlns:a="http://schemas.openxmlformats.org/drawingml/2006/main"/>
+      </p:grpSpPr>
+      <p:sp>
+        <p:nvSpPr>
+          <p:cNvPr id="7" name="">
+            <a:extLst xmlns:a="http://schemas.openxmlformats.org/drawingml/2006/main">
+              <a:ext uri="{FF2B5EF4-FFF2-40B4-BE49-F238E27FC236}">
+                <a16:creationId xmlns:a16="http://schemas.microsoft.com/office/drawing/2014/main" id="{52BC51E6-6E84-4C1E-8D3E-0D1B2ADE0DA7}"/>
+              </a:ext>
+            </a:extLst>
+          </p:cNvPr>
+          <p:cNvSpPr>
+            <a:spLocks xmlns:a="http://schemas.openxmlformats.org/drawingml/2006/main" noGrp="1"/>
+          </p:cNvSpPr>
+          <p:nvPr/>
+        </p:nvSpPr>
+        <p:spPr>
+          <a:xfrm xmlns:a="http://schemas.openxmlformats.org/drawingml/2006/main">
+            <a:off x="457200" y="400050"/>
+            <a:ext cx="4000500" cy="266700"/>
+          </a:xfrm>
+          <a:prstGeom xmlns:a="http://schemas.openxmlformats.org/drawingml/2006/main" prst="rect">
+            <a:avLst/>
+          </a:prstGeom>
+          <a:noFill xmlns:a="http://schemas.openxmlformats.org/drawingml/2006/main"/>
+          <a:ln xmlns:a="http://schemas.openxmlformats.org/drawingml/2006/main" w="0">
+            <a:noFill/>
+            <a:prstDash val="solid"/>
+          </a:ln>
+        </p:spPr>
+        <p:txBody>
+          <a:bodyPr xmlns:a="http://schemas.openxmlformats.org/drawingml/2006/main" wrap="square" lIns="0" tIns="0" rIns="0" bIns="0" anchor="t">
+            <a:normAutofit fontScale="100000"/>
+          </a:bodyPr>
+          <a:lstStyle xmlns:a="http://schemas.openxmlformats.org/drawingml/2006/main"/>
+          <a:p xmlns:a="http://schemas.openxmlformats.org/drawingml/2006/main">
+            <a:pPr algn="l">
+              <a:buNone/>
+              <a:defRPr sz="1350" b="1">
+                <a:solidFill>
+                  <a:srgbClr val="667384"/>
+                </a:solidFill>
+                <a:latin typeface="Arial"/>
+                <a:ea typeface="Arial"/>
+                <a:cs typeface="Arial"/>
+              </a:defRPr>
+            </a:pPr>
+            <a:r>
+              <a:rPr sz="1350" b="1">
+                <a:solidFill>
+                  <a:srgbClr val="667384"/>
+                </a:solidFill>
+                <a:latin typeface="Arial"/>
+                <a:ea typeface="Arial"/>
+                <a:cs typeface="Arial"/>
+              </a:rPr>
+              <a:t>CROSS-ASSET PRIOR RETURNS</a:t>
+            </a:r>
+          </a:p>
+        </p:txBody>
+      </p:sp>
+      <p:sp>
+        <p:nvSpPr>
+          <p:cNvPr id="2" name="">
+            <a:extLst xmlns:a="http://schemas.openxmlformats.org/drawingml/2006/main">
+              <a:ext uri="{FF2B5EF4-FFF2-40B4-BE49-F238E27FC236}">
+                <a16:creationId xmlns:a16="http://schemas.microsoft.com/office/drawing/2014/main" id="{D5FBD659-315B-4902-8A62-88F3460EC6CC}"/>
+              </a:ext>
+            </a:extLst>
+          </p:cNvPr>
+          <p:cNvSpPr>
+            <a:spLocks xmlns:a="http://schemas.openxmlformats.org/drawingml/2006/main" noGrp="1"/>
+          </p:cNvSpPr>
+          <p:nvPr/>
+        </p:nvSpPr>
+        <p:spPr>
+          <a:xfrm xmlns:a="http://schemas.openxmlformats.org/drawingml/2006/main">
+            <a:off x="457200" y="1562100"/>
+            <a:ext cx="10763250" cy="1809750"/>
+          </a:xfrm>
+          <a:prstGeom xmlns:a="http://schemas.openxmlformats.org/drawingml/2006/main" prst="rect">
+            <a:avLst/>
+          </a:prstGeom>
+          <a:noFill xmlns:a="http://schemas.openxmlformats.org/drawingml/2006/main"/>
+          <a:ln xmlns:a="http://schemas.openxmlformats.org/drawingml/2006/main" w="0">
+            <a:noFill/>
+            <a:prstDash val="solid"/>
+          </a:ln>
+        </p:spPr>
+        <p:txBody>
+          <a:bodyPr xmlns:a="http://schemas.openxmlformats.org/drawingml/2006/main" wrap="square" lIns="0" tIns="0" rIns="0" bIns="0" anchor="t">
+            <a:noAutofit/>
+          </a:bodyPr>
+          <a:lstStyle xmlns:a="http://schemas.openxmlformats.org/drawingml/2006/main"/>
+          <a:p xmlns:a="http://schemas.openxmlformats.org/drawingml/2006/main">
+            <a:pPr algn="l">
+              <a:buNone/>
+              <a:defRPr sz="5100" b="1">
+                <a:solidFill>
+                  <a:srgbClr val="000000"/>
+                </a:solidFill>
+                <a:latin typeface="Arial"/>
+                <a:ea typeface="Arial"/>
+                <a:cs typeface="Arial"/>
+              </a:defRPr>
+            </a:pPr>
+            <a:r>
+              <a:rPr sz="5100" b="1">
+                <a:solidFill>
+                  <a:srgbClr val="000000"/>
+                </a:solidFill>
+                <a:latin typeface="Arial"/>
+                <a:ea typeface="Arial"/>
+                <a:cs typeface="Arial"/>
+              </a:rPr>
+              <a:t>Can prior market return foreshadow TSLA?</a:t>
+            </a:r>
+          </a:p>
+        </p:txBody>
+      </p:sp>
+      <p:sp>
+        <p:nvSpPr>
+          <p:cNvPr id="3" name="">
+            <a:extLst xmlns:a="http://schemas.openxmlformats.org/drawingml/2006/main">
+              <a:ext uri="{FF2B5EF4-FFF2-40B4-BE49-F238E27FC236}">
+                <a16:creationId xmlns:a16="http://schemas.microsoft.com/office/drawing/2014/main" id="{108F8D12-F796-4339-A513-DF003E6E5740}"/>
+              </a:ext>
+            </a:extLst>
+          </p:cNvPr>
+          <p:cNvSpPr>
+            <a:spLocks xmlns:a="http://schemas.openxmlformats.org/drawingml/2006/main" noGrp="1"/>
+          </p:cNvSpPr>
+          <p:nvPr/>
+        </p:nvSpPr>
+        <p:spPr>
+          <a:xfrm xmlns:a="http://schemas.openxmlformats.org/drawingml/2006/main">
+            <a:off x="457200" y="3714750"/>
+            <a:ext cx="1257300" cy="76200"/>
+          </a:xfrm>
+          <a:prstGeom xmlns:a="http://schemas.openxmlformats.org/drawingml/2006/main" prst="rect">
+            <a:avLst/>
+          </a:prstGeom>
+          <a:solidFill xmlns:a="http://schemas.openxmlformats.org/drawingml/2006/main">
+            <a:srgbClr val="3D8DFF"/>
+          </a:solidFill>
+          <a:ln xmlns:a="http://schemas.openxmlformats.org/drawingml/2006/main" w="0">
+            <a:solidFill>
+              <a:srgbClr val="3D8DFF"/>
+            </a:solidFill>
+            <a:prstDash val="solid"/>
+          </a:ln>
+        </p:spPr>
+      </p:sp>
+      <p:sp>
+        <p:nvSpPr>
+          <p:cNvPr id="4" name="">
+            <a:extLst xmlns:a="http://schemas.openxmlformats.org/drawingml/2006/main">
+              <a:ext uri="{FF2B5EF4-FFF2-40B4-BE49-F238E27FC236}">
+                <a16:creationId xmlns:a16="http://schemas.microsoft.com/office/drawing/2014/main" id="{8345830B-E6EE-4175-94D1-A484215C8069}"/>
+              </a:ext>
+            </a:extLst>
+          </p:cNvPr>
+          <p:cNvSpPr>
+            <a:spLocks xmlns:a="http://schemas.openxmlformats.org/drawingml/2006/main" noGrp="1"/>
+          </p:cNvSpPr>
+          <p:nvPr/>
+        </p:nvSpPr>
+        <p:spPr>
+          <a:xfrm xmlns:a="http://schemas.openxmlformats.org/drawingml/2006/main">
+            <a:off x="457200" y="4171950"/>
+            <a:ext cx="9239250" cy="685800"/>
+          </a:xfrm>
+          <a:prstGeom xmlns:a="http://schemas.openxmlformats.org/drawingml/2006/main" prst="rect">
+            <a:avLst/>
+          </a:prstGeom>
+          <a:noFill xmlns:a="http://schemas.openxmlformats.org/drawingml/2006/main"/>
+          <a:ln xmlns:a="http://schemas.openxmlformats.org/drawingml/2006/main" w="0">
+            <a:noFill/>
+            <a:prstDash val="solid"/>
+          </a:ln>
+        </p:spPr>
+        <p:txBody>
+          <a:bodyPr xmlns:a="http://schemas.openxmlformats.org/drawingml/2006/main" wrap="square" lIns="0" tIns="0" rIns="0" bIns="0" anchor="t">
+            <a:normAutofit fontScale="88235"/>
+          </a:bodyPr>
+          <a:lstStyle xmlns:a="http://schemas.openxmlformats.org/drawingml/2006/main"/>
+          <a:p xmlns:a="http://schemas.openxmlformats.org/drawingml/2006/main">
+            <a:pPr algn="l">
+              <a:buNone/>
+              <a:defRPr sz="2550" b="0">
+                <a:solidFill>
+                  <a:srgbClr val="273548"/>
+                </a:solidFill>
+                <a:latin typeface="Arial"/>
+                <a:ea typeface="Arial"/>
+                <a:cs typeface="Arial"/>
+              </a:defRPr>
+            </a:pPr>
+            <a:r>
+              <a:rPr sz="2550" b="0">
+                <a:solidFill>
+                  <a:srgbClr val="273548"/>
+                </a:solidFill>
+                <a:latin typeface="Arial"/>
+                <a:ea typeface="Arial"/>
+                <a:cs typeface="Arial"/>
+              </a:rPr>
+              <a:t>Compare QQQ and SPY return windows ending at the TSLA anchor close.</a:t>
+            </a:r>
+          </a:p>
+        </p:txBody>
+      </p:sp>
+      <p:sp>
+        <p:nvSpPr>
+          <p:cNvPr id="5" name="">
+            <a:extLst xmlns:a="http://schemas.openxmlformats.org/drawingml/2006/main">
+              <a:ext uri="{FF2B5EF4-FFF2-40B4-BE49-F238E27FC236}">
+                <a16:creationId xmlns:a16="http://schemas.microsoft.com/office/drawing/2014/main" id="{93B3AAD9-855C-47E7-9BA0-F94B71F3F42B}"/>
+              </a:ext>
+            </a:extLst>
+          </p:cNvPr>
+          <p:cNvSpPr>
+            <a:spLocks xmlns:a="http://schemas.openxmlformats.org/drawingml/2006/main" noGrp="1"/>
+          </p:cNvSpPr>
+          <p:nvPr/>
+        </p:nvSpPr>
+        <p:spPr>
+          <a:xfrm xmlns:a="http://schemas.openxmlformats.org/drawingml/2006/main">
+            <a:off x="457200" y="5429250"/>
+            <a:ext cx="10191750" cy="609600"/>
+          </a:xfrm>
+          <a:prstGeom xmlns:a="http://schemas.openxmlformats.org/drawingml/2006/main" prst="rect">
+            <a:avLst/>
+          </a:prstGeom>
+          <a:noFill xmlns:a="http://schemas.openxmlformats.org/drawingml/2006/main"/>
+          <a:ln xmlns:a="http://schemas.openxmlformats.org/drawingml/2006/main" w="0">
+            <a:noFill/>
+            <a:prstDash val="solid"/>
+          </a:ln>
+        </p:spPr>
+        <p:txBody>
+          <a:bodyPr xmlns:a="http://schemas.openxmlformats.org/drawingml/2006/main" wrap="square" lIns="0" tIns="0" rIns="0" bIns="0" anchor="t">
+            <a:normAutofit fontScale="100000"/>
+          </a:bodyPr>
+          <a:lstStyle xmlns:a="http://schemas.openxmlformats.org/drawingml/2006/main"/>
+          <a:p xmlns:a="http://schemas.openxmlformats.org/drawingml/2006/main">
+            <a:pPr algn="l">
+              <a:buNone/>
+              <a:defRPr sz="1650" b="0">
+                <a:solidFill>
+                  <a:srgbClr val="667384"/>
+                </a:solidFill>
+                <a:latin typeface="Arial"/>
+                <a:ea typeface="Arial"/>
+                <a:cs typeface="Arial"/>
+              </a:defRPr>
+            </a:pPr>
+            <a:r>
+              <a:rPr sz="1650" b="0">
+                <a:solidFill>
+                  <a:srgbClr val="667384"/>
+                </a:solidFill>
+                <a:latin typeface="Arial"/>
+                <a:ea typeface="Arial"/>
+                <a:cs typeface="Arial"/>
+              </a:rPr>
+              <a:t>Same TSLA target, sample, horizons, timing boundary, and uncertainty. No relative-strength model.</a:t>
+            </a:r>
+          </a:p>
+        </p:txBody>
+      </p:sp>
+      <p:sp>
+        <p:nvSpPr>
+          <p:cNvPr id="6" name="">
+            <a:extLst xmlns:a="http://schemas.openxmlformats.org/drawingml/2006/main">
+              <a:ext uri="{FF2B5EF4-FFF2-40B4-BE49-F238E27FC236}">
+                <a16:creationId xmlns:a16="http://schemas.microsoft.com/office/drawing/2014/main" id="{C26E2559-6393-4E7F-A448-E0578397EEA2}"/>
+              </a:ext>
+            </a:extLst>
+          </p:cNvPr>
+          <p:cNvSpPr>
+            <a:spLocks xmlns:a="http://schemas.openxmlformats.org/drawingml/2006/main" noGrp="1"/>
+          </p:cNvSpPr>
+          <p:nvPr/>
+        </p:nvSpPr>
+        <p:spPr>
+          <a:xfrm xmlns:a="http://schemas.openxmlformats.org/drawingml/2006/main">
+            <a:off x="11239500" y="6496050"/>
+            <a:ext cx="495300" cy="190500"/>
+          </a:xfrm>
+          <a:prstGeom xmlns:a="http://schemas.openxmlformats.org/drawingml/2006/main" prst="rect">
+            <a:avLst/>
+          </a:prstGeom>
+          <a:noFill xmlns:a="http://schemas.openxmlformats.org/drawingml/2006/main"/>
+          <a:ln xmlns:a="http://schemas.openxmlformats.org/drawingml/2006/main" w="0">
+            <a:noFill/>
+            <a:prstDash val="solid"/>
+          </a:ln>
+        </p:spPr>
+        <p:txBody>
+          <a:bodyPr xmlns:a="http://schemas.openxmlformats.org/drawingml/2006/main" wrap="square" lIns="0" tIns="0" rIns="0" bIns="0" anchor="t">
+            <a:normAutofit fontScale="100000"/>
+          </a:bodyPr>
+          <a:lstStyle xmlns:a="http://schemas.openxmlformats.org/drawingml/2006/main"/>
+          <a:p xmlns:a="http://schemas.openxmlformats.org/drawingml/2006/main">
+            <a:pPr algn="r">
+              <a:buNone/>
+              <a:defRPr sz="1050" b="0">
+                <a:solidFill>
+                  <a:srgbClr val="667384"/>
+                </a:solidFill>
+                <a:latin typeface="Arial"/>
+                <a:ea typeface="Arial"/>
+                <a:cs typeface="Arial"/>
+              </a:defRPr>
+            </a:pPr>
+            <a:r>
+              <a:rPr sz="1050" b="0">
+                <a:solidFill>
+                  <a:srgbClr val="667384"/>
+                </a:solidFill>
+                <a:latin typeface="Arial"/>
+                <a:ea typeface="Arial"/>
+                <a:cs typeface="Arial"/>
+              </a:rPr>
+              <a:t>48</a:t>
+            </a:r>
+          </a:p>
+        </p:txBody>
+      </p:sp>
+    </p:spTree>
+    <p:extLst>
+      <p:ext uri="{BB962C8B-B14F-4D97-AF65-F5344CB8AC3E}">
+        <p14:creationId xmlns:p14="http://schemas.microsoft.com/office/powerpoint/2010/main" val="80248067"/>
+      </p:ext>
+    </p:extLst>
+  </p:cSld>
+</p:sld>
+</file>
+
+<file path=ppt/slides/slide49.xml><?xml version="1.0" encoding="utf-8"?>
+<p:sld xmlns:p="http://schemas.openxmlformats.org/presentationml/2006/main">
+  <p:cSld>
+    <p:bg>
+      <p:bgPr>
+        <a:solidFill xmlns:a="http://schemas.openxmlformats.org/drawingml/2006/main">
+          <a:srgbClr val="FFFFFF"/>
+        </a:solidFill>
+      </p:bgPr>
+    </p:bg>
+    <p:spTree>
+      <p:nvGrpSpPr>
+        <p:cNvPr id="1" name=""/>
+        <p:cNvGrpSpPr/>
+        <p:nvPr/>
+      </p:nvGrpSpPr>
+      <p:grpSpPr>
+        <a:xfrm xmlns:a="http://schemas.openxmlformats.org/drawingml/2006/main"/>
+      </p:grpSpPr>
+      <p:sp>
+        <p:nvSpPr>
+          <p:cNvPr id="30" name="section-3">
+            <a:extLst xmlns:a="http://schemas.openxmlformats.org/drawingml/2006/main">
+              <a:ext uri="{FF2B5EF4-FFF2-40B4-BE49-F238E27FC236}">
+                <a16:creationId xmlns:a16="http://schemas.microsoft.com/office/drawing/2014/main" id="{D21E8F50-BA1C-4536-B715-AAD5A74ED82B}"/>
+              </a:ext>
+            </a:extLst>
+          </p:cNvPr>
+          <p:cNvSpPr>
+            <a:spLocks xmlns:a="http://schemas.openxmlformats.org/drawingml/2006/main" noGrp="1"/>
+          </p:cNvSpPr>
+          <p:nvPr/>
+        </p:nvSpPr>
+        <p:spPr>
+          <a:xfrm xmlns:a="http://schemas.openxmlformats.org/drawingml/2006/main">
+            <a:off x="457200" y="228600"/>
+            <a:ext cx="4191000" cy="228600"/>
+          </a:xfrm>
+          <a:prstGeom xmlns:a="http://schemas.openxmlformats.org/drawingml/2006/main" prst="rect">
+            <a:avLst/>
+          </a:prstGeom>
+          <a:noFill xmlns:a="http://schemas.openxmlformats.org/drawingml/2006/main"/>
+          <a:ln xmlns:a="http://schemas.openxmlformats.org/drawingml/2006/main" w="0">
+            <a:noFill/>
+            <a:prstDash val="solid"/>
+          </a:ln>
+        </p:spPr>
+        <p:txBody>
+          <a:bodyPr xmlns:a="http://schemas.openxmlformats.org/drawingml/2006/main" wrap="square" lIns="0" tIns="0" rIns="0" bIns="0" anchor="t">
+            <a:normAutofit fontScale="100000"/>
+          </a:bodyPr>
+          <a:lstStyle xmlns:a="http://schemas.openxmlformats.org/drawingml/2006/main"/>
+          <a:p xmlns:a="http://schemas.openxmlformats.org/drawingml/2006/main">
+            <a:pPr algn="l">
+              <a:buNone/>
+              <a:defRPr sz="1200" b="1">
+                <a:solidFill>
+                  <a:srgbClr val="667384"/>
+                </a:solidFill>
+                <a:latin typeface="Arial"/>
+                <a:ea typeface="Arial"/>
+                <a:cs typeface="Arial"/>
+              </a:defRPr>
+            </a:pPr>
+            <a:r>
+              <a:rPr sz="1200" b="1">
+                <a:solidFill>
+                  <a:srgbClr val="667384"/>
+                </a:solidFill>
+                <a:latin typeface="Arial"/>
+                <a:ea typeface="Arial"/>
+                <a:cs typeface="Arial"/>
+              </a:rPr>
+              <a:t>TSLA DESCRIPTIVE MICROSCOPE</a:t>
+            </a:r>
+          </a:p>
+        </p:txBody>
+      </p:sp>
+      <p:sp>
+        <p:nvSpPr>
+          <p:cNvPr id="2" name="title-3">
+            <a:extLst xmlns:a="http://schemas.openxmlformats.org/drawingml/2006/main">
+              <a:ext uri="{FF2B5EF4-FFF2-40B4-BE49-F238E27FC236}">
+                <a16:creationId xmlns:a16="http://schemas.microsoft.com/office/drawing/2014/main" id="{622D00AB-54E7-40F8-BC73-9A3D2344F481}"/>
+              </a:ext>
+            </a:extLst>
+          </p:cNvPr>
+          <p:cNvSpPr>
+            <a:spLocks xmlns:a="http://schemas.openxmlformats.org/drawingml/2006/main" noGrp="1"/>
+          </p:cNvSpPr>
+          <p:nvPr/>
+        </p:nvSpPr>
+        <p:spPr>
+          <a:xfrm xmlns:a="http://schemas.openxmlformats.org/drawingml/2006/main">
+            <a:off x="457200" y="533400"/>
+            <a:ext cx="11277600" cy="628650"/>
+          </a:xfrm>
+          <a:prstGeom xmlns:a="http://schemas.openxmlformats.org/drawingml/2006/main" prst="rect">
+            <a:avLst/>
+          </a:prstGeom>
+          <a:noFill xmlns:a="http://schemas.openxmlformats.org/drawingml/2006/main"/>
+          <a:ln xmlns:a="http://schemas.openxmlformats.org/drawingml/2006/main" w="0">
+            <a:noFill/>
+            <a:prstDash val="solid"/>
+          </a:ln>
+        </p:spPr>
+        <p:txBody>
+          <a:bodyPr xmlns:a="http://schemas.openxmlformats.org/drawingml/2006/main" wrap="square" lIns="0" tIns="0" rIns="0" bIns="0" anchor="t">
+            <a:normAutofit fontScale="99580"/>
+          </a:bodyPr>
+          <a:lstStyle xmlns:a="http://schemas.openxmlformats.org/drawingml/2006/main"/>
+          <a:p xmlns:a="http://schemas.openxmlformats.org/drawingml/2006/main">
+            <a:pPr algn="l">
+              <a:buNone/>
+              <a:defRPr sz="3525" b="1">
+                <a:solidFill>
+                  <a:srgbClr val="000000"/>
+                </a:solidFill>
+                <a:latin typeface="Arial"/>
+                <a:ea typeface="Arial"/>
+                <a:cs typeface="Arial"/>
+              </a:defRPr>
+            </a:pPr>
+            <a:r>
+              <a:rPr sz="3525" b="1">
+                <a:solidFill>
+                  <a:srgbClr val="000000"/>
+                </a:solidFill>
+                <a:latin typeface="Arial"/>
+                <a:ea typeface="Arial"/>
+                <a:cs typeface="Arial"/>
+              </a:rPr>
+              <a:t>Prior market return ends before TSLA's future begins</a:t>
+            </a:r>
+          </a:p>
+        </p:txBody>
+      </p:sp>
+      <p:sp>
+        <p:nvSpPr>
+          <p:cNvPr id="3" name="">
+            <a:extLst xmlns:a="http://schemas.openxmlformats.org/drawingml/2006/main">
+              <a:ext uri="{FF2B5EF4-FFF2-40B4-BE49-F238E27FC236}">
+                <a16:creationId xmlns:a16="http://schemas.microsoft.com/office/drawing/2014/main" id="{C3977435-894D-461F-A4F7-CD91DF8A8A55}"/>
+              </a:ext>
+            </a:extLst>
+          </p:cNvPr>
+          <p:cNvSpPr>
+            <a:spLocks xmlns:a="http://schemas.openxmlformats.org/drawingml/2006/main" noGrp="1"/>
+          </p:cNvSpPr>
+          <p:nvPr/>
+        </p:nvSpPr>
+        <p:spPr>
+          <a:xfrm xmlns:a="http://schemas.openxmlformats.org/drawingml/2006/main">
+            <a:off x="457200" y="1200150"/>
+            <a:ext cx="11277600" cy="19050"/>
+          </a:xfrm>
+          <a:prstGeom xmlns:a="http://schemas.openxmlformats.org/drawingml/2006/main" prst="rect">
+            <a:avLst/>
+          </a:prstGeom>
+          <a:solidFill xmlns:a="http://schemas.openxmlformats.org/drawingml/2006/main">
+            <a:srgbClr val="B8BCC4"/>
+          </a:solidFill>
+          <a:ln xmlns:a="http://schemas.openxmlformats.org/drawingml/2006/main" w="0">
+            <a:solidFill>
+              <a:srgbClr val="B8BCC4"/>
+            </a:solidFill>
+            <a:prstDash val="solid"/>
+          </a:ln>
+        </p:spPr>
+      </p:sp>
+      <p:sp>
+        <p:nvSpPr>
+          <p:cNvPr id="4" name="footer-left-3">
+            <a:extLst xmlns:a="http://schemas.openxmlformats.org/drawingml/2006/main">
+              <a:ext uri="{FF2B5EF4-FFF2-40B4-BE49-F238E27FC236}">
+                <a16:creationId xmlns:a16="http://schemas.microsoft.com/office/drawing/2014/main" id="{FC53CCFE-82C8-49A0-BC48-206B3BC8CC1B}"/>
+              </a:ext>
+            </a:extLst>
+          </p:cNvPr>
+          <p:cNvSpPr>
+            <a:spLocks xmlns:a="http://schemas.openxmlformats.org/drawingml/2006/main" noGrp="1"/>
+          </p:cNvSpPr>
+          <p:nvPr/>
+        </p:nvSpPr>
+        <p:spPr>
+          <a:xfrm xmlns:a="http://schemas.openxmlformats.org/drawingml/2006/main">
+            <a:off x="457200" y="6515100"/>
+            <a:ext cx="3429000" cy="171450"/>
+          </a:xfrm>
+          <a:prstGeom xmlns:a="http://schemas.openxmlformats.org/drawingml/2006/main" prst="rect">
+            <a:avLst/>
+          </a:prstGeom>
+          <a:noFill xmlns:a="http://schemas.openxmlformats.org/drawingml/2006/main"/>
+          <a:ln xmlns:a="http://schemas.openxmlformats.org/drawingml/2006/main" w="0">
+            <a:noFill/>
+            <a:prstDash val="solid"/>
+          </a:ln>
+        </p:spPr>
+        <p:txBody>
+          <a:bodyPr xmlns:a="http://schemas.openxmlformats.org/drawingml/2006/main" wrap="square" lIns="0" tIns="0" rIns="0" bIns="0" anchor="t">
+            <a:normAutofit fontScale="100000"/>
+          </a:bodyPr>
+          <a:lstStyle xmlns:a="http://schemas.openxmlformats.org/drawingml/2006/main"/>
+          <a:p xmlns:a="http://schemas.openxmlformats.org/drawingml/2006/main">
+            <a:pPr algn="l">
+              <a:buNone/>
+              <a:defRPr sz="1050" b="0">
+                <a:solidFill>
+                  <a:srgbClr val="667384"/>
+                </a:solidFill>
+                <a:latin typeface="Arial"/>
+                <a:ea typeface="Arial"/>
+                <a:cs typeface="Arial"/>
+              </a:defRPr>
+            </a:pPr>
+            <a:r>
+              <a:rPr sz="1050" b="0">
+                <a:solidFill>
+                  <a:srgbClr val="667384"/>
+                </a:solidFill>
+                <a:latin typeface="Arial"/>
+                <a:ea typeface="Arial"/>
+                <a:cs typeface="Arial"/>
+              </a:rPr>
+              <a:t>Adjusted daily TSLA | 2018-2023</a:t>
+            </a:r>
+          </a:p>
+        </p:txBody>
+      </p:sp>
+      <p:sp>
+        <p:nvSpPr>
+          <p:cNvPr id="5" name="footer-number-3">
+            <a:extLst xmlns:a="http://schemas.openxmlformats.org/drawingml/2006/main">
+              <a:ext uri="{FF2B5EF4-FFF2-40B4-BE49-F238E27FC236}">
+                <a16:creationId xmlns:a16="http://schemas.microsoft.com/office/drawing/2014/main" id="{B9F045FD-2505-4635-89F0-EDCD31EF4080}"/>
+              </a:ext>
+            </a:extLst>
+          </p:cNvPr>
+          <p:cNvSpPr>
+            <a:spLocks xmlns:a="http://schemas.openxmlformats.org/drawingml/2006/main" noGrp="1"/>
+          </p:cNvSpPr>
+          <p:nvPr/>
+        </p:nvSpPr>
+        <p:spPr>
+          <a:xfrm xmlns:a="http://schemas.openxmlformats.org/drawingml/2006/main">
+            <a:off x="11239500" y="6496050"/>
+            <a:ext cx="495300" cy="190500"/>
+          </a:xfrm>
+          <a:prstGeom xmlns:a="http://schemas.openxmlformats.org/drawingml/2006/main" prst="rect">
+            <a:avLst/>
+          </a:prstGeom>
+          <a:noFill xmlns:a="http://schemas.openxmlformats.org/drawingml/2006/main"/>
+          <a:ln xmlns:a="http://schemas.openxmlformats.org/drawingml/2006/main" w="0">
+            <a:noFill/>
+            <a:prstDash val="solid"/>
+          </a:ln>
+        </p:spPr>
+        <p:txBody>
+          <a:bodyPr xmlns:a="http://schemas.openxmlformats.org/drawingml/2006/main" wrap="square" lIns="0" tIns="0" rIns="0" bIns="0" anchor="t">
+            <a:normAutofit fontScale="100000"/>
+          </a:bodyPr>
+          <a:lstStyle xmlns:a="http://schemas.openxmlformats.org/drawingml/2006/main"/>
+          <a:p xmlns:a="http://schemas.openxmlformats.org/drawingml/2006/main">
+            <a:pPr algn="r">
+              <a:buNone/>
+              <a:defRPr sz="1050" b="0">
+                <a:solidFill>
+                  <a:srgbClr val="667384"/>
+                </a:solidFill>
+                <a:latin typeface="Arial"/>
+                <a:ea typeface="Arial"/>
+                <a:cs typeface="Arial"/>
+              </a:defRPr>
+            </a:pPr>
+            <a:r>
+              <a:rPr sz="1050" b="0">
+                <a:solidFill>
+                  <a:srgbClr val="667384"/>
+                </a:solidFill>
+                <a:latin typeface="Arial"/>
+                <a:ea typeface="Arial"/>
+                <a:cs typeface="Arial"/>
+              </a:rPr>
+              <a:t>49</a:t>
+            </a:r>
+          </a:p>
+        </p:txBody>
+      </p:sp>
+      <p:sp>
+        <p:nvSpPr>
+          <p:cNvPr id="6" name="">
+            <a:extLst xmlns:a="http://schemas.openxmlformats.org/drawingml/2006/main">
+              <a:ext uri="{FF2B5EF4-FFF2-40B4-BE49-F238E27FC236}">
+                <a16:creationId xmlns:a16="http://schemas.microsoft.com/office/drawing/2014/main" id="{551133C9-969B-4370-A80C-D9B73CA522F0}"/>
+              </a:ext>
+            </a:extLst>
+          </p:cNvPr>
+          <p:cNvSpPr>
+            <a:spLocks xmlns:a="http://schemas.openxmlformats.org/drawingml/2006/main" noGrp="1"/>
+          </p:cNvSpPr>
+          <p:nvPr/>
+        </p:nvSpPr>
+        <p:spPr>
+          <a:xfrm xmlns:a="http://schemas.openxmlformats.org/drawingml/2006/main">
+            <a:off x="628650" y="1752600"/>
+            <a:ext cx="5429250" cy="762000"/>
+          </a:xfrm>
+          <a:prstGeom xmlns:a="http://schemas.openxmlformats.org/drawingml/2006/main" prst="rect">
+            <a:avLst/>
+          </a:prstGeom>
+          <a:noFill xmlns:a="http://schemas.openxmlformats.org/drawingml/2006/main"/>
+          <a:ln xmlns:a="http://schemas.openxmlformats.org/drawingml/2006/main" w="0">
+            <a:noFill/>
+            <a:prstDash val="solid"/>
+          </a:ln>
+        </p:spPr>
+        <p:txBody>
+          <a:bodyPr xmlns:a="http://schemas.openxmlformats.org/drawingml/2006/main" wrap="square" lIns="0" tIns="0" rIns="0" bIns="0" anchor="t">
+            <a:normAutofit fontScale="84485"/>
+          </a:bodyPr>
+          <a:lstStyle xmlns:a="http://schemas.openxmlformats.org/drawingml/2006/main"/>
+          <a:p xmlns:a="http://schemas.openxmlformats.org/drawingml/2006/main">
+            <a:pPr algn="l">
+              <a:buNone/>
+              <a:defRPr sz="3300" b="1">
+                <a:solidFill>
+                  <a:srgbClr val="3D8DFF"/>
+                </a:solidFill>
+                <a:latin typeface="Arial"/>
+                <a:ea typeface="Arial"/>
+                <a:cs typeface="Arial"/>
+              </a:defRPr>
+            </a:pPr>
+            <a:r>
+              <a:rPr sz="3300" b="1">
+                <a:solidFill>
+                  <a:srgbClr val="3D8DFF"/>
+                </a:solidFill>
+                <a:latin typeface="Arial"/>
+                <a:ea typeface="Arial"/>
+                <a:cs typeface="Arial"/>
+              </a:rPr>
+              <a:t>QQQ / SPY R−(p)  →  TSLA R+(f)</a:t>
+            </a:r>
+          </a:p>
+        </p:txBody>
+      </p:sp>
+      <p:sp>
+        <p:nvSpPr>
+          <p:cNvPr id="7" name="">
+            <a:extLst xmlns:a="http://schemas.openxmlformats.org/drawingml/2006/main">
+              <a:ext uri="{FF2B5EF4-FFF2-40B4-BE49-F238E27FC236}">
+                <a16:creationId xmlns:a16="http://schemas.microsoft.com/office/drawing/2014/main" id="{82D8EB97-B391-424E-82EB-0DEEC881C286}"/>
+              </a:ext>
+            </a:extLst>
+          </p:cNvPr>
+          <p:cNvSpPr>
+            <a:spLocks xmlns:a="http://schemas.openxmlformats.org/drawingml/2006/main" noGrp="1"/>
+          </p:cNvSpPr>
+          <p:nvPr/>
+        </p:nvSpPr>
+        <p:spPr>
+          <a:xfrm xmlns:a="http://schemas.openxmlformats.org/drawingml/2006/main">
+            <a:off x="628650" y="2724150"/>
+            <a:ext cx="5048250" cy="990600"/>
+          </a:xfrm>
+          <a:prstGeom xmlns:a="http://schemas.openxmlformats.org/drawingml/2006/main" prst="rect">
+            <a:avLst/>
+          </a:prstGeom>
+          <a:noFill xmlns:a="http://schemas.openxmlformats.org/drawingml/2006/main"/>
+          <a:ln xmlns:a="http://schemas.openxmlformats.org/drawingml/2006/main" w="0">
+            <a:noFill/>
+            <a:prstDash val="solid"/>
+          </a:ln>
+        </p:spPr>
+        <p:txBody>
+          <a:bodyPr xmlns:a="http://schemas.openxmlformats.org/drawingml/2006/main" wrap="square" lIns="0" tIns="0" rIns="0" bIns="0" anchor="t">
+            <a:normAutofit fontScale="100000"/>
+          </a:bodyPr>
+          <a:lstStyle xmlns:a="http://schemas.openxmlformats.org/drawingml/2006/main"/>
+          <a:p xmlns:a="http://schemas.openxmlformats.org/drawingml/2006/main">
+            <a:pPr algn="l">
+              <a:buNone/>
+              <a:defRPr sz="1875" b="0">
+                <a:solidFill>
+                  <a:srgbClr val="273548"/>
+                </a:solidFill>
+                <a:latin typeface="Arial"/>
+                <a:ea typeface="Arial"/>
+                <a:cs typeface="Arial"/>
+              </a:defRPr>
+            </a:pPr>
+            <a:r>
+              <a:rPr sz="1875" b="0">
+                <a:solidFill>
+                  <a:srgbClr val="273548"/>
+                </a:solidFill>
+                <a:latin typeface="Arial"/>
+                <a:ea typeface="Arial"/>
+                <a:cs typeface="Arial"/>
+              </a:rPr>
+              <a:t>The market-return window ends at anchor close t. TSLA's following return begins after t—no return interval appears on both sides.</a:t>
+            </a:r>
+          </a:p>
+        </p:txBody>
+      </p:sp>
+      <p:sp>
+        <p:nvSpPr>
+          <p:cNvPr id="8" name="">
+            <a:extLst xmlns:a="http://schemas.openxmlformats.org/drawingml/2006/main">
+              <a:ext uri="{FF2B5EF4-FFF2-40B4-BE49-F238E27FC236}">
+                <a16:creationId xmlns:a16="http://schemas.microsoft.com/office/drawing/2014/main" id="{8FD10794-EB76-4BB0-B74E-31375B660ECD}"/>
+              </a:ext>
+            </a:extLst>
+          </p:cNvPr>
+          <p:cNvSpPr>
+            <a:spLocks xmlns:a="http://schemas.openxmlformats.org/drawingml/2006/main" noGrp="1"/>
+          </p:cNvSpPr>
+          <p:nvPr/>
+        </p:nvSpPr>
+        <p:spPr>
+          <a:xfrm xmlns:a="http://schemas.openxmlformats.org/drawingml/2006/main">
+            <a:off x="628650" y="4095750"/>
+            <a:ext cx="4953000" cy="1695450"/>
+          </a:xfrm>
+          <a:prstGeom xmlns:a="http://schemas.openxmlformats.org/drawingml/2006/main" prst="rect">
+            <a:avLst/>
+          </a:prstGeom>
+          <a:solidFill xmlns:a="http://schemas.openxmlformats.org/drawingml/2006/main">
+            <a:srgbClr val="EDEDED"/>
+          </a:solidFill>
+          <a:ln xmlns:a="http://schemas.openxmlformats.org/drawingml/2006/main" w="0">
+            <a:solidFill>
+              <a:srgbClr val="EDEDED"/>
+            </a:solidFill>
+            <a:prstDash val="solid"/>
+          </a:ln>
+        </p:spPr>
+      </p:sp>
+      <p:sp>
+        <p:nvSpPr>
+          <p:cNvPr id="9" name="">
+            <a:extLst xmlns:a="http://schemas.openxmlformats.org/drawingml/2006/main">
+              <a:ext uri="{FF2B5EF4-FFF2-40B4-BE49-F238E27FC236}">
+                <a16:creationId xmlns:a16="http://schemas.microsoft.com/office/drawing/2014/main" id="{E8834C39-6D46-429B-A2ED-F97A068A843A}"/>
+              </a:ext>
+            </a:extLst>
+          </p:cNvPr>
+          <p:cNvSpPr>
+            <a:spLocks xmlns:a="http://schemas.openxmlformats.org/drawingml/2006/main" noGrp="1"/>
+          </p:cNvSpPr>
+          <p:nvPr/>
+        </p:nvSpPr>
+        <p:spPr>
+          <a:xfrm xmlns:a="http://schemas.openxmlformats.org/drawingml/2006/main">
+            <a:off x="628650" y="4095750"/>
+            <a:ext cx="76200" cy="1695450"/>
+          </a:xfrm>
+          <a:prstGeom xmlns:a="http://schemas.openxmlformats.org/drawingml/2006/main" prst="rect">
+            <a:avLst/>
+          </a:prstGeom>
+          <a:solidFill xmlns:a="http://schemas.openxmlformats.org/drawingml/2006/main">
+            <a:srgbClr val="3D8DFF"/>
+          </a:solidFill>
+          <a:ln xmlns:a="http://schemas.openxmlformats.org/drawingml/2006/main" w="0">
+            <a:solidFill>
+              <a:srgbClr val="3D8DFF"/>
+            </a:solidFill>
+            <a:prstDash val="solid"/>
+          </a:ln>
+        </p:spPr>
+      </p:sp>
+      <p:sp>
+        <p:nvSpPr>
+          <p:cNvPr id="10" name="">
+            <a:extLst xmlns:a="http://schemas.openxmlformats.org/drawingml/2006/main">
+              <a:ext uri="{FF2B5EF4-FFF2-40B4-BE49-F238E27FC236}">
+                <a16:creationId xmlns:a16="http://schemas.microsoft.com/office/drawing/2014/main" id="{743D83BD-5D8C-4BCB-B02F-81EB74163C70}"/>
+              </a:ext>
+            </a:extLst>
+          </p:cNvPr>
+          <p:cNvSpPr>
+            <a:spLocks xmlns:a="http://schemas.openxmlformats.org/drawingml/2006/main" noGrp="1"/>
+          </p:cNvSpPr>
+          <p:nvPr/>
+        </p:nvSpPr>
+        <p:spPr>
+          <a:xfrm xmlns:a="http://schemas.openxmlformats.org/drawingml/2006/main">
+            <a:off x="895350" y="4267200"/>
+            <a:ext cx="4495800" cy="590550"/>
+          </a:xfrm>
+          <a:prstGeom xmlns:a="http://schemas.openxmlformats.org/drawingml/2006/main" prst="rect">
+            <a:avLst/>
+          </a:prstGeom>
+          <a:noFill xmlns:a="http://schemas.openxmlformats.org/drawingml/2006/main"/>
+          <a:ln xmlns:a="http://schemas.openxmlformats.org/drawingml/2006/main" w="0">
+            <a:noFill/>
+            <a:prstDash val="solid"/>
+          </a:ln>
+        </p:spPr>
+        <p:txBody>
+          <a:bodyPr xmlns:a="http://schemas.openxmlformats.org/drawingml/2006/main" wrap="square" lIns="0" tIns="0" rIns="0" bIns="0" anchor="t">
+            <a:normAutofit fontScale="100000"/>
+          </a:bodyPr>
+          <a:lstStyle xmlns:a="http://schemas.openxmlformats.org/drawingml/2006/main"/>
+          <a:p xmlns:a="http://schemas.openxmlformats.org/drawingml/2006/main">
+            <a:pPr algn="l">
+              <a:buNone/>
+              <a:defRPr sz="3225" b="1">
+                <a:solidFill>
+                  <a:srgbClr val="3D8DFF"/>
+                </a:solidFill>
+                <a:latin typeface="Arial"/>
+                <a:ea typeface="Arial"/>
+                <a:cs typeface="Arial"/>
+              </a:defRPr>
+            </a:pPr>
+            <a:r>
+              <a:rPr sz="3225" b="1">
+                <a:solidFill>
+                  <a:srgbClr val="3D8DFF"/>
+                </a:solidFill>
+                <a:latin typeface="Arial"/>
+                <a:ea typeface="Arial"/>
+                <a:cs typeface="Arial"/>
+              </a:rPr>
+              <a:t>2</a:t>
+            </a:r>
+          </a:p>
+        </p:txBody>
+      </p:sp>
+      <p:sp>
+        <p:nvSpPr>
+          <p:cNvPr id="11" name="">
+            <a:extLst xmlns:a="http://schemas.openxmlformats.org/drawingml/2006/main">
+              <a:ext uri="{FF2B5EF4-FFF2-40B4-BE49-F238E27FC236}">
+                <a16:creationId xmlns:a16="http://schemas.microsoft.com/office/drawing/2014/main" id="{ED88569D-B256-4A8E-9334-C068F39865EA}"/>
+              </a:ext>
+            </a:extLst>
+          </p:cNvPr>
+          <p:cNvSpPr>
+            <a:spLocks xmlns:a="http://schemas.openxmlformats.org/drawingml/2006/main" noGrp="1"/>
+          </p:cNvSpPr>
+          <p:nvPr/>
+        </p:nvSpPr>
+        <p:spPr>
+          <a:xfrm xmlns:a="http://schemas.openxmlformats.org/drawingml/2006/main">
+            <a:off x="895350" y="4933950"/>
+            <a:ext cx="4495800" cy="704850"/>
+          </a:xfrm>
+          <a:prstGeom xmlns:a="http://schemas.openxmlformats.org/drawingml/2006/main" prst="rect">
+            <a:avLst/>
+          </a:prstGeom>
+          <a:noFill xmlns:a="http://schemas.openxmlformats.org/drawingml/2006/main"/>
+          <a:ln xmlns:a="http://schemas.openxmlformats.org/drawingml/2006/main" w="0">
+            <a:noFill/>
+            <a:prstDash val="solid"/>
+          </a:ln>
+        </p:spPr>
+        <p:txBody>
+          <a:bodyPr xmlns:a="http://schemas.openxmlformats.org/drawingml/2006/main" wrap="square" lIns="0" tIns="0" rIns="0" bIns="0" anchor="t">
+            <a:normAutofit fontScale="100000"/>
+          </a:bodyPr>
+          <a:lstStyle xmlns:a="http://schemas.openxmlformats.org/drawingml/2006/main"/>
+          <a:p xmlns:a="http://schemas.openxmlformats.org/drawingml/2006/main">
+            <a:pPr algn="l">
+              <a:buNone/>
+              <a:defRPr sz="1350" b="0">
+                <a:solidFill>
+                  <a:srgbClr val="273548"/>
+                </a:solidFill>
+                <a:latin typeface="Arial"/>
+                <a:ea typeface="Arial"/>
+                <a:cs typeface="Arial"/>
+              </a:defRPr>
+            </a:pPr>
+            <a:r>
+              <a:rPr sz="1350" b="0">
+                <a:solidFill>
+                  <a:srgbClr val="273548"/>
+                </a:solidFill>
+                <a:latin typeface="Arial"/>
+                <a:ea typeface="Arial"/>
+                <a:cs typeface="Arial"/>
+              </a:rPr>
+              <a:t>separate prior-return authorities</a:t>
+            </a:r>
+          </a:p>
+        </p:txBody>
+      </p:sp>
+      <p:sp>
+        <p:nvSpPr>
+          <p:cNvPr id="12" name="">
+            <a:extLst xmlns:a="http://schemas.openxmlformats.org/drawingml/2006/main">
+              <a:ext uri="{FF2B5EF4-FFF2-40B4-BE49-F238E27FC236}">
+                <a16:creationId xmlns:a16="http://schemas.microsoft.com/office/drawing/2014/main" id="{1139CAED-155E-4498-A477-F11A6F4A02F8}"/>
+              </a:ext>
+            </a:extLst>
+          </p:cNvPr>
+          <p:cNvSpPr>
+            <a:spLocks xmlns:a="http://schemas.openxmlformats.org/drawingml/2006/main" noGrp="1"/>
+          </p:cNvSpPr>
+          <p:nvPr/>
+        </p:nvSpPr>
+        <p:spPr>
+          <a:xfrm xmlns:a="http://schemas.openxmlformats.org/drawingml/2006/main">
+            <a:off x="6667500" y="1676400"/>
+            <a:ext cx="4191000" cy="400050"/>
+          </a:xfrm>
+          <a:prstGeom xmlns:a="http://schemas.openxmlformats.org/drawingml/2006/main" prst="rect">
+            <a:avLst/>
+          </a:prstGeom>
+          <a:noFill xmlns:a="http://schemas.openxmlformats.org/drawingml/2006/main"/>
+          <a:ln xmlns:a="http://schemas.openxmlformats.org/drawingml/2006/main" w="0">
+            <a:noFill/>
+            <a:prstDash val="solid"/>
+          </a:ln>
+        </p:spPr>
+        <p:txBody>
+          <a:bodyPr xmlns:a="http://schemas.openxmlformats.org/drawingml/2006/main" wrap="square" lIns="0" tIns="0" rIns="0" bIns="0" anchor="t">
+            <a:normAutofit fontScale="100000"/>
+          </a:bodyPr>
+          <a:lstStyle xmlns:a="http://schemas.openxmlformats.org/drawingml/2006/main"/>
+          <a:p xmlns:a="http://schemas.openxmlformats.org/drawingml/2006/main">
+            <a:pPr algn="l">
+              <a:buNone/>
+              <a:defRPr sz="2250" b="1">
+                <a:solidFill>
+                  <a:srgbClr val="000000"/>
+                </a:solidFill>
+                <a:latin typeface="Arial"/>
+                <a:ea typeface="Arial"/>
+                <a:cs typeface="Arial"/>
+              </a:defRPr>
+            </a:pPr>
+            <a:r>
+              <a:rPr sz="2250" b="1">
+                <a:solidFill>
+                  <a:srgbClr val="000000"/>
+                </a:solidFill>
+                <a:latin typeface="Arial"/>
+                <a:ea typeface="Arial"/>
+                <a:cs typeface="Arial"/>
+              </a:rPr>
+              <a:t>Fixed cross-asset surface</a:t>
+            </a:r>
+          </a:p>
+        </p:txBody>
+      </p:sp>
+      <p:sp>
+        <p:nvSpPr>
+          <p:cNvPr id="13" name="">
+            <a:extLst xmlns:a="http://schemas.openxmlformats.org/drawingml/2006/main">
+              <a:ext uri="{FF2B5EF4-FFF2-40B4-BE49-F238E27FC236}">
+                <a16:creationId xmlns:a16="http://schemas.microsoft.com/office/drawing/2014/main" id="{09D8E2E5-6744-4962-977E-E85B48910BDF}"/>
+              </a:ext>
+            </a:extLst>
+          </p:cNvPr>
+          <p:cNvSpPr>
+            <a:spLocks xmlns:a="http://schemas.openxmlformats.org/drawingml/2006/main" noGrp="1"/>
+          </p:cNvSpPr>
+          <p:nvPr/>
+        </p:nvSpPr>
+        <p:spPr>
+          <a:xfrm xmlns:a="http://schemas.openxmlformats.org/drawingml/2006/main">
+            <a:off x="6667500" y="2286000"/>
+            <a:ext cx="1809750" cy="323850"/>
+          </a:xfrm>
+          <a:prstGeom xmlns:a="http://schemas.openxmlformats.org/drawingml/2006/main" prst="rect">
+            <a:avLst/>
+          </a:prstGeom>
+          <a:noFill xmlns:a="http://schemas.openxmlformats.org/drawingml/2006/main"/>
+          <a:ln xmlns:a="http://schemas.openxmlformats.org/drawingml/2006/main" w="0">
+            <a:noFill/>
+            <a:prstDash val="solid"/>
+          </a:ln>
+        </p:spPr>
+        <p:txBody>
+          <a:bodyPr xmlns:a="http://schemas.openxmlformats.org/drawingml/2006/main" wrap="square" lIns="0" tIns="0" rIns="0" bIns="0" anchor="t">
+            <a:normAutofit fontScale="100000"/>
+          </a:bodyPr>
+          <a:lstStyle xmlns:a="http://schemas.openxmlformats.org/drawingml/2006/main"/>
+          <a:p xmlns:a="http://schemas.openxmlformats.org/drawingml/2006/main">
+            <a:pPr algn="l">
+              <a:buNone/>
+              <a:defRPr sz="1500" b="1">
+                <a:solidFill>
+                  <a:srgbClr val="667384"/>
+                </a:solidFill>
+                <a:latin typeface="Arial"/>
+                <a:ea typeface="Arial"/>
+                <a:cs typeface="Arial"/>
+              </a:defRPr>
+            </a:pPr>
+            <a:r>
+              <a:rPr sz="1500" b="1">
+                <a:solidFill>
+                  <a:srgbClr val="667384"/>
+                </a:solidFill>
+                <a:latin typeface="Arial"/>
+                <a:ea typeface="Arial"/>
+                <a:cs typeface="Arial"/>
+              </a:rPr>
+              <a:t>Predictors</a:t>
+            </a:r>
+          </a:p>
+        </p:txBody>
+      </p:sp>
+      <p:sp>
+        <p:nvSpPr>
+          <p:cNvPr id="14" name="">
+            <a:extLst xmlns:a="http://schemas.openxmlformats.org/drawingml/2006/main">
+              <a:ext uri="{FF2B5EF4-FFF2-40B4-BE49-F238E27FC236}">
+                <a16:creationId xmlns:a16="http://schemas.microsoft.com/office/drawing/2014/main" id="{60FD2958-8D30-49E2-9398-075A839B2785}"/>
+              </a:ext>
+            </a:extLst>
+          </p:cNvPr>
+          <p:cNvSpPr>
+            <a:spLocks xmlns:a="http://schemas.openxmlformats.org/drawingml/2006/main" noGrp="1"/>
+          </p:cNvSpPr>
+          <p:nvPr/>
+        </p:nvSpPr>
+        <p:spPr>
+          <a:xfrm xmlns:a="http://schemas.openxmlformats.org/drawingml/2006/main">
+            <a:off x="8572500" y="2286000"/>
+            <a:ext cx="2952750" cy="419100"/>
+          </a:xfrm>
+          <a:prstGeom xmlns:a="http://schemas.openxmlformats.org/drawingml/2006/main" prst="rect">
+            <a:avLst/>
+          </a:prstGeom>
+          <a:noFill xmlns:a="http://schemas.openxmlformats.org/drawingml/2006/main"/>
+          <a:ln xmlns:a="http://schemas.openxmlformats.org/drawingml/2006/main" w="0">
+            <a:noFill/>
+            <a:prstDash val="solid"/>
+          </a:ln>
+        </p:spPr>
+        <p:txBody>
+          <a:bodyPr xmlns:a="http://schemas.openxmlformats.org/drawingml/2006/main" wrap="square" lIns="0" tIns="0" rIns="0" bIns="0" anchor="t">
+            <a:normAutofit fontScale="100000"/>
+          </a:bodyPr>
+          <a:lstStyle xmlns:a="http://schemas.openxmlformats.org/drawingml/2006/main"/>
+          <a:p xmlns:a="http://schemas.openxmlformats.org/drawingml/2006/main">
+            <a:pPr algn="l">
+              <a:buNone/>
+              <a:defRPr sz="1500" b="0">
+                <a:solidFill>
+                  <a:srgbClr val="273548"/>
+                </a:solidFill>
+                <a:latin typeface="Arial"/>
+                <a:ea typeface="Arial"/>
+                <a:cs typeface="Arial"/>
+              </a:defRPr>
+            </a:pPr>
+            <a:r>
+              <a:rPr sz="1500" b="0">
+                <a:solidFill>
+                  <a:srgbClr val="273548"/>
+                </a:solidFill>
+                <a:latin typeface="Arial"/>
+                <a:ea typeface="Arial"/>
+                <a:cs typeface="Arial"/>
+              </a:rPr>
+              <a:t>QQQ and SPY</a:t>
+            </a:r>
+          </a:p>
+        </p:txBody>
+      </p:sp>
+      <p:sp>
+        <p:nvSpPr>
+          <p:cNvPr id="15" name="">
+            <a:extLst xmlns:a="http://schemas.openxmlformats.org/drawingml/2006/main">
+              <a:ext uri="{FF2B5EF4-FFF2-40B4-BE49-F238E27FC236}">
+                <a16:creationId xmlns:a16="http://schemas.microsoft.com/office/drawing/2014/main" id="{B5F0B4C3-3792-489F-A37E-FD53597FE449}"/>
+              </a:ext>
+            </a:extLst>
+          </p:cNvPr>
+          <p:cNvSpPr>
+            <a:spLocks xmlns:a="http://schemas.openxmlformats.org/drawingml/2006/main" noGrp="1"/>
+          </p:cNvSpPr>
+          <p:nvPr/>
+        </p:nvSpPr>
+        <p:spPr>
+          <a:xfrm xmlns:a="http://schemas.openxmlformats.org/drawingml/2006/main">
+            <a:off x="6667500" y="2743200"/>
+            <a:ext cx="4857750" cy="9525"/>
+          </a:xfrm>
+          <a:prstGeom xmlns:a="http://schemas.openxmlformats.org/drawingml/2006/main" prst="rect">
+            <a:avLst/>
+          </a:prstGeom>
+          <a:solidFill xmlns:a="http://schemas.openxmlformats.org/drawingml/2006/main">
+            <a:srgbClr val="B8BCC4"/>
+          </a:solidFill>
+          <a:ln xmlns:a="http://schemas.openxmlformats.org/drawingml/2006/main" w="0">
+            <a:solidFill>
+              <a:srgbClr val="B8BCC4"/>
+            </a:solidFill>
+            <a:prstDash val="solid"/>
+          </a:ln>
+        </p:spPr>
+      </p:sp>
+      <p:sp>
+        <p:nvSpPr>
+          <p:cNvPr id="16" name="">
+            <a:extLst xmlns:a="http://schemas.openxmlformats.org/drawingml/2006/main">
+              <a:ext uri="{FF2B5EF4-FFF2-40B4-BE49-F238E27FC236}">
+                <a16:creationId xmlns:a16="http://schemas.microsoft.com/office/drawing/2014/main" id="{1F168646-6439-4EB2-88F0-0C08EDC14E3F}"/>
+              </a:ext>
+            </a:extLst>
+          </p:cNvPr>
+          <p:cNvSpPr>
+            <a:spLocks xmlns:a="http://schemas.openxmlformats.org/drawingml/2006/main" noGrp="1"/>
+          </p:cNvSpPr>
+          <p:nvPr/>
+        </p:nvSpPr>
+        <p:spPr>
+          <a:xfrm xmlns:a="http://schemas.openxmlformats.org/drawingml/2006/main">
+            <a:off x="6667500" y="2876550"/>
+            <a:ext cx="1809750" cy="323850"/>
+          </a:xfrm>
+          <a:prstGeom xmlns:a="http://schemas.openxmlformats.org/drawingml/2006/main" prst="rect">
+            <a:avLst/>
+          </a:prstGeom>
+          <a:noFill xmlns:a="http://schemas.openxmlformats.org/drawingml/2006/main"/>
+          <a:ln xmlns:a="http://schemas.openxmlformats.org/drawingml/2006/main" w="0">
+            <a:noFill/>
+            <a:prstDash val="solid"/>
+          </a:ln>
+        </p:spPr>
+        <p:txBody>
+          <a:bodyPr xmlns:a="http://schemas.openxmlformats.org/drawingml/2006/main" wrap="square" lIns="0" tIns="0" rIns="0" bIns="0" anchor="t">
+            <a:normAutofit fontScale="100000"/>
+          </a:bodyPr>
+          <a:lstStyle xmlns:a="http://schemas.openxmlformats.org/drawingml/2006/main"/>
+          <a:p xmlns:a="http://schemas.openxmlformats.org/drawingml/2006/main">
+            <a:pPr algn="l">
+              <a:buNone/>
+              <a:defRPr sz="1500" b="1">
+                <a:solidFill>
+                  <a:srgbClr val="667384"/>
+                </a:solidFill>
+                <a:latin typeface="Arial"/>
+                <a:ea typeface="Arial"/>
+                <a:cs typeface="Arial"/>
+              </a:defRPr>
+            </a:pPr>
+            <a:r>
+              <a:rPr sz="1500" b="1">
+                <a:solidFill>
+                  <a:srgbClr val="667384"/>
+                </a:solidFill>
+                <a:latin typeface="Arial"/>
+                <a:ea typeface="Arial"/>
+                <a:cs typeface="Arial"/>
+              </a:rPr>
+              <a:t>Prior windows</a:t>
+            </a:r>
+          </a:p>
+        </p:txBody>
+      </p:sp>
+      <p:sp>
+        <p:nvSpPr>
+          <p:cNvPr id="17" name="">
+            <a:extLst xmlns:a="http://schemas.openxmlformats.org/drawingml/2006/main">
+              <a:ext uri="{FF2B5EF4-FFF2-40B4-BE49-F238E27FC236}">
+                <a16:creationId xmlns:a16="http://schemas.microsoft.com/office/drawing/2014/main" id="{5CE87A9A-C6B3-4232-84C2-9C442CAD9C05}"/>
+              </a:ext>
+            </a:extLst>
+          </p:cNvPr>
+          <p:cNvSpPr>
+            <a:spLocks xmlns:a="http://schemas.openxmlformats.org/drawingml/2006/main" noGrp="1"/>
+          </p:cNvSpPr>
+          <p:nvPr/>
+        </p:nvSpPr>
+        <p:spPr>
+          <a:xfrm xmlns:a="http://schemas.openxmlformats.org/drawingml/2006/main">
+            <a:off x="8572500" y="2876550"/>
+            <a:ext cx="2952750" cy="419100"/>
+          </a:xfrm>
+          <a:prstGeom xmlns:a="http://schemas.openxmlformats.org/drawingml/2006/main" prst="rect">
+            <a:avLst/>
+          </a:prstGeom>
+          <a:noFill xmlns:a="http://schemas.openxmlformats.org/drawingml/2006/main"/>
+          <a:ln xmlns:a="http://schemas.openxmlformats.org/drawingml/2006/main" w="0">
+            <a:noFill/>
+            <a:prstDash val="solid"/>
+          </a:ln>
+        </p:spPr>
+        <p:txBody>
+          <a:bodyPr xmlns:a="http://schemas.openxmlformats.org/drawingml/2006/main" wrap="square" lIns="0" tIns="0" rIns="0" bIns="0" anchor="t">
+            <a:normAutofit fontScale="100000"/>
+          </a:bodyPr>
+          <a:lstStyle xmlns:a="http://schemas.openxmlformats.org/drawingml/2006/main"/>
+          <a:p xmlns:a="http://schemas.openxmlformats.org/drawingml/2006/main">
+            <a:pPr algn="l">
+              <a:buNone/>
+              <a:defRPr sz="1500" b="0">
+                <a:solidFill>
+                  <a:srgbClr val="273548"/>
+                </a:solidFill>
+                <a:latin typeface="Arial"/>
+                <a:ea typeface="Arial"/>
+                <a:cs typeface="Arial"/>
+              </a:defRPr>
+            </a:pPr>
+            <a:r>
+              <a:rPr sz="1500" b="0">
+                <a:solidFill>
+                  <a:srgbClr val="273548"/>
+                </a:solidFill>
+                <a:latin typeface="Arial"/>
+                <a:ea typeface="Arial"/>
+                <a:cs typeface="Arial"/>
+              </a:rPr>
+              <a:t>1, 2, 3, 4, 5, 10, 15, 20, 25</a:t>
+            </a:r>
+          </a:p>
+        </p:txBody>
+      </p:sp>
+      <p:sp>
+        <p:nvSpPr>
+          <p:cNvPr id="18" name="">
+            <a:extLst xmlns:a="http://schemas.openxmlformats.org/drawingml/2006/main">
+              <a:ext uri="{FF2B5EF4-FFF2-40B4-BE49-F238E27FC236}">
+                <a16:creationId xmlns:a16="http://schemas.microsoft.com/office/drawing/2014/main" id="{4C822C36-1982-4EF0-A9F3-89DAA8EAA125}"/>
+              </a:ext>
+            </a:extLst>
+          </p:cNvPr>
+          <p:cNvSpPr>
+            <a:spLocks xmlns:a="http://schemas.openxmlformats.org/drawingml/2006/main" noGrp="1"/>
+          </p:cNvSpPr>
+          <p:nvPr/>
+        </p:nvSpPr>
+        <p:spPr>
+          <a:xfrm xmlns:a="http://schemas.openxmlformats.org/drawingml/2006/main">
+            <a:off x="6667500" y="3333750"/>
+            <a:ext cx="4857750" cy="9525"/>
+          </a:xfrm>
+          <a:prstGeom xmlns:a="http://schemas.openxmlformats.org/drawingml/2006/main" prst="rect">
+            <a:avLst/>
+          </a:prstGeom>
+          <a:solidFill xmlns:a="http://schemas.openxmlformats.org/drawingml/2006/main">
+            <a:srgbClr val="B8BCC4"/>
+          </a:solidFill>
+          <a:ln xmlns:a="http://schemas.openxmlformats.org/drawingml/2006/main" w="0">
+            <a:solidFill>
+              <a:srgbClr val="B8BCC4"/>
+            </a:solidFill>
+            <a:prstDash val="solid"/>
+          </a:ln>
+        </p:spPr>
+      </p:sp>
+      <p:sp>
+        <p:nvSpPr>
+          <p:cNvPr id="19" name="">
+            <a:extLst xmlns:a="http://schemas.openxmlformats.org/drawingml/2006/main">
+              <a:ext uri="{FF2B5EF4-FFF2-40B4-BE49-F238E27FC236}">
+                <a16:creationId xmlns:a16="http://schemas.microsoft.com/office/drawing/2014/main" id="{FFA764C4-9BB1-4E82-A1F0-6E930868FEC3}"/>
+              </a:ext>
+            </a:extLst>
+          </p:cNvPr>
+          <p:cNvSpPr>
+            <a:spLocks xmlns:a="http://schemas.openxmlformats.org/drawingml/2006/main" noGrp="1"/>
+          </p:cNvSpPr>
+          <p:nvPr/>
+        </p:nvSpPr>
+        <p:spPr>
+          <a:xfrm xmlns:a="http://schemas.openxmlformats.org/drawingml/2006/main">
+            <a:off x="6667500" y="3467100"/>
+            <a:ext cx="1809750" cy="323850"/>
+          </a:xfrm>
+          <a:prstGeom xmlns:a="http://schemas.openxmlformats.org/drawingml/2006/main" prst="rect">
+            <a:avLst/>
+          </a:prstGeom>
+          <a:noFill xmlns:a="http://schemas.openxmlformats.org/drawingml/2006/main"/>
+          <a:ln xmlns:a="http://schemas.openxmlformats.org/drawingml/2006/main" w="0">
+            <a:noFill/>
+            <a:prstDash val="solid"/>
+          </a:ln>
+        </p:spPr>
+        <p:txBody>
+          <a:bodyPr xmlns:a="http://schemas.openxmlformats.org/drawingml/2006/main" wrap="square" lIns="0" tIns="0" rIns="0" bIns="0" anchor="t">
+            <a:normAutofit fontScale="100000"/>
+          </a:bodyPr>
+          <a:lstStyle xmlns:a="http://schemas.openxmlformats.org/drawingml/2006/main"/>
+          <a:p xmlns:a="http://schemas.openxmlformats.org/drawingml/2006/main">
+            <a:pPr algn="l">
+              <a:buNone/>
+              <a:defRPr sz="1500" b="1">
+                <a:solidFill>
+                  <a:srgbClr val="667384"/>
+                </a:solidFill>
+                <a:latin typeface="Arial"/>
+                <a:ea typeface="Arial"/>
+                <a:cs typeface="Arial"/>
+              </a:defRPr>
+            </a:pPr>
+            <a:r>
+              <a:rPr sz="1500" b="1">
+                <a:solidFill>
+                  <a:srgbClr val="667384"/>
+                </a:solidFill>
+                <a:latin typeface="Arial"/>
+                <a:ea typeface="Arial"/>
+                <a:cs typeface="Arial"/>
+              </a:rPr>
+              <a:t>Target</a:t>
+            </a:r>
+          </a:p>
+        </p:txBody>
+      </p:sp>
+      <p:sp>
+        <p:nvSpPr>
+          <p:cNvPr id="20" name="">
+            <a:extLst xmlns:a="http://schemas.openxmlformats.org/drawingml/2006/main">
+              <a:ext uri="{FF2B5EF4-FFF2-40B4-BE49-F238E27FC236}">
+                <a16:creationId xmlns:a16="http://schemas.microsoft.com/office/drawing/2014/main" id="{62A04E11-771F-482D-97D0-41D18323CD03}"/>
+              </a:ext>
+            </a:extLst>
+          </p:cNvPr>
+          <p:cNvSpPr>
+            <a:spLocks xmlns:a="http://schemas.openxmlformats.org/drawingml/2006/main" noGrp="1"/>
+          </p:cNvSpPr>
+          <p:nvPr/>
+        </p:nvSpPr>
+        <p:spPr>
+          <a:xfrm xmlns:a="http://schemas.openxmlformats.org/drawingml/2006/main">
+            <a:off x="8572500" y="3467100"/>
+            <a:ext cx="2952750" cy="419100"/>
+          </a:xfrm>
+          <a:prstGeom xmlns:a="http://schemas.openxmlformats.org/drawingml/2006/main" prst="rect">
+            <a:avLst/>
+          </a:prstGeom>
+          <a:noFill xmlns:a="http://schemas.openxmlformats.org/drawingml/2006/main"/>
+          <a:ln xmlns:a="http://schemas.openxmlformats.org/drawingml/2006/main" w="0">
+            <a:noFill/>
+            <a:prstDash val="solid"/>
+          </a:ln>
+        </p:spPr>
+        <p:txBody>
+          <a:bodyPr xmlns:a="http://schemas.openxmlformats.org/drawingml/2006/main" wrap="square" lIns="0" tIns="0" rIns="0" bIns="0" anchor="t">
+            <a:normAutofit fontScale="93632"/>
+          </a:bodyPr>
+          <a:lstStyle xmlns:a="http://schemas.openxmlformats.org/drawingml/2006/main"/>
+          <a:p xmlns:a="http://schemas.openxmlformats.org/drawingml/2006/main">
+            <a:pPr algn="l">
+              <a:buNone/>
+              <a:defRPr sz="1500" b="0">
+                <a:solidFill>
+                  <a:srgbClr val="273548"/>
+                </a:solidFill>
+                <a:latin typeface="Arial"/>
+                <a:ea typeface="Arial"/>
+                <a:cs typeface="Arial"/>
+              </a:defRPr>
+            </a:pPr>
+            <a:r>
+              <a:rPr sz="1500" b="0">
+                <a:solidFill>
+                  <a:srgbClr val="273548"/>
+                </a:solidFill>
+                <a:latin typeface="Arial"/>
+                <a:ea typeface="Arial"/>
+                <a:cs typeface="Arial"/>
+              </a:rPr>
+              <a:t>Following TSLA cumulative log return</a:t>
+            </a:r>
+          </a:p>
+        </p:txBody>
+      </p:sp>
+      <p:sp>
+        <p:nvSpPr>
+          <p:cNvPr id="21" name="">
+            <a:extLst xmlns:a="http://schemas.openxmlformats.org/drawingml/2006/main">
+              <a:ext uri="{FF2B5EF4-FFF2-40B4-BE49-F238E27FC236}">
+                <a16:creationId xmlns:a16="http://schemas.microsoft.com/office/drawing/2014/main" id="{2AEA1D46-2EB0-459D-9313-BA82DEAD9553}"/>
+              </a:ext>
+            </a:extLst>
+          </p:cNvPr>
+          <p:cNvSpPr>
+            <a:spLocks xmlns:a="http://schemas.openxmlformats.org/drawingml/2006/main" noGrp="1"/>
+          </p:cNvSpPr>
+          <p:nvPr/>
+        </p:nvSpPr>
+        <p:spPr>
+          <a:xfrm xmlns:a="http://schemas.openxmlformats.org/drawingml/2006/main">
+            <a:off x="6667500" y="3924300"/>
+            <a:ext cx="4857750" cy="9525"/>
+          </a:xfrm>
+          <a:prstGeom xmlns:a="http://schemas.openxmlformats.org/drawingml/2006/main" prst="rect">
+            <a:avLst/>
+          </a:prstGeom>
+          <a:solidFill xmlns:a="http://schemas.openxmlformats.org/drawingml/2006/main">
+            <a:srgbClr val="B8BCC4"/>
+          </a:solidFill>
+          <a:ln xmlns:a="http://schemas.openxmlformats.org/drawingml/2006/main" w="0">
+            <a:solidFill>
+              <a:srgbClr val="B8BCC4"/>
+            </a:solidFill>
+            <a:prstDash val="solid"/>
+          </a:ln>
+        </p:spPr>
+      </p:sp>
+      <p:sp>
+        <p:nvSpPr>
+          <p:cNvPr id="22" name="">
+            <a:extLst xmlns:a="http://schemas.openxmlformats.org/drawingml/2006/main">
+              <a:ext uri="{FF2B5EF4-FFF2-40B4-BE49-F238E27FC236}">
+                <a16:creationId xmlns:a16="http://schemas.microsoft.com/office/drawing/2014/main" id="{AAD0A15B-41F8-429C-8446-F9003B5B4E6F}"/>
+              </a:ext>
+            </a:extLst>
+          </p:cNvPr>
+          <p:cNvSpPr>
+            <a:spLocks xmlns:a="http://schemas.openxmlformats.org/drawingml/2006/main" noGrp="1"/>
+          </p:cNvSpPr>
+          <p:nvPr/>
+        </p:nvSpPr>
+        <p:spPr>
+          <a:xfrm xmlns:a="http://schemas.openxmlformats.org/drawingml/2006/main">
+            <a:off x="6667500" y="4057650"/>
+            <a:ext cx="1809750" cy="323850"/>
+          </a:xfrm>
+          <a:prstGeom xmlns:a="http://schemas.openxmlformats.org/drawingml/2006/main" prst="rect">
+            <a:avLst/>
+          </a:prstGeom>
+          <a:noFill xmlns:a="http://schemas.openxmlformats.org/drawingml/2006/main"/>
+          <a:ln xmlns:a="http://schemas.openxmlformats.org/drawingml/2006/main" w="0">
+            <a:noFill/>
+            <a:prstDash val="solid"/>
+          </a:ln>
+        </p:spPr>
+        <p:txBody>
+          <a:bodyPr xmlns:a="http://schemas.openxmlformats.org/drawingml/2006/main" wrap="square" lIns="0" tIns="0" rIns="0" bIns="0" anchor="t">
+            <a:normAutofit fontScale="100000"/>
+          </a:bodyPr>
+          <a:lstStyle xmlns:a="http://schemas.openxmlformats.org/drawingml/2006/main"/>
+          <a:p xmlns:a="http://schemas.openxmlformats.org/drawingml/2006/main">
+            <a:pPr algn="l">
+              <a:buNone/>
+              <a:defRPr sz="1500" b="1">
+                <a:solidFill>
+                  <a:srgbClr val="667384"/>
+                </a:solidFill>
+                <a:latin typeface="Arial"/>
+                <a:ea typeface="Arial"/>
+                <a:cs typeface="Arial"/>
+              </a:defRPr>
+            </a:pPr>
+            <a:r>
+              <a:rPr sz="1500" b="1">
+                <a:solidFill>
+                  <a:srgbClr val="667384"/>
+                </a:solidFill>
+                <a:latin typeface="Arial"/>
+                <a:ea typeface="Arial"/>
+                <a:cs typeface="Arial"/>
+              </a:rPr>
+              <a:t>Timing</a:t>
+            </a:r>
+          </a:p>
+        </p:txBody>
+      </p:sp>
+      <p:sp>
+        <p:nvSpPr>
+          <p:cNvPr id="23" name="">
+            <a:extLst xmlns:a="http://schemas.openxmlformats.org/drawingml/2006/main">
+              <a:ext uri="{FF2B5EF4-FFF2-40B4-BE49-F238E27FC236}">
+                <a16:creationId xmlns:a16="http://schemas.microsoft.com/office/drawing/2014/main" id="{A13F5128-0043-4265-B48A-E7E4E9B6F96C}"/>
+              </a:ext>
+            </a:extLst>
+          </p:cNvPr>
+          <p:cNvSpPr>
+            <a:spLocks xmlns:a="http://schemas.openxmlformats.org/drawingml/2006/main" noGrp="1"/>
+          </p:cNvSpPr>
+          <p:nvPr/>
+        </p:nvSpPr>
+        <p:spPr>
+          <a:xfrm xmlns:a="http://schemas.openxmlformats.org/drawingml/2006/main">
+            <a:off x="8572500" y="4057650"/>
+            <a:ext cx="2952750" cy="419100"/>
+          </a:xfrm>
+          <a:prstGeom xmlns:a="http://schemas.openxmlformats.org/drawingml/2006/main" prst="rect">
+            <a:avLst/>
+          </a:prstGeom>
+          <a:noFill xmlns:a="http://schemas.openxmlformats.org/drawingml/2006/main"/>
+          <a:ln xmlns:a="http://schemas.openxmlformats.org/drawingml/2006/main" w="0">
+            <a:noFill/>
+            <a:prstDash val="solid"/>
+          </a:ln>
+        </p:spPr>
+        <p:txBody>
+          <a:bodyPr xmlns:a="http://schemas.openxmlformats.org/drawingml/2006/main" wrap="square" lIns="0" tIns="0" rIns="0" bIns="0" anchor="t">
+            <a:normAutofit fontScale="100000"/>
+          </a:bodyPr>
+          <a:lstStyle xmlns:a="http://schemas.openxmlformats.org/drawingml/2006/main"/>
+          <a:p xmlns:a="http://schemas.openxmlformats.org/drawingml/2006/main">
+            <a:pPr algn="l">
+              <a:buNone/>
+              <a:defRPr sz="1500" b="0">
+                <a:solidFill>
+                  <a:srgbClr val="273548"/>
+                </a:solidFill>
+                <a:latin typeface="Arial"/>
+                <a:ea typeface="Arial"/>
+                <a:cs typeface="Arial"/>
+              </a:defRPr>
+            </a:pPr>
+            <a:r>
+              <a:rPr sz="1500" b="0">
+                <a:solidFill>
+                  <a:srgbClr val="273548"/>
+                </a:solidFill>
+                <a:latin typeface="Arial"/>
+                <a:ea typeface="Arial"/>
+                <a:cs typeface="Arial"/>
+              </a:rPr>
+              <a:t>Known at anchor close t</a:t>
+            </a:r>
+          </a:p>
+        </p:txBody>
+      </p:sp>
+      <p:sp>
+        <p:nvSpPr>
+          <p:cNvPr id="24" name="">
+            <a:extLst xmlns:a="http://schemas.openxmlformats.org/drawingml/2006/main">
+              <a:ext uri="{FF2B5EF4-FFF2-40B4-BE49-F238E27FC236}">
+                <a16:creationId xmlns:a16="http://schemas.microsoft.com/office/drawing/2014/main" id="{1BB63F79-B572-4EF7-8C82-E4140C6E382C}"/>
+              </a:ext>
+            </a:extLst>
+          </p:cNvPr>
+          <p:cNvSpPr>
+            <a:spLocks xmlns:a="http://schemas.openxmlformats.org/drawingml/2006/main" noGrp="1"/>
+          </p:cNvSpPr>
+          <p:nvPr/>
+        </p:nvSpPr>
+        <p:spPr>
+          <a:xfrm xmlns:a="http://schemas.openxmlformats.org/drawingml/2006/main">
+            <a:off x="6667500" y="4514850"/>
+            <a:ext cx="4857750" cy="9525"/>
+          </a:xfrm>
+          <a:prstGeom xmlns:a="http://schemas.openxmlformats.org/drawingml/2006/main" prst="rect">
+            <a:avLst/>
+          </a:prstGeom>
+          <a:solidFill xmlns:a="http://schemas.openxmlformats.org/drawingml/2006/main">
+            <a:srgbClr val="B8BCC4"/>
+          </a:solidFill>
+          <a:ln xmlns:a="http://schemas.openxmlformats.org/drawingml/2006/main" w="0">
+            <a:solidFill>
+              <a:srgbClr val="B8BCC4"/>
+            </a:solidFill>
+            <a:prstDash val="solid"/>
+          </a:ln>
+        </p:spPr>
+      </p:sp>
+      <p:sp>
+        <p:nvSpPr>
+          <p:cNvPr id="25" name="">
+            <a:extLst xmlns:a="http://schemas.openxmlformats.org/drawingml/2006/main">
+              <a:ext uri="{FF2B5EF4-FFF2-40B4-BE49-F238E27FC236}">
+                <a16:creationId xmlns:a16="http://schemas.microsoft.com/office/drawing/2014/main" id="{F58FD0A4-5938-4ECC-AC99-491391233E24}"/>
+              </a:ext>
+            </a:extLst>
+          </p:cNvPr>
+          <p:cNvSpPr>
+            <a:spLocks xmlns:a="http://schemas.openxmlformats.org/drawingml/2006/main" noGrp="1"/>
+          </p:cNvSpPr>
+          <p:nvPr/>
+        </p:nvSpPr>
+        <p:spPr>
+          <a:xfrm xmlns:a="http://schemas.openxmlformats.org/drawingml/2006/main">
+            <a:off x="6667500" y="4648200"/>
+            <a:ext cx="1809750" cy="323850"/>
+          </a:xfrm>
+          <a:prstGeom xmlns:a="http://schemas.openxmlformats.org/drawingml/2006/main" prst="rect">
+            <a:avLst/>
+          </a:prstGeom>
+          <a:noFill xmlns:a="http://schemas.openxmlformats.org/drawingml/2006/main"/>
+          <a:ln xmlns:a="http://schemas.openxmlformats.org/drawingml/2006/main" w="0">
+            <a:noFill/>
+            <a:prstDash val="solid"/>
+          </a:ln>
+        </p:spPr>
+        <p:txBody>
+          <a:bodyPr xmlns:a="http://schemas.openxmlformats.org/drawingml/2006/main" wrap="square" lIns="0" tIns="0" rIns="0" bIns="0" anchor="t">
+            <a:normAutofit fontScale="100000"/>
+          </a:bodyPr>
+          <a:lstStyle xmlns:a="http://schemas.openxmlformats.org/drawingml/2006/main"/>
+          <a:p xmlns:a="http://schemas.openxmlformats.org/drawingml/2006/main">
+            <a:pPr algn="l">
+              <a:buNone/>
+              <a:defRPr sz="1500" b="1">
+                <a:solidFill>
+                  <a:srgbClr val="667384"/>
+                </a:solidFill>
+                <a:latin typeface="Arial"/>
+                <a:ea typeface="Arial"/>
+                <a:cs typeface="Arial"/>
+              </a:defRPr>
+            </a:pPr>
+            <a:r>
+              <a:rPr sz="1500" b="1">
+                <a:solidFill>
+                  <a:srgbClr val="667384"/>
+                </a:solidFill>
+                <a:latin typeface="Arial"/>
+                <a:ea typeface="Arial"/>
+                <a:cs typeface="Arial"/>
+              </a:rPr>
+              <a:t>Uncertainty</a:t>
+            </a:r>
+          </a:p>
+        </p:txBody>
+      </p:sp>
+      <p:sp>
+        <p:nvSpPr>
+          <p:cNvPr id="26" name="">
+            <a:extLst xmlns:a="http://schemas.openxmlformats.org/drawingml/2006/main">
+              <a:ext uri="{FF2B5EF4-FFF2-40B4-BE49-F238E27FC236}">
+                <a16:creationId xmlns:a16="http://schemas.microsoft.com/office/drawing/2014/main" id="{AA292260-C22B-4C56-9ED9-C8744785B552}"/>
+              </a:ext>
+            </a:extLst>
+          </p:cNvPr>
+          <p:cNvSpPr>
+            <a:spLocks xmlns:a="http://schemas.openxmlformats.org/drawingml/2006/main" noGrp="1"/>
+          </p:cNvSpPr>
+          <p:nvPr/>
+        </p:nvSpPr>
+        <p:spPr>
+          <a:xfrm xmlns:a="http://schemas.openxmlformats.org/drawingml/2006/main">
+            <a:off x="8572500" y="4648200"/>
+            <a:ext cx="2952750" cy="419100"/>
+          </a:xfrm>
+          <a:prstGeom xmlns:a="http://schemas.openxmlformats.org/drawingml/2006/main" prst="rect">
+            <a:avLst/>
+          </a:prstGeom>
+          <a:noFill xmlns:a="http://schemas.openxmlformats.org/drawingml/2006/main"/>
+          <a:ln xmlns:a="http://schemas.openxmlformats.org/drawingml/2006/main" w="0">
+            <a:noFill/>
+            <a:prstDash val="solid"/>
+          </a:ln>
+        </p:spPr>
+        <p:txBody>
+          <a:bodyPr xmlns:a="http://schemas.openxmlformats.org/drawingml/2006/main" wrap="square" lIns="0" tIns="0" rIns="0" bIns="0" anchor="t">
+            <a:normAutofit fontScale="100000"/>
+          </a:bodyPr>
+          <a:lstStyle xmlns:a="http://schemas.openxmlformats.org/drawingml/2006/main"/>
+          <a:p xmlns:a="http://schemas.openxmlformats.org/drawingml/2006/main">
+            <a:pPr algn="l">
+              <a:buNone/>
+              <a:defRPr sz="1500" b="0">
+                <a:solidFill>
+                  <a:srgbClr val="273548"/>
+                </a:solidFill>
+                <a:latin typeface="Arial"/>
+                <a:ea typeface="Arial"/>
+                <a:cs typeface="Arial"/>
+              </a:defRPr>
+            </a:pPr>
+            <a:r>
+              <a:rPr sz="1500" b="0">
+                <a:solidFill>
+                  <a:srgbClr val="273548"/>
+                </a:solidFill>
+                <a:latin typeface="Arial"/>
+                <a:ea typeface="Arial"/>
+                <a:cs typeface="Arial"/>
+              </a:rPr>
+              <a:t>Overlap-aware Newey-West / HAC</a:t>
+            </a:r>
+          </a:p>
+        </p:txBody>
+      </p:sp>
+      <p:sp>
+        <p:nvSpPr>
+          <p:cNvPr id="27" name="">
+            <a:extLst xmlns:a="http://schemas.openxmlformats.org/drawingml/2006/main">
+              <a:ext uri="{FF2B5EF4-FFF2-40B4-BE49-F238E27FC236}">
+                <a16:creationId xmlns:a16="http://schemas.microsoft.com/office/drawing/2014/main" id="{6C617A11-8542-47F5-AD42-16C68CB863E7}"/>
+              </a:ext>
+            </a:extLst>
+          </p:cNvPr>
+          <p:cNvSpPr>
+            <a:spLocks xmlns:a="http://schemas.openxmlformats.org/drawingml/2006/main" noGrp="1"/>
+          </p:cNvSpPr>
+          <p:nvPr/>
+        </p:nvSpPr>
+        <p:spPr>
+          <a:xfrm xmlns:a="http://schemas.openxmlformats.org/drawingml/2006/main">
+            <a:off x="6667500" y="5105400"/>
+            <a:ext cx="4857750" cy="9525"/>
+          </a:xfrm>
+          <a:prstGeom xmlns:a="http://schemas.openxmlformats.org/drawingml/2006/main" prst="rect">
+            <a:avLst/>
+          </a:prstGeom>
+          <a:solidFill xmlns:a="http://schemas.openxmlformats.org/drawingml/2006/main">
+            <a:srgbClr val="B8BCC4"/>
+          </a:solidFill>
+          <a:ln xmlns:a="http://schemas.openxmlformats.org/drawingml/2006/main" w="0">
+            <a:solidFill>
+              <a:srgbClr val="B8BCC4"/>
+            </a:solidFill>
+            <a:prstDash val="solid"/>
+          </a:ln>
+        </p:spPr>
+      </p:sp>
+      <p:sp>
+        <p:nvSpPr>
+          <p:cNvPr id="28" name="">
+            <a:extLst xmlns:a="http://schemas.openxmlformats.org/drawingml/2006/main">
+              <a:ext uri="{FF2B5EF4-FFF2-40B4-BE49-F238E27FC236}">
+                <a16:creationId xmlns:a16="http://schemas.microsoft.com/office/drawing/2014/main" id="{D3258514-91F0-4BFE-BE7D-A95A1C826021}"/>
+              </a:ext>
+            </a:extLst>
+          </p:cNvPr>
+          <p:cNvSpPr>
+            <a:spLocks xmlns:a="http://schemas.openxmlformats.org/drawingml/2006/main" noGrp="1"/>
+          </p:cNvSpPr>
+          <p:nvPr/>
+        </p:nvSpPr>
+        <p:spPr>
+          <a:xfrm xmlns:a="http://schemas.openxmlformats.org/drawingml/2006/main">
+            <a:off x="6667500" y="5238750"/>
+            <a:ext cx="1809750" cy="323850"/>
+          </a:xfrm>
+          <a:prstGeom xmlns:a="http://schemas.openxmlformats.org/drawingml/2006/main" prst="rect">
+            <a:avLst/>
+          </a:prstGeom>
+          <a:noFill xmlns:a="http://schemas.openxmlformats.org/drawingml/2006/main"/>
+          <a:ln xmlns:a="http://schemas.openxmlformats.org/drawingml/2006/main" w="0">
+            <a:noFill/>
+            <a:prstDash val="solid"/>
+          </a:ln>
+        </p:spPr>
+        <p:txBody>
+          <a:bodyPr xmlns:a="http://schemas.openxmlformats.org/drawingml/2006/main" wrap="square" lIns="0" tIns="0" rIns="0" bIns="0" anchor="t">
+            <a:normAutofit fontScale="100000"/>
+          </a:bodyPr>
+          <a:lstStyle xmlns:a="http://schemas.openxmlformats.org/drawingml/2006/main"/>
+          <a:p xmlns:a="http://schemas.openxmlformats.org/drawingml/2006/main">
+            <a:pPr algn="l">
+              <a:buNone/>
+              <a:defRPr sz="1500" b="1">
+                <a:solidFill>
+                  <a:srgbClr val="667384"/>
+                </a:solidFill>
+                <a:latin typeface="Arial"/>
+                <a:ea typeface="Arial"/>
+                <a:cs typeface="Arial"/>
+              </a:defRPr>
+            </a:pPr>
+            <a:r>
+              <a:rPr sz="1500" b="1">
+                <a:solidFill>
+                  <a:srgbClr val="667384"/>
+                </a:solidFill>
+                <a:latin typeface="Arial"/>
+                <a:ea typeface="Arial"/>
+                <a:cs typeface="Arial"/>
+              </a:rPr>
+              <a:t>Multiplicity</a:t>
+            </a:r>
+          </a:p>
+        </p:txBody>
+      </p:sp>
+      <p:sp>
+        <p:nvSpPr>
+          <p:cNvPr id="29" name="">
+            <a:extLst xmlns:a="http://schemas.openxmlformats.org/drawingml/2006/main">
+              <a:ext uri="{FF2B5EF4-FFF2-40B4-BE49-F238E27FC236}">
+                <a16:creationId xmlns:a16="http://schemas.microsoft.com/office/drawing/2014/main" id="{F73C58E3-8C22-4D23-8076-93E173576113}"/>
+              </a:ext>
+            </a:extLst>
+          </p:cNvPr>
+          <p:cNvSpPr>
+            <a:spLocks xmlns:a="http://schemas.openxmlformats.org/drawingml/2006/main" noGrp="1"/>
+          </p:cNvSpPr>
+          <p:nvPr/>
+        </p:nvSpPr>
+        <p:spPr>
+          <a:xfrm xmlns:a="http://schemas.openxmlformats.org/drawingml/2006/main">
+            <a:off x="8572500" y="5238750"/>
+            <a:ext cx="2952750" cy="419100"/>
+          </a:xfrm>
+          <a:prstGeom xmlns:a="http://schemas.openxmlformats.org/drawingml/2006/main" prst="rect">
+            <a:avLst/>
+          </a:prstGeom>
+          <a:noFill xmlns:a="http://schemas.openxmlformats.org/drawingml/2006/main"/>
+          <a:ln xmlns:a="http://schemas.openxmlformats.org/drawingml/2006/main" w="0">
+            <a:noFill/>
+            <a:prstDash val="solid"/>
+          </a:ln>
+        </p:spPr>
+        <p:txBody>
+          <a:bodyPr xmlns:a="http://schemas.openxmlformats.org/drawingml/2006/main" wrap="square" lIns="0" tIns="0" rIns="0" bIns="0" anchor="t">
+            <a:normAutofit fontScale="100000"/>
+          </a:bodyPr>
+          <a:lstStyle xmlns:a="http://schemas.openxmlformats.org/drawingml/2006/main"/>
+          <a:p xmlns:a="http://schemas.openxmlformats.org/drawingml/2006/main">
+            <a:pPr algn="l">
+              <a:buNone/>
+              <a:defRPr sz="1500" b="0">
+                <a:solidFill>
+                  <a:srgbClr val="273548"/>
+                </a:solidFill>
+                <a:latin typeface="Arial"/>
+                <a:ea typeface="Arial"/>
+                <a:cs typeface="Arial"/>
+              </a:defRPr>
+            </a:pPr>
+            <a:r>
+              <a:rPr sz="1500" b="0">
+                <a:solidFill>
+                  <a:srgbClr val="273548"/>
+                </a:solidFill>
+                <a:latin typeface="Arial"/>
+                <a:ea typeface="Arial"/>
+                <a:cs typeface="Arial"/>
+              </a:rPr>
+              <a:t>81 each; 162 pooled BH tests</a:t>
+            </a:r>
+          </a:p>
+        </p:txBody>
+      </p:sp>
+    </p:spTree>
+    <p:extLst>
+      <p:ext uri="{BB962C8B-B14F-4D97-AF65-F5344CB8AC3E}">
+        <p14:creationId xmlns:p14="http://schemas.microsoft.com/office/powerpoint/2010/main" val="1397283360"/>
+      </p:ext>
+    </p:extLst>
+  </p:cSld>
+</p:sld>
+</file>
+
 <file path=ppt/slides/slide5.xml><?xml version="1.0" encoding="utf-8"?>
 <p:sld xmlns:p="http://schemas.openxmlformats.org/presentationml/2006/main">
   <p:cSld>
@@ -38631,7 +41231,7 @@
           <p:nvPr/>
         </p:nvPicPr>
         <p:blipFill>
-          <a:blip xmlns:r="http://schemas.openxmlformats.org/officeDocument/2006/relationships" xmlns:a="http://schemas.openxmlformats.org/drawingml/2006/main" r:embed="R8c8ff13369c4450d"/>
+          <a:blip xmlns:r="http://schemas.openxmlformats.org/officeDocument/2006/relationships" xmlns:a="http://schemas.openxmlformats.org/drawingml/2006/main" r:embed="Re3f881a0d9f54425"/>
           <a:stretch xmlns:a="http://schemas.openxmlformats.org/drawingml/2006/main"/>
         </p:blipFill>
         <p:spPr>
@@ -38976,6 +41576,2979 @@
     <p:extLst>
       <p:ext uri="{BB962C8B-B14F-4D97-AF65-F5344CB8AC3E}">
         <p14:creationId xmlns:p14="http://schemas.microsoft.com/office/powerpoint/2010/main" val="317191340"/>
+      </p:ext>
+    </p:extLst>
+  </p:cSld>
+</p:sld>
+</file>
+
+<file path=ppt/slides/slide50.xml><?xml version="1.0" encoding="utf-8"?>
+<p:sld xmlns:p="http://schemas.openxmlformats.org/presentationml/2006/main">
+  <p:cSld>
+    <p:bg>
+      <p:bgPr>
+        <a:solidFill xmlns:a="http://schemas.openxmlformats.org/drawingml/2006/main">
+          <a:srgbClr val="FFFFFF"/>
+        </a:solidFill>
+      </p:bgPr>
+    </p:bg>
+    <p:spTree>
+      <p:nvGrpSpPr>
+        <p:cNvPr id="1" name=""/>
+        <p:cNvGrpSpPr/>
+        <p:nvPr/>
+      </p:nvGrpSpPr>
+      <p:grpSpPr>
+        <a:xfrm xmlns:a="http://schemas.openxmlformats.org/drawingml/2006/main"/>
+      </p:grpSpPr>
+      <p:sp>
+        <p:nvSpPr>
+          <p:cNvPr id="9" name="section-4">
+            <a:extLst xmlns:a="http://schemas.openxmlformats.org/drawingml/2006/main">
+              <a:ext uri="{FF2B5EF4-FFF2-40B4-BE49-F238E27FC236}">
+                <a16:creationId xmlns:a16="http://schemas.microsoft.com/office/drawing/2014/main" id="{8AE0A271-669A-49F0-A82E-C4438BEE27D9}"/>
+              </a:ext>
+            </a:extLst>
+          </p:cNvPr>
+          <p:cNvSpPr>
+            <a:spLocks xmlns:a="http://schemas.openxmlformats.org/drawingml/2006/main" noGrp="1"/>
+          </p:cNvSpPr>
+          <p:nvPr/>
+        </p:nvSpPr>
+        <p:spPr>
+          <a:xfrm xmlns:a="http://schemas.openxmlformats.org/drawingml/2006/main">
+            <a:off x="457200" y="228600"/>
+            <a:ext cx="4191000" cy="228600"/>
+          </a:xfrm>
+          <a:prstGeom xmlns:a="http://schemas.openxmlformats.org/drawingml/2006/main" prst="rect">
+            <a:avLst/>
+          </a:prstGeom>
+          <a:noFill xmlns:a="http://schemas.openxmlformats.org/drawingml/2006/main"/>
+          <a:ln xmlns:a="http://schemas.openxmlformats.org/drawingml/2006/main" w="0">
+            <a:noFill/>
+            <a:prstDash val="solid"/>
+          </a:ln>
+        </p:spPr>
+        <p:txBody>
+          <a:bodyPr xmlns:a="http://schemas.openxmlformats.org/drawingml/2006/main" wrap="square" lIns="0" tIns="0" rIns="0" bIns="0" anchor="t">
+            <a:normAutofit fontScale="100000"/>
+          </a:bodyPr>
+          <a:lstStyle xmlns:a="http://schemas.openxmlformats.org/drawingml/2006/main"/>
+          <a:p xmlns:a="http://schemas.openxmlformats.org/drawingml/2006/main">
+            <a:pPr algn="l">
+              <a:buNone/>
+              <a:defRPr sz="1200" b="1">
+                <a:solidFill>
+                  <a:srgbClr val="667384"/>
+                </a:solidFill>
+                <a:latin typeface="Arial"/>
+                <a:ea typeface="Arial"/>
+                <a:cs typeface="Arial"/>
+              </a:defRPr>
+            </a:pPr>
+            <a:r>
+              <a:rPr sz="1200" b="1">
+                <a:solidFill>
+                  <a:srgbClr val="667384"/>
+                </a:solidFill>
+                <a:latin typeface="Arial"/>
+                <a:ea typeface="Arial"/>
+                <a:cs typeface="Arial"/>
+              </a:rPr>
+              <a:t>TSLA DESCRIPTIVE MICROSCOPE</a:t>
+            </a:r>
+          </a:p>
+        </p:txBody>
+      </p:sp>
+      <p:sp>
+        <p:nvSpPr>
+          <p:cNvPr id="2" name="title-4">
+            <a:extLst xmlns:a="http://schemas.openxmlformats.org/drawingml/2006/main">
+              <a:ext uri="{FF2B5EF4-FFF2-40B4-BE49-F238E27FC236}">
+                <a16:creationId xmlns:a16="http://schemas.microsoft.com/office/drawing/2014/main" id="{50C6F92F-721A-4252-9CF8-B5C9B01C7310}"/>
+              </a:ext>
+            </a:extLst>
+          </p:cNvPr>
+          <p:cNvSpPr>
+            <a:spLocks xmlns:a="http://schemas.openxmlformats.org/drawingml/2006/main" noGrp="1"/>
+          </p:cNvSpPr>
+          <p:nvPr/>
+        </p:nvSpPr>
+        <p:spPr>
+          <a:xfrm xmlns:a="http://schemas.openxmlformats.org/drawingml/2006/main">
+            <a:off x="457200" y="533400"/>
+            <a:ext cx="11277600" cy="628650"/>
+          </a:xfrm>
+          <a:prstGeom xmlns:a="http://schemas.openxmlformats.org/drawingml/2006/main" prst="rect">
+            <a:avLst/>
+          </a:prstGeom>
+          <a:noFill xmlns:a="http://schemas.openxmlformats.org/drawingml/2006/main"/>
+          <a:ln xmlns:a="http://schemas.openxmlformats.org/drawingml/2006/main" w="0">
+            <a:noFill/>
+            <a:prstDash val="solid"/>
+          </a:ln>
+        </p:spPr>
+        <p:txBody>
+          <a:bodyPr xmlns:a="http://schemas.openxmlformats.org/drawingml/2006/main" wrap="square" lIns="0" tIns="0" rIns="0" bIns="0" anchor="t">
+            <a:normAutofit fontScale="100000"/>
+          </a:bodyPr>
+          <a:lstStyle xmlns:a="http://schemas.openxmlformats.org/drawingml/2006/main"/>
+          <a:p xmlns:a="http://schemas.openxmlformats.org/drawingml/2006/main">
+            <a:pPr algn="l">
+              <a:buNone/>
+              <a:defRPr sz="3525" b="1">
+                <a:solidFill>
+                  <a:srgbClr val="000000"/>
+                </a:solidFill>
+                <a:latin typeface="Arial"/>
+                <a:ea typeface="Arial"/>
+                <a:cs typeface="Arial"/>
+              </a:defRPr>
+            </a:pPr>
+            <a:r>
+              <a:rPr sz="3525" b="1">
+                <a:solidFill>
+                  <a:srgbClr val="000000"/>
+                </a:solidFill>
+                <a:latin typeface="Arial"/>
+                <a:ea typeface="Arial"/>
+                <a:cs typeface="Arial"/>
+              </a:rPr>
+              <a:t>Prior QQQ return reveals a medium-horizon island</a:t>
+            </a:r>
+          </a:p>
+        </p:txBody>
+      </p:sp>
+      <p:sp>
+        <p:nvSpPr>
+          <p:cNvPr id="3" name="">
+            <a:extLst xmlns:a="http://schemas.openxmlformats.org/drawingml/2006/main">
+              <a:ext uri="{FF2B5EF4-FFF2-40B4-BE49-F238E27FC236}">
+                <a16:creationId xmlns:a16="http://schemas.microsoft.com/office/drawing/2014/main" id="{242399F2-4D0A-4337-B17E-DB3599DC380F}"/>
+              </a:ext>
+            </a:extLst>
+          </p:cNvPr>
+          <p:cNvSpPr>
+            <a:spLocks xmlns:a="http://schemas.openxmlformats.org/drawingml/2006/main" noGrp="1"/>
+          </p:cNvSpPr>
+          <p:nvPr/>
+        </p:nvSpPr>
+        <p:spPr>
+          <a:xfrm xmlns:a="http://schemas.openxmlformats.org/drawingml/2006/main">
+            <a:off x="457200" y="1200150"/>
+            <a:ext cx="11277600" cy="19050"/>
+          </a:xfrm>
+          <a:prstGeom xmlns:a="http://schemas.openxmlformats.org/drawingml/2006/main" prst="rect">
+            <a:avLst/>
+          </a:prstGeom>
+          <a:solidFill xmlns:a="http://schemas.openxmlformats.org/drawingml/2006/main">
+            <a:srgbClr val="B8BCC4"/>
+          </a:solidFill>
+          <a:ln xmlns:a="http://schemas.openxmlformats.org/drawingml/2006/main" w="0">
+            <a:solidFill>
+              <a:srgbClr val="B8BCC4"/>
+            </a:solidFill>
+            <a:prstDash val="solid"/>
+          </a:ln>
+        </p:spPr>
+      </p:sp>
+      <p:sp>
+        <p:nvSpPr>
+          <p:cNvPr id="4" name="footer-left-4">
+            <a:extLst xmlns:a="http://schemas.openxmlformats.org/drawingml/2006/main">
+              <a:ext uri="{FF2B5EF4-FFF2-40B4-BE49-F238E27FC236}">
+                <a16:creationId xmlns:a16="http://schemas.microsoft.com/office/drawing/2014/main" id="{BF8B82CA-1E48-4669-BAD8-1FF8C09FCBFB}"/>
+              </a:ext>
+            </a:extLst>
+          </p:cNvPr>
+          <p:cNvSpPr>
+            <a:spLocks xmlns:a="http://schemas.openxmlformats.org/drawingml/2006/main" noGrp="1"/>
+          </p:cNvSpPr>
+          <p:nvPr/>
+        </p:nvSpPr>
+        <p:spPr>
+          <a:xfrm xmlns:a="http://schemas.openxmlformats.org/drawingml/2006/main">
+            <a:off x="457200" y="6515100"/>
+            <a:ext cx="3429000" cy="171450"/>
+          </a:xfrm>
+          <a:prstGeom xmlns:a="http://schemas.openxmlformats.org/drawingml/2006/main" prst="rect">
+            <a:avLst/>
+          </a:prstGeom>
+          <a:noFill xmlns:a="http://schemas.openxmlformats.org/drawingml/2006/main"/>
+          <a:ln xmlns:a="http://schemas.openxmlformats.org/drawingml/2006/main" w="0">
+            <a:noFill/>
+            <a:prstDash val="solid"/>
+          </a:ln>
+        </p:spPr>
+        <p:txBody>
+          <a:bodyPr xmlns:a="http://schemas.openxmlformats.org/drawingml/2006/main" wrap="square" lIns="0" tIns="0" rIns="0" bIns="0" anchor="t">
+            <a:normAutofit fontScale="100000"/>
+          </a:bodyPr>
+          <a:lstStyle xmlns:a="http://schemas.openxmlformats.org/drawingml/2006/main"/>
+          <a:p xmlns:a="http://schemas.openxmlformats.org/drawingml/2006/main">
+            <a:pPr algn="l">
+              <a:buNone/>
+              <a:defRPr sz="1050" b="0">
+                <a:solidFill>
+                  <a:srgbClr val="667384"/>
+                </a:solidFill>
+                <a:latin typeface="Arial"/>
+                <a:ea typeface="Arial"/>
+                <a:cs typeface="Arial"/>
+              </a:defRPr>
+            </a:pPr>
+            <a:r>
+              <a:rPr sz="1050" b="0">
+                <a:solidFill>
+                  <a:srgbClr val="667384"/>
+                </a:solidFill>
+                <a:latin typeface="Arial"/>
+                <a:ea typeface="Arial"/>
+                <a:cs typeface="Arial"/>
+              </a:rPr>
+              <a:t>Adjusted daily TSLA | 2018-2023</a:t>
+            </a:r>
+          </a:p>
+        </p:txBody>
+      </p:sp>
+      <p:sp>
+        <p:nvSpPr>
+          <p:cNvPr id="5" name="footer-number-4">
+            <a:extLst xmlns:a="http://schemas.openxmlformats.org/drawingml/2006/main">
+              <a:ext uri="{FF2B5EF4-FFF2-40B4-BE49-F238E27FC236}">
+                <a16:creationId xmlns:a16="http://schemas.microsoft.com/office/drawing/2014/main" id="{05959AEC-B0A5-45F0-A65B-C94C3E5A032F}"/>
+              </a:ext>
+            </a:extLst>
+          </p:cNvPr>
+          <p:cNvSpPr>
+            <a:spLocks xmlns:a="http://schemas.openxmlformats.org/drawingml/2006/main" noGrp="1"/>
+          </p:cNvSpPr>
+          <p:nvPr/>
+        </p:nvSpPr>
+        <p:spPr>
+          <a:xfrm xmlns:a="http://schemas.openxmlformats.org/drawingml/2006/main">
+            <a:off x="11239500" y="6496050"/>
+            <a:ext cx="495300" cy="190500"/>
+          </a:xfrm>
+          <a:prstGeom xmlns:a="http://schemas.openxmlformats.org/drawingml/2006/main" prst="rect">
+            <a:avLst/>
+          </a:prstGeom>
+          <a:noFill xmlns:a="http://schemas.openxmlformats.org/drawingml/2006/main"/>
+          <a:ln xmlns:a="http://schemas.openxmlformats.org/drawingml/2006/main" w="0">
+            <a:noFill/>
+            <a:prstDash val="solid"/>
+          </a:ln>
+        </p:spPr>
+        <p:txBody>
+          <a:bodyPr xmlns:a="http://schemas.openxmlformats.org/drawingml/2006/main" wrap="square" lIns="0" tIns="0" rIns="0" bIns="0" anchor="t">
+            <a:normAutofit fontScale="100000"/>
+          </a:bodyPr>
+          <a:lstStyle xmlns:a="http://schemas.openxmlformats.org/drawingml/2006/main"/>
+          <a:p xmlns:a="http://schemas.openxmlformats.org/drawingml/2006/main">
+            <a:pPr algn="r">
+              <a:buNone/>
+              <a:defRPr sz="1050" b="0">
+                <a:solidFill>
+                  <a:srgbClr val="667384"/>
+                </a:solidFill>
+                <a:latin typeface="Arial"/>
+                <a:ea typeface="Arial"/>
+                <a:cs typeface="Arial"/>
+              </a:defRPr>
+            </a:pPr>
+            <a:r>
+              <a:rPr sz="1050" b="0">
+                <a:solidFill>
+                  <a:srgbClr val="667384"/>
+                </a:solidFill>
+                <a:latin typeface="Arial"/>
+                <a:ea typeface="Arial"/>
+                <a:cs typeface="Arial"/>
+              </a:rPr>
+              <a:t>50</a:t>
+            </a:r>
+          </a:p>
+        </p:txBody>
+      </p:sp>
+      <p:sp>
+        <p:nvSpPr>
+          <p:cNvPr id="6" name="">
+            <a:extLst xmlns:a="http://schemas.openxmlformats.org/drawingml/2006/main">
+              <a:ext uri="{FF2B5EF4-FFF2-40B4-BE49-F238E27FC236}">
+                <a16:creationId xmlns:a16="http://schemas.microsoft.com/office/drawing/2014/main" id="{9C8DEA29-E57D-4C8D-8538-2028FF89DA7C}"/>
+              </a:ext>
+            </a:extLst>
+          </p:cNvPr>
+          <p:cNvSpPr>
+            <a:spLocks xmlns:a="http://schemas.openxmlformats.org/drawingml/2006/main" noGrp="1"/>
+          </p:cNvSpPr>
+          <p:nvPr/>
+        </p:nvSpPr>
+        <p:spPr>
+          <a:xfrm xmlns:a="http://schemas.openxmlformats.org/drawingml/2006/main">
+            <a:off x="1000125" y="1352550"/>
+            <a:ext cx="10191750" cy="4905375"/>
+          </a:xfrm>
+          <a:prstGeom xmlns:a="http://schemas.openxmlformats.org/drawingml/2006/main" prst="rect">
+            <a:avLst/>
+          </a:prstGeom>
+          <a:solidFill xmlns:a="http://schemas.openxmlformats.org/drawingml/2006/main">
+            <a:srgbClr val="FFFFFF"/>
+          </a:solidFill>
+          <a:ln xmlns:a="http://schemas.openxmlformats.org/drawingml/2006/main" w="9525">
+            <a:solidFill>
+              <a:srgbClr val="B8BCC4"/>
+            </a:solidFill>
+            <a:prstDash val="solid"/>
+          </a:ln>
+        </p:spPr>
+      </p:sp>
+      <p:sp>
+        <p:nvSpPr>
+          <p:cNvPr id="8" name="">
+            <a:extLst xmlns:a="http://schemas.openxmlformats.org/drawingml/2006/main">
+              <a:ext uri="{FF2B5EF4-FFF2-40B4-BE49-F238E27FC236}">
+                <a16:creationId xmlns:a16="http://schemas.microsoft.com/office/drawing/2014/main" id="{4346A5F2-8CC4-4151-9BDB-346D47A3096B}"/>
+              </a:ext>
+            </a:extLst>
+          </p:cNvPr>
+          <p:cNvSpPr>
+            <a:spLocks xmlns:a="http://schemas.openxmlformats.org/drawingml/2006/main" noGrp="1"/>
+          </p:cNvSpPr>
+          <p:nvPr/>
+        </p:nvSpPr>
+        <p:spPr>
+          <a:xfrm xmlns:a="http://schemas.openxmlformats.org/drawingml/2006/main">
+            <a:off x="1143000" y="6286500"/>
+            <a:ext cx="9906000" cy="171450"/>
+          </a:xfrm>
+          <a:prstGeom xmlns:a="http://schemas.openxmlformats.org/drawingml/2006/main" prst="rect">
+            <a:avLst/>
+          </a:prstGeom>
+          <a:noFill xmlns:a="http://schemas.openxmlformats.org/drawingml/2006/main"/>
+          <a:ln xmlns:a="http://schemas.openxmlformats.org/drawingml/2006/main" w="0">
+            <a:noFill/>
+            <a:prstDash val="solid"/>
+          </a:ln>
+        </p:spPr>
+        <p:txBody>
+          <a:bodyPr xmlns:a="http://schemas.openxmlformats.org/drawingml/2006/main" wrap="square" lIns="0" tIns="0" rIns="0" bIns="0" anchor="t">
+            <a:normAutofit fontScale="93750"/>
+          </a:bodyPr>
+          <a:lstStyle xmlns:a="http://schemas.openxmlformats.org/drawingml/2006/main"/>
+          <a:p xmlns:a="http://schemas.openxmlformats.org/drawingml/2006/main">
+            <a:pPr algn="ctr">
+              <a:buNone/>
+              <a:defRPr sz="1200" b="0">
+                <a:solidFill>
+                  <a:srgbClr val="667384"/>
+                </a:solidFill>
+                <a:latin typeface="Arial"/>
+                <a:ea typeface="Arial"/>
+                <a:cs typeface="Arial"/>
+              </a:defRPr>
+            </a:pPr>
+            <a:r>
+              <a:rPr sz="1200" b="0">
+                <a:solidFill>
+                  <a:srgbClr val="667384"/>
+                </a:solidFill>
+                <a:latin typeface="Arial"/>
+                <a:ea typeface="Arial"/>
+                <a:cs typeface="Arial"/>
+              </a:rPr>
+              <a:t>72/81 cells positive; strongest +0.134 at 10 prior / 10 forward; family q = 0.361, so 0/81 passes.</a:t>
+            </a:r>
+          </a:p>
+        </p:txBody>
+      </p:sp>
+      <p:pic>
+        <p:nvPicPr>
+          <p:cNvPr id="19" name=""/>
+          <p:cNvPicPr>
+            <a:picLocks xmlns:a="http://schemas.openxmlformats.org/drawingml/2006/main" noChangeAspect="1"/>
+          </p:cNvPicPr>
+          <p:nvPr/>
+        </p:nvPicPr>
+        <p:blipFill>
+          <a:blip xmlns:r="http://schemas.openxmlformats.org/officeDocument/2006/relationships" xmlns:a="http://schemas.openxmlformats.org/drawingml/2006/main" r:embed="R9617acbdd661423a"/>
+          <a:stretch xmlns:a="http://schemas.openxmlformats.org/drawingml/2006/main"/>
+        </p:blipFill>
+        <p:spPr>
+          <a:xfrm xmlns:a="http://schemas.openxmlformats.org/drawingml/2006/main" flipH="0" flipV="0">
+            <a:off x="2942545" y="1352550"/>
+            <a:ext cx="6306911" cy="4905375"/>
+          </a:xfrm>
+          <a:prstGeom xmlns:a="http://schemas.openxmlformats.org/drawingml/2006/main" prst="rect">
+            <a:avLst/>
+          </a:prstGeom>
+        </p:spPr>
+      </p:pic>
+      <p:pic>
+        <p:nvPicPr>
+          <p:cNvPr id="20" name=""/>
+          <p:cNvPicPr>
+            <a:picLocks xmlns:a="http://schemas.openxmlformats.org/drawingml/2006/main" noChangeAspect="1"/>
+          </p:cNvPicPr>
+          <p:nvPr/>
+        </p:nvPicPr>
+        <p:blipFill>
+          <a:blip xmlns:r="http://schemas.openxmlformats.org/officeDocument/2006/relationships" xmlns:a="http://schemas.openxmlformats.org/drawingml/2006/main" r:embed="R746b396aef224c3d"/>
+          <a:stretch xmlns:a="http://schemas.openxmlformats.org/drawingml/2006/main"/>
+        </p:blipFill>
+        <p:spPr>
+          <a:xfrm xmlns:a="http://schemas.openxmlformats.org/drawingml/2006/main" flipH="0" flipV="0">
+            <a:off x="2942545" y="1352550"/>
+            <a:ext cx="6306911" cy="4905375"/>
+          </a:xfrm>
+          <a:prstGeom xmlns:a="http://schemas.openxmlformats.org/drawingml/2006/main" prst="rect">
+            <a:avLst/>
+          </a:prstGeom>
+        </p:spPr>
+      </p:pic>
+    </p:spTree>
+    <p:extLst>
+      <p:ext uri="{BB962C8B-B14F-4D97-AF65-F5344CB8AC3E}">
+        <p14:creationId xmlns:p14="http://schemas.microsoft.com/office/powerpoint/2010/main" val="400872380"/>
+      </p:ext>
+    </p:extLst>
+  </p:cSld>
+</p:sld>
+</file>
+
+<file path=ppt/slides/slide51.xml><?xml version="1.0" encoding="utf-8"?>
+<p:sld xmlns:p="http://schemas.openxmlformats.org/presentationml/2006/main">
+  <p:cSld>
+    <p:bg>
+      <p:bgPr>
+        <a:solidFill xmlns:a="http://schemas.openxmlformats.org/drawingml/2006/main">
+          <a:srgbClr val="FFFFFF"/>
+        </a:solidFill>
+      </p:bgPr>
+    </p:bg>
+    <p:spTree>
+      <p:nvGrpSpPr>
+        <p:cNvPr id="1" name=""/>
+        <p:cNvGrpSpPr/>
+        <p:nvPr/>
+      </p:nvGrpSpPr>
+      <p:grpSpPr>
+        <a:xfrm xmlns:a="http://schemas.openxmlformats.org/drawingml/2006/main"/>
+      </p:grpSpPr>
+      <p:sp>
+        <p:nvSpPr>
+          <p:cNvPr id="9" name="section-4">
+            <a:extLst xmlns:a="http://schemas.openxmlformats.org/drawingml/2006/main">
+              <a:ext uri="{FF2B5EF4-FFF2-40B4-BE49-F238E27FC236}">
+                <a16:creationId xmlns:a16="http://schemas.microsoft.com/office/drawing/2014/main" id="{8AE0A271-669A-49F0-A82E-C4438BEE27D9}"/>
+              </a:ext>
+            </a:extLst>
+          </p:cNvPr>
+          <p:cNvSpPr>
+            <a:spLocks xmlns:a="http://schemas.openxmlformats.org/drawingml/2006/main" noGrp="1"/>
+          </p:cNvSpPr>
+          <p:nvPr/>
+        </p:nvSpPr>
+        <p:spPr>
+          <a:xfrm xmlns:a="http://schemas.openxmlformats.org/drawingml/2006/main">
+            <a:off x="457200" y="228600"/>
+            <a:ext cx="4191000" cy="228600"/>
+          </a:xfrm>
+          <a:prstGeom xmlns:a="http://schemas.openxmlformats.org/drawingml/2006/main" prst="rect">
+            <a:avLst/>
+          </a:prstGeom>
+          <a:noFill xmlns:a="http://schemas.openxmlformats.org/drawingml/2006/main"/>
+          <a:ln xmlns:a="http://schemas.openxmlformats.org/drawingml/2006/main" w="0">
+            <a:noFill/>
+            <a:prstDash val="solid"/>
+          </a:ln>
+        </p:spPr>
+        <p:txBody>
+          <a:bodyPr xmlns:a="http://schemas.openxmlformats.org/drawingml/2006/main" wrap="square" lIns="0" tIns="0" rIns="0" bIns="0" anchor="t">
+            <a:normAutofit fontScale="100000"/>
+          </a:bodyPr>
+          <a:lstStyle xmlns:a="http://schemas.openxmlformats.org/drawingml/2006/main"/>
+          <a:p xmlns:a="http://schemas.openxmlformats.org/drawingml/2006/main">
+            <a:pPr algn="l">
+              <a:buNone/>
+              <a:defRPr sz="1200" b="1">
+                <a:solidFill>
+                  <a:srgbClr val="667384"/>
+                </a:solidFill>
+                <a:latin typeface="Arial"/>
+                <a:ea typeface="Arial"/>
+                <a:cs typeface="Arial"/>
+              </a:defRPr>
+            </a:pPr>
+            <a:r>
+              <a:rPr sz="1200" b="1">
+                <a:solidFill>
+                  <a:srgbClr val="667384"/>
+                </a:solidFill>
+                <a:latin typeface="Arial"/>
+                <a:ea typeface="Arial"/>
+                <a:cs typeface="Arial"/>
+              </a:rPr>
+              <a:t>TSLA DESCRIPTIVE MICROSCOPE</a:t>
+            </a:r>
+          </a:p>
+        </p:txBody>
+      </p:sp>
+      <p:sp>
+        <p:nvSpPr>
+          <p:cNvPr id="2" name="title-4">
+            <a:extLst xmlns:a="http://schemas.openxmlformats.org/drawingml/2006/main">
+              <a:ext uri="{FF2B5EF4-FFF2-40B4-BE49-F238E27FC236}">
+                <a16:creationId xmlns:a16="http://schemas.microsoft.com/office/drawing/2014/main" id="{50C6F92F-721A-4252-9CF8-B5C9B01C7310}"/>
+              </a:ext>
+            </a:extLst>
+          </p:cNvPr>
+          <p:cNvSpPr>
+            <a:spLocks xmlns:a="http://schemas.openxmlformats.org/drawingml/2006/main" noGrp="1"/>
+          </p:cNvSpPr>
+          <p:nvPr/>
+        </p:nvSpPr>
+        <p:spPr>
+          <a:xfrm xmlns:a="http://schemas.openxmlformats.org/drawingml/2006/main">
+            <a:off x="457200" y="533400"/>
+            <a:ext cx="11277600" cy="628650"/>
+          </a:xfrm>
+          <a:prstGeom xmlns:a="http://schemas.openxmlformats.org/drawingml/2006/main" prst="rect">
+            <a:avLst/>
+          </a:prstGeom>
+          <a:noFill xmlns:a="http://schemas.openxmlformats.org/drawingml/2006/main"/>
+          <a:ln xmlns:a="http://schemas.openxmlformats.org/drawingml/2006/main" w="0">
+            <a:noFill/>
+            <a:prstDash val="solid"/>
+          </a:ln>
+        </p:spPr>
+        <p:txBody>
+          <a:bodyPr xmlns:a="http://schemas.openxmlformats.org/drawingml/2006/main" wrap="square" lIns="0" tIns="0" rIns="0" bIns="0" anchor="t">
+            <a:normAutofit fontScale="100000"/>
+          </a:bodyPr>
+          <a:lstStyle xmlns:a="http://schemas.openxmlformats.org/drawingml/2006/main"/>
+          <a:p xmlns:a="http://schemas.openxmlformats.org/drawingml/2006/main">
+            <a:pPr algn="l">
+              <a:buNone/>
+              <a:defRPr sz="3525" b="1">
+                <a:solidFill>
+                  <a:srgbClr val="000000"/>
+                </a:solidFill>
+                <a:latin typeface="Arial"/>
+                <a:ea typeface="Arial"/>
+                <a:cs typeface="Arial"/>
+              </a:defRPr>
+            </a:pPr>
+            <a:r>
+              <a:rPr sz="3525" b="1">
+                <a:solidFill>
+                  <a:srgbClr val="000000"/>
+                </a:solidFill>
+                <a:latin typeface="Arial"/>
+                <a:ea typeface="Arial"/>
+                <a:cs typeface="Arial"/>
+              </a:rPr>
+              <a:t>Prior SPY return traces the same, weaker island</a:t>
+            </a:r>
+          </a:p>
+        </p:txBody>
+      </p:sp>
+      <p:sp>
+        <p:nvSpPr>
+          <p:cNvPr id="3" name="">
+            <a:extLst xmlns:a="http://schemas.openxmlformats.org/drawingml/2006/main">
+              <a:ext uri="{FF2B5EF4-FFF2-40B4-BE49-F238E27FC236}">
+                <a16:creationId xmlns:a16="http://schemas.microsoft.com/office/drawing/2014/main" id="{242399F2-4D0A-4337-B17E-DB3599DC380F}"/>
+              </a:ext>
+            </a:extLst>
+          </p:cNvPr>
+          <p:cNvSpPr>
+            <a:spLocks xmlns:a="http://schemas.openxmlformats.org/drawingml/2006/main" noGrp="1"/>
+          </p:cNvSpPr>
+          <p:nvPr/>
+        </p:nvSpPr>
+        <p:spPr>
+          <a:xfrm xmlns:a="http://schemas.openxmlformats.org/drawingml/2006/main">
+            <a:off x="457200" y="1200150"/>
+            <a:ext cx="11277600" cy="19050"/>
+          </a:xfrm>
+          <a:prstGeom xmlns:a="http://schemas.openxmlformats.org/drawingml/2006/main" prst="rect">
+            <a:avLst/>
+          </a:prstGeom>
+          <a:solidFill xmlns:a="http://schemas.openxmlformats.org/drawingml/2006/main">
+            <a:srgbClr val="B8BCC4"/>
+          </a:solidFill>
+          <a:ln xmlns:a="http://schemas.openxmlformats.org/drawingml/2006/main" w="0">
+            <a:solidFill>
+              <a:srgbClr val="B8BCC4"/>
+            </a:solidFill>
+            <a:prstDash val="solid"/>
+          </a:ln>
+        </p:spPr>
+      </p:sp>
+      <p:sp>
+        <p:nvSpPr>
+          <p:cNvPr id="4" name="footer-left-4">
+            <a:extLst xmlns:a="http://schemas.openxmlformats.org/drawingml/2006/main">
+              <a:ext uri="{FF2B5EF4-FFF2-40B4-BE49-F238E27FC236}">
+                <a16:creationId xmlns:a16="http://schemas.microsoft.com/office/drawing/2014/main" id="{BF8B82CA-1E48-4669-BAD8-1FF8C09FCBFB}"/>
+              </a:ext>
+            </a:extLst>
+          </p:cNvPr>
+          <p:cNvSpPr>
+            <a:spLocks xmlns:a="http://schemas.openxmlformats.org/drawingml/2006/main" noGrp="1"/>
+          </p:cNvSpPr>
+          <p:nvPr/>
+        </p:nvSpPr>
+        <p:spPr>
+          <a:xfrm xmlns:a="http://schemas.openxmlformats.org/drawingml/2006/main">
+            <a:off x="457200" y="6515100"/>
+            <a:ext cx="3429000" cy="171450"/>
+          </a:xfrm>
+          <a:prstGeom xmlns:a="http://schemas.openxmlformats.org/drawingml/2006/main" prst="rect">
+            <a:avLst/>
+          </a:prstGeom>
+          <a:noFill xmlns:a="http://schemas.openxmlformats.org/drawingml/2006/main"/>
+          <a:ln xmlns:a="http://schemas.openxmlformats.org/drawingml/2006/main" w="0">
+            <a:noFill/>
+            <a:prstDash val="solid"/>
+          </a:ln>
+        </p:spPr>
+        <p:txBody>
+          <a:bodyPr xmlns:a="http://schemas.openxmlformats.org/drawingml/2006/main" wrap="square" lIns="0" tIns="0" rIns="0" bIns="0" anchor="t">
+            <a:normAutofit fontScale="100000"/>
+          </a:bodyPr>
+          <a:lstStyle xmlns:a="http://schemas.openxmlformats.org/drawingml/2006/main"/>
+          <a:p xmlns:a="http://schemas.openxmlformats.org/drawingml/2006/main">
+            <a:pPr algn="l">
+              <a:buNone/>
+              <a:defRPr sz="1050" b="0">
+                <a:solidFill>
+                  <a:srgbClr val="667384"/>
+                </a:solidFill>
+                <a:latin typeface="Arial"/>
+                <a:ea typeface="Arial"/>
+                <a:cs typeface="Arial"/>
+              </a:defRPr>
+            </a:pPr>
+            <a:r>
+              <a:rPr sz="1050" b="0">
+                <a:solidFill>
+                  <a:srgbClr val="667384"/>
+                </a:solidFill>
+                <a:latin typeface="Arial"/>
+                <a:ea typeface="Arial"/>
+                <a:cs typeface="Arial"/>
+              </a:rPr>
+              <a:t>Adjusted daily TSLA | 2018-2023</a:t>
+            </a:r>
+          </a:p>
+        </p:txBody>
+      </p:sp>
+      <p:sp>
+        <p:nvSpPr>
+          <p:cNvPr id="5" name="footer-number-4">
+            <a:extLst xmlns:a="http://schemas.openxmlformats.org/drawingml/2006/main">
+              <a:ext uri="{FF2B5EF4-FFF2-40B4-BE49-F238E27FC236}">
+                <a16:creationId xmlns:a16="http://schemas.microsoft.com/office/drawing/2014/main" id="{05959AEC-B0A5-45F0-A65B-C94C3E5A032F}"/>
+              </a:ext>
+            </a:extLst>
+          </p:cNvPr>
+          <p:cNvSpPr>
+            <a:spLocks xmlns:a="http://schemas.openxmlformats.org/drawingml/2006/main" noGrp="1"/>
+          </p:cNvSpPr>
+          <p:nvPr/>
+        </p:nvSpPr>
+        <p:spPr>
+          <a:xfrm xmlns:a="http://schemas.openxmlformats.org/drawingml/2006/main">
+            <a:off x="11239500" y="6496050"/>
+            <a:ext cx="495300" cy="190500"/>
+          </a:xfrm>
+          <a:prstGeom xmlns:a="http://schemas.openxmlformats.org/drawingml/2006/main" prst="rect">
+            <a:avLst/>
+          </a:prstGeom>
+          <a:noFill xmlns:a="http://schemas.openxmlformats.org/drawingml/2006/main"/>
+          <a:ln xmlns:a="http://schemas.openxmlformats.org/drawingml/2006/main" w="0">
+            <a:noFill/>
+            <a:prstDash val="solid"/>
+          </a:ln>
+        </p:spPr>
+        <p:txBody>
+          <a:bodyPr xmlns:a="http://schemas.openxmlformats.org/drawingml/2006/main" wrap="square" lIns="0" tIns="0" rIns="0" bIns="0" anchor="t">
+            <a:normAutofit fontScale="100000"/>
+          </a:bodyPr>
+          <a:lstStyle xmlns:a="http://schemas.openxmlformats.org/drawingml/2006/main"/>
+          <a:p xmlns:a="http://schemas.openxmlformats.org/drawingml/2006/main">
+            <a:pPr algn="r">
+              <a:buNone/>
+              <a:defRPr sz="1050" b="0">
+                <a:solidFill>
+                  <a:srgbClr val="667384"/>
+                </a:solidFill>
+                <a:latin typeface="Arial"/>
+                <a:ea typeface="Arial"/>
+                <a:cs typeface="Arial"/>
+              </a:defRPr>
+            </a:pPr>
+            <a:r>
+              <a:rPr sz="1050" b="0">
+                <a:solidFill>
+                  <a:srgbClr val="667384"/>
+                </a:solidFill>
+                <a:latin typeface="Arial"/>
+                <a:ea typeface="Arial"/>
+                <a:cs typeface="Arial"/>
+              </a:rPr>
+              <a:t>51</a:t>
+            </a:r>
+          </a:p>
+        </p:txBody>
+      </p:sp>
+      <p:sp>
+        <p:nvSpPr>
+          <p:cNvPr id="6" name="">
+            <a:extLst xmlns:a="http://schemas.openxmlformats.org/drawingml/2006/main">
+              <a:ext uri="{FF2B5EF4-FFF2-40B4-BE49-F238E27FC236}">
+                <a16:creationId xmlns:a16="http://schemas.microsoft.com/office/drawing/2014/main" id="{9C8DEA29-E57D-4C8D-8538-2028FF89DA7C}"/>
+              </a:ext>
+            </a:extLst>
+          </p:cNvPr>
+          <p:cNvSpPr>
+            <a:spLocks xmlns:a="http://schemas.openxmlformats.org/drawingml/2006/main" noGrp="1"/>
+          </p:cNvSpPr>
+          <p:nvPr/>
+        </p:nvSpPr>
+        <p:spPr>
+          <a:xfrm xmlns:a="http://schemas.openxmlformats.org/drawingml/2006/main">
+            <a:off x="1000125" y="1352550"/>
+            <a:ext cx="10191750" cy="4905375"/>
+          </a:xfrm>
+          <a:prstGeom xmlns:a="http://schemas.openxmlformats.org/drawingml/2006/main" prst="rect">
+            <a:avLst/>
+          </a:prstGeom>
+          <a:solidFill xmlns:a="http://schemas.openxmlformats.org/drawingml/2006/main">
+            <a:srgbClr val="FFFFFF"/>
+          </a:solidFill>
+          <a:ln xmlns:a="http://schemas.openxmlformats.org/drawingml/2006/main" w="9525">
+            <a:solidFill>
+              <a:srgbClr val="B8BCC4"/>
+            </a:solidFill>
+            <a:prstDash val="solid"/>
+          </a:ln>
+        </p:spPr>
+      </p:sp>
+      <p:sp>
+        <p:nvSpPr>
+          <p:cNvPr id="8" name="">
+            <a:extLst xmlns:a="http://schemas.openxmlformats.org/drawingml/2006/main">
+              <a:ext uri="{FF2B5EF4-FFF2-40B4-BE49-F238E27FC236}">
+                <a16:creationId xmlns:a16="http://schemas.microsoft.com/office/drawing/2014/main" id="{4346A5F2-8CC4-4151-9BDB-346D47A3096B}"/>
+              </a:ext>
+            </a:extLst>
+          </p:cNvPr>
+          <p:cNvSpPr>
+            <a:spLocks xmlns:a="http://schemas.openxmlformats.org/drawingml/2006/main" noGrp="1"/>
+          </p:cNvSpPr>
+          <p:nvPr/>
+        </p:nvSpPr>
+        <p:spPr>
+          <a:xfrm xmlns:a="http://schemas.openxmlformats.org/drawingml/2006/main">
+            <a:off x="1143000" y="6286500"/>
+            <a:ext cx="9906000" cy="171450"/>
+          </a:xfrm>
+          <a:prstGeom xmlns:a="http://schemas.openxmlformats.org/drawingml/2006/main" prst="rect">
+            <a:avLst/>
+          </a:prstGeom>
+          <a:noFill xmlns:a="http://schemas.openxmlformats.org/drawingml/2006/main"/>
+          <a:ln xmlns:a="http://schemas.openxmlformats.org/drawingml/2006/main" w="0">
+            <a:noFill/>
+            <a:prstDash val="solid"/>
+          </a:ln>
+        </p:spPr>
+        <p:txBody>
+          <a:bodyPr xmlns:a="http://schemas.openxmlformats.org/drawingml/2006/main" wrap="square" lIns="0" tIns="0" rIns="0" bIns="0" anchor="t">
+            <a:normAutofit fontScale="93750"/>
+          </a:bodyPr>
+          <a:lstStyle xmlns:a="http://schemas.openxmlformats.org/drawingml/2006/main"/>
+          <a:p xmlns:a="http://schemas.openxmlformats.org/drawingml/2006/main">
+            <a:pPr algn="ctr">
+              <a:buNone/>
+              <a:defRPr sz="1200" b="0">
+                <a:solidFill>
+                  <a:srgbClr val="667384"/>
+                </a:solidFill>
+                <a:latin typeface="Arial"/>
+                <a:ea typeface="Arial"/>
+                <a:cs typeface="Arial"/>
+              </a:defRPr>
+            </a:pPr>
+            <a:r>
+              <a:rPr sz="1200" b="0">
+                <a:solidFill>
+                  <a:srgbClr val="667384"/>
+                </a:solidFill>
+                <a:latin typeface="Arial"/>
+                <a:ea typeface="Arial"/>
+                <a:cs typeface="Arial"/>
+              </a:rPr>
+              <a:t>70/81 cells positive; strongest +0.111 at 10 prior / 5 forward; family q = 0.662, so 0/81 passes.</a:t>
+            </a:r>
+          </a:p>
+        </p:txBody>
+      </p:sp>
+      <p:pic>
+        <p:nvPicPr>
+          <p:cNvPr id="19" name=""/>
+          <p:cNvPicPr>
+            <a:picLocks xmlns:a="http://schemas.openxmlformats.org/drawingml/2006/main" noChangeAspect="1"/>
+          </p:cNvPicPr>
+          <p:nvPr/>
+        </p:nvPicPr>
+        <p:blipFill>
+          <a:blip xmlns:r="http://schemas.openxmlformats.org/officeDocument/2006/relationships" xmlns:a="http://schemas.openxmlformats.org/drawingml/2006/main" r:embed="Rea9e525c0de64db1"/>
+          <a:stretch xmlns:a="http://schemas.openxmlformats.org/drawingml/2006/main"/>
+        </p:blipFill>
+        <p:spPr>
+          <a:xfrm xmlns:a="http://schemas.openxmlformats.org/drawingml/2006/main" flipH="0" flipV="0">
+            <a:off x="2942545" y="1352550"/>
+            <a:ext cx="6306911" cy="4905375"/>
+          </a:xfrm>
+          <a:prstGeom xmlns:a="http://schemas.openxmlformats.org/drawingml/2006/main" prst="rect">
+            <a:avLst/>
+          </a:prstGeom>
+        </p:spPr>
+      </p:pic>
+      <p:pic>
+        <p:nvPicPr>
+          <p:cNvPr id="20" name=""/>
+          <p:cNvPicPr>
+            <a:picLocks xmlns:a="http://schemas.openxmlformats.org/drawingml/2006/main" noChangeAspect="1"/>
+          </p:cNvPicPr>
+          <p:nvPr/>
+        </p:nvPicPr>
+        <p:blipFill>
+          <a:blip xmlns:r="http://schemas.openxmlformats.org/officeDocument/2006/relationships" xmlns:a="http://schemas.openxmlformats.org/drawingml/2006/main" r:embed="Rdd307b45b41c40b5"/>
+          <a:stretch xmlns:a="http://schemas.openxmlformats.org/drawingml/2006/main"/>
+        </p:blipFill>
+        <p:spPr>
+          <a:xfrm xmlns:a="http://schemas.openxmlformats.org/drawingml/2006/main" flipH="0" flipV="0">
+            <a:off x="2942545" y="1352550"/>
+            <a:ext cx="6306911" cy="4905375"/>
+          </a:xfrm>
+          <a:prstGeom xmlns:a="http://schemas.openxmlformats.org/drawingml/2006/main" prst="rect">
+            <a:avLst/>
+          </a:prstGeom>
+        </p:spPr>
+      </p:pic>
+    </p:spTree>
+    <p:extLst>
+      <p:ext uri="{BB962C8B-B14F-4D97-AF65-F5344CB8AC3E}">
+        <p14:creationId xmlns:p14="http://schemas.microsoft.com/office/powerpoint/2010/main" val="400872380"/>
+      </p:ext>
+    </p:extLst>
+  </p:cSld>
+</p:sld>
+</file>
+
+<file path=ppt/slides/slide52.xml><?xml version="1.0" encoding="utf-8"?>
+<p:sld xmlns:p="http://schemas.openxmlformats.org/presentationml/2006/main">
+  <p:cSld>
+    <p:bg>
+      <p:bgPr>
+        <a:solidFill xmlns:a="http://schemas.openxmlformats.org/drawingml/2006/main">
+          <a:srgbClr val="FFFFFF"/>
+        </a:solidFill>
+      </p:bgPr>
+    </p:bg>
+    <p:spTree>
+      <p:nvGrpSpPr>
+        <p:cNvPr id="1" name=""/>
+        <p:cNvGrpSpPr/>
+        <p:nvPr/>
+      </p:nvGrpSpPr>
+      <p:grpSpPr>
+        <a:xfrm xmlns:a="http://schemas.openxmlformats.org/drawingml/2006/main"/>
+      </p:grpSpPr>
+      <p:sp>
+        <p:nvSpPr>
+          <p:cNvPr id="20" name="section-7">
+            <a:extLst xmlns:a="http://schemas.openxmlformats.org/drawingml/2006/main">
+              <a:ext uri="{FF2B5EF4-FFF2-40B4-BE49-F238E27FC236}">
+                <a16:creationId xmlns:a16="http://schemas.microsoft.com/office/drawing/2014/main" id="{BAC8373F-594E-467B-A8F8-56439CEBE044}"/>
+              </a:ext>
+            </a:extLst>
+          </p:cNvPr>
+          <p:cNvSpPr>
+            <a:spLocks xmlns:a="http://schemas.openxmlformats.org/drawingml/2006/main" noGrp="1"/>
+          </p:cNvSpPr>
+          <p:nvPr/>
+        </p:nvSpPr>
+        <p:spPr>
+          <a:xfrm xmlns:a="http://schemas.openxmlformats.org/drawingml/2006/main">
+            <a:off x="457200" y="228600"/>
+            <a:ext cx="4191000" cy="228600"/>
+          </a:xfrm>
+          <a:prstGeom xmlns:a="http://schemas.openxmlformats.org/drawingml/2006/main" prst="rect">
+            <a:avLst/>
+          </a:prstGeom>
+          <a:noFill xmlns:a="http://schemas.openxmlformats.org/drawingml/2006/main"/>
+          <a:ln xmlns:a="http://schemas.openxmlformats.org/drawingml/2006/main" w="0">
+            <a:noFill/>
+            <a:prstDash val="solid"/>
+          </a:ln>
+        </p:spPr>
+        <p:txBody>
+          <a:bodyPr xmlns:a="http://schemas.openxmlformats.org/drawingml/2006/main" wrap="square" lIns="0" tIns="0" rIns="0" bIns="0" anchor="t">
+            <a:normAutofit fontScale="100000"/>
+          </a:bodyPr>
+          <a:lstStyle xmlns:a="http://schemas.openxmlformats.org/drawingml/2006/main"/>
+          <a:p xmlns:a="http://schemas.openxmlformats.org/drawingml/2006/main">
+            <a:pPr algn="l">
+              <a:buNone/>
+              <a:defRPr sz="1200" b="1">
+                <a:solidFill>
+                  <a:srgbClr val="667384"/>
+                </a:solidFill>
+                <a:latin typeface="Arial"/>
+                <a:ea typeface="Arial"/>
+                <a:cs typeface="Arial"/>
+              </a:defRPr>
+            </a:pPr>
+            <a:r>
+              <a:rPr sz="1200" b="1">
+                <a:solidFill>
+                  <a:srgbClr val="667384"/>
+                </a:solidFill>
+                <a:latin typeface="Arial"/>
+                <a:ea typeface="Arial"/>
+                <a:cs typeface="Arial"/>
+              </a:rPr>
+              <a:t>TSLA DESCRIPTIVE MICROSCOPE</a:t>
+            </a:r>
+          </a:p>
+        </p:txBody>
+      </p:sp>
+      <p:sp>
+        <p:nvSpPr>
+          <p:cNvPr id="2" name="title-7">
+            <a:extLst xmlns:a="http://schemas.openxmlformats.org/drawingml/2006/main">
+              <a:ext uri="{FF2B5EF4-FFF2-40B4-BE49-F238E27FC236}">
+                <a16:creationId xmlns:a16="http://schemas.microsoft.com/office/drawing/2014/main" id="{7592E6E5-EA60-427F-BAB4-42C154D8CC5F}"/>
+              </a:ext>
+            </a:extLst>
+          </p:cNvPr>
+          <p:cNvSpPr>
+            <a:spLocks xmlns:a="http://schemas.openxmlformats.org/drawingml/2006/main" noGrp="1"/>
+          </p:cNvSpPr>
+          <p:nvPr/>
+        </p:nvSpPr>
+        <p:spPr>
+          <a:xfrm xmlns:a="http://schemas.openxmlformats.org/drawingml/2006/main">
+            <a:off x="457200" y="533400"/>
+            <a:ext cx="11277600" cy="628650"/>
+          </a:xfrm>
+          <a:prstGeom xmlns:a="http://schemas.openxmlformats.org/drawingml/2006/main" prst="rect">
+            <a:avLst/>
+          </a:prstGeom>
+          <a:noFill xmlns:a="http://schemas.openxmlformats.org/drawingml/2006/main"/>
+          <a:ln xmlns:a="http://schemas.openxmlformats.org/drawingml/2006/main" w="0">
+            <a:noFill/>
+            <a:prstDash val="solid"/>
+          </a:ln>
+        </p:spPr>
+        <p:txBody>
+          <a:bodyPr xmlns:a="http://schemas.openxmlformats.org/drawingml/2006/main" wrap="square" lIns="0" tIns="0" rIns="0" bIns="0" anchor="t">
+            <a:normAutofit fontScale="100000"/>
+          </a:bodyPr>
+          <a:lstStyle xmlns:a="http://schemas.openxmlformats.org/drawingml/2006/main"/>
+          <a:p xmlns:a="http://schemas.openxmlformats.org/drawingml/2006/main">
+            <a:pPr algn="l">
+              <a:buNone/>
+              <a:defRPr sz="3525" b="1">
+                <a:solidFill>
+                  <a:srgbClr val="000000"/>
+                </a:solidFill>
+                <a:latin typeface="Arial"/>
+                <a:ea typeface="Arial"/>
+                <a:cs typeface="Arial"/>
+              </a:defRPr>
+            </a:pPr>
+            <a:r>
+              <a:rPr sz="3525" b="1">
+                <a:solidFill>
+                  <a:srgbClr val="000000"/>
+                </a:solidFill>
+                <a:latin typeface="Arial"/>
+                <a:ea typeface="Arial"/>
+                <a:cs typeface="Arial"/>
+              </a:rPr>
+              <a:t>QQQ and SPY maps differ only modestly</a:t>
+            </a:r>
+          </a:p>
+        </p:txBody>
+      </p:sp>
+      <p:sp>
+        <p:nvSpPr>
+          <p:cNvPr id="3" name="">
+            <a:extLst xmlns:a="http://schemas.openxmlformats.org/drawingml/2006/main">
+              <a:ext uri="{FF2B5EF4-FFF2-40B4-BE49-F238E27FC236}">
+                <a16:creationId xmlns:a16="http://schemas.microsoft.com/office/drawing/2014/main" id="{C852E1AC-5CE8-4847-87B1-81C28A4EFEDE}"/>
+              </a:ext>
+            </a:extLst>
+          </p:cNvPr>
+          <p:cNvSpPr>
+            <a:spLocks xmlns:a="http://schemas.openxmlformats.org/drawingml/2006/main" noGrp="1"/>
+          </p:cNvSpPr>
+          <p:nvPr/>
+        </p:nvSpPr>
+        <p:spPr>
+          <a:xfrm xmlns:a="http://schemas.openxmlformats.org/drawingml/2006/main">
+            <a:off x="457200" y="1200150"/>
+            <a:ext cx="11277600" cy="19050"/>
+          </a:xfrm>
+          <a:prstGeom xmlns:a="http://schemas.openxmlformats.org/drawingml/2006/main" prst="rect">
+            <a:avLst/>
+          </a:prstGeom>
+          <a:solidFill xmlns:a="http://schemas.openxmlformats.org/drawingml/2006/main">
+            <a:srgbClr val="B8BCC4"/>
+          </a:solidFill>
+          <a:ln xmlns:a="http://schemas.openxmlformats.org/drawingml/2006/main" w="0">
+            <a:solidFill>
+              <a:srgbClr val="B8BCC4"/>
+            </a:solidFill>
+            <a:prstDash val="solid"/>
+          </a:ln>
+        </p:spPr>
+      </p:sp>
+      <p:sp>
+        <p:nvSpPr>
+          <p:cNvPr id="4" name="footer-left-7">
+            <a:extLst xmlns:a="http://schemas.openxmlformats.org/drawingml/2006/main">
+              <a:ext uri="{FF2B5EF4-FFF2-40B4-BE49-F238E27FC236}">
+                <a16:creationId xmlns:a16="http://schemas.microsoft.com/office/drawing/2014/main" id="{4896B590-20BC-4B46-9282-D9F5A22A0CC5}"/>
+              </a:ext>
+            </a:extLst>
+          </p:cNvPr>
+          <p:cNvSpPr>
+            <a:spLocks xmlns:a="http://schemas.openxmlformats.org/drawingml/2006/main" noGrp="1"/>
+          </p:cNvSpPr>
+          <p:nvPr/>
+        </p:nvSpPr>
+        <p:spPr>
+          <a:xfrm xmlns:a="http://schemas.openxmlformats.org/drawingml/2006/main">
+            <a:off x="457200" y="6515100"/>
+            <a:ext cx="3429000" cy="171450"/>
+          </a:xfrm>
+          <a:prstGeom xmlns:a="http://schemas.openxmlformats.org/drawingml/2006/main" prst="rect">
+            <a:avLst/>
+          </a:prstGeom>
+          <a:noFill xmlns:a="http://schemas.openxmlformats.org/drawingml/2006/main"/>
+          <a:ln xmlns:a="http://schemas.openxmlformats.org/drawingml/2006/main" w="0">
+            <a:noFill/>
+            <a:prstDash val="solid"/>
+          </a:ln>
+        </p:spPr>
+        <p:txBody>
+          <a:bodyPr xmlns:a="http://schemas.openxmlformats.org/drawingml/2006/main" wrap="square" lIns="0" tIns="0" rIns="0" bIns="0" anchor="t">
+            <a:normAutofit fontScale="100000"/>
+          </a:bodyPr>
+          <a:lstStyle xmlns:a="http://schemas.openxmlformats.org/drawingml/2006/main"/>
+          <a:p xmlns:a="http://schemas.openxmlformats.org/drawingml/2006/main">
+            <a:pPr algn="l">
+              <a:buNone/>
+              <a:defRPr sz="1050" b="0">
+                <a:solidFill>
+                  <a:srgbClr val="667384"/>
+                </a:solidFill>
+                <a:latin typeface="Arial"/>
+                <a:ea typeface="Arial"/>
+                <a:cs typeface="Arial"/>
+              </a:defRPr>
+            </a:pPr>
+            <a:r>
+              <a:rPr sz="1050" b="0">
+                <a:solidFill>
+                  <a:srgbClr val="667384"/>
+                </a:solidFill>
+                <a:latin typeface="Arial"/>
+                <a:ea typeface="Arial"/>
+                <a:cs typeface="Arial"/>
+              </a:rPr>
+              <a:t>Adjusted daily TSLA | 2018-2023</a:t>
+            </a:r>
+          </a:p>
+        </p:txBody>
+      </p:sp>
+      <p:sp>
+        <p:nvSpPr>
+          <p:cNvPr id="5" name="footer-number-7">
+            <a:extLst xmlns:a="http://schemas.openxmlformats.org/drawingml/2006/main">
+              <a:ext uri="{FF2B5EF4-FFF2-40B4-BE49-F238E27FC236}">
+                <a16:creationId xmlns:a16="http://schemas.microsoft.com/office/drawing/2014/main" id="{1503EFAF-F487-4981-AFDC-23F1B41A7207}"/>
+              </a:ext>
+            </a:extLst>
+          </p:cNvPr>
+          <p:cNvSpPr>
+            <a:spLocks xmlns:a="http://schemas.openxmlformats.org/drawingml/2006/main" noGrp="1"/>
+          </p:cNvSpPr>
+          <p:nvPr/>
+        </p:nvSpPr>
+        <p:spPr>
+          <a:xfrm xmlns:a="http://schemas.openxmlformats.org/drawingml/2006/main">
+            <a:off x="11239500" y="6496050"/>
+            <a:ext cx="495300" cy="190500"/>
+          </a:xfrm>
+          <a:prstGeom xmlns:a="http://schemas.openxmlformats.org/drawingml/2006/main" prst="rect">
+            <a:avLst/>
+          </a:prstGeom>
+          <a:noFill xmlns:a="http://schemas.openxmlformats.org/drawingml/2006/main"/>
+          <a:ln xmlns:a="http://schemas.openxmlformats.org/drawingml/2006/main" w="0">
+            <a:noFill/>
+            <a:prstDash val="solid"/>
+          </a:ln>
+        </p:spPr>
+        <p:txBody>
+          <a:bodyPr xmlns:a="http://schemas.openxmlformats.org/drawingml/2006/main" wrap="square" lIns="0" tIns="0" rIns="0" bIns="0" anchor="t">
+            <a:normAutofit fontScale="100000"/>
+          </a:bodyPr>
+          <a:lstStyle xmlns:a="http://schemas.openxmlformats.org/drawingml/2006/main"/>
+          <a:p xmlns:a="http://schemas.openxmlformats.org/drawingml/2006/main">
+            <a:pPr algn="r">
+              <a:buNone/>
+              <a:defRPr sz="1050" b="0">
+                <a:solidFill>
+                  <a:srgbClr val="667384"/>
+                </a:solidFill>
+                <a:latin typeface="Arial"/>
+                <a:ea typeface="Arial"/>
+                <a:cs typeface="Arial"/>
+              </a:defRPr>
+            </a:pPr>
+            <a:r>
+              <a:rPr sz="1050" b="0">
+                <a:solidFill>
+                  <a:srgbClr val="667384"/>
+                </a:solidFill>
+                <a:latin typeface="Arial"/>
+                <a:ea typeface="Arial"/>
+                <a:cs typeface="Arial"/>
+              </a:rPr>
+              <a:t>52</a:t>
+            </a:r>
+          </a:p>
+        </p:txBody>
+      </p:sp>
+      <p:sp>
+        <p:nvSpPr>
+          <p:cNvPr id="6" name="">
+            <a:extLst xmlns:a="http://schemas.openxmlformats.org/drawingml/2006/main">
+              <a:ext uri="{FF2B5EF4-FFF2-40B4-BE49-F238E27FC236}">
+                <a16:creationId xmlns:a16="http://schemas.microsoft.com/office/drawing/2014/main" id="{4AA770DD-55E6-42DB-942A-6938E642B1A0}"/>
+              </a:ext>
+            </a:extLst>
+          </p:cNvPr>
+          <p:cNvSpPr>
+            <a:spLocks xmlns:a="http://schemas.openxmlformats.org/drawingml/2006/main" noGrp="1"/>
+          </p:cNvSpPr>
+          <p:nvPr/>
+        </p:nvSpPr>
+        <p:spPr>
+          <a:xfrm xmlns:a="http://schemas.openxmlformats.org/drawingml/2006/main">
+            <a:off x="342900" y="1428750"/>
+            <a:ext cx="7677150" cy="4762500"/>
+          </a:xfrm>
+          <a:prstGeom xmlns:a="http://schemas.openxmlformats.org/drawingml/2006/main" prst="rect">
+            <a:avLst/>
+          </a:prstGeom>
+          <a:solidFill xmlns:a="http://schemas.openxmlformats.org/drawingml/2006/main">
+            <a:srgbClr val="FFFFFF"/>
+          </a:solidFill>
+          <a:ln xmlns:a="http://schemas.openxmlformats.org/drawingml/2006/main" w="9525">
+            <a:solidFill>
+              <a:srgbClr val="B8BCC4"/>
+            </a:solidFill>
+            <a:prstDash val="solid"/>
+          </a:ln>
+        </p:spPr>
+      </p:sp>
+      <p:sp>
+        <p:nvSpPr>
+          <p:cNvPr id="8" name="">
+            <a:extLst xmlns:a="http://schemas.openxmlformats.org/drawingml/2006/main">
+              <a:ext uri="{FF2B5EF4-FFF2-40B4-BE49-F238E27FC236}">
+                <a16:creationId xmlns:a16="http://schemas.microsoft.com/office/drawing/2014/main" id="{925D1653-1738-47C8-BFA1-9C9390285CC4}"/>
+              </a:ext>
+            </a:extLst>
+          </p:cNvPr>
+          <p:cNvSpPr>
+            <a:spLocks xmlns:a="http://schemas.openxmlformats.org/drawingml/2006/main" noGrp="1"/>
+          </p:cNvSpPr>
+          <p:nvPr/>
+        </p:nvSpPr>
+        <p:spPr>
+          <a:xfrm xmlns:a="http://schemas.openxmlformats.org/drawingml/2006/main">
+            <a:off x="8362950" y="1504950"/>
+            <a:ext cx="3143250" cy="1428750"/>
+          </a:xfrm>
+          <a:prstGeom xmlns:a="http://schemas.openxmlformats.org/drawingml/2006/main" prst="rect">
+            <a:avLst/>
+          </a:prstGeom>
+          <a:solidFill xmlns:a="http://schemas.openxmlformats.org/drawingml/2006/main">
+            <a:srgbClr val="EDEDED"/>
+          </a:solidFill>
+          <a:ln xmlns:a="http://schemas.openxmlformats.org/drawingml/2006/main" w="0">
+            <a:solidFill>
+              <a:srgbClr val="EDEDED"/>
+            </a:solidFill>
+            <a:prstDash val="solid"/>
+          </a:ln>
+        </p:spPr>
+      </p:sp>
+      <p:sp>
+        <p:nvSpPr>
+          <p:cNvPr id="9" name="">
+            <a:extLst xmlns:a="http://schemas.openxmlformats.org/drawingml/2006/main">
+              <a:ext uri="{FF2B5EF4-FFF2-40B4-BE49-F238E27FC236}">
+                <a16:creationId xmlns:a16="http://schemas.microsoft.com/office/drawing/2014/main" id="{AD911094-04B5-4E98-9749-4F832E6A7030}"/>
+              </a:ext>
+            </a:extLst>
+          </p:cNvPr>
+          <p:cNvSpPr>
+            <a:spLocks xmlns:a="http://schemas.openxmlformats.org/drawingml/2006/main" noGrp="1"/>
+          </p:cNvSpPr>
+          <p:nvPr/>
+        </p:nvSpPr>
+        <p:spPr>
+          <a:xfrm xmlns:a="http://schemas.openxmlformats.org/drawingml/2006/main">
+            <a:off x="8362950" y="1504950"/>
+            <a:ext cx="76200" cy="1428750"/>
+          </a:xfrm>
+          <a:prstGeom xmlns:a="http://schemas.openxmlformats.org/drawingml/2006/main" prst="rect">
+            <a:avLst/>
+          </a:prstGeom>
+          <a:solidFill xmlns:a="http://schemas.openxmlformats.org/drawingml/2006/main">
+            <a:srgbClr val="E45756"/>
+          </a:solidFill>
+          <a:ln xmlns:a="http://schemas.openxmlformats.org/drawingml/2006/main" w="0">
+            <a:solidFill>
+              <a:srgbClr val="E45756"/>
+            </a:solidFill>
+            <a:prstDash val="solid"/>
+          </a:ln>
+        </p:spPr>
+      </p:sp>
+      <p:sp>
+        <p:nvSpPr>
+          <p:cNvPr id="10" name="">
+            <a:extLst xmlns:a="http://schemas.openxmlformats.org/drawingml/2006/main">
+              <a:ext uri="{FF2B5EF4-FFF2-40B4-BE49-F238E27FC236}">
+                <a16:creationId xmlns:a16="http://schemas.microsoft.com/office/drawing/2014/main" id="{8259A327-4374-4B4E-A3BA-F8E016498564}"/>
+              </a:ext>
+            </a:extLst>
+          </p:cNvPr>
+          <p:cNvSpPr>
+            <a:spLocks xmlns:a="http://schemas.openxmlformats.org/drawingml/2006/main" noGrp="1"/>
+          </p:cNvSpPr>
+          <p:nvPr/>
+        </p:nvSpPr>
+        <p:spPr>
+          <a:xfrm xmlns:a="http://schemas.openxmlformats.org/drawingml/2006/main">
+            <a:off x="8629650" y="1676400"/>
+            <a:ext cx="2686050" cy="590550"/>
+          </a:xfrm>
+          <a:prstGeom xmlns:a="http://schemas.openxmlformats.org/drawingml/2006/main" prst="rect">
+            <a:avLst/>
+          </a:prstGeom>
+          <a:noFill xmlns:a="http://schemas.openxmlformats.org/drawingml/2006/main"/>
+          <a:ln xmlns:a="http://schemas.openxmlformats.org/drawingml/2006/main" w="0">
+            <a:noFill/>
+            <a:prstDash val="solid"/>
+          </a:ln>
+        </p:spPr>
+        <p:txBody>
+          <a:bodyPr xmlns:a="http://schemas.openxmlformats.org/drawingml/2006/main" wrap="square" lIns="0" tIns="0" rIns="0" bIns="0" anchor="t">
+            <a:normAutofit fontScale="100000"/>
+          </a:bodyPr>
+          <a:lstStyle xmlns:a="http://schemas.openxmlformats.org/drawingml/2006/main"/>
+          <a:p xmlns:a="http://schemas.openxmlformats.org/drawingml/2006/main">
+            <a:pPr algn="l">
+              <a:buNone/>
+              <a:defRPr sz="3225" b="1">
+                <a:solidFill>
+                  <a:srgbClr val="E45756"/>
+                </a:solidFill>
+                <a:latin typeface="Arial"/>
+                <a:ea typeface="Arial"/>
+                <a:cs typeface="Arial"/>
+              </a:defRPr>
+            </a:pPr>
+            <a:r>
+              <a:rPr sz="3225" b="1">
+                <a:solidFill>
+                  <a:srgbClr val="E45756"/>
+                </a:solidFill>
+                <a:latin typeface="Arial"/>
+                <a:ea typeface="Arial"/>
+                <a:cs typeface="Arial"/>
+              </a:rPr>
+              <a:t>+0.035</a:t>
+            </a:r>
+          </a:p>
+        </p:txBody>
+      </p:sp>
+      <p:sp>
+        <p:nvSpPr>
+          <p:cNvPr id="11" name="">
+            <a:extLst xmlns:a="http://schemas.openxmlformats.org/drawingml/2006/main">
+              <a:ext uri="{FF2B5EF4-FFF2-40B4-BE49-F238E27FC236}">
+                <a16:creationId xmlns:a16="http://schemas.microsoft.com/office/drawing/2014/main" id="{BE341AE3-547D-4111-ADFF-14E5545F2DBF}"/>
+              </a:ext>
+            </a:extLst>
+          </p:cNvPr>
+          <p:cNvSpPr>
+            <a:spLocks xmlns:a="http://schemas.openxmlformats.org/drawingml/2006/main" noGrp="1"/>
+          </p:cNvSpPr>
+          <p:nvPr/>
+        </p:nvSpPr>
+        <p:spPr>
+          <a:xfrm xmlns:a="http://schemas.openxmlformats.org/drawingml/2006/main">
+            <a:off x="8629650" y="2343150"/>
+            <a:ext cx="2686050" cy="438150"/>
+          </a:xfrm>
+          <a:prstGeom xmlns:a="http://schemas.openxmlformats.org/drawingml/2006/main" prst="rect">
+            <a:avLst/>
+          </a:prstGeom>
+          <a:noFill xmlns:a="http://schemas.openxmlformats.org/drawingml/2006/main"/>
+          <a:ln xmlns:a="http://schemas.openxmlformats.org/drawingml/2006/main" w="0">
+            <a:noFill/>
+            <a:prstDash val="solid"/>
+          </a:ln>
+        </p:spPr>
+        <p:txBody>
+          <a:bodyPr xmlns:a="http://schemas.openxmlformats.org/drawingml/2006/main" wrap="square" lIns="0" tIns="0" rIns="0" bIns="0" anchor="t">
+            <a:normAutofit fontScale="100000"/>
+          </a:bodyPr>
+          <a:lstStyle xmlns:a="http://schemas.openxmlformats.org/drawingml/2006/main"/>
+          <a:p xmlns:a="http://schemas.openxmlformats.org/drawingml/2006/main">
+            <a:pPr algn="l">
+              <a:buNone/>
+              <a:defRPr sz="1350" b="0">
+                <a:solidFill>
+                  <a:srgbClr val="273548"/>
+                </a:solidFill>
+                <a:latin typeface="Arial"/>
+                <a:ea typeface="Arial"/>
+                <a:cs typeface="Arial"/>
+              </a:defRPr>
+            </a:pPr>
+            <a:r>
+              <a:rPr sz="1350" b="0">
+                <a:solidFill>
+                  <a:srgbClr val="273548"/>
+                </a:solidFill>
+                <a:latin typeface="Arial"/>
+                <a:ea typeface="Arial"/>
+                <a:cs typeface="Arial"/>
+              </a:rPr>
+              <a:t>largest QQQ-minus-SPY change: 15 prior / 10 forward</a:t>
+            </a:r>
+          </a:p>
+        </p:txBody>
+      </p:sp>
+      <p:sp>
+        <p:nvSpPr>
+          <p:cNvPr id="12" name="">
+            <a:extLst xmlns:a="http://schemas.openxmlformats.org/drawingml/2006/main">
+              <a:ext uri="{FF2B5EF4-FFF2-40B4-BE49-F238E27FC236}">
+                <a16:creationId xmlns:a16="http://schemas.microsoft.com/office/drawing/2014/main" id="{627B1C2D-BD18-4B6C-8DC8-10694F2FD365}"/>
+              </a:ext>
+            </a:extLst>
+          </p:cNvPr>
+          <p:cNvSpPr>
+            <a:spLocks xmlns:a="http://schemas.openxmlformats.org/drawingml/2006/main" noGrp="1"/>
+          </p:cNvSpPr>
+          <p:nvPr/>
+        </p:nvSpPr>
+        <p:spPr>
+          <a:xfrm xmlns:a="http://schemas.openxmlformats.org/drawingml/2006/main">
+            <a:off x="8362950" y="3143250"/>
+            <a:ext cx="3143250" cy="1428750"/>
+          </a:xfrm>
+          <a:prstGeom xmlns:a="http://schemas.openxmlformats.org/drawingml/2006/main" prst="rect">
+            <a:avLst/>
+          </a:prstGeom>
+          <a:solidFill xmlns:a="http://schemas.openxmlformats.org/drawingml/2006/main">
+            <a:srgbClr val="EDEDED"/>
+          </a:solidFill>
+          <a:ln xmlns:a="http://schemas.openxmlformats.org/drawingml/2006/main" w="0">
+            <a:solidFill>
+              <a:srgbClr val="EDEDED"/>
+            </a:solidFill>
+            <a:prstDash val="solid"/>
+          </a:ln>
+        </p:spPr>
+      </p:sp>
+      <p:sp>
+        <p:nvSpPr>
+          <p:cNvPr id="13" name="">
+            <a:extLst xmlns:a="http://schemas.openxmlformats.org/drawingml/2006/main">
+              <a:ext uri="{FF2B5EF4-FFF2-40B4-BE49-F238E27FC236}">
+                <a16:creationId xmlns:a16="http://schemas.microsoft.com/office/drawing/2014/main" id="{1A4050CC-5568-4F8A-B026-EC7B8ABEFB7A}"/>
+              </a:ext>
+            </a:extLst>
+          </p:cNvPr>
+          <p:cNvSpPr>
+            <a:spLocks xmlns:a="http://schemas.openxmlformats.org/drawingml/2006/main" noGrp="1"/>
+          </p:cNvSpPr>
+          <p:nvPr/>
+        </p:nvSpPr>
+        <p:spPr>
+          <a:xfrm xmlns:a="http://schemas.openxmlformats.org/drawingml/2006/main">
+            <a:off x="8362950" y="3143250"/>
+            <a:ext cx="76200" cy="1428750"/>
+          </a:xfrm>
+          <a:prstGeom xmlns:a="http://schemas.openxmlformats.org/drawingml/2006/main" prst="rect">
+            <a:avLst/>
+          </a:prstGeom>
+          <a:solidFill xmlns:a="http://schemas.openxmlformats.org/drawingml/2006/main">
+            <a:srgbClr val="3D8DFF"/>
+          </a:solidFill>
+          <a:ln xmlns:a="http://schemas.openxmlformats.org/drawingml/2006/main" w="0">
+            <a:solidFill>
+              <a:srgbClr val="3D8DFF"/>
+            </a:solidFill>
+            <a:prstDash val="solid"/>
+          </a:ln>
+        </p:spPr>
+      </p:sp>
+      <p:sp>
+        <p:nvSpPr>
+          <p:cNvPr id="14" name="">
+            <a:extLst xmlns:a="http://schemas.openxmlformats.org/drawingml/2006/main">
+              <a:ext uri="{FF2B5EF4-FFF2-40B4-BE49-F238E27FC236}">
+                <a16:creationId xmlns:a16="http://schemas.microsoft.com/office/drawing/2014/main" id="{502FF9D4-D051-476B-B68A-15DCA6B44FE9}"/>
+              </a:ext>
+            </a:extLst>
+          </p:cNvPr>
+          <p:cNvSpPr>
+            <a:spLocks xmlns:a="http://schemas.openxmlformats.org/drawingml/2006/main" noGrp="1"/>
+          </p:cNvSpPr>
+          <p:nvPr/>
+        </p:nvSpPr>
+        <p:spPr>
+          <a:xfrm xmlns:a="http://schemas.openxmlformats.org/drawingml/2006/main">
+            <a:off x="8629650" y="3314700"/>
+            <a:ext cx="2686050" cy="590550"/>
+          </a:xfrm>
+          <a:prstGeom xmlns:a="http://schemas.openxmlformats.org/drawingml/2006/main" prst="rect">
+            <a:avLst/>
+          </a:prstGeom>
+          <a:noFill xmlns:a="http://schemas.openxmlformats.org/drawingml/2006/main"/>
+          <a:ln xmlns:a="http://schemas.openxmlformats.org/drawingml/2006/main" w="0">
+            <a:noFill/>
+            <a:prstDash val="solid"/>
+          </a:ln>
+        </p:spPr>
+        <p:txBody>
+          <a:bodyPr xmlns:a="http://schemas.openxmlformats.org/drawingml/2006/main" wrap="square" lIns="0" tIns="0" rIns="0" bIns="0" anchor="t">
+            <a:normAutofit fontScale="100000"/>
+          </a:bodyPr>
+          <a:lstStyle xmlns:a="http://schemas.openxmlformats.org/drawingml/2006/main"/>
+          <a:p xmlns:a="http://schemas.openxmlformats.org/drawingml/2006/main">
+            <a:pPr algn="l">
+              <a:buNone/>
+              <a:defRPr sz="3225" b="1">
+                <a:solidFill>
+                  <a:srgbClr val="3D8DFF"/>
+                </a:solidFill>
+                <a:latin typeface="Arial"/>
+                <a:ea typeface="Arial"/>
+                <a:cs typeface="Arial"/>
+              </a:defRPr>
+            </a:pPr>
+            <a:r>
+              <a:rPr sz="3225" b="1">
+                <a:solidFill>
+                  <a:srgbClr val="3D8DFF"/>
+                </a:solidFill>
+                <a:latin typeface="Arial"/>
+                <a:ea typeface="Arial"/>
+                <a:cs typeface="Arial"/>
+              </a:rPr>
+              <a:t>79 / 81</a:t>
+            </a:r>
+          </a:p>
+        </p:txBody>
+      </p:sp>
+      <p:sp>
+        <p:nvSpPr>
+          <p:cNvPr id="15" name="">
+            <a:extLst xmlns:a="http://schemas.openxmlformats.org/drawingml/2006/main">
+              <a:ext uri="{FF2B5EF4-FFF2-40B4-BE49-F238E27FC236}">
+                <a16:creationId xmlns:a16="http://schemas.microsoft.com/office/drawing/2014/main" id="{03DFBB46-08D6-4497-AA7C-C2049757E9DE}"/>
+              </a:ext>
+            </a:extLst>
+          </p:cNvPr>
+          <p:cNvSpPr>
+            <a:spLocks xmlns:a="http://schemas.openxmlformats.org/drawingml/2006/main" noGrp="1"/>
+          </p:cNvSpPr>
+          <p:nvPr/>
+        </p:nvSpPr>
+        <p:spPr>
+          <a:xfrm xmlns:a="http://schemas.openxmlformats.org/drawingml/2006/main">
+            <a:off x="8629650" y="3981450"/>
+            <a:ext cx="2686050" cy="438150"/>
+          </a:xfrm>
+          <a:prstGeom xmlns:a="http://schemas.openxmlformats.org/drawingml/2006/main" prst="rect">
+            <a:avLst/>
+          </a:prstGeom>
+          <a:noFill xmlns:a="http://schemas.openxmlformats.org/drawingml/2006/main"/>
+          <a:ln xmlns:a="http://schemas.openxmlformats.org/drawingml/2006/main" w="0">
+            <a:noFill/>
+            <a:prstDash val="solid"/>
+          </a:ln>
+        </p:spPr>
+        <p:txBody>
+          <a:bodyPr xmlns:a="http://schemas.openxmlformats.org/drawingml/2006/main" wrap="square" lIns="0" tIns="0" rIns="0" bIns="0" anchor="t">
+            <a:normAutofit fontScale="100000"/>
+          </a:bodyPr>
+          <a:lstStyle xmlns:a="http://schemas.openxmlformats.org/drawingml/2006/main"/>
+          <a:p xmlns:a="http://schemas.openxmlformats.org/drawingml/2006/main">
+            <a:pPr algn="l">
+              <a:buNone/>
+              <a:defRPr sz="1350" b="0">
+                <a:solidFill>
+                  <a:srgbClr val="273548"/>
+                </a:solidFill>
+                <a:latin typeface="Arial"/>
+                <a:ea typeface="Arial"/>
+                <a:cs typeface="Arial"/>
+              </a:defRPr>
+            </a:pPr>
+            <a:r>
+              <a:rPr sz="1350" b="0">
+                <a:solidFill>
+                  <a:srgbClr val="273548"/>
+                </a:solidFill>
+                <a:latin typeface="Arial"/>
+                <a:ea typeface="Arial"/>
+                <a:cs typeface="Arial"/>
+              </a:rPr>
+              <a:t>cells with the same correlation sign</a:t>
+            </a:r>
+          </a:p>
+        </p:txBody>
+      </p:sp>
+      <p:sp>
+        <p:nvSpPr>
+          <p:cNvPr id="16" name="">
+            <a:extLst xmlns:a="http://schemas.openxmlformats.org/drawingml/2006/main">
+              <a:ext uri="{FF2B5EF4-FFF2-40B4-BE49-F238E27FC236}">
+                <a16:creationId xmlns:a16="http://schemas.microsoft.com/office/drawing/2014/main" id="{509D61CC-6E5E-49EC-A5F6-E861E8561441}"/>
+              </a:ext>
+            </a:extLst>
+          </p:cNvPr>
+          <p:cNvSpPr>
+            <a:spLocks xmlns:a="http://schemas.openxmlformats.org/drawingml/2006/main" noGrp="1"/>
+          </p:cNvSpPr>
+          <p:nvPr/>
+        </p:nvSpPr>
+        <p:spPr>
+          <a:xfrm xmlns:a="http://schemas.openxmlformats.org/drawingml/2006/main">
+            <a:off x="8362950" y="4781550"/>
+            <a:ext cx="3143250" cy="1428750"/>
+          </a:xfrm>
+          <a:prstGeom xmlns:a="http://schemas.openxmlformats.org/drawingml/2006/main" prst="rect">
+            <a:avLst/>
+          </a:prstGeom>
+          <a:solidFill xmlns:a="http://schemas.openxmlformats.org/drawingml/2006/main">
+            <a:srgbClr val="EDEDED"/>
+          </a:solidFill>
+          <a:ln xmlns:a="http://schemas.openxmlformats.org/drawingml/2006/main" w="0">
+            <a:solidFill>
+              <a:srgbClr val="EDEDED"/>
+            </a:solidFill>
+            <a:prstDash val="solid"/>
+          </a:ln>
+        </p:spPr>
+      </p:sp>
+      <p:sp>
+        <p:nvSpPr>
+          <p:cNvPr id="17" name="">
+            <a:extLst xmlns:a="http://schemas.openxmlformats.org/drawingml/2006/main">
+              <a:ext uri="{FF2B5EF4-FFF2-40B4-BE49-F238E27FC236}">
+                <a16:creationId xmlns:a16="http://schemas.microsoft.com/office/drawing/2014/main" id="{A935608E-4DDE-41BA-8DF2-831CF419565B}"/>
+              </a:ext>
+            </a:extLst>
+          </p:cNvPr>
+          <p:cNvSpPr>
+            <a:spLocks xmlns:a="http://schemas.openxmlformats.org/drawingml/2006/main" noGrp="1"/>
+          </p:cNvSpPr>
+          <p:nvPr/>
+        </p:nvSpPr>
+        <p:spPr>
+          <a:xfrm xmlns:a="http://schemas.openxmlformats.org/drawingml/2006/main">
+            <a:off x="8362950" y="4781550"/>
+            <a:ext cx="76200" cy="1428750"/>
+          </a:xfrm>
+          <a:prstGeom xmlns:a="http://schemas.openxmlformats.org/drawingml/2006/main" prst="rect">
+            <a:avLst/>
+          </a:prstGeom>
+          <a:solidFill xmlns:a="http://schemas.openxmlformats.org/drawingml/2006/main">
+            <a:srgbClr val="273548"/>
+          </a:solidFill>
+          <a:ln xmlns:a="http://schemas.openxmlformats.org/drawingml/2006/main" w="0">
+            <a:solidFill>
+              <a:srgbClr val="273548"/>
+            </a:solidFill>
+            <a:prstDash val="solid"/>
+          </a:ln>
+        </p:spPr>
+      </p:sp>
+      <p:sp>
+        <p:nvSpPr>
+          <p:cNvPr id="18" name="">
+            <a:extLst xmlns:a="http://schemas.openxmlformats.org/drawingml/2006/main">
+              <a:ext uri="{FF2B5EF4-FFF2-40B4-BE49-F238E27FC236}">
+                <a16:creationId xmlns:a16="http://schemas.microsoft.com/office/drawing/2014/main" id="{088A976D-39D1-4C6C-803F-0D3F8BAE4A28}"/>
+              </a:ext>
+            </a:extLst>
+          </p:cNvPr>
+          <p:cNvSpPr>
+            <a:spLocks xmlns:a="http://schemas.openxmlformats.org/drawingml/2006/main" noGrp="1"/>
+          </p:cNvSpPr>
+          <p:nvPr/>
+        </p:nvSpPr>
+        <p:spPr>
+          <a:xfrm xmlns:a="http://schemas.openxmlformats.org/drawingml/2006/main">
+            <a:off x="8629650" y="4953000"/>
+            <a:ext cx="2686050" cy="590550"/>
+          </a:xfrm>
+          <a:prstGeom xmlns:a="http://schemas.openxmlformats.org/drawingml/2006/main" prst="rect">
+            <a:avLst/>
+          </a:prstGeom>
+          <a:noFill xmlns:a="http://schemas.openxmlformats.org/drawingml/2006/main"/>
+          <a:ln xmlns:a="http://schemas.openxmlformats.org/drawingml/2006/main" w="0">
+            <a:noFill/>
+            <a:prstDash val="solid"/>
+          </a:ln>
+        </p:spPr>
+        <p:txBody>
+          <a:bodyPr xmlns:a="http://schemas.openxmlformats.org/drawingml/2006/main" wrap="square" lIns="0" tIns="0" rIns="0" bIns="0" anchor="t">
+            <a:normAutofit fontScale="100000"/>
+          </a:bodyPr>
+          <a:lstStyle xmlns:a="http://schemas.openxmlformats.org/drawingml/2006/main"/>
+          <a:p xmlns:a="http://schemas.openxmlformats.org/drawingml/2006/main">
+            <a:pPr algn="l">
+              <a:buNone/>
+              <a:defRPr sz="3225" b="1">
+                <a:solidFill>
+                  <a:srgbClr val="273548"/>
+                </a:solidFill>
+                <a:latin typeface="Arial"/>
+                <a:ea typeface="Arial"/>
+                <a:cs typeface="Arial"/>
+              </a:defRPr>
+            </a:pPr>
+            <a:r>
+              <a:rPr sz="3225" b="1">
+                <a:solidFill>
+                  <a:srgbClr val="273548"/>
+                </a:solidFill>
+                <a:latin typeface="Arial"/>
+                <a:ea typeface="Arial"/>
+                <a:cs typeface="Arial"/>
+              </a:rPr>
+              <a:t>r = 0.947</a:t>
+            </a:r>
+          </a:p>
+        </p:txBody>
+      </p:sp>
+      <p:sp>
+        <p:nvSpPr>
+          <p:cNvPr id="19" name="">
+            <a:extLst xmlns:a="http://schemas.openxmlformats.org/drawingml/2006/main">
+              <a:ext uri="{FF2B5EF4-FFF2-40B4-BE49-F238E27FC236}">
+                <a16:creationId xmlns:a16="http://schemas.microsoft.com/office/drawing/2014/main" id="{AA1E116E-13CC-4735-B31A-B5C1846B2D22}"/>
+              </a:ext>
+            </a:extLst>
+          </p:cNvPr>
+          <p:cNvSpPr>
+            <a:spLocks xmlns:a="http://schemas.openxmlformats.org/drawingml/2006/main" noGrp="1"/>
+          </p:cNvSpPr>
+          <p:nvPr/>
+        </p:nvSpPr>
+        <p:spPr>
+          <a:xfrm xmlns:a="http://schemas.openxmlformats.org/drawingml/2006/main">
+            <a:off x="8629650" y="5619750"/>
+            <a:ext cx="2686050" cy="438150"/>
+          </a:xfrm>
+          <a:prstGeom xmlns:a="http://schemas.openxmlformats.org/drawingml/2006/main" prst="rect">
+            <a:avLst/>
+          </a:prstGeom>
+          <a:noFill xmlns:a="http://schemas.openxmlformats.org/drawingml/2006/main"/>
+          <a:ln xmlns:a="http://schemas.openxmlformats.org/drawingml/2006/main" w="0">
+            <a:noFill/>
+            <a:prstDash val="solid"/>
+          </a:ln>
+        </p:spPr>
+        <p:txBody>
+          <a:bodyPr xmlns:a="http://schemas.openxmlformats.org/drawingml/2006/main" wrap="square" lIns="0" tIns="0" rIns="0" bIns="0" anchor="t">
+            <a:normAutofit fontScale="100000"/>
+          </a:bodyPr>
+          <a:lstStyle xmlns:a="http://schemas.openxmlformats.org/drawingml/2006/main"/>
+          <a:p xmlns:a="http://schemas.openxmlformats.org/drawingml/2006/main">
+            <a:pPr algn="l">
+              <a:buNone/>
+              <a:defRPr sz="1350" b="0">
+                <a:solidFill>
+                  <a:srgbClr val="273548"/>
+                </a:solidFill>
+                <a:latin typeface="Arial"/>
+                <a:ea typeface="Arial"/>
+                <a:cs typeface="Arial"/>
+              </a:defRPr>
+            </a:pPr>
+            <a:r>
+              <a:rPr sz="1350" b="0">
+                <a:solidFill>
+                  <a:srgbClr val="273548"/>
+                </a:solidFill>
+                <a:latin typeface="Arial"/>
+                <a:ea typeface="Arial"/>
+                <a:cs typeface="Arial"/>
+              </a:rPr>
+              <a:t>cellwise correlation between the two maps</a:t>
+            </a:r>
+          </a:p>
+        </p:txBody>
+      </p:sp>
+      <p:pic>
+        <p:nvPicPr>
+          <p:cNvPr id="41" name=""/>
+          <p:cNvPicPr>
+            <a:picLocks xmlns:a="http://schemas.openxmlformats.org/drawingml/2006/main" noChangeAspect="1"/>
+          </p:cNvPicPr>
+          <p:nvPr/>
+        </p:nvPicPr>
+        <p:blipFill>
+          <a:blip xmlns:r="http://schemas.openxmlformats.org/officeDocument/2006/relationships" xmlns:a="http://schemas.openxmlformats.org/drawingml/2006/main" r:embed="Re269ce31688244a6"/>
+          <a:stretch xmlns:a="http://schemas.openxmlformats.org/drawingml/2006/main"/>
+        </p:blipFill>
+        <p:spPr>
+          <a:xfrm xmlns:a="http://schemas.openxmlformats.org/drawingml/2006/main" flipH="0" flipV="0">
+            <a:off x="609600" y="1428750"/>
+            <a:ext cx="7143750" cy="4762500"/>
+          </a:xfrm>
+          <a:prstGeom xmlns:a="http://schemas.openxmlformats.org/drawingml/2006/main" prst="rect">
+            <a:avLst/>
+          </a:prstGeom>
+        </p:spPr>
+      </p:pic>
+      <p:pic>
+        <p:nvPicPr>
+          <p:cNvPr id="42" name=""/>
+          <p:cNvPicPr>
+            <a:picLocks xmlns:a="http://schemas.openxmlformats.org/drawingml/2006/main" noChangeAspect="1"/>
+          </p:cNvPicPr>
+          <p:nvPr/>
+        </p:nvPicPr>
+        <p:blipFill>
+          <a:blip xmlns:r="http://schemas.openxmlformats.org/officeDocument/2006/relationships" xmlns:a="http://schemas.openxmlformats.org/drawingml/2006/main" r:embed="R2c6c5ad576b24d78"/>
+          <a:stretch xmlns:a="http://schemas.openxmlformats.org/drawingml/2006/main"/>
+        </p:blipFill>
+        <p:spPr>
+          <a:xfrm xmlns:a="http://schemas.openxmlformats.org/drawingml/2006/main" flipH="0" flipV="0">
+            <a:off x="609600" y="1428750"/>
+            <a:ext cx="7143750" cy="4762500"/>
+          </a:xfrm>
+          <a:prstGeom xmlns:a="http://schemas.openxmlformats.org/drawingml/2006/main" prst="rect">
+            <a:avLst/>
+          </a:prstGeom>
+        </p:spPr>
+      </p:pic>
+    </p:spTree>
+    <p:extLst>
+      <p:ext uri="{BB962C8B-B14F-4D97-AF65-F5344CB8AC3E}">
+        <p14:creationId xmlns:p14="http://schemas.microsoft.com/office/powerpoint/2010/main" val="1583170704"/>
+      </p:ext>
+    </p:extLst>
+  </p:cSld>
+</p:sld>
+</file>
+
+<file path=ppt/slides/slide53.xml><?xml version="1.0" encoding="utf-8"?>
+<p:sld xmlns:p="http://schemas.openxmlformats.org/presentationml/2006/main">
+  <p:cSld>
+    <p:bg>
+      <p:bgPr>
+        <a:solidFill xmlns:a="http://schemas.openxmlformats.org/drawingml/2006/main">
+          <a:srgbClr val="FFFFFF"/>
+        </a:solidFill>
+      </p:bgPr>
+    </p:bg>
+    <p:spTree>
+      <p:nvGrpSpPr>
+        <p:cNvPr id="1" name=""/>
+        <p:cNvGrpSpPr/>
+        <p:nvPr/>
+      </p:nvGrpSpPr>
+      <p:grpSpPr>
+        <a:xfrm xmlns:a="http://schemas.openxmlformats.org/drawingml/2006/main"/>
+      </p:grpSpPr>
+      <p:sp>
+        <p:nvSpPr>
+          <p:cNvPr id="24" name="section-11">
+            <a:extLst xmlns:a="http://schemas.openxmlformats.org/drawingml/2006/main">
+              <a:ext uri="{FF2B5EF4-FFF2-40B4-BE49-F238E27FC236}">
+                <a16:creationId xmlns:a16="http://schemas.microsoft.com/office/drawing/2014/main" id="{272ED433-B59C-436C-9DFB-4D317B90A13F}"/>
+              </a:ext>
+            </a:extLst>
+          </p:cNvPr>
+          <p:cNvSpPr>
+            <a:spLocks xmlns:a="http://schemas.openxmlformats.org/drawingml/2006/main" noGrp="1"/>
+          </p:cNvSpPr>
+          <p:nvPr/>
+        </p:nvSpPr>
+        <p:spPr>
+          <a:xfrm xmlns:a="http://schemas.openxmlformats.org/drawingml/2006/main">
+            <a:off x="457200" y="228600"/>
+            <a:ext cx="4191000" cy="228600"/>
+          </a:xfrm>
+          <a:prstGeom xmlns:a="http://schemas.openxmlformats.org/drawingml/2006/main" prst="rect">
+            <a:avLst/>
+          </a:prstGeom>
+          <a:noFill xmlns:a="http://schemas.openxmlformats.org/drawingml/2006/main"/>
+          <a:ln xmlns:a="http://schemas.openxmlformats.org/drawingml/2006/main" w="0">
+            <a:noFill/>
+            <a:prstDash val="solid"/>
+          </a:ln>
+        </p:spPr>
+        <p:txBody>
+          <a:bodyPr xmlns:a="http://schemas.openxmlformats.org/drawingml/2006/main" wrap="square" lIns="0" tIns="0" rIns="0" bIns="0" anchor="t">
+            <a:normAutofit fontScale="100000"/>
+          </a:bodyPr>
+          <a:lstStyle xmlns:a="http://schemas.openxmlformats.org/drawingml/2006/main"/>
+          <a:p xmlns:a="http://schemas.openxmlformats.org/drawingml/2006/main">
+            <a:pPr algn="l">
+              <a:buNone/>
+              <a:defRPr sz="1200" b="1">
+                <a:solidFill>
+                  <a:srgbClr val="667384"/>
+                </a:solidFill>
+                <a:latin typeface="Arial"/>
+                <a:ea typeface="Arial"/>
+                <a:cs typeface="Arial"/>
+              </a:defRPr>
+            </a:pPr>
+            <a:r>
+              <a:rPr sz="1200" b="1">
+                <a:solidFill>
+                  <a:srgbClr val="667384"/>
+                </a:solidFill>
+                <a:latin typeface="Arial"/>
+                <a:ea typeface="Arial"/>
+                <a:cs typeface="Arial"/>
+              </a:rPr>
+              <a:t>TSLA DESCRIPTIVE MICROSCOPE</a:t>
+            </a:r>
+          </a:p>
+        </p:txBody>
+      </p:sp>
+      <p:sp>
+        <p:nvSpPr>
+          <p:cNvPr id="2" name="title-11">
+            <a:extLst xmlns:a="http://schemas.openxmlformats.org/drawingml/2006/main">
+              <a:ext uri="{FF2B5EF4-FFF2-40B4-BE49-F238E27FC236}">
+                <a16:creationId xmlns:a16="http://schemas.microsoft.com/office/drawing/2014/main" id="{3EC40708-7E00-432C-8ECE-907FA5705292}"/>
+              </a:ext>
+            </a:extLst>
+          </p:cNvPr>
+          <p:cNvSpPr>
+            <a:spLocks xmlns:a="http://schemas.openxmlformats.org/drawingml/2006/main" noGrp="1"/>
+          </p:cNvSpPr>
+          <p:nvPr/>
+        </p:nvSpPr>
+        <p:spPr>
+          <a:xfrm xmlns:a="http://schemas.openxmlformats.org/drawingml/2006/main">
+            <a:off x="457200" y="533400"/>
+            <a:ext cx="11277600" cy="628650"/>
+          </a:xfrm>
+          <a:prstGeom xmlns:a="http://schemas.openxmlformats.org/drawingml/2006/main" prst="rect">
+            <a:avLst/>
+          </a:prstGeom>
+          <a:noFill xmlns:a="http://schemas.openxmlformats.org/drawingml/2006/main"/>
+          <a:ln xmlns:a="http://schemas.openxmlformats.org/drawingml/2006/main" w="0">
+            <a:noFill/>
+            <a:prstDash val="solid"/>
+          </a:ln>
+        </p:spPr>
+        <p:txBody>
+          <a:bodyPr xmlns:a="http://schemas.openxmlformats.org/drawingml/2006/main" wrap="square" lIns="0" tIns="0" rIns="0" bIns="0" anchor="t">
+            <a:normAutofit fontScale="92007"/>
+          </a:bodyPr>
+          <a:lstStyle xmlns:a="http://schemas.openxmlformats.org/drawingml/2006/main"/>
+          <a:p xmlns:a="http://schemas.openxmlformats.org/drawingml/2006/main">
+            <a:pPr algn="l">
+              <a:buNone/>
+              <a:defRPr sz="3525" b="1">
+                <a:solidFill>
+                  <a:srgbClr val="000000"/>
+                </a:solidFill>
+                <a:latin typeface="Arial"/>
+                <a:ea typeface="Arial"/>
+                <a:cs typeface="Arial"/>
+              </a:defRPr>
+            </a:pPr>
+            <a:r>
+              <a:rPr sz="3525" b="1">
+                <a:solidFill>
+                  <a:srgbClr val="000000"/>
+                </a:solidFill>
+                <a:latin typeface="Arial"/>
+                <a:ea typeface="Arial"/>
+                <a:cs typeface="Arial"/>
+              </a:rPr>
+              <a:t>External prior returns reveal shared geometry—not a lead</a:t>
+            </a:r>
+          </a:p>
+        </p:txBody>
+      </p:sp>
+      <p:sp>
+        <p:nvSpPr>
+          <p:cNvPr id="3" name="">
+            <a:extLst xmlns:a="http://schemas.openxmlformats.org/drawingml/2006/main">
+              <a:ext uri="{FF2B5EF4-FFF2-40B4-BE49-F238E27FC236}">
+                <a16:creationId xmlns:a16="http://schemas.microsoft.com/office/drawing/2014/main" id="{D5CA0FCE-75E8-41EF-A76A-23E9E2120C6A}"/>
+              </a:ext>
+            </a:extLst>
+          </p:cNvPr>
+          <p:cNvSpPr>
+            <a:spLocks xmlns:a="http://schemas.openxmlformats.org/drawingml/2006/main" noGrp="1"/>
+          </p:cNvSpPr>
+          <p:nvPr/>
+        </p:nvSpPr>
+        <p:spPr>
+          <a:xfrm xmlns:a="http://schemas.openxmlformats.org/drawingml/2006/main">
+            <a:off x="457200" y="1200150"/>
+            <a:ext cx="11277600" cy="19050"/>
+          </a:xfrm>
+          <a:prstGeom xmlns:a="http://schemas.openxmlformats.org/drawingml/2006/main" prst="rect">
+            <a:avLst/>
+          </a:prstGeom>
+          <a:solidFill xmlns:a="http://schemas.openxmlformats.org/drawingml/2006/main">
+            <a:srgbClr val="B8BCC4"/>
+          </a:solidFill>
+          <a:ln xmlns:a="http://schemas.openxmlformats.org/drawingml/2006/main" w="0">
+            <a:solidFill>
+              <a:srgbClr val="B8BCC4"/>
+            </a:solidFill>
+            <a:prstDash val="solid"/>
+          </a:ln>
+        </p:spPr>
+      </p:sp>
+      <p:sp>
+        <p:nvSpPr>
+          <p:cNvPr id="4" name="footer-left-11">
+            <a:extLst xmlns:a="http://schemas.openxmlformats.org/drawingml/2006/main">
+              <a:ext uri="{FF2B5EF4-FFF2-40B4-BE49-F238E27FC236}">
+                <a16:creationId xmlns:a16="http://schemas.microsoft.com/office/drawing/2014/main" id="{700DA765-80E0-4197-8700-00D867B86FA2}"/>
+              </a:ext>
+            </a:extLst>
+          </p:cNvPr>
+          <p:cNvSpPr>
+            <a:spLocks xmlns:a="http://schemas.openxmlformats.org/drawingml/2006/main" noGrp="1"/>
+          </p:cNvSpPr>
+          <p:nvPr/>
+        </p:nvSpPr>
+        <p:spPr>
+          <a:xfrm xmlns:a="http://schemas.openxmlformats.org/drawingml/2006/main">
+            <a:off x="457200" y="6515100"/>
+            <a:ext cx="3429000" cy="171450"/>
+          </a:xfrm>
+          <a:prstGeom xmlns:a="http://schemas.openxmlformats.org/drawingml/2006/main" prst="rect">
+            <a:avLst/>
+          </a:prstGeom>
+          <a:noFill xmlns:a="http://schemas.openxmlformats.org/drawingml/2006/main"/>
+          <a:ln xmlns:a="http://schemas.openxmlformats.org/drawingml/2006/main" w="0">
+            <a:noFill/>
+            <a:prstDash val="solid"/>
+          </a:ln>
+        </p:spPr>
+        <p:txBody>
+          <a:bodyPr xmlns:a="http://schemas.openxmlformats.org/drawingml/2006/main" wrap="square" lIns="0" tIns="0" rIns="0" bIns="0" anchor="t">
+            <a:normAutofit fontScale="100000"/>
+          </a:bodyPr>
+          <a:lstStyle xmlns:a="http://schemas.openxmlformats.org/drawingml/2006/main"/>
+          <a:p xmlns:a="http://schemas.openxmlformats.org/drawingml/2006/main">
+            <a:pPr algn="l">
+              <a:buNone/>
+              <a:defRPr sz="1050" b="0">
+                <a:solidFill>
+                  <a:srgbClr val="667384"/>
+                </a:solidFill>
+                <a:latin typeface="Arial"/>
+                <a:ea typeface="Arial"/>
+                <a:cs typeface="Arial"/>
+              </a:defRPr>
+            </a:pPr>
+            <a:r>
+              <a:rPr sz="1050" b="0">
+                <a:solidFill>
+                  <a:srgbClr val="667384"/>
+                </a:solidFill>
+                <a:latin typeface="Arial"/>
+                <a:ea typeface="Arial"/>
+                <a:cs typeface="Arial"/>
+              </a:rPr>
+              <a:t>Adjusted daily TSLA | 2018-2023</a:t>
+            </a:r>
+          </a:p>
+        </p:txBody>
+      </p:sp>
+      <p:sp>
+        <p:nvSpPr>
+          <p:cNvPr id="5" name="footer-number-11">
+            <a:extLst xmlns:a="http://schemas.openxmlformats.org/drawingml/2006/main">
+              <a:ext uri="{FF2B5EF4-FFF2-40B4-BE49-F238E27FC236}">
+                <a16:creationId xmlns:a16="http://schemas.microsoft.com/office/drawing/2014/main" id="{83896276-4112-4532-AF7C-776C67C58B77}"/>
+              </a:ext>
+            </a:extLst>
+          </p:cNvPr>
+          <p:cNvSpPr>
+            <a:spLocks xmlns:a="http://schemas.openxmlformats.org/drawingml/2006/main" noGrp="1"/>
+          </p:cNvSpPr>
+          <p:nvPr/>
+        </p:nvSpPr>
+        <p:spPr>
+          <a:xfrm xmlns:a="http://schemas.openxmlformats.org/drawingml/2006/main">
+            <a:off x="11239500" y="6496050"/>
+            <a:ext cx="495300" cy="190500"/>
+          </a:xfrm>
+          <a:prstGeom xmlns:a="http://schemas.openxmlformats.org/drawingml/2006/main" prst="rect">
+            <a:avLst/>
+          </a:prstGeom>
+          <a:noFill xmlns:a="http://schemas.openxmlformats.org/drawingml/2006/main"/>
+          <a:ln xmlns:a="http://schemas.openxmlformats.org/drawingml/2006/main" w="0">
+            <a:noFill/>
+            <a:prstDash val="solid"/>
+          </a:ln>
+        </p:spPr>
+        <p:txBody>
+          <a:bodyPr xmlns:a="http://schemas.openxmlformats.org/drawingml/2006/main" wrap="square" lIns="0" tIns="0" rIns="0" bIns="0" anchor="t">
+            <a:normAutofit fontScale="100000"/>
+          </a:bodyPr>
+          <a:lstStyle xmlns:a="http://schemas.openxmlformats.org/drawingml/2006/main"/>
+          <a:p xmlns:a="http://schemas.openxmlformats.org/drawingml/2006/main">
+            <a:pPr algn="r">
+              <a:buNone/>
+              <a:defRPr sz="1050" b="0">
+                <a:solidFill>
+                  <a:srgbClr val="667384"/>
+                </a:solidFill>
+                <a:latin typeface="Arial"/>
+                <a:ea typeface="Arial"/>
+                <a:cs typeface="Arial"/>
+              </a:defRPr>
+            </a:pPr>
+            <a:r>
+              <a:rPr sz="1050" b="0">
+                <a:solidFill>
+                  <a:srgbClr val="667384"/>
+                </a:solidFill>
+                <a:latin typeface="Arial"/>
+                <a:ea typeface="Arial"/>
+                <a:cs typeface="Arial"/>
+              </a:rPr>
+              <a:t>53</a:t>
+            </a:r>
+          </a:p>
+        </p:txBody>
+      </p:sp>
+      <p:sp>
+        <p:nvSpPr>
+          <p:cNvPr id="6" name="">
+            <a:extLst xmlns:a="http://schemas.openxmlformats.org/drawingml/2006/main">
+              <a:ext uri="{FF2B5EF4-FFF2-40B4-BE49-F238E27FC236}">
+                <a16:creationId xmlns:a16="http://schemas.microsoft.com/office/drawing/2014/main" id="{10F4BA85-46C5-47BD-BA74-EC806E663D58}"/>
+              </a:ext>
+            </a:extLst>
+          </p:cNvPr>
+          <p:cNvSpPr>
+            <a:spLocks xmlns:a="http://schemas.openxmlformats.org/drawingml/2006/main" noGrp="1"/>
+          </p:cNvSpPr>
+          <p:nvPr/>
+        </p:nvSpPr>
+        <p:spPr>
+          <a:xfrm xmlns:a="http://schemas.openxmlformats.org/drawingml/2006/main">
+            <a:off x="552450" y="1600200"/>
+            <a:ext cx="95250" cy="895350"/>
+          </a:xfrm>
+          <a:prstGeom xmlns:a="http://schemas.openxmlformats.org/drawingml/2006/main" prst="rect">
+            <a:avLst/>
+          </a:prstGeom>
+          <a:solidFill xmlns:a="http://schemas.openxmlformats.org/drawingml/2006/main">
+            <a:srgbClr val="E45756"/>
+          </a:solidFill>
+          <a:ln xmlns:a="http://schemas.openxmlformats.org/drawingml/2006/main" w="0">
+            <a:solidFill>
+              <a:srgbClr val="E45756"/>
+            </a:solidFill>
+            <a:prstDash val="solid"/>
+          </a:ln>
+        </p:spPr>
+      </p:sp>
+      <p:sp>
+        <p:nvSpPr>
+          <p:cNvPr id="7" name="">
+            <a:extLst xmlns:a="http://schemas.openxmlformats.org/drawingml/2006/main">
+              <a:ext uri="{FF2B5EF4-FFF2-40B4-BE49-F238E27FC236}">
+                <a16:creationId xmlns:a16="http://schemas.microsoft.com/office/drawing/2014/main" id="{7EF5B945-9D04-48FA-BA66-96DE813A9715}"/>
+              </a:ext>
+            </a:extLst>
+          </p:cNvPr>
+          <p:cNvSpPr>
+            <a:spLocks xmlns:a="http://schemas.openxmlformats.org/drawingml/2006/main" noGrp="1"/>
+          </p:cNvSpPr>
+          <p:nvPr/>
+        </p:nvSpPr>
+        <p:spPr>
+          <a:xfrm xmlns:a="http://schemas.openxmlformats.org/drawingml/2006/main">
+            <a:off x="876300" y="1581150"/>
+            <a:ext cx="2095500" cy="285750"/>
+          </a:xfrm>
+          <a:prstGeom xmlns:a="http://schemas.openxmlformats.org/drawingml/2006/main" prst="rect">
+            <a:avLst/>
+          </a:prstGeom>
+          <a:noFill xmlns:a="http://schemas.openxmlformats.org/drawingml/2006/main"/>
+          <a:ln xmlns:a="http://schemas.openxmlformats.org/drawingml/2006/main" w="0">
+            <a:noFill/>
+            <a:prstDash val="solid"/>
+          </a:ln>
+        </p:spPr>
+        <p:txBody>
+          <a:bodyPr xmlns:a="http://schemas.openxmlformats.org/drawingml/2006/main" wrap="square" lIns="0" tIns="0" rIns="0" bIns="0" anchor="t">
+            <a:normAutofit fontScale="100000"/>
+          </a:bodyPr>
+          <a:lstStyle xmlns:a="http://schemas.openxmlformats.org/drawingml/2006/main"/>
+          <a:p xmlns:a="http://schemas.openxmlformats.org/drawingml/2006/main">
+            <a:pPr algn="l">
+              <a:buNone/>
+              <a:defRPr sz="1350" b="1">
+                <a:solidFill>
+                  <a:srgbClr val="E45756"/>
+                </a:solidFill>
+                <a:latin typeface="Arial"/>
+                <a:ea typeface="Arial"/>
+                <a:cs typeface="Arial"/>
+              </a:defRPr>
+            </a:pPr>
+            <a:r>
+              <a:rPr sz="1350" b="1">
+                <a:solidFill>
+                  <a:srgbClr val="E45756"/>
+                </a:solidFill>
+                <a:latin typeface="Arial"/>
+                <a:ea typeface="Arial"/>
+                <a:cs typeface="Arial"/>
+              </a:rPr>
+              <a:t>QQQ PRIOR MAP</a:t>
+            </a:r>
+          </a:p>
+        </p:txBody>
+      </p:sp>
+      <p:sp>
+        <p:nvSpPr>
+          <p:cNvPr id="8" name="">
+            <a:extLst xmlns:a="http://schemas.openxmlformats.org/drawingml/2006/main">
+              <a:ext uri="{FF2B5EF4-FFF2-40B4-BE49-F238E27FC236}">
+                <a16:creationId xmlns:a16="http://schemas.microsoft.com/office/drawing/2014/main" id="{655CF75D-5F23-4C7F-BE9C-764036D0B9E8}"/>
+              </a:ext>
+            </a:extLst>
+          </p:cNvPr>
+          <p:cNvSpPr>
+            <a:spLocks xmlns:a="http://schemas.openxmlformats.org/drawingml/2006/main" noGrp="1"/>
+          </p:cNvSpPr>
+          <p:nvPr/>
+        </p:nvSpPr>
+        <p:spPr>
+          <a:xfrm xmlns:a="http://schemas.openxmlformats.org/drawingml/2006/main">
+            <a:off x="3105150" y="1562100"/>
+            <a:ext cx="4762500" cy="419100"/>
+          </a:xfrm>
+          <a:prstGeom xmlns:a="http://schemas.openxmlformats.org/drawingml/2006/main" prst="rect">
+            <a:avLst/>
+          </a:prstGeom>
+          <a:noFill xmlns:a="http://schemas.openxmlformats.org/drawingml/2006/main"/>
+          <a:ln xmlns:a="http://schemas.openxmlformats.org/drawingml/2006/main" w="0">
+            <a:noFill/>
+            <a:prstDash val="solid"/>
+          </a:ln>
+        </p:spPr>
+        <p:txBody>
+          <a:bodyPr xmlns:a="http://schemas.openxmlformats.org/drawingml/2006/main" wrap="square" lIns="0" tIns="0" rIns="0" bIns="0" anchor="t">
+            <a:normAutofit fontScale="74325"/>
+          </a:bodyPr>
+          <a:lstStyle xmlns:a="http://schemas.openxmlformats.org/drawingml/2006/main"/>
+          <a:p xmlns:a="http://schemas.openxmlformats.org/drawingml/2006/main">
+            <a:pPr algn="l">
+              <a:buNone/>
+              <a:defRPr sz="1950" b="1">
+                <a:solidFill>
+                  <a:srgbClr val="273548"/>
+                </a:solidFill>
+                <a:latin typeface="Arial"/>
+                <a:ea typeface="Arial"/>
+                <a:cs typeface="Arial"/>
+              </a:defRPr>
+            </a:pPr>
+            <a:r>
+              <a:rPr sz="1950" b="1">
+                <a:solidFill>
+                  <a:srgbClr val="273548"/>
+                </a:solidFill>
+                <a:latin typeface="Arial"/>
+                <a:ea typeface="Arial"/>
+                <a:cs typeface="Arial"/>
+              </a:rPr>
+              <a:t>Positive island peaks around 5–10 prior / 5–10 forward</a:t>
+            </a:r>
+          </a:p>
+        </p:txBody>
+      </p:sp>
+      <p:sp>
+        <p:nvSpPr>
+          <p:cNvPr id="9" name="">
+            <a:extLst xmlns:a="http://schemas.openxmlformats.org/drawingml/2006/main">
+              <a:ext uri="{FF2B5EF4-FFF2-40B4-BE49-F238E27FC236}">
+                <a16:creationId xmlns:a16="http://schemas.microsoft.com/office/drawing/2014/main" id="{3E0B76F2-4514-4DD8-934B-ABE42A34E950}"/>
+              </a:ext>
+            </a:extLst>
+          </p:cNvPr>
+          <p:cNvSpPr>
+            <a:spLocks xmlns:a="http://schemas.openxmlformats.org/drawingml/2006/main" noGrp="1"/>
+          </p:cNvSpPr>
+          <p:nvPr/>
+        </p:nvSpPr>
+        <p:spPr>
+          <a:xfrm xmlns:a="http://schemas.openxmlformats.org/drawingml/2006/main">
+            <a:off x="8096250" y="1581150"/>
+            <a:ext cx="3333750" cy="704850"/>
+          </a:xfrm>
+          <a:prstGeom xmlns:a="http://schemas.openxmlformats.org/drawingml/2006/main" prst="rect">
+            <a:avLst/>
+          </a:prstGeom>
+          <a:noFill xmlns:a="http://schemas.openxmlformats.org/drawingml/2006/main"/>
+          <a:ln xmlns:a="http://schemas.openxmlformats.org/drawingml/2006/main" w="0">
+            <a:noFill/>
+            <a:prstDash val="solid"/>
+          </a:ln>
+        </p:spPr>
+        <p:txBody>
+          <a:bodyPr xmlns:a="http://schemas.openxmlformats.org/drawingml/2006/main" wrap="square" lIns="0" tIns="0" rIns="0" bIns="0" anchor="t">
+            <a:normAutofit fontScale="100000"/>
+          </a:bodyPr>
+          <a:lstStyle xmlns:a="http://schemas.openxmlformats.org/drawingml/2006/main"/>
+          <a:p xmlns:a="http://schemas.openxmlformats.org/drawingml/2006/main">
+            <a:pPr algn="l">
+              <a:buNone/>
+              <a:defRPr sz="1425" b="0">
+                <a:solidFill>
+                  <a:srgbClr val="667384"/>
+                </a:solidFill>
+                <a:latin typeface="Arial"/>
+                <a:ea typeface="Arial"/>
+                <a:cs typeface="Arial"/>
+              </a:defRPr>
+            </a:pPr>
+            <a:r>
+              <a:rPr sz="1425" b="0">
+                <a:solidFill>
+                  <a:srgbClr val="667384"/>
+                </a:solidFill>
+                <a:latin typeface="Arial"/>
+                <a:ea typeface="Arial"/>
+                <a:cs typeface="Arial"/>
+              </a:rPr>
+              <a:t>72/81 positive; max r +0.134; 0/81 family passes</a:t>
+            </a:r>
+          </a:p>
+        </p:txBody>
+      </p:sp>
+      <p:sp>
+        <p:nvSpPr>
+          <p:cNvPr id="10" name="">
+            <a:extLst xmlns:a="http://schemas.openxmlformats.org/drawingml/2006/main">
+              <a:ext uri="{FF2B5EF4-FFF2-40B4-BE49-F238E27FC236}">
+                <a16:creationId xmlns:a16="http://schemas.microsoft.com/office/drawing/2014/main" id="{294777C3-6D2F-4277-840E-7E984FB4554D}"/>
+              </a:ext>
+            </a:extLst>
+          </p:cNvPr>
+          <p:cNvSpPr>
+            <a:spLocks xmlns:a="http://schemas.openxmlformats.org/drawingml/2006/main" noGrp="1"/>
+          </p:cNvSpPr>
+          <p:nvPr/>
+        </p:nvSpPr>
+        <p:spPr>
+          <a:xfrm xmlns:a="http://schemas.openxmlformats.org/drawingml/2006/main">
+            <a:off x="876300" y="2590800"/>
+            <a:ext cx="10553700" cy="9525"/>
+          </a:xfrm>
+          <a:prstGeom xmlns:a="http://schemas.openxmlformats.org/drawingml/2006/main" prst="rect">
+            <a:avLst/>
+          </a:prstGeom>
+          <a:solidFill xmlns:a="http://schemas.openxmlformats.org/drawingml/2006/main">
+            <a:srgbClr val="B8BCC4"/>
+          </a:solidFill>
+          <a:ln xmlns:a="http://schemas.openxmlformats.org/drawingml/2006/main" w="0">
+            <a:solidFill>
+              <a:srgbClr val="B8BCC4"/>
+            </a:solidFill>
+            <a:prstDash val="solid"/>
+          </a:ln>
+        </p:spPr>
+      </p:sp>
+      <p:sp>
+        <p:nvSpPr>
+          <p:cNvPr id="11" name="">
+            <a:extLst xmlns:a="http://schemas.openxmlformats.org/drawingml/2006/main">
+              <a:ext uri="{FF2B5EF4-FFF2-40B4-BE49-F238E27FC236}">
+                <a16:creationId xmlns:a16="http://schemas.microsoft.com/office/drawing/2014/main" id="{F894CF3F-AD63-423C-8F01-64C507896579}"/>
+              </a:ext>
+            </a:extLst>
+          </p:cNvPr>
+          <p:cNvSpPr>
+            <a:spLocks xmlns:a="http://schemas.openxmlformats.org/drawingml/2006/main" noGrp="1"/>
+          </p:cNvSpPr>
+          <p:nvPr/>
+        </p:nvSpPr>
+        <p:spPr>
+          <a:xfrm xmlns:a="http://schemas.openxmlformats.org/drawingml/2006/main">
+            <a:off x="552450" y="2800350"/>
+            <a:ext cx="95250" cy="895350"/>
+          </a:xfrm>
+          <a:prstGeom xmlns:a="http://schemas.openxmlformats.org/drawingml/2006/main" prst="rect">
+            <a:avLst/>
+          </a:prstGeom>
+          <a:solidFill xmlns:a="http://schemas.openxmlformats.org/drawingml/2006/main">
+            <a:srgbClr val="2A9D6F"/>
+          </a:solidFill>
+          <a:ln xmlns:a="http://schemas.openxmlformats.org/drawingml/2006/main" w="0">
+            <a:solidFill>
+              <a:srgbClr val="2A9D6F"/>
+            </a:solidFill>
+            <a:prstDash val="solid"/>
+          </a:ln>
+        </p:spPr>
+      </p:sp>
+      <p:sp>
+        <p:nvSpPr>
+          <p:cNvPr id="12" name="">
+            <a:extLst xmlns:a="http://schemas.openxmlformats.org/drawingml/2006/main">
+              <a:ext uri="{FF2B5EF4-FFF2-40B4-BE49-F238E27FC236}">
+                <a16:creationId xmlns:a16="http://schemas.microsoft.com/office/drawing/2014/main" id="{D3953D03-6A7A-4FEE-B242-02BF0319C169}"/>
+              </a:ext>
+            </a:extLst>
+          </p:cNvPr>
+          <p:cNvSpPr>
+            <a:spLocks xmlns:a="http://schemas.openxmlformats.org/drawingml/2006/main" noGrp="1"/>
+          </p:cNvSpPr>
+          <p:nvPr/>
+        </p:nvSpPr>
+        <p:spPr>
+          <a:xfrm xmlns:a="http://schemas.openxmlformats.org/drawingml/2006/main">
+            <a:off x="876300" y="2781300"/>
+            <a:ext cx="2095500" cy="285750"/>
+          </a:xfrm>
+          <a:prstGeom xmlns:a="http://schemas.openxmlformats.org/drawingml/2006/main" prst="rect">
+            <a:avLst/>
+          </a:prstGeom>
+          <a:noFill xmlns:a="http://schemas.openxmlformats.org/drawingml/2006/main"/>
+          <a:ln xmlns:a="http://schemas.openxmlformats.org/drawingml/2006/main" w="0">
+            <a:noFill/>
+            <a:prstDash val="solid"/>
+          </a:ln>
+        </p:spPr>
+        <p:txBody>
+          <a:bodyPr xmlns:a="http://schemas.openxmlformats.org/drawingml/2006/main" wrap="square" lIns="0" tIns="0" rIns="0" bIns="0" anchor="t">
+            <a:normAutofit fontScale="100000"/>
+          </a:bodyPr>
+          <a:lstStyle xmlns:a="http://schemas.openxmlformats.org/drawingml/2006/main"/>
+          <a:p xmlns:a="http://schemas.openxmlformats.org/drawingml/2006/main">
+            <a:pPr algn="l">
+              <a:buNone/>
+              <a:defRPr sz="1350" b="1">
+                <a:solidFill>
+                  <a:srgbClr val="2A9D6F"/>
+                </a:solidFill>
+                <a:latin typeface="Arial"/>
+                <a:ea typeface="Arial"/>
+                <a:cs typeface="Arial"/>
+              </a:defRPr>
+            </a:pPr>
+            <a:r>
+              <a:rPr sz="1350" b="1">
+                <a:solidFill>
+                  <a:srgbClr val="2A9D6F"/>
+                </a:solidFill>
+                <a:latin typeface="Arial"/>
+                <a:ea typeface="Arial"/>
+                <a:cs typeface="Arial"/>
+              </a:rPr>
+              <a:t>SPY PRIOR MAP</a:t>
+            </a:r>
+          </a:p>
+        </p:txBody>
+      </p:sp>
+      <p:sp>
+        <p:nvSpPr>
+          <p:cNvPr id="13" name="">
+            <a:extLst xmlns:a="http://schemas.openxmlformats.org/drawingml/2006/main">
+              <a:ext uri="{FF2B5EF4-FFF2-40B4-BE49-F238E27FC236}">
+                <a16:creationId xmlns:a16="http://schemas.microsoft.com/office/drawing/2014/main" id="{52D1DBE8-EAF6-4492-89E7-5C97A3A6A395}"/>
+              </a:ext>
+            </a:extLst>
+          </p:cNvPr>
+          <p:cNvSpPr>
+            <a:spLocks xmlns:a="http://schemas.openxmlformats.org/drawingml/2006/main" noGrp="1"/>
+          </p:cNvSpPr>
+          <p:nvPr/>
+        </p:nvSpPr>
+        <p:spPr>
+          <a:xfrm xmlns:a="http://schemas.openxmlformats.org/drawingml/2006/main">
+            <a:off x="3105150" y="2762250"/>
+            <a:ext cx="4762500" cy="419100"/>
+          </a:xfrm>
+          <a:prstGeom xmlns:a="http://schemas.openxmlformats.org/drawingml/2006/main" prst="rect">
+            <a:avLst/>
+          </a:prstGeom>
+          <a:noFill xmlns:a="http://schemas.openxmlformats.org/drawingml/2006/main"/>
+          <a:ln xmlns:a="http://schemas.openxmlformats.org/drawingml/2006/main" w="0">
+            <a:noFill/>
+            <a:prstDash val="solid"/>
+          </a:ln>
+        </p:spPr>
+        <p:txBody>
+          <a:bodyPr xmlns:a="http://schemas.openxmlformats.org/drawingml/2006/main" wrap="square" lIns="0" tIns="0" rIns="0" bIns="0" anchor="t">
+            <a:normAutofit fontScale="70513"/>
+          </a:bodyPr>
+          <a:lstStyle xmlns:a="http://schemas.openxmlformats.org/drawingml/2006/main"/>
+          <a:p xmlns:a="http://schemas.openxmlformats.org/drawingml/2006/main">
+            <a:pPr algn="l">
+              <a:buNone/>
+              <a:defRPr sz="1950" b="1">
+                <a:solidFill>
+                  <a:srgbClr val="273548"/>
+                </a:solidFill>
+                <a:latin typeface="Arial"/>
+                <a:ea typeface="Arial"/>
+                <a:cs typeface="Arial"/>
+              </a:defRPr>
+            </a:pPr>
+            <a:r>
+              <a:rPr sz="1950" b="1">
+                <a:solidFill>
+                  <a:srgbClr val="273548"/>
+                </a:solidFill>
+                <a:latin typeface="Arial"/>
+                <a:ea typeface="Arial"/>
+                <a:cs typeface="Arial"/>
+              </a:rPr>
+              <a:t>Nearly the same surface, with slightly weaker point estimates</a:t>
+            </a:r>
+          </a:p>
+        </p:txBody>
+      </p:sp>
+      <p:sp>
+        <p:nvSpPr>
+          <p:cNvPr id="14" name="">
+            <a:extLst xmlns:a="http://schemas.openxmlformats.org/drawingml/2006/main">
+              <a:ext uri="{FF2B5EF4-FFF2-40B4-BE49-F238E27FC236}">
+                <a16:creationId xmlns:a16="http://schemas.microsoft.com/office/drawing/2014/main" id="{2CAF0156-C9E6-4210-8A8A-BFEDD044631B}"/>
+              </a:ext>
+            </a:extLst>
+          </p:cNvPr>
+          <p:cNvSpPr>
+            <a:spLocks xmlns:a="http://schemas.openxmlformats.org/drawingml/2006/main" noGrp="1"/>
+          </p:cNvSpPr>
+          <p:nvPr/>
+        </p:nvSpPr>
+        <p:spPr>
+          <a:xfrm xmlns:a="http://schemas.openxmlformats.org/drawingml/2006/main">
+            <a:off x="8096250" y="2781300"/>
+            <a:ext cx="3333750" cy="704850"/>
+          </a:xfrm>
+          <a:prstGeom xmlns:a="http://schemas.openxmlformats.org/drawingml/2006/main" prst="rect">
+            <a:avLst/>
+          </a:prstGeom>
+          <a:noFill xmlns:a="http://schemas.openxmlformats.org/drawingml/2006/main"/>
+          <a:ln xmlns:a="http://schemas.openxmlformats.org/drawingml/2006/main" w="0">
+            <a:noFill/>
+            <a:prstDash val="solid"/>
+          </a:ln>
+        </p:spPr>
+        <p:txBody>
+          <a:bodyPr xmlns:a="http://schemas.openxmlformats.org/drawingml/2006/main" wrap="square" lIns="0" tIns="0" rIns="0" bIns="0" anchor="t">
+            <a:normAutofit fontScale="100000"/>
+          </a:bodyPr>
+          <a:lstStyle xmlns:a="http://schemas.openxmlformats.org/drawingml/2006/main"/>
+          <a:p xmlns:a="http://schemas.openxmlformats.org/drawingml/2006/main">
+            <a:pPr algn="l">
+              <a:buNone/>
+              <a:defRPr sz="1425" b="0">
+                <a:solidFill>
+                  <a:srgbClr val="667384"/>
+                </a:solidFill>
+                <a:latin typeface="Arial"/>
+                <a:ea typeface="Arial"/>
+                <a:cs typeface="Arial"/>
+              </a:defRPr>
+            </a:pPr>
+            <a:r>
+              <a:rPr sz="1425" b="0">
+                <a:solidFill>
+                  <a:srgbClr val="667384"/>
+                </a:solidFill>
+                <a:latin typeface="Arial"/>
+                <a:ea typeface="Arial"/>
+                <a:cs typeface="Arial"/>
+              </a:rPr>
+              <a:t>70/81 positive; max r +0.111; 0/81 family passes</a:t>
+            </a:r>
+          </a:p>
+        </p:txBody>
+      </p:sp>
+      <p:sp>
+        <p:nvSpPr>
+          <p:cNvPr id="15" name="">
+            <a:extLst xmlns:a="http://schemas.openxmlformats.org/drawingml/2006/main">
+              <a:ext uri="{FF2B5EF4-FFF2-40B4-BE49-F238E27FC236}">
+                <a16:creationId xmlns:a16="http://schemas.microsoft.com/office/drawing/2014/main" id="{B126165D-5B65-44DB-99BD-15ED33F9B90F}"/>
+              </a:ext>
+            </a:extLst>
+          </p:cNvPr>
+          <p:cNvSpPr>
+            <a:spLocks xmlns:a="http://schemas.openxmlformats.org/drawingml/2006/main" noGrp="1"/>
+          </p:cNvSpPr>
+          <p:nvPr/>
+        </p:nvSpPr>
+        <p:spPr>
+          <a:xfrm xmlns:a="http://schemas.openxmlformats.org/drawingml/2006/main">
+            <a:off x="876300" y="3790950"/>
+            <a:ext cx="10553700" cy="9525"/>
+          </a:xfrm>
+          <a:prstGeom xmlns:a="http://schemas.openxmlformats.org/drawingml/2006/main" prst="rect">
+            <a:avLst/>
+          </a:prstGeom>
+          <a:solidFill xmlns:a="http://schemas.openxmlformats.org/drawingml/2006/main">
+            <a:srgbClr val="B8BCC4"/>
+          </a:solidFill>
+          <a:ln xmlns:a="http://schemas.openxmlformats.org/drawingml/2006/main" w="0">
+            <a:solidFill>
+              <a:srgbClr val="B8BCC4"/>
+            </a:solidFill>
+            <a:prstDash val="solid"/>
+          </a:ln>
+        </p:spPr>
+      </p:sp>
+      <p:sp>
+        <p:nvSpPr>
+          <p:cNvPr id="16" name="">
+            <a:extLst xmlns:a="http://schemas.openxmlformats.org/drawingml/2006/main">
+              <a:ext uri="{FF2B5EF4-FFF2-40B4-BE49-F238E27FC236}">
+                <a16:creationId xmlns:a16="http://schemas.microsoft.com/office/drawing/2014/main" id="{7DC0911F-9587-4B19-84C6-11974DB2A91C}"/>
+              </a:ext>
+            </a:extLst>
+          </p:cNvPr>
+          <p:cNvSpPr>
+            <a:spLocks xmlns:a="http://schemas.openxmlformats.org/drawingml/2006/main" noGrp="1"/>
+          </p:cNvSpPr>
+          <p:nvPr/>
+        </p:nvSpPr>
+        <p:spPr>
+          <a:xfrm xmlns:a="http://schemas.openxmlformats.org/drawingml/2006/main">
+            <a:off x="552450" y="4000500"/>
+            <a:ext cx="95250" cy="895350"/>
+          </a:xfrm>
+          <a:prstGeom xmlns:a="http://schemas.openxmlformats.org/drawingml/2006/main" prst="rect">
+            <a:avLst/>
+          </a:prstGeom>
+          <a:solidFill xmlns:a="http://schemas.openxmlformats.org/drawingml/2006/main">
+            <a:srgbClr val="3D8DFF"/>
+          </a:solidFill>
+          <a:ln xmlns:a="http://schemas.openxmlformats.org/drawingml/2006/main" w="0">
+            <a:solidFill>
+              <a:srgbClr val="3D8DFF"/>
+            </a:solidFill>
+            <a:prstDash val="solid"/>
+          </a:ln>
+        </p:spPr>
+      </p:sp>
+      <p:sp>
+        <p:nvSpPr>
+          <p:cNvPr id="17" name="">
+            <a:extLst xmlns:a="http://schemas.openxmlformats.org/drawingml/2006/main">
+              <a:ext uri="{FF2B5EF4-FFF2-40B4-BE49-F238E27FC236}">
+                <a16:creationId xmlns:a16="http://schemas.microsoft.com/office/drawing/2014/main" id="{DAB53991-F50C-4B95-9F23-DAE86BCEDF3B}"/>
+              </a:ext>
+            </a:extLst>
+          </p:cNvPr>
+          <p:cNvSpPr>
+            <a:spLocks xmlns:a="http://schemas.openxmlformats.org/drawingml/2006/main" noGrp="1"/>
+          </p:cNvSpPr>
+          <p:nvPr/>
+        </p:nvSpPr>
+        <p:spPr>
+          <a:xfrm xmlns:a="http://schemas.openxmlformats.org/drawingml/2006/main">
+            <a:off x="876300" y="3981450"/>
+            <a:ext cx="2095500" cy="285750"/>
+          </a:xfrm>
+          <a:prstGeom xmlns:a="http://schemas.openxmlformats.org/drawingml/2006/main" prst="rect">
+            <a:avLst/>
+          </a:prstGeom>
+          <a:noFill xmlns:a="http://schemas.openxmlformats.org/drawingml/2006/main"/>
+          <a:ln xmlns:a="http://schemas.openxmlformats.org/drawingml/2006/main" w="0">
+            <a:noFill/>
+            <a:prstDash val="solid"/>
+          </a:ln>
+        </p:spPr>
+        <p:txBody>
+          <a:bodyPr xmlns:a="http://schemas.openxmlformats.org/drawingml/2006/main" wrap="square" lIns="0" tIns="0" rIns="0" bIns="0" anchor="t">
+            <a:normAutofit fontScale="100000"/>
+          </a:bodyPr>
+          <a:lstStyle xmlns:a="http://schemas.openxmlformats.org/drawingml/2006/main"/>
+          <a:p xmlns:a="http://schemas.openxmlformats.org/drawingml/2006/main">
+            <a:pPr algn="l">
+              <a:buNone/>
+              <a:defRPr sz="1350" b="1">
+                <a:solidFill>
+                  <a:srgbClr val="3D8DFF"/>
+                </a:solidFill>
+                <a:latin typeface="Arial"/>
+                <a:ea typeface="Arial"/>
+                <a:cs typeface="Arial"/>
+              </a:defRPr>
+            </a:pPr>
+            <a:r>
+              <a:rPr sz="1350" b="1">
+                <a:solidFill>
+                  <a:srgbClr val="3D8DFF"/>
+                </a:solidFill>
+                <a:latin typeface="Arial"/>
+                <a:ea typeface="Arial"/>
+                <a:cs typeface="Arial"/>
+              </a:rPr>
+              <a:t>TSLA-OWN BASELINE</a:t>
+            </a:r>
+          </a:p>
+        </p:txBody>
+      </p:sp>
+      <p:sp>
+        <p:nvSpPr>
+          <p:cNvPr id="18" name="">
+            <a:extLst xmlns:a="http://schemas.openxmlformats.org/drawingml/2006/main">
+              <a:ext uri="{FF2B5EF4-FFF2-40B4-BE49-F238E27FC236}">
+                <a16:creationId xmlns:a16="http://schemas.microsoft.com/office/drawing/2014/main" id="{5DFACF3B-08BC-4148-A40A-2004DFB81D71}"/>
+              </a:ext>
+            </a:extLst>
+          </p:cNvPr>
+          <p:cNvSpPr>
+            <a:spLocks xmlns:a="http://schemas.openxmlformats.org/drawingml/2006/main" noGrp="1"/>
+          </p:cNvSpPr>
+          <p:nvPr/>
+        </p:nvSpPr>
+        <p:spPr>
+          <a:xfrm xmlns:a="http://schemas.openxmlformats.org/drawingml/2006/main">
+            <a:off x="3105150" y="3962400"/>
+            <a:ext cx="4762500" cy="419100"/>
+          </a:xfrm>
+          <a:prstGeom xmlns:a="http://schemas.openxmlformats.org/drawingml/2006/main" prst="rect">
+            <a:avLst/>
+          </a:prstGeom>
+          <a:noFill xmlns:a="http://schemas.openxmlformats.org/drawingml/2006/main"/>
+          <a:ln xmlns:a="http://schemas.openxmlformats.org/drawingml/2006/main" w="0">
+            <a:noFill/>
+            <a:prstDash val="solid"/>
+          </a:ln>
+        </p:spPr>
+        <p:txBody>
+          <a:bodyPr xmlns:a="http://schemas.openxmlformats.org/drawingml/2006/main" wrap="square" lIns="0" tIns="0" rIns="0" bIns="0" anchor="t">
+            <a:normAutofit fontScale="70513"/>
+          </a:bodyPr>
+          <a:lstStyle xmlns:a="http://schemas.openxmlformats.org/drawingml/2006/main"/>
+          <a:p xmlns:a="http://schemas.openxmlformats.org/drawingml/2006/main">
+            <a:pPr algn="l">
+              <a:buNone/>
+              <a:defRPr sz="1950" b="1">
+                <a:solidFill>
+                  <a:srgbClr val="273548"/>
+                </a:solidFill>
+                <a:latin typeface="Arial"/>
+                <a:ea typeface="Arial"/>
+                <a:cs typeface="Arial"/>
+              </a:defRPr>
+            </a:pPr>
+            <a:r>
+              <a:rPr sz="1950" b="1">
+                <a:solidFill>
+                  <a:srgbClr val="273548"/>
+                </a:solidFill>
+                <a:latin typeface="Arial"/>
+                <a:ea typeface="Arial"/>
+                <a:cs typeface="Arial"/>
+              </a:rPr>
+              <a:t>The same island already exists in TSLA's own prior-return map</a:t>
+            </a:r>
+          </a:p>
+        </p:txBody>
+      </p:sp>
+      <p:sp>
+        <p:nvSpPr>
+          <p:cNvPr id="19" name="">
+            <a:extLst xmlns:a="http://schemas.openxmlformats.org/drawingml/2006/main">
+              <a:ext uri="{FF2B5EF4-FFF2-40B4-BE49-F238E27FC236}">
+                <a16:creationId xmlns:a16="http://schemas.microsoft.com/office/drawing/2014/main" id="{C907D23B-44A2-43C4-9658-4C6E38430BF5}"/>
+              </a:ext>
+            </a:extLst>
+          </p:cNvPr>
+          <p:cNvSpPr>
+            <a:spLocks xmlns:a="http://schemas.openxmlformats.org/drawingml/2006/main" noGrp="1"/>
+          </p:cNvSpPr>
+          <p:nvPr/>
+        </p:nvSpPr>
+        <p:spPr>
+          <a:xfrm xmlns:a="http://schemas.openxmlformats.org/drawingml/2006/main">
+            <a:off x="8096250" y="3981450"/>
+            <a:ext cx="3333750" cy="704850"/>
+          </a:xfrm>
+          <a:prstGeom xmlns:a="http://schemas.openxmlformats.org/drawingml/2006/main" prst="rect">
+            <a:avLst/>
+          </a:prstGeom>
+          <a:noFill xmlns:a="http://schemas.openxmlformats.org/drawingml/2006/main"/>
+          <a:ln xmlns:a="http://schemas.openxmlformats.org/drawingml/2006/main" w="0">
+            <a:noFill/>
+            <a:prstDash val="solid"/>
+          </a:ln>
+        </p:spPr>
+        <p:txBody>
+          <a:bodyPr xmlns:a="http://schemas.openxmlformats.org/drawingml/2006/main" wrap="square" lIns="0" tIns="0" rIns="0" bIns="0" anchor="t">
+            <a:normAutofit fontScale="100000"/>
+          </a:bodyPr>
+          <a:lstStyle xmlns:a="http://schemas.openxmlformats.org/drawingml/2006/main"/>
+          <a:p xmlns:a="http://schemas.openxmlformats.org/drawingml/2006/main">
+            <a:pPr algn="l">
+              <a:buNone/>
+              <a:defRPr sz="1425" b="0">
+                <a:solidFill>
+                  <a:srgbClr val="667384"/>
+                </a:solidFill>
+                <a:latin typeface="Arial"/>
+                <a:ea typeface="Arial"/>
+                <a:cs typeface="Arial"/>
+              </a:defRPr>
+            </a:pPr>
+            <a:r>
+              <a:rPr sz="1425" b="0">
+                <a:solidFill>
+                  <a:srgbClr val="667384"/>
+                </a:solidFill>
+                <a:latin typeface="Arial"/>
+                <a:ea typeface="Arial"/>
+                <a:cs typeface="Arial"/>
+              </a:rPr>
+              <a:t>QQQ/own map r +0.906; SPY/own r +0.965</a:t>
+            </a:r>
+          </a:p>
+        </p:txBody>
+      </p:sp>
+      <p:sp>
+        <p:nvSpPr>
+          <p:cNvPr id="20" name="">
+            <a:extLst xmlns:a="http://schemas.openxmlformats.org/drawingml/2006/main">
+              <a:ext uri="{FF2B5EF4-FFF2-40B4-BE49-F238E27FC236}">
+                <a16:creationId xmlns:a16="http://schemas.microsoft.com/office/drawing/2014/main" id="{8042DFC4-7E22-47E6-8C53-1E63A8411C3A}"/>
+              </a:ext>
+            </a:extLst>
+          </p:cNvPr>
+          <p:cNvSpPr>
+            <a:spLocks xmlns:a="http://schemas.openxmlformats.org/drawingml/2006/main" noGrp="1"/>
+          </p:cNvSpPr>
+          <p:nvPr/>
+        </p:nvSpPr>
+        <p:spPr>
+          <a:xfrm xmlns:a="http://schemas.openxmlformats.org/drawingml/2006/main">
+            <a:off x="876300" y="4991100"/>
+            <a:ext cx="10553700" cy="9525"/>
+          </a:xfrm>
+          <a:prstGeom xmlns:a="http://schemas.openxmlformats.org/drawingml/2006/main" prst="rect">
+            <a:avLst/>
+          </a:prstGeom>
+          <a:solidFill xmlns:a="http://schemas.openxmlformats.org/drawingml/2006/main">
+            <a:srgbClr val="B8BCC4"/>
+          </a:solidFill>
+          <a:ln xmlns:a="http://schemas.openxmlformats.org/drawingml/2006/main" w="0">
+            <a:solidFill>
+              <a:srgbClr val="B8BCC4"/>
+            </a:solidFill>
+            <a:prstDash val="solid"/>
+          </a:ln>
+        </p:spPr>
+      </p:sp>
+      <p:sp>
+        <p:nvSpPr>
+          <p:cNvPr id="21" name="">
+            <a:extLst xmlns:a="http://schemas.openxmlformats.org/drawingml/2006/main">
+              <a:ext uri="{FF2B5EF4-FFF2-40B4-BE49-F238E27FC236}">
+                <a16:creationId xmlns:a16="http://schemas.microsoft.com/office/drawing/2014/main" id="{F4066D54-676B-4D0F-93B6-2152B57E41AF}"/>
+              </a:ext>
+            </a:extLst>
+          </p:cNvPr>
+          <p:cNvSpPr>
+            <a:spLocks xmlns:a="http://schemas.openxmlformats.org/drawingml/2006/main" noGrp="1"/>
+          </p:cNvSpPr>
+          <p:nvPr/>
+        </p:nvSpPr>
+        <p:spPr>
+          <a:xfrm xmlns:a="http://schemas.openxmlformats.org/drawingml/2006/main">
+            <a:off x="552450" y="5353050"/>
+            <a:ext cx="10877550" cy="781050"/>
+          </a:xfrm>
+          <a:prstGeom xmlns:a="http://schemas.openxmlformats.org/drawingml/2006/main" prst="rect">
+            <a:avLst/>
+          </a:prstGeom>
+          <a:solidFill xmlns:a="http://schemas.openxmlformats.org/drawingml/2006/main">
+            <a:srgbClr val="EAF5FB"/>
+          </a:solidFill>
+          <a:ln xmlns:a="http://schemas.openxmlformats.org/drawingml/2006/main" w="0">
+            <a:solidFill>
+              <a:srgbClr val="EAF5FB"/>
+            </a:solidFill>
+            <a:prstDash val="solid"/>
+          </a:ln>
+        </p:spPr>
+      </p:sp>
+      <p:sp>
+        <p:nvSpPr>
+          <p:cNvPr id="22" name="">
+            <a:extLst xmlns:a="http://schemas.openxmlformats.org/drawingml/2006/main">
+              <a:ext uri="{FF2B5EF4-FFF2-40B4-BE49-F238E27FC236}">
+                <a16:creationId xmlns:a16="http://schemas.microsoft.com/office/drawing/2014/main" id="{6E4C79AE-EB98-4B5B-B3D3-11ED0D4C729B}"/>
+              </a:ext>
+            </a:extLst>
+          </p:cNvPr>
+          <p:cNvSpPr>
+            <a:spLocks xmlns:a="http://schemas.openxmlformats.org/drawingml/2006/main" noGrp="1"/>
+          </p:cNvSpPr>
+          <p:nvPr/>
+        </p:nvSpPr>
+        <p:spPr>
+          <a:xfrm xmlns:a="http://schemas.openxmlformats.org/drawingml/2006/main">
+            <a:off x="781050" y="5524500"/>
+            <a:ext cx="2476500" cy="323850"/>
+          </a:xfrm>
+          <a:prstGeom xmlns:a="http://schemas.openxmlformats.org/drawingml/2006/main" prst="rect">
+            <a:avLst/>
+          </a:prstGeom>
+          <a:noFill xmlns:a="http://schemas.openxmlformats.org/drawingml/2006/main"/>
+          <a:ln xmlns:a="http://schemas.openxmlformats.org/drawingml/2006/main" w="0">
+            <a:noFill/>
+            <a:prstDash val="solid"/>
+          </a:ln>
+        </p:spPr>
+        <p:txBody>
+          <a:bodyPr xmlns:a="http://schemas.openxmlformats.org/drawingml/2006/main" wrap="square" lIns="0" tIns="0" rIns="0" bIns="0" anchor="t">
+            <a:normAutofit fontScale="100000"/>
+          </a:bodyPr>
+          <a:lstStyle xmlns:a="http://schemas.openxmlformats.org/drawingml/2006/main"/>
+          <a:p xmlns:a="http://schemas.openxmlformats.org/drawingml/2006/main">
+            <a:pPr algn="l">
+              <a:buNone/>
+              <a:defRPr sz="1725" b="1">
+                <a:solidFill>
+                  <a:srgbClr val="3D8DFF"/>
+                </a:solidFill>
+                <a:latin typeface="Arial"/>
+                <a:ea typeface="Arial"/>
+                <a:cs typeface="Arial"/>
+              </a:defRPr>
+            </a:pPr>
+            <a:r>
+              <a:rPr sz="1725" b="1">
+                <a:solidFill>
+                  <a:srgbClr val="3D8DFF"/>
+                </a:solidFill>
+                <a:latin typeface="Arial"/>
+                <a:ea typeface="Arial"/>
+                <a:cs typeface="Arial"/>
+              </a:rPr>
+              <a:t>What this earns</a:t>
+            </a:r>
+          </a:p>
+        </p:txBody>
+      </p:sp>
+      <p:sp>
+        <p:nvSpPr>
+          <p:cNvPr id="23" name="">
+            <a:extLst xmlns:a="http://schemas.openxmlformats.org/drawingml/2006/main">
+              <a:ext uri="{FF2B5EF4-FFF2-40B4-BE49-F238E27FC236}">
+                <a16:creationId xmlns:a16="http://schemas.microsoft.com/office/drawing/2014/main" id="{3320D60E-6067-4236-80ED-A898A863026E}"/>
+              </a:ext>
+            </a:extLst>
+          </p:cNvPr>
+          <p:cNvSpPr>
+            <a:spLocks xmlns:a="http://schemas.openxmlformats.org/drawingml/2006/main" noGrp="1"/>
+          </p:cNvSpPr>
+          <p:nvPr/>
+        </p:nvSpPr>
+        <p:spPr>
+          <a:xfrm xmlns:a="http://schemas.openxmlformats.org/drawingml/2006/main">
+            <a:off x="3333750" y="5486400"/>
+            <a:ext cx="7810500" cy="419100"/>
+          </a:xfrm>
+          <a:prstGeom xmlns:a="http://schemas.openxmlformats.org/drawingml/2006/main" prst="rect">
+            <a:avLst/>
+          </a:prstGeom>
+          <a:noFill xmlns:a="http://schemas.openxmlformats.org/drawingml/2006/main"/>
+          <a:ln xmlns:a="http://schemas.openxmlformats.org/drawingml/2006/main" w="0">
+            <a:noFill/>
+            <a:prstDash val="solid"/>
+          </a:ln>
+        </p:spPr>
+        <p:txBody>
+          <a:bodyPr xmlns:a="http://schemas.openxmlformats.org/drawingml/2006/main" wrap="square" lIns="0" tIns="0" rIns="0" bIns="0" anchor="t">
+            <a:normAutofit fontScale="76389"/>
+          </a:bodyPr>
+          <a:lstStyle xmlns:a="http://schemas.openxmlformats.org/drawingml/2006/main"/>
+          <a:p xmlns:a="http://schemas.openxmlformats.org/drawingml/2006/main">
+            <a:pPr algn="l">
+              <a:buNone/>
+              <a:defRPr sz="1800" b="1">
+                <a:solidFill>
+                  <a:srgbClr val="273548"/>
+                </a:solidFill>
+                <a:latin typeface="Arial"/>
+                <a:ea typeface="Arial"/>
+                <a:cs typeface="Arial"/>
+              </a:defRPr>
+            </a:pPr>
+            <a:r>
+              <a:rPr sz="1800" b="1">
+                <a:solidFill>
+                  <a:srgbClr val="273548"/>
+                </a:solidFill>
+                <a:latin typeface="Arial"/>
+                <a:ea typeface="Arial"/>
+                <a:cs typeface="Arial"/>
+              </a:rPr>
+              <a:t>Shared trend geometry is a useful clue, but no distinct external lead or multiplicity survivor is established. Keep the strategy gate closed.</a:t>
+            </a:r>
+          </a:p>
+        </p:txBody>
+      </p:sp>
+    </p:spTree>
+    <p:extLst>
+      <p:ext uri="{BB962C8B-B14F-4D97-AF65-F5344CB8AC3E}">
+        <p14:creationId xmlns:p14="http://schemas.microsoft.com/office/powerpoint/2010/main" val="666536286"/>
       </p:ext>
     </p:extLst>
   </p:cSld>
@@ -39693,7 +45266,7 @@
           <p:nvPr/>
         </p:nvPicPr>
         <p:blipFill>
-          <a:blip xmlns:r="http://schemas.openxmlformats.org/officeDocument/2006/relationships" xmlns:a="http://schemas.openxmlformats.org/drawingml/2006/main" r:embed="R6c170401382e4b68"/>
+          <a:blip xmlns:r="http://schemas.openxmlformats.org/officeDocument/2006/relationships" xmlns:a="http://schemas.openxmlformats.org/drawingml/2006/main" r:embed="R92c65cdd62d64b68"/>
           <a:stretch xmlns:a="http://schemas.openxmlformats.org/drawingml/2006/main"/>
         </p:blipFill>
         <p:spPr>
@@ -40598,7 +46171,7 @@
           <p:nvPr/>
         </p:nvPicPr>
         <p:blipFill>
-          <a:blip xmlns:r="http://schemas.openxmlformats.org/officeDocument/2006/relationships" xmlns:a="http://schemas.openxmlformats.org/drawingml/2006/main" r:embed="R198f8196e94149a5"/>
+          <a:blip xmlns:r="http://schemas.openxmlformats.org/officeDocument/2006/relationships" xmlns:a="http://schemas.openxmlformats.org/drawingml/2006/main" r:embed="Rf0f08754e4bc4009"/>
           <a:stretch xmlns:a="http://schemas.openxmlformats.org/drawingml/2006/main"/>
         </p:blipFill>
         <p:spPr>
@@ -41402,7 +46975,7 @@
           <p:nvPr/>
         </p:nvPicPr>
         <p:blipFill>
-          <a:blip xmlns:r="http://schemas.openxmlformats.org/officeDocument/2006/relationships" xmlns:a="http://schemas.openxmlformats.org/drawingml/2006/main" r:embed="R9f8ac34b6219429b"/>
+          <a:blip xmlns:r="http://schemas.openxmlformats.org/officeDocument/2006/relationships" xmlns:a="http://schemas.openxmlformats.org/drawingml/2006/main" r:embed="R9cf19edbd4864893"/>
           <a:stretch xmlns:a="http://schemas.openxmlformats.org/drawingml/2006/main"/>
         </p:blipFill>
         <p:spPr>

--- a/operator_hypothesis_lab/presentations/tsla_descriptive_microscope_evidence.pptx
+++ b/operator_hypothesis_lab/presentations/tsla_descriptive_microscope_evidence.pptx
@@ -2,65 +2,66 @@
 <file path=ppt/presentation.xml><?xml version="1.0" encoding="utf-8"?>
 <p:presentation xmlns:p="http://schemas.openxmlformats.org/presentationml/2006/main">
   <p:sldMasterIdLst>
-    <p:sldMasterId xmlns:r="http://schemas.openxmlformats.org/officeDocument/2006/relationships" id="2147483648" r:id="R2d0c60dfa8154058"/>
+    <p:sldMasterId xmlns:r="http://schemas.openxmlformats.org/officeDocument/2006/relationships" id="2147483648" r:id="Rf61dd1f23718494c"/>
   </p:sldMasterIdLst>
   <p:notesMasterIdLst>
-    <p:notesMasterId xmlns:r="http://schemas.openxmlformats.org/officeDocument/2006/relationships" r:id="Rc909d29ae35c4d05"/>
+    <p:notesMasterId xmlns:r="http://schemas.openxmlformats.org/officeDocument/2006/relationships" r:id="R81b9721162024041"/>
   </p:notesMasterIdLst>
   <p:sldIdLst>
-    <p:sldId xmlns:r="http://schemas.openxmlformats.org/officeDocument/2006/relationships" id="256" r:id="Rb5da33f69b824c39"/>
-    <p:sldId xmlns:r="http://schemas.openxmlformats.org/officeDocument/2006/relationships" id="257" r:id="R86485ec219bc4914"/>
-    <p:sldId xmlns:r="http://schemas.openxmlformats.org/officeDocument/2006/relationships" id="258" r:id="R507cec9fd33b456f"/>
-    <p:sldId xmlns:r="http://schemas.openxmlformats.org/officeDocument/2006/relationships" id="259" r:id="R1298cd02b5df4ce3"/>
-    <p:sldId xmlns:r="http://schemas.openxmlformats.org/officeDocument/2006/relationships" id="260" r:id="Rbe97eac3eecc4559"/>
-    <p:sldId xmlns:r="http://schemas.openxmlformats.org/officeDocument/2006/relationships" id="261" r:id="R8d8f3e588f32481f"/>
-    <p:sldId xmlns:r="http://schemas.openxmlformats.org/officeDocument/2006/relationships" id="262" r:id="Rc058de0f50f44cc9"/>
-    <p:sldId xmlns:r="http://schemas.openxmlformats.org/officeDocument/2006/relationships" id="263" r:id="Rf384f44496b44ebd"/>
-    <p:sldId xmlns:r="http://schemas.openxmlformats.org/officeDocument/2006/relationships" id="264" r:id="R9700962d23de46c8"/>
-    <p:sldId xmlns:r="http://schemas.openxmlformats.org/officeDocument/2006/relationships" id="265" r:id="R28f3beb482344672"/>
-    <p:sldId xmlns:r="http://schemas.openxmlformats.org/officeDocument/2006/relationships" id="266" r:id="R159eae1c65254443"/>
-    <p:sldId xmlns:r="http://schemas.openxmlformats.org/officeDocument/2006/relationships" id="267" r:id="Rb764c1a112754d06"/>
-    <p:sldId xmlns:r="http://schemas.openxmlformats.org/officeDocument/2006/relationships" id="268" r:id="R299a86d13f0748aa"/>
-    <p:sldId xmlns:r="http://schemas.openxmlformats.org/officeDocument/2006/relationships" id="269" r:id="R19677b2f514b4cd1"/>
-    <p:sldId xmlns:r="http://schemas.openxmlformats.org/officeDocument/2006/relationships" id="270" r:id="R1f6ba1e54b7b4da8"/>
-    <p:sldId xmlns:r="http://schemas.openxmlformats.org/officeDocument/2006/relationships" id="271" r:id="R8665125a4f5341cc"/>
-    <p:sldId xmlns:r="http://schemas.openxmlformats.org/officeDocument/2006/relationships" id="272" r:id="R5e69029554114e12"/>
-    <p:sldId xmlns:r="http://schemas.openxmlformats.org/officeDocument/2006/relationships" id="273" r:id="Racb65886ade94225"/>
-    <p:sldId xmlns:r="http://schemas.openxmlformats.org/officeDocument/2006/relationships" id="274" r:id="R9a01683007d444b9"/>
-    <p:sldId xmlns:r="http://schemas.openxmlformats.org/officeDocument/2006/relationships" id="275" r:id="R53c16fbdd6bd45d3"/>
-    <p:sldId xmlns:r="http://schemas.openxmlformats.org/officeDocument/2006/relationships" id="276" r:id="Rff86cf4a30724c42"/>
-    <p:sldId xmlns:r="http://schemas.openxmlformats.org/officeDocument/2006/relationships" id="277" r:id="Rbd31e32d4a344bfc"/>
-    <p:sldId xmlns:r="http://schemas.openxmlformats.org/officeDocument/2006/relationships" id="278" r:id="Rf158738c48164368"/>
-    <p:sldId xmlns:r="http://schemas.openxmlformats.org/officeDocument/2006/relationships" id="279" r:id="R3aa2b53991164f9f"/>
-    <p:sldId xmlns:r="http://schemas.openxmlformats.org/officeDocument/2006/relationships" id="280" r:id="R94cb0c3a9787486a"/>
-    <p:sldId xmlns:r="http://schemas.openxmlformats.org/officeDocument/2006/relationships" id="281" r:id="Re91ad19faf0f4475"/>
-    <p:sldId xmlns:r="http://schemas.openxmlformats.org/officeDocument/2006/relationships" id="282" r:id="Rdcdabb6a27444b08"/>
-    <p:sldId xmlns:r="http://schemas.openxmlformats.org/officeDocument/2006/relationships" id="283" r:id="R5591180664d9418f"/>
-    <p:sldId xmlns:r="http://schemas.openxmlformats.org/officeDocument/2006/relationships" id="284" r:id="R60580597089b43e2"/>
-    <p:sldId xmlns:r="http://schemas.openxmlformats.org/officeDocument/2006/relationships" id="285" r:id="Rcdae2b7c6abc4176"/>
-    <p:sldId xmlns:r="http://schemas.openxmlformats.org/officeDocument/2006/relationships" id="286" r:id="Rc8ecab206c4149a3"/>
-    <p:sldId xmlns:r="http://schemas.openxmlformats.org/officeDocument/2006/relationships" id="287" r:id="R48352f625278406f"/>
-    <p:sldId xmlns:r="http://schemas.openxmlformats.org/officeDocument/2006/relationships" id="288" r:id="Re98a7faeef234284"/>
-    <p:sldId xmlns:r="http://schemas.openxmlformats.org/officeDocument/2006/relationships" id="289" r:id="R62e758bbbe9f4a2a"/>
-    <p:sldId xmlns:r="http://schemas.openxmlformats.org/officeDocument/2006/relationships" id="290" r:id="Rf71bacf99c4d41a9"/>
-    <p:sldId xmlns:r="http://schemas.openxmlformats.org/officeDocument/2006/relationships" id="291" r:id="R6115b0548474494d"/>
-    <p:sldId xmlns:r="http://schemas.openxmlformats.org/officeDocument/2006/relationships" id="292" r:id="Rae2888d3ec4d4c7d"/>
-    <p:sldId xmlns:r="http://schemas.openxmlformats.org/officeDocument/2006/relationships" id="293" r:id="R5c128c99c3a64973"/>
-    <p:sldId xmlns:r="http://schemas.openxmlformats.org/officeDocument/2006/relationships" id="294" r:id="Rae827422b6194e12"/>
-    <p:sldId xmlns:r="http://schemas.openxmlformats.org/officeDocument/2006/relationships" id="295" r:id="R950565b7faba499e"/>
-    <p:sldId xmlns:r="http://schemas.openxmlformats.org/officeDocument/2006/relationships" id="296" r:id="R57dba2d151ff4b10"/>
-    <p:sldId xmlns:r="http://schemas.openxmlformats.org/officeDocument/2006/relationships" id="297" r:id="R44623d04a653437d"/>
-    <p:sldId xmlns:r="http://schemas.openxmlformats.org/officeDocument/2006/relationships" id="298" r:id="R675eacbfc68742d6"/>
-    <p:sldId xmlns:r="http://schemas.openxmlformats.org/officeDocument/2006/relationships" id="299" r:id="R49d100e88b9444a3"/>
-    <p:sldId xmlns:r="http://schemas.openxmlformats.org/officeDocument/2006/relationships" id="300" r:id="R9c17e4d3a4644dfd"/>
-    <p:sldId xmlns:r="http://schemas.openxmlformats.org/officeDocument/2006/relationships" id="301" r:id="Rfd9b5ed52224450c"/>
-    <p:sldId xmlns:r="http://schemas.openxmlformats.org/officeDocument/2006/relationships" id="302" r:id="R17f5d8bd4b2e4953"/>
-    <p:sldId xmlns:r="http://schemas.openxmlformats.org/officeDocument/2006/relationships" id="303" r:id="R1afb64cd08f448da"/>
-    <p:sldId xmlns:r="http://schemas.openxmlformats.org/officeDocument/2006/relationships" id="304" r:id="R4fe355cdbcf2424b"/>
-    <p:sldId xmlns:r="http://schemas.openxmlformats.org/officeDocument/2006/relationships" id="305" r:id="Rdd458d252e874f3c"/>
-    <p:sldId xmlns:r="http://schemas.openxmlformats.org/officeDocument/2006/relationships" id="306" r:id="R2e28cbb731d94a3f"/>
-    <p:sldId xmlns:r="http://schemas.openxmlformats.org/officeDocument/2006/relationships" id="307" r:id="R5f3d2787aef84bdb"/>
-    <p:sldId xmlns:r="http://schemas.openxmlformats.org/officeDocument/2006/relationships" id="308" r:id="R13d54c743bae45da"/>
+    <p:sldId xmlns:r="http://schemas.openxmlformats.org/officeDocument/2006/relationships" id="256" r:id="Rd529e9f358b244a8"/>
+    <p:sldId xmlns:r="http://schemas.openxmlformats.org/officeDocument/2006/relationships" id="257" r:id="Rc356486f566f4c2d"/>
+    <p:sldId xmlns:r="http://schemas.openxmlformats.org/officeDocument/2006/relationships" id="258" r:id="Re82aef3c68f04574"/>
+    <p:sldId xmlns:r="http://schemas.openxmlformats.org/officeDocument/2006/relationships" id="259" r:id="R466e892a068d4664"/>
+    <p:sldId xmlns:r="http://schemas.openxmlformats.org/officeDocument/2006/relationships" id="260" r:id="Re417a43f19134f68"/>
+    <p:sldId xmlns:r="http://schemas.openxmlformats.org/officeDocument/2006/relationships" id="261" r:id="R271f45b6d12c4495"/>
+    <p:sldId xmlns:r="http://schemas.openxmlformats.org/officeDocument/2006/relationships" id="262" r:id="Ra863e21e033d4d76"/>
+    <p:sldId xmlns:r="http://schemas.openxmlformats.org/officeDocument/2006/relationships" id="263" r:id="R8232b5c9785d4cbc"/>
+    <p:sldId xmlns:r="http://schemas.openxmlformats.org/officeDocument/2006/relationships" id="264" r:id="Rc1acf6d23e044b0e"/>
+    <p:sldId xmlns:r="http://schemas.openxmlformats.org/officeDocument/2006/relationships" id="265" r:id="Rb7ec82c82c8c44dc"/>
+    <p:sldId xmlns:r="http://schemas.openxmlformats.org/officeDocument/2006/relationships" id="266" r:id="Rf2c7793e025b4400"/>
+    <p:sldId xmlns:r="http://schemas.openxmlformats.org/officeDocument/2006/relationships" id="267" r:id="R20791de619b74893"/>
+    <p:sldId xmlns:r="http://schemas.openxmlformats.org/officeDocument/2006/relationships" id="268" r:id="R312c8a5fd9354a03"/>
+    <p:sldId xmlns:r="http://schemas.openxmlformats.org/officeDocument/2006/relationships" id="269" r:id="R6267bdbaeb1449f0"/>
+    <p:sldId xmlns:r="http://schemas.openxmlformats.org/officeDocument/2006/relationships" id="270" r:id="R38d4bb1e362b4bdd"/>
+    <p:sldId xmlns:r="http://schemas.openxmlformats.org/officeDocument/2006/relationships" id="271" r:id="R1b58016fb1d042df"/>
+    <p:sldId xmlns:r="http://schemas.openxmlformats.org/officeDocument/2006/relationships" id="272" r:id="R2898cb1bddef4c5c"/>
+    <p:sldId xmlns:r="http://schemas.openxmlformats.org/officeDocument/2006/relationships" id="273" r:id="R33a1585bb05144cd"/>
+    <p:sldId xmlns:r="http://schemas.openxmlformats.org/officeDocument/2006/relationships" id="274" r:id="R547410e006904312"/>
+    <p:sldId xmlns:r="http://schemas.openxmlformats.org/officeDocument/2006/relationships" id="275" r:id="Ref611fff2b354357"/>
+    <p:sldId xmlns:r="http://schemas.openxmlformats.org/officeDocument/2006/relationships" id="276" r:id="Rdbb3af3237464437"/>
+    <p:sldId xmlns:r="http://schemas.openxmlformats.org/officeDocument/2006/relationships" id="277" r:id="R255205585b564edd"/>
+    <p:sldId xmlns:r="http://schemas.openxmlformats.org/officeDocument/2006/relationships" id="278" r:id="R2de7367c44454c4e"/>
+    <p:sldId xmlns:r="http://schemas.openxmlformats.org/officeDocument/2006/relationships" id="279" r:id="Rb140ee5455714ab5"/>
+    <p:sldId xmlns:r="http://schemas.openxmlformats.org/officeDocument/2006/relationships" id="280" r:id="Re3170730671c4b8c"/>
+    <p:sldId xmlns:r="http://schemas.openxmlformats.org/officeDocument/2006/relationships" id="281" r:id="R3007416aff5347b4"/>
+    <p:sldId xmlns:r="http://schemas.openxmlformats.org/officeDocument/2006/relationships" id="282" r:id="R115c58aa49174245"/>
+    <p:sldId xmlns:r="http://schemas.openxmlformats.org/officeDocument/2006/relationships" id="283" r:id="R994bb15582184ec0"/>
+    <p:sldId xmlns:r="http://schemas.openxmlformats.org/officeDocument/2006/relationships" id="284" r:id="R1b996ff9f0024938"/>
+    <p:sldId xmlns:r="http://schemas.openxmlformats.org/officeDocument/2006/relationships" id="285" r:id="R5a22998ac5a0497d"/>
+    <p:sldId xmlns:r="http://schemas.openxmlformats.org/officeDocument/2006/relationships" id="286" r:id="R7c475a0f575e4aa8"/>
+    <p:sldId xmlns:r="http://schemas.openxmlformats.org/officeDocument/2006/relationships" id="287" r:id="R3b45af128ea74c6a"/>
+    <p:sldId xmlns:r="http://schemas.openxmlformats.org/officeDocument/2006/relationships" id="288" r:id="R19b26324dfbb4383"/>
+    <p:sldId xmlns:r="http://schemas.openxmlformats.org/officeDocument/2006/relationships" id="289" r:id="R6ed55f6b04014b49"/>
+    <p:sldId xmlns:r="http://schemas.openxmlformats.org/officeDocument/2006/relationships" id="290" r:id="R835a57eaaae64903"/>
+    <p:sldId xmlns:r="http://schemas.openxmlformats.org/officeDocument/2006/relationships" id="291" r:id="R65a926a64c0b4c0e"/>
+    <p:sldId xmlns:r="http://schemas.openxmlformats.org/officeDocument/2006/relationships" id="292" r:id="Ra9839fa44c77492a"/>
+    <p:sldId xmlns:r="http://schemas.openxmlformats.org/officeDocument/2006/relationships" id="293" r:id="R64dc8a30f4ea4728"/>
+    <p:sldId xmlns:r="http://schemas.openxmlformats.org/officeDocument/2006/relationships" id="294" r:id="R6a754a44c34f4bb1"/>
+    <p:sldId xmlns:r="http://schemas.openxmlformats.org/officeDocument/2006/relationships" id="295" r:id="Rd11cc658b8b34b22"/>
+    <p:sldId xmlns:r="http://schemas.openxmlformats.org/officeDocument/2006/relationships" id="296" r:id="Rfeb0eeab965c4579"/>
+    <p:sldId xmlns:r="http://schemas.openxmlformats.org/officeDocument/2006/relationships" id="297" r:id="R44e04f7905f4410e"/>
+    <p:sldId xmlns:r="http://schemas.openxmlformats.org/officeDocument/2006/relationships" id="298" r:id="R038cd30c6eda455d"/>
+    <p:sldId xmlns:r="http://schemas.openxmlformats.org/officeDocument/2006/relationships" id="299" r:id="Red0a0811517d4db8"/>
+    <p:sldId xmlns:r="http://schemas.openxmlformats.org/officeDocument/2006/relationships" id="300" r:id="Re5f12015abb14c9a"/>
+    <p:sldId xmlns:r="http://schemas.openxmlformats.org/officeDocument/2006/relationships" id="301" r:id="Raf568e89fb1d4048"/>
+    <p:sldId xmlns:r="http://schemas.openxmlformats.org/officeDocument/2006/relationships" id="302" r:id="Rabe8660e61b741df"/>
+    <p:sldId xmlns:r="http://schemas.openxmlformats.org/officeDocument/2006/relationships" id="303" r:id="R1e3bb9b4fb694bf7"/>
+    <p:sldId xmlns:r="http://schemas.openxmlformats.org/officeDocument/2006/relationships" id="304" r:id="Rbd4fbf1d201047a9"/>
+    <p:sldId xmlns:r="http://schemas.openxmlformats.org/officeDocument/2006/relationships" id="305" r:id="Rfbfcb626eabe4614"/>
+    <p:sldId xmlns:r="http://schemas.openxmlformats.org/officeDocument/2006/relationships" id="306" r:id="Rd82e957cec7e42e8"/>
+    <p:sldId xmlns:r="http://schemas.openxmlformats.org/officeDocument/2006/relationships" id="307" r:id="Rf5fd6644ebf94e6a"/>
+    <p:sldId xmlns:r="http://schemas.openxmlformats.org/officeDocument/2006/relationships" id="308" r:id="R06d63831d43b48e5"/>
+    <p:sldId xmlns:r="http://schemas.openxmlformats.org/officeDocument/2006/relationships" id="309" r:id="Rdc2f36f62e9b41d1"/>
   </p:sldIdLst>
   <p:sldSz cx="12192000" cy="6858000"/>
   <p:notesSz cx="6858000" cy="9144000"/>
@@ -5014,6 +5015,96 @@
           </a:p>
           <a:p xmlns:a="http://schemas.openxmlformats.org/drawingml/2006/main">
             <a:r>
+              <a:t>Internal Gen5 own-return baseline packet: runs/research_workbench/operator_hypothesis_lab/tsla_cumulative_return_horizon_grid_20260825/</a:t>
+            </a:r>
+          </a:p>
+          <a:p xmlns:a="http://schemas.openxmlformats.org/drawingml/2006/main">
+            <a:r>
+              <a:t>[/Sources]</a:t>
+            </a:r>
+          </a:p>
+        </p:txBody>
+      </p:sp>
+      <p:sp>
+        <p:nvSpPr>
+          <p:cNvPr id="4" name="Slide Number Placeholder 3"/>
+          <p:cNvSpPr>
+            <a:spLocks xmlns:a="http://schemas.openxmlformats.org/drawingml/2006/main" noGrp="1"/>
+          </p:cNvSpPr>
+          <p:nvPr>
+            <p:ph type="sldNum" idx="5"/>
+          </p:nvPr>
+        </p:nvSpPr>
+        <p:spPr/>
+        <p:txBody>
+          <a:bodyPr xmlns:a="http://schemas.openxmlformats.org/drawingml/2006/main"/>
+          <a:lstStyle xmlns:a="http://schemas.openxmlformats.org/drawingml/2006/main"/>
+          <a:p xmlns:a="http://schemas.openxmlformats.org/drawingml/2006/main"/>
+        </p:txBody>
+      </p:sp>
+    </p:spTree>
+  </p:cSld>
+  <p:clrMapOvr>
+    <a:masterClrMapping xmlns:a="http://schemas.openxmlformats.org/drawingml/2006/main"/>
+  </p:clrMapOvr>
+</p:notes>
+</file>
+
+<file path=ppt/notesSlides/notesSlide54.xml><?xml version="1.0" encoding="utf-8"?>
+<p:notes xmlns:p="http://schemas.openxmlformats.org/presentationml/2006/main">
+  <p:cSld>
+    <p:spTree>
+      <p:nvGrpSpPr>
+        <p:cNvPr id="1" name=""/>
+        <p:cNvGrpSpPr/>
+        <p:nvPr/>
+      </p:nvGrpSpPr>
+      <p:grpSpPr>
+        <a:xfrm xmlns:a="http://schemas.openxmlformats.org/drawingml/2006/main"/>
+      </p:grpSpPr>
+      <p:sp>
+        <p:nvSpPr>
+          <p:cNvPr id="2" name="Slide Image Placeholder 1"/>
+          <p:cNvSpPr>
+            <a:spLocks xmlns:a="http://schemas.openxmlformats.org/drawingml/2006/main" noGrp="1"/>
+          </p:cNvSpPr>
+          <p:nvPr>
+            <p:ph type="sldImg" idx="0"/>
+          </p:nvPr>
+        </p:nvSpPr>
+        <p:spPr/>
+      </p:sp>
+      <p:sp>
+        <p:nvSpPr>
+          <p:cNvPr id="3" name="Notes Placeholder 2"/>
+          <p:cNvSpPr>
+            <a:spLocks xmlns:a="http://schemas.openxmlformats.org/drawingml/2006/main" noGrp="1"/>
+          </p:cNvSpPr>
+          <p:nvPr>
+            <p:ph type="body" idx="1"/>
+          </p:nvPr>
+        </p:nvSpPr>
+        <p:spPr/>
+        <p:txBody>
+          <a:bodyPr xmlns:a="http://schemas.openxmlformats.org/drawingml/2006/main"/>
+          <a:lstStyle xmlns:a="http://schemas.openxmlformats.org/drawingml/2006/main"/>
+          <a:p xmlns:a="http://schemas.openxmlformats.org/drawingml/2006/main">
+            <a:r>
+              <a:t>[Sources]</a:t>
+            </a:r>
+          </a:p>
+          <a:p xmlns:a="http://schemas.openxmlformats.org/drawingml/2006/main">
+            <a:r>
+              <a:t>Internal Gen5 packet: runs/research_workbench/operator_hypothesis_lab/tsla_qqq_spy_prior_return_horizon_grid_20260825/</a:t>
+            </a:r>
+          </a:p>
+          <a:p xmlns:a="http://schemas.openxmlformats.org/drawingml/2006/main">
+            <a:r>
+              <a:t>Internal Gen5 note: operator_hypothesis_lab/docs/TSLA_QQQ_SPY_PRIOR_RETURN_HORIZON_GRID_2018_2023.md</a:t>
+            </a:r>
+          </a:p>
+          <a:p xmlns:a="http://schemas.openxmlformats.org/drawingml/2006/main">
+            <a:r>
               <a:t>Internal Gen5 comparison packet: runs/research_workbench/operator_hypothesis_lab/tsla_return_horizon_grid_20260824/</a:t>
             </a:r>
           </a:p>
@@ -5477,7 +5568,7 @@
   </p:cSld>
   <p:clrMap bg1="lt1" tx1="dk1" bg2="lt2" tx2="dk2" accent1="accent1" accent2="accent2" accent3="accent3" accent4="accent4" accent5="accent5" accent6="accent6" hlink="hlink" folHlink="folHlink"/>
   <p:sldLayoutIdLst>
-    <p:sldLayoutId xmlns:r="http://schemas.openxmlformats.org/officeDocument/2006/relationships" id="2147483649" r:id="Rb0dbce1e837d4a3a"/>
+    <p:sldLayoutId xmlns:r="http://schemas.openxmlformats.org/officeDocument/2006/relationships" id="2147483649" r:id="R153e58f707b04b92"/>
   </p:sldLayoutIdLst>
   <p:txStyles>
     <p:titleStyle>
@@ -6656,7 +6747,7 @@
           <p:nvPr/>
         </p:nvPicPr>
         <p:blipFill>
-          <a:blip xmlns:r="http://schemas.openxmlformats.org/officeDocument/2006/relationships" xmlns:a="http://schemas.openxmlformats.org/drawingml/2006/main" r:embed="Rcab7b7c0b1cb40ed"/>
+          <a:blip xmlns:r="http://schemas.openxmlformats.org/officeDocument/2006/relationships" xmlns:a="http://schemas.openxmlformats.org/drawingml/2006/main" r:embed="R781ccdcb81604dbe"/>
           <a:stretch xmlns:a="http://schemas.openxmlformats.org/drawingml/2006/main"/>
         </p:blipFill>
         <p:spPr>
@@ -10577,7 +10668,7 @@
           <p:nvPr/>
         </p:nvPicPr>
         <p:blipFill>
-          <a:blip xmlns:r="http://schemas.openxmlformats.org/officeDocument/2006/relationships" xmlns:a="http://schemas.openxmlformats.org/drawingml/2006/main" r:embed="R6dbf029c19894815"/>
+          <a:blip xmlns:r="http://schemas.openxmlformats.org/officeDocument/2006/relationships" xmlns:a="http://schemas.openxmlformats.org/drawingml/2006/main" r:embed="R0988610be9cc4e56"/>
           <a:stretch xmlns:a="http://schemas.openxmlformats.org/drawingml/2006/main"/>
         </p:blipFill>
         <p:spPr>
@@ -11482,7 +11573,7 @@
           <p:nvPr/>
         </p:nvPicPr>
         <p:blipFill>
-          <a:blip xmlns:r="http://schemas.openxmlformats.org/officeDocument/2006/relationships" xmlns:a="http://schemas.openxmlformats.org/drawingml/2006/main" r:embed="Reaf50aa0b4334874"/>
+          <a:blip xmlns:r="http://schemas.openxmlformats.org/officeDocument/2006/relationships" xmlns:a="http://schemas.openxmlformats.org/drawingml/2006/main" r:embed="Rf3266d2e5dae4023"/>
           <a:stretch xmlns:a="http://schemas.openxmlformats.org/drawingml/2006/main"/>
         </p:blipFill>
         <p:spPr>
@@ -12286,7 +12377,7 @@
           <p:nvPr/>
         </p:nvPicPr>
         <p:blipFill>
-          <a:blip xmlns:r="http://schemas.openxmlformats.org/officeDocument/2006/relationships" xmlns:a="http://schemas.openxmlformats.org/drawingml/2006/main" r:embed="R075c54dcde854ec5"/>
+          <a:blip xmlns:r="http://schemas.openxmlformats.org/officeDocument/2006/relationships" xmlns:a="http://schemas.openxmlformats.org/drawingml/2006/main" r:embed="R90fbece7564a438e"/>
           <a:stretch xmlns:a="http://schemas.openxmlformats.org/drawingml/2006/main"/>
         </p:blipFill>
         <p:spPr>
@@ -16639,7 +16730,7 @@
           <p:nvPr/>
         </p:nvPicPr>
         <p:blipFill>
-          <a:blip xmlns:r="http://schemas.openxmlformats.org/officeDocument/2006/relationships" xmlns:a="http://schemas.openxmlformats.org/drawingml/2006/main" r:embed="R0ec84b4d1e4049ff"/>
+          <a:blip xmlns:r="http://schemas.openxmlformats.org/officeDocument/2006/relationships" xmlns:a="http://schemas.openxmlformats.org/drawingml/2006/main" r:embed="Rd8d2739ec61646db"/>
           <a:stretch xmlns:a="http://schemas.openxmlformats.org/drawingml/2006/main"/>
         </p:blipFill>
         <p:spPr>
@@ -17051,7 +17142,7 @@
           <p:nvPr/>
         </p:nvPicPr>
         <p:blipFill>
-          <a:blip xmlns:r="http://schemas.openxmlformats.org/officeDocument/2006/relationships" xmlns:a="http://schemas.openxmlformats.org/drawingml/2006/main" r:embed="R0a1aaa9241c84c8d"/>
+          <a:blip xmlns:r="http://schemas.openxmlformats.org/officeDocument/2006/relationships" xmlns:a="http://schemas.openxmlformats.org/drawingml/2006/main" r:embed="R32ee69f84bce44d3"/>
           <a:stretch xmlns:a="http://schemas.openxmlformats.org/drawingml/2006/main"/>
         </p:blipFill>
         <p:spPr>
@@ -17956,7 +18047,7 @@
           <p:nvPr/>
         </p:nvPicPr>
         <p:blipFill>
-          <a:blip xmlns:r="http://schemas.openxmlformats.org/officeDocument/2006/relationships" xmlns:a="http://schemas.openxmlformats.org/drawingml/2006/main" r:embed="R470effb4594349cd"/>
+          <a:blip xmlns:r="http://schemas.openxmlformats.org/officeDocument/2006/relationships" xmlns:a="http://schemas.openxmlformats.org/drawingml/2006/main" r:embed="R44c89596c34b49f7"/>
           <a:stretch xmlns:a="http://schemas.openxmlformats.org/drawingml/2006/main"/>
         </p:blipFill>
         <p:spPr>
@@ -21728,7 +21819,7 @@
           <p:nvPr/>
         </p:nvPicPr>
         <p:blipFill>
-          <a:blip xmlns:r="http://schemas.openxmlformats.org/officeDocument/2006/relationships" xmlns:a="http://schemas.openxmlformats.org/drawingml/2006/main" r:embed="R7fa0a0942b9f4d2b"/>
+          <a:blip xmlns:r="http://schemas.openxmlformats.org/officeDocument/2006/relationships" xmlns:a="http://schemas.openxmlformats.org/drawingml/2006/main" r:embed="R981bb5217faa4601"/>
           <a:stretch xmlns:a="http://schemas.openxmlformats.org/drawingml/2006/main"/>
         </p:blipFill>
         <p:spPr>
@@ -22140,7 +22231,7 @@
           <p:nvPr/>
         </p:nvPicPr>
         <p:blipFill>
-          <a:blip xmlns:r="http://schemas.openxmlformats.org/officeDocument/2006/relationships" xmlns:a="http://schemas.openxmlformats.org/drawingml/2006/main" r:embed="R3598d30657ac4505"/>
+          <a:blip xmlns:r="http://schemas.openxmlformats.org/officeDocument/2006/relationships" xmlns:a="http://schemas.openxmlformats.org/drawingml/2006/main" r:embed="R3236a7dfed144fd0"/>
           <a:stretch xmlns:a="http://schemas.openxmlformats.org/drawingml/2006/main"/>
         </p:blipFill>
         <p:spPr>
@@ -22552,7 +22643,7 @@
           <p:nvPr/>
         </p:nvPicPr>
         <p:blipFill>
-          <a:blip xmlns:r="http://schemas.openxmlformats.org/officeDocument/2006/relationships" xmlns:a="http://schemas.openxmlformats.org/drawingml/2006/main" r:embed="Rc03ae16d0eb04a4a"/>
+          <a:blip xmlns:r="http://schemas.openxmlformats.org/officeDocument/2006/relationships" xmlns:a="http://schemas.openxmlformats.org/drawingml/2006/main" r:embed="R97755672eec54980"/>
           <a:stretch xmlns:a="http://schemas.openxmlformats.org/drawingml/2006/main"/>
         </p:blipFill>
         <p:spPr>
@@ -22964,7 +23055,7 @@
           <p:nvPr/>
         </p:nvPicPr>
         <p:blipFill>
-          <a:blip xmlns:r="http://schemas.openxmlformats.org/officeDocument/2006/relationships" xmlns:a="http://schemas.openxmlformats.org/drawingml/2006/main" r:embed="Rc94cd0e81912432b"/>
+          <a:blip xmlns:r="http://schemas.openxmlformats.org/officeDocument/2006/relationships" xmlns:a="http://schemas.openxmlformats.org/drawingml/2006/main" r:embed="R330aa16d701b4700"/>
           <a:stretch xmlns:a="http://schemas.openxmlformats.org/drawingml/2006/main"/>
         </p:blipFill>
         <p:spPr>
@@ -25401,7 +25492,7 @@
           <p:nvPr/>
         </p:nvPicPr>
         <p:blipFill>
-          <a:blip xmlns:r="http://schemas.openxmlformats.org/officeDocument/2006/relationships" xmlns:a="http://schemas.openxmlformats.org/drawingml/2006/main" r:embed="R0bc69edbf6d04db4"/>
+          <a:blip xmlns:r="http://schemas.openxmlformats.org/officeDocument/2006/relationships" xmlns:a="http://schemas.openxmlformats.org/drawingml/2006/main" r:embed="R9bbbfcee6def46ff"/>
           <a:stretch xmlns:a="http://schemas.openxmlformats.org/drawingml/2006/main"/>
         </p:blipFill>
         <p:spPr>
@@ -29149,7 +29240,7 @@
           <p:nvPr/>
         </p:nvPicPr>
         <p:blipFill>
-          <a:blip xmlns:r="http://schemas.openxmlformats.org/officeDocument/2006/relationships" xmlns:a="http://schemas.openxmlformats.org/drawingml/2006/main" r:embed="R18baa9981447494d"/>
+          <a:blip xmlns:r="http://schemas.openxmlformats.org/officeDocument/2006/relationships" xmlns:a="http://schemas.openxmlformats.org/drawingml/2006/main" r:embed="R9fb5b7cc3197490f"/>
           <a:stretch xmlns:a="http://schemas.openxmlformats.org/drawingml/2006/main"/>
         </p:blipFill>
         <p:spPr>
@@ -29171,7 +29262,7 @@
           <p:nvPr/>
         </p:nvPicPr>
         <p:blipFill>
-          <a:blip xmlns:r="http://schemas.openxmlformats.org/officeDocument/2006/relationships" xmlns:a="http://schemas.openxmlformats.org/drawingml/2006/main" r:embed="R264e646452964028"/>
+          <a:blip xmlns:r="http://schemas.openxmlformats.org/officeDocument/2006/relationships" xmlns:a="http://schemas.openxmlformats.org/drawingml/2006/main" r:embed="R7cd54ae45d7a4081"/>
           <a:stretch xmlns:a="http://schemas.openxmlformats.org/drawingml/2006/main"/>
         </p:blipFill>
         <p:spPr>
@@ -29583,7 +29674,7 @@
           <p:nvPr/>
         </p:nvPicPr>
         <p:blipFill>
-          <a:blip xmlns:r="http://schemas.openxmlformats.org/officeDocument/2006/relationships" xmlns:a="http://schemas.openxmlformats.org/drawingml/2006/main" r:embed="R6d0bab586b6c4923"/>
+          <a:blip xmlns:r="http://schemas.openxmlformats.org/officeDocument/2006/relationships" xmlns:a="http://schemas.openxmlformats.org/drawingml/2006/main" r:embed="R5c115e1fc3624940"/>
           <a:stretch xmlns:a="http://schemas.openxmlformats.org/drawingml/2006/main"/>
         </p:blipFill>
         <p:spPr>
@@ -29605,7 +29696,7 @@
           <p:nvPr/>
         </p:nvPicPr>
         <p:blipFill>
-          <a:blip xmlns:r="http://schemas.openxmlformats.org/officeDocument/2006/relationships" xmlns:a="http://schemas.openxmlformats.org/drawingml/2006/main" r:embed="Rcd0b2122601f4376"/>
+          <a:blip xmlns:r="http://schemas.openxmlformats.org/officeDocument/2006/relationships" xmlns:a="http://schemas.openxmlformats.org/drawingml/2006/main" r:embed="R84d61ca46c5e408a"/>
           <a:stretch xmlns:a="http://schemas.openxmlformats.org/drawingml/2006/main"/>
         </p:blipFill>
         <p:spPr>
@@ -30017,7 +30108,7 @@
           <p:nvPr/>
         </p:nvPicPr>
         <p:blipFill>
-          <a:blip xmlns:r="http://schemas.openxmlformats.org/officeDocument/2006/relationships" xmlns:a="http://schemas.openxmlformats.org/drawingml/2006/main" r:embed="Re2235d9a399946fc"/>
+          <a:blip xmlns:r="http://schemas.openxmlformats.org/officeDocument/2006/relationships" xmlns:a="http://schemas.openxmlformats.org/drawingml/2006/main" r:embed="Rc92868afc270479f"/>
           <a:stretch xmlns:a="http://schemas.openxmlformats.org/drawingml/2006/main"/>
         </p:blipFill>
         <p:spPr>
@@ -30039,7 +30130,7 @@
           <p:nvPr/>
         </p:nvPicPr>
         <p:blipFill>
-          <a:blip xmlns:r="http://schemas.openxmlformats.org/officeDocument/2006/relationships" xmlns:a="http://schemas.openxmlformats.org/drawingml/2006/main" r:embed="R2fb79264e7474fa9"/>
+          <a:blip xmlns:r="http://schemas.openxmlformats.org/officeDocument/2006/relationships" xmlns:a="http://schemas.openxmlformats.org/drawingml/2006/main" r:embed="Rae259f9a50864188"/>
           <a:stretch xmlns:a="http://schemas.openxmlformats.org/drawingml/2006/main"/>
         </p:blipFill>
         <p:spPr>
@@ -30451,7 +30542,7 @@
           <p:nvPr/>
         </p:nvPicPr>
         <p:blipFill>
-          <a:blip xmlns:r="http://schemas.openxmlformats.org/officeDocument/2006/relationships" xmlns:a="http://schemas.openxmlformats.org/drawingml/2006/main" r:embed="Rf62d6f3bd4964097"/>
+          <a:blip xmlns:r="http://schemas.openxmlformats.org/officeDocument/2006/relationships" xmlns:a="http://schemas.openxmlformats.org/drawingml/2006/main" r:embed="R3861d3fbf5eb43b8"/>
           <a:stretch xmlns:a="http://schemas.openxmlformats.org/drawingml/2006/main"/>
         </p:blipFill>
         <p:spPr>
@@ -30473,7 +30564,7 @@
           <p:nvPr/>
         </p:nvPicPr>
         <p:blipFill>
-          <a:blip xmlns:r="http://schemas.openxmlformats.org/officeDocument/2006/relationships" xmlns:a="http://schemas.openxmlformats.org/drawingml/2006/main" r:embed="Rcff7f4fdf5974f35"/>
+          <a:blip xmlns:r="http://schemas.openxmlformats.org/officeDocument/2006/relationships" xmlns:a="http://schemas.openxmlformats.org/drawingml/2006/main" r:embed="R32d61d750d4e4780"/>
           <a:stretch xmlns:a="http://schemas.openxmlformats.org/drawingml/2006/main"/>
         </p:blipFill>
         <p:spPr>
@@ -31378,7 +31469,7 @@
           <p:nvPr/>
         </p:nvPicPr>
         <p:blipFill>
-          <a:blip xmlns:r="http://schemas.openxmlformats.org/officeDocument/2006/relationships" xmlns:a="http://schemas.openxmlformats.org/drawingml/2006/main" r:embed="R16b45566989146a5"/>
+          <a:blip xmlns:r="http://schemas.openxmlformats.org/officeDocument/2006/relationships" xmlns:a="http://schemas.openxmlformats.org/drawingml/2006/main" r:embed="R0351242011ba4b2b"/>
           <a:stretch xmlns:a="http://schemas.openxmlformats.org/drawingml/2006/main"/>
         </p:blipFill>
         <p:spPr>
@@ -31400,7 +31491,7 @@
           <p:nvPr/>
         </p:nvPicPr>
         <p:blipFill>
-          <a:blip xmlns:r="http://schemas.openxmlformats.org/officeDocument/2006/relationships" xmlns:a="http://schemas.openxmlformats.org/drawingml/2006/main" r:embed="Re5dfa0ca2a854822"/>
+          <a:blip xmlns:r="http://schemas.openxmlformats.org/officeDocument/2006/relationships" xmlns:a="http://schemas.openxmlformats.org/drawingml/2006/main" r:embed="R6ab9b66c31e74076"/>
           <a:stretch xmlns:a="http://schemas.openxmlformats.org/drawingml/2006/main"/>
         </p:blipFill>
         <p:spPr>
@@ -32931,7 +33022,7 @@
           <p:nvPr/>
         </p:nvPicPr>
         <p:blipFill>
-          <a:blip xmlns:r="http://schemas.openxmlformats.org/officeDocument/2006/relationships" xmlns:a="http://schemas.openxmlformats.org/drawingml/2006/main" r:embed="R7ad2fa2f815d4d6d"/>
+          <a:blip xmlns:r="http://schemas.openxmlformats.org/officeDocument/2006/relationships" xmlns:a="http://schemas.openxmlformats.org/drawingml/2006/main" r:embed="Ra7520dbeb69e4a08"/>
           <a:stretch xmlns:a="http://schemas.openxmlformats.org/drawingml/2006/main"/>
         </p:blipFill>
         <p:spPr>
@@ -35560,7 +35651,7 @@
           <p:nvPr/>
         </p:nvPicPr>
         <p:blipFill>
-          <a:blip xmlns:r="http://schemas.openxmlformats.org/officeDocument/2006/relationships" xmlns:a="http://schemas.openxmlformats.org/drawingml/2006/main" r:embed="Rf627b50688354903"/>
+          <a:blip xmlns:r="http://schemas.openxmlformats.org/officeDocument/2006/relationships" xmlns:a="http://schemas.openxmlformats.org/drawingml/2006/main" r:embed="R0f09c7caf7cc4ec8"/>
           <a:stretch xmlns:a="http://schemas.openxmlformats.org/drawingml/2006/main"/>
         </p:blipFill>
         <p:spPr>
@@ -35582,7 +35673,7 @@
           <p:nvPr/>
         </p:nvPicPr>
         <p:blipFill>
-          <a:blip xmlns:r="http://schemas.openxmlformats.org/officeDocument/2006/relationships" xmlns:a="http://schemas.openxmlformats.org/drawingml/2006/main" r:embed="R58945659d51f44a1"/>
+          <a:blip xmlns:r="http://schemas.openxmlformats.org/officeDocument/2006/relationships" xmlns:a="http://schemas.openxmlformats.org/drawingml/2006/main" r:embed="Rae1f5a56da734ad3"/>
           <a:stretch xmlns:a="http://schemas.openxmlformats.org/drawingml/2006/main"/>
         </p:blipFill>
         <p:spPr>
@@ -35994,7 +36085,7 @@
           <p:nvPr/>
         </p:nvPicPr>
         <p:blipFill>
-          <a:blip xmlns:r="http://schemas.openxmlformats.org/officeDocument/2006/relationships" xmlns:a="http://schemas.openxmlformats.org/drawingml/2006/main" r:embed="R4f41a6a53e0c4f93"/>
+          <a:blip xmlns:r="http://schemas.openxmlformats.org/officeDocument/2006/relationships" xmlns:a="http://schemas.openxmlformats.org/drawingml/2006/main" r:embed="R018fa2bfa5b84dd8"/>
           <a:stretch xmlns:a="http://schemas.openxmlformats.org/drawingml/2006/main"/>
         </p:blipFill>
         <p:spPr>
@@ -36016,7 +36107,7 @@
           <p:nvPr/>
         </p:nvPicPr>
         <p:blipFill>
-          <a:blip xmlns:r="http://schemas.openxmlformats.org/officeDocument/2006/relationships" xmlns:a="http://schemas.openxmlformats.org/drawingml/2006/main" r:embed="R687a21721adb418a"/>
+          <a:blip xmlns:r="http://schemas.openxmlformats.org/officeDocument/2006/relationships" xmlns:a="http://schemas.openxmlformats.org/drawingml/2006/main" r:embed="R6caeea9c68b244d9"/>
           <a:stretch xmlns:a="http://schemas.openxmlformats.org/drawingml/2006/main"/>
         </p:blipFill>
         <p:spPr>
@@ -36428,7 +36519,7 @@
           <p:nvPr/>
         </p:nvPicPr>
         <p:blipFill>
-          <a:blip xmlns:r="http://schemas.openxmlformats.org/officeDocument/2006/relationships" xmlns:a="http://schemas.openxmlformats.org/drawingml/2006/main" r:embed="R2baf666064904f43"/>
+          <a:blip xmlns:r="http://schemas.openxmlformats.org/officeDocument/2006/relationships" xmlns:a="http://schemas.openxmlformats.org/drawingml/2006/main" r:embed="Rd5afa9b8f0724349"/>
           <a:stretch xmlns:a="http://schemas.openxmlformats.org/drawingml/2006/main"/>
         </p:blipFill>
         <p:spPr>
@@ -36450,7 +36541,7 @@
           <p:nvPr/>
         </p:nvPicPr>
         <p:blipFill>
-          <a:blip xmlns:r="http://schemas.openxmlformats.org/officeDocument/2006/relationships" xmlns:a="http://schemas.openxmlformats.org/drawingml/2006/main" r:embed="R984a13127eb343cf"/>
+          <a:blip xmlns:r="http://schemas.openxmlformats.org/officeDocument/2006/relationships" xmlns:a="http://schemas.openxmlformats.org/drawingml/2006/main" r:embed="R7531d327adaa4e5b"/>
           <a:stretch xmlns:a="http://schemas.openxmlformats.org/drawingml/2006/main"/>
         </p:blipFill>
         <p:spPr>
@@ -36862,7 +36953,7 @@
           <p:nvPr/>
         </p:nvPicPr>
         <p:blipFill>
-          <a:blip xmlns:r="http://schemas.openxmlformats.org/officeDocument/2006/relationships" xmlns:a="http://schemas.openxmlformats.org/drawingml/2006/main" r:embed="Rea75e8986eae4477"/>
+          <a:blip xmlns:r="http://schemas.openxmlformats.org/officeDocument/2006/relationships" xmlns:a="http://schemas.openxmlformats.org/drawingml/2006/main" r:embed="Rc63a75766b3e4ecd"/>
           <a:stretch xmlns:a="http://schemas.openxmlformats.org/drawingml/2006/main"/>
         </p:blipFill>
         <p:spPr>
@@ -36884,7 +36975,7 @@
           <p:nvPr/>
         </p:nvPicPr>
         <p:blipFill>
-          <a:blip xmlns:r="http://schemas.openxmlformats.org/officeDocument/2006/relationships" xmlns:a="http://schemas.openxmlformats.org/drawingml/2006/main" r:embed="Rae891186be36471b"/>
+          <a:blip xmlns:r="http://schemas.openxmlformats.org/officeDocument/2006/relationships" xmlns:a="http://schemas.openxmlformats.org/drawingml/2006/main" r:embed="R1df615e9bb8b4a5d"/>
           <a:stretch xmlns:a="http://schemas.openxmlformats.org/drawingml/2006/main"/>
         </p:blipFill>
         <p:spPr>
@@ -37789,7 +37880,7 @@
           <p:nvPr/>
         </p:nvPicPr>
         <p:blipFill>
-          <a:blip xmlns:r="http://schemas.openxmlformats.org/officeDocument/2006/relationships" xmlns:a="http://schemas.openxmlformats.org/drawingml/2006/main" r:embed="R440add1ae3854a4d"/>
+          <a:blip xmlns:r="http://schemas.openxmlformats.org/officeDocument/2006/relationships" xmlns:a="http://schemas.openxmlformats.org/drawingml/2006/main" r:embed="Rf43d2e1642cd4294"/>
           <a:stretch xmlns:a="http://schemas.openxmlformats.org/drawingml/2006/main"/>
         </p:blipFill>
         <p:spPr>
@@ -37811,7 +37902,7 @@
           <p:nvPr/>
         </p:nvPicPr>
         <p:blipFill>
-          <a:blip xmlns:r="http://schemas.openxmlformats.org/officeDocument/2006/relationships" xmlns:a="http://schemas.openxmlformats.org/drawingml/2006/main" r:embed="R0ced9f43c1dd4407"/>
+          <a:blip xmlns:r="http://schemas.openxmlformats.org/officeDocument/2006/relationships" xmlns:a="http://schemas.openxmlformats.org/drawingml/2006/main" r:embed="R1309559a2de54401"/>
           <a:stretch xmlns:a="http://schemas.openxmlformats.org/drawingml/2006/main"/>
         </p:blipFill>
         <p:spPr>
@@ -41231,7 +41322,7 @@
           <p:nvPr/>
         </p:nvPicPr>
         <p:blipFill>
-          <a:blip xmlns:r="http://schemas.openxmlformats.org/officeDocument/2006/relationships" xmlns:a="http://schemas.openxmlformats.org/drawingml/2006/main" r:embed="Re3f881a0d9f54425"/>
+          <a:blip xmlns:r="http://schemas.openxmlformats.org/officeDocument/2006/relationships" xmlns:a="http://schemas.openxmlformats.org/drawingml/2006/main" r:embed="Rfda214b5c579424b"/>
           <a:stretch xmlns:a="http://schemas.openxmlformats.org/drawingml/2006/main"/>
         </p:blipFill>
         <p:spPr>
@@ -41971,7 +42062,7 @@
           <p:nvPr/>
         </p:nvPicPr>
         <p:blipFill>
-          <a:blip xmlns:r="http://schemas.openxmlformats.org/officeDocument/2006/relationships" xmlns:a="http://schemas.openxmlformats.org/drawingml/2006/main" r:embed="R9617acbdd661423a"/>
+          <a:blip xmlns:r="http://schemas.openxmlformats.org/officeDocument/2006/relationships" xmlns:a="http://schemas.openxmlformats.org/drawingml/2006/main" r:embed="Rcd12a77403c548d9"/>
           <a:stretch xmlns:a="http://schemas.openxmlformats.org/drawingml/2006/main"/>
         </p:blipFill>
         <p:spPr>
@@ -41993,7 +42084,7 @@
           <p:nvPr/>
         </p:nvPicPr>
         <p:blipFill>
-          <a:blip xmlns:r="http://schemas.openxmlformats.org/officeDocument/2006/relationships" xmlns:a="http://schemas.openxmlformats.org/drawingml/2006/main" r:embed="R746b396aef224c3d"/>
+          <a:blip xmlns:r="http://schemas.openxmlformats.org/officeDocument/2006/relationships" xmlns:a="http://schemas.openxmlformats.org/drawingml/2006/main" r:embed="R013a2b654454478e"/>
           <a:stretch xmlns:a="http://schemas.openxmlformats.org/drawingml/2006/main"/>
         </p:blipFill>
         <p:spPr>
@@ -42405,7 +42496,7 @@
           <p:nvPr/>
         </p:nvPicPr>
         <p:blipFill>
-          <a:blip xmlns:r="http://schemas.openxmlformats.org/officeDocument/2006/relationships" xmlns:a="http://schemas.openxmlformats.org/drawingml/2006/main" r:embed="Rea9e525c0de64db1"/>
+          <a:blip xmlns:r="http://schemas.openxmlformats.org/officeDocument/2006/relationships" xmlns:a="http://schemas.openxmlformats.org/drawingml/2006/main" r:embed="Rd17ef16e3c324dbc"/>
           <a:stretch xmlns:a="http://schemas.openxmlformats.org/drawingml/2006/main"/>
         </p:blipFill>
         <p:spPr>
@@ -42427,7 +42518,7 @@
           <p:nvPr/>
         </p:nvPicPr>
         <p:blipFill>
-          <a:blip xmlns:r="http://schemas.openxmlformats.org/officeDocument/2006/relationships" xmlns:a="http://schemas.openxmlformats.org/drawingml/2006/main" r:embed="Rdd307b45b41c40b5"/>
+          <a:blip xmlns:r="http://schemas.openxmlformats.org/officeDocument/2006/relationships" xmlns:a="http://schemas.openxmlformats.org/drawingml/2006/main" r:embed="R14e3c570ac2a4e96"/>
           <a:stretch xmlns:a="http://schemas.openxmlformats.org/drawingml/2006/main"/>
         </p:blipFill>
         <p:spPr>
@@ -43332,7 +43423,7 @@
           <p:nvPr/>
         </p:nvPicPr>
         <p:blipFill>
-          <a:blip xmlns:r="http://schemas.openxmlformats.org/officeDocument/2006/relationships" xmlns:a="http://schemas.openxmlformats.org/drawingml/2006/main" r:embed="Re269ce31688244a6"/>
+          <a:blip xmlns:r="http://schemas.openxmlformats.org/officeDocument/2006/relationships" xmlns:a="http://schemas.openxmlformats.org/drawingml/2006/main" r:embed="R9ae801dbd1b947e4"/>
           <a:stretch xmlns:a="http://schemas.openxmlformats.org/drawingml/2006/main"/>
         </p:blipFill>
         <p:spPr>
@@ -43354,7 +43445,7 @@
           <p:nvPr/>
         </p:nvPicPr>
         <p:blipFill>
-          <a:blip xmlns:r="http://schemas.openxmlformats.org/officeDocument/2006/relationships" xmlns:a="http://schemas.openxmlformats.org/drawingml/2006/main" r:embed="R2c6c5ad576b24d78"/>
+          <a:blip xmlns:r="http://schemas.openxmlformats.org/officeDocument/2006/relationships" xmlns:a="http://schemas.openxmlformats.org/drawingml/2006/main" r:embed="R4e4372975ad841db"/>
           <a:stretch xmlns:a="http://schemas.openxmlformats.org/drawingml/2006/main"/>
         </p:blipFill>
         <p:spPr>
@@ -43398,10 +43489,10 @@
       </p:grpSpPr>
       <p:sp>
         <p:nvSpPr>
-          <p:cNvPr id="24" name="section-11">
-            <a:extLst xmlns:a="http://schemas.openxmlformats.org/drawingml/2006/main">
-              <a:ext uri="{FF2B5EF4-FFF2-40B4-BE49-F238E27FC236}">
-                <a16:creationId xmlns:a16="http://schemas.microsoft.com/office/drawing/2014/main" id="{272ED433-B59C-436C-9DFB-4D317B90A13F}"/>
+          <p:cNvPr id="9" name="section-4">
+            <a:extLst xmlns:a="http://schemas.openxmlformats.org/drawingml/2006/main">
+              <a:ext uri="{FF2B5EF4-FFF2-40B4-BE49-F238E27FC236}">
+                <a16:creationId xmlns:a16="http://schemas.microsoft.com/office/drawing/2014/main" id="{8AE0A271-669A-49F0-A82E-C4438BEE27D9}"/>
               </a:ext>
             </a:extLst>
           </p:cNvPr>
@@ -43457,10 +43548,10 @@
       </p:sp>
       <p:sp>
         <p:nvSpPr>
-          <p:cNvPr id="2" name="title-11">
-            <a:extLst xmlns:a="http://schemas.openxmlformats.org/drawingml/2006/main">
-              <a:ext uri="{FF2B5EF4-FFF2-40B4-BE49-F238E27FC236}">
-                <a16:creationId xmlns:a16="http://schemas.microsoft.com/office/drawing/2014/main" id="{3EC40708-7E00-432C-8ECE-907FA5705292}"/>
+          <p:cNvPr id="2" name="title-4">
+            <a:extLst xmlns:a="http://schemas.openxmlformats.org/drawingml/2006/main">
+              <a:ext uri="{FF2B5EF4-FFF2-40B4-BE49-F238E27FC236}">
+                <a16:creationId xmlns:a16="http://schemas.microsoft.com/office/drawing/2014/main" id="{50C6F92F-721A-4252-9CF8-B5C9B01C7310}"/>
               </a:ext>
             </a:extLst>
           </p:cNvPr>
@@ -43485,7 +43576,7 @@
         </p:spPr>
         <p:txBody>
           <a:bodyPr xmlns:a="http://schemas.openxmlformats.org/drawingml/2006/main" wrap="square" lIns="0" tIns="0" rIns="0" bIns="0" anchor="t">
-            <a:normAutofit fontScale="92007"/>
+            <a:normAutofit fontScale="91473"/>
           </a:bodyPr>
           <a:lstStyle xmlns:a="http://schemas.openxmlformats.org/drawingml/2006/main"/>
           <a:p xmlns:a="http://schemas.openxmlformats.org/drawingml/2006/main">
@@ -43509,7 +43600,7 @@
                 <a:ea typeface="Arial"/>
                 <a:cs typeface="Arial"/>
               </a:rPr>
-              <a:t>External prior returns reveal shared geometry—not a lead</a:t>
+              <a:t>QQQ and SPY largely reproduce TSLA's own horizon map</a:t>
             </a:r>
           </a:p>
         </p:txBody>
@@ -43519,7 +43610,7 @@
           <p:cNvPr id="3" name="">
             <a:extLst xmlns:a="http://schemas.openxmlformats.org/drawingml/2006/main">
               <a:ext uri="{FF2B5EF4-FFF2-40B4-BE49-F238E27FC236}">
-                <a16:creationId xmlns:a16="http://schemas.microsoft.com/office/drawing/2014/main" id="{D5CA0FCE-75E8-41EF-A76A-23E9E2120C6A}"/>
+                <a16:creationId xmlns:a16="http://schemas.microsoft.com/office/drawing/2014/main" id="{242399F2-4D0A-4337-B17E-DB3599DC380F}"/>
               </a:ext>
             </a:extLst>
           </p:cNvPr>
@@ -43549,10 +43640,10 @@
       </p:sp>
       <p:sp>
         <p:nvSpPr>
-          <p:cNvPr id="4" name="footer-left-11">
-            <a:extLst xmlns:a="http://schemas.openxmlformats.org/drawingml/2006/main">
-              <a:ext uri="{FF2B5EF4-FFF2-40B4-BE49-F238E27FC236}">
-                <a16:creationId xmlns:a16="http://schemas.microsoft.com/office/drawing/2014/main" id="{700DA765-80E0-4197-8700-00D867B86FA2}"/>
+          <p:cNvPr id="4" name="footer-left-4">
+            <a:extLst xmlns:a="http://schemas.openxmlformats.org/drawingml/2006/main">
+              <a:ext uri="{FF2B5EF4-FFF2-40B4-BE49-F238E27FC236}">
+                <a16:creationId xmlns:a16="http://schemas.microsoft.com/office/drawing/2014/main" id="{BF8B82CA-1E48-4669-BAD8-1FF8C09FCBFB}"/>
               </a:ext>
             </a:extLst>
           </p:cNvPr>
@@ -43608,10 +43699,10 @@
       </p:sp>
       <p:sp>
         <p:nvSpPr>
-          <p:cNvPr id="5" name="footer-number-11">
-            <a:extLst xmlns:a="http://schemas.openxmlformats.org/drawingml/2006/main">
-              <a:ext uri="{FF2B5EF4-FFF2-40B4-BE49-F238E27FC236}">
-                <a16:creationId xmlns:a16="http://schemas.microsoft.com/office/drawing/2014/main" id="{83896276-4112-4532-AF7C-776C67C58B77}"/>
+          <p:cNvPr id="5" name="footer-number-4">
+            <a:extLst xmlns:a="http://schemas.openxmlformats.org/drawingml/2006/main">
+              <a:ext uri="{FF2B5EF4-FFF2-40B4-BE49-F238E27FC236}">
+                <a16:creationId xmlns:a16="http://schemas.microsoft.com/office/drawing/2014/main" id="{05959AEC-B0A5-45F0-A65B-C94C3E5A032F}"/>
               </a:ext>
             </a:extLst>
           </p:cNvPr>
@@ -43661,6 +43752,473 @@
                 <a:cs typeface="Arial"/>
               </a:rPr>
               <a:t>53</a:t>
+            </a:r>
+          </a:p>
+        </p:txBody>
+      </p:sp>
+      <p:sp>
+        <p:nvSpPr>
+          <p:cNvPr id="6" name="">
+            <a:extLst xmlns:a="http://schemas.openxmlformats.org/drawingml/2006/main">
+              <a:ext uri="{FF2B5EF4-FFF2-40B4-BE49-F238E27FC236}">
+                <a16:creationId xmlns:a16="http://schemas.microsoft.com/office/drawing/2014/main" id="{9C8DEA29-E57D-4C8D-8538-2028FF89DA7C}"/>
+              </a:ext>
+            </a:extLst>
+          </p:cNvPr>
+          <p:cNvSpPr>
+            <a:spLocks xmlns:a="http://schemas.openxmlformats.org/drawingml/2006/main" noGrp="1"/>
+          </p:cNvSpPr>
+          <p:nvPr/>
+        </p:nvSpPr>
+        <p:spPr>
+          <a:xfrm xmlns:a="http://schemas.openxmlformats.org/drawingml/2006/main">
+            <a:off x="1000125" y="1352550"/>
+            <a:ext cx="10191750" cy="4905375"/>
+          </a:xfrm>
+          <a:prstGeom xmlns:a="http://schemas.openxmlformats.org/drawingml/2006/main" prst="rect">
+            <a:avLst/>
+          </a:prstGeom>
+          <a:solidFill xmlns:a="http://schemas.openxmlformats.org/drawingml/2006/main">
+            <a:srgbClr val="FFFFFF"/>
+          </a:solidFill>
+          <a:ln xmlns:a="http://schemas.openxmlformats.org/drawingml/2006/main" w="9525">
+            <a:solidFill>
+              <a:srgbClr val="B8BCC4"/>
+            </a:solidFill>
+            <a:prstDash val="solid"/>
+          </a:ln>
+        </p:spPr>
+      </p:sp>
+      <p:sp>
+        <p:nvSpPr>
+          <p:cNvPr id="8" name="">
+            <a:extLst xmlns:a="http://schemas.openxmlformats.org/drawingml/2006/main">
+              <a:ext uri="{FF2B5EF4-FFF2-40B4-BE49-F238E27FC236}">
+                <a16:creationId xmlns:a16="http://schemas.microsoft.com/office/drawing/2014/main" id="{4346A5F2-8CC4-4151-9BDB-346D47A3096B}"/>
+              </a:ext>
+            </a:extLst>
+          </p:cNvPr>
+          <p:cNvSpPr>
+            <a:spLocks xmlns:a="http://schemas.openxmlformats.org/drawingml/2006/main" noGrp="1"/>
+          </p:cNvSpPr>
+          <p:nvPr/>
+        </p:nvSpPr>
+        <p:spPr>
+          <a:xfrm xmlns:a="http://schemas.openxmlformats.org/drawingml/2006/main">
+            <a:off x="1143000" y="6286500"/>
+            <a:ext cx="9906000" cy="171450"/>
+          </a:xfrm>
+          <a:prstGeom xmlns:a="http://schemas.openxmlformats.org/drawingml/2006/main" prst="rect">
+            <a:avLst/>
+          </a:prstGeom>
+          <a:noFill xmlns:a="http://schemas.openxmlformats.org/drawingml/2006/main"/>
+          <a:ln xmlns:a="http://schemas.openxmlformats.org/drawingml/2006/main" w="0">
+            <a:noFill/>
+            <a:prstDash val="solid"/>
+          </a:ln>
+        </p:spPr>
+        <p:txBody>
+          <a:bodyPr xmlns:a="http://schemas.openxmlformats.org/drawingml/2006/main" wrap="square" lIns="0" tIns="0" rIns="0" bIns="0" anchor="t">
+            <a:normAutofit fontScale="93750"/>
+          </a:bodyPr>
+          <a:lstStyle xmlns:a="http://schemas.openxmlformats.org/drawingml/2006/main"/>
+          <a:p xmlns:a="http://schemas.openxmlformats.org/drawingml/2006/main">
+            <a:pPr algn="ctr">
+              <a:buNone/>
+              <a:defRPr sz="1200" b="0">
+                <a:solidFill>
+                  <a:srgbClr val="667384"/>
+                </a:solidFill>
+                <a:latin typeface="Arial"/>
+                <a:ea typeface="Arial"/>
+                <a:cs typeface="Arial"/>
+              </a:defRPr>
+            </a:pPr>
+            <a:r>
+              <a:rPr sz="1200" b="0">
+                <a:solidFill>
+                  <a:srgbClr val="667384"/>
+                </a:solidFill>
+                <a:latin typeface="Arial"/>
+                <a:ea typeface="Arial"/>
+                <a:cs typeface="Arial"/>
+              </a:rPr>
+              <a:t>Map correlation vs TSLA-own: QQQ +0.906, SPY +0.965; no external BH survivor.</a:t>
+            </a:r>
+          </a:p>
+        </p:txBody>
+      </p:sp>
+      <p:pic>
+        <p:nvPicPr>
+          <p:cNvPr id="20" name=""/>
+          <p:cNvPicPr>
+            <a:picLocks xmlns:a="http://schemas.openxmlformats.org/drawingml/2006/main" noChangeAspect="1"/>
+          </p:cNvPicPr>
+          <p:nvPr/>
+        </p:nvPicPr>
+        <p:blipFill>
+          <a:blip xmlns:r="http://schemas.openxmlformats.org/officeDocument/2006/relationships" xmlns:a="http://schemas.openxmlformats.org/drawingml/2006/main" r:embed="R0ddc4380e94a4e8a"/>
+          <a:stretch xmlns:a="http://schemas.openxmlformats.org/drawingml/2006/main"/>
+        </p:blipFill>
+        <p:spPr>
+          <a:xfrm xmlns:a="http://schemas.openxmlformats.org/drawingml/2006/main" flipH="0" flipV="0">
+            <a:off x="2942545" y="1352550"/>
+            <a:ext cx="6306911" cy="4905375"/>
+          </a:xfrm>
+          <a:prstGeom xmlns:a="http://schemas.openxmlformats.org/drawingml/2006/main" prst="rect">
+            <a:avLst/>
+          </a:prstGeom>
+        </p:spPr>
+      </p:pic>
+      <p:sp>
+        <p:nvSpPr>
+          <p:cNvPr id="11" name="">
+            <a:extLst xmlns:a="http://schemas.openxmlformats.org/drawingml/2006/main">
+              <a:ext uri="{FF2B5EF4-FFF2-40B4-BE49-F238E27FC236}">
+                <a16:creationId xmlns:a16="http://schemas.microsoft.com/office/drawing/2014/main" id="{CCA475D3-61B6-47E4-B4AF-667A5724B835}"/>
+              </a:ext>
+            </a:extLst>
+          </p:cNvPr>
+          <p:cNvSpPr>
+            <a:spLocks xmlns:a="http://schemas.openxmlformats.org/drawingml/2006/main" noGrp="1"/>
+          </p:cNvSpPr>
+          <p:nvPr/>
+        </p:nvSpPr>
+        <p:spPr>
+          <a:xfrm xmlns:a="http://schemas.openxmlformats.org/drawingml/2006/main">
+            <a:off x="1000125" y="1352550"/>
+            <a:ext cx="10191750" cy="4905375"/>
+          </a:xfrm>
+          <a:prstGeom xmlns:a="http://schemas.openxmlformats.org/drawingml/2006/main" prst="rect">
+            <a:avLst/>
+          </a:prstGeom>
+          <a:solidFill xmlns:a="http://schemas.openxmlformats.org/drawingml/2006/main">
+            <a:srgbClr val="FFFFFF"/>
+          </a:solidFill>
+          <a:ln xmlns:a="http://schemas.openxmlformats.org/drawingml/2006/main" w="9525">
+            <a:solidFill>
+              <a:srgbClr val="CDD3DA"/>
+            </a:solidFill>
+            <a:prstDash val="solid"/>
+          </a:ln>
+        </p:spPr>
+      </p:sp>
+      <p:pic>
+        <p:nvPicPr>
+          <p:cNvPr id="22" name=""/>
+          <p:cNvPicPr>
+            <a:picLocks xmlns:a="http://schemas.openxmlformats.org/drawingml/2006/main" noChangeAspect="1"/>
+          </p:cNvPicPr>
+          <p:nvPr/>
+        </p:nvPicPr>
+        <p:blipFill>
+          <a:blip xmlns:r="http://schemas.openxmlformats.org/officeDocument/2006/relationships" xmlns:a="http://schemas.openxmlformats.org/drawingml/2006/main" r:embed="R359c80643a0a4c48"/>
+          <a:stretch xmlns:a="http://schemas.openxmlformats.org/drawingml/2006/main"/>
+        </p:blipFill>
+        <p:spPr>
+          <a:xfrm xmlns:a="http://schemas.openxmlformats.org/drawingml/2006/main">
+            <a:off x="1000125" y="1581150"/>
+            <a:ext cx="10191750" cy="3838575"/>
+          </a:xfrm>
+          <a:prstGeom xmlns:a="http://schemas.openxmlformats.org/drawingml/2006/main" prst="rect">
+            <a:avLst/>
+          </a:prstGeom>
+        </p:spPr>
+      </p:pic>
+    </p:spTree>
+    <p:extLst>
+      <p:ext uri="{BB962C8B-B14F-4D97-AF65-F5344CB8AC3E}">
+        <p14:creationId xmlns:p14="http://schemas.microsoft.com/office/powerpoint/2010/main" val="400872380"/>
+      </p:ext>
+    </p:extLst>
+  </p:cSld>
+</p:sld>
+</file>
+
+<file path=ppt/slides/slide54.xml><?xml version="1.0" encoding="utf-8"?>
+<p:sld xmlns:p="http://schemas.openxmlformats.org/presentationml/2006/main">
+  <p:cSld>
+    <p:bg>
+      <p:bgPr>
+        <a:solidFill xmlns:a="http://schemas.openxmlformats.org/drawingml/2006/main">
+          <a:srgbClr val="FFFFFF"/>
+        </a:solidFill>
+      </p:bgPr>
+    </p:bg>
+    <p:spTree>
+      <p:nvGrpSpPr>
+        <p:cNvPr id="1" name=""/>
+        <p:cNvGrpSpPr/>
+        <p:nvPr/>
+      </p:nvGrpSpPr>
+      <p:grpSpPr>
+        <a:xfrm xmlns:a="http://schemas.openxmlformats.org/drawingml/2006/main"/>
+      </p:grpSpPr>
+      <p:sp>
+        <p:nvSpPr>
+          <p:cNvPr id="24" name="section-11">
+            <a:extLst xmlns:a="http://schemas.openxmlformats.org/drawingml/2006/main">
+              <a:ext uri="{FF2B5EF4-FFF2-40B4-BE49-F238E27FC236}">
+                <a16:creationId xmlns:a16="http://schemas.microsoft.com/office/drawing/2014/main" id="{272ED433-B59C-436C-9DFB-4D317B90A13F}"/>
+              </a:ext>
+            </a:extLst>
+          </p:cNvPr>
+          <p:cNvSpPr>
+            <a:spLocks xmlns:a="http://schemas.openxmlformats.org/drawingml/2006/main" noGrp="1"/>
+          </p:cNvSpPr>
+          <p:nvPr/>
+        </p:nvSpPr>
+        <p:spPr>
+          <a:xfrm xmlns:a="http://schemas.openxmlformats.org/drawingml/2006/main">
+            <a:off x="457200" y="228600"/>
+            <a:ext cx="4191000" cy="228600"/>
+          </a:xfrm>
+          <a:prstGeom xmlns:a="http://schemas.openxmlformats.org/drawingml/2006/main" prst="rect">
+            <a:avLst/>
+          </a:prstGeom>
+          <a:noFill xmlns:a="http://schemas.openxmlformats.org/drawingml/2006/main"/>
+          <a:ln xmlns:a="http://schemas.openxmlformats.org/drawingml/2006/main" w="0">
+            <a:noFill/>
+            <a:prstDash val="solid"/>
+          </a:ln>
+        </p:spPr>
+        <p:txBody>
+          <a:bodyPr xmlns:a="http://schemas.openxmlformats.org/drawingml/2006/main" wrap="square" lIns="0" tIns="0" rIns="0" bIns="0" anchor="t">
+            <a:normAutofit fontScale="100000"/>
+          </a:bodyPr>
+          <a:lstStyle xmlns:a="http://schemas.openxmlformats.org/drawingml/2006/main"/>
+          <a:p xmlns:a="http://schemas.openxmlformats.org/drawingml/2006/main">
+            <a:pPr algn="l">
+              <a:buNone/>
+              <a:defRPr sz="1200" b="1">
+                <a:solidFill>
+                  <a:srgbClr val="667384"/>
+                </a:solidFill>
+                <a:latin typeface="Arial"/>
+                <a:ea typeface="Arial"/>
+                <a:cs typeface="Arial"/>
+              </a:defRPr>
+            </a:pPr>
+            <a:r>
+              <a:rPr sz="1200" b="1">
+                <a:solidFill>
+                  <a:srgbClr val="667384"/>
+                </a:solidFill>
+                <a:latin typeface="Arial"/>
+                <a:ea typeface="Arial"/>
+                <a:cs typeface="Arial"/>
+              </a:rPr>
+              <a:t>TSLA DESCRIPTIVE MICROSCOPE</a:t>
+            </a:r>
+          </a:p>
+        </p:txBody>
+      </p:sp>
+      <p:sp>
+        <p:nvSpPr>
+          <p:cNvPr id="2" name="title-11">
+            <a:extLst xmlns:a="http://schemas.openxmlformats.org/drawingml/2006/main">
+              <a:ext uri="{FF2B5EF4-FFF2-40B4-BE49-F238E27FC236}">
+                <a16:creationId xmlns:a16="http://schemas.microsoft.com/office/drawing/2014/main" id="{3EC40708-7E00-432C-8ECE-907FA5705292}"/>
+              </a:ext>
+            </a:extLst>
+          </p:cNvPr>
+          <p:cNvSpPr>
+            <a:spLocks xmlns:a="http://schemas.openxmlformats.org/drawingml/2006/main" noGrp="1"/>
+          </p:cNvSpPr>
+          <p:nvPr/>
+        </p:nvSpPr>
+        <p:spPr>
+          <a:xfrm xmlns:a="http://schemas.openxmlformats.org/drawingml/2006/main">
+            <a:off x="457200" y="533400"/>
+            <a:ext cx="11277600" cy="628650"/>
+          </a:xfrm>
+          <a:prstGeom xmlns:a="http://schemas.openxmlformats.org/drawingml/2006/main" prst="rect">
+            <a:avLst/>
+          </a:prstGeom>
+          <a:noFill xmlns:a="http://schemas.openxmlformats.org/drawingml/2006/main"/>
+          <a:ln xmlns:a="http://schemas.openxmlformats.org/drawingml/2006/main" w="0">
+            <a:noFill/>
+            <a:prstDash val="solid"/>
+          </a:ln>
+        </p:spPr>
+        <p:txBody>
+          <a:bodyPr xmlns:a="http://schemas.openxmlformats.org/drawingml/2006/main" wrap="square" lIns="0" tIns="0" rIns="0" bIns="0" anchor="t">
+            <a:normAutofit fontScale="92007"/>
+          </a:bodyPr>
+          <a:lstStyle xmlns:a="http://schemas.openxmlformats.org/drawingml/2006/main"/>
+          <a:p xmlns:a="http://schemas.openxmlformats.org/drawingml/2006/main">
+            <a:pPr algn="l">
+              <a:buNone/>
+              <a:defRPr sz="3525" b="1">
+                <a:solidFill>
+                  <a:srgbClr val="000000"/>
+                </a:solidFill>
+                <a:latin typeface="Arial"/>
+                <a:ea typeface="Arial"/>
+                <a:cs typeface="Arial"/>
+              </a:defRPr>
+            </a:pPr>
+            <a:r>
+              <a:rPr sz="3525" b="1">
+                <a:solidFill>
+                  <a:srgbClr val="000000"/>
+                </a:solidFill>
+                <a:latin typeface="Arial"/>
+                <a:ea typeface="Arial"/>
+                <a:cs typeface="Arial"/>
+              </a:rPr>
+              <a:t>External prior returns reveal shared geometry—not a lead</a:t>
+            </a:r>
+          </a:p>
+        </p:txBody>
+      </p:sp>
+      <p:sp>
+        <p:nvSpPr>
+          <p:cNvPr id="3" name="">
+            <a:extLst xmlns:a="http://schemas.openxmlformats.org/drawingml/2006/main">
+              <a:ext uri="{FF2B5EF4-FFF2-40B4-BE49-F238E27FC236}">
+                <a16:creationId xmlns:a16="http://schemas.microsoft.com/office/drawing/2014/main" id="{D5CA0FCE-75E8-41EF-A76A-23E9E2120C6A}"/>
+              </a:ext>
+            </a:extLst>
+          </p:cNvPr>
+          <p:cNvSpPr>
+            <a:spLocks xmlns:a="http://schemas.openxmlformats.org/drawingml/2006/main" noGrp="1"/>
+          </p:cNvSpPr>
+          <p:nvPr/>
+        </p:nvSpPr>
+        <p:spPr>
+          <a:xfrm xmlns:a="http://schemas.openxmlformats.org/drawingml/2006/main">
+            <a:off x="457200" y="1200150"/>
+            <a:ext cx="11277600" cy="19050"/>
+          </a:xfrm>
+          <a:prstGeom xmlns:a="http://schemas.openxmlformats.org/drawingml/2006/main" prst="rect">
+            <a:avLst/>
+          </a:prstGeom>
+          <a:solidFill xmlns:a="http://schemas.openxmlformats.org/drawingml/2006/main">
+            <a:srgbClr val="B8BCC4"/>
+          </a:solidFill>
+          <a:ln xmlns:a="http://schemas.openxmlformats.org/drawingml/2006/main" w="0">
+            <a:solidFill>
+              <a:srgbClr val="B8BCC4"/>
+            </a:solidFill>
+            <a:prstDash val="solid"/>
+          </a:ln>
+        </p:spPr>
+      </p:sp>
+      <p:sp>
+        <p:nvSpPr>
+          <p:cNvPr id="4" name="footer-left-11">
+            <a:extLst xmlns:a="http://schemas.openxmlformats.org/drawingml/2006/main">
+              <a:ext uri="{FF2B5EF4-FFF2-40B4-BE49-F238E27FC236}">
+                <a16:creationId xmlns:a16="http://schemas.microsoft.com/office/drawing/2014/main" id="{700DA765-80E0-4197-8700-00D867B86FA2}"/>
+              </a:ext>
+            </a:extLst>
+          </p:cNvPr>
+          <p:cNvSpPr>
+            <a:spLocks xmlns:a="http://schemas.openxmlformats.org/drawingml/2006/main" noGrp="1"/>
+          </p:cNvSpPr>
+          <p:nvPr/>
+        </p:nvSpPr>
+        <p:spPr>
+          <a:xfrm xmlns:a="http://schemas.openxmlformats.org/drawingml/2006/main">
+            <a:off x="457200" y="6515100"/>
+            <a:ext cx="3429000" cy="171450"/>
+          </a:xfrm>
+          <a:prstGeom xmlns:a="http://schemas.openxmlformats.org/drawingml/2006/main" prst="rect">
+            <a:avLst/>
+          </a:prstGeom>
+          <a:noFill xmlns:a="http://schemas.openxmlformats.org/drawingml/2006/main"/>
+          <a:ln xmlns:a="http://schemas.openxmlformats.org/drawingml/2006/main" w="0">
+            <a:noFill/>
+            <a:prstDash val="solid"/>
+          </a:ln>
+        </p:spPr>
+        <p:txBody>
+          <a:bodyPr xmlns:a="http://schemas.openxmlformats.org/drawingml/2006/main" wrap="square" lIns="0" tIns="0" rIns="0" bIns="0" anchor="t">
+            <a:normAutofit fontScale="100000"/>
+          </a:bodyPr>
+          <a:lstStyle xmlns:a="http://schemas.openxmlformats.org/drawingml/2006/main"/>
+          <a:p xmlns:a="http://schemas.openxmlformats.org/drawingml/2006/main">
+            <a:pPr algn="l">
+              <a:buNone/>
+              <a:defRPr sz="1050" b="0">
+                <a:solidFill>
+                  <a:srgbClr val="667384"/>
+                </a:solidFill>
+                <a:latin typeface="Arial"/>
+                <a:ea typeface="Arial"/>
+                <a:cs typeface="Arial"/>
+              </a:defRPr>
+            </a:pPr>
+            <a:r>
+              <a:rPr sz="1050" b="0">
+                <a:solidFill>
+                  <a:srgbClr val="667384"/>
+                </a:solidFill>
+                <a:latin typeface="Arial"/>
+                <a:ea typeface="Arial"/>
+                <a:cs typeface="Arial"/>
+              </a:rPr>
+              <a:t>Adjusted daily TSLA | 2018-2023</a:t>
+            </a:r>
+          </a:p>
+        </p:txBody>
+      </p:sp>
+      <p:sp>
+        <p:nvSpPr>
+          <p:cNvPr id="5" name="footer-number-11">
+            <a:extLst xmlns:a="http://schemas.openxmlformats.org/drawingml/2006/main">
+              <a:ext uri="{FF2B5EF4-FFF2-40B4-BE49-F238E27FC236}">
+                <a16:creationId xmlns:a16="http://schemas.microsoft.com/office/drawing/2014/main" id="{83896276-4112-4532-AF7C-776C67C58B77}"/>
+              </a:ext>
+            </a:extLst>
+          </p:cNvPr>
+          <p:cNvSpPr>
+            <a:spLocks xmlns:a="http://schemas.openxmlformats.org/drawingml/2006/main" noGrp="1"/>
+          </p:cNvSpPr>
+          <p:nvPr/>
+        </p:nvSpPr>
+        <p:spPr>
+          <a:xfrm xmlns:a="http://schemas.openxmlformats.org/drawingml/2006/main">
+            <a:off x="11239500" y="6496050"/>
+            <a:ext cx="495300" cy="190500"/>
+          </a:xfrm>
+          <a:prstGeom xmlns:a="http://schemas.openxmlformats.org/drawingml/2006/main" prst="rect">
+            <a:avLst/>
+          </a:prstGeom>
+          <a:noFill xmlns:a="http://schemas.openxmlformats.org/drawingml/2006/main"/>
+          <a:ln xmlns:a="http://schemas.openxmlformats.org/drawingml/2006/main" w="0">
+            <a:noFill/>
+            <a:prstDash val="solid"/>
+          </a:ln>
+        </p:spPr>
+        <p:txBody>
+          <a:bodyPr xmlns:a="http://schemas.openxmlformats.org/drawingml/2006/main" wrap="square" lIns="0" tIns="0" rIns="0" bIns="0" anchor="t">
+            <a:normAutofit fontScale="100000"/>
+          </a:bodyPr>
+          <a:lstStyle xmlns:a="http://schemas.openxmlformats.org/drawingml/2006/main"/>
+          <a:p xmlns:a="http://schemas.openxmlformats.org/drawingml/2006/main">
+            <a:pPr algn="r">
+              <a:buNone/>
+              <a:defRPr sz="1050" b="0">
+                <a:solidFill>
+                  <a:srgbClr val="667384"/>
+                </a:solidFill>
+                <a:latin typeface="Arial"/>
+                <a:ea typeface="Arial"/>
+                <a:cs typeface="Arial"/>
+              </a:defRPr>
+            </a:pPr>
+            <a:r>
+              <a:rPr sz="1050" b="0">
+                <a:solidFill>
+                  <a:srgbClr val="667384"/>
+                </a:solidFill>
+                <a:latin typeface="Arial"/>
+                <a:ea typeface="Arial"/>
+                <a:cs typeface="Arial"/>
+              </a:rPr>
+              <a:t>54</a:t>
             </a:r>
           </a:p>
         </p:txBody>
@@ -45266,7 +45824,7 @@
           <p:nvPr/>
         </p:nvPicPr>
         <p:blipFill>
-          <a:blip xmlns:r="http://schemas.openxmlformats.org/officeDocument/2006/relationships" xmlns:a="http://schemas.openxmlformats.org/drawingml/2006/main" r:embed="R92c65cdd62d64b68"/>
+          <a:blip xmlns:r="http://schemas.openxmlformats.org/officeDocument/2006/relationships" xmlns:a="http://schemas.openxmlformats.org/drawingml/2006/main" r:embed="R2d8da2da6cde4799"/>
           <a:stretch xmlns:a="http://schemas.openxmlformats.org/drawingml/2006/main"/>
         </p:blipFill>
         <p:spPr>
@@ -46171,7 +46729,7 @@
           <p:nvPr/>
         </p:nvPicPr>
         <p:blipFill>
-          <a:blip xmlns:r="http://schemas.openxmlformats.org/officeDocument/2006/relationships" xmlns:a="http://schemas.openxmlformats.org/drawingml/2006/main" r:embed="Rf0f08754e4bc4009"/>
+          <a:blip xmlns:r="http://schemas.openxmlformats.org/officeDocument/2006/relationships" xmlns:a="http://schemas.openxmlformats.org/drawingml/2006/main" r:embed="R0ce103d7a77a427b"/>
           <a:stretch xmlns:a="http://schemas.openxmlformats.org/drawingml/2006/main"/>
         </p:blipFill>
         <p:spPr>
@@ -46975,7 +47533,7 @@
           <p:nvPr/>
         </p:nvPicPr>
         <p:blipFill>
-          <a:blip xmlns:r="http://schemas.openxmlformats.org/officeDocument/2006/relationships" xmlns:a="http://schemas.openxmlformats.org/drawingml/2006/main" r:embed="R9cf19edbd4864893"/>
+          <a:blip xmlns:r="http://schemas.openxmlformats.org/officeDocument/2006/relationships" xmlns:a="http://schemas.openxmlformats.org/drawingml/2006/main" r:embed="R1be092d3fe8043ff"/>
           <a:stretch xmlns:a="http://schemas.openxmlformats.org/drawingml/2006/main"/>
         </p:blipFill>
         <p:spPr>
